--- a/docs/WatermarkScope_FYP_Viva.pptx
+++ b/docs/WatermarkScope_FYP_Viva.pptx
@@ -205,7 +205,7 @@
             </a:lvl1pPr>
           </a:lstStyle>
           <a:p>
-            <a:fld id="{7541D88A-89EF-4DB3-8D64-00B902629D9A}" type="datetimeFigureOut">
+            <a:fld id="{500981E5-BBF6-41A0-B7F9-DF5B8124118C}" type="datetimeFigureOut">
               <a:rPr lang="zh-CN" altLang="en-US" smtClean="0"/>
               <a:t>2026/5/13</a:t>
             </a:fld>
@@ -363,7 +363,7 @@
             </a:lvl1pPr>
           </a:lstStyle>
           <a:p>
-            <a:fld id="{365D4ADE-EBF0-40FB-83BD-2C8DAEF4D47A}" type="slidenum">
+            <a:fld id="{3781BBA5-3D10-4E44-A9DC-9DFD38F5AEB5}" type="slidenum">
               <a:rPr lang="zh-CN" altLang="en-US" smtClean="0"/>
               <a:t>‹#›</a:t>
             </a:fld>
@@ -374,7 +374,7 @@
     </p:spTree>
     <p:extLst>
       <p:ext uri="{BB962C8B-B14F-4D97-AF65-F5344CB8AC3E}">
-        <p14:creationId xmlns:p14="http://schemas.microsoft.com/office/powerpoint/2010/main" val="1566439417"/>
+        <p14:creationId xmlns:p14="http://schemas.microsoft.com/office/powerpoint/2010/main" val="111496457"/>
       </p:ext>
     </p:extLst>
   </p:cSld>
@@ -541,7 +541,7 @@
           <a:bodyPr/>
           <a:lstStyle/>
           <a:p>
-            <a:fld id="{365D4ADE-EBF0-40FB-83BD-2C8DAEF4D47A}" type="slidenum">
+            <a:fld id="{3781BBA5-3D10-4E44-A9DC-9DFD38F5AEB5}" type="slidenum">
               <a:rPr lang="zh-CN" altLang="en-US" smtClean="0"/>
               <a:t>1</a:t>
             </a:fld>
@@ -552,7 +552,7 @@
     </p:spTree>
     <p:extLst>
       <p:ext uri="{BB962C8B-B14F-4D97-AF65-F5344CB8AC3E}">
-        <p14:creationId xmlns:p14="http://schemas.microsoft.com/office/powerpoint/2010/main" val="4116016711"/>
+        <p14:creationId xmlns:p14="http://schemas.microsoft.com/office/powerpoint/2010/main" val="2534879203"/>
       </p:ext>
     </p:extLst>
   </p:cSld>
@@ -629,7 +629,7 @@
           <a:bodyPr/>
           <a:lstStyle/>
           <a:p>
-            <a:fld id="{365D4ADE-EBF0-40FB-83BD-2C8DAEF4D47A}" type="slidenum">
+            <a:fld id="{3781BBA5-3D10-4E44-A9DC-9DFD38F5AEB5}" type="slidenum">
               <a:rPr lang="zh-CN" altLang="en-US" smtClean="0"/>
               <a:t>10</a:t>
             </a:fld>
@@ -640,7 +640,7 @@
     </p:spTree>
     <p:extLst>
       <p:ext uri="{BB962C8B-B14F-4D97-AF65-F5344CB8AC3E}">
-        <p14:creationId xmlns:p14="http://schemas.microsoft.com/office/powerpoint/2010/main" val="300676459"/>
+        <p14:creationId xmlns:p14="http://schemas.microsoft.com/office/powerpoint/2010/main" val="2990868276"/>
       </p:ext>
     </p:extLst>
   </p:cSld>
@@ -717,7 +717,7 @@
           <a:bodyPr/>
           <a:lstStyle/>
           <a:p>
-            <a:fld id="{365D4ADE-EBF0-40FB-83BD-2C8DAEF4D47A}" type="slidenum">
+            <a:fld id="{3781BBA5-3D10-4E44-A9DC-9DFD38F5AEB5}" type="slidenum">
               <a:rPr lang="zh-CN" altLang="en-US" smtClean="0"/>
               <a:t>11</a:t>
             </a:fld>
@@ -728,7 +728,7 @@
     </p:spTree>
     <p:extLst>
       <p:ext uri="{BB962C8B-B14F-4D97-AF65-F5344CB8AC3E}">
-        <p14:creationId xmlns:p14="http://schemas.microsoft.com/office/powerpoint/2010/main" val="1733555794"/>
+        <p14:creationId xmlns:p14="http://schemas.microsoft.com/office/powerpoint/2010/main" val="1484427191"/>
       </p:ext>
     </p:extLst>
   </p:cSld>
@@ -805,7 +805,7 @@
           <a:bodyPr/>
           <a:lstStyle/>
           <a:p>
-            <a:fld id="{365D4ADE-EBF0-40FB-83BD-2C8DAEF4D47A}" type="slidenum">
+            <a:fld id="{3781BBA5-3D10-4E44-A9DC-9DFD38F5AEB5}" type="slidenum">
               <a:rPr lang="zh-CN" altLang="en-US" smtClean="0"/>
               <a:t>12</a:t>
             </a:fld>
@@ -816,7 +816,7 @@
     </p:spTree>
     <p:extLst>
       <p:ext uri="{BB962C8B-B14F-4D97-AF65-F5344CB8AC3E}">
-        <p14:creationId xmlns:p14="http://schemas.microsoft.com/office/powerpoint/2010/main" val="1197535695"/>
+        <p14:creationId xmlns:p14="http://schemas.microsoft.com/office/powerpoint/2010/main" val="3327418144"/>
       </p:ext>
     </p:extLst>
   </p:cSld>
@@ -893,7 +893,7 @@
           <a:bodyPr/>
           <a:lstStyle/>
           <a:p>
-            <a:fld id="{365D4ADE-EBF0-40FB-83BD-2C8DAEF4D47A}" type="slidenum">
+            <a:fld id="{3781BBA5-3D10-4E44-A9DC-9DFD38F5AEB5}" type="slidenum">
               <a:rPr lang="zh-CN" altLang="en-US" smtClean="0"/>
               <a:t>13</a:t>
             </a:fld>
@@ -904,7 +904,7 @@
     </p:spTree>
     <p:extLst>
       <p:ext uri="{BB962C8B-B14F-4D97-AF65-F5344CB8AC3E}">
-        <p14:creationId xmlns:p14="http://schemas.microsoft.com/office/powerpoint/2010/main" val="2543117146"/>
+        <p14:creationId xmlns:p14="http://schemas.microsoft.com/office/powerpoint/2010/main" val="1106430357"/>
       </p:ext>
     </p:extLst>
   </p:cSld>
@@ -981,7 +981,7 @@
           <a:bodyPr/>
           <a:lstStyle/>
           <a:p>
-            <a:fld id="{365D4ADE-EBF0-40FB-83BD-2C8DAEF4D47A}" type="slidenum">
+            <a:fld id="{3781BBA5-3D10-4E44-A9DC-9DFD38F5AEB5}" type="slidenum">
               <a:rPr lang="zh-CN" altLang="en-US" smtClean="0"/>
               <a:t>14</a:t>
             </a:fld>
@@ -992,7 +992,7 @@
     </p:spTree>
     <p:extLst>
       <p:ext uri="{BB962C8B-B14F-4D97-AF65-F5344CB8AC3E}">
-        <p14:creationId xmlns:p14="http://schemas.microsoft.com/office/powerpoint/2010/main" val="1836814378"/>
+        <p14:creationId xmlns:p14="http://schemas.microsoft.com/office/powerpoint/2010/main" val="3260382467"/>
       </p:ext>
     </p:extLst>
   </p:cSld>
@@ -1069,7 +1069,7 @@
           <a:bodyPr/>
           <a:lstStyle/>
           <a:p>
-            <a:fld id="{365D4ADE-EBF0-40FB-83BD-2C8DAEF4D47A}" type="slidenum">
+            <a:fld id="{3781BBA5-3D10-4E44-A9DC-9DFD38F5AEB5}" type="slidenum">
               <a:rPr lang="zh-CN" altLang="en-US" smtClean="0"/>
               <a:t>15</a:t>
             </a:fld>
@@ -1080,7 +1080,7 @@
     </p:spTree>
     <p:extLst>
       <p:ext uri="{BB962C8B-B14F-4D97-AF65-F5344CB8AC3E}">
-        <p14:creationId xmlns:p14="http://schemas.microsoft.com/office/powerpoint/2010/main" val="3998014912"/>
+        <p14:creationId xmlns:p14="http://schemas.microsoft.com/office/powerpoint/2010/main" val="1441210895"/>
       </p:ext>
     </p:extLst>
   </p:cSld>
@@ -1157,7 +1157,7 @@
           <a:bodyPr/>
           <a:lstStyle/>
           <a:p>
-            <a:fld id="{365D4ADE-EBF0-40FB-83BD-2C8DAEF4D47A}" type="slidenum">
+            <a:fld id="{3781BBA5-3D10-4E44-A9DC-9DFD38F5AEB5}" type="slidenum">
               <a:rPr lang="zh-CN" altLang="en-US" smtClean="0"/>
               <a:t>16</a:t>
             </a:fld>
@@ -1168,7 +1168,7 @@
     </p:spTree>
     <p:extLst>
       <p:ext uri="{BB962C8B-B14F-4D97-AF65-F5344CB8AC3E}">
-        <p14:creationId xmlns:p14="http://schemas.microsoft.com/office/powerpoint/2010/main" val="763982360"/>
+        <p14:creationId xmlns:p14="http://schemas.microsoft.com/office/powerpoint/2010/main" val="475358697"/>
       </p:ext>
     </p:extLst>
   </p:cSld>
@@ -1245,7 +1245,7 @@
           <a:bodyPr/>
           <a:lstStyle/>
           <a:p>
-            <a:fld id="{365D4ADE-EBF0-40FB-83BD-2C8DAEF4D47A}" type="slidenum">
+            <a:fld id="{3781BBA5-3D10-4E44-A9DC-9DFD38F5AEB5}" type="slidenum">
               <a:rPr lang="zh-CN" altLang="en-US" smtClean="0"/>
               <a:t>2</a:t>
             </a:fld>
@@ -1256,7 +1256,7 @@
     </p:spTree>
     <p:extLst>
       <p:ext uri="{BB962C8B-B14F-4D97-AF65-F5344CB8AC3E}">
-        <p14:creationId xmlns:p14="http://schemas.microsoft.com/office/powerpoint/2010/main" val="3857368044"/>
+        <p14:creationId xmlns:p14="http://schemas.microsoft.com/office/powerpoint/2010/main" val="2499207584"/>
       </p:ext>
     </p:extLst>
   </p:cSld>
@@ -1333,7 +1333,7 @@
           <a:bodyPr/>
           <a:lstStyle/>
           <a:p>
-            <a:fld id="{365D4ADE-EBF0-40FB-83BD-2C8DAEF4D47A}" type="slidenum">
+            <a:fld id="{3781BBA5-3D10-4E44-A9DC-9DFD38F5AEB5}" type="slidenum">
               <a:rPr lang="zh-CN" altLang="en-US" smtClean="0"/>
               <a:t>3</a:t>
             </a:fld>
@@ -1344,7 +1344,7 @@
     </p:spTree>
     <p:extLst>
       <p:ext uri="{BB962C8B-B14F-4D97-AF65-F5344CB8AC3E}">
-        <p14:creationId xmlns:p14="http://schemas.microsoft.com/office/powerpoint/2010/main" val="4217518366"/>
+        <p14:creationId xmlns:p14="http://schemas.microsoft.com/office/powerpoint/2010/main" val="2325717168"/>
       </p:ext>
     </p:extLst>
   </p:cSld>
@@ -1421,7 +1421,7 @@
           <a:bodyPr/>
           <a:lstStyle/>
           <a:p>
-            <a:fld id="{365D4ADE-EBF0-40FB-83BD-2C8DAEF4D47A}" type="slidenum">
+            <a:fld id="{3781BBA5-3D10-4E44-A9DC-9DFD38F5AEB5}" type="slidenum">
               <a:rPr lang="zh-CN" altLang="en-US" smtClean="0"/>
               <a:t>4</a:t>
             </a:fld>
@@ -1432,7 +1432,7 @@
     </p:spTree>
     <p:extLst>
       <p:ext uri="{BB962C8B-B14F-4D97-AF65-F5344CB8AC3E}">
-        <p14:creationId xmlns:p14="http://schemas.microsoft.com/office/powerpoint/2010/main" val="2243476678"/>
+        <p14:creationId xmlns:p14="http://schemas.microsoft.com/office/powerpoint/2010/main" val="3256894341"/>
       </p:ext>
     </p:extLst>
   </p:cSld>
@@ -1509,7 +1509,7 @@
           <a:bodyPr/>
           <a:lstStyle/>
           <a:p>
-            <a:fld id="{365D4ADE-EBF0-40FB-83BD-2C8DAEF4D47A}" type="slidenum">
+            <a:fld id="{3781BBA5-3D10-4E44-A9DC-9DFD38F5AEB5}" type="slidenum">
               <a:rPr lang="zh-CN" altLang="en-US" smtClean="0"/>
               <a:t>5</a:t>
             </a:fld>
@@ -1520,7 +1520,7 @@
     </p:spTree>
     <p:extLst>
       <p:ext uri="{BB962C8B-B14F-4D97-AF65-F5344CB8AC3E}">
-        <p14:creationId xmlns:p14="http://schemas.microsoft.com/office/powerpoint/2010/main" val="1919294072"/>
+        <p14:creationId xmlns:p14="http://schemas.microsoft.com/office/powerpoint/2010/main" val="3991962572"/>
       </p:ext>
     </p:extLst>
   </p:cSld>
@@ -1597,7 +1597,7 @@
           <a:bodyPr/>
           <a:lstStyle/>
           <a:p>
-            <a:fld id="{365D4ADE-EBF0-40FB-83BD-2C8DAEF4D47A}" type="slidenum">
+            <a:fld id="{3781BBA5-3D10-4E44-A9DC-9DFD38F5AEB5}" type="slidenum">
               <a:rPr lang="zh-CN" altLang="en-US" smtClean="0"/>
               <a:t>6</a:t>
             </a:fld>
@@ -1608,7 +1608,7 @@
     </p:spTree>
     <p:extLst>
       <p:ext uri="{BB962C8B-B14F-4D97-AF65-F5344CB8AC3E}">
-        <p14:creationId xmlns:p14="http://schemas.microsoft.com/office/powerpoint/2010/main" val="1205859245"/>
+        <p14:creationId xmlns:p14="http://schemas.microsoft.com/office/powerpoint/2010/main" val="3039445185"/>
       </p:ext>
     </p:extLst>
   </p:cSld>
@@ -1685,7 +1685,7 @@
           <a:bodyPr/>
           <a:lstStyle/>
           <a:p>
-            <a:fld id="{365D4ADE-EBF0-40FB-83BD-2C8DAEF4D47A}" type="slidenum">
+            <a:fld id="{3781BBA5-3D10-4E44-A9DC-9DFD38F5AEB5}" type="slidenum">
               <a:rPr lang="zh-CN" altLang="en-US" smtClean="0"/>
               <a:t>7</a:t>
             </a:fld>
@@ -1696,7 +1696,7 @@
     </p:spTree>
     <p:extLst>
       <p:ext uri="{BB962C8B-B14F-4D97-AF65-F5344CB8AC3E}">
-        <p14:creationId xmlns:p14="http://schemas.microsoft.com/office/powerpoint/2010/main" val="363160098"/>
+        <p14:creationId xmlns:p14="http://schemas.microsoft.com/office/powerpoint/2010/main" val="1941370131"/>
       </p:ext>
     </p:extLst>
   </p:cSld>
@@ -1773,7 +1773,7 @@
           <a:bodyPr/>
           <a:lstStyle/>
           <a:p>
-            <a:fld id="{365D4ADE-EBF0-40FB-83BD-2C8DAEF4D47A}" type="slidenum">
+            <a:fld id="{3781BBA5-3D10-4E44-A9DC-9DFD38F5AEB5}" type="slidenum">
               <a:rPr lang="zh-CN" altLang="en-US" smtClean="0"/>
               <a:t>8</a:t>
             </a:fld>
@@ -1784,7 +1784,7 @@
     </p:spTree>
     <p:extLst>
       <p:ext uri="{BB962C8B-B14F-4D97-AF65-F5344CB8AC3E}">
-        <p14:creationId xmlns:p14="http://schemas.microsoft.com/office/powerpoint/2010/main" val="311911213"/>
+        <p14:creationId xmlns:p14="http://schemas.microsoft.com/office/powerpoint/2010/main" val="2965746233"/>
       </p:ext>
     </p:extLst>
   </p:cSld>
@@ -1861,7 +1861,7 @@
           <a:bodyPr/>
           <a:lstStyle/>
           <a:p>
-            <a:fld id="{365D4ADE-EBF0-40FB-83BD-2C8DAEF4D47A}" type="slidenum">
+            <a:fld id="{3781BBA5-3D10-4E44-A9DC-9DFD38F5AEB5}" type="slidenum">
               <a:rPr lang="zh-CN" altLang="en-US" smtClean="0"/>
               <a:t>9</a:t>
             </a:fld>
@@ -1872,7 +1872,7 @@
     </p:spTree>
     <p:extLst>
       <p:ext uri="{BB962C8B-B14F-4D97-AF65-F5344CB8AC3E}">
-        <p14:creationId xmlns:p14="http://schemas.microsoft.com/office/powerpoint/2010/main" val="2189271969"/>
+        <p14:creationId xmlns:p14="http://schemas.microsoft.com/office/powerpoint/2010/main" val="492203663"/>
       </p:ext>
     </p:extLst>
   </p:cSld>
@@ -1904,7 +1904,7 @@
           <p:cNvPr id="2" name="标题 1">
             <a:extLst>
               <a:ext uri="{FF2B5EF4-FFF2-40B4-BE49-F238E27FC236}">
-                <a16:creationId xmlns:a16="http://schemas.microsoft.com/office/drawing/2014/main" id="{1CBE7C60-DCA4-AC39-C9C9-1031A06A6D13}"/>
+                <a16:creationId xmlns:a16="http://schemas.microsoft.com/office/drawing/2014/main" id="{6ED7CBF8-0998-E283-6C22-BF803875379C}"/>
               </a:ext>
             </a:extLst>
           </p:cNvPr>
@@ -1941,7 +1941,7 @@
           <p:cNvPr id="3" name="副标题 2">
             <a:extLst>
               <a:ext uri="{FF2B5EF4-FFF2-40B4-BE49-F238E27FC236}">
-                <a16:creationId xmlns:a16="http://schemas.microsoft.com/office/drawing/2014/main" id="{C9BC6DD7-9DEF-DCBF-3F13-EC2A2EB8F91A}"/>
+                <a16:creationId xmlns:a16="http://schemas.microsoft.com/office/drawing/2014/main" id="{A9FE8E91-C027-A21A-1C8C-544F6639E967}"/>
               </a:ext>
             </a:extLst>
           </p:cNvPr>
@@ -2011,7 +2011,7 @@
           <p:cNvPr id="4" name="日期占位符 3">
             <a:extLst>
               <a:ext uri="{FF2B5EF4-FFF2-40B4-BE49-F238E27FC236}">
-                <a16:creationId xmlns:a16="http://schemas.microsoft.com/office/drawing/2014/main" id="{0AAF399B-9D8C-ABA1-8114-6F2F59434FE0}"/>
+                <a16:creationId xmlns:a16="http://schemas.microsoft.com/office/drawing/2014/main" id="{8AB0DA8C-BA33-212D-89BE-278DCAF06F87}"/>
               </a:ext>
             </a:extLst>
           </p:cNvPr>
@@ -2027,7 +2027,7 @@
           <a:bodyPr/>
           <a:lstStyle/>
           <a:p>
-            <a:fld id="{C69E6D5B-6EF5-476F-BC11-33A090B32CB5}" type="datetimeFigureOut">
+            <a:fld id="{8B9FF69C-14BA-4B4B-ABF0-AACFDA9EC10F}" type="datetimeFigureOut">
               <a:rPr lang="zh-CN" altLang="en-US" smtClean="0"/>
               <a:t>2026/5/13</a:t>
             </a:fld>
@@ -2040,7 +2040,7 @@
           <p:cNvPr id="5" name="页脚占位符 4">
             <a:extLst>
               <a:ext uri="{FF2B5EF4-FFF2-40B4-BE49-F238E27FC236}">
-                <a16:creationId xmlns:a16="http://schemas.microsoft.com/office/drawing/2014/main" id="{613C708A-7FB4-B724-4BC1-CE46111149A0}"/>
+                <a16:creationId xmlns:a16="http://schemas.microsoft.com/office/drawing/2014/main" id="{8C0471FF-26C7-871C-E69E-93E0345AB9AC}"/>
               </a:ext>
             </a:extLst>
           </p:cNvPr>
@@ -2065,7 +2065,7 @@
           <p:cNvPr id="6" name="灯片编号占位符 5">
             <a:extLst>
               <a:ext uri="{FF2B5EF4-FFF2-40B4-BE49-F238E27FC236}">
-                <a16:creationId xmlns:a16="http://schemas.microsoft.com/office/drawing/2014/main" id="{6558F884-322B-13BB-03DD-435CE6A7817B}"/>
+                <a16:creationId xmlns:a16="http://schemas.microsoft.com/office/drawing/2014/main" id="{684A6BBE-6170-6C6B-9196-D012A918E8C3}"/>
               </a:ext>
             </a:extLst>
           </p:cNvPr>
@@ -2081,7 +2081,7 @@
           <a:bodyPr/>
           <a:lstStyle/>
           <a:p>
-            <a:fld id="{0ED7A2DD-ADE0-4144-A624-BB666DAA3DE9}" type="slidenum">
+            <a:fld id="{F8752B0D-6D65-4C56-8EE1-42B6C981AAFF}" type="slidenum">
               <a:rPr lang="zh-CN" altLang="en-US" smtClean="0"/>
               <a:t>‹#›</a:t>
             </a:fld>
@@ -2092,7 +2092,7 @@
     </p:spTree>
     <p:extLst>
       <p:ext uri="{BB962C8B-B14F-4D97-AF65-F5344CB8AC3E}">
-        <p14:creationId xmlns:p14="http://schemas.microsoft.com/office/powerpoint/2010/main" val="4269839088"/>
+        <p14:creationId xmlns:p14="http://schemas.microsoft.com/office/powerpoint/2010/main" val="3262681552"/>
       </p:ext>
     </p:extLst>
   </p:cSld>
@@ -2124,7 +2124,7 @@
           <p:cNvPr id="2" name="标题 1">
             <a:extLst>
               <a:ext uri="{FF2B5EF4-FFF2-40B4-BE49-F238E27FC236}">
-                <a16:creationId xmlns:a16="http://schemas.microsoft.com/office/drawing/2014/main" id="{0729CE04-577A-0583-4947-2E139007BA3C}"/>
+                <a16:creationId xmlns:a16="http://schemas.microsoft.com/office/drawing/2014/main" id="{E7B8029A-7ABC-43D5-5953-634E5A00FE16}"/>
               </a:ext>
             </a:extLst>
           </p:cNvPr>
@@ -2152,7 +2152,7 @@
           <p:cNvPr id="3" name="竖排文字占位符 2">
             <a:extLst>
               <a:ext uri="{FF2B5EF4-FFF2-40B4-BE49-F238E27FC236}">
-                <a16:creationId xmlns:a16="http://schemas.microsoft.com/office/drawing/2014/main" id="{4E04F76C-18F4-1484-C844-AC9BDB9CF5A8}"/>
+                <a16:creationId xmlns:a16="http://schemas.microsoft.com/office/drawing/2014/main" id="{48590B2E-CE51-E22C-C1D1-A7204509E0F6}"/>
               </a:ext>
             </a:extLst>
           </p:cNvPr>
@@ -2209,7 +2209,7 @@
           <p:cNvPr id="4" name="日期占位符 3">
             <a:extLst>
               <a:ext uri="{FF2B5EF4-FFF2-40B4-BE49-F238E27FC236}">
-                <a16:creationId xmlns:a16="http://schemas.microsoft.com/office/drawing/2014/main" id="{9BF2E36B-5CFD-37A7-74D5-A30FA6DDC724}"/>
+                <a16:creationId xmlns:a16="http://schemas.microsoft.com/office/drawing/2014/main" id="{627AE2AF-C551-C09E-9384-2F332E0109A9}"/>
               </a:ext>
             </a:extLst>
           </p:cNvPr>
@@ -2225,7 +2225,7 @@
           <a:bodyPr/>
           <a:lstStyle/>
           <a:p>
-            <a:fld id="{C69E6D5B-6EF5-476F-BC11-33A090B32CB5}" type="datetimeFigureOut">
+            <a:fld id="{8B9FF69C-14BA-4B4B-ABF0-AACFDA9EC10F}" type="datetimeFigureOut">
               <a:rPr lang="zh-CN" altLang="en-US" smtClean="0"/>
               <a:t>2026/5/13</a:t>
             </a:fld>
@@ -2238,7 +2238,7 @@
           <p:cNvPr id="5" name="页脚占位符 4">
             <a:extLst>
               <a:ext uri="{FF2B5EF4-FFF2-40B4-BE49-F238E27FC236}">
-                <a16:creationId xmlns:a16="http://schemas.microsoft.com/office/drawing/2014/main" id="{FABEEF7F-D2B5-ED79-3700-4803EF031531}"/>
+                <a16:creationId xmlns:a16="http://schemas.microsoft.com/office/drawing/2014/main" id="{94FD42CC-2F78-9C5B-0CA3-3CA78F96C030}"/>
               </a:ext>
             </a:extLst>
           </p:cNvPr>
@@ -2263,7 +2263,7 @@
           <p:cNvPr id="6" name="灯片编号占位符 5">
             <a:extLst>
               <a:ext uri="{FF2B5EF4-FFF2-40B4-BE49-F238E27FC236}">
-                <a16:creationId xmlns:a16="http://schemas.microsoft.com/office/drawing/2014/main" id="{36330FC4-361A-ADDE-73EE-359F5C0864A1}"/>
+                <a16:creationId xmlns:a16="http://schemas.microsoft.com/office/drawing/2014/main" id="{42B63AF4-30F4-521E-62BC-3232DEB0B634}"/>
               </a:ext>
             </a:extLst>
           </p:cNvPr>
@@ -2279,7 +2279,7 @@
           <a:bodyPr/>
           <a:lstStyle/>
           <a:p>
-            <a:fld id="{0ED7A2DD-ADE0-4144-A624-BB666DAA3DE9}" type="slidenum">
+            <a:fld id="{F8752B0D-6D65-4C56-8EE1-42B6C981AAFF}" type="slidenum">
               <a:rPr lang="zh-CN" altLang="en-US" smtClean="0"/>
               <a:t>‹#›</a:t>
             </a:fld>
@@ -2290,7 +2290,7 @@
     </p:spTree>
     <p:extLst>
       <p:ext uri="{BB962C8B-B14F-4D97-AF65-F5344CB8AC3E}">
-        <p14:creationId xmlns:p14="http://schemas.microsoft.com/office/powerpoint/2010/main" val="3430889071"/>
+        <p14:creationId xmlns:p14="http://schemas.microsoft.com/office/powerpoint/2010/main" val="826148538"/>
       </p:ext>
     </p:extLst>
   </p:cSld>
@@ -2322,7 +2322,7 @@
           <p:cNvPr id="2" name="竖排标题 1">
             <a:extLst>
               <a:ext uri="{FF2B5EF4-FFF2-40B4-BE49-F238E27FC236}">
-                <a16:creationId xmlns:a16="http://schemas.microsoft.com/office/drawing/2014/main" id="{084B19D3-FE4B-7090-DC6E-5076E4142017}"/>
+                <a16:creationId xmlns:a16="http://schemas.microsoft.com/office/drawing/2014/main" id="{68D2D698-6452-9735-45A2-7E5C1F0454A5}"/>
               </a:ext>
             </a:extLst>
           </p:cNvPr>
@@ -2355,7 +2355,7 @@
           <p:cNvPr id="3" name="竖排文字占位符 2">
             <a:extLst>
               <a:ext uri="{FF2B5EF4-FFF2-40B4-BE49-F238E27FC236}">
-                <a16:creationId xmlns:a16="http://schemas.microsoft.com/office/drawing/2014/main" id="{95832E38-D907-581D-3B90-4F83102D1208}"/>
+                <a16:creationId xmlns:a16="http://schemas.microsoft.com/office/drawing/2014/main" id="{47D01FBA-A3B6-0529-9BC5-94CD030E9BD6}"/>
               </a:ext>
             </a:extLst>
           </p:cNvPr>
@@ -2417,7 +2417,7 @@
           <p:cNvPr id="4" name="日期占位符 3">
             <a:extLst>
               <a:ext uri="{FF2B5EF4-FFF2-40B4-BE49-F238E27FC236}">
-                <a16:creationId xmlns:a16="http://schemas.microsoft.com/office/drawing/2014/main" id="{CE318B2A-86FD-AA54-AE26-A95F4BD7F887}"/>
+                <a16:creationId xmlns:a16="http://schemas.microsoft.com/office/drawing/2014/main" id="{B564F468-5F2D-5EA8-C862-12073EAD6D3E}"/>
               </a:ext>
             </a:extLst>
           </p:cNvPr>
@@ -2433,7 +2433,7 @@
           <a:bodyPr/>
           <a:lstStyle/>
           <a:p>
-            <a:fld id="{C69E6D5B-6EF5-476F-BC11-33A090B32CB5}" type="datetimeFigureOut">
+            <a:fld id="{8B9FF69C-14BA-4B4B-ABF0-AACFDA9EC10F}" type="datetimeFigureOut">
               <a:rPr lang="zh-CN" altLang="en-US" smtClean="0"/>
               <a:t>2026/5/13</a:t>
             </a:fld>
@@ -2446,7 +2446,7 @@
           <p:cNvPr id="5" name="页脚占位符 4">
             <a:extLst>
               <a:ext uri="{FF2B5EF4-FFF2-40B4-BE49-F238E27FC236}">
-                <a16:creationId xmlns:a16="http://schemas.microsoft.com/office/drawing/2014/main" id="{97DE3F86-0018-5DD1-8B21-640591346756}"/>
+                <a16:creationId xmlns:a16="http://schemas.microsoft.com/office/drawing/2014/main" id="{55E1D232-7EAE-65C6-FE64-CAA07006E9D3}"/>
               </a:ext>
             </a:extLst>
           </p:cNvPr>
@@ -2471,7 +2471,7 @@
           <p:cNvPr id="6" name="灯片编号占位符 5">
             <a:extLst>
               <a:ext uri="{FF2B5EF4-FFF2-40B4-BE49-F238E27FC236}">
-                <a16:creationId xmlns:a16="http://schemas.microsoft.com/office/drawing/2014/main" id="{920CFD97-AC30-8C78-34D4-8FFC699A2CE1}"/>
+                <a16:creationId xmlns:a16="http://schemas.microsoft.com/office/drawing/2014/main" id="{151F08B7-4E6B-9C3D-245F-8C4263EBF7A6}"/>
               </a:ext>
             </a:extLst>
           </p:cNvPr>
@@ -2487,7 +2487,7 @@
           <a:bodyPr/>
           <a:lstStyle/>
           <a:p>
-            <a:fld id="{0ED7A2DD-ADE0-4144-A624-BB666DAA3DE9}" type="slidenum">
+            <a:fld id="{F8752B0D-6D65-4C56-8EE1-42B6C981AAFF}" type="slidenum">
               <a:rPr lang="zh-CN" altLang="en-US" smtClean="0"/>
               <a:t>‹#›</a:t>
             </a:fld>
@@ -2498,7 +2498,7 @@
     </p:spTree>
     <p:extLst>
       <p:ext uri="{BB962C8B-B14F-4D97-AF65-F5344CB8AC3E}">
-        <p14:creationId xmlns:p14="http://schemas.microsoft.com/office/powerpoint/2010/main" val="1754970906"/>
+        <p14:creationId xmlns:p14="http://schemas.microsoft.com/office/powerpoint/2010/main" val="532871462"/>
       </p:ext>
     </p:extLst>
   </p:cSld>
@@ -2530,7 +2530,7 @@
           <p:cNvPr id="2" name="标题 1">
             <a:extLst>
               <a:ext uri="{FF2B5EF4-FFF2-40B4-BE49-F238E27FC236}">
-                <a16:creationId xmlns:a16="http://schemas.microsoft.com/office/drawing/2014/main" id="{82AD0B26-4000-AB5E-EBCB-9319D680A465}"/>
+                <a16:creationId xmlns:a16="http://schemas.microsoft.com/office/drawing/2014/main" id="{49C812B4-31A3-6972-DA10-AFA9D3381AA8}"/>
               </a:ext>
             </a:extLst>
           </p:cNvPr>
@@ -2558,7 +2558,7 @@
           <p:cNvPr id="3" name="内容占位符 2">
             <a:extLst>
               <a:ext uri="{FF2B5EF4-FFF2-40B4-BE49-F238E27FC236}">
-                <a16:creationId xmlns:a16="http://schemas.microsoft.com/office/drawing/2014/main" id="{58E391A3-1A26-5EEC-2200-E52653BDC131}"/>
+                <a16:creationId xmlns:a16="http://schemas.microsoft.com/office/drawing/2014/main" id="{73A3DE95-FFED-F5CD-EDCE-BA6A2029B16E}"/>
               </a:ext>
             </a:extLst>
           </p:cNvPr>
@@ -2615,7 +2615,7 @@
           <p:cNvPr id="4" name="日期占位符 3">
             <a:extLst>
               <a:ext uri="{FF2B5EF4-FFF2-40B4-BE49-F238E27FC236}">
-                <a16:creationId xmlns:a16="http://schemas.microsoft.com/office/drawing/2014/main" id="{3978F4A4-DA07-D5A0-D78C-B0A03A5A0D5B}"/>
+                <a16:creationId xmlns:a16="http://schemas.microsoft.com/office/drawing/2014/main" id="{D440A467-9746-F34D-C798-28D39004C343}"/>
               </a:ext>
             </a:extLst>
           </p:cNvPr>
@@ -2631,7 +2631,7 @@
           <a:bodyPr/>
           <a:lstStyle/>
           <a:p>
-            <a:fld id="{C69E6D5B-6EF5-476F-BC11-33A090B32CB5}" type="datetimeFigureOut">
+            <a:fld id="{8B9FF69C-14BA-4B4B-ABF0-AACFDA9EC10F}" type="datetimeFigureOut">
               <a:rPr lang="zh-CN" altLang="en-US" smtClean="0"/>
               <a:t>2026/5/13</a:t>
             </a:fld>
@@ -2644,7 +2644,7 @@
           <p:cNvPr id="5" name="页脚占位符 4">
             <a:extLst>
               <a:ext uri="{FF2B5EF4-FFF2-40B4-BE49-F238E27FC236}">
-                <a16:creationId xmlns:a16="http://schemas.microsoft.com/office/drawing/2014/main" id="{8081AE77-1B5A-E487-13D4-BE0460C749AD}"/>
+                <a16:creationId xmlns:a16="http://schemas.microsoft.com/office/drawing/2014/main" id="{93677643-8FCF-CA2C-C650-5488DC625F7A}"/>
               </a:ext>
             </a:extLst>
           </p:cNvPr>
@@ -2669,7 +2669,7 @@
           <p:cNvPr id="6" name="灯片编号占位符 5">
             <a:extLst>
               <a:ext uri="{FF2B5EF4-FFF2-40B4-BE49-F238E27FC236}">
-                <a16:creationId xmlns:a16="http://schemas.microsoft.com/office/drawing/2014/main" id="{3EA54572-5C3E-F1AF-629E-93E88F6E04EF}"/>
+                <a16:creationId xmlns:a16="http://schemas.microsoft.com/office/drawing/2014/main" id="{F7BF6450-BC4C-89FE-C3C7-C05F360AACB6}"/>
               </a:ext>
             </a:extLst>
           </p:cNvPr>
@@ -2685,7 +2685,7 @@
           <a:bodyPr/>
           <a:lstStyle/>
           <a:p>
-            <a:fld id="{0ED7A2DD-ADE0-4144-A624-BB666DAA3DE9}" type="slidenum">
+            <a:fld id="{F8752B0D-6D65-4C56-8EE1-42B6C981AAFF}" type="slidenum">
               <a:rPr lang="zh-CN" altLang="en-US" smtClean="0"/>
               <a:t>‹#›</a:t>
             </a:fld>
@@ -2696,7 +2696,7 @@
     </p:spTree>
     <p:extLst>
       <p:ext uri="{BB962C8B-B14F-4D97-AF65-F5344CB8AC3E}">
-        <p14:creationId xmlns:p14="http://schemas.microsoft.com/office/powerpoint/2010/main" val="842836833"/>
+        <p14:creationId xmlns:p14="http://schemas.microsoft.com/office/powerpoint/2010/main" val="1938302869"/>
       </p:ext>
     </p:extLst>
   </p:cSld>
@@ -2728,7 +2728,7 @@
           <p:cNvPr id="2" name="标题 1">
             <a:extLst>
               <a:ext uri="{FF2B5EF4-FFF2-40B4-BE49-F238E27FC236}">
-                <a16:creationId xmlns:a16="http://schemas.microsoft.com/office/drawing/2014/main" id="{551AEFE1-11F4-B534-33F3-E4D9D5AEAA31}"/>
+                <a16:creationId xmlns:a16="http://schemas.microsoft.com/office/drawing/2014/main" id="{02181733-02B7-5031-FE4B-D3F96EF85A62}"/>
               </a:ext>
             </a:extLst>
           </p:cNvPr>
@@ -2765,7 +2765,7 @@
           <p:cNvPr id="3" name="文本占位符 2">
             <a:extLst>
               <a:ext uri="{FF2B5EF4-FFF2-40B4-BE49-F238E27FC236}">
-                <a16:creationId xmlns:a16="http://schemas.microsoft.com/office/drawing/2014/main" id="{792A0D8C-FB07-A4DD-594E-98B3D132B089}"/>
+                <a16:creationId xmlns:a16="http://schemas.microsoft.com/office/drawing/2014/main" id="{75B876CF-19C2-FFB6-CF94-00F481BAD389}"/>
               </a:ext>
             </a:extLst>
           </p:cNvPr>
@@ -2890,7 +2890,7 @@
           <p:cNvPr id="4" name="日期占位符 3">
             <a:extLst>
               <a:ext uri="{FF2B5EF4-FFF2-40B4-BE49-F238E27FC236}">
-                <a16:creationId xmlns:a16="http://schemas.microsoft.com/office/drawing/2014/main" id="{EDA72B9D-A50E-8E7A-2A19-5AD46B5F7E8E}"/>
+                <a16:creationId xmlns:a16="http://schemas.microsoft.com/office/drawing/2014/main" id="{0B0F7CB7-DEF3-0B87-DC55-7A53BB1DA7AC}"/>
               </a:ext>
             </a:extLst>
           </p:cNvPr>
@@ -2906,7 +2906,7 @@
           <a:bodyPr/>
           <a:lstStyle/>
           <a:p>
-            <a:fld id="{C69E6D5B-6EF5-476F-BC11-33A090B32CB5}" type="datetimeFigureOut">
+            <a:fld id="{8B9FF69C-14BA-4B4B-ABF0-AACFDA9EC10F}" type="datetimeFigureOut">
               <a:rPr lang="zh-CN" altLang="en-US" smtClean="0"/>
               <a:t>2026/5/13</a:t>
             </a:fld>
@@ -2919,7 +2919,7 @@
           <p:cNvPr id="5" name="页脚占位符 4">
             <a:extLst>
               <a:ext uri="{FF2B5EF4-FFF2-40B4-BE49-F238E27FC236}">
-                <a16:creationId xmlns:a16="http://schemas.microsoft.com/office/drawing/2014/main" id="{05951CDE-8DCC-FE1D-90A4-B401A225AEC8}"/>
+                <a16:creationId xmlns:a16="http://schemas.microsoft.com/office/drawing/2014/main" id="{9C9BC317-AE2A-A5B3-335E-DE10B1E482FF}"/>
               </a:ext>
             </a:extLst>
           </p:cNvPr>
@@ -2944,7 +2944,7 @@
           <p:cNvPr id="6" name="灯片编号占位符 5">
             <a:extLst>
               <a:ext uri="{FF2B5EF4-FFF2-40B4-BE49-F238E27FC236}">
-                <a16:creationId xmlns:a16="http://schemas.microsoft.com/office/drawing/2014/main" id="{91A1C55A-E26C-8018-916E-69807C6E9749}"/>
+                <a16:creationId xmlns:a16="http://schemas.microsoft.com/office/drawing/2014/main" id="{307D036C-B6F7-2B1F-66B1-C9A2467CFC4F}"/>
               </a:ext>
             </a:extLst>
           </p:cNvPr>
@@ -2960,7 +2960,7 @@
           <a:bodyPr/>
           <a:lstStyle/>
           <a:p>
-            <a:fld id="{0ED7A2DD-ADE0-4144-A624-BB666DAA3DE9}" type="slidenum">
+            <a:fld id="{F8752B0D-6D65-4C56-8EE1-42B6C981AAFF}" type="slidenum">
               <a:rPr lang="zh-CN" altLang="en-US" smtClean="0"/>
               <a:t>‹#›</a:t>
             </a:fld>
@@ -2971,7 +2971,7 @@
     </p:spTree>
     <p:extLst>
       <p:ext uri="{BB962C8B-B14F-4D97-AF65-F5344CB8AC3E}">
-        <p14:creationId xmlns:p14="http://schemas.microsoft.com/office/powerpoint/2010/main" val="309869908"/>
+        <p14:creationId xmlns:p14="http://schemas.microsoft.com/office/powerpoint/2010/main" val="746564869"/>
       </p:ext>
     </p:extLst>
   </p:cSld>
@@ -3003,7 +3003,7 @@
           <p:cNvPr id="2" name="标题 1">
             <a:extLst>
               <a:ext uri="{FF2B5EF4-FFF2-40B4-BE49-F238E27FC236}">
-                <a16:creationId xmlns:a16="http://schemas.microsoft.com/office/drawing/2014/main" id="{E0FE3A8B-1CAE-0147-848B-1B9691C20863}"/>
+                <a16:creationId xmlns:a16="http://schemas.microsoft.com/office/drawing/2014/main" id="{6DE610C8-050C-5B5A-C273-0B049C28C19C}"/>
               </a:ext>
             </a:extLst>
           </p:cNvPr>
@@ -3031,7 +3031,7 @@
           <p:cNvPr id="3" name="内容占位符 2">
             <a:extLst>
               <a:ext uri="{FF2B5EF4-FFF2-40B4-BE49-F238E27FC236}">
-                <a16:creationId xmlns:a16="http://schemas.microsoft.com/office/drawing/2014/main" id="{B91CD5F7-31D5-92F0-798E-15721ADC8FDB}"/>
+                <a16:creationId xmlns:a16="http://schemas.microsoft.com/office/drawing/2014/main" id="{6236743C-082A-6B04-E8F0-A3BB9204C94D}"/>
               </a:ext>
             </a:extLst>
           </p:cNvPr>
@@ -3093,7 +3093,7 @@
           <p:cNvPr id="4" name="内容占位符 3">
             <a:extLst>
               <a:ext uri="{FF2B5EF4-FFF2-40B4-BE49-F238E27FC236}">
-                <a16:creationId xmlns:a16="http://schemas.microsoft.com/office/drawing/2014/main" id="{927B6FE1-FF68-57CA-6376-B22FCB6C93D5}"/>
+                <a16:creationId xmlns:a16="http://schemas.microsoft.com/office/drawing/2014/main" id="{730ECDDA-FD83-4B6D-70AB-0C036D8F1EBE}"/>
               </a:ext>
             </a:extLst>
           </p:cNvPr>
@@ -3155,7 +3155,7 @@
           <p:cNvPr id="5" name="日期占位符 4">
             <a:extLst>
               <a:ext uri="{FF2B5EF4-FFF2-40B4-BE49-F238E27FC236}">
-                <a16:creationId xmlns:a16="http://schemas.microsoft.com/office/drawing/2014/main" id="{3849D163-6A0A-9DF0-862C-7E176806E34C}"/>
+                <a16:creationId xmlns:a16="http://schemas.microsoft.com/office/drawing/2014/main" id="{4E9DC0F0-0DA9-02C8-F9A7-58DE85973A3E}"/>
               </a:ext>
             </a:extLst>
           </p:cNvPr>
@@ -3171,7 +3171,7 @@
           <a:bodyPr/>
           <a:lstStyle/>
           <a:p>
-            <a:fld id="{C69E6D5B-6EF5-476F-BC11-33A090B32CB5}" type="datetimeFigureOut">
+            <a:fld id="{8B9FF69C-14BA-4B4B-ABF0-AACFDA9EC10F}" type="datetimeFigureOut">
               <a:rPr lang="zh-CN" altLang="en-US" smtClean="0"/>
               <a:t>2026/5/13</a:t>
             </a:fld>
@@ -3184,7 +3184,7 @@
           <p:cNvPr id="6" name="页脚占位符 5">
             <a:extLst>
               <a:ext uri="{FF2B5EF4-FFF2-40B4-BE49-F238E27FC236}">
-                <a16:creationId xmlns:a16="http://schemas.microsoft.com/office/drawing/2014/main" id="{7FEE7DB5-3281-D6F5-ED8D-11800255CDF1}"/>
+                <a16:creationId xmlns:a16="http://schemas.microsoft.com/office/drawing/2014/main" id="{D52A5F4C-0D33-7362-68D0-E2D5F8AB8F0C}"/>
               </a:ext>
             </a:extLst>
           </p:cNvPr>
@@ -3209,7 +3209,7 @@
           <p:cNvPr id="7" name="灯片编号占位符 6">
             <a:extLst>
               <a:ext uri="{FF2B5EF4-FFF2-40B4-BE49-F238E27FC236}">
-                <a16:creationId xmlns:a16="http://schemas.microsoft.com/office/drawing/2014/main" id="{E0DE68D1-213A-2206-7D25-CEA52817A2E7}"/>
+                <a16:creationId xmlns:a16="http://schemas.microsoft.com/office/drawing/2014/main" id="{74A6D386-B96B-C3A6-E7F9-641661C38480}"/>
               </a:ext>
             </a:extLst>
           </p:cNvPr>
@@ -3225,7 +3225,7 @@
           <a:bodyPr/>
           <a:lstStyle/>
           <a:p>
-            <a:fld id="{0ED7A2DD-ADE0-4144-A624-BB666DAA3DE9}" type="slidenum">
+            <a:fld id="{F8752B0D-6D65-4C56-8EE1-42B6C981AAFF}" type="slidenum">
               <a:rPr lang="zh-CN" altLang="en-US" smtClean="0"/>
               <a:t>‹#›</a:t>
             </a:fld>
@@ -3236,7 +3236,7 @@
     </p:spTree>
     <p:extLst>
       <p:ext uri="{BB962C8B-B14F-4D97-AF65-F5344CB8AC3E}">
-        <p14:creationId xmlns:p14="http://schemas.microsoft.com/office/powerpoint/2010/main" val="1040047212"/>
+        <p14:creationId xmlns:p14="http://schemas.microsoft.com/office/powerpoint/2010/main" val="2908046191"/>
       </p:ext>
     </p:extLst>
   </p:cSld>
@@ -3268,7 +3268,7 @@
           <p:cNvPr id="2" name="标题 1">
             <a:extLst>
               <a:ext uri="{FF2B5EF4-FFF2-40B4-BE49-F238E27FC236}">
-                <a16:creationId xmlns:a16="http://schemas.microsoft.com/office/drawing/2014/main" id="{CE9ACAAA-73DB-CC63-F215-CF91929468BB}"/>
+                <a16:creationId xmlns:a16="http://schemas.microsoft.com/office/drawing/2014/main" id="{B8FE30D3-3EE7-0AA0-FFEA-0F734496D539}"/>
               </a:ext>
             </a:extLst>
           </p:cNvPr>
@@ -3301,7 +3301,7 @@
           <p:cNvPr id="3" name="文本占位符 2">
             <a:extLst>
               <a:ext uri="{FF2B5EF4-FFF2-40B4-BE49-F238E27FC236}">
-                <a16:creationId xmlns:a16="http://schemas.microsoft.com/office/drawing/2014/main" id="{A5182B8E-D29A-6CEF-7076-A1426269B069}"/>
+                <a16:creationId xmlns:a16="http://schemas.microsoft.com/office/drawing/2014/main" id="{AC434FB0-2DC9-458C-8440-B9B5FCEFD9BB}"/>
               </a:ext>
             </a:extLst>
           </p:cNvPr>
@@ -3372,7 +3372,7 @@
           <p:cNvPr id="4" name="内容占位符 3">
             <a:extLst>
               <a:ext uri="{FF2B5EF4-FFF2-40B4-BE49-F238E27FC236}">
-                <a16:creationId xmlns:a16="http://schemas.microsoft.com/office/drawing/2014/main" id="{4F16EB50-6BBC-BA41-02BD-C311DDB6CC24}"/>
+                <a16:creationId xmlns:a16="http://schemas.microsoft.com/office/drawing/2014/main" id="{76281E95-9113-9DB6-3A48-21FFC06555C8}"/>
               </a:ext>
             </a:extLst>
           </p:cNvPr>
@@ -3434,7 +3434,7 @@
           <p:cNvPr id="5" name="文本占位符 4">
             <a:extLst>
               <a:ext uri="{FF2B5EF4-FFF2-40B4-BE49-F238E27FC236}">
-                <a16:creationId xmlns:a16="http://schemas.microsoft.com/office/drawing/2014/main" id="{ECA54C0E-34D4-B065-0974-ACBCBCCAEE59}"/>
+                <a16:creationId xmlns:a16="http://schemas.microsoft.com/office/drawing/2014/main" id="{53C6DBB1-3A9F-25F2-7CB5-70A502CEF134}"/>
               </a:ext>
             </a:extLst>
           </p:cNvPr>
@@ -3505,7 +3505,7 @@
           <p:cNvPr id="6" name="内容占位符 5">
             <a:extLst>
               <a:ext uri="{FF2B5EF4-FFF2-40B4-BE49-F238E27FC236}">
-                <a16:creationId xmlns:a16="http://schemas.microsoft.com/office/drawing/2014/main" id="{652C2D50-56A9-D898-B04B-01881D3233A9}"/>
+                <a16:creationId xmlns:a16="http://schemas.microsoft.com/office/drawing/2014/main" id="{82168B8E-6232-918D-F413-55BF40919BA2}"/>
               </a:ext>
             </a:extLst>
           </p:cNvPr>
@@ -3567,7 +3567,7 @@
           <p:cNvPr id="7" name="日期占位符 6">
             <a:extLst>
               <a:ext uri="{FF2B5EF4-FFF2-40B4-BE49-F238E27FC236}">
-                <a16:creationId xmlns:a16="http://schemas.microsoft.com/office/drawing/2014/main" id="{21B9EF70-A27A-EEEC-2FA9-190D0AA604CA}"/>
+                <a16:creationId xmlns:a16="http://schemas.microsoft.com/office/drawing/2014/main" id="{800B9BB2-F849-212A-DDD4-62B2D4CDD244}"/>
               </a:ext>
             </a:extLst>
           </p:cNvPr>
@@ -3583,7 +3583,7 @@
           <a:bodyPr/>
           <a:lstStyle/>
           <a:p>
-            <a:fld id="{C69E6D5B-6EF5-476F-BC11-33A090B32CB5}" type="datetimeFigureOut">
+            <a:fld id="{8B9FF69C-14BA-4B4B-ABF0-AACFDA9EC10F}" type="datetimeFigureOut">
               <a:rPr lang="zh-CN" altLang="en-US" smtClean="0"/>
               <a:t>2026/5/13</a:t>
             </a:fld>
@@ -3596,7 +3596,7 @@
           <p:cNvPr id="8" name="页脚占位符 7">
             <a:extLst>
               <a:ext uri="{FF2B5EF4-FFF2-40B4-BE49-F238E27FC236}">
-                <a16:creationId xmlns:a16="http://schemas.microsoft.com/office/drawing/2014/main" id="{F1640B17-D0B1-B5EB-ED58-A5F06415EE12}"/>
+                <a16:creationId xmlns:a16="http://schemas.microsoft.com/office/drawing/2014/main" id="{868B2B07-B637-E55A-B0BA-848FDDC3FB38}"/>
               </a:ext>
             </a:extLst>
           </p:cNvPr>
@@ -3621,7 +3621,7 @@
           <p:cNvPr id="9" name="灯片编号占位符 8">
             <a:extLst>
               <a:ext uri="{FF2B5EF4-FFF2-40B4-BE49-F238E27FC236}">
-                <a16:creationId xmlns:a16="http://schemas.microsoft.com/office/drawing/2014/main" id="{DE2D61A2-DC02-6067-41E3-43A29FD06D9D}"/>
+                <a16:creationId xmlns:a16="http://schemas.microsoft.com/office/drawing/2014/main" id="{1A775CAB-E128-015E-1047-DE75B549EDCA}"/>
               </a:ext>
             </a:extLst>
           </p:cNvPr>
@@ -3637,7 +3637,7 @@
           <a:bodyPr/>
           <a:lstStyle/>
           <a:p>
-            <a:fld id="{0ED7A2DD-ADE0-4144-A624-BB666DAA3DE9}" type="slidenum">
+            <a:fld id="{F8752B0D-6D65-4C56-8EE1-42B6C981AAFF}" type="slidenum">
               <a:rPr lang="zh-CN" altLang="en-US" smtClean="0"/>
               <a:t>‹#›</a:t>
             </a:fld>
@@ -3648,7 +3648,7 @@
     </p:spTree>
     <p:extLst>
       <p:ext uri="{BB962C8B-B14F-4D97-AF65-F5344CB8AC3E}">
-        <p14:creationId xmlns:p14="http://schemas.microsoft.com/office/powerpoint/2010/main" val="2293531285"/>
+        <p14:creationId xmlns:p14="http://schemas.microsoft.com/office/powerpoint/2010/main" val="55915591"/>
       </p:ext>
     </p:extLst>
   </p:cSld>
@@ -3680,7 +3680,7 @@
           <p:cNvPr id="2" name="标题 1">
             <a:extLst>
               <a:ext uri="{FF2B5EF4-FFF2-40B4-BE49-F238E27FC236}">
-                <a16:creationId xmlns:a16="http://schemas.microsoft.com/office/drawing/2014/main" id="{4C1F90DC-E594-C2EF-3E41-E6CDF5073775}"/>
+                <a16:creationId xmlns:a16="http://schemas.microsoft.com/office/drawing/2014/main" id="{E73A8853-0150-8FB6-5361-696CF9AA4E4C}"/>
               </a:ext>
             </a:extLst>
           </p:cNvPr>
@@ -3708,7 +3708,7 @@
           <p:cNvPr id="3" name="日期占位符 2">
             <a:extLst>
               <a:ext uri="{FF2B5EF4-FFF2-40B4-BE49-F238E27FC236}">
-                <a16:creationId xmlns:a16="http://schemas.microsoft.com/office/drawing/2014/main" id="{FBD94A11-0467-9B2F-1350-23A427EECEDC}"/>
+                <a16:creationId xmlns:a16="http://schemas.microsoft.com/office/drawing/2014/main" id="{38C5A666-8A38-5E3D-92C7-F0BC799A765F}"/>
               </a:ext>
             </a:extLst>
           </p:cNvPr>
@@ -3724,7 +3724,7 @@
           <a:bodyPr/>
           <a:lstStyle/>
           <a:p>
-            <a:fld id="{C69E6D5B-6EF5-476F-BC11-33A090B32CB5}" type="datetimeFigureOut">
+            <a:fld id="{8B9FF69C-14BA-4B4B-ABF0-AACFDA9EC10F}" type="datetimeFigureOut">
               <a:rPr lang="zh-CN" altLang="en-US" smtClean="0"/>
               <a:t>2026/5/13</a:t>
             </a:fld>
@@ -3737,7 +3737,7 @@
           <p:cNvPr id="4" name="页脚占位符 3">
             <a:extLst>
               <a:ext uri="{FF2B5EF4-FFF2-40B4-BE49-F238E27FC236}">
-                <a16:creationId xmlns:a16="http://schemas.microsoft.com/office/drawing/2014/main" id="{3D6B6CFF-7D19-A588-3DA7-C9508BD068B9}"/>
+                <a16:creationId xmlns:a16="http://schemas.microsoft.com/office/drawing/2014/main" id="{DF1B2DA2-A45F-19A7-BD27-40A2A731C0F7}"/>
               </a:ext>
             </a:extLst>
           </p:cNvPr>
@@ -3762,7 +3762,7 @@
           <p:cNvPr id="5" name="灯片编号占位符 4">
             <a:extLst>
               <a:ext uri="{FF2B5EF4-FFF2-40B4-BE49-F238E27FC236}">
-                <a16:creationId xmlns:a16="http://schemas.microsoft.com/office/drawing/2014/main" id="{C67BE2F5-AC4E-97C5-3782-A215488400FA}"/>
+                <a16:creationId xmlns:a16="http://schemas.microsoft.com/office/drawing/2014/main" id="{D5532403-78F0-D36A-8946-857FE8F18CFE}"/>
               </a:ext>
             </a:extLst>
           </p:cNvPr>
@@ -3778,7 +3778,7 @@
           <a:bodyPr/>
           <a:lstStyle/>
           <a:p>
-            <a:fld id="{0ED7A2DD-ADE0-4144-A624-BB666DAA3DE9}" type="slidenum">
+            <a:fld id="{F8752B0D-6D65-4C56-8EE1-42B6C981AAFF}" type="slidenum">
               <a:rPr lang="zh-CN" altLang="en-US" smtClean="0"/>
               <a:t>‹#›</a:t>
             </a:fld>
@@ -3789,7 +3789,7 @@
     </p:spTree>
     <p:extLst>
       <p:ext uri="{BB962C8B-B14F-4D97-AF65-F5344CB8AC3E}">
-        <p14:creationId xmlns:p14="http://schemas.microsoft.com/office/powerpoint/2010/main" val="2703223255"/>
+        <p14:creationId xmlns:p14="http://schemas.microsoft.com/office/powerpoint/2010/main" val="4033924610"/>
       </p:ext>
     </p:extLst>
   </p:cSld>
@@ -3821,7 +3821,7 @@
           <p:cNvPr id="2" name="日期占位符 1">
             <a:extLst>
               <a:ext uri="{FF2B5EF4-FFF2-40B4-BE49-F238E27FC236}">
-                <a16:creationId xmlns:a16="http://schemas.microsoft.com/office/drawing/2014/main" id="{1F8F8112-01DE-CB51-0BE7-8783D4D4F774}"/>
+                <a16:creationId xmlns:a16="http://schemas.microsoft.com/office/drawing/2014/main" id="{1217653D-4AEE-6D1C-132C-00BAE22F3FD7}"/>
               </a:ext>
             </a:extLst>
           </p:cNvPr>
@@ -3837,7 +3837,7 @@
           <a:bodyPr/>
           <a:lstStyle/>
           <a:p>
-            <a:fld id="{C69E6D5B-6EF5-476F-BC11-33A090B32CB5}" type="datetimeFigureOut">
+            <a:fld id="{8B9FF69C-14BA-4B4B-ABF0-AACFDA9EC10F}" type="datetimeFigureOut">
               <a:rPr lang="zh-CN" altLang="en-US" smtClean="0"/>
               <a:t>2026/5/13</a:t>
             </a:fld>
@@ -3850,7 +3850,7 @@
           <p:cNvPr id="3" name="页脚占位符 2">
             <a:extLst>
               <a:ext uri="{FF2B5EF4-FFF2-40B4-BE49-F238E27FC236}">
-                <a16:creationId xmlns:a16="http://schemas.microsoft.com/office/drawing/2014/main" id="{9F0C62E3-C76B-CEA8-61D4-124F38DCF83B}"/>
+                <a16:creationId xmlns:a16="http://schemas.microsoft.com/office/drawing/2014/main" id="{4764A4D7-C139-C928-1DDF-85115355B115}"/>
               </a:ext>
             </a:extLst>
           </p:cNvPr>
@@ -3875,7 +3875,7 @@
           <p:cNvPr id="4" name="灯片编号占位符 3">
             <a:extLst>
               <a:ext uri="{FF2B5EF4-FFF2-40B4-BE49-F238E27FC236}">
-                <a16:creationId xmlns:a16="http://schemas.microsoft.com/office/drawing/2014/main" id="{6CD147EC-0DCC-86B6-11E3-39223D59F0C6}"/>
+                <a16:creationId xmlns:a16="http://schemas.microsoft.com/office/drawing/2014/main" id="{CE313DAC-9139-1045-F14C-9A164D37CE77}"/>
               </a:ext>
             </a:extLst>
           </p:cNvPr>
@@ -3891,7 +3891,7 @@
           <a:bodyPr/>
           <a:lstStyle/>
           <a:p>
-            <a:fld id="{0ED7A2DD-ADE0-4144-A624-BB666DAA3DE9}" type="slidenum">
+            <a:fld id="{F8752B0D-6D65-4C56-8EE1-42B6C981AAFF}" type="slidenum">
               <a:rPr lang="zh-CN" altLang="en-US" smtClean="0"/>
               <a:t>‹#›</a:t>
             </a:fld>
@@ -3902,7 +3902,7 @@
     </p:spTree>
     <p:extLst>
       <p:ext uri="{BB962C8B-B14F-4D97-AF65-F5344CB8AC3E}">
-        <p14:creationId xmlns:p14="http://schemas.microsoft.com/office/powerpoint/2010/main" val="2049861099"/>
+        <p14:creationId xmlns:p14="http://schemas.microsoft.com/office/powerpoint/2010/main" val="2229569309"/>
       </p:ext>
     </p:extLst>
   </p:cSld>
@@ -3934,7 +3934,7 @@
           <p:cNvPr id="2" name="标题 1">
             <a:extLst>
               <a:ext uri="{FF2B5EF4-FFF2-40B4-BE49-F238E27FC236}">
-                <a16:creationId xmlns:a16="http://schemas.microsoft.com/office/drawing/2014/main" id="{65459280-EE77-DE10-697D-1E035FB69CD7}"/>
+                <a16:creationId xmlns:a16="http://schemas.microsoft.com/office/drawing/2014/main" id="{FA1D2EB9-2E9C-B34E-8F08-7253D0983C6E}"/>
               </a:ext>
             </a:extLst>
           </p:cNvPr>
@@ -3971,7 +3971,7 @@
           <p:cNvPr id="3" name="内容占位符 2">
             <a:extLst>
               <a:ext uri="{FF2B5EF4-FFF2-40B4-BE49-F238E27FC236}">
-                <a16:creationId xmlns:a16="http://schemas.microsoft.com/office/drawing/2014/main" id="{486CAC62-E8F4-3D6D-60DE-AA977090EB69}"/>
+                <a16:creationId xmlns:a16="http://schemas.microsoft.com/office/drawing/2014/main" id="{FA1B8F19-A1B8-C9C4-C556-0C3596A69ABD}"/>
               </a:ext>
             </a:extLst>
           </p:cNvPr>
@@ -4061,7 +4061,7 @@
           <p:cNvPr id="4" name="文本占位符 3">
             <a:extLst>
               <a:ext uri="{FF2B5EF4-FFF2-40B4-BE49-F238E27FC236}">
-                <a16:creationId xmlns:a16="http://schemas.microsoft.com/office/drawing/2014/main" id="{39A5A5F3-1E7F-C8C3-0A45-842327F17C20}"/>
+                <a16:creationId xmlns:a16="http://schemas.microsoft.com/office/drawing/2014/main" id="{E7B050EA-907F-19B7-E0E0-033BEB7E9D4E}"/>
               </a:ext>
             </a:extLst>
           </p:cNvPr>
@@ -4132,7 +4132,7 @@
           <p:cNvPr id="5" name="日期占位符 4">
             <a:extLst>
               <a:ext uri="{FF2B5EF4-FFF2-40B4-BE49-F238E27FC236}">
-                <a16:creationId xmlns:a16="http://schemas.microsoft.com/office/drawing/2014/main" id="{BBE9BC38-181F-2B2F-7452-A073E969D137}"/>
+                <a16:creationId xmlns:a16="http://schemas.microsoft.com/office/drawing/2014/main" id="{1E6CF955-EBD5-D6DF-BFB2-8C692D4DF759}"/>
               </a:ext>
             </a:extLst>
           </p:cNvPr>
@@ -4148,7 +4148,7 @@
           <a:bodyPr/>
           <a:lstStyle/>
           <a:p>
-            <a:fld id="{C69E6D5B-6EF5-476F-BC11-33A090B32CB5}" type="datetimeFigureOut">
+            <a:fld id="{8B9FF69C-14BA-4B4B-ABF0-AACFDA9EC10F}" type="datetimeFigureOut">
               <a:rPr lang="zh-CN" altLang="en-US" smtClean="0"/>
               <a:t>2026/5/13</a:t>
             </a:fld>
@@ -4161,7 +4161,7 @@
           <p:cNvPr id="6" name="页脚占位符 5">
             <a:extLst>
               <a:ext uri="{FF2B5EF4-FFF2-40B4-BE49-F238E27FC236}">
-                <a16:creationId xmlns:a16="http://schemas.microsoft.com/office/drawing/2014/main" id="{D1E10548-E484-17D2-01CC-EC2B4D312FC8}"/>
+                <a16:creationId xmlns:a16="http://schemas.microsoft.com/office/drawing/2014/main" id="{B2BA29FC-7ED9-64FD-AB47-42EFE90B0B8F}"/>
               </a:ext>
             </a:extLst>
           </p:cNvPr>
@@ -4186,7 +4186,7 @@
           <p:cNvPr id="7" name="灯片编号占位符 6">
             <a:extLst>
               <a:ext uri="{FF2B5EF4-FFF2-40B4-BE49-F238E27FC236}">
-                <a16:creationId xmlns:a16="http://schemas.microsoft.com/office/drawing/2014/main" id="{3C6FF8B2-9351-B11F-D383-30A8EF84B7BA}"/>
+                <a16:creationId xmlns:a16="http://schemas.microsoft.com/office/drawing/2014/main" id="{0921DEB7-49DE-968F-921A-20120D51C59C}"/>
               </a:ext>
             </a:extLst>
           </p:cNvPr>
@@ -4202,7 +4202,7 @@
           <a:bodyPr/>
           <a:lstStyle/>
           <a:p>
-            <a:fld id="{0ED7A2DD-ADE0-4144-A624-BB666DAA3DE9}" type="slidenum">
+            <a:fld id="{F8752B0D-6D65-4C56-8EE1-42B6C981AAFF}" type="slidenum">
               <a:rPr lang="zh-CN" altLang="en-US" smtClean="0"/>
               <a:t>‹#›</a:t>
             </a:fld>
@@ -4213,7 +4213,7 @@
     </p:spTree>
     <p:extLst>
       <p:ext uri="{BB962C8B-B14F-4D97-AF65-F5344CB8AC3E}">
-        <p14:creationId xmlns:p14="http://schemas.microsoft.com/office/powerpoint/2010/main" val="502086981"/>
+        <p14:creationId xmlns:p14="http://schemas.microsoft.com/office/powerpoint/2010/main" val="3139683401"/>
       </p:ext>
     </p:extLst>
   </p:cSld>
@@ -4245,7 +4245,7 @@
           <p:cNvPr id="2" name="标题 1">
             <a:extLst>
               <a:ext uri="{FF2B5EF4-FFF2-40B4-BE49-F238E27FC236}">
-                <a16:creationId xmlns:a16="http://schemas.microsoft.com/office/drawing/2014/main" id="{7EB5E363-09C0-5F9C-1263-6CA39EBE9434}"/>
+                <a16:creationId xmlns:a16="http://schemas.microsoft.com/office/drawing/2014/main" id="{B9EFBB16-3EC0-D46F-7FAF-4D8E4F735B20}"/>
               </a:ext>
             </a:extLst>
           </p:cNvPr>
@@ -4282,7 +4282,7 @@
           <p:cNvPr id="3" name="图片占位符 2">
             <a:extLst>
               <a:ext uri="{FF2B5EF4-FFF2-40B4-BE49-F238E27FC236}">
-                <a16:creationId xmlns:a16="http://schemas.microsoft.com/office/drawing/2014/main" id="{146F7B93-8659-9505-D670-6C40EB83CF4B}"/>
+                <a16:creationId xmlns:a16="http://schemas.microsoft.com/office/drawing/2014/main" id="{601B75C0-DAE4-025D-8E35-6D812523FF8D}"/>
               </a:ext>
             </a:extLst>
           </p:cNvPr>
@@ -4349,7 +4349,7 @@
           <p:cNvPr id="4" name="文本占位符 3">
             <a:extLst>
               <a:ext uri="{FF2B5EF4-FFF2-40B4-BE49-F238E27FC236}">
-                <a16:creationId xmlns:a16="http://schemas.microsoft.com/office/drawing/2014/main" id="{4986D465-1F7E-6019-23EB-9CE875F74756}"/>
+                <a16:creationId xmlns:a16="http://schemas.microsoft.com/office/drawing/2014/main" id="{D5683514-8ABC-3D67-EB49-644CED48675A}"/>
               </a:ext>
             </a:extLst>
           </p:cNvPr>
@@ -4420,7 +4420,7 @@
           <p:cNvPr id="5" name="日期占位符 4">
             <a:extLst>
               <a:ext uri="{FF2B5EF4-FFF2-40B4-BE49-F238E27FC236}">
-                <a16:creationId xmlns:a16="http://schemas.microsoft.com/office/drawing/2014/main" id="{5D61A923-4F08-2AB4-23A2-1FAC3748DE42}"/>
+                <a16:creationId xmlns:a16="http://schemas.microsoft.com/office/drawing/2014/main" id="{2A8C51E3-4849-27D6-1507-C8841FBAB8FB}"/>
               </a:ext>
             </a:extLst>
           </p:cNvPr>
@@ -4436,7 +4436,7 @@
           <a:bodyPr/>
           <a:lstStyle/>
           <a:p>
-            <a:fld id="{C69E6D5B-6EF5-476F-BC11-33A090B32CB5}" type="datetimeFigureOut">
+            <a:fld id="{8B9FF69C-14BA-4B4B-ABF0-AACFDA9EC10F}" type="datetimeFigureOut">
               <a:rPr lang="zh-CN" altLang="en-US" smtClean="0"/>
               <a:t>2026/5/13</a:t>
             </a:fld>
@@ -4449,7 +4449,7 @@
           <p:cNvPr id="6" name="页脚占位符 5">
             <a:extLst>
               <a:ext uri="{FF2B5EF4-FFF2-40B4-BE49-F238E27FC236}">
-                <a16:creationId xmlns:a16="http://schemas.microsoft.com/office/drawing/2014/main" id="{F2B3D730-637E-85F8-3EF6-D884417329B1}"/>
+                <a16:creationId xmlns:a16="http://schemas.microsoft.com/office/drawing/2014/main" id="{00495505-6672-E55F-2149-5A9699D5221F}"/>
               </a:ext>
             </a:extLst>
           </p:cNvPr>
@@ -4474,7 +4474,7 @@
           <p:cNvPr id="7" name="灯片编号占位符 6">
             <a:extLst>
               <a:ext uri="{FF2B5EF4-FFF2-40B4-BE49-F238E27FC236}">
-                <a16:creationId xmlns:a16="http://schemas.microsoft.com/office/drawing/2014/main" id="{4C70CB8C-065A-9713-3858-4FAC211D98CD}"/>
+                <a16:creationId xmlns:a16="http://schemas.microsoft.com/office/drawing/2014/main" id="{5848E535-DCD3-CEDB-05E6-5FFE2B62006B}"/>
               </a:ext>
             </a:extLst>
           </p:cNvPr>
@@ -4490,7 +4490,7 @@
           <a:bodyPr/>
           <a:lstStyle/>
           <a:p>
-            <a:fld id="{0ED7A2DD-ADE0-4144-A624-BB666DAA3DE9}" type="slidenum">
+            <a:fld id="{F8752B0D-6D65-4C56-8EE1-42B6C981AAFF}" type="slidenum">
               <a:rPr lang="zh-CN" altLang="en-US" smtClean="0"/>
               <a:t>‹#›</a:t>
             </a:fld>
@@ -4501,7 +4501,7 @@
     </p:spTree>
     <p:extLst>
       <p:ext uri="{BB962C8B-B14F-4D97-AF65-F5344CB8AC3E}">
-        <p14:creationId xmlns:p14="http://schemas.microsoft.com/office/powerpoint/2010/main" val="3104130465"/>
+        <p14:creationId xmlns:p14="http://schemas.microsoft.com/office/powerpoint/2010/main" val="2060312925"/>
       </p:ext>
     </p:extLst>
   </p:cSld>
@@ -4538,7 +4538,7 @@
           <p:cNvPr id="2" name="标题占位符 1">
             <a:extLst>
               <a:ext uri="{FF2B5EF4-FFF2-40B4-BE49-F238E27FC236}">
-                <a16:creationId xmlns:a16="http://schemas.microsoft.com/office/drawing/2014/main" id="{1CBB4728-5B89-EDE6-3B96-AF1B30CEE409}"/>
+                <a16:creationId xmlns:a16="http://schemas.microsoft.com/office/drawing/2014/main" id="{ABC193CA-3231-5FF6-BF20-1AF231CAEDAE}"/>
               </a:ext>
             </a:extLst>
           </p:cNvPr>
@@ -4576,7 +4576,7 @@
           <p:cNvPr id="3" name="文本占位符 2">
             <a:extLst>
               <a:ext uri="{FF2B5EF4-FFF2-40B4-BE49-F238E27FC236}">
-                <a16:creationId xmlns:a16="http://schemas.microsoft.com/office/drawing/2014/main" id="{091F3BC0-3157-D292-79D1-BDF5074989E1}"/>
+                <a16:creationId xmlns:a16="http://schemas.microsoft.com/office/drawing/2014/main" id="{F3E808A2-5D7F-11DD-0F58-96B58A082D7F}"/>
               </a:ext>
             </a:extLst>
           </p:cNvPr>
@@ -4643,7 +4643,7 @@
           <p:cNvPr id="4" name="日期占位符 3">
             <a:extLst>
               <a:ext uri="{FF2B5EF4-FFF2-40B4-BE49-F238E27FC236}">
-                <a16:creationId xmlns:a16="http://schemas.microsoft.com/office/drawing/2014/main" id="{B6BFA7C9-6716-C715-BFB7-A19CCE8B1EF7}"/>
+                <a16:creationId xmlns:a16="http://schemas.microsoft.com/office/drawing/2014/main" id="{E3F7CEEF-816D-3217-20DD-D81CD7870EB3}"/>
               </a:ext>
             </a:extLst>
           </p:cNvPr>
@@ -4677,7 +4677,7 @@
             </a:lvl1pPr>
           </a:lstStyle>
           <a:p>
-            <a:fld id="{C69E6D5B-6EF5-476F-BC11-33A090B32CB5}" type="datetimeFigureOut">
+            <a:fld id="{8B9FF69C-14BA-4B4B-ABF0-AACFDA9EC10F}" type="datetimeFigureOut">
               <a:rPr lang="zh-CN" altLang="en-US" smtClean="0"/>
               <a:t>2026/5/13</a:t>
             </a:fld>
@@ -4690,7 +4690,7 @@
           <p:cNvPr id="5" name="页脚占位符 4">
             <a:extLst>
               <a:ext uri="{FF2B5EF4-FFF2-40B4-BE49-F238E27FC236}">
-                <a16:creationId xmlns:a16="http://schemas.microsoft.com/office/drawing/2014/main" id="{730C0D41-E88A-44A9-9E2D-59F959E7A910}"/>
+                <a16:creationId xmlns:a16="http://schemas.microsoft.com/office/drawing/2014/main" id="{0C3FAE21-8793-3BFE-CBFD-7A28D59DE109}"/>
               </a:ext>
             </a:extLst>
           </p:cNvPr>
@@ -4733,7 +4733,7 @@
           <p:cNvPr id="6" name="灯片编号占位符 5">
             <a:extLst>
               <a:ext uri="{FF2B5EF4-FFF2-40B4-BE49-F238E27FC236}">
-                <a16:creationId xmlns:a16="http://schemas.microsoft.com/office/drawing/2014/main" id="{F19DCAF5-AC1F-B620-1B85-9BC071E3E0E9}"/>
+                <a16:creationId xmlns:a16="http://schemas.microsoft.com/office/drawing/2014/main" id="{66C09B58-D868-0CCC-3C27-2F3958A6907D}"/>
               </a:ext>
             </a:extLst>
           </p:cNvPr>
@@ -4767,7 +4767,7 @@
             </a:lvl1pPr>
           </a:lstStyle>
           <a:p>
-            <a:fld id="{0ED7A2DD-ADE0-4144-A624-BB666DAA3DE9}" type="slidenum">
+            <a:fld id="{F8752B0D-6D65-4C56-8EE1-42B6C981AAFF}" type="slidenum">
               <a:rPr lang="zh-CN" altLang="en-US" smtClean="0"/>
               <a:t>‹#›</a:t>
             </a:fld>
@@ -4778,7 +4778,7 @@
     </p:spTree>
     <p:extLst>
       <p:ext uri="{BB962C8B-B14F-4D97-AF65-F5344CB8AC3E}">
-        <p14:creationId xmlns:p14="http://schemas.microsoft.com/office/powerpoint/2010/main" val="1481527369"/>
+        <p14:creationId xmlns:p14="http://schemas.microsoft.com/office/powerpoint/2010/main" val="1082943481"/>
       </p:ext>
     </p:extLst>
   </p:cSld>
@@ -5101,7 +5101,7 @@
           <p:cNvPr id="2" name="dark-bg">
             <a:extLst>
               <a:ext uri="{FF2B5EF4-FFF2-40B4-BE49-F238E27FC236}">
-                <a16:creationId xmlns:a16="http://schemas.microsoft.com/office/drawing/2014/main" id="{B1D384E6-EB98-39B0-5DEA-12C4BE0EA021}"/>
+                <a16:creationId xmlns:a16="http://schemas.microsoft.com/office/drawing/2014/main" id="{E81CD634-6978-03CD-D594-7E96EF91D519}"/>
               </a:ext>
             </a:extLst>
           </p:cNvPr>
@@ -5162,7 +5162,7 @@
           <p:cNvPr id="3" name="dark-panel">
             <a:extLst>
               <a:ext uri="{FF2B5EF4-FFF2-40B4-BE49-F238E27FC236}">
-                <a16:creationId xmlns:a16="http://schemas.microsoft.com/office/drawing/2014/main" id="{6F2BE028-ABA5-9A87-EDFC-4D7717E6B4FD}"/>
+                <a16:creationId xmlns:a16="http://schemas.microsoft.com/office/drawing/2014/main" id="{81624108-B22C-BBD5-6B9C-ACB9028F672B}"/>
               </a:ext>
             </a:extLst>
           </p:cNvPr>
@@ -5225,7 +5225,7 @@
           <p:cNvPr id="4" name="grid-v-0">
             <a:extLst>
               <a:ext uri="{FF2B5EF4-FFF2-40B4-BE49-F238E27FC236}">
-                <a16:creationId xmlns:a16="http://schemas.microsoft.com/office/drawing/2014/main" id="{DAA1394E-5DEE-3306-E5D0-53D539931B30}"/>
+                <a16:creationId xmlns:a16="http://schemas.microsoft.com/office/drawing/2014/main" id="{573A22DF-8D4F-8269-31C5-BB727DE8D49F}"/>
               </a:ext>
             </a:extLst>
           </p:cNvPr>
@@ -5266,7 +5266,7 @@
           <p:cNvPr id="5" name="grid-v-64">
             <a:extLst>
               <a:ext uri="{FF2B5EF4-FFF2-40B4-BE49-F238E27FC236}">
-                <a16:creationId xmlns:a16="http://schemas.microsoft.com/office/drawing/2014/main" id="{D55B0B58-21C9-4187-9C11-E5856E75B887}"/>
+                <a16:creationId xmlns:a16="http://schemas.microsoft.com/office/drawing/2014/main" id="{4FF4D7D5-4B78-DBCB-1F88-9E966890ACAE}"/>
               </a:ext>
             </a:extLst>
           </p:cNvPr>
@@ -5307,7 +5307,7 @@
           <p:cNvPr id="6" name="grid-v-128">
             <a:extLst>
               <a:ext uri="{FF2B5EF4-FFF2-40B4-BE49-F238E27FC236}">
-                <a16:creationId xmlns:a16="http://schemas.microsoft.com/office/drawing/2014/main" id="{2CBA1F77-A11C-BF75-8785-14758FCAD5FB}"/>
+                <a16:creationId xmlns:a16="http://schemas.microsoft.com/office/drawing/2014/main" id="{11A7DBBF-7876-356A-C786-EF2B7FB25500}"/>
               </a:ext>
             </a:extLst>
           </p:cNvPr>
@@ -5348,7 +5348,7 @@
           <p:cNvPr id="7" name="grid-v-192">
             <a:extLst>
               <a:ext uri="{FF2B5EF4-FFF2-40B4-BE49-F238E27FC236}">
-                <a16:creationId xmlns:a16="http://schemas.microsoft.com/office/drawing/2014/main" id="{CF50B363-CA62-00E7-CB5F-6E7838F8FE00}"/>
+                <a16:creationId xmlns:a16="http://schemas.microsoft.com/office/drawing/2014/main" id="{4E861B53-A970-344F-11BE-DCFF89F59A76}"/>
               </a:ext>
             </a:extLst>
           </p:cNvPr>
@@ -5389,7 +5389,7 @@
           <p:cNvPr id="8" name="grid-v-256">
             <a:extLst>
               <a:ext uri="{FF2B5EF4-FFF2-40B4-BE49-F238E27FC236}">
-                <a16:creationId xmlns:a16="http://schemas.microsoft.com/office/drawing/2014/main" id="{7BBD33B5-1397-EE82-06E8-897B0BD9AF88}"/>
+                <a16:creationId xmlns:a16="http://schemas.microsoft.com/office/drawing/2014/main" id="{9BA93E34-05B1-85C1-FF73-B3CA07D04BF3}"/>
               </a:ext>
             </a:extLst>
           </p:cNvPr>
@@ -5430,7 +5430,7 @@
           <p:cNvPr id="9" name="grid-v-320">
             <a:extLst>
               <a:ext uri="{FF2B5EF4-FFF2-40B4-BE49-F238E27FC236}">
-                <a16:creationId xmlns:a16="http://schemas.microsoft.com/office/drawing/2014/main" id="{AA7CFEE8-3D9E-14E4-7BE1-178797F83092}"/>
+                <a16:creationId xmlns:a16="http://schemas.microsoft.com/office/drawing/2014/main" id="{C40F0E5C-1FA9-0529-08F9-8EFCFC5A238F}"/>
               </a:ext>
             </a:extLst>
           </p:cNvPr>
@@ -5471,7 +5471,7 @@
           <p:cNvPr id="10" name="grid-v-384">
             <a:extLst>
               <a:ext uri="{FF2B5EF4-FFF2-40B4-BE49-F238E27FC236}">
-                <a16:creationId xmlns:a16="http://schemas.microsoft.com/office/drawing/2014/main" id="{1313A918-2239-B1AF-2056-8CB678973265}"/>
+                <a16:creationId xmlns:a16="http://schemas.microsoft.com/office/drawing/2014/main" id="{BC1FDA6E-E785-06DB-44A7-AB77ED6EE342}"/>
               </a:ext>
             </a:extLst>
           </p:cNvPr>
@@ -5512,7 +5512,7 @@
           <p:cNvPr id="11" name="grid-v-448">
             <a:extLst>
               <a:ext uri="{FF2B5EF4-FFF2-40B4-BE49-F238E27FC236}">
-                <a16:creationId xmlns:a16="http://schemas.microsoft.com/office/drawing/2014/main" id="{314C9CD2-5AB3-1C64-A318-0CA907E34011}"/>
+                <a16:creationId xmlns:a16="http://schemas.microsoft.com/office/drawing/2014/main" id="{B4776592-B33D-36CF-2C0C-8CC9960C5D1A}"/>
               </a:ext>
             </a:extLst>
           </p:cNvPr>
@@ -5553,7 +5553,7 @@
           <p:cNvPr id="12" name="grid-v-512">
             <a:extLst>
               <a:ext uri="{FF2B5EF4-FFF2-40B4-BE49-F238E27FC236}">
-                <a16:creationId xmlns:a16="http://schemas.microsoft.com/office/drawing/2014/main" id="{3603B494-DD21-7438-4456-0173DB0E7BEF}"/>
+                <a16:creationId xmlns:a16="http://schemas.microsoft.com/office/drawing/2014/main" id="{A9320CF2-4B0A-28AC-EBBB-941E234ACCE9}"/>
               </a:ext>
             </a:extLst>
           </p:cNvPr>
@@ -5594,7 +5594,7 @@
           <p:cNvPr id="13" name="grid-v-576">
             <a:extLst>
               <a:ext uri="{FF2B5EF4-FFF2-40B4-BE49-F238E27FC236}">
-                <a16:creationId xmlns:a16="http://schemas.microsoft.com/office/drawing/2014/main" id="{C153CCB1-3EA9-CE26-951C-240A1AC1218D}"/>
+                <a16:creationId xmlns:a16="http://schemas.microsoft.com/office/drawing/2014/main" id="{F153FF48-5476-A5AF-42A9-C057BC94FCB7}"/>
               </a:ext>
             </a:extLst>
           </p:cNvPr>
@@ -5635,7 +5635,7 @@
           <p:cNvPr id="14" name="grid-v-640">
             <a:extLst>
               <a:ext uri="{FF2B5EF4-FFF2-40B4-BE49-F238E27FC236}">
-                <a16:creationId xmlns:a16="http://schemas.microsoft.com/office/drawing/2014/main" id="{74111182-E142-B912-3A03-0D7CD63F068A}"/>
+                <a16:creationId xmlns:a16="http://schemas.microsoft.com/office/drawing/2014/main" id="{99C77D7D-71E9-3B21-6C4C-351360ECDCFF}"/>
               </a:ext>
             </a:extLst>
           </p:cNvPr>
@@ -5676,7 +5676,7 @@
           <p:cNvPr id="15" name="grid-v-704">
             <a:extLst>
               <a:ext uri="{FF2B5EF4-FFF2-40B4-BE49-F238E27FC236}">
-                <a16:creationId xmlns:a16="http://schemas.microsoft.com/office/drawing/2014/main" id="{B9E3E222-265C-3D05-F2CB-E03EE99E6C26}"/>
+                <a16:creationId xmlns:a16="http://schemas.microsoft.com/office/drawing/2014/main" id="{EAF1190F-4AC8-EBF4-43D5-F2FC24FC62B6}"/>
               </a:ext>
             </a:extLst>
           </p:cNvPr>
@@ -5717,7 +5717,7 @@
           <p:cNvPr id="16" name="grid-v-768">
             <a:extLst>
               <a:ext uri="{FF2B5EF4-FFF2-40B4-BE49-F238E27FC236}">
-                <a16:creationId xmlns:a16="http://schemas.microsoft.com/office/drawing/2014/main" id="{753A2FF0-33C0-1393-88FE-211AA0107382}"/>
+                <a16:creationId xmlns:a16="http://schemas.microsoft.com/office/drawing/2014/main" id="{8B40F9B3-E370-01B2-B540-CAC933C726F4}"/>
               </a:ext>
             </a:extLst>
           </p:cNvPr>
@@ -5758,7 +5758,7 @@
           <p:cNvPr id="17" name="grid-v-832">
             <a:extLst>
               <a:ext uri="{FF2B5EF4-FFF2-40B4-BE49-F238E27FC236}">
-                <a16:creationId xmlns:a16="http://schemas.microsoft.com/office/drawing/2014/main" id="{4F7D11A6-8182-71AD-0956-194B4E5023B3}"/>
+                <a16:creationId xmlns:a16="http://schemas.microsoft.com/office/drawing/2014/main" id="{A57E4889-659C-DD09-616A-07DCD2CD8215}"/>
               </a:ext>
             </a:extLst>
           </p:cNvPr>
@@ -5799,7 +5799,7 @@
           <p:cNvPr id="18" name="grid-v-896">
             <a:extLst>
               <a:ext uri="{FF2B5EF4-FFF2-40B4-BE49-F238E27FC236}">
-                <a16:creationId xmlns:a16="http://schemas.microsoft.com/office/drawing/2014/main" id="{5123E869-AF5A-879B-0601-0121667EC3A9}"/>
+                <a16:creationId xmlns:a16="http://schemas.microsoft.com/office/drawing/2014/main" id="{607BEBA8-F7C5-21CF-4552-9A3EA93AAA80}"/>
               </a:ext>
             </a:extLst>
           </p:cNvPr>
@@ -5840,7 +5840,7 @@
           <p:cNvPr id="19" name="grid-v-960">
             <a:extLst>
               <a:ext uri="{FF2B5EF4-FFF2-40B4-BE49-F238E27FC236}">
-                <a16:creationId xmlns:a16="http://schemas.microsoft.com/office/drawing/2014/main" id="{8154301F-251E-58B4-36B4-293AFA4718DD}"/>
+                <a16:creationId xmlns:a16="http://schemas.microsoft.com/office/drawing/2014/main" id="{A72DE507-F750-D638-5200-DC0F67F87DCA}"/>
               </a:ext>
             </a:extLst>
           </p:cNvPr>
@@ -5881,7 +5881,7 @@
           <p:cNvPr id="20" name="grid-h-0">
             <a:extLst>
               <a:ext uri="{FF2B5EF4-FFF2-40B4-BE49-F238E27FC236}">
-                <a16:creationId xmlns:a16="http://schemas.microsoft.com/office/drawing/2014/main" id="{3C57C650-8B77-BCE9-BBB4-D9F68B9F579F}"/>
+                <a16:creationId xmlns:a16="http://schemas.microsoft.com/office/drawing/2014/main" id="{EE0E488B-BEAB-DC0D-28A4-6E0612B1AF5C}"/>
               </a:ext>
             </a:extLst>
           </p:cNvPr>
@@ -5922,7 +5922,7 @@
           <p:cNvPr id="21" name="grid-h-64">
             <a:extLst>
               <a:ext uri="{FF2B5EF4-FFF2-40B4-BE49-F238E27FC236}">
-                <a16:creationId xmlns:a16="http://schemas.microsoft.com/office/drawing/2014/main" id="{2F813482-9AB8-B0C2-A2F6-C5A4D29447F3}"/>
+                <a16:creationId xmlns:a16="http://schemas.microsoft.com/office/drawing/2014/main" id="{D887A390-374E-9B29-EE4F-CE79D6A84FED}"/>
               </a:ext>
             </a:extLst>
           </p:cNvPr>
@@ -5963,7 +5963,7 @@
           <p:cNvPr id="22" name="grid-h-128">
             <a:extLst>
               <a:ext uri="{FF2B5EF4-FFF2-40B4-BE49-F238E27FC236}">
-                <a16:creationId xmlns:a16="http://schemas.microsoft.com/office/drawing/2014/main" id="{BB296A7E-7422-DD39-0DC4-CD5D4E41817E}"/>
+                <a16:creationId xmlns:a16="http://schemas.microsoft.com/office/drawing/2014/main" id="{29EB8320-21D3-06AD-15AE-CE97FCBA4588}"/>
               </a:ext>
             </a:extLst>
           </p:cNvPr>
@@ -6004,7 +6004,7 @@
           <p:cNvPr id="23" name="grid-h-192">
             <a:extLst>
               <a:ext uri="{FF2B5EF4-FFF2-40B4-BE49-F238E27FC236}">
-                <a16:creationId xmlns:a16="http://schemas.microsoft.com/office/drawing/2014/main" id="{5A57A5D0-3446-963D-BED4-38E69D0067FE}"/>
+                <a16:creationId xmlns:a16="http://schemas.microsoft.com/office/drawing/2014/main" id="{31A4EA1B-CAB9-3C4D-7293-701765BE9240}"/>
               </a:ext>
             </a:extLst>
           </p:cNvPr>
@@ -6045,7 +6045,7 @@
           <p:cNvPr id="24" name="grid-h-256">
             <a:extLst>
               <a:ext uri="{FF2B5EF4-FFF2-40B4-BE49-F238E27FC236}">
-                <a16:creationId xmlns:a16="http://schemas.microsoft.com/office/drawing/2014/main" id="{883745FB-8385-702B-7653-80D47A752BF6}"/>
+                <a16:creationId xmlns:a16="http://schemas.microsoft.com/office/drawing/2014/main" id="{819C626F-721E-9992-67A4-4FC9DE32F4B5}"/>
               </a:ext>
             </a:extLst>
           </p:cNvPr>
@@ -6086,7 +6086,7 @@
           <p:cNvPr id="25" name="grid-h-320">
             <a:extLst>
               <a:ext uri="{FF2B5EF4-FFF2-40B4-BE49-F238E27FC236}">
-                <a16:creationId xmlns:a16="http://schemas.microsoft.com/office/drawing/2014/main" id="{A2E3C21F-E2FE-2D7D-2F65-F054390E5EBF}"/>
+                <a16:creationId xmlns:a16="http://schemas.microsoft.com/office/drawing/2014/main" id="{8055CD00-EEAC-E37A-7F51-DFDED7013CD9}"/>
               </a:ext>
             </a:extLst>
           </p:cNvPr>
@@ -6127,7 +6127,7 @@
           <p:cNvPr id="26" name="grid-h-384">
             <a:extLst>
               <a:ext uri="{FF2B5EF4-FFF2-40B4-BE49-F238E27FC236}">
-                <a16:creationId xmlns:a16="http://schemas.microsoft.com/office/drawing/2014/main" id="{D9022877-6955-DBB7-00FF-52BF80B389EC}"/>
+                <a16:creationId xmlns:a16="http://schemas.microsoft.com/office/drawing/2014/main" id="{700B0811-A437-B50D-E801-6C1A17E49C7E}"/>
               </a:ext>
             </a:extLst>
           </p:cNvPr>
@@ -6168,7 +6168,7 @@
           <p:cNvPr id="27" name="grid-h-448">
             <a:extLst>
               <a:ext uri="{FF2B5EF4-FFF2-40B4-BE49-F238E27FC236}">
-                <a16:creationId xmlns:a16="http://schemas.microsoft.com/office/drawing/2014/main" id="{7E0AD9B8-7664-A4D3-BDBA-00C9CF8920A7}"/>
+                <a16:creationId xmlns:a16="http://schemas.microsoft.com/office/drawing/2014/main" id="{34BBF93D-182B-84E9-677A-8BAECBA905E5}"/>
               </a:ext>
             </a:extLst>
           </p:cNvPr>
@@ -6209,7 +6209,7 @@
           <p:cNvPr id="28" name="grid-h-512">
             <a:extLst>
               <a:ext uri="{FF2B5EF4-FFF2-40B4-BE49-F238E27FC236}">
-                <a16:creationId xmlns:a16="http://schemas.microsoft.com/office/drawing/2014/main" id="{F3F21C49-D15B-0E66-A669-49E819D343BA}"/>
+                <a16:creationId xmlns:a16="http://schemas.microsoft.com/office/drawing/2014/main" id="{16052E37-2AEA-22FF-F174-50854FB7706B}"/>
               </a:ext>
             </a:extLst>
           </p:cNvPr>
@@ -6250,7 +6250,7 @@
           <p:cNvPr id="29" name="page-num">
             <a:extLst>
               <a:ext uri="{FF2B5EF4-FFF2-40B4-BE49-F238E27FC236}">
-                <a16:creationId xmlns:a16="http://schemas.microsoft.com/office/drawing/2014/main" id="{511085A6-B8A6-1F66-AFB6-98E4FA00B035}"/>
+                <a16:creationId xmlns:a16="http://schemas.microsoft.com/office/drawing/2014/main" id="{DF8CE95B-07F9-D5B8-DECE-B3F0A091D6B4}"/>
               </a:ext>
             </a:extLst>
           </p:cNvPr>
@@ -6296,7 +6296,7 @@
           <p:cNvPr id="30" name="section-label">
             <a:extLst>
               <a:ext uri="{FF2B5EF4-FFF2-40B4-BE49-F238E27FC236}">
-                <a16:creationId xmlns:a16="http://schemas.microsoft.com/office/drawing/2014/main" id="{2976F845-9FD6-342A-4C12-5FA4124E16A7}"/>
+                <a16:creationId xmlns:a16="http://schemas.microsoft.com/office/drawing/2014/main" id="{DE73C8FD-E658-2F42-7F2D-3B266311EE29}"/>
               </a:ext>
             </a:extLst>
           </p:cNvPr>
@@ -6342,7 +6342,7 @@
           <p:cNvPr id="31" name="title">
             <a:extLst>
               <a:ext uri="{FF2B5EF4-FFF2-40B4-BE49-F238E27FC236}">
-                <a16:creationId xmlns:a16="http://schemas.microsoft.com/office/drawing/2014/main" id="{94FB9C68-2028-18E7-715C-DD2E35C3B3C1}"/>
+                <a16:creationId xmlns:a16="http://schemas.microsoft.com/office/drawing/2014/main" id="{88FCFC02-779F-6B49-E4C2-DB105BBA8306}"/>
               </a:ext>
             </a:extLst>
           </p:cNvPr>
@@ -6388,7 +6388,7 @@
           <p:cNvPr id="32" name="subtitle">
             <a:extLst>
               <a:ext uri="{FF2B5EF4-FFF2-40B4-BE49-F238E27FC236}">
-                <a16:creationId xmlns:a16="http://schemas.microsoft.com/office/drawing/2014/main" id="{3B1BA0BD-4021-A088-FE81-97FD35CDFD92}"/>
+                <a16:creationId xmlns:a16="http://schemas.microsoft.com/office/drawing/2014/main" id="{3EA90F1E-51DE-83EA-6836-22142B097166}"/>
               </a:ext>
             </a:extLst>
           </p:cNvPr>
@@ -6434,7 +6434,7 @@
           <p:cNvPr id="33" name="cover-rule">
             <a:extLst>
               <a:ext uri="{FF2B5EF4-FFF2-40B4-BE49-F238E27FC236}">
-                <a16:creationId xmlns:a16="http://schemas.microsoft.com/office/drawing/2014/main" id="{83D0EB12-325D-B1C6-9BC9-47B7BD62C0E3}"/>
+                <a16:creationId xmlns:a16="http://schemas.microsoft.com/office/drawing/2014/main" id="{A843235D-D09D-723A-5A9E-AB2A93CD94D2}"/>
               </a:ext>
             </a:extLst>
           </p:cNvPr>
@@ -6475,7 +6475,7 @@
           <p:cNvPr id="34" name="thesis-box">
             <a:extLst>
               <a:ext uri="{FF2B5EF4-FFF2-40B4-BE49-F238E27FC236}">
-                <a16:creationId xmlns:a16="http://schemas.microsoft.com/office/drawing/2014/main" id="{0C5A0595-F39E-2910-0B87-A333A53A95F7}"/>
+                <a16:creationId xmlns:a16="http://schemas.microsoft.com/office/drawing/2014/main" id="{D30A8D7C-408B-B5D8-ABFB-21109CB7E8F6}"/>
               </a:ext>
             </a:extLst>
           </p:cNvPr>
@@ -6529,7 +6529,7 @@
           <p:cNvPr id="35" name="thesis-k">
             <a:extLst>
               <a:ext uri="{FF2B5EF4-FFF2-40B4-BE49-F238E27FC236}">
-                <a16:creationId xmlns:a16="http://schemas.microsoft.com/office/drawing/2014/main" id="{AA4ADED8-5D5D-8341-58D6-40D5D75284F6}"/>
+                <a16:creationId xmlns:a16="http://schemas.microsoft.com/office/drawing/2014/main" id="{671F6952-FFEA-C668-25B0-846E3BE062AD}"/>
               </a:ext>
             </a:extLst>
           </p:cNvPr>
@@ -6575,7 +6575,7 @@
           <p:cNvPr id="36" name="thesis">
             <a:extLst>
               <a:ext uri="{FF2B5EF4-FFF2-40B4-BE49-F238E27FC236}">
-                <a16:creationId xmlns:a16="http://schemas.microsoft.com/office/drawing/2014/main" id="{69DC9A10-27A1-0CC9-DFFA-77D2BDE51389}"/>
+                <a16:creationId xmlns:a16="http://schemas.microsoft.com/office/drawing/2014/main" id="{59289072-F20A-601F-143F-3D4D3138AE1C}"/>
               </a:ext>
             </a:extLst>
           </p:cNvPr>
@@ -6622,7 +6622,7 @@
             <a:hlinkClick r:id="rId3"/>
             <a:extLst>
               <a:ext uri="{FF2B5EF4-FFF2-40B4-BE49-F238E27FC236}">
-                <a16:creationId xmlns:a16="http://schemas.microsoft.com/office/drawing/2014/main" id="{3D11960E-7521-82A4-1A62-55E852C407E0}"/>
+                <a16:creationId xmlns:a16="http://schemas.microsoft.com/office/drawing/2014/main" id="{2CEC0A3F-F58E-5762-313A-8E77E1F0680F}"/>
               </a:ext>
             </a:extLst>
           </p:cNvPr>
@@ -6658,7 +6658,7 @@
           <p:cNvPr id="39" name="qr-caption-bg">
             <a:extLst>
               <a:ext uri="{FF2B5EF4-FFF2-40B4-BE49-F238E27FC236}">
-                <a16:creationId xmlns:a16="http://schemas.microsoft.com/office/drawing/2014/main" id="{F07271A2-A806-D85F-E39E-DF36976A9EAC}"/>
+                <a16:creationId xmlns:a16="http://schemas.microsoft.com/office/drawing/2014/main" id="{4B0B13DB-2E70-B095-D4CE-8FA7AB3226FA}"/>
               </a:ext>
             </a:extLst>
           </p:cNvPr>
@@ -6712,7 +6712,7 @@
           <p:cNvPr id="40" name="qr-cap1">
             <a:extLst>
               <a:ext uri="{FF2B5EF4-FFF2-40B4-BE49-F238E27FC236}">
-                <a16:creationId xmlns:a16="http://schemas.microsoft.com/office/drawing/2014/main" id="{053CE74F-6934-7B95-35F7-962E2CE80F18}"/>
+                <a16:creationId xmlns:a16="http://schemas.microsoft.com/office/drawing/2014/main" id="{3C1487B4-4C55-8435-F341-1F5EB423FB6B}"/>
               </a:ext>
             </a:extLst>
           </p:cNvPr>
@@ -6758,7 +6758,7 @@
           <p:cNvPr id="41" name="qr-cap2">
             <a:extLst>
               <a:ext uri="{FF2B5EF4-FFF2-40B4-BE49-F238E27FC236}">
-                <a16:creationId xmlns:a16="http://schemas.microsoft.com/office/drawing/2014/main" id="{C228AC34-7B9D-87DC-C537-78E4B08F92D7}"/>
+                <a16:creationId xmlns:a16="http://schemas.microsoft.com/office/drawing/2014/main" id="{D94F44D2-E345-D94B-8400-AF4B63BAA47B}"/>
               </a:ext>
             </a:extLst>
           </p:cNvPr>
@@ -6804,7 +6804,7 @@
           <p:cNvPr id="42" name="name">
             <a:extLst>
               <a:ext uri="{FF2B5EF4-FFF2-40B4-BE49-F238E27FC236}">
-                <a16:creationId xmlns:a16="http://schemas.microsoft.com/office/drawing/2014/main" id="{A31D3BE5-33D3-B78F-0FAE-A6F96DB53B31}"/>
+                <a16:creationId xmlns:a16="http://schemas.microsoft.com/office/drawing/2014/main" id="{4291BD58-C9A6-5F94-5D27-E15A02522585}"/>
               </a:ext>
             </a:extLst>
           </p:cNvPr>
@@ -6850,7 +6850,7 @@
           <p:cNvPr id="43" name="sup">
             <a:extLst>
               <a:ext uri="{FF2B5EF4-FFF2-40B4-BE49-F238E27FC236}">
-                <a16:creationId xmlns:a16="http://schemas.microsoft.com/office/drawing/2014/main" id="{74AD9B58-8079-4E08-F671-21030D04E939}"/>
+                <a16:creationId xmlns:a16="http://schemas.microsoft.com/office/drawing/2014/main" id="{5560C5FE-181D-BFC8-E6CD-E5E1AFB68DC9}"/>
               </a:ext>
             </a:extLst>
           </p:cNvPr>
@@ -6896,7 +6896,7 @@
           <p:cNvPr id="45" name="图片 44">
             <a:extLst>
               <a:ext uri="{FF2B5EF4-FFF2-40B4-BE49-F238E27FC236}">
-                <a16:creationId xmlns:a16="http://schemas.microsoft.com/office/drawing/2014/main" id="{3EFB07DF-DD63-ACD1-D6F2-45EEE4E8FA29}"/>
+                <a16:creationId xmlns:a16="http://schemas.microsoft.com/office/drawing/2014/main" id="{CA681714-B6EB-E099-5F42-3CECE54A3560}"/>
               </a:ext>
             </a:extLst>
           </p:cNvPr>
@@ -6930,7 +6930,7 @@
     </p:spTree>
     <p:extLst>
       <p:ext uri="{BB962C8B-B14F-4D97-AF65-F5344CB8AC3E}">
-        <p14:creationId xmlns:p14="http://schemas.microsoft.com/office/powerpoint/2010/main" val="183419485"/>
+        <p14:creationId xmlns:p14="http://schemas.microsoft.com/office/powerpoint/2010/main" val="1729401161"/>
       </p:ext>
     </p:extLst>
   </p:cSld>
@@ -6974,7 +6974,7 @@
           <p:cNvPr id="2" name="dark-bg">
             <a:extLst>
               <a:ext uri="{FF2B5EF4-FFF2-40B4-BE49-F238E27FC236}">
-                <a16:creationId xmlns:a16="http://schemas.microsoft.com/office/drawing/2014/main" id="{7B94B9D1-D051-212E-5DB0-8D4FD5AB8E79}"/>
+                <a16:creationId xmlns:a16="http://schemas.microsoft.com/office/drawing/2014/main" id="{3DE192BD-0715-3FE4-6D6D-773DBF4C410E}"/>
               </a:ext>
             </a:extLst>
           </p:cNvPr>
@@ -7035,7 +7035,7 @@
           <p:cNvPr id="3" name="dark-panel">
             <a:extLst>
               <a:ext uri="{FF2B5EF4-FFF2-40B4-BE49-F238E27FC236}">
-                <a16:creationId xmlns:a16="http://schemas.microsoft.com/office/drawing/2014/main" id="{AFA9303C-E8F6-5127-7591-F351D11013A0}"/>
+                <a16:creationId xmlns:a16="http://schemas.microsoft.com/office/drawing/2014/main" id="{6644C7E9-5DC2-8B53-D546-22AF30C9E6D0}"/>
               </a:ext>
             </a:extLst>
           </p:cNvPr>
@@ -7098,7 +7098,7 @@
           <p:cNvPr id="4" name="grid-v-0">
             <a:extLst>
               <a:ext uri="{FF2B5EF4-FFF2-40B4-BE49-F238E27FC236}">
-                <a16:creationId xmlns:a16="http://schemas.microsoft.com/office/drawing/2014/main" id="{D7D32D47-FE31-5025-49EE-39A3E696DC18}"/>
+                <a16:creationId xmlns:a16="http://schemas.microsoft.com/office/drawing/2014/main" id="{D39C50AD-31FE-0C6A-9909-B01F0F051F76}"/>
               </a:ext>
             </a:extLst>
           </p:cNvPr>
@@ -7139,7 +7139,7 @@
           <p:cNvPr id="5" name="grid-v-64">
             <a:extLst>
               <a:ext uri="{FF2B5EF4-FFF2-40B4-BE49-F238E27FC236}">
-                <a16:creationId xmlns:a16="http://schemas.microsoft.com/office/drawing/2014/main" id="{136D5AAC-D4E2-9481-27F8-C9C6AD7D296C}"/>
+                <a16:creationId xmlns:a16="http://schemas.microsoft.com/office/drawing/2014/main" id="{9AD34FBA-4E5B-68E0-FF43-3B5DA7458372}"/>
               </a:ext>
             </a:extLst>
           </p:cNvPr>
@@ -7180,7 +7180,7 @@
           <p:cNvPr id="6" name="grid-v-128">
             <a:extLst>
               <a:ext uri="{FF2B5EF4-FFF2-40B4-BE49-F238E27FC236}">
-                <a16:creationId xmlns:a16="http://schemas.microsoft.com/office/drawing/2014/main" id="{B16883B1-E84F-3C61-5C06-8C99BA81DCE1}"/>
+                <a16:creationId xmlns:a16="http://schemas.microsoft.com/office/drawing/2014/main" id="{CD24DCF2-7D78-26D3-9BE3-465B6A6076A1}"/>
               </a:ext>
             </a:extLst>
           </p:cNvPr>
@@ -7221,7 +7221,7 @@
           <p:cNvPr id="7" name="grid-v-192">
             <a:extLst>
               <a:ext uri="{FF2B5EF4-FFF2-40B4-BE49-F238E27FC236}">
-                <a16:creationId xmlns:a16="http://schemas.microsoft.com/office/drawing/2014/main" id="{8AA8F484-28C4-3D61-8CEB-DA42D2A0F533}"/>
+                <a16:creationId xmlns:a16="http://schemas.microsoft.com/office/drawing/2014/main" id="{20EBD46F-5D3C-EF3F-6EA8-3841C7DAA3AE}"/>
               </a:ext>
             </a:extLst>
           </p:cNvPr>
@@ -7262,7 +7262,7 @@
           <p:cNvPr id="8" name="grid-v-256">
             <a:extLst>
               <a:ext uri="{FF2B5EF4-FFF2-40B4-BE49-F238E27FC236}">
-                <a16:creationId xmlns:a16="http://schemas.microsoft.com/office/drawing/2014/main" id="{35999B90-E4FE-48F9-0F2A-7AB4F0CCCFB8}"/>
+                <a16:creationId xmlns:a16="http://schemas.microsoft.com/office/drawing/2014/main" id="{76B7781F-37FB-517F-5F54-2168135EE532}"/>
               </a:ext>
             </a:extLst>
           </p:cNvPr>
@@ -7303,7 +7303,7 @@
           <p:cNvPr id="9" name="grid-v-320">
             <a:extLst>
               <a:ext uri="{FF2B5EF4-FFF2-40B4-BE49-F238E27FC236}">
-                <a16:creationId xmlns:a16="http://schemas.microsoft.com/office/drawing/2014/main" id="{40BD0EDF-BE56-E2F1-494E-60391583D60A}"/>
+                <a16:creationId xmlns:a16="http://schemas.microsoft.com/office/drawing/2014/main" id="{4BAEE7F1-362A-5FC5-F0B5-7ACF44C68BDA}"/>
               </a:ext>
             </a:extLst>
           </p:cNvPr>
@@ -7344,7 +7344,7 @@
           <p:cNvPr id="10" name="grid-v-384">
             <a:extLst>
               <a:ext uri="{FF2B5EF4-FFF2-40B4-BE49-F238E27FC236}">
-                <a16:creationId xmlns:a16="http://schemas.microsoft.com/office/drawing/2014/main" id="{31E8F77C-4900-2293-117F-4F46CB3CC5EC}"/>
+                <a16:creationId xmlns:a16="http://schemas.microsoft.com/office/drawing/2014/main" id="{0E74539E-4A0A-564D-C346-5B663275C5DB}"/>
               </a:ext>
             </a:extLst>
           </p:cNvPr>
@@ -7385,7 +7385,7 @@
           <p:cNvPr id="11" name="grid-v-448">
             <a:extLst>
               <a:ext uri="{FF2B5EF4-FFF2-40B4-BE49-F238E27FC236}">
-                <a16:creationId xmlns:a16="http://schemas.microsoft.com/office/drawing/2014/main" id="{0839A33A-840F-9390-EB2B-A80B0CE17BC6}"/>
+                <a16:creationId xmlns:a16="http://schemas.microsoft.com/office/drawing/2014/main" id="{B8565E1E-8422-9059-B583-30C939793BE6}"/>
               </a:ext>
             </a:extLst>
           </p:cNvPr>
@@ -7426,7 +7426,7 @@
           <p:cNvPr id="12" name="grid-v-512">
             <a:extLst>
               <a:ext uri="{FF2B5EF4-FFF2-40B4-BE49-F238E27FC236}">
-                <a16:creationId xmlns:a16="http://schemas.microsoft.com/office/drawing/2014/main" id="{3459EF24-9B26-C393-5CC3-B89BA8FA4074}"/>
+                <a16:creationId xmlns:a16="http://schemas.microsoft.com/office/drawing/2014/main" id="{A9927399-B30B-4345-3AE7-381EA07F7059}"/>
               </a:ext>
             </a:extLst>
           </p:cNvPr>
@@ -7467,7 +7467,7 @@
           <p:cNvPr id="13" name="grid-v-576">
             <a:extLst>
               <a:ext uri="{FF2B5EF4-FFF2-40B4-BE49-F238E27FC236}">
-                <a16:creationId xmlns:a16="http://schemas.microsoft.com/office/drawing/2014/main" id="{E098F5B8-1245-529A-170F-6545F13E15B4}"/>
+                <a16:creationId xmlns:a16="http://schemas.microsoft.com/office/drawing/2014/main" id="{D6125719-B86B-5AC0-D10E-67487A0CE338}"/>
               </a:ext>
             </a:extLst>
           </p:cNvPr>
@@ -7508,7 +7508,7 @@
           <p:cNvPr id="14" name="grid-v-640">
             <a:extLst>
               <a:ext uri="{FF2B5EF4-FFF2-40B4-BE49-F238E27FC236}">
-                <a16:creationId xmlns:a16="http://schemas.microsoft.com/office/drawing/2014/main" id="{FE80CABC-E895-BD17-3E2D-4D5210905193}"/>
+                <a16:creationId xmlns:a16="http://schemas.microsoft.com/office/drawing/2014/main" id="{0023BF4C-2288-5503-99BD-0C59657DDDC4}"/>
               </a:ext>
             </a:extLst>
           </p:cNvPr>
@@ -7549,7 +7549,7 @@
           <p:cNvPr id="15" name="grid-v-704">
             <a:extLst>
               <a:ext uri="{FF2B5EF4-FFF2-40B4-BE49-F238E27FC236}">
-                <a16:creationId xmlns:a16="http://schemas.microsoft.com/office/drawing/2014/main" id="{84CDABF7-839A-E657-ECBD-8BEEF811F31E}"/>
+                <a16:creationId xmlns:a16="http://schemas.microsoft.com/office/drawing/2014/main" id="{954C131A-3451-4C32-6A6C-51883C2AC19B}"/>
               </a:ext>
             </a:extLst>
           </p:cNvPr>
@@ -7590,7 +7590,7 @@
           <p:cNvPr id="16" name="grid-v-768">
             <a:extLst>
               <a:ext uri="{FF2B5EF4-FFF2-40B4-BE49-F238E27FC236}">
-                <a16:creationId xmlns:a16="http://schemas.microsoft.com/office/drawing/2014/main" id="{72A140B4-6332-AB24-D849-769DB59F39BD}"/>
+                <a16:creationId xmlns:a16="http://schemas.microsoft.com/office/drawing/2014/main" id="{68DDDA07-796F-7421-8021-76B369D94FE5}"/>
               </a:ext>
             </a:extLst>
           </p:cNvPr>
@@ -7631,7 +7631,7 @@
           <p:cNvPr id="17" name="grid-v-832">
             <a:extLst>
               <a:ext uri="{FF2B5EF4-FFF2-40B4-BE49-F238E27FC236}">
-                <a16:creationId xmlns:a16="http://schemas.microsoft.com/office/drawing/2014/main" id="{D59B3C0D-ABD2-7884-5FDE-A2165BBA345E}"/>
+                <a16:creationId xmlns:a16="http://schemas.microsoft.com/office/drawing/2014/main" id="{9EA9A4EC-589B-47DF-8372-BAE82DF5B31D}"/>
               </a:ext>
             </a:extLst>
           </p:cNvPr>
@@ -7672,7 +7672,7 @@
           <p:cNvPr id="18" name="grid-v-896">
             <a:extLst>
               <a:ext uri="{FF2B5EF4-FFF2-40B4-BE49-F238E27FC236}">
-                <a16:creationId xmlns:a16="http://schemas.microsoft.com/office/drawing/2014/main" id="{25F55B05-6641-8ED0-F2EC-040E2238D669}"/>
+                <a16:creationId xmlns:a16="http://schemas.microsoft.com/office/drawing/2014/main" id="{60045718-982C-530B-A648-8E99958F5345}"/>
               </a:ext>
             </a:extLst>
           </p:cNvPr>
@@ -7713,7 +7713,7 @@
           <p:cNvPr id="19" name="grid-v-960">
             <a:extLst>
               <a:ext uri="{FF2B5EF4-FFF2-40B4-BE49-F238E27FC236}">
-                <a16:creationId xmlns:a16="http://schemas.microsoft.com/office/drawing/2014/main" id="{005ADD99-6C40-B937-D5F0-7CFC6914D38A}"/>
+                <a16:creationId xmlns:a16="http://schemas.microsoft.com/office/drawing/2014/main" id="{5B681E9D-C0BE-C2BB-02CB-07DF298FD1FE}"/>
               </a:ext>
             </a:extLst>
           </p:cNvPr>
@@ -7754,7 +7754,7 @@
           <p:cNvPr id="20" name="grid-h-0">
             <a:extLst>
               <a:ext uri="{FF2B5EF4-FFF2-40B4-BE49-F238E27FC236}">
-                <a16:creationId xmlns:a16="http://schemas.microsoft.com/office/drawing/2014/main" id="{1A1A4006-94C0-E9FB-D5A5-502F3691EA92}"/>
+                <a16:creationId xmlns:a16="http://schemas.microsoft.com/office/drawing/2014/main" id="{7F0171F2-B632-6092-BDE5-2633547D9F54}"/>
               </a:ext>
             </a:extLst>
           </p:cNvPr>
@@ -7795,7 +7795,7 @@
           <p:cNvPr id="21" name="grid-h-64">
             <a:extLst>
               <a:ext uri="{FF2B5EF4-FFF2-40B4-BE49-F238E27FC236}">
-                <a16:creationId xmlns:a16="http://schemas.microsoft.com/office/drawing/2014/main" id="{A335B8DE-989E-BAFC-B7DF-70C9313F59B6}"/>
+                <a16:creationId xmlns:a16="http://schemas.microsoft.com/office/drawing/2014/main" id="{480C93BD-5648-8BC8-72D7-66C9C74206B1}"/>
               </a:ext>
             </a:extLst>
           </p:cNvPr>
@@ -7836,7 +7836,7 @@
           <p:cNvPr id="22" name="grid-h-128">
             <a:extLst>
               <a:ext uri="{FF2B5EF4-FFF2-40B4-BE49-F238E27FC236}">
-                <a16:creationId xmlns:a16="http://schemas.microsoft.com/office/drawing/2014/main" id="{9BD46EE7-1DB9-8D0B-C053-FFF633F7D33E}"/>
+                <a16:creationId xmlns:a16="http://schemas.microsoft.com/office/drawing/2014/main" id="{BA55D9B1-6996-D6A9-37BF-9307613F3F54}"/>
               </a:ext>
             </a:extLst>
           </p:cNvPr>
@@ -7877,7 +7877,7 @@
           <p:cNvPr id="23" name="grid-h-192">
             <a:extLst>
               <a:ext uri="{FF2B5EF4-FFF2-40B4-BE49-F238E27FC236}">
-                <a16:creationId xmlns:a16="http://schemas.microsoft.com/office/drawing/2014/main" id="{E705AB2A-184D-8B04-7E59-748E0E385DBC}"/>
+                <a16:creationId xmlns:a16="http://schemas.microsoft.com/office/drawing/2014/main" id="{9993EC67-F560-6F55-5947-21F51B6BC613}"/>
               </a:ext>
             </a:extLst>
           </p:cNvPr>
@@ -7918,7 +7918,7 @@
           <p:cNvPr id="24" name="grid-h-256">
             <a:extLst>
               <a:ext uri="{FF2B5EF4-FFF2-40B4-BE49-F238E27FC236}">
-                <a16:creationId xmlns:a16="http://schemas.microsoft.com/office/drawing/2014/main" id="{5D072CCE-F209-5126-D74A-821B7E218768}"/>
+                <a16:creationId xmlns:a16="http://schemas.microsoft.com/office/drawing/2014/main" id="{6E18E62A-9E23-4777-614B-91F440137E10}"/>
               </a:ext>
             </a:extLst>
           </p:cNvPr>
@@ -7959,7 +7959,7 @@
           <p:cNvPr id="25" name="grid-h-320">
             <a:extLst>
               <a:ext uri="{FF2B5EF4-FFF2-40B4-BE49-F238E27FC236}">
-                <a16:creationId xmlns:a16="http://schemas.microsoft.com/office/drawing/2014/main" id="{F7E5CA1D-A665-0645-55B1-1F32795FDC8D}"/>
+                <a16:creationId xmlns:a16="http://schemas.microsoft.com/office/drawing/2014/main" id="{A6FCF3CF-23CA-7C37-45D2-A4789EFFC55F}"/>
               </a:ext>
             </a:extLst>
           </p:cNvPr>
@@ -8000,7 +8000,7 @@
           <p:cNvPr id="26" name="grid-h-384">
             <a:extLst>
               <a:ext uri="{FF2B5EF4-FFF2-40B4-BE49-F238E27FC236}">
-                <a16:creationId xmlns:a16="http://schemas.microsoft.com/office/drawing/2014/main" id="{7373089F-8CDA-490F-1310-2CD3D0AC39D3}"/>
+                <a16:creationId xmlns:a16="http://schemas.microsoft.com/office/drawing/2014/main" id="{6A763F31-D22B-53D6-A2F8-3CBDE8E345A3}"/>
               </a:ext>
             </a:extLst>
           </p:cNvPr>
@@ -8041,7 +8041,7 @@
           <p:cNvPr id="27" name="grid-h-448">
             <a:extLst>
               <a:ext uri="{FF2B5EF4-FFF2-40B4-BE49-F238E27FC236}">
-                <a16:creationId xmlns:a16="http://schemas.microsoft.com/office/drawing/2014/main" id="{2955199D-4303-33BC-30A5-9919F9960A22}"/>
+                <a16:creationId xmlns:a16="http://schemas.microsoft.com/office/drawing/2014/main" id="{0ACD4B65-B75A-2C64-BF2A-A26F73495BF0}"/>
               </a:ext>
             </a:extLst>
           </p:cNvPr>
@@ -8082,7 +8082,7 @@
           <p:cNvPr id="28" name="grid-h-512">
             <a:extLst>
               <a:ext uri="{FF2B5EF4-FFF2-40B4-BE49-F238E27FC236}">
-                <a16:creationId xmlns:a16="http://schemas.microsoft.com/office/drawing/2014/main" id="{853C27D9-F5E3-3848-55BB-54BF294D900E}"/>
+                <a16:creationId xmlns:a16="http://schemas.microsoft.com/office/drawing/2014/main" id="{285CC7B6-659E-09D7-2283-07ADA5B3D1CB}"/>
               </a:ext>
             </a:extLst>
           </p:cNvPr>
@@ -8123,7 +8123,7 @@
           <p:cNvPr id="29" name="page-num">
             <a:extLst>
               <a:ext uri="{FF2B5EF4-FFF2-40B4-BE49-F238E27FC236}">
-                <a16:creationId xmlns:a16="http://schemas.microsoft.com/office/drawing/2014/main" id="{F50D5A4B-D8FC-5F95-97F0-698F7D818A3C}"/>
+                <a16:creationId xmlns:a16="http://schemas.microsoft.com/office/drawing/2014/main" id="{BE76BEB4-7596-EAAA-9278-ED1BA3211FDA}"/>
               </a:ext>
             </a:extLst>
           </p:cNvPr>
@@ -8169,7 +8169,7 @@
           <p:cNvPr id="30" name="section-label">
             <a:extLst>
               <a:ext uri="{FF2B5EF4-FFF2-40B4-BE49-F238E27FC236}">
-                <a16:creationId xmlns:a16="http://schemas.microsoft.com/office/drawing/2014/main" id="{49004B7A-65CF-08BB-8C57-6A6C17EFF4EC}"/>
+                <a16:creationId xmlns:a16="http://schemas.microsoft.com/office/drawing/2014/main" id="{8E4903B7-706B-F396-DEE6-17CBDF77E8F6}"/>
               </a:ext>
             </a:extLst>
           </p:cNvPr>
@@ -8215,7 +8215,7 @@
           <p:cNvPr id="31" name="title">
             <a:extLst>
               <a:ext uri="{FF2B5EF4-FFF2-40B4-BE49-F238E27FC236}">
-                <a16:creationId xmlns:a16="http://schemas.microsoft.com/office/drawing/2014/main" id="{47F79EE4-1291-00FF-8550-2BF80A69B9F3}"/>
+                <a16:creationId xmlns:a16="http://schemas.microsoft.com/office/drawing/2014/main" id="{F3A0CCE8-CDD2-70D8-B2FD-278E513BB1F2}"/>
               </a:ext>
             </a:extLst>
           </p:cNvPr>
@@ -8261,7 +8261,7 @@
           <p:cNvPr id="32" name="subtitle">
             <a:extLst>
               <a:ext uri="{FF2B5EF4-FFF2-40B4-BE49-F238E27FC236}">
-                <a16:creationId xmlns:a16="http://schemas.microsoft.com/office/drawing/2014/main" id="{12D3A77D-0413-4E43-C72F-C8E759D9AD8C}"/>
+                <a16:creationId xmlns:a16="http://schemas.microsoft.com/office/drawing/2014/main" id="{E4B4D7C1-EC21-031D-3E4A-C68705B27F7A}"/>
               </a:ext>
             </a:extLst>
           </p:cNvPr>
@@ -8307,7 +8307,7 @@
           <p:cNvPr id="33" name="shot-frame">
             <a:extLst>
               <a:ext uri="{FF2B5EF4-FFF2-40B4-BE49-F238E27FC236}">
-                <a16:creationId xmlns:a16="http://schemas.microsoft.com/office/drawing/2014/main" id="{F7A63C05-51A6-19C7-B30A-C12D25D6CFAC}"/>
+                <a16:creationId xmlns:a16="http://schemas.microsoft.com/office/drawing/2014/main" id="{6835D949-A5DF-866E-4B0F-4700066ACA66}"/>
               </a:ext>
             </a:extLst>
           </p:cNvPr>
@@ -8361,7 +8361,7 @@
           <p:cNvPr id="35" name="homepage-shot">
             <a:extLst>
               <a:ext uri="{FF2B5EF4-FFF2-40B4-BE49-F238E27FC236}">
-                <a16:creationId xmlns:a16="http://schemas.microsoft.com/office/drawing/2014/main" id="{03B70C54-297E-A481-B842-BF857822FA4D}"/>
+                <a16:creationId xmlns:a16="http://schemas.microsoft.com/office/drawing/2014/main" id="{E4112902-D4D2-D147-B7C0-D2CB704EA99A}"/>
               </a:ext>
             </a:extLst>
           </p:cNvPr>
@@ -8384,8 +8384,8 @@
         </p:blipFill>
         <p:spPr>
           <a:xfrm>
-            <a:off x="1828154" y="2006600"/>
-            <a:ext cx="5462291" cy="3098800"/>
+            <a:off x="914400" y="2274277"/>
+            <a:ext cx="7289800" cy="2563446"/>
           </a:xfrm>
           <a:prstGeom prst="rect">
             <a:avLst/>
@@ -8397,7 +8397,7 @@
           <p:cNvPr id="36" name="route">
             <a:extLst>
               <a:ext uri="{FF2B5EF4-FFF2-40B4-BE49-F238E27FC236}">
-                <a16:creationId xmlns:a16="http://schemas.microsoft.com/office/drawing/2014/main" id="{11509AC9-38FC-9B17-7B6F-B65B79477674}"/>
+                <a16:creationId xmlns:a16="http://schemas.microsoft.com/office/drawing/2014/main" id="{85A4F43F-C534-4C46-CDCA-B841DBA1236F}"/>
               </a:ext>
             </a:extLst>
           </p:cNvPr>
@@ -8451,7 +8451,7 @@
           <p:cNvPr id="37" name="route-title">
             <a:extLst>
               <a:ext uri="{FF2B5EF4-FFF2-40B4-BE49-F238E27FC236}">
-                <a16:creationId xmlns:a16="http://schemas.microsoft.com/office/drawing/2014/main" id="{C77F3F89-920E-F763-95ED-AAC3B17265E0}"/>
+                <a16:creationId xmlns:a16="http://schemas.microsoft.com/office/drawing/2014/main" id="{733879F4-428E-D09B-D651-0BDC2F2C8785}"/>
               </a:ext>
             </a:extLst>
           </p:cNvPr>
@@ -8497,7 +8497,7 @@
           <p:cNvPr id="38" name="route-item-0">
             <a:extLst>
               <a:ext uri="{FF2B5EF4-FFF2-40B4-BE49-F238E27FC236}">
-                <a16:creationId xmlns:a16="http://schemas.microsoft.com/office/drawing/2014/main" id="{47438F2B-35ED-7553-5AE5-CB93B9CCF83A}"/>
+                <a16:creationId xmlns:a16="http://schemas.microsoft.com/office/drawing/2014/main" id="{D17F3371-B564-55AE-96F3-FFEC134DD189}"/>
               </a:ext>
             </a:extLst>
           </p:cNvPr>
@@ -8543,7 +8543,7 @@
           <p:cNvPr id="39" name="route-item-1">
             <a:extLst>
               <a:ext uri="{FF2B5EF4-FFF2-40B4-BE49-F238E27FC236}">
-                <a16:creationId xmlns:a16="http://schemas.microsoft.com/office/drawing/2014/main" id="{3A981AC7-717E-1A1C-3809-2F8D5C851A03}"/>
+                <a16:creationId xmlns:a16="http://schemas.microsoft.com/office/drawing/2014/main" id="{41D4D270-CC00-40F1-EE17-97D070AF9782}"/>
               </a:ext>
             </a:extLst>
           </p:cNvPr>
@@ -8589,7 +8589,7 @@
           <p:cNvPr id="40" name="route-item-2">
             <a:extLst>
               <a:ext uri="{FF2B5EF4-FFF2-40B4-BE49-F238E27FC236}">
-                <a16:creationId xmlns:a16="http://schemas.microsoft.com/office/drawing/2014/main" id="{CDFA18A3-8841-AA70-7510-0B84A3121A45}"/>
+                <a16:creationId xmlns:a16="http://schemas.microsoft.com/office/drawing/2014/main" id="{A80F3F04-B023-74CE-50DE-C797E500F769}"/>
               </a:ext>
             </a:extLst>
           </p:cNvPr>
@@ -8635,7 +8635,7 @@
           <p:cNvPr id="41" name="route-item-3">
             <a:extLst>
               <a:ext uri="{FF2B5EF4-FFF2-40B4-BE49-F238E27FC236}">
-                <a16:creationId xmlns:a16="http://schemas.microsoft.com/office/drawing/2014/main" id="{B511F842-7A07-7A78-1B9A-9AED9C437F22}"/>
+                <a16:creationId xmlns:a16="http://schemas.microsoft.com/office/drawing/2014/main" id="{70802F1B-EFE2-EA50-5D0A-9B8ADEAAE4FA}"/>
               </a:ext>
             </a:extLst>
           </p:cNvPr>
@@ -8681,7 +8681,7 @@
           <p:cNvPr id="42" name="route-item-4">
             <a:extLst>
               <a:ext uri="{FF2B5EF4-FFF2-40B4-BE49-F238E27FC236}">
-                <a16:creationId xmlns:a16="http://schemas.microsoft.com/office/drawing/2014/main" id="{42F1B28A-7734-BF27-5919-7907E65EBAC2}"/>
+                <a16:creationId xmlns:a16="http://schemas.microsoft.com/office/drawing/2014/main" id="{30CCCA7C-7441-26A0-16FC-4A62CADDF6D5}"/>
               </a:ext>
             </a:extLst>
           </p:cNvPr>
@@ -8728,7 +8728,7 @@
             <a:hlinkClick r:id="rId4"/>
             <a:extLst>
               <a:ext uri="{FF2B5EF4-FFF2-40B4-BE49-F238E27FC236}">
-                <a16:creationId xmlns:a16="http://schemas.microsoft.com/office/drawing/2014/main" id="{6D043238-F663-F0E5-85D9-8F23D33E2A30}"/>
+                <a16:creationId xmlns:a16="http://schemas.microsoft.com/office/drawing/2014/main" id="{97455876-8DD9-7D6C-82C1-4C50CFDE47E6}"/>
               </a:ext>
             </a:extLst>
           </p:cNvPr>
@@ -8765,7 +8765,7 @@
             <a:hlinkClick r:id="rId4"/>
             <a:extLst>
               <a:ext uri="{FF2B5EF4-FFF2-40B4-BE49-F238E27FC236}">
-                <a16:creationId xmlns:a16="http://schemas.microsoft.com/office/drawing/2014/main" id="{A90355BE-AEC6-A58F-024E-324145AAAA3F}"/>
+                <a16:creationId xmlns:a16="http://schemas.microsoft.com/office/drawing/2014/main" id="{B3EACD5D-4B64-8A7F-0525-D2A1095CCDF3}"/>
               </a:ext>
             </a:extLst>
           </p:cNvPr>
@@ -8833,7 +8833,7 @@
           <p:cNvPr id="47" name="图片 46">
             <a:extLst>
               <a:ext uri="{FF2B5EF4-FFF2-40B4-BE49-F238E27FC236}">
-                <a16:creationId xmlns:a16="http://schemas.microsoft.com/office/drawing/2014/main" id="{9861E80D-9976-49D1-1B40-C80B4643E8A2}"/>
+                <a16:creationId xmlns:a16="http://schemas.microsoft.com/office/drawing/2014/main" id="{A49FD369-93D7-492C-3F17-063C9CC32346}"/>
               </a:ext>
             </a:extLst>
           </p:cNvPr>
@@ -8867,7 +8867,7 @@
     </p:spTree>
     <p:extLst>
       <p:ext uri="{BB962C8B-B14F-4D97-AF65-F5344CB8AC3E}">
-        <p14:creationId xmlns:p14="http://schemas.microsoft.com/office/powerpoint/2010/main" val="1769023735"/>
+        <p14:creationId xmlns:p14="http://schemas.microsoft.com/office/powerpoint/2010/main" val="511349850"/>
       </p:ext>
     </p:extLst>
   </p:cSld>
@@ -8911,7 +8911,7 @@
           <p:cNvPr id="2" name="page-bg">
             <a:extLst>
               <a:ext uri="{FF2B5EF4-FFF2-40B4-BE49-F238E27FC236}">
-                <a16:creationId xmlns:a16="http://schemas.microsoft.com/office/drawing/2014/main" id="{11B15CCC-323E-5230-2C3A-7F71F071F6E3}"/>
+                <a16:creationId xmlns:a16="http://schemas.microsoft.com/office/drawing/2014/main" id="{149B7A56-3CE4-0DB2-7959-8C4E301146FE}"/>
               </a:ext>
             </a:extLst>
           </p:cNvPr>
@@ -8972,7 +8972,7 @@
           <p:cNvPr id="3" name="left-rail">
             <a:extLst>
               <a:ext uri="{FF2B5EF4-FFF2-40B4-BE49-F238E27FC236}">
-                <a16:creationId xmlns:a16="http://schemas.microsoft.com/office/drawing/2014/main" id="{54D0089B-1188-F793-DB27-C9F0A2217F28}"/>
+                <a16:creationId xmlns:a16="http://schemas.microsoft.com/office/drawing/2014/main" id="{E668E972-957D-F47A-4E81-BAB453C91C5E}"/>
               </a:ext>
             </a:extLst>
           </p:cNvPr>
@@ -9033,7 +9033,7 @@
           <p:cNvPr id="4" name="top-line">
             <a:extLst>
               <a:ext uri="{FF2B5EF4-FFF2-40B4-BE49-F238E27FC236}">
-                <a16:creationId xmlns:a16="http://schemas.microsoft.com/office/drawing/2014/main" id="{21994D0E-71C7-BF96-9DF3-2FC68120C40A}"/>
+                <a16:creationId xmlns:a16="http://schemas.microsoft.com/office/drawing/2014/main" id="{5007445A-5C7F-4807-68A4-0E928A7C92BB}"/>
               </a:ext>
             </a:extLst>
           </p:cNvPr>
@@ -9074,7 +9074,7 @@
           <p:cNvPr id="5" name="footer-left">
             <a:extLst>
               <a:ext uri="{FF2B5EF4-FFF2-40B4-BE49-F238E27FC236}">
-                <a16:creationId xmlns:a16="http://schemas.microsoft.com/office/drawing/2014/main" id="{9887996E-070B-50FA-DB7D-D01CBF117EEF}"/>
+                <a16:creationId xmlns:a16="http://schemas.microsoft.com/office/drawing/2014/main" id="{F08B4FFB-FBCF-7389-7F6E-D57AD5E43C53}"/>
               </a:ext>
             </a:extLst>
           </p:cNvPr>
@@ -9120,7 +9120,7 @@
           <p:cNvPr id="6" name="footer-mid">
             <a:extLst>
               <a:ext uri="{FF2B5EF4-FFF2-40B4-BE49-F238E27FC236}">
-                <a16:creationId xmlns:a16="http://schemas.microsoft.com/office/drawing/2014/main" id="{2FBA54BC-B88B-DE07-A913-7DE047E15EC6}"/>
+                <a16:creationId xmlns:a16="http://schemas.microsoft.com/office/drawing/2014/main" id="{FFFF76FC-CC6B-AC7A-5785-4D407ADE0943}"/>
               </a:ext>
             </a:extLst>
           </p:cNvPr>
@@ -9166,7 +9166,7 @@
           <p:cNvPr id="7" name="page-num">
             <a:extLst>
               <a:ext uri="{FF2B5EF4-FFF2-40B4-BE49-F238E27FC236}">
-                <a16:creationId xmlns:a16="http://schemas.microsoft.com/office/drawing/2014/main" id="{462093CF-B6E1-2BA9-23A9-2C5C71387A0D}"/>
+                <a16:creationId xmlns:a16="http://schemas.microsoft.com/office/drawing/2014/main" id="{954B71ED-3F62-5162-5317-7ED408423A05}"/>
               </a:ext>
             </a:extLst>
           </p:cNvPr>
@@ -9212,7 +9212,7 @@
           <p:cNvPr id="8" name="section-label">
             <a:extLst>
               <a:ext uri="{FF2B5EF4-FFF2-40B4-BE49-F238E27FC236}">
-                <a16:creationId xmlns:a16="http://schemas.microsoft.com/office/drawing/2014/main" id="{1261EA0A-CBAC-17B7-645E-DB9EF757E0F7}"/>
+                <a16:creationId xmlns:a16="http://schemas.microsoft.com/office/drawing/2014/main" id="{6468339F-1BEA-2DE0-3BF7-80A47394FF65}"/>
               </a:ext>
             </a:extLst>
           </p:cNvPr>
@@ -9258,7 +9258,7 @@
           <p:cNvPr id="10" name="图片 9">
             <a:extLst>
               <a:ext uri="{FF2B5EF4-FFF2-40B4-BE49-F238E27FC236}">
-                <a16:creationId xmlns:a16="http://schemas.microsoft.com/office/drawing/2014/main" id="{CE59FBC6-D837-76A3-9B64-EF030CCEC6C5}"/>
+                <a16:creationId xmlns:a16="http://schemas.microsoft.com/office/drawing/2014/main" id="{8BC574F9-2051-5F16-7A59-2FAA21237E70}"/>
               </a:ext>
             </a:extLst>
           </p:cNvPr>
@@ -9294,7 +9294,7 @@
           <p:cNvPr id="11" name="title">
             <a:extLst>
               <a:ext uri="{FF2B5EF4-FFF2-40B4-BE49-F238E27FC236}">
-                <a16:creationId xmlns:a16="http://schemas.microsoft.com/office/drawing/2014/main" id="{84A5B45B-0A8D-3B2F-C6CF-928B27F533A3}"/>
+                <a16:creationId xmlns:a16="http://schemas.microsoft.com/office/drawing/2014/main" id="{8E9E4AD9-DDFC-AEE5-7BFC-C215AF3A26E8}"/>
               </a:ext>
             </a:extLst>
           </p:cNvPr>
@@ -9340,7 +9340,7 @@
           <p:cNvPr id="12" name="subtitle">
             <a:extLst>
               <a:ext uri="{FF2B5EF4-FFF2-40B4-BE49-F238E27FC236}">
-                <a16:creationId xmlns:a16="http://schemas.microsoft.com/office/drawing/2014/main" id="{ECEB3E7B-C312-7C02-EA21-005F728B8510}"/>
+                <a16:creationId xmlns:a16="http://schemas.microsoft.com/office/drawing/2014/main" id="{341BE764-EA63-76D4-37B1-3407D14E7F29}"/>
               </a:ext>
             </a:extLst>
           </p:cNvPr>
@@ -9386,7 +9386,7 @@
           <p:cNvPr id="13" name="terminal">
             <a:extLst>
               <a:ext uri="{FF2B5EF4-FFF2-40B4-BE49-F238E27FC236}">
-                <a16:creationId xmlns:a16="http://schemas.microsoft.com/office/drawing/2014/main" id="{C987EEDA-5237-2614-FFDC-A64DC89075BE}"/>
+                <a16:creationId xmlns:a16="http://schemas.microsoft.com/office/drawing/2014/main" id="{5E1EAE36-6E0A-3D8E-313E-541096873A71}"/>
               </a:ext>
             </a:extLst>
           </p:cNvPr>
@@ -9447,7 +9447,7 @@
           <p:cNvPr id="14" name="term-title">
             <a:extLst>
               <a:ext uri="{FF2B5EF4-FFF2-40B4-BE49-F238E27FC236}">
-                <a16:creationId xmlns:a16="http://schemas.microsoft.com/office/drawing/2014/main" id="{979C31E9-3239-DBB7-480C-598E8DBCE6A3}"/>
+                <a16:creationId xmlns:a16="http://schemas.microsoft.com/office/drawing/2014/main" id="{C42BA89D-BE7B-2049-DCD0-3405DC135636}"/>
               </a:ext>
             </a:extLst>
           </p:cNvPr>
@@ -9493,7 +9493,7 @@
           <p:cNvPr id="15" name="term-rule">
             <a:extLst>
               <a:ext uri="{FF2B5EF4-FFF2-40B4-BE49-F238E27FC236}">
-                <a16:creationId xmlns:a16="http://schemas.microsoft.com/office/drawing/2014/main" id="{6883874E-F7AE-3B36-60F2-04C53AFCB92A}"/>
+                <a16:creationId xmlns:a16="http://schemas.microsoft.com/office/drawing/2014/main" id="{28C5F818-99FD-85D5-C40E-49C9D682BAF0}"/>
               </a:ext>
             </a:extLst>
           </p:cNvPr>
@@ -9534,7 +9534,7 @@
           <p:cNvPr id="16" name="terminal-text">
             <a:extLst>
               <a:ext uri="{FF2B5EF4-FFF2-40B4-BE49-F238E27FC236}">
-                <a16:creationId xmlns:a16="http://schemas.microsoft.com/office/drawing/2014/main" id="{CE22532E-F825-235D-257E-61B2EDB324D0}"/>
+                <a16:creationId xmlns:a16="http://schemas.microsoft.com/office/drawing/2014/main" id="{9E3D0E4B-1885-3CC9-6C33-8C1406D6B75F}"/>
               </a:ext>
             </a:extLst>
           </p:cNvPr>
@@ -9585,7 +9585,7 @@
           <p:cNvPr id="17" name="check-0">
             <a:extLst>
               <a:ext uri="{FF2B5EF4-FFF2-40B4-BE49-F238E27FC236}">
-                <a16:creationId xmlns:a16="http://schemas.microsoft.com/office/drawing/2014/main" id="{F7BC8EAA-3D49-DE4F-9437-F0CFB6B255AD}"/>
+                <a16:creationId xmlns:a16="http://schemas.microsoft.com/office/drawing/2014/main" id="{B12B013A-6CB4-A92B-973F-4A7565ADA88D}"/>
               </a:ext>
             </a:extLst>
           </p:cNvPr>
@@ -9639,7 +9639,7 @@
           <p:cNvPr id="18" name="check-title-0">
             <a:extLst>
               <a:ext uri="{FF2B5EF4-FFF2-40B4-BE49-F238E27FC236}">
-                <a16:creationId xmlns:a16="http://schemas.microsoft.com/office/drawing/2014/main" id="{D55779F6-690D-9CF7-FD7D-762F9CF7D156}"/>
+                <a16:creationId xmlns:a16="http://schemas.microsoft.com/office/drawing/2014/main" id="{0608C139-D89B-99EE-11DC-913F0B18A1A9}"/>
               </a:ext>
             </a:extLst>
           </p:cNvPr>
@@ -9685,7 +9685,7 @@
           <p:cNvPr id="19" name="check-sub-0">
             <a:extLst>
               <a:ext uri="{FF2B5EF4-FFF2-40B4-BE49-F238E27FC236}">
-                <a16:creationId xmlns:a16="http://schemas.microsoft.com/office/drawing/2014/main" id="{41FA5A7B-8D88-94E8-F136-A0A296ABE110}"/>
+                <a16:creationId xmlns:a16="http://schemas.microsoft.com/office/drawing/2014/main" id="{2D45CC22-EDC7-88F1-0BEF-DAEA8C2C6BC7}"/>
               </a:ext>
             </a:extLst>
           </p:cNvPr>
@@ -9731,7 +9731,7 @@
           <p:cNvPr id="20" name="check-1">
             <a:extLst>
               <a:ext uri="{FF2B5EF4-FFF2-40B4-BE49-F238E27FC236}">
-                <a16:creationId xmlns:a16="http://schemas.microsoft.com/office/drawing/2014/main" id="{B7101BAB-9CB4-D9B0-1846-75E149F84974}"/>
+                <a16:creationId xmlns:a16="http://schemas.microsoft.com/office/drawing/2014/main" id="{30D2C63E-57C3-6ECF-88A8-A4472B8C3B02}"/>
               </a:ext>
             </a:extLst>
           </p:cNvPr>
@@ -9785,7 +9785,7 @@
           <p:cNvPr id="21" name="check-title-1">
             <a:extLst>
               <a:ext uri="{FF2B5EF4-FFF2-40B4-BE49-F238E27FC236}">
-                <a16:creationId xmlns:a16="http://schemas.microsoft.com/office/drawing/2014/main" id="{E786A479-6A5F-4139-4C16-0508A0EBB417}"/>
+                <a16:creationId xmlns:a16="http://schemas.microsoft.com/office/drawing/2014/main" id="{A8B76122-0E0C-D852-7855-E9764BFC993C}"/>
               </a:ext>
             </a:extLst>
           </p:cNvPr>
@@ -9831,7 +9831,7 @@
           <p:cNvPr id="22" name="check-sub-1">
             <a:extLst>
               <a:ext uri="{FF2B5EF4-FFF2-40B4-BE49-F238E27FC236}">
-                <a16:creationId xmlns:a16="http://schemas.microsoft.com/office/drawing/2014/main" id="{68561619-0E00-8A9C-3B2C-0CE87C422A40}"/>
+                <a16:creationId xmlns:a16="http://schemas.microsoft.com/office/drawing/2014/main" id="{7538C890-E6C1-F777-7055-85EB4FC1A595}"/>
               </a:ext>
             </a:extLst>
           </p:cNvPr>
@@ -9877,7 +9877,7 @@
           <p:cNvPr id="23" name="check-2">
             <a:extLst>
               <a:ext uri="{FF2B5EF4-FFF2-40B4-BE49-F238E27FC236}">
-                <a16:creationId xmlns:a16="http://schemas.microsoft.com/office/drawing/2014/main" id="{80D203F5-3318-7ECA-9921-BF9EB0AE35B4}"/>
+                <a16:creationId xmlns:a16="http://schemas.microsoft.com/office/drawing/2014/main" id="{AE638425-FE85-5466-A2E7-3B8D074F4AE5}"/>
               </a:ext>
             </a:extLst>
           </p:cNvPr>
@@ -9931,7 +9931,7 @@
           <p:cNvPr id="24" name="check-title-2">
             <a:extLst>
               <a:ext uri="{FF2B5EF4-FFF2-40B4-BE49-F238E27FC236}">
-                <a16:creationId xmlns:a16="http://schemas.microsoft.com/office/drawing/2014/main" id="{0EA6A93F-514C-9BC4-F173-25D19B11DAEF}"/>
+                <a16:creationId xmlns:a16="http://schemas.microsoft.com/office/drawing/2014/main" id="{6249CC81-749C-C631-2D5B-2F8A849429C4}"/>
               </a:ext>
             </a:extLst>
           </p:cNvPr>
@@ -9977,7 +9977,7 @@
           <p:cNvPr id="25" name="check-sub-2">
             <a:extLst>
               <a:ext uri="{FF2B5EF4-FFF2-40B4-BE49-F238E27FC236}">
-                <a16:creationId xmlns:a16="http://schemas.microsoft.com/office/drawing/2014/main" id="{88A86931-D1C1-75BA-626E-D004BE05EEFC}"/>
+                <a16:creationId xmlns:a16="http://schemas.microsoft.com/office/drawing/2014/main" id="{62E773F7-7FAC-7C71-7305-64D168B19DB0}"/>
               </a:ext>
             </a:extLst>
           </p:cNvPr>
@@ -10024,7 +10024,7 @@
             <a:hlinkClick r:id="rId4"/>
             <a:extLst>
               <a:ext uri="{FF2B5EF4-FFF2-40B4-BE49-F238E27FC236}">
-                <a16:creationId xmlns:a16="http://schemas.microsoft.com/office/drawing/2014/main" id="{05C3427F-A812-B139-ABBB-02240C5823BB}"/>
+                <a16:creationId xmlns:a16="http://schemas.microsoft.com/office/drawing/2014/main" id="{BAF2CB0B-4EC7-E57D-889B-E5306DDC2178}"/>
               </a:ext>
             </a:extLst>
           </p:cNvPr>
@@ -10093,7 +10093,7 @@
             <a:hlinkClick r:id="rId5"/>
             <a:extLst>
               <a:ext uri="{FF2B5EF4-FFF2-40B4-BE49-F238E27FC236}">
-                <a16:creationId xmlns:a16="http://schemas.microsoft.com/office/drawing/2014/main" id="{0C7663B7-D8C3-6BBA-741D-D764E36B14C3}"/>
+                <a16:creationId xmlns:a16="http://schemas.microsoft.com/office/drawing/2014/main" id="{27E599D7-1D24-AC1B-F7BC-FCED251D7A72}"/>
               </a:ext>
             </a:extLst>
           </p:cNvPr>
@@ -10159,7 +10159,7 @@
     </p:spTree>
     <p:extLst>
       <p:ext uri="{BB962C8B-B14F-4D97-AF65-F5344CB8AC3E}">
-        <p14:creationId xmlns:p14="http://schemas.microsoft.com/office/powerpoint/2010/main" val="4219798619"/>
+        <p14:creationId xmlns:p14="http://schemas.microsoft.com/office/powerpoint/2010/main" val="4290647337"/>
       </p:ext>
     </p:extLst>
   </p:cSld>
@@ -10203,7 +10203,7 @@
           <p:cNvPr id="2" name="page-bg">
             <a:extLst>
               <a:ext uri="{FF2B5EF4-FFF2-40B4-BE49-F238E27FC236}">
-                <a16:creationId xmlns:a16="http://schemas.microsoft.com/office/drawing/2014/main" id="{ECF8189C-74FA-CD18-E5F4-312D10281F19}"/>
+                <a16:creationId xmlns:a16="http://schemas.microsoft.com/office/drawing/2014/main" id="{49F7C996-1553-C568-F8F5-F17AC9CB2E87}"/>
               </a:ext>
             </a:extLst>
           </p:cNvPr>
@@ -10264,7 +10264,7 @@
           <p:cNvPr id="3" name="left-rail">
             <a:extLst>
               <a:ext uri="{FF2B5EF4-FFF2-40B4-BE49-F238E27FC236}">
-                <a16:creationId xmlns:a16="http://schemas.microsoft.com/office/drawing/2014/main" id="{E34B3285-4A6C-7E1D-B42A-04B5D4CC04B8}"/>
+                <a16:creationId xmlns:a16="http://schemas.microsoft.com/office/drawing/2014/main" id="{2541D891-F12F-ACAF-88B5-DBD158458AB4}"/>
               </a:ext>
             </a:extLst>
           </p:cNvPr>
@@ -10325,7 +10325,7 @@
           <p:cNvPr id="4" name="top-line">
             <a:extLst>
               <a:ext uri="{FF2B5EF4-FFF2-40B4-BE49-F238E27FC236}">
-                <a16:creationId xmlns:a16="http://schemas.microsoft.com/office/drawing/2014/main" id="{413FA659-A380-2501-818F-BE0E4624642E}"/>
+                <a16:creationId xmlns:a16="http://schemas.microsoft.com/office/drawing/2014/main" id="{F4CE04ED-DDEA-3110-B7EE-6188131E8440}"/>
               </a:ext>
             </a:extLst>
           </p:cNvPr>
@@ -10366,7 +10366,7 @@
           <p:cNvPr id="5" name="footer-left">
             <a:extLst>
               <a:ext uri="{FF2B5EF4-FFF2-40B4-BE49-F238E27FC236}">
-                <a16:creationId xmlns:a16="http://schemas.microsoft.com/office/drawing/2014/main" id="{9343DB84-76C1-B682-32D0-40A02C404C8F}"/>
+                <a16:creationId xmlns:a16="http://schemas.microsoft.com/office/drawing/2014/main" id="{7FFD9843-50E8-8E45-B74C-54DCDC5C3001}"/>
               </a:ext>
             </a:extLst>
           </p:cNvPr>
@@ -10412,7 +10412,7 @@
           <p:cNvPr id="6" name="footer-mid">
             <a:extLst>
               <a:ext uri="{FF2B5EF4-FFF2-40B4-BE49-F238E27FC236}">
-                <a16:creationId xmlns:a16="http://schemas.microsoft.com/office/drawing/2014/main" id="{873823CD-64DE-F850-197B-6BBB492535B3}"/>
+                <a16:creationId xmlns:a16="http://schemas.microsoft.com/office/drawing/2014/main" id="{EB448A0A-438F-4CC0-8258-03AC4E6ACD44}"/>
               </a:ext>
             </a:extLst>
           </p:cNvPr>
@@ -10458,7 +10458,7 @@
           <p:cNvPr id="7" name="page-num">
             <a:extLst>
               <a:ext uri="{FF2B5EF4-FFF2-40B4-BE49-F238E27FC236}">
-                <a16:creationId xmlns:a16="http://schemas.microsoft.com/office/drawing/2014/main" id="{E43C9772-AED3-35C9-9FB1-7C5BEB87D384}"/>
+                <a16:creationId xmlns:a16="http://schemas.microsoft.com/office/drawing/2014/main" id="{A02D3649-257E-7541-3C9F-8EC88E0E445A}"/>
               </a:ext>
             </a:extLst>
           </p:cNvPr>
@@ -10504,7 +10504,7 @@
           <p:cNvPr id="8" name="section-label">
             <a:extLst>
               <a:ext uri="{FF2B5EF4-FFF2-40B4-BE49-F238E27FC236}">
-                <a16:creationId xmlns:a16="http://schemas.microsoft.com/office/drawing/2014/main" id="{C92E47F5-1815-8FEC-FEE9-97B341E41A44}"/>
+                <a16:creationId xmlns:a16="http://schemas.microsoft.com/office/drawing/2014/main" id="{04F72763-A0CD-A899-A372-ED8B1849376F}"/>
               </a:ext>
             </a:extLst>
           </p:cNvPr>
@@ -10550,7 +10550,7 @@
           <p:cNvPr id="10" name="图片 9">
             <a:extLst>
               <a:ext uri="{FF2B5EF4-FFF2-40B4-BE49-F238E27FC236}">
-                <a16:creationId xmlns:a16="http://schemas.microsoft.com/office/drawing/2014/main" id="{FD7E4671-C7B6-B702-D564-DFC729C93DDD}"/>
+                <a16:creationId xmlns:a16="http://schemas.microsoft.com/office/drawing/2014/main" id="{58DB8794-EE3A-1E81-B02F-B8408E54F454}"/>
               </a:ext>
             </a:extLst>
           </p:cNvPr>
@@ -10586,7 +10586,7 @@
           <p:cNvPr id="11" name="title">
             <a:extLst>
               <a:ext uri="{FF2B5EF4-FFF2-40B4-BE49-F238E27FC236}">
-                <a16:creationId xmlns:a16="http://schemas.microsoft.com/office/drawing/2014/main" id="{CC4C3792-B6D1-2E48-F40A-3D5CA8F8BDA1}"/>
+                <a16:creationId xmlns:a16="http://schemas.microsoft.com/office/drawing/2014/main" id="{BB8D41C1-762D-6055-29AA-D7067000BED1}"/>
               </a:ext>
             </a:extLst>
           </p:cNvPr>
@@ -10632,7 +10632,7 @@
           <p:cNvPr id="12" name="subtitle">
             <a:extLst>
               <a:ext uri="{FF2B5EF4-FFF2-40B4-BE49-F238E27FC236}">
-                <a16:creationId xmlns:a16="http://schemas.microsoft.com/office/drawing/2014/main" id="{70C5F3AD-2148-520F-98BB-FCDF4A9B53CE}"/>
+                <a16:creationId xmlns:a16="http://schemas.microsoft.com/office/drawing/2014/main" id="{7C057D71-B849-50AF-8756-7460765A8FC4}"/>
               </a:ext>
             </a:extLst>
           </p:cNvPr>
@@ -10678,7 +10678,7 @@
           <p:cNvPr id="13" name="def-row-0">
             <a:extLst>
               <a:ext uri="{FF2B5EF4-FFF2-40B4-BE49-F238E27FC236}">
-                <a16:creationId xmlns:a16="http://schemas.microsoft.com/office/drawing/2014/main" id="{CC0C9EBD-7650-DF30-E02A-04F0E5EE50EC}"/>
+                <a16:creationId xmlns:a16="http://schemas.microsoft.com/office/drawing/2014/main" id="{F854706E-EE6E-046F-0885-5EDFCD952AC1}"/>
               </a:ext>
             </a:extLst>
           </p:cNvPr>
@@ -10732,7 +10732,7 @@
           <p:cNvPr id="14" name="def-label-0">
             <a:extLst>
               <a:ext uri="{FF2B5EF4-FFF2-40B4-BE49-F238E27FC236}">
-                <a16:creationId xmlns:a16="http://schemas.microsoft.com/office/drawing/2014/main" id="{4AF61A1C-5D64-91D9-A1B4-F4232BEB2C7A}"/>
+                <a16:creationId xmlns:a16="http://schemas.microsoft.com/office/drawing/2014/main" id="{9B6F8A3D-1C17-F7A6-C661-8EEAB1E2FFFE}"/>
               </a:ext>
             </a:extLst>
           </p:cNvPr>
@@ -10778,7 +10778,7 @@
           <p:cNvPr id="15" name="def-text-0">
             <a:extLst>
               <a:ext uri="{FF2B5EF4-FFF2-40B4-BE49-F238E27FC236}">
-                <a16:creationId xmlns:a16="http://schemas.microsoft.com/office/drawing/2014/main" id="{DBED5480-A1A4-F824-FFE2-3A9E9AF64303}"/>
+                <a16:creationId xmlns:a16="http://schemas.microsoft.com/office/drawing/2014/main" id="{189BF288-0FF8-667C-734A-C57300EE96EA}"/>
               </a:ext>
             </a:extLst>
           </p:cNvPr>
@@ -10824,7 +10824,7 @@
           <p:cNvPr id="16" name="def-row-1">
             <a:extLst>
               <a:ext uri="{FF2B5EF4-FFF2-40B4-BE49-F238E27FC236}">
-                <a16:creationId xmlns:a16="http://schemas.microsoft.com/office/drawing/2014/main" id="{49576240-29F7-BDAB-716A-A9D6D2CED640}"/>
+                <a16:creationId xmlns:a16="http://schemas.microsoft.com/office/drawing/2014/main" id="{E59E43AB-061E-9D4A-B8BA-7E935BDE07DF}"/>
               </a:ext>
             </a:extLst>
           </p:cNvPr>
@@ -10878,7 +10878,7 @@
           <p:cNvPr id="17" name="def-label-1">
             <a:extLst>
               <a:ext uri="{FF2B5EF4-FFF2-40B4-BE49-F238E27FC236}">
-                <a16:creationId xmlns:a16="http://schemas.microsoft.com/office/drawing/2014/main" id="{214D8B30-9C8B-5324-E588-A8FD85982813}"/>
+                <a16:creationId xmlns:a16="http://schemas.microsoft.com/office/drawing/2014/main" id="{3D6562D1-731D-50F0-608E-5FAB2E1CB283}"/>
               </a:ext>
             </a:extLst>
           </p:cNvPr>
@@ -10924,7 +10924,7 @@
           <p:cNvPr id="18" name="def-text-1">
             <a:extLst>
               <a:ext uri="{FF2B5EF4-FFF2-40B4-BE49-F238E27FC236}">
-                <a16:creationId xmlns:a16="http://schemas.microsoft.com/office/drawing/2014/main" id="{66CCFE4F-E0CC-14DF-93F6-2F0DD5B730BF}"/>
+                <a16:creationId xmlns:a16="http://schemas.microsoft.com/office/drawing/2014/main" id="{1D13C79A-42CA-6C61-68EE-F5D1FACC098A}"/>
               </a:ext>
             </a:extLst>
           </p:cNvPr>
@@ -10970,7 +10970,7 @@
           <p:cNvPr id="19" name="def-row-2">
             <a:extLst>
               <a:ext uri="{FF2B5EF4-FFF2-40B4-BE49-F238E27FC236}">
-                <a16:creationId xmlns:a16="http://schemas.microsoft.com/office/drawing/2014/main" id="{9F5E1CC9-5544-041C-5947-7072FB316CC3}"/>
+                <a16:creationId xmlns:a16="http://schemas.microsoft.com/office/drawing/2014/main" id="{5102844A-790E-AC7B-451A-CAFC5313DC7D}"/>
               </a:ext>
             </a:extLst>
           </p:cNvPr>
@@ -11024,7 +11024,7 @@
           <p:cNvPr id="20" name="def-label-2">
             <a:extLst>
               <a:ext uri="{FF2B5EF4-FFF2-40B4-BE49-F238E27FC236}">
-                <a16:creationId xmlns:a16="http://schemas.microsoft.com/office/drawing/2014/main" id="{C5B6A4D5-673E-315C-7DD1-0611AEB16F2D}"/>
+                <a16:creationId xmlns:a16="http://schemas.microsoft.com/office/drawing/2014/main" id="{03A99EF0-6A16-5B0C-1F8B-1656BA0F63BE}"/>
               </a:ext>
             </a:extLst>
           </p:cNvPr>
@@ -11070,7 +11070,7 @@
           <p:cNvPr id="21" name="def-text-2">
             <a:extLst>
               <a:ext uri="{FF2B5EF4-FFF2-40B4-BE49-F238E27FC236}">
-                <a16:creationId xmlns:a16="http://schemas.microsoft.com/office/drawing/2014/main" id="{B1B0652B-E261-C1C4-9462-FCA350D10782}"/>
+                <a16:creationId xmlns:a16="http://schemas.microsoft.com/office/drawing/2014/main" id="{190F5BBA-01FB-4273-5DCB-8E6C8DB21A0A}"/>
               </a:ext>
             </a:extLst>
           </p:cNvPr>
@@ -11117,7 +11117,7 @@
             <a:hlinkClick r:id="rId4"/>
             <a:extLst>
               <a:ext uri="{FF2B5EF4-FFF2-40B4-BE49-F238E27FC236}">
-                <a16:creationId xmlns:a16="http://schemas.microsoft.com/office/drawing/2014/main" id="{3444E0D2-D640-DBD2-65DB-1A691B719D91}"/>
+                <a16:creationId xmlns:a16="http://schemas.microsoft.com/office/drawing/2014/main" id="{F129AB85-7CCE-521A-E742-FF9B398C6ED1}"/>
               </a:ext>
             </a:extLst>
           </p:cNvPr>
@@ -11183,7 +11183,7 @@
     </p:spTree>
     <p:extLst>
       <p:ext uri="{BB962C8B-B14F-4D97-AF65-F5344CB8AC3E}">
-        <p14:creationId xmlns:p14="http://schemas.microsoft.com/office/powerpoint/2010/main" val="972359636"/>
+        <p14:creationId xmlns:p14="http://schemas.microsoft.com/office/powerpoint/2010/main" val="3149325210"/>
       </p:ext>
     </p:extLst>
   </p:cSld>
@@ -11227,7 +11227,7 @@
           <p:cNvPr id="2" name="page-bg">
             <a:extLst>
               <a:ext uri="{FF2B5EF4-FFF2-40B4-BE49-F238E27FC236}">
-                <a16:creationId xmlns:a16="http://schemas.microsoft.com/office/drawing/2014/main" id="{83D039F4-4ADA-C041-8D1A-739B7283FDE1}"/>
+                <a16:creationId xmlns:a16="http://schemas.microsoft.com/office/drawing/2014/main" id="{B7BD3A76-1D3F-0507-A343-EF79936C2EA1}"/>
               </a:ext>
             </a:extLst>
           </p:cNvPr>
@@ -11288,7 +11288,7 @@
           <p:cNvPr id="3" name="left-rail">
             <a:extLst>
               <a:ext uri="{FF2B5EF4-FFF2-40B4-BE49-F238E27FC236}">
-                <a16:creationId xmlns:a16="http://schemas.microsoft.com/office/drawing/2014/main" id="{43330657-BD72-449B-6899-DC650B4893F6}"/>
+                <a16:creationId xmlns:a16="http://schemas.microsoft.com/office/drawing/2014/main" id="{2CA5DE6E-E8E2-4DA9-5694-6DAB2CAF1887}"/>
               </a:ext>
             </a:extLst>
           </p:cNvPr>
@@ -11349,7 +11349,7 @@
           <p:cNvPr id="4" name="top-line">
             <a:extLst>
               <a:ext uri="{FF2B5EF4-FFF2-40B4-BE49-F238E27FC236}">
-                <a16:creationId xmlns:a16="http://schemas.microsoft.com/office/drawing/2014/main" id="{63C8D4B1-F7C1-DC22-7011-86AF9F68F8EF}"/>
+                <a16:creationId xmlns:a16="http://schemas.microsoft.com/office/drawing/2014/main" id="{A6D3DC05-2A82-D451-888E-D8477E10B431}"/>
               </a:ext>
             </a:extLst>
           </p:cNvPr>
@@ -11390,7 +11390,7 @@
           <p:cNvPr id="5" name="footer-left">
             <a:extLst>
               <a:ext uri="{FF2B5EF4-FFF2-40B4-BE49-F238E27FC236}">
-                <a16:creationId xmlns:a16="http://schemas.microsoft.com/office/drawing/2014/main" id="{EA99BD44-515E-461F-2B4B-EC0BAD30BD63}"/>
+                <a16:creationId xmlns:a16="http://schemas.microsoft.com/office/drawing/2014/main" id="{F65EFB48-379E-6909-9DBB-2870A7369356}"/>
               </a:ext>
             </a:extLst>
           </p:cNvPr>
@@ -11436,7 +11436,7 @@
           <p:cNvPr id="6" name="footer-mid">
             <a:extLst>
               <a:ext uri="{FF2B5EF4-FFF2-40B4-BE49-F238E27FC236}">
-                <a16:creationId xmlns:a16="http://schemas.microsoft.com/office/drawing/2014/main" id="{EEB350D3-24ED-76DE-D126-6DD0AA04ECC3}"/>
+                <a16:creationId xmlns:a16="http://schemas.microsoft.com/office/drawing/2014/main" id="{4B873CE1-9377-8CE6-B0AC-A0F64139FBE7}"/>
               </a:ext>
             </a:extLst>
           </p:cNvPr>
@@ -11482,7 +11482,7 @@
           <p:cNvPr id="7" name="page-num">
             <a:extLst>
               <a:ext uri="{FF2B5EF4-FFF2-40B4-BE49-F238E27FC236}">
-                <a16:creationId xmlns:a16="http://schemas.microsoft.com/office/drawing/2014/main" id="{B5AC82DD-1CF0-F056-5C90-5AAA50532888}"/>
+                <a16:creationId xmlns:a16="http://schemas.microsoft.com/office/drawing/2014/main" id="{5E87621C-998F-0FEA-BFF0-41F3A88048E9}"/>
               </a:ext>
             </a:extLst>
           </p:cNvPr>
@@ -11528,7 +11528,7 @@
           <p:cNvPr id="8" name="section-label">
             <a:extLst>
               <a:ext uri="{FF2B5EF4-FFF2-40B4-BE49-F238E27FC236}">
-                <a16:creationId xmlns:a16="http://schemas.microsoft.com/office/drawing/2014/main" id="{D20CC7A6-8525-076F-E77D-C31F641CEC58}"/>
+                <a16:creationId xmlns:a16="http://schemas.microsoft.com/office/drawing/2014/main" id="{6BE22CAB-F30A-8555-E4AD-F308DEDE5F43}"/>
               </a:ext>
             </a:extLst>
           </p:cNvPr>
@@ -11574,7 +11574,7 @@
           <p:cNvPr id="10" name="图片 9">
             <a:extLst>
               <a:ext uri="{FF2B5EF4-FFF2-40B4-BE49-F238E27FC236}">
-                <a16:creationId xmlns:a16="http://schemas.microsoft.com/office/drawing/2014/main" id="{02DE87CD-3535-C5FF-A5DA-926246EB41C0}"/>
+                <a16:creationId xmlns:a16="http://schemas.microsoft.com/office/drawing/2014/main" id="{B3B8DA86-690C-720A-18EA-A4ED3A584776}"/>
               </a:ext>
             </a:extLst>
           </p:cNvPr>
@@ -11610,7 +11610,7 @@
           <p:cNvPr id="11" name="title">
             <a:extLst>
               <a:ext uri="{FF2B5EF4-FFF2-40B4-BE49-F238E27FC236}">
-                <a16:creationId xmlns:a16="http://schemas.microsoft.com/office/drawing/2014/main" id="{A288A2B0-6DBC-6D25-5307-68A2D485ED29}"/>
+                <a16:creationId xmlns:a16="http://schemas.microsoft.com/office/drawing/2014/main" id="{F15242C2-9DC2-DE1C-C84A-D8B7E1C333C8}"/>
               </a:ext>
             </a:extLst>
           </p:cNvPr>
@@ -11656,7 +11656,7 @@
           <p:cNvPr id="12" name="subtitle">
             <a:extLst>
               <a:ext uri="{FF2B5EF4-FFF2-40B4-BE49-F238E27FC236}">
-                <a16:creationId xmlns:a16="http://schemas.microsoft.com/office/drawing/2014/main" id="{413D918E-BC43-A4EE-69DA-544E5A920848}"/>
+                <a16:creationId xmlns:a16="http://schemas.microsoft.com/office/drawing/2014/main" id="{B7978C6D-8457-01D2-EBF8-41EE9185E56C}"/>
               </a:ext>
             </a:extLst>
           </p:cNvPr>
@@ -11702,7 +11702,7 @@
           <p:cNvPr id="13" name="lane-0">
             <a:extLst>
               <a:ext uri="{FF2B5EF4-FFF2-40B4-BE49-F238E27FC236}">
-                <a16:creationId xmlns:a16="http://schemas.microsoft.com/office/drawing/2014/main" id="{CD98A8A0-489C-7F92-E945-BD4077285442}"/>
+                <a16:creationId xmlns:a16="http://schemas.microsoft.com/office/drawing/2014/main" id="{DCFD73B5-8BD0-686B-6E93-FEF5F06A880E}"/>
               </a:ext>
             </a:extLst>
           </p:cNvPr>
@@ -11756,7 +11756,7 @@
           <p:cNvPr id="14" name="lane-band-0">
             <a:extLst>
               <a:ext uri="{FF2B5EF4-FFF2-40B4-BE49-F238E27FC236}">
-                <a16:creationId xmlns:a16="http://schemas.microsoft.com/office/drawing/2014/main" id="{1A3670E4-15D4-2B14-90C3-F007EABC1F51}"/>
+                <a16:creationId xmlns:a16="http://schemas.microsoft.com/office/drawing/2014/main" id="{F6E59EE3-5A41-BABC-D56E-EDB65E518E66}"/>
               </a:ext>
             </a:extLst>
           </p:cNvPr>
@@ -11810,7 +11810,7 @@
           <p:cNvPr id="15" name="lane-title-0">
             <a:extLst>
               <a:ext uri="{FF2B5EF4-FFF2-40B4-BE49-F238E27FC236}">
-                <a16:creationId xmlns:a16="http://schemas.microsoft.com/office/drawing/2014/main" id="{F6B3CC57-D7F5-2F24-58D6-6A0460650FFA}"/>
+                <a16:creationId xmlns:a16="http://schemas.microsoft.com/office/drawing/2014/main" id="{CB4FDCDB-A7AF-F2D5-51B1-F91DA7649E61}"/>
               </a:ext>
             </a:extLst>
           </p:cNvPr>
@@ -11856,7 +11856,7 @@
           <p:cNvPr id="16" name="lane-target-0">
             <a:extLst>
               <a:ext uri="{FF2B5EF4-FFF2-40B4-BE49-F238E27FC236}">
-                <a16:creationId xmlns:a16="http://schemas.microsoft.com/office/drawing/2014/main" id="{4490F5E1-7467-247D-50FB-A9E7F12BE6E5}"/>
+                <a16:creationId xmlns:a16="http://schemas.microsoft.com/office/drawing/2014/main" id="{A54A7DD6-92F9-D4C6-68A1-B143A8840D0F}"/>
               </a:ext>
             </a:extLst>
           </p:cNvPr>
@@ -11902,7 +11902,7 @@
           <p:cNvPr id="17" name="lane-sub-0">
             <a:extLst>
               <a:ext uri="{FF2B5EF4-FFF2-40B4-BE49-F238E27FC236}">
-                <a16:creationId xmlns:a16="http://schemas.microsoft.com/office/drawing/2014/main" id="{0E1DEB36-DBA1-B27A-2BC5-C1DB0C41051E}"/>
+                <a16:creationId xmlns:a16="http://schemas.microsoft.com/office/drawing/2014/main" id="{1054C98A-852F-E987-318E-106E0A0F4C79}"/>
               </a:ext>
             </a:extLst>
           </p:cNvPr>
@@ -11948,7 +11948,7 @@
           <p:cNvPr id="18" name="lane-1">
             <a:extLst>
               <a:ext uri="{FF2B5EF4-FFF2-40B4-BE49-F238E27FC236}">
-                <a16:creationId xmlns:a16="http://schemas.microsoft.com/office/drawing/2014/main" id="{CB38E7E7-31BE-E074-0B44-32D24EB4832A}"/>
+                <a16:creationId xmlns:a16="http://schemas.microsoft.com/office/drawing/2014/main" id="{35D91016-6F6F-9FDA-300D-782383656D3D}"/>
               </a:ext>
             </a:extLst>
           </p:cNvPr>
@@ -12002,7 +12002,7 @@
           <p:cNvPr id="19" name="lane-band-1">
             <a:extLst>
               <a:ext uri="{FF2B5EF4-FFF2-40B4-BE49-F238E27FC236}">
-                <a16:creationId xmlns:a16="http://schemas.microsoft.com/office/drawing/2014/main" id="{02D571CF-1D40-7CBA-1150-9979408B07FA}"/>
+                <a16:creationId xmlns:a16="http://schemas.microsoft.com/office/drawing/2014/main" id="{02D0F7B6-A8E8-77B0-3ED5-CFB24910084E}"/>
               </a:ext>
             </a:extLst>
           </p:cNvPr>
@@ -12056,7 +12056,7 @@
           <p:cNvPr id="20" name="lane-title-1">
             <a:extLst>
               <a:ext uri="{FF2B5EF4-FFF2-40B4-BE49-F238E27FC236}">
-                <a16:creationId xmlns:a16="http://schemas.microsoft.com/office/drawing/2014/main" id="{6A7B2170-D7DE-46EA-3210-4226C6FE853C}"/>
+                <a16:creationId xmlns:a16="http://schemas.microsoft.com/office/drawing/2014/main" id="{2ED275C9-5107-1A3E-8C22-CB3599B8628F}"/>
               </a:ext>
             </a:extLst>
           </p:cNvPr>
@@ -12102,7 +12102,7 @@
           <p:cNvPr id="21" name="lane-target-1">
             <a:extLst>
               <a:ext uri="{FF2B5EF4-FFF2-40B4-BE49-F238E27FC236}">
-                <a16:creationId xmlns:a16="http://schemas.microsoft.com/office/drawing/2014/main" id="{8C20E57B-AB7F-2C7A-66DE-25D8F417281E}"/>
+                <a16:creationId xmlns:a16="http://schemas.microsoft.com/office/drawing/2014/main" id="{BDC0C369-9D5A-0D3B-3B7B-458E5431F58F}"/>
               </a:ext>
             </a:extLst>
           </p:cNvPr>
@@ -12148,7 +12148,7 @@
           <p:cNvPr id="22" name="lane-sub-1">
             <a:extLst>
               <a:ext uri="{FF2B5EF4-FFF2-40B4-BE49-F238E27FC236}">
-                <a16:creationId xmlns:a16="http://schemas.microsoft.com/office/drawing/2014/main" id="{C4E1A89C-D154-DA24-8B74-8734A05900C4}"/>
+                <a16:creationId xmlns:a16="http://schemas.microsoft.com/office/drawing/2014/main" id="{9ACA81B0-85F2-B674-1637-40AE3BBB81A4}"/>
               </a:ext>
             </a:extLst>
           </p:cNvPr>
@@ -12194,7 +12194,7 @@
           <p:cNvPr id="23" name="lane-2">
             <a:extLst>
               <a:ext uri="{FF2B5EF4-FFF2-40B4-BE49-F238E27FC236}">
-                <a16:creationId xmlns:a16="http://schemas.microsoft.com/office/drawing/2014/main" id="{BAC03E2D-F2FE-6538-65DB-9FDB6F97B999}"/>
+                <a16:creationId xmlns:a16="http://schemas.microsoft.com/office/drawing/2014/main" id="{401E846A-E11C-C4FC-1846-BCEDC050F9EE}"/>
               </a:ext>
             </a:extLst>
           </p:cNvPr>
@@ -12248,7 +12248,7 @@
           <p:cNvPr id="24" name="lane-band-2">
             <a:extLst>
               <a:ext uri="{FF2B5EF4-FFF2-40B4-BE49-F238E27FC236}">
-                <a16:creationId xmlns:a16="http://schemas.microsoft.com/office/drawing/2014/main" id="{36E67D60-AE3F-124B-BF1F-1B877BCB2A29}"/>
+                <a16:creationId xmlns:a16="http://schemas.microsoft.com/office/drawing/2014/main" id="{EEC039FE-0D6B-86AE-7E2B-6502AA3FA9DC}"/>
               </a:ext>
             </a:extLst>
           </p:cNvPr>
@@ -12302,7 +12302,7 @@
           <p:cNvPr id="25" name="lane-title-2">
             <a:extLst>
               <a:ext uri="{FF2B5EF4-FFF2-40B4-BE49-F238E27FC236}">
-                <a16:creationId xmlns:a16="http://schemas.microsoft.com/office/drawing/2014/main" id="{63769315-CD29-B340-E773-19DA3EA078E8}"/>
+                <a16:creationId xmlns:a16="http://schemas.microsoft.com/office/drawing/2014/main" id="{0950D9A7-2D1F-3910-A146-8E67CA3249F1}"/>
               </a:ext>
             </a:extLst>
           </p:cNvPr>
@@ -12348,7 +12348,7 @@
           <p:cNvPr id="26" name="lane-target-2">
             <a:extLst>
               <a:ext uri="{FF2B5EF4-FFF2-40B4-BE49-F238E27FC236}">
-                <a16:creationId xmlns:a16="http://schemas.microsoft.com/office/drawing/2014/main" id="{8551EEB9-223D-BEB7-CA8D-2AA447C995DE}"/>
+                <a16:creationId xmlns:a16="http://schemas.microsoft.com/office/drawing/2014/main" id="{62CC7FB2-534B-35EA-EC8C-55DA19BFD99E}"/>
               </a:ext>
             </a:extLst>
           </p:cNvPr>
@@ -12394,7 +12394,7 @@
           <p:cNvPr id="27" name="lane-sub-2">
             <a:extLst>
               <a:ext uri="{FF2B5EF4-FFF2-40B4-BE49-F238E27FC236}">
-                <a16:creationId xmlns:a16="http://schemas.microsoft.com/office/drawing/2014/main" id="{95C9C389-F55D-E2A9-9F67-B187D7658126}"/>
+                <a16:creationId xmlns:a16="http://schemas.microsoft.com/office/drawing/2014/main" id="{82378A0F-B68E-2F4A-23B2-6F6467DEE848}"/>
               </a:ext>
             </a:extLst>
           </p:cNvPr>
@@ -12440,7 +12440,7 @@
           <p:cNvPr id="28" name="lane-3">
             <a:extLst>
               <a:ext uri="{FF2B5EF4-FFF2-40B4-BE49-F238E27FC236}">
-                <a16:creationId xmlns:a16="http://schemas.microsoft.com/office/drawing/2014/main" id="{FBE26815-A2E0-E166-07C5-123F4656D75D}"/>
+                <a16:creationId xmlns:a16="http://schemas.microsoft.com/office/drawing/2014/main" id="{1F5A5A51-728F-C9AD-9EB9-C0A68AE8B912}"/>
               </a:ext>
             </a:extLst>
           </p:cNvPr>
@@ -12494,7 +12494,7 @@
           <p:cNvPr id="29" name="lane-band-3">
             <a:extLst>
               <a:ext uri="{FF2B5EF4-FFF2-40B4-BE49-F238E27FC236}">
-                <a16:creationId xmlns:a16="http://schemas.microsoft.com/office/drawing/2014/main" id="{E5F333EE-FDD7-DDA0-734D-4C0492FD6591}"/>
+                <a16:creationId xmlns:a16="http://schemas.microsoft.com/office/drawing/2014/main" id="{944EBC5E-6A67-2D6D-2A2A-BC1C68E36EFD}"/>
               </a:ext>
             </a:extLst>
           </p:cNvPr>
@@ -12548,7 +12548,7 @@
           <p:cNvPr id="30" name="lane-title-3">
             <a:extLst>
               <a:ext uri="{FF2B5EF4-FFF2-40B4-BE49-F238E27FC236}">
-                <a16:creationId xmlns:a16="http://schemas.microsoft.com/office/drawing/2014/main" id="{17CFDDF4-E57E-B6FE-8B18-B35F0A19B94C}"/>
+                <a16:creationId xmlns:a16="http://schemas.microsoft.com/office/drawing/2014/main" id="{26EC2F58-45AC-6A4B-B23C-DF78309C84FE}"/>
               </a:ext>
             </a:extLst>
           </p:cNvPr>
@@ -12594,7 +12594,7 @@
           <p:cNvPr id="31" name="lane-target-3">
             <a:extLst>
               <a:ext uri="{FF2B5EF4-FFF2-40B4-BE49-F238E27FC236}">
-                <a16:creationId xmlns:a16="http://schemas.microsoft.com/office/drawing/2014/main" id="{84D3F1D4-1D36-B8BF-7196-35F08FD80A84}"/>
+                <a16:creationId xmlns:a16="http://schemas.microsoft.com/office/drawing/2014/main" id="{3E8DD47F-E323-0A6E-FD49-D0CD01042AE4}"/>
               </a:ext>
             </a:extLst>
           </p:cNvPr>
@@ -12640,7 +12640,7 @@
           <p:cNvPr id="32" name="lane-sub-3">
             <a:extLst>
               <a:ext uri="{FF2B5EF4-FFF2-40B4-BE49-F238E27FC236}">
-                <a16:creationId xmlns:a16="http://schemas.microsoft.com/office/drawing/2014/main" id="{95485645-7B25-65EB-A78D-67547D130F87}"/>
+                <a16:creationId xmlns:a16="http://schemas.microsoft.com/office/drawing/2014/main" id="{81E4AB20-DA72-9A65-F523-1B078711A820}"/>
               </a:ext>
             </a:extLst>
           </p:cNvPr>
@@ -12686,7 +12686,7 @@
           <p:cNvPr id="33" name="lane-4">
             <a:extLst>
               <a:ext uri="{FF2B5EF4-FFF2-40B4-BE49-F238E27FC236}">
-                <a16:creationId xmlns:a16="http://schemas.microsoft.com/office/drawing/2014/main" id="{30144747-F283-D75D-48AA-D663A1F764CF}"/>
+                <a16:creationId xmlns:a16="http://schemas.microsoft.com/office/drawing/2014/main" id="{A2EA4C56-1713-1B19-640C-F7108E3D7DE4}"/>
               </a:ext>
             </a:extLst>
           </p:cNvPr>
@@ -12740,7 +12740,7 @@
           <p:cNvPr id="34" name="lane-band-4">
             <a:extLst>
               <a:ext uri="{FF2B5EF4-FFF2-40B4-BE49-F238E27FC236}">
-                <a16:creationId xmlns:a16="http://schemas.microsoft.com/office/drawing/2014/main" id="{978277F7-9ABC-22E0-C679-2888D3B2128B}"/>
+                <a16:creationId xmlns:a16="http://schemas.microsoft.com/office/drawing/2014/main" id="{4E252083-9677-5E3D-E9CF-87155C06FEDB}"/>
               </a:ext>
             </a:extLst>
           </p:cNvPr>
@@ -12794,7 +12794,7 @@
           <p:cNvPr id="35" name="lane-title-4">
             <a:extLst>
               <a:ext uri="{FF2B5EF4-FFF2-40B4-BE49-F238E27FC236}">
-                <a16:creationId xmlns:a16="http://schemas.microsoft.com/office/drawing/2014/main" id="{33A17C16-CF0D-21D6-59DF-9E3F38706D65}"/>
+                <a16:creationId xmlns:a16="http://schemas.microsoft.com/office/drawing/2014/main" id="{49E1F2C8-EB77-254E-100B-A31280A1FCE1}"/>
               </a:ext>
             </a:extLst>
           </p:cNvPr>
@@ -12840,7 +12840,7 @@
           <p:cNvPr id="36" name="lane-target-4">
             <a:extLst>
               <a:ext uri="{FF2B5EF4-FFF2-40B4-BE49-F238E27FC236}">
-                <a16:creationId xmlns:a16="http://schemas.microsoft.com/office/drawing/2014/main" id="{6260D8C4-A310-B698-1DE9-B5C4283EFC36}"/>
+                <a16:creationId xmlns:a16="http://schemas.microsoft.com/office/drawing/2014/main" id="{18EFB502-2DCD-4C21-37DF-C80F43A6F355}"/>
               </a:ext>
             </a:extLst>
           </p:cNvPr>
@@ -12886,7 +12886,7 @@
           <p:cNvPr id="37" name="lane-sub-4">
             <a:extLst>
               <a:ext uri="{FF2B5EF4-FFF2-40B4-BE49-F238E27FC236}">
-                <a16:creationId xmlns:a16="http://schemas.microsoft.com/office/drawing/2014/main" id="{B55A209B-E429-1B7C-B6C4-EDAD6466DEE8}"/>
+                <a16:creationId xmlns:a16="http://schemas.microsoft.com/office/drawing/2014/main" id="{4D57B13C-B545-7074-8F63-B416FC651578}"/>
               </a:ext>
             </a:extLst>
           </p:cNvPr>
@@ -12932,7 +12932,7 @@
           <p:cNvPr id="38" name="ownership">
             <a:extLst>
               <a:ext uri="{FF2B5EF4-FFF2-40B4-BE49-F238E27FC236}">
-                <a16:creationId xmlns:a16="http://schemas.microsoft.com/office/drawing/2014/main" id="{2D48BD94-618D-34B8-74BE-6D04071C1E4B}"/>
+                <a16:creationId xmlns:a16="http://schemas.microsoft.com/office/drawing/2014/main" id="{53B4F68A-0E94-61F5-5007-9FB4AC1C26B0}"/>
               </a:ext>
             </a:extLst>
           </p:cNvPr>
@@ -12986,7 +12986,7 @@
           <p:cNvPr id="39" name="ownership-text">
             <a:extLst>
               <a:ext uri="{FF2B5EF4-FFF2-40B4-BE49-F238E27FC236}">
-                <a16:creationId xmlns:a16="http://schemas.microsoft.com/office/drawing/2014/main" id="{08D9BD76-7DF2-755F-FB55-49BB3AC5E2D6}"/>
+                <a16:creationId xmlns:a16="http://schemas.microsoft.com/office/drawing/2014/main" id="{D43AC06C-6C75-D000-07C0-CF0111B085B4}"/>
               </a:ext>
             </a:extLst>
           </p:cNvPr>
@@ -13030,7 +13030,7 @@
     </p:spTree>
     <p:extLst>
       <p:ext uri="{BB962C8B-B14F-4D97-AF65-F5344CB8AC3E}">
-        <p14:creationId xmlns:p14="http://schemas.microsoft.com/office/powerpoint/2010/main" val="378223650"/>
+        <p14:creationId xmlns:p14="http://schemas.microsoft.com/office/powerpoint/2010/main" val="3428772530"/>
       </p:ext>
     </p:extLst>
   </p:cSld>
@@ -13074,7 +13074,7 @@
           <p:cNvPr id="2" name="dark-bg">
             <a:extLst>
               <a:ext uri="{FF2B5EF4-FFF2-40B4-BE49-F238E27FC236}">
-                <a16:creationId xmlns:a16="http://schemas.microsoft.com/office/drawing/2014/main" id="{637FD941-1DE9-4673-E78E-62DF83078119}"/>
+                <a16:creationId xmlns:a16="http://schemas.microsoft.com/office/drawing/2014/main" id="{1383F119-CA52-0EA1-19E4-C6AD4F2D7E8B}"/>
               </a:ext>
             </a:extLst>
           </p:cNvPr>
@@ -13135,7 +13135,7 @@
           <p:cNvPr id="3" name="dark-panel">
             <a:extLst>
               <a:ext uri="{FF2B5EF4-FFF2-40B4-BE49-F238E27FC236}">
-                <a16:creationId xmlns:a16="http://schemas.microsoft.com/office/drawing/2014/main" id="{0C33213E-EACA-A899-5E89-89B38AC8E995}"/>
+                <a16:creationId xmlns:a16="http://schemas.microsoft.com/office/drawing/2014/main" id="{8C383105-1C3E-89A8-E915-4A54166883C6}"/>
               </a:ext>
             </a:extLst>
           </p:cNvPr>
@@ -13198,7 +13198,7 @@
           <p:cNvPr id="4" name="grid-v-0">
             <a:extLst>
               <a:ext uri="{FF2B5EF4-FFF2-40B4-BE49-F238E27FC236}">
-                <a16:creationId xmlns:a16="http://schemas.microsoft.com/office/drawing/2014/main" id="{B0AC7CB5-C340-471C-94E5-E380418CF480}"/>
+                <a16:creationId xmlns:a16="http://schemas.microsoft.com/office/drawing/2014/main" id="{574DC98E-2A26-07DB-5C81-9FFB0E09545B}"/>
               </a:ext>
             </a:extLst>
           </p:cNvPr>
@@ -13239,7 +13239,7 @@
           <p:cNvPr id="5" name="grid-v-64">
             <a:extLst>
               <a:ext uri="{FF2B5EF4-FFF2-40B4-BE49-F238E27FC236}">
-                <a16:creationId xmlns:a16="http://schemas.microsoft.com/office/drawing/2014/main" id="{12B99D87-7556-F329-593A-58A250617FAA}"/>
+                <a16:creationId xmlns:a16="http://schemas.microsoft.com/office/drawing/2014/main" id="{9BF9EEC0-01D8-9720-713D-E5F548864CAC}"/>
               </a:ext>
             </a:extLst>
           </p:cNvPr>
@@ -13280,7 +13280,7 @@
           <p:cNvPr id="6" name="grid-v-128">
             <a:extLst>
               <a:ext uri="{FF2B5EF4-FFF2-40B4-BE49-F238E27FC236}">
-                <a16:creationId xmlns:a16="http://schemas.microsoft.com/office/drawing/2014/main" id="{81B6C15B-100B-DEA9-A77D-02C07616A068}"/>
+                <a16:creationId xmlns:a16="http://schemas.microsoft.com/office/drawing/2014/main" id="{6BA8AA76-71F6-9F16-3FF4-73A6339FFDAF}"/>
               </a:ext>
             </a:extLst>
           </p:cNvPr>
@@ -13321,7 +13321,7 @@
           <p:cNvPr id="7" name="grid-v-192">
             <a:extLst>
               <a:ext uri="{FF2B5EF4-FFF2-40B4-BE49-F238E27FC236}">
-                <a16:creationId xmlns:a16="http://schemas.microsoft.com/office/drawing/2014/main" id="{9B21F2BA-8B51-5437-4B45-4C41A69CC19D}"/>
+                <a16:creationId xmlns:a16="http://schemas.microsoft.com/office/drawing/2014/main" id="{DBD6DBF5-2161-FACA-6817-D7D3E23E2C71}"/>
               </a:ext>
             </a:extLst>
           </p:cNvPr>
@@ -13362,7 +13362,7 @@
           <p:cNvPr id="8" name="grid-v-256">
             <a:extLst>
               <a:ext uri="{FF2B5EF4-FFF2-40B4-BE49-F238E27FC236}">
-                <a16:creationId xmlns:a16="http://schemas.microsoft.com/office/drawing/2014/main" id="{D9F4A425-3C46-E7D0-3B70-1283DACAF703}"/>
+                <a16:creationId xmlns:a16="http://schemas.microsoft.com/office/drawing/2014/main" id="{3B9DBB8C-B0FF-27EF-9792-3DB406DE0645}"/>
               </a:ext>
             </a:extLst>
           </p:cNvPr>
@@ -13403,7 +13403,7 @@
           <p:cNvPr id="9" name="grid-v-320">
             <a:extLst>
               <a:ext uri="{FF2B5EF4-FFF2-40B4-BE49-F238E27FC236}">
-                <a16:creationId xmlns:a16="http://schemas.microsoft.com/office/drawing/2014/main" id="{FAD3E5D6-BEDD-36F8-5B51-8BA6F1E20C21}"/>
+                <a16:creationId xmlns:a16="http://schemas.microsoft.com/office/drawing/2014/main" id="{17315285-3CFE-586C-7EFF-576E51B264D5}"/>
               </a:ext>
             </a:extLst>
           </p:cNvPr>
@@ -13444,7 +13444,7 @@
           <p:cNvPr id="10" name="grid-v-384">
             <a:extLst>
               <a:ext uri="{FF2B5EF4-FFF2-40B4-BE49-F238E27FC236}">
-                <a16:creationId xmlns:a16="http://schemas.microsoft.com/office/drawing/2014/main" id="{973E2657-9E7E-5D23-A0C5-3809DB101DD4}"/>
+                <a16:creationId xmlns:a16="http://schemas.microsoft.com/office/drawing/2014/main" id="{9503F5CF-9000-40D9-4AFA-47107F6A263A}"/>
               </a:ext>
             </a:extLst>
           </p:cNvPr>
@@ -13485,7 +13485,7 @@
           <p:cNvPr id="11" name="grid-v-448">
             <a:extLst>
               <a:ext uri="{FF2B5EF4-FFF2-40B4-BE49-F238E27FC236}">
-                <a16:creationId xmlns:a16="http://schemas.microsoft.com/office/drawing/2014/main" id="{62594945-97FA-D528-24B5-BA8C3690C890}"/>
+                <a16:creationId xmlns:a16="http://schemas.microsoft.com/office/drawing/2014/main" id="{E7B6AB9A-3A9E-7BA4-4ACD-60678776D593}"/>
               </a:ext>
             </a:extLst>
           </p:cNvPr>
@@ -13526,7 +13526,7 @@
           <p:cNvPr id="12" name="grid-v-512">
             <a:extLst>
               <a:ext uri="{FF2B5EF4-FFF2-40B4-BE49-F238E27FC236}">
-                <a16:creationId xmlns:a16="http://schemas.microsoft.com/office/drawing/2014/main" id="{03C3DD63-6B75-90ED-A4AC-D5914FDEDFEC}"/>
+                <a16:creationId xmlns:a16="http://schemas.microsoft.com/office/drawing/2014/main" id="{B5B86860-76DF-D7E1-F91B-A7B08095E5F5}"/>
               </a:ext>
             </a:extLst>
           </p:cNvPr>
@@ -13567,7 +13567,7 @@
           <p:cNvPr id="13" name="grid-v-576">
             <a:extLst>
               <a:ext uri="{FF2B5EF4-FFF2-40B4-BE49-F238E27FC236}">
-                <a16:creationId xmlns:a16="http://schemas.microsoft.com/office/drawing/2014/main" id="{1CA4DA1E-3C8F-DA62-E53D-957A74616E15}"/>
+                <a16:creationId xmlns:a16="http://schemas.microsoft.com/office/drawing/2014/main" id="{412E329A-E776-CC27-D3DA-1F40E347A582}"/>
               </a:ext>
             </a:extLst>
           </p:cNvPr>
@@ -13608,7 +13608,7 @@
           <p:cNvPr id="14" name="grid-v-640">
             <a:extLst>
               <a:ext uri="{FF2B5EF4-FFF2-40B4-BE49-F238E27FC236}">
-                <a16:creationId xmlns:a16="http://schemas.microsoft.com/office/drawing/2014/main" id="{34615A58-1AE3-8D8D-069A-F55DD6981C56}"/>
+                <a16:creationId xmlns:a16="http://schemas.microsoft.com/office/drawing/2014/main" id="{75EB79A3-6118-E23D-AA7C-ECF19605D76C}"/>
               </a:ext>
             </a:extLst>
           </p:cNvPr>
@@ -13649,7 +13649,7 @@
           <p:cNvPr id="15" name="grid-v-704">
             <a:extLst>
               <a:ext uri="{FF2B5EF4-FFF2-40B4-BE49-F238E27FC236}">
-                <a16:creationId xmlns:a16="http://schemas.microsoft.com/office/drawing/2014/main" id="{E3D7D61F-95C9-BAAB-A486-6590784A756D}"/>
+                <a16:creationId xmlns:a16="http://schemas.microsoft.com/office/drawing/2014/main" id="{119002C0-242E-274F-F957-640ACA543C10}"/>
               </a:ext>
             </a:extLst>
           </p:cNvPr>
@@ -13690,7 +13690,7 @@
           <p:cNvPr id="16" name="grid-v-768">
             <a:extLst>
               <a:ext uri="{FF2B5EF4-FFF2-40B4-BE49-F238E27FC236}">
-                <a16:creationId xmlns:a16="http://schemas.microsoft.com/office/drawing/2014/main" id="{210C7844-1E2B-18D6-6FB4-6772900E4CCD}"/>
+                <a16:creationId xmlns:a16="http://schemas.microsoft.com/office/drawing/2014/main" id="{CAEDC10F-9C42-1FE0-DFB8-C0AEADAE0331}"/>
               </a:ext>
             </a:extLst>
           </p:cNvPr>
@@ -13731,7 +13731,7 @@
           <p:cNvPr id="17" name="grid-v-832">
             <a:extLst>
               <a:ext uri="{FF2B5EF4-FFF2-40B4-BE49-F238E27FC236}">
-                <a16:creationId xmlns:a16="http://schemas.microsoft.com/office/drawing/2014/main" id="{D56BC640-9CEB-74C7-F1D4-3BF06D0BF9AE}"/>
+                <a16:creationId xmlns:a16="http://schemas.microsoft.com/office/drawing/2014/main" id="{42773ABE-254B-50E6-3ADF-38E2FF63236B}"/>
               </a:ext>
             </a:extLst>
           </p:cNvPr>
@@ -13772,7 +13772,7 @@
           <p:cNvPr id="18" name="grid-v-896">
             <a:extLst>
               <a:ext uri="{FF2B5EF4-FFF2-40B4-BE49-F238E27FC236}">
-                <a16:creationId xmlns:a16="http://schemas.microsoft.com/office/drawing/2014/main" id="{C1DE9E35-A8AE-25B4-DDA2-7800B3200615}"/>
+                <a16:creationId xmlns:a16="http://schemas.microsoft.com/office/drawing/2014/main" id="{281406B4-215F-36F7-CF8D-A9AE2684C7B4}"/>
               </a:ext>
             </a:extLst>
           </p:cNvPr>
@@ -13813,7 +13813,7 @@
           <p:cNvPr id="19" name="grid-v-960">
             <a:extLst>
               <a:ext uri="{FF2B5EF4-FFF2-40B4-BE49-F238E27FC236}">
-                <a16:creationId xmlns:a16="http://schemas.microsoft.com/office/drawing/2014/main" id="{D6A70803-9FC8-0084-DA64-4A8435862B0B}"/>
+                <a16:creationId xmlns:a16="http://schemas.microsoft.com/office/drawing/2014/main" id="{71D1BACA-CBF1-04F1-1829-9F44F005CAB6}"/>
               </a:ext>
             </a:extLst>
           </p:cNvPr>
@@ -13854,7 +13854,7 @@
           <p:cNvPr id="20" name="grid-h-0">
             <a:extLst>
               <a:ext uri="{FF2B5EF4-FFF2-40B4-BE49-F238E27FC236}">
-                <a16:creationId xmlns:a16="http://schemas.microsoft.com/office/drawing/2014/main" id="{C41365DF-DB75-ECA8-8038-6E3B848A8D37}"/>
+                <a16:creationId xmlns:a16="http://schemas.microsoft.com/office/drawing/2014/main" id="{F643568A-1825-4329-2B01-B3E09CAA88ED}"/>
               </a:ext>
             </a:extLst>
           </p:cNvPr>
@@ -13895,7 +13895,7 @@
           <p:cNvPr id="21" name="grid-h-64">
             <a:extLst>
               <a:ext uri="{FF2B5EF4-FFF2-40B4-BE49-F238E27FC236}">
-                <a16:creationId xmlns:a16="http://schemas.microsoft.com/office/drawing/2014/main" id="{FFDF3DF7-BC05-8517-7903-C6377AB5631D}"/>
+                <a16:creationId xmlns:a16="http://schemas.microsoft.com/office/drawing/2014/main" id="{83546355-906E-D2DA-FEDA-8975FE00B73B}"/>
               </a:ext>
             </a:extLst>
           </p:cNvPr>
@@ -13936,7 +13936,7 @@
           <p:cNvPr id="22" name="grid-h-128">
             <a:extLst>
               <a:ext uri="{FF2B5EF4-FFF2-40B4-BE49-F238E27FC236}">
-                <a16:creationId xmlns:a16="http://schemas.microsoft.com/office/drawing/2014/main" id="{12265B65-906D-7F2C-85A5-230D035B20E2}"/>
+                <a16:creationId xmlns:a16="http://schemas.microsoft.com/office/drawing/2014/main" id="{2221781E-9B74-CC53-226A-AD063A0681AA}"/>
               </a:ext>
             </a:extLst>
           </p:cNvPr>
@@ -13977,7 +13977,7 @@
           <p:cNvPr id="23" name="grid-h-192">
             <a:extLst>
               <a:ext uri="{FF2B5EF4-FFF2-40B4-BE49-F238E27FC236}">
-                <a16:creationId xmlns:a16="http://schemas.microsoft.com/office/drawing/2014/main" id="{4938E34D-70C0-C80B-27C3-6C235807E22C}"/>
+                <a16:creationId xmlns:a16="http://schemas.microsoft.com/office/drawing/2014/main" id="{3E210C2D-9424-0271-317C-6ED63FED39EB}"/>
               </a:ext>
             </a:extLst>
           </p:cNvPr>
@@ -14018,7 +14018,7 @@
           <p:cNvPr id="24" name="grid-h-256">
             <a:extLst>
               <a:ext uri="{FF2B5EF4-FFF2-40B4-BE49-F238E27FC236}">
-                <a16:creationId xmlns:a16="http://schemas.microsoft.com/office/drawing/2014/main" id="{C187C816-CFDC-A9BF-2AF1-79DD981FFCBB}"/>
+                <a16:creationId xmlns:a16="http://schemas.microsoft.com/office/drawing/2014/main" id="{7365A9F7-ED32-08D8-544C-57B336E3DAA9}"/>
               </a:ext>
             </a:extLst>
           </p:cNvPr>
@@ -14059,7 +14059,7 @@
           <p:cNvPr id="25" name="grid-h-320">
             <a:extLst>
               <a:ext uri="{FF2B5EF4-FFF2-40B4-BE49-F238E27FC236}">
-                <a16:creationId xmlns:a16="http://schemas.microsoft.com/office/drawing/2014/main" id="{2028827D-4A6F-237B-AE94-CED07959E9BA}"/>
+                <a16:creationId xmlns:a16="http://schemas.microsoft.com/office/drawing/2014/main" id="{403A36B1-5BE6-EAB3-2C37-BA9D882FEE21}"/>
               </a:ext>
             </a:extLst>
           </p:cNvPr>
@@ -14100,7 +14100,7 @@
           <p:cNvPr id="26" name="grid-h-384">
             <a:extLst>
               <a:ext uri="{FF2B5EF4-FFF2-40B4-BE49-F238E27FC236}">
-                <a16:creationId xmlns:a16="http://schemas.microsoft.com/office/drawing/2014/main" id="{5A1C4E17-AD39-E0F4-FB8C-890FEAEF072C}"/>
+                <a16:creationId xmlns:a16="http://schemas.microsoft.com/office/drawing/2014/main" id="{11CC5162-D51C-EB20-66A1-F6D32D307295}"/>
               </a:ext>
             </a:extLst>
           </p:cNvPr>
@@ -14141,7 +14141,7 @@
           <p:cNvPr id="27" name="grid-h-448">
             <a:extLst>
               <a:ext uri="{FF2B5EF4-FFF2-40B4-BE49-F238E27FC236}">
-                <a16:creationId xmlns:a16="http://schemas.microsoft.com/office/drawing/2014/main" id="{4276B78E-6CF5-CE13-09E9-F57B92ED2675}"/>
+                <a16:creationId xmlns:a16="http://schemas.microsoft.com/office/drawing/2014/main" id="{2559D8CB-37A2-072F-0C1B-A36B2C07C273}"/>
               </a:ext>
             </a:extLst>
           </p:cNvPr>
@@ -14182,7 +14182,7 @@
           <p:cNvPr id="28" name="grid-h-512">
             <a:extLst>
               <a:ext uri="{FF2B5EF4-FFF2-40B4-BE49-F238E27FC236}">
-                <a16:creationId xmlns:a16="http://schemas.microsoft.com/office/drawing/2014/main" id="{3C25A976-BE88-727F-C2A2-0287B2AB0FD0}"/>
+                <a16:creationId xmlns:a16="http://schemas.microsoft.com/office/drawing/2014/main" id="{29306134-CA7E-A52E-B5A9-C942F321A95C}"/>
               </a:ext>
             </a:extLst>
           </p:cNvPr>
@@ -14223,7 +14223,7 @@
           <p:cNvPr id="29" name="page-num">
             <a:extLst>
               <a:ext uri="{FF2B5EF4-FFF2-40B4-BE49-F238E27FC236}">
-                <a16:creationId xmlns:a16="http://schemas.microsoft.com/office/drawing/2014/main" id="{D00C26F2-6CD9-EC44-5948-9D0C844C142A}"/>
+                <a16:creationId xmlns:a16="http://schemas.microsoft.com/office/drawing/2014/main" id="{1B55C0BC-1A22-8B6C-D3C1-9B997B3CFC29}"/>
               </a:ext>
             </a:extLst>
           </p:cNvPr>
@@ -14269,7 +14269,7 @@
           <p:cNvPr id="30" name="section-label">
             <a:extLst>
               <a:ext uri="{FF2B5EF4-FFF2-40B4-BE49-F238E27FC236}">
-                <a16:creationId xmlns:a16="http://schemas.microsoft.com/office/drawing/2014/main" id="{AC649D94-0D85-E4BE-481F-4FEE29C05E86}"/>
+                <a16:creationId xmlns:a16="http://schemas.microsoft.com/office/drawing/2014/main" id="{E0BCA324-41DC-1FAA-D976-5848BA67A1E1}"/>
               </a:ext>
             </a:extLst>
           </p:cNvPr>
@@ -14315,7 +14315,7 @@
           <p:cNvPr id="31" name="thanks">
             <a:extLst>
               <a:ext uri="{FF2B5EF4-FFF2-40B4-BE49-F238E27FC236}">
-                <a16:creationId xmlns:a16="http://schemas.microsoft.com/office/drawing/2014/main" id="{0F0B5D08-7D2B-44B9-7613-576B4E81A695}"/>
+                <a16:creationId xmlns:a16="http://schemas.microsoft.com/office/drawing/2014/main" id="{C71DC23C-0F6A-1A68-6251-9BAC7957AED9}"/>
               </a:ext>
             </a:extLst>
           </p:cNvPr>
@@ -14361,7 +14361,7 @@
           <p:cNvPr id="32" name="questions">
             <a:extLst>
               <a:ext uri="{FF2B5EF4-FFF2-40B4-BE49-F238E27FC236}">
-                <a16:creationId xmlns:a16="http://schemas.microsoft.com/office/drawing/2014/main" id="{DD72FDE8-0B74-D521-3732-F4857C608B0C}"/>
+                <a16:creationId xmlns:a16="http://schemas.microsoft.com/office/drawing/2014/main" id="{66F14E7A-FB26-16DC-C603-A7750B5A7977}"/>
               </a:ext>
             </a:extLst>
           </p:cNvPr>
@@ -14407,7 +14407,7 @@
           <p:cNvPr id="33" name="closing-line">
             <a:extLst>
               <a:ext uri="{FF2B5EF4-FFF2-40B4-BE49-F238E27FC236}">
-                <a16:creationId xmlns:a16="http://schemas.microsoft.com/office/drawing/2014/main" id="{A5B9F848-39EE-13C7-C582-AEA15A933043}"/>
+                <a16:creationId xmlns:a16="http://schemas.microsoft.com/office/drawing/2014/main" id="{E79D9BA0-D0DD-9B35-25AA-D611ECD513C5}"/>
               </a:ext>
             </a:extLst>
           </p:cNvPr>
@@ -14448,7 +14448,7 @@
           <p:cNvPr id="34" name="takeaway">
             <a:extLst>
               <a:ext uri="{FF2B5EF4-FFF2-40B4-BE49-F238E27FC236}">
-                <a16:creationId xmlns:a16="http://schemas.microsoft.com/office/drawing/2014/main" id="{2FCA7717-B794-B728-F3B6-4DB14E748BB0}"/>
+                <a16:creationId xmlns:a16="http://schemas.microsoft.com/office/drawing/2014/main" id="{9CF41230-0B80-1498-DE8B-A0D09D5D7C5E}"/>
               </a:ext>
             </a:extLst>
           </p:cNvPr>
@@ -14502,7 +14502,7 @@
           <p:cNvPr id="35" name="takeaway-t">
             <a:extLst>
               <a:ext uri="{FF2B5EF4-FFF2-40B4-BE49-F238E27FC236}">
-                <a16:creationId xmlns:a16="http://schemas.microsoft.com/office/drawing/2014/main" id="{8CBB32E5-3E11-2A24-9F56-4D00DB993355}"/>
+                <a16:creationId xmlns:a16="http://schemas.microsoft.com/office/drawing/2014/main" id="{FF863FC1-C133-BCA5-AD7B-56D3B7E95B27}"/>
               </a:ext>
             </a:extLst>
           </p:cNvPr>
@@ -14548,7 +14548,7 @@
           <p:cNvPr id="36" name="qa">
             <a:extLst>
               <a:ext uri="{FF2B5EF4-FFF2-40B4-BE49-F238E27FC236}">
-                <a16:creationId xmlns:a16="http://schemas.microsoft.com/office/drawing/2014/main" id="{799A8E06-EF07-2655-5A73-9250DC27DBDA}"/>
+                <a16:creationId xmlns:a16="http://schemas.microsoft.com/office/drawing/2014/main" id="{C1970C7C-C0D4-7061-F04E-BC69ECDF948D}"/>
               </a:ext>
             </a:extLst>
           </p:cNvPr>
@@ -14602,7 +14602,7 @@
           <p:cNvPr id="37" name="qa-t">
             <a:extLst>
               <a:ext uri="{FF2B5EF4-FFF2-40B4-BE49-F238E27FC236}">
-                <a16:creationId xmlns:a16="http://schemas.microsoft.com/office/drawing/2014/main" id="{6357DCC9-F664-9B0C-C90B-9DDC6DEB1C59}"/>
+                <a16:creationId xmlns:a16="http://schemas.microsoft.com/office/drawing/2014/main" id="{001EB2C5-2F4C-0AD2-FA04-8B71AEE8F8FE}"/>
               </a:ext>
             </a:extLst>
           </p:cNvPr>
@@ -14649,7 +14649,7 @@
             <a:hlinkClick r:id="rId3"/>
             <a:extLst>
               <a:ext uri="{FF2B5EF4-FFF2-40B4-BE49-F238E27FC236}">
-                <a16:creationId xmlns:a16="http://schemas.microsoft.com/office/drawing/2014/main" id="{EB947117-5962-82CB-9BE6-0C2C12C0719F}"/>
+                <a16:creationId xmlns:a16="http://schemas.microsoft.com/office/drawing/2014/main" id="{E9BCD431-AAFA-A2D1-8A54-B463454BB865}"/>
               </a:ext>
             </a:extLst>
           </p:cNvPr>
@@ -14686,7 +14686,7 @@
             <a:hlinkClick r:id="rId3"/>
             <a:extLst>
               <a:ext uri="{FF2B5EF4-FFF2-40B4-BE49-F238E27FC236}">
-                <a16:creationId xmlns:a16="http://schemas.microsoft.com/office/drawing/2014/main" id="{85A9DED1-D37D-B74A-9310-B32D0A79AC6D}"/>
+                <a16:creationId xmlns:a16="http://schemas.microsoft.com/office/drawing/2014/main" id="{37566A4F-7DD8-7255-0670-F69EF5CD7D69}"/>
               </a:ext>
             </a:extLst>
           </p:cNvPr>
@@ -14755,7 +14755,7 @@
             <a:hlinkClick r:id="rId5"/>
             <a:extLst>
               <a:ext uri="{FF2B5EF4-FFF2-40B4-BE49-F238E27FC236}">
-                <a16:creationId xmlns:a16="http://schemas.microsoft.com/office/drawing/2014/main" id="{554213AE-C8C2-AD60-2711-3DF7CC2D7287}"/>
+                <a16:creationId xmlns:a16="http://schemas.microsoft.com/office/drawing/2014/main" id="{09FA2C9D-2703-338D-8264-69393242CFEF}"/>
               </a:ext>
             </a:extLst>
           </p:cNvPr>
@@ -14823,7 +14823,7 @@
           <p:cNvPr id="43" name="图片 42">
             <a:extLst>
               <a:ext uri="{FF2B5EF4-FFF2-40B4-BE49-F238E27FC236}">
-                <a16:creationId xmlns:a16="http://schemas.microsoft.com/office/drawing/2014/main" id="{122FE66F-617C-6038-4304-931FAA423AAB}"/>
+                <a16:creationId xmlns:a16="http://schemas.microsoft.com/office/drawing/2014/main" id="{5530ADE2-691B-64A0-72CC-5B9102C748AB}"/>
               </a:ext>
             </a:extLst>
           </p:cNvPr>
@@ -14857,7 +14857,7 @@
     </p:spTree>
     <p:extLst>
       <p:ext uri="{BB962C8B-B14F-4D97-AF65-F5344CB8AC3E}">
-        <p14:creationId xmlns:p14="http://schemas.microsoft.com/office/powerpoint/2010/main" val="2836912469"/>
+        <p14:creationId xmlns:p14="http://schemas.microsoft.com/office/powerpoint/2010/main" val="3406624489"/>
       </p:ext>
     </p:extLst>
   </p:cSld>
@@ -14901,7 +14901,7 @@
           <p:cNvPr id="2" name="page-bg">
             <a:extLst>
               <a:ext uri="{FF2B5EF4-FFF2-40B4-BE49-F238E27FC236}">
-                <a16:creationId xmlns:a16="http://schemas.microsoft.com/office/drawing/2014/main" id="{ECB82770-F394-AB8B-5D85-7C7A13D9B1E0}"/>
+                <a16:creationId xmlns:a16="http://schemas.microsoft.com/office/drawing/2014/main" id="{3D79997B-96FD-1511-867E-04860E8A18BF}"/>
               </a:ext>
             </a:extLst>
           </p:cNvPr>
@@ -14962,7 +14962,7 @@
           <p:cNvPr id="3" name="left-rail">
             <a:extLst>
               <a:ext uri="{FF2B5EF4-FFF2-40B4-BE49-F238E27FC236}">
-                <a16:creationId xmlns:a16="http://schemas.microsoft.com/office/drawing/2014/main" id="{25FF11C9-60D3-608A-7AAE-D725EA2B97BB}"/>
+                <a16:creationId xmlns:a16="http://schemas.microsoft.com/office/drawing/2014/main" id="{F736AA20-179C-E829-0F29-3666BC0134AF}"/>
               </a:ext>
             </a:extLst>
           </p:cNvPr>
@@ -15023,7 +15023,7 @@
           <p:cNvPr id="4" name="top-line">
             <a:extLst>
               <a:ext uri="{FF2B5EF4-FFF2-40B4-BE49-F238E27FC236}">
-                <a16:creationId xmlns:a16="http://schemas.microsoft.com/office/drawing/2014/main" id="{5B302BA4-9C7C-A6DB-0778-B5CCC6940A10}"/>
+                <a16:creationId xmlns:a16="http://schemas.microsoft.com/office/drawing/2014/main" id="{AF686C45-3BD0-A720-DCF2-5FB3A6FF6D75}"/>
               </a:ext>
             </a:extLst>
           </p:cNvPr>
@@ -15064,7 +15064,7 @@
           <p:cNvPr id="5" name="footer-left">
             <a:extLst>
               <a:ext uri="{FF2B5EF4-FFF2-40B4-BE49-F238E27FC236}">
-                <a16:creationId xmlns:a16="http://schemas.microsoft.com/office/drawing/2014/main" id="{DBCB5030-5FD4-A1CD-A329-95D1D361591B}"/>
+                <a16:creationId xmlns:a16="http://schemas.microsoft.com/office/drawing/2014/main" id="{89946EE3-D87C-AD47-82B0-CC2FEEC50DC2}"/>
               </a:ext>
             </a:extLst>
           </p:cNvPr>
@@ -15110,7 +15110,7 @@
           <p:cNvPr id="6" name="footer-mid">
             <a:extLst>
               <a:ext uri="{FF2B5EF4-FFF2-40B4-BE49-F238E27FC236}">
-                <a16:creationId xmlns:a16="http://schemas.microsoft.com/office/drawing/2014/main" id="{BC766F9D-F17B-9E30-FFDC-5398F4B8C320}"/>
+                <a16:creationId xmlns:a16="http://schemas.microsoft.com/office/drawing/2014/main" id="{B41C31D3-5E63-5984-6E6E-9BEF08B258F5}"/>
               </a:ext>
             </a:extLst>
           </p:cNvPr>
@@ -15156,7 +15156,7 @@
           <p:cNvPr id="7" name="page-num">
             <a:extLst>
               <a:ext uri="{FF2B5EF4-FFF2-40B4-BE49-F238E27FC236}">
-                <a16:creationId xmlns:a16="http://schemas.microsoft.com/office/drawing/2014/main" id="{E0F2356F-1B8F-95CA-C45A-F40C13F2D37B}"/>
+                <a16:creationId xmlns:a16="http://schemas.microsoft.com/office/drawing/2014/main" id="{840EA330-DB77-5DA1-10D9-ED22A565696C}"/>
               </a:ext>
             </a:extLst>
           </p:cNvPr>
@@ -15202,7 +15202,7 @@
           <p:cNvPr id="8" name="section-label">
             <a:extLst>
               <a:ext uri="{FF2B5EF4-FFF2-40B4-BE49-F238E27FC236}">
-                <a16:creationId xmlns:a16="http://schemas.microsoft.com/office/drawing/2014/main" id="{942FD811-F44F-78F9-F8F2-9DA7BD24BCAC}"/>
+                <a16:creationId xmlns:a16="http://schemas.microsoft.com/office/drawing/2014/main" id="{BC7426E7-C9FF-5E20-BD92-3A3BE588C16B}"/>
               </a:ext>
             </a:extLst>
           </p:cNvPr>
@@ -15248,7 +15248,7 @@
           <p:cNvPr id="10" name="图片 9">
             <a:extLst>
               <a:ext uri="{FF2B5EF4-FFF2-40B4-BE49-F238E27FC236}">
-                <a16:creationId xmlns:a16="http://schemas.microsoft.com/office/drawing/2014/main" id="{28D760EE-C843-B0DE-84BF-4DC170A74FE8}"/>
+                <a16:creationId xmlns:a16="http://schemas.microsoft.com/office/drawing/2014/main" id="{DF8B5B6A-200C-55FF-BD6E-5C50642F76DE}"/>
               </a:ext>
             </a:extLst>
           </p:cNvPr>
@@ -15284,7 +15284,7 @@
           <p:cNvPr id="11" name="title">
             <a:extLst>
               <a:ext uri="{FF2B5EF4-FFF2-40B4-BE49-F238E27FC236}">
-                <a16:creationId xmlns:a16="http://schemas.microsoft.com/office/drawing/2014/main" id="{5BE685A8-4305-92C6-D170-762B870BDCBF}"/>
+                <a16:creationId xmlns:a16="http://schemas.microsoft.com/office/drawing/2014/main" id="{43AF84C9-D289-2BE9-ED48-53FE1FB75290}"/>
               </a:ext>
             </a:extLst>
           </p:cNvPr>
@@ -15330,7 +15330,7 @@
           <p:cNvPr id="12" name="subtitle">
             <a:extLst>
               <a:ext uri="{FF2B5EF4-FFF2-40B4-BE49-F238E27FC236}">
-                <a16:creationId xmlns:a16="http://schemas.microsoft.com/office/drawing/2014/main" id="{53F75C36-6730-F349-F733-F0A9250B89BD}"/>
+                <a16:creationId xmlns:a16="http://schemas.microsoft.com/office/drawing/2014/main" id="{B63C66E5-D61B-C2C6-8255-A60CEE0BF26D}"/>
               </a:ext>
             </a:extLst>
           </p:cNvPr>
@@ -15376,7 +15376,7 @@
           <p:cNvPr id="13" name="formula-big">
             <a:extLst>
               <a:ext uri="{FF2B5EF4-FFF2-40B4-BE49-F238E27FC236}">
-                <a16:creationId xmlns:a16="http://schemas.microsoft.com/office/drawing/2014/main" id="{ED13A21B-88B0-C399-2CE0-67866BF1E915}"/>
+                <a16:creationId xmlns:a16="http://schemas.microsoft.com/office/drawing/2014/main" id="{5C30F536-25B3-E530-8AA2-2BCE15FE10BC}"/>
               </a:ext>
             </a:extLst>
           </p:cNvPr>
@@ -15430,7 +15430,7 @@
           <p:cNvPr id="14" name="formula-text">
             <a:extLst>
               <a:ext uri="{FF2B5EF4-FFF2-40B4-BE49-F238E27FC236}">
-                <a16:creationId xmlns:a16="http://schemas.microsoft.com/office/drawing/2014/main" id="{9BFED1EB-A3DA-E5CC-522B-57326A8BE70E}"/>
+                <a16:creationId xmlns:a16="http://schemas.microsoft.com/office/drawing/2014/main" id="{7107620E-A6D9-6F48-6E36-7D9577D5F602}"/>
               </a:ext>
             </a:extLst>
           </p:cNvPr>
@@ -15476,7 +15476,7 @@
           <p:cNvPr id="16" name="claim-matrix">
             <a:extLst>
               <a:ext uri="{FF2B5EF4-FFF2-40B4-BE49-F238E27FC236}">
-                <a16:creationId xmlns:a16="http://schemas.microsoft.com/office/drawing/2014/main" id="{607A08C9-770A-A805-3194-21638207960A}"/>
+                <a16:creationId xmlns:a16="http://schemas.microsoft.com/office/drawing/2014/main" id="{C51CFC60-CB9A-C442-D375-33CC6C8C8597}"/>
               </a:ext>
             </a:extLst>
           </p:cNvPr>
@@ -15513,7 +15513,7 @@
             <a:hlinkClick r:id="rId5"/>
             <a:extLst>
               <a:ext uri="{FF2B5EF4-FFF2-40B4-BE49-F238E27FC236}">
-                <a16:creationId xmlns:a16="http://schemas.microsoft.com/office/drawing/2014/main" id="{33FEABAB-19B9-E02D-D20A-47E91907C68E}"/>
+                <a16:creationId xmlns:a16="http://schemas.microsoft.com/office/drawing/2014/main" id="{8563CCD8-FB35-AD01-B92E-F10D2208F998}"/>
               </a:ext>
             </a:extLst>
           </p:cNvPr>
@@ -15579,7 +15579,7 @@
     </p:spTree>
     <p:extLst>
       <p:ext uri="{BB962C8B-B14F-4D97-AF65-F5344CB8AC3E}">
-        <p14:creationId xmlns:p14="http://schemas.microsoft.com/office/powerpoint/2010/main" val="3546336315"/>
+        <p14:creationId xmlns:p14="http://schemas.microsoft.com/office/powerpoint/2010/main" val="540961499"/>
       </p:ext>
     </p:extLst>
   </p:cSld>
@@ -15623,7 +15623,7 @@
           <p:cNvPr id="2" name="page-bg">
             <a:extLst>
               <a:ext uri="{FF2B5EF4-FFF2-40B4-BE49-F238E27FC236}">
-                <a16:creationId xmlns:a16="http://schemas.microsoft.com/office/drawing/2014/main" id="{7E4ADB3B-9E5A-7A57-F6B7-D8A803A6F960}"/>
+                <a16:creationId xmlns:a16="http://schemas.microsoft.com/office/drawing/2014/main" id="{A96B4A57-6AC3-FD4D-A9A7-AD49AD6C5618}"/>
               </a:ext>
             </a:extLst>
           </p:cNvPr>
@@ -15684,7 +15684,7 @@
           <p:cNvPr id="3" name="left-rail">
             <a:extLst>
               <a:ext uri="{FF2B5EF4-FFF2-40B4-BE49-F238E27FC236}">
-                <a16:creationId xmlns:a16="http://schemas.microsoft.com/office/drawing/2014/main" id="{20CA5C99-D036-42F0-E976-2C6060A1E5E3}"/>
+                <a16:creationId xmlns:a16="http://schemas.microsoft.com/office/drawing/2014/main" id="{4FFC3DB4-3313-610F-E662-7F39C89CC8DF}"/>
               </a:ext>
             </a:extLst>
           </p:cNvPr>
@@ -15745,7 +15745,7 @@
           <p:cNvPr id="4" name="top-line">
             <a:extLst>
               <a:ext uri="{FF2B5EF4-FFF2-40B4-BE49-F238E27FC236}">
-                <a16:creationId xmlns:a16="http://schemas.microsoft.com/office/drawing/2014/main" id="{9855FCB4-200B-48AD-5EF0-D422FFE6908B}"/>
+                <a16:creationId xmlns:a16="http://schemas.microsoft.com/office/drawing/2014/main" id="{9A71CBA0-5A1E-C943-9A3A-0C5F3BE41807}"/>
               </a:ext>
             </a:extLst>
           </p:cNvPr>
@@ -15786,7 +15786,7 @@
           <p:cNvPr id="5" name="footer-left">
             <a:extLst>
               <a:ext uri="{FF2B5EF4-FFF2-40B4-BE49-F238E27FC236}">
-                <a16:creationId xmlns:a16="http://schemas.microsoft.com/office/drawing/2014/main" id="{987393AE-33F9-801D-7A27-5EE2485A6326}"/>
+                <a16:creationId xmlns:a16="http://schemas.microsoft.com/office/drawing/2014/main" id="{4705BE68-2A89-7C22-E273-22908DA58C8D}"/>
               </a:ext>
             </a:extLst>
           </p:cNvPr>
@@ -15832,7 +15832,7 @@
           <p:cNvPr id="6" name="footer-mid">
             <a:extLst>
               <a:ext uri="{FF2B5EF4-FFF2-40B4-BE49-F238E27FC236}">
-                <a16:creationId xmlns:a16="http://schemas.microsoft.com/office/drawing/2014/main" id="{42BA7E5F-83F6-6992-80DC-1F658718FB0E}"/>
+                <a16:creationId xmlns:a16="http://schemas.microsoft.com/office/drawing/2014/main" id="{4800D02B-E7FA-E43A-13C8-CEFDF54E5D90}"/>
               </a:ext>
             </a:extLst>
           </p:cNvPr>
@@ -15878,7 +15878,7 @@
           <p:cNvPr id="7" name="page-num">
             <a:extLst>
               <a:ext uri="{FF2B5EF4-FFF2-40B4-BE49-F238E27FC236}">
-                <a16:creationId xmlns:a16="http://schemas.microsoft.com/office/drawing/2014/main" id="{CF9C4412-9BAE-B1D0-13CD-6AEBADAE747D}"/>
+                <a16:creationId xmlns:a16="http://schemas.microsoft.com/office/drawing/2014/main" id="{CE0C9503-2BCF-1D81-B035-DF4D6DF360E7}"/>
               </a:ext>
             </a:extLst>
           </p:cNvPr>
@@ -15924,7 +15924,7 @@
           <p:cNvPr id="8" name="section-label">
             <a:extLst>
               <a:ext uri="{FF2B5EF4-FFF2-40B4-BE49-F238E27FC236}">
-                <a16:creationId xmlns:a16="http://schemas.microsoft.com/office/drawing/2014/main" id="{FE9F9D50-8BDA-B30F-26CA-1FDBF36620E7}"/>
+                <a16:creationId xmlns:a16="http://schemas.microsoft.com/office/drawing/2014/main" id="{8695FACC-1490-5EAF-4E2F-F07A6B37958B}"/>
               </a:ext>
             </a:extLst>
           </p:cNvPr>
@@ -15970,7 +15970,7 @@
           <p:cNvPr id="10" name="图片 9">
             <a:extLst>
               <a:ext uri="{FF2B5EF4-FFF2-40B4-BE49-F238E27FC236}">
-                <a16:creationId xmlns:a16="http://schemas.microsoft.com/office/drawing/2014/main" id="{CABC51D8-C2AD-382B-210F-CCC70500A034}"/>
+                <a16:creationId xmlns:a16="http://schemas.microsoft.com/office/drawing/2014/main" id="{4ED4C19D-1C53-20AC-7AFB-0461AC5360CB}"/>
               </a:ext>
             </a:extLst>
           </p:cNvPr>
@@ -16006,7 +16006,7 @@
           <p:cNvPr id="11" name="title">
             <a:extLst>
               <a:ext uri="{FF2B5EF4-FFF2-40B4-BE49-F238E27FC236}">
-                <a16:creationId xmlns:a16="http://schemas.microsoft.com/office/drawing/2014/main" id="{22DDBEA6-0B94-C8E7-8E32-9D186CF4548C}"/>
+                <a16:creationId xmlns:a16="http://schemas.microsoft.com/office/drawing/2014/main" id="{C5126E4F-8C58-B9B3-E2DF-4C1631DCED41}"/>
               </a:ext>
             </a:extLst>
           </p:cNvPr>
@@ -16052,7 +16052,7 @@
           <p:cNvPr id="12" name="subtitle">
             <a:extLst>
               <a:ext uri="{FF2B5EF4-FFF2-40B4-BE49-F238E27FC236}">
-                <a16:creationId xmlns:a16="http://schemas.microsoft.com/office/drawing/2014/main" id="{0A908784-0FB1-2439-B534-20A309936EEF}"/>
+                <a16:creationId xmlns:a16="http://schemas.microsoft.com/office/drawing/2014/main" id="{0C1FBFDE-2C4B-4BDB-91C0-3B3D99BE0350}"/>
               </a:ext>
             </a:extLst>
           </p:cNvPr>
@@ -16098,7 +16098,7 @@
           <p:cNvPr id="13" name="qa-row-0">
             <a:extLst>
               <a:ext uri="{FF2B5EF4-FFF2-40B4-BE49-F238E27FC236}">
-                <a16:creationId xmlns:a16="http://schemas.microsoft.com/office/drawing/2014/main" id="{6681EAF7-C547-AFD4-016A-6D450539959E}"/>
+                <a16:creationId xmlns:a16="http://schemas.microsoft.com/office/drawing/2014/main" id="{696B0222-D5A8-5ECD-65C2-A92277FC4E8A}"/>
               </a:ext>
             </a:extLst>
           </p:cNvPr>
@@ -16152,7 +16152,7 @@
           <p:cNvPr id="14" name="q-0">
             <a:extLst>
               <a:ext uri="{FF2B5EF4-FFF2-40B4-BE49-F238E27FC236}">
-                <a16:creationId xmlns:a16="http://schemas.microsoft.com/office/drawing/2014/main" id="{63EE116A-4352-5695-8841-A096610752A2}"/>
+                <a16:creationId xmlns:a16="http://schemas.microsoft.com/office/drawing/2014/main" id="{12A7DB56-EB88-C13F-1406-B08AB2064CDA}"/>
               </a:ext>
             </a:extLst>
           </p:cNvPr>
@@ -16198,7 +16198,7 @@
           <p:cNvPr id="15" name="a-0">
             <a:extLst>
               <a:ext uri="{FF2B5EF4-FFF2-40B4-BE49-F238E27FC236}">
-                <a16:creationId xmlns:a16="http://schemas.microsoft.com/office/drawing/2014/main" id="{473FE789-DC2D-DEF5-11E4-3306E2F7C736}"/>
+                <a16:creationId xmlns:a16="http://schemas.microsoft.com/office/drawing/2014/main" id="{65F2F1BF-258C-9E66-855C-76536BC028D9}"/>
               </a:ext>
             </a:extLst>
           </p:cNvPr>
@@ -16244,7 +16244,7 @@
           <p:cNvPr id="16" name="qa-row-1">
             <a:extLst>
               <a:ext uri="{FF2B5EF4-FFF2-40B4-BE49-F238E27FC236}">
-                <a16:creationId xmlns:a16="http://schemas.microsoft.com/office/drawing/2014/main" id="{1449CE53-BDC9-ECF1-47F4-515DDFD55F73}"/>
+                <a16:creationId xmlns:a16="http://schemas.microsoft.com/office/drawing/2014/main" id="{890A1FAC-1498-2E40-E393-9A2C249770E5}"/>
               </a:ext>
             </a:extLst>
           </p:cNvPr>
@@ -16298,7 +16298,7 @@
           <p:cNvPr id="17" name="q-1">
             <a:extLst>
               <a:ext uri="{FF2B5EF4-FFF2-40B4-BE49-F238E27FC236}">
-                <a16:creationId xmlns:a16="http://schemas.microsoft.com/office/drawing/2014/main" id="{11644D56-3C05-B0CC-F98B-18A527A136F8}"/>
+                <a16:creationId xmlns:a16="http://schemas.microsoft.com/office/drawing/2014/main" id="{1258276F-6EE9-74FE-3E36-9BB894F6A61F}"/>
               </a:ext>
             </a:extLst>
           </p:cNvPr>
@@ -16344,7 +16344,7 @@
           <p:cNvPr id="18" name="a-1">
             <a:extLst>
               <a:ext uri="{FF2B5EF4-FFF2-40B4-BE49-F238E27FC236}">
-                <a16:creationId xmlns:a16="http://schemas.microsoft.com/office/drawing/2014/main" id="{DC445A7C-F6E1-A5E4-580F-C3DA8468477E}"/>
+                <a16:creationId xmlns:a16="http://schemas.microsoft.com/office/drawing/2014/main" id="{B16A513F-0409-F86A-D63D-F1430894A61B}"/>
               </a:ext>
             </a:extLst>
           </p:cNvPr>
@@ -16390,7 +16390,7 @@
           <p:cNvPr id="19" name="qa-row-2">
             <a:extLst>
               <a:ext uri="{FF2B5EF4-FFF2-40B4-BE49-F238E27FC236}">
-                <a16:creationId xmlns:a16="http://schemas.microsoft.com/office/drawing/2014/main" id="{C05AD3E0-1A5E-6FE6-3DAF-A1AB3C503572}"/>
+                <a16:creationId xmlns:a16="http://schemas.microsoft.com/office/drawing/2014/main" id="{05A5C0E5-C73A-EFF8-927D-028A39D6716C}"/>
               </a:ext>
             </a:extLst>
           </p:cNvPr>
@@ -16444,7 +16444,7 @@
           <p:cNvPr id="20" name="q-2">
             <a:extLst>
               <a:ext uri="{FF2B5EF4-FFF2-40B4-BE49-F238E27FC236}">
-                <a16:creationId xmlns:a16="http://schemas.microsoft.com/office/drawing/2014/main" id="{EAC816E1-32B3-A65F-5E92-2CC2F2809555}"/>
+                <a16:creationId xmlns:a16="http://schemas.microsoft.com/office/drawing/2014/main" id="{F39C8F8D-C76C-1BE4-3C4B-BBD014820C5F}"/>
               </a:ext>
             </a:extLst>
           </p:cNvPr>
@@ -16490,7 +16490,7 @@
           <p:cNvPr id="21" name="a-2">
             <a:extLst>
               <a:ext uri="{FF2B5EF4-FFF2-40B4-BE49-F238E27FC236}">
-                <a16:creationId xmlns:a16="http://schemas.microsoft.com/office/drawing/2014/main" id="{024FF407-D6A9-091E-3364-49F5A9BCC3EA}"/>
+                <a16:creationId xmlns:a16="http://schemas.microsoft.com/office/drawing/2014/main" id="{4D928D38-65DD-33D1-40B8-9B98E4A5D65D}"/>
               </a:ext>
             </a:extLst>
           </p:cNvPr>
@@ -16536,7 +16536,7 @@
           <p:cNvPr id="22" name="qa-row-3">
             <a:extLst>
               <a:ext uri="{FF2B5EF4-FFF2-40B4-BE49-F238E27FC236}">
-                <a16:creationId xmlns:a16="http://schemas.microsoft.com/office/drawing/2014/main" id="{3D732FCD-0B36-8B7B-930B-D19ABEB1594D}"/>
+                <a16:creationId xmlns:a16="http://schemas.microsoft.com/office/drawing/2014/main" id="{C8A5D720-4423-D68D-8CB0-2B0A7080A734}"/>
               </a:ext>
             </a:extLst>
           </p:cNvPr>
@@ -16590,7 +16590,7 @@
           <p:cNvPr id="23" name="q-3">
             <a:extLst>
               <a:ext uri="{FF2B5EF4-FFF2-40B4-BE49-F238E27FC236}">
-                <a16:creationId xmlns:a16="http://schemas.microsoft.com/office/drawing/2014/main" id="{DA09ADB2-F1A7-EFDC-4B2C-DE70FC7C16B3}"/>
+                <a16:creationId xmlns:a16="http://schemas.microsoft.com/office/drawing/2014/main" id="{0C8B7ACC-C153-5AFC-697B-6750C74F6967}"/>
               </a:ext>
             </a:extLst>
           </p:cNvPr>
@@ -16636,7 +16636,7 @@
           <p:cNvPr id="24" name="a-3">
             <a:extLst>
               <a:ext uri="{FF2B5EF4-FFF2-40B4-BE49-F238E27FC236}">
-                <a16:creationId xmlns:a16="http://schemas.microsoft.com/office/drawing/2014/main" id="{53105568-03D0-A6FF-27BD-3DAC9D941650}"/>
+                <a16:creationId xmlns:a16="http://schemas.microsoft.com/office/drawing/2014/main" id="{5B45215E-4701-480D-DE0F-E1C5C6173F19}"/>
               </a:ext>
             </a:extLst>
           </p:cNvPr>
@@ -16682,7 +16682,7 @@
           <p:cNvPr id="25" name="qa-row-4">
             <a:extLst>
               <a:ext uri="{FF2B5EF4-FFF2-40B4-BE49-F238E27FC236}">
-                <a16:creationId xmlns:a16="http://schemas.microsoft.com/office/drawing/2014/main" id="{4D69B614-2CCF-918B-A5A0-5DC74B21F54A}"/>
+                <a16:creationId xmlns:a16="http://schemas.microsoft.com/office/drawing/2014/main" id="{C1976337-9F93-CD42-B347-F7725FC4A662}"/>
               </a:ext>
             </a:extLst>
           </p:cNvPr>
@@ -16736,7 +16736,7 @@
           <p:cNvPr id="26" name="q-4">
             <a:extLst>
               <a:ext uri="{FF2B5EF4-FFF2-40B4-BE49-F238E27FC236}">
-                <a16:creationId xmlns:a16="http://schemas.microsoft.com/office/drawing/2014/main" id="{013698EF-F76A-52ED-1759-9028E6210C3E}"/>
+                <a16:creationId xmlns:a16="http://schemas.microsoft.com/office/drawing/2014/main" id="{0E525FA1-6A97-1116-07FB-D8FF94922201}"/>
               </a:ext>
             </a:extLst>
           </p:cNvPr>
@@ -16782,7 +16782,7 @@
           <p:cNvPr id="27" name="a-4">
             <a:extLst>
               <a:ext uri="{FF2B5EF4-FFF2-40B4-BE49-F238E27FC236}">
-                <a16:creationId xmlns:a16="http://schemas.microsoft.com/office/drawing/2014/main" id="{0AD09E11-4E9D-4584-F4CE-CB3F5AE2C6E9}"/>
+                <a16:creationId xmlns:a16="http://schemas.microsoft.com/office/drawing/2014/main" id="{4B42D15E-E8BC-E988-A400-E6F91B2DAC0E}"/>
               </a:ext>
             </a:extLst>
           </p:cNvPr>
@@ -16826,7 +16826,7 @@
     </p:spTree>
     <p:extLst>
       <p:ext uri="{BB962C8B-B14F-4D97-AF65-F5344CB8AC3E}">
-        <p14:creationId xmlns:p14="http://schemas.microsoft.com/office/powerpoint/2010/main" val="848955929"/>
+        <p14:creationId xmlns:p14="http://schemas.microsoft.com/office/powerpoint/2010/main" val="3177828497"/>
       </p:ext>
     </p:extLst>
   </p:cSld>
@@ -16870,7 +16870,7 @@
           <p:cNvPr id="2" name="page-bg">
             <a:extLst>
               <a:ext uri="{FF2B5EF4-FFF2-40B4-BE49-F238E27FC236}">
-                <a16:creationId xmlns:a16="http://schemas.microsoft.com/office/drawing/2014/main" id="{B2DA8DB6-990E-1DBF-907F-456C5D34ADCA}"/>
+                <a16:creationId xmlns:a16="http://schemas.microsoft.com/office/drawing/2014/main" id="{05F4534D-9E0F-673C-DD9B-205B59B408C4}"/>
               </a:ext>
             </a:extLst>
           </p:cNvPr>
@@ -16931,7 +16931,7 @@
           <p:cNvPr id="3" name="left-rail">
             <a:extLst>
               <a:ext uri="{FF2B5EF4-FFF2-40B4-BE49-F238E27FC236}">
-                <a16:creationId xmlns:a16="http://schemas.microsoft.com/office/drawing/2014/main" id="{1C36503D-5947-1BFA-40FE-0B2182D7800D}"/>
+                <a16:creationId xmlns:a16="http://schemas.microsoft.com/office/drawing/2014/main" id="{1A3A46D5-296E-D555-8351-6215552022F0}"/>
               </a:ext>
             </a:extLst>
           </p:cNvPr>
@@ -16992,7 +16992,7 @@
           <p:cNvPr id="4" name="top-line">
             <a:extLst>
               <a:ext uri="{FF2B5EF4-FFF2-40B4-BE49-F238E27FC236}">
-                <a16:creationId xmlns:a16="http://schemas.microsoft.com/office/drawing/2014/main" id="{1087A86F-93EA-00F6-8998-4FC9B4073DE7}"/>
+                <a16:creationId xmlns:a16="http://schemas.microsoft.com/office/drawing/2014/main" id="{CB5D99E0-1044-ABB9-6DF9-F4D5FD796404}"/>
               </a:ext>
             </a:extLst>
           </p:cNvPr>
@@ -17033,7 +17033,7 @@
           <p:cNvPr id="5" name="footer-left">
             <a:extLst>
               <a:ext uri="{FF2B5EF4-FFF2-40B4-BE49-F238E27FC236}">
-                <a16:creationId xmlns:a16="http://schemas.microsoft.com/office/drawing/2014/main" id="{A22DB209-3D21-21AA-1816-B6E0C0C8DB34}"/>
+                <a16:creationId xmlns:a16="http://schemas.microsoft.com/office/drawing/2014/main" id="{59CBD0B1-FDE2-7FE7-1DAA-43A4F6BCA34A}"/>
               </a:ext>
             </a:extLst>
           </p:cNvPr>
@@ -17079,7 +17079,7 @@
           <p:cNvPr id="6" name="footer-mid">
             <a:extLst>
               <a:ext uri="{FF2B5EF4-FFF2-40B4-BE49-F238E27FC236}">
-                <a16:creationId xmlns:a16="http://schemas.microsoft.com/office/drawing/2014/main" id="{A6DE7B88-0A89-632B-3661-7673508B1522}"/>
+                <a16:creationId xmlns:a16="http://schemas.microsoft.com/office/drawing/2014/main" id="{A12A926C-B918-8EC7-FA5C-3D808EDF2B91}"/>
               </a:ext>
             </a:extLst>
           </p:cNvPr>
@@ -17125,7 +17125,7 @@
           <p:cNvPr id="7" name="page-num">
             <a:extLst>
               <a:ext uri="{FF2B5EF4-FFF2-40B4-BE49-F238E27FC236}">
-                <a16:creationId xmlns:a16="http://schemas.microsoft.com/office/drawing/2014/main" id="{19C36FB4-B90F-D9AB-3782-CC400DE55B49}"/>
+                <a16:creationId xmlns:a16="http://schemas.microsoft.com/office/drawing/2014/main" id="{4D545AA2-BBEC-ECDE-1E5E-121E8D0E6FF5}"/>
               </a:ext>
             </a:extLst>
           </p:cNvPr>
@@ -17171,7 +17171,7 @@
           <p:cNvPr id="8" name="section-label">
             <a:extLst>
               <a:ext uri="{FF2B5EF4-FFF2-40B4-BE49-F238E27FC236}">
-                <a16:creationId xmlns:a16="http://schemas.microsoft.com/office/drawing/2014/main" id="{4164E334-2D03-076B-0686-284BA08FC8E3}"/>
+                <a16:creationId xmlns:a16="http://schemas.microsoft.com/office/drawing/2014/main" id="{98BA455F-81DD-6225-3D39-2B95875A5235}"/>
               </a:ext>
             </a:extLst>
           </p:cNvPr>
@@ -17217,7 +17217,7 @@
           <p:cNvPr id="10" name="图片 9">
             <a:extLst>
               <a:ext uri="{FF2B5EF4-FFF2-40B4-BE49-F238E27FC236}">
-                <a16:creationId xmlns:a16="http://schemas.microsoft.com/office/drawing/2014/main" id="{C65FD378-11C0-690F-ADCA-8443938910C3}"/>
+                <a16:creationId xmlns:a16="http://schemas.microsoft.com/office/drawing/2014/main" id="{7681B6FE-4BEA-B32F-AD53-6D2C1D97789A}"/>
               </a:ext>
             </a:extLst>
           </p:cNvPr>
@@ -17253,7 +17253,7 @@
           <p:cNvPr id="11" name="title">
             <a:extLst>
               <a:ext uri="{FF2B5EF4-FFF2-40B4-BE49-F238E27FC236}">
-                <a16:creationId xmlns:a16="http://schemas.microsoft.com/office/drawing/2014/main" id="{C1966915-2BD1-D04C-387E-142CAB127E98}"/>
+                <a16:creationId xmlns:a16="http://schemas.microsoft.com/office/drawing/2014/main" id="{DD1AD0CE-4AD5-8C58-03DE-41F3B89BC393}"/>
               </a:ext>
             </a:extLst>
           </p:cNvPr>
@@ -17299,7 +17299,7 @@
           <p:cNvPr id="12" name="subtitle">
             <a:extLst>
               <a:ext uri="{FF2B5EF4-FFF2-40B4-BE49-F238E27FC236}">
-                <a16:creationId xmlns:a16="http://schemas.microsoft.com/office/drawing/2014/main" id="{3321664D-8ABD-488E-27C2-349437A775F7}"/>
+                <a16:creationId xmlns:a16="http://schemas.microsoft.com/office/drawing/2014/main" id="{9005ABFE-4A9D-1EEC-8B84-6322ADCE275A}"/>
               </a:ext>
             </a:extLst>
           </p:cNvPr>
@@ -17345,7 +17345,7 @@
           <p:cNvPr id="13" name="story-card-0">
             <a:extLst>
               <a:ext uri="{FF2B5EF4-FFF2-40B4-BE49-F238E27FC236}">
-                <a16:creationId xmlns:a16="http://schemas.microsoft.com/office/drawing/2014/main" id="{E1EE212A-E64F-C5AF-14AF-6F9FBAEBD984}"/>
+                <a16:creationId xmlns:a16="http://schemas.microsoft.com/office/drawing/2014/main" id="{B25D4E30-DB06-AFE4-EFBB-C67C769777E3}"/>
               </a:ext>
             </a:extLst>
           </p:cNvPr>
@@ -17399,7 +17399,7 @@
           <p:cNvPr id="14" name="story-top-0">
             <a:extLst>
               <a:ext uri="{FF2B5EF4-FFF2-40B4-BE49-F238E27FC236}">
-                <a16:creationId xmlns:a16="http://schemas.microsoft.com/office/drawing/2014/main" id="{EF92260D-2AFA-A410-CADF-3DA33489ECA1}"/>
+                <a16:creationId xmlns:a16="http://schemas.microsoft.com/office/drawing/2014/main" id="{C2D6E2CD-E469-0D03-F885-D9BC335C07EB}"/>
               </a:ext>
             </a:extLst>
           </p:cNvPr>
@@ -17453,7 +17453,7 @@
           <p:cNvPr id="15" name="story-num-0">
             <a:extLst>
               <a:ext uri="{FF2B5EF4-FFF2-40B4-BE49-F238E27FC236}">
-                <a16:creationId xmlns:a16="http://schemas.microsoft.com/office/drawing/2014/main" id="{D21D439A-6CF2-F065-3905-86D7FCE65357}"/>
+                <a16:creationId xmlns:a16="http://schemas.microsoft.com/office/drawing/2014/main" id="{BBAE8708-8412-ABC4-4C98-F3CECAE8DAE2}"/>
               </a:ext>
             </a:extLst>
           </p:cNvPr>
@@ -17499,7 +17499,7 @@
           <p:cNvPr id="16" name="story-title-0">
             <a:extLst>
               <a:ext uri="{FF2B5EF4-FFF2-40B4-BE49-F238E27FC236}">
-                <a16:creationId xmlns:a16="http://schemas.microsoft.com/office/drawing/2014/main" id="{0AAF3B3D-D123-4382-455B-16DCFBAC5F2E}"/>
+                <a16:creationId xmlns:a16="http://schemas.microsoft.com/office/drawing/2014/main" id="{CAFC6AC3-B338-A743-244C-D56EDD12D854}"/>
               </a:ext>
             </a:extLst>
           </p:cNvPr>
@@ -17545,7 +17545,7 @@
           <p:cNvPr id="17" name="story-sub-0">
             <a:extLst>
               <a:ext uri="{FF2B5EF4-FFF2-40B4-BE49-F238E27FC236}">
-                <a16:creationId xmlns:a16="http://schemas.microsoft.com/office/drawing/2014/main" id="{03D4C9C9-75F9-3EBB-1CCD-AAD9942C2D34}"/>
+                <a16:creationId xmlns:a16="http://schemas.microsoft.com/office/drawing/2014/main" id="{FD942674-680B-F6B4-0DE6-8E2495CA2302}"/>
               </a:ext>
             </a:extLst>
           </p:cNvPr>
@@ -17591,7 +17591,7 @@
           <p:cNvPr id="18" name="story-line-0">
             <a:extLst>
               <a:ext uri="{FF2B5EF4-FFF2-40B4-BE49-F238E27FC236}">
-                <a16:creationId xmlns:a16="http://schemas.microsoft.com/office/drawing/2014/main" id="{5EAA67E1-AE60-2976-61B9-A07C813D2890}"/>
+                <a16:creationId xmlns:a16="http://schemas.microsoft.com/office/drawing/2014/main" id="{964AEAF1-072B-5852-D69E-639FB212F935}"/>
               </a:ext>
             </a:extLst>
           </p:cNvPr>
@@ -17632,7 +17632,7 @@
           <p:cNvPr id="19" name="story-card-1">
             <a:extLst>
               <a:ext uri="{FF2B5EF4-FFF2-40B4-BE49-F238E27FC236}">
-                <a16:creationId xmlns:a16="http://schemas.microsoft.com/office/drawing/2014/main" id="{D7A39EE1-DCB3-ED42-7485-5A782879E4F7}"/>
+                <a16:creationId xmlns:a16="http://schemas.microsoft.com/office/drawing/2014/main" id="{CF1612FD-C2BA-B3F4-FCCF-179837F419BB}"/>
               </a:ext>
             </a:extLst>
           </p:cNvPr>
@@ -17686,7 +17686,7 @@
           <p:cNvPr id="20" name="story-top-1">
             <a:extLst>
               <a:ext uri="{FF2B5EF4-FFF2-40B4-BE49-F238E27FC236}">
-                <a16:creationId xmlns:a16="http://schemas.microsoft.com/office/drawing/2014/main" id="{2A0295A3-2FEA-E7E8-F4B7-D90C9BCD0BA1}"/>
+                <a16:creationId xmlns:a16="http://schemas.microsoft.com/office/drawing/2014/main" id="{6737D042-722E-23E8-32A8-7238A9EE6437}"/>
               </a:ext>
             </a:extLst>
           </p:cNvPr>
@@ -17740,7 +17740,7 @@
           <p:cNvPr id="21" name="story-num-1">
             <a:extLst>
               <a:ext uri="{FF2B5EF4-FFF2-40B4-BE49-F238E27FC236}">
-                <a16:creationId xmlns:a16="http://schemas.microsoft.com/office/drawing/2014/main" id="{A5AD3D28-2404-42CC-AC25-C361BC3A38D9}"/>
+                <a16:creationId xmlns:a16="http://schemas.microsoft.com/office/drawing/2014/main" id="{468276E1-8596-CC3F-485C-032949C8085A}"/>
               </a:ext>
             </a:extLst>
           </p:cNvPr>
@@ -17786,7 +17786,7 @@
           <p:cNvPr id="22" name="story-title-1">
             <a:extLst>
               <a:ext uri="{FF2B5EF4-FFF2-40B4-BE49-F238E27FC236}">
-                <a16:creationId xmlns:a16="http://schemas.microsoft.com/office/drawing/2014/main" id="{1988E3EA-C696-9661-47BF-2B87D68C9725}"/>
+                <a16:creationId xmlns:a16="http://schemas.microsoft.com/office/drawing/2014/main" id="{F39E9FF7-3C24-4290-B909-E37C76F7F502}"/>
               </a:ext>
             </a:extLst>
           </p:cNvPr>
@@ -17832,7 +17832,7 @@
           <p:cNvPr id="23" name="story-sub-1">
             <a:extLst>
               <a:ext uri="{FF2B5EF4-FFF2-40B4-BE49-F238E27FC236}">
-                <a16:creationId xmlns:a16="http://schemas.microsoft.com/office/drawing/2014/main" id="{F93BC5EB-4561-09C4-1777-94D7B4FBFE13}"/>
+                <a16:creationId xmlns:a16="http://schemas.microsoft.com/office/drawing/2014/main" id="{19978995-DB6A-F82A-882A-FCA79CF41F24}"/>
               </a:ext>
             </a:extLst>
           </p:cNvPr>
@@ -17878,7 +17878,7 @@
           <p:cNvPr id="24" name="story-line-1">
             <a:extLst>
               <a:ext uri="{FF2B5EF4-FFF2-40B4-BE49-F238E27FC236}">
-                <a16:creationId xmlns:a16="http://schemas.microsoft.com/office/drawing/2014/main" id="{DE15FFBA-4C9F-9B43-0DAF-8CFC86D51C87}"/>
+                <a16:creationId xmlns:a16="http://schemas.microsoft.com/office/drawing/2014/main" id="{47197CA2-3876-013C-E625-6980A589CBAA}"/>
               </a:ext>
             </a:extLst>
           </p:cNvPr>
@@ -17919,7 +17919,7 @@
           <p:cNvPr id="25" name="story-card-2">
             <a:extLst>
               <a:ext uri="{FF2B5EF4-FFF2-40B4-BE49-F238E27FC236}">
-                <a16:creationId xmlns:a16="http://schemas.microsoft.com/office/drawing/2014/main" id="{A953EFD1-13CE-8FC6-7729-7A1274693B3E}"/>
+                <a16:creationId xmlns:a16="http://schemas.microsoft.com/office/drawing/2014/main" id="{E7516CA4-DC4F-13CB-C2D8-84CCFF7B54E2}"/>
               </a:ext>
             </a:extLst>
           </p:cNvPr>
@@ -17973,7 +17973,7 @@
           <p:cNvPr id="26" name="story-top-2">
             <a:extLst>
               <a:ext uri="{FF2B5EF4-FFF2-40B4-BE49-F238E27FC236}">
-                <a16:creationId xmlns:a16="http://schemas.microsoft.com/office/drawing/2014/main" id="{BD99C3C0-26F4-B7F2-63F7-F260A887AC64}"/>
+                <a16:creationId xmlns:a16="http://schemas.microsoft.com/office/drawing/2014/main" id="{0AE22896-F4B4-D216-F587-FCE1FD7877DF}"/>
               </a:ext>
             </a:extLst>
           </p:cNvPr>
@@ -18027,7 +18027,7 @@
           <p:cNvPr id="27" name="story-num-2">
             <a:extLst>
               <a:ext uri="{FF2B5EF4-FFF2-40B4-BE49-F238E27FC236}">
-                <a16:creationId xmlns:a16="http://schemas.microsoft.com/office/drawing/2014/main" id="{DEFD8D2A-C420-5DDA-7498-7B355C1C1EEB}"/>
+                <a16:creationId xmlns:a16="http://schemas.microsoft.com/office/drawing/2014/main" id="{A54D5BA7-706B-3417-F735-820CD6670316}"/>
               </a:ext>
             </a:extLst>
           </p:cNvPr>
@@ -18073,7 +18073,7 @@
           <p:cNvPr id="28" name="story-title-2">
             <a:extLst>
               <a:ext uri="{FF2B5EF4-FFF2-40B4-BE49-F238E27FC236}">
-                <a16:creationId xmlns:a16="http://schemas.microsoft.com/office/drawing/2014/main" id="{2F93CAC9-436E-17F5-8E79-45BC297F2181}"/>
+                <a16:creationId xmlns:a16="http://schemas.microsoft.com/office/drawing/2014/main" id="{6279D441-B64A-6599-A340-43B42EFE16B7}"/>
               </a:ext>
             </a:extLst>
           </p:cNvPr>
@@ -18119,7 +18119,7 @@
           <p:cNvPr id="29" name="story-sub-2">
             <a:extLst>
               <a:ext uri="{FF2B5EF4-FFF2-40B4-BE49-F238E27FC236}">
-                <a16:creationId xmlns:a16="http://schemas.microsoft.com/office/drawing/2014/main" id="{57BF8D13-AEE1-D452-C47C-1DA8D1E27E55}"/>
+                <a16:creationId xmlns:a16="http://schemas.microsoft.com/office/drawing/2014/main" id="{7683CF45-B121-6D05-DDB2-0F4593E2435D}"/>
               </a:ext>
             </a:extLst>
           </p:cNvPr>
@@ -18165,7 +18165,7 @@
           <p:cNvPr id="30" name="story-line-2">
             <a:extLst>
               <a:ext uri="{FF2B5EF4-FFF2-40B4-BE49-F238E27FC236}">
-                <a16:creationId xmlns:a16="http://schemas.microsoft.com/office/drawing/2014/main" id="{D744842E-7562-E3C8-F8C5-73007E3517DF}"/>
+                <a16:creationId xmlns:a16="http://schemas.microsoft.com/office/drawing/2014/main" id="{2C5AD309-C10F-C7AB-582A-9C2828037A25}"/>
               </a:ext>
             </a:extLst>
           </p:cNvPr>
@@ -18206,7 +18206,7 @@
           <p:cNvPr id="31" name="story-card-3">
             <a:extLst>
               <a:ext uri="{FF2B5EF4-FFF2-40B4-BE49-F238E27FC236}">
-                <a16:creationId xmlns:a16="http://schemas.microsoft.com/office/drawing/2014/main" id="{CBAA7A68-FEB9-0AE2-B2AB-86AE6F6AF81D}"/>
+                <a16:creationId xmlns:a16="http://schemas.microsoft.com/office/drawing/2014/main" id="{59A7B599-AD8B-FC6F-CBBB-AA97F350DD2F}"/>
               </a:ext>
             </a:extLst>
           </p:cNvPr>
@@ -18260,7 +18260,7 @@
           <p:cNvPr id="32" name="story-top-3">
             <a:extLst>
               <a:ext uri="{FF2B5EF4-FFF2-40B4-BE49-F238E27FC236}">
-                <a16:creationId xmlns:a16="http://schemas.microsoft.com/office/drawing/2014/main" id="{AB2D3624-3413-CE48-EE7B-A357108DC901}"/>
+                <a16:creationId xmlns:a16="http://schemas.microsoft.com/office/drawing/2014/main" id="{A40998B4-A9DC-BD3D-2F5E-3195C5101DA9}"/>
               </a:ext>
             </a:extLst>
           </p:cNvPr>
@@ -18314,7 +18314,7 @@
           <p:cNvPr id="33" name="story-num-3">
             <a:extLst>
               <a:ext uri="{FF2B5EF4-FFF2-40B4-BE49-F238E27FC236}">
-                <a16:creationId xmlns:a16="http://schemas.microsoft.com/office/drawing/2014/main" id="{068422A2-2493-A104-5B8A-3EBCFDBC42F9}"/>
+                <a16:creationId xmlns:a16="http://schemas.microsoft.com/office/drawing/2014/main" id="{BA6825CA-D62C-9D81-1850-26F5BA1509AE}"/>
               </a:ext>
             </a:extLst>
           </p:cNvPr>
@@ -18360,7 +18360,7 @@
           <p:cNvPr id="34" name="story-title-3">
             <a:extLst>
               <a:ext uri="{FF2B5EF4-FFF2-40B4-BE49-F238E27FC236}">
-                <a16:creationId xmlns:a16="http://schemas.microsoft.com/office/drawing/2014/main" id="{7E32CC55-A795-2B49-0B54-8C7EBD8EEDE8}"/>
+                <a16:creationId xmlns:a16="http://schemas.microsoft.com/office/drawing/2014/main" id="{B026BF69-187A-223E-B094-3BDF2EE2F13C}"/>
               </a:ext>
             </a:extLst>
           </p:cNvPr>
@@ -18406,7 +18406,7 @@
           <p:cNvPr id="35" name="story-sub-3">
             <a:extLst>
               <a:ext uri="{FF2B5EF4-FFF2-40B4-BE49-F238E27FC236}">
-                <a16:creationId xmlns:a16="http://schemas.microsoft.com/office/drawing/2014/main" id="{65513231-7C4E-BDA1-938F-E30CFB2BE4A8}"/>
+                <a16:creationId xmlns:a16="http://schemas.microsoft.com/office/drawing/2014/main" id="{FA357FD9-6B60-420E-987A-E2D4067FBAB0}"/>
               </a:ext>
             </a:extLst>
           </p:cNvPr>
@@ -18452,7 +18452,7 @@
           <p:cNvPr id="36" name="time-box">
             <a:extLst>
               <a:ext uri="{FF2B5EF4-FFF2-40B4-BE49-F238E27FC236}">
-                <a16:creationId xmlns:a16="http://schemas.microsoft.com/office/drawing/2014/main" id="{DF09C7F8-A4D3-D269-DD5A-856FB25280F1}"/>
+                <a16:creationId xmlns:a16="http://schemas.microsoft.com/office/drawing/2014/main" id="{BAD5335B-6538-CDD5-5A4E-A303774F7265}"/>
               </a:ext>
             </a:extLst>
           </p:cNvPr>
@@ -18506,7 +18506,7 @@
           <p:cNvPr id="37" name="time-text">
             <a:extLst>
               <a:ext uri="{FF2B5EF4-FFF2-40B4-BE49-F238E27FC236}">
-                <a16:creationId xmlns:a16="http://schemas.microsoft.com/office/drawing/2014/main" id="{A7567D14-67B5-B9D6-B652-668269666163}"/>
+                <a16:creationId xmlns:a16="http://schemas.microsoft.com/office/drawing/2014/main" id="{28F1B08E-E3E7-42FE-89CD-D0E018F1790B}"/>
               </a:ext>
             </a:extLst>
           </p:cNvPr>
@@ -18550,7 +18550,7 @@
     </p:spTree>
     <p:extLst>
       <p:ext uri="{BB962C8B-B14F-4D97-AF65-F5344CB8AC3E}">
-        <p14:creationId xmlns:p14="http://schemas.microsoft.com/office/powerpoint/2010/main" val="1896739953"/>
+        <p14:creationId xmlns:p14="http://schemas.microsoft.com/office/powerpoint/2010/main" val="1042263075"/>
       </p:ext>
     </p:extLst>
   </p:cSld>
@@ -18594,7 +18594,7 @@
           <p:cNvPr id="2" name="page-bg">
             <a:extLst>
               <a:ext uri="{FF2B5EF4-FFF2-40B4-BE49-F238E27FC236}">
-                <a16:creationId xmlns:a16="http://schemas.microsoft.com/office/drawing/2014/main" id="{56F48FC7-EF66-521B-F657-05D36532F355}"/>
+                <a16:creationId xmlns:a16="http://schemas.microsoft.com/office/drawing/2014/main" id="{7034BFAA-AF18-8B33-EEE3-86E8970A6917}"/>
               </a:ext>
             </a:extLst>
           </p:cNvPr>
@@ -18655,7 +18655,7 @@
           <p:cNvPr id="3" name="left-rail">
             <a:extLst>
               <a:ext uri="{FF2B5EF4-FFF2-40B4-BE49-F238E27FC236}">
-                <a16:creationId xmlns:a16="http://schemas.microsoft.com/office/drawing/2014/main" id="{C534969A-AF61-AF49-7BD0-C47F26571CDC}"/>
+                <a16:creationId xmlns:a16="http://schemas.microsoft.com/office/drawing/2014/main" id="{3039EE19-01C5-A86C-DCFA-4B5D92A516ED}"/>
               </a:ext>
             </a:extLst>
           </p:cNvPr>
@@ -18716,7 +18716,7 @@
           <p:cNvPr id="4" name="top-line">
             <a:extLst>
               <a:ext uri="{FF2B5EF4-FFF2-40B4-BE49-F238E27FC236}">
-                <a16:creationId xmlns:a16="http://schemas.microsoft.com/office/drawing/2014/main" id="{B3FE7084-EAF0-1877-15AB-FE4D7B2D76B4}"/>
+                <a16:creationId xmlns:a16="http://schemas.microsoft.com/office/drawing/2014/main" id="{FB07C0D4-8A03-B8FD-2CF2-2BC54A4F0A9E}"/>
               </a:ext>
             </a:extLst>
           </p:cNvPr>
@@ -18757,7 +18757,7 @@
           <p:cNvPr id="5" name="footer-left">
             <a:extLst>
               <a:ext uri="{FF2B5EF4-FFF2-40B4-BE49-F238E27FC236}">
-                <a16:creationId xmlns:a16="http://schemas.microsoft.com/office/drawing/2014/main" id="{0D53421B-F9D5-F720-4ACE-214FCCDD1B1A}"/>
+                <a16:creationId xmlns:a16="http://schemas.microsoft.com/office/drawing/2014/main" id="{04206ADC-7343-4E32-FF56-E58D794F969B}"/>
               </a:ext>
             </a:extLst>
           </p:cNvPr>
@@ -18803,7 +18803,7 @@
           <p:cNvPr id="6" name="footer-mid">
             <a:extLst>
               <a:ext uri="{FF2B5EF4-FFF2-40B4-BE49-F238E27FC236}">
-                <a16:creationId xmlns:a16="http://schemas.microsoft.com/office/drawing/2014/main" id="{43E4AB19-FBDF-23F6-CD2E-1A4B4FEE6457}"/>
+                <a16:creationId xmlns:a16="http://schemas.microsoft.com/office/drawing/2014/main" id="{4F4FCDB6-692E-1337-EC43-BC4EB29FCE15}"/>
               </a:ext>
             </a:extLst>
           </p:cNvPr>
@@ -18849,7 +18849,7 @@
           <p:cNvPr id="7" name="page-num">
             <a:extLst>
               <a:ext uri="{FF2B5EF4-FFF2-40B4-BE49-F238E27FC236}">
-                <a16:creationId xmlns:a16="http://schemas.microsoft.com/office/drawing/2014/main" id="{9C9736F3-33BC-EE8D-D719-BC91556FA289}"/>
+                <a16:creationId xmlns:a16="http://schemas.microsoft.com/office/drawing/2014/main" id="{2103848E-1884-918E-0E3E-64B427436975}"/>
               </a:ext>
             </a:extLst>
           </p:cNvPr>
@@ -18895,7 +18895,7 @@
           <p:cNvPr id="8" name="section-label">
             <a:extLst>
               <a:ext uri="{FF2B5EF4-FFF2-40B4-BE49-F238E27FC236}">
-                <a16:creationId xmlns:a16="http://schemas.microsoft.com/office/drawing/2014/main" id="{4BD906F2-F01A-5A73-97F6-80782C51F110}"/>
+                <a16:creationId xmlns:a16="http://schemas.microsoft.com/office/drawing/2014/main" id="{BD3B566D-9855-DDDC-ED10-DE95BE9F45EB}"/>
               </a:ext>
             </a:extLst>
           </p:cNvPr>
@@ -18941,7 +18941,7 @@
           <p:cNvPr id="10" name="图片 9">
             <a:extLst>
               <a:ext uri="{FF2B5EF4-FFF2-40B4-BE49-F238E27FC236}">
-                <a16:creationId xmlns:a16="http://schemas.microsoft.com/office/drawing/2014/main" id="{F7B66F7A-CF06-FC1C-57D6-48973B59D6D2}"/>
+                <a16:creationId xmlns:a16="http://schemas.microsoft.com/office/drawing/2014/main" id="{73C66F31-3D0D-874A-7AB9-80703B7AAE9B}"/>
               </a:ext>
             </a:extLst>
           </p:cNvPr>
@@ -18977,7 +18977,7 @@
           <p:cNvPr id="11" name="title">
             <a:extLst>
               <a:ext uri="{FF2B5EF4-FFF2-40B4-BE49-F238E27FC236}">
-                <a16:creationId xmlns:a16="http://schemas.microsoft.com/office/drawing/2014/main" id="{29CDC168-9593-EE26-39F1-4C4315D1128D}"/>
+                <a16:creationId xmlns:a16="http://schemas.microsoft.com/office/drawing/2014/main" id="{EE80A7A1-EC93-FD44-5AD1-A44900390EED}"/>
               </a:ext>
             </a:extLst>
           </p:cNvPr>
@@ -19023,7 +19023,7 @@
           <p:cNvPr id="12" name="subtitle">
             <a:extLst>
               <a:ext uri="{FF2B5EF4-FFF2-40B4-BE49-F238E27FC236}">
-                <a16:creationId xmlns:a16="http://schemas.microsoft.com/office/drawing/2014/main" id="{8225EBDD-18ED-43B4-E325-60C755930966}"/>
+                <a16:creationId xmlns:a16="http://schemas.microsoft.com/office/drawing/2014/main" id="{DB366D0A-7824-72DC-4DF9-2869D471D3EE}"/>
               </a:ext>
             </a:extLst>
           </p:cNvPr>
@@ -19069,7 +19069,7 @@
           <p:cNvPr id="13" name="code-panel">
             <a:extLst>
               <a:ext uri="{FF2B5EF4-FFF2-40B4-BE49-F238E27FC236}">
-                <a16:creationId xmlns:a16="http://schemas.microsoft.com/office/drawing/2014/main" id="{D960E057-1A8C-BEDC-1A8D-47BB65487CC2}"/>
+                <a16:creationId xmlns:a16="http://schemas.microsoft.com/office/drawing/2014/main" id="{926ED0B8-FB4C-5AC6-E82D-7B91BF3DD499}"/>
               </a:ext>
             </a:extLst>
           </p:cNvPr>
@@ -19130,7 +19130,7 @@
           <p:cNvPr id="14" name="code-title">
             <a:extLst>
               <a:ext uri="{FF2B5EF4-FFF2-40B4-BE49-F238E27FC236}">
-                <a16:creationId xmlns:a16="http://schemas.microsoft.com/office/drawing/2014/main" id="{7B7CDE0D-1A52-08F5-0B2B-DB7567E0CC8B}"/>
+                <a16:creationId xmlns:a16="http://schemas.microsoft.com/office/drawing/2014/main" id="{D6B8B76E-8D96-3A46-03A8-40BEBA26E252}"/>
               </a:ext>
             </a:extLst>
           </p:cNvPr>
@@ -19176,7 +19176,7 @@
           <p:cNvPr id="15" name="code">
             <a:extLst>
               <a:ext uri="{FF2B5EF4-FFF2-40B4-BE49-F238E27FC236}">
-                <a16:creationId xmlns:a16="http://schemas.microsoft.com/office/drawing/2014/main" id="{57FDCAEE-EF67-F711-FE47-4A4605CFDCE5}"/>
+                <a16:creationId xmlns:a16="http://schemas.microsoft.com/office/drawing/2014/main" id="{A3B5C73F-6554-9DEF-6B62-5E5909D25277}"/>
               </a:ext>
             </a:extLst>
           </p:cNvPr>
@@ -19225,7 +19225,7 @@
           <p:cNvPr id="16" name="flow-box-0">
             <a:extLst>
               <a:ext uri="{FF2B5EF4-FFF2-40B4-BE49-F238E27FC236}">
-                <a16:creationId xmlns:a16="http://schemas.microsoft.com/office/drawing/2014/main" id="{4722E9F8-CBCD-31FD-337D-81816BF30190}"/>
+                <a16:creationId xmlns:a16="http://schemas.microsoft.com/office/drawing/2014/main" id="{29060469-4CE5-56FF-5A2A-E3BDF7F0E64C}"/>
               </a:ext>
             </a:extLst>
           </p:cNvPr>
@@ -19279,7 +19279,7 @@
           <p:cNvPr id="17" name="flow-title-0">
             <a:extLst>
               <a:ext uri="{FF2B5EF4-FFF2-40B4-BE49-F238E27FC236}">
-                <a16:creationId xmlns:a16="http://schemas.microsoft.com/office/drawing/2014/main" id="{EE3D1419-E047-504D-6B5D-56903285D288}"/>
+                <a16:creationId xmlns:a16="http://schemas.microsoft.com/office/drawing/2014/main" id="{D3E4BDF9-C775-1910-5AFD-64AF49B8822F}"/>
               </a:ext>
             </a:extLst>
           </p:cNvPr>
@@ -19325,7 +19325,7 @@
           <p:cNvPr id="18" name="flow-sub-0">
             <a:extLst>
               <a:ext uri="{FF2B5EF4-FFF2-40B4-BE49-F238E27FC236}">
-                <a16:creationId xmlns:a16="http://schemas.microsoft.com/office/drawing/2014/main" id="{9DD73395-F798-5D61-8CC9-3FDEF6F42B0A}"/>
+                <a16:creationId xmlns:a16="http://schemas.microsoft.com/office/drawing/2014/main" id="{449A2BE7-75D5-26C9-C275-34A9906AC8F8}"/>
               </a:ext>
             </a:extLst>
           </p:cNvPr>
@@ -19371,7 +19371,7 @@
           <p:cNvPr id="19" name="flow-arrow-0">
             <a:extLst>
               <a:ext uri="{FF2B5EF4-FFF2-40B4-BE49-F238E27FC236}">
-                <a16:creationId xmlns:a16="http://schemas.microsoft.com/office/drawing/2014/main" id="{80CC5169-B192-1835-011A-51EF8D55B4BF}"/>
+                <a16:creationId xmlns:a16="http://schemas.microsoft.com/office/drawing/2014/main" id="{F18CE2CD-24F2-9AA5-0E84-582189743423}"/>
               </a:ext>
             </a:extLst>
           </p:cNvPr>
@@ -19412,7 +19412,7 @@
           <p:cNvPr id="20" name="flow-box-1">
             <a:extLst>
               <a:ext uri="{FF2B5EF4-FFF2-40B4-BE49-F238E27FC236}">
-                <a16:creationId xmlns:a16="http://schemas.microsoft.com/office/drawing/2014/main" id="{C48B46EF-00D2-9E59-2F57-8AD7EEAEFF8D}"/>
+                <a16:creationId xmlns:a16="http://schemas.microsoft.com/office/drawing/2014/main" id="{8E2BDBD0-04DA-6407-A026-99CFE4548D0C}"/>
               </a:ext>
             </a:extLst>
           </p:cNvPr>
@@ -19466,7 +19466,7 @@
           <p:cNvPr id="21" name="flow-title-1">
             <a:extLst>
               <a:ext uri="{FF2B5EF4-FFF2-40B4-BE49-F238E27FC236}">
-                <a16:creationId xmlns:a16="http://schemas.microsoft.com/office/drawing/2014/main" id="{ABF87AC3-71D4-AA5D-8379-FAE90AA0A2AF}"/>
+                <a16:creationId xmlns:a16="http://schemas.microsoft.com/office/drawing/2014/main" id="{04B53322-944B-1C44-B0A3-92A8113FDE2D}"/>
               </a:ext>
             </a:extLst>
           </p:cNvPr>
@@ -19512,7 +19512,7 @@
           <p:cNvPr id="22" name="flow-sub-1">
             <a:extLst>
               <a:ext uri="{FF2B5EF4-FFF2-40B4-BE49-F238E27FC236}">
-                <a16:creationId xmlns:a16="http://schemas.microsoft.com/office/drawing/2014/main" id="{1FF89B32-71E6-7AB1-60C3-4F5F1E15F3FD}"/>
+                <a16:creationId xmlns:a16="http://schemas.microsoft.com/office/drawing/2014/main" id="{17EEB471-A8E6-B972-A2B9-F7892659CC72}"/>
               </a:ext>
             </a:extLst>
           </p:cNvPr>
@@ -19558,7 +19558,7 @@
           <p:cNvPr id="23" name="flow-arrow-1">
             <a:extLst>
               <a:ext uri="{FF2B5EF4-FFF2-40B4-BE49-F238E27FC236}">
-                <a16:creationId xmlns:a16="http://schemas.microsoft.com/office/drawing/2014/main" id="{68A19176-F121-887C-9F64-DD47507539B2}"/>
+                <a16:creationId xmlns:a16="http://schemas.microsoft.com/office/drawing/2014/main" id="{E24C4D3F-1304-7559-AAC0-E0A738C7D877}"/>
               </a:ext>
             </a:extLst>
           </p:cNvPr>
@@ -19599,7 +19599,7 @@
           <p:cNvPr id="24" name="flow-box-2">
             <a:extLst>
               <a:ext uri="{FF2B5EF4-FFF2-40B4-BE49-F238E27FC236}">
-                <a16:creationId xmlns:a16="http://schemas.microsoft.com/office/drawing/2014/main" id="{ABA383A0-D85B-AABF-FE7A-B2D0E16AEFAC}"/>
+                <a16:creationId xmlns:a16="http://schemas.microsoft.com/office/drawing/2014/main" id="{BEFD28E5-E6FA-91A3-FBC5-860CE1E186C6}"/>
               </a:ext>
             </a:extLst>
           </p:cNvPr>
@@ -19653,7 +19653,7 @@
           <p:cNvPr id="25" name="flow-title-2">
             <a:extLst>
               <a:ext uri="{FF2B5EF4-FFF2-40B4-BE49-F238E27FC236}">
-                <a16:creationId xmlns:a16="http://schemas.microsoft.com/office/drawing/2014/main" id="{D0E69917-720F-F493-406C-D12751A5B0D4}"/>
+                <a16:creationId xmlns:a16="http://schemas.microsoft.com/office/drawing/2014/main" id="{7C172B0A-3E0F-C865-0402-44FB5729FB6B}"/>
               </a:ext>
             </a:extLst>
           </p:cNvPr>
@@ -19699,7 +19699,7 @@
           <p:cNvPr id="26" name="flow-sub-2">
             <a:extLst>
               <a:ext uri="{FF2B5EF4-FFF2-40B4-BE49-F238E27FC236}">
-                <a16:creationId xmlns:a16="http://schemas.microsoft.com/office/drawing/2014/main" id="{A433F386-9282-670D-537D-C09115F36AB5}"/>
+                <a16:creationId xmlns:a16="http://schemas.microsoft.com/office/drawing/2014/main" id="{02B4B23A-8B8B-2AC9-B224-1724484E5ADF}"/>
               </a:ext>
             </a:extLst>
           </p:cNvPr>
@@ -19745,7 +19745,7 @@
           <p:cNvPr id="27" name="flow-arrow-2">
             <a:extLst>
               <a:ext uri="{FF2B5EF4-FFF2-40B4-BE49-F238E27FC236}">
-                <a16:creationId xmlns:a16="http://schemas.microsoft.com/office/drawing/2014/main" id="{35E7C55F-6C69-B64B-516F-7F2FD27106A9}"/>
+                <a16:creationId xmlns:a16="http://schemas.microsoft.com/office/drawing/2014/main" id="{04F0EB81-5B66-5870-F8C2-6F43871FFDC4}"/>
               </a:ext>
             </a:extLst>
           </p:cNvPr>
@@ -19786,7 +19786,7 @@
           <p:cNvPr id="28" name="flow-box-3">
             <a:extLst>
               <a:ext uri="{FF2B5EF4-FFF2-40B4-BE49-F238E27FC236}">
-                <a16:creationId xmlns:a16="http://schemas.microsoft.com/office/drawing/2014/main" id="{330CE6D4-276F-CEA3-539C-511F9BA643F5}"/>
+                <a16:creationId xmlns:a16="http://schemas.microsoft.com/office/drawing/2014/main" id="{2C1CBFCA-8514-AE88-B8BF-D60B74D00BB7}"/>
               </a:ext>
             </a:extLst>
           </p:cNvPr>
@@ -19840,7 +19840,7 @@
           <p:cNvPr id="29" name="flow-title-3">
             <a:extLst>
               <a:ext uri="{FF2B5EF4-FFF2-40B4-BE49-F238E27FC236}">
-                <a16:creationId xmlns:a16="http://schemas.microsoft.com/office/drawing/2014/main" id="{0D9C3161-2B1C-C21F-605F-EC1A7822CF9A}"/>
+                <a16:creationId xmlns:a16="http://schemas.microsoft.com/office/drawing/2014/main" id="{7AA10783-BA85-EE46-A28A-FED939627AC5}"/>
               </a:ext>
             </a:extLst>
           </p:cNvPr>
@@ -19886,7 +19886,7 @@
           <p:cNvPr id="30" name="flow-sub-3">
             <a:extLst>
               <a:ext uri="{FF2B5EF4-FFF2-40B4-BE49-F238E27FC236}">
-                <a16:creationId xmlns:a16="http://schemas.microsoft.com/office/drawing/2014/main" id="{A24BA043-7D44-58BB-14F9-5374F4879BD8}"/>
+                <a16:creationId xmlns:a16="http://schemas.microsoft.com/office/drawing/2014/main" id="{BF09F8C7-7CD1-FA09-55E7-37AC5CCF2873}"/>
               </a:ext>
             </a:extLst>
           </p:cNvPr>
@@ -19932,7 +19932,7 @@
           <p:cNvPr id="31" name="question">
             <a:extLst>
               <a:ext uri="{FF2B5EF4-FFF2-40B4-BE49-F238E27FC236}">
-                <a16:creationId xmlns:a16="http://schemas.microsoft.com/office/drawing/2014/main" id="{C3E1A422-1248-1B63-F2B3-80753D3ADE57}"/>
+                <a16:creationId xmlns:a16="http://schemas.microsoft.com/office/drawing/2014/main" id="{0B96C2D9-5DEF-DDE2-E595-AAF447FAA175}"/>
               </a:ext>
             </a:extLst>
           </p:cNvPr>
@@ -19986,7 +19986,7 @@
           <p:cNvPr id="32" name="question-text">
             <a:extLst>
               <a:ext uri="{FF2B5EF4-FFF2-40B4-BE49-F238E27FC236}">
-                <a16:creationId xmlns:a16="http://schemas.microsoft.com/office/drawing/2014/main" id="{732C348F-D6FD-2ABE-E2ED-BA7355983758}"/>
+                <a16:creationId xmlns:a16="http://schemas.microsoft.com/office/drawing/2014/main" id="{58CF1D6D-48C6-6449-3038-D1198C7E5423}"/>
               </a:ext>
             </a:extLst>
           </p:cNvPr>
@@ -20030,7 +20030,7 @@
     </p:spTree>
     <p:extLst>
       <p:ext uri="{BB962C8B-B14F-4D97-AF65-F5344CB8AC3E}">
-        <p14:creationId xmlns:p14="http://schemas.microsoft.com/office/powerpoint/2010/main" val="2285146834"/>
+        <p14:creationId xmlns:p14="http://schemas.microsoft.com/office/powerpoint/2010/main" val="2959212323"/>
       </p:ext>
     </p:extLst>
   </p:cSld>
@@ -20074,7 +20074,7 @@
           <p:cNvPr id="2" name="dark-bg">
             <a:extLst>
               <a:ext uri="{FF2B5EF4-FFF2-40B4-BE49-F238E27FC236}">
-                <a16:creationId xmlns:a16="http://schemas.microsoft.com/office/drawing/2014/main" id="{36E1D049-A96D-F517-4F4E-3ACB9BDD5722}"/>
+                <a16:creationId xmlns:a16="http://schemas.microsoft.com/office/drawing/2014/main" id="{4E06CC28-88CD-7C9F-3775-D5B7D791E847}"/>
               </a:ext>
             </a:extLst>
           </p:cNvPr>
@@ -20135,7 +20135,7 @@
           <p:cNvPr id="3" name="dark-panel">
             <a:extLst>
               <a:ext uri="{FF2B5EF4-FFF2-40B4-BE49-F238E27FC236}">
-                <a16:creationId xmlns:a16="http://schemas.microsoft.com/office/drawing/2014/main" id="{CDDDAA4B-9307-5F7B-738A-BE27E292116A}"/>
+                <a16:creationId xmlns:a16="http://schemas.microsoft.com/office/drawing/2014/main" id="{29DEDBD0-0059-45E6-1BCB-9BCE2D16CA6F}"/>
               </a:ext>
             </a:extLst>
           </p:cNvPr>
@@ -20198,7 +20198,7 @@
           <p:cNvPr id="4" name="grid-v-0">
             <a:extLst>
               <a:ext uri="{FF2B5EF4-FFF2-40B4-BE49-F238E27FC236}">
-                <a16:creationId xmlns:a16="http://schemas.microsoft.com/office/drawing/2014/main" id="{27B9A84E-2A9C-8DB8-684E-4CEB6EAE8449}"/>
+                <a16:creationId xmlns:a16="http://schemas.microsoft.com/office/drawing/2014/main" id="{5F7A3973-DA45-6AA0-EE73-2268D6880538}"/>
               </a:ext>
             </a:extLst>
           </p:cNvPr>
@@ -20239,7 +20239,7 @@
           <p:cNvPr id="5" name="grid-v-64">
             <a:extLst>
               <a:ext uri="{FF2B5EF4-FFF2-40B4-BE49-F238E27FC236}">
-                <a16:creationId xmlns:a16="http://schemas.microsoft.com/office/drawing/2014/main" id="{C2767A47-BB3E-61DD-9ED4-E9203749632B}"/>
+                <a16:creationId xmlns:a16="http://schemas.microsoft.com/office/drawing/2014/main" id="{E4C6CBC2-9FF1-249B-9ACA-211C598EA492}"/>
               </a:ext>
             </a:extLst>
           </p:cNvPr>
@@ -20280,7 +20280,7 @@
           <p:cNvPr id="6" name="grid-v-128">
             <a:extLst>
               <a:ext uri="{FF2B5EF4-FFF2-40B4-BE49-F238E27FC236}">
-                <a16:creationId xmlns:a16="http://schemas.microsoft.com/office/drawing/2014/main" id="{99551596-0307-3E49-8CF5-66A5BD00D857}"/>
+                <a16:creationId xmlns:a16="http://schemas.microsoft.com/office/drawing/2014/main" id="{A4EB6B0D-CA08-7A97-BC09-55A3BDB4F338}"/>
               </a:ext>
             </a:extLst>
           </p:cNvPr>
@@ -20321,7 +20321,7 @@
           <p:cNvPr id="7" name="grid-v-192">
             <a:extLst>
               <a:ext uri="{FF2B5EF4-FFF2-40B4-BE49-F238E27FC236}">
-                <a16:creationId xmlns:a16="http://schemas.microsoft.com/office/drawing/2014/main" id="{66E33BC0-D1C2-9FBF-640A-80030E5A9355}"/>
+                <a16:creationId xmlns:a16="http://schemas.microsoft.com/office/drawing/2014/main" id="{16D62C9B-15BC-4882-C5B5-07E3D5D81E38}"/>
               </a:ext>
             </a:extLst>
           </p:cNvPr>
@@ -20362,7 +20362,7 @@
           <p:cNvPr id="8" name="grid-v-256">
             <a:extLst>
               <a:ext uri="{FF2B5EF4-FFF2-40B4-BE49-F238E27FC236}">
-                <a16:creationId xmlns:a16="http://schemas.microsoft.com/office/drawing/2014/main" id="{C6B0B543-48D1-C651-89A0-F91F80A8D514}"/>
+                <a16:creationId xmlns:a16="http://schemas.microsoft.com/office/drawing/2014/main" id="{28851002-1AD8-A1D5-3F0E-DD0E0CA86E9A}"/>
               </a:ext>
             </a:extLst>
           </p:cNvPr>
@@ -20403,7 +20403,7 @@
           <p:cNvPr id="9" name="grid-v-320">
             <a:extLst>
               <a:ext uri="{FF2B5EF4-FFF2-40B4-BE49-F238E27FC236}">
-                <a16:creationId xmlns:a16="http://schemas.microsoft.com/office/drawing/2014/main" id="{D0EA55B3-BA13-02BA-B721-38DB9032B010}"/>
+                <a16:creationId xmlns:a16="http://schemas.microsoft.com/office/drawing/2014/main" id="{53473C06-6A69-DDF9-BBD9-DBF878AC6E67}"/>
               </a:ext>
             </a:extLst>
           </p:cNvPr>
@@ -20444,7 +20444,7 @@
           <p:cNvPr id="10" name="grid-v-384">
             <a:extLst>
               <a:ext uri="{FF2B5EF4-FFF2-40B4-BE49-F238E27FC236}">
-                <a16:creationId xmlns:a16="http://schemas.microsoft.com/office/drawing/2014/main" id="{0FD58B58-7B0B-87D0-4A91-91E6AFDA14A1}"/>
+                <a16:creationId xmlns:a16="http://schemas.microsoft.com/office/drawing/2014/main" id="{999F5B8F-D4DB-D6FA-31D9-38DCB71E9585}"/>
               </a:ext>
             </a:extLst>
           </p:cNvPr>
@@ -20485,7 +20485,7 @@
           <p:cNvPr id="11" name="grid-v-448">
             <a:extLst>
               <a:ext uri="{FF2B5EF4-FFF2-40B4-BE49-F238E27FC236}">
-                <a16:creationId xmlns:a16="http://schemas.microsoft.com/office/drawing/2014/main" id="{D02EDF27-6566-5855-571B-A68CAEDBD58E}"/>
+                <a16:creationId xmlns:a16="http://schemas.microsoft.com/office/drawing/2014/main" id="{75386037-FD75-DE86-3008-C32538CBCD07}"/>
               </a:ext>
             </a:extLst>
           </p:cNvPr>
@@ -20526,7 +20526,7 @@
           <p:cNvPr id="12" name="grid-v-512">
             <a:extLst>
               <a:ext uri="{FF2B5EF4-FFF2-40B4-BE49-F238E27FC236}">
-                <a16:creationId xmlns:a16="http://schemas.microsoft.com/office/drawing/2014/main" id="{39853F30-02AA-9ED0-F371-D440DD0CD847}"/>
+                <a16:creationId xmlns:a16="http://schemas.microsoft.com/office/drawing/2014/main" id="{9187B7F0-F8DC-5B00-C873-F6519B55E120}"/>
               </a:ext>
             </a:extLst>
           </p:cNvPr>
@@ -20567,7 +20567,7 @@
           <p:cNvPr id="13" name="grid-v-576">
             <a:extLst>
               <a:ext uri="{FF2B5EF4-FFF2-40B4-BE49-F238E27FC236}">
-                <a16:creationId xmlns:a16="http://schemas.microsoft.com/office/drawing/2014/main" id="{AACA4B04-EF99-F335-F69E-7A181E426B17}"/>
+                <a16:creationId xmlns:a16="http://schemas.microsoft.com/office/drawing/2014/main" id="{CC677100-1417-5B2B-CF8F-F282B2F87396}"/>
               </a:ext>
             </a:extLst>
           </p:cNvPr>
@@ -20608,7 +20608,7 @@
           <p:cNvPr id="14" name="grid-v-640">
             <a:extLst>
               <a:ext uri="{FF2B5EF4-FFF2-40B4-BE49-F238E27FC236}">
-                <a16:creationId xmlns:a16="http://schemas.microsoft.com/office/drawing/2014/main" id="{48D63430-631D-02D3-88A5-90B303AA7D10}"/>
+                <a16:creationId xmlns:a16="http://schemas.microsoft.com/office/drawing/2014/main" id="{AD67B031-6AC9-D960-F94E-6DF36458FC54}"/>
               </a:ext>
             </a:extLst>
           </p:cNvPr>
@@ -20649,7 +20649,7 @@
           <p:cNvPr id="15" name="grid-v-704">
             <a:extLst>
               <a:ext uri="{FF2B5EF4-FFF2-40B4-BE49-F238E27FC236}">
-                <a16:creationId xmlns:a16="http://schemas.microsoft.com/office/drawing/2014/main" id="{B13FC1B2-C68D-1801-35E3-68CF047584BF}"/>
+                <a16:creationId xmlns:a16="http://schemas.microsoft.com/office/drawing/2014/main" id="{DA590415-8FB7-9DAF-4FB3-A4172454964B}"/>
               </a:ext>
             </a:extLst>
           </p:cNvPr>
@@ -20690,7 +20690,7 @@
           <p:cNvPr id="16" name="grid-v-768">
             <a:extLst>
               <a:ext uri="{FF2B5EF4-FFF2-40B4-BE49-F238E27FC236}">
-                <a16:creationId xmlns:a16="http://schemas.microsoft.com/office/drawing/2014/main" id="{2C944248-5264-CA2E-E643-F3C0B70303E6}"/>
+                <a16:creationId xmlns:a16="http://schemas.microsoft.com/office/drawing/2014/main" id="{1E423A92-EF90-5541-C0AC-D8FD14B018AD}"/>
               </a:ext>
             </a:extLst>
           </p:cNvPr>
@@ -20731,7 +20731,7 @@
           <p:cNvPr id="17" name="grid-v-832">
             <a:extLst>
               <a:ext uri="{FF2B5EF4-FFF2-40B4-BE49-F238E27FC236}">
-                <a16:creationId xmlns:a16="http://schemas.microsoft.com/office/drawing/2014/main" id="{248BFCBC-9BC6-62D3-4A82-7C72B5525680}"/>
+                <a16:creationId xmlns:a16="http://schemas.microsoft.com/office/drawing/2014/main" id="{6326CC6B-2034-BDCA-5801-2F805B1FBAFA}"/>
               </a:ext>
             </a:extLst>
           </p:cNvPr>
@@ -20772,7 +20772,7 @@
           <p:cNvPr id="18" name="grid-v-896">
             <a:extLst>
               <a:ext uri="{FF2B5EF4-FFF2-40B4-BE49-F238E27FC236}">
-                <a16:creationId xmlns:a16="http://schemas.microsoft.com/office/drawing/2014/main" id="{90DB4A7E-ED78-3677-854D-CF464783160D}"/>
+                <a16:creationId xmlns:a16="http://schemas.microsoft.com/office/drawing/2014/main" id="{21D6818B-CFA5-4A52-AFCD-C6311E4EC856}"/>
               </a:ext>
             </a:extLst>
           </p:cNvPr>
@@ -20813,7 +20813,7 @@
           <p:cNvPr id="19" name="grid-v-960">
             <a:extLst>
               <a:ext uri="{FF2B5EF4-FFF2-40B4-BE49-F238E27FC236}">
-                <a16:creationId xmlns:a16="http://schemas.microsoft.com/office/drawing/2014/main" id="{8921EEF9-5564-BE60-9762-3068ACBF687B}"/>
+                <a16:creationId xmlns:a16="http://schemas.microsoft.com/office/drawing/2014/main" id="{E1FC6018-DA42-4C51-6979-8D3BEBABAC29}"/>
               </a:ext>
             </a:extLst>
           </p:cNvPr>
@@ -20854,7 +20854,7 @@
           <p:cNvPr id="20" name="grid-h-0">
             <a:extLst>
               <a:ext uri="{FF2B5EF4-FFF2-40B4-BE49-F238E27FC236}">
-                <a16:creationId xmlns:a16="http://schemas.microsoft.com/office/drawing/2014/main" id="{F5B2B7AC-6BC0-6AAC-8690-687EB855994E}"/>
+                <a16:creationId xmlns:a16="http://schemas.microsoft.com/office/drawing/2014/main" id="{0515794B-63E5-B145-33CC-868C05821E72}"/>
               </a:ext>
             </a:extLst>
           </p:cNvPr>
@@ -20895,7 +20895,7 @@
           <p:cNvPr id="21" name="grid-h-64">
             <a:extLst>
               <a:ext uri="{FF2B5EF4-FFF2-40B4-BE49-F238E27FC236}">
-                <a16:creationId xmlns:a16="http://schemas.microsoft.com/office/drawing/2014/main" id="{92B0DB87-528D-5FB7-90E8-CDD320654CCE}"/>
+                <a16:creationId xmlns:a16="http://schemas.microsoft.com/office/drawing/2014/main" id="{BA222477-B227-543C-4578-B604F29C0C66}"/>
               </a:ext>
             </a:extLst>
           </p:cNvPr>
@@ -20936,7 +20936,7 @@
           <p:cNvPr id="22" name="grid-h-128">
             <a:extLst>
               <a:ext uri="{FF2B5EF4-FFF2-40B4-BE49-F238E27FC236}">
-                <a16:creationId xmlns:a16="http://schemas.microsoft.com/office/drawing/2014/main" id="{901BAB4F-C535-F460-3CBD-713FA0D2CC65}"/>
+                <a16:creationId xmlns:a16="http://schemas.microsoft.com/office/drawing/2014/main" id="{1BBE660C-7E6A-941D-71CA-EBCD37A2C6E9}"/>
               </a:ext>
             </a:extLst>
           </p:cNvPr>
@@ -20977,7 +20977,7 @@
           <p:cNvPr id="23" name="grid-h-192">
             <a:extLst>
               <a:ext uri="{FF2B5EF4-FFF2-40B4-BE49-F238E27FC236}">
-                <a16:creationId xmlns:a16="http://schemas.microsoft.com/office/drawing/2014/main" id="{BA80C73A-23C7-EB21-A9F2-DED8F3F38F7F}"/>
+                <a16:creationId xmlns:a16="http://schemas.microsoft.com/office/drawing/2014/main" id="{A94D1D9D-1C67-AE01-50B2-EFC8AB86DCD7}"/>
               </a:ext>
             </a:extLst>
           </p:cNvPr>
@@ -21018,7 +21018,7 @@
           <p:cNvPr id="24" name="grid-h-256">
             <a:extLst>
               <a:ext uri="{FF2B5EF4-FFF2-40B4-BE49-F238E27FC236}">
-                <a16:creationId xmlns:a16="http://schemas.microsoft.com/office/drawing/2014/main" id="{280E3188-1598-1DB9-EE79-2C9B9854191A}"/>
+                <a16:creationId xmlns:a16="http://schemas.microsoft.com/office/drawing/2014/main" id="{03922AF2-C2C8-562E-08F1-CF36D07621F4}"/>
               </a:ext>
             </a:extLst>
           </p:cNvPr>
@@ -21059,7 +21059,7 @@
           <p:cNvPr id="25" name="grid-h-320">
             <a:extLst>
               <a:ext uri="{FF2B5EF4-FFF2-40B4-BE49-F238E27FC236}">
-                <a16:creationId xmlns:a16="http://schemas.microsoft.com/office/drawing/2014/main" id="{32028642-0783-FD62-14CC-5D1AC96407F7}"/>
+                <a16:creationId xmlns:a16="http://schemas.microsoft.com/office/drawing/2014/main" id="{96C017E4-F50D-FAA6-1967-EF9391356320}"/>
               </a:ext>
             </a:extLst>
           </p:cNvPr>
@@ -21100,7 +21100,7 @@
           <p:cNvPr id="26" name="grid-h-384">
             <a:extLst>
               <a:ext uri="{FF2B5EF4-FFF2-40B4-BE49-F238E27FC236}">
-                <a16:creationId xmlns:a16="http://schemas.microsoft.com/office/drawing/2014/main" id="{766E75BF-E196-7E6E-987B-64EE60E4B8CE}"/>
+                <a16:creationId xmlns:a16="http://schemas.microsoft.com/office/drawing/2014/main" id="{8CD079FB-FB9D-49AD-C7A1-A2996BA0F587}"/>
               </a:ext>
             </a:extLst>
           </p:cNvPr>
@@ -21141,7 +21141,7 @@
           <p:cNvPr id="27" name="grid-h-448">
             <a:extLst>
               <a:ext uri="{FF2B5EF4-FFF2-40B4-BE49-F238E27FC236}">
-                <a16:creationId xmlns:a16="http://schemas.microsoft.com/office/drawing/2014/main" id="{1035A653-0750-E3C7-D5D0-73FB5A26165B}"/>
+                <a16:creationId xmlns:a16="http://schemas.microsoft.com/office/drawing/2014/main" id="{68705FB9-9C20-CF31-95A4-6214788D695C}"/>
               </a:ext>
             </a:extLst>
           </p:cNvPr>
@@ -21182,7 +21182,7 @@
           <p:cNvPr id="28" name="grid-h-512">
             <a:extLst>
               <a:ext uri="{FF2B5EF4-FFF2-40B4-BE49-F238E27FC236}">
-                <a16:creationId xmlns:a16="http://schemas.microsoft.com/office/drawing/2014/main" id="{698B745F-F99A-5152-8F54-1003C9090779}"/>
+                <a16:creationId xmlns:a16="http://schemas.microsoft.com/office/drawing/2014/main" id="{5BAFF1C3-A4E6-BDD5-AF3A-FB8D0760E07B}"/>
               </a:ext>
             </a:extLst>
           </p:cNvPr>
@@ -21223,7 +21223,7 @@
           <p:cNvPr id="29" name="page-num">
             <a:extLst>
               <a:ext uri="{FF2B5EF4-FFF2-40B4-BE49-F238E27FC236}">
-                <a16:creationId xmlns:a16="http://schemas.microsoft.com/office/drawing/2014/main" id="{EA2FDF8E-E1D0-7107-A7B6-1BAD5A24389B}"/>
+                <a16:creationId xmlns:a16="http://schemas.microsoft.com/office/drawing/2014/main" id="{A295F66E-BB00-0051-8FCD-C841A3DF5172}"/>
               </a:ext>
             </a:extLst>
           </p:cNvPr>
@@ -21269,7 +21269,7 @@
           <p:cNvPr id="30" name="section-label">
             <a:extLst>
               <a:ext uri="{FF2B5EF4-FFF2-40B4-BE49-F238E27FC236}">
-                <a16:creationId xmlns:a16="http://schemas.microsoft.com/office/drawing/2014/main" id="{256B0C95-0E12-F6AD-B406-AEBC381A3831}"/>
+                <a16:creationId xmlns:a16="http://schemas.microsoft.com/office/drawing/2014/main" id="{49C5E2A3-EFD7-E8EB-F46B-B4EF79A70C1A}"/>
               </a:ext>
             </a:extLst>
           </p:cNvPr>
@@ -21315,7 +21315,7 @@
           <p:cNvPr id="31" name="title">
             <a:extLst>
               <a:ext uri="{FF2B5EF4-FFF2-40B4-BE49-F238E27FC236}">
-                <a16:creationId xmlns:a16="http://schemas.microsoft.com/office/drawing/2014/main" id="{93FF80D7-E663-F29D-842D-CD2B60EEB2B3}"/>
+                <a16:creationId xmlns:a16="http://schemas.microsoft.com/office/drawing/2014/main" id="{8072040D-AB48-0E8F-F808-3557132A570D}"/>
               </a:ext>
             </a:extLst>
           </p:cNvPr>
@@ -21361,7 +21361,7 @@
           <p:cNvPr id="32" name="gap-rule">
             <a:extLst>
               <a:ext uri="{FF2B5EF4-FFF2-40B4-BE49-F238E27FC236}">
-                <a16:creationId xmlns:a16="http://schemas.microsoft.com/office/drawing/2014/main" id="{734B51D7-7F41-C365-EBD4-52920A4DFFAE}"/>
+                <a16:creationId xmlns:a16="http://schemas.microsoft.com/office/drawing/2014/main" id="{22840E53-1608-0FD9-12F0-D4E265EA0330}"/>
               </a:ext>
             </a:extLst>
           </p:cNvPr>
@@ -21402,7 +21402,7 @@
           <p:cNvPr id="33" name="left-card">
             <a:extLst>
               <a:ext uri="{FF2B5EF4-FFF2-40B4-BE49-F238E27FC236}">
-                <a16:creationId xmlns:a16="http://schemas.microsoft.com/office/drawing/2014/main" id="{A6A5DDCE-CC44-617E-14C9-03B78CBA2F66}"/>
+                <a16:creationId xmlns:a16="http://schemas.microsoft.com/office/drawing/2014/main" id="{38C78208-5592-4B98-A9F7-D8F0C258E8CC}"/>
               </a:ext>
             </a:extLst>
           </p:cNvPr>
@@ -21456,7 +21456,7 @@
           <p:cNvPr id="34" name="left-k">
             <a:extLst>
               <a:ext uri="{FF2B5EF4-FFF2-40B4-BE49-F238E27FC236}">
-                <a16:creationId xmlns:a16="http://schemas.microsoft.com/office/drawing/2014/main" id="{F0D9671E-9B24-104B-E03E-349DC3B1A9E1}"/>
+                <a16:creationId xmlns:a16="http://schemas.microsoft.com/office/drawing/2014/main" id="{840F7A41-4924-412B-E11D-B94E3112B5BA}"/>
               </a:ext>
             </a:extLst>
           </p:cNvPr>
@@ -21502,7 +21502,7 @@
           <p:cNvPr id="35" name="left-main">
             <a:extLst>
               <a:ext uri="{FF2B5EF4-FFF2-40B4-BE49-F238E27FC236}">
-                <a16:creationId xmlns:a16="http://schemas.microsoft.com/office/drawing/2014/main" id="{128C5D57-7660-16A1-72EC-7B23D999FA8E}"/>
+                <a16:creationId xmlns:a16="http://schemas.microsoft.com/office/drawing/2014/main" id="{B85D47C5-A420-122C-9693-6D4F45880978}"/>
               </a:ext>
             </a:extLst>
           </p:cNvPr>
@@ -21548,7 +21548,7 @@
           <p:cNvPr id="36" name="gap-arrow">
             <a:extLst>
               <a:ext uri="{FF2B5EF4-FFF2-40B4-BE49-F238E27FC236}">
-                <a16:creationId xmlns:a16="http://schemas.microsoft.com/office/drawing/2014/main" id="{D81C9AC0-8095-0A1F-9588-77E3D91F49A4}"/>
+                <a16:creationId xmlns:a16="http://schemas.microsoft.com/office/drawing/2014/main" id="{351BD472-CBCC-1E51-279F-217F37EBFD3F}"/>
               </a:ext>
             </a:extLst>
           </p:cNvPr>
@@ -21589,7 +21589,7 @@
           <p:cNvPr id="37" name="right-card">
             <a:extLst>
               <a:ext uri="{FF2B5EF4-FFF2-40B4-BE49-F238E27FC236}">
-                <a16:creationId xmlns:a16="http://schemas.microsoft.com/office/drawing/2014/main" id="{719C2A7A-05B0-DD9B-0079-AA2035460196}"/>
+                <a16:creationId xmlns:a16="http://schemas.microsoft.com/office/drawing/2014/main" id="{022BE9F1-9332-E612-AF1E-5697A553EDC0}"/>
               </a:ext>
             </a:extLst>
           </p:cNvPr>
@@ -21643,7 +21643,7 @@
           <p:cNvPr id="38" name="right-k">
             <a:extLst>
               <a:ext uri="{FF2B5EF4-FFF2-40B4-BE49-F238E27FC236}">
-                <a16:creationId xmlns:a16="http://schemas.microsoft.com/office/drawing/2014/main" id="{A49E4CDB-BA03-EB64-2BBC-37BE4BB8681B}"/>
+                <a16:creationId xmlns:a16="http://schemas.microsoft.com/office/drawing/2014/main" id="{847D9240-DB63-EFBC-6F6D-130B534CAF54}"/>
               </a:ext>
             </a:extLst>
           </p:cNvPr>
@@ -21689,7 +21689,7 @@
           <p:cNvPr id="39" name="right-main">
             <a:extLst>
               <a:ext uri="{FF2B5EF4-FFF2-40B4-BE49-F238E27FC236}">
-                <a16:creationId xmlns:a16="http://schemas.microsoft.com/office/drawing/2014/main" id="{BA4412F5-E564-D242-C3B1-D63698BD23D0}"/>
+                <a16:creationId xmlns:a16="http://schemas.microsoft.com/office/drawing/2014/main" id="{9CB1F81F-2678-3CFC-9620-76711FA088CD}"/>
               </a:ext>
             </a:extLst>
           </p:cNvPr>
@@ -21735,7 +21735,7 @@
           <p:cNvPr id="40" name="claim-bar">
             <a:extLst>
               <a:ext uri="{FF2B5EF4-FFF2-40B4-BE49-F238E27FC236}">
-                <a16:creationId xmlns:a16="http://schemas.microsoft.com/office/drawing/2014/main" id="{F0207045-7AD1-AD1B-7B39-1921CCC7C6C1}"/>
+                <a16:creationId xmlns:a16="http://schemas.microsoft.com/office/drawing/2014/main" id="{655D0932-6124-4616-869C-BEAEE6594BEF}"/>
               </a:ext>
             </a:extLst>
           </p:cNvPr>
@@ -21789,7 +21789,7 @@
           <p:cNvPr id="41" name="claim-text">
             <a:extLst>
               <a:ext uri="{FF2B5EF4-FFF2-40B4-BE49-F238E27FC236}">
-                <a16:creationId xmlns:a16="http://schemas.microsoft.com/office/drawing/2014/main" id="{832F6002-A22F-39A6-8084-B34FDE37A4E6}"/>
+                <a16:creationId xmlns:a16="http://schemas.microsoft.com/office/drawing/2014/main" id="{0F9E73CD-FC3A-31EB-873A-293FCBF08E7B}"/>
               </a:ext>
             </a:extLst>
           </p:cNvPr>
@@ -21835,7 +21835,7 @@
           <p:cNvPr id="43" name="图片 42">
             <a:extLst>
               <a:ext uri="{FF2B5EF4-FFF2-40B4-BE49-F238E27FC236}">
-                <a16:creationId xmlns:a16="http://schemas.microsoft.com/office/drawing/2014/main" id="{0334D4F4-DA40-8D35-F7C3-C18C6EAF24E2}"/>
+                <a16:creationId xmlns:a16="http://schemas.microsoft.com/office/drawing/2014/main" id="{4B7C7FD9-34CA-9ADE-643B-C5C7D56D9795}"/>
               </a:ext>
             </a:extLst>
           </p:cNvPr>
@@ -21869,7 +21869,7 @@
     </p:spTree>
     <p:extLst>
       <p:ext uri="{BB962C8B-B14F-4D97-AF65-F5344CB8AC3E}">
-        <p14:creationId xmlns:p14="http://schemas.microsoft.com/office/powerpoint/2010/main" val="1807008116"/>
+        <p14:creationId xmlns:p14="http://schemas.microsoft.com/office/powerpoint/2010/main" val="893711359"/>
       </p:ext>
     </p:extLst>
   </p:cSld>
@@ -21913,7 +21913,7 @@
           <p:cNvPr id="2" name="page-bg">
             <a:extLst>
               <a:ext uri="{FF2B5EF4-FFF2-40B4-BE49-F238E27FC236}">
-                <a16:creationId xmlns:a16="http://schemas.microsoft.com/office/drawing/2014/main" id="{D36250EE-6E44-28A9-2057-3978A12DC3A8}"/>
+                <a16:creationId xmlns:a16="http://schemas.microsoft.com/office/drawing/2014/main" id="{151776B3-2795-1F8F-CC51-06C41CD4CF5A}"/>
               </a:ext>
             </a:extLst>
           </p:cNvPr>
@@ -21974,7 +21974,7 @@
           <p:cNvPr id="3" name="left-rail">
             <a:extLst>
               <a:ext uri="{FF2B5EF4-FFF2-40B4-BE49-F238E27FC236}">
-                <a16:creationId xmlns:a16="http://schemas.microsoft.com/office/drawing/2014/main" id="{D740C603-3D82-2C74-8C57-7AC5CAFBAD5C}"/>
+                <a16:creationId xmlns:a16="http://schemas.microsoft.com/office/drawing/2014/main" id="{34CCDA60-9B2A-927D-29B9-7BB21BAF06D1}"/>
               </a:ext>
             </a:extLst>
           </p:cNvPr>
@@ -22035,7 +22035,7 @@
           <p:cNvPr id="4" name="top-line">
             <a:extLst>
               <a:ext uri="{FF2B5EF4-FFF2-40B4-BE49-F238E27FC236}">
-                <a16:creationId xmlns:a16="http://schemas.microsoft.com/office/drawing/2014/main" id="{5933B481-1306-035B-311C-72CC0CCE30B0}"/>
+                <a16:creationId xmlns:a16="http://schemas.microsoft.com/office/drawing/2014/main" id="{E6E8C761-6D0F-E0DD-3F81-A079AF7B89E6}"/>
               </a:ext>
             </a:extLst>
           </p:cNvPr>
@@ -22076,7 +22076,7 @@
           <p:cNvPr id="5" name="footer-left">
             <a:extLst>
               <a:ext uri="{FF2B5EF4-FFF2-40B4-BE49-F238E27FC236}">
-                <a16:creationId xmlns:a16="http://schemas.microsoft.com/office/drawing/2014/main" id="{A606D33C-8865-A689-C9F5-088A4E85E3E4}"/>
+                <a16:creationId xmlns:a16="http://schemas.microsoft.com/office/drawing/2014/main" id="{A7B9152E-A63A-221F-A83A-2772B2948CCC}"/>
               </a:ext>
             </a:extLst>
           </p:cNvPr>
@@ -22122,7 +22122,7 @@
           <p:cNvPr id="6" name="footer-mid">
             <a:extLst>
               <a:ext uri="{FF2B5EF4-FFF2-40B4-BE49-F238E27FC236}">
-                <a16:creationId xmlns:a16="http://schemas.microsoft.com/office/drawing/2014/main" id="{D8AEC1BD-745B-61BE-FDFB-67D5DC479D27}"/>
+                <a16:creationId xmlns:a16="http://schemas.microsoft.com/office/drawing/2014/main" id="{1F2C0594-5C26-D043-7EBE-3002282D454B}"/>
               </a:ext>
             </a:extLst>
           </p:cNvPr>
@@ -22168,7 +22168,7 @@
           <p:cNvPr id="7" name="page-num">
             <a:extLst>
               <a:ext uri="{FF2B5EF4-FFF2-40B4-BE49-F238E27FC236}">
-                <a16:creationId xmlns:a16="http://schemas.microsoft.com/office/drawing/2014/main" id="{30A4E4AD-FB9E-1930-447D-AC46967B22E9}"/>
+                <a16:creationId xmlns:a16="http://schemas.microsoft.com/office/drawing/2014/main" id="{033AFB84-A0DD-FDEF-0AFE-00A3D7CB4195}"/>
               </a:ext>
             </a:extLst>
           </p:cNvPr>
@@ -22214,7 +22214,7 @@
           <p:cNvPr id="8" name="section-label">
             <a:extLst>
               <a:ext uri="{FF2B5EF4-FFF2-40B4-BE49-F238E27FC236}">
-                <a16:creationId xmlns:a16="http://schemas.microsoft.com/office/drawing/2014/main" id="{5C050858-6116-43F0-F7A1-E42CBFD5ABFC}"/>
+                <a16:creationId xmlns:a16="http://schemas.microsoft.com/office/drawing/2014/main" id="{B9CDA589-9359-BBD0-1669-DE721B1EE7C2}"/>
               </a:ext>
             </a:extLst>
           </p:cNvPr>
@@ -22260,7 +22260,7 @@
           <p:cNvPr id="10" name="图片 9">
             <a:extLst>
               <a:ext uri="{FF2B5EF4-FFF2-40B4-BE49-F238E27FC236}">
-                <a16:creationId xmlns:a16="http://schemas.microsoft.com/office/drawing/2014/main" id="{8EADEA61-131E-DA1C-1039-D784DECC3C86}"/>
+                <a16:creationId xmlns:a16="http://schemas.microsoft.com/office/drawing/2014/main" id="{B8B4E65A-E0BA-4CBC-F50C-CC862955AF1F}"/>
               </a:ext>
             </a:extLst>
           </p:cNvPr>
@@ -22296,7 +22296,7 @@
           <p:cNvPr id="11" name="title">
             <a:extLst>
               <a:ext uri="{FF2B5EF4-FFF2-40B4-BE49-F238E27FC236}">
-                <a16:creationId xmlns:a16="http://schemas.microsoft.com/office/drawing/2014/main" id="{18A4A683-696B-492E-1681-BB767B2BD376}"/>
+                <a16:creationId xmlns:a16="http://schemas.microsoft.com/office/drawing/2014/main" id="{98C89332-3462-FAFA-DA24-82A32CBF4239}"/>
               </a:ext>
             </a:extLst>
           </p:cNvPr>
@@ -22342,7 +22342,7 @@
           <p:cNvPr id="12" name="subtitle">
             <a:extLst>
               <a:ext uri="{FF2B5EF4-FFF2-40B4-BE49-F238E27FC236}">
-                <a16:creationId xmlns:a16="http://schemas.microsoft.com/office/drawing/2014/main" id="{2E5A08B5-E73A-5F35-C709-2A20A8F143E3}"/>
+                <a16:creationId xmlns:a16="http://schemas.microsoft.com/office/drawing/2014/main" id="{B1B272B7-70F7-F8CA-C863-6D0D7ED7671F}"/>
               </a:ext>
             </a:extLst>
           </p:cNvPr>
@@ -22388,7 +22388,7 @@
           <p:cNvPr id="13" name="fig-frame">
             <a:extLst>
               <a:ext uri="{FF2B5EF4-FFF2-40B4-BE49-F238E27FC236}">
-                <a16:creationId xmlns:a16="http://schemas.microsoft.com/office/drawing/2014/main" id="{3C6339FE-A8BA-FC3D-B43C-B009F14348DD}"/>
+                <a16:creationId xmlns:a16="http://schemas.microsoft.com/office/drawing/2014/main" id="{482DEF32-DD45-4BBA-9C23-DC32F5A4A183}"/>
               </a:ext>
             </a:extLst>
           </p:cNvPr>
@@ -22442,7 +22442,7 @@
           <p:cNvPr id="15" name="framework-figure">
             <a:extLst>
               <a:ext uri="{FF2B5EF4-FFF2-40B4-BE49-F238E27FC236}">
-                <a16:creationId xmlns:a16="http://schemas.microsoft.com/office/drawing/2014/main" id="{3247787D-A45E-309E-2078-EAFD8386626D}"/>
+                <a16:creationId xmlns:a16="http://schemas.microsoft.com/office/drawing/2014/main" id="{EC641E5B-2E37-E976-B866-6FB40C23836A}"/>
               </a:ext>
             </a:extLst>
           </p:cNvPr>
@@ -22478,7 +22478,7 @@
           <p:cNvPr id="16" name="takeaway">
             <a:extLst>
               <a:ext uri="{FF2B5EF4-FFF2-40B4-BE49-F238E27FC236}">
-                <a16:creationId xmlns:a16="http://schemas.microsoft.com/office/drawing/2014/main" id="{7D9C5F51-839D-9E22-AFC5-BA91CDB79C56}"/>
+                <a16:creationId xmlns:a16="http://schemas.microsoft.com/office/drawing/2014/main" id="{639F8B06-C004-FDD9-7D10-7DF82657E20D}"/>
               </a:ext>
             </a:extLst>
           </p:cNvPr>
@@ -22532,7 +22532,7 @@
           <p:cNvPr id="17" name="takeaway-text">
             <a:extLst>
               <a:ext uri="{FF2B5EF4-FFF2-40B4-BE49-F238E27FC236}">
-                <a16:creationId xmlns:a16="http://schemas.microsoft.com/office/drawing/2014/main" id="{CF355169-F70D-D03F-49CC-33D624B746CA}"/>
+                <a16:creationId xmlns:a16="http://schemas.microsoft.com/office/drawing/2014/main" id="{0410F77E-89D9-3FE2-597B-A333C050C7D3}"/>
               </a:ext>
             </a:extLst>
           </p:cNvPr>
@@ -22579,7 +22579,7 @@
             <a:hlinkClick r:id="rId5"/>
             <a:extLst>
               <a:ext uri="{FF2B5EF4-FFF2-40B4-BE49-F238E27FC236}">
-                <a16:creationId xmlns:a16="http://schemas.microsoft.com/office/drawing/2014/main" id="{ADB7A564-6371-41F7-D252-89F934FF5016}"/>
+                <a16:creationId xmlns:a16="http://schemas.microsoft.com/office/drawing/2014/main" id="{79AD6960-B4C0-6117-5534-E22A7E259A5F}"/>
               </a:ext>
             </a:extLst>
           </p:cNvPr>
@@ -22648,7 +22648,7 @@
             <a:hlinkClick r:id="rId6"/>
             <a:extLst>
               <a:ext uri="{FF2B5EF4-FFF2-40B4-BE49-F238E27FC236}">
-                <a16:creationId xmlns:a16="http://schemas.microsoft.com/office/drawing/2014/main" id="{D5136D54-9298-7CE2-2E0F-9D3F6B0BD0B5}"/>
+                <a16:creationId xmlns:a16="http://schemas.microsoft.com/office/drawing/2014/main" id="{F9FAE353-7294-D9C3-ACA2-23667F368A5A}"/>
               </a:ext>
             </a:extLst>
           </p:cNvPr>
@@ -22714,7 +22714,7 @@
     </p:spTree>
     <p:extLst>
       <p:ext uri="{BB962C8B-B14F-4D97-AF65-F5344CB8AC3E}">
-        <p14:creationId xmlns:p14="http://schemas.microsoft.com/office/powerpoint/2010/main" val="1886506256"/>
+        <p14:creationId xmlns:p14="http://schemas.microsoft.com/office/powerpoint/2010/main" val="2769930265"/>
       </p:ext>
     </p:extLst>
   </p:cSld>
@@ -22758,7 +22758,7 @@
           <p:cNvPr id="2" name="page-bg">
             <a:extLst>
               <a:ext uri="{FF2B5EF4-FFF2-40B4-BE49-F238E27FC236}">
-                <a16:creationId xmlns:a16="http://schemas.microsoft.com/office/drawing/2014/main" id="{44E147FD-A6EB-C85F-84EB-08869886F272}"/>
+                <a16:creationId xmlns:a16="http://schemas.microsoft.com/office/drawing/2014/main" id="{128961B6-9F5E-9E57-A19E-879E1B7F9DD4}"/>
               </a:ext>
             </a:extLst>
           </p:cNvPr>
@@ -22819,7 +22819,7 @@
           <p:cNvPr id="3" name="left-rail">
             <a:extLst>
               <a:ext uri="{FF2B5EF4-FFF2-40B4-BE49-F238E27FC236}">
-                <a16:creationId xmlns:a16="http://schemas.microsoft.com/office/drawing/2014/main" id="{5A523454-579D-12C7-7454-CB359947DB0F}"/>
+                <a16:creationId xmlns:a16="http://schemas.microsoft.com/office/drawing/2014/main" id="{B263BFAB-E14E-B9BF-32BB-1E91D86F41AF}"/>
               </a:ext>
             </a:extLst>
           </p:cNvPr>
@@ -22880,7 +22880,7 @@
           <p:cNvPr id="4" name="top-line">
             <a:extLst>
               <a:ext uri="{FF2B5EF4-FFF2-40B4-BE49-F238E27FC236}">
-                <a16:creationId xmlns:a16="http://schemas.microsoft.com/office/drawing/2014/main" id="{ED0D0A99-D630-E49A-C21F-C8B568DD72A1}"/>
+                <a16:creationId xmlns:a16="http://schemas.microsoft.com/office/drawing/2014/main" id="{C134D3F3-04F7-15ED-16CF-8818F62DDDF7}"/>
               </a:ext>
             </a:extLst>
           </p:cNvPr>
@@ -22921,7 +22921,7 @@
           <p:cNvPr id="5" name="footer-left">
             <a:extLst>
               <a:ext uri="{FF2B5EF4-FFF2-40B4-BE49-F238E27FC236}">
-                <a16:creationId xmlns:a16="http://schemas.microsoft.com/office/drawing/2014/main" id="{69743E4A-4D71-C7A4-9D55-C7D944F73919}"/>
+                <a16:creationId xmlns:a16="http://schemas.microsoft.com/office/drawing/2014/main" id="{1312BAF9-DEAF-3601-36FC-4E2B64F35C5D}"/>
               </a:ext>
             </a:extLst>
           </p:cNvPr>
@@ -22967,7 +22967,7 @@
           <p:cNvPr id="6" name="footer-mid">
             <a:extLst>
               <a:ext uri="{FF2B5EF4-FFF2-40B4-BE49-F238E27FC236}">
-                <a16:creationId xmlns:a16="http://schemas.microsoft.com/office/drawing/2014/main" id="{92BD5084-7CA4-88C2-F45B-4C96AFE4C2A0}"/>
+                <a16:creationId xmlns:a16="http://schemas.microsoft.com/office/drawing/2014/main" id="{AED36AD5-0F0A-C347-B653-1CE21D3890B8}"/>
               </a:ext>
             </a:extLst>
           </p:cNvPr>
@@ -23013,7 +23013,7 @@
           <p:cNvPr id="7" name="page-num">
             <a:extLst>
               <a:ext uri="{FF2B5EF4-FFF2-40B4-BE49-F238E27FC236}">
-                <a16:creationId xmlns:a16="http://schemas.microsoft.com/office/drawing/2014/main" id="{9E89BF76-AF91-49E7-9517-397764D619A0}"/>
+                <a16:creationId xmlns:a16="http://schemas.microsoft.com/office/drawing/2014/main" id="{4AFF2002-A8BD-08CF-8C03-42D67826D558}"/>
               </a:ext>
             </a:extLst>
           </p:cNvPr>
@@ -23059,7 +23059,7 @@
           <p:cNvPr id="8" name="section-label">
             <a:extLst>
               <a:ext uri="{FF2B5EF4-FFF2-40B4-BE49-F238E27FC236}">
-                <a16:creationId xmlns:a16="http://schemas.microsoft.com/office/drawing/2014/main" id="{A864A8F5-DE70-BF89-88D6-671E93D3B8B2}"/>
+                <a16:creationId xmlns:a16="http://schemas.microsoft.com/office/drawing/2014/main" id="{251F3EF3-0CF0-311C-FF1C-45B347716B62}"/>
               </a:ext>
             </a:extLst>
           </p:cNvPr>
@@ -23105,7 +23105,7 @@
           <p:cNvPr id="10" name="图片 9">
             <a:extLst>
               <a:ext uri="{FF2B5EF4-FFF2-40B4-BE49-F238E27FC236}">
-                <a16:creationId xmlns:a16="http://schemas.microsoft.com/office/drawing/2014/main" id="{18722B0C-5C37-C9AF-37C1-411B45F8AF8E}"/>
+                <a16:creationId xmlns:a16="http://schemas.microsoft.com/office/drawing/2014/main" id="{82337E37-7B74-52D6-6D2D-F0AA70FDF08C}"/>
               </a:ext>
             </a:extLst>
           </p:cNvPr>
@@ -23141,7 +23141,7 @@
           <p:cNvPr id="11" name="title">
             <a:extLst>
               <a:ext uri="{FF2B5EF4-FFF2-40B4-BE49-F238E27FC236}">
-                <a16:creationId xmlns:a16="http://schemas.microsoft.com/office/drawing/2014/main" id="{01AF2DC6-2208-5BCB-63E1-4BF9AC5575D2}"/>
+                <a16:creationId xmlns:a16="http://schemas.microsoft.com/office/drawing/2014/main" id="{EC7C6D10-168D-696A-DDF1-5288D78C499C}"/>
               </a:ext>
             </a:extLst>
           </p:cNvPr>
@@ -23187,7 +23187,7 @@
           <p:cNvPr id="12" name="subtitle">
             <a:extLst>
               <a:ext uri="{FF2B5EF4-FFF2-40B4-BE49-F238E27FC236}">
-                <a16:creationId xmlns:a16="http://schemas.microsoft.com/office/drawing/2014/main" id="{DAADE8D0-9F11-08C5-70B5-7F9DF80D791D}"/>
+                <a16:creationId xmlns:a16="http://schemas.microsoft.com/office/drawing/2014/main" id="{B1F81EE8-6AB5-63FC-EF8C-0AF67DE519E5}"/>
               </a:ext>
             </a:extLst>
           </p:cNvPr>
@@ -23233,7 +23233,7 @@
           <p:cNvPr id="13" name="formula">
             <a:extLst>
               <a:ext uri="{FF2B5EF4-FFF2-40B4-BE49-F238E27FC236}">
-                <a16:creationId xmlns:a16="http://schemas.microsoft.com/office/drawing/2014/main" id="{989E1B56-F5FA-0FE3-E83B-9C61F5F5D06C}"/>
+                <a16:creationId xmlns:a16="http://schemas.microsoft.com/office/drawing/2014/main" id="{8E1A2101-D0CF-AD24-DB45-CC4D3F46CDD0}"/>
               </a:ext>
             </a:extLst>
           </p:cNvPr>
@@ -23294,7 +23294,7 @@
           <p:cNvPr id="14" name="formula-main">
             <a:extLst>
               <a:ext uri="{FF2B5EF4-FFF2-40B4-BE49-F238E27FC236}">
-                <a16:creationId xmlns:a16="http://schemas.microsoft.com/office/drawing/2014/main" id="{AE46A465-57F1-4ADE-5C0B-295C44D1FA93}"/>
+                <a16:creationId xmlns:a16="http://schemas.microsoft.com/office/drawing/2014/main" id="{BE9A88C3-55DF-5EF0-95CC-E3C45F7BDADE}"/>
               </a:ext>
             </a:extLst>
           </p:cNvPr>
@@ -23340,7 +23340,7 @@
           <p:cNvPr id="15" name="formula-sub">
             <a:extLst>
               <a:ext uri="{FF2B5EF4-FFF2-40B4-BE49-F238E27FC236}">
-                <a16:creationId xmlns:a16="http://schemas.microsoft.com/office/drawing/2014/main" id="{7A58B4FE-6349-7431-D2E7-34FB1E173556}"/>
+                <a16:creationId xmlns:a16="http://schemas.microsoft.com/office/drawing/2014/main" id="{A2E311AC-32AB-58BB-2A7F-218B26B6C0DD}"/>
               </a:ext>
             </a:extLst>
           </p:cNvPr>
@@ -23386,7 +23386,7 @@
           <p:cNvPr id="16" name="fig-frame">
             <a:extLst>
               <a:ext uri="{FF2B5EF4-FFF2-40B4-BE49-F238E27FC236}">
-                <a16:creationId xmlns:a16="http://schemas.microsoft.com/office/drawing/2014/main" id="{227B81AE-1069-17B8-5056-1DAE17B5C54C}"/>
+                <a16:creationId xmlns:a16="http://schemas.microsoft.com/office/drawing/2014/main" id="{99BEB268-484E-C518-A1CA-DA07F4BE17FB}"/>
               </a:ext>
             </a:extLst>
           </p:cNvPr>
@@ -23440,7 +23440,7 @@
           <p:cNvPr id="18" name="contract-stack">
             <a:extLst>
               <a:ext uri="{FF2B5EF4-FFF2-40B4-BE49-F238E27FC236}">
-                <a16:creationId xmlns:a16="http://schemas.microsoft.com/office/drawing/2014/main" id="{8B95FB33-4771-9D43-E49C-F279CD530B79}"/>
+                <a16:creationId xmlns:a16="http://schemas.microsoft.com/office/drawing/2014/main" id="{92473F39-9CB4-93AB-23D2-84C4262115C7}"/>
               </a:ext>
             </a:extLst>
           </p:cNvPr>
@@ -23476,7 +23476,7 @@
           <p:cNvPr id="19" name="gate-0">
             <a:extLst>
               <a:ext uri="{FF2B5EF4-FFF2-40B4-BE49-F238E27FC236}">
-                <a16:creationId xmlns:a16="http://schemas.microsoft.com/office/drawing/2014/main" id="{F1AB4A48-9D77-859C-D21C-E29FC0C9DB7F}"/>
+                <a16:creationId xmlns:a16="http://schemas.microsoft.com/office/drawing/2014/main" id="{1C30836D-054A-5D70-A0C3-1B302A97D3DE}"/>
               </a:ext>
             </a:extLst>
           </p:cNvPr>
@@ -23530,7 +23530,7 @@
           <p:cNvPr id="20" name="gate-band-0">
             <a:extLst>
               <a:ext uri="{FF2B5EF4-FFF2-40B4-BE49-F238E27FC236}">
-                <a16:creationId xmlns:a16="http://schemas.microsoft.com/office/drawing/2014/main" id="{818675E3-AD02-9422-18A7-D8D731085E0E}"/>
+                <a16:creationId xmlns:a16="http://schemas.microsoft.com/office/drawing/2014/main" id="{D946C48F-50FC-F322-77DE-95E229E02FE6}"/>
               </a:ext>
             </a:extLst>
           </p:cNvPr>
@@ -23584,7 +23584,7 @@
           <p:cNvPr id="21" name="gate-title-0">
             <a:extLst>
               <a:ext uri="{FF2B5EF4-FFF2-40B4-BE49-F238E27FC236}">
-                <a16:creationId xmlns:a16="http://schemas.microsoft.com/office/drawing/2014/main" id="{50779436-18F6-3FFD-DA06-A4CDD99BBAFA}"/>
+                <a16:creationId xmlns:a16="http://schemas.microsoft.com/office/drawing/2014/main" id="{BB457055-8CF7-6A82-C417-C95A8667CA10}"/>
               </a:ext>
             </a:extLst>
           </p:cNvPr>
@@ -23630,7 +23630,7 @@
           <p:cNvPr id="22" name="gate-sub-0">
             <a:extLst>
               <a:ext uri="{FF2B5EF4-FFF2-40B4-BE49-F238E27FC236}">
-                <a16:creationId xmlns:a16="http://schemas.microsoft.com/office/drawing/2014/main" id="{3AF51C56-B0C8-45A2-37D9-2E4ECC6C53AD}"/>
+                <a16:creationId xmlns:a16="http://schemas.microsoft.com/office/drawing/2014/main" id="{E7BE0E0E-B739-522B-769B-A1FA4F72B052}"/>
               </a:ext>
             </a:extLst>
           </p:cNvPr>
@@ -23676,7 +23676,7 @@
           <p:cNvPr id="23" name="gate-1">
             <a:extLst>
               <a:ext uri="{FF2B5EF4-FFF2-40B4-BE49-F238E27FC236}">
-                <a16:creationId xmlns:a16="http://schemas.microsoft.com/office/drawing/2014/main" id="{AD0F08E0-6E1A-2884-0819-E2EF829AC3E0}"/>
+                <a16:creationId xmlns:a16="http://schemas.microsoft.com/office/drawing/2014/main" id="{A2F021CF-4F23-B5D9-251C-FC5EBE8BF038}"/>
               </a:ext>
             </a:extLst>
           </p:cNvPr>
@@ -23730,7 +23730,7 @@
           <p:cNvPr id="24" name="gate-band-1">
             <a:extLst>
               <a:ext uri="{FF2B5EF4-FFF2-40B4-BE49-F238E27FC236}">
-                <a16:creationId xmlns:a16="http://schemas.microsoft.com/office/drawing/2014/main" id="{ADF4DB65-1E8C-DEE8-7F37-53B16805A752}"/>
+                <a16:creationId xmlns:a16="http://schemas.microsoft.com/office/drawing/2014/main" id="{FD427956-E71B-24FA-D713-3AEB2143CD1E}"/>
               </a:ext>
             </a:extLst>
           </p:cNvPr>
@@ -23784,7 +23784,7 @@
           <p:cNvPr id="25" name="gate-title-1">
             <a:extLst>
               <a:ext uri="{FF2B5EF4-FFF2-40B4-BE49-F238E27FC236}">
-                <a16:creationId xmlns:a16="http://schemas.microsoft.com/office/drawing/2014/main" id="{205BCEDA-15A6-F718-4900-B419F90AC854}"/>
+                <a16:creationId xmlns:a16="http://schemas.microsoft.com/office/drawing/2014/main" id="{E7C2D4E1-39F1-809A-2ADA-A7B51D2C92D7}"/>
               </a:ext>
             </a:extLst>
           </p:cNvPr>
@@ -23830,7 +23830,7 @@
           <p:cNvPr id="26" name="gate-sub-1">
             <a:extLst>
               <a:ext uri="{FF2B5EF4-FFF2-40B4-BE49-F238E27FC236}">
-                <a16:creationId xmlns:a16="http://schemas.microsoft.com/office/drawing/2014/main" id="{25D83337-2C28-6044-D815-0492F1FE0771}"/>
+                <a16:creationId xmlns:a16="http://schemas.microsoft.com/office/drawing/2014/main" id="{F3C3557F-2B4F-C8CB-D798-724AC411544C}"/>
               </a:ext>
             </a:extLst>
           </p:cNvPr>
@@ -23876,7 +23876,7 @@
           <p:cNvPr id="27" name="gate-2">
             <a:extLst>
               <a:ext uri="{FF2B5EF4-FFF2-40B4-BE49-F238E27FC236}">
-                <a16:creationId xmlns:a16="http://schemas.microsoft.com/office/drawing/2014/main" id="{BB04100D-2CD3-F45E-839B-B62CA328862F}"/>
+                <a16:creationId xmlns:a16="http://schemas.microsoft.com/office/drawing/2014/main" id="{E9A0ED52-2454-C71F-FD6B-EE34867DEFA5}"/>
               </a:ext>
             </a:extLst>
           </p:cNvPr>
@@ -23930,7 +23930,7 @@
           <p:cNvPr id="28" name="gate-band-2">
             <a:extLst>
               <a:ext uri="{FF2B5EF4-FFF2-40B4-BE49-F238E27FC236}">
-                <a16:creationId xmlns:a16="http://schemas.microsoft.com/office/drawing/2014/main" id="{44853A01-81A2-2CC2-8339-063E3FD3A241}"/>
+                <a16:creationId xmlns:a16="http://schemas.microsoft.com/office/drawing/2014/main" id="{2BEB0291-9021-C375-BD75-EF5602CF5E07}"/>
               </a:ext>
             </a:extLst>
           </p:cNvPr>
@@ -23984,7 +23984,7 @@
           <p:cNvPr id="29" name="gate-title-2">
             <a:extLst>
               <a:ext uri="{FF2B5EF4-FFF2-40B4-BE49-F238E27FC236}">
-                <a16:creationId xmlns:a16="http://schemas.microsoft.com/office/drawing/2014/main" id="{A90F935E-A45F-A832-3B84-117CF968BB37}"/>
+                <a16:creationId xmlns:a16="http://schemas.microsoft.com/office/drawing/2014/main" id="{56AE0BCC-5995-49FF-5278-679D3B77546D}"/>
               </a:ext>
             </a:extLst>
           </p:cNvPr>
@@ -24030,7 +24030,7 @@
           <p:cNvPr id="30" name="gate-sub-2">
             <a:extLst>
               <a:ext uri="{FF2B5EF4-FFF2-40B4-BE49-F238E27FC236}">
-                <a16:creationId xmlns:a16="http://schemas.microsoft.com/office/drawing/2014/main" id="{1C0AE611-FE83-D619-E879-3C5066182820}"/>
+                <a16:creationId xmlns:a16="http://schemas.microsoft.com/office/drawing/2014/main" id="{52BFE8D1-F9CB-75A0-D059-0919E757F313}"/>
               </a:ext>
             </a:extLst>
           </p:cNvPr>
@@ -24076,7 +24076,7 @@
           <p:cNvPr id="31" name="gate-3">
             <a:extLst>
               <a:ext uri="{FF2B5EF4-FFF2-40B4-BE49-F238E27FC236}">
-                <a16:creationId xmlns:a16="http://schemas.microsoft.com/office/drawing/2014/main" id="{F8D9A4EB-81CB-5606-85E2-4C9D0E51393B}"/>
+                <a16:creationId xmlns:a16="http://schemas.microsoft.com/office/drawing/2014/main" id="{944F6095-7002-8D47-8B74-F93CBA6AFD7E}"/>
               </a:ext>
             </a:extLst>
           </p:cNvPr>
@@ -24130,7 +24130,7 @@
           <p:cNvPr id="32" name="gate-band-3">
             <a:extLst>
               <a:ext uri="{FF2B5EF4-FFF2-40B4-BE49-F238E27FC236}">
-                <a16:creationId xmlns:a16="http://schemas.microsoft.com/office/drawing/2014/main" id="{E94DBC2D-BE45-6727-FCD2-FEF98EBADBB7}"/>
+                <a16:creationId xmlns:a16="http://schemas.microsoft.com/office/drawing/2014/main" id="{9C4E396F-9691-CE12-22D7-8AAE7FB921AD}"/>
               </a:ext>
             </a:extLst>
           </p:cNvPr>
@@ -24184,7 +24184,7 @@
           <p:cNvPr id="33" name="gate-title-3">
             <a:extLst>
               <a:ext uri="{FF2B5EF4-FFF2-40B4-BE49-F238E27FC236}">
-                <a16:creationId xmlns:a16="http://schemas.microsoft.com/office/drawing/2014/main" id="{3582F7BD-719E-8344-51BB-E4ABE0382913}"/>
+                <a16:creationId xmlns:a16="http://schemas.microsoft.com/office/drawing/2014/main" id="{9B47BB64-6952-7F7B-B053-CCCED968D49D}"/>
               </a:ext>
             </a:extLst>
           </p:cNvPr>
@@ -24230,7 +24230,7 @@
           <p:cNvPr id="34" name="gate-sub-3">
             <a:extLst>
               <a:ext uri="{FF2B5EF4-FFF2-40B4-BE49-F238E27FC236}">
-                <a16:creationId xmlns:a16="http://schemas.microsoft.com/office/drawing/2014/main" id="{B1BA4038-9C3F-7037-9188-77C9A9272357}"/>
+                <a16:creationId xmlns:a16="http://schemas.microsoft.com/office/drawing/2014/main" id="{269BCEA7-B9AC-9FE6-54B8-9B2B2D7EB38C}"/>
               </a:ext>
             </a:extLst>
           </p:cNvPr>
@@ -24274,7 +24274,7 @@
     </p:spTree>
     <p:extLst>
       <p:ext uri="{BB962C8B-B14F-4D97-AF65-F5344CB8AC3E}">
-        <p14:creationId xmlns:p14="http://schemas.microsoft.com/office/powerpoint/2010/main" val="3838017087"/>
+        <p14:creationId xmlns:p14="http://schemas.microsoft.com/office/powerpoint/2010/main" val="2164490533"/>
       </p:ext>
     </p:extLst>
   </p:cSld>
@@ -24318,7 +24318,7 @@
           <p:cNvPr id="2" name="dark-bg">
             <a:extLst>
               <a:ext uri="{FF2B5EF4-FFF2-40B4-BE49-F238E27FC236}">
-                <a16:creationId xmlns:a16="http://schemas.microsoft.com/office/drawing/2014/main" id="{952DE887-EE8D-EBFF-CB81-8F9F17D7406D}"/>
+                <a16:creationId xmlns:a16="http://schemas.microsoft.com/office/drawing/2014/main" id="{94989859-C712-3E48-28A0-C6C10C2B3252}"/>
               </a:ext>
             </a:extLst>
           </p:cNvPr>
@@ -24379,7 +24379,7 @@
           <p:cNvPr id="3" name="dark-panel">
             <a:extLst>
               <a:ext uri="{FF2B5EF4-FFF2-40B4-BE49-F238E27FC236}">
-                <a16:creationId xmlns:a16="http://schemas.microsoft.com/office/drawing/2014/main" id="{13FD7FD7-B7A9-78E1-AB17-18C43FDD52FB}"/>
+                <a16:creationId xmlns:a16="http://schemas.microsoft.com/office/drawing/2014/main" id="{BADF0AD1-336C-8AE7-06A5-E7C9BD72ABB4}"/>
               </a:ext>
             </a:extLst>
           </p:cNvPr>
@@ -24442,7 +24442,7 @@
           <p:cNvPr id="4" name="grid-v-0">
             <a:extLst>
               <a:ext uri="{FF2B5EF4-FFF2-40B4-BE49-F238E27FC236}">
-                <a16:creationId xmlns:a16="http://schemas.microsoft.com/office/drawing/2014/main" id="{2449DD3B-346E-2E5C-88AE-0EB23ACB3EC0}"/>
+                <a16:creationId xmlns:a16="http://schemas.microsoft.com/office/drawing/2014/main" id="{DC380E90-7500-408B-918D-742C8B7FF56D}"/>
               </a:ext>
             </a:extLst>
           </p:cNvPr>
@@ -24483,7 +24483,7 @@
           <p:cNvPr id="5" name="grid-v-64">
             <a:extLst>
               <a:ext uri="{FF2B5EF4-FFF2-40B4-BE49-F238E27FC236}">
-                <a16:creationId xmlns:a16="http://schemas.microsoft.com/office/drawing/2014/main" id="{6D477D3D-FC12-4FDF-1259-96B1E3D22E5B}"/>
+                <a16:creationId xmlns:a16="http://schemas.microsoft.com/office/drawing/2014/main" id="{8F4B180C-82B7-1A14-FE5F-F905E8DDC10C}"/>
               </a:ext>
             </a:extLst>
           </p:cNvPr>
@@ -24524,7 +24524,7 @@
           <p:cNvPr id="6" name="grid-v-128">
             <a:extLst>
               <a:ext uri="{FF2B5EF4-FFF2-40B4-BE49-F238E27FC236}">
-                <a16:creationId xmlns:a16="http://schemas.microsoft.com/office/drawing/2014/main" id="{766916F4-20B6-36CD-5C5D-15842E17FC47}"/>
+                <a16:creationId xmlns:a16="http://schemas.microsoft.com/office/drawing/2014/main" id="{0BC57537-FF26-3241-A4F2-42DC98A53882}"/>
               </a:ext>
             </a:extLst>
           </p:cNvPr>
@@ -24565,7 +24565,7 @@
           <p:cNvPr id="7" name="grid-v-192">
             <a:extLst>
               <a:ext uri="{FF2B5EF4-FFF2-40B4-BE49-F238E27FC236}">
-                <a16:creationId xmlns:a16="http://schemas.microsoft.com/office/drawing/2014/main" id="{E0A37E93-179B-42E4-41B6-0C18838C81EE}"/>
+                <a16:creationId xmlns:a16="http://schemas.microsoft.com/office/drawing/2014/main" id="{33309C72-E967-5E27-826B-FFB1F9B404A5}"/>
               </a:ext>
             </a:extLst>
           </p:cNvPr>
@@ -24606,7 +24606,7 @@
           <p:cNvPr id="8" name="grid-v-256">
             <a:extLst>
               <a:ext uri="{FF2B5EF4-FFF2-40B4-BE49-F238E27FC236}">
-                <a16:creationId xmlns:a16="http://schemas.microsoft.com/office/drawing/2014/main" id="{703169EB-22F6-4F72-EEDB-E30212CFDE2E}"/>
+                <a16:creationId xmlns:a16="http://schemas.microsoft.com/office/drawing/2014/main" id="{641CD5FA-C7FA-F4AA-CD65-22361F45C698}"/>
               </a:ext>
             </a:extLst>
           </p:cNvPr>
@@ -24647,7 +24647,7 @@
           <p:cNvPr id="9" name="grid-v-320">
             <a:extLst>
               <a:ext uri="{FF2B5EF4-FFF2-40B4-BE49-F238E27FC236}">
-                <a16:creationId xmlns:a16="http://schemas.microsoft.com/office/drawing/2014/main" id="{CE52C614-49B7-C9F8-21D4-9D38AFBD9017}"/>
+                <a16:creationId xmlns:a16="http://schemas.microsoft.com/office/drawing/2014/main" id="{C7F136E5-4A26-AC56-02BB-C1C3D5686065}"/>
               </a:ext>
             </a:extLst>
           </p:cNvPr>
@@ -24688,7 +24688,7 @@
           <p:cNvPr id="10" name="grid-v-384">
             <a:extLst>
               <a:ext uri="{FF2B5EF4-FFF2-40B4-BE49-F238E27FC236}">
-                <a16:creationId xmlns:a16="http://schemas.microsoft.com/office/drawing/2014/main" id="{BA24BA99-37D0-D792-C0DC-215B76B24BDB}"/>
+                <a16:creationId xmlns:a16="http://schemas.microsoft.com/office/drawing/2014/main" id="{9AB4F9D9-4BF7-E2A5-A360-CB21B542F3D0}"/>
               </a:ext>
             </a:extLst>
           </p:cNvPr>
@@ -24729,7 +24729,7 @@
           <p:cNvPr id="11" name="grid-v-448">
             <a:extLst>
               <a:ext uri="{FF2B5EF4-FFF2-40B4-BE49-F238E27FC236}">
-                <a16:creationId xmlns:a16="http://schemas.microsoft.com/office/drawing/2014/main" id="{A1F88A93-FCB0-1B90-B526-6E838CEE61EE}"/>
+                <a16:creationId xmlns:a16="http://schemas.microsoft.com/office/drawing/2014/main" id="{4E7425E1-6036-4520-20EF-844080E6136B}"/>
               </a:ext>
             </a:extLst>
           </p:cNvPr>
@@ -24770,7 +24770,7 @@
           <p:cNvPr id="12" name="grid-v-512">
             <a:extLst>
               <a:ext uri="{FF2B5EF4-FFF2-40B4-BE49-F238E27FC236}">
-                <a16:creationId xmlns:a16="http://schemas.microsoft.com/office/drawing/2014/main" id="{B366569F-B3C4-C3DC-34C4-81EE339AC35F}"/>
+                <a16:creationId xmlns:a16="http://schemas.microsoft.com/office/drawing/2014/main" id="{EACC8D4B-5137-2556-BD28-32229DABAF1B}"/>
               </a:ext>
             </a:extLst>
           </p:cNvPr>
@@ -24811,7 +24811,7 @@
           <p:cNvPr id="13" name="grid-v-576">
             <a:extLst>
               <a:ext uri="{FF2B5EF4-FFF2-40B4-BE49-F238E27FC236}">
-                <a16:creationId xmlns:a16="http://schemas.microsoft.com/office/drawing/2014/main" id="{453A961A-9945-8295-B427-EAED5F2D780C}"/>
+                <a16:creationId xmlns:a16="http://schemas.microsoft.com/office/drawing/2014/main" id="{7F972E7E-7321-EED3-758B-F602CCF4A3AE}"/>
               </a:ext>
             </a:extLst>
           </p:cNvPr>
@@ -24852,7 +24852,7 @@
           <p:cNvPr id="14" name="grid-v-640">
             <a:extLst>
               <a:ext uri="{FF2B5EF4-FFF2-40B4-BE49-F238E27FC236}">
-                <a16:creationId xmlns:a16="http://schemas.microsoft.com/office/drawing/2014/main" id="{1E3E5725-B15C-EA42-F3CA-0903D439703C}"/>
+                <a16:creationId xmlns:a16="http://schemas.microsoft.com/office/drawing/2014/main" id="{E04C9F71-6B00-70E3-407E-7E6FCD4F4238}"/>
               </a:ext>
             </a:extLst>
           </p:cNvPr>
@@ -24893,7 +24893,7 @@
           <p:cNvPr id="15" name="grid-v-704">
             <a:extLst>
               <a:ext uri="{FF2B5EF4-FFF2-40B4-BE49-F238E27FC236}">
-                <a16:creationId xmlns:a16="http://schemas.microsoft.com/office/drawing/2014/main" id="{66BDEDF2-FAF1-9FEE-CD69-D31574F979D9}"/>
+                <a16:creationId xmlns:a16="http://schemas.microsoft.com/office/drawing/2014/main" id="{D321CE26-EA00-0D5A-60DD-D7DFACD89CB3}"/>
               </a:ext>
             </a:extLst>
           </p:cNvPr>
@@ -24934,7 +24934,7 @@
           <p:cNvPr id="16" name="grid-v-768">
             <a:extLst>
               <a:ext uri="{FF2B5EF4-FFF2-40B4-BE49-F238E27FC236}">
-                <a16:creationId xmlns:a16="http://schemas.microsoft.com/office/drawing/2014/main" id="{DABC8017-5359-DD89-D22C-2E36A4B5A4D3}"/>
+                <a16:creationId xmlns:a16="http://schemas.microsoft.com/office/drawing/2014/main" id="{5095E0CA-E67E-0631-CA67-EE4494B6A00B}"/>
               </a:ext>
             </a:extLst>
           </p:cNvPr>
@@ -24975,7 +24975,7 @@
           <p:cNvPr id="17" name="grid-v-832">
             <a:extLst>
               <a:ext uri="{FF2B5EF4-FFF2-40B4-BE49-F238E27FC236}">
-                <a16:creationId xmlns:a16="http://schemas.microsoft.com/office/drawing/2014/main" id="{05A186D4-2978-CC26-188A-9DCB25A08C74}"/>
+                <a16:creationId xmlns:a16="http://schemas.microsoft.com/office/drawing/2014/main" id="{8AB51A8D-0396-3ADF-8514-A16500D7F645}"/>
               </a:ext>
             </a:extLst>
           </p:cNvPr>
@@ -25016,7 +25016,7 @@
           <p:cNvPr id="18" name="grid-v-896">
             <a:extLst>
               <a:ext uri="{FF2B5EF4-FFF2-40B4-BE49-F238E27FC236}">
-                <a16:creationId xmlns:a16="http://schemas.microsoft.com/office/drawing/2014/main" id="{BA2F846C-8D3F-02F7-6358-F377F1712868}"/>
+                <a16:creationId xmlns:a16="http://schemas.microsoft.com/office/drawing/2014/main" id="{3D364294-DDD4-8699-C398-3FCE61A55F7F}"/>
               </a:ext>
             </a:extLst>
           </p:cNvPr>
@@ -25057,7 +25057,7 @@
           <p:cNvPr id="19" name="grid-v-960">
             <a:extLst>
               <a:ext uri="{FF2B5EF4-FFF2-40B4-BE49-F238E27FC236}">
-                <a16:creationId xmlns:a16="http://schemas.microsoft.com/office/drawing/2014/main" id="{CA96F860-6DAD-83BE-EEAB-7D0AD9A953DA}"/>
+                <a16:creationId xmlns:a16="http://schemas.microsoft.com/office/drawing/2014/main" id="{D6CFBAC3-A84D-A7CA-39E6-1E96D88197ED}"/>
               </a:ext>
             </a:extLst>
           </p:cNvPr>
@@ -25098,7 +25098,7 @@
           <p:cNvPr id="20" name="grid-h-0">
             <a:extLst>
               <a:ext uri="{FF2B5EF4-FFF2-40B4-BE49-F238E27FC236}">
-                <a16:creationId xmlns:a16="http://schemas.microsoft.com/office/drawing/2014/main" id="{FC39E454-9227-B26D-15BB-B2D705153DA7}"/>
+                <a16:creationId xmlns:a16="http://schemas.microsoft.com/office/drawing/2014/main" id="{38419C10-8A7E-A2EC-BA07-73F274E26AB0}"/>
               </a:ext>
             </a:extLst>
           </p:cNvPr>
@@ -25139,7 +25139,7 @@
           <p:cNvPr id="21" name="grid-h-64">
             <a:extLst>
               <a:ext uri="{FF2B5EF4-FFF2-40B4-BE49-F238E27FC236}">
-                <a16:creationId xmlns:a16="http://schemas.microsoft.com/office/drawing/2014/main" id="{72E29214-A60E-5753-5742-B97C511DA80A}"/>
+                <a16:creationId xmlns:a16="http://schemas.microsoft.com/office/drawing/2014/main" id="{1FF7BFD0-E5F3-9546-F7AC-1E00F6FA764B}"/>
               </a:ext>
             </a:extLst>
           </p:cNvPr>
@@ -25180,7 +25180,7 @@
           <p:cNvPr id="22" name="grid-h-128">
             <a:extLst>
               <a:ext uri="{FF2B5EF4-FFF2-40B4-BE49-F238E27FC236}">
-                <a16:creationId xmlns:a16="http://schemas.microsoft.com/office/drawing/2014/main" id="{7B3D5430-7252-EEBE-6199-7969DC391636}"/>
+                <a16:creationId xmlns:a16="http://schemas.microsoft.com/office/drawing/2014/main" id="{D39ED34E-794A-3D93-39FF-CB0C89066C0C}"/>
               </a:ext>
             </a:extLst>
           </p:cNvPr>
@@ -25221,7 +25221,7 @@
           <p:cNvPr id="23" name="grid-h-192">
             <a:extLst>
               <a:ext uri="{FF2B5EF4-FFF2-40B4-BE49-F238E27FC236}">
-                <a16:creationId xmlns:a16="http://schemas.microsoft.com/office/drawing/2014/main" id="{D22FB796-1E6D-6B74-1251-C82E27D76F03}"/>
+                <a16:creationId xmlns:a16="http://schemas.microsoft.com/office/drawing/2014/main" id="{17B45764-9CCD-5F9E-BD64-CB667BC1DE99}"/>
               </a:ext>
             </a:extLst>
           </p:cNvPr>
@@ -25262,7 +25262,7 @@
           <p:cNvPr id="24" name="grid-h-256">
             <a:extLst>
               <a:ext uri="{FF2B5EF4-FFF2-40B4-BE49-F238E27FC236}">
-                <a16:creationId xmlns:a16="http://schemas.microsoft.com/office/drawing/2014/main" id="{FDF7E188-B94C-1480-1121-528D62D56000}"/>
+                <a16:creationId xmlns:a16="http://schemas.microsoft.com/office/drawing/2014/main" id="{455BFBCD-C18D-B246-1C93-EB921593A4C8}"/>
               </a:ext>
             </a:extLst>
           </p:cNvPr>
@@ -25303,7 +25303,7 @@
           <p:cNvPr id="25" name="grid-h-320">
             <a:extLst>
               <a:ext uri="{FF2B5EF4-FFF2-40B4-BE49-F238E27FC236}">
-                <a16:creationId xmlns:a16="http://schemas.microsoft.com/office/drawing/2014/main" id="{B242B28E-37C3-EDC1-5C7B-9FE4AEDBD1AB}"/>
+                <a16:creationId xmlns:a16="http://schemas.microsoft.com/office/drawing/2014/main" id="{25598014-EE8D-DA4B-CA72-0A29E3F2D515}"/>
               </a:ext>
             </a:extLst>
           </p:cNvPr>
@@ -25344,7 +25344,7 @@
           <p:cNvPr id="26" name="grid-h-384">
             <a:extLst>
               <a:ext uri="{FF2B5EF4-FFF2-40B4-BE49-F238E27FC236}">
-                <a16:creationId xmlns:a16="http://schemas.microsoft.com/office/drawing/2014/main" id="{4A8665D0-D072-38C5-BD00-74719C2DED7B}"/>
+                <a16:creationId xmlns:a16="http://schemas.microsoft.com/office/drawing/2014/main" id="{CBF4CF99-E007-B6CC-D8DF-9120A0F15377}"/>
               </a:ext>
             </a:extLst>
           </p:cNvPr>
@@ -25385,7 +25385,7 @@
           <p:cNvPr id="27" name="grid-h-448">
             <a:extLst>
               <a:ext uri="{FF2B5EF4-FFF2-40B4-BE49-F238E27FC236}">
-                <a16:creationId xmlns:a16="http://schemas.microsoft.com/office/drawing/2014/main" id="{9660BC49-012D-90E9-3C01-DC46D120028A}"/>
+                <a16:creationId xmlns:a16="http://schemas.microsoft.com/office/drawing/2014/main" id="{BE9A6248-86B3-7A6C-D12E-4977AB8A7C23}"/>
               </a:ext>
             </a:extLst>
           </p:cNvPr>
@@ -25426,7 +25426,7 @@
           <p:cNvPr id="28" name="grid-h-512">
             <a:extLst>
               <a:ext uri="{FF2B5EF4-FFF2-40B4-BE49-F238E27FC236}">
-                <a16:creationId xmlns:a16="http://schemas.microsoft.com/office/drawing/2014/main" id="{EC526CC3-1CF3-53BB-BFF2-842AF2B29A28}"/>
+                <a16:creationId xmlns:a16="http://schemas.microsoft.com/office/drawing/2014/main" id="{E7066E96-FE98-9E3A-E4A0-52C67B42EC5C}"/>
               </a:ext>
             </a:extLst>
           </p:cNvPr>
@@ -25467,7 +25467,7 @@
           <p:cNvPr id="29" name="page-num">
             <a:extLst>
               <a:ext uri="{FF2B5EF4-FFF2-40B4-BE49-F238E27FC236}">
-                <a16:creationId xmlns:a16="http://schemas.microsoft.com/office/drawing/2014/main" id="{996C8803-9E49-D1A1-E19E-95F63F11721C}"/>
+                <a16:creationId xmlns:a16="http://schemas.microsoft.com/office/drawing/2014/main" id="{2F6A5579-C292-917A-A7A8-0E6F4EFBE3E9}"/>
               </a:ext>
             </a:extLst>
           </p:cNvPr>
@@ -25513,7 +25513,7 @@
           <p:cNvPr id="30" name="section-label">
             <a:extLst>
               <a:ext uri="{FF2B5EF4-FFF2-40B4-BE49-F238E27FC236}">
-                <a16:creationId xmlns:a16="http://schemas.microsoft.com/office/drawing/2014/main" id="{5AECC493-B644-1BAA-33F0-C64E883FE4FB}"/>
+                <a16:creationId xmlns:a16="http://schemas.microsoft.com/office/drawing/2014/main" id="{3FD843EF-583A-5B4C-CB7B-8EC641F2F5A4}"/>
               </a:ext>
             </a:extLst>
           </p:cNvPr>
@@ -25559,7 +25559,7 @@
           <p:cNvPr id="31" name="title">
             <a:extLst>
               <a:ext uri="{FF2B5EF4-FFF2-40B4-BE49-F238E27FC236}">
-                <a16:creationId xmlns:a16="http://schemas.microsoft.com/office/drawing/2014/main" id="{23072ADF-635D-E29B-2838-E79B4CC6D267}"/>
+                <a16:creationId xmlns:a16="http://schemas.microsoft.com/office/drawing/2014/main" id="{171ED3E3-496B-B786-802D-AD770308039A}"/>
               </a:ext>
             </a:extLst>
           </p:cNvPr>
@@ -25605,7 +25605,7 @@
           <p:cNvPr id="32" name="subtitle">
             <a:extLst>
               <a:ext uri="{FF2B5EF4-FFF2-40B4-BE49-F238E27FC236}">
-                <a16:creationId xmlns:a16="http://schemas.microsoft.com/office/drawing/2014/main" id="{A91C0B1D-336E-27F0-FBB2-4356171E567C}"/>
+                <a16:creationId xmlns:a16="http://schemas.microsoft.com/office/drawing/2014/main" id="{62A63DBA-6C97-EF10-D1E0-A62F1C474FF4}"/>
               </a:ext>
             </a:extLst>
           </p:cNvPr>
@@ -25651,7 +25651,7 @@
           <p:cNvPr id="33" name="metric-0">
             <a:extLst>
               <a:ext uri="{FF2B5EF4-FFF2-40B4-BE49-F238E27FC236}">
-                <a16:creationId xmlns:a16="http://schemas.microsoft.com/office/drawing/2014/main" id="{8859817E-2BDA-C8CE-2442-3780092BCF13}"/>
+                <a16:creationId xmlns:a16="http://schemas.microsoft.com/office/drawing/2014/main" id="{1696DCA2-FA0E-1589-41D5-EC2FD5BE059B}"/>
               </a:ext>
             </a:extLst>
           </p:cNvPr>
@@ -25705,7 +25705,7 @@
           <p:cNvPr id="34" name="metric-band-0">
             <a:extLst>
               <a:ext uri="{FF2B5EF4-FFF2-40B4-BE49-F238E27FC236}">
-                <a16:creationId xmlns:a16="http://schemas.microsoft.com/office/drawing/2014/main" id="{DD01D5FD-716D-23D1-49CA-C2D797401634}"/>
+                <a16:creationId xmlns:a16="http://schemas.microsoft.com/office/drawing/2014/main" id="{ED00C02C-9A86-BCD3-F76F-AAE442915E3C}"/>
               </a:ext>
             </a:extLst>
           </p:cNvPr>
@@ -25759,7 +25759,7 @@
           <p:cNvPr id="35" name="metric-label-0">
             <a:extLst>
               <a:ext uri="{FF2B5EF4-FFF2-40B4-BE49-F238E27FC236}">
-                <a16:creationId xmlns:a16="http://schemas.microsoft.com/office/drawing/2014/main" id="{380E3DF7-F9ED-647D-46B4-D27F553279E4}"/>
+                <a16:creationId xmlns:a16="http://schemas.microsoft.com/office/drawing/2014/main" id="{055F61BF-4A03-1A2A-9F95-CD606B1753B8}"/>
               </a:ext>
             </a:extLst>
           </p:cNvPr>
@@ -25805,7 +25805,7 @@
           <p:cNvPr id="36" name="metric-value-0">
             <a:extLst>
               <a:ext uri="{FF2B5EF4-FFF2-40B4-BE49-F238E27FC236}">
-                <a16:creationId xmlns:a16="http://schemas.microsoft.com/office/drawing/2014/main" id="{73346F1D-47F5-CDE8-23D5-39DBFCBD43F7}"/>
+                <a16:creationId xmlns:a16="http://schemas.microsoft.com/office/drawing/2014/main" id="{640FCDF9-1A31-FAEB-14E5-76F0C5CEA6B0}"/>
               </a:ext>
             </a:extLst>
           </p:cNvPr>
@@ -25851,7 +25851,7 @@
           <p:cNvPr id="37" name="metric-note-0">
             <a:extLst>
               <a:ext uri="{FF2B5EF4-FFF2-40B4-BE49-F238E27FC236}">
-                <a16:creationId xmlns:a16="http://schemas.microsoft.com/office/drawing/2014/main" id="{6298D8AF-C60A-EF88-5D6B-7FCE2C96DD22}"/>
+                <a16:creationId xmlns:a16="http://schemas.microsoft.com/office/drawing/2014/main" id="{4946CE1F-D46D-3C74-5D1C-BAE7453A2D1F}"/>
               </a:ext>
             </a:extLst>
           </p:cNvPr>
@@ -25897,7 +25897,7 @@
           <p:cNvPr id="38" name="metric-1">
             <a:extLst>
               <a:ext uri="{FF2B5EF4-FFF2-40B4-BE49-F238E27FC236}">
-                <a16:creationId xmlns:a16="http://schemas.microsoft.com/office/drawing/2014/main" id="{1C620DF7-D98C-DCF7-4159-DD7D03F152B3}"/>
+                <a16:creationId xmlns:a16="http://schemas.microsoft.com/office/drawing/2014/main" id="{C87AFB29-3FCC-D4BA-2DEC-2A48D8EE6063}"/>
               </a:ext>
             </a:extLst>
           </p:cNvPr>
@@ -25951,7 +25951,7 @@
           <p:cNvPr id="39" name="metric-band-1">
             <a:extLst>
               <a:ext uri="{FF2B5EF4-FFF2-40B4-BE49-F238E27FC236}">
-                <a16:creationId xmlns:a16="http://schemas.microsoft.com/office/drawing/2014/main" id="{77EAB615-F9D5-2F13-0873-44D829E436E5}"/>
+                <a16:creationId xmlns:a16="http://schemas.microsoft.com/office/drawing/2014/main" id="{BC9CB624-ED75-6F5F-098C-4DC32202F163}"/>
               </a:ext>
             </a:extLst>
           </p:cNvPr>
@@ -26005,7 +26005,7 @@
           <p:cNvPr id="40" name="metric-label-1">
             <a:extLst>
               <a:ext uri="{FF2B5EF4-FFF2-40B4-BE49-F238E27FC236}">
-                <a16:creationId xmlns:a16="http://schemas.microsoft.com/office/drawing/2014/main" id="{76B88436-5249-EEDA-BC3E-B16087B62A46}"/>
+                <a16:creationId xmlns:a16="http://schemas.microsoft.com/office/drawing/2014/main" id="{B44A2223-824E-E368-9A87-AB579DE2B50C}"/>
               </a:ext>
             </a:extLst>
           </p:cNvPr>
@@ -26051,7 +26051,7 @@
           <p:cNvPr id="41" name="metric-value-1">
             <a:extLst>
               <a:ext uri="{FF2B5EF4-FFF2-40B4-BE49-F238E27FC236}">
-                <a16:creationId xmlns:a16="http://schemas.microsoft.com/office/drawing/2014/main" id="{E30497F3-874C-05A4-841F-3A7ECB5A5FA8}"/>
+                <a16:creationId xmlns:a16="http://schemas.microsoft.com/office/drawing/2014/main" id="{D1CE6254-F34C-D8B7-0B32-D8ECB5E506F3}"/>
               </a:ext>
             </a:extLst>
           </p:cNvPr>
@@ -26097,7 +26097,7 @@
           <p:cNvPr id="42" name="metric-note-1">
             <a:extLst>
               <a:ext uri="{FF2B5EF4-FFF2-40B4-BE49-F238E27FC236}">
-                <a16:creationId xmlns:a16="http://schemas.microsoft.com/office/drawing/2014/main" id="{A290387C-6A74-2A73-94C2-F61012FA3E86}"/>
+                <a16:creationId xmlns:a16="http://schemas.microsoft.com/office/drawing/2014/main" id="{70D72FE8-E827-3FEF-F43F-5E32D41B1E65}"/>
               </a:ext>
             </a:extLst>
           </p:cNvPr>
@@ -26143,7 +26143,7 @@
           <p:cNvPr id="43" name="metric-2">
             <a:extLst>
               <a:ext uri="{FF2B5EF4-FFF2-40B4-BE49-F238E27FC236}">
-                <a16:creationId xmlns:a16="http://schemas.microsoft.com/office/drawing/2014/main" id="{90D137A2-3FF7-549E-C16E-8200E88FEE99}"/>
+                <a16:creationId xmlns:a16="http://schemas.microsoft.com/office/drawing/2014/main" id="{A3760775-A909-0691-41D2-D084C659F823}"/>
               </a:ext>
             </a:extLst>
           </p:cNvPr>
@@ -26197,7 +26197,7 @@
           <p:cNvPr id="44" name="metric-band-2">
             <a:extLst>
               <a:ext uri="{FF2B5EF4-FFF2-40B4-BE49-F238E27FC236}">
-                <a16:creationId xmlns:a16="http://schemas.microsoft.com/office/drawing/2014/main" id="{6ACF1B15-084E-CA47-F27E-174457750CDB}"/>
+                <a16:creationId xmlns:a16="http://schemas.microsoft.com/office/drawing/2014/main" id="{D5C438DE-6EC8-90AA-FDA9-2DF14DB4B478}"/>
               </a:ext>
             </a:extLst>
           </p:cNvPr>
@@ -26251,7 +26251,7 @@
           <p:cNvPr id="45" name="metric-label-2">
             <a:extLst>
               <a:ext uri="{FF2B5EF4-FFF2-40B4-BE49-F238E27FC236}">
-                <a16:creationId xmlns:a16="http://schemas.microsoft.com/office/drawing/2014/main" id="{29AD8B72-5AF5-A230-DD25-C435EAEDBA55}"/>
+                <a16:creationId xmlns:a16="http://schemas.microsoft.com/office/drawing/2014/main" id="{6D4A2A7E-B780-FCB3-3DAF-FCC64FA120AA}"/>
               </a:ext>
             </a:extLst>
           </p:cNvPr>
@@ -26297,7 +26297,7 @@
           <p:cNvPr id="46" name="metric-value-2">
             <a:extLst>
               <a:ext uri="{FF2B5EF4-FFF2-40B4-BE49-F238E27FC236}">
-                <a16:creationId xmlns:a16="http://schemas.microsoft.com/office/drawing/2014/main" id="{F1D20E46-27A2-0B83-25D4-63D54558CC9F}"/>
+                <a16:creationId xmlns:a16="http://schemas.microsoft.com/office/drawing/2014/main" id="{D78F5508-E364-CE0F-35D6-CC33E5535C59}"/>
               </a:ext>
             </a:extLst>
           </p:cNvPr>
@@ -26343,7 +26343,7 @@
           <p:cNvPr id="47" name="metric-note-2">
             <a:extLst>
               <a:ext uri="{FF2B5EF4-FFF2-40B4-BE49-F238E27FC236}">
-                <a16:creationId xmlns:a16="http://schemas.microsoft.com/office/drawing/2014/main" id="{991A5E86-E099-2935-3483-F4FE408721E3}"/>
+                <a16:creationId xmlns:a16="http://schemas.microsoft.com/office/drawing/2014/main" id="{C0D880B5-E993-DFBC-D92C-5825B9AD2789}"/>
               </a:ext>
             </a:extLst>
           </p:cNvPr>
@@ -26389,7 +26389,7 @@
           <p:cNvPr id="48" name="fig-frame">
             <a:extLst>
               <a:ext uri="{FF2B5EF4-FFF2-40B4-BE49-F238E27FC236}">
-                <a16:creationId xmlns:a16="http://schemas.microsoft.com/office/drawing/2014/main" id="{8CA33AAF-946C-1B8C-06AD-D1AE32209537}"/>
+                <a16:creationId xmlns:a16="http://schemas.microsoft.com/office/drawing/2014/main" id="{92440CBB-0B60-C1EE-8860-6F1328A81103}"/>
               </a:ext>
             </a:extLst>
           </p:cNvPr>
@@ -26443,7 +26443,7 @@
           <p:cNvPr id="50" name="sem-compact">
             <a:extLst>
               <a:ext uri="{FF2B5EF4-FFF2-40B4-BE49-F238E27FC236}">
-                <a16:creationId xmlns:a16="http://schemas.microsoft.com/office/drawing/2014/main" id="{0C4E8C86-E6FF-8FFC-F2B5-6C3FEDD453FF}"/>
+                <a16:creationId xmlns:a16="http://schemas.microsoft.com/office/drawing/2014/main" id="{252EC4A9-1E37-1A87-263E-456C2D8569B7}"/>
               </a:ext>
             </a:extLst>
           </p:cNvPr>
@@ -26479,7 +26479,7 @@
           <p:cNvPr id="51" name="caveat">
             <a:extLst>
               <a:ext uri="{FF2B5EF4-FFF2-40B4-BE49-F238E27FC236}">
-                <a16:creationId xmlns:a16="http://schemas.microsoft.com/office/drawing/2014/main" id="{A2160760-31DC-52B2-D005-650D5B8178D1}"/>
+                <a16:creationId xmlns:a16="http://schemas.microsoft.com/office/drawing/2014/main" id="{77FA77E7-250F-CE9D-39C2-9BCFF25E2B0A}"/>
               </a:ext>
             </a:extLst>
           </p:cNvPr>
@@ -26525,7 +26525,7 @@
           <p:cNvPr id="53" name="图片 52">
             <a:extLst>
               <a:ext uri="{FF2B5EF4-FFF2-40B4-BE49-F238E27FC236}">
-                <a16:creationId xmlns:a16="http://schemas.microsoft.com/office/drawing/2014/main" id="{F8510071-4D83-C590-BBF7-6548AC21A1FE}"/>
+                <a16:creationId xmlns:a16="http://schemas.microsoft.com/office/drawing/2014/main" id="{A1F9D777-12AE-0E81-3426-43E6B8042B72}"/>
               </a:ext>
             </a:extLst>
           </p:cNvPr>
@@ -26559,7 +26559,7 @@
     </p:spTree>
     <p:extLst>
       <p:ext uri="{BB962C8B-B14F-4D97-AF65-F5344CB8AC3E}">
-        <p14:creationId xmlns:p14="http://schemas.microsoft.com/office/powerpoint/2010/main" val="2884546206"/>
+        <p14:creationId xmlns:p14="http://schemas.microsoft.com/office/powerpoint/2010/main" val="2181610189"/>
       </p:ext>
     </p:extLst>
   </p:cSld>
@@ -26603,7 +26603,7 @@
           <p:cNvPr id="2" name="page-bg">
             <a:extLst>
               <a:ext uri="{FF2B5EF4-FFF2-40B4-BE49-F238E27FC236}">
-                <a16:creationId xmlns:a16="http://schemas.microsoft.com/office/drawing/2014/main" id="{86DBF5F0-55FF-6B08-25E7-0A44BE3168B4}"/>
+                <a16:creationId xmlns:a16="http://schemas.microsoft.com/office/drawing/2014/main" id="{EF08A35B-819C-D1E1-6019-07BB2C4967DA}"/>
               </a:ext>
             </a:extLst>
           </p:cNvPr>
@@ -26664,7 +26664,7 @@
           <p:cNvPr id="3" name="left-rail">
             <a:extLst>
               <a:ext uri="{FF2B5EF4-FFF2-40B4-BE49-F238E27FC236}">
-                <a16:creationId xmlns:a16="http://schemas.microsoft.com/office/drawing/2014/main" id="{670BEF7E-B36F-BD82-FF45-0930172CE0AE}"/>
+                <a16:creationId xmlns:a16="http://schemas.microsoft.com/office/drawing/2014/main" id="{93916BC1-1E0E-5EB8-BFDA-92EA705F3102}"/>
               </a:ext>
             </a:extLst>
           </p:cNvPr>
@@ -26725,7 +26725,7 @@
           <p:cNvPr id="4" name="top-line">
             <a:extLst>
               <a:ext uri="{FF2B5EF4-FFF2-40B4-BE49-F238E27FC236}">
-                <a16:creationId xmlns:a16="http://schemas.microsoft.com/office/drawing/2014/main" id="{0A7C7AF9-BBF9-DEF9-801E-445EA2D1988B}"/>
+                <a16:creationId xmlns:a16="http://schemas.microsoft.com/office/drawing/2014/main" id="{ABE92CA3-B65D-D185-2EFF-131CA572EB64}"/>
               </a:ext>
             </a:extLst>
           </p:cNvPr>
@@ -26766,7 +26766,7 @@
           <p:cNvPr id="5" name="footer-left">
             <a:extLst>
               <a:ext uri="{FF2B5EF4-FFF2-40B4-BE49-F238E27FC236}">
-                <a16:creationId xmlns:a16="http://schemas.microsoft.com/office/drawing/2014/main" id="{4BE15C12-EEFD-6397-9A11-9AEF45E412AE}"/>
+                <a16:creationId xmlns:a16="http://schemas.microsoft.com/office/drawing/2014/main" id="{1E69C0AA-966C-48EB-4042-D7B4C909B5DF}"/>
               </a:ext>
             </a:extLst>
           </p:cNvPr>
@@ -26812,7 +26812,7 @@
           <p:cNvPr id="6" name="footer-mid">
             <a:extLst>
               <a:ext uri="{FF2B5EF4-FFF2-40B4-BE49-F238E27FC236}">
-                <a16:creationId xmlns:a16="http://schemas.microsoft.com/office/drawing/2014/main" id="{C7FCB9D8-A41B-3A19-9F54-DC386058CE06}"/>
+                <a16:creationId xmlns:a16="http://schemas.microsoft.com/office/drawing/2014/main" id="{6A574B0C-5BDD-C4F7-DCE5-8ED034810C7F}"/>
               </a:ext>
             </a:extLst>
           </p:cNvPr>
@@ -26858,7 +26858,7 @@
           <p:cNvPr id="7" name="page-num">
             <a:extLst>
               <a:ext uri="{FF2B5EF4-FFF2-40B4-BE49-F238E27FC236}">
-                <a16:creationId xmlns:a16="http://schemas.microsoft.com/office/drawing/2014/main" id="{B7EF31BF-C5E5-278D-1748-F390B192FF67}"/>
+                <a16:creationId xmlns:a16="http://schemas.microsoft.com/office/drawing/2014/main" id="{FD6DA114-146F-5534-E554-0E9CAD123518}"/>
               </a:ext>
             </a:extLst>
           </p:cNvPr>
@@ -26904,7 +26904,7 @@
           <p:cNvPr id="8" name="section-label">
             <a:extLst>
               <a:ext uri="{FF2B5EF4-FFF2-40B4-BE49-F238E27FC236}">
-                <a16:creationId xmlns:a16="http://schemas.microsoft.com/office/drawing/2014/main" id="{AD1CD8B0-4D40-CBD9-6134-D5A9A6CC9134}"/>
+                <a16:creationId xmlns:a16="http://schemas.microsoft.com/office/drawing/2014/main" id="{8D6843B1-7022-4839-66C1-664B07F391D9}"/>
               </a:ext>
             </a:extLst>
           </p:cNvPr>
@@ -26950,7 +26950,7 @@
           <p:cNvPr id="10" name="图片 9">
             <a:extLst>
               <a:ext uri="{FF2B5EF4-FFF2-40B4-BE49-F238E27FC236}">
-                <a16:creationId xmlns:a16="http://schemas.microsoft.com/office/drawing/2014/main" id="{4F2C7C76-16E0-7069-4C30-F2B77C22B750}"/>
+                <a16:creationId xmlns:a16="http://schemas.microsoft.com/office/drawing/2014/main" id="{3D15C05D-DA2E-1603-C781-37AAEE2B9479}"/>
               </a:ext>
             </a:extLst>
           </p:cNvPr>
@@ -26986,7 +26986,7 @@
           <p:cNvPr id="11" name="title">
             <a:extLst>
               <a:ext uri="{FF2B5EF4-FFF2-40B4-BE49-F238E27FC236}">
-                <a16:creationId xmlns:a16="http://schemas.microsoft.com/office/drawing/2014/main" id="{7BC23FFC-12CC-E845-9DC9-1B82257D12A1}"/>
+                <a16:creationId xmlns:a16="http://schemas.microsoft.com/office/drawing/2014/main" id="{21B7FD4D-9EC0-8304-9905-CB3B16C16DF4}"/>
               </a:ext>
             </a:extLst>
           </p:cNvPr>
@@ -27032,7 +27032,7 @@
           <p:cNvPr id="12" name="subtitle">
             <a:extLst>
               <a:ext uri="{FF2B5EF4-FFF2-40B4-BE49-F238E27FC236}">
-                <a16:creationId xmlns:a16="http://schemas.microsoft.com/office/drawing/2014/main" id="{6247FFF3-EFA5-98EE-6259-B7B563BB4E79}"/>
+                <a16:creationId xmlns:a16="http://schemas.microsoft.com/office/drawing/2014/main" id="{DECC1093-3235-C95F-5FDB-F0547ACB3276}"/>
               </a:ext>
             </a:extLst>
           </p:cNvPr>
@@ -27078,7 +27078,7 @@
           <p:cNvPr id="13" name="fig-frame">
             <a:extLst>
               <a:ext uri="{FF2B5EF4-FFF2-40B4-BE49-F238E27FC236}">
-                <a16:creationId xmlns:a16="http://schemas.microsoft.com/office/drawing/2014/main" id="{548C2C9C-1E16-6AD9-5EB0-EA11C953DE47}"/>
+                <a16:creationId xmlns:a16="http://schemas.microsoft.com/office/drawing/2014/main" id="{C8DB2896-B0BC-330B-B64F-6A2A74BA92AA}"/>
               </a:ext>
             </a:extLst>
           </p:cNvPr>
@@ -27132,7 +27132,7 @@
           <p:cNvPr id="15" name="blackbox-table">
             <a:extLst>
               <a:ext uri="{FF2B5EF4-FFF2-40B4-BE49-F238E27FC236}">
-                <a16:creationId xmlns:a16="http://schemas.microsoft.com/office/drawing/2014/main" id="{C91CBF31-D22C-9E4D-6345-97201B580F62}"/>
+                <a16:creationId xmlns:a16="http://schemas.microsoft.com/office/drawing/2014/main" id="{77A20999-585D-ADEC-35FE-47DA5B51ADA5}"/>
               </a:ext>
             </a:extLst>
           </p:cNvPr>
@@ -27168,7 +27168,7 @@
           <p:cNvPr id="16" name="left">
             <a:extLst>
               <a:ext uri="{FF2B5EF4-FFF2-40B4-BE49-F238E27FC236}">
-                <a16:creationId xmlns:a16="http://schemas.microsoft.com/office/drawing/2014/main" id="{A7BE5099-774C-6FD5-630F-0F51CD7902BE}"/>
+                <a16:creationId xmlns:a16="http://schemas.microsoft.com/office/drawing/2014/main" id="{8ACD14DB-EDA0-C49F-4054-F727A858389B}"/>
               </a:ext>
             </a:extLst>
           </p:cNvPr>
@@ -27222,7 +27222,7 @@
           <p:cNvPr id="17" name="left-main">
             <a:extLst>
               <a:ext uri="{FF2B5EF4-FFF2-40B4-BE49-F238E27FC236}">
-                <a16:creationId xmlns:a16="http://schemas.microsoft.com/office/drawing/2014/main" id="{7C23190F-1EF9-AE5F-C351-F923AF803039}"/>
+                <a16:creationId xmlns:a16="http://schemas.microsoft.com/office/drawing/2014/main" id="{66AD8334-B589-007E-EB89-CE4D1C48AB7B}"/>
               </a:ext>
             </a:extLst>
           </p:cNvPr>
@@ -27268,7 +27268,7 @@
           <p:cNvPr id="18" name="right">
             <a:extLst>
               <a:ext uri="{FF2B5EF4-FFF2-40B4-BE49-F238E27FC236}">
-                <a16:creationId xmlns:a16="http://schemas.microsoft.com/office/drawing/2014/main" id="{FFA6E64B-2DB7-D0D9-92A8-4FC047EB3289}"/>
+                <a16:creationId xmlns:a16="http://schemas.microsoft.com/office/drawing/2014/main" id="{DB87E2C1-2740-5676-AC1D-EF5F5E1A44DF}"/>
               </a:ext>
             </a:extLst>
           </p:cNvPr>
@@ -27322,7 +27322,7 @@
           <p:cNvPr id="19" name="right-main">
             <a:extLst>
               <a:ext uri="{FF2B5EF4-FFF2-40B4-BE49-F238E27FC236}">
-                <a16:creationId xmlns:a16="http://schemas.microsoft.com/office/drawing/2014/main" id="{FC16714E-0549-BA2B-AA22-720FA914B90E}"/>
+                <a16:creationId xmlns:a16="http://schemas.microsoft.com/office/drawing/2014/main" id="{A6361C06-14C7-B2B6-54EB-6D858786334E}"/>
               </a:ext>
             </a:extLst>
           </p:cNvPr>
@@ -27366,7 +27366,7 @@
     </p:spTree>
     <p:extLst>
       <p:ext uri="{BB962C8B-B14F-4D97-AF65-F5344CB8AC3E}">
-        <p14:creationId xmlns:p14="http://schemas.microsoft.com/office/powerpoint/2010/main" val="1414268189"/>
+        <p14:creationId xmlns:p14="http://schemas.microsoft.com/office/powerpoint/2010/main" val="2950727345"/>
       </p:ext>
     </p:extLst>
   </p:cSld>
@@ -27410,7 +27410,7 @@
           <p:cNvPr id="2" name="page-bg">
             <a:extLst>
               <a:ext uri="{FF2B5EF4-FFF2-40B4-BE49-F238E27FC236}">
-                <a16:creationId xmlns:a16="http://schemas.microsoft.com/office/drawing/2014/main" id="{F6E13EAF-31D6-3EB8-12B9-FAC1FEB97428}"/>
+                <a16:creationId xmlns:a16="http://schemas.microsoft.com/office/drawing/2014/main" id="{BD9022B5-0110-1E2A-DB2E-89320B14A81F}"/>
               </a:ext>
             </a:extLst>
           </p:cNvPr>
@@ -27471,7 +27471,7 @@
           <p:cNvPr id="3" name="left-rail">
             <a:extLst>
               <a:ext uri="{FF2B5EF4-FFF2-40B4-BE49-F238E27FC236}">
-                <a16:creationId xmlns:a16="http://schemas.microsoft.com/office/drawing/2014/main" id="{731D24AF-6775-2ABA-683D-D5CA9EE08003}"/>
+                <a16:creationId xmlns:a16="http://schemas.microsoft.com/office/drawing/2014/main" id="{893FF4B6-5A7F-2E5C-1C88-8EC65DBB0B16}"/>
               </a:ext>
             </a:extLst>
           </p:cNvPr>
@@ -27532,7 +27532,7 @@
           <p:cNvPr id="4" name="top-line">
             <a:extLst>
               <a:ext uri="{FF2B5EF4-FFF2-40B4-BE49-F238E27FC236}">
-                <a16:creationId xmlns:a16="http://schemas.microsoft.com/office/drawing/2014/main" id="{E7C636A5-4C98-FA71-107B-9A9D1A04C3A6}"/>
+                <a16:creationId xmlns:a16="http://schemas.microsoft.com/office/drawing/2014/main" id="{92FE0A0F-27F3-FB31-4330-3279FAB95703}"/>
               </a:ext>
             </a:extLst>
           </p:cNvPr>
@@ -27573,7 +27573,7 @@
           <p:cNvPr id="5" name="footer-left">
             <a:extLst>
               <a:ext uri="{FF2B5EF4-FFF2-40B4-BE49-F238E27FC236}">
-                <a16:creationId xmlns:a16="http://schemas.microsoft.com/office/drawing/2014/main" id="{8CDFC1CB-5D78-4FE8-0A09-1AAD4CF104AB}"/>
+                <a16:creationId xmlns:a16="http://schemas.microsoft.com/office/drawing/2014/main" id="{331A796F-A6A7-7A92-32FC-0F8D106217BB}"/>
               </a:ext>
             </a:extLst>
           </p:cNvPr>
@@ -27619,7 +27619,7 @@
           <p:cNvPr id="6" name="footer-mid">
             <a:extLst>
               <a:ext uri="{FF2B5EF4-FFF2-40B4-BE49-F238E27FC236}">
-                <a16:creationId xmlns:a16="http://schemas.microsoft.com/office/drawing/2014/main" id="{AADF7929-31B0-020D-128C-5CFDFE212535}"/>
+                <a16:creationId xmlns:a16="http://schemas.microsoft.com/office/drawing/2014/main" id="{E98E7CF6-A5B6-8490-3577-CC872EC55313}"/>
               </a:ext>
             </a:extLst>
           </p:cNvPr>
@@ -27665,7 +27665,7 @@
           <p:cNvPr id="7" name="page-num">
             <a:extLst>
               <a:ext uri="{FF2B5EF4-FFF2-40B4-BE49-F238E27FC236}">
-                <a16:creationId xmlns:a16="http://schemas.microsoft.com/office/drawing/2014/main" id="{2F901F27-F6BB-16FE-56BB-2EE7C5616D71}"/>
+                <a16:creationId xmlns:a16="http://schemas.microsoft.com/office/drawing/2014/main" id="{ACF05ADE-8502-AC1D-B4BC-60417B4DA6FE}"/>
               </a:ext>
             </a:extLst>
           </p:cNvPr>
@@ -27711,7 +27711,7 @@
           <p:cNvPr id="8" name="section-label">
             <a:extLst>
               <a:ext uri="{FF2B5EF4-FFF2-40B4-BE49-F238E27FC236}">
-                <a16:creationId xmlns:a16="http://schemas.microsoft.com/office/drawing/2014/main" id="{5F3E3D06-84E3-6D8C-9D97-42FD80E94C43}"/>
+                <a16:creationId xmlns:a16="http://schemas.microsoft.com/office/drawing/2014/main" id="{7293605D-A90C-DC8D-BB47-AA3F6DF45620}"/>
               </a:ext>
             </a:extLst>
           </p:cNvPr>
@@ -27757,7 +27757,7 @@
           <p:cNvPr id="10" name="图片 9">
             <a:extLst>
               <a:ext uri="{FF2B5EF4-FFF2-40B4-BE49-F238E27FC236}">
-                <a16:creationId xmlns:a16="http://schemas.microsoft.com/office/drawing/2014/main" id="{96035878-DE00-D2C6-035A-00E6156B7E2B}"/>
+                <a16:creationId xmlns:a16="http://schemas.microsoft.com/office/drawing/2014/main" id="{E9A7E130-CF7D-1FB9-A820-B599FBAC8126}"/>
               </a:ext>
             </a:extLst>
           </p:cNvPr>
@@ -27793,7 +27793,7 @@
           <p:cNvPr id="11" name="title">
             <a:extLst>
               <a:ext uri="{FF2B5EF4-FFF2-40B4-BE49-F238E27FC236}">
-                <a16:creationId xmlns:a16="http://schemas.microsoft.com/office/drawing/2014/main" id="{FB85C1F7-A2B5-A4BF-5341-CF96C71F0191}"/>
+                <a16:creationId xmlns:a16="http://schemas.microsoft.com/office/drawing/2014/main" id="{55605FF9-4AA6-FA78-2AA8-5CC14A769523}"/>
               </a:ext>
             </a:extLst>
           </p:cNvPr>
@@ -27839,7 +27839,7 @@
           <p:cNvPr id="12" name="subtitle">
             <a:extLst>
               <a:ext uri="{FF2B5EF4-FFF2-40B4-BE49-F238E27FC236}">
-                <a16:creationId xmlns:a16="http://schemas.microsoft.com/office/drawing/2014/main" id="{12E403AA-80FE-2DBD-E50B-410FBC0F6629}"/>
+                <a16:creationId xmlns:a16="http://schemas.microsoft.com/office/drawing/2014/main" id="{EA5F933F-0983-F68D-DBD4-5BD0DAE9D420}"/>
               </a:ext>
             </a:extLst>
           </p:cNvPr>
@@ -27885,7 +27885,7 @@
           <p:cNvPr id="13" name="fig-frame">
             <a:extLst>
               <a:ext uri="{FF2B5EF4-FFF2-40B4-BE49-F238E27FC236}">
-                <a16:creationId xmlns:a16="http://schemas.microsoft.com/office/drawing/2014/main" id="{4C556746-6B97-1FB0-A25E-61BF58389371}"/>
+                <a16:creationId xmlns:a16="http://schemas.microsoft.com/office/drawing/2014/main" id="{E4B3B66D-EF46-4DFE-B021-B895A875E43C}"/>
               </a:ext>
             </a:extLst>
           </p:cNvPr>
@@ -27939,7 +27939,7 @@
           <p:cNvPr id="15" name="tradeoff">
             <a:extLst>
               <a:ext uri="{FF2B5EF4-FFF2-40B4-BE49-F238E27FC236}">
-                <a16:creationId xmlns:a16="http://schemas.microsoft.com/office/drawing/2014/main" id="{4CE3BE27-EE8A-B67A-B9B6-3B5827EFE90E}"/>
+                <a16:creationId xmlns:a16="http://schemas.microsoft.com/office/drawing/2014/main" id="{4601170B-3C88-85BC-1321-BD7208B24B8C}"/>
               </a:ext>
             </a:extLst>
           </p:cNvPr>
@@ -27975,7 +27975,7 @@
           <p:cNvPr id="16" name="message">
             <a:extLst>
               <a:ext uri="{FF2B5EF4-FFF2-40B4-BE49-F238E27FC236}">
-                <a16:creationId xmlns:a16="http://schemas.microsoft.com/office/drawing/2014/main" id="{1D858FC6-DCF9-3EF8-940E-C1F6FCA38942}"/>
+                <a16:creationId xmlns:a16="http://schemas.microsoft.com/office/drawing/2014/main" id="{2316C7DD-EFC7-F852-1C50-E6BF8CB54842}"/>
               </a:ext>
             </a:extLst>
           </p:cNvPr>
@@ -28029,7 +28029,7 @@
           <p:cNvPr id="17" name="message-text">
             <a:extLst>
               <a:ext uri="{FF2B5EF4-FFF2-40B4-BE49-F238E27FC236}">
-                <a16:creationId xmlns:a16="http://schemas.microsoft.com/office/drawing/2014/main" id="{3BDE1F55-8504-BF7A-68E9-412A82524BD7}"/>
+                <a16:creationId xmlns:a16="http://schemas.microsoft.com/office/drawing/2014/main" id="{0BD841D5-3EDD-334D-81D2-9C8E9133611C}"/>
               </a:ext>
             </a:extLst>
           </p:cNvPr>
@@ -28073,7 +28073,7 @@
     </p:spTree>
     <p:extLst>
       <p:ext uri="{BB962C8B-B14F-4D97-AF65-F5344CB8AC3E}">
-        <p14:creationId xmlns:p14="http://schemas.microsoft.com/office/powerpoint/2010/main" val="651090309"/>
+        <p14:creationId xmlns:p14="http://schemas.microsoft.com/office/powerpoint/2010/main" val="3122203889"/>
       </p:ext>
     </p:extLst>
   </p:cSld>

--- a/docs/WatermarkScope_FYP_Viva.pptx
+++ b/docs/WatermarkScope_FYP_Viva.pptx
@@ -205,9 +205,9 @@
             </a:lvl1pPr>
           </a:lstStyle>
           <a:p>
-            <a:fld id="{500981E5-BBF6-41A0-B7F9-DF5B8124118C}" type="datetimeFigureOut">
+            <a:fld id="{05BBCB70-1D17-4533-B526-8128BCC9D0B4}" type="datetimeFigureOut">
               <a:rPr lang="zh-CN" altLang="en-US" smtClean="0"/>
-              <a:t>2026/5/13</a:t>
+              <a:t>2026/5/14</a:t>
             </a:fld>
             <a:endParaRPr lang="zh-CN" altLang="en-US"/>
           </a:p>
@@ -363,7 +363,7 @@
             </a:lvl1pPr>
           </a:lstStyle>
           <a:p>
-            <a:fld id="{3781BBA5-3D10-4E44-A9DC-9DFD38F5AEB5}" type="slidenum">
+            <a:fld id="{17D19553-C48B-4D03-BDA2-C13F7408F6BC}" type="slidenum">
               <a:rPr lang="zh-CN" altLang="en-US" smtClean="0"/>
               <a:t>‹#›</a:t>
             </a:fld>
@@ -374,7 +374,7 @@
     </p:spTree>
     <p:extLst>
       <p:ext uri="{BB962C8B-B14F-4D97-AF65-F5344CB8AC3E}">
-        <p14:creationId xmlns:p14="http://schemas.microsoft.com/office/powerpoint/2010/main" val="111496457"/>
+        <p14:creationId xmlns:p14="http://schemas.microsoft.com/office/powerpoint/2010/main" val="2543822617"/>
       </p:ext>
     </p:extLst>
   </p:cSld>
@@ -541,7 +541,7 @@
           <a:bodyPr/>
           <a:lstStyle/>
           <a:p>
-            <a:fld id="{3781BBA5-3D10-4E44-A9DC-9DFD38F5AEB5}" type="slidenum">
+            <a:fld id="{17D19553-C48B-4D03-BDA2-C13F7408F6BC}" type="slidenum">
               <a:rPr lang="zh-CN" altLang="en-US" smtClean="0"/>
               <a:t>1</a:t>
             </a:fld>
@@ -552,7 +552,7 @@
     </p:spTree>
     <p:extLst>
       <p:ext uri="{BB962C8B-B14F-4D97-AF65-F5344CB8AC3E}">
-        <p14:creationId xmlns:p14="http://schemas.microsoft.com/office/powerpoint/2010/main" val="2534879203"/>
+        <p14:creationId xmlns:p14="http://schemas.microsoft.com/office/powerpoint/2010/main" val="1232942026"/>
       </p:ext>
     </p:extLst>
   </p:cSld>
@@ -629,7 +629,7 @@
           <a:bodyPr/>
           <a:lstStyle/>
           <a:p>
-            <a:fld id="{3781BBA5-3D10-4E44-A9DC-9DFD38F5AEB5}" type="slidenum">
+            <a:fld id="{17D19553-C48B-4D03-BDA2-C13F7408F6BC}" type="slidenum">
               <a:rPr lang="zh-CN" altLang="en-US" smtClean="0"/>
               <a:t>10</a:t>
             </a:fld>
@@ -640,7 +640,7 @@
     </p:spTree>
     <p:extLst>
       <p:ext uri="{BB962C8B-B14F-4D97-AF65-F5344CB8AC3E}">
-        <p14:creationId xmlns:p14="http://schemas.microsoft.com/office/powerpoint/2010/main" val="2990868276"/>
+        <p14:creationId xmlns:p14="http://schemas.microsoft.com/office/powerpoint/2010/main" val="2353356098"/>
       </p:ext>
     </p:extLst>
   </p:cSld>
@@ -717,7 +717,7 @@
           <a:bodyPr/>
           <a:lstStyle/>
           <a:p>
-            <a:fld id="{3781BBA5-3D10-4E44-A9DC-9DFD38F5AEB5}" type="slidenum">
+            <a:fld id="{17D19553-C48B-4D03-BDA2-C13F7408F6BC}" type="slidenum">
               <a:rPr lang="zh-CN" altLang="en-US" smtClean="0"/>
               <a:t>11</a:t>
             </a:fld>
@@ -728,7 +728,7 @@
     </p:spTree>
     <p:extLst>
       <p:ext uri="{BB962C8B-B14F-4D97-AF65-F5344CB8AC3E}">
-        <p14:creationId xmlns:p14="http://schemas.microsoft.com/office/powerpoint/2010/main" val="1484427191"/>
+        <p14:creationId xmlns:p14="http://schemas.microsoft.com/office/powerpoint/2010/main" val="1857946827"/>
       </p:ext>
     </p:extLst>
   </p:cSld>
@@ -805,7 +805,7 @@
           <a:bodyPr/>
           <a:lstStyle/>
           <a:p>
-            <a:fld id="{3781BBA5-3D10-4E44-A9DC-9DFD38F5AEB5}" type="slidenum">
+            <a:fld id="{17D19553-C48B-4D03-BDA2-C13F7408F6BC}" type="slidenum">
               <a:rPr lang="zh-CN" altLang="en-US" smtClean="0"/>
               <a:t>12</a:t>
             </a:fld>
@@ -816,7 +816,7 @@
     </p:spTree>
     <p:extLst>
       <p:ext uri="{BB962C8B-B14F-4D97-AF65-F5344CB8AC3E}">
-        <p14:creationId xmlns:p14="http://schemas.microsoft.com/office/powerpoint/2010/main" val="3327418144"/>
+        <p14:creationId xmlns:p14="http://schemas.microsoft.com/office/powerpoint/2010/main" val="2344999115"/>
       </p:ext>
     </p:extLst>
   </p:cSld>
@@ -893,7 +893,7 @@
           <a:bodyPr/>
           <a:lstStyle/>
           <a:p>
-            <a:fld id="{3781BBA5-3D10-4E44-A9DC-9DFD38F5AEB5}" type="slidenum">
+            <a:fld id="{17D19553-C48B-4D03-BDA2-C13F7408F6BC}" type="slidenum">
               <a:rPr lang="zh-CN" altLang="en-US" smtClean="0"/>
               <a:t>13</a:t>
             </a:fld>
@@ -904,7 +904,7 @@
     </p:spTree>
     <p:extLst>
       <p:ext uri="{BB962C8B-B14F-4D97-AF65-F5344CB8AC3E}">
-        <p14:creationId xmlns:p14="http://schemas.microsoft.com/office/powerpoint/2010/main" val="1106430357"/>
+        <p14:creationId xmlns:p14="http://schemas.microsoft.com/office/powerpoint/2010/main" val="1956417698"/>
       </p:ext>
     </p:extLst>
   </p:cSld>
@@ -981,7 +981,7 @@
           <a:bodyPr/>
           <a:lstStyle/>
           <a:p>
-            <a:fld id="{3781BBA5-3D10-4E44-A9DC-9DFD38F5AEB5}" type="slidenum">
+            <a:fld id="{17D19553-C48B-4D03-BDA2-C13F7408F6BC}" type="slidenum">
               <a:rPr lang="zh-CN" altLang="en-US" smtClean="0"/>
               <a:t>14</a:t>
             </a:fld>
@@ -992,7 +992,7 @@
     </p:spTree>
     <p:extLst>
       <p:ext uri="{BB962C8B-B14F-4D97-AF65-F5344CB8AC3E}">
-        <p14:creationId xmlns:p14="http://schemas.microsoft.com/office/powerpoint/2010/main" val="3260382467"/>
+        <p14:creationId xmlns:p14="http://schemas.microsoft.com/office/powerpoint/2010/main" val="775428024"/>
       </p:ext>
     </p:extLst>
   </p:cSld>
@@ -1069,7 +1069,7 @@
           <a:bodyPr/>
           <a:lstStyle/>
           <a:p>
-            <a:fld id="{3781BBA5-3D10-4E44-A9DC-9DFD38F5AEB5}" type="slidenum">
+            <a:fld id="{17D19553-C48B-4D03-BDA2-C13F7408F6BC}" type="slidenum">
               <a:rPr lang="zh-CN" altLang="en-US" smtClean="0"/>
               <a:t>15</a:t>
             </a:fld>
@@ -1080,7 +1080,7 @@
     </p:spTree>
     <p:extLst>
       <p:ext uri="{BB962C8B-B14F-4D97-AF65-F5344CB8AC3E}">
-        <p14:creationId xmlns:p14="http://schemas.microsoft.com/office/powerpoint/2010/main" val="1441210895"/>
+        <p14:creationId xmlns:p14="http://schemas.microsoft.com/office/powerpoint/2010/main" val="1968320785"/>
       </p:ext>
     </p:extLst>
   </p:cSld>
@@ -1157,7 +1157,7 @@
           <a:bodyPr/>
           <a:lstStyle/>
           <a:p>
-            <a:fld id="{3781BBA5-3D10-4E44-A9DC-9DFD38F5AEB5}" type="slidenum">
+            <a:fld id="{17D19553-C48B-4D03-BDA2-C13F7408F6BC}" type="slidenum">
               <a:rPr lang="zh-CN" altLang="en-US" smtClean="0"/>
               <a:t>16</a:t>
             </a:fld>
@@ -1168,7 +1168,7 @@
     </p:spTree>
     <p:extLst>
       <p:ext uri="{BB962C8B-B14F-4D97-AF65-F5344CB8AC3E}">
-        <p14:creationId xmlns:p14="http://schemas.microsoft.com/office/powerpoint/2010/main" val="475358697"/>
+        <p14:creationId xmlns:p14="http://schemas.microsoft.com/office/powerpoint/2010/main" val="1605853032"/>
       </p:ext>
     </p:extLst>
   </p:cSld>
@@ -1245,7 +1245,7 @@
           <a:bodyPr/>
           <a:lstStyle/>
           <a:p>
-            <a:fld id="{3781BBA5-3D10-4E44-A9DC-9DFD38F5AEB5}" type="slidenum">
+            <a:fld id="{17D19553-C48B-4D03-BDA2-C13F7408F6BC}" type="slidenum">
               <a:rPr lang="zh-CN" altLang="en-US" smtClean="0"/>
               <a:t>2</a:t>
             </a:fld>
@@ -1256,7 +1256,7 @@
     </p:spTree>
     <p:extLst>
       <p:ext uri="{BB962C8B-B14F-4D97-AF65-F5344CB8AC3E}">
-        <p14:creationId xmlns:p14="http://schemas.microsoft.com/office/powerpoint/2010/main" val="2499207584"/>
+        <p14:creationId xmlns:p14="http://schemas.microsoft.com/office/powerpoint/2010/main" val="1292301861"/>
       </p:ext>
     </p:extLst>
   </p:cSld>
@@ -1333,7 +1333,7 @@
           <a:bodyPr/>
           <a:lstStyle/>
           <a:p>
-            <a:fld id="{3781BBA5-3D10-4E44-A9DC-9DFD38F5AEB5}" type="slidenum">
+            <a:fld id="{17D19553-C48B-4D03-BDA2-C13F7408F6BC}" type="slidenum">
               <a:rPr lang="zh-CN" altLang="en-US" smtClean="0"/>
               <a:t>3</a:t>
             </a:fld>
@@ -1344,7 +1344,7 @@
     </p:spTree>
     <p:extLst>
       <p:ext uri="{BB962C8B-B14F-4D97-AF65-F5344CB8AC3E}">
-        <p14:creationId xmlns:p14="http://schemas.microsoft.com/office/powerpoint/2010/main" val="2325717168"/>
+        <p14:creationId xmlns:p14="http://schemas.microsoft.com/office/powerpoint/2010/main" val="2034422373"/>
       </p:ext>
     </p:extLst>
   </p:cSld>
@@ -1421,7 +1421,7 @@
           <a:bodyPr/>
           <a:lstStyle/>
           <a:p>
-            <a:fld id="{3781BBA5-3D10-4E44-A9DC-9DFD38F5AEB5}" type="slidenum">
+            <a:fld id="{17D19553-C48B-4D03-BDA2-C13F7408F6BC}" type="slidenum">
               <a:rPr lang="zh-CN" altLang="en-US" smtClean="0"/>
               <a:t>4</a:t>
             </a:fld>
@@ -1432,7 +1432,7 @@
     </p:spTree>
     <p:extLst>
       <p:ext uri="{BB962C8B-B14F-4D97-AF65-F5344CB8AC3E}">
-        <p14:creationId xmlns:p14="http://schemas.microsoft.com/office/powerpoint/2010/main" val="3256894341"/>
+        <p14:creationId xmlns:p14="http://schemas.microsoft.com/office/powerpoint/2010/main" val="3991210947"/>
       </p:ext>
     </p:extLst>
   </p:cSld>
@@ -1509,7 +1509,7 @@
           <a:bodyPr/>
           <a:lstStyle/>
           <a:p>
-            <a:fld id="{3781BBA5-3D10-4E44-A9DC-9DFD38F5AEB5}" type="slidenum">
+            <a:fld id="{17D19553-C48B-4D03-BDA2-C13F7408F6BC}" type="slidenum">
               <a:rPr lang="zh-CN" altLang="en-US" smtClean="0"/>
               <a:t>5</a:t>
             </a:fld>
@@ -1520,7 +1520,7 @@
     </p:spTree>
     <p:extLst>
       <p:ext uri="{BB962C8B-B14F-4D97-AF65-F5344CB8AC3E}">
-        <p14:creationId xmlns:p14="http://schemas.microsoft.com/office/powerpoint/2010/main" val="3991962572"/>
+        <p14:creationId xmlns:p14="http://schemas.microsoft.com/office/powerpoint/2010/main" val="1594902952"/>
       </p:ext>
     </p:extLst>
   </p:cSld>
@@ -1597,7 +1597,7 @@
           <a:bodyPr/>
           <a:lstStyle/>
           <a:p>
-            <a:fld id="{3781BBA5-3D10-4E44-A9DC-9DFD38F5AEB5}" type="slidenum">
+            <a:fld id="{17D19553-C48B-4D03-BDA2-C13F7408F6BC}" type="slidenum">
               <a:rPr lang="zh-CN" altLang="en-US" smtClean="0"/>
               <a:t>6</a:t>
             </a:fld>
@@ -1608,7 +1608,7 @@
     </p:spTree>
     <p:extLst>
       <p:ext uri="{BB962C8B-B14F-4D97-AF65-F5344CB8AC3E}">
-        <p14:creationId xmlns:p14="http://schemas.microsoft.com/office/powerpoint/2010/main" val="3039445185"/>
+        <p14:creationId xmlns:p14="http://schemas.microsoft.com/office/powerpoint/2010/main" val="1778368200"/>
       </p:ext>
     </p:extLst>
   </p:cSld>
@@ -1685,7 +1685,7 @@
           <a:bodyPr/>
           <a:lstStyle/>
           <a:p>
-            <a:fld id="{3781BBA5-3D10-4E44-A9DC-9DFD38F5AEB5}" type="slidenum">
+            <a:fld id="{17D19553-C48B-4D03-BDA2-C13F7408F6BC}" type="slidenum">
               <a:rPr lang="zh-CN" altLang="en-US" smtClean="0"/>
               <a:t>7</a:t>
             </a:fld>
@@ -1696,7 +1696,7 @@
     </p:spTree>
     <p:extLst>
       <p:ext uri="{BB962C8B-B14F-4D97-AF65-F5344CB8AC3E}">
-        <p14:creationId xmlns:p14="http://schemas.microsoft.com/office/powerpoint/2010/main" val="1941370131"/>
+        <p14:creationId xmlns:p14="http://schemas.microsoft.com/office/powerpoint/2010/main" val="946897099"/>
       </p:ext>
     </p:extLst>
   </p:cSld>
@@ -1773,7 +1773,7 @@
           <a:bodyPr/>
           <a:lstStyle/>
           <a:p>
-            <a:fld id="{3781BBA5-3D10-4E44-A9DC-9DFD38F5AEB5}" type="slidenum">
+            <a:fld id="{17D19553-C48B-4D03-BDA2-C13F7408F6BC}" type="slidenum">
               <a:rPr lang="zh-CN" altLang="en-US" smtClean="0"/>
               <a:t>8</a:t>
             </a:fld>
@@ -1784,7 +1784,7 @@
     </p:spTree>
     <p:extLst>
       <p:ext uri="{BB962C8B-B14F-4D97-AF65-F5344CB8AC3E}">
-        <p14:creationId xmlns:p14="http://schemas.microsoft.com/office/powerpoint/2010/main" val="2965746233"/>
+        <p14:creationId xmlns:p14="http://schemas.microsoft.com/office/powerpoint/2010/main" val="1476933357"/>
       </p:ext>
     </p:extLst>
   </p:cSld>
@@ -1861,7 +1861,7 @@
           <a:bodyPr/>
           <a:lstStyle/>
           <a:p>
-            <a:fld id="{3781BBA5-3D10-4E44-A9DC-9DFD38F5AEB5}" type="slidenum">
+            <a:fld id="{17D19553-C48B-4D03-BDA2-C13F7408F6BC}" type="slidenum">
               <a:rPr lang="zh-CN" altLang="en-US" smtClean="0"/>
               <a:t>9</a:t>
             </a:fld>
@@ -1872,7 +1872,7 @@
     </p:spTree>
     <p:extLst>
       <p:ext uri="{BB962C8B-B14F-4D97-AF65-F5344CB8AC3E}">
-        <p14:creationId xmlns:p14="http://schemas.microsoft.com/office/powerpoint/2010/main" val="492203663"/>
+        <p14:creationId xmlns:p14="http://schemas.microsoft.com/office/powerpoint/2010/main" val="1931824873"/>
       </p:ext>
     </p:extLst>
   </p:cSld>
@@ -1904,7 +1904,7 @@
           <p:cNvPr id="2" name="标题 1">
             <a:extLst>
               <a:ext uri="{FF2B5EF4-FFF2-40B4-BE49-F238E27FC236}">
-                <a16:creationId xmlns:a16="http://schemas.microsoft.com/office/drawing/2014/main" id="{6ED7CBF8-0998-E283-6C22-BF803875379C}"/>
+                <a16:creationId xmlns:a16="http://schemas.microsoft.com/office/drawing/2014/main" id="{6F51E3E0-06C1-6402-FF9C-68886C8C1C00}"/>
               </a:ext>
             </a:extLst>
           </p:cNvPr>
@@ -1941,7 +1941,7 @@
           <p:cNvPr id="3" name="副标题 2">
             <a:extLst>
               <a:ext uri="{FF2B5EF4-FFF2-40B4-BE49-F238E27FC236}">
-                <a16:creationId xmlns:a16="http://schemas.microsoft.com/office/drawing/2014/main" id="{A9FE8E91-C027-A21A-1C8C-544F6639E967}"/>
+                <a16:creationId xmlns:a16="http://schemas.microsoft.com/office/drawing/2014/main" id="{DACC674B-17C9-3A12-7145-5A1B4AB0D555}"/>
               </a:ext>
             </a:extLst>
           </p:cNvPr>
@@ -2011,7 +2011,7 @@
           <p:cNvPr id="4" name="日期占位符 3">
             <a:extLst>
               <a:ext uri="{FF2B5EF4-FFF2-40B4-BE49-F238E27FC236}">
-                <a16:creationId xmlns:a16="http://schemas.microsoft.com/office/drawing/2014/main" id="{8AB0DA8C-BA33-212D-89BE-278DCAF06F87}"/>
+                <a16:creationId xmlns:a16="http://schemas.microsoft.com/office/drawing/2014/main" id="{CB941403-EA15-4891-7669-F209DD0C7A06}"/>
               </a:ext>
             </a:extLst>
           </p:cNvPr>
@@ -2027,9 +2027,9 @@
           <a:bodyPr/>
           <a:lstStyle/>
           <a:p>
-            <a:fld id="{8B9FF69C-14BA-4B4B-ABF0-AACFDA9EC10F}" type="datetimeFigureOut">
+            <a:fld id="{6DADD656-4731-4A00-8EB8-E13ACEB57B07}" type="datetimeFigureOut">
               <a:rPr lang="zh-CN" altLang="en-US" smtClean="0"/>
-              <a:t>2026/5/13</a:t>
+              <a:t>2026/5/14</a:t>
             </a:fld>
             <a:endParaRPr lang="zh-CN" altLang="en-US"/>
           </a:p>
@@ -2040,7 +2040,7 @@
           <p:cNvPr id="5" name="页脚占位符 4">
             <a:extLst>
               <a:ext uri="{FF2B5EF4-FFF2-40B4-BE49-F238E27FC236}">
-                <a16:creationId xmlns:a16="http://schemas.microsoft.com/office/drawing/2014/main" id="{8C0471FF-26C7-871C-E69E-93E0345AB9AC}"/>
+                <a16:creationId xmlns:a16="http://schemas.microsoft.com/office/drawing/2014/main" id="{58DD5985-BFB1-A749-6771-7F7A5E1C1ADA}"/>
               </a:ext>
             </a:extLst>
           </p:cNvPr>
@@ -2065,7 +2065,7 @@
           <p:cNvPr id="6" name="灯片编号占位符 5">
             <a:extLst>
               <a:ext uri="{FF2B5EF4-FFF2-40B4-BE49-F238E27FC236}">
-                <a16:creationId xmlns:a16="http://schemas.microsoft.com/office/drawing/2014/main" id="{684A6BBE-6170-6C6B-9196-D012A918E8C3}"/>
+                <a16:creationId xmlns:a16="http://schemas.microsoft.com/office/drawing/2014/main" id="{55821B91-E5AD-365C-FFBD-872D041E0922}"/>
               </a:ext>
             </a:extLst>
           </p:cNvPr>
@@ -2081,7 +2081,7 @@
           <a:bodyPr/>
           <a:lstStyle/>
           <a:p>
-            <a:fld id="{F8752B0D-6D65-4C56-8EE1-42B6C981AAFF}" type="slidenum">
+            <a:fld id="{85D3BD71-BD51-4A94-BFDA-01348E1EB70F}" type="slidenum">
               <a:rPr lang="zh-CN" altLang="en-US" smtClean="0"/>
               <a:t>‹#›</a:t>
             </a:fld>
@@ -2092,7 +2092,7 @@
     </p:spTree>
     <p:extLst>
       <p:ext uri="{BB962C8B-B14F-4D97-AF65-F5344CB8AC3E}">
-        <p14:creationId xmlns:p14="http://schemas.microsoft.com/office/powerpoint/2010/main" val="3262681552"/>
+        <p14:creationId xmlns:p14="http://schemas.microsoft.com/office/powerpoint/2010/main" val="383598221"/>
       </p:ext>
     </p:extLst>
   </p:cSld>
@@ -2124,7 +2124,7 @@
           <p:cNvPr id="2" name="标题 1">
             <a:extLst>
               <a:ext uri="{FF2B5EF4-FFF2-40B4-BE49-F238E27FC236}">
-                <a16:creationId xmlns:a16="http://schemas.microsoft.com/office/drawing/2014/main" id="{E7B8029A-7ABC-43D5-5953-634E5A00FE16}"/>
+                <a16:creationId xmlns:a16="http://schemas.microsoft.com/office/drawing/2014/main" id="{FF2D4930-2100-0341-C978-37A6FAFD7933}"/>
               </a:ext>
             </a:extLst>
           </p:cNvPr>
@@ -2152,7 +2152,7 @@
           <p:cNvPr id="3" name="竖排文字占位符 2">
             <a:extLst>
               <a:ext uri="{FF2B5EF4-FFF2-40B4-BE49-F238E27FC236}">
-                <a16:creationId xmlns:a16="http://schemas.microsoft.com/office/drawing/2014/main" id="{48590B2E-CE51-E22C-C1D1-A7204509E0F6}"/>
+                <a16:creationId xmlns:a16="http://schemas.microsoft.com/office/drawing/2014/main" id="{A49B6466-0179-0112-C938-BDF4165760A7}"/>
               </a:ext>
             </a:extLst>
           </p:cNvPr>
@@ -2209,7 +2209,7 @@
           <p:cNvPr id="4" name="日期占位符 3">
             <a:extLst>
               <a:ext uri="{FF2B5EF4-FFF2-40B4-BE49-F238E27FC236}">
-                <a16:creationId xmlns:a16="http://schemas.microsoft.com/office/drawing/2014/main" id="{627AE2AF-C551-C09E-9384-2F332E0109A9}"/>
+                <a16:creationId xmlns:a16="http://schemas.microsoft.com/office/drawing/2014/main" id="{0975FA63-6541-D112-EB6A-D394C8BCE535}"/>
               </a:ext>
             </a:extLst>
           </p:cNvPr>
@@ -2225,9 +2225,9 @@
           <a:bodyPr/>
           <a:lstStyle/>
           <a:p>
-            <a:fld id="{8B9FF69C-14BA-4B4B-ABF0-AACFDA9EC10F}" type="datetimeFigureOut">
+            <a:fld id="{6DADD656-4731-4A00-8EB8-E13ACEB57B07}" type="datetimeFigureOut">
               <a:rPr lang="zh-CN" altLang="en-US" smtClean="0"/>
-              <a:t>2026/5/13</a:t>
+              <a:t>2026/5/14</a:t>
             </a:fld>
             <a:endParaRPr lang="zh-CN" altLang="en-US"/>
           </a:p>
@@ -2238,7 +2238,7 @@
           <p:cNvPr id="5" name="页脚占位符 4">
             <a:extLst>
               <a:ext uri="{FF2B5EF4-FFF2-40B4-BE49-F238E27FC236}">
-                <a16:creationId xmlns:a16="http://schemas.microsoft.com/office/drawing/2014/main" id="{94FD42CC-2F78-9C5B-0CA3-3CA78F96C030}"/>
+                <a16:creationId xmlns:a16="http://schemas.microsoft.com/office/drawing/2014/main" id="{91C7AED7-AA95-E419-895F-387C775DC352}"/>
               </a:ext>
             </a:extLst>
           </p:cNvPr>
@@ -2263,7 +2263,7 @@
           <p:cNvPr id="6" name="灯片编号占位符 5">
             <a:extLst>
               <a:ext uri="{FF2B5EF4-FFF2-40B4-BE49-F238E27FC236}">
-                <a16:creationId xmlns:a16="http://schemas.microsoft.com/office/drawing/2014/main" id="{42B63AF4-30F4-521E-62BC-3232DEB0B634}"/>
+                <a16:creationId xmlns:a16="http://schemas.microsoft.com/office/drawing/2014/main" id="{DFB914ED-F7F1-855F-14D3-952B0FC8F8B6}"/>
               </a:ext>
             </a:extLst>
           </p:cNvPr>
@@ -2279,7 +2279,7 @@
           <a:bodyPr/>
           <a:lstStyle/>
           <a:p>
-            <a:fld id="{F8752B0D-6D65-4C56-8EE1-42B6C981AAFF}" type="slidenum">
+            <a:fld id="{85D3BD71-BD51-4A94-BFDA-01348E1EB70F}" type="slidenum">
               <a:rPr lang="zh-CN" altLang="en-US" smtClean="0"/>
               <a:t>‹#›</a:t>
             </a:fld>
@@ -2290,7 +2290,7 @@
     </p:spTree>
     <p:extLst>
       <p:ext uri="{BB962C8B-B14F-4D97-AF65-F5344CB8AC3E}">
-        <p14:creationId xmlns:p14="http://schemas.microsoft.com/office/powerpoint/2010/main" val="826148538"/>
+        <p14:creationId xmlns:p14="http://schemas.microsoft.com/office/powerpoint/2010/main" val="2124310990"/>
       </p:ext>
     </p:extLst>
   </p:cSld>
@@ -2322,7 +2322,7 @@
           <p:cNvPr id="2" name="竖排标题 1">
             <a:extLst>
               <a:ext uri="{FF2B5EF4-FFF2-40B4-BE49-F238E27FC236}">
-                <a16:creationId xmlns:a16="http://schemas.microsoft.com/office/drawing/2014/main" id="{68D2D698-6452-9735-45A2-7E5C1F0454A5}"/>
+                <a16:creationId xmlns:a16="http://schemas.microsoft.com/office/drawing/2014/main" id="{EE0D4CC7-B535-14C3-BB79-33395D4BA88F}"/>
               </a:ext>
             </a:extLst>
           </p:cNvPr>
@@ -2355,7 +2355,7 @@
           <p:cNvPr id="3" name="竖排文字占位符 2">
             <a:extLst>
               <a:ext uri="{FF2B5EF4-FFF2-40B4-BE49-F238E27FC236}">
-                <a16:creationId xmlns:a16="http://schemas.microsoft.com/office/drawing/2014/main" id="{47D01FBA-A3B6-0529-9BC5-94CD030E9BD6}"/>
+                <a16:creationId xmlns:a16="http://schemas.microsoft.com/office/drawing/2014/main" id="{4F16ACAE-AB36-2AD3-21D6-A1FA22796409}"/>
               </a:ext>
             </a:extLst>
           </p:cNvPr>
@@ -2417,7 +2417,7 @@
           <p:cNvPr id="4" name="日期占位符 3">
             <a:extLst>
               <a:ext uri="{FF2B5EF4-FFF2-40B4-BE49-F238E27FC236}">
-                <a16:creationId xmlns:a16="http://schemas.microsoft.com/office/drawing/2014/main" id="{B564F468-5F2D-5EA8-C862-12073EAD6D3E}"/>
+                <a16:creationId xmlns:a16="http://schemas.microsoft.com/office/drawing/2014/main" id="{D2B1CA2B-AF48-9D66-7B93-0A0DA01EF83C}"/>
               </a:ext>
             </a:extLst>
           </p:cNvPr>
@@ -2433,9 +2433,9 @@
           <a:bodyPr/>
           <a:lstStyle/>
           <a:p>
-            <a:fld id="{8B9FF69C-14BA-4B4B-ABF0-AACFDA9EC10F}" type="datetimeFigureOut">
+            <a:fld id="{6DADD656-4731-4A00-8EB8-E13ACEB57B07}" type="datetimeFigureOut">
               <a:rPr lang="zh-CN" altLang="en-US" smtClean="0"/>
-              <a:t>2026/5/13</a:t>
+              <a:t>2026/5/14</a:t>
             </a:fld>
             <a:endParaRPr lang="zh-CN" altLang="en-US"/>
           </a:p>
@@ -2446,7 +2446,7 @@
           <p:cNvPr id="5" name="页脚占位符 4">
             <a:extLst>
               <a:ext uri="{FF2B5EF4-FFF2-40B4-BE49-F238E27FC236}">
-                <a16:creationId xmlns:a16="http://schemas.microsoft.com/office/drawing/2014/main" id="{55E1D232-7EAE-65C6-FE64-CAA07006E9D3}"/>
+                <a16:creationId xmlns:a16="http://schemas.microsoft.com/office/drawing/2014/main" id="{1DF57EF8-EE0C-3D97-6F67-1410B67010E2}"/>
               </a:ext>
             </a:extLst>
           </p:cNvPr>
@@ -2471,7 +2471,7 @@
           <p:cNvPr id="6" name="灯片编号占位符 5">
             <a:extLst>
               <a:ext uri="{FF2B5EF4-FFF2-40B4-BE49-F238E27FC236}">
-                <a16:creationId xmlns:a16="http://schemas.microsoft.com/office/drawing/2014/main" id="{151F08B7-4E6B-9C3D-245F-8C4263EBF7A6}"/>
+                <a16:creationId xmlns:a16="http://schemas.microsoft.com/office/drawing/2014/main" id="{1CAA6452-D233-E3C2-53BF-4353450A7DF0}"/>
               </a:ext>
             </a:extLst>
           </p:cNvPr>
@@ -2487,7 +2487,7 @@
           <a:bodyPr/>
           <a:lstStyle/>
           <a:p>
-            <a:fld id="{F8752B0D-6D65-4C56-8EE1-42B6C981AAFF}" type="slidenum">
+            <a:fld id="{85D3BD71-BD51-4A94-BFDA-01348E1EB70F}" type="slidenum">
               <a:rPr lang="zh-CN" altLang="en-US" smtClean="0"/>
               <a:t>‹#›</a:t>
             </a:fld>
@@ -2498,7 +2498,7 @@
     </p:spTree>
     <p:extLst>
       <p:ext uri="{BB962C8B-B14F-4D97-AF65-F5344CB8AC3E}">
-        <p14:creationId xmlns:p14="http://schemas.microsoft.com/office/powerpoint/2010/main" val="532871462"/>
+        <p14:creationId xmlns:p14="http://schemas.microsoft.com/office/powerpoint/2010/main" val="1227145500"/>
       </p:ext>
     </p:extLst>
   </p:cSld>
@@ -2530,7 +2530,7 @@
           <p:cNvPr id="2" name="标题 1">
             <a:extLst>
               <a:ext uri="{FF2B5EF4-FFF2-40B4-BE49-F238E27FC236}">
-                <a16:creationId xmlns:a16="http://schemas.microsoft.com/office/drawing/2014/main" id="{49C812B4-31A3-6972-DA10-AFA9D3381AA8}"/>
+                <a16:creationId xmlns:a16="http://schemas.microsoft.com/office/drawing/2014/main" id="{C7ED4141-669F-ECA5-5E58-F91C228070EC}"/>
               </a:ext>
             </a:extLst>
           </p:cNvPr>
@@ -2558,7 +2558,7 @@
           <p:cNvPr id="3" name="内容占位符 2">
             <a:extLst>
               <a:ext uri="{FF2B5EF4-FFF2-40B4-BE49-F238E27FC236}">
-                <a16:creationId xmlns:a16="http://schemas.microsoft.com/office/drawing/2014/main" id="{73A3DE95-FFED-F5CD-EDCE-BA6A2029B16E}"/>
+                <a16:creationId xmlns:a16="http://schemas.microsoft.com/office/drawing/2014/main" id="{B06B554C-3FBE-F5BD-A56D-DF6F0A44FE43}"/>
               </a:ext>
             </a:extLst>
           </p:cNvPr>
@@ -2615,7 +2615,7 @@
           <p:cNvPr id="4" name="日期占位符 3">
             <a:extLst>
               <a:ext uri="{FF2B5EF4-FFF2-40B4-BE49-F238E27FC236}">
-                <a16:creationId xmlns:a16="http://schemas.microsoft.com/office/drawing/2014/main" id="{D440A467-9746-F34D-C798-28D39004C343}"/>
+                <a16:creationId xmlns:a16="http://schemas.microsoft.com/office/drawing/2014/main" id="{656A3E90-277B-AC4C-DAE9-7F3F9C5B287F}"/>
               </a:ext>
             </a:extLst>
           </p:cNvPr>
@@ -2631,9 +2631,9 @@
           <a:bodyPr/>
           <a:lstStyle/>
           <a:p>
-            <a:fld id="{8B9FF69C-14BA-4B4B-ABF0-AACFDA9EC10F}" type="datetimeFigureOut">
+            <a:fld id="{6DADD656-4731-4A00-8EB8-E13ACEB57B07}" type="datetimeFigureOut">
               <a:rPr lang="zh-CN" altLang="en-US" smtClean="0"/>
-              <a:t>2026/5/13</a:t>
+              <a:t>2026/5/14</a:t>
             </a:fld>
             <a:endParaRPr lang="zh-CN" altLang="en-US"/>
           </a:p>
@@ -2644,7 +2644,7 @@
           <p:cNvPr id="5" name="页脚占位符 4">
             <a:extLst>
               <a:ext uri="{FF2B5EF4-FFF2-40B4-BE49-F238E27FC236}">
-                <a16:creationId xmlns:a16="http://schemas.microsoft.com/office/drawing/2014/main" id="{93677643-8FCF-CA2C-C650-5488DC625F7A}"/>
+                <a16:creationId xmlns:a16="http://schemas.microsoft.com/office/drawing/2014/main" id="{773F445E-B2E4-8C4E-5825-A6A1A1D6CC2B}"/>
               </a:ext>
             </a:extLst>
           </p:cNvPr>
@@ -2669,7 +2669,7 @@
           <p:cNvPr id="6" name="灯片编号占位符 5">
             <a:extLst>
               <a:ext uri="{FF2B5EF4-FFF2-40B4-BE49-F238E27FC236}">
-                <a16:creationId xmlns:a16="http://schemas.microsoft.com/office/drawing/2014/main" id="{F7BF6450-BC4C-89FE-C3C7-C05F360AACB6}"/>
+                <a16:creationId xmlns:a16="http://schemas.microsoft.com/office/drawing/2014/main" id="{1B1689C8-790C-FC68-E677-A516EC5302FC}"/>
               </a:ext>
             </a:extLst>
           </p:cNvPr>
@@ -2685,7 +2685,7 @@
           <a:bodyPr/>
           <a:lstStyle/>
           <a:p>
-            <a:fld id="{F8752B0D-6D65-4C56-8EE1-42B6C981AAFF}" type="slidenum">
+            <a:fld id="{85D3BD71-BD51-4A94-BFDA-01348E1EB70F}" type="slidenum">
               <a:rPr lang="zh-CN" altLang="en-US" smtClean="0"/>
               <a:t>‹#›</a:t>
             </a:fld>
@@ -2696,7 +2696,7 @@
     </p:spTree>
     <p:extLst>
       <p:ext uri="{BB962C8B-B14F-4D97-AF65-F5344CB8AC3E}">
-        <p14:creationId xmlns:p14="http://schemas.microsoft.com/office/powerpoint/2010/main" val="1938302869"/>
+        <p14:creationId xmlns:p14="http://schemas.microsoft.com/office/powerpoint/2010/main" val="1635483599"/>
       </p:ext>
     </p:extLst>
   </p:cSld>
@@ -2728,7 +2728,7 @@
           <p:cNvPr id="2" name="标题 1">
             <a:extLst>
               <a:ext uri="{FF2B5EF4-FFF2-40B4-BE49-F238E27FC236}">
-                <a16:creationId xmlns:a16="http://schemas.microsoft.com/office/drawing/2014/main" id="{02181733-02B7-5031-FE4B-D3F96EF85A62}"/>
+                <a16:creationId xmlns:a16="http://schemas.microsoft.com/office/drawing/2014/main" id="{A48FB60E-6FE7-B724-6D8D-AD5EA84D493A}"/>
               </a:ext>
             </a:extLst>
           </p:cNvPr>
@@ -2765,7 +2765,7 @@
           <p:cNvPr id="3" name="文本占位符 2">
             <a:extLst>
               <a:ext uri="{FF2B5EF4-FFF2-40B4-BE49-F238E27FC236}">
-                <a16:creationId xmlns:a16="http://schemas.microsoft.com/office/drawing/2014/main" id="{75B876CF-19C2-FFB6-CF94-00F481BAD389}"/>
+                <a16:creationId xmlns:a16="http://schemas.microsoft.com/office/drawing/2014/main" id="{C551A897-5BA5-B06C-5DFB-26CC2132A203}"/>
               </a:ext>
             </a:extLst>
           </p:cNvPr>
@@ -2890,7 +2890,7 @@
           <p:cNvPr id="4" name="日期占位符 3">
             <a:extLst>
               <a:ext uri="{FF2B5EF4-FFF2-40B4-BE49-F238E27FC236}">
-                <a16:creationId xmlns:a16="http://schemas.microsoft.com/office/drawing/2014/main" id="{0B0F7CB7-DEF3-0B87-DC55-7A53BB1DA7AC}"/>
+                <a16:creationId xmlns:a16="http://schemas.microsoft.com/office/drawing/2014/main" id="{BD361D7D-F521-6BD0-C896-5E8AE655369B}"/>
               </a:ext>
             </a:extLst>
           </p:cNvPr>
@@ -2906,9 +2906,9 @@
           <a:bodyPr/>
           <a:lstStyle/>
           <a:p>
-            <a:fld id="{8B9FF69C-14BA-4B4B-ABF0-AACFDA9EC10F}" type="datetimeFigureOut">
+            <a:fld id="{6DADD656-4731-4A00-8EB8-E13ACEB57B07}" type="datetimeFigureOut">
               <a:rPr lang="zh-CN" altLang="en-US" smtClean="0"/>
-              <a:t>2026/5/13</a:t>
+              <a:t>2026/5/14</a:t>
             </a:fld>
             <a:endParaRPr lang="zh-CN" altLang="en-US"/>
           </a:p>
@@ -2919,7 +2919,7 @@
           <p:cNvPr id="5" name="页脚占位符 4">
             <a:extLst>
               <a:ext uri="{FF2B5EF4-FFF2-40B4-BE49-F238E27FC236}">
-                <a16:creationId xmlns:a16="http://schemas.microsoft.com/office/drawing/2014/main" id="{9C9BC317-AE2A-A5B3-335E-DE10B1E482FF}"/>
+                <a16:creationId xmlns:a16="http://schemas.microsoft.com/office/drawing/2014/main" id="{B4A1637D-2043-2A56-A852-A738664D7C1D}"/>
               </a:ext>
             </a:extLst>
           </p:cNvPr>
@@ -2944,7 +2944,7 @@
           <p:cNvPr id="6" name="灯片编号占位符 5">
             <a:extLst>
               <a:ext uri="{FF2B5EF4-FFF2-40B4-BE49-F238E27FC236}">
-                <a16:creationId xmlns:a16="http://schemas.microsoft.com/office/drawing/2014/main" id="{307D036C-B6F7-2B1F-66B1-C9A2467CFC4F}"/>
+                <a16:creationId xmlns:a16="http://schemas.microsoft.com/office/drawing/2014/main" id="{760A2643-B10C-E44D-78AB-7CDBFA09737A}"/>
               </a:ext>
             </a:extLst>
           </p:cNvPr>
@@ -2960,7 +2960,7 @@
           <a:bodyPr/>
           <a:lstStyle/>
           <a:p>
-            <a:fld id="{F8752B0D-6D65-4C56-8EE1-42B6C981AAFF}" type="slidenum">
+            <a:fld id="{85D3BD71-BD51-4A94-BFDA-01348E1EB70F}" type="slidenum">
               <a:rPr lang="zh-CN" altLang="en-US" smtClean="0"/>
               <a:t>‹#›</a:t>
             </a:fld>
@@ -2971,7 +2971,7 @@
     </p:spTree>
     <p:extLst>
       <p:ext uri="{BB962C8B-B14F-4D97-AF65-F5344CB8AC3E}">
-        <p14:creationId xmlns:p14="http://schemas.microsoft.com/office/powerpoint/2010/main" val="746564869"/>
+        <p14:creationId xmlns:p14="http://schemas.microsoft.com/office/powerpoint/2010/main" val="2531970554"/>
       </p:ext>
     </p:extLst>
   </p:cSld>
@@ -3003,7 +3003,7 @@
           <p:cNvPr id="2" name="标题 1">
             <a:extLst>
               <a:ext uri="{FF2B5EF4-FFF2-40B4-BE49-F238E27FC236}">
-                <a16:creationId xmlns:a16="http://schemas.microsoft.com/office/drawing/2014/main" id="{6DE610C8-050C-5B5A-C273-0B049C28C19C}"/>
+                <a16:creationId xmlns:a16="http://schemas.microsoft.com/office/drawing/2014/main" id="{42BBC0D1-3EC4-04C4-F6EA-9ACB1C21CA08}"/>
               </a:ext>
             </a:extLst>
           </p:cNvPr>
@@ -3031,7 +3031,7 @@
           <p:cNvPr id="3" name="内容占位符 2">
             <a:extLst>
               <a:ext uri="{FF2B5EF4-FFF2-40B4-BE49-F238E27FC236}">
-                <a16:creationId xmlns:a16="http://schemas.microsoft.com/office/drawing/2014/main" id="{6236743C-082A-6B04-E8F0-A3BB9204C94D}"/>
+                <a16:creationId xmlns:a16="http://schemas.microsoft.com/office/drawing/2014/main" id="{87E8CB3E-9AAA-4562-5A19-5063A4937DEC}"/>
               </a:ext>
             </a:extLst>
           </p:cNvPr>
@@ -3093,7 +3093,7 @@
           <p:cNvPr id="4" name="内容占位符 3">
             <a:extLst>
               <a:ext uri="{FF2B5EF4-FFF2-40B4-BE49-F238E27FC236}">
-                <a16:creationId xmlns:a16="http://schemas.microsoft.com/office/drawing/2014/main" id="{730ECDDA-FD83-4B6D-70AB-0C036D8F1EBE}"/>
+                <a16:creationId xmlns:a16="http://schemas.microsoft.com/office/drawing/2014/main" id="{63D3BAD4-9270-0DF9-6F29-1B866EDD5D9F}"/>
               </a:ext>
             </a:extLst>
           </p:cNvPr>
@@ -3155,7 +3155,7 @@
           <p:cNvPr id="5" name="日期占位符 4">
             <a:extLst>
               <a:ext uri="{FF2B5EF4-FFF2-40B4-BE49-F238E27FC236}">
-                <a16:creationId xmlns:a16="http://schemas.microsoft.com/office/drawing/2014/main" id="{4E9DC0F0-0DA9-02C8-F9A7-58DE85973A3E}"/>
+                <a16:creationId xmlns:a16="http://schemas.microsoft.com/office/drawing/2014/main" id="{A4D652E2-9420-B043-E10A-3C632A1A2CF1}"/>
               </a:ext>
             </a:extLst>
           </p:cNvPr>
@@ -3171,9 +3171,9 @@
           <a:bodyPr/>
           <a:lstStyle/>
           <a:p>
-            <a:fld id="{8B9FF69C-14BA-4B4B-ABF0-AACFDA9EC10F}" type="datetimeFigureOut">
+            <a:fld id="{6DADD656-4731-4A00-8EB8-E13ACEB57B07}" type="datetimeFigureOut">
               <a:rPr lang="zh-CN" altLang="en-US" smtClean="0"/>
-              <a:t>2026/5/13</a:t>
+              <a:t>2026/5/14</a:t>
             </a:fld>
             <a:endParaRPr lang="zh-CN" altLang="en-US"/>
           </a:p>
@@ -3184,7 +3184,7 @@
           <p:cNvPr id="6" name="页脚占位符 5">
             <a:extLst>
               <a:ext uri="{FF2B5EF4-FFF2-40B4-BE49-F238E27FC236}">
-                <a16:creationId xmlns:a16="http://schemas.microsoft.com/office/drawing/2014/main" id="{D52A5F4C-0D33-7362-68D0-E2D5F8AB8F0C}"/>
+                <a16:creationId xmlns:a16="http://schemas.microsoft.com/office/drawing/2014/main" id="{1C41101F-E7A8-C074-9942-B5AC929026E7}"/>
               </a:ext>
             </a:extLst>
           </p:cNvPr>
@@ -3209,7 +3209,7 @@
           <p:cNvPr id="7" name="灯片编号占位符 6">
             <a:extLst>
               <a:ext uri="{FF2B5EF4-FFF2-40B4-BE49-F238E27FC236}">
-                <a16:creationId xmlns:a16="http://schemas.microsoft.com/office/drawing/2014/main" id="{74A6D386-B96B-C3A6-E7F9-641661C38480}"/>
+                <a16:creationId xmlns:a16="http://schemas.microsoft.com/office/drawing/2014/main" id="{37C4A55D-3021-E1DA-9DEB-E490AAB4D8F0}"/>
               </a:ext>
             </a:extLst>
           </p:cNvPr>
@@ -3225,7 +3225,7 @@
           <a:bodyPr/>
           <a:lstStyle/>
           <a:p>
-            <a:fld id="{F8752B0D-6D65-4C56-8EE1-42B6C981AAFF}" type="slidenum">
+            <a:fld id="{85D3BD71-BD51-4A94-BFDA-01348E1EB70F}" type="slidenum">
               <a:rPr lang="zh-CN" altLang="en-US" smtClean="0"/>
               <a:t>‹#›</a:t>
             </a:fld>
@@ -3236,7 +3236,7 @@
     </p:spTree>
     <p:extLst>
       <p:ext uri="{BB962C8B-B14F-4D97-AF65-F5344CB8AC3E}">
-        <p14:creationId xmlns:p14="http://schemas.microsoft.com/office/powerpoint/2010/main" val="2908046191"/>
+        <p14:creationId xmlns:p14="http://schemas.microsoft.com/office/powerpoint/2010/main" val="2164262338"/>
       </p:ext>
     </p:extLst>
   </p:cSld>
@@ -3268,7 +3268,7 @@
           <p:cNvPr id="2" name="标题 1">
             <a:extLst>
               <a:ext uri="{FF2B5EF4-FFF2-40B4-BE49-F238E27FC236}">
-                <a16:creationId xmlns:a16="http://schemas.microsoft.com/office/drawing/2014/main" id="{B8FE30D3-3EE7-0AA0-FFEA-0F734496D539}"/>
+                <a16:creationId xmlns:a16="http://schemas.microsoft.com/office/drawing/2014/main" id="{4E7D93CD-7843-72ED-896D-9187E254FEF4}"/>
               </a:ext>
             </a:extLst>
           </p:cNvPr>
@@ -3301,7 +3301,7 @@
           <p:cNvPr id="3" name="文本占位符 2">
             <a:extLst>
               <a:ext uri="{FF2B5EF4-FFF2-40B4-BE49-F238E27FC236}">
-                <a16:creationId xmlns:a16="http://schemas.microsoft.com/office/drawing/2014/main" id="{AC434FB0-2DC9-458C-8440-B9B5FCEFD9BB}"/>
+                <a16:creationId xmlns:a16="http://schemas.microsoft.com/office/drawing/2014/main" id="{7D5E339B-04E4-A408-C8EB-9C2B8C6EB226}"/>
               </a:ext>
             </a:extLst>
           </p:cNvPr>
@@ -3372,7 +3372,7 @@
           <p:cNvPr id="4" name="内容占位符 3">
             <a:extLst>
               <a:ext uri="{FF2B5EF4-FFF2-40B4-BE49-F238E27FC236}">
-                <a16:creationId xmlns:a16="http://schemas.microsoft.com/office/drawing/2014/main" id="{76281E95-9113-9DB6-3A48-21FFC06555C8}"/>
+                <a16:creationId xmlns:a16="http://schemas.microsoft.com/office/drawing/2014/main" id="{40598E3E-43A1-F45F-38CC-1C616313599A}"/>
               </a:ext>
             </a:extLst>
           </p:cNvPr>
@@ -3434,7 +3434,7 @@
           <p:cNvPr id="5" name="文本占位符 4">
             <a:extLst>
               <a:ext uri="{FF2B5EF4-FFF2-40B4-BE49-F238E27FC236}">
-                <a16:creationId xmlns:a16="http://schemas.microsoft.com/office/drawing/2014/main" id="{53C6DBB1-3A9F-25F2-7CB5-70A502CEF134}"/>
+                <a16:creationId xmlns:a16="http://schemas.microsoft.com/office/drawing/2014/main" id="{4F53B770-7E37-2E27-50DD-B0D60899B11B}"/>
               </a:ext>
             </a:extLst>
           </p:cNvPr>
@@ -3505,7 +3505,7 @@
           <p:cNvPr id="6" name="内容占位符 5">
             <a:extLst>
               <a:ext uri="{FF2B5EF4-FFF2-40B4-BE49-F238E27FC236}">
-                <a16:creationId xmlns:a16="http://schemas.microsoft.com/office/drawing/2014/main" id="{82168B8E-6232-918D-F413-55BF40919BA2}"/>
+                <a16:creationId xmlns:a16="http://schemas.microsoft.com/office/drawing/2014/main" id="{D85C1C96-1C15-0CCE-B159-23D91662E388}"/>
               </a:ext>
             </a:extLst>
           </p:cNvPr>
@@ -3567,7 +3567,7 @@
           <p:cNvPr id="7" name="日期占位符 6">
             <a:extLst>
               <a:ext uri="{FF2B5EF4-FFF2-40B4-BE49-F238E27FC236}">
-                <a16:creationId xmlns:a16="http://schemas.microsoft.com/office/drawing/2014/main" id="{800B9BB2-F849-212A-DDD4-62B2D4CDD244}"/>
+                <a16:creationId xmlns:a16="http://schemas.microsoft.com/office/drawing/2014/main" id="{12B23EDC-34E7-385D-24CD-937BB8F601DF}"/>
               </a:ext>
             </a:extLst>
           </p:cNvPr>
@@ -3583,9 +3583,9 @@
           <a:bodyPr/>
           <a:lstStyle/>
           <a:p>
-            <a:fld id="{8B9FF69C-14BA-4B4B-ABF0-AACFDA9EC10F}" type="datetimeFigureOut">
+            <a:fld id="{6DADD656-4731-4A00-8EB8-E13ACEB57B07}" type="datetimeFigureOut">
               <a:rPr lang="zh-CN" altLang="en-US" smtClean="0"/>
-              <a:t>2026/5/13</a:t>
+              <a:t>2026/5/14</a:t>
             </a:fld>
             <a:endParaRPr lang="zh-CN" altLang="en-US"/>
           </a:p>
@@ -3596,7 +3596,7 @@
           <p:cNvPr id="8" name="页脚占位符 7">
             <a:extLst>
               <a:ext uri="{FF2B5EF4-FFF2-40B4-BE49-F238E27FC236}">
-                <a16:creationId xmlns:a16="http://schemas.microsoft.com/office/drawing/2014/main" id="{868B2B07-B637-E55A-B0BA-848FDDC3FB38}"/>
+                <a16:creationId xmlns:a16="http://schemas.microsoft.com/office/drawing/2014/main" id="{E77F207F-F794-2558-D8ED-CF5052E35BCE}"/>
               </a:ext>
             </a:extLst>
           </p:cNvPr>
@@ -3621,7 +3621,7 @@
           <p:cNvPr id="9" name="灯片编号占位符 8">
             <a:extLst>
               <a:ext uri="{FF2B5EF4-FFF2-40B4-BE49-F238E27FC236}">
-                <a16:creationId xmlns:a16="http://schemas.microsoft.com/office/drawing/2014/main" id="{1A775CAB-E128-015E-1047-DE75B549EDCA}"/>
+                <a16:creationId xmlns:a16="http://schemas.microsoft.com/office/drawing/2014/main" id="{5FF51BE9-0355-F095-C80F-02B3CDDD0D49}"/>
               </a:ext>
             </a:extLst>
           </p:cNvPr>
@@ -3637,7 +3637,7 @@
           <a:bodyPr/>
           <a:lstStyle/>
           <a:p>
-            <a:fld id="{F8752B0D-6D65-4C56-8EE1-42B6C981AAFF}" type="slidenum">
+            <a:fld id="{85D3BD71-BD51-4A94-BFDA-01348E1EB70F}" type="slidenum">
               <a:rPr lang="zh-CN" altLang="en-US" smtClean="0"/>
               <a:t>‹#›</a:t>
             </a:fld>
@@ -3648,7 +3648,7 @@
     </p:spTree>
     <p:extLst>
       <p:ext uri="{BB962C8B-B14F-4D97-AF65-F5344CB8AC3E}">
-        <p14:creationId xmlns:p14="http://schemas.microsoft.com/office/powerpoint/2010/main" val="55915591"/>
+        <p14:creationId xmlns:p14="http://schemas.microsoft.com/office/powerpoint/2010/main" val="4262444165"/>
       </p:ext>
     </p:extLst>
   </p:cSld>
@@ -3680,7 +3680,7 @@
           <p:cNvPr id="2" name="标题 1">
             <a:extLst>
               <a:ext uri="{FF2B5EF4-FFF2-40B4-BE49-F238E27FC236}">
-                <a16:creationId xmlns:a16="http://schemas.microsoft.com/office/drawing/2014/main" id="{E73A8853-0150-8FB6-5361-696CF9AA4E4C}"/>
+                <a16:creationId xmlns:a16="http://schemas.microsoft.com/office/drawing/2014/main" id="{7A7E6B9C-6584-8490-83AA-B98C38677E82}"/>
               </a:ext>
             </a:extLst>
           </p:cNvPr>
@@ -3708,7 +3708,7 @@
           <p:cNvPr id="3" name="日期占位符 2">
             <a:extLst>
               <a:ext uri="{FF2B5EF4-FFF2-40B4-BE49-F238E27FC236}">
-                <a16:creationId xmlns:a16="http://schemas.microsoft.com/office/drawing/2014/main" id="{38C5A666-8A38-5E3D-92C7-F0BC799A765F}"/>
+                <a16:creationId xmlns:a16="http://schemas.microsoft.com/office/drawing/2014/main" id="{5E58597A-5F4B-3EAE-C09D-37BDE6229B6F}"/>
               </a:ext>
             </a:extLst>
           </p:cNvPr>
@@ -3724,9 +3724,9 @@
           <a:bodyPr/>
           <a:lstStyle/>
           <a:p>
-            <a:fld id="{8B9FF69C-14BA-4B4B-ABF0-AACFDA9EC10F}" type="datetimeFigureOut">
+            <a:fld id="{6DADD656-4731-4A00-8EB8-E13ACEB57B07}" type="datetimeFigureOut">
               <a:rPr lang="zh-CN" altLang="en-US" smtClean="0"/>
-              <a:t>2026/5/13</a:t>
+              <a:t>2026/5/14</a:t>
             </a:fld>
             <a:endParaRPr lang="zh-CN" altLang="en-US"/>
           </a:p>
@@ -3737,7 +3737,7 @@
           <p:cNvPr id="4" name="页脚占位符 3">
             <a:extLst>
               <a:ext uri="{FF2B5EF4-FFF2-40B4-BE49-F238E27FC236}">
-                <a16:creationId xmlns:a16="http://schemas.microsoft.com/office/drawing/2014/main" id="{DF1B2DA2-A45F-19A7-BD27-40A2A731C0F7}"/>
+                <a16:creationId xmlns:a16="http://schemas.microsoft.com/office/drawing/2014/main" id="{52BC1516-B6A7-933A-8020-F1C25480842B}"/>
               </a:ext>
             </a:extLst>
           </p:cNvPr>
@@ -3762,7 +3762,7 @@
           <p:cNvPr id="5" name="灯片编号占位符 4">
             <a:extLst>
               <a:ext uri="{FF2B5EF4-FFF2-40B4-BE49-F238E27FC236}">
-                <a16:creationId xmlns:a16="http://schemas.microsoft.com/office/drawing/2014/main" id="{D5532403-78F0-D36A-8946-857FE8F18CFE}"/>
+                <a16:creationId xmlns:a16="http://schemas.microsoft.com/office/drawing/2014/main" id="{A04B1A9B-FB72-7DB9-03BA-9800334B0599}"/>
               </a:ext>
             </a:extLst>
           </p:cNvPr>
@@ -3778,7 +3778,7 @@
           <a:bodyPr/>
           <a:lstStyle/>
           <a:p>
-            <a:fld id="{F8752B0D-6D65-4C56-8EE1-42B6C981AAFF}" type="slidenum">
+            <a:fld id="{85D3BD71-BD51-4A94-BFDA-01348E1EB70F}" type="slidenum">
               <a:rPr lang="zh-CN" altLang="en-US" smtClean="0"/>
               <a:t>‹#›</a:t>
             </a:fld>
@@ -3789,7 +3789,7 @@
     </p:spTree>
     <p:extLst>
       <p:ext uri="{BB962C8B-B14F-4D97-AF65-F5344CB8AC3E}">
-        <p14:creationId xmlns:p14="http://schemas.microsoft.com/office/powerpoint/2010/main" val="4033924610"/>
+        <p14:creationId xmlns:p14="http://schemas.microsoft.com/office/powerpoint/2010/main" val="2273769323"/>
       </p:ext>
     </p:extLst>
   </p:cSld>
@@ -3821,7 +3821,7 @@
           <p:cNvPr id="2" name="日期占位符 1">
             <a:extLst>
               <a:ext uri="{FF2B5EF4-FFF2-40B4-BE49-F238E27FC236}">
-                <a16:creationId xmlns:a16="http://schemas.microsoft.com/office/drawing/2014/main" id="{1217653D-4AEE-6D1C-132C-00BAE22F3FD7}"/>
+                <a16:creationId xmlns:a16="http://schemas.microsoft.com/office/drawing/2014/main" id="{709F0BBB-4540-58D9-1424-B72E51ED890A}"/>
               </a:ext>
             </a:extLst>
           </p:cNvPr>
@@ -3837,9 +3837,9 @@
           <a:bodyPr/>
           <a:lstStyle/>
           <a:p>
-            <a:fld id="{8B9FF69C-14BA-4B4B-ABF0-AACFDA9EC10F}" type="datetimeFigureOut">
+            <a:fld id="{6DADD656-4731-4A00-8EB8-E13ACEB57B07}" type="datetimeFigureOut">
               <a:rPr lang="zh-CN" altLang="en-US" smtClean="0"/>
-              <a:t>2026/5/13</a:t>
+              <a:t>2026/5/14</a:t>
             </a:fld>
             <a:endParaRPr lang="zh-CN" altLang="en-US"/>
           </a:p>
@@ -3850,7 +3850,7 @@
           <p:cNvPr id="3" name="页脚占位符 2">
             <a:extLst>
               <a:ext uri="{FF2B5EF4-FFF2-40B4-BE49-F238E27FC236}">
-                <a16:creationId xmlns:a16="http://schemas.microsoft.com/office/drawing/2014/main" id="{4764A4D7-C139-C928-1DDF-85115355B115}"/>
+                <a16:creationId xmlns:a16="http://schemas.microsoft.com/office/drawing/2014/main" id="{2CEED92D-5D26-DD41-BD0B-38E1585678EC}"/>
               </a:ext>
             </a:extLst>
           </p:cNvPr>
@@ -3875,7 +3875,7 @@
           <p:cNvPr id="4" name="灯片编号占位符 3">
             <a:extLst>
               <a:ext uri="{FF2B5EF4-FFF2-40B4-BE49-F238E27FC236}">
-                <a16:creationId xmlns:a16="http://schemas.microsoft.com/office/drawing/2014/main" id="{CE313DAC-9139-1045-F14C-9A164D37CE77}"/>
+                <a16:creationId xmlns:a16="http://schemas.microsoft.com/office/drawing/2014/main" id="{E442B6D2-B5C2-D744-C538-8A66E0094693}"/>
               </a:ext>
             </a:extLst>
           </p:cNvPr>
@@ -3891,7 +3891,7 @@
           <a:bodyPr/>
           <a:lstStyle/>
           <a:p>
-            <a:fld id="{F8752B0D-6D65-4C56-8EE1-42B6C981AAFF}" type="slidenum">
+            <a:fld id="{85D3BD71-BD51-4A94-BFDA-01348E1EB70F}" type="slidenum">
               <a:rPr lang="zh-CN" altLang="en-US" smtClean="0"/>
               <a:t>‹#›</a:t>
             </a:fld>
@@ -3902,7 +3902,7 @@
     </p:spTree>
     <p:extLst>
       <p:ext uri="{BB962C8B-B14F-4D97-AF65-F5344CB8AC3E}">
-        <p14:creationId xmlns:p14="http://schemas.microsoft.com/office/powerpoint/2010/main" val="2229569309"/>
+        <p14:creationId xmlns:p14="http://schemas.microsoft.com/office/powerpoint/2010/main" val="1585580177"/>
       </p:ext>
     </p:extLst>
   </p:cSld>
@@ -3934,7 +3934,7 @@
           <p:cNvPr id="2" name="标题 1">
             <a:extLst>
               <a:ext uri="{FF2B5EF4-FFF2-40B4-BE49-F238E27FC236}">
-                <a16:creationId xmlns:a16="http://schemas.microsoft.com/office/drawing/2014/main" id="{FA1D2EB9-2E9C-B34E-8F08-7253D0983C6E}"/>
+                <a16:creationId xmlns:a16="http://schemas.microsoft.com/office/drawing/2014/main" id="{A6450B8A-CC61-E026-F149-2F0E9EA097F6}"/>
               </a:ext>
             </a:extLst>
           </p:cNvPr>
@@ -3971,7 +3971,7 @@
           <p:cNvPr id="3" name="内容占位符 2">
             <a:extLst>
               <a:ext uri="{FF2B5EF4-FFF2-40B4-BE49-F238E27FC236}">
-                <a16:creationId xmlns:a16="http://schemas.microsoft.com/office/drawing/2014/main" id="{FA1B8F19-A1B8-C9C4-C556-0C3596A69ABD}"/>
+                <a16:creationId xmlns:a16="http://schemas.microsoft.com/office/drawing/2014/main" id="{58BD2228-43B1-3976-A8B8-8A0198E87A5C}"/>
               </a:ext>
             </a:extLst>
           </p:cNvPr>
@@ -4061,7 +4061,7 @@
           <p:cNvPr id="4" name="文本占位符 3">
             <a:extLst>
               <a:ext uri="{FF2B5EF4-FFF2-40B4-BE49-F238E27FC236}">
-                <a16:creationId xmlns:a16="http://schemas.microsoft.com/office/drawing/2014/main" id="{E7B050EA-907F-19B7-E0E0-033BEB7E9D4E}"/>
+                <a16:creationId xmlns:a16="http://schemas.microsoft.com/office/drawing/2014/main" id="{4CE5342A-0ECB-35B4-9D61-099834AFA7C4}"/>
               </a:ext>
             </a:extLst>
           </p:cNvPr>
@@ -4132,7 +4132,7 @@
           <p:cNvPr id="5" name="日期占位符 4">
             <a:extLst>
               <a:ext uri="{FF2B5EF4-FFF2-40B4-BE49-F238E27FC236}">
-                <a16:creationId xmlns:a16="http://schemas.microsoft.com/office/drawing/2014/main" id="{1E6CF955-EBD5-D6DF-BFB2-8C692D4DF759}"/>
+                <a16:creationId xmlns:a16="http://schemas.microsoft.com/office/drawing/2014/main" id="{E4465EC3-1B80-5521-F758-7F8192CC1C96}"/>
               </a:ext>
             </a:extLst>
           </p:cNvPr>
@@ -4148,9 +4148,9 @@
           <a:bodyPr/>
           <a:lstStyle/>
           <a:p>
-            <a:fld id="{8B9FF69C-14BA-4B4B-ABF0-AACFDA9EC10F}" type="datetimeFigureOut">
+            <a:fld id="{6DADD656-4731-4A00-8EB8-E13ACEB57B07}" type="datetimeFigureOut">
               <a:rPr lang="zh-CN" altLang="en-US" smtClean="0"/>
-              <a:t>2026/5/13</a:t>
+              <a:t>2026/5/14</a:t>
             </a:fld>
             <a:endParaRPr lang="zh-CN" altLang="en-US"/>
           </a:p>
@@ -4161,7 +4161,7 @@
           <p:cNvPr id="6" name="页脚占位符 5">
             <a:extLst>
               <a:ext uri="{FF2B5EF4-FFF2-40B4-BE49-F238E27FC236}">
-                <a16:creationId xmlns:a16="http://schemas.microsoft.com/office/drawing/2014/main" id="{B2BA29FC-7ED9-64FD-AB47-42EFE90B0B8F}"/>
+                <a16:creationId xmlns:a16="http://schemas.microsoft.com/office/drawing/2014/main" id="{19AA842E-B3FB-A1AE-4759-385C54FC09AD}"/>
               </a:ext>
             </a:extLst>
           </p:cNvPr>
@@ -4186,7 +4186,7 @@
           <p:cNvPr id="7" name="灯片编号占位符 6">
             <a:extLst>
               <a:ext uri="{FF2B5EF4-FFF2-40B4-BE49-F238E27FC236}">
-                <a16:creationId xmlns:a16="http://schemas.microsoft.com/office/drawing/2014/main" id="{0921DEB7-49DE-968F-921A-20120D51C59C}"/>
+                <a16:creationId xmlns:a16="http://schemas.microsoft.com/office/drawing/2014/main" id="{4EE6BEB3-FACF-501F-7187-1CED3E66EC29}"/>
               </a:ext>
             </a:extLst>
           </p:cNvPr>
@@ -4202,7 +4202,7 @@
           <a:bodyPr/>
           <a:lstStyle/>
           <a:p>
-            <a:fld id="{F8752B0D-6D65-4C56-8EE1-42B6C981AAFF}" type="slidenum">
+            <a:fld id="{85D3BD71-BD51-4A94-BFDA-01348E1EB70F}" type="slidenum">
               <a:rPr lang="zh-CN" altLang="en-US" smtClean="0"/>
               <a:t>‹#›</a:t>
             </a:fld>
@@ -4213,7 +4213,7 @@
     </p:spTree>
     <p:extLst>
       <p:ext uri="{BB962C8B-B14F-4D97-AF65-F5344CB8AC3E}">
-        <p14:creationId xmlns:p14="http://schemas.microsoft.com/office/powerpoint/2010/main" val="3139683401"/>
+        <p14:creationId xmlns:p14="http://schemas.microsoft.com/office/powerpoint/2010/main" val="3331103133"/>
       </p:ext>
     </p:extLst>
   </p:cSld>
@@ -4245,7 +4245,7 @@
           <p:cNvPr id="2" name="标题 1">
             <a:extLst>
               <a:ext uri="{FF2B5EF4-FFF2-40B4-BE49-F238E27FC236}">
-                <a16:creationId xmlns:a16="http://schemas.microsoft.com/office/drawing/2014/main" id="{B9EFBB16-3EC0-D46F-7FAF-4D8E4F735B20}"/>
+                <a16:creationId xmlns:a16="http://schemas.microsoft.com/office/drawing/2014/main" id="{27CF544B-6A64-C1E2-F5F9-8F5D4C4B9F23}"/>
               </a:ext>
             </a:extLst>
           </p:cNvPr>
@@ -4282,7 +4282,7 @@
           <p:cNvPr id="3" name="图片占位符 2">
             <a:extLst>
               <a:ext uri="{FF2B5EF4-FFF2-40B4-BE49-F238E27FC236}">
-                <a16:creationId xmlns:a16="http://schemas.microsoft.com/office/drawing/2014/main" id="{601B75C0-DAE4-025D-8E35-6D812523FF8D}"/>
+                <a16:creationId xmlns:a16="http://schemas.microsoft.com/office/drawing/2014/main" id="{BD2474DE-A7CE-2129-BD31-4CF2189C75CC}"/>
               </a:ext>
             </a:extLst>
           </p:cNvPr>
@@ -4349,7 +4349,7 @@
           <p:cNvPr id="4" name="文本占位符 3">
             <a:extLst>
               <a:ext uri="{FF2B5EF4-FFF2-40B4-BE49-F238E27FC236}">
-                <a16:creationId xmlns:a16="http://schemas.microsoft.com/office/drawing/2014/main" id="{D5683514-8ABC-3D67-EB49-644CED48675A}"/>
+                <a16:creationId xmlns:a16="http://schemas.microsoft.com/office/drawing/2014/main" id="{6BF559E6-937E-F0C0-AC5B-DEC4573E008A}"/>
               </a:ext>
             </a:extLst>
           </p:cNvPr>
@@ -4420,7 +4420,7 @@
           <p:cNvPr id="5" name="日期占位符 4">
             <a:extLst>
               <a:ext uri="{FF2B5EF4-FFF2-40B4-BE49-F238E27FC236}">
-                <a16:creationId xmlns:a16="http://schemas.microsoft.com/office/drawing/2014/main" id="{2A8C51E3-4849-27D6-1507-C8841FBAB8FB}"/>
+                <a16:creationId xmlns:a16="http://schemas.microsoft.com/office/drawing/2014/main" id="{9D4DE520-F96B-FA55-B659-E2E3C41F46C9}"/>
               </a:ext>
             </a:extLst>
           </p:cNvPr>
@@ -4436,9 +4436,9 @@
           <a:bodyPr/>
           <a:lstStyle/>
           <a:p>
-            <a:fld id="{8B9FF69C-14BA-4B4B-ABF0-AACFDA9EC10F}" type="datetimeFigureOut">
+            <a:fld id="{6DADD656-4731-4A00-8EB8-E13ACEB57B07}" type="datetimeFigureOut">
               <a:rPr lang="zh-CN" altLang="en-US" smtClean="0"/>
-              <a:t>2026/5/13</a:t>
+              <a:t>2026/5/14</a:t>
             </a:fld>
             <a:endParaRPr lang="zh-CN" altLang="en-US"/>
           </a:p>
@@ -4449,7 +4449,7 @@
           <p:cNvPr id="6" name="页脚占位符 5">
             <a:extLst>
               <a:ext uri="{FF2B5EF4-FFF2-40B4-BE49-F238E27FC236}">
-                <a16:creationId xmlns:a16="http://schemas.microsoft.com/office/drawing/2014/main" id="{00495505-6672-E55F-2149-5A9699D5221F}"/>
+                <a16:creationId xmlns:a16="http://schemas.microsoft.com/office/drawing/2014/main" id="{B156BA6E-5DBC-ECE4-AF21-F519F18B9EFA}"/>
               </a:ext>
             </a:extLst>
           </p:cNvPr>
@@ -4474,7 +4474,7 @@
           <p:cNvPr id="7" name="灯片编号占位符 6">
             <a:extLst>
               <a:ext uri="{FF2B5EF4-FFF2-40B4-BE49-F238E27FC236}">
-                <a16:creationId xmlns:a16="http://schemas.microsoft.com/office/drawing/2014/main" id="{5848E535-DCD3-CEDB-05E6-5FFE2B62006B}"/>
+                <a16:creationId xmlns:a16="http://schemas.microsoft.com/office/drawing/2014/main" id="{69978AE5-1778-DB83-13D4-4B20B99F6850}"/>
               </a:ext>
             </a:extLst>
           </p:cNvPr>
@@ -4490,7 +4490,7 @@
           <a:bodyPr/>
           <a:lstStyle/>
           <a:p>
-            <a:fld id="{F8752B0D-6D65-4C56-8EE1-42B6C981AAFF}" type="slidenum">
+            <a:fld id="{85D3BD71-BD51-4A94-BFDA-01348E1EB70F}" type="slidenum">
               <a:rPr lang="zh-CN" altLang="en-US" smtClean="0"/>
               <a:t>‹#›</a:t>
             </a:fld>
@@ -4501,7 +4501,7 @@
     </p:spTree>
     <p:extLst>
       <p:ext uri="{BB962C8B-B14F-4D97-AF65-F5344CB8AC3E}">
-        <p14:creationId xmlns:p14="http://schemas.microsoft.com/office/powerpoint/2010/main" val="2060312925"/>
+        <p14:creationId xmlns:p14="http://schemas.microsoft.com/office/powerpoint/2010/main" val="3226370476"/>
       </p:ext>
     </p:extLst>
   </p:cSld>
@@ -4538,7 +4538,7 @@
           <p:cNvPr id="2" name="标题占位符 1">
             <a:extLst>
               <a:ext uri="{FF2B5EF4-FFF2-40B4-BE49-F238E27FC236}">
-                <a16:creationId xmlns:a16="http://schemas.microsoft.com/office/drawing/2014/main" id="{ABC193CA-3231-5FF6-BF20-1AF231CAEDAE}"/>
+                <a16:creationId xmlns:a16="http://schemas.microsoft.com/office/drawing/2014/main" id="{B00E0392-EAFE-1EB2-38D2-E1AB9CC7C9E7}"/>
               </a:ext>
             </a:extLst>
           </p:cNvPr>
@@ -4576,7 +4576,7 @@
           <p:cNvPr id="3" name="文本占位符 2">
             <a:extLst>
               <a:ext uri="{FF2B5EF4-FFF2-40B4-BE49-F238E27FC236}">
-                <a16:creationId xmlns:a16="http://schemas.microsoft.com/office/drawing/2014/main" id="{F3E808A2-5D7F-11DD-0F58-96B58A082D7F}"/>
+                <a16:creationId xmlns:a16="http://schemas.microsoft.com/office/drawing/2014/main" id="{07C7AB04-01D5-66E5-4FB1-82C90DD15E11}"/>
               </a:ext>
             </a:extLst>
           </p:cNvPr>
@@ -4643,7 +4643,7 @@
           <p:cNvPr id="4" name="日期占位符 3">
             <a:extLst>
               <a:ext uri="{FF2B5EF4-FFF2-40B4-BE49-F238E27FC236}">
-                <a16:creationId xmlns:a16="http://schemas.microsoft.com/office/drawing/2014/main" id="{E3F7CEEF-816D-3217-20DD-D81CD7870EB3}"/>
+                <a16:creationId xmlns:a16="http://schemas.microsoft.com/office/drawing/2014/main" id="{4BF86831-9980-374A-7FF7-65C6140A0361}"/>
               </a:ext>
             </a:extLst>
           </p:cNvPr>
@@ -4677,9 +4677,9 @@
             </a:lvl1pPr>
           </a:lstStyle>
           <a:p>
-            <a:fld id="{8B9FF69C-14BA-4B4B-ABF0-AACFDA9EC10F}" type="datetimeFigureOut">
+            <a:fld id="{6DADD656-4731-4A00-8EB8-E13ACEB57B07}" type="datetimeFigureOut">
               <a:rPr lang="zh-CN" altLang="en-US" smtClean="0"/>
-              <a:t>2026/5/13</a:t>
+              <a:t>2026/5/14</a:t>
             </a:fld>
             <a:endParaRPr lang="zh-CN" altLang="en-US"/>
           </a:p>
@@ -4690,7 +4690,7 @@
           <p:cNvPr id="5" name="页脚占位符 4">
             <a:extLst>
               <a:ext uri="{FF2B5EF4-FFF2-40B4-BE49-F238E27FC236}">
-                <a16:creationId xmlns:a16="http://schemas.microsoft.com/office/drawing/2014/main" id="{0C3FAE21-8793-3BFE-CBFD-7A28D59DE109}"/>
+                <a16:creationId xmlns:a16="http://schemas.microsoft.com/office/drawing/2014/main" id="{35F91B64-ADD9-A1AE-F918-4E765DB8F19D}"/>
               </a:ext>
             </a:extLst>
           </p:cNvPr>
@@ -4733,7 +4733,7 @@
           <p:cNvPr id="6" name="灯片编号占位符 5">
             <a:extLst>
               <a:ext uri="{FF2B5EF4-FFF2-40B4-BE49-F238E27FC236}">
-                <a16:creationId xmlns:a16="http://schemas.microsoft.com/office/drawing/2014/main" id="{66C09B58-D868-0CCC-3C27-2F3958A6907D}"/>
+                <a16:creationId xmlns:a16="http://schemas.microsoft.com/office/drawing/2014/main" id="{9D4123A3-98F8-DC97-1295-7D25C9D53EFE}"/>
               </a:ext>
             </a:extLst>
           </p:cNvPr>
@@ -4767,7 +4767,7 @@
             </a:lvl1pPr>
           </a:lstStyle>
           <a:p>
-            <a:fld id="{F8752B0D-6D65-4C56-8EE1-42B6C981AAFF}" type="slidenum">
+            <a:fld id="{85D3BD71-BD51-4A94-BFDA-01348E1EB70F}" type="slidenum">
               <a:rPr lang="zh-CN" altLang="en-US" smtClean="0"/>
               <a:t>‹#›</a:t>
             </a:fld>
@@ -4778,7 +4778,7 @@
     </p:spTree>
     <p:extLst>
       <p:ext uri="{BB962C8B-B14F-4D97-AF65-F5344CB8AC3E}">
-        <p14:creationId xmlns:p14="http://schemas.microsoft.com/office/powerpoint/2010/main" val="1082943481"/>
+        <p14:creationId xmlns:p14="http://schemas.microsoft.com/office/powerpoint/2010/main" val="1518178750"/>
       </p:ext>
     </p:extLst>
   </p:cSld>
@@ -5101,7 +5101,7 @@
           <p:cNvPr id="2" name="dark-bg">
             <a:extLst>
               <a:ext uri="{FF2B5EF4-FFF2-40B4-BE49-F238E27FC236}">
-                <a16:creationId xmlns:a16="http://schemas.microsoft.com/office/drawing/2014/main" id="{E81CD634-6978-03CD-D594-7E96EF91D519}"/>
+                <a16:creationId xmlns:a16="http://schemas.microsoft.com/office/drawing/2014/main" id="{84B7695C-C835-DF30-D420-A2E83A705C8F}"/>
               </a:ext>
             </a:extLst>
           </p:cNvPr>
@@ -5162,7 +5162,7 @@
           <p:cNvPr id="3" name="dark-panel">
             <a:extLst>
               <a:ext uri="{FF2B5EF4-FFF2-40B4-BE49-F238E27FC236}">
-                <a16:creationId xmlns:a16="http://schemas.microsoft.com/office/drawing/2014/main" id="{81624108-B22C-BBD5-6B9C-ACB9028F672B}"/>
+                <a16:creationId xmlns:a16="http://schemas.microsoft.com/office/drawing/2014/main" id="{7E86BEEF-5A7F-181F-4B8D-0016BD399C16}"/>
               </a:ext>
             </a:extLst>
           </p:cNvPr>
@@ -5225,7 +5225,7 @@
           <p:cNvPr id="4" name="grid-v-0">
             <a:extLst>
               <a:ext uri="{FF2B5EF4-FFF2-40B4-BE49-F238E27FC236}">
-                <a16:creationId xmlns:a16="http://schemas.microsoft.com/office/drawing/2014/main" id="{573A22DF-8D4F-8269-31C5-BB727DE8D49F}"/>
+                <a16:creationId xmlns:a16="http://schemas.microsoft.com/office/drawing/2014/main" id="{2F553449-D449-FBFB-B45C-725B81AE11FD}"/>
               </a:ext>
             </a:extLst>
           </p:cNvPr>
@@ -5266,7 +5266,7 @@
           <p:cNvPr id="5" name="grid-v-64">
             <a:extLst>
               <a:ext uri="{FF2B5EF4-FFF2-40B4-BE49-F238E27FC236}">
-                <a16:creationId xmlns:a16="http://schemas.microsoft.com/office/drawing/2014/main" id="{4FF4D7D5-4B78-DBCB-1F88-9E966890ACAE}"/>
+                <a16:creationId xmlns:a16="http://schemas.microsoft.com/office/drawing/2014/main" id="{6E961E7A-9122-13DB-2EB8-CE5A0EE6FF1C}"/>
               </a:ext>
             </a:extLst>
           </p:cNvPr>
@@ -5307,7 +5307,7 @@
           <p:cNvPr id="6" name="grid-v-128">
             <a:extLst>
               <a:ext uri="{FF2B5EF4-FFF2-40B4-BE49-F238E27FC236}">
-                <a16:creationId xmlns:a16="http://schemas.microsoft.com/office/drawing/2014/main" id="{11A7DBBF-7876-356A-C786-EF2B7FB25500}"/>
+                <a16:creationId xmlns:a16="http://schemas.microsoft.com/office/drawing/2014/main" id="{B204651C-26BB-6B96-D70C-0B4195D209E6}"/>
               </a:ext>
             </a:extLst>
           </p:cNvPr>
@@ -5348,7 +5348,7 @@
           <p:cNvPr id="7" name="grid-v-192">
             <a:extLst>
               <a:ext uri="{FF2B5EF4-FFF2-40B4-BE49-F238E27FC236}">
-                <a16:creationId xmlns:a16="http://schemas.microsoft.com/office/drawing/2014/main" id="{4E861B53-A970-344F-11BE-DCFF89F59A76}"/>
+                <a16:creationId xmlns:a16="http://schemas.microsoft.com/office/drawing/2014/main" id="{1C57103C-879C-954E-3FD5-A1ADED9BBB9A}"/>
               </a:ext>
             </a:extLst>
           </p:cNvPr>
@@ -5389,7 +5389,7 @@
           <p:cNvPr id="8" name="grid-v-256">
             <a:extLst>
               <a:ext uri="{FF2B5EF4-FFF2-40B4-BE49-F238E27FC236}">
-                <a16:creationId xmlns:a16="http://schemas.microsoft.com/office/drawing/2014/main" id="{9BA93E34-05B1-85C1-FF73-B3CA07D04BF3}"/>
+                <a16:creationId xmlns:a16="http://schemas.microsoft.com/office/drawing/2014/main" id="{F25E1F29-5779-1863-16F6-58CDCED90D8B}"/>
               </a:ext>
             </a:extLst>
           </p:cNvPr>
@@ -5430,7 +5430,7 @@
           <p:cNvPr id="9" name="grid-v-320">
             <a:extLst>
               <a:ext uri="{FF2B5EF4-FFF2-40B4-BE49-F238E27FC236}">
-                <a16:creationId xmlns:a16="http://schemas.microsoft.com/office/drawing/2014/main" id="{C40F0E5C-1FA9-0529-08F9-8EFCFC5A238F}"/>
+                <a16:creationId xmlns:a16="http://schemas.microsoft.com/office/drawing/2014/main" id="{A74C8A74-2661-1CB1-1992-A74596D40F57}"/>
               </a:ext>
             </a:extLst>
           </p:cNvPr>
@@ -5471,7 +5471,7 @@
           <p:cNvPr id="10" name="grid-v-384">
             <a:extLst>
               <a:ext uri="{FF2B5EF4-FFF2-40B4-BE49-F238E27FC236}">
-                <a16:creationId xmlns:a16="http://schemas.microsoft.com/office/drawing/2014/main" id="{BC1FDA6E-E785-06DB-44A7-AB77ED6EE342}"/>
+                <a16:creationId xmlns:a16="http://schemas.microsoft.com/office/drawing/2014/main" id="{63935AED-666F-FCB2-024B-15E69D1C66D9}"/>
               </a:ext>
             </a:extLst>
           </p:cNvPr>
@@ -5512,7 +5512,7 @@
           <p:cNvPr id="11" name="grid-v-448">
             <a:extLst>
               <a:ext uri="{FF2B5EF4-FFF2-40B4-BE49-F238E27FC236}">
-                <a16:creationId xmlns:a16="http://schemas.microsoft.com/office/drawing/2014/main" id="{B4776592-B33D-36CF-2C0C-8CC9960C5D1A}"/>
+                <a16:creationId xmlns:a16="http://schemas.microsoft.com/office/drawing/2014/main" id="{7D9DB72C-1E77-D792-E95E-E0FA5DB7F48B}"/>
               </a:ext>
             </a:extLst>
           </p:cNvPr>
@@ -5553,7 +5553,7 @@
           <p:cNvPr id="12" name="grid-v-512">
             <a:extLst>
               <a:ext uri="{FF2B5EF4-FFF2-40B4-BE49-F238E27FC236}">
-                <a16:creationId xmlns:a16="http://schemas.microsoft.com/office/drawing/2014/main" id="{A9320CF2-4B0A-28AC-EBBB-941E234ACCE9}"/>
+                <a16:creationId xmlns:a16="http://schemas.microsoft.com/office/drawing/2014/main" id="{85670AD4-7024-02F6-C5CD-6048AA49873A}"/>
               </a:ext>
             </a:extLst>
           </p:cNvPr>
@@ -5594,7 +5594,7 @@
           <p:cNvPr id="13" name="grid-v-576">
             <a:extLst>
               <a:ext uri="{FF2B5EF4-FFF2-40B4-BE49-F238E27FC236}">
-                <a16:creationId xmlns:a16="http://schemas.microsoft.com/office/drawing/2014/main" id="{F153FF48-5476-A5AF-42A9-C057BC94FCB7}"/>
+                <a16:creationId xmlns:a16="http://schemas.microsoft.com/office/drawing/2014/main" id="{C2983D0E-007E-250A-ADA3-D0C291E7CDA3}"/>
               </a:ext>
             </a:extLst>
           </p:cNvPr>
@@ -5635,7 +5635,7 @@
           <p:cNvPr id="14" name="grid-v-640">
             <a:extLst>
               <a:ext uri="{FF2B5EF4-FFF2-40B4-BE49-F238E27FC236}">
-                <a16:creationId xmlns:a16="http://schemas.microsoft.com/office/drawing/2014/main" id="{99C77D7D-71E9-3B21-6C4C-351360ECDCFF}"/>
+                <a16:creationId xmlns:a16="http://schemas.microsoft.com/office/drawing/2014/main" id="{CF55C992-35AD-F092-75C0-DF643D77E8B6}"/>
               </a:ext>
             </a:extLst>
           </p:cNvPr>
@@ -5676,7 +5676,7 @@
           <p:cNvPr id="15" name="grid-v-704">
             <a:extLst>
               <a:ext uri="{FF2B5EF4-FFF2-40B4-BE49-F238E27FC236}">
-                <a16:creationId xmlns:a16="http://schemas.microsoft.com/office/drawing/2014/main" id="{EAF1190F-4AC8-EBF4-43D5-F2FC24FC62B6}"/>
+                <a16:creationId xmlns:a16="http://schemas.microsoft.com/office/drawing/2014/main" id="{AAF16914-4E6C-59A1-53A9-6A7AFEB1856A}"/>
               </a:ext>
             </a:extLst>
           </p:cNvPr>
@@ -5717,7 +5717,7 @@
           <p:cNvPr id="16" name="grid-v-768">
             <a:extLst>
               <a:ext uri="{FF2B5EF4-FFF2-40B4-BE49-F238E27FC236}">
-                <a16:creationId xmlns:a16="http://schemas.microsoft.com/office/drawing/2014/main" id="{8B40F9B3-E370-01B2-B540-CAC933C726F4}"/>
+                <a16:creationId xmlns:a16="http://schemas.microsoft.com/office/drawing/2014/main" id="{55401DB9-1FC5-FA61-E206-6626CCEE7EB3}"/>
               </a:ext>
             </a:extLst>
           </p:cNvPr>
@@ -5758,7 +5758,7 @@
           <p:cNvPr id="17" name="grid-v-832">
             <a:extLst>
               <a:ext uri="{FF2B5EF4-FFF2-40B4-BE49-F238E27FC236}">
-                <a16:creationId xmlns:a16="http://schemas.microsoft.com/office/drawing/2014/main" id="{A57E4889-659C-DD09-616A-07DCD2CD8215}"/>
+                <a16:creationId xmlns:a16="http://schemas.microsoft.com/office/drawing/2014/main" id="{F19CEC85-E0D0-D011-D4E2-36AE896B9187}"/>
               </a:ext>
             </a:extLst>
           </p:cNvPr>
@@ -5799,7 +5799,7 @@
           <p:cNvPr id="18" name="grid-v-896">
             <a:extLst>
               <a:ext uri="{FF2B5EF4-FFF2-40B4-BE49-F238E27FC236}">
-                <a16:creationId xmlns:a16="http://schemas.microsoft.com/office/drawing/2014/main" id="{607BEBA8-F7C5-21CF-4552-9A3EA93AAA80}"/>
+                <a16:creationId xmlns:a16="http://schemas.microsoft.com/office/drawing/2014/main" id="{283197B0-90A9-1A94-7C9C-3A0326586EF4}"/>
               </a:ext>
             </a:extLst>
           </p:cNvPr>
@@ -5840,7 +5840,7 @@
           <p:cNvPr id="19" name="grid-v-960">
             <a:extLst>
               <a:ext uri="{FF2B5EF4-FFF2-40B4-BE49-F238E27FC236}">
-                <a16:creationId xmlns:a16="http://schemas.microsoft.com/office/drawing/2014/main" id="{A72DE507-F750-D638-5200-DC0F67F87DCA}"/>
+                <a16:creationId xmlns:a16="http://schemas.microsoft.com/office/drawing/2014/main" id="{39F26505-6223-25A2-7C15-6AEA2B547ABB}"/>
               </a:ext>
             </a:extLst>
           </p:cNvPr>
@@ -5881,7 +5881,7 @@
           <p:cNvPr id="20" name="grid-h-0">
             <a:extLst>
               <a:ext uri="{FF2B5EF4-FFF2-40B4-BE49-F238E27FC236}">
-                <a16:creationId xmlns:a16="http://schemas.microsoft.com/office/drawing/2014/main" id="{EE0E488B-BEAB-DC0D-28A4-6E0612B1AF5C}"/>
+                <a16:creationId xmlns:a16="http://schemas.microsoft.com/office/drawing/2014/main" id="{FE7B0D78-511D-9FB9-ED53-114D5F77D7F7}"/>
               </a:ext>
             </a:extLst>
           </p:cNvPr>
@@ -5922,7 +5922,7 @@
           <p:cNvPr id="21" name="grid-h-64">
             <a:extLst>
               <a:ext uri="{FF2B5EF4-FFF2-40B4-BE49-F238E27FC236}">
-                <a16:creationId xmlns:a16="http://schemas.microsoft.com/office/drawing/2014/main" id="{D887A390-374E-9B29-EE4F-CE79D6A84FED}"/>
+                <a16:creationId xmlns:a16="http://schemas.microsoft.com/office/drawing/2014/main" id="{9EB60434-311B-2705-A2E6-BB267FD0E4E9}"/>
               </a:ext>
             </a:extLst>
           </p:cNvPr>
@@ -5963,7 +5963,7 @@
           <p:cNvPr id="22" name="grid-h-128">
             <a:extLst>
               <a:ext uri="{FF2B5EF4-FFF2-40B4-BE49-F238E27FC236}">
-                <a16:creationId xmlns:a16="http://schemas.microsoft.com/office/drawing/2014/main" id="{29EB8320-21D3-06AD-15AE-CE97FCBA4588}"/>
+                <a16:creationId xmlns:a16="http://schemas.microsoft.com/office/drawing/2014/main" id="{BF3872AD-2517-8A1F-E32D-E4CFFBB1ADD2}"/>
               </a:ext>
             </a:extLst>
           </p:cNvPr>
@@ -6004,7 +6004,7 @@
           <p:cNvPr id="23" name="grid-h-192">
             <a:extLst>
               <a:ext uri="{FF2B5EF4-FFF2-40B4-BE49-F238E27FC236}">
-                <a16:creationId xmlns:a16="http://schemas.microsoft.com/office/drawing/2014/main" id="{31A4EA1B-CAB9-3C4D-7293-701765BE9240}"/>
+                <a16:creationId xmlns:a16="http://schemas.microsoft.com/office/drawing/2014/main" id="{AEEBD4FA-C2FC-863A-D1F0-DBD6EBE7FED9}"/>
               </a:ext>
             </a:extLst>
           </p:cNvPr>
@@ -6045,7 +6045,7 @@
           <p:cNvPr id="24" name="grid-h-256">
             <a:extLst>
               <a:ext uri="{FF2B5EF4-FFF2-40B4-BE49-F238E27FC236}">
-                <a16:creationId xmlns:a16="http://schemas.microsoft.com/office/drawing/2014/main" id="{819C626F-721E-9992-67A4-4FC9DE32F4B5}"/>
+                <a16:creationId xmlns:a16="http://schemas.microsoft.com/office/drawing/2014/main" id="{BD4355F4-8140-4776-6DD4-835FEBA89677}"/>
               </a:ext>
             </a:extLst>
           </p:cNvPr>
@@ -6086,7 +6086,7 @@
           <p:cNvPr id="25" name="grid-h-320">
             <a:extLst>
               <a:ext uri="{FF2B5EF4-FFF2-40B4-BE49-F238E27FC236}">
-                <a16:creationId xmlns:a16="http://schemas.microsoft.com/office/drawing/2014/main" id="{8055CD00-EEAC-E37A-7F51-DFDED7013CD9}"/>
+                <a16:creationId xmlns:a16="http://schemas.microsoft.com/office/drawing/2014/main" id="{96BBBEC7-7CB0-9595-A1D5-186FC26DFD3E}"/>
               </a:ext>
             </a:extLst>
           </p:cNvPr>
@@ -6127,7 +6127,7 @@
           <p:cNvPr id="26" name="grid-h-384">
             <a:extLst>
               <a:ext uri="{FF2B5EF4-FFF2-40B4-BE49-F238E27FC236}">
-                <a16:creationId xmlns:a16="http://schemas.microsoft.com/office/drawing/2014/main" id="{700B0811-A437-B50D-E801-6C1A17E49C7E}"/>
+                <a16:creationId xmlns:a16="http://schemas.microsoft.com/office/drawing/2014/main" id="{4F6F8591-4E28-B2C0-3EB9-412F0DF95799}"/>
               </a:ext>
             </a:extLst>
           </p:cNvPr>
@@ -6168,7 +6168,7 @@
           <p:cNvPr id="27" name="grid-h-448">
             <a:extLst>
               <a:ext uri="{FF2B5EF4-FFF2-40B4-BE49-F238E27FC236}">
-                <a16:creationId xmlns:a16="http://schemas.microsoft.com/office/drawing/2014/main" id="{34BBF93D-182B-84E9-677A-8BAECBA905E5}"/>
+                <a16:creationId xmlns:a16="http://schemas.microsoft.com/office/drawing/2014/main" id="{6BF64B5A-8E71-2927-1ED3-41CD3F1C66BA}"/>
               </a:ext>
             </a:extLst>
           </p:cNvPr>
@@ -6209,7 +6209,7 @@
           <p:cNvPr id="28" name="grid-h-512">
             <a:extLst>
               <a:ext uri="{FF2B5EF4-FFF2-40B4-BE49-F238E27FC236}">
-                <a16:creationId xmlns:a16="http://schemas.microsoft.com/office/drawing/2014/main" id="{16052E37-2AEA-22FF-F174-50854FB7706B}"/>
+                <a16:creationId xmlns:a16="http://schemas.microsoft.com/office/drawing/2014/main" id="{0101EE8B-6FB7-7A28-1519-8B54A583FCF2}"/>
               </a:ext>
             </a:extLst>
           </p:cNvPr>
@@ -6250,7 +6250,7 @@
           <p:cNvPr id="29" name="page-num">
             <a:extLst>
               <a:ext uri="{FF2B5EF4-FFF2-40B4-BE49-F238E27FC236}">
-                <a16:creationId xmlns:a16="http://schemas.microsoft.com/office/drawing/2014/main" id="{DF8CE95B-07F9-D5B8-DECE-B3F0A091D6B4}"/>
+                <a16:creationId xmlns:a16="http://schemas.microsoft.com/office/drawing/2014/main" id="{F7E3D722-6413-D4D0-A7D6-3E3455BA8A7D}"/>
               </a:ext>
             </a:extLst>
           </p:cNvPr>
@@ -6296,7 +6296,7 @@
           <p:cNvPr id="30" name="section-label">
             <a:extLst>
               <a:ext uri="{FF2B5EF4-FFF2-40B4-BE49-F238E27FC236}">
-                <a16:creationId xmlns:a16="http://schemas.microsoft.com/office/drawing/2014/main" id="{DE73C8FD-E658-2F42-7F2D-3B266311EE29}"/>
+                <a16:creationId xmlns:a16="http://schemas.microsoft.com/office/drawing/2014/main" id="{387E09FE-5E26-3151-D3BC-CAFB613F8411}"/>
               </a:ext>
             </a:extLst>
           </p:cNvPr>
@@ -6342,7 +6342,7 @@
           <p:cNvPr id="31" name="title">
             <a:extLst>
               <a:ext uri="{FF2B5EF4-FFF2-40B4-BE49-F238E27FC236}">
-                <a16:creationId xmlns:a16="http://schemas.microsoft.com/office/drawing/2014/main" id="{88FCFC02-779F-6B49-E4C2-DB105BBA8306}"/>
+                <a16:creationId xmlns:a16="http://schemas.microsoft.com/office/drawing/2014/main" id="{C6FB28AD-D3D7-763A-31A3-F660D0B78BFC}"/>
               </a:ext>
             </a:extLst>
           </p:cNvPr>
@@ -6388,7 +6388,7 @@
           <p:cNvPr id="32" name="subtitle">
             <a:extLst>
               <a:ext uri="{FF2B5EF4-FFF2-40B4-BE49-F238E27FC236}">
-                <a16:creationId xmlns:a16="http://schemas.microsoft.com/office/drawing/2014/main" id="{3EA90F1E-51DE-83EA-6836-22142B097166}"/>
+                <a16:creationId xmlns:a16="http://schemas.microsoft.com/office/drawing/2014/main" id="{0222F254-6ECD-B3BC-9BC2-C4C4601ABC6D}"/>
               </a:ext>
             </a:extLst>
           </p:cNvPr>
@@ -6434,7 +6434,7 @@
           <p:cNvPr id="33" name="cover-rule">
             <a:extLst>
               <a:ext uri="{FF2B5EF4-FFF2-40B4-BE49-F238E27FC236}">
-                <a16:creationId xmlns:a16="http://schemas.microsoft.com/office/drawing/2014/main" id="{A843235D-D09D-723A-5A9E-AB2A93CD94D2}"/>
+                <a16:creationId xmlns:a16="http://schemas.microsoft.com/office/drawing/2014/main" id="{251F75B7-97F9-2730-BBB9-780E3A8F2D4D}"/>
               </a:ext>
             </a:extLst>
           </p:cNvPr>
@@ -6475,7 +6475,7 @@
           <p:cNvPr id="34" name="thesis-box">
             <a:extLst>
               <a:ext uri="{FF2B5EF4-FFF2-40B4-BE49-F238E27FC236}">
-                <a16:creationId xmlns:a16="http://schemas.microsoft.com/office/drawing/2014/main" id="{D30A8D7C-408B-B5D8-ABFB-21109CB7E8F6}"/>
+                <a16:creationId xmlns:a16="http://schemas.microsoft.com/office/drawing/2014/main" id="{5F6A71E0-F486-6828-EA8A-793977B7A1AA}"/>
               </a:ext>
             </a:extLst>
           </p:cNvPr>
@@ -6529,7 +6529,7 @@
           <p:cNvPr id="35" name="thesis-k">
             <a:extLst>
               <a:ext uri="{FF2B5EF4-FFF2-40B4-BE49-F238E27FC236}">
-                <a16:creationId xmlns:a16="http://schemas.microsoft.com/office/drawing/2014/main" id="{671F6952-FFEA-C668-25B0-846E3BE062AD}"/>
+                <a16:creationId xmlns:a16="http://schemas.microsoft.com/office/drawing/2014/main" id="{632D624A-7A1E-DCEE-0A94-6C8C88525D41}"/>
               </a:ext>
             </a:extLst>
           </p:cNvPr>
@@ -6575,7 +6575,7 @@
           <p:cNvPr id="36" name="thesis">
             <a:extLst>
               <a:ext uri="{FF2B5EF4-FFF2-40B4-BE49-F238E27FC236}">
-                <a16:creationId xmlns:a16="http://schemas.microsoft.com/office/drawing/2014/main" id="{59289072-F20A-601F-143F-3D4D3138AE1C}"/>
+                <a16:creationId xmlns:a16="http://schemas.microsoft.com/office/drawing/2014/main" id="{37F01708-D214-F414-CDE2-E4992119FCE6}"/>
               </a:ext>
             </a:extLst>
           </p:cNvPr>
@@ -6622,7 +6622,7 @@
             <a:hlinkClick r:id="rId3"/>
             <a:extLst>
               <a:ext uri="{FF2B5EF4-FFF2-40B4-BE49-F238E27FC236}">
-                <a16:creationId xmlns:a16="http://schemas.microsoft.com/office/drawing/2014/main" id="{2CEC0A3F-F58E-5762-313A-8E77E1F0680F}"/>
+                <a16:creationId xmlns:a16="http://schemas.microsoft.com/office/drawing/2014/main" id="{344BBF56-5747-4B6C-24C4-A4F347B2A137}"/>
               </a:ext>
             </a:extLst>
           </p:cNvPr>
@@ -6658,7 +6658,7 @@
           <p:cNvPr id="39" name="qr-caption-bg">
             <a:extLst>
               <a:ext uri="{FF2B5EF4-FFF2-40B4-BE49-F238E27FC236}">
-                <a16:creationId xmlns:a16="http://schemas.microsoft.com/office/drawing/2014/main" id="{4B0B13DB-2E70-B095-D4CE-8FA7AB3226FA}"/>
+                <a16:creationId xmlns:a16="http://schemas.microsoft.com/office/drawing/2014/main" id="{70753880-FF5F-D2CF-1134-BC6A0ED06EEA}"/>
               </a:ext>
             </a:extLst>
           </p:cNvPr>
@@ -6712,7 +6712,7 @@
           <p:cNvPr id="40" name="qr-cap1">
             <a:extLst>
               <a:ext uri="{FF2B5EF4-FFF2-40B4-BE49-F238E27FC236}">
-                <a16:creationId xmlns:a16="http://schemas.microsoft.com/office/drawing/2014/main" id="{3C1487B4-4C55-8435-F341-1F5EB423FB6B}"/>
+                <a16:creationId xmlns:a16="http://schemas.microsoft.com/office/drawing/2014/main" id="{D7C24AC8-E3EE-720A-65DE-BD64B2E1C93A}"/>
               </a:ext>
             </a:extLst>
           </p:cNvPr>
@@ -6758,7 +6758,7 @@
           <p:cNvPr id="41" name="qr-cap2">
             <a:extLst>
               <a:ext uri="{FF2B5EF4-FFF2-40B4-BE49-F238E27FC236}">
-                <a16:creationId xmlns:a16="http://schemas.microsoft.com/office/drawing/2014/main" id="{D94F44D2-E345-D94B-8400-AF4B63BAA47B}"/>
+                <a16:creationId xmlns:a16="http://schemas.microsoft.com/office/drawing/2014/main" id="{3B7F99B9-2367-B308-33C7-04D3CC123CB1}"/>
               </a:ext>
             </a:extLst>
           </p:cNvPr>
@@ -6804,7 +6804,7 @@
           <p:cNvPr id="42" name="name">
             <a:extLst>
               <a:ext uri="{FF2B5EF4-FFF2-40B4-BE49-F238E27FC236}">
-                <a16:creationId xmlns:a16="http://schemas.microsoft.com/office/drawing/2014/main" id="{4291BD58-C9A6-5F94-5D27-E15A02522585}"/>
+                <a16:creationId xmlns:a16="http://schemas.microsoft.com/office/drawing/2014/main" id="{2B3EBCDC-34B5-8B45-2B67-3991B751D48D}"/>
               </a:ext>
             </a:extLst>
           </p:cNvPr>
@@ -6850,7 +6850,7 @@
           <p:cNvPr id="43" name="sup">
             <a:extLst>
               <a:ext uri="{FF2B5EF4-FFF2-40B4-BE49-F238E27FC236}">
-                <a16:creationId xmlns:a16="http://schemas.microsoft.com/office/drawing/2014/main" id="{5560C5FE-181D-BFC8-E6CD-E5E1AFB68DC9}"/>
+                <a16:creationId xmlns:a16="http://schemas.microsoft.com/office/drawing/2014/main" id="{4C7A70B1-5657-8BB2-393D-E6A33E3E90AB}"/>
               </a:ext>
             </a:extLst>
           </p:cNvPr>
@@ -6896,7 +6896,7 @@
           <p:cNvPr id="45" name="图片 44">
             <a:extLst>
               <a:ext uri="{FF2B5EF4-FFF2-40B4-BE49-F238E27FC236}">
-                <a16:creationId xmlns:a16="http://schemas.microsoft.com/office/drawing/2014/main" id="{CA681714-B6EB-E099-5F42-3CECE54A3560}"/>
+                <a16:creationId xmlns:a16="http://schemas.microsoft.com/office/drawing/2014/main" id="{868A5B32-5D23-1A92-D4A3-A7326349F721}"/>
               </a:ext>
             </a:extLst>
           </p:cNvPr>
@@ -6930,7 +6930,7 @@
     </p:spTree>
     <p:extLst>
       <p:ext uri="{BB962C8B-B14F-4D97-AF65-F5344CB8AC3E}">
-        <p14:creationId xmlns:p14="http://schemas.microsoft.com/office/powerpoint/2010/main" val="1729401161"/>
+        <p14:creationId xmlns:p14="http://schemas.microsoft.com/office/powerpoint/2010/main" val="1467233523"/>
       </p:ext>
     </p:extLst>
   </p:cSld>
@@ -6974,7 +6974,7 @@
           <p:cNvPr id="2" name="dark-bg">
             <a:extLst>
               <a:ext uri="{FF2B5EF4-FFF2-40B4-BE49-F238E27FC236}">
-                <a16:creationId xmlns:a16="http://schemas.microsoft.com/office/drawing/2014/main" id="{3DE192BD-0715-3FE4-6D6D-773DBF4C410E}"/>
+                <a16:creationId xmlns:a16="http://schemas.microsoft.com/office/drawing/2014/main" id="{61B09E7C-B94A-39D1-C3D3-74EC8DEAE388}"/>
               </a:ext>
             </a:extLst>
           </p:cNvPr>
@@ -7035,7 +7035,7 @@
           <p:cNvPr id="3" name="dark-panel">
             <a:extLst>
               <a:ext uri="{FF2B5EF4-FFF2-40B4-BE49-F238E27FC236}">
-                <a16:creationId xmlns:a16="http://schemas.microsoft.com/office/drawing/2014/main" id="{6644C7E9-5DC2-8B53-D546-22AF30C9E6D0}"/>
+                <a16:creationId xmlns:a16="http://schemas.microsoft.com/office/drawing/2014/main" id="{E299B6B5-3C93-2567-2BA3-8955B804DA10}"/>
               </a:ext>
             </a:extLst>
           </p:cNvPr>
@@ -7098,7 +7098,7 @@
           <p:cNvPr id="4" name="grid-v-0">
             <a:extLst>
               <a:ext uri="{FF2B5EF4-FFF2-40B4-BE49-F238E27FC236}">
-                <a16:creationId xmlns:a16="http://schemas.microsoft.com/office/drawing/2014/main" id="{D39C50AD-31FE-0C6A-9909-B01F0F051F76}"/>
+                <a16:creationId xmlns:a16="http://schemas.microsoft.com/office/drawing/2014/main" id="{4EEDEA6B-820C-A24D-ECED-000B2B283575}"/>
               </a:ext>
             </a:extLst>
           </p:cNvPr>
@@ -7139,7 +7139,7 @@
           <p:cNvPr id="5" name="grid-v-64">
             <a:extLst>
               <a:ext uri="{FF2B5EF4-FFF2-40B4-BE49-F238E27FC236}">
-                <a16:creationId xmlns:a16="http://schemas.microsoft.com/office/drawing/2014/main" id="{9AD34FBA-4E5B-68E0-FF43-3B5DA7458372}"/>
+                <a16:creationId xmlns:a16="http://schemas.microsoft.com/office/drawing/2014/main" id="{AD50C712-378C-2A8A-320E-87550EA47474}"/>
               </a:ext>
             </a:extLst>
           </p:cNvPr>
@@ -7180,7 +7180,7 @@
           <p:cNvPr id="6" name="grid-v-128">
             <a:extLst>
               <a:ext uri="{FF2B5EF4-FFF2-40B4-BE49-F238E27FC236}">
-                <a16:creationId xmlns:a16="http://schemas.microsoft.com/office/drawing/2014/main" id="{CD24DCF2-7D78-26D3-9BE3-465B6A6076A1}"/>
+                <a16:creationId xmlns:a16="http://schemas.microsoft.com/office/drawing/2014/main" id="{3BA7CC75-FF82-3179-3270-AF5704520CB8}"/>
               </a:ext>
             </a:extLst>
           </p:cNvPr>
@@ -7221,7 +7221,7 @@
           <p:cNvPr id="7" name="grid-v-192">
             <a:extLst>
               <a:ext uri="{FF2B5EF4-FFF2-40B4-BE49-F238E27FC236}">
-                <a16:creationId xmlns:a16="http://schemas.microsoft.com/office/drawing/2014/main" id="{20EBD46F-5D3C-EF3F-6EA8-3841C7DAA3AE}"/>
+                <a16:creationId xmlns:a16="http://schemas.microsoft.com/office/drawing/2014/main" id="{4E196D0A-7245-2F7F-D8A5-AD832BB485A7}"/>
               </a:ext>
             </a:extLst>
           </p:cNvPr>
@@ -7262,7 +7262,7 @@
           <p:cNvPr id="8" name="grid-v-256">
             <a:extLst>
               <a:ext uri="{FF2B5EF4-FFF2-40B4-BE49-F238E27FC236}">
-                <a16:creationId xmlns:a16="http://schemas.microsoft.com/office/drawing/2014/main" id="{76B7781F-37FB-517F-5F54-2168135EE532}"/>
+                <a16:creationId xmlns:a16="http://schemas.microsoft.com/office/drawing/2014/main" id="{84310148-5F64-481A-D156-150B893D015D}"/>
               </a:ext>
             </a:extLst>
           </p:cNvPr>
@@ -7303,7 +7303,7 @@
           <p:cNvPr id="9" name="grid-v-320">
             <a:extLst>
               <a:ext uri="{FF2B5EF4-FFF2-40B4-BE49-F238E27FC236}">
-                <a16:creationId xmlns:a16="http://schemas.microsoft.com/office/drawing/2014/main" id="{4BAEE7F1-362A-5FC5-F0B5-7ACF44C68BDA}"/>
+                <a16:creationId xmlns:a16="http://schemas.microsoft.com/office/drawing/2014/main" id="{C473FACA-3EE4-5B4F-F26C-EAAD0E0E1DC6}"/>
               </a:ext>
             </a:extLst>
           </p:cNvPr>
@@ -7344,7 +7344,7 @@
           <p:cNvPr id="10" name="grid-v-384">
             <a:extLst>
               <a:ext uri="{FF2B5EF4-FFF2-40B4-BE49-F238E27FC236}">
-                <a16:creationId xmlns:a16="http://schemas.microsoft.com/office/drawing/2014/main" id="{0E74539E-4A0A-564D-C346-5B663275C5DB}"/>
+                <a16:creationId xmlns:a16="http://schemas.microsoft.com/office/drawing/2014/main" id="{C241A5A5-A320-1762-000B-80562CA9A4EB}"/>
               </a:ext>
             </a:extLst>
           </p:cNvPr>
@@ -7385,7 +7385,7 @@
           <p:cNvPr id="11" name="grid-v-448">
             <a:extLst>
               <a:ext uri="{FF2B5EF4-FFF2-40B4-BE49-F238E27FC236}">
-                <a16:creationId xmlns:a16="http://schemas.microsoft.com/office/drawing/2014/main" id="{B8565E1E-8422-9059-B583-30C939793BE6}"/>
+                <a16:creationId xmlns:a16="http://schemas.microsoft.com/office/drawing/2014/main" id="{9D4C3903-3508-05E7-0991-5039C34A45D6}"/>
               </a:ext>
             </a:extLst>
           </p:cNvPr>
@@ -7426,7 +7426,7 @@
           <p:cNvPr id="12" name="grid-v-512">
             <a:extLst>
               <a:ext uri="{FF2B5EF4-FFF2-40B4-BE49-F238E27FC236}">
-                <a16:creationId xmlns:a16="http://schemas.microsoft.com/office/drawing/2014/main" id="{A9927399-B30B-4345-3AE7-381EA07F7059}"/>
+                <a16:creationId xmlns:a16="http://schemas.microsoft.com/office/drawing/2014/main" id="{F1D0542B-069D-F785-DC77-550E3DE0F9B3}"/>
               </a:ext>
             </a:extLst>
           </p:cNvPr>
@@ -7467,7 +7467,7 @@
           <p:cNvPr id="13" name="grid-v-576">
             <a:extLst>
               <a:ext uri="{FF2B5EF4-FFF2-40B4-BE49-F238E27FC236}">
-                <a16:creationId xmlns:a16="http://schemas.microsoft.com/office/drawing/2014/main" id="{D6125719-B86B-5AC0-D10E-67487A0CE338}"/>
+                <a16:creationId xmlns:a16="http://schemas.microsoft.com/office/drawing/2014/main" id="{9AC02922-F1A2-BF6A-4891-05B199E5A542}"/>
               </a:ext>
             </a:extLst>
           </p:cNvPr>
@@ -7508,7 +7508,7 @@
           <p:cNvPr id="14" name="grid-v-640">
             <a:extLst>
               <a:ext uri="{FF2B5EF4-FFF2-40B4-BE49-F238E27FC236}">
-                <a16:creationId xmlns:a16="http://schemas.microsoft.com/office/drawing/2014/main" id="{0023BF4C-2288-5503-99BD-0C59657DDDC4}"/>
+                <a16:creationId xmlns:a16="http://schemas.microsoft.com/office/drawing/2014/main" id="{036BA9B2-E856-3D25-ED29-9B8730984A8E}"/>
               </a:ext>
             </a:extLst>
           </p:cNvPr>
@@ -7549,7 +7549,7 @@
           <p:cNvPr id="15" name="grid-v-704">
             <a:extLst>
               <a:ext uri="{FF2B5EF4-FFF2-40B4-BE49-F238E27FC236}">
-                <a16:creationId xmlns:a16="http://schemas.microsoft.com/office/drawing/2014/main" id="{954C131A-3451-4C32-6A6C-51883C2AC19B}"/>
+                <a16:creationId xmlns:a16="http://schemas.microsoft.com/office/drawing/2014/main" id="{F314B5C9-D1CF-82D2-A245-8582AE805940}"/>
               </a:ext>
             </a:extLst>
           </p:cNvPr>
@@ -7590,7 +7590,7 @@
           <p:cNvPr id="16" name="grid-v-768">
             <a:extLst>
               <a:ext uri="{FF2B5EF4-FFF2-40B4-BE49-F238E27FC236}">
-                <a16:creationId xmlns:a16="http://schemas.microsoft.com/office/drawing/2014/main" id="{68DDDA07-796F-7421-8021-76B369D94FE5}"/>
+                <a16:creationId xmlns:a16="http://schemas.microsoft.com/office/drawing/2014/main" id="{3D8E8167-D3BB-D07E-F458-C87E79DDE3AB}"/>
               </a:ext>
             </a:extLst>
           </p:cNvPr>
@@ -7631,7 +7631,7 @@
           <p:cNvPr id="17" name="grid-v-832">
             <a:extLst>
               <a:ext uri="{FF2B5EF4-FFF2-40B4-BE49-F238E27FC236}">
-                <a16:creationId xmlns:a16="http://schemas.microsoft.com/office/drawing/2014/main" id="{9EA9A4EC-589B-47DF-8372-BAE82DF5B31D}"/>
+                <a16:creationId xmlns:a16="http://schemas.microsoft.com/office/drawing/2014/main" id="{51CDE924-539E-DC8B-8E6B-37C70ED55329}"/>
               </a:ext>
             </a:extLst>
           </p:cNvPr>
@@ -7672,7 +7672,7 @@
           <p:cNvPr id="18" name="grid-v-896">
             <a:extLst>
               <a:ext uri="{FF2B5EF4-FFF2-40B4-BE49-F238E27FC236}">
-                <a16:creationId xmlns:a16="http://schemas.microsoft.com/office/drawing/2014/main" id="{60045718-982C-530B-A648-8E99958F5345}"/>
+                <a16:creationId xmlns:a16="http://schemas.microsoft.com/office/drawing/2014/main" id="{EE40D340-D65A-7EA2-46B9-E9AD6780C586}"/>
               </a:ext>
             </a:extLst>
           </p:cNvPr>
@@ -7713,7 +7713,7 @@
           <p:cNvPr id="19" name="grid-v-960">
             <a:extLst>
               <a:ext uri="{FF2B5EF4-FFF2-40B4-BE49-F238E27FC236}">
-                <a16:creationId xmlns:a16="http://schemas.microsoft.com/office/drawing/2014/main" id="{5B681E9D-C0BE-C2BB-02CB-07DF298FD1FE}"/>
+                <a16:creationId xmlns:a16="http://schemas.microsoft.com/office/drawing/2014/main" id="{71E67BE8-829E-FFFE-708E-F02463D2248B}"/>
               </a:ext>
             </a:extLst>
           </p:cNvPr>
@@ -7754,7 +7754,7 @@
           <p:cNvPr id="20" name="grid-h-0">
             <a:extLst>
               <a:ext uri="{FF2B5EF4-FFF2-40B4-BE49-F238E27FC236}">
-                <a16:creationId xmlns:a16="http://schemas.microsoft.com/office/drawing/2014/main" id="{7F0171F2-B632-6092-BDE5-2633547D9F54}"/>
+                <a16:creationId xmlns:a16="http://schemas.microsoft.com/office/drawing/2014/main" id="{15C2E582-2281-4A57-52F7-7336FA16DD38}"/>
               </a:ext>
             </a:extLst>
           </p:cNvPr>
@@ -7795,7 +7795,7 @@
           <p:cNvPr id="21" name="grid-h-64">
             <a:extLst>
               <a:ext uri="{FF2B5EF4-FFF2-40B4-BE49-F238E27FC236}">
-                <a16:creationId xmlns:a16="http://schemas.microsoft.com/office/drawing/2014/main" id="{480C93BD-5648-8BC8-72D7-66C9C74206B1}"/>
+                <a16:creationId xmlns:a16="http://schemas.microsoft.com/office/drawing/2014/main" id="{58FAE318-CEA6-23F2-09DC-03D7F173D75C}"/>
               </a:ext>
             </a:extLst>
           </p:cNvPr>
@@ -7836,7 +7836,7 @@
           <p:cNvPr id="22" name="grid-h-128">
             <a:extLst>
               <a:ext uri="{FF2B5EF4-FFF2-40B4-BE49-F238E27FC236}">
-                <a16:creationId xmlns:a16="http://schemas.microsoft.com/office/drawing/2014/main" id="{BA55D9B1-6996-D6A9-37BF-9307613F3F54}"/>
+                <a16:creationId xmlns:a16="http://schemas.microsoft.com/office/drawing/2014/main" id="{A269E10B-0E82-B675-E983-382A69D004E6}"/>
               </a:ext>
             </a:extLst>
           </p:cNvPr>
@@ -7877,7 +7877,7 @@
           <p:cNvPr id="23" name="grid-h-192">
             <a:extLst>
               <a:ext uri="{FF2B5EF4-FFF2-40B4-BE49-F238E27FC236}">
-                <a16:creationId xmlns:a16="http://schemas.microsoft.com/office/drawing/2014/main" id="{9993EC67-F560-6F55-5947-21F51B6BC613}"/>
+                <a16:creationId xmlns:a16="http://schemas.microsoft.com/office/drawing/2014/main" id="{DEDC663D-D272-C588-9F0F-AD1DE404E285}"/>
               </a:ext>
             </a:extLst>
           </p:cNvPr>
@@ -7918,7 +7918,7 @@
           <p:cNvPr id="24" name="grid-h-256">
             <a:extLst>
               <a:ext uri="{FF2B5EF4-FFF2-40B4-BE49-F238E27FC236}">
-                <a16:creationId xmlns:a16="http://schemas.microsoft.com/office/drawing/2014/main" id="{6E18E62A-9E23-4777-614B-91F440137E10}"/>
+                <a16:creationId xmlns:a16="http://schemas.microsoft.com/office/drawing/2014/main" id="{44756CB9-17BD-546F-E791-14B6812AF66D}"/>
               </a:ext>
             </a:extLst>
           </p:cNvPr>
@@ -7959,7 +7959,7 @@
           <p:cNvPr id="25" name="grid-h-320">
             <a:extLst>
               <a:ext uri="{FF2B5EF4-FFF2-40B4-BE49-F238E27FC236}">
-                <a16:creationId xmlns:a16="http://schemas.microsoft.com/office/drawing/2014/main" id="{A6FCF3CF-23CA-7C37-45D2-A4789EFFC55F}"/>
+                <a16:creationId xmlns:a16="http://schemas.microsoft.com/office/drawing/2014/main" id="{3CB42545-7C1E-0E4F-A07D-92790A8DCCAF}"/>
               </a:ext>
             </a:extLst>
           </p:cNvPr>
@@ -8000,7 +8000,7 @@
           <p:cNvPr id="26" name="grid-h-384">
             <a:extLst>
               <a:ext uri="{FF2B5EF4-FFF2-40B4-BE49-F238E27FC236}">
-                <a16:creationId xmlns:a16="http://schemas.microsoft.com/office/drawing/2014/main" id="{6A763F31-D22B-53D6-A2F8-3CBDE8E345A3}"/>
+                <a16:creationId xmlns:a16="http://schemas.microsoft.com/office/drawing/2014/main" id="{BBAD131C-1389-CEF1-0B6D-CD274960D2C9}"/>
               </a:ext>
             </a:extLst>
           </p:cNvPr>
@@ -8041,7 +8041,7 @@
           <p:cNvPr id="27" name="grid-h-448">
             <a:extLst>
               <a:ext uri="{FF2B5EF4-FFF2-40B4-BE49-F238E27FC236}">
-                <a16:creationId xmlns:a16="http://schemas.microsoft.com/office/drawing/2014/main" id="{0ACD4B65-B75A-2C64-BF2A-A26F73495BF0}"/>
+                <a16:creationId xmlns:a16="http://schemas.microsoft.com/office/drawing/2014/main" id="{80E17951-36AD-EDC9-8E3C-32A45B23D028}"/>
               </a:ext>
             </a:extLst>
           </p:cNvPr>
@@ -8082,7 +8082,7 @@
           <p:cNvPr id="28" name="grid-h-512">
             <a:extLst>
               <a:ext uri="{FF2B5EF4-FFF2-40B4-BE49-F238E27FC236}">
-                <a16:creationId xmlns:a16="http://schemas.microsoft.com/office/drawing/2014/main" id="{285CC7B6-659E-09D7-2283-07ADA5B3D1CB}"/>
+                <a16:creationId xmlns:a16="http://schemas.microsoft.com/office/drawing/2014/main" id="{D8D839B8-5E4A-1885-B7B3-8DF0CFB5EA8C}"/>
               </a:ext>
             </a:extLst>
           </p:cNvPr>
@@ -8123,7 +8123,7 @@
           <p:cNvPr id="29" name="page-num">
             <a:extLst>
               <a:ext uri="{FF2B5EF4-FFF2-40B4-BE49-F238E27FC236}">
-                <a16:creationId xmlns:a16="http://schemas.microsoft.com/office/drawing/2014/main" id="{BE76BEB4-7596-EAAA-9278-ED1BA3211FDA}"/>
+                <a16:creationId xmlns:a16="http://schemas.microsoft.com/office/drawing/2014/main" id="{AE80EA1C-D251-9F2D-A4CF-F8B89CFEA79F}"/>
               </a:ext>
             </a:extLst>
           </p:cNvPr>
@@ -8169,7 +8169,7 @@
           <p:cNvPr id="30" name="section-label">
             <a:extLst>
               <a:ext uri="{FF2B5EF4-FFF2-40B4-BE49-F238E27FC236}">
-                <a16:creationId xmlns:a16="http://schemas.microsoft.com/office/drawing/2014/main" id="{8E4903B7-706B-F396-DEE6-17CBDF77E8F6}"/>
+                <a16:creationId xmlns:a16="http://schemas.microsoft.com/office/drawing/2014/main" id="{2263DE95-9D40-DBDC-0DB6-C6457908A43B}"/>
               </a:ext>
             </a:extLst>
           </p:cNvPr>
@@ -8215,7 +8215,7 @@
           <p:cNvPr id="31" name="title">
             <a:extLst>
               <a:ext uri="{FF2B5EF4-FFF2-40B4-BE49-F238E27FC236}">
-                <a16:creationId xmlns:a16="http://schemas.microsoft.com/office/drawing/2014/main" id="{F3A0CCE8-CDD2-70D8-B2FD-278E513BB1F2}"/>
+                <a16:creationId xmlns:a16="http://schemas.microsoft.com/office/drawing/2014/main" id="{E18217E9-B303-1C72-B90E-20AF7554D16E}"/>
               </a:ext>
             </a:extLst>
           </p:cNvPr>
@@ -8261,7 +8261,7 @@
           <p:cNvPr id="32" name="subtitle">
             <a:extLst>
               <a:ext uri="{FF2B5EF4-FFF2-40B4-BE49-F238E27FC236}">
-                <a16:creationId xmlns:a16="http://schemas.microsoft.com/office/drawing/2014/main" id="{E4B4D7C1-EC21-031D-3E4A-C68705B27F7A}"/>
+                <a16:creationId xmlns:a16="http://schemas.microsoft.com/office/drawing/2014/main" id="{697EE91A-AA03-545D-482E-33E936E6A298}"/>
               </a:ext>
             </a:extLst>
           </p:cNvPr>
@@ -8307,7 +8307,7 @@
           <p:cNvPr id="33" name="shot-frame">
             <a:extLst>
               <a:ext uri="{FF2B5EF4-FFF2-40B4-BE49-F238E27FC236}">
-                <a16:creationId xmlns:a16="http://schemas.microsoft.com/office/drawing/2014/main" id="{6835D949-A5DF-866E-4B0F-4700066ACA66}"/>
+                <a16:creationId xmlns:a16="http://schemas.microsoft.com/office/drawing/2014/main" id="{F509A8DB-B690-65AB-4E20-14612BA5407F}"/>
               </a:ext>
             </a:extLst>
           </p:cNvPr>
@@ -8316,18 +8316,18 @@
         </p:nvSpPr>
         <p:spPr>
           <a:xfrm>
-            <a:off x="711200" y="1803400"/>
-            <a:ext cx="7696200" cy="3505200"/>
+            <a:off x="685800" y="1854200"/>
+            <a:ext cx="8026400" cy="3606800"/>
           </a:xfrm>
           <a:prstGeom prst="rect">
             <a:avLst/>
           </a:prstGeom>
           <a:solidFill>
-            <a:srgbClr val="FFFFFF"/>
+            <a:srgbClr val="051126"/>
           </a:solidFill>
           <a:ln w="12700">
             <a:solidFill>
-              <a:srgbClr val="FFFFFF"/>
+              <a:srgbClr val="5087C8"/>
             </a:solidFill>
           </a:ln>
         </p:spPr>
@@ -8361,7 +8361,7 @@
           <p:cNvPr id="35" name="homepage-shot">
             <a:extLst>
               <a:ext uri="{FF2B5EF4-FFF2-40B4-BE49-F238E27FC236}">
-                <a16:creationId xmlns:a16="http://schemas.microsoft.com/office/drawing/2014/main" id="{E4112902-D4D2-D147-B7C0-D2CB704EA99A}"/>
+                <a16:creationId xmlns:a16="http://schemas.microsoft.com/office/drawing/2014/main" id="{8CE6C55C-6FFA-59C9-840A-D1B0C77EABAB}"/>
               </a:ext>
             </a:extLst>
           </p:cNvPr>
@@ -8384,8 +8384,8 @@
         </p:blipFill>
         <p:spPr>
           <a:xfrm>
-            <a:off x="914400" y="2274277"/>
-            <a:ext cx="7289800" cy="2563446"/>
+            <a:off x="1297583" y="2006600"/>
+            <a:ext cx="6802834" cy="3098800"/>
           </a:xfrm>
           <a:prstGeom prst="rect">
             <a:avLst/>
@@ -8397,7 +8397,7 @@
           <p:cNvPr id="36" name="route">
             <a:extLst>
               <a:ext uri="{FF2B5EF4-FFF2-40B4-BE49-F238E27FC236}">
-                <a16:creationId xmlns:a16="http://schemas.microsoft.com/office/drawing/2014/main" id="{85A4F43F-C534-4C46-CDCA-B841DBA1236F}"/>
+                <a16:creationId xmlns:a16="http://schemas.microsoft.com/office/drawing/2014/main" id="{400DB1B1-51FA-E5D9-6786-88C85030810B}"/>
               </a:ext>
             </a:extLst>
           </p:cNvPr>
@@ -8406,8 +8406,8 @@
         </p:nvSpPr>
         <p:spPr>
           <a:xfrm>
-            <a:off x="8737600" y="1854200"/>
-            <a:ext cx="2616200" cy="2565400"/>
+            <a:off x="9067800" y="1854200"/>
+            <a:ext cx="2260600" cy="2565400"/>
           </a:xfrm>
           <a:prstGeom prst="rect">
             <a:avLst/>
@@ -8451,7 +8451,7 @@
           <p:cNvPr id="37" name="route-title">
             <a:extLst>
               <a:ext uri="{FF2B5EF4-FFF2-40B4-BE49-F238E27FC236}">
-                <a16:creationId xmlns:a16="http://schemas.microsoft.com/office/drawing/2014/main" id="{733879F4-428E-D09B-D651-0BDC2F2C8785}"/>
+                <a16:creationId xmlns:a16="http://schemas.microsoft.com/office/drawing/2014/main" id="{C0F5AC81-035A-6E78-0FAD-0B724E579243}"/>
               </a:ext>
             </a:extLst>
           </p:cNvPr>
@@ -8460,8 +8460,8 @@
         </p:nvSpPr>
         <p:spPr>
           <a:xfrm>
-            <a:off x="9067800" y="2133600"/>
-            <a:ext cx="1854200" cy="276999"/>
+            <a:off x="9372600" y="2133600"/>
+            <a:ext cx="1600200" cy="276999"/>
           </a:xfrm>
           <a:prstGeom prst="rect">
             <a:avLst/>
@@ -8494,10 +8494,71 @@
       </p:sp>
       <p:sp>
         <p:nvSpPr>
-          <p:cNvPr id="38" name="route-item-0">
-            <a:extLst>
-              <a:ext uri="{FF2B5EF4-FFF2-40B4-BE49-F238E27FC236}">
-                <a16:creationId xmlns:a16="http://schemas.microsoft.com/office/drawing/2014/main" id="{D17F3371-B564-55AE-96F3-FFEC134DD189}"/>
+          <p:cNvPr id="38" name="route-dot-0">
+            <a:extLst>
+              <a:ext uri="{FF2B5EF4-FFF2-40B4-BE49-F238E27FC236}">
+                <a16:creationId xmlns:a16="http://schemas.microsoft.com/office/drawing/2014/main" id="{E497945F-6FC2-F88C-0125-6D88896739D5}"/>
+              </a:ext>
+            </a:extLst>
+          </p:cNvPr>
+          <p:cNvSpPr/>
+          <p:nvPr/>
+        </p:nvSpPr>
+        <p:spPr>
+          <a:xfrm>
+            <a:off x="9372600" y="2565400"/>
+            <a:ext cx="228600" cy="228600"/>
+          </a:xfrm>
+          <a:prstGeom prst="rect">
+            <a:avLst/>
+          </a:prstGeom>
+          <a:solidFill>
+            <a:srgbClr val="2369C8"/>
+          </a:solidFill>
+          <a:ln w="12700" cap="flat" cmpd="sng" algn="ctr">
+            <a:solidFill>
+              <a:schemeClr val="accent1">
+                <a:shade val="15000"/>
+                <a:alpha val="0"/>
+              </a:schemeClr>
+            </a:solidFill>
+            <a:prstDash val="solid"/>
+            <a:miter lim="800000"/>
+            <a:headEnd type="none" w="med" len="med"/>
+            <a:tailEnd type="none" w="med" len="med"/>
+          </a:ln>
+        </p:spPr>
+        <p:style>
+          <a:lnRef idx="2">
+            <a:schemeClr val="accent1">
+              <a:shade val="15000"/>
+            </a:schemeClr>
+          </a:lnRef>
+          <a:fillRef idx="1">
+            <a:schemeClr val="accent1"/>
+          </a:fillRef>
+          <a:effectRef idx="0">
+            <a:schemeClr val="accent1"/>
+          </a:effectRef>
+          <a:fontRef idx="minor">
+            <a:schemeClr val="lt1"/>
+          </a:fontRef>
+        </p:style>
+        <p:txBody>
+          <a:bodyPr rtlCol="0" anchor="ctr"/>
+          <a:lstStyle/>
+          <a:p>
+            <a:pPr algn="ctr"/>
+            <a:endParaRPr lang="zh-CN" altLang="en-US"/>
+          </a:p>
+        </p:txBody>
+      </p:sp>
+      <p:sp>
+        <p:nvSpPr>
+          <p:cNvPr id="39" name="route-num-0">
+            <a:extLst>
+              <a:ext uri="{FF2B5EF4-FFF2-40B4-BE49-F238E27FC236}">
+                <a16:creationId xmlns:a16="http://schemas.microsoft.com/office/drawing/2014/main" id="{F0B3B8E0-E507-8385-C58B-B6239D66F4B3}"/>
               </a:ext>
             </a:extLst>
           </p:cNvPr>
@@ -8506,8 +8567,8 @@
         </p:nvSpPr>
         <p:spPr>
           <a:xfrm>
-            <a:off x="9067800" y="2565400"/>
-            <a:ext cx="1905000" cy="276999"/>
+            <a:off x="9436100" y="2616200"/>
+            <a:ext cx="101600" cy="276999"/>
           </a:xfrm>
           <a:prstGeom prst="rect">
             <a:avLst/>
@@ -8521,15 +8582,61 @@
           <a:lstStyle/>
           <a:p>
             <a:r>
-              <a:rPr lang="en-US" altLang="zh-CN" sz="820" b="1">
+              <a:rPr lang="en-US" altLang="zh-CN" sz="580" b="1">
+                <a:solidFill>
+                  <a:srgbClr val="FFFFFF"/>
+                </a:solidFill>
+                <a:latin typeface="Aptos" panose="020B0004020202020204" pitchFamily="34" charset="0"/>
+              </a:rPr>
+              <a:t>1</a:t>
+            </a:r>
+            <a:endParaRPr lang="zh-CN" altLang="en-US" sz="580" b="1">
+              <a:solidFill>
+                <a:srgbClr val="FFFFFF"/>
+              </a:solidFill>
+              <a:latin typeface="Aptos" panose="020B0004020202020204" pitchFamily="34" charset="0"/>
+            </a:endParaRPr>
+          </a:p>
+        </p:txBody>
+      </p:sp>
+      <p:sp>
+        <p:nvSpPr>
+          <p:cNvPr id="40" name="route-item-0">
+            <a:extLst>
+              <a:ext uri="{FF2B5EF4-FFF2-40B4-BE49-F238E27FC236}">
+                <a16:creationId xmlns:a16="http://schemas.microsoft.com/office/drawing/2014/main" id="{A7062E20-94DA-4388-A400-D142300F0D1D}"/>
+              </a:ext>
+            </a:extLst>
+          </p:cNvPr>
+          <p:cNvSpPr txBox="1"/>
+          <p:nvPr/>
+        </p:nvSpPr>
+        <p:spPr>
+          <a:xfrm>
+            <a:off x="9728200" y="2590800"/>
+            <a:ext cx="1219200" cy="276999"/>
+          </a:xfrm>
+          <a:prstGeom prst="rect">
+            <a:avLst/>
+          </a:prstGeom>
+          <a:noFill/>
+        </p:spPr>
+        <p:txBody>
+          <a:bodyPr vert="horz" wrap="square" lIns="0" tIns="0" rIns="0" bIns="0" rtlCol="0">
+            <a:noAutofit/>
+          </a:bodyPr>
+          <a:lstStyle/>
+          <a:p>
+            <a:r>
+              <a:rPr lang="en-US" altLang="zh-CN" sz="770" b="1">
                 <a:solidFill>
                   <a:srgbClr val="D6E8FA"/>
                 </a:solidFill>
                 <a:latin typeface="Aptos" panose="020B0004020202020204" pitchFamily="34" charset="0"/>
               </a:rPr>
-              <a:t>1. Project page</a:t>
-            </a:r>
-            <a:endParaRPr lang="zh-CN" altLang="en-US" sz="820" b="1">
+              <a:t>Project page</a:t>
+            </a:r>
+            <a:endParaRPr lang="zh-CN" altLang="en-US" sz="770" b="1">
               <a:solidFill>
                 <a:srgbClr val="D6E8FA"/>
               </a:solidFill>
@@ -8540,10 +8647,71 @@
       </p:sp>
       <p:sp>
         <p:nvSpPr>
-          <p:cNvPr id="39" name="route-item-1">
-            <a:extLst>
-              <a:ext uri="{FF2B5EF4-FFF2-40B4-BE49-F238E27FC236}">
-                <a16:creationId xmlns:a16="http://schemas.microsoft.com/office/drawing/2014/main" id="{41D4D270-CC00-40F1-EE17-97D070AF9782}"/>
+          <p:cNvPr id="41" name="route-dot-1">
+            <a:extLst>
+              <a:ext uri="{FF2B5EF4-FFF2-40B4-BE49-F238E27FC236}">
+                <a16:creationId xmlns:a16="http://schemas.microsoft.com/office/drawing/2014/main" id="{EAB7302F-6ACC-2CD9-330C-507665422C8E}"/>
+              </a:ext>
+            </a:extLst>
+          </p:cNvPr>
+          <p:cNvSpPr/>
+          <p:nvPr/>
+        </p:nvSpPr>
+        <p:spPr>
+          <a:xfrm>
+            <a:off x="9372600" y="2895600"/>
+            <a:ext cx="228600" cy="228600"/>
+          </a:xfrm>
+          <a:prstGeom prst="rect">
+            <a:avLst/>
+          </a:prstGeom>
+          <a:solidFill>
+            <a:srgbClr val="00AABE"/>
+          </a:solidFill>
+          <a:ln w="12700" cap="flat" cmpd="sng" algn="ctr">
+            <a:solidFill>
+              <a:schemeClr val="accent1">
+                <a:shade val="15000"/>
+                <a:alpha val="0"/>
+              </a:schemeClr>
+            </a:solidFill>
+            <a:prstDash val="solid"/>
+            <a:miter lim="800000"/>
+            <a:headEnd type="none" w="med" len="med"/>
+            <a:tailEnd type="none" w="med" len="med"/>
+          </a:ln>
+        </p:spPr>
+        <p:style>
+          <a:lnRef idx="2">
+            <a:schemeClr val="accent1">
+              <a:shade val="15000"/>
+            </a:schemeClr>
+          </a:lnRef>
+          <a:fillRef idx="1">
+            <a:schemeClr val="accent1"/>
+          </a:fillRef>
+          <a:effectRef idx="0">
+            <a:schemeClr val="accent1"/>
+          </a:effectRef>
+          <a:fontRef idx="minor">
+            <a:schemeClr val="lt1"/>
+          </a:fontRef>
+        </p:style>
+        <p:txBody>
+          <a:bodyPr rtlCol="0" anchor="ctr"/>
+          <a:lstStyle/>
+          <a:p>
+            <a:pPr algn="ctr"/>
+            <a:endParaRPr lang="zh-CN" altLang="en-US"/>
+          </a:p>
+        </p:txBody>
+      </p:sp>
+      <p:sp>
+        <p:nvSpPr>
+          <p:cNvPr id="42" name="route-num-1">
+            <a:extLst>
+              <a:ext uri="{FF2B5EF4-FFF2-40B4-BE49-F238E27FC236}">
+                <a16:creationId xmlns:a16="http://schemas.microsoft.com/office/drawing/2014/main" id="{B3040B0C-B88D-AAC9-B21D-98D5545207FE}"/>
               </a:ext>
             </a:extLst>
           </p:cNvPr>
@@ -8552,8 +8720,8 @@
         </p:nvSpPr>
         <p:spPr>
           <a:xfrm>
-            <a:off x="9067800" y="2882900"/>
-            <a:ext cx="1905000" cy="276999"/>
+            <a:off x="9436100" y="2946400"/>
+            <a:ext cx="101600" cy="276999"/>
           </a:xfrm>
           <a:prstGeom prst="rect">
             <a:avLst/>
@@ -8567,15 +8735,61 @@
           <a:lstStyle/>
           <a:p>
             <a:r>
-              <a:rPr lang="en-US" altLang="zh-CN" sz="820" b="1">
+              <a:rPr lang="en-US" altLang="zh-CN" sz="580" b="1">
+                <a:solidFill>
+                  <a:srgbClr val="FFFFFF"/>
+                </a:solidFill>
+                <a:latin typeface="Aptos" panose="020B0004020202020204" pitchFamily="34" charset="0"/>
+              </a:rPr>
+              <a:t>2</a:t>
+            </a:r>
+            <a:endParaRPr lang="zh-CN" altLang="en-US" sz="580" b="1">
+              <a:solidFill>
+                <a:srgbClr val="FFFFFF"/>
+              </a:solidFill>
+              <a:latin typeface="Aptos" panose="020B0004020202020204" pitchFamily="34" charset="0"/>
+            </a:endParaRPr>
+          </a:p>
+        </p:txBody>
+      </p:sp>
+      <p:sp>
+        <p:nvSpPr>
+          <p:cNvPr id="43" name="route-item-1">
+            <a:extLst>
+              <a:ext uri="{FF2B5EF4-FFF2-40B4-BE49-F238E27FC236}">
+                <a16:creationId xmlns:a16="http://schemas.microsoft.com/office/drawing/2014/main" id="{6B0F675D-3604-5FBE-D258-C5928A8271CD}"/>
+              </a:ext>
+            </a:extLst>
+          </p:cNvPr>
+          <p:cNvSpPr txBox="1"/>
+          <p:nvPr/>
+        </p:nvSpPr>
+        <p:spPr>
+          <a:xfrm>
+            <a:off x="9728200" y="2921000"/>
+            <a:ext cx="1219200" cy="276999"/>
+          </a:xfrm>
+          <a:prstGeom prst="rect">
+            <a:avLst/>
+          </a:prstGeom>
+          <a:noFill/>
+        </p:spPr>
+        <p:txBody>
+          <a:bodyPr vert="horz" wrap="square" lIns="0" tIns="0" rIns="0" bIns="0" rtlCol="0">
+            <a:noAutofit/>
+          </a:bodyPr>
+          <a:lstStyle/>
+          <a:p>
+            <a:r>
+              <a:rPr lang="en-US" altLang="zh-CN" sz="770" b="1">
                 <a:solidFill>
                   <a:srgbClr val="D6E8FA"/>
                 </a:solidFill>
                 <a:latin typeface="Aptos" panose="020B0004020202020204" pitchFamily="34" charset="0"/>
               </a:rPr>
-              <a:t>2. Repository</a:t>
-            </a:r>
-            <a:endParaRPr lang="zh-CN" altLang="en-US" sz="820" b="1">
+              <a:t>Repository</a:t>
+            </a:r>
+            <a:endParaRPr lang="zh-CN" altLang="en-US" sz="770" b="1">
               <a:solidFill>
                 <a:srgbClr val="D6E8FA"/>
               </a:solidFill>
@@ -8586,10 +8800,71 @@
       </p:sp>
       <p:sp>
         <p:nvSpPr>
-          <p:cNvPr id="40" name="route-item-2">
-            <a:extLst>
-              <a:ext uri="{FF2B5EF4-FFF2-40B4-BE49-F238E27FC236}">
-                <a16:creationId xmlns:a16="http://schemas.microsoft.com/office/drawing/2014/main" id="{A80F3F04-B023-74CE-50DE-C797E500F769}"/>
+          <p:cNvPr id="44" name="route-dot-2">
+            <a:extLst>
+              <a:ext uri="{FF2B5EF4-FFF2-40B4-BE49-F238E27FC236}">
+                <a16:creationId xmlns:a16="http://schemas.microsoft.com/office/drawing/2014/main" id="{0F4038DC-7852-7A28-7CCB-397F75C03F3F}"/>
+              </a:ext>
+            </a:extLst>
+          </p:cNvPr>
+          <p:cNvSpPr/>
+          <p:nvPr/>
+        </p:nvSpPr>
+        <p:spPr>
+          <a:xfrm>
+            <a:off x="9372600" y="3225800"/>
+            <a:ext cx="228600" cy="228600"/>
+          </a:xfrm>
+          <a:prstGeom prst="rect">
+            <a:avLst/>
+          </a:prstGeom>
+          <a:solidFill>
+            <a:srgbClr val="784CD2"/>
+          </a:solidFill>
+          <a:ln w="12700" cap="flat" cmpd="sng" algn="ctr">
+            <a:solidFill>
+              <a:schemeClr val="accent1">
+                <a:shade val="15000"/>
+                <a:alpha val="0"/>
+              </a:schemeClr>
+            </a:solidFill>
+            <a:prstDash val="solid"/>
+            <a:miter lim="800000"/>
+            <a:headEnd type="none" w="med" len="med"/>
+            <a:tailEnd type="none" w="med" len="med"/>
+          </a:ln>
+        </p:spPr>
+        <p:style>
+          <a:lnRef idx="2">
+            <a:schemeClr val="accent1">
+              <a:shade val="15000"/>
+            </a:schemeClr>
+          </a:lnRef>
+          <a:fillRef idx="1">
+            <a:schemeClr val="accent1"/>
+          </a:fillRef>
+          <a:effectRef idx="0">
+            <a:schemeClr val="accent1"/>
+          </a:effectRef>
+          <a:fontRef idx="minor">
+            <a:schemeClr val="lt1"/>
+          </a:fontRef>
+        </p:style>
+        <p:txBody>
+          <a:bodyPr rtlCol="0" anchor="ctr"/>
+          <a:lstStyle/>
+          <a:p>
+            <a:pPr algn="ctr"/>
+            <a:endParaRPr lang="zh-CN" altLang="en-US"/>
+          </a:p>
+        </p:txBody>
+      </p:sp>
+      <p:sp>
+        <p:nvSpPr>
+          <p:cNvPr id="45" name="route-num-2">
+            <a:extLst>
+              <a:ext uri="{FF2B5EF4-FFF2-40B4-BE49-F238E27FC236}">
+                <a16:creationId xmlns:a16="http://schemas.microsoft.com/office/drawing/2014/main" id="{041D0CDF-C4CA-B05F-3127-E092D7DFBFCB}"/>
               </a:ext>
             </a:extLst>
           </p:cNvPr>
@@ -8598,8 +8873,8 @@
         </p:nvSpPr>
         <p:spPr>
           <a:xfrm>
-            <a:off x="9067800" y="3200400"/>
-            <a:ext cx="1905000" cy="276999"/>
+            <a:off x="9436100" y="3276600"/>
+            <a:ext cx="101600" cy="276999"/>
           </a:xfrm>
           <a:prstGeom prst="rect">
             <a:avLst/>
@@ -8613,15 +8888,61 @@
           <a:lstStyle/>
           <a:p>
             <a:r>
-              <a:rPr lang="en-US" altLang="zh-CN" sz="820" b="1">
+              <a:rPr lang="en-US" altLang="zh-CN" sz="580" b="1">
+                <a:solidFill>
+                  <a:srgbClr val="FFFFFF"/>
+                </a:solidFill>
+                <a:latin typeface="Aptos" panose="020B0004020202020204" pitchFamily="34" charset="0"/>
+              </a:rPr>
+              <a:t>3</a:t>
+            </a:r>
+            <a:endParaRPr lang="zh-CN" altLang="en-US" sz="580" b="1">
+              <a:solidFill>
+                <a:srgbClr val="FFFFFF"/>
+              </a:solidFill>
+              <a:latin typeface="Aptos" panose="020B0004020202020204" pitchFamily="34" charset="0"/>
+            </a:endParaRPr>
+          </a:p>
+        </p:txBody>
+      </p:sp>
+      <p:sp>
+        <p:nvSpPr>
+          <p:cNvPr id="46" name="route-item-2">
+            <a:extLst>
+              <a:ext uri="{FF2B5EF4-FFF2-40B4-BE49-F238E27FC236}">
+                <a16:creationId xmlns:a16="http://schemas.microsoft.com/office/drawing/2014/main" id="{B3446E1E-5D85-6A05-A1D9-2117B8AF3EEC}"/>
+              </a:ext>
+            </a:extLst>
+          </p:cNvPr>
+          <p:cNvSpPr txBox="1"/>
+          <p:nvPr/>
+        </p:nvSpPr>
+        <p:spPr>
+          <a:xfrm>
+            <a:off x="9728200" y="3251200"/>
+            <a:ext cx="1219200" cy="276999"/>
+          </a:xfrm>
+          <a:prstGeom prst="rect">
+            <a:avLst/>
+          </a:prstGeom>
+          <a:noFill/>
+        </p:spPr>
+        <p:txBody>
+          <a:bodyPr vert="horz" wrap="square" lIns="0" tIns="0" rIns="0" bIns="0" rtlCol="0">
+            <a:noAutofit/>
+          </a:bodyPr>
+          <a:lstStyle/>
+          <a:p>
+            <a:r>
+              <a:rPr lang="en-US" altLang="zh-CN" sz="770" b="1">
                 <a:solidFill>
                   <a:srgbClr val="D6E8FA"/>
                 </a:solidFill>
                 <a:latin typeface="Aptos" panose="020B0004020202020204" pitchFamily="34" charset="0"/>
               </a:rPr>
-              <a:t>3. Claim boundaries</a:t>
-            </a:r>
-            <a:endParaRPr lang="zh-CN" altLang="en-US" sz="820" b="1">
+              <a:t>Claim boundaries</a:t>
+            </a:r>
+            <a:endParaRPr lang="zh-CN" altLang="en-US" sz="770" b="1">
               <a:solidFill>
                 <a:srgbClr val="D6E8FA"/>
               </a:solidFill>
@@ -8632,10 +8953,71 @@
       </p:sp>
       <p:sp>
         <p:nvSpPr>
-          <p:cNvPr id="41" name="route-item-3">
-            <a:extLst>
-              <a:ext uri="{FF2B5EF4-FFF2-40B4-BE49-F238E27FC236}">
-                <a16:creationId xmlns:a16="http://schemas.microsoft.com/office/drawing/2014/main" id="{70802F1B-EFE2-EA50-5D0A-9B8ADEAAE4FA}"/>
+          <p:cNvPr id="47" name="route-dot-3">
+            <a:extLst>
+              <a:ext uri="{FF2B5EF4-FFF2-40B4-BE49-F238E27FC236}">
+                <a16:creationId xmlns:a16="http://schemas.microsoft.com/office/drawing/2014/main" id="{A112EA2F-B965-26FC-D32E-CBD21156B732}"/>
+              </a:ext>
+            </a:extLst>
+          </p:cNvPr>
+          <p:cNvSpPr/>
+          <p:nvPr/>
+        </p:nvSpPr>
+        <p:spPr>
+          <a:xfrm>
+            <a:off x="9372600" y="3556000"/>
+            <a:ext cx="228600" cy="228600"/>
+          </a:xfrm>
+          <a:prstGeom prst="rect">
+            <a:avLst/>
+          </a:prstGeom>
+          <a:solidFill>
+            <a:srgbClr val="EE9122"/>
+          </a:solidFill>
+          <a:ln w="12700" cap="flat" cmpd="sng" algn="ctr">
+            <a:solidFill>
+              <a:schemeClr val="accent1">
+                <a:shade val="15000"/>
+                <a:alpha val="0"/>
+              </a:schemeClr>
+            </a:solidFill>
+            <a:prstDash val="solid"/>
+            <a:miter lim="800000"/>
+            <a:headEnd type="none" w="med" len="med"/>
+            <a:tailEnd type="none" w="med" len="med"/>
+          </a:ln>
+        </p:spPr>
+        <p:style>
+          <a:lnRef idx="2">
+            <a:schemeClr val="accent1">
+              <a:shade val="15000"/>
+            </a:schemeClr>
+          </a:lnRef>
+          <a:fillRef idx="1">
+            <a:schemeClr val="accent1"/>
+          </a:fillRef>
+          <a:effectRef idx="0">
+            <a:schemeClr val="accent1"/>
+          </a:effectRef>
+          <a:fontRef idx="minor">
+            <a:schemeClr val="lt1"/>
+          </a:fontRef>
+        </p:style>
+        <p:txBody>
+          <a:bodyPr rtlCol="0" anchor="ctr"/>
+          <a:lstStyle/>
+          <a:p>
+            <a:pPr algn="ctr"/>
+            <a:endParaRPr lang="zh-CN" altLang="en-US"/>
+          </a:p>
+        </p:txBody>
+      </p:sp>
+      <p:sp>
+        <p:nvSpPr>
+          <p:cNvPr id="48" name="route-num-3">
+            <a:extLst>
+              <a:ext uri="{FF2B5EF4-FFF2-40B4-BE49-F238E27FC236}">
+                <a16:creationId xmlns:a16="http://schemas.microsoft.com/office/drawing/2014/main" id="{40AD6EC5-39F6-3081-999E-8A60A38CAC25}"/>
               </a:ext>
             </a:extLst>
           </p:cNvPr>
@@ -8644,8 +9026,8 @@
         </p:nvSpPr>
         <p:spPr>
           <a:xfrm>
-            <a:off x="9067800" y="3517900"/>
-            <a:ext cx="1905000" cy="276999"/>
+            <a:off x="9436100" y="3606800"/>
+            <a:ext cx="101600" cy="276999"/>
           </a:xfrm>
           <a:prstGeom prst="rect">
             <a:avLst/>
@@ -8659,15 +9041,61 @@
           <a:lstStyle/>
           <a:p>
             <a:r>
-              <a:rPr lang="en-US" altLang="zh-CN" sz="820" b="1">
+              <a:rPr lang="en-US" altLang="zh-CN" sz="580" b="1">
+                <a:solidFill>
+                  <a:srgbClr val="FFFFFF"/>
+                </a:solidFill>
+                <a:latin typeface="Aptos" panose="020B0004020202020204" pitchFamily="34" charset="0"/>
+              </a:rPr>
+              <a:t>4</a:t>
+            </a:r>
+            <a:endParaRPr lang="zh-CN" altLang="en-US" sz="580" b="1">
+              <a:solidFill>
+                <a:srgbClr val="FFFFFF"/>
+              </a:solidFill>
+              <a:latin typeface="Aptos" panose="020B0004020202020204" pitchFamily="34" charset="0"/>
+            </a:endParaRPr>
+          </a:p>
+        </p:txBody>
+      </p:sp>
+      <p:sp>
+        <p:nvSpPr>
+          <p:cNvPr id="49" name="route-item-3">
+            <a:extLst>
+              <a:ext uri="{FF2B5EF4-FFF2-40B4-BE49-F238E27FC236}">
+                <a16:creationId xmlns:a16="http://schemas.microsoft.com/office/drawing/2014/main" id="{C3F6B8AE-40DD-1DE1-0087-00F20E72D325}"/>
+              </a:ext>
+            </a:extLst>
+          </p:cNvPr>
+          <p:cNvSpPr txBox="1"/>
+          <p:nvPr/>
+        </p:nvSpPr>
+        <p:spPr>
+          <a:xfrm>
+            <a:off x="9728200" y="3581400"/>
+            <a:ext cx="1219200" cy="276999"/>
+          </a:xfrm>
+          <a:prstGeom prst="rect">
+            <a:avLst/>
+          </a:prstGeom>
+          <a:noFill/>
+        </p:spPr>
+        <p:txBody>
+          <a:bodyPr vert="horz" wrap="square" lIns="0" tIns="0" rIns="0" bIns="0" rtlCol="0">
+            <a:noAutofit/>
+          </a:bodyPr>
+          <a:lstStyle/>
+          <a:p>
+            <a:r>
+              <a:rPr lang="en-US" altLang="zh-CN" sz="770" b="1">
                 <a:solidFill>
                   <a:srgbClr val="D6E8FA"/>
                 </a:solidFill>
                 <a:latin typeface="Aptos" panose="020B0004020202020204" pitchFamily="34" charset="0"/>
               </a:rPr>
-              <a:t>4. Traceability</a:t>
-            </a:r>
-            <a:endParaRPr lang="zh-CN" altLang="en-US" sz="820" b="1">
+              <a:t>Traceability</a:t>
+            </a:r>
+            <a:endParaRPr lang="zh-CN" altLang="en-US" sz="770" b="1">
               <a:solidFill>
                 <a:srgbClr val="D6E8FA"/>
               </a:solidFill>
@@ -8678,10 +9106,71 @@
       </p:sp>
       <p:sp>
         <p:nvSpPr>
-          <p:cNvPr id="42" name="route-item-4">
-            <a:extLst>
-              <a:ext uri="{FF2B5EF4-FFF2-40B4-BE49-F238E27FC236}">
-                <a16:creationId xmlns:a16="http://schemas.microsoft.com/office/drawing/2014/main" id="{30CCCA7C-7441-26A0-16FC-4A62CADDF6D5}"/>
+          <p:cNvPr id="50" name="route-dot-4">
+            <a:extLst>
+              <a:ext uri="{FF2B5EF4-FFF2-40B4-BE49-F238E27FC236}">
+                <a16:creationId xmlns:a16="http://schemas.microsoft.com/office/drawing/2014/main" id="{CDFCDB22-93B6-01B8-07BB-51787AA1BE50}"/>
+              </a:ext>
+            </a:extLst>
+          </p:cNvPr>
+          <p:cNvSpPr/>
+          <p:nvPr/>
+        </p:nvSpPr>
+        <p:spPr>
+          <a:xfrm>
+            <a:off x="9372600" y="3886200"/>
+            <a:ext cx="228600" cy="228600"/>
+          </a:xfrm>
+          <a:prstGeom prst="rect">
+            <a:avLst/>
+          </a:prstGeom>
+          <a:solidFill>
+            <a:srgbClr val="008E66"/>
+          </a:solidFill>
+          <a:ln w="12700" cap="flat" cmpd="sng" algn="ctr">
+            <a:solidFill>
+              <a:schemeClr val="accent1">
+                <a:shade val="15000"/>
+                <a:alpha val="0"/>
+              </a:schemeClr>
+            </a:solidFill>
+            <a:prstDash val="solid"/>
+            <a:miter lim="800000"/>
+            <a:headEnd type="none" w="med" len="med"/>
+            <a:tailEnd type="none" w="med" len="med"/>
+          </a:ln>
+        </p:spPr>
+        <p:style>
+          <a:lnRef idx="2">
+            <a:schemeClr val="accent1">
+              <a:shade val="15000"/>
+            </a:schemeClr>
+          </a:lnRef>
+          <a:fillRef idx="1">
+            <a:schemeClr val="accent1"/>
+          </a:fillRef>
+          <a:effectRef idx="0">
+            <a:schemeClr val="accent1"/>
+          </a:effectRef>
+          <a:fontRef idx="minor">
+            <a:schemeClr val="lt1"/>
+          </a:fontRef>
+        </p:style>
+        <p:txBody>
+          <a:bodyPr rtlCol="0" anchor="ctr"/>
+          <a:lstStyle/>
+          <a:p>
+            <a:pPr algn="ctr"/>
+            <a:endParaRPr lang="zh-CN" altLang="en-US"/>
+          </a:p>
+        </p:txBody>
+      </p:sp>
+      <p:sp>
+        <p:nvSpPr>
+          <p:cNvPr id="51" name="route-num-4">
+            <a:extLst>
+              <a:ext uri="{FF2B5EF4-FFF2-40B4-BE49-F238E27FC236}">
+                <a16:creationId xmlns:a16="http://schemas.microsoft.com/office/drawing/2014/main" id="{F08E8EBE-7176-64B1-EA56-2E1141BE1529}"/>
               </a:ext>
             </a:extLst>
           </p:cNvPr>
@@ -8690,8 +9179,8 @@
         </p:nvSpPr>
         <p:spPr>
           <a:xfrm>
-            <a:off x="9067800" y="3835400"/>
-            <a:ext cx="1905000" cy="276999"/>
+            <a:off x="9436100" y="3937000"/>
+            <a:ext cx="101600" cy="276999"/>
           </a:xfrm>
           <a:prstGeom prst="rect">
             <a:avLst/>
@@ -8705,15 +9194,61 @@
           <a:lstStyle/>
           <a:p>
             <a:r>
-              <a:rPr lang="en-US" altLang="zh-CN" sz="820" b="1">
+              <a:rPr lang="en-US" altLang="zh-CN" sz="580" b="1">
+                <a:solidFill>
+                  <a:srgbClr val="FFFFFF"/>
+                </a:solidFill>
+                <a:latin typeface="Aptos" panose="020B0004020202020204" pitchFamily="34" charset="0"/>
+              </a:rPr>
+              <a:t>5</a:t>
+            </a:r>
+            <a:endParaRPr lang="zh-CN" altLang="en-US" sz="580" b="1">
+              <a:solidFill>
+                <a:srgbClr val="FFFFFF"/>
+              </a:solidFill>
+              <a:latin typeface="Aptos" panose="020B0004020202020204" pitchFamily="34" charset="0"/>
+            </a:endParaRPr>
+          </a:p>
+        </p:txBody>
+      </p:sp>
+      <p:sp>
+        <p:nvSpPr>
+          <p:cNvPr id="52" name="route-item-4">
+            <a:extLst>
+              <a:ext uri="{FF2B5EF4-FFF2-40B4-BE49-F238E27FC236}">
+                <a16:creationId xmlns:a16="http://schemas.microsoft.com/office/drawing/2014/main" id="{C4F67B63-3A92-C709-623D-69AFDE38FCD9}"/>
+              </a:ext>
+            </a:extLst>
+          </p:cNvPr>
+          <p:cNvSpPr txBox="1"/>
+          <p:nvPr/>
+        </p:nvSpPr>
+        <p:spPr>
+          <a:xfrm>
+            <a:off x="9728200" y="3911600"/>
+            <a:ext cx="1219200" cy="276999"/>
+          </a:xfrm>
+          <a:prstGeom prst="rect">
+            <a:avLst/>
+          </a:prstGeom>
+          <a:noFill/>
+        </p:spPr>
+        <p:txBody>
+          <a:bodyPr vert="horz" wrap="square" lIns="0" tIns="0" rIns="0" bIns="0" rtlCol="0">
+            <a:noAutofit/>
+          </a:bodyPr>
+          <a:lstStyle/>
+          <a:p>
+            <a:r>
+              <a:rPr lang="en-US" altLang="zh-CN" sz="770" b="1">
                 <a:solidFill>
                   <a:srgbClr val="D6E8FA"/>
                 </a:solidFill>
                 <a:latin typeface="Aptos" panose="020B0004020202020204" pitchFamily="34" charset="0"/>
               </a:rPr>
-              <a:t>5. Manifest</a:t>
-            </a:r>
-            <a:endParaRPr lang="zh-CN" altLang="en-US" sz="820" b="1">
+              <a:t>Manifest</a:t>
+            </a:r>
+            <a:endParaRPr lang="zh-CN" altLang="en-US" sz="770" b="1">
               <a:solidFill>
                 <a:srgbClr val="D6E8FA"/>
               </a:solidFill>
@@ -8722,13 +9257,113 @@
           </a:p>
         </p:txBody>
       </p:sp>
+      <p:sp>
+        <p:nvSpPr>
+          <p:cNvPr id="53" name="demo-caption">
+            <a:extLst>
+              <a:ext uri="{FF2B5EF4-FFF2-40B4-BE49-F238E27FC236}">
+                <a16:creationId xmlns:a16="http://schemas.microsoft.com/office/drawing/2014/main" id="{6089AFD0-F9F6-9445-04FE-B20964FF443A}"/>
+              </a:ext>
+            </a:extLst>
+          </p:cNvPr>
+          <p:cNvSpPr/>
+          <p:nvPr/>
+        </p:nvSpPr>
+        <p:spPr>
+          <a:xfrm>
+            <a:off x="1092200" y="5003800"/>
+            <a:ext cx="7112000" cy="304800"/>
+          </a:xfrm>
+          <a:prstGeom prst="rect">
+            <a:avLst/>
+          </a:prstGeom>
+          <a:solidFill>
+            <a:srgbClr val="0B5CA0"/>
+          </a:solidFill>
+          <a:ln w="12700">
+            <a:solidFill>
+              <a:srgbClr val="76AEE4"/>
+            </a:solidFill>
+          </a:ln>
+        </p:spPr>
+        <p:style>
+          <a:lnRef idx="2">
+            <a:schemeClr val="accent1">
+              <a:shade val="15000"/>
+            </a:schemeClr>
+          </a:lnRef>
+          <a:fillRef idx="1">
+            <a:schemeClr val="accent1"/>
+          </a:fillRef>
+          <a:effectRef idx="0">
+            <a:schemeClr val="accent1"/>
+          </a:effectRef>
+          <a:fontRef idx="minor">
+            <a:schemeClr val="lt1"/>
+          </a:fontRef>
+        </p:style>
+        <p:txBody>
+          <a:bodyPr rtlCol="0" anchor="ctr"/>
+          <a:lstStyle/>
+          <a:p>
+            <a:pPr algn="ctr"/>
+            <a:endParaRPr lang="zh-CN" altLang="en-US"/>
+          </a:p>
+        </p:txBody>
+      </p:sp>
+      <p:sp>
+        <p:nvSpPr>
+          <p:cNvPr id="54" name="demo-caption-text">
+            <a:extLst>
+              <a:ext uri="{FF2B5EF4-FFF2-40B4-BE49-F238E27FC236}">
+                <a16:creationId xmlns:a16="http://schemas.microsoft.com/office/drawing/2014/main" id="{3B77477A-6A4D-376D-AFC6-D53A5F77A2B3}"/>
+              </a:ext>
+            </a:extLst>
+          </p:cNvPr>
+          <p:cNvSpPr txBox="1"/>
+          <p:nvPr/>
+        </p:nvSpPr>
+        <p:spPr>
+          <a:xfrm>
+            <a:off x="1397000" y="5092700"/>
+            <a:ext cx="6502400" cy="276999"/>
+          </a:xfrm>
+          <a:prstGeom prst="rect">
+            <a:avLst/>
+          </a:prstGeom>
+          <a:noFill/>
+        </p:spPr>
+        <p:txBody>
+          <a:bodyPr vert="horz" wrap="square" lIns="0" tIns="0" rIns="0" bIns="0" rtlCol="0">
+            <a:noAutofit/>
+          </a:bodyPr>
+          <a:lstStyle/>
+          <a:p>
+            <a:r>
+              <a:rPr lang="en-US" altLang="zh-CN" sz="690" b="1">
+                <a:solidFill>
+                  <a:srgbClr val="FFFFFF"/>
+                </a:solidFill>
+                <a:latin typeface="Aptos" panose="020B0004020202020204" pitchFamily="34" charset="0"/>
+              </a:rPr>
+              <a:t>Use the page as the entry point; use GitHub only when the examiner asks for the artifact.</a:t>
+            </a:r>
+            <a:endParaRPr lang="zh-CN" altLang="en-US" sz="690" b="1">
+              <a:solidFill>
+                <a:srgbClr val="FFFFFF"/>
+              </a:solidFill>
+              <a:latin typeface="Aptos" panose="020B0004020202020204" pitchFamily="34" charset="0"/>
+            </a:endParaRPr>
+          </a:p>
+        </p:txBody>
+      </p:sp>
       <p:pic>
         <p:nvPicPr>
-          <p:cNvPr id="44" name="图片 43">
+          <p:cNvPr id="56" name="图片 55">
             <a:hlinkClick r:id="rId4"/>
             <a:extLst>
               <a:ext uri="{FF2B5EF4-FFF2-40B4-BE49-F238E27FC236}">
-                <a16:creationId xmlns:a16="http://schemas.microsoft.com/office/drawing/2014/main" id="{97455876-8DD9-7D6C-82C1-4C50CFDE47E6}"/>
+                <a16:creationId xmlns:a16="http://schemas.microsoft.com/office/drawing/2014/main" id="{F05916D1-5E9A-0DAF-95DE-131E7353CA1A}"/>
               </a:ext>
             </a:extLst>
           </p:cNvPr>
@@ -8751,8 +9386,8 @@
         </p:blipFill>
         <p:spPr>
           <a:xfrm>
-            <a:off x="9245600" y="4749800"/>
-            <a:ext cx="1117600" cy="1117600"/>
+            <a:off x="9194800" y="4749800"/>
+            <a:ext cx="1168400" cy="1168400"/>
           </a:xfrm>
           <a:prstGeom prst="rect">
             <a:avLst/>
@@ -8761,11 +9396,11 @@
       </p:pic>
       <p:sp>
         <p:nvSpPr>
-          <p:cNvPr id="45" name="open-page">
+          <p:cNvPr id="57" name="open-page">
             <a:hlinkClick r:id="rId4"/>
             <a:extLst>
               <a:ext uri="{FF2B5EF4-FFF2-40B4-BE49-F238E27FC236}">
-                <a16:creationId xmlns:a16="http://schemas.microsoft.com/office/drawing/2014/main" id="{B3EACD5D-4B64-8A7F-0525-D2A1095CCDF3}"/>
+                <a16:creationId xmlns:a16="http://schemas.microsoft.com/office/drawing/2014/main" id="{4AE10DA7-FE47-9BAC-B55A-D2D58BE298FA}"/>
               </a:ext>
             </a:extLst>
           </p:cNvPr>
@@ -8774,8 +9409,8 @@
         </p:nvSpPr>
         <p:spPr>
           <a:xfrm>
-            <a:off x="10439400" y="4953000"/>
-            <a:ext cx="889000" cy="279400"/>
+            <a:off x="10464800" y="4978400"/>
+            <a:ext cx="863600" cy="279400"/>
           </a:xfrm>
           <a:prstGeom prst="rect">
             <a:avLst/>
@@ -8830,10 +9465,10 @@
       </p:sp>
       <p:pic>
         <p:nvPicPr>
-          <p:cNvPr id="47" name="图片 46">
-            <a:extLst>
-              <a:ext uri="{FF2B5EF4-FFF2-40B4-BE49-F238E27FC236}">
-                <a16:creationId xmlns:a16="http://schemas.microsoft.com/office/drawing/2014/main" id="{A49FD369-93D7-492C-3F17-063C9CC32346}"/>
+          <p:cNvPr id="59" name="图片 58">
+            <a:extLst>
+              <a:ext uri="{FF2B5EF4-FFF2-40B4-BE49-F238E27FC236}">
+                <a16:creationId xmlns:a16="http://schemas.microsoft.com/office/drawing/2014/main" id="{322D5B39-C9A9-136E-448E-E8112AA96E01}"/>
               </a:ext>
             </a:extLst>
           </p:cNvPr>
@@ -8867,7 +9502,7 @@
     </p:spTree>
     <p:extLst>
       <p:ext uri="{BB962C8B-B14F-4D97-AF65-F5344CB8AC3E}">
-        <p14:creationId xmlns:p14="http://schemas.microsoft.com/office/powerpoint/2010/main" val="511349850"/>
+        <p14:creationId xmlns:p14="http://schemas.microsoft.com/office/powerpoint/2010/main" val="4073593194"/>
       </p:ext>
     </p:extLst>
   </p:cSld>
@@ -8886,6 +9521,92 @@
       </p:transition>
     </mc:Fallback>
   </mc:AlternateContent>
+  <p:timing>
+    <p:tnLst>
+      <p:par>
+        <p:cTn id="1" dur="indefinite" restart="never" nodeType="tmRoot">
+          <p:childTnLst>
+            <p:seq concurrent="1" nextAc="seek">
+              <p:cTn id="2" dur="indefinite" nodeType="mainSeq">
+                <p:childTnLst>
+                  <p:par>
+                    <p:cTn id="3" fill="hold">
+                      <p:stCondLst>
+                        <p:cond delay="indefinite"/>
+                        <p:cond evt="onBegin" delay="0">
+                          <p:tn val="2"/>
+                        </p:cond>
+                      </p:stCondLst>
+                      <p:childTnLst>
+                        <p:par>
+                          <p:cTn id="4" fill="hold">
+                            <p:stCondLst>
+                              <p:cond delay="0"/>
+                            </p:stCondLst>
+                            <p:childTnLst>
+                              <p:par>
+                                <p:cTn id="5" presetID="10" presetClass="entr" presetSubtype="0" fill="hold" nodeType="afterEffect">
+                                  <p:stCondLst>
+                                    <p:cond delay="0"/>
+                                  </p:stCondLst>
+                                  <p:childTnLst>
+                                    <p:set>
+                                      <p:cBhvr>
+                                        <p:cTn id="6" dur="1" fill="hold">
+                                          <p:stCondLst>
+                                            <p:cond delay="0"/>
+                                          </p:stCondLst>
+                                        </p:cTn>
+                                        <p:tgtEl>
+                                          <p:spTgt spid="35"/>
+                                        </p:tgtEl>
+                                        <p:attrNameLst>
+                                          <p:attrName>style.visibility</p:attrName>
+                                        </p:attrNameLst>
+                                      </p:cBhvr>
+                                      <p:to>
+                                        <p:strVal val="visible"/>
+                                      </p:to>
+                                    </p:set>
+                                    <p:animEffect transition="in" filter="fade">
+                                      <p:cBhvr>
+                                        <p:cTn id="7" dur="250"/>
+                                        <p:tgtEl>
+                                          <p:spTgt spid="35"/>
+                                        </p:tgtEl>
+                                      </p:cBhvr>
+                                    </p:animEffect>
+                                  </p:childTnLst>
+                                </p:cTn>
+                              </p:par>
+                            </p:childTnLst>
+                          </p:cTn>
+                        </p:par>
+                      </p:childTnLst>
+                    </p:cTn>
+                  </p:par>
+                </p:childTnLst>
+              </p:cTn>
+              <p:prevCondLst>
+                <p:cond evt="onPrev" delay="0">
+                  <p:tgtEl>
+                    <p:sldTgt/>
+                  </p:tgtEl>
+                </p:cond>
+              </p:prevCondLst>
+              <p:nextCondLst>
+                <p:cond evt="onNext" delay="0">
+                  <p:tgtEl>
+                    <p:sldTgt/>
+                  </p:tgtEl>
+                </p:cond>
+              </p:nextCondLst>
+            </p:seq>
+          </p:childTnLst>
+        </p:cTn>
+      </p:par>
+    </p:tnLst>
+  </p:timing>
 </p:sld>
 </file>
 
@@ -8911,7 +9632,7 @@
           <p:cNvPr id="2" name="page-bg">
             <a:extLst>
               <a:ext uri="{FF2B5EF4-FFF2-40B4-BE49-F238E27FC236}">
-                <a16:creationId xmlns:a16="http://schemas.microsoft.com/office/drawing/2014/main" id="{149B7A56-3CE4-0DB2-7959-8C4E301146FE}"/>
+                <a16:creationId xmlns:a16="http://schemas.microsoft.com/office/drawing/2014/main" id="{5B0A9FD8-A2DD-F52E-BCF5-3C021979708A}"/>
               </a:ext>
             </a:extLst>
           </p:cNvPr>
@@ -8972,7 +9693,7 @@
           <p:cNvPr id="3" name="left-rail">
             <a:extLst>
               <a:ext uri="{FF2B5EF4-FFF2-40B4-BE49-F238E27FC236}">
-                <a16:creationId xmlns:a16="http://schemas.microsoft.com/office/drawing/2014/main" id="{E668E972-957D-F47A-4E81-BAB453C91C5E}"/>
+                <a16:creationId xmlns:a16="http://schemas.microsoft.com/office/drawing/2014/main" id="{7E36D876-05AE-4F5B-8304-25354B2254BD}"/>
               </a:ext>
             </a:extLst>
           </p:cNvPr>
@@ -9033,7 +9754,7 @@
           <p:cNvPr id="4" name="top-line">
             <a:extLst>
               <a:ext uri="{FF2B5EF4-FFF2-40B4-BE49-F238E27FC236}">
-                <a16:creationId xmlns:a16="http://schemas.microsoft.com/office/drawing/2014/main" id="{5007445A-5C7F-4807-68A4-0E928A7C92BB}"/>
+                <a16:creationId xmlns:a16="http://schemas.microsoft.com/office/drawing/2014/main" id="{0A24279B-3D83-CC45-21AC-3E9E05185673}"/>
               </a:ext>
             </a:extLst>
           </p:cNvPr>
@@ -9074,7 +9795,7 @@
           <p:cNvPr id="5" name="footer-left">
             <a:extLst>
               <a:ext uri="{FF2B5EF4-FFF2-40B4-BE49-F238E27FC236}">
-                <a16:creationId xmlns:a16="http://schemas.microsoft.com/office/drawing/2014/main" id="{F08B4FFB-FBCF-7389-7F6E-D57AD5E43C53}"/>
+                <a16:creationId xmlns:a16="http://schemas.microsoft.com/office/drawing/2014/main" id="{6F7CC908-4A6E-4EB2-F7B3-341DD439B4A0}"/>
               </a:ext>
             </a:extLst>
           </p:cNvPr>
@@ -9120,7 +9841,7 @@
           <p:cNvPr id="6" name="footer-mid">
             <a:extLst>
               <a:ext uri="{FF2B5EF4-FFF2-40B4-BE49-F238E27FC236}">
-                <a16:creationId xmlns:a16="http://schemas.microsoft.com/office/drawing/2014/main" id="{FFFF76FC-CC6B-AC7A-5785-4D407ADE0943}"/>
+                <a16:creationId xmlns:a16="http://schemas.microsoft.com/office/drawing/2014/main" id="{8AC41556-9C17-2263-3274-1E07594EF949}"/>
               </a:ext>
             </a:extLst>
           </p:cNvPr>
@@ -9166,7 +9887,7 @@
           <p:cNvPr id="7" name="page-num">
             <a:extLst>
               <a:ext uri="{FF2B5EF4-FFF2-40B4-BE49-F238E27FC236}">
-                <a16:creationId xmlns:a16="http://schemas.microsoft.com/office/drawing/2014/main" id="{954B71ED-3F62-5162-5317-7ED408423A05}"/>
+                <a16:creationId xmlns:a16="http://schemas.microsoft.com/office/drawing/2014/main" id="{3A14BDFE-259C-7AC0-7718-288BBC8BC1EB}"/>
               </a:ext>
             </a:extLst>
           </p:cNvPr>
@@ -9212,7 +9933,7 @@
           <p:cNvPr id="8" name="section-label">
             <a:extLst>
               <a:ext uri="{FF2B5EF4-FFF2-40B4-BE49-F238E27FC236}">
-                <a16:creationId xmlns:a16="http://schemas.microsoft.com/office/drawing/2014/main" id="{6468339F-1BEA-2DE0-3BF7-80A47394FF65}"/>
+                <a16:creationId xmlns:a16="http://schemas.microsoft.com/office/drawing/2014/main" id="{9A7F64F5-27E0-CC70-4221-9CD4FD03F1E3}"/>
               </a:ext>
             </a:extLst>
           </p:cNvPr>
@@ -9258,7 +9979,7 @@
           <p:cNvPr id="10" name="图片 9">
             <a:extLst>
               <a:ext uri="{FF2B5EF4-FFF2-40B4-BE49-F238E27FC236}">
-                <a16:creationId xmlns:a16="http://schemas.microsoft.com/office/drawing/2014/main" id="{8BC574F9-2051-5F16-7A59-2FAA21237E70}"/>
+                <a16:creationId xmlns:a16="http://schemas.microsoft.com/office/drawing/2014/main" id="{E55D7D23-F085-32C1-DB14-49A01139F3C5}"/>
               </a:ext>
             </a:extLst>
           </p:cNvPr>
@@ -9294,7 +10015,7 @@
           <p:cNvPr id="11" name="title">
             <a:extLst>
               <a:ext uri="{FF2B5EF4-FFF2-40B4-BE49-F238E27FC236}">
-                <a16:creationId xmlns:a16="http://schemas.microsoft.com/office/drawing/2014/main" id="{8E9E4AD9-DDFC-AEE5-7BFC-C215AF3A26E8}"/>
+                <a16:creationId xmlns:a16="http://schemas.microsoft.com/office/drawing/2014/main" id="{16CCEA60-C7EE-AE10-7B87-C3F6324E5DD9}"/>
               </a:ext>
             </a:extLst>
           </p:cNvPr>
@@ -9340,7 +10061,7 @@
           <p:cNvPr id="12" name="subtitle">
             <a:extLst>
               <a:ext uri="{FF2B5EF4-FFF2-40B4-BE49-F238E27FC236}">
-                <a16:creationId xmlns:a16="http://schemas.microsoft.com/office/drawing/2014/main" id="{341BE764-EA63-76D4-37B1-3407D14E7F29}"/>
+                <a16:creationId xmlns:a16="http://schemas.microsoft.com/office/drawing/2014/main" id="{80CE461C-1E93-FBEC-34FF-44157749B001}"/>
               </a:ext>
             </a:extLst>
           </p:cNvPr>
@@ -9386,7 +10107,7 @@
           <p:cNvPr id="13" name="terminal">
             <a:extLst>
               <a:ext uri="{FF2B5EF4-FFF2-40B4-BE49-F238E27FC236}">
-                <a16:creationId xmlns:a16="http://schemas.microsoft.com/office/drawing/2014/main" id="{5E1EAE36-6E0A-3D8E-313E-541096873A71}"/>
+                <a16:creationId xmlns:a16="http://schemas.microsoft.com/office/drawing/2014/main" id="{61DA02F9-0753-FF5A-C161-7371233AC050}"/>
               </a:ext>
             </a:extLst>
           </p:cNvPr>
@@ -9447,7 +10168,7 @@
           <p:cNvPr id="14" name="term-title">
             <a:extLst>
               <a:ext uri="{FF2B5EF4-FFF2-40B4-BE49-F238E27FC236}">
-                <a16:creationId xmlns:a16="http://schemas.microsoft.com/office/drawing/2014/main" id="{C42BA89D-BE7B-2049-DCD0-3405DC135636}"/>
+                <a16:creationId xmlns:a16="http://schemas.microsoft.com/office/drawing/2014/main" id="{5DE53C77-ADBC-645D-79EC-23E9FDB08104}"/>
               </a:ext>
             </a:extLst>
           </p:cNvPr>
@@ -9493,7 +10214,7 @@
           <p:cNvPr id="15" name="term-rule">
             <a:extLst>
               <a:ext uri="{FF2B5EF4-FFF2-40B4-BE49-F238E27FC236}">
-                <a16:creationId xmlns:a16="http://schemas.microsoft.com/office/drawing/2014/main" id="{28C5F818-99FD-85D5-C40E-49C9D682BAF0}"/>
+                <a16:creationId xmlns:a16="http://schemas.microsoft.com/office/drawing/2014/main" id="{3BD3747D-31E4-643E-1899-0EDC192468FA}"/>
               </a:ext>
             </a:extLst>
           </p:cNvPr>
@@ -9534,7 +10255,7 @@
           <p:cNvPr id="16" name="terminal-text">
             <a:extLst>
               <a:ext uri="{FF2B5EF4-FFF2-40B4-BE49-F238E27FC236}">
-                <a16:creationId xmlns:a16="http://schemas.microsoft.com/office/drawing/2014/main" id="{9E3D0E4B-1885-3CC9-6C33-8C1406D6B75F}"/>
+                <a16:creationId xmlns:a16="http://schemas.microsoft.com/office/drawing/2014/main" id="{D4CFB558-894E-5C21-52F2-A96B54BB8544}"/>
               </a:ext>
             </a:extLst>
           </p:cNvPr>
@@ -9585,7 +10306,7 @@
           <p:cNvPr id="17" name="check-0">
             <a:extLst>
               <a:ext uri="{FF2B5EF4-FFF2-40B4-BE49-F238E27FC236}">
-                <a16:creationId xmlns:a16="http://schemas.microsoft.com/office/drawing/2014/main" id="{B12B013A-6CB4-A92B-973F-4A7565ADA88D}"/>
+                <a16:creationId xmlns:a16="http://schemas.microsoft.com/office/drawing/2014/main" id="{35D08866-090F-5BEA-A74C-4663861ED213}"/>
               </a:ext>
             </a:extLst>
           </p:cNvPr>
@@ -9639,7 +10360,7 @@
           <p:cNvPr id="18" name="check-title-0">
             <a:extLst>
               <a:ext uri="{FF2B5EF4-FFF2-40B4-BE49-F238E27FC236}">
-                <a16:creationId xmlns:a16="http://schemas.microsoft.com/office/drawing/2014/main" id="{0608C139-D89B-99EE-11DC-913F0B18A1A9}"/>
+                <a16:creationId xmlns:a16="http://schemas.microsoft.com/office/drawing/2014/main" id="{4DBA109B-E54D-430C-706B-0DFC23ED4FA4}"/>
               </a:ext>
             </a:extLst>
           </p:cNvPr>
@@ -9685,7 +10406,7 @@
           <p:cNvPr id="19" name="check-sub-0">
             <a:extLst>
               <a:ext uri="{FF2B5EF4-FFF2-40B4-BE49-F238E27FC236}">
-                <a16:creationId xmlns:a16="http://schemas.microsoft.com/office/drawing/2014/main" id="{2D45CC22-EDC7-88F1-0BEF-DAEA8C2C6BC7}"/>
+                <a16:creationId xmlns:a16="http://schemas.microsoft.com/office/drawing/2014/main" id="{F082B458-D70F-E76B-1E12-2B122BA51FBE}"/>
               </a:ext>
             </a:extLst>
           </p:cNvPr>
@@ -9731,7 +10452,7 @@
           <p:cNvPr id="20" name="check-1">
             <a:extLst>
               <a:ext uri="{FF2B5EF4-FFF2-40B4-BE49-F238E27FC236}">
-                <a16:creationId xmlns:a16="http://schemas.microsoft.com/office/drawing/2014/main" id="{30D2C63E-57C3-6ECF-88A8-A4472B8C3B02}"/>
+                <a16:creationId xmlns:a16="http://schemas.microsoft.com/office/drawing/2014/main" id="{801F5328-A006-0C87-F6FB-7DA666A947A7}"/>
               </a:ext>
             </a:extLst>
           </p:cNvPr>
@@ -9785,7 +10506,7 @@
           <p:cNvPr id="21" name="check-title-1">
             <a:extLst>
               <a:ext uri="{FF2B5EF4-FFF2-40B4-BE49-F238E27FC236}">
-                <a16:creationId xmlns:a16="http://schemas.microsoft.com/office/drawing/2014/main" id="{A8B76122-0E0C-D852-7855-E9764BFC993C}"/>
+                <a16:creationId xmlns:a16="http://schemas.microsoft.com/office/drawing/2014/main" id="{24147A8D-E3AF-3609-5309-132C85A0E2F8}"/>
               </a:ext>
             </a:extLst>
           </p:cNvPr>
@@ -9831,7 +10552,7 @@
           <p:cNvPr id="22" name="check-sub-1">
             <a:extLst>
               <a:ext uri="{FF2B5EF4-FFF2-40B4-BE49-F238E27FC236}">
-                <a16:creationId xmlns:a16="http://schemas.microsoft.com/office/drawing/2014/main" id="{7538C890-E6C1-F777-7055-85EB4FC1A595}"/>
+                <a16:creationId xmlns:a16="http://schemas.microsoft.com/office/drawing/2014/main" id="{EE9FE060-586E-CF64-02DE-71FECC5FF3EE}"/>
               </a:ext>
             </a:extLst>
           </p:cNvPr>
@@ -9877,7 +10598,7 @@
           <p:cNvPr id="23" name="check-2">
             <a:extLst>
               <a:ext uri="{FF2B5EF4-FFF2-40B4-BE49-F238E27FC236}">
-                <a16:creationId xmlns:a16="http://schemas.microsoft.com/office/drawing/2014/main" id="{AE638425-FE85-5466-A2E7-3B8D074F4AE5}"/>
+                <a16:creationId xmlns:a16="http://schemas.microsoft.com/office/drawing/2014/main" id="{AB3AE63D-5AD1-DE0E-C400-812F292CD8A8}"/>
               </a:ext>
             </a:extLst>
           </p:cNvPr>
@@ -9931,7 +10652,7 @@
           <p:cNvPr id="24" name="check-title-2">
             <a:extLst>
               <a:ext uri="{FF2B5EF4-FFF2-40B4-BE49-F238E27FC236}">
-                <a16:creationId xmlns:a16="http://schemas.microsoft.com/office/drawing/2014/main" id="{6249CC81-749C-C631-2D5B-2F8A849429C4}"/>
+                <a16:creationId xmlns:a16="http://schemas.microsoft.com/office/drawing/2014/main" id="{246E4E76-0C40-7717-DF35-1AA2021FFD36}"/>
               </a:ext>
             </a:extLst>
           </p:cNvPr>
@@ -9977,7 +10698,7 @@
           <p:cNvPr id="25" name="check-sub-2">
             <a:extLst>
               <a:ext uri="{FF2B5EF4-FFF2-40B4-BE49-F238E27FC236}">
-                <a16:creationId xmlns:a16="http://schemas.microsoft.com/office/drawing/2014/main" id="{62E773F7-7FAC-7C71-7305-64D168B19DB0}"/>
+                <a16:creationId xmlns:a16="http://schemas.microsoft.com/office/drawing/2014/main" id="{6B87A194-797A-3090-0591-C1429F7DD2C3}"/>
               </a:ext>
             </a:extLst>
           </p:cNvPr>
@@ -10024,7 +10745,7 @@
             <a:hlinkClick r:id="rId4"/>
             <a:extLst>
               <a:ext uri="{FF2B5EF4-FFF2-40B4-BE49-F238E27FC236}">
-                <a16:creationId xmlns:a16="http://schemas.microsoft.com/office/drawing/2014/main" id="{BAF2CB0B-4EC7-E57D-889B-E5306DDC2178}"/>
+                <a16:creationId xmlns:a16="http://schemas.microsoft.com/office/drawing/2014/main" id="{BA4100B1-0DCE-AB30-682A-FAE025456621}"/>
               </a:ext>
             </a:extLst>
           </p:cNvPr>
@@ -10093,7 +10814,7 @@
             <a:hlinkClick r:id="rId5"/>
             <a:extLst>
               <a:ext uri="{FF2B5EF4-FFF2-40B4-BE49-F238E27FC236}">
-                <a16:creationId xmlns:a16="http://schemas.microsoft.com/office/drawing/2014/main" id="{27E599D7-1D24-AC1B-F7BC-FCED251D7A72}"/>
+                <a16:creationId xmlns:a16="http://schemas.microsoft.com/office/drawing/2014/main" id="{B43A1C55-4D07-71AF-1773-040BEFA0C07A}"/>
               </a:ext>
             </a:extLst>
           </p:cNvPr>
@@ -10159,7 +10880,7 @@
     </p:spTree>
     <p:extLst>
       <p:ext uri="{BB962C8B-B14F-4D97-AF65-F5344CB8AC3E}">
-        <p14:creationId xmlns:p14="http://schemas.microsoft.com/office/powerpoint/2010/main" val="4290647337"/>
+        <p14:creationId xmlns:p14="http://schemas.microsoft.com/office/powerpoint/2010/main" val="364623141"/>
       </p:ext>
     </p:extLst>
   </p:cSld>
@@ -10203,7 +10924,7 @@
           <p:cNvPr id="2" name="page-bg">
             <a:extLst>
               <a:ext uri="{FF2B5EF4-FFF2-40B4-BE49-F238E27FC236}">
-                <a16:creationId xmlns:a16="http://schemas.microsoft.com/office/drawing/2014/main" id="{49F7C996-1553-C568-F8F5-F17AC9CB2E87}"/>
+                <a16:creationId xmlns:a16="http://schemas.microsoft.com/office/drawing/2014/main" id="{977BB31B-19E3-5F02-E17A-63285D069DA4}"/>
               </a:ext>
             </a:extLst>
           </p:cNvPr>
@@ -10264,7 +10985,7 @@
           <p:cNvPr id="3" name="left-rail">
             <a:extLst>
               <a:ext uri="{FF2B5EF4-FFF2-40B4-BE49-F238E27FC236}">
-                <a16:creationId xmlns:a16="http://schemas.microsoft.com/office/drawing/2014/main" id="{2541D891-F12F-ACAF-88B5-DBD158458AB4}"/>
+                <a16:creationId xmlns:a16="http://schemas.microsoft.com/office/drawing/2014/main" id="{8D6E5F15-71CE-F6A2-CCEB-BEA2364AEBC6}"/>
               </a:ext>
             </a:extLst>
           </p:cNvPr>
@@ -10325,7 +11046,7 @@
           <p:cNvPr id="4" name="top-line">
             <a:extLst>
               <a:ext uri="{FF2B5EF4-FFF2-40B4-BE49-F238E27FC236}">
-                <a16:creationId xmlns:a16="http://schemas.microsoft.com/office/drawing/2014/main" id="{F4CE04ED-DDEA-3110-B7EE-6188131E8440}"/>
+                <a16:creationId xmlns:a16="http://schemas.microsoft.com/office/drawing/2014/main" id="{DB4CC93D-A84F-2A75-3984-01C4D048CDFD}"/>
               </a:ext>
             </a:extLst>
           </p:cNvPr>
@@ -10366,7 +11087,7 @@
           <p:cNvPr id="5" name="footer-left">
             <a:extLst>
               <a:ext uri="{FF2B5EF4-FFF2-40B4-BE49-F238E27FC236}">
-                <a16:creationId xmlns:a16="http://schemas.microsoft.com/office/drawing/2014/main" id="{7FFD9843-50E8-8E45-B74C-54DCDC5C3001}"/>
+                <a16:creationId xmlns:a16="http://schemas.microsoft.com/office/drawing/2014/main" id="{3E67F96B-5686-4E8B-9124-29324D46478A}"/>
               </a:ext>
             </a:extLst>
           </p:cNvPr>
@@ -10412,7 +11133,7 @@
           <p:cNvPr id="6" name="footer-mid">
             <a:extLst>
               <a:ext uri="{FF2B5EF4-FFF2-40B4-BE49-F238E27FC236}">
-                <a16:creationId xmlns:a16="http://schemas.microsoft.com/office/drawing/2014/main" id="{EB448A0A-438F-4CC0-8258-03AC4E6ACD44}"/>
+                <a16:creationId xmlns:a16="http://schemas.microsoft.com/office/drawing/2014/main" id="{517F82D5-4216-39A1-8488-8C1B98CCC487}"/>
               </a:ext>
             </a:extLst>
           </p:cNvPr>
@@ -10458,7 +11179,7 @@
           <p:cNvPr id="7" name="page-num">
             <a:extLst>
               <a:ext uri="{FF2B5EF4-FFF2-40B4-BE49-F238E27FC236}">
-                <a16:creationId xmlns:a16="http://schemas.microsoft.com/office/drawing/2014/main" id="{A02D3649-257E-7541-3C9F-8EC88E0E445A}"/>
+                <a16:creationId xmlns:a16="http://schemas.microsoft.com/office/drawing/2014/main" id="{E4999577-8DD4-C172-D657-28FDDB21E9F0}"/>
               </a:ext>
             </a:extLst>
           </p:cNvPr>
@@ -10504,7 +11225,7 @@
           <p:cNvPr id="8" name="section-label">
             <a:extLst>
               <a:ext uri="{FF2B5EF4-FFF2-40B4-BE49-F238E27FC236}">
-                <a16:creationId xmlns:a16="http://schemas.microsoft.com/office/drawing/2014/main" id="{04F72763-A0CD-A899-A372-ED8B1849376F}"/>
+                <a16:creationId xmlns:a16="http://schemas.microsoft.com/office/drawing/2014/main" id="{C391D997-A90F-FEB5-8F75-78942D7FB245}"/>
               </a:ext>
             </a:extLst>
           </p:cNvPr>
@@ -10550,7 +11271,7 @@
           <p:cNvPr id="10" name="图片 9">
             <a:extLst>
               <a:ext uri="{FF2B5EF4-FFF2-40B4-BE49-F238E27FC236}">
-                <a16:creationId xmlns:a16="http://schemas.microsoft.com/office/drawing/2014/main" id="{58DB8794-EE3A-1E81-B02F-B8408E54F454}"/>
+                <a16:creationId xmlns:a16="http://schemas.microsoft.com/office/drawing/2014/main" id="{840595A0-388D-039F-D526-372CF03D2034}"/>
               </a:ext>
             </a:extLst>
           </p:cNvPr>
@@ -10586,7 +11307,7 @@
           <p:cNvPr id="11" name="title">
             <a:extLst>
               <a:ext uri="{FF2B5EF4-FFF2-40B4-BE49-F238E27FC236}">
-                <a16:creationId xmlns:a16="http://schemas.microsoft.com/office/drawing/2014/main" id="{BB8D41C1-762D-6055-29AA-D7067000BED1}"/>
+                <a16:creationId xmlns:a16="http://schemas.microsoft.com/office/drawing/2014/main" id="{9DCA57FF-AAD8-D95E-5BBB-B651C6FA40C5}"/>
               </a:ext>
             </a:extLst>
           </p:cNvPr>
@@ -10632,7 +11353,7 @@
           <p:cNvPr id="12" name="subtitle">
             <a:extLst>
               <a:ext uri="{FF2B5EF4-FFF2-40B4-BE49-F238E27FC236}">
-                <a16:creationId xmlns:a16="http://schemas.microsoft.com/office/drawing/2014/main" id="{7C057D71-B849-50AF-8756-7460765A8FC4}"/>
+                <a16:creationId xmlns:a16="http://schemas.microsoft.com/office/drawing/2014/main" id="{792E0E5F-A652-986F-1ACF-7AD532F58C7C}"/>
               </a:ext>
             </a:extLst>
           </p:cNvPr>
@@ -10678,7 +11399,7 @@
           <p:cNvPr id="13" name="def-row-0">
             <a:extLst>
               <a:ext uri="{FF2B5EF4-FFF2-40B4-BE49-F238E27FC236}">
-                <a16:creationId xmlns:a16="http://schemas.microsoft.com/office/drawing/2014/main" id="{F854706E-EE6E-046F-0885-5EDFCD952AC1}"/>
+                <a16:creationId xmlns:a16="http://schemas.microsoft.com/office/drawing/2014/main" id="{42B0A097-3968-4346-4101-DBDCE190085F}"/>
               </a:ext>
             </a:extLst>
           </p:cNvPr>
@@ -10732,7 +11453,7 @@
           <p:cNvPr id="14" name="def-label-0">
             <a:extLst>
               <a:ext uri="{FF2B5EF4-FFF2-40B4-BE49-F238E27FC236}">
-                <a16:creationId xmlns:a16="http://schemas.microsoft.com/office/drawing/2014/main" id="{9B6F8A3D-1C17-F7A6-C661-8EEAB1E2FFFE}"/>
+                <a16:creationId xmlns:a16="http://schemas.microsoft.com/office/drawing/2014/main" id="{1962BAF0-EE75-05A4-B885-6D9C03B084B8}"/>
               </a:ext>
             </a:extLst>
           </p:cNvPr>
@@ -10778,7 +11499,7 @@
           <p:cNvPr id="15" name="def-text-0">
             <a:extLst>
               <a:ext uri="{FF2B5EF4-FFF2-40B4-BE49-F238E27FC236}">
-                <a16:creationId xmlns:a16="http://schemas.microsoft.com/office/drawing/2014/main" id="{189BF288-0FF8-667C-734A-C57300EE96EA}"/>
+                <a16:creationId xmlns:a16="http://schemas.microsoft.com/office/drawing/2014/main" id="{BA275712-8F3F-B0B1-7BE3-AEC3720C0360}"/>
               </a:ext>
             </a:extLst>
           </p:cNvPr>
@@ -10824,7 +11545,7 @@
           <p:cNvPr id="16" name="def-row-1">
             <a:extLst>
               <a:ext uri="{FF2B5EF4-FFF2-40B4-BE49-F238E27FC236}">
-                <a16:creationId xmlns:a16="http://schemas.microsoft.com/office/drawing/2014/main" id="{E59E43AB-061E-9D4A-B8BA-7E935BDE07DF}"/>
+                <a16:creationId xmlns:a16="http://schemas.microsoft.com/office/drawing/2014/main" id="{927A80E6-CC55-6D21-54D4-7EEA779D2EEE}"/>
               </a:ext>
             </a:extLst>
           </p:cNvPr>
@@ -10878,7 +11599,7 @@
           <p:cNvPr id="17" name="def-label-1">
             <a:extLst>
               <a:ext uri="{FF2B5EF4-FFF2-40B4-BE49-F238E27FC236}">
-                <a16:creationId xmlns:a16="http://schemas.microsoft.com/office/drawing/2014/main" id="{3D6562D1-731D-50F0-608E-5FAB2E1CB283}"/>
+                <a16:creationId xmlns:a16="http://schemas.microsoft.com/office/drawing/2014/main" id="{8FB933BA-BA4E-255A-6302-C726612BA7B7}"/>
               </a:ext>
             </a:extLst>
           </p:cNvPr>
@@ -10924,7 +11645,7 @@
           <p:cNvPr id="18" name="def-text-1">
             <a:extLst>
               <a:ext uri="{FF2B5EF4-FFF2-40B4-BE49-F238E27FC236}">
-                <a16:creationId xmlns:a16="http://schemas.microsoft.com/office/drawing/2014/main" id="{1D13C79A-42CA-6C61-68EE-F5D1FACC098A}"/>
+                <a16:creationId xmlns:a16="http://schemas.microsoft.com/office/drawing/2014/main" id="{037E5C09-D2D3-6DA8-D7DC-8C0C3370E91A}"/>
               </a:ext>
             </a:extLst>
           </p:cNvPr>
@@ -10970,7 +11691,7 @@
           <p:cNvPr id="19" name="def-row-2">
             <a:extLst>
               <a:ext uri="{FF2B5EF4-FFF2-40B4-BE49-F238E27FC236}">
-                <a16:creationId xmlns:a16="http://schemas.microsoft.com/office/drawing/2014/main" id="{5102844A-790E-AC7B-451A-CAFC5313DC7D}"/>
+                <a16:creationId xmlns:a16="http://schemas.microsoft.com/office/drawing/2014/main" id="{DCBC3B8E-CC1E-10CC-3475-B6D3B8A9AFD3}"/>
               </a:ext>
             </a:extLst>
           </p:cNvPr>
@@ -11024,7 +11745,7 @@
           <p:cNvPr id="20" name="def-label-2">
             <a:extLst>
               <a:ext uri="{FF2B5EF4-FFF2-40B4-BE49-F238E27FC236}">
-                <a16:creationId xmlns:a16="http://schemas.microsoft.com/office/drawing/2014/main" id="{03A99EF0-6A16-5B0C-1F8B-1656BA0F63BE}"/>
+                <a16:creationId xmlns:a16="http://schemas.microsoft.com/office/drawing/2014/main" id="{A2C2114D-E8A9-5E2A-3B75-676005BAAA5F}"/>
               </a:ext>
             </a:extLst>
           </p:cNvPr>
@@ -11070,7 +11791,7 @@
           <p:cNvPr id="21" name="def-text-2">
             <a:extLst>
               <a:ext uri="{FF2B5EF4-FFF2-40B4-BE49-F238E27FC236}">
-                <a16:creationId xmlns:a16="http://schemas.microsoft.com/office/drawing/2014/main" id="{190F5BBA-01FB-4273-5DCB-8E6C8DB21A0A}"/>
+                <a16:creationId xmlns:a16="http://schemas.microsoft.com/office/drawing/2014/main" id="{D3837056-22CC-C48E-AA99-784142E116E3}"/>
               </a:ext>
             </a:extLst>
           </p:cNvPr>
@@ -11117,7 +11838,7 @@
             <a:hlinkClick r:id="rId4"/>
             <a:extLst>
               <a:ext uri="{FF2B5EF4-FFF2-40B4-BE49-F238E27FC236}">
-                <a16:creationId xmlns:a16="http://schemas.microsoft.com/office/drawing/2014/main" id="{F129AB85-7CCE-521A-E742-FF9B398C6ED1}"/>
+                <a16:creationId xmlns:a16="http://schemas.microsoft.com/office/drawing/2014/main" id="{E73F20DD-D421-FCD0-6041-D403E1B6F457}"/>
               </a:ext>
             </a:extLst>
           </p:cNvPr>
@@ -11183,7 +11904,7 @@
     </p:spTree>
     <p:extLst>
       <p:ext uri="{BB962C8B-B14F-4D97-AF65-F5344CB8AC3E}">
-        <p14:creationId xmlns:p14="http://schemas.microsoft.com/office/powerpoint/2010/main" val="3149325210"/>
+        <p14:creationId xmlns:p14="http://schemas.microsoft.com/office/powerpoint/2010/main" val="1189071874"/>
       </p:ext>
     </p:extLst>
   </p:cSld>
@@ -11227,7 +11948,7 @@
           <p:cNvPr id="2" name="page-bg">
             <a:extLst>
               <a:ext uri="{FF2B5EF4-FFF2-40B4-BE49-F238E27FC236}">
-                <a16:creationId xmlns:a16="http://schemas.microsoft.com/office/drawing/2014/main" id="{B7BD3A76-1D3F-0507-A343-EF79936C2EA1}"/>
+                <a16:creationId xmlns:a16="http://schemas.microsoft.com/office/drawing/2014/main" id="{8F257184-0FB7-DA34-5D84-604A0CB3793A}"/>
               </a:ext>
             </a:extLst>
           </p:cNvPr>
@@ -11288,7 +12009,7 @@
           <p:cNvPr id="3" name="left-rail">
             <a:extLst>
               <a:ext uri="{FF2B5EF4-FFF2-40B4-BE49-F238E27FC236}">
-                <a16:creationId xmlns:a16="http://schemas.microsoft.com/office/drawing/2014/main" id="{2CA5DE6E-E8E2-4DA9-5694-6DAB2CAF1887}"/>
+                <a16:creationId xmlns:a16="http://schemas.microsoft.com/office/drawing/2014/main" id="{DDC89367-0C75-B651-A6AF-B31BCA1B2FB2}"/>
               </a:ext>
             </a:extLst>
           </p:cNvPr>
@@ -11349,7 +12070,7 @@
           <p:cNvPr id="4" name="top-line">
             <a:extLst>
               <a:ext uri="{FF2B5EF4-FFF2-40B4-BE49-F238E27FC236}">
-                <a16:creationId xmlns:a16="http://schemas.microsoft.com/office/drawing/2014/main" id="{A6D3DC05-2A82-D451-888E-D8477E10B431}"/>
+                <a16:creationId xmlns:a16="http://schemas.microsoft.com/office/drawing/2014/main" id="{71CB55C6-8FC5-7171-AF85-5E26A028FCA7}"/>
               </a:ext>
             </a:extLst>
           </p:cNvPr>
@@ -11390,7 +12111,7 @@
           <p:cNvPr id="5" name="footer-left">
             <a:extLst>
               <a:ext uri="{FF2B5EF4-FFF2-40B4-BE49-F238E27FC236}">
-                <a16:creationId xmlns:a16="http://schemas.microsoft.com/office/drawing/2014/main" id="{F65EFB48-379E-6909-9DBB-2870A7369356}"/>
+                <a16:creationId xmlns:a16="http://schemas.microsoft.com/office/drawing/2014/main" id="{9F99F7FB-79E0-C7BB-05BA-51A3D0DA180F}"/>
               </a:ext>
             </a:extLst>
           </p:cNvPr>
@@ -11436,7 +12157,7 @@
           <p:cNvPr id="6" name="footer-mid">
             <a:extLst>
               <a:ext uri="{FF2B5EF4-FFF2-40B4-BE49-F238E27FC236}">
-                <a16:creationId xmlns:a16="http://schemas.microsoft.com/office/drawing/2014/main" id="{4B873CE1-9377-8CE6-B0AC-A0F64139FBE7}"/>
+                <a16:creationId xmlns:a16="http://schemas.microsoft.com/office/drawing/2014/main" id="{0E654F56-238A-8660-3C3D-9B6187EC6FB1}"/>
               </a:ext>
             </a:extLst>
           </p:cNvPr>
@@ -11482,7 +12203,7 @@
           <p:cNvPr id="7" name="page-num">
             <a:extLst>
               <a:ext uri="{FF2B5EF4-FFF2-40B4-BE49-F238E27FC236}">
-                <a16:creationId xmlns:a16="http://schemas.microsoft.com/office/drawing/2014/main" id="{5E87621C-998F-0FEA-BFF0-41F3A88048E9}"/>
+                <a16:creationId xmlns:a16="http://schemas.microsoft.com/office/drawing/2014/main" id="{806D1433-85FD-C09A-2C5C-64A0FF4B4120}"/>
               </a:ext>
             </a:extLst>
           </p:cNvPr>
@@ -11528,7 +12249,7 @@
           <p:cNvPr id="8" name="section-label">
             <a:extLst>
               <a:ext uri="{FF2B5EF4-FFF2-40B4-BE49-F238E27FC236}">
-                <a16:creationId xmlns:a16="http://schemas.microsoft.com/office/drawing/2014/main" id="{6BE22CAB-F30A-8555-E4AD-F308DEDE5F43}"/>
+                <a16:creationId xmlns:a16="http://schemas.microsoft.com/office/drawing/2014/main" id="{A21D51FF-4588-23C9-2983-70F284345FC4}"/>
               </a:ext>
             </a:extLst>
           </p:cNvPr>
@@ -11574,7 +12295,7 @@
           <p:cNvPr id="10" name="图片 9">
             <a:extLst>
               <a:ext uri="{FF2B5EF4-FFF2-40B4-BE49-F238E27FC236}">
-                <a16:creationId xmlns:a16="http://schemas.microsoft.com/office/drawing/2014/main" id="{B3B8DA86-690C-720A-18EA-A4ED3A584776}"/>
+                <a16:creationId xmlns:a16="http://schemas.microsoft.com/office/drawing/2014/main" id="{F69C418A-6EBA-9275-F5DF-E7E2A699A0F9}"/>
               </a:ext>
             </a:extLst>
           </p:cNvPr>
@@ -11610,7 +12331,7 @@
           <p:cNvPr id="11" name="title">
             <a:extLst>
               <a:ext uri="{FF2B5EF4-FFF2-40B4-BE49-F238E27FC236}">
-                <a16:creationId xmlns:a16="http://schemas.microsoft.com/office/drawing/2014/main" id="{F15242C2-9DC2-DE1C-C84A-D8B7E1C333C8}"/>
+                <a16:creationId xmlns:a16="http://schemas.microsoft.com/office/drawing/2014/main" id="{A593D091-0459-2C3D-2576-B209CC1A8A26}"/>
               </a:ext>
             </a:extLst>
           </p:cNvPr>
@@ -11656,7 +12377,7 @@
           <p:cNvPr id="12" name="subtitle">
             <a:extLst>
               <a:ext uri="{FF2B5EF4-FFF2-40B4-BE49-F238E27FC236}">
-                <a16:creationId xmlns:a16="http://schemas.microsoft.com/office/drawing/2014/main" id="{B7978C6D-8457-01D2-EBF8-41EE9185E56C}"/>
+                <a16:creationId xmlns:a16="http://schemas.microsoft.com/office/drawing/2014/main" id="{4A009321-B13A-0BB8-1AB4-BA70B72273C7}"/>
               </a:ext>
             </a:extLst>
           </p:cNvPr>
@@ -11699,10 +12420,10 @@
       </p:sp>
       <p:sp>
         <p:nvSpPr>
-          <p:cNvPr id="13" name="lane-0">
-            <a:extLst>
-              <a:ext uri="{FF2B5EF4-FFF2-40B4-BE49-F238E27FC236}">
-                <a16:creationId xmlns:a16="http://schemas.microsoft.com/office/drawing/2014/main" id="{DCFD73B5-8BD0-686B-6E93-FEF5F06A880E}"/>
+          <p:cNvPr id="13" name="spine">
+            <a:extLst>
+              <a:ext uri="{FF2B5EF4-FFF2-40B4-BE49-F238E27FC236}">
+                <a16:creationId xmlns:a16="http://schemas.microsoft.com/office/drawing/2014/main" id="{EF96F849-9A89-31E3-AF45-494D6A68ACCC}"/>
               </a:ext>
             </a:extLst>
           </p:cNvPr>
@@ -11711,14 +12432,14 @@
         </p:nvSpPr>
         <p:spPr>
           <a:xfrm>
-            <a:off x="787400" y="2032000"/>
-            <a:ext cx="1879600" cy="2159000"/>
+            <a:off x="1270000" y="3098800"/>
+            <a:ext cx="9652000" cy="38100"/>
           </a:xfrm>
           <a:prstGeom prst="rect">
             <a:avLst/>
           </a:prstGeom>
           <a:solidFill>
-            <a:srgbClr val="FFFFFF"/>
+            <a:srgbClr val="D2DCEB"/>
           </a:solidFill>
           <a:ln w="12700">
             <a:solidFill>
@@ -11753,10 +12474,10 @@
       </p:sp>
       <p:sp>
         <p:nvSpPr>
-          <p:cNvPr id="14" name="lane-band-0">
-            <a:extLst>
-              <a:ext uri="{FF2B5EF4-FFF2-40B4-BE49-F238E27FC236}">
-                <a16:creationId xmlns:a16="http://schemas.microsoft.com/office/drawing/2014/main" id="{F6E59EE3-5A41-BABC-D56E-EDB65E518E66}"/>
+          <p:cNvPr id="14" name="node-0">
+            <a:extLst>
+              <a:ext uri="{FF2B5EF4-FFF2-40B4-BE49-F238E27FC236}">
+                <a16:creationId xmlns:a16="http://schemas.microsoft.com/office/drawing/2014/main" id="{61E8BE79-6B1D-54F8-FDE3-4E15C15372B2}"/>
               </a:ext>
             </a:extLst>
           </p:cNvPr>
@@ -11765,8 +12486,8 @@
         </p:nvSpPr>
         <p:spPr>
           <a:xfrm>
-            <a:off x="787400" y="2032000"/>
-            <a:ext cx="1879600" cy="76200"/>
+            <a:off x="1600200" y="2794000"/>
+            <a:ext cx="609600" cy="609600"/>
           </a:xfrm>
           <a:prstGeom prst="rect">
             <a:avLst/>
@@ -11807,10 +12528,10 @@
       </p:sp>
       <p:sp>
         <p:nvSpPr>
-          <p:cNvPr id="15" name="lane-title-0">
-            <a:extLst>
-              <a:ext uri="{FF2B5EF4-FFF2-40B4-BE49-F238E27FC236}">
-                <a16:creationId xmlns:a16="http://schemas.microsoft.com/office/drawing/2014/main" id="{CB4FDCDB-A7AF-F2D5-51B1-F91DA7649E61}"/>
+          <p:cNvPr id="15" name="node-num-0">
+            <a:extLst>
+              <a:ext uri="{FF2B5EF4-FFF2-40B4-BE49-F238E27FC236}">
+                <a16:creationId xmlns:a16="http://schemas.microsoft.com/office/drawing/2014/main" id="{41DBB8A2-B15B-EEBF-E24A-DD7B26E55B81}"/>
               </a:ext>
             </a:extLst>
           </p:cNvPr>
@@ -11819,8 +12540,8 @@
         </p:nvSpPr>
         <p:spPr>
           <a:xfrm>
-            <a:off x="965200" y="2387600"/>
-            <a:ext cx="1498600" cy="276999"/>
+            <a:off x="1790700" y="2984500"/>
+            <a:ext cx="228600" cy="276999"/>
           </a:xfrm>
           <a:prstGeom prst="rect">
             <a:avLst/>
@@ -11834,7 +12555,99 @@
           <a:lstStyle/>
           <a:p>
             <a:r>
-              <a:rPr lang="en-US" altLang="zh-CN" sz="1050" b="1">
+              <a:rPr lang="en-US" altLang="zh-CN" sz="900" b="1">
+                <a:solidFill>
+                  <a:srgbClr val="FFFFFF"/>
+                </a:solidFill>
+                <a:latin typeface="Aptos" panose="020B0004020202020204" pitchFamily="34" charset="0"/>
+              </a:rPr>
+              <a:t>1</a:t>
+            </a:r>
+            <a:endParaRPr lang="zh-CN" altLang="en-US" sz="900" b="1">
+              <a:solidFill>
+                <a:srgbClr val="FFFFFF"/>
+              </a:solidFill>
+              <a:latin typeface="Aptos" panose="020B0004020202020204" pitchFamily="34" charset="0"/>
+            </a:endParaRPr>
+          </a:p>
+        </p:txBody>
+      </p:sp>
+      <p:sp>
+        <p:nvSpPr>
+          <p:cNvPr id="16" name="lane-kind-0">
+            <a:extLst>
+              <a:ext uri="{FF2B5EF4-FFF2-40B4-BE49-F238E27FC236}">
+                <a16:creationId xmlns:a16="http://schemas.microsoft.com/office/drawing/2014/main" id="{E9F3A675-D7F7-EA66-7327-09C0875CDF62}"/>
+              </a:ext>
+            </a:extLst>
+          </p:cNvPr>
+          <p:cNvSpPr txBox="1"/>
+          <p:nvPr/>
+        </p:nvSpPr>
+        <p:spPr>
+          <a:xfrm>
+            <a:off x="939800" y="2082800"/>
+            <a:ext cx="1905000" cy="276999"/>
+          </a:xfrm>
+          <a:prstGeom prst="rect">
+            <a:avLst/>
+          </a:prstGeom>
+          <a:noFill/>
+        </p:spPr>
+        <p:txBody>
+          <a:bodyPr vert="horz" wrap="square" lIns="0" tIns="0" rIns="0" bIns="0" rtlCol="0">
+            <a:noAutofit/>
+          </a:bodyPr>
+          <a:lstStyle/>
+          <a:p>
+            <a:r>
+              <a:rPr lang="en-US" altLang="zh-CN" sz="700" b="1">
+                <a:solidFill>
+                  <a:srgbClr val="536580"/>
+                </a:solidFill>
+                <a:latin typeface="Aptos" panose="020B0004020202020204" pitchFamily="34" charset="0"/>
+              </a:rPr>
+              <a:t>Benchmark</a:t>
+            </a:r>
+            <a:endParaRPr lang="zh-CN" altLang="en-US" sz="700" b="1">
+              <a:solidFill>
+                <a:srgbClr val="536580"/>
+              </a:solidFill>
+              <a:latin typeface="Aptos" panose="020B0004020202020204" pitchFamily="34" charset="0"/>
+            </a:endParaRPr>
+          </a:p>
+        </p:txBody>
+      </p:sp>
+      <p:sp>
+        <p:nvSpPr>
+          <p:cNvPr id="17" name="lane-title-0">
+            <a:extLst>
+              <a:ext uri="{FF2B5EF4-FFF2-40B4-BE49-F238E27FC236}">
+                <a16:creationId xmlns:a16="http://schemas.microsoft.com/office/drawing/2014/main" id="{107B1CA7-17E6-9874-3537-84FF0ECCDFB7}"/>
+              </a:ext>
+            </a:extLst>
+          </p:cNvPr>
+          <p:cNvSpPr txBox="1"/>
+          <p:nvPr/>
+        </p:nvSpPr>
+        <p:spPr>
+          <a:xfrm>
+            <a:off x="939800" y="2336800"/>
+            <a:ext cx="1905000" cy="276999"/>
+          </a:xfrm>
+          <a:prstGeom prst="rect">
+            <a:avLst/>
+          </a:prstGeom>
+          <a:noFill/>
+        </p:spPr>
+        <p:txBody>
+          <a:bodyPr vert="horz" wrap="square" lIns="0" tIns="0" rIns="0" bIns="0" rtlCol="0">
+            <a:noAutofit/>
+          </a:bodyPr>
+          <a:lstStyle/>
+          <a:p>
+            <a:r>
+              <a:rPr lang="en-US" altLang="zh-CN" sz="1150" b="1">
                 <a:solidFill>
                   <a:srgbClr val="0D182C"/>
                 </a:solidFill>
@@ -11842,7 +12655,7 @@
               </a:rPr>
               <a:t>CodeMarkBench</a:t>
             </a:r>
-            <a:endParaRPr lang="zh-CN" altLang="en-US" sz="1050" b="1">
+            <a:endParaRPr lang="zh-CN" altLang="en-US" sz="1150" b="1">
               <a:solidFill>
                 <a:srgbClr val="0D182C"/>
               </a:solidFill>
@@ -11853,102 +12666,10 @@
       </p:sp>
       <p:sp>
         <p:nvSpPr>
-          <p:cNvPr id="16" name="lane-target-0">
-            <a:extLst>
-              <a:ext uri="{FF2B5EF4-FFF2-40B4-BE49-F238E27FC236}">
-                <a16:creationId xmlns:a16="http://schemas.microsoft.com/office/drawing/2014/main" id="{A54A7DD6-92F9-D4C6-68A1-B143A8840D0F}"/>
-              </a:ext>
-            </a:extLst>
-          </p:cNvPr>
-          <p:cNvSpPr txBox="1"/>
-          <p:nvPr/>
-        </p:nvSpPr>
-        <p:spPr>
-          <a:xfrm>
-            <a:off x="965200" y="2997200"/>
-            <a:ext cx="1498600" cy="276999"/>
-          </a:xfrm>
-          <a:prstGeom prst="rect">
-            <a:avLst/>
-          </a:prstGeom>
-          <a:noFill/>
-        </p:spPr>
-        <p:txBody>
-          <a:bodyPr vert="horz" wrap="square" lIns="0" tIns="0" rIns="0" bIns="0" rtlCol="0">
-            <a:noAutofit/>
-          </a:bodyPr>
-          <a:lstStyle/>
-          <a:p>
-            <a:r>
-              <a:rPr lang="en-US" altLang="zh-CN" sz="800" b="1">
-                <a:solidFill>
-                  <a:srgbClr val="004080"/>
-                </a:solidFill>
-                <a:latin typeface="Aptos" panose="020B0004020202020204" pitchFamily="34" charset="0"/>
-              </a:rPr>
-              <a:t>TOSEM target</a:t>
-            </a:r>
-            <a:endParaRPr lang="zh-CN" altLang="en-US" sz="800" b="1">
-              <a:solidFill>
-                <a:srgbClr val="004080"/>
-              </a:solidFill>
-              <a:latin typeface="Aptos" panose="020B0004020202020204" pitchFamily="34" charset="0"/>
-            </a:endParaRPr>
-          </a:p>
-        </p:txBody>
-      </p:sp>
-      <p:sp>
-        <p:nvSpPr>
-          <p:cNvPr id="17" name="lane-sub-0">
-            <a:extLst>
-              <a:ext uri="{FF2B5EF4-FFF2-40B4-BE49-F238E27FC236}">
-                <a16:creationId xmlns:a16="http://schemas.microsoft.com/office/drawing/2014/main" id="{1054C98A-852F-E987-318E-106E0A0F4C79}"/>
-              </a:ext>
-            </a:extLst>
-          </p:cNvPr>
-          <p:cNvSpPr txBox="1"/>
-          <p:nvPr/>
-        </p:nvSpPr>
-        <p:spPr>
-          <a:xfrm>
-            <a:off x="965200" y="3479800"/>
-            <a:ext cx="1498600" cy="276999"/>
-          </a:xfrm>
-          <a:prstGeom prst="rect">
-            <a:avLst/>
-          </a:prstGeom>
-          <a:noFill/>
-        </p:spPr>
-        <p:txBody>
-          <a:bodyPr vert="horz" wrap="square" lIns="0" tIns="0" rIns="0" bIns="0" rtlCol="0">
-            <a:noAutofit/>
-          </a:bodyPr>
-          <a:lstStyle/>
-          <a:p>
-            <a:r>
-              <a:rPr lang="en-US" altLang="zh-CN" sz="740">
-                <a:solidFill>
-                  <a:srgbClr val="536580"/>
-                </a:solidFill>
-                <a:latin typeface="Aptos" panose="020B0004020202020204" pitchFamily="34" charset="0"/>
-              </a:rPr>
-              <a:t>benchmark denominator</a:t>
-            </a:r>
-            <a:endParaRPr lang="zh-CN" altLang="en-US" sz="740">
-              <a:solidFill>
-                <a:srgbClr val="536580"/>
-              </a:solidFill>
-              <a:latin typeface="Aptos" panose="020B0004020202020204" pitchFamily="34" charset="0"/>
-            </a:endParaRPr>
-          </a:p>
-        </p:txBody>
-      </p:sp>
-      <p:sp>
-        <p:nvSpPr>
-          <p:cNvPr id="18" name="lane-1">
-            <a:extLst>
-              <a:ext uri="{FF2B5EF4-FFF2-40B4-BE49-F238E27FC236}">
-                <a16:creationId xmlns:a16="http://schemas.microsoft.com/office/drawing/2014/main" id="{35D91016-6F6F-9FDA-300D-782383656D3D}"/>
+          <p:cNvPr id="18" name="lane-target-box-0">
+            <a:extLst>
+              <a:ext uri="{FF2B5EF4-FFF2-40B4-BE49-F238E27FC236}">
+                <a16:creationId xmlns:a16="http://schemas.microsoft.com/office/drawing/2014/main" id="{0EAAADD2-831D-E668-814C-C3B3BBAB9EDC}"/>
               </a:ext>
             </a:extLst>
           </p:cNvPr>
@@ -11957,18 +12678,18 @@
         </p:nvSpPr>
         <p:spPr>
           <a:xfrm>
-            <a:off x="2971800" y="2032000"/>
-            <a:ext cx="1879600" cy="2159000"/>
+            <a:off x="939800" y="3708400"/>
+            <a:ext cx="1905000" cy="381000"/>
           </a:xfrm>
           <a:prstGeom prst="rect">
             <a:avLst/>
           </a:prstGeom>
           <a:solidFill>
-            <a:srgbClr val="FFFFFF"/>
+            <a:srgbClr val="EFF6FF"/>
           </a:solidFill>
           <a:ln w="12700">
             <a:solidFill>
-              <a:srgbClr val="D2DCEB"/>
+              <a:srgbClr val="AFCDF5"/>
             </a:solidFill>
           </a:ln>
         </p:spPr>
@@ -11999,10 +12720,102 @@
       </p:sp>
       <p:sp>
         <p:nvSpPr>
-          <p:cNvPr id="19" name="lane-band-1">
-            <a:extLst>
-              <a:ext uri="{FF2B5EF4-FFF2-40B4-BE49-F238E27FC236}">
-                <a16:creationId xmlns:a16="http://schemas.microsoft.com/office/drawing/2014/main" id="{02D0F7B6-A8E8-77B0-3ED5-CFB24910084E}"/>
+          <p:cNvPr id="19" name="lane-target-0">
+            <a:extLst>
+              <a:ext uri="{FF2B5EF4-FFF2-40B4-BE49-F238E27FC236}">
+                <a16:creationId xmlns:a16="http://schemas.microsoft.com/office/drawing/2014/main" id="{B030AE9E-1D4C-287C-D14B-DCDA3191FBD3}"/>
+              </a:ext>
+            </a:extLst>
+          </p:cNvPr>
+          <p:cNvSpPr txBox="1"/>
+          <p:nvPr/>
+        </p:nvSpPr>
+        <p:spPr>
+          <a:xfrm>
+            <a:off x="1143000" y="3835400"/>
+            <a:ext cx="1498600" cy="276999"/>
+          </a:xfrm>
+          <a:prstGeom prst="rect">
+            <a:avLst/>
+          </a:prstGeom>
+          <a:noFill/>
+        </p:spPr>
+        <p:txBody>
+          <a:bodyPr vert="horz" wrap="square" lIns="0" tIns="0" rIns="0" bIns="0" rtlCol="0">
+            <a:noAutofit/>
+          </a:bodyPr>
+          <a:lstStyle/>
+          <a:p>
+            <a:r>
+              <a:rPr lang="en-US" altLang="zh-CN" sz="720" b="1">
+                <a:solidFill>
+                  <a:srgbClr val="004080"/>
+                </a:solidFill>
+                <a:latin typeface="Aptos" panose="020B0004020202020204" pitchFamily="34" charset="0"/>
+              </a:rPr>
+              <a:t>TOSEM target</a:t>
+            </a:r>
+            <a:endParaRPr lang="zh-CN" altLang="en-US" sz="720" b="1">
+              <a:solidFill>
+                <a:srgbClr val="004080"/>
+              </a:solidFill>
+              <a:latin typeface="Aptos" panose="020B0004020202020204" pitchFamily="34" charset="0"/>
+            </a:endParaRPr>
+          </a:p>
+        </p:txBody>
+      </p:sp>
+      <p:sp>
+        <p:nvSpPr>
+          <p:cNvPr id="20" name="lane-sub-0">
+            <a:extLst>
+              <a:ext uri="{FF2B5EF4-FFF2-40B4-BE49-F238E27FC236}">
+                <a16:creationId xmlns:a16="http://schemas.microsoft.com/office/drawing/2014/main" id="{B65954C4-18DD-2755-DFC3-AC76AB152B9F}"/>
+              </a:ext>
+            </a:extLst>
+          </p:cNvPr>
+          <p:cNvSpPr txBox="1"/>
+          <p:nvPr/>
+        </p:nvSpPr>
+        <p:spPr>
+          <a:xfrm>
+            <a:off x="939800" y="4318000"/>
+            <a:ext cx="1905000" cy="276999"/>
+          </a:xfrm>
+          <a:prstGeom prst="rect">
+            <a:avLst/>
+          </a:prstGeom>
+          <a:noFill/>
+        </p:spPr>
+        <p:txBody>
+          <a:bodyPr vert="horz" wrap="square" lIns="0" tIns="0" rIns="0" bIns="0" rtlCol="0">
+            <a:noAutofit/>
+          </a:bodyPr>
+          <a:lstStyle/>
+          <a:p>
+            <a:r>
+              <a:rPr lang="en-US" altLang="zh-CN" sz="740">
+                <a:solidFill>
+                  <a:srgbClr val="536580"/>
+                </a:solidFill>
+                <a:latin typeface="Aptos" panose="020B0004020202020204" pitchFamily="34" charset="0"/>
+              </a:rPr>
+              <a:t>executable denominator</a:t>
+            </a:r>
+            <a:endParaRPr lang="zh-CN" altLang="en-US" sz="740">
+              <a:solidFill>
+                <a:srgbClr val="536580"/>
+              </a:solidFill>
+              <a:latin typeface="Aptos" panose="020B0004020202020204" pitchFamily="34" charset="0"/>
+            </a:endParaRPr>
+          </a:p>
+        </p:txBody>
+      </p:sp>
+      <p:sp>
+        <p:nvSpPr>
+          <p:cNvPr id="21" name="node-1">
+            <a:extLst>
+              <a:ext uri="{FF2B5EF4-FFF2-40B4-BE49-F238E27FC236}">
+                <a16:creationId xmlns:a16="http://schemas.microsoft.com/office/drawing/2014/main" id="{0915D067-8266-B042-8359-CE0DB1AE3707}"/>
               </a:ext>
             </a:extLst>
           </p:cNvPr>
@@ -12011,8 +12824,8 @@
         </p:nvSpPr>
         <p:spPr>
           <a:xfrm>
-            <a:off x="2971800" y="2032000"/>
-            <a:ext cx="1879600" cy="76200"/>
+            <a:off x="3860800" y="2794000"/>
+            <a:ext cx="609600" cy="609600"/>
           </a:xfrm>
           <a:prstGeom prst="rect">
             <a:avLst/>
@@ -12053,10 +12866,10 @@
       </p:sp>
       <p:sp>
         <p:nvSpPr>
-          <p:cNvPr id="20" name="lane-title-1">
-            <a:extLst>
-              <a:ext uri="{FF2B5EF4-FFF2-40B4-BE49-F238E27FC236}">
-                <a16:creationId xmlns:a16="http://schemas.microsoft.com/office/drawing/2014/main" id="{2ED275C9-5107-1A3E-8C22-CB3599B8628F}"/>
+          <p:cNvPr id="22" name="node-num-1">
+            <a:extLst>
+              <a:ext uri="{FF2B5EF4-FFF2-40B4-BE49-F238E27FC236}">
+                <a16:creationId xmlns:a16="http://schemas.microsoft.com/office/drawing/2014/main" id="{20C0B2FA-9CC1-98B4-D40F-651565E986E0}"/>
               </a:ext>
             </a:extLst>
           </p:cNvPr>
@@ -12065,8 +12878,8 @@
         </p:nvSpPr>
         <p:spPr>
           <a:xfrm>
-            <a:off x="3149600" y="2387600"/>
-            <a:ext cx="1498600" cy="276999"/>
+            <a:off x="4051300" y="2984500"/>
+            <a:ext cx="228600" cy="276999"/>
           </a:xfrm>
           <a:prstGeom prst="rect">
             <a:avLst/>
@@ -12080,7 +12893,99 @@
           <a:lstStyle/>
           <a:p>
             <a:r>
-              <a:rPr lang="en-US" altLang="zh-CN" sz="1050" b="1">
+              <a:rPr lang="en-US" altLang="zh-CN" sz="900" b="1">
+                <a:solidFill>
+                  <a:srgbClr val="FFFFFF"/>
+                </a:solidFill>
+                <a:latin typeface="Aptos" panose="020B0004020202020204" pitchFamily="34" charset="0"/>
+              </a:rPr>
+              <a:t>2</a:t>
+            </a:r>
+            <a:endParaRPr lang="zh-CN" altLang="en-US" sz="900" b="1">
+              <a:solidFill>
+                <a:srgbClr val="FFFFFF"/>
+              </a:solidFill>
+              <a:latin typeface="Aptos" panose="020B0004020202020204" pitchFamily="34" charset="0"/>
+            </a:endParaRPr>
+          </a:p>
+        </p:txBody>
+      </p:sp>
+      <p:sp>
+        <p:nvSpPr>
+          <p:cNvPr id="23" name="lane-kind-1">
+            <a:extLst>
+              <a:ext uri="{FF2B5EF4-FFF2-40B4-BE49-F238E27FC236}">
+                <a16:creationId xmlns:a16="http://schemas.microsoft.com/office/drawing/2014/main" id="{4017E17E-5D8C-AC9F-6DA9-005A96D4967E}"/>
+              </a:ext>
+            </a:extLst>
+          </p:cNvPr>
+          <p:cNvSpPr txBox="1"/>
+          <p:nvPr/>
+        </p:nvSpPr>
+        <p:spPr>
+          <a:xfrm>
+            <a:off x="3200400" y="2082800"/>
+            <a:ext cx="1905000" cy="276999"/>
+          </a:xfrm>
+          <a:prstGeom prst="rect">
+            <a:avLst/>
+          </a:prstGeom>
+          <a:noFill/>
+        </p:spPr>
+        <p:txBody>
+          <a:bodyPr vert="horz" wrap="square" lIns="0" tIns="0" rIns="0" bIns="0" rtlCol="0">
+            <a:noAutofit/>
+          </a:bodyPr>
+          <a:lstStyle/>
+          <a:p>
+            <a:r>
+              <a:rPr lang="en-US" altLang="zh-CN" sz="700" b="1">
+                <a:solidFill>
+                  <a:srgbClr val="536580"/>
+                </a:solidFill>
+                <a:latin typeface="Aptos" panose="020B0004020202020204" pitchFamily="34" charset="0"/>
+              </a:rPr>
+              <a:t>White-box</a:t>
+            </a:r>
+            <a:endParaRPr lang="zh-CN" altLang="en-US" sz="700" b="1">
+              <a:solidFill>
+                <a:srgbClr val="536580"/>
+              </a:solidFill>
+              <a:latin typeface="Aptos" panose="020B0004020202020204" pitchFamily="34" charset="0"/>
+            </a:endParaRPr>
+          </a:p>
+        </p:txBody>
+      </p:sp>
+      <p:sp>
+        <p:nvSpPr>
+          <p:cNvPr id="24" name="lane-title-1">
+            <a:extLst>
+              <a:ext uri="{FF2B5EF4-FFF2-40B4-BE49-F238E27FC236}">
+                <a16:creationId xmlns:a16="http://schemas.microsoft.com/office/drawing/2014/main" id="{4E746853-52A1-9B03-250C-F145266DCBEF}"/>
+              </a:ext>
+            </a:extLst>
+          </p:cNvPr>
+          <p:cNvSpPr txBox="1"/>
+          <p:nvPr/>
+        </p:nvSpPr>
+        <p:spPr>
+          <a:xfrm>
+            <a:off x="3200400" y="2336800"/>
+            <a:ext cx="1905000" cy="276999"/>
+          </a:xfrm>
+          <a:prstGeom prst="rect">
+            <a:avLst/>
+          </a:prstGeom>
+          <a:noFill/>
+        </p:spPr>
+        <p:txBody>
+          <a:bodyPr vert="horz" wrap="square" lIns="0" tIns="0" rIns="0" bIns="0" rtlCol="0">
+            <a:noAutofit/>
+          </a:bodyPr>
+          <a:lstStyle/>
+          <a:p>
+            <a:r>
+              <a:rPr lang="en-US" altLang="zh-CN" sz="1150" b="1">
                 <a:solidFill>
                   <a:srgbClr val="0D182C"/>
                 </a:solidFill>
@@ -12088,7 +12993,7 @@
               </a:rPr>
               <a:t>SemCodebook</a:t>
             </a:r>
-            <a:endParaRPr lang="zh-CN" altLang="en-US" sz="1050" b="1">
+            <a:endParaRPr lang="zh-CN" altLang="en-US" sz="1150" b="1">
               <a:solidFill>
                 <a:srgbClr val="0D182C"/>
               </a:solidFill>
@@ -12099,102 +13004,10 @@
       </p:sp>
       <p:sp>
         <p:nvSpPr>
-          <p:cNvPr id="21" name="lane-target-1">
-            <a:extLst>
-              <a:ext uri="{FF2B5EF4-FFF2-40B4-BE49-F238E27FC236}">
-                <a16:creationId xmlns:a16="http://schemas.microsoft.com/office/drawing/2014/main" id="{BDC0C369-9D5A-0D3B-3B7B-458E5431F58F}"/>
-              </a:ext>
-            </a:extLst>
-          </p:cNvPr>
-          <p:cNvSpPr txBox="1"/>
-          <p:nvPr/>
-        </p:nvSpPr>
-        <p:spPr>
-          <a:xfrm>
-            <a:off x="3149600" y="2997200"/>
-            <a:ext cx="1498600" cy="276999"/>
-          </a:xfrm>
-          <a:prstGeom prst="rect">
-            <a:avLst/>
-          </a:prstGeom>
-          <a:noFill/>
-        </p:spPr>
-        <p:txBody>
-          <a:bodyPr vert="horz" wrap="square" lIns="0" tIns="0" rIns="0" bIns="0" rtlCol="0">
-            <a:noAutofit/>
-          </a:bodyPr>
-          <a:lstStyle/>
-          <a:p>
-            <a:r>
-              <a:rPr lang="en-US" altLang="zh-CN" sz="800" b="1">
-                <a:solidFill>
-                  <a:srgbClr val="004080"/>
-                </a:solidFill>
-                <a:latin typeface="Aptos" panose="020B0004020202020204" pitchFamily="34" charset="0"/>
-              </a:rPr>
-              <a:t>EMNLP target</a:t>
-            </a:r>
-            <a:endParaRPr lang="zh-CN" altLang="en-US" sz="800" b="1">
-              <a:solidFill>
-                <a:srgbClr val="004080"/>
-              </a:solidFill>
-              <a:latin typeface="Aptos" panose="020B0004020202020204" pitchFamily="34" charset="0"/>
-            </a:endParaRPr>
-          </a:p>
-        </p:txBody>
-      </p:sp>
-      <p:sp>
-        <p:nvSpPr>
-          <p:cNvPr id="22" name="lane-sub-1">
-            <a:extLst>
-              <a:ext uri="{FF2B5EF4-FFF2-40B4-BE49-F238E27FC236}">
-                <a16:creationId xmlns:a16="http://schemas.microsoft.com/office/drawing/2014/main" id="{9ACA81B0-85F2-B674-1637-40AE3BBB81A4}"/>
-              </a:ext>
-            </a:extLst>
-          </p:cNvPr>
-          <p:cNvSpPr txBox="1"/>
-          <p:nvPr/>
-        </p:nvSpPr>
-        <p:spPr>
-          <a:xfrm>
-            <a:off x="3149600" y="3479800"/>
-            <a:ext cx="1498600" cy="276999"/>
-          </a:xfrm>
-          <a:prstGeom prst="rect">
-            <a:avLst/>
-          </a:prstGeom>
-          <a:noFill/>
-        </p:spPr>
-        <p:txBody>
-          <a:bodyPr vert="horz" wrap="square" lIns="0" tIns="0" rIns="0" bIns="0" rtlCol="0">
-            <a:noAutofit/>
-          </a:bodyPr>
-          <a:lstStyle/>
-          <a:p>
-            <a:r>
-              <a:rPr lang="en-US" altLang="zh-CN" sz="740">
-                <a:solidFill>
-                  <a:srgbClr val="536580"/>
-                </a:solidFill>
-                <a:latin typeface="Aptos" panose="020B0004020202020204" pitchFamily="34" charset="0"/>
-              </a:rPr>
-              <a:t>white-box recovery</a:t>
-            </a:r>
-            <a:endParaRPr lang="zh-CN" altLang="en-US" sz="740">
-              <a:solidFill>
-                <a:srgbClr val="536580"/>
-              </a:solidFill>
-              <a:latin typeface="Aptos" panose="020B0004020202020204" pitchFamily="34" charset="0"/>
-            </a:endParaRPr>
-          </a:p>
-        </p:txBody>
-      </p:sp>
-      <p:sp>
-        <p:nvSpPr>
-          <p:cNvPr id="23" name="lane-2">
-            <a:extLst>
-              <a:ext uri="{FF2B5EF4-FFF2-40B4-BE49-F238E27FC236}">
-                <a16:creationId xmlns:a16="http://schemas.microsoft.com/office/drawing/2014/main" id="{401E846A-E11C-C4FC-1846-BCEDC050F9EE}"/>
+          <p:cNvPr id="25" name="lane-target-box-1">
+            <a:extLst>
+              <a:ext uri="{FF2B5EF4-FFF2-40B4-BE49-F238E27FC236}">
+                <a16:creationId xmlns:a16="http://schemas.microsoft.com/office/drawing/2014/main" id="{A412B472-3F5F-B6E3-F935-433B090985AC}"/>
               </a:ext>
             </a:extLst>
           </p:cNvPr>
@@ -12203,18 +13016,18 @@
         </p:nvSpPr>
         <p:spPr>
           <a:xfrm>
-            <a:off x="5156200" y="2032000"/>
-            <a:ext cx="1879600" cy="2159000"/>
+            <a:off x="3200400" y="3708400"/>
+            <a:ext cx="1905000" cy="381000"/>
           </a:xfrm>
           <a:prstGeom prst="rect">
             <a:avLst/>
           </a:prstGeom>
           <a:solidFill>
-            <a:srgbClr val="FFFFFF"/>
+            <a:srgbClr val="EFF6FF"/>
           </a:solidFill>
           <a:ln w="12700">
             <a:solidFill>
-              <a:srgbClr val="D2DCEB"/>
+              <a:srgbClr val="AFCDF5"/>
             </a:solidFill>
           </a:ln>
         </p:spPr>
@@ -12245,10 +13058,102 @@
       </p:sp>
       <p:sp>
         <p:nvSpPr>
-          <p:cNvPr id="24" name="lane-band-2">
-            <a:extLst>
-              <a:ext uri="{FF2B5EF4-FFF2-40B4-BE49-F238E27FC236}">
-                <a16:creationId xmlns:a16="http://schemas.microsoft.com/office/drawing/2014/main" id="{EEC039FE-0D6B-86AE-7E2B-6502AA3FA9DC}"/>
+          <p:cNvPr id="26" name="lane-target-1">
+            <a:extLst>
+              <a:ext uri="{FF2B5EF4-FFF2-40B4-BE49-F238E27FC236}">
+                <a16:creationId xmlns:a16="http://schemas.microsoft.com/office/drawing/2014/main" id="{47B0669B-B073-DBC1-E4DA-6DA208BA5FB6}"/>
+              </a:ext>
+            </a:extLst>
+          </p:cNvPr>
+          <p:cNvSpPr txBox="1"/>
+          <p:nvPr/>
+        </p:nvSpPr>
+        <p:spPr>
+          <a:xfrm>
+            <a:off x="3403600" y="3835400"/>
+            <a:ext cx="1498600" cy="276999"/>
+          </a:xfrm>
+          <a:prstGeom prst="rect">
+            <a:avLst/>
+          </a:prstGeom>
+          <a:noFill/>
+        </p:spPr>
+        <p:txBody>
+          <a:bodyPr vert="horz" wrap="square" lIns="0" tIns="0" rIns="0" bIns="0" rtlCol="0">
+            <a:noAutofit/>
+          </a:bodyPr>
+          <a:lstStyle/>
+          <a:p>
+            <a:r>
+              <a:rPr lang="en-US" altLang="zh-CN" sz="720" b="1">
+                <a:solidFill>
+                  <a:srgbClr val="004080"/>
+                </a:solidFill>
+                <a:latin typeface="Aptos" panose="020B0004020202020204" pitchFamily="34" charset="0"/>
+              </a:rPr>
+              <a:t>EMNLP target</a:t>
+            </a:r>
+            <a:endParaRPr lang="zh-CN" altLang="en-US" sz="720" b="1">
+              <a:solidFill>
+                <a:srgbClr val="004080"/>
+              </a:solidFill>
+              <a:latin typeface="Aptos" panose="020B0004020202020204" pitchFamily="34" charset="0"/>
+            </a:endParaRPr>
+          </a:p>
+        </p:txBody>
+      </p:sp>
+      <p:sp>
+        <p:nvSpPr>
+          <p:cNvPr id="27" name="lane-sub-1">
+            <a:extLst>
+              <a:ext uri="{FF2B5EF4-FFF2-40B4-BE49-F238E27FC236}">
+                <a16:creationId xmlns:a16="http://schemas.microsoft.com/office/drawing/2014/main" id="{3D92C410-79C0-E812-7923-EBEBD46821FF}"/>
+              </a:ext>
+            </a:extLst>
+          </p:cNvPr>
+          <p:cNvSpPr txBox="1"/>
+          <p:nvPr/>
+        </p:nvSpPr>
+        <p:spPr>
+          <a:xfrm>
+            <a:off x="3200400" y="4318000"/>
+            <a:ext cx="1905000" cy="276999"/>
+          </a:xfrm>
+          <a:prstGeom prst="rect">
+            <a:avLst/>
+          </a:prstGeom>
+          <a:noFill/>
+        </p:spPr>
+        <p:txBody>
+          <a:bodyPr vert="horz" wrap="square" lIns="0" tIns="0" rIns="0" bIns="0" rtlCol="0">
+            <a:noAutofit/>
+          </a:bodyPr>
+          <a:lstStyle/>
+          <a:p>
+            <a:r>
+              <a:rPr lang="en-US" altLang="zh-CN" sz="740">
+                <a:solidFill>
+                  <a:srgbClr val="536580"/>
+                </a:solidFill>
+                <a:latin typeface="Aptos" panose="020B0004020202020204" pitchFamily="34" charset="0"/>
+              </a:rPr>
+              <a:t>provenance recovery</a:t>
+            </a:r>
+            <a:endParaRPr lang="zh-CN" altLang="en-US" sz="740">
+              <a:solidFill>
+                <a:srgbClr val="536580"/>
+              </a:solidFill>
+              <a:latin typeface="Aptos" panose="020B0004020202020204" pitchFamily="34" charset="0"/>
+            </a:endParaRPr>
+          </a:p>
+        </p:txBody>
+      </p:sp>
+      <p:sp>
+        <p:nvSpPr>
+          <p:cNvPr id="28" name="node-2">
+            <a:extLst>
+              <a:ext uri="{FF2B5EF4-FFF2-40B4-BE49-F238E27FC236}">
+                <a16:creationId xmlns:a16="http://schemas.microsoft.com/office/drawing/2014/main" id="{452C2B55-7577-8E42-BB18-D8AD7634F83C}"/>
               </a:ext>
             </a:extLst>
           </p:cNvPr>
@@ -12257,8 +13162,8 @@
         </p:nvSpPr>
         <p:spPr>
           <a:xfrm>
-            <a:off x="5156200" y="2032000"/>
-            <a:ext cx="1879600" cy="76200"/>
+            <a:off x="6121400" y="2794000"/>
+            <a:ext cx="609600" cy="609600"/>
           </a:xfrm>
           <a:prstGeom prst="rect">
             <a:avLst/>
@@ -12299,10 +13204,10 @@
       </p:sp>
       <p:sp>
         <p:nvSpPr>
-          <p:cNvPr id="25" name="lane-title-2">
-            <a:extLst>
-              <a:ext uri="{FF2B5EF4-FFF2-40B4-BE49-F238E27FC236}">
-                <a16:creationId xmlns:a16="http://schemas.microsoft.com/office/drawing/2014/main" id="{0950D9A7-2D1F-3910-A146-8E67CA3249F1}"/>
+          <p:cNvPr id="29" name="node-num-2">
+            <a:extLst>
+              <a:ext uri="{FF2B5EF4-FFF2-40B4-BE49-F238E27FC236}">
+                <a16:creationId xmlns:a16="http://schemas.microsoft.com/office/drawing/2014/main" id="{23467D98-04C7-06F2-211D-B0D167A647B8}"/>
               </a:ext>
             </a:extLst>
           </p:cNvPr>
@@ -12311,8 +13216,8 @@
         </p:nvSpPr>
         <p:spPr>
           <a:xfrm>
-            <a:off x="5334000" y="2387600"/>
-            <a:ext cx="1498600" cy="276999"/>
+            <a:off x="6311900" y="2984500"/>
+            <a:ext cx="228600" cy="276999"/>
           </a:xfrm>
           <a:prstGeom prst="rect">
             <a:avLst/>
@@ -12326,7 +13231,99 @@
           <a:lstStyle/>
           <a:p>
             <a:r>
-              <a:rPr lang="en-US" altLang="zh-CN" sz="1050" b="1">
+              <a:rPr lang="en-US" altLang="zh-CN" sz="900" b="1">
+                <a:solidFill>
+                  <a:srgbClr val="FFFFFF"/>
+                </a:solidFill>
+                <a:latin typeface="Aptos" panose="020B0004020202020204" pitchFamily="34" charset="0"/>
+              </a:rPr>
+              <a:t>3</a:t>
+            </a:r>
+            <a:endParaRPr lang="zh-CN" altLang="en-US" sz="900" b="1">
+              <a:solidFill>
+                <a:srgbClr val="FFFFFF"/>
+              </a:solidFill>
+              <a:latin typeface="Aptos" panose="020B0004020202020204" pitchFamily="34" charset="0"/>
+            </a:endParaRPr>
+          </a:p>
+        </p:txBody>
+      </p:sp>
+      <p:sp>
+        <p:nvSpPr>
+          <p:cNvPr id="30" name="lane-kind-2">
+            <a:extLst>
+              <a:ext uri="{FF2B5EF4-FFF2-40B4-BE49-F238E27FC236}">
+                <a16:creationId xmlns:a16="http://schemas.microsoft.com/office/drawing/2014/main" id="{D7C5856F-FBAF-5868-9C5F-BB7A8A583D08}"/>
+              </a:ext>
+            </a:extLst>
+          </p:cNvPr>
+          <p:cNvSpPr txBox="1"/>
+          <p:nvPr/>
+        </p:nvSpPr>
+        <p:spPr>
+          <a:xfrm>
+            <a:off x="5461000" y="2082800"/>
+            <a:ext cx="1905000" cy="276999"/>
+          </a:xfrm>
+          <a:prstGeom prst="rect">
+            <a:avLst/>
+          </a:prstGeom>
+          <a:noFill/>
+        </p:spPr>
+        <p:txBody>
+          <a:bodyPr vert="horz" wrap="square" lIns="0" tIns="0" rIns="0" bIns="0" rtlCol="0">
+            <a:noAutofit/>
+          </a:bodyPr>
+          <a:lstStyle/>
+          <a:p>
+            <a:r>
+              <a:rPr lang="en-US" altLang="zh-CN" sz="700" b="1">
+                <a:solidFill>
+                  <a:srgbClr val="536580"/>
+                </a:solidFill>
+                <a:latin typeface="Aptos" panose="020B0004020202020204" pitchFamily="34" charset="0"/>
+              </a:rPr>
+              <a:t>Black-box</a:t>
+            </a:r>
+            <a:endParaRPr lang="zh-CN" altLang="en-US" sz="700" b="1">
+              <a:solidFill>
+                <a:srgbClr val="536580"/>
+              </a:solidFill>
+              <a:latin typeface="Aptos" panose="020B0004020202020204" pitchFamily="34" charset="0"/>
+            </a:endParaRPr>
+          </a:p>
+        </p:txBody>
+      </p:sp>
+      <p:sp>
+        <p:nvSpPr>
+          <p:cNvPr id="31" name="lane-title-2">
+            <a:extLst>
+              <a:ext uri="{FF2B5EF4-FFF2-40B4-BE49-F238E27FC236}">
+                <a16:creationId xmlns:a16="http://schemas.microsoft.com/office/drawing/2014/main" id="{7D8FA798-8C2D-B14C-E8D3-8D925C750ED2}"/>
+              </a:ext>
+            </a:extLst>
+          </p:cNvPr>
+          <p:cNvSpPr txBox="1"/>
+          <p:nvPr/>
+        </p:nvSpPr>
+        <p:spPr>
+          <a:xfrm>
+            <a:off x="5461000" y="2336800"/>
+            <a:ext cx="1905000" cy="276999"/>
+          </a:xfrm>
+          <a:prstGeom prst="rect">
+            <a:avLst/>
+          </a:prstGeom>
+          <a:noFill/>
+        </p:spPr>
+        <p:txBody>
+          <a:bodyPr vert="horz" wrap="square" lIns="0" tIns="0" rIns="0" bIns="0" rtlCol="0">
+            <a:noAutofit/>
+          </a:bodyPr>
+          <a:lstStyle/>
+          <a:p>
+            <a:r>
+              <a:rPr lang="en-US" altLang="zh-CN" sz="1150" b="1">
                 <a:solidFill>
                   <a:srgbClr val="0D182C"/>
                 </a:solidFill>
@@ -12334,7 +13331,7 @@
               </a:rPr>
               <a:t>CodeDye</a:t>
             </a:r>
-            <a:endParaRPr lang="zh-CN" altLang="en-US" sz="1050" b="1">
+            <a:endParaRPr lang="zh-CN" altLang="en-US" sz="1150" b="1">
               <a:solidFill>
                 <a:srgbClr val="0D182C"/>
               </a:solidFill>
@@ -12345,102 +13342,10 @@
       </p:sp>
       <p:sp>
         <p:nvSpPr>
-          <p:cNvPr id="26" name="lane-target-2">
-            <a:extLst>
-              <a:ext uri="{FF2B5EF4-FFF2-40B4-BE49-F238E27FC236}">
-                <a16:creationId xmlns:a16="http://schemas.microsoft.com/office/drawing/2014/main" id="{62CC7FB2-534B-35EA-EC8C-55DA19BFD99E}"/>
-              </a:ext>
-            </a:extLst>
-          </p:cNvPr>
-          <p:cNvSpPr txBox="1"/>
-          <p:nvPr/>
-        </p:nvSpPr>
-        <p:spPr>
-          <a:xfrm>
-            <a:off x="5334000" y="2997200"/>
-            <a:ext cx="1498600" cy="276999"/>
-          </a:xfrm>
-          <a:prstGeom prst="rect">
-            <a:avLst/>
-          </a:prstGeom>
-          <a:noFill/>
-        </p:spPr>
-        <p:txBody>
-          <a:bodyPr vert="horz" wrap="square" lIns="0" tIns="0" rIns="0" bIns="0" rtlCol="0">
-            <a:noAutofit/>
-          </a:bodyPr>
-          <a:lstStyle/>
-          <a:p>
-            <a:r>
-              <a:rPr lang="en-US" altLang="zh-CN" sz="800" b="1">
-                <a:solidFill>
-                  <a:srgbClr val="004080"/>
-                </a:solidFill>
-                <a:latin typeface="Aptos" panose="020B0004020202020204" pitchFamily="34" charset="0"/>
-              </a:rPr>
-              <a:t>EMNLP target</a:t>
-            </a:r>
-            <a:endParaRPr lang="zh-CN" altLang="en-US" sz="800" b="1">
-              <a:solidFill>
-                <a:srgbClr val="004080"/>
-              </a:solidFill>
-              <a:latin typeface="Aptos" panose="020B0004020202020204" pitchFamily="34" charset="0"/>
-            </a:endParaRPr>
-          </a:p>
-        </p:txBody>
-      </p:sp>
-      <p:sp>
-        <p:nvSpPr>
-          <p:cNvPr id="27" name="lane-sub-2">
-            <a:extLst>
-              <a:ext uri="{FF2B5EF4-FFF2-40B4-BE49-F238E27FC236}">
-                <a16:creationId xmlns:a16="http://schemas.microsoft.com/office/drawing/2014/main" id="{82378A0F-B68E-2F4A-23B2-6F6467DEE848}"/>
-              </a:ext>
-            </a:extLst>
-          </p:cNvPr>
-          <p:cNvSpPr txBox="1"/>
-          <p:nvPr/>
-        </p:nvSpPr>
-        <p:spPr>
-          <a:xfrm>
-            <a:off x="5334000" y="3479800"/>
-            <a:ext cx="1498600" cy="276999"/>
-          </a:xfrm>
-          <a:prstGeom prst="rect">
-            <a:avLst/>
-          </a:prstGeom>
-          <a:noFill/>
-        </p:spPr>
-        <p:txBody>
-          <a:bodyPr vert="horz" wrap="square" lIns="0" tIns="0" rIns="0" bIns="0" rtlCol="0">
-            <a:noAutofit/>
-          </a:bodyPr>
-          <a:lstStyle/>
-          <a:p>
-            <a:r>
-              <a:rPr lang="en-US" altLang="zh-CN" sz="740">
-                <a:solidFill>
-                  <a:srgbClr val="536580"/>
-                </a:solidFill>
-                <a:latin typeface="Aptos" panose="020B0004020202020204" pitchFamily="34" charset="0"/>
-              </a:rPr>
-              <a:t>black-box null audit</a:t>
-            </a:r>
-            <a:endParaRPr lang="zh-CN" altLang="en-US" sz="740">
-              <a:solidFill>
-                <a:srgbClr val="536580"/>
-              </a:solidFill>
-              <a:latin typeface="Aptos" panose="020B0004020202020204" pitchFamily="34" charset="0"/>
-            </a:endParaRPr>
-          </a:p>
-        </p:txBody>
-      </p:sp>
-      <p:sp>
-        <p:nvSpPr>
-          <p:cNvPr id="28" name="lane-3">
-            <a:extLst>
-              <a:ext uri="{FF2B5EF4-FFF2-40B4-BE49-F238E27FC236}">
-                <a16:creationId xmlns:a16="http://schemas.microsoft.com/office/drawing/2014/main" id="{1F5A5A51-728F-C9AD-9EB9-C0A68AE8B912}"/>
+          <p:cNvPr id="32" name="lane-target-box-2">
+            <a:extLst>
+              <a:ext uri="{FF2B5EF4-FFF2-40B4-BE49-F238E27FC236}">
+                <a16:creationId xmlns:a16="http://schemas.microsoft.com/office/drawing/2014/main" id="{2C742F6F-B5A2-ACE4-D689-1F1E34AA3684}"/>
               </a:ext>
             </a:extLst>
           </p:cNvPr>
@@ -12449,18 +13354,18 @@
         </p:nvSpPr>
         <p:spPr>
           <a:xfrm>
-            <a:off x="7340600" y="2032000"/>
-            <a:ext cx="1879600" cy="2159000"/>
+            <a:off x="5461000" y="3708400"/>
+            <a:ext cx="1905000" cy="381000"/>
           </a:xfrm>
           <a:prstGeom prst="rect">
             <a:avLst/>
           </a:prstGeom>
           <a:solidFill>
-            <a:srgbClr val="FFFFFF"/>
+            <a:srgbClr val="EFF6FF"/>
           </a:solidFill>
           <a:ln w="12700">
             <a:solidFill>
-              <a:srgbClr val="D2DCEB"/>
+              <a:srgbClr val="AFCDF5"/>
             </a:solidFill>
           </a:ln>
         </p:spPr>
@@ -12491,10 +13396,102 @@
       </p:sp>
       <p:sp>
         <p:nvSpPr>
-          <p:cNvPr id="29" name="lane-band-3">
-            <a:extLst>
-              <a:ext uri="{FF2B5EF4-FFF2-40B4-BE49-F238E27FC236}">
-                <a16:creationId xmlns:a16="http://schemas.microsoft.com/office/drawing/2014/main" id="{944EBC5E-6A67-2D6D-2A2A-BC1C68E36EFD}"/>
+          <p:cNvPr id="33" name="lane-target-2">
+            <a:extLst>
+              <a:ext uri="{FF2B5EF4-FFF2-40B4-BE49-F238E27FC236}">
+                <a16:creationId xmlns:a16="http://schemas.microsoft.com/office/drawing/2014/main" id="{0D7FD51E-5626-7A4B-9D79-B8FB584B35BB}"/>
+              </a:ext>
+            </a:extLst>
+          </p:cNvPr>
+          <p:cNvSpPr txBox="1"/>
+          <p:nvPr/>
+        </p:nvSpPr>
+        <p:spPr>
+          <a:xfrm>
+            <a:off x="5664200" y="3835400"/>
+            <a:ext cx="1498600" cy="276999"/>
+          </a:xfrm>
+          <a:prstGeom prst="rect">
+            <a:avLst/>
+          </a:prstGeom>
+          <a:noFill/>
+        </p:spPr>
+        <p:txBody>
+          <a:bodyPr vert="horz" wrap="square" lIns="0" tIns="0" rIns="0" bIns="0" rtlCol="0">
+            <a:noAutofit/>
+          </a:bodyPr>
+          <a:lstStyle/>
+          <a:p>
+            <a:r>
+              <a:rPr lang="en-US" altLang="zh-CN" sz="720" b="1">
+                <a:solidFill>
+                  <a:srgbClr val="004080"/>
+                </a:solidFill>
+                <a:latin typeface="Aptos" panose="020B0004020202020204" pitchFamily="34" charset="0"/>
+              </a:rPr>
+              <a:t>EMNLP target</a:t>
+            </a:r>
+            <a:endParaRPr lang="zh-CN" altLang="en-US" sz="720" b="1">
+              <a:solidFill>
+                <a:srgbClr val="004080"/>
+              </a:solidFill>
+              <a:latin typeface="Aptos" panose="020B0004020202020204" pitchFamily="34" charset="0"/>
+            </a:endParaRPr>
+          </a:p>
+        </p:txBody>
+      </p:sp>
+      <p:sp>
+        <p:nvSpPr>
+          <p:cNvPr id="34" name="lane-sub-2">
+            <a:extLst>
+              <a:ext uri="{FF2B5EF4-FFF2-40B4-BE49-F238E27FC236}">
+                <a16:creationId xmlns:a16="http://schemas.microsoft.com/office/drawing/2014/main" id="{E321A664-5E70-2645-8D2F-A4BF3E1F3085}"/>
+              </a:ext>
+            </a:extLst>
+          </p:cNvPr>
+          <p:cNvSpPr txBox="1"/>
+          <p:nvPr/>
+        </p:nvSpPr>
+        <p:spPr>
+          <a:xfrm>
+            <a:off x="5461000" y="4318000"/>
+            <a:ext cx="1905000" cy="276999"/>
+          </a:xfrm>
+          <a:prstGeom prst="rect">
+            <a:avLst/>
+          </a:prstGeom>
+          <a:noFill/>
+        </p:spPr>
+        <p:txBody>
+          <a:bodyPr vert="horz" wrap="square" lIns="0" tIns="0" rIns="0" bIns="0" rtlCol="0">
+            <a:noAutofit/>
+          </a:bodyPr>
+          <a:lstStyle/>
+          <a:p>
+            <a:r>
+              <a:rPr lang="en-US" altLang="zh-CN" sz="740">
+                <a:solidFill>
+                  <a:srgbClr val="536580"/>
+                </a:solidFill>
+                <a:latin typeface="Aptos" panose="020B0004020202020204" pitchFamily="34" charset="0"/>
+              </a:rPr>
+              <a:t>null-audit evidence</a:t>
+            </a:r>
+            <a:endParaRPr lang="zh-CN" altLang="en-US" sz="740">
+              <a:solidFill>
+                <a:srgbClr val="536580"/>
+              </a:solidFill>
+              <a:latin typeface="Aptos" panose="020B0004020202020204" pitchFamily="34" charset="0"/>
+            </a:endParaRPr>
+          </a:p>
+        </p:txBody>
+      </p:sp>
+      <p:sp>
+        <p:nvSpPr>
+          <p:cNvPr id="35" name="node-3">
+            <a:extLst>
+              <a:ext uri="{FF2B5EF4-FFF2-40B4-BE49-F238E27FC236}">
+                <a16:creationId xmlns:a16="http://schemas.microsoft.com/office/drawing/2014/main" id="{64E730B3-42DA-13E7-268E-73A62B926E0B}"/>
               </a:ext>
             </a:extLst>
           </p:cNvPr>
@@ -12503,8 +13500,8 @@
         </p:nvSpPr>
         <p:spPr>
           <a:xfrm>
-            <a:off x="7340600" y="2032000"/>
-            <a:ext cx="1879600" cy="76200"/>
+            <a:off x="8382000" y="2794000"/>
+            <a:ext cx="609600" cy="609600"/>
           </a:xfrm>
           <a:prstGeom prst="rect">
             <a:avLst/>
@@ -12545,10 +13542,10 @@
       </p:sp>
       <p:sp>
         <p:nvSpPr>
-          <p:cNvPr id="30" name="lane-title-3">
-            <a:extLst>
-              <a:ext uri="{FF2B5EF4-FFF2-40B4-BE49-F238E27FC236}">
-                <a16:creationId xmlns:a16="http://schemas.microsoft.com/office/drawing/2014/main" id="{26EC2F58-45AC-6A4B-B23C-DF78309C84FE}"/>
+          <p:cNvPr id="36" name="node-num-3">
+            <a:extLst>
+              <a:ext uri="{FF2B5EF4-FFF2-40B4-BE49-F238E27FC236}">
+                <a16:creationId xmlns:a16="http://schemas.microsoft.com/office/drawing/2014/main" id="{A0BDB74F-4146-63DE-2632-D32B8EDADEBE}"/>
               </a:ext>
             </a:extLst>
           </p:cNvPr>
@@ -12557,8 +13554,8 @@
         </p:nvSpPr>
         <p:spPr>
           <a:xfrm>
-            <a:off x="7518400" y="2387600"/>
-            <a:ext cx="1498600" cy="276999"/>
+            <a:off x="8572500" y="2984500"/>
+            <a:ext cx="228600" cy="276999"/>
           </a:xfrm>
           <a:prstGeom prst="rect">
             <a:avLst/>
@@ -12572,7 +13569,99 @@
           <a:lstStyle/>
           <a:p>
             <a:r>
-              <a:rPr lang="en-US" altLang="zh-CN" sz="1050" b="1">
+              <a:rPr lang="en-US" altLang="zh-CN" sz="900" b="1">
+                <a:solidFill>
+                  <a:srgbClr val="FFFFFF"/>
+                </a:solidFill>
+                <a:latin typeface="Aptos" panose="020B0004020202020204" pitchFamily="34" charset="0"/>
+              </a:rPr>
+              <a:t>4</a:t>
+            </a:r>
+            <a:endParaRPr lang="zh-CN" altLang="en-US" sz="900" b="1">
+              <a:solidFill>
+                <a:srgbClr val="FFFFFF"/>
+              </a:solidFill>
+              <a:latin typeface="Aptos" panose="020B0004020202020204" pitchFamily="34" charset="0"/>
+            </a:endParaRPr>
+          </a:p>
+        </p:txBody>
+      </p:sp>
+      <p:sp>
+        <p:nvSpPr>
+          <p:cNvPr id="37" name="lane-kind-3">
+            <a:extLst>
+              <a:ext uri="{FF2B5EF4-FFF2-40B4-BE49-F238E27FC236}">
+                <a16:creationId xmlns:a16="http://schemas.microsoft.com/office/drawing/2014/main" id="{C0ED5600-E4D5-75FE-AD30-B95B7FE5A580}"/>
+              </a:ext>
+            </a:extLst>
+          </p:cNvPr>
+          <p:cNvSpPr txBox="1"/>
+          <p:nvPr/>
+        </p:nvSpPr>
+        <p:spPr>
+          <a:xfrm>
+            <a:off x="7721600" y="2082800"/>
+            <a:ext cx="1905000" cy="276999"/>
+          </a:xfrm>
+          <a:prstGeom prst="rect">
+            <a:avLst/>
+          </a:prstGeom>
+          <a:noFill/>
+        </p:spPr>
+        <p:txBody>
+          <a:bodyPr vert="horz" wrap="square" lIns="0" tIns="0" rIns="0" bIns="0" rtlCol="0">
+            <a:noAutofit/>
+          </a:bodyPr>
+          <a:lstStyle/>
+          <a:p>
+            <a:r>
+              <a:rPr lang="en-US" altLang="zh-CN" sz="700" b="1">
+                <a:solidFill>
+                  <a:srgbClr val="536580"/>
+                </a:solidFill>
+                <a:latin typeface="Aptos" panose="020B0004020202020204" pitchFamily="34" charset="0"/>
+              </a:rPr>
+              <a:t>Owner</a:t>
+            </a:r>
+            <a:endParaRPr lang="zh-CN" altLang="en-US" sz="700" b="1">
+              <a:solidFill>
+                <a:srgbClr val="536580"/>
+              </a:solidFill>
+              <a:latin typeface="Aptos" panose="020B0004020202020204" pitchFamily="34" charset="0"/>
+            </a:endParaRPr>
+          </a:p>
+        </p:txBody>
+      </p:sp>
+      <p:sp>
+        <p:nvSpPr>
+          <p:cNvPr id="38" name="lane-title-3">
+            <a:extLst>
+              <a:ext uri="{FF2B5EF4-FFF2-40B4-BE49-F238E27FC236}">
+                <a16:creationId xmlns:a16="http://schemas.microsoft.com/office/drawing/2014/main" id="{E61D5C47-F402-41D9-A33A-C54F1FC98532}"/>
+              </a:ext>
+            </a:extLst>
+          </p:cNvPr>
+          <p:cNvSpPr txBox="1"/>
+          <p:nvPr/>
+        </p:nvSpPr>
+        <p:spPr>
+          <a:xfrm>
+            <a:off x="7721600" y="2336800"/>
+            <a:ext cx="1905000" cy="276999"/>
+          </a:xfrm>
+          <a:prstGeom prst="rect">
+            <a:avLst/>
+          </a:prstGeom>
+          <a:noFill/>
+        </p:spPr>
+        <p:txBody>
+          <a:bodyPr vert="horz" wrap="square" lIns="0" tIns="0" rIns="0" bIns="0" rtlCol="0">
+            <a:noAutofit/>
+          </a:bodyPr>
+          <a:lstStyle/>
+          <a:p>
+            <a:r>
+              <a:rPr lang="en-US" altLang="zh-CN" sz="1150" b="1">
                 <a:solidFill>
                   <a:srgbClr val="0D182C"/>
                 </a:solidFill>
@@ -12580,7 +13669,7 @@
               </a:rPr>
               <a:t>ProbeTrace</a:t>
             </a:r>
-            <a:endParaRPr lang="zh-CN" altLang="en-US" sz="1050" b="1">
+            <a:endParaRPr lang="zh-CN" altLang="en-US" sz="1150" b="1">
               <a:solidFill>
                 <a:srgbClr val="0D182C"/>
               </a:solidFill>
@@ -12591,102 +13680,10 @@
       </p:sp>
       <p:sp>
         <p:nvSpPr>
-          <p:cNvPr id="31" name="lane-target-3">
-            <a:extLst>
-              <a:ext uri="{FF2B5EF4-FFF2-40B4-BE49-F238E27FC236}">
-                <a16:creationId xmlns:a16="http://schemas.microsoft.com/office/drawing/2014/main" id="{3E8DD47F-E323-0A6E-FD49-D0CD01042AE4}"/>
-              </a:ext>
-            </a:extLst>
-          </p:cNvPr>
-          <p:cNvSpPr txBox="1"/>
-          <p:nvPr/>
-        </p:nvSpPr>
-        <p:spPr>
-          <a:xfrm>
-            <a:off x="7518400" y="2997200"/>
-            <a:ext cx="1498600" cy="276999"/>
-          </a:xfrm>
-          <a:prstGeom prst="rect">
-            <a:avLst/>
-          </a:prstGeom>
-          <a:noFill/>
-        </p:spPr>
-        <p:txBody>
-          <a:bodyPr vert="horz" wrap="square" lIns="0" tIns="0" rIns="0" bIns="0" rtlCol="0">
-            <a:noAutofit/>
-          </a:bodyPr>
-          <a:lstStyle/>
-          <a:p>
-            <a:r>
-              <a:rPr lang="en-US" altLang="zh-CN" sz="800" b="1">
-                <a:solidFill>
-                  <a:srgbClr val="004080"/>
-                </a:solidFill>
-                <a:latin typeface="Aptos" panose="020B0004020202020204" pitchFamily="34" charset="0"/>
-              </a:rPr>
-              <a:t>EMNLP target</a:t>
-            </a:r>
-            <a:endParaRPr lang="zh-CN" altLang="en-US" sz="800" b="1">
-              <a:solidFill>
-                <a:srgbClr val="004080"/>
-              </a:solidFill>
-              <a:latin typeface="Aptos" panose="020B0004020202020204" pitchFamily="34" charset="0"/>
-            </a:endParaRPr>
-          </a:p>
-        </p:txBody>
-      </p:sp>
-      <p:sp>
-        <p:nvSpPr>
-          <p:cNvPr id="32" name="lane-sub-3">
-            <a:extLst>
-              <a:ext uri="{FF2B5EF4-FFF2-40B4-BE49-F238E27FC236}">
-                <a16:creationId xmlns:a16="http://schemas.microsoft.com/office/drawing/2014/main" id="{81E4AB20-DA72-9A65-F523-1B078711A820}"/>
-              </a:ext>
-            </a:extLst>
-          </p:cNvPr>
-          <p:cNvSpPr txBox="1"/>
-          <p:nvPr/>
-        </p:nvSpPr>
-        <p:spPr>
-          <a:xfrm>
-            <a:off x="7518400" y="3479800"/>
-            <a:ext cx="1498600" cy="276999"/>
-          </a:xfrm>
-          <a:prstGeom prst="rect">
-            <a:avLst/>
-          </a:prstGeom>
-          <a:noFill/>
-        </p:spPr>
-        <p:txBody>
-          <a:bodyPr vert="horz" wrap="square" lIns="0" tIns="0" rIns="0" bIns="0" rtlCol="0">
-            <a:noAutofit/>
-          </a:bodyPr>
-          <a:lstStyle/>
-          <a:p>
-            <a:r>
-              <a:rPr lang="en-US" altLang="zh-CN" sz="740">
-                <a:solidFill>
-                  <a:srgbClr val="536580"/>
-                </a:solidFill>
-                <a:latin typeface="Aptos" panose="020B0004020202020204" pitchFamily="34" charset="0"/>
-              </a:rPr>
-              <a:t>owner attribution</a:t>
-            </a:r>
-            <a:endParaRPr lang="zh-CN" altLang="en-US" sz="740">
-              <a:solidFill>
-                <a:srgbClr val="536580"/>
-              </a:solidFill>
-              <a:latin typeface="Aptos" panose="020B0004020202020204" pitchFamily="34" charset="0"/>
-            </a:endParaRPr>
-          </a:p>
-        </p:txBody>
-      </p:sp>
-      <p:sp>
-        <p:nvSpPr>
-          <p:cNvPr id="33" name="lane-4">
-            <a:extLst>
-              <a:ext uri="{FF2B5EF4-FFF2-40B4-BE49-F238E27FC236}">
-                <a16:creationId xmlns:a16="http://schemas.microsoft.com/office/drawing/2014/main" id="{A2EA4C56-1713-1B19-640C-F7108E3D7DE4}"/>
+          <p:cNvPr id="39" name="lane-target-box-3">
+            <a:extLst>
+              <a:ext uri="{FF2B5EF4-FFF2-40B4-BE49-F238E27FC236}">
+                <a16:creationId xmlns:a16="http://schemas.microsoft.com/office/drawing/2014/main" id="{D4C4F3B6-5BA1-E922-BFC6-455D1E046232}"/>
               </a:ext>
             </a:extLst>
           </p:cNvPr>
@@ -12695,18 +13692,18 @@
         </p:nvSpPr>
         <p:spPr>
           <a:xfrm>
-            <a:off x="9525000" y="2032000"/>
-            <a:ext cx="1879600" cy="2159000"/>
+            <a:off x="7721600" y="3708400"/>
+            <a:ext cx="1905000" cy="381000"/>
           </a:xfrm>
           <a:prstGeom prst="rect">
             <a:avLst/>
           </a:prstGeom>
           <a:solidFill>
-            <a:srgbClr val="FFFFFF"/>
+            <a:srgbClr val="EFF6FF"/>
           </a:solidFill>
           <a:ln w="12700">
             <a:solidFill>
-              <a:srgbClr val="D2DCEB"/>
+              <a:srgbClr val="AFCDF5"/>
             </a:solidFill>
           </a:ln>
         </p:spPr>
@@ -12737,10 +13734,102 @@
       </p:sp>
       <p:sp>
         <p:nvSpPr>
-          <p:cNvPr id="34" name="lane-band-4">
-            <a:extLst>
-              <a:ext uri="{FF2B5EF4-FFF2-40B4-BE49-F238E27FC236}">
-                <a16:creationId xmlns:a16="http://schemas.microsoft.com/office/drawing/2014/main" id="{4E252083-9677-5E3D-E9CF-87155C06FEDB}"/>
+          <p:cNvPr id="40" name="lane-target-3">
+            <a:extLst>
+              <a:ext uri="{FF2B5EF4-FFF2-40B4-BE49-F238E27FC236}">
+                <a16:creationId xmlns:a16="http://schemas.microsoft.com/office/drawing/2014/main" id="{866A48F0-A613-D3B8-033B-FF619187F449}"/>
+              </a:ext>
+            </a:extLst>
+          </p:cNvPr>
+          <p:cNvSpPr txBox="1"/>
+          <p:nvPr/>
+        </p:nvSpPr>
+        <p:spPr>
+          <a:xfrm>
+            <a:off x="7924800" y="3835400"/>
+            <a:ext cx="1498600" cy="276999"/>
+          </a:xfrm>
+          <a:prstGeom prst="rect">
+            <a:avLst/>
+          </a:prstGeom>
+          <a:noFill/>
+        </p:spPr>
+        <p:txBody>
+          <a:bodyPr vert="horz" wrap="square" lIns="0" tIns="0" rIns="0" bIns="0" rtlCol="0">
+            <a:noAutofit/>
+          </a:bodyPr>
+          <a:lstStyle/>
+          <a:p>
+            <a:r>
+              <a:rPr lang="en-US" altLang="zh-CN" sz="720" b="1">
+                <a:solidFill>
+                  <a:srgbClr val="004080"/>
+                </a:solidFill>
+                <a:latin typeface="Aptos" panose="020B0004020202020204" pitchFamily="34" charset="0"/>
+              </a:rPr>
+              <a:t>EMNLP target</a:t>
+            </a:r>
+            <a:endParaRPr lang="zh-CN" altLang="en-US" sz="720" b="1">
+              <a:solidFill>
+                <a:srgbClr val="004080"/>
+              </a:solidFill>
+              <a:latin typeface="Aptos" panose="020B0004020202020204" pitchFamily="34" charset="0"/>
+            </a:endParaRPr>
+          </a:p>
+        </p:txBody>
+      </p:sp>
+      <p:sp>
+        <p:nvSpPr>
+          <p:cNvPr id="41" name="lane-sub-3">
+            <a:extLst>
+              <a:ext uri="{FF2B5EF4-FFF2-40B4-BE49-F238E27FC236}">
+                <a16:creationId xmlns:a16="http://schemas.microsoft.com/office/drawing/2014/main" id="{712C5FCC-AD19-7881-9059-C7C73B510E97}"/>
+              </a:ext>
+            </a:extLst>
+          </p:cNvPr>
+          <p:cNvSpPr txBox="1"/>
+          <p:nvPr/>
+        </p:nvSpPr>
+        <p:spPr>
+          <a:xfrm>
+            <a:off x="7721600" y="4318000"/>
+            <a:ext cx="1905000" cy="276999"/>
+          </a:xfrm>
+          <a:prstGeom prst="rect">
+            <a:avLst/>
+          </a:prstGeom>
+          <a:noFill/>
+        </p:spPr>
+        <p:txBody>
+          <a:bodyPr vert="horz" wrap="square" lIns="0" tIns="0" rIns="0" bIns="0" rtlCol="0">
+            <a:noAutofit/>
+          </a:bodyPr>
+          <a:lstStyle/>
+          <a:p>
+            <a:r>
+              <a:rPr lang="en-US" altLang="zh-CN" sz="740">
+                <a:solidFill>
+                  <a:srgbClr val="536580"/>
+                </a:solidFill>
+                <a:latin typeface="Aptos" panose="020B0004020202020204" pitchFamily="34" charset="0"/>
+              </a:rPr>
+              <a:t>source-bound attribution</a:t>
+            </a:r>
+            <a:endParaRPr lang="zh-CN" altLang="en-US" sz="740">
+              <a:solidFill>
+                <a:srgbClr val="536580"/>
+              </a:solidFill>
+              <a:latin typeface="Aptos" panose="020B0004020202020204" pitchFamily="34" charset="0"/>
+            </a:endParaRPr>
+          </a:p>
+        </p:txBody>
+      </p:sp>
+      <p:sp>
+        <p:nvSpPr>
+          <p:cNvPr id="42" name="node-4">
+            <a:extLst>
+              <a:ext uri="{FF2B5EF4-FFF2-40B4-BE49-F238E27FC236}">
+                <a16:creationId xmlns:a16="http://schemas.microsoft.com/office/drawing/2014/main" id="{BA73EB36-D8D2-CB45-539D-95466D7F7EC0}"/>
               </a:ext>
             </a:extLst>
           </p:cNvPr>
@@ -12749,8 +13838,8 @@
         </p:nvSpPr>
         <p:spPr>
           <a:xfrm>
-            <a:off x="9525000" y="2032000"/>
-            <a:ext cx="1879600" cy="76200"/>
+            <a:off x="10642600" y="2794000"/>
+            <a:ext cx="609600" cy="609600"/>
           </a:xfrm>
           <a:prstGeom prst="rect">
             <a:avLst/>
@@ -12791,10 +13880,10 @@
       </p:sp>
       <p:sp>
         <p:nvSpPr>
-          <p:cNvPr id="35" name="lane-title-4">
-            <a:extLst>
-              <a:ext uri="{FF2B5EF4-FFF2-40B4-BE49-F238E27FC236}">
-                <a16:creationId xmlns:a16="http://schemas.microsoft.com/office/drawing/2014/main" id="{49E1F2C8-EB77-254E-100B-A31280A1FCE1}"/>
+          <p:cNvPr id="43" name="node-num-4">
+            <a:extLst>
+              <a:ext uri="{FF2B5EF4-FFF2-40B4-BE49-F238E27FC236}">
+                <a16:creationId xmlns:a16="http://schemas.microsoft.com/office/drawing/2014/main" id="{CD8FEE9A-4E64-56D6-258F-20D9EBDE3189}"/>
               </a:ext>
             </a:extLst>
           </p:cNvPr>
@@ -12803,8 +13892,8 @@
         </p:nvSpPr>
         <p:spPr>
           <a:xfrm>
-            <a:off x="9702800" y="2387600"/>
-            <a:ext cx="1498600" cy="276999"/>
+            <a:off x="10833100" y="2984500"/>
+            <a:ext cx="228600" cy="276999"/>
           </a:xfrm>
           <a:prstGeom prst="rect">
             <a:avLst/>
@@ -12818,7 +13907,99 @@
           <a:lstStyle/>
           <a:p>
             <a:r>
-              <a:rPr lang="en-US" altLang="zh-CN" sz="1050" b="1">
+              <a:rPr lang="en-US" altLang="zh-CN" sz="900" b="1">
+                <a:solidFill>
+                  <a:srgbClr val="FFFFFF"/>
+                </a:solidFill>
+                <a:latin typeface="Aptos" panose="020B0004020202020204" pitchFamily="34" charset="0"/>
+              </a:rPr>
+              <a:t>5</a:t>
+            </a:r>
+            <a:endParaRPr lang="zh-CN" altLang="en-US" sz="900" b="1">
+              <a:solidFill>
+                <a:srgbClr val="FFFFFF"/>
+              </a:solidFill>
+              <a:latin typeface="Aptos" panose="020B0004020202020204" pitchFamily="34" charset="0"/>
+            </a:endParaRPr>
+          </a:p>
+        </p:txBody>
+      </p:sp>
+      <p:sp>
+        <p:nvSpPr>
+          <p:cNvPr id="44" name="lane-kind-4">
+            <a:extLst>
+              <a:ext uri="{FF2B5EF4-FFF2-40B4-BE49-F238E27FC236}">
+                <a16:creationId xmlns:a16="http://schemas.microsoft.com/office/drawing/2014/main" id="{E7DBB39B-EDFF-E459-E2FF-D3920160D0B8}"/>
+              </a:ext>
+            </a:extLst>
+          </p:cNvPr>
+          <p:cNvSpPr txBox="1"/>
+          <p:nvPr/>
+        </p:nvSpPr>
+        <p:spPr>
+          <a:xfrm>
+            <a:off x="9982200" y="2082800"/>
+            <a:ext cx="1905000" cy="276999"/>
+          </a:xfrm>
+          <a:prstGeom prst="rect">
+            <a:avLst/>
+          </a:prstGeom>
+          <a:noFill/>
+        </p:spPr>
+        <p:txBody>
+          <a:bodyPr vert="horz" wrap="square" lIns="0" tIns="0" rIns="0" bIns="0" rtlCol="0">
+            <a:noAutofit/>
+          </a:bodyPr>
+          <a:lstStyle/>
+          <a:p>
+            <a:r>
+              <a:rPr lang="en-US" altLang="zh-CN" sz="700" b="1">
+                <a:solidFill>
+                  <a:srgbClr val="536580"/>
+                </a:solidFill>
+                <a:latin typeface="Aptos" panose="020B0004020202020204" pitchFamily="34" charset="0"/>
+              </a:rPr>
+              <a:t>Security</a:t>
+            </a:r>
+            <a:endParaRPr lang="zh-CN" altLang="en-US" sz="700" b="1">
+              <a:solidFill>
+                <a:srgbClr val="536580"/>
+              </a:solidFill>
+              <a:latin typeface="Aptos" panose="020B0004020202020204" pitchFamily="34" charset="0"/>
+            </a:endParaRPr>
+          </a:p>
+        </p:txBody>
+      </p:sp>
+      <p:sp>
+        <p:nvSpPr>
+          <p:cNvPr id="45" name="lane-title-4">
+            <a:extLst>
+              <a:ext uri="{FF2B5EF4-FFF2-40B4-BE49-F238E27FC236}">
+                <a16:creationId xmlns:a16="http://schemas.microsoft.com/office/drawing/2014/main" id="{60815BB2-4D85-D141-A42E-5012C62B8D63}"/>
+              </a:ext>
+            </a:extLst>
+          </p:cNvPr>
+          <p:cNvSpPr txBox="1"/>
+          <p:nvPr/>
+        </p:nvSpPr>
+        <p:spPr>
+          <a:xfrm>
+            <a:off x="9982200" y="2336800"/>
+            <a:ext cx="1905000" cy="276999"/>
+          </a:xfrm>
+          <a:prstGeom prst="rect">
+            <a:avLst/>
+          </a:prstGeom>
+          <a:noFill/>
+        </p:spPr>
+        <p:txBody>
+          <a:bodyPr vert="horz" wrap="square" lIns="0" tIns="0" rIns="0" bIns="0" rtlCol="0">
+            <a:noAutofit/>
+          </a:bodyPr>
+          <a:lstStyle/>
+          <a:p>
+            <a:r>
+              <a:rPr lang="en-US" altLang="zh-CN" sz="1150" b="1">
                 <a:solidFill>
                   <a:srgbClr val="0D182C"/>
                 </a:solidFill>
@@ -12826,7 +14007,7 @@
               </a:rPr>
               <a:t>SealAudit</a:t>
             </a:r>
-            <a:endParaRPr lang="zh-CN" altLang="en-US" sz="1050" b="1">
+            <a:endParaRPr lang="zh-CN" altLang="en-US" sz="1150" b="1">
               <a:solidFill>
                 <a:srgbClr val="0D182C"/>
               </a:solidFill>
@@ -12837,10 +14018,64 @@
       </p:sp>
       <p:sp>
         <p:nvSpPr>
-          <p:cNvPr id="36" name="lane-target-4">
-            <a:extLst>
-              <a:ext uri="{FF2B5EF4-FFF2-40B4-BE49-F238E27FC236}">
-                <a16:creationId xmlns:a16="http://schemas.microsoft.com/office/drawing/2014/main" id="{18EFB502-2DCD-4C21-37DF-C80F43A6F355}"/>
+          <p:cNvPr id="46" name="lane-target-box-4">
+            <a:extLst>
+              <a:ext uri="{FF2B5EF4-FFF2-40B4-BE49-F238E27FC236}">
+                <a16:creationId xmlns:a16="http://schemas.microsoft.com/office/drawing/2014/main" id="{C44150FE-9D1D-8526-BA38-5866F6101EB7}"/>
+              </a:ext>
+            </a:extLst>
+          </p:cNvPr>
+          <p:cNvSpPr/>
+          <p:nvPr/>
+        </p:nvSpPr>
+        <p:spPr>
+          <a:xfrm>
+            <a:off x="9982200" y="3708400"/>
+            <a:ext cx="1905000" cy="381000"/>
+          </a:xfrm>
+          <a:prstGeom prst="rect">
+            <a:avLst/>
+          </a:prstGeom>
+          <a:solidFill>
+            <a:srgbClr val="EFF6FF"/>
+          </a:solidFill>
+          <a:ln w="12700">
+            <a:solidFill>
+              <a:srgbClr val="AFCDF5"/>
+            </a:solidFill>
+          </a:ln>
+        </p:spPr>
+        <p:style>
+          <a:lnRef idx="2">
+            <a:schemeClr val="accent1">
+              <a:shade val="15000"/>
+            </a:schemeClr>
+          </a:lnRef>
+          <a:fillRef idx="1">
+            <a:schemeClr val="accent1"/>
+          </a:fillRef>
+          <a:effectRef idx="0">
+            <a:schemeClr val="accent1"/>
+          </a:effectRef>
+          <a:fontRef idx="minor">
+            <a:schemeClr val="lt1"/>
+          </a:fontRef>
+        </p:style>
+        <p:txBody>
+          <a:bodyPr rtlCol="0" anchor="ctr"/>
+          <a:lstStyle/>
+          <a:p>
+            <a:pPr algn="ctr"/>
+            <a:endParaRPr lang="zh-CN" altLang="en-US"/>
+          </a:p>
+        </p:txBody>
+      </p:sp>
+      <p:sp>
+        <p:nvSpPr>
+          <p:cNvPr id="47" name="lane-target-4">
+            <a:extLst>
+              <a:ext uri="{FF2B5EF4-FFF2-40B4-BE49-F238E27FC236}">
+                <a16:creationId xmlns:a16="http://schemas.microsoft.com/office/drawing/2014/main" id="{180B52FE-2DD3-F600-A619-DA2BE9A27F24}"/>
               </a:ext>
             </a:extLst>
           </p:cNvPr>
@@ -12849,7 +14084,7 @@
         </p:nvSpPr>
         <p:spPr>
           <a:xfrm>
-            <a:off x="9702800" y="2997200"/>
+            <a:off x="10185400" y="3835400"/>
             <a:ext cx="1498600" cy="276999"/>
           </a:xfrm>
           <a:prstGeom prst="rect">
@@ -12864,7 +14099,7 @@
           <a:lstStyle/>
           <a:p>
             <a:r>
-              <a:rPr lang="en-US" altLang="zh-CN" sz="800" b="1">
+              <a:rPr lang="en-US" altLang="zh-CN" sz="720" b="1">
                 <a:solidFill>
                   <a:srgbClr val="004080"/>
                 </a:solidFill>
@@ -12872,7 +14107,7 @@
               </a:rPr>
               <a:t>EMNLP target</a:t>
             </a:r>
-            <a:endParaRPr lang="zh-CN" altLang="en-US" sz="800" b="1">
+            <a:endParaRPr lang="zh-CN" altLang="en-US" sz="720" b="1">
               <a:solidFill>
                 <a:srgbClr val="004080"/>
               </a:solidFill>
@@ -12883,10 +14118,10 @@
       </p:sp>
       <p:sp>
         <p:nvSpPr>
-          <p:cNvPr id="37" name="lane-sub-4">
-            <a:extLst>
-              <a:ext uri="{FF2B5EF4-FFF2-40B4-BE49-F238E27FC236}">
-                <a16:creationId xmlns:a16="http://schemas.microsoft.com/office/drawing/2014/main" id="{4D57B13C-B545-7074-8F63-B416FC651578}"/>
+          <p:cNvPr id="48" name="lane-sub-4">
+            <a:extLst>
+              <a:ext uri="{FF2B5EF4-FFF2-40B4-BE49-F238E27FC236}">
+                <a16:creationId xmlns:a16="http://schemas.microsoft.com/office/drawing/2014/main" id="{5F8C3602-B285-62D6-8749-3B87D819503C}"/>
               </a:ext>
             </a:extLst>
           </p:cNvPr>
@@ -12895,8 +14130,8 @@
         </p:nvSpPr>
         <p:spPr>
           <a:xfrm>
-            <a:off x="9702800" y="3479800"/>
-            <a:ext cx="1498600" cy="276999"/>
+            <a:off x="9982200" y="4318000"/>
+            <a:ext cx="1905000" cy="276999"/>
           </a:xfrm>
           <a:prstGeom prst="rect">
             <a:avLst/>
@@ -12916,7 +14151,7 @@
                 </a:solidFill>
                 <a:latin typeface="Aptos" panose="020B0004020202020204" pitchFamily="34" charset="0"/>
               </a:rPr>
-              <a:t>security triage</a:t>
+              <a:t>selective triage</a:t>
             </a:r>
             <a:endParaRPr lang="zh-CN" altLang="en-US" sz="740">
               <a:solidFill>
@@ -12929,10 +14164,10 @@
       </p:sp>
       <p:sp>
         <p:nvSpPr>
-          <p:cNvPr id="38" name="ownership">
-            <a:extLst>
-              <a:ext uri="{FF2B5EF4-FFF2-40B4-BE49-F238E27FC236}">
-                <a16:creationId xmlns:a16="http://schemas.microsoft.com/office/drawing/2014/main" id="{53B4F68A-0E94-61F5-5007-9FB4AC1C26B0}"/>
+          <p:cNvPr id="49" name="ownership">
+            <a:extLst>
+              <a:ext uri="{FF2B5EF4-FFF2-40B4-BE49-F238E27FC236}">
+                <a16:creationId xmlns:a16="http://schemas.microsoft.com/office/drawing/2014/main" id="{B4B7A122-6039-A40F-FD33-A09C1EF4076F}"/>
               </a:ext>
             </a:extLst>
           </p:cNvPr>
@@ -12941,7 +14176,7 @@
         </p:nvSpPr>
         <p:spPr>
           <a:xfrm>
-            <a:off x="1193800" y="4978400"/>
+            <a:off x="1193800" y="5283200"/>
             <a:ext cx="9804400" cy="482600"/>
           </a:xfrm>
           <a:prstGeom prst="rect">
@@ -12983,10 +14218,10 @@
       </p:sp>
       <p:sp>
         <p:nvSpPr>
-          <p:cNvPr id="39" name="ownership-text">
-            <a:extLst>
-              <a:ext uri="{FF2B5EF4-FFF2-40B4-BE49-F238E27FC236}">
-                <a16:creationId xmlns:a16="http://schemas.microsoft.com/office/drawing/2014/main" id="{D43AC06C-6C75-D000-07C0-CF0111B085B4}"/>
+          <p:cNvPr id="50" name="ownership-text">
+            <a:extLst>
+              <a:ext uri="{FF2B5EF4-FFF2-40B4-BE49-F238E27FC236}">
+                <a16:creationId xmlns:a16="http://schemas.microsoft.com/office/drawing/2014/main" id="{4122A994-6BF4-536A-DFB0-7DD2EC77781F}"/>
               </a:ext>
             </a:extLst>
           </p:cNvPr>
@@ -12995,7 +14230,7 @@
         </p:nvSpPr>
         <p:spPr>
           <a:xfrm>
-            <a:off x="1524000" y="5143500"/>
+            <a:off x="1524000" y="5448300"/>
             <a:ext cx="9144000" cy="276999"/>
           </a:xfrm>
           <a:prstGeom prst="rect">
@@ -13016,7 +14251,7 @@
                 </a:solidFill>
                 <a:latin typeface="Aptos" panose="020B0004020202020204" pitchFamily="34" charset="0"/>
               </a:rPr>
-              <a:t>For the FYP submission, the implementation and submitted dissertation artifact are my own work; later paper writing may involve collaborators.</a:t>
+              <a:t>FYP submission: implementation and submitted dissertation artifact completed individually; later paper writing may involve collaborators.</a:t>
             </a:r>
             <a:endParaRPr lang="zh-CN" altLang="en-US" sz="830" b="1">
               <a:solidFill>
@@ -13030,7 +14265,7 @@
     </p:spTree>
     <p:extLst>
       <p:ext uri="{BB962C8B-B14F-4D97-AF65-F5344CB8AC3E}">
-        <p14:creationId xmlns:p14="http://schemas.microsoft.com/office/powerpoint/2010/main" val="3428772530"/>
+        <p14:creationId xmlns:p14="http://schemas.microsoft.com/office/powerpoint/2010/main" val="2178802051"/>
       </p:ext>
     </p:extLst>
   </p:cSld>
@@ -13074,7 +14309,7 @@
           <p:cNvPr id="2" name="dark-bg">
             <a:extLst>
               <a:ext uri="{FF2B5EF4-FFF2-40B4-BE49-F238E27FC236}">
-                <a16:creationId xmlns:a16="http://schemas.microsoft.com/office/drawing/2014/main" id="{1383F119-CA52-0EA1-19E4-C6AD4F2D7E8B}"/>
+                <a16:creationId xmlns:a16="http://schemas.microsoft.com/office/drawing/2014/main" id="{45D4767F-A9F5-7D93-E57C-7D848FB0BFEE}"/>
               </a:ext>
             </a:extLst>
           </p:cNvPr>
@@ -13135,7 +14370,7 @@
           <p:cNvPr id="3" name="dark-panel">
             <a:extLst>
               <a:ext uri="{FF2B5EF4-FFF2-40B4-BE49-F238E27FC236}">
-                <a16:creationId xmlns:a16="http://schemas.microsoft.com/office/drawing/2014/main" id="{8C383105-1C3E-89A8-E915-4A54166883C6}"/>
+                <a16:creationId xmlns:a16="http://schemas.microsoft.com/office/drawing/2014/main" id="{C8D9294B-B926-0FC5-C7D6-56958B872EB6}"/>
               </a:ext>
             </a:extLst>
           </p:cNvPr>
@@ -13198,7 +14433,7 @@
           <p:cNvPr id="4" name="grid-v-0">
             <a:extLst>
               <a:ext uri="{FF2B5EF4-FFF2-40B4-BE49-F238E27FC236}">
-                <a16:creationId xmlns:a16="http://schemas.microsoft.com/office/drawing/2014/main" id="{574DC98E-2A26-07DB-5C81-9FFB0E09545B}"/>
+                <a16:creationId xmlns:a16="http://schemas.microsoft.com/office/drawing/2014/main" id="{31007564-9B59-65E1-C3E6-9FF547C9A954}"/>
               </a:ext>
             </a:extLst>
           </p:cNvPr>
@@ -13239,7 +14474,7 @@
           <p:cNvPr id="5" name="grid-v-64">
             <a:extLst>
               <a:ext uri="{FF2B5EF4-FFF2-40B4-BE49-F238E27FC236}">
-                <a16:creationId xmlns:a16="http://schemas.microsoft.com/office/drawing/2014/main" id="{9BF9EEC0-01D8-9720-713D-E5F548864CAC}"/>
+                <a16:creationId xmlns:a16="http://schemas.microsoft.com/office/drawing/2014/main" id="{20A2C944-3B46-7798-45BD-6D181AB63D83}"/>
               </a:ext>
             </a:extLst>
           </p:cNvPr>
@@ -13280,7 +14515,7 @@
           <p:cNvPr id="6" name="grid-v-128">
             <a:extLst>
               <a:ext uri="{FF2B5EF4-FFF2-40B4-BE49-F238E27FC236}">
-                <a16:creationId xmlns:a16="http://schemas.microsoft.com/office/drawing/2014/main" id="{6BA8AA76-71F6-9F16-3FF4-73A6339FFDAF}"/>
+                <a16:creationId xmlns:a16="http://schemas.microsoft.com/office/drawing/2014/main" id="{F7419B30-ED53-0F83-EFBB-C4496ACBF2A9}"/>
               </a:ext>
             </a:extLst>
           </p:cNvPr>
@@ -13321,7 +14556,7 @@
           <p:cNvPr id="7" name="grid-v-192">
             <a:extLst>
               <a:ext uri="{FF2B5EF4-FFF2-40B4-BE49-F238E27FC236}">
-                <a16:creationId xmlns:a16="http://schemas.microsoft.com/office/drawing/2014/main" id="{DBD6DBF5-2161-FACA-6817-D7D3E23E2C71}"/>
+                <a16:creationId xmlns:a16="http://schemas.microsoft.com/office/drawing/2014/main" id="{43D55E65-A6A2-4D6A-F224-FA89DCD279C1}"/>
               </a:ext>
             </a:extLst>
           </p:cNvPr>
@@ -13362,7 +14597,7 @@
           <p:cNvPr id="8" name="grid-v-256">
             <a:extLst>
               <a:ext uri="{FF2B5EF4-FFF2-40B4-BE49-F238E27FC236}">
-                <a16:creationId xmlns:a16="http://schemas.microsoft.com/office/drawing/2014/main" id="{3B9DBB8C-B0FF-27EF-9792-3DB406DE0645}"/>
+                <a16:creationId xmlns:a16="http://schemas.microsoft.com/office/drawing/2014/main" id="{15DC8B1B-D146-5D13-E3D8-9AB13DD4B6C7}"/>
               </a:ext>
             </a:extLst>
           </p:cNvPr>
@@ -13403,7 +14638,7 @@
           <p:cNvPr id="9" name="grid-v-320">
             <a:extLst>
               <a:ext uri="{FF2B5EF4-FFF2-40B4-BE49-F238E27FC236}">
-                <a16:creationId xmlns:a16="http://schemas.microsoft.com/office/drawing/2014/main" id="{17315285-3CFE-586C-7EFF-576E51B264D5}"/>
+                <a16:creationId xmlns:a16="http://schemas.microsoft.com/office/drawing/2014/main" id="{9856177A-E98A-C0F3-E298-C0FDF9096B59}"/>
               </a:ext>
             </a:extLst>
           </p:cNvPr>
@@ -13444,7 +14679,7 @@
           <p:cNvPr id="10" name="grid-v-384">
             <a:extLst>
               <a:ext uri="{FF2B5EF4-FFF2-40B4-BE49-F238E27FC236}">
-                <a16:creationId xmlns:a16="http://schemas.microsoft.com/office/drawing/2014/main" id="{9503F5CF-9000-40D9-4AFA-47107F6A263A}"/>
+                <a16:creationId xmlns:a16="http://schemas.microsoft.com/office/drawing/2014/main" id="{09F2625B-8C49-5876-B9F7-4E98775E8B8F}"/>
               </a:ext>
             </a:extLst>
           </p:cNvPr>
@@ -13485,7 +14720,7 @@
           <p:cNvPr id="11" name="grid-v-448">
             <a:extLst>
               <a:ext uri="{FF2B5EF4-FFF2-40B4-BE49-F238E27FC236}">
-                <a16:creationId xmlns:a16="http://schemas.microsoft.com/office/drawing/2014/main" id="{E7B6AB9A-3A9E-7BA4-4ACD-60678776D593}"/>
+                <a16:creationId xmlns:a16="http://schemas.microsoft.com/office/drawing/2014/main" id="{E8F6BD6C-05B5-2A23-EAA1-944F58217CFB}"/>
               </a:ext>
             </a:extLst>
           </p:cNvPr>
@@ -13526,7 +14761,7 @@
           <p:cNvPr id="12" name="grid-v-512">
             <a:extLst>
               <a:ext uri="{FF2B5EF4-FFF2-40B4-BE49-F238E27FC236}">
-                <a16:creationId xmlns:a16="http://schemas.microsoft.com/office/drawing/2014/main" id="{B5B86860-76DF-D7E1-F91B-A7B08095E5F5}"/>
+                <a16:creationId xmlns:a16="http://schemas.microsoft.com/office/drawing/2014/main" id="{7CF0EB77-B9C5-B02F-7FD9-283C7739DFFA}"/>
               </a:ext>
             </a:extLst>
           </p:cNvPr>
@@ -13567,7 +14802,7 @@
           <p:cNvPr id="13" name="grid-v-576">
             <a:extLst>
               <a:ext uri="{FF2B5EF4-FFF2-40B4-BE49-F238E27FC236}">
-                <a16:creationId xmlns:a16="http://schemas.microsoft.com/office/drawing/2014/main" id="{412E329A-E776-CC27-D3DA-1F40E347A582}"/>
+                <a16:creationId xmlns:a16="http://schemas.microsoft.com/office/drawing/2014/main" id="{EC4499FB-FB4C-6D59-1ACA-6D6EBF80DEEC}"/>
               </a:ext>
             </a:extLst>
           </p:cNvPr>
@@ -13608,7 +14843,7 @@
           <p:cNvPr id="14" name="grid-v-640">
             <a:extLst>
               <a:ext uri="{FF2B5EF4-FFF2-40B4-BE49-F238E27FC236}">
-                <a16:creationId xmlns:a16="http://schemas.microsoft.com/office/drawing/2014/main" id="{75EB79A3-6118-E23D-AA7C-ECF19605D76C}"/>
+                <a16:creationId xmlns:a16="http://schemas.microsoft.com/office/drawing/2014/main" id="{304E9092-DD57-EBA2-12BC-C88B9C83F4E1}"/>
               </a:ext>
             </a:extLst>
           </p:cNvPr>
@@ -13649,7 +14884,7 @@
           <p:cNvPr id="15" name="grid-v-704">
             <a:extLst>
               <a:ext uri="{FF2B5EF4-FFF2-40B4-BE49-F238E27FC236}">
-                <a16:creationId xmlns:a16="http://schemas.microsoft.com/office/drawing/2014/main" id="{119002C0-242E-274F-F957-640ACA543C10}"/>
+                <a16:creationId xmlns:a16="http://schemas.microsoft.com/office/drawing/2014/main" id="{44556C57-5C09-85ED-BC87-EEC10A409540}"/>
               </a:ext>
             </a:extLst>
           </p:cNvPr>
@@ -13690,7 +14925,7 @@
           <p:cNvPr id="16" name="grid-v-768">
             <a:extLst>
               <a:ext uri="{FF2B5EF4-FFF2-40B4-BE49-F238E27FC236}">
-                <a16:creationId xmlns:a16="http://schemas.microsoft.com/office/drawing/2014/main" id="{CAEDC10F-9C42-1FE0-DFB8-C0AEADAE0331}"/>
+                <a16:creationId xmlns:a16="http://schemas.microsoft.com/office/drawing/2014/main" id="{C3B4115F-DC46-B855-CFD2-E364FA0C5C53}"/>
               </a:ext>
             </a:extLst>
           </p:cNvPr>
@@ -13731,7 +14966,7 @@
           <p:cNvPr id="17" name="grid-v-832">
             <a:extLst>
               <a:ext uri="{FF2B5EF4-FFF2-40B4-BE49-F238E27FC236}">
-                <a16:creationId xmlns:a16="http://schemas.microsoft.com/office/drawing/2014/main" id="{42773ABE-254B-50E6-3ADF-38E2FF63236B}"/>
+                <a16:creationId xmlns:a16="http://schemas.microsoft.com/office/drawing/2014/main" id="{09141AF4-4148-4A49-1E81-EDEE10B10626}"/>
               </a:ext>
             </a:extLst>
           </p:cNvPr>
@@ -13772,7 +15007,7 @@
           <p:cNvPr id="18" name="grid-v-896">
             <a:extLst>
               <a:ext uri="{FF2B5EF4-FFF2-40B4-BE49-F238E27FC236}">
-                <a16:creationId xmlns:a16="http://schemas.microsoft.com/office/drawing/2014/main" id="{281406B4-215F-36F7-CF8D-A9AE2684C7B4}"/>
+                <a16:creationId xmlns:a16="http://schemas.microsoft.com/office/drawing/2014/main" id="{D8D639E1-B828-0111-266F-D904BCE20BC4}"/>
               </a:ext>
             </a:extLst>
           </p:cNvPr>
@@ -13813,7 +15048,7 @@
           <p:cNvPr id="19" name="grid-v-960">
             <a:extLst>
               <a:ext uri="{FF2B5EF4-FFF2-40B4-BE49-F238E27FC236}">
-                <a16:creationId xmlns:a16="http://schemas.microsoft.com/office/drawing/2014/main" id="{71D1BACA-CBF1-04F1-1829-9F44F005CAB6}"/>
+                <a16:creationId xmlns:a16="http://schemas.microsoft.com/office/drawing/2014/main" id="{BE27E73F-20E4-3AB8-B087-007591D3A832}"/>
               </a:ext>
             </a:extLst>
           </p:cNvPr>
@@ -13854,7 +15089,7 @@
           <p:cNvPr id="20" name="grid-h-0">
             <a:extLst>
               <a:ext uri="{FF2B5EF4-FFF2-40B4-BE49-F238E27FC236}">
-                <a16:creationId xmlns:a16="http://schemas.microsoft.com/office/drawing/2014/main" id="{F643568A-1825-4329-2B01-B3E09CAA88ED}"/>
+                <a16:creationId xmlns:a16="http://schemas.microsoft.com/office/drawing/2014/main" id="{4AB2880F-1CD8-2DD4-B1D0-2A9D2D9C6ABB}"/>
               </a:ext>
             </a:extLst>
           </p:cNvPr>
@@ -13895,7 +15130,7 @@
           <p:cNvPr id="21" name="grid-h-64">
             <a:extLst>
               <a:ext uri="{FF2B5EF4-FFF2-40B4-BE49-F238E27FC236}">
-                <a16:creationId xmlns:a16="http://schemas.microsoft.com/office/drawing/2014/main" id="{83546355-906E-D2DA-FEDA-8975FE00B73B}"/>
+                <a16:creationId xmlns:a16="http://schemas.microsoft.com/office/drawing/2014/main" id="{3E48743A-D199-24EF-2459-522B48174A4C}"/>
               </a:ext>
             </a:extLst>
           </p:cNvPr>
@@ -13936,7 +15171,7 @@
           <p:cNvPr id="22" name="grid-h-128">
             <a:extLst>
               <a:ext uri="{FF2B5EF4-FFF2-40B4-BE49-F238E27FC236}">
-                <a16:creationId xmlns:a16="http://schemas.microsoft.com/office/drawing/2014/main" id="{2221781E-9B74-CC53-226A-AD063A0681AA}"/>
+                <a16:creationId xmlns:a16="http://schemas.microsoft.com/office/drawing/2014/main" id="{7CD48F26-6020-5D59-0E92-A7E71204954C}"/>
               </a:ext>
             </a:extLst>
           </p:cNvPr>
@@ -13977,7 +15212,7 @@
           <p:cNvPr id="23" name="grid-h-192">
             <a:extLst>
               <a:ext uri="{FF2B5EF4-FFF2-40B4-BE49-F238E27FC236}">
-                <a16:creationId xmlns:a16="http://schemas.microsoft.com/office/drawing/2014/main" id="{3E210C2D-9424-0271-317C-6ED63FED39EB}"/>
+                <a16:creationId xmlns:a16="http://schemas.microsoft.com/office/drawing/2014/main" id="{8ECDF935-AA82-EA29-CA1C-9E394D8D54F8}"/>
               </a:ext>
             </a:extLst>
           </p:cNvPr>
@@ -14018,7 +15253,7 @@
           <p:cNvPr id="24" name="grid-h-256">
             <a:extLst>
               <a:ext uri="{FF2B5EF4-FFF2-40B4-BE49-F238E27FC236}">
-                <a16:creationId xmlns:a16="http://schemas.microsoft.com/office/drawing/2014/main" id="{7365A9F7-ED32-08D8-544C-57B336E3DAA9}"/>
+                <a16:creationId xmlns:a16="http://schemas.microsoft.com/office/drawing/2014/main" id="{FE65A4B4-80E7-C870-96B5-AB13E2FFE2AB}"/>
               </a:ext>
             </a:extLst>
           </p:cNvPr>
@@ -14059,7 +15294,7 @@
           <p:cNvPr id="25" name="grid-h-320">
             <a:extLst>
               <a:ext uri="{FF2B5EF4-FFF2-40B4-BE49-F238E27FC236}">
-                <a16:creationId xmlns:a16="http://schemas.microsoft.com/office/drawing/2014/main" id="{403A36B1-5BE6-EAB3-2C37-BA9D882FEE21}"/>
+                <a16:creationId xmlns:a16="http://schemas.microsoft.com/office/drawing/2014/main" id="{02B05EDB-088C-2343-60B5-BA4CDB78CEFE}"/>
               </a:ext>
             </a:extLst>
           </p:cNvPr>
@@ -14100,7 +15335,7 @@
           <p:cNvPr id="26" name="grid-h-384">
             <a:extLst>
               <a:ext uri="{FF2B5EF4-FFF2-40B4-BE49-F238E27FC236}">
-                <a16:creationId xmlns:a16="http://schemas.microsoft.com/office/drawing/2014/main" id="{11CC5162-D51C-EB20-66A1-F6D32D307295}"/>
+                <a16:creationId xmlns:a16="http://schemas.microsoft.com/office/drawing/2014/main" id="{ED917A82-F34D-620B-82A0-F3E445E5B5AD}"/>
               </a:ext>
             </a:extLst>
           </p:cNvPr>
@@ -14141,7 +15376,7 @@
           <p:cNvPr id="27" name="grid-h-448">
             <a:extLst>
               <a:ext uri="{FF2B5EF4-FFF2-40B4-BE49-F238E27FC236}">
-                <a16:creationId xmlns:a16="http://schemas.microsoft.com/office/drawing/2014/main" id="{2559D8CB-37A2-072F-0C1B-A36B2C07C273}"/>
+                <a16:creationId xmlns:a16="http://schemas.microsoft.com/office/drawing/2014/main" id="{12CA9646-A7BB-997D-BFE2-827FD1D103FD}"/>
               </a:ext>
             </a:extLst>
           </p:cNvPr>
@@ -14182,7 +15417,7 @@
           <p:cNvPr id="28" name="grid-h-512">
             <a:extLst>
               <a:ext uri="{FF2B5EF4-FFF2-40B4-BE49-F238E27FC236}">
-                <a16:creationId xmlns:a16="http://schemas.microsoft.com/office/drawing/2014/main" id="{29306134-CA7E-A52E-B5A9-C942F321A95C}"/>
+                <a16:creationId xmlns:a16="http://schemas.microsoft.com/office/drawing/2014/main" id="{19ADDC50-0932-908F-E88B-5A4820636FEC}"/>
               </a:ext>
             </a:extLst>
           </p:cNvPr>
@@ -14223,7 +15458,7 @@
           <p:cNvPr id="29" name="page-num">
             <a:extLst>
               <a:ext uri="{FF2B5EF4-FFF2-40B4-BE49-F238E27FC236}">
-                <a16:creationId xmlns:a16="http://schemas.microsoft.com/office/drawing/2014/main" id="{1B55C0BC-1A22-8B6C-D3C1-9B997B3CFC29}"/>
+                <a16:creationId xmlns:a16="http://schemas.microsoft.com/office/drawing/2014/main" id="{23EA2F7C-1832-84E3-2130-50CDE6FA63AF}"/>
               </a:ext>
             </a:extLst>
           </p:cNvPr>
@@ -14269,7 +15504,7 @@
           <p:cNvPr id="30" name="section-label">
             <a:extLst>
               <a:ext uri="{FF2B5EF4-FFF2-40B4-BE49-F238E27FC236}">
-                <a16:creationId xmlns:a16="http://schemas.microsoft.com/office/drawing/2014/main" id="{E0BCA324-41DC-1FAA-D976-5848BA67A1E1}"/>
+                <a16:creationId xmlns:a16="http://schemas.microsoft.com/office/drawing/2014/main" id="{4BA0B368-090A-A592-D7D4-1399C32FF720}"/>
               </a:ext>
             </a:extLst>
           </p:cNvPr>
@@ -14315,7 +15550,7 @@
           <p:cNvPr id="31" name="thanks">
             <a:extLst>
               <a:ext uri="{FF2B5EF4-FFF2-40B4-BE49-F238E27FC236}">
-                <a16:creationId xmlns:a16="http://schemas.microsoft.com/office/drawing/2014/main" id="{C71DC23C-0F6A-1A68-6251-9BAC7957AED9}"/>
+                <a16:creationId xmlns:a16="http://schemas.microsoft.com/office/drawing/2014/main" id="{9D87B3E9-51E2-A65A-ACF7-64A1092407C4}"/>
               </a:ext>
             </a:extLst>
           </p:cNvPr>
@@ -14361,7 +15596,7 @@
           <p:cNvPr id="32" name="questions">
             <a:extLst>
               <a:ext uri="{FF2B5EF4-FFF2-40B4-BE49-F238E27FC236}">
-                <a16:creationId xmlns:a16="http://schemas.microsoft.com/office/drawing/2014/main" id="{66F14E7A-FB26-16DC-C603-A7750B5A7977}"/>
+                <a16:creationId xmlns:a16="http://schemas.microsoft.com/office/drawing/2014/main" id="{48497E40-903E-745D-08F7-9A72F1043295}"/>
               </a:ext>
             </a:extLst>
           </p:cNvPr>
@@ -14407,7 +15642,7 @@
           <p:cNvPr id="33" name="closing-line">
             <a:extLst>
               <a:ext uri="{FF2B5EF4-FFF2-40B4-BE49-F238E27FC236}">
-                <a16:creationId xmlns:a16="http://schemas.microsoft.com/office/drawing/2014/main" id="{E79D9BA0-D0DD-9B35-25AA-D611ECD513C5}"/>
+                <a16:creationId xmlns:a16="http://schemas.microsoft.com/office/drawing/2014/main" id="{5FC6B06A-E914-3206-46A5-E5C194A445B2}"/>
               </a:ext>
             </a:extLst>
           </p:cNvPr>
@@ -14448,7 +15683,7 @@
           <p:cNvPr id="34" name="takeaway">
             <a:extLst>
               <a:ext uri="{FF2B5EF4-FFF2-40B4-BE49-F238E27FC236}">
-                <a16:creationId xmlns:a16="http://schemas.microsoft.com/office/drawing/2014/main" id="{9CF41230-0B80-1498-DE8B-A0D09D5D7C5E}"/>
+                <a16:creationId xmlns:a16="http://schemas.microsoft.com/office/drawing/2014/main" id="{5112B22E-B4EE-60D0-3283-7483BBF974EA}"/>
               </a:ext>
             </a:extLst>
           </p:cNvPr>
@@ -14502,7 +15737,7 @@
           <p:cNvPr id="35" name="takeaway-t">
             <a:extLst>
               <a:ext uri="{FF2B5EF4-FFF2-40B4-BE49-F238E27FC236}">
-                <a16:creationId xmlns:a16="http://schemas.microsoft.com/office/drawing/2014/main" id="{FF863FC1-C133-BCA5-AD7B-56D3B7E95B27}"/>
+                <a16:creationId xmlns:a16="http://schemas.microsoft.com/office/drawing/2014/main" id="{AAD8569C-2EAB-213C-6FDA-3A07E42AEDCF}"/>
               </a:ext>
             </a:extLst>
           </p:cNvPr>
@@ -14548,7 +15783,7 @@
           <p:cNvPr id="36" name="qa">
             <a:extLst>
               <a:ext uri="{FF2B5EF4-FFF2-40B4-BE49-F238E27FC236}">
-                <a16:creationId xmlns:a16="http://schemas.microsoft.com/office/drawing/2014/main" id="{C1970C7C-C0D4-7061-F04E-BC69ECDF948D}"/>
+                <a16:creationId xmlns:a16="http://schemas.microsoft.com/office/drawing/2014/main" id="{BE45CABC-BC22-A141-3B50-9E8CC960FF14}"/>
               </a:ext>
             </a:extLst>
           </p:cNvPr>
@@ -14602,7 +15837,7 @@
           <p:cNvPr id="37" name="qa-t">
             <a:extLst>
               <a:ext uri="{FF2B5EF4-FFF2-40B4-BE49-F238E27FC236}">
-                <a16:creationId xmlns:a16="http://schemas.microsoft.com/office/drawing/2014/main" id="{001EB2C5-2F4C-0AD2-FA04-8B71AEE8F8FE}"/>
+                <a16:creationId xmlns:a16="http://schemas.microsoft.com/office/drawing/2014/main" id="{C6D007A3-EBB0-0392-F91D-756EACE87C5D}"/>
               </a:ext>
             </a:extLst>
           </p:cNvPr>
@@ -14649,7 +15884,7 @@
             <a:hlinkClick r:id="rId3"/>
             <a:extLst>
               <a:ext uri="{FF2B5EF4-FFF2-40B4-BE49-F238E27FC236}">
-                <a16:creationId xmlns:a16="http://schemas.microsoft.com/office/drawing/2014/main" id="{E9BCD431-AAFA-A2D1-8A54-B463454BB865}"/>
+                <a16:creationId xmlns:a16="http://schemas.microsoft.com/office/drawing/2014/main" id="{74EFF83C-27DA-EBCC-8A94-DBE54E1DB75B}"/>
               </a:ext>
             </a:extLst>
           </p:cNvPr>
@@ -14686,7 +15921,7 @@
             <a:hlinkClick r:id="rId3"/>
             <a:extLst>
               <a:ext uri="{FF2B5EF4-FFF2-40B4-BE49-F238E27FC236}">
-                <a16:creationId xmlns:a16="http://schemas.microsoft.com/office/drawing/2014/main" id="{37566A4F-7DD8-7255-0670-F69EF5CD7D69}"/>
+                <a16:creationId xmlns:a16="http://schemas.microsoft.com/office/drawing/2014/main" id="{687A38F4-0BEE-AE8B-21E4-228E315E94AD}"/>
               </a:ext>
             </a:extLst>
           </p:cNvPr>
@@ -14755,7 +15990,7 @@
             <a:hlinkClick r:id="rId5"/>
             <a:extLst>
               <a:ext uri="{FF2B5EF4-FFF2-40B4-BE49-F238E27FC236}">
-                <a16:creationId xmlns:a16="http://schemas.microsoft.com/office/drawing/2014/main" id="{09FA2C9D-2703-338D-8264-69393242CFEF}"/>
+                <a16:creationId xmlns:a16="http://schemas.microsoft.com/office/drawing/2014/main" id="{9212C5FE-AAE0-E86D-58B5-47CF867226C0}"/>
               </a:ext>
             </a:extLst>
           </p:cNvPr>
@@ -14823,7 +16058,7 @@
           <p:cNvPr id="43" name="图片 42">
             <a:extLst>
               <a:ext uri="{FF2B5EF4-FFF2-40B4-BE49-F238E27FC236}">
-                <a16:creationId xmlns:a16="http://schemas.microsoft.com/office/drawing/2014/main" id="{5530ADE2-691B-64A0-72CC-5B9102C748AB}"/>
+                <a16:creationId xmlns:a16="http://schemas.microsoft.com/office/drawing/2014/main" id="{FBD2DEE0-68C5-F68C-3D4B-30706344B2B6}"/>
               </a:ext>
             </a:extLst>
           </p:cNvPr>
@@ -14857,7 +16092,7 @@
     </p:spTree>
     <p:extLst>
       <p:ext uri="{BB962C8B-B14F-4D97-AF65-F5344CB8AC3E}">
-        <p14:creationId xmlns:p14="http://schemas.microsoft.com/office/powerpoint/2010/main" val="3406624489"/>
+        <p14:creationId xmlns:p14="http://schemas.microsoft.com/office/powerpoint/2010/main" val="3546156096"/>
       </p:ext>
     </p:extLst>
   </p:cSld>
@@ -14901,7 +16136,7 @@
           <p:cNvPr id="2" name="page-bg">
             <a:extLst>
               <a:ext uri="{FF2B5EF4-FFF2-40B4-BE49-F238E27FC236}">
-                <a16:creationId xmlns:a16="http://schemas.microsoft.com/office/drawing/2014/main" id="{3D79997B-96FD-1511-867E-04860E8A18BF}"/>
+                <a16:creationId xmlns:a16="http://schemas.microsoft.com/office/drawing/2014/main" id="{EEE7FCC0-5467-4898-00F5-B0686556FAC7}"/>
               </a:ext>
             </a:extLst>
           </p:cNvPr>
@@ -14962,7 +16197,7 @@
           <p:cNvPr id="3" name="left-rail">
             <a:extLst>
               <a:ext uri="{FF2B5EF4-FFF2-40B4-BE49-F238E27FC236}">
-                <a16:creationId xmlns:a16="http://schemas.microsoft.com/office/drawing/2014/main" id="{F736AA20-179C-E829-0F29-3666BC0134AF}"/>
+                <a16:creationId xmlns:a16="http://schemas.microsoft.com/office/drawing/2014/main" id="{369367E3-D870-D008-AB99-5BB3ABB5A409}"/>
               </a:ext>
             </a:extLst>
           </p:cNvPr>
@@ -15023,7 +16258,7 @@
           <p:cNvPr id="4" name="top-line">
             <a:extLst>
               <a:ext uri="{FF2B5EF4-FFF2-40B4-BE49-F238E27FC236}">
-                <a16:creationId xmlns:a16="http://schemas.microsoft.com/office/drawing/2014/main" id="{AF686C45-3BD0-A720-DCF2-5FB3A6FF6D75}"/>
+                <a16:creationId xmlns:a16="http://schemas.microsoft.com/office/drawing/2014/main" id="{C096CFAC-A511-EFD1-5F2D-F7B955F89A34}"/>
               </a:ext>
             </a:extLst>
           </p:cNvPr>
@@ -15064,7 +16299,7 @@
           <p:cNvPr id="5" name="footer-left">
             <a:extLst>
               <a:ext uri="{FF2B5EF4-FFF2-40B4-BE49-F238E27FC236}">
-                <a16:creationId xmlns:a16="http://schemas.microsoft.com/office/drawing/2014/main" id="{89946EE3-D87C-AD47-82B0-CC2FEEC50DC2}"/>
+                <a16:creationId xmlns:a16="http://schemas.microsoft.com/office/drawing/2014/main" id="{6F150B0F-7944-CC3B-FE55-1B20530FA5BE}"/>
               </a:ext>
             </a:extLst>
           </p:cNvPr>
@@ -15110,7 +16345,7 @@
           <p:cNvPr id="6" name="footer-mid">
             <a:extLst>
               <a:ext uri="{FF2B5EF4-FFF2-40B4-BE49-F238E27FC236}">
-                <a16:creationId xmlns:a16="http://schemas.microsoft.com/office/drawing/2014/main" id="{B41C31D3-5E63-5984-6E6E-9BEF08B258F5}"/>
+                <a16:creationId xmlns:a16="http://schemas.microsoft.com/office/drawing/2014/main" id="{225AB401-EA4E-4D29-1543-DFEF86B35DA2}"/>
               </a:ext>
             </a:extLst>
           </p:cNvPr>
@@ -15156,7 +16391,7 @@
           <p:cNvPr id="7" name="page-num">
             <a:extLst>
               <a:ext uri="{FF2B5EF4-FFF2-40B4-BE49-F238E27FC236}">
-                <a16:creationId xmlns:a16="http://schemas.microsoft.com/office/drawing/2014/main" id="{840EA330-DB77-5DA1-10D9-ED22A565696C}"/>
+                <a16:creationId xmlns:a16="http://schemas.microsoft.com/office/drawing/2014/main" id="{7762C090-B260-3D22-AF55-BA63A0E7903C}"/>
               </a:ext>
             </a:extLst>
           </p:cNvPr>
@@ -15202,7 +16437,7 @@
           <p:cNvPr id="8" name="section-label">
             <a:extLst>
               <a:ext uri="{FF2B5EF4-FFF2-40B4-BE49-F238E27FC236}">
-                <a16:creationId xmlns:a16="http://schemas.microsoft.com/office/drawing/2014/main" id="{BC7426E7-C9FF-5E20-BD92-3A3BE588C16B}"/>
+                <a16:creationId xmlns:a16="http://schemas.microsoft.com/office/drawing/2014/main" id="{35F9DB35-D021-2232-2F33-276B1F1C5390}"/>
               </a:ext>
             </a:extLst>
           </p:cNvPr>
@@ -15248,7 +16483,7 @@
           <p:cNvPr id="10" name="图片 9">
             <a:extLst>
               <a:ext uri="{FF2B5EF4-FFF2-40B4-BE49-F238E27FC236}">
-                <a16:creationId xmlns:a16="http://schemas.microsoft.com/office/drawing/2014/main" id="{DF8B5B6A-200C-55FF-BD6E-5C50642F76DE}"/>
+                <a16:creationId xmlns:a16="http://schemas.microsoft.com/office/drawing/2014/main" id="{69435036-5B71-181F-F1B3-7C1E92F72B2A}"/>
               </a:ext>
             </a:extLst>
           </p:cNvPr>
@@ -15284,7 +16519,7 @@
           <p:cNvPr id="11" name="title">
             <a:extLst>
               <a:ext uri="{FF2B5EF4-FFF2-40B4-BE49-F238E27FC236}">
-                <a16:creationId xmlns:a16="http://schemas.microsoft.com/office/drawing/2014/main" id="{43AF84C9-D289-2BE9-ED48-53FE1FB75290}"/>
+                <a16:creationId xmlns:a16="http://schemas.microsoft.com/office/drawing/2014/main" id="{891D316C-D5E2-27A1-C066-2A18FB68F3AD}"/>
               </a:ext>
             </a:extLst>
           </p:cNvPr>
@@ -15330,7 +16565,7 @@
           <p:cNvPr id="12" name="subtitle">
             <a:extLst>
               <a:ext uri="{FF2B5EF4-FFF2-40B4-BE49-F238E27FC236}">
-                <a16:creationId xmlns:a16="http://schemas.microsoft.com/office/drawing/2014/main" id="{B63C66E5-D61B-C2C6-8255-A60CEE0BF26D}"/>
+                <a16:creationId xmlns:a16="http://schemas.microsoft.com/office/drawing/2014/main" id="{AD50E98C-F31D-46A5-B829-4D66281B9253}"/>
               </a:ext>
             </a:extLst>
           </p:cNvPr>
@@ -15376,7 +16611,7 @@
           <p:cNvPr id="13" name="formula-big">
             <a:extLst>
               <a:ext uri="{FF2B5EF4-FFF2-40B4-BE49-F238E27FC236}">
-                <a16:creationId xmlns:a16="http://schemas.microsoft.com/office/drawing/2014/main" id="{5C30F536-25B3-E530-8AA2-2BCE15FE10BC}"/>
+                <a16:creationId xmlns:a16="http://schemas.microsoft.com/office/drawing/2014/main" id="{6AF7ACF6-2986-A837-E035-0A632AE57447}"/>
               </a:ext>
             </a:extLst>
           </p:cNvPr>
@@ -15430,7 +16665,7 @@
           <p:cNvPr id="14" name="formula-text">
             <a:extLst>
               <a:ext uri="{FF2B5EF4-FFF2-40B4-BE49-F238E27FC236}">
-                <a16:creationId xmlns:a16="http://schemas.microsoft.com/office/drawing/2014/main" id="{7107620E-A6D9-6F48-6E36-7D9577D5F602}"/>
+                <a16:creationId xmlns:a16="http://schemas.microsoft.com/office/drawing/2014/main" id="{24DEA3E7-0DC7-B5C5-9BC7-BA9CE696F11A}"/>
               </a:ext>
             </a:extLst>
           </p:cNvPr>
@@ -15476,7 +16711,7 @@
           <p:cNvPr id="16" name="claim-matrix">
             <a:extLst>
               <a:ext uri="{FF2B5EF4-FFF2-40B4-BE49-F238E27FC236}">
-                <a16:creationId xmlns:a16="http://schemas.microsoft.com/office/drawing/2014/main" id="{C51CFC60-CB9A-C442-D375-33CC6C8C8597}"/>
+                <a16:creationId xmlns:a16="http://schemas.microsoft.com/office/drawing/2014/main" id="{1189FC1A-FEB8-674B-67A1-5CB6CFCF572E}"/>
               </a:ext>
             </a:extLst>
           </p:cNvPr>
@@ -15513,7 +16748,7 @@
             <a:hlinkClick r:id="rId5"/>
             <a:extLst>
               <a:ext uri="{FF2B5EF4-FFF2-40B4-BE49-F238E27FC236}">
-                <a16:creationId xmlns:a16="http://schemas.microsoft.com/office/drawing/2014/main" id="{8563CCD8-FB35-AD01-B92E-F10D2208F998}"/>
+                <a16:creationId xmlns:a16="http://schemas.microsoft.com/office/drawing/2014/main" id="{489B53F8-15E9-80D6-A293-3EB2D1143035}"/>
               </a:ext>
             </a:extLst>
           </p:cNvPr>
@@ -15579,7 +16814,7 @@
     </p:spTree>
     <p:extLst>
       <p:ext uri="{BB962C8B-B14F-4D97-AF65-F5344CB8AC3E}">
-        <p14:creationId xmlns:p14="http://schemas.microsoft.com/office/powerpoint/2010/main" val="540961499"/>
+        <p14:creationId xmlns:p14="http://schemas.microsoft.com/office/powerpoint/2010/main" val="3231806601"/>
       </p:ext>
     </p:extLst>
   </p:cSld>
@@ -15623,7 +16858,7 @@
           <p:cNvPr id="2" name="page-bg">
             <a:extLst>
               <a:ext uri="{FF2B5EF4-FFF2-40B4-BE49-F238E27FC236}">
-                <a16:creationId xmlns:a16="http://schemas.microsoft.com/office/drawing/2014/main" id="{A96B4A57-6AC3-FD4D-A9A7-AD49AD6C5618}"/>
+                <a16:creationId xmlns:a16="http://schemas.microsoft.com/office/drawing/2014/main" id="{813B1E86-EDB6-1FA2-BEA8-E90CC444B671}"/>
               </a:ext>
             </a:extLst>
           </p:cNvPr>
@@ -15684,7 +16919,7 @@
           <p:cNvPr id="3" name="left-rail">
             <a:extLst>
               <a:ext uri="{FF2B5EF4-FFF2-40B4-BE49-F238E27FC236}">
-                <a16:creationId xmlns:a16="http://schemas.microsoft.com/office/drawing/2014/main" id="{4FFC3DB4-3313-610F-E662-7F39C89CC8DF}"/>
+                <a16:creationId xmlns:a16="http://schemas.microsoft.com/office/drawing/2014/main" id="{9E16A126-6491-4B9B-1F7B-7A736868A6D2}"/>
               </a:ext>
             </a:extLst>
           </p:cNvPr>
@@ -15745,7 +16980,7 @@
           <p:cNvPr id="4" name="top-line">
             <a:extLst>
               <a:ext uri="{FF2B5EF4-FFF2-40B4-BE49-F238E27FC236}">
-                <a16:creationId xmlns:a16="http://schemas.microsoft.com/office/drawing/2014/main" id="{9A71CBA0-5A1E-C943-9A3A-0C5F3BE41807}"/>
+                <a16:creationId xmlns:a16="http://schemas.microsoft.com/office/drawing/2014/main" id="{B75925DA-FF2E-0EBD-D8C2-104843DD383E}"/>
               </a:ext>
             </a:extLst>
           </p:cNvPr>
@@ -15786,7 +17021,7 @@
           <p:cNvPr id="5" name="footer-left">
             <a:extLst>
               <a:ext uri="{FF2B5EF4-FFF2-40B4-BE49-F238E27FC236}">
-                <a16:creationId xmlns:a16="http://schemas.microsoft.com/office/drawing/2014/main" id="{4705BE68-2A89-7C22-E273-22908DA58C8D}"/>
+                <a16:creationId xmlns:a16="http://schemas.microsoft.com/office/drawing/2014/main" id="{1B94AF9C-55D1-43E4-D3C2-324EB8721715}"/>
               </a:ext>
             </a:extLst>
           </p:cNvPr>
@@ -15832,7 +17067,7 @@
           <p:cNvPr id="6" name="footer-mid">
             <a:extLst>
               <a:ext uri="{FF2B5EF4-FFF2-40B4-BE49-F238E27FC236}">
-                <a16:creationId xmlns:a16="http://schemas.microsoft.com/office/drawing/2014/main" id="{4800D02B-E7FA-E43A-13C8-CEFDF54E5D90}"/>
+                <a16:creationId xmlns:a16="http://schemas.microsoft.com/office/drawing/2014/main" id="{7011C3BD-229B-80F3-35E7-139F48CC0E71}"/>
               </a:ext>
             </a:extLst>
           </p:cNvPr>
@@ -15878,7 +17113,7 @@
           <p:cNvPr id="7" name="page-num">
             <a:extLst>
               <a:ext uri="{FF2B5EF4-FFF2-40B4-BE49-F238E27FC236}">
-                <a16:creationId xmlns:a16="http://schemas.microsoft.com/office/drawing/2014/main" id="{CE0C9503-2BCF-1D81-B035-DF4D6DF360E7}"/>
+                <a16:creationId xmlns:a16="http://schemas.microsoft.com/office/drawing/2014/main" id="{657DD4D0-BFD2-B192-0CBF-505BF4004E8E}"/>
               </a:ext>
             </a:extLst>
           </p:cNvPr>
@@ -15924,7 +17159,7 @@
           <p:cNvPr id="8" name="section-label">
             <a:extLst>
               <a:ext uri="{FF2B5EF4-FFF2-40B4-BE49-F238E27FC236}">
-                <a16:creationId xmlns:a16="http://schemas.microsoft.com/office/drawing/2014/main" id="{8695FACC-1490-5EAF-4E2F-F07A6B37958B}"/>
+                <a16:creationId xmlns:a16="http://schemas.microsoft.com/office/drawing/2014/main" id="{8111921D-9DBA-4EE8-966D-23CAB4BD2945}"/>
               </a:ext>
             </a:extLst>
           </p:cNvPr>
@@ -15970,7 +17205,7 @@
           <p:cNvPr id="10" name="图片 9">
             <a:extLst>
               <a:ext uri="{FF2B5EF4-FFF2-40B4-BE49-F238E27FC236}">
-                <a16:creationId xmlns:a16="http://schemas.microsoft.com/office/drawing/2014/main" id="{4ED4C19D-1C53-20AC-7AFB-0461AC5360CB}"/>
+                <a16:creationId xmlns:a16="http://schemas.microsoft.com/office/drawing/2014/main" id="{97D3CFE8-2B4D-E67D-A417-925906BACF67}"/>
               </a:ext>
             </a:extLst>
           </p:cNvPr>
@@ -16006,7 +17241,7 @@
           <p:cNvPr id="11" name="title">
             <a:extLst>
               <a:ext uri="{FF2B5EF4-FFF2-40B4-BE49-F238E27FC236}">
-                <a16:creationId xmlns:a16="http://schemas.microsoft.com/office/drawing/2014/main" id="{C5126E4F-8C58-B9B3-E2DF-4C1631DCED41}"/>
+                <a16:creationId xmlns:a16="http://schemas.microsoft.com/office/drawing/2014/main" id="{C39746C2-F335-02B4-A05B-6294496BFD3D}"/>
               </a:ext>
             </a:extLst>
           </p:cNvPr>
@@ -16052,7 +17287,7 @@
           <p:cNvPr id="12" name="subtitle">
             <a:extLst>
               <a:ext uri="{FF2B5EF4-FFF2-40B4-BE49-F238E27FC236}">
-                <a16:creationId xmlns:a16="http://schemas.microsoft.com/office/drawing/2014/main" id="{0C1FBFDE-2C4B-4BDB-91C0-3B3D99BE0350}"/>
+                <a16:creationId xmlns:a16="http://schemas.microsoft.com/office/drawing/2014/main" id="{4CA40838-7DF4-3022-EF62-E7ADE3662041}"/>
               </a:ext>
             </a:extLst>
           </p:cNvPr>
@@ -16098,7 +17333,7 @@
           <p:cNvPr id="13" name="qa-row-0">
             <a:extLst>
               <a:ext uri="{FF2B5EF4-FFF2-40B4-BE49-F238E27FC236}">
-                <a16:creationId xmlns:a16="http://schemas.microsoft.com/office/drawing/2014/main" id="{696B0222-D5A8-5ECD-65C2-A92277FC4E8A}"/>
+                <a16:creationId xmlns:a16="http://schemas.microsoft.com/office/drawing/2014/main" id="{FFA4835A-5BBB-724B-7156-BD6667B9E66F}"/>
               </a:ext>
             </a:extLst>
           </p:cNvPr>
@@ -16152,7 +17387,7 @@
           <p:cNvPr id="14" name="q-0">
             <a:extLst>
               <a:ext uri="{FF2B5EF4-FFF2-40B4-BE49-F238E27FC236}">
-                <a16:creationId xmlns:a16="http://schemas.microsoft.com/office/drawing/2014/main" id="{12A7DB56-EB88-C13F-1406-B08AB2064CDA}"/>
+                <a16:creationId xmlns:a16="http://schemas.microsoft.com/office/drawing/2014/main" id="{86A7E5BE-D05D-6C7C-FC3F-F5D31C433ABC}"/>
               </a:ext>
             </a:extLst>
           </p:cNvPr>
@@ -16198,7 +17433,7 @@
           <p:cNvPr id="15" name="a-0">
             <a:extLst>
               <a:ext uri="{FF2B5EF4-FFF2-40B4-BE49-F238E27FC236}">
-                <a16:creationId xmlns:a16="http://schemas.microsoft.com/office/drawing/2014/main" id="{65F2F1BF-258C-9E66-855C-76536BC028D9}"/>
+                <a16:creationId xmlns:a16="http://schemas.microsoft.com/office/drawing/2014/main" id="{7C4A1E40-69FF-18A2-C6D9-AFE29897D1D6}"/>
               </a:ext>
             </a:extLst>
           </p:cNvPr>
@@ -16244,7 +17479,7 @@
           <p:cNvPr id="16" name="qa-row-1">
             <a:extLst>
               <a:ext uri="{FF2B5EF4-FFF2-40B4-BE49-F238E27FC236}">
-                <a16:creationId xmlns:a16="http://schemas.microsoft.com/office/drawing/2014/main" id="{890A1FAC-1498-2E40-E393-9A2C249770E5}"/>
+                <a16:creationId xmlns:a16="http://schemas.microsoft.com/office/drawing/2014/main" id="{C9615D33-5497-1212-E488-71CAAE5A1A34}"/>
               </a:ext>
             </a:extLst>
           </p:cNvPr>
@@ -16298,7 +17533,7 @@
           <p:cNvPr id="17" name="q-1">
             <a:extLst>
               <a:ext uri="{FF2B5EF4-FFF2-40B4-BE49-F238E27FC236}">
-                <a16:creationId xmlns:a16="http://schemas.microsoft.com/office/drawing/2014/main" id="{1258276F-6EE9-74FE-3E36-9BB894F6A61F}"/>
+                <a16:creationId xmlns:a16="http://schemas.microsoft.com/office/drawing/2014/main" id="{0F317D1C-25D1-EB9B-5814-6D2359656A25}"/>
               </a:ext>
             </a:extLst>
           </p:cNvPr>
@@ -16344,7 +17579,7 @@
           <p:cNvPr id="18" name="a-1">
             <a:extLst>
               <a:ext uri="{FF2B5EF4-FFF2-40B4-BE49-F238E27FC236}">
-                <a16:creationId xmlns:a16="http://schemas.microsoft.com/office/drawing/2014/main" id="{B16A513F-0409-F86A-D63D-F1430894A61B}"/>
+                <a16:creationId xmlns:a16="http://schemas.microsoft.com/office/drawing/2014/main" id="{4E169421-C7BE-A6EE-422C-28944E780A1F}"/>
               </a:ext>
             </a:extLst>
           </p:cNvPr>
@@ -16390,7 +17625,7 @@
           <p:cNvPr id="19" name="qa-row-2">
             <a:extLst>
               <a:ext uri="{FF2B5EF4-FFF2-40B4-BE49-F238E27FC236}">
-                <a16:creationId xmlns:a16="http://schemas.microsoft.com/office/drawing/2014/main" id="{05A5C0E5-C73A-EFF8-927D-028A39D6716C}"/>
+                <a16:creationId xmlns:a16="http://schemas.microsoft.com/office/drawing/2014/main" id="{10B1680F-CBD8-93A6-EDE8-B9467CF6A566}"/>
               </a:ext>
             </a:extLst>
           </p:cNvPr>
@@ -16444,7 +17679,7 @@
           <p:cNvPr id="20" name="q-2">
             <a:extLst>
               <a:ext uri="{FF2B5EF4-FFF2-40B4-BE49-F238E27FC236}">
-                <a16:creationId xmlns:a16="http://schemas.microsoft.com/office/drawing/2014/main" id="{F39C8F8D-C76C-1BE4-3C4B-BBD014820C5F}"/>
+                <a16:creationId xmlns:a16="http://schemas.microsoft.com/office/drawing/2014/main" id="{2ECA8190-ACDA-AC27-FBAF-C944C162084C}"/>
               </a:ext>
             </a:extLst>
           </p:cNvPr>
@@ -16490,7 +17725,7 @@
           <p:cNvPr id="21" name="a-2">
             <a:extLst>
               <a:ext uri="{FF2B5EF4-FFF2-40B4-BE49-F238E27FC236}">
-                <a16:creationId xmlns:a16="http://schemas.microsoft.com/office/drawing/2014/main" id="{4D928D38-65DD-33D1-40B8-9B98E4A5D65D}"/>
+                <a16:creationId xmlns:a16="http://schemas.microsoft.com/office/drawing/2014/main" id="{1F73772F-0745-F15A-F368-83C578B9F63A}"/>
               </a:ext>
             </a:extLst>
           </p:cNvPr>
@@ -16536,7 +17771,7 @@
           <p:cNvPr id="22" name="qa-row-3">
             <a:extLst>
               <a:ext uri="{FF2B5EF4-FFF2-40B4-BE49-F238E27FC236}">
-                <a16:creationId xmlns:a16="http://schemas.microsoft.com/office/drawing/2014/main" id="{C8A5D720-4423-D68D-8CB0-2B0A7080A734}"/>
+                <a16:creationId xmlns:a16="http://schemas.microsoft.com/office/drawing/2014/main" id="{A9E38208-9053-4236-3615-285FC5CA4801}"/>
               </a:ext>
             </a:extLst>
           </p:cNvPr>
@@ -16590,7 +17825,7 @@
           <p:cNvPr id="23" name="q-3">
             <a:extLst>
               <a:ext uri="{FF2B5EF4-FFF2-40B4-BE49-F238E27FC236}">
-                <a16:creationId xmlns:a16="http://schemas.microsoft.com/office/drawing/2014/main" id="{0C8B7ACC-C153-5AFC-697B-6750C74F6967}"/>
+                <a16:creationId xmlns:a16="http://schemas.microsoft.com/office/drawing/2014/main" id="{2F368D9D-A94D-0A79-4082-11642D3AA5BD}"/>
               </a:ext>
             </a:extLst>
           </p:cNvPr>
@@ -16636,7 +17871,7 @@
           <p:cNvPr id="24" name="a-3">
             <a:extLst>
               <a:ext uri="{FF2B5EF4-FFF2-40B4-BE49-F238E27FC236}">
-                <a16:creationId xmlns:a16="http://schemas.microsoft.com/office/drawing/2014/main" id="{5B45215E-4701-480D-DE0F-E1C5C6173F19}"/>
+                <a16:creationId xmlns:a16="http://schemas.microsoft.com/office/drawing/2014/main" id="{BF748893-93F9-4598-685C-D9F3C6CFD277}"/>
               </a:ext>
             </a:extLst>
           </p:cNvPr>
@@ -16682,7 +17917,7 @@
           <p:cNvPr id="25" name="qa-row-4">
             <a:extLst>
               <a:ext uri="{FF2B5EF4-FFF2-40B4-BE49-F238E27FC236}">
-                <a16:creationId xmlns:a16="http://schemas.microsoft.com/office/drawing/2014/main" id="{C1976337-9F93-CD42-B347-F7725FC4A662}"/>
+                <a16:creationId xmlns:a16="http://schemas.microsoft.com/office/drawing/2014/main" id="{86F58912-BF21-7EF9-96DE-17918E1B6C8A}"/>
               </a:ext>
             </a:extLst>
           </p:cNvPr>
@@ -16736,7 +17971,7 @@
           <p:cNvPr id="26" name="q-4">
             <a:extLst>
               <a:ext uri="{FF2B5EF4-FFF2-40B4-BE49-F238E27FC236}">
-                <a16:creationId xmlns:a16="http://schemas.microsoft.com/office/drawing/2014/main" id="{0E525FA1-6A97-1116-07FB-D8FF94922201}"/>
+                <a16:creationId xmlns:a16="http://schemas.microsoft.com/office/drawing/2014/main" id="{6A172310-D89A-D25C-1D77-ADD7BB958ABB}"/>
               </a:ext>
             </a:extLst>
           </p:cNvPr>
@@ -16782,7 +18017,7 @@
           <p:cNvPr id="27" name="a-4">
             <a:extLst>
               <a:ext uri="{FF2B5EF4-FFF2-40B4-BE49-F238E27FC236}">
-                <a16:creationId xmlns:a16="http://schemas.microsoft.com/office/drawing/2014/main" id="{4B42D15E-E8BC-E988-A400-E6F91B2DAC0E}"/>
+                <a16:creationId xmlns:a16="http://schemas.microsoft.com/office/drawing/2014/main" id="{3221FE0A-387D-F996-4996-EE7D185F2B4F}"/>
               </a:ext>
             </a:extLst>
           </p:cNvPr>
@@ -16826,7 +18061,7 @@
     </p:spTree>
     <p:extLst>
       <p:ext uri="{BB962C8B-B14F-4D97-AF65-F5344CB8AC3E}">
-        <p14:creationId xmlns:p14="http://schemas.microsoft.com/office/powerpoint/2010/main" val="3177828497"/>
+        <p14:creationId xmlns:p14="http://schemas.microsoft.com/office/powerpoint/2010/main" val="258101288"/>
       </p:ext>
     </p:extLst>
   </p:cSld>
@@ -16870,7 +18105,7 @@
           <p:cNvPr id="2" name="page-bg">
             <a:extLst>
               <a:ext uri="{FF2B5EF4-FFF2-40B4-BE49-F238E27FC236}">
-                <a16:creationId xmlns:a16="http://schemas.microsoft.com/office/drawing/2014/main" id="{05F4534D-9E0F-673C-DD9B-205B59B408C4}"/>
+                <a16:creationId xmlns:a16="http://schemas.microsoft.com/office/drawing/2014/main" id="{C08F3CA7-6EDE-1D0C-D8D2-2619041BD784}"/>
               </a:ext>
             </a:extLst>
           </p:cNvPr>
@@ -16931,7 +18166,7 @@
           <p:cNvPr id="3" name="left-rail">
             <a:extLst>
               <a:ext uri="{FF2B5EF4-FFF2-40B4-BE49-F238E27FC236}">
-                <a16:creationId xmlns:a16="http://schemas.microsoft.com/office/drawing/2014/main" id="{1A3A46D5-296E-D555-8351-6215552022F0}"/>
+                <a16:creationId xmlns:a16="http://schemas.microsoft.com/office/drawing/2014/main" id="{0D0309D0-3431-1F63-295A-6AB72BDE50B1}"/>
               </a:ext>
             </a:extLst>
           </p:cNvPr>
@@ -16992,7 +18227,7 @@
           <p:cNvPr id="4" name="top-line">
             <a:extLst>
               <a:ext uri="{FF2B5EF4-FFF2-40B4-BE49-F238E27FC236}">
-                <a16:creationId xmlns:a16="http://schemas.microsoft.com/office/drawing/2014/main" id="{CB5D99E0-1044-ABB9-6DF9-F4D5FD796404}"/>
+                <a16:creationId xmlns:a16="http://schemas.microsoft.com/office/drawing/2014/main" id="{84FBB985-0C77-2A9B-F3E2-6AAA9935137B}"/>
               </a:ext>
             </a:extLst>
           </p:cNvPr>
@@ -17033,7 +18268,7 @@
           <p:cNvPr id="5" name="footer-left">
             <a:extLst>
               <a:ext uri="{FF2B5EF4-FFF2-40B4-BE49-F238E27FC236}">
-                <a16:creationId xmlns:a16="http://schemas.microsoft.com/office/drawing/2014/main" id="{59CBD0B1-FDE2-7FE7-1DAA-43A4F6BCA34A}"/>
+                <a16:creationId xmlns:a16="http://schemas.microsoft.com/office/drawing/2014/main" id="{C7AB45C2-B494-F4BA-756B-779478451035}"/>
               </a:ext>
             </a:extLst>
           </p:cNvPr>
@@ -17079,7 +18314,7 @@
           <p:cNvPr id="6" name="footer-mid">
             <a:extLst>
               <a:ext uri="{FF2B5EF4-FFF2-40B4-BE49-F238E27FC236}">
-                <a16:creationId xmlns:a16="http://schemas.microsoft.com/office/drawing/2014/main" id="{A12A926C-B918-8EC7-FA5C-3D808EDF2B91}"/>
+                <a16:creationId xmlns:a16="http://schemas.microsoft.com/office/drawing/2014/main" id="{F7568743-FE98-D425-5534-50E6EA05EA6C}"/>
               </a:ext>
             </a:extLst>
           </p:cNvPr>
@@ -17125,7 +18360,7 @@
           <p:cNvPr id="7" name="page-num">
             <a:extLst>
               <a:ext uri="{FF2B5EF4-FFF2-40B4-BE49-F238E27FC236}">
-                <a16:creationId xmlns:a16="http://schemas.microsoft.com/office/drawing/2014/main" id="{4D545AA2-BBEC-ECDE-1E5E-121E8D0E6FF5}"/>
+                <a16:creationId xmlns:a16="http://schemas.microsoft.com/office/drawing/2014/main" id="{52FE01C1-A037-4B5A-D8BD-265299CF6902}"/>
               </a:ext>
             </a:extLst>
           </p:cNvPr>
@@ -17171,7 +18406,7 @@
           <p:cNvPr id="8" name="section-label">
             <a:extLst>
               <a:ext uri="{FF2B5EF4-FFF2-40B4-BE49-F238E27FC236}">
-                <a16:creationId xmlns:a16="http://schemas.microsoft.com/office/drawing/2014/main" id="{98BA455F-81DD-6225-3D39-2B95875A5235}"/>
+                <a16:creationId xmlns:a16="http://schemas.microsoft.com/office/drawing/2014/main" id="{0D1E1C92-9866-303D-BFC7-511BD594B7DA}"/>
               </a:ext>
             </a:extLst>
           </p:cNvPr>
@@ -17217,7 +18452,7 @@
           <p:cNvPr id="10" name="图片 9">
             <a:extLst>
               <a:ext uri="{FF2B5EF4-FFF2-40B4-BE49-F238E27FC236}">
-                <a16:creationId xmlns:a16="http://schemas.microsoft.com/office/drawing/2014/main" id="{7681B6FE-4BEA-B32F-AD53-6D2C1D97789A}"/>
+                <a16:creationId xmlns:a16="http://schemas.microsoft.com/office/drawing/2014/main" id="{4E7145B8-9E00-AF08-6356-C157F76DEE6E}"/>
               </a:ext>
             </a:extLst>
           </p:cNvPr>
@@ -17253,7 +18488,7 @@
           <p:cNvPr id="11" name="title">
             <a:extLst>
               <a:ext uri="{FF2B5EF4-FFF2-40B4-BE49-F238E27FC236}">
-                <a16:creationId xmlns:a16="http://schemas.microsoft.com/office/drawing/2014/main" id="{DD1AD0CE-4AD5-8C58-03DE-41F3B89BC393}"/>
+                <a16:creationId xmlns:a16="http://schemas.microsoft.com/office/drawing/2014/main" id="{807A7F33-B426-3836-6561-A497CADA71BE}"/>
               </a:ext>
             </a:extLst>
           </p:cNvPr>
@@ -17299,7 +18534,7 @@
           <p:cNvPr id="12" name="subtitle">
             <a:extLst>
               <a:ext uri="{FF2B5EF4-FFF2-40B4-BE49-F238E27FC236}">
-                <a16:creationId xmlns:a16="http://schemas.microsoft.com/office/drawing/2014/main" id="{9005ABFE-4A9D-1EEC-8B84-6322ADCE275A}"/>
+                <a16:creationId xmlns:a16="http://schemas.microsoft.com/office/drawing/2014/main" id="{104B91CA-0191-9CC1-EAB0-1206B319E15C}"/>
               </a:ext>
             </a:extLst>
           </p:cNvPr>
@@ -17345,7 +18580,7 @@
           <p:cNvPr id="13" name="story-card-0">
             <a:extLst>
               <a:ext uri="{FF2B5EF4-FFF2-40B4-BE49-F238E27FC236}">
-                <a16:creationId xmlns:a16="http://schemas.microsoft.com/office/drawing/2014/main" id="{B25D4E30-DB06-AFE4-EFBB-C67C769777E3}"/>
+                <a16:creationId xmlns:a16="http://schemas.microsoft.com/office/drawing/2014/main" id="{168BD7C2-CA1F-366B-1F41-4FD0DEC006AE}"/>
               </a:ext>
             </a:extLst>
           </p:cNvPr>
@@ -17399,7 +18634,7 @@
           <p:cNvPr id="14" name="story-top-0">
             <a:extLst>
               <a:ext uri="{FF2B5EF4-FFF2-40B4-BE49-F238E27FC236}">
-                <a16:creationId xmlns:a16="http://schemas.microsoft.com/office/drawing/2014/main" id="{C2D6E2CD-E469-0D03-F885-D9BC335C07EB}"/>
+                <a16:creationId xmlns:a16="http://schemas.microsoft.com/office/drawing/2014/main" id="{3C64AA64-E6B4-C114-8A64-B25A45B7CF25}"/>
               </a:ext>
             </a:extLst>
           </p:cNvPr>
@@ -17453,7 +18688,7 @@
           <p:cNvPr id="15" name="story-num-0">
             <a:extLst>
               <a:ext uri="{FF2B5EF4-FFF2-40B4-BE49-F238E27FC236}">
-                <a16:creationId xmlns:a16="http://schemas.microsoft.com/office/drawing/2014/main" id="{BBAE8708-8412-ABC4-4C98-F3CECAE8DAE2}"/>
+                <a16:creationId xmlns:a16="http://schemas.microsoft.com/office/drawing/2014/main" id="{3C8F295A-1F5F-1CC5-F3D0-B185FDF15B50}"/>
               </a:ext>
             </a:extLst>
           </p:cNvPr>
@@ -17499,7 +18734,7 @@
           <p:cNvPr id="16" name="story-title-0">
             <a:extLst>
               <a:ext uri="{FF2B5EF4-FFF2-40B4-BE49-F238E27FC236}">
-                <a16:creationId xmlns:a16="http://schemas.microsoft.com/office/drawing/2014/main" id="{CAFC6AC3-B338-A743-244C-D56EDD12D854}"/>
+                <a16:creationId xmlns:a16="http://schemas.microsoft.com/office/drawing/2014/main" id="{65749B2A-E48E-1257-8909-A75638DE043E}"/>
               </a:ext>
             </a:extLst>
           </p:cNvPr>
@@ -17545,7 +18780,7 @@
           <p:cNvPr id="17" name="story-sub-0">
             <a:extLst>
               <a:ext uri="{FF2B5EF4-FFF2-40B4-BE49-F238E27FC236}">
-                <a16:creationId xmlns:a16="http://schemas.microsoft.com/office/drawing/2014/main" id="{FD942674-680B-F6B4-0DE6-8E2495CA2302}"/>
+                <a16:creationId xmlns:a16="http://schemas.microsoft.com/office/drawing/2014/main" id="{2036B3C9-376A-4961-0D3C-ACBDB1DA0981}"/>
               </a:ext>
             </a:extLst>
           </p:cNvPr>
@@ -17591,7 +18826,7 @@
           <p:cNvPr id="18" name="story-line-0">
             <a:extLst>
               <a:ext uri="{FF2B5EF4-FFF2-40B4-BE49-F238E27FC236}">
-                <a16:creationId xmlns:a16="http://schemas.microsoft.com/office/drawing/2014/main" id="{964AEAF1-072B-5852-D69E-639FB212F935}"/>
+                <a16:creationId xmlns:a16="http://schemas.microsoft.com/office/drawing/2014/main" id="{C7117F9A-682D-27F1-4A16-4262D221F990}"/>
               </a:ext>
             </a:extLst>
           </p:cNvPr>
@@ -17632,7 +18867,7 @@
           <p:cNvPr id="19" name="story-card-1">
             <a:extLst>
               <a:ext uri="{FF2B5EF4-FFF2-40B4-BE49-F238E27FC236}">
-                <a16:creationId xmlns:a16="http://schemas.microsoft.com/office/drawing/2014/main" id="{CF1612FD-C2BA-B3F4-FCCF-179837F419BB}"/>
+                <a16:creationId xmlns:a16="http://schemas.microsoft.com/office/drawing/2014/main" id="{D63BBF10-8981-966E-8B58-A4D030C7709A}"/>
               </a:ext>
             </a:extLst>
           </p:cNvPr>
@@ -17686,7 +18921,7 @@
           <p:cNvPr id="20" name="story-top-1">
             <a:extLst>
               <a:ext uri="{FF2B5EF4-FFF2-40B4-BE49-F238E27FC236}">
-                <a16:creationId xmlns:a16="http://schemas.microsoft.com/office/drawing/2014/main" id="{6737D042-722E-23E8-32A8-7238A9EE6437}"/>
+                <a16:creationId xmlns:a16="http://schemas.microsoft.com/office/drawing/2014/main" id="{0E3004D3-D512-CD55-B4F9-3707BCE75CDC}"/>
               </a:ext>
             </a:extLst>
           </p:cNvPr>
@@ -17740,7 +18975,7 @@
           <p:cNvPr id="21" name="story-num-1">
             <a:extLst>
               <a:ext uri="{FF2B5EF4-FFF2-40B4-BE49-F238E27FC236}">
-                <a16:creationId xmlns:a16="http://schemas.microsoft.com/office/drawing/2014/main" id="{468276E1-8596-CC3F-485C-032949C8085A}"/>
+                <a16:creationId xmlns:a16="http://schemas.microsoft.com/office/drawing/2014/main" id="{BC4458E8-A007-9CC8-191D-C7CA57CD54F6}"/>
               </a:ext>
             </a:extLst>
           </p:cNvPr>
@@ -17786,7 +19021,7 @@
           <p:cNvPr id="22" name="story-title-1">
             <a:extLst>
               <a:ext uri="{FF2B5EF4-FFF2-40B4-BE49-F238E27FC236}">
-                <a16:creationId xmlns:a16="http://schemas.microsoft.com/office/drawing/2014/main" id="{F39E9FF7-3C24-4290-B909-E37C76F7F502}"/>
+                <a16:creationId xmlns:a16="http://schemas.microsoft.com/office/drawing/2014/main" id="{B22F4050-A8D3-3F09-47D3-E5AC55729C3D}"/>
               </a:ext>
             </a:extLst>
           </p:cNvPr>
@@ -17832,7 +19067,7 @@
           <p:cNvPr id="23" name="story-sub-1">
             <a:extLst>
               <a:ext uri="{FF2B5EF4-FFF2-40B4-BE49-F238E27FC236}">
-                <a16:creationId xmlns:a16="http://schemas.microsoft.com/office/drawing/2014/main" id="{19978995-DB6A-F82A-882A-FCA79CF41F24}"/>
+                <a16:creationId xmlns:a16="http://schemas.microsoft.com/office/drawing/2014/main" id="{F7EF28A9-18C0-87E5-9353-6EA62A5C976B}"/>
               </a:ext>
             </a:extLst>
           </p:cNvPr>
@@ -17878,7 +19113,7 @@
           <p:cNvPr id="24" name="story-line-1">
             <a:extLst>
               <a:ext uri="{FF2B5EF4-FFF2-40B4-BE49-F238E27FC236}">
-                <a16:creationId xmlns:a16="http://schemas.microsoft.com/office/drawing/2014/main" id="{47197CA2-3876-013C-E625-6980A589CBAA}"/>
+                <a16:creationId xmlns:a16="http://schemas.microsoft.com/office/drawing/2014/main" id="{9262FF6F-3382-F030-82D6-E170F0B8E221}"/>
               </a:ext>
             </a:extLst>
           </p:cNvPr>
@@ -17919,7 +19154,7 @@
           <p:cNvPr id="25" name="story-card-2">
             <a:extLst>
               <a:ext uri="{FF2B5EF4-FFF2-40B4-BE49-F238E27FC236}">
-                <a16:creationId xmlns:a16="http://schemas.microsoft.com/office/drawing/2014/main" id="{E7516CA4-DC4F-13CB-C2D8-84CCFF7B54E2}"/>
+                <a16:creationId xmlns:a16="http://schemas.microsoft.com/office/drawing/2014/main" id="{30EC9A5E-822F-CF71-F36E-C21F45E6B500}"/>
               </a:ext>
             </a:extLst>
           </p:cNvPr>
@@ -17973,7 +19208,7 @@
           <p:cNvPr id="26" name="story-top-2">
             <a:extLst>
               <a:ext uri="{FF2B5EF4-FFF2-40B4-BE49-F238E27FC236}">
-                <a16:creationId xmlns:a16="http://schemas.microsoft.com/office/drawing/2014/main" id="{0AE22896-F4B4-D216-F587-FCE1FD7877DF}"/>
+                <a16:creationId xmlns:a16="http://schemas.microsoft.com/office/drawing/2014/main" id="{6240CDB1-0DDB-6D62-0101-0B7578B38E0E}"/>
               </a:ext>
             </a:extLst>
           </p:cNvPr>
@@ -18027,7 +19262,7 @@
           <p:cNvPr id="27" name="story-num-2">
             <a:extLst>
               <a:ext uri="{FF2B5EF4-FFF2-40B4-BE49-F238E27FC236}">
-                <a16:creationId xmlns:a16="http://schemas.microsoft.com/office/drawing/2014/main" id="{A54D5BA7-706B-3417-F735-820CD6670316}"/>
+                <a16:creationId xmlns:a16="http://schemas.microsoft.com/office/drawing/2014/main" id="{27BA98D5-3CF2-BDE1-C53C-0301C1CAFA01}"/>
               </a:ext>
             </a:extLst>
           </p:cNvPr>
@@ -18073,7 +19308,7 @@
           <p:cNvPr id="28" name="story-title-2">
             <a:extLst>
               <a:ext uri="{FF2B5EF4-FFF2-40B4-BE49-F238E27FC236}">
-                <a16:creationId xmlns:a16="http://schemas.microsoft.com/office/drawing/2014/main" id="{6279D441-B64A-6599-A340-43B42EFE16B7}"/>
+                <a16:creationId xmlns:a16="http://schemas.microsoft.com/office/drawing/2014/main" id="{00147A7F-1A70-8182-8F93-4ACCD146A605}"/>
               </a:ext>
             </a:extLst>
           </p:cNvPr>
@@ -18119,7 +19354,7 @@
           <p:cNvPr id="29" name="story-sub-2">
             <a:extLst>
               <a:ext uri="{FF2B5EF4-FFF2-40B4-BE49-F238E27FC236}">
-                <a16:creationId xmlns:a16="http://schemas.microsoft.com/office/drawing/2014/main" id="{7683CF45-B121-6D05-DDB2-0F4593E2435D}"/>
+                <a16:creationId xmlns:a16="http://schemas.microsoft.com/office/drawing/2014/main" id="{775F5E45-07A6-8E4E-3B49-D11BC7AA1765}"/>
               </a:ext>
             </a:extLst>
           </p:cNvPr>
@@ -18165,7 +19400,7 @@
           <p:cNvPr id="30" name="story-line-2">
             <a:extLst>
               <a:ext uri="{FF2B5EF4-FFF2-40B4-BE49-F238E27FC236}">
-                <a16:creationId xmlns:a16="http://schemas.microsoft.com/office/drawing/2014/main" id="{2C5AD309-C10F-C7AB-582A-9C2828037A25}"/>
+                <a16:creationId xmlns:a16="http://schemas.microsoft.com/office/drawing/2014/main" id="{9369619D-C41D-BC00-E23A-076AF1C07732}"/>
               </a:ext>
             </a:extLst>
           </p:cNvPr>
@@ -18206,7 +19441,7 @@
           <p:cNvPr id="31" name="story-card-3">
             <a:extLst>
               <a:ext uri="{FF2B5EF4-FFF2-40B4-BE49-F238E27FC236}">
-                <a16:creationId xmlns:a16="http://schemas.microsoft.com/office/drawing/2014/main" id="{59A7B599-AD8B-FC6F-CBBB-AA97F350DD2F}"/>
+                <a16:creationId xmlns:a16="http://schemas.microsoft.com/office/drawing/2014/main" id="{88C42403-FDD9-EBB2-11DB-8A46944DC592}"/>
               </a:ext>
             </a:extLst>
           </p:cNvPr>
@@ -18260,7 +19495,7 @@
           <p:cNvPr id="32" name="story-top-3">
             <a:extLst>
               <a:ext uri="{FF2B5EF4-FFF2-40B4-BE49-F238E27FC236}">
-                <a16:creationId xmlns:a16="http://schemas.microsoft.com/office/drawing/2014/main" id="{A40998B4-A9DC-BD3D-2F5E-3195C5101DA9}"/>
+                <a16:creationId xmlns:a16="http://schemas.microsoft.com/office/drawing/2014/main" id="{5C188D5E-9A8E-EB5F-054D-77E761953F68}"/>
               </a:ext>
             </a:extLst>
           </p:cNvPr>
@@ -18314,7 +19549,7 @@
           <p:cNvPr id="33" name="story-num-3">
             <a:extLst>
               <a:ext uri="{FF2B5EF4-FFF2-40B4-BE49-F238E27FC236}">
-                <a16:creationId xmlns:a16="http://schemas.microsoft.com/office/drawing/2014/main" id="{BA6825CA-D62C-9D81-1850-26F5BA1509AE}"/>
+                <a16:creationId xmlns:a16="http://schemas.microsoft.com/office/drawing/2014/main" id="{E686232E-3F82-5821-A3C5-660587E849A0}"/>
               </a:ext>
             </a:extLst>
           </p:cNvPr>
@@ -18360,7 +19595,7 @@
           <p:cNvPr id="34" name="story-title-3">
             <a:extLst>
               <a:ext uri="{FF2B5EF4-FFF2-40B4-BE49-F238E27FC236}">
-                <a16:creationId xmlns:a16="http://schemas.microsoft.com/office/drawing/2014/main" id="{B026BF69-187A-223E-B094-3BDF2EE2F13C}"/>
+                <a16:creationId xmlns:a16="http://schemas.microsoft.com/office/drawing/2014/main" id="{1AFE1906-B049-74D9-22D9-BDB3656993C1}"/>
               </a:ext>
             </a:extLst>
           </p:cNvPr>
@@ -18406,7 +19641,7 @@
           <p:cNvPr id="35" name="story-sub-3">
             <a:extLst>
               <a:ext uri="{FF2B5EF4-FFF2-40B4-BE49-F238E27FC236}">
-                <a16:creationId xmlns:a16="http://schemas.microsoft.com/office/drawing/2014/main" id="{FA357FD9-6B60-420E-987A-E2D4067FBAB0}"/>
+                <a16:creationId xmlns:a16="http://schemas.microsoft.com/office/drawing/2014/main" id="{9D9CA356-2077-64DD-63BD-41A61515C5E8}"/>
               </a:ext>
             </a:extLst>
           </p:cNvPr>
@@ -18452,7 +19687,7 @@
           <p:cNvPr id="36" name="time-box">
             <a:extLst>
               <a:ext uri="{FF2B5EF4-FFF2-40B4-BE49-F238E27FC236}">
-                <a16:creationId xmlns:a16="http://schemas.microsoft.com/office/drawing/2014/main" id="{BAD5335B-6538-CDD5-5A4E-A303774F7265}"/>
+                <a16:creationId xmlns:a16="http://schemas.microsoft.com/office/drawing/2014/main" id="{984BC41F-4908-D8BC-8F1E-282546065234}"/>
               </a:ext>
             </a:extLst>
           </p:cNvPr>
@@ -18506,7 +19741,7 @@
           <p:cNvPr id="37" name="time-text">
             <a:extLst>
               <a:ext uri="{FF2B5EF4-FFF2-40B4-BE49-F238E27FC236}">
-                <a16:creationId xmlns:a16="http://schemas.microsoft.com/office/drawing/2014/main" id="{28F1B08E-E3E7-42FE-89CD-D0E018F1790B}"/>
+                <a16:creationId xmlns:a16="http://schemas.microsoft.com/office/drawing/2014/main" id="{499D0C20-59C9-0301-0364-E07DEA806A45}"/>
               </a:ext>
             </a:extLst>
           </p:cNvPr>
@@ -18550,7 +19785,7 @@
     </p:spTree>
     <p:extLst>
       <p:ext uri="{BB962C8B-B14F-4D97-AF65-F5344CB8AC3E}">
-        <p14:creationId xmlns:p14="http://schemas.microsoft.com/office/powerpoint/2010/main" val="1042263075"/>
+        <p14:creationId xmlns:p14="http://schemas.microsoft.com/office/powerpoint/2010/main" val="1528814054"/>
       </p:ext>
     </p:extLst>
   </p:cSld>
@@ -18594,7 +19829,7 @@
           <p:cNvPr id="2" name="page-bg">
             <a:extLst>
               <a:ext uri="{FF2B5EF4-FFF2-40B4-BE49-F238E27FC236}">
-                <a16:creationId xmlns:a16="http://schemas.microsoft.com/office/drawing/2014/main" id="{7034BFAA-AF18-8B33-EEE3-86E8970A6917}"/>
+                <a16:creationId xmlns:a16="http://schemas.microsoft.com/office/drawing/2014/main" id="{D4568F0F-FFB4-7D92-A364-3668477591A8}"/>
               </a:ext>
             </a:extLst>
           </p:cNvPr>
@@ -18655,7 +19890,7 @@
           <p:cNvPr id="3" name="left-rail">
             <a:extLst>
               <a:ext uri="{FF2B5EF4-FFF2-40B4-BE49-F238E27FC236}">
-                <a16:creationId xmlns:a16="http://schemas.microsoft.com/office/drawing/2014/main" id="{3039EE19-01C5-A86C-DCFA-4B5D92A516ED}"/>
+                <a16:creationId xmlns:a16="http://schemas.microsoft.com/office/drawing/2014/main" id="{6BF4C0CD-0F92-C312-4AD1-51A04D923334}"/>
               </a:ext>
             </a:extLst>
           </p:cNvPr>
@@ -18716,7 +19951,7 @@
           <p:cNvPr id="4" name="top-line">
             <a:extLst>
               <a:ext uri="{FF2B5EF4-FFF2-40B4-BE49-F238E27FC236}">
-                <a16:creationId xmlns:a16="http://schemas.microsoft.com/office/drawing/2014/main" id="{FB07C0D4-8A03-B8FD-2CF2-2BC54A4F0A9E}"/>
+                <a16:creationId xmlns:a16="http://schemas.microsoft.com/office/drawing/2014/main" id="{7E77ABEC-F04E-7716-7317-D3C9B4BF69E3}"/>
               </a:ext>
             </a:extLst>
           </p:cNvPr>
@@ -18757,7 +19992,7 @@
           <p:cNvPr id="5" name="footer-left">
             <a:extLst>
               <a:ext uri="{FF2B5EF4-FFF2-40B4-BE49-F238E27FC236}">
-                <a16:creationId xmlns:a16="http://schemas.microsoft.com/office/drawing/2014/main" id="{04206ADC-7343-4E32-FF56-E58D794F969B}"/>
+                <a16:creationId xmlns:a16="http://schemas.microsoft.com/office/drawing/2014/main" id="{03BB9080-4D93-8690-9644-8403830C16C9}"/>
               </a:ext>
             </a:extLst>
           </p:cNvPr>
@@ -18803,7 +20038,7 @@
           <p:cNvPr id="6" name="footer-mid">
             <a:extLst>
               <a:ext uri="{FF2B5EF4-FFF2-40B4-BE49-F238E27FC236}">
-                <a16:creationId xmlns:a16="http://schemas.microsoft.com/office/drawing/2014/main" id="{4F4FCDB6-692E-1337-EC43-BC4EB29FCE15}"/>
+                <a16:creationId xmlns:a16="http://schemas.microsoft.com/office/drawing/2014/main" id="{344E0C01-099D-4FDC-D61A-4081A00A3222}"/>
               </a:ext>
             </a:extLst>
           </p:cNvPr>
@@ -18849,7 +20084,7 @@
           <p:cNvPr id="7" name="page-num">
             <a:extLst>
               <a:ext uri="{FF2B5EF4-FFF2-40B4-BE49-F238E27FC236}">
-                <a16:creationId xmlns:a16="http://schemas.microsoft.com/office/drawing/2014/main" id="{2103848E-1884-918E-0E3E-64B427436975}"/>
+                <a16:creationId xmlns:a16="http://schemas.microsoft.com/office/drawing/2014/main" id="{EB4A5D1C-25DC-3CE4-02B4-235452259284}"/>
               </a:ext>
             </a:extLst>
           </p:cNvPr>
@@ -18895,7 +20130,7 @@
           <p:cNvPr id="8" name="section-label">
             <a:extLst>
               <a:ext uri="{FF2B5EF4-FFF2-40B4-BE49-F238E27FC236}">
-                <a16:creationId xmlns:a16="http://schemas.microsoft.com/office/drawing/2014/main" id="{BD3B566D-9855-DDDC-ED10-DE95BE9F45EB}"/>
+                <a16:creationId xmlns:a16="http://schemas.microsoft.com/office/drawing/2014/main" id="{01AA75E5-9016-94DB-6713-A919C6A0B5F6}"/>
               </a:ext>
             </a:extLst>
           </p:cNvPr>
@@ -18941,7 +20176,7 @@
           <p:cNvPr id="10" name="图片 9">
             <a:extLst>
               <a:ext uri="{FF2B5EF4-FFF2-40B4-BE49-F238E27FC236}">
-                <a16:creationId xmlns:a16="http://schemas.microsoft.com/office/drawing/2014/main" id="{73C66F31-3D0D-874A-7AB9-80703B7AAE9B}"/>
+                <a16:creationId xmlns:a16="http://schemas.microsoft.com/office/drawing/2014/main" id="{DE723E01-5F1E-9225-B934-65962993C4AD}"/>
               </a:ext>
             </a:extLst>
           </p:cNvPr>
@@ -18977,7 +20212,7 @@
           <p:cNvPr id="11" name="title">
             <a:extLst>
               <a:ext uri="{FF2B5EF4-FFF2-40B4-BE49-F238E27FC236}">
-                <a16:creationId xmlns:a16="http://schemas.microsoft.com/office/drawing/2014/main" id="{EE80A7A1-EC93-FD44-5AD1-A44900390EED}"/>
+                <a16:creationId xmlns:a16="http://schemas.microsoft.com/office/drawing/2014/main" id="{47A6281E-50AF-3FE1-E65B-75B179D4CE00}"/>
               </a:ext>
             </a:extLst>
           </p:cNvPr>
@@ -19023,7 +20258,7 @@
           <p:cNvPr id="12" name="subtitle">
             <a:extLst>
               <a:ext uri="{FF2B5EF4-FFF2-40B4-BE49-F238E27FC236}">
-                <a16:creationId xmlns:a16="http://schemas.microsoft.com/office/drawing/2014/main" id="{DB366D0A-7824-72DC-4DF9-2869D471D3EE}"/>
+                <a16:creationId xmlns:a16="http://schemas.microsoft.com/office/drawing/2014/main" id="{2242852B-B1F8-6373-E284-19EADFC92973}"/>
               </a:ext>
             </a:extLst>
           </p:cNvPr>
@@ -19069,7 +20304,7 @@
           <p:cNvPr id="13" name="code-panel">
             <a:extLst>
               <a:ext uri="{FF2B5EF4-FFF2-40B4-BE49-F238E27FC236}">
-                <a16:creationId xmlns:a16="http://schemas.microsoft.com/office/drawing/2014/main" id="{926ED0B8-FB4C-5AC6-E82D-7B91BF3DD499}"/>
+                <a16:creationId xmlns:a16="http://schemas.microsoft.com/office/drawing/2014/main" id="{E5E1A966-6468-40A0-4D88-9F8E50C29FBF}"/>
               </a:ext>
             </a:extLst>
           </p:cNvPr>
@@ -19130,7 +20365,7 @@
           <p:cNvPr id="14" name="code-title">
             <a:extLst>
               <a:ext uri="{FF2B5EF4-FFF2-40B4-BE49-F238E27FC236}">
-                <a16:creationId xmlns:a16="http://schemas.microsoft.com/office/drawing/2014/main" id="{D6B8B76E-8D96-3A46-03A8-40BEBA26E252}"/>
+                <a16:creationId xmlns:a16="http://schemas.microsoft.com/office/drawing/2014/main" id="{FCED5905-137B-1471-D3AA-E6BB9A04AC41}"/>
               </a:ext>
             </a:extLst>
           </p:cNvPr>
@@ -19176,7 +20411,7 @@
           <p:cNvPr id="15" name="code">
             <a:extLst>
               <a:ext uri="{FF2B5EF4-FFF2-40B4-BE49-F238E27FC236}">
-                <a16:creationId xmlns:a16="http://schemas.microsoft.com/office/drawing/2014/main" id="{A3B5C73F-6554-9DEF-6B62-5E5909D25277}"/>
+                <a16:creationId xmlns:a16="http://schemas.microsoft.com/office/drawing/2014/main" id="{3DA38827-EDE4-A7C8-C622-8556E0518AA1}"/>
               </a:ext>
             </a:extLst>
           </p:cNvPr>
@@ -19225,7 +20460,7 @@
           <p:cNvPr id="16" name="flow-box-0">
             <a:extLst>
               <a:ext uri="{FF2B5EF4-FFF2-40B4-BE49-F238E27FC236}">
-                <a16:creationId xmlns:a16="http://schemas.microsoft.com/office/drawing/2014/main" id="{29060469-4CE5-56FF-5A2A-E3BDF7F0E64C}"/>
+                <a16:creationId xmlns:a16="http://schemas.microsoft.com/office/drawing/2014/main" id="{75506A75-CCD1-F0F5-BD8C-4B1CA7138828}"/>
               </a:ext>
             </a:extLst>
           </p:cNvPr>
@@ -19279,7 +20514,7 @@
           <p:cNvPr id="17" name="flow-title-0">
             <a:extLst>
               <a:ext uri="{FF2B5EF4-FFF2-40B4-BE49-F238E27FC236}">
-                <a16:creationId xmlns:a16="http://schemas.microsoft.com/office/drawing/2014/main" id="{D3E4BDF9-C775-1910-5AFD-64AF49B8822F}"/>
+                <a16:creationId xmlns:a16="http://schemas.microsoft.com/office/drawing/2014/main" id="{E1C94494-952E-B6B8-6B48-FD2448CD643A}"/>
               </a:ext>
             </a:extLst>
           </p:cNvPr>
@@ -19325,7 +20560,7 @@
           <p:cNvPr id="18" name="flow-sub-0">
             <a:extLst>
               <a:ext uri="{FF2B5EF4-FFF2-40B4-BE49-F238E27FC236}">
-                <a16:creationId xmlns:a16="http://schemas.microsoft.com/office/drawing/2014/main" id="{449A2BE7-75D5-26C9-C275-34A9906AC8F8}"/>
+                <a16:creationId xmlns:a16="http://schemas.microsoft.com/office/drawing/2014/main" id="{65C051EB-D22B-6D97-F915-978100A1FCCA}"/>
               </a:ext>
             </a:extLst>
           </p:cNvPr>
@@ -19371,7 +20606,7 @@
           <p:cNvPr id="19" name="flow-arrow-0">
             <a:extLst>
               <a:ext uri="{FF2B5EF4-FFF2-40B4-BE49-F238E27FC236}">
-                <a16:creationId xmlns:a16="http://schemas.microsoft.com/office/drawing/2014/main" id="{F18CE2CD-24F2-9AA5-0E84-582189743423}"/>
+                <a16:creationId xmlns:a16="http://schemas.microsoft.com/office/drawing/2014/main" id="{DC7A5306-463D-47D5-6170-DAD10334E72C}"/>
               </a:ext>
             </a:extLst>
           </p:cNvPr>
@@ -19412,7 +20647,7 @@
           <p:cNvPr id="20" name="flow-box-1">
             <a:extLst>
               <a:ext uri="{FF2B5EF4-FFF2-40B4-BE49-F238E27FC236}">
-                <a16:creationId xmlns:a16="http://schemas.microsoft.com/office/drawing/2014/main" id="{8E2BDBD0-04DA-6407-A026-99CFE4548D0C}"/>
+                <a16:creationId xmlns:a16="http://schemas.microsoft.com/office/drawing/2014/main" id="{AFF4CFE3-6A9B-3846-0C12-8F8E956BFD7B}"/>
               </a:ext>
             </a:extLst>
           </p:cNvPr>
@@ -19466,7 +20701,7 @@
           <p:cNvPr id="21" name="flow-title-1">
             <a:extLst>
               <a:ext uri="{FF2B5EF4-FFF2-40B4-BE49-F238E27FC236}">
-                <a16:creationId xmlns:a16="http://schemas.microsoft.com/office/drawing/2014/main" id="{04B53322-944B-1C44-B0A3-92A8113FDE2D}"/>
+                <a16:creationId xmlns:a16="http://schemas.microsoft.com/office/drawing/2014/main" id="{66C85D84-F6C3-76B0-30A6-8AE1545D6AD3}"/>
               </a:ext>
             </a:extLst>
           </p:cNvPr>
@@ -19512,7 +20747,7 @@
           <p:cNvPr id="22" name="flow-sub-1">
             <a:extLst>
               <a:ext uri="{FF2B5EF4-FFF2-40B4-BE49-F238E27FC236}">
-                <a16:creationId xmlns:a16="http://schemas.microsoft.com/office/drawing/2014/main" id="{17EEB471-A8E6-B972-A2B9-F7892659CC72}"/>
+                <a16:creationId xmlns:a16="http://schemas.microsoft.com/office/drawing/2014/main" id="{7A66EE8A-082E-578E-E183-B6F92CC39413}"/>
               </a:ext>
             </a:extLst>
           </p:cNvPr>
@@ -19558,7 +20793,7 @@
           <p:cNvPr id="23" name="flow-arrow-1">
             <a:extLst>
               <a:ext uri="{FF2B5EF4-FFF2-40B4-BE49-F238E27FC236}">
-                <a16:creationId xmlns:a16="http://schemas.microsoft.com/office/drawing/2014/main" id="{E24C4D3F-1304-7559-AAC0-E0A738C7D877}"/>
+                <a16:creationId xmlns:a16="http://schemas.microsoft.com/office/drawing/2014/main" id="{77ADF257-6D56-BD70-9BB4-1CA116468743}"/>
               </a:ext>
             </a:extLst>
           </p:cNvPr>
@@ -19599,7 +20834,7 @@
           <p:cNvPr id="24" name="flow-box-2">
             <a:extLst>
               <a:ext uri="{FF2B5EF4-FFF2-40B4-BE49-F238E27FC236}">
-                <a16:creationId xmlns:a16="http://schemas.microsoft.com/office/drawing/2014/main" id="{BEFD28E5-E6FA-91A3-FBC5-860CE1E186C6}"/>
+                <a16:creationId xmlns:a16="http://schemas.microsoft.com/office/drawing/2014/main" id="{28C7A680-65BF-54C7-3705-FCE9CDFF765E}"/>
               </a:ext>
             </a:extLst>
           </p:cNvPr>
@@ -19653,7 +20888,7 @@
           <p:cNvPr id="25" name="flow-title-2">
             <a:extLst>
               <a:ext uri="{FF2B5EF4-FFF2-40B4-BE49-F238E27FC236}">
-                <a16:creationId xmlns:a16="http://schemas.microsoft.com/office/drawing/2014/main" id="{7C172B0A-3E0F-C865-0402-44FB5729FB6B}"/>
+                <a16:creationId xmlns:a16="http://schemas.microsoft.com/office/drawing/2014/main" id="{FB03DA0A-ECA1-D367-8FD0-A25DBFF4ACA1}"/>
               </a:ext>
             </a:extLst>
           </p:cNvPr>
@@ -19699,7 +20934,7 @@
           <p:cNvPr id="26" name="flow-sub-2">
             <a:extLst>
               <a:ext uri="{FF2B5EF4-FFF2-40B4-BE49-F238E27FC236}">
-                <a16:creationId xmlns:a16="http://schemas.microsoft.com/office/drawing/2014/main" id="{02B4B23A-8B8B-2AC9-B224-1724484E5ADF}"/>
+                <a16:creationId xmlns:a16="http://schemas.microsoft.com/office/drawing/2014/main" id="{B59070D7-E433-C5CB-A577-032E6D2ECEC6}"/>
               </a:ext>
             </a:extLst>
           </p:cNvPr>
@@ -19745,7 +20980,7 @@
           <p:cNvPr id="27" name="flow-arrow-2">
             <a:extLst>
               <a:ext uri="{FF2B5EF4-FFF2-40B4-BE49-F238E27FC236}">
-                <a16:creationId xmlns:a16="http://schemas.microsoft.com/office/drawing/2014/main" id="{04F0EB81-5B66-5870-F8C2-6F43871FFDC4}"/>
+                <a16:creationId xmlns:a16="http://schemas.microsoft.com/office/drawing/2014/main" id="{1793082A-2280-4609-1AC1-9BEA643A463D}"/>
               </a:ext>
             </a:extLst>
           </p:cNvPr>
@@ -19786,7 +21021,7 @@
           <p:cNvPr id="28" name="flow-box-3">
             <a:extLst>
               <a:ext uri="{FF2B5EF4-FFF2-40B4-BE49-F238E27FC236}">
-                <a16:creationId xmlns:a16="http://schemas.microsoft.com/office/drawing/2014/main" id="{2C1CBFCA-8514-AE88-B8BF-D60B74D00BB7}"/>
+                <a16:creationId xmlns:a16="http://schemas.microsoft.com/office/drawing/2014/main" id="{BEC4E65B-0349-FBD1-8E27-C9C62A399703}"/>
               </a:ext>
             </a:extLst>
           </p:cNvPr>
@@ -19840,7 +21075,7 @@
           <p:cNvPr id="29" name="flow-title-3">
             <a:extLst>
               <a:ext uri="{FF2B5EF4-FFF2-40B4-BE49-F238E27FC236}">
-                <a16:creationId xmlns:a16="http://schemas.microsoft.com/office/drawing/2014/main" id="{7AA10783-BA85-EE46-A28A-FED939627AC5}"/>
+                <a16:creationId xmlns:a16="http://schemas.microsoft.com/office/drawing/2014/main" id="{F9240566-86FD-3970-3F5D-56B1121B1E35}"/>
               </a:ext>
             </a:extLst>
           </p:cNvPr>
@@ -19886,7 +21121,7 @@
           <p:cNvPr id="30" name="flow-sub-3">
             <a:extLst>
               <a:ext uri="{FF2B5EF4-FFF2-40B4-BE49-F238E27FC236}">
-                <a16:creationId xmlns:a16="http://schemas.microsoft.com/office/drawing/2014/main" id="{BF09F8C7-7CD1-FA09-55E7-37AC5CCF2873}"/>
+                <a16:creationId xmlns:a16="http://schemas.microsoft.com/office/drawing/2014/main" id="{DB8C508C-95C4-AF60-3495-09699DD55B25}"/>
               </a:ext>
             </a:extLst>
           </p:cNvPr>
@@ -19932,7 +21167,7 @@
           <p:cNvPr id="31" name="question">
             <a:extLst>
               <a:ext uri="{FF2B5EF4-FFF2-40B4-BE49-F238E27FC236}">
-                <a16:creationId xmlns:a16="http://schemas.microsoft.com/office/drawing/2014/main" id="{0B96C2D9-5DEF-DDE2-E595-AAF447FAA175}"/>
+                <a16:creationId xmlns:a16="http://schemas.microsoft.com/office/drawing/2014/main" id="{F1B59AB5-3A4E-E0BB-6229-BF0E3F9F705B}"/>
               </a:ext>
             </a:extLst>
           </p:cNvPr>
@@ -19986,7 +21221,7 @@
           <p:cNvPr id="32" name="question-text">
             <a:extLst>
               <a:ext uri="{FF2B5EF4-FFF2-40B4-BE49-F238E27FC236}">
-                <a16:creationId xmlns:a16="http://schemas.microsoft.com/office/drawing/2014/main" id="{58CF1D6D-48C6-6449-3038-D1198C7E5423}"/>
+                <a16:creationId xmlns:a16="http://schemas.microsoft.com/office/drawing/2014/main" id="{A5F9955E-673A-435D-7042-9730BEFE8552}"/>
               </a:ext>
             </a:extLst>
           </p:cNvPr>
@@ -20030,7 +21265,7 @@
     </p:spTree>
     <p:extLst>
       <p:ext uri="{BB962C8B-B14F-4D97-AF65-F5344CB8AC3E}">
-        <p14:creationId xmlns:p14="http://schemas.microsoft.com/office/powerpoint/2010/main" val="2959212323"/>
+        <p14:creationId xmlns:p14="http://schemas.microsoft.com/office/powerpoint/2010/main" val="46582483"/>
       </p:ext>
     </p:extLst>
   </p:cSld>
@@ -20074,7 +21309,7 @@
           <p:cNvPr id="2" name="dark-bg">
             <a:extLst>
               <a:ext uri="{FF2B5EF4-FFF2-40B4-BE49-F238E27FC236}">
-                <a16:creationId xmlns:a16="http://schemas.microsoft.com/office/drawing/2014/main" id="{4E06CC28-88CD-7C9F-3775-D5B7D791E847}"/>
+                <a16:creationId xmlns:a16="http://schemas.microsoft.com/office/drawing/2014/main" id="{48513B30-C594-75E9-F70E-521DFD3005AA}"/>
               </a:ext>
             </a:extLst>
           </p:cNvPr>
@@ -20135,7 +21370,7 @@
           <p:cNvPr id="3" name="dark-panel">
             <a:extLst>
               <a:ext uri="{FF2B5EF4-FFF2-40B4-BE49-F238E27FC236}">
-                <a16:creationId xmlns:a16="http://schemas.microsoft.com/office/drawing/2014/main" id="{29DEDBD0-0059-45E6-1BCB-9BCE2D16CA6F}"/>
+                <a16:creationId xmlns:a16="http://schemas.microsoft.com/office/drawing/2014/main" id="{5DB1B082-4B37-430D-85CA-BF67623A6B94}"/>
               </a:ext>
             </a:extLst>
           </p:cNvPr>
@@ -20198,7 +21433,7 @@
           <p:cNvPr id="4" name="grid-v-0">
             <a:extLst>
               <a:ext uri="{FF2B5EF4-FFF2-40B4-BE49-F238E27FC236}">
-                <a16:creationId xmlns:a16="http://schemas.microsoft.com/office/drawing/2014/main" id="{5F7A3973-DA45-6AA0-EE73-2268D6880538}"/>
+                <a16:creationId xmlns:a16="http://schemas.microsoft.com/office/drawing/2014/main" id="{2F4A69D3-5647-3375-F8DD-F90B8384652E}"/>
               </a:ext>
             </a:extLst>
           </p:cNvPr>
@@ -20239,7 +21474,7 @@
           <p:cNvPr id="5" name="grid-v-64">
             <a:extLst>
               <a:ext uri="{FF2B5EF4-FFF2-40B4-BE49-F238E27FC236}">
-                <a16:creationId xmlns:a16="http://schemas.microsoft.com/office/drawing/2014/main" id="{E4C6CBC2-9FF1-249B-9ACA-211C598EA492}"/>
+                <a16:creationId xmlns:a16="http://schemas.microsoft.com/office/drawing/2014/main" id="{D8823734-634D-6CF2-0107-ED847AD335E1}"/>
               </a:ext>
             </a:extLst>
           </p:cNvPr>
@@ -20280,7 +21515,7 @@
           <p:cNvPr id="6" name="grid-v-128">
             <a:extLst>
               <a:ext uri="{FF2B5EF4-FFF2-40B4-BE49-F238E27FC236}">
-                <a16:creationId xmlns:a16="http://schemas.microsoft.com/office/drawing/2014/main" id="{A4EB6B0D-CA08-7A97-BC09-55A3BDB4F338}"/>
+                <a16:creationId xmlns:a16="http://schemas.microsoft.com/office/drawing/2014/main" id="{9D7BC23B-40B6-EC54-14F8-EC6F10D2CFC8}"/>
               </a:ext>
             </a:extLst>
           </p:cNvPr>
@@ -20321,7 +21556,7 @@
           <p:cNvPr id="7" name="grid-v-192">
             <a:extLst>
               <a:ext uri="{FF2B5EF4-FFF2-40B4-BE49-F238E27FC236}">
-                <a16:creationId xmlns:a16="http://schemas.microsoft.com/office/drawing/2014/main" id="{16D62C9B-15BC-4882-C5B5-07E3D5D81E38}"/>
+                <a16:creationId xmlns:a16="http://schemas.microsoft.com/office/drawing/2014/main" id="{F26F5862-BAF1-C32E-465F-2239D4EC19C7}"/>
               </a:ext>
             </a:extLst>
           </p:cNvPr>
@@ -20362,7 +21597,7 @@
           <p:cNvPr id="8" name="grid-v-256">
             <a:extLst>
               <a:ext uri="{FF2B5EF4-FFF2-40B4-BE49-F238E27FC236}">
-                <a16:creationId xmlns:a16="http://schemas.microsoft.com/office/drawing/2014/main" id="{28851002-1AD8-A1D5-3F0E-DD0E0CA86E9A}"/>
+                <a16:creationId xmlns:a16="http://schemas.microsoft.com/office/drawing/2014/main" id="{9C6FCEA1-0967-1600-777C-F7C6162EFD57}"/>
               </a:ext>
             </a:extLst>
           </p:cNvPr>
@@ -20403,7 +21638,7 @@
           <p:cNvPr id="9" name="grid-v-320">
             <a:extLst>
               <a:ext uri="{FF2B5EF4-FFF2-40B4-BE49-F238E27FC236}">
-                <a16:creationId xmlns:a16="http://schemas.microsoft.com/office/drawing/2014/main" id="{53473C06-6A69-DDF9-BBD9-DBF878AC6E67}"/>
+                <a16:creationId xmlns:a16="http://schemas.microsoft.com/office/drawing/2014/main" id="{5E31101F-031F-93AD-2F7A-B1968BD55BA4}"/>
               </a:ext>
             </a:extLst>
           </p:cNvPr>
@@ -20444,7 +21679,7 @@
           <p:cNvPr id="10" name="grid-v-384">
             <a:extLst>
               <a:ext uri="{FF2B5EF4-FFF2-40B4-BE49-F238E27FC236}">
-                <a16:creationId xmlns:a16="http://schemas.microsoft.com/office/drawing/2014/main" id="{999F5B8F-D4DB-D6FA-31D9-38DCB71E9585}"/>
+                <a16:creationId xmlns:a16="http://schemas.microsoft.com/office/drawing/2014/main" id="{E448EDDE-D1F2-5D6B-C02B-8FDFFCBDCC9D}"/>
               </a:ext>
             </a:extLst>
           </p:cNvPr>
@@ -20485,7 +21720,7 @@
           <p:cNvPr id="11" name="grid-v-448">
             <a:extLst>
               <a:ext uri="{FF2B5EF4-FFF2-40B4-BE49-F238E27FC236}">
-                <a16:creationId xmlns:a16="http://schemas.microsoft.com/office/drawing/2014/main" id="{75386037-FD75-DE86-3008-C32538CBCD07}"/>
+                <a16:creationId xmlns:a16="http://schemas.microsoft.com/office/drawing/2014/main" id="{A491C81F-2F9C-0B2B-F4D5-45F2B30A3913}"/>
               </a:ext>
             </a:extLst>
           </p:cNvPr>
@@ -20526,7 +21761,7 @@
           <p:cNvPr id="12" name="grid-v-512">
             <a:extLst>
               <a:ext uri="{FF2B5EF4-FFF2-40B4-BE49-F238E27FC236}">
-                <a16:creationId xmlns:a16="http://schemas.microsoft.com/office/drawing/2014/main" id="{9187B7F0-F8DC-5B00-C873-F6519B55E120}"/>
+                <a16:creationId xmlns:a16="http://schemas.microsoft.com/office/drawing/2014/main" id="{DF65D1FD-8AEC-666F-895D-3607A2B7DC7A}"/>
               </a:ext>
             </a:extLst>
           </p:cNvPr>
@@ -20567,7 +21802,7 @@
           <p:cNvPr id="13" name="grid-v-576">
             <a:extLst>
               <a:ext uri="{FF2B5EF4-FFF2-40B4-BE49-F238E27FC236}">
-                <a16:creationId xmlns:a16="http://schemas.microsoft.com/office/drawing/2014/main" id="{CC677100-1417-5B2B-CF8F-F282B2F87396}"/>
+                <a16:creationId xmlns:a16="http://schemas.microsoft.com/office/drawing/2014/main" id="{95856226-4FC0-A665-7ED1-F13AC225D7D7}"/>
               </a:ext>
             </a:extLst>
           </p:cNvPr>
@@ -20608,7 +21843,7 @@
           <p:cNvPr id="14" name="grid-v-640">
             <a:extLst>
               <a:ext uri="{FF2B5EF4-FFF2-40B4-BE49-F238E27FC236}">
-                <a16:creationId xmlns:a16="http://schemas.microsoft.com/office/drawing/2014/main" id="{AD67B031-6AC9-D960-F94E-6DF36458FC54}"/>
+                <a16:creationId xmlns:a16="http://schemas.microsoft.com/office/drawing/2014/main" id="{E5514939-5543-5315-BECB-53719A678FC0}"/>
               </a:ext>
             </a:extLst>
           </p:cNvPr>
@@ -20649,7 +21884,7 @@
           <p:cNvPr id="15" name="grid-v-704">
             <a:extLst>
               <a:ext uri="{FF2B5EF4-FFF2-40B4-BE49-F238E27FC236}">
-                <a16:creationId xmlns:a16="http://schemas.microsoft.com/office/drawing/2014/main" id="{DA590415-8FB7-9DAF-4FB3-A4172454964B}"/>
+                <a16:creationId xmlns:a16="http://schemas.microsoft.com/office/drawing/2014/main" id="{3AAB34D7-829A-FE68-EEB0-0F7257B039A8}"/>
               </a:ext>
             </a:extLst>
           </p:cNvPr>
@@ -20690,7 +21925,7 @@
           <p:cNvPr id="16" name="grid-v-768">
             <a:extLst>
               <a:ext uri="{FF2B5EF4-FFF2-40B4-BE49-F238E27FC236}">
-                <a16:creationId xmlns:a16="http://schemas.microsoft.com/office/drawing/2014/main" id="{1E423A92-EF90-5541-C0AC-D8FD14B018AD}"/>
+                <a16:creationId xmlns:a16="http://schemas.microsoft.com/office/drawing/2014/main" id="{5802C594-13DF-73E7-275A-AFF6D137AC56}"/>
               </a:ext>
             </a:extLst>
           </p:cNvPr>
@@ -20731,7 +21966,7 @@
           <p:cNvPr id="17" name="grid-v-832">
             <a:extLst>
               <a:ext uri="{FF2B5EF4-FFF2-40B4-BE49-F238E27FC236}">
-                <a16:creationId xmlns:a16="http://schemas.microsoft.com/office/drawing/2014/main" id="{6326CC6B-2034-BDCA-5801-2F805B1FBAFA}"/>
+                <a16:creationId xmlns:a16="http://schemas.microsoft.com/office/drawing/2014/main" id="{C1EFCFF7-0935-3406-B515-67B8ADFAC00A}"/>
               </a:ext>
             </a:extLst>
           </p:cNvPr>
@@ -20772,7 +22007,7 @@
           <p:cNvPr id="18" name="grid-v-896">
             <a:extLst>
               <a:ext uri="{FF2B5EF4-FFF2-40B4-BE49-F238E27FC236}">
-                <a16:creationId xmlns:a16="http://schemas.microsoft.com/office/drawing/2014/main" id="{21D6818B-CFA5-4A52-AFCD-C6311E4EC856}"/>
+                <a16:creationId xmlns:a16="http://schemas.microsoft.com/office/drawing/2014/main" id="{79DFDE3F-02CF-87A0-47C1-07F3E68D0D0B}"/>
               </a:ext>
             </a:extLst>
           </p:cNvPr>
@@ -20813,7 +22048,7 @@
           <p:cNvPr id="19" name="grid-v-960">
             <a:extLst>
               <a:ext uri="{FF2B5EF4-FFF2-40B4-BE49-F238E27FC236}">
-                <a16:creationId xmlns:a16="http://schemas.microsoft.com/office/drawing/2014/main" id="{E1FC6018-DA42-4C51-6979-8D3BEBABAC29}"/>
+                <a16:creationId xmlns:a16="http://schemas.microsoft.com/office/drawing/2014/main" id="{C3C9B329-F238-DE8A-6F3E-23A674867E08}"/>
               </a:ext>
             </a:extLst>
           </p:cNvPr>
@@ -20854,7 +22089,7 @@
           <p:cNvPr id="20" name="grid-h-0">
             <a:extLst>
               <a:ext uri="{FF2B5EF4-FFF2-40B4-BE49-F238E27FC236}">
-                <a16:creationId xmlns:a16="http://schemas.microsoft.com/office/drawing/2014/main" id="{0515794B-63E5-B145-33CC-868C05821E72}"/>
+                <a16:creationId xmlns:a16="http://schemas.microsoft.com/office/drawing/2014/main" id="{59E58225-AE28-D0E2-932C-C25B43C576DC}"/>
               </a:ext>
             </a:extLst>
           </p:cNvPr>
@@ -20895,7 +22130,7 @@
           <p:cNvPr id="21" name="grid-h-64">
             <a:extLst>
               <a:ext uri="{FF2B5EF4-FFF2-40B4-BE49-F238E27FC236}">
-                <a16:creationId xmlns:a16="http://schemas.microsoft.com/office/drawing/2014/main" id="{BA222477-B227-543C-4578-B604F29C0C66}"/>
+                <a16:creationId xmlns:a16="http://schemas.microsoft.com/office/drawing/2014/main" id="{41FF659A-EFFD-0EA8-CA73-459C31D83EF5}"/>
               </a:ext>
             </a:extLst>
           </p:cNvPr>
@@ -20936,7 +22171,7 @@
           <p:cNvPr id="22" name="grid-h-128">
             <a:extLst>
               <a:ext uri="{FF2B5EF4-FFF2-40B4-BE49-F238E27FC236}">
-                <a16:creationId xmlns:a16="http://schemas.microsoft.com/office/drawing/2014/main" id="{1BBE660C-7E6A-941D-71CA-EBCD37A2C6E9}"/>
+                <a16:creationId xmlns:a16="http://schemas.microsoft.com/office/drawing/2014/main" id="{50F7C5CD-3E94-96B9-AEC1-C7E25A02BA76}"/>
               </a:ext>
             </a:extLst>
           </p:cNvPr>
@@ -20977,7 +22212,7 @@
           <p:cNvPr id="23" name="grid-h-192">
             <a:extLst>
               <a:ext uri="{FF2B5EF4-FFF2-40B4-BE49-F238E27FC236}">
-                <a16:creationId xmlns:a16="http://schemas.microsoft.com/office/drawing/2014/main" id="{A94D1D9D-1C67-AE01-50B2-EFC8AB86DCD7}"/>
+                <a16:creationId xmlns:a16="http://schemas.microsoft.com/office/drawing/2014/main" id="{10E54CCE-BD2E-FACD-26E6-4FD0B6CDF381}"/>
               </a:ext>
             </a:extLst>
           </p:cNvPr>
@@ -21018,7 +22253,7 @@
           <p:cNvPr id="24" name="grid-h-256">
             <a:extLst>
               <a:ext uri="{FF2B5EF4-FFF2-40B4-BE49-F238E27FC236}">
-                <a16:creationId xmlns:a16="http://schemas.microsoft.com/office/drawing/2014/main" id="{03922AF2-C2C8-562E-08F1-CF36D07621F4}"/>
+                <a16:creationId xmlns:a16="http://schemas.microsoft.com/office/drawing/2014/main" id="{C45B53FA-ACAF-CE22-28BF-912589EEF33A}"/>
               </a:ext>
             </a:extLst>
           </p:cNvPr>
@@ -21059,7 +22294,7 @@
           <p:cNvPr id="25" name="grid-h-320">
             <a:extLst>
               <a:ext uri="{FF2B5EF4-FFF2-40B4-BE49-F238E27FC236}">
-                <a16:creationId xmlns:a16="http://schemas.microsoft.com/office/drawing/2014/main" id="{96C017E4-F50D-FAA6-1967-EF9391356320}"/>
+                <a16:creationId xmlns:a16="http://schemas.microsoft.com/office/drawing/2014/main" id="{DF5A73F6-1FCB-6977-0A4B-8578BEA9EF7B}"/>
               </a:ext>
             </a:extLst>
           </p:cNvPr>
@@ -21100,7 +22335,7 @@
           <p:cNvPr id="26" name="grid-h-384">
             <a:extLst>
               <a:ext uri="{FF2B5EF4-FFF2-40B4-BE49-F238E27FC236}">
-                <a16:creationId xmlns:a16="http://schemas.microsoft.com/office/drawing/2014/main" id="{8CD079FB-FB9D-49AD-C7A1-A2996BA0F587}"/>
+                <a16:creationId xmlns:a16="http://schemas.microsoft.com/office/drawing/2014/main" id="{B53511CD-D1F1-BBD6-DA44-3F40D9E885C8}"/>
               </a:ext>
             </a:extLst>
           </p:cNvPr>
@@ -21141,7 +22376,7 @@
           <p:cNvPr id="27" name="grid-h-448">
             <a:extLst>
               <a:ext uri="{FF2B5EF4-FFF2-40B4-BE49-F238E27FC236}">
-                <a16:creationId xmlns:a16="http://schemas.microsoft.com/office/drawing/2014/main" id="{68705FB9-9C20-CF31-95A4-6214788D695C}"/>
+                <a16:creationId xmlns:a16="http://schemas.microsoft.com/office/drawing/2014/main" id="{5181B877-DD51-3706-1D54-19D803072564}"/>
               </a:ext>
             </a:extLst>
           </p:cNvPr>
@@ -21182,7 +22417,7 @@
           <p:cNvPr id="28" name="grid-h-512">
             <a:extLst>
               <a:ext uri="{FF2B5EF4-FFF2-40B4-BE49-F238E27FC236}">
-                <a16:creationId xmlns:a16="http://schemas.microsoft.com/office/drawing/2014/main" id="{5BAFF1C3-A4E6-BDD5-AF3A-FB8D0760E07B}"/>
+                <a16:creationId xmlns:a16="http://schemas.microsoft.com/office/drawing/2014/main" id="{15AC78B8-F1D1-7EDC-5E51-FA6AB0640045}"/>
               </a:ext>
             </a:extLst>
           </p:cNvPr>
@@ -21223,7 +22458,7 @@
           <p:cNvPr id="29" name="page-num">
             <a:extLst>
               <a:ext uri="{FF2B5EF4-FFF2-40B4-BE49-F238E27FC236}">
-                <a16:creationId xmlns:a16="http://schemas.microsoft.com/office/drawing/2014/main" id="{A295F66E-BB00-0051-8FCD-C841A3DF5172}"/>
+                <a16:creationId xmlns:a16="http://schemas.microsoft.com/office/drawing/2014/main" id="{21C67D39-BB4B-3996-6C80-113EB3389B3B}"/>
               </a:ext>
             </a:extLst>
           </p:cNvPr>
@@ -21269,7 +22504,7 @@
           <p:cNvPr id="30" name="section-label">
             <a:extLst>
               <a:ext uri="{FF2B5EF4-FFF2-40B4-BE49-F238E27FC236}">
-                <a16:creationId xmlns:a16="http://schemas.microsoft.com/office/drawing/2014/main" id="{49C5E2A3-EFD7-E8EB-F46B-B4EF79A70C1A}"/>
+                <a16:creationId xmlns:a16="http://schemas.microsoft.com/office/drawing/2014/main" id="{32B3E9F0-352E-3C14-FE53-27BCFAAE5990}"/>
               </a:ext>
             </a:extLst>
           </p:cNvPr>
@@ -21315,7 +22550,7 @@
           <p:cNvPr id="31" name="title">
             <a:extLst>
               <a:ext uri="{FF2B5EF4-FFF2-40B4-BE49-F238E27FC236}">
-                <a16:creationId xmlns:a16="http://schemas.microsoft.com/office/drawing/2014/main" id="{8072040D-AB48-0E8F-F808-3557132A570D}"/>
+                <a16:creationId xmlns:a16="http://schemas.microsoft.com/office/drawing/2014/main" id="{620D8AC4-580C-B1E9-9869-C90C5E65A023}"/>
               </a:ext>
             </a:extLst>
           </p:cNvPr>
@@ -21361,7 +22596,7 @@
           <p:cNvPr id="32" name="gap-rule">
             <a:extLst>
               <a:ext uri="{FF2B5EF4-FFF2-40B4-BE49-F238E27FC236}">
-                <a16:creationId xmlns:a16="http://schemas.microsoft.com/office/drawing/2014/main" id="{22840E53-1608-0FD9-12F0-D4E265EA0330}"/>
+                <a16:creationId xmlns:a16="http://schemas.microsoft.com/office/drawing/2014/main" id="{27FD9E8A-F366-4DB0-5D36-840ACC033798}"/>
               </a:ext>
             </a:extLst>
           </p:cNvPr>
@@ -21402,7 +22637,7 @@
           <p:cNvPr id="33" name="left-card">
             <a:extLst>
               <a:ext uri="{FF2B5EF4-FFF2-40B4-BE49-F238E27FC236}">
-                <a16:creationId xmlns:a16="http://schemas.microsoft.com/office/drawing/2014/main" id="{38C78208-5592-4B98-A9F7-D8F0C258E8CC}"/>
+                <a16:creationId xmlns:a16="http://schemas.microsoft.com/office/drawing/2014/main" id="{F91D9AF8-AAD2-E463-B0B3-3314B9077490}"/>
               </a:ext>
             </a:extLst>
           </p:cNvPr>
@@ -21456,7 +22691,7 @@
           <p:cNvPr id="34" name="left-k">
             <a:extLst>
               <a:ext uri="{FF2B5EF4-FFF2-40B4-BE49-F238E27FC236}">
-                <a16:creationId xmlns:a16="http://schemas.microsoft.com/office/drawing/2014/main" id="{840F7A41-4924-412B-E11D-B94E3112B5BA}"/>
+                <a16:creationId xmlns:a16="http://schemas.microsoft.com/office/drawing/2014/main" id="{ABC7B8C2-063F-07FD-F298-6970708C65B9}"/>
               </a:ext>
             </a:extLst>
           </p:cNvPr>
@@ -21502,7 +22737,7 @@
           <p:cNvPr id="35" name="left-main">
             <a:extLst>
               <a:ext uri="{FF2B5EF4-FFF2-40B4-BE49-F238E27FC236}">
-                <a16:creationId xmlns:a16="http://schemas.microsoft.com/office/drawing/2014/main" id="{B85D47C5-A420-122C-9693-6D4F45880978}"/>
+                <a16:creationId xmlns:a16="http://schemas.microsoft.com/office/drawing/2014/main" id="{714DD937-F6BD-F05C-6304-4048210B5FC9}"/>
               </a:ext>
             </a:extLst>
           </p:cNvPr>
@@ -21548,7 +22783,7 @@
           <p:cNvPr id="36" name="gap-arrow">
             <a:extLst>
               <a:ext uri="{FF2B5EF4-FFF2-40B4-BE49-F238E27FC236}">
-                <a16:creationId xmlns:a16="http://schemas.microsoft.com/office/drawing/2014/main" id="{351BD472-CBCC-1E51-279F-217F37EBFD3F}"/>
+                <a16:creationId xmlns:a16="http://schemas.microsoft.com/office/drawing/2014/main" id="{C59B44C2-5C2D-BD33-96C5-17E2D092C56E}"/>
               </a:ext>
             </a:extLst>
           </p:cNvPr>
@@ -21589,7 +22824,7 @@
           <p:cNvPr id="37" name="right-card">
             <a:extLst>
               <a:ext uri="{FF2B5EF4-FFF2-40B4-BE49-F238E27FC236}">
-                <a16:creationId xmlns:a16="http://schemas.microsoft.com/office/drawing/2014/main" id="{022BE9F1-9332-E612-AF1E-5697A553EDC0}"/>
+                <a16:creationId xmlns:a16="http://schemas.microsoft.com/office/drawing/2014/main" id="{8EF93208-498D-9B1F-12CD-E2E9F928464F}"/>
               </a:ext>
             </a:extLst>
           </p:cNvPr>
@@ -21643,7 +22878,7 @@
           <p:cNvPr id="38" name="right-k">
             <a:extLst>
               <a:ext uri="{FF2B5EF4-FFF2-40B4-BE49-F238E27FC236}">
-                <a16:creationId xmlns:a16="http://schemas.microsoft.com/office/drawing/2014/main" id="{847D9240-DB63-EFBC-6F6D-130B534CAF54}"/>
+                <a16:creationId xmlns:a16="http://schemas.microsoft.com/office/drawing/2014/main" id="{42BFC4E7-D46C-731D-9737-ABDF50258DF3}"/>
               </a:ext>
             </a:extLst>
           </p:cNvPr>
@@ -21689,7 +22924,7 @@
           <p:cNvPr id="39" name="right-main">
             <a:extLst>
               <a:ext uri="{FF2B5EF4-FFF2-40B4-BE49-F238E27FC236}">
-                <a16:creationId xmlns:a16="http://schemas.microsoft.com/office/drawing/2014/main" id="{9CB1F81F-2678-3CFC-9620-76711FA088CD}"/>
+                <a16:creationId xmlns:a16="http://schemas.microsoft.com/office/drawing/2014/main" id="{847C1B69-0D8E-7F00-5257-1DC777C8E3B1}"/>
               </a:ext>
             </a:extLst>
           </p:cNvPr>
@@ -21735,7 +22970,7 @@
           <p:cNvPr id="40" name="claim-bar">
             <a:extLst>
               <a:ext uri="{FF2B5EF4-FFF2-40B4-BE49-F238E27FC236}">
-                <a16:creationId xmlns:a16="http://schemas.microsoft.com/office/drawing/2014/main" id="{655D0932-6124-4616-869C-BEAEE6594BEF}"/>
+                <a16:creationId xmlns:a16="http://schemas.microsoft.com/office/drawing/2014/main" id="{1DB3F329-F8D3-B8FC-C380-776ACA83DEBD}"/>
               </a:ext>
             </a:extLst>
           </p:cNvPr>
@@ -21789,7 +23024,7 @@
           <p:cNvPr id="41" name="claim-text">
             <a:extLst>
               <a:ext uri="{FF2B5EF4-FFF2-40B4-BE49-F238E27FC236}">
-                <a16:creationId xmlns:a16="http://schemas.microsoft.com/office/drawing/2014/main" id="{0F9E73CD-FC3A-31EB-873A-293FCBF08E7B}"/>
+                <a16:creationId xmlns:a16="http://schemas.microsoft.com/office/drawing/2014/main" id="{2D24271D-F078-40A1-FF48-4E858DC2AE4B}"/>
               </a:ext>
             </a:extLst>
           </p:cNvPr>
@@ -21835,7 +23070,7 @@
           <p:cNvPr id="43" name="图片 42">
             <a:extLst>
               <a:ext uri="{FF2B5EF4-FFF2-40B4-BE49-F238E27FC236}">
-                <a16:creationId xmlns:a16="http://schemas.microsoft.com/office/drawing/2014/main" id="{4B7C7FD9-34CA-9ADE-643B-C5C7D56D9795}"/>
+                <a16:creationId xmlns:a16="http://schemas.microsoft.com/office/drawing/2014/main" id="{00131F36-5273-102E-7083-088C8854110B}"/>
               </a:ext>
             </a:extLst>
           </p:cNvPr>
@@ -21869,7 +23104,7 @@
     </p:spTree>
     <p:extLst>
       <p:ext uri="{BB962C8B-B14F-4D97-AF65-F5344CB8AC3E}">
-        <p14:creationId xmlns:p14="http://schemas.microsoft.com/office/powerpoint/2010/main" val="893711359"/>
+        <p14:creationId xmlns:p14="http://schemas.microsoft.com/office/powerpoint/2010/main" val="2159857896"/>
       </p:ext>
     </p:extLst>
   </p:cSld>
@@ -21913,7 +23148,7 @@
           <p:cNvPr id="2" name="page-bg">
             <a:extLst>
               <a:ext uri="{FF2B5EF4-FFF2-40B4-BE49-F238E27FC236}">
-                <a16:creationId xmlns:a16="http://schemas.microsoft.com/office/drawing/2014/main" id="{151776B3-2795-1F8F-CC51-06C41CD4CF5A}"/>
+                <a16:creationId xmlns:a16="http://schemas.microsoft.com/office/drawing/2014/main" id="{03206A9B-9816-9F70-2659-20D351CEA50D}"/>
               </a:ext>
             </a:extLst>
           </p:cNvPr>
@@ -21974,7 +23209,7 @@
           <p:cNvPr id="3" name="left-rail">
             <a:extLst>
               <a:ext uri="{FF2B5EF4-FFF2-40B4-BE49-F238E27FC236}">
-                <a16:creationId xmlns:a16="http://schemas.microsoft.com/office/drawing/2014/main" id="{34CCDA60-9B2A-927D-29B9-7BB21BAF06D1}"/>
+                <a16:creationId xmlns:a16="http://schemas.microsoft.com/office/drawing/2014/main" id="{1CF7E263-88C5-387A-767F-9D06F12C00CD}"/>
               </a:ext>
             </a:extLst>
           </p:cNvPr>
@@ -22035,7 +23270,7 @@
           <p:cNvPr id="4" name="top-line">
             <a:extLst>
               <a:ext uri="{FF2B5EF4-FFF2-40B4-BE49-F238E27FC236}">
-                <a16:creationId xmlns:a16="http://schemas.microsoft.com/office/drawing/2014/main" id="{E6E8C761-6D0F-E0DD-3F81-A079AF7B89E6}"/>
+                <a16:creationId xmlns:a16="http://schemas.microsoft.com/office/drawing/2014/main" id="{20E54E6F-5EF1-7F34-BAF7-56606CE35426}"/>
               </a:ext>
             </a:extLst>
           </p:cNvPr>
@@ -22076,7 +23311,7 @@
           <p:cNvPr id="5" name="footer-left">
             <a:extLst>
               <a:ext uri="{FF2B5EF4-FFF2-40B4-BE49-F238E27FC236}">
-                <a16:creationId xmlns:a16="http://schemas.microsoft.com/office/drawing/2014/main" id="{A7B9152E-A63A-221F-A83A-2772B2948CCC}"/>
+                <a16:creationId xmlns:a16="http://schemas.microsoft.com/office/drawing/2014/main" id="{F57BC1D9-22A5-D188-59EC-87A01BE07AA6}"/>
               </a:ext>
             </a:extLst>
           </p:cNvPr>
@@ -22122,7 +23357,7 @@
           <p:cNvPr id="6" name="footer-mid">
             <a:extLst>
               <a:ext uri="{FF2B5EF4-FFF2-40B4-BE49-F238E27FC236}">
-                <a16:creationId xmlns:a16="http://schemas.microsoft.com/office/drawing/2014/main" id="{1F2C0594-5C26-D043-7EBE-3002282D454B}"/>
+                <a16:creationId xmlns:a16="http://schemas.microsoft.com/office/drawing/2014/main" id="{87438515-3EED-A6A0-C56A-5002833E6ED6}"/>
               </a:ext>
             </a:extLst>
           </p:cNvPr>
@@ -22168,7 +23403,7 @@
           <p:cNvPr id="7" name="page-num">
             <a:extLst>
               <a:ext uri="{FF2B5EF4-FFF2-40B4-BE49-F238E27FC236}">
-                <a16:creationId xmlns:a16="http://schemas.microsoft.com/office/drawing/2014/main" id="{033AFB84-A0DD-FDEF-0AFE-00A3D7CB4195}"/>
+                <a16:creationId xmlns:a16="http://schemas.microsoft.com/office/drawing/2014/main" id="{8EFB7033-5113-815B-6314-88EA0B021C36}"/>
               </a:ext>
             </a:extLst>
           </p:cNvPr>
@@ -22214,7 +23449,7 @@
           <p:cNvPr id="8" name="section-label">
             <a:extLst>
               <a:ext uri="{FF2B5EF4-FFF2-40B4-BE49-F238E27FC236}">
-                <a16:creationId xmlns:a16="http://schemas.microsoft.com/office/drawing/2014/main" id="{B9CDA589-9359-BBD0-1669-DE721B1EE7C2}"/>
+                <a16:creationId xmlns:a16="http://schemas.microsoft.com/office/drawing/2014/main" id="{142DA701-2114-368B-D6CC-9D03D57B95E3}"/>
               </a:ext>
             </a:extLst>
           </p:cNvPr>
@@ -22260,7 +23495,7 @@
           <p:cNvPr id="10" name="图片 9">
             <a:extLst>
               <a:ext uri="{FF2B5EF4-FFF2-40B4-BE49-F238E27FC236}">
-                <a16:creationId xmlns:a16="http://schemas.microsoft.com/office/drawing/2014/main" id="{B8B4E65A-E0BA-4CBC-F50C-CC862955AF1F}"/>
+                <a16:creationId xmlns:a16="http://schemas.microsoft.com/office/drawing/2014/main" id="{E9A76EB7-EDA5-BEF6-0BCD-C7778CC6BF42}"/>
               </a:ext>
             </a:extLst>
           </p:cNvPr>
@@ -22296,7 +23531,7 @@
           <p:cNvPr id="11" name="title">
             <a:extLst>
               <a:ext uri="{FF2B5EF4-FFF2-40B4-BE49-F238E27FC236}">
-                <a16:creationId xmlns:a16="http://schemas.microsoft.com/office/drawing/2014/main" id="{98C89332-3462-FAFA-DA24-82A32CBF4239}"/>
+                <a16:creationId xmlns:a16="http://schemas.microsoft.com/office/drawing/2014/main" id="{B40972DC-372A-4CD9-4DCD-BEE87B4CFE86}"/>
               </a:ext>
             </a:extLst>
           </p:cNvPr>
@@ -22342,7 +23577,7 @@
           <p:cNvPr id="12" name="subtitle">
             <a:extLst>
               <a:ext uri="{FF2B5EF4-FFF2-40B4-BE49-F238E27FC236}">
-                <a16:creationId xmlns:a16="http://schemas.microsoft.com/office/drawing/2014/main" id="{B1B272B7-70F7-F8CA-C863-6D0D7ED7671F}"/>
+                <a16:creationId xmlns:a16="http://schemas.microsoft.com/office/drawing/2014/main" id="{3095F495-B26B-6FD3-1A9C-45C7A17D3A56}"/>
               </a:ext>
             </a:extLst>
           </p:cNvPr>
@@ -22388,7 +23623,7 @@
           <p:cNvPr id="13" name="fig-frame">
             <a:extLst>
               <a:ext uri="{FF2B5EF4-FFF2-40B4-BE49-F238E27FC236}">
-                <a16:creationId xmlns:a16="http://schemas.microsoft.com/office/drawing/2014/main" id="{482DEF32-DD45-4BBA-9C23-DC32F5A4A183}"/>
+                <a16:creationId xmlns:a16="http://schemas.microsoft.com/office/drawing/2014/main" id="{CF28ED43-13CD-4461-FEAF-E83FEF2737FF}"/>
               </a:ext>
             </a:extLst>
           </p:cNvPr>
@@ -22442,7 +23677,7 @@
           <p:cNvPr id="15" name="framework-figure">
             <a:extLst>
               <a:ext uri="{FF2B5EF4-FFF2-40B4-BE49-F238E27FC236}">
-                <a16:creationId xmlns:a16="http://schemas.microsoft.com/office/drawing/2014/main" id="{EC641E5B-2E37-E976-B866-6FB40C23836A}"/>
+                <a16:creationId xmlns:a16="http://schemas.microsoft.com/office/drawing/2014/main" id="{A5ACA931-8643-EC82-C79E-ADA74D01936A}"/>
               </a:ext>
             </a:extLst>
           </p:cNvPr>
@@ -22478,7 +23713,7 @@
           <p:cNvPr id="16" name="takeaway">
             <a:extLst>
               <a:ext uri="{FF2B5EF4-FFF2-40B4-BE49-F238E27FC236}">
-                <a16:creationId xmlns:a16="http://schemas.microsoft.com/office/drawing/2014/main" id="{639F8B06-C004-FDD9-7D10-7DF82657E20D}"/>
+                <a16:creationId xmlns:a16="http://schemas.microsoft.com/office/drawing/2014/main" id="{003AB74E-99E0-91BB-C451-2171D16268B3}"/>
               </a:ext>
             </a:extLst>
           </p:cNvPr>
@@ -22532,7 +23767,7 @@
           <p:cNvPr id="17" name="takeaway-text">
             <a:extLst>
               <a:ext uri="{FF2B5EF4-FFF2-40B4-BE49-F238E27FC236}">
-                <a16:creationId xmlns:a16="http://schemas.microsoft.com/office/drawing/2014/main" id="{0410F77E-89D9-3FE2-597B-A333C050C7D3}"/>
+                <a16:creationId xmlns:a16="http://schemas.microsoft.com/office/drawing/2014/main" id="{E0763E78-1D12-4BCF-5579-A11AA1322ACE}"/>
               </a:ext>
             </a:extLst>
           </p:cNvPr>
@@ -22579,7 +23814,7 @@
             <a:hlinkClick r:id="rId5"/>
             <a:extLst>
               <a:ext uri="{FF2B5EF4-FFF2-40B4-BE49-F238E27FC236}">
-                <a16:creationId xmlns:a16="http://schemas.microsoft.com/office/drawing/2014/main" id="{79AD6960-B4C0-6117-5534-E22A7E259A5F}"/>
+                <a16:creationId xmlns:a16="http://schemas.microsoft.com/office/drawing/2014/main" id="{99815090-7FB3-9AE1-9F29-4D61C85A7A94}"/>
               </a:ext>
             </a:extLst>
           </p:cNvPr>
@@ -22648,7 +23883,7 @@
             <a:hlinkClick r:id="rId6"/>
             <a:extLst>
               <a:ext uri="{FF2B5EF4-FFF2-40B4-BE49-F238E27FC236}">
-                <a16:creationId xmlns:a16="http://schemas.microsoft.com/office/drawing/2014/main" id="{F9FAE353-7294-D9C3-ACA2-23667F368A5A}"/>
+                <a16:creationId xmlns:a16="http://schemas.microsoft.com/office/drawing/2014/main" id="{CA4DDCBC-6979-A0D9-14C8-F6337F3E7EE6}"/>
               </a:ext>
             </a:extLst>
           </p:cNvPr>
@@ -22714,7 +23949,7 @@
     </p:spTree>
     <p:extLst>
       <p:ext uri="{BB962C8B-B14F-4D97-AF65-F5344CB8AC3E}">
-        <p14:creationId xmlns:p14="http://schemas.microsoft.com/office/powerpoint/2010/main" val="2769930265"/>
+        <p14:creationId xmlns:p14="http://schemas.microsoft.com/office/powerpoint/2010/main" val="1018726875"/>
       </p:ext>
     </p:extLst>
   </p:cSld>
@@ -22758,7 +23993,7 @@
           <p:cNvPr id="2" name="page-bg">
             <a:extLst>
               <a:ext uri="{FF2B5EF4-FFF2-40B4-BE49-F238E27FC236}">
-                <a16:creationId xmlns:a16="http://schemas.microsoft.com/office/drawing/2014/main" id="{128961B6-9F5E-9E57-A19E-879E1B7F9DD4}"/>
+                <a16:creationId xmlns:a16="http://schemas.microsoft.com/office/drawing/2014/main" id="{CCF0A745-4C1E-0AF6-3370-676976002701}"/>
               </a:ext>
             </a:extLst>
           </p:cNvPr>
@@ -22819,7 +24054,7 @@
           <p:cNvPr id="3" name="left-rail">
             <a:extLst>
               <a:ext uri="{FF2B5EF4-FFF2-40B4-BE49-F238E27FC236}">
-                <a16:creationId xmlns:a16="http://schemas.microsoft.com/office/drawing/2014/main" id="{B263BFAB-E14E-B9BF-32BB-1E91D86F41AF}"/>
+                <a16:creationId xmlns:a16="http://schemas.microsoft.com/office/drawing/2014/main" id="{6EF4816F-2803-D5EE-F6F9-26868105F1CC}"/>
               </a:ext>
             </a:extLst>
           </p:cNvPr>
@@ -22880,7 +24115,7 @@
           <p:cNvPr id="4" name="top-line">
             <a:extLst>
               <a:ext uri="{FF2B5EF4-FFF2-40B4-BE49-F238E27FC236}">
-                <a16:creationId xmlns:a16="http://schemas.microsoft.com/office/drawing/2014/main" id="{C134D3F3-04F7-15ED-16CF-8818F62DDDF7}"/>
+                <a16:creationId xmlns:a16="http://schemas.microsoft.com/office/drawing/2014/main" id="{EF71DC84-4B83-E5FA-A465-9804EF8FA3AD}"/>
               </a:ext>
             </a:extLst>
           </p:cNvPr>
@@ -22921,7 +24156,7 @@
           <p:cNvPr id="5" name="footer-left">
             <a:extLst>
               <a:ext uri="{FF2B5EF4-FFF2-40B4-BE49-F238E27FC236}">
-                <a16:creationId xmlns:a16="http://schemas.microsoft.com/office/drawing/2014/main" id="{1312BAF9-DEAF-3601-36FC-4E2B64F35C5D}"/>
+                <a16:creationId xmlns:a16="http://schemas.microsoft.com/office/drawing/2014/main" id="{E33C3DB6-819B-1DDC-E1F4-FDAAEC490DDA}"/>
               </a:ext>
             </a:extLst>
           </p:cNvPr>
@@ -22967,7 +24202,7 @@
           <p:cNvPr id="6" name="footer-mid">
             <a:extLst>
               <a:ext uri="{FF2B5EF4-FFF2-40B4-BE49-F238E27FC236}">
-                <a16:creationId xmlns:a16="http://schemas.microsoft.com/office/drawing/2014/main" id="{AED36AD5-0F0A-C347-B653-1CE21D3890B8}"/>
+                <a16:creationId xmlns:a16="http://schemas.microsoft.com/office/drawing/2014/main" id="{940F567C-6042-C433-1C7F-85E6CB0F7B9C}"/>
               </a:ext>
             </a:extLst>
           </p:cNvPr>
@@ -23013,7 +24248,7 @@
           <p:cNvPr id="7" name="page-num">
             <a:extLst>
               <a:ext uri="{FF2B5EF4-FFF2-40B4-BE49-F238E27FC236}">
-                <a16:creationId xmlns:a16="http://schemas.microsoft.com/office/drawing/2014/main" id="{4AFF2002-A8BD-08CF-8C03-42D67826D558}"/>
+                <a16:creationId xmlns:a16="http://schemas.microsoft.com/office/drawing/2014/main" id="{4E01A12B-83F6-BED8-2B50-72004CA55209}"/>
               </a:ext>
             </a:extLst>
           </p:cNvPr>
@@ -23059,7 +24294,7 @@
           <p:cNvPr id="8" name="section-label">
             <a:extLst>
               <a:ext uri="{FF2B5EF4-FFF2-40B4-BE49-F238E27FC236}">
-                <a16:creationId xmlns:a16="http://schemas.microsoft.com/office/drawing/2014/main" id="{251F3EF3-0CF0-311C-FF1C-45B347716B62}"/>
+                <a16:creationId xmlns:a16="http://schemas.microsoft.com/office/drawing/2014/main" id="{A6A49515-C0BB-C625-85BF-56ADA4FF1EB8}"/>
               </a:ext>
             </a:extLst>
           </p:cNvPr>
@@ -23105,7 +24340,7 @@
           <p:cNvPr id="10" name="图片 9">
             <a:extLst>
               <a:ext uri="{FF2B5EF4-FFF2-40B4-BE49-F238E27FC236}">
-                <a16:creationId xmlns:a16="http://schemas.microsoft.com/office/drawing/2014/main" id="{82337E37-7B74-52D6-6D2D-F0AA70FDF08C}"/>
+                <a16:creationId xmlns:a16="http://schemas.microsoft.com/office/drawing/2014/main" id="{0CA845A2-7BBC-BBC1-9599-C8B4F518BBE5}"/>
               </a:ext>
             </a:extLst>
           </p:cNvPr>
@@ -23141,7 +24376,7 @@
           <p:cNvPr id="11" name="title">
             <a:extLst>
               <a:ext uri="{FF2B5EF4-FFF2-40B4-BE49-F238E27FC236}">
-                <a16:creationId xmlns:a16="http://schemas.microsoft.com/office/drawing/2014/main" id="{EC7C6D10-168D-696A-DDF1-5288D78C499C}"/>
+                <a16:creationId xmlns:a16="http://schemas.microsoft.com/office/drawing/2014/main" id="{2966FC0D-9C84-83FE-7B8C-321707D6763A}"/>
               </a:ext>
             </a:extLst>
           </p:cNvPr>
@@ -23187,7 +24422,7 @@
           <p:cNvPr id="12" name="subtitle">
             <a:extLst>
               <a:ext uri="{FF2B5EF4-FFF2-40B4-BE49-F238E27FC236}">
-                <a16:creationId xmlns:a16="http://schemas.microsoft.com/office/drawing/2014/main" id="{B1F81EE8-6AB5-63FC-EF8C-0AF67DE519E5}"/>
+                <a16:creationId xmlns:a16="http://schemas.microsoft.com/office/drawing/2014/main" id="{5D6A64BC-C15C-EF38-A271-E03D81FFA18F}"/>
               </a:ext>
             </a:extLst>
           </p:cNvPr>
@@ -23233,7 +24468,7 @@
           <p:cNvPr id="13" name="formula">
             <a:extLst>
               <a:ext uri="{FF2B5EF4-FFF2-40B4-BE49-F238E27FC236}">
-                <a16:creationId xmlns:a16="http://schemas.microsoft.com/office/drawing/2014/main" id="{8E1A2101-D0CF-AD24-DB45-CC4D3F46CDD0}"/>
+                <a16:creationId xmlns:a16="http://schemas.microsoft.com/office/drawing/2014/main" id="{A083B572-A2C3-5F52-38F0-AB4FE149180B}"/>
               </a:ext>
             </a:extLst>
           </p:cNvPr>
@@ -23294,7 +24529,7 @@
           <p:cNvPr id="14" name="formula-main">
             <a:extLst>
               <a:ext uri="{FF2B5EF4-FFF2-40B4-BE49-F238E27FC236}">
-                <a16:creationId xmlns:a16="http://schemas.microsoft.com/office/drawing/2014/main" id="{BE9A88C3-55DF-5EF0-95CC-E3C45F7BDADE}"/>
+                <a16:creationId xmlns:a16="http://schemas.microsoft.com/office/drawing/2014/main" id="{A8ECF2EE-C15E-A13A-B145-D1D79A03DC4A}"/>
               </a:ext>
             </a:extLst>
           </p:cNvPr>
@@ -23340,7 +24575,7 @@
           <p:cNvPr id="15" name="formula-sub">
             <a:extLst>
               <a:ext uri="{FF2B5EF4-FFF2-40B4-BE49-F238E27FC236}">
-                <a16:creationId xmlns:a16="http://schemas.microsoft.com/office/drawing/2014/main" id="{A2E311AC-32AB-58BB-2A7F-218B26B6C0DD}"/>
+                <a16:creationId xmlns:a16="http://schemas.microsoft.com/office/drawing/2014/main" id="{B44B1CAA-94B9-91AF-F195-008D82169401}"/>
               </a:ext>
             </a:extLst>
           </p:cNvPr>
@@ -23386,7 +24621,7 @@
           <p:cNvPr id="16" name="fig-frame">
             <a:extLst>
               <a:ext uri="{FF2B5EF4-FFF2-40B4-BE49-F238E27FC236}">
-                <a16:creationId xmlns:a16="http://schemas.microsoft.com/office/drawing/2014/main" id="{99BEB268-484E-C518-A1CA-DA07F4BE17FB}"/>
+                <a16:creationId xmlns:a16="http://schemas.microsoft.com/office/drawing/2014/main" id="{EC26C0D1-FD76-A5E0-2394-C195C28B5F27}"/>
               </a:ext>
             </a:extLst>
           </p:cNvPr>
@@ -23440,7 +24675,7 @@
           <p:cNvPr id="18" name="contract-stack">
             <a:extLst>
               <a:ext uri="{FF2B5EF4-FFF2-40B4-BE49-F238E27FC236}">
-                <a16:creationId xmlns:a16="http://schemas.microsoft.com/office/drawing/2014/main" id="{92473F39-9CB4-93AB-23D2-84C4262115C7}"/>
+                <a16:creationId xmlns:a16="http://schemas.microsoft.com/office/drawing/2014/main" id="{F444913F-7A3A-A7A4-B822-0E83CBC6C524}"/>
               </a:ext>
             </a:extLst>
           </p:cNvPr>
@@ -23476,7 +24711,7 @@
           <p:cNvPr id="19" name="gate-0">
             <a:extLst>
               <a:ext uri="{FF2B5EF4-FFF2-40B4-BE49-F238E27FC236}">
-                <a16:creationId xmlns:a16="http://schemas.microsoft.com/office/drawing/2014/main" id="{1C30836D-054A-5D70-A0C3-1B302A97D3DE}"/>
+                <a16:creationId xmlns:a16="http://schemas.microsoft.com/office/drawing/2014/main" id="{A93C3065-244F-B348-0680-16B1C3A83E7F}"/>
               </a:ext>
             </a:extLst>
           </p:cNvPr>
@@ -23530,7 +24765,7 @@
           <p:cNvPr id="20" name="gate-band-0">
             <a:extLst>
               <a:ext uri="{FF2B5EF4-FFF2-40B4-BE49-F238E27FC236}">
-                <a16:creationId xmlns:a16="http://schemas.microsoft.com/office/drawing/2014/main" id="{D946C48F-50FC-F322-77DE-95E229E02FE6}"/>
+                <a16:creationId xmlns:a16="http://schemas.microsoft.com/office/drawing/2014/main" id="{4C0990BE-09FB-9ED5-99EC-B581A0964DAC}"/>
               </a:ext>
             </a:extLst>
           </p:cNvPr>
@@ -23584,7 +24819,7 @@
           <p:cNvPr id="21" name="gate-title-0">
             <a:extLst>
               <a:ext uri="{FF2B5EF4-FFF2-40B4-BE49-F238E27FC236}">
-                <a16:creationId xmlns:a16="http://schemas.microsoft.com/office/drawing/2014/main" id="{BB457055-8CF7-6A82-C417-C95A8667CA10}"/>
+                <a16:creationId xmlns:a16="http://schemas.microsoft.com/office/drawing/2014/main" id="{E4A8C44B-8260-C830-053A-F2984351ACDF}"/>
               </a:ext>
             </a:extLst>
           </p:cNvPr>
@@ -23630,7 +24865,7 @@
           <p:cNvPr id="22" name="gate-sub-0">
             <a:extLst>
               <a:ext uri="{FF2B5EF4-FFF2-40B4-BE49-F238E27FC236}">
-                <a16:creationId xmlns:a16="http://schemas.microsoft.com/office/drawing/2014/main" id="{E7BE0E0E-B739-522B-769B-A1FA4F72B052}"/>
+                <a16:creationId xmlns:a16="http://schemas.microsoft.com/office/drawing/2014/main" id="{1537D93A-4DE1-8C40-D433-8A05A0B7A581}"/>
               </a:ext>
             </a:extLst>
           </p:cNvPr>
@@ -23676,7 +24911,7 @@
           <p:cNvPr id="23" name="gate-1">
             <a:extLst>
               <a:ext uri="{FF2B5EF4-FFF2-40B4-BE49-F238E27FC236}">
-                <a16:creationId xmlns:a16="http://schemas.microsoft.com/office/drawing/2014/main" id="{A2F021CF-4F23-B5D9-251C-FC5EBE8BF038}"/>
+                <a16:creationId xmlns:a16="http://schemas.microsoft.com/office/drawing/2014/main" id="{2F906E98-B2D5-B105-454C-B8CDA33A49BD}"/>
               </a:ext>
             </a:extLst>
           </p:cNvPr>
@@ -23730,7 +24965,7 @@
           <p:cNvPr id="24" name="gate-band-1">
             <a:extLst>
               <a:ext uri="{FF2B5EF4-FFF2-40B4-BE49-F238E27FC236}">
-                <a16:creationId xmlns:a16="http://schemas.microsoft.com/office/drawing/2014/main" id="{FD427956-E71B-24FA-D713-3AEB2143CD1E}"/>
+                <a16:creationId xmlns:a16="http://schemas.microsoft.com/office/drawing/2014/main" id="{13EC59A6-9274-0089-0969-F1A9428ACDDB}"/>
               </a:ext>
             </a:extLst>
           </p:cNvPr>
@@ -23784,7 +25019,7 @@
           <p:cNvPr id="25" name="gate-title-1">
             <a:extLst>
               <a:ext uri="{FF2B5EF4-FFF2-40B4-BE49-F238E27FC236}">
-                <a16:creationId xmlns:a16="http://schemas.microsoft.com/office/drawing/2014/main" id="{E7C2D4E1-39F1-809A-2ADA-A7B51D2C92D7}"/>
+                <a16:creationId xmlns:a16="http://schemas.microsoft.com/office/drawing/2014/main" id="{FCA07540-15CF-5BCB-EA81-570B29DB6AF1}"/>
               </a:ext>
             </a:extLst>
           </p:cNvPr>
@@ -23830,7 +25065,7 @@
           <p:cNvPr id="26" name="gate-sub-1">
             <a:extLst>
               <a:ext uri="{FF2B5EF4-FFF2-40B4-BE49-F238E27FC236}">
-                <a16:creationId xmlns:a16="http://schemas.microsoft.com/office/drawing/2014/main" id="{F3C3557F-2B4F-C8CB-D798-724AC411544C}"/>
+                <a16:creationId xmlns:a16="http://schemas.microsoft.com/office/drawing/2014/main" id="{03B47D24-D0D6-A312-469C-1952FE11DE6D}"/>
               </a:ext>
             </a:extLst>
           </p:cNvPr>
@@ -23876,7 +25111,7 @@
           <p:cNvPr id="27" name="gate-2">
             <a:extLst>
               <a:ext uri="{FF2B5EF4-FFF2-40B4-BE49-F238E27FC236}">
-                <a16:creationId xmlns:a16="http://schemas.microsoft.com/office/drawing/2014/main" id="{E9A0ED52-2454-C71F-FD6B-EE34867DEFA5}"/>
+                <a16:creationId xmlns:a16="http://schemas.microsoft.com/office/drawing/2014/main" id="{12135765-8C45-798A-4056-888A6489C435}"/>
               </a:ext>
             </a:extLst>
           </p:cNvPr>
@@ -23930,7 +25165,7 @@
           <p:cNvPr id="28" name="gate-band-2">
             <a:extLst>
               <a:ext uri="{FF2B5EF4-FFF2-40B4-BE49-F238E27FC236}">
-                <a16:creationId xmlns:a16="http://schemas.microsoft.com/office/drawing/2014/main" id="{2BEB0291-9021-C375-BD75-EF5602CF5E07}"/>
+                <a16:creationId xmlns:a16="http://schemas.microsoft.com/office/drawing/2014/main" id="{0EC539DF-7446-3EAC-4AFA-3CFE97B44599}"/>
               </a:ext>
             </a:extLst>
           </p:cNvPr>
@@ -23984,7 +25219,7 @@
           <p:cNvPr id="29" name="gate-title-2">
             <a:extLst>
               <a:ext uri="{FF2B5EF4-FFF2-40B4-BE49-F238E27FC236}">
-                <a16:creationId xmlns:a16="http://schemas.microsoft.com/office/drawing/2014/main" id="{56AE0BCC-5995-49FF-5278-679D3B77546D}"/>
+                <a16:creationId xmlns:a16="http://schemas.microsoft.com/office/drawing/2014/main" id="{FE0BE3B8-AD54-C06F-75E7-47639F8ECBF1}"/>
               </a:ext>
             </a:extLst>
           </p:cNvPr>
@@ -24030,7 +25265,7 @@
           <p:cNvPr id="30" name="gate-sub-2">
             <a:extLst>
               <a:ext uri="{FF2B5EF4-FFF2-40B4-BE49-F238E27FC236}">
-                <a16:creationId xmlns:a16="http://schemas.microsoft.com/office/drawing/2014/main" id="{52BFE8D1-F9CB-75A0-D059-0919E757F313}"/>
+                <a16:creationId xmlns:a16="http://schemas.microsoft.com/office/drawing/2014/main" id="{3A793155-4579-22BC-E573-E38A6D1C00B3}"/>
               </a:ext>
             </a:extLst>
           </p:cNvPr>
@@ -24076,7 +25311,7 @@
           <p:cNvPr id="31" name="gate-3">
             <a:extLst>
               <a:ext uri="{FF2B5EF4-FFF2-40B4-BE49-F238E27FC236}">
-                <a16:creationId xmlns:a16="http://schemas.microsoft.com/office/drawing/2014/main" id="{944F6095-7002-8D47-8B74-F93CBA6AFD7E}"/>
+                <a16:creationId xmlns:a16="http://schemas.microsoft.com/office/drawing/2014/main" id="{FDBD67A1-CB69-E5C2-9BC5-D25965A86CBA}"/>
               </a:ext>
             </a:extLst>
           </p:cNvPr>
@@ -24130,7 +25365,7 @@
           <p:cNvPr id="32" name="gate-band-3">
             <a:extLst>
               <a:ext uri="{FF2B5EF4-FFF2-40B4-BE49-F238E27FC236}">
-                <a16:creationId xmlns:a16="http://schemas.microsoft.com/office/drawing/2014/main" id="{9C4E396F-9691-CE12-22D7-8AAE7FB921AD}"/>
+                <a16:creationId xmlns:a16="http://schemas.microsoft.com/office/drawing/2014/main" id="{E3D24DD4-636E-3ED8-69C1-8401DAC8DBF3}"/>
               </a:ext>
             </a:extLst>
           </p:cNvPr>
@@ -24184,7 +25419,7 @@
           <p:cNvPr id="33" name="gate-title-3">
             <a:extLst>
               <a:ext uri="{FF2B5EF4-FFF2-40B4-BE49-F238E27FC236}">
-                <a16:creationId xmlns:a16="http://schemas.microsoft.com/office/drawing/2014/main" id="{9B47BB64-6952-7F7B-B053-CCCED968D49D}"/>
+                <a16:creationId xmlns:a16="http://schemas.microsoft.com/office/drawing/2014/main" id="{14E44798-0782-2A23-8CB2-C219DA4E2082}"/>
               </a:ext>
             </a:extLst>
           </p:cNvPr>
@@ -24230,7 +25465,7 @@
           <p:cNvPr id="34" name="gate-sub-3">
             <a:extLst>
               <a:ext uri="{FF2B5EF4-FFF2-40B4-BE49-F238E27FC236}">
-                <a16:creationId xmlns:a16="http://schemas.microsoft.com/office/drawing/2014/main" id="{269BCEA7-B9AC-9FE6-54B8-9B2B2D7EB38C}"/>
+                <a16:creationId xmlns:a16="http://schemas.microsoft.com/office/drawing/2014/main" id="{CAFD38AC-7212-BB8C-6B60-2A1F6B3DB60F}"/>
               </a:ext>
             </a:extLst>
           </p:cNvPr>
@@ -24274,7 +25509,7 @@
     </p:spTree>
     <p:extLst>
       <p:ext uri="{BB962C8B-B14F-4D97-AF65-F5344CB8AC3E}">
-        <p14:creationId xmlns:p14="http://schemas.microsoft.com/office/powerpoint/2010/main" val="2164490533"/>
+        <p14:creationId xmlns:p14="http://schemas.microsoft.com/office/powerpoint/2010/main" val="628383933"/>
       </p:ext>
     </p:extLst>
   </p:cSld>
@@ -24318,7 +25553,7 @@
           <p:cNvPr id="2" name="dark-bg">
             <a:extLst>
               <a:ext uri="{FF2B5EF4-FFF2-40B4-BE49-F238E27FC236}">
-                <a16:creationId xmlns:a16="http://schemas.microsoft.com/office/drawing/2014/main" id="{94989859-C712-3E48-28A0-C6C10C2B3252}"/>
+                <a16:creationId xmlns:a16="http://schemas.microsoft.com/office/drawing/2014/main" id="{5739FF5B-3613-1F68-D937-76306FB7D2C9}"/>
               </a:ext>
             </a:extLst>
           </p:cNvPr>
@@ -24379,7 +25614,7 @@
           <p:cNvPr id="3" name="dark-panel">
             <a:extLst>
               <a:ext uri="{FF2B5EF4-FFF2-40B4-BE49-F238E27FC236}">
-                <a16:creationId xmlns:a16="http://schemas.microsoft.com/office/drawing/2014/main" id="{BADF0AD1-336C-8AE7-06A5-E7C9BD72ABB4}"/>
+                <a16:creationId xmlns:a16="http://schemas.microsoft.com/office/drawing/2014/main" id="{F48517D9-5575-1FE3-CA0A-8304C7792277}"/>
               </a:ext>
             </a:extLst>
           </p:cNvPr>
@@ -24442,7 +25677,7 @@
           <p:cNvPr id="4" name="grid-v-0">
             <a:extLst>
               <a:ext uri="{FF2B5EF4-FFF2-40B4-BE49-F238E27FC236}">
-                <a16:creationId xmlns:a16="http://schemas.microsoft.com/office/drawing/2014/main" id="{DC380E90-7500-408B-918D-742C8B7FF56D}"/>
+                <a16:creationId xmlns:a16="http://schemas.microsoft.com/office/drawing/2014/main" id="{01E50D38-AE3C-778B-2F5D-81B52030BD51}"/>
               </a:ext>
             </a:extLst>
           </p:cNvPr>
@@ -24483,7 +25718,7 @@
           <p:cNvPr id="5" name="grid-v-64">
             <a:extLst>
               <a:ext uri="{FF2B5EF4-FFF2-40B4-BE49-F238E27FC236}">
-                <a16:creationId xmlns:a16="http://schemas.microsoft.com/office/drawing/2014/main" id="{8F4B180C-82B7-1A14-FE5F-F905E8DDC10C}"/>
+                <a16:creationId xmlns:a16="http://schemas.microsoft.com/office/drawing/2014/main" id="{9C492DEE-9C64-08C9-9988-FA5C26886524}"/>
               </a:ext>
             </a:extLst>
           </p:cNvPr>
@@ -24524,7 +25759,7 @@
           <p:cNvPr id="6" name="grid-v-128">
             <a:extLst>
               <a:ext uri="{FF2B5EF4-FFF2-40B4-BE49-F238E27FC236}">
-                <a16:creationId xmlns:a16="http://schemas.microsoft.com/office/drawing/2014/main" id="{0BC57537-FF26-3241-A4F2-42DC98A53882}"/>
+                <a16:creationId xmlns:a16="http://schemas.microsoft.com/office/drawing/2014/main" id="{15AFE37F-9345-48A4-5E51-C4BBD7F689AD}"/>
               </a:ext>
             </a:extLst>
           </p:cNvPr>
@@ -24565,7 +25800,7 @@
           <p:cNvPr id="7" name="grid-v-192">
             <a:extLst>
               <a:ext uri="{FF2B5EF4-FFF2-40B4-BE49-F238E27FC236}">
-                <a16:creationId xmlns:a16="http://schemas.microsoft.com/office/drawing/2014/main" id="{33309C72-E967-5E27-826B-FFB1F9B404A5}"/>
+                <a16:creationId xmlns:a16="http://schemas.microsoft.com/office/drawing/2014/main" id="{7838245A-9BD2-0543-FB8D-E646A4093167}"/>
               </a:ext>
             </a:extLst>
           </p:cNvPr>
@@ -24606,7 +25841,7 @@
           <p:cNvPr id="8" name="grid-v-256">
             <a:extLst>
               <a:ext uri="{FF2B5EF4-FFF2-40B4-BE49-F238E27FC236}">
-                <a16:creationId xmlns:a16="http://schemas.microsoft.com/office/drawing/2014/main" id="{641CD5FA-C7FA-F4AA-CD65-22361F45C698}"/>
+                <a16:creationId xmlns:a16="http://schemas.microsoft.com/office/drawing/2014/main" id="{FEA306C5-E449-4749-7FC3-82CE5F4164D4}"/>
               </a:ext>
             </a:extLst>
           </p:cNvPr>
@@ -24647,7 +25882,7 @@
           <p:cNvPr id="9" name="grid-v-320">
             <a:extLst>
               <a:ext uri="{FF2B5EF4-FFF2-40B4-BE49-F238E27FC236}">
-                <a16:creationId xmlns:a16="http://schemas.microsoft.com/office/drawing/2014/main" id="{C7F136E5-4A26-AC56-02BB-C1C3D5686065}"/>
+                <a16:creationId xmlns:a16="http://schemas.microsoft.com/office/drawing/2014/main" id="{7220BB88-5772-B250-8279-72D44BCCB1C7}"/>
               </a:ext>
             </a:extLst>
           </p:cNvPr>
@@ -24688,7 +25923,7 @@
           <p:cNvPr id="10" name="grid-v-384">
             <a:extLst>
               <a:ext uri="{FF2B5EF4-FFF2-40B4-BE49-F238E27FC236}">
-                <a16:creationId xmlns:a16="http://schemas.microsoft.com/office/drawing/2014/main" id="{9AB4F9D9-4BF7-E2A5-A360-CB21B542F3D0}"/>
+                <a16:creationId xmlns:a16="http://schemas.microsoft.com/office/drawing/2014/main" id="{F456E44B-921A-E290-8D89-9878FD455B8B}"/>
               </a:ext>
             </a:extLst>
           </p:cNvPr>
@@ -24729,7 +25964,7 @@
           <p:cNvPr id="11" name="grid-v-448">
             <a:extLst>
               <a:ext uri="{FF2B5EF4-FFF2-40B4-BE49-F238E27FC236}">
-                <a16:creationId xmlns:a16="http://schemas.microsoft.com/office/drawing/2014/main" id="{4E7425E1-6036-4520-20EF-844080E6136B}"/>
+                <a16:creationId xmlns:a16="http://schemas.microsoft.com/office/drawing/2014/main" id="{9560C7C3-2777-8F98-65EE-970A6D60F0C6}"/>
               </a:ext>
             </a:extLst>
           </p:cNvPr>
@@ -24770,7 +26005,7 @@
           <p:cNvPr id="12" name="grid-v-512">
             <a:extLst>
               <a:ext uri="{FF2B5EF4-FFF2-40B4-BE49-F238E27FC236}">
-                <a16:creationId xmlns:a16="http://schemas.microsoft.com/office/drawing/2014/main" id="{EACC8D4B-5137-2556-BD28-32229DABAF1B}"/>
+                <a16:creationId xmlns:a16="http://schemas.microsoft.com/office/drawing/2014/main" id="{6C9D99F1-B566-6A12-DCFA-2E4B0034AFFE}"/>
               </a:ext>
             </a:extLst>
           </p:cNvPr>
@@ -24811,7 +26046,7 @@
           <p:cNvPr id="13" name="grid-v-576">
             <a:extLst>
               <a:ext uri="{FF2B5EF4-FFF2-40B4-BE49-F238E27FC236}">
-                <a16:creationId xmlns:a16="http://schemas.microsoft.com/office/drawing/2014/main" id="{7F972E7E-7321-EED3-758B-F602CCF4A3AE}"/>
+                <a16:creationId xmlns:a16="http://schemas.microsoft.com/office/drawing/2014/main" id="{A357E17B-505E-E0A7-5CDB-A0D451DF7D60}"/>
               </a:ext>
             </a:extLst>
           </p:cNvPr>
@@ -24852,7 +26087,7 @@
           <p:cNvPr id="14" name="grid-v-640">
             <a:extLst>
               <a:ext uri="{FF2B5EF4-FFF2-40B4-BE49-F238E27FC236}">
-                <a16:creationId xmlns:a16="http://schemas.microsoft.com/office/drawing/2014/main" id="{E04C9F71-6B00-70E3-407E-7E6FCD4F4238}"/>
+                <a16:creationId xmlns:a16="http://schemas.microsoft.com/office/drawing/2014/main" id="{D99B0BFA-C18F-5B74-7D8C-B24A40D7AE66}"/>
               </a:ext>
             </a:extLst>
           </p:cNvPr>
@@ -24893,7 +26128,7 @@
           <p:cNvPr id="15" name="grid-v-704">
             <a:extLst>
               <a:ext uri="{FF2B5EF4-FFF2-40B4-BE49-F238E27FC236}">
-                <a16:creationId xmlns:a16="http://schemas.microsoft.com/office/drawing/2014/main" id="{D321CE26-EA00-0D5A-60DD-D7DFACD89CB3}"/>
+                <a16:creationId xmlns:a16="http://schemas.microsoft.com/office/drawing/2014/main" id="{AA77DE56-77D3-66CD-7DD1-C11A45A648E2}"/>
               </a:ext>
             </a:extLst>
           </p:cNvPr>
@@ -24934,7 +26169,7 @@
           <p:cNvPr id="16" name="grid-v-768">
             <a:extLst>
               <a:ext uri="{FF2B5EF4-FFF2-40B4-BE49-F238E27FC236}">
-                <a16:creationId xmlns:a16="http://schemas.microsoft.com/office/drawing/2014/main" id="{5095E0CA-E67E-0631-CA67-EE4494B6A00B}"/>
+                <a16:creationId xmlns:a16="http://schemas.microsoft.com/office/drawing/2014/main" id="{9E5A7A3F-8893-B685-35C5-1CD821D79959}"/>
               </a:ext>
             </a:extLst>
           </p:cNvPr>
@@ -24975,7 +26210,7 @@
           <p:cNvPr id="17" name="grid-v-832">
             <a:extLst>
               <a:ext uri="{FF2B5EF4-FFF2-40B4-BE49-F238E27FC236}">
-                <a16:creationId xmlns:a16="http://schemas.microsoft.com/office/drawing/2014/main" id="{8AB51A8D-0396-3ADF-8514-A16500D7F645}"/>
+                <a16:creationId xmlns:a16="http://schemas.microsoft.com/office/drawing/2014/main" id="{057F7E01-BAC9-8E52-BB55-81950EE877D0}"/>
               </a:ext>
             </a:extLst>
           </p:cNvPr>
@@ -25016,7 +26251,7 @@
           <p:cNvPr id="18" name="grid-v-896">
             <a:extLst>
               <a:ext uri="{FF2B5EF4-FFF2-40B4-BE49-F238E27FC236}">
-                <a16:creationId xmlns:a16="http://schemas.microsoft.com/office/drawing/2014/main" id="{3D364294-DDD4-8699-C398-3FCE61A55F7F}"/>
+                <a16:creationId xmlns:a16="http://schemas.microsoft.com/office/drawing/2014/main" id="{49237FA4-4CBD-674C-716F-948F02631CC8}"/>
               </a:ext>
             </a:extLst>
           </p:cNvPr>
@@ -25057,7 +26292,7 @@
           <p:cNvPr id="19" name="grid-v-960">
             <a:extLst>
               <a:ext uri="{FF2B5EF4-FFF2-40B4-BE49-F238E27FC236}">
-                <a16:creationId xmlns:a16="http://schemas.microsoft.com/office/drawing/2014/main" id="{D6CFBAC3-A84D-A7CA-39E6-1E96D88197ED}"/>
+                <a16:creationId xmlns:a16="http://schemas.microsoft.com/office/drawing/2014/main" id="{25E2A00E-B846-C05A-3505-9A14D1C861FB}"/>
               </a:ext>
             </a:extLst>
           </p:cNvPr>
@@ -25098,7 +26333,7 @@
           <p:cNvPr id="20" name="grid-h-0">
             <a:extLst>
               <a:ext uri="{FF2B5EF4-FFF2-40B4-BE49-F238E27FC236}">
-                <a16:creationId xmlns:a16="http://schemas.microsoft.com/office/drawing/2014/main" id="{38419C10-8A7E-A2EC-BA07-73F274E26AB0}"/>
+                <a16:creationId xmlns:a16="http://schemas.microsoft.com/office/drawing/2014/main" id="{390033CC-5196-F325-AE13-FDB0D1A280E8}"/>
               </a:ext>
             </a:extLst>
           </p:cNvPr>
@@ -25139,7 +26374,7 @@
           <p:cNvPr id="21" name="grid-h-64">
             <a:extLst>
               <a:ext uri="{FF2B5EF4-FFF2-40B4-BE49-F238E27FC236}">
-                <a16:creationId xmlns:a16="http://schemas.microsoft.com/office/drawing/2014/main" id="{1FF7BFD0-E5F3-9546-F7AC-1E00F6FA764B}"/>
+                <a16:creationId xmlns:a16="http://schemas.microsoft.com/office/drawing/2014/main" id="{51638600-B0F3-261B-DD5D-AB4EFA520A34}"/>
               </a:ext>
             </a:extLst>
           </p:cNvPr>
@@ -25180,7 +26415,7 @@
           <p:cNvPr id="22" name="grid-h-128">
             <a:extLst>
               <a:ext uri="{FF2B5EF4-FFF2-40B4-BE49-F238E27FC236}">
-                <a16:creationId xmlns:a16="http://schemas.microsoft.com/office/drawing/2014/main" id="{D39ED34E-794A-3D93-39FF-CB0C89066C0C}"/>
+                <a16:creationId xmlns:a16="http://schemas.microsoft.com/office/drawing/2014/main" id="{2F3D61F4-730A-F833-AD96-83647C26D2CE}"/>
               </a:ext>
             </a:extLst>
           </p:cNvPr>
@@ -25221,7 +26456,7 @@
           <p:cNvPr id="23" name="grid-h-192">
             <a:extLst>
               <a:ext uri="{FF2B5EF4-FFF2-40B4-BE49-F238E27FC236}">
-                <a16:creationId xmlns:a16="http://schemas.microsoft.com/office/drawing/2014/main" id="{17B45764-9CCD-5F9E-BD64-CB667BC1DE99}"/>
+                <a16:creationId xmlns:a16="http://schemas.microsoft.com/office/drawing/2014/main" id="{47173AE8-EEAF-6267-A3C5-8597F3F23410}"/>
               </a:ext>
             </a:extLst>
           </p:cNvPr>
@@ -25262,7 +26497,7 @@
           <p:cNvPr id="24" name="grid-h-256">
             <a:extLst>
               <a:ext uri="{FF2B5EF4-FFF2-40B4-BE49-F238E27FC236}">
-                <a16:creationId xmlns:a16="http://schemas.microsoft.com/office/drawing/2014/main" id="{455BFBCD-C18D-B246-1C93-EB921593A4C8}"/>
+                <a16:creationId xmlns:a16="http://schemas.microsoft.com/office/drawing/2014/main" id="{A2AC87CA-017A-AAC8-CCDE-7EE18BF98536}"/>
               </a:ext>
             </a:extLst>
           </p:cNvPr>
@@ -25303,7 +26538,7 @@
           <p:cNvPr id="25" name="grid-h-320">
             <a:extLst>
               <a:ext uri="{FF2B5EF4-FFF2-40B4-BE49-F238E27FC236}">
-                <a16:creationId xmlns:a16="http://schemas.microsoft.com/office/drawing/2014/main" id="{25598014-EE8D-DA4B-CA72-0A29E3F2D515}"/>
+                <a16:creationId xmlns:a16="http://schemas.microsoft.com/office/drawing/2014/main" id="{512F8694-48B4-C17D-B73C-B9E63856E881}"/>
               </a:ext>
             </a:extLst>
           </p:cNvPr>
@@ -25344,7 +26579,7 @@
           <p:cNvPr id="26" name="grid-h-384">
             <a:extLst>
               <a:ext uri="{FF2B5EF4-FFF2-40B4-BE49-F238E27FC236}">
-                <a16:creationId xmlns:a16="http://schemas.microsoft.com/office/drawing/2014/main" id="{CBF4CF99-E007-B6CC-D8DF-9120A0F15377}"/>
+                <a16:creationId xmlns:a16="http://schemas.microsoft.com/office/drawing/2014/main" id="{81A300D7-73EC-0B31-5C9D-6302075FBFFB}"/>
               </a:ext>
             </a:extLst>
           </p:cNvPr>
@@ -25385,7 +26620,7 @@
           <p:cNvPr id="27" name="grid-h-448">
             <a:extLst>
               <a:ext uri="{FF2B5EF4-FFF2-40B4-BE49-F238E27FC236}">
-                <a16:creationId xmlns:a16="http://schemas.microsoft.com/office/drawing/2014/main" id="{BE9A6248-86B3-7A6C-D12E-4977AB8A7C23}"/>
+                <a16:creationId xmlns:a16="http://schemas.microsoft.com/office/drawing/2014/main" id="{D34AD4E1-B4F0-2099-3D8D-FFC87BB18DCA}"/>
               </a:ext>
             </a:extLst>
           </p:cNvPr>
@@ -25426,7 +26661,7 @@
           <p:cNvPr id="28" name="grid-h-512">
             <a:extLst>
               <a:ext uri="{FF2B5EF4-FFF2-40B4-BE49-F238E27FC236}">
-                <a16:creationId xmlns:a16="http://schemas.microsoft.com/office/drawing/2014/main" id="{E7066E96-FE98-9E3A-E4A0-52C67B42EC5C}"/>
+                <a16:creationId xmlns:a16="http://schemas.microsoft.com/office/drawing/2014/main" id="{98B42FDB-4EC4-0AD7-02C6-841838016D94}"/>
               </a:ext>
             </a:extLst>
           </p:cNvPr>
@@ -25467,7 +26702,7 @@
           <p:cNvPr id="29" name="page-num">
             <a:extLst>
               <a:ext uri="{FF2B5EF4-FFF2-40B4-BE49-F238E27FC236}">
-                <a16:creationId xmlns:a16="http://schemas.microsoft.com/office/drawing/2014/main" id="{2F6A5579-C292-917A-A7A8-0E6F4EFBE3E9}"/>
+                <a16:creationId xmlns:a16="http://schemas.microsoft.com/office/drawing/2014/main" id="{49567506-3DC9-1F15-0EE2-EE34646E5B85}"/>
               </a:ext>
             </a:extLst>
           </p:cNvPr>
@@ -25513,7 +26748,7 @@
           <p:cNvPr id="30" name="section-label">
             <a:extLst>
               <a:ext uri="{FF2B5EF4-FFF2-40B4-BE49-F238E27FC236}">
-                <a16:creationId xmlns:a16="http://schemas.microsoft.com/office/drawing/2014/main" id="{3FD843EF-583A-5B4C-CB7B-8EC641F2F5A4}"/>
+                <a16:creationId xmlns:a16="http://schemas.microsoft.com/office/drawing/2014/main" id="{AFB400D8-0905-05B0-551A-147942C2212A}"/>
               </a:ext>
             </a:extLst>
           </p:cNvPr>
@@ -25559,7 +26794,7 @@
           <p:cNvPr id="31" name="title">
             <a:extLst>
               <a:ext uri="{FF2B5EF4-FFF2-40B4-BE49-F238E27FC236}">
-                <a16:creationId xmlns:a16="http://schemas.microsoft.com/office/drawing/2014/main" id="{171ED3E3-496B-B786-802D-AD770308039A}"/>
+                <a16:creationId xmlns:a16="http://schemas.microsoft.com/office/drawing/2014/main" id="{ECFCE90F-E918-96D7-8EA8-93A2B67BD581}"/>
               </a:ext>
             </a:extLst>
           </p:cNvPr>
@@ -25568,7 +26803,7 @@
         </p:nvSpPr>
         <p:spPr>
           <a:xfrm>
-            <a:off x="685800" y="685800"/>
+            <a:off x="685800" y="635000"/>
             <a:ext cx="9906000" cy="276999"/>
           </a:xfrm>
           <a:prstGeom prst="rect">
@@ -25583,7 +26818,7 @@
           <a:lstStyle/>
           <a:p>
             <a:r>
-              <a:rPr lang="en-US" altLang="zh-CN" sz="2700" b="1">
+              <a:rPr lang="en-US" altLang="zh-CN" sz="2800" b="1">
                 <a:solidFill>
                   <a:srgbClr val="FFFFFF"/>
                 </a:solidFill>
@@ -25591,7 +26826,7 @@
               </a:rPr>
               <a:t>Submitted FYP evidence surface</a:t>
             </a:r>
-            <a:endParaRPr lang="zh-CN" altLang="en-US" sz="2700" b="1">
+            <a:endParaRPr lang="zh-CN" altLang="en-US" sz="2800" b="1">
               <a:solidFill>
                 <a:srgbClr val="FFFFFF"/>
               </a:solidFill>
@@ -25605,7 +26840,7 @@
           <p:cNvPr id="32" name="subtitle">
             <a:extLst>
               <a:ext uri="{FF2B5EF4-FFF2-40B4-BE49-F238E27FC236}">
-                <a16:creationId xmlns:a16="http://schemas.microsoft.com/office/drawing/2014/main" id="{62A63DBA-6C97-EF10-D1E0-A62F1C474FF4}"/>
+                <a16:creationId xmlns:a16="http://schemas.microsoft.com/office/drawing/2014/main" id="{618AF016-16B9-FC93-0D8E-19FDE8F9A6DD}"/>
               </a:ext>
             </a:extLst>
           </p:cNvPr>
@@ -25614,7 +26849,7 @@
         </p:nvSpPr>
         <p:spPr>
           <a:xfrm>
-            <a:off x="736600" y="1295400"/>
+            <a:off x="736600" y="1219200"/>
             <a:ext cx="9652000" cy="276999"/>
           </a:xfrm>
           <a:prstGeom prst="rect">
@@ -25635,7 +26870,7 @@
                 </a:solidFill>
                 <a:latin typeface="Aptos" panose="020B0004020202020204" pitchFamily="34" charset="0"/>
               </a:rPr>
-              <a:t>These are the headline numbers in the submitted dissertation snapshot.</a:t>
+              <a:t>The headline results are useful because every number carries its denominator and boundary.</a:t>
             </a:r>
             <a:endParaRPr lang="zh-CN" altLang="en-US" sz="980">
               <a:solidFill>
@@ -25651,7 +26886,7 @@
           <p:cNvPr id="33" name="metric-0">
             <a:extLst>
               <a:ext uri="{FF2B5EF4-FFF2-40B4-BE49-F238E27FC236}">
-                <a16:creationId xmlns:a16="http://schemas.microsoft.com/office/drawing/2014/main" id="{1696DCA2-FA0E-1589-41D5-EC2FD5BE059B}"/>
+                <a16:creationId xmlns:a16="http://schemas.microsoft.com/office/drawing/2014/main" id="{4D628684-1396-44F5-F0AB-98F7AA68D9C7}"/>
               </a:ext>
             </a:extLst>
           </p:cNvPr>
@@ -25660,8 +26895,8 @@
         </p:nvSpPr>
         <p:spPr>
           <a:xfrm>
-            <a:off x="812800" y="2006600"/>
-            <a:ext cx="3149600" cy="1625600"/>
+            <a:off x="685800" y="1854200"/>
+            <a:ext cx="1981200" cy="2082800"/>
           </a:xfrm>
           <a:prstGeom prst="rect">
             <a:avLst/>
@@ -25705,7 +26940,7 @@
           <p:cNvPr id="34" name="metric-band-0">
             <a:extLst>
               <a:ext uri="{FF2B5EF4-FFF2-40B4-BE49-F238E27FC236}">
-                <a16:creationId xmlns:a16="http://schemas.microsoft.com/office/drawing/2014/main" id="{ED00C02C-9A86-BCD3-F76F-AAE442915E3C}"/>
+                <a16:creationId xmlns:a16="http://schemas.microsoft.com/office/drawing/2014/main" id="{DD2F4EF6-9592-54C2-E0D7-A2E2BF9AC187}"/>
               </a:ext>
             </a:extLst>
           </p:cNvPr>
@@ -25714,8 +26949,8 @@
         </p:nvSpPr>
         <p:spPr>
           <a:xfrm>
-            <a:off x="812800" y="2006600"/>
-            <a:ext cx="76200" cy="1625600"/>
+            <a:off x="685800" y="1854200"/>
+            <a:ext cx="1981200" cy="88900"/>
           </a:xfrm>
           <a:prstGeom prst="rect">
             <a:avLst/>
@@ -25759,7 +26994,7 @@
           <p:cNvPr id="35" name="metric-label-0">
             <a:extLst>
               <a:ext uri="{FF2B5EF4-FFF2-40B4-BE49-F238E27FC236}">
-                <a16:creationId xmlns:a16="http://schemas.microsoft.com/office/drawing/2014/main" id="{055F61BF-4A03-1A2A-9F95-CD606B1753B8}"/>
+                <a16:creationId xmlns:a16="http://schemas.microsoft.com/office/drawing/2014/main" id="{C4A78281-21E5-09E8-97E1-392B121D2572}"/>
               </a:ext>
             </a:extLst>
           </p:cNvPr>
@@ -25768,8 +27003,8 @@
         </p:nvSpPr>
         <p:spPr>
           <a:xfrm>
-            <a:off x="1117600" y="2311400"/>
-            <a:ext cx="2286000" cy="276999"/>
+            <a:off x="914400" y="2235200"/>
+            <a:ext cx="1498600" cy="276999"/>
           </a:xfrm>
           <a:prstGeom prst="rect">
             <a:avLst/>
@@ -25789,7 +27024,7 @@
                 </a:solidFill>
                 <a:latin typeface="Aptos" panose="020B0004020202020204" pitchFamily="34" charset="0"/>
               </a:rPr>
-              <a:t>CodeMarkBench</a:t>
+              <a:t>Benchmark</a:t>
             </a:r>
             <a:endParaRPr lang="zh-CN" altLang="en-US" sz="800" b="1">
               <a:solidFill>
@@ -25805,7 +27040,7 @@
           <p:cNvPr id="36" name="metric-value-0">
             <a:extLst>
               <a:ext uri="{FF2B5EF4-FFF2-40B4-BE49-F238E27FC236}">
-                <a16:creationId xmlns:a16="http://schemas.microsoft.com/office/drawing/2014/main" id="{640FCDF9-1A31-FAEB-14E5-76F0C5CEA6B0}"/>
+                <a16:creationId xmlns:a16="http://schemas.microsoft.com/office/drawing/2014/main" id="{5455325B-3558-711D-71D8-91058FF53B61}"/>
               </a:ext>
             </a:extLst>
           </p:cNvPr>
@@ -25814,8 +27049,8 @@
         </p:nvSpPr>
         <p:spPr>
           <a:xfrm>
-            <a:off x="1117600" y="2794000"/>
-            <a:ext cx="2413000" cy="276999"/>
+            <a:off x="914400" y="2794000"/>
+            <a:ext cx="1625600" cy="276999"/>
           </a:xfrm>
           <a:prstGeom prst="rect">
             <a:avLst/>
@@ -25829,15 +27064,15 @@
           <a:lstStyle/>
           <a:p>
             <a:r>
-              <a:rPr lang="en-US" altLang="zh-CN" sz="2200" b="1">
+              <a:rPr lang="en-US" altLang="zh-CN" sz="1950" b="1">
                 <a:solidFill>
                   <a:srgbClr val="FFFFFF"/>
                 </a:solidFill>
                 <a:latin typeface="Aptos" panose="020B0004020202020204" pitchFamily="34" charset="0"/>
               </a:rPr>
-              <a:t>140 / 140</a:t>
-            </a:r>
-            <a:endParaRPr lang="zh-CN" altLang="en-US" sz="2200" b="1">
+              <a:t>140/140</a:t>
+            </a:r>
+            <a:endParaRPr lang="zh-CN" altLang="en-US" sz="1950" b="1">
               <a:solidFill>
                 <a:srgbClr val="FFFFFF"/>
               </a:solidFill>
@@ -25851,7 +27086,7 @@
           <p:cNvPr id="37" name="metric-note-0">
             <a:extLst>
               <a:ext uri="{FF2B5EF4-FFF2-40B4-BE49-F238E27FC236}">
-                <a16:creationId xmlns:a16="http://schemas.microsoft.com/office/drawing/2014/main" id="{4946CE1F-D46D-3C74-5D1C-BAE7453A2D1F}"/>
+                <a16:creationId xmlns:a16="http://schemas.microsoft.com/office/drawing/2014/main" id="{3D62B0EE-4103-A521-EEA8-D9DCB40A108F}"/>
               </a:ext>
             </a:extLst>
           </p:cNvPr>
@@ -25860,8 +27095,8 @@
         </p:nvSpPr>
         <p:spPr>
           <a:xfrm>
-            <a:off x="1117600" y="3276600"/>
-            <a:ext cx="2413000" cy="276999"/>
+            <a:off x="914400" y="3429000"/>
+            <a:ext cx="1498600" cy="276999"/>
           </a:xfrm>
           <a:prstGeom prst="rect">
             <a:avLst/>
@@ -25881,7 +27116,7 @@
                 </a:solidFill>
                 <a:latin typeface="Aptos" panose="020B0004020202020204" pitchFamily="34" charset="0"/>
               </a:rPr>
-              <a:t>canonical benchmark runs</a:t>
+              <a:t>canonical runs</a:t>
             </a:r>
             <a:endParaRPr lang="zh-CN" altLang="en-US" sz="720">
               <a:solidFill>
@@ -25897,7 +27132,7 @@
           <p:cNvPr id="38" name="metric-1">
             <a:extLst>
               <a:ext uri="{FF2B5EF4-FFF2-40B4-BE49-F238E27FC236}">
-                <a16:creationId xmlns:a16="http://schemas.microsoft.com/office/drawing/2014/main" id="{C87AFB29-3FCC-D4BA-2DEC-2A48D8EE6063}"/>
+                <a16:creationId xmlns:a16="http://schemas.microsoft.com/office/drawing/2014/main" id="{8E2B163B-7491-F246-9828-88DCBBB6C114}"/>
               </a:ext>
             </a:extLst>
           </p:cNvPr>
@@ -25906,8 +27141,8 @@
         </p:nvSpPr>
         <p:spPr>
           <a:xfrm>
-            <a:off x="4521200" y="2006600"/>
-            <a:ext cx="3149600" cy="1625600"/>
+            <a:off x="2921000" y="1854200"/>
+            <a:ext cx="1981200" cy="2082800"/>
           </a:xfrm>
           <a:prstGeom prst="rect">
             <a:avLst/>
@@ -25951,7 +27186,7 @@
           <p:cNvPr id="39" name="metric-band-1">
             <a:extLst>
               <a:ext uri="{FF2B5EF4-FFF2-40B4-BE49-F238E27FC236}">
-                <a16:creationId xmlns:a16="http://schemas.microsoft.com/office/drawing/2014/main" id="{BC9CB624-ED75-6F5F-098C-4DC32202F163}"/>
+                <a16:creationId xmlns:a16="http://schemas.microsoft.com/office/drawing/2014/main" id="{F34C2B1C-48E1-3314-24B1-65CC359E42FD}"/>
               </a:ext>
             </a:extLst>
           </p:cNvPr>
@@ -25960,8 +27195,8 @@
         </p:nvSpPr>
         <p:spPr>
           <a:xfrm>
-            <a:off x="4521200" y="2006600"/>
-            <a:ext cx="76200" cy="1625600"/>
+            <a:off x="2921000" y="1854200"/>
+            <a:ext cx="1981200" cy="88900"/>
           </a:xfrm>
           <a:prstGeom prst="rect">
             <a:avLst/>
@@ -26005,7 +27240,7 @@
           <p:cNvPr id="40" name="metric-label-1">
             <a:extLst>
               <a:ext uri="{FF2B5EF4-FFF2-40B4-BE49-F238E27FC236}">
-                <a16:creationId xmlns:a16="http://schemas.microsoft.com/office/drawing/2014/main" id="{B44A2223-824E-E368-9A87-AB579DE2B50C}"/>
+                <a16:creationId xmlns:a16="http://schemas.microsoft.com/office/drawing/2014/main" id="{7AA24871-758D-9D24-DAE2-4944E247F97E}"/>
               </a:ext>
             </a:extLst>
           </p:cNvPr>
@@ -26014,8 +27249,8 @@
         </p:nvSpPr>
         <p:spPr>
           <a:xfrm>
-            <a:off x="4826000" y="2311400"/>
-            <a:ext cx="2286000" cy="276999"/>
+            <a:off x="3149600" y="2235200"/>
+            <a:ext cx="1498600" cy="276999"/>
           </a:xfrm>
           <a:prstGeom prst="rect">
             <a:avLst/>
@@ -26035,7 +27270,7 @@
                 </a:solidFill>
                 <a:latin typeface="Aptos" panose="020B0004020202020204" pitchFamily="34" charset="0"/>
               </a:rPr>
-              <a:t>SemCodebook</a:t>
+              <a:t>Provenance</a:t>
             </a:r>
             <a:endParaRPr lang="zh-CN" altLang="en-US" sz="800" b="1">
               <a:solidFill>
@@ -26051,7 +27286,7 @@
           <p:cNvPr id="41" name="metric-value-1">
             <a:extLst>
               <a:ext uri="{FF2B5EF4-FFF2-40B4-BE49-F238E27FC236}">
-                <a16:creationId xmlns:a16="http://schemas.microsoft.com/office/drawing/2014/main" id="{D1CE6254-F34C-D8B7-0B32-D8ECB5E506F3}"/>
+                <a16:creationId xmlns:a16="http://schemas.microsoft.com/office/drawing/2014/main" id="{4E299BA1-154C-DDD2-6051-CB4F83D7A39F}"/>
               </a:ext>
             </a:extLst>
           </p:cNvPr>
@@ -26060,8 +27295,8 @@
         </p:nvSpPr>
         <p:spPr>
           <a:xfrm>
-            <a:off x="4826000" y="2794000"/>
-            <a:ext cx="2413000" cy="276999"/>
+            <a:off x="3149600" y="2794000"/>
+            <a:ext cx="1625600" cy="276999"/>
           </a:xfrm>
           <a:prstGeom prst="rect">
             <a:avLst/>
@@ -26075,15 +27310,15 @@
           <a:lstStyle/>
           <a:p>
             <a:r>
-              <a:rPr lang="en-US" altLang="zh-CN" sz="2200" b="1">
+              <a:rPr lang="en-US" altLang="zh-CN" sz="1950" b="1">
                 <a:solidFill>
                   <a:srgbClr val="FFFFFF"/>
                 </a:solidFill>
                 <a:latin typeface="Aptos" panose="020B0004020202020204" pitchFamily="34" charset="0"/>
               </a:rPr>
-              <a:t>23,342 / 24,000</a:t>
-            </a:r>
-            <a:endParaRPr lang="zh-CN" altLang="en-US" sz="2200" b="1">
+              <a:t>23,342/24,000</a:t>
+            </a:r>
+            <a:endParaRPr lang="zh-CN" altLang="en-US" sz="1950" b="1">
               <a:solidFill>
                 <a:srgbClr val="FFFFFF"/>
               </a:solidFill>
@@ -26097,7 +27332,7 @@
           <p:cNvPr id="42" name="metric-note-1">
             <a:extLst>
               <a:ext uri="{FF2B5EF4-FFF2-40B4-BE49-F238E27FC236}">
-                <a16:creationId xmlns:a16="http://schemas.microsoft.com/office/drawing/2014/main" id="{70D72FE8-E827-3FEF-F43F-5E32D41B1E65}"/>
+                <a16:creationId xmlns:a16="http://schemas.microsoft.com/office/drawing/2014/main" id="{5F7B7918-4823-DEB1-83DB-B897735688FC}"/>
               </a:ext>
             </a:extLst>
           </p:cNvPr>
@@ -26106,8 +27341,8 @@
         </p:nvSpPr>
         <p:spPr>
           <a:xfrm>
-            <a:off x="4826000" y="3276600"/>
-            <a:ext cx="2413000" cy="276999"/>
+            <a:off x="3149600" y="3429000"/>
+            <a:ext cx="1498600" cy="276999"/>
           </a:xfrm>
           <a:prstGeom prst="rect">
             <a:avLst/>
@@ -26127,7 +27362,7 @@
                 </a:solidFill>
                 <a:latin typeface="Aptos" panose="020B0004020202020204" pitchFamily="34" charset="0"/>
               </a:rPr>
-              <a:t>recoveries; 0/48,000 controls</a:t>
+              <a:t>0/48,000 controls</a:t>
             </a:r>
             <a:endParaRPr lang="zh-CN" altLang="en-US" sz="720">
               <a:solidFill>
@@ -26143,7 +27378,7 @@
           <p:cNvPr id="43" name="metric-2">
             <a:extLst>
               <a:ext uri="{FF2B5EF4-FFF2-40B4-BE49-F238E27FC236}">
-                <a16:creationId xmlns:a16="http://schemas.microsoft.com/office/drawing/2014/main" id="{A3760775-A909-0691-41D2-D084C659F823}"/>
+                <a16:creationId xmlns:a16="http://schemas.microsoft.com/office/drawing/2014/main" id="{7A0074D8-74C7-4593-1534-05773DD7E61D}"/>
               </a:ext>
             </a:extLst>
           </p:cNvPr>
@@ -26152,8 +27387,8 @@
         </p:nvSpPr>
         <p:spPr>
           <a:xfrm>
-            <a:off x="8229600" y="2006600"/>
-            <a:ext cx="3149600" cy="1625600"/>
+            <a:off x="5156200" y="1854200"/>
+            <a:ext cx="1981200" cy="2082800"/>
           </a:xfrm>
           <a:prstGeom prst="rect">
             <a:avLst/>
@@ -26197,7 +27432,7 @@
           <p:cNvPr id="44" name="metric-band-2">
             <a:extLst>
               <a:ext uri="{FF2B5EF4-FFF2-40B4-BE49-F238E27FC236}">
-                <a16:creationId xmlns:a16="http://schemas.microsoft.com/office/drawing/2014/main" id="{D5C438DE-6EC8-90AA-FDA9-2DF14DB4B478}"/>
+                <a16:creationId xmlns:a16="http://schemas.microsoft.com/office/drawing/2014/main" id="{8684979F-EEB5-1871-1589-D961919C09B5}"/>
               </a:ext>
             </a:extLst>
           </p:cNvPr>
@@ -26206,8 +27441,254 @@
         </p:nvSpPr>
         <p:spPr>
           <a:xfrm>
-            <a:off x="8229600" y="2006600"/>
-            <a:ext cx="76200" cy="1625600"/>
+            <a:off x="5156200" y="1854200"/>
+            <a:ext cx="1981200" cy="88900"/>
+          </a:xfrm>
+          <a:prstGeom prst="rect">
+            <a:avLst/>
+          </a:prstGeom>
+          <a:solidFill>
+            <a:srgbClr val="784CD2"/>
+          </a:solidFill>
+          <a:ln w="12700">
+            <a:solidFill>
+              <a:srgbClr val="784CD2"/>
+            </a:solidFill>
+          </a:ln>
+        </p:spPr>
+        <p:style>
+          <a:lnRef idx="2">
+            <a:schemeClr val="accent1">
+              <a:shade val="15000"/>
+            </a:schemeClr>
+          </a:lnRef>
+          <a:fillRef idx="1">
+            <a:schemeClr val="accent1"/>
+          </a:fillRef>
+          <a:effectRef idx="0">
+            <a:schemeClr val="accent1"/>
+          </a:effectRef>
+          <a:fontRef idx="minor">
+            <a:schemeClr val="lt1"/>
+          </a:fontRef>
+        </p:style>
+        <p:txBody>
+          <a:bodyPr rtlCol="0" anchor="ctr"/>
+          <a:lstStyle/>
+          <a:p>
+            <a:pPr algn="ctr"/>
+            <a:endParaRPr lang="zh-CN" altLang="en-US"/>
+          </a:p>
+        </p:txBody>
+      </p:sp>
+      <p:sp>
+        <p:nvSpPr>
+          <p:cNvPr id="45" name="metric-label-2">
+            <a:extLst>
+              <a:ext uri="{FF2B5EF4-FFF2-40B4-BE49-F238E27FC236}">
+                <a16:creationId xmlns:a16="http://schemas.microsoft.com/office/drawing/2014/main" id="{70958CA8-0192-313D-14CE-E5956D08A8FC}"/>
+              </a:ext>
+            </a:extLst>
+          </p:cNvPr>
+          <p:cNvSpPr txBox="1"/>
+          <p:nvPr/>
+        </p:nvSpPr>
+        <p:spPr>
+          <a:xfrm>
+            <a:off x="5384800" y="2235200"/>
+            <a:ext cx="1498600" cy="276999"/>
+          </a:xfrm>
+          <a:prstGeom prst="rect">
+            <a:avLst/>
+          </a:prstGeom>
+          <a:noFill/>
+        </p:spPr>
+        <p:txBody>
+          <a:bodyPr vert="horz" wrap="square" lIns="0" tIns="0" rIns="0" bIns="0" rtlCol="0">
+            <a:noAutofit/>
+          </a:bodyPr>
+          <a:lstStyle/>
+          <a:p>
+            <a:r>
+              <a:rPr lang="en-US" altLang="zh-CN" sz="800" b="1">
+                <a:solidFill>
+                  <a:srgbClr val="BCD6F4"/>
+                </a:solidFill>
+                <a:latin typeface="Aptos" panose="020B0004020202020204" pitchFamily="34" charset="0"/>
+              </a:rPr>
+              <a:t>Null audit</a:t>
+            </a:r>
+            <a:endParaRPr lang="zh-CN" altLang="en-US" sz="800" b="1">
+              <a:solidFill>
+                <a:srgbClr val="BCD6F4"/>
+              </a:solidFill>
+              <a:latin typeface="Aptos" panose="020B0004020202020204" pitchFamily="34" charset="0"/>
+            </a:endParaRPr>
+          </a:p>
+        </p:txBody>
+      </p:sp>
+      <p:sp>
+        <p:nvSpPr>
+          <p:cNvPr id="46" name="metric-value-2">
+            <a:extLst>
+              <a:ext uri="{FF2B5EF4-FFF2-40B4-BE49-F238E27FC236}">
+                <a16:creationId xmlns:a16="http://schemas.microsoft.com/office/drawing/2014/main" id="{3FC87910-29F7-80CA-BB91-924647207A9B}"/>
+              </a:ext>
+            </a:extLst>
+          </p:cNvPr>
+          <p:cNvSpPr txBox="1"/>
+          <p:nvPr/>
+        </p:nvSpPr>
+        <p:spPr>
+          <a:xfrm>
+            <a:off x="5384800" y="2794000"/>
+            <a:ext cx="1625600" cy="276999"/>
+          </a:xfrm>
+          <a:prstGeom prst="rect">
+            <a:avLst/>
+          </a:prstGeom>
+          <a:noFill/>
+        </p:spPr>
+        <p:txBody>
+          <a:bodyPr vert="horz" wrap="square" lIns="0" tIns="0" rIns="0" bIns="0" rtlCol="0">
+            <a:noAutofit/>
+          </a:bodyPr>
+          <a:lstStyle/>
+          <a:p>
+            <a:r>
+              <a:rPr lang="en-US" altLang="zh-CN" sz="1950" b="1">
+                <a:solidFill>
+                  <a:srgbClr val="FFFFFF"/>
+                </a:solidFill>
+                <a:latin typeface="Aptos" panose="020B0004020202020204" pitchFamily="34" charset="0"/>
+              </a:rPr>
+              <a:t>6/300</a:t>
+            </a:r>
+            <a:endParaRPr lang="zh-CN" altLang="en-US" sz="1950" b="1">
+              <a:solidFill>
+                <a:srgbClr val="FFFFFF"/>
+              </a:solidFill>
+              <a:latin typeface="Aptos" panose="020B0004020202020204" pitchFamily="34" charset="0"/>
+            </a:endParaRPr>
+          </a:p>
+        </p:txBody>
+      </p:sp>
+      <p:sp>
+        <p:nvSpPr>
+          <p:cNvPr id="47" name="metric-note-2">
+            <a:extLst>
+              <a:ext uri="{FF2B5EF4-FFF2-40B4-BE49-F238E27FC236}">
+                <a16:creationId xmlns:a16="http://schemas.microsoft.com/office/drawing/2014/main" id="{6E85415D-1832-49C8-283D-6D2B1C3EFAFC}"/>
+              </a:ext>
+            </a:extLst>
+          </p:cNvPr>
+          <p:cNvSpPr txBox="1"/>
+          <p:nvPr/>
+        </p:nvSpPr>
+        <p:spPr>
+          <a:xfrm>
+            <a:off x="5384800" y="3429000"/>
+            <a:ext cx="1498600" cy="276999"/>
+          </a:xfrm>
+          <a:prstGeom prst="rect">
+            <a:avLst/>
+          </a:prstGeom>
+          <a:noFill/>
+        </p:spPr>
+        <p:txBody>
+          <a:bodyPr vert="horz" wrap="square" lIns="0" tIns="0" rIns="0" bIns="0" rtlCol="0">
+            <a:noAutofit/>
+          </a:bodyPr>
+          <a:lstStyle/>
+          <a:p>
+            <a:r>
+              <a:rPr lang="en-US" altLang="zh-CN" sz="720">
+                <a:solidFill>
+                  <a:srgbClr val="C4DAF6"/>
+                </a:solidFill>
+                <a:latin typeface="Aptos" panose="020B0004020202020204" pitchFamily="34" charset="0"/>
+              </a:rPr>
+              <a:t>sparse live signal</a:t>
+            </a:r>
+            <a:endParaRPr lang="zh-CN" altLang="en-US" sz="720">
+              <a:solidFill>
+                <a:srgbClr val="C4DAF6"/>
+              </a:solidFill>
+              <a:latin typeface="Aptos" panose="020B0004020202020204" pitchFamily="34" charset="0"/>
+            </a:endParaRPr>
+          </a:p>
+        </p:txBody>
+      </p:sp>
+      <p:sp>
+        <p:nvSpPr>
+          <p:cNvPr id="48" name="metric-3">
+            <a:extLst>
+              <a:ext uri="{FF2B5EF4-FFF2-40B4-BE49-F238E27FC236}">
+                <a16:creationId xmlns:a16="http://schemas.microsoft.com/office/drawing/2014/main" id="{A383EF44-4D79-E6C6-D2A8-2BC3AA5F9831}"/>
+              </a:ext>
+            </a:extLst>
+          </p:cNvPr>
+          <p:cNvSpPr/>
+          <p:nvPr/>
+        </p:nvSpPr>
+        <p:spPr>
+          <a:xfrm>
+            <a:off x="7391400" y="1854200"/>
+            <a:ext cx="1981200" cy="2082800"/>
+          </a:xfrm>
+          <a:prstGeom prst="rect">
+            <a:avLst/>
+          </a:prstGeom>
+          <a:solidFill>
+            <a:srgbClr val="0D2A57"/>
+          </a:solidFill>
+          <a:ln w="12700">
+            <a:solidFill>
+              <a:srgbClr val="4782C4"/>
+            </a:solidFill>
+          </a:ln>
+        </p:spPr>
+        <p:style>
+          <a:lnRef idx="2">
+            <a:schemeClr val="accent1">
+              <a:shade val="15000"/>
+            </a:schemeClr>
+          </a:lnRef>
+          <a:fillRef idx="1">
+            <a:schemeClr val="accent1"/>
+          </a:fillRef>
+          <a:effectRef idx="0">
+            <a:schemeClr val="accent1"/>
+          </a:effectRef>
+          <a:fontRef idx="minor">
+            <a:schemeClr val="lt1"/>
+          </a:fontRef>
+        </p:style>
+        <p:txBody>
+          <a:bodyPr rtlCol="0" anchor="ctr"/>
+          <a:lstStyle/>
+          <a:p>
+            <a:pPr algn="ctr"/>
+            <a:endParaRPr lang="zh-CN" altLang="en-US"/>
+          </a:p>
+        </p:txBody>
+      </p:sp>
+      <p:sp>
+        <p:nvSpPr>
+          <p:cNvPr id="49" name="metric-band-3">
+            <a:extLst>
+              <a:ext uri="{FF2B5EF4-FFF2-40B4-BE49-F238E27FC236}">
+                <a16:creationId xmlns:a16="http://schemas.microsoft.com/office/drawing/2014/main" id="{C05A60A5-1B98-8B61-D498-D2700F3CB69F}"/>
+              </a:ext>
+            </a:extLst>
+          </p:cNvPr>
+          <p:cNvSpPr/>
+          <p:nvPr/>
+        </p:nvSpPr>
+        <p:spPr>
+          <a:xfrm>
+            <a:off x="7391400" y="1854200"/>
+            <a:ext cx="1981200" cy="88900"/>
           </a:xfrm>
           <a:prstGeom prst="rect">
             <a:avLst/>
@@ -26248,10 +27729,10 @@
       </p:sp>
       <p:sp>
         <p:nvSpPr>
-          <p:cNvPr id="45" name="metric-label-2">
-            <a:extLst>
-              <a:ext uri="{FF2B5EF4-FFF2-40B4-BE49-F238E27FC236}">
-                <a16:creationId xmlns:a16="http://schemas.microsoft.com/office/drawing/2014/main" id="{6D4A2A7E-B780-FCB3-3DAF-FCC64FA120AA}"/>
+          <p:cNvPr id="50" name="metric-label-3">
+            <a:extLst>
+              <a:ext uri="{FF2B5EF4-FFF2-40B4-BE49-F238E27FC236}">
+                <a16:creationId xmlns:a16="http://schemas.microsoft.com/office/drawing/2014/main" id="{8984F5BE-7D1F-BCE6-34D3-5F40C2E97E2D}"/>
               </a:ext>
             </a:extLst>
           </p:cNvPr>
@@ -26260,8 +27741,8 @@
         </p:nvSpPr>
         <p:spPr>
           <a:xfrm>
-            <a:off x="8534400" y="2311400"/>
-            <a:ext cx="2286000" cy="276999"/>
+            <a:off x="7620000" y="2235200"/>
+            <a:ext cx="1498600" cy="276999"/>
           </a:xfrm>
           <a:prstGeom prst="rect">
             <a:avLst/>
@@ -26281,7 +27762,7 @@
                 </a:solidFill>
                 <a:latin typeface="Aptos" panose="020B0004020202020204" pitchFamily="34" charset="0"/>
               </a:rPr>
-              <a:t>ProbeTrace</a:t>
+              <a:t>Attribution</a:t>
             </a:r>
             <a:endParaRPr lang="zh-CN" altLang="en-US" sz="800" b="1">
               <a:solidFill>
@@ -26294,10 +27775,10 @@
       </p:sp>
       <p:sp>
         <p:nvSpPr>
-          <p:cNvPr id="46" name="metric-value-2">
-            <a:extLst>
-              <a:ext uri="{FF2B5EF4-FFF2-40B4-BE49-F238E27FC236}">
-                <a16:creationId xmlns:a16="http://schemas.microsoft.com/office/drawing/2014/main" id="{D78F5508-E364-CE0F-35D6-CC33E5535C59}"/>
+          <p:cNvPr id="51" name="metric-value-3">
+            <a:extLst>
+              <a:ext uri="{FF2B5EF4-FFF2-40B4-BE49-F238E27FC236}">
+                <a16:creationId xmlns:a16="http://schemas.microsoft.com/office/drawing/2014/main" id="{F494D3CE-619F-AE78-9681-EE0614D5DBA8}"/>
               </a:ext>
             </a:extLst>
           </p:cNvPr>
@@ -26306,8 +27787,8 @@
         </p:nvSpPr>
         <p:spPr>
           <a:xfrm>
-            <a:off x="8534400" y="2794000"/>
-            <a:ext cx="2413000" cy="276999"/>
+            <a:off x="7620000" y="2794000"/>
+            <a:ext cx="1625600" cy="276999"/>
           </a:xfrm>
           <a:prstGeom prst="rect">
             <a:avLst/>
@@ -26321,15 +27802,15 @@
           <a:lstStyle/>
           <a:p>
             <a:r>
-              <a:rPr lang="en-US" altLang="zh-CN" sz="2200" b="1">
+              <a:rPr lang="en-US" altLang="zh-CN" sz="1950" b="1">
                 <a:solidFill>
                   <a:srgbClr val="FFFFFF"/>
                 </a:solidFill>
                 <a:latin typeface="Aptos" panose="020B0004020202020204" pitchFamily="34" charset="0"/>
               </a:rPr>
-              <a:t>300 / 300</a:t>
-            </a:r>
-            <a:endParaRPr lang="zh-CN" altLang="en-US" sz="2200" b="1">
+              <a:t>300/300</a:t>
+            </a:r>
+            <a:endParaRPr lang="zh-CN" altLang="en-US" sz="1950" b="1">
               <a:solidFill>
                 <a:srgbClr val="FFFFFF"/>
               </a:solidFill>
@@ -26340,10 +27821,10 @@
       </p:sp>
       <p:sp>
         <p:nvSpPr>
-          <p:cNvPr id="47" name="metric-note-2">
-            <a:extLst>
-              <a:ext uri="{FF2B5EF4-FFF2-40B4-BE49-F238E27FC236}">
-                <a16:creationId xmlns:a16="http://schemas.microsoft.com/office/drawing/2014/main" id="{C0D880B5-E993-DFBC-D92C-5825B9AD2789}"/>
+          <p:cNvPr id="52" name="metric-note-3">
+            <a:extLst>
+              <a:ext uri="{FF2B5EF4-FFF2-40B4-BE49-F238E27FC236}">
+                <a16:creationId xmlns:a16="http://schemas.microsoft.com/office/drawing/2014/main" id="{CADD6CFC-C52C-731E-296A-4AAE2AA32A7B}"/>
               </a:ext>
             </a:extLst>
           </p:cNvPr>
@@ -26352,8 +27833,8 @@
         </p:nvSpPr>
         <p:spPr>
           <a:xfrm>
-            <a:off x="8534400" y="3276600"/>
-            <a:ext cx="2413000" cy="276999"/>
+            <a:off x="7620000" y="3429000"/>
+            <a:ext cx="1498600" cy="276999"/>
           </a:xfrm>
           <a:prstGeom prst="rect">
             <a:avLst/>
@@ -26373,7 +27854,7 @@
                 </a:solidFill>
                 <a:latin typeface="Aptos" panose="020B0004020202020204" pitchFamily="34" charset="0"/>
               </a:rPr>
-              <a:t>scoped decisions; 0/1,200 controls</a:t>
+              <a:t>0/1,200 controls</a:t>
             </a:r>
             <a:endParaRPr lang="zh-CN" altLang="en-US" sz="720">
               <a:solidFill>
@@ -26386,10 +27867,10 @@
       </p:sp>
       <p:sp>
         <p:nvSpPr>
-          <p:cNvPr id="48" name="fig-frame">
-            <a:extLst>
-              <a:ext uri="{FF2B5EF4-FFF2-40B4-BE49-F238E27FC236}">
-                <a16:creationId xmlns:a16="http://schemas.microsoft.com/office/drawing/2014/main" id="{92440CBB-0B60-C1EE-8860-6F1328A81103}"/>
+          <p:cNvPr id="53" name="metric-4">
+            <a:extLst>
+              <a:ext uri="{FF2B5EF4-FFF2-40B4-BE49-F238E27FC236}">
+                <a16:creationId xmlns:a16="http://schemas.microsoft.com/office/drawing/2014/main" id="{E95F3DC7-63BB-1046-88B1-DAFC419301DD}"/>
               </a:ext>
             </a:extLst>
           </p:cNvPr>
@@ -26398,18 +27879,18 @@
         </p:nvSpPr>
         <p:spPr>
           <a:xfrm>
-            <a:off x="939800" y="4216400"/>
-            <a:ext cx="10312400" cy="1041400"/>
+            <a:off x="9626600" y="1854200"/>
+            <a:ext cx="1981200" cy="2082800"/>
           </a:xfrm>
           <a:prstGeom prst="rect">
             <a:avLst/>
           </a:prstGeom>
           <a:solidFill>
-            <a:srgbClr val="FFFFFF"/>
+            <a:srgbClr val="0D2A57"/>
           </a:solidFill>
           <a:ln w="12700">
             <a:solidFill>
-              <a:srgbClr val="FFFFFF"/>
+              <a:srgbClr val="4782C4"/>
             </a:solidFill>
           </a:ln>
         </p:spPr>
@@ -26438,12 +27919,450 @@
           </a:p>
         </p:txBody>
       </p:sp>
+      <p:sp>
+        <p:nvSpPr>
+          <p:cNvPr id="54" name="metric-band-4">
+            <a:extLst>
+              <a:ext uri="{FF2B5EF4-FFF2-40B4-BE49-F238E27FC236}">
+                <a16:creationId xmlns:a16="http://schemas.microsoft.com/office/drawing/2014/main" id="{B88EFBD0-17E5-75FC-B7DA-6F5CD7451DBA}"/>
+              </a:ext>
+            </a:extLst>
+          </p:cNvPr>
+          <p:cNvSpPr/>
+          <p:nvPr/>
+        </p:nvSpPr>
+        <p:spPr>
+          <a:xfrm>
+            <a:off x="9626600" y="1854200"/>
+            <a:ext cx="1981200" cy="88900"/>
+          </a:xfrm>
+          <a:prstGeom prst="rect">
+            <a:avLst/>
+          </a:prstGeom>
+          <a:solidFill>
+            <a:srgbClr val="008E66"/>
+          </a:solidFill>
+          <a:ln w="12700">
+            <a:solidFill>
+              <a:srgbClr val="008E66"/>
+            </a:solidFill>
+          </a:ln>
+        </p:spPr>
+        <p:style>
+          <a:lnRef idx="2">
+            <a:schemeClr val="accent1">
+              <a:shade val="15000"/>
+            </a:schemeClr>
+          </a:lnRef>
+          <a:fillRef idx="1">
+            <a:schemeClr val="accent1"/>
+          </a:fillRef>
+          <a:effectRef idx="0">
+            <a:schemeClr val="accent1"/>
+          </a:effectRef>
+          <a:fontRef idx="minor">
+            <a:schemeClr val="lt1"/>
+          </a:fontRef>
+        </p:style>
+        <p:txBody>
+          <a:bodyPr rtlCol="0" anchor="ctr"/>
+          <a:lstStyle/>
+          <a:p>
+            <a:pPr algn="ctr"/>
+            <a:endParaRPr lang="zh-CN" altLang="en-US"/>
+          </a:p>
+        </p:txBody>
+      </p:sp>
+      <p:sp>
+        <p:nvSpPr>
+          <p:cNvPr id="55" name="metric-label-4">
+            <a:extLst>
+              <a:ext uri="{FF2B5EF4-FFF2-40B4-BE49-F238E27FC236}">
+                <a16:creationId xmlns:a16="http://schemas.microsoft.com/office/drawing/2014/main" id="{7CE5E9B2-E273-EB7A-CC4A-AE6525557EB6}"/>
+              </a:ext>
+            </a:extLst>
+          </p:cNvPr>
+          <p:cNvSpPr txBox="1"/>
+          <p:nvPr/>
+        </p:nvSpPr>
+        <p:spPr>
+          <a:xfrm>
+            <a:off x="9855200" y="2235200"/>
+            <a:ext cx="1498600" cy="276999"/>
+          </a:xfrm>
+          <a:prstGeom prst="rect">
+            <a:avLst/>
+          </a:prstGeom>
+          <a:noFill/>
+        </p:spPr>
+        <p:txBody>
+          <a:bodyPr vert="horz" wrap="square" lIns="0" tIns="0" rIns="0" bIns="0" rtlCol="0">
+            <a:noAutofit/>
+          </a:bodyPr>
+          <a:lstStyle/>
+          <a:p>
+            <a:r>
+              <a:rPr lang="en-US" altLang="zh-CN" sz="800" b="1">
+                <a:solidFill>
+                  <a:srgbClr val="BCD6F4"/>
+                </a:solidFill>
+                <a:latin typeface="Aptos" panose="020B0004020202020204" pitchFamily="34" charset="0"/>
+              </a:rPr>
+              <a:t>Triage</a:t>
+            </a:r>
+            <a:endParaRPr lang="zh-CN" altLang="en-US" sz="800" b="1">
+              <a:solidFill>
+                <a:srgbClr val="BCD6F4"/>
+              </a:solidFill>
+              <a:latin typeface="Aptos" panose="020B0004020202020204" pitchFamily="34" charset="0"/>
+            </a:endParaRPr>
+          </a:p>
+        </p:txBody>
+      </p:sp>
+      <p:sp>
+        <p:nvSpPr>
+          <p:cNvPr id="56" name="metric-value-4">
+            <a:extLst>
+              <a:ext uri="{FF2B5EF4-FFF2-40B4-BE49-F238E27FC236}">
+                <a16:creationId xmlns:a16="http://schemas.microsoft.com/office/drawing/2014/main" id="{7A908698-56CC-51ED-F401-5CE4256C79AC}"/>
+              </a:ext>
+            </a:extLst>
+          </p:cNvPr>
+          <p:cNvSpPr txBox="1"/>
+          <p:nvPr/>
+        </p:nvSpPr>
+        <p:spPr>
+          <a:xfrm>
+            <a:off x="9855200" y="2794000"/>
+            <a:ext cx="1625600" cy="276999"/>
+          </a:xfrm>
+          <a:prstGeom prst="rect">
+            <a:avLst/>
+          </a:prstGeom>
+          <a:noFill/>
+        </p:spPr>
+        <p:txBody>
+          <a:bodyPr vert="horz" wrap="square" lIns="0" tIns="0" rIns="0" bIns="0" rtlCol="0">
+            <a:noAutofit/>
+          </a:bodyPr>
+          <a:lstStyle/>
+          <a:p>
+            <a:r>
+              <a:rPr lang="en-US" altLang="zh-CN" sz="1950" b="1">
+                <a:solidFill>
+                  <a:srgbClr val="FFFFFF"/>
+                </a:solidFill>
+                <a:latin typeface="Aptos" panose="020B0004020202020204" pitchFamily="34" charset="0"/>
+              </a:rPr>
+              <a:t>81/960</a:t>
+            </a:r>
+            <a:endParaRPr lang="zh-CN" altLang="en-US" sz="1950" b="1">
+              <a:solidFill>
+                <a:srgbClr val="FFFFFF"/>
+              </a:solidFill>
+              <a:latin typeface="Aptos" panose="020B0004020202020204" pitchFamily="34" charset="0"/>
+            </a:endParaRPr>
+          </a:p>
+        </p:txBody>
+      </p:sp>
+      <p:sp>
+        <p:nvSpPr>
+          <p:cNvPr id="57" name="metric-note-4">
+            <a:extLst>
+              <a:ext uri="{FF2B5EF4-FFF2-40B4-BE49-F238E27FC236}">
+                <a16:creationId xmlns:a16="http://schemas.microsoft.com/office/drawing/2014/main" id="{4913BB67-5085-D8AF-9194-FBFC6EB55796}"/>
+              </a:ext>
+            </a:extLst>
+          </p:cNvPr>
+          <p:cNvSpPr txBox="1"/>
+          <p:nvPr/>
+        </p:nvSpPr>
+        <p:spPr>
+          <a:xfrm>
+            <a:off x="9855200" y="3429000"/>
+            <a:ext cx="1498600" cy="276999"/>
+          </a:xfrm>
+          <a:prstGeom prst="rect">
+            <a:avLst/>
+          </a:prstGeom>
+          <a:noFill/>
+        </p:spPr>
+        <p:txBody>
+          <a:bodyPr vert="horz" wrap="square" lIns="0" tIns="0" rIns="0" bIns="0" rtlCol="0">
+            <a:noAutofit/>
+          </a:bodyPr>
+          <a:lstStyle/>
+          <a:p>
+            <a:r>
+              <a:rPr lang="en-US" altLang="zh-CN" sz="720">
+                <a:solidFill>
+                  <a:srgbClr val="C4DAF6"/>
+                </a:solidFill>
+                <a:latin typeface="Aptos" panose="020B0004020202020204" pitchFamily="34" charset="0"/>
+              </a:rPr>
+              <a:t>0 unsafe passes</a:t>
+            </a:r>
+            <a:endParaRPr lang="zh-CN" altLang="en-US" sz="720">
+              <a:solidFill>
+                <a:srgbClr val="C4DAF6"/>
+              </a:solidFill>
+              <a:latin typeface="Aptos" panose="020B0004020202020204" pitchFamily="34" charset="0"/>
+            </a:endParaRPr>
+          </a:p>
+        </p:txBody>
+      </p:sp>
+      <p:sp>
+        <p:nvSpPr>
+          <p:cNvPr id="58" name="claim-strip">
+            <a:extLst>
+              <a:ext uri="{FF2B5EF4-FFF2-40B4-BE49-F238E27FC236}">
+                <a16:creationId xmlns:a16="http://schemas.microsoft.com/office/drawing/2014/main" id="{C6ECFB2A-A7C3-9058-5037-59B1AF283EFE}"/>
+              </a:ext>
+            </a:extLst>
+          </p:cNvPr>
+          <p:cNvSpPr/>
+          <p:nvPr/>
+        </p:nvSpPr>
+        <p:spPr>
+          <a:xfrm>
+            <a:off x="1219200" y="4495800"/>
+            <a:ext cx="9753600" cy="660400"/>
+          </a:xfrm>
+          <a:prstGeom prst="rect">
+            <a:avLst/>
+          </a:prstGeom>
+          <a:solidFill>
+            <a:srgbClr val="071C3E"/>
+          </a:solidFill>
+          <a:ln w="12700">
+            <a:solidFill>
+              <a:srgbClr val="4E82BE"/>
+            </a:solidFill>
+          </a:ln>
+        </p:spPr>
+        <p:style>
+          <a:lnRef idx="2">
+            <a:schemeClr val="accent1">
+              <a:shade val="15000"/>
+            </a:schemeClr>
+          </a:lnRef>
+          <a:fillRef idx="1">
+            <a:schemeClr val="accent1"/>
+          </a:fillRef>
+          <a:effectRef idx="0">
+            <a:schemeClr val="accent1"/>
+          </a:effectRef>
+          <a:fontRef idx="minor">
+            <a:schemeClr val="lt1"/>
+          </a:fontRef>
+        </p:style>
+        <p:txBody>
+          <a:bodyPr rtlCol="0" anchor="ctr"/>
+          <a:lstStyle/>
+          <a:p>
+            <a:pPr algn="ctr"/>
+            <a:endParaRPr lang="zh-CN" altLang="en-US"/>
+          </a:p>
+        </p:txBody>
+      </p:sp>
+      <p:sp>
+        <p:nvSpPr>
+          <p:cNvPr id="59" name="claim-strip-k">
+            <a:extLst>
+              <a:ext uri="{FF2B5EF4-FFF2-40B4-BE49-F238E27FC236}">
+                <a16:creationId xmlns:a16="http://schemas.microsoft.com/office/drawing/2014/main" id="{A886B573-1A65-D0BD-C81B-43C56F23C1C6}"/>
+              </a:ext>
+            </a:extLst>
+          </p:cNvPr>
+          <p:cNvSpPr txBox="1"/>
+          <p:nvPr/>
+        </p:nvSpPr>
+        <p:spPr>
+          <a:xfrm>
+            <a:off x="1600200" y="4699000"/>
+            <a:ext cx="1524000" cy="276999"/>
+          </a:xfrm>
+          <a:prstGeom prst="rect">
+            <a:avLst/>
+          </a:prstGeom>
+          <a:noFill/>
+        </p:spPr>
+        <p:txBody>
+          <a:bodyPr vert="horz" wrap="square" lIns="0" tIns="0" rIns="0" bIns="0" rtlCol="0">
+            <a:noAutofit/>
+          </a:bodyPr>
+          <a:lstStyle/>
+          <a:p>
+            <a:r>
+              <a:rPr lang="en-US" altLang="zh-CN" sz="720" b="1">
+                <a:solidFill>
+                  <a:srgbClr val="BEDCFF"/>
+                </a:solidFill>
+                <a:latin typeface="Aptos" panose="020B0004020202020204" pitchFamily="34" charset="0"/>
+              </a:rPr>
+              <a:t>INTERPRETATION</a:t>
+            </a:r>
+            <a:endParaRPr lang="zh-CN" altLang="en-US" sz="720" b="1">
+              <a:solidFill>
+                <a:srgbClr val="BEDCFF"/>
+              </a:solidFill>
+              <a:latin typeface="Aptos" panose="020B0004020202020204" pitchFamily="34" charset="0"/>
+            </a:endParaRPr>
+          </a:p>
+        </p:txBody>
+      </p:sp>
+      <p:sp>
+        <p:nvSpPr>
+          <p:cNvPr id="60" name="claim-strip-t">
+            <a:extLst>
+              <a:ext uri="{FF2B5EF4-FFF2-40B4-BE49-F238E27FC236}">
+                <a16:creationId xmlns:a16="http://schemas.microsoft.com/office/drawing/2014/main" id="{119455B3-62FC-C366-EB5B-BDC8C13EB332}"/>
+              </a:ext>
+            </a:extLst>
+          </p:cNvPr>
+          <p:cNvSpPr txBox="1"/>
+          <p:nvPr/>
+        </p:nvSpPr>
+        <p:spPr>
+          <a:xfrm>
+            <a:off x="3632200" y="4686300"/>
+            <a:ext cx="6959600" cy="276999"/>
+          </a:xfrm>
+          <a:prstGeom prst="rect">
+            <a:avLst/>
+          </a:prstGeom>
+          <a:noFill/>
+        </p:spPr>
+        <p:txBody>
+          <a:bodyPr vert="horz" wrap="square" lIns="0" tIns="0" rIns="0" bIns="0" rtlCol="0">
+            <a:noAutofit/>
+          </a:bodyPr>
+          <a:lstStyle/>
+          <a:p>
+            <a:r>
+              <a:rPr lang="en-US" altLang="zh-CN" sz="1050" b="1">
+                <a:solidFill>
+                  <a:srgbClr val="FFFFFF"/>
+                </a:solidFill>
+                <a:latin typeface="Aptos" panose="020B0004020202020204" pitchFamily="34" charset="0"/>
+              </a:rPr>
+              <a:t>No number is promoted without denominator, controls, artifact, and boundary.</a:t>
+            </a:r>
+            <a:endParaRPr lang="zh-CN" altLang="en-US" sz="1050" b="1">
+              <a:solidFill>
+                <a:srgbClr val="FFFFFF"/>
+              </a:solidFill>
+              <a:latin typeface="Aptos" panose="020B0004020202020204" pitchFamily="34" charset="0"/>
+            </a:endParaRPr>
+          </a:p>
+        </p:txBody>
+      </p:sp>
+      <p:sp>
+        <p:nvSpPr>
+          <p:cNvPr id="61" name="caveat-box">
+            <a:extLst>
+              <a:ext uri="{FF2B5EF4-FFF2-40B4-BE49-F238E27FC236}">
+                <a16:creationId xmlns:a16="http://schemas.microsoft.com/office/drawing/2014/main" id="{0D58A69E-C379-A351-6AF1-E668CDA052E8}"/>
+              </a:ext>
+            </a:extLst>
+          </p:cNvPr>
+          <p:cNvSpPr/>
+          <p:nvPr/>
+        </p:nvSpPr>
+        <p:spPr>
+          <a:xfrm>
+            <a:off x="1955800" y="5588000"/>
+            <a:ext cx="8280400" cy="381000"/>
+          </a:xfrm>
+          <a:prstGeom prst="rect">
+            <a:avLst/>
+          </a:prstGeom>
+          <a:solidFill>
+            <a:srgbClr val="FFF7E0"/>
+          </a:solidFill>
+          <a:ln w="12700">
+            <a:solidFill>
+              <a:srgbClr val="F5BE4E"/>
+            </a:solidFill>
+          </a:ln>
+        </p:spPr>
+        <p:style>
+          <a:lnRef idx="2">
+            <a:schemeClr val="accent1">
+              <a:shade val="15000"/>
+            </a:schemeClr>
+          </a:lnRef>
+          <a:fillRef idx="1">
+            <a:schemeClr val="accent1"/>
+          </a:fillRef>
+          <a:effectRef idx="0">
+            <a:schemeClr val="accent1"/>
+          </a:effectRef>
+          <a:fontRef idx="minor">
+            <a:schemeClr val="lt1"/>
+          </a:fontRef>
+        </p:style>
+        <p:txBody>
+          <a:bodyPr rtlCol="0" anchor="ctr"/>
+          <a:lstStyle/>
+          <a:p>
+            <a:pPr algn="ctr"/>
+            <a:endParaRPr lang="zh-CN" altLang="en-US"/>
+          </a:p>
+        </p:txBody>
+      </p:sp>
+      <p:sp>
+        <p:nvSpPr>
+          <p:cNvPr id="62" name="caveat">
+            <a:extLst>
+              <a:ext uri="{FF2B5EF4-FFF2-40B4-BE49-F238E27FC236}">
+                <a16:creationId xmlns:a16="http://schemas.microsoft.com/office/drawing/2014/main" id="{9CAD5747-D809-0221-70A9-161618213ED0}"/>
+              </a:ext>
+            </a:extLst>
+          </p:cNvPr>
+          <p:cNvSpPr txBox="1"/>
+          <p:nvPr/>
+        </p:nvSpPr>
+        <p:spPr>
+          <a:xfrm>
+            <a:off x="2311400" y="5702300"/>
+            <a:ext cx="7569200" cy="276999"/>
+          </a:xfrm>
+          <a:prstGeom prst="rect">
+            <a:avLst/>
+          </a:prstGeom>
+          <a:noFill/>
+        </p:spPr>
+        <p:txBody>
+          <a:bodyPr vert="horz" wrap="square" lIns="0" tIns="0" rIns="0" bIns="0" rtlCol="0">
+            <a:noAutofit/>
+          </a:bodyPr>
+          <a:lstStyle/>
+          <a:p>
+            <a:r>
+              <a:rPr lang="en-US" altLang="zh-CN" sz="810" b="1">
+                <a:solidFill>
+                  <a:srgbClr val="5C3A0C"/>
+                </a:solidFill>
+                <a:latin typeface="Aptos" panose="020B0004020202020204" pitchFamily="34" charset="0"/>
+              </a:rPr>
+              <a:t>Important qualifier: access-specific results, not a universal watermarking guarantee.</a:t>
+            </a:r>
+            <a:endParaRPr lang="zh-CN" altLang="en-US" sz="810" b="1">
+              <a:solidFill>
+                <a:srgbClr val="5C3A0C"/>
+              </a:solidFill>
+              <a:latin typeface="Aptos" panose="020B0004020202020204" pitchFamily="34" charset="0"/>
+            </a:endParaRPr>
+          </a:p>
+        </p:txBody>
+      </p:sp>
       <p:pic>
         <p:nvPicPr>
-          <p:cNvPr id="50" name="sem-compact">
-            <a:extLst>
-              <a:ext uri="{FF2B5EF4-FFF2-40B4-BE49-F238E27FC236}">
-                <a16:creationId xmlns:a16="http://schemas.microsoft.com/office/drawing/2014/main" id="{252EC4A9-1E37-1A87-263E-456C2D8569B7}"/>
+          <p:cNvPr id="64" name="图片 63">
+            <a:extLst>
+              <a:ext uri="{FF2B5EF4-FFF2-40B4-BE49-F238E27FC236}">
+                <a16:creationId xmlns:a16="http://schemas.microsoft.com/office/drawing/2014/main" id="{F4833AFD-7F9E-5655-F774-87FA10A54EC8}"/>
               </a:ext>
             </a:extLst>
           </p:cNvPr>
@@ -26466,88 +28385,6 @@
         </p:blipFill>
         <p:spPr>
           <a:xfrm>
-            <a:off x="4811018" y="4241800"/>
-            <a:ext cx="2569963" cy="1041400"/>
-          </a:xfrm>
-          <a:prstGeom prst="rect">
-            <a:avLst/>
-          </a:prstGeom>
-        </p:spPr>
-      </p:pic>
-      <p:sp>
-        <p:nvSpPr>
-          <p:cNvPr id="51" name="caveat">
-            <a:extLst>
-              <a:ext uri="{FF2B5EF4-FFF2-40B4-BE49-F238E27FC236}">
-                <a16:creationId xmlns:a16="http://schemas.microsoft.com/office/drawing/2014/main" id="{77FA77E7-250F-CE9D-39C2-9BCFF25E2B0A}"/>
-              </a:ext>
-            </a:extLst>
-          </p:cNvPr>
-          <p:cNvSpPr txBox="1"/>
-          <p:nvPr/>
-        </p:nvSpPr>
-        <p:spPr>
-          <a:xfrm>
-            <a:off x="1270000" y="5740400"/>
-            <a:ext cx="9652000" cy="276999"/>
-          </a:xfrm>
-          <a:prstGeom prst="rect">
-            <a:avLst/>
-          </a:prstGeom>
-          <a:noFill/>
-        </p:spPr>
-        <p:txBody>
-          <a:bodyPr vert="horz" wrap="square" lIns="0" tIns="0" rIns="0" bIns="0" rtlCol="0">
-            <a:noAutofit/>
-          </a:bodyPr>
-          <a:lstStyle/>
-          <a:p>
-            <a:r>
-              <a:rPr lang="en-US" altLang="zh-CN" sz="850" b="1">
-                <a:solidFill>
-                  <a:srgbClr val="FFFFFF"/>
-                </a:solidFill>
-                <a:latin typeface="Aptos" panose="020B0004020202020204" pitchFamily="34" charset="0"/>
-              </a:rPr>
-              <a:t>Important qualifier: these are access-specific results, not a universal watermarking guarantee.</a:t>
-            </a:r>
-            <a:endParaRPr lang="zh-CN" altLang="en-US" sz="850" b="1">
-              <a:solidFill>
-                <a:srgbClr val="FFFFFF"/>
-              </a:solidFill>
-              <a:latin typeface="Aptos" panose="020B0004020202020204" pitchFamily="34" charset="0"/>
-            </a:endParaRPr>
-          </a:p>
-        </p:txBody>
-      </p:sp>
-      <p:pic>
-        <p:nvPicPr>
-          <p:cNvPr id="53" name="图片 52">
-            <a:extLst>
-              <a:ext uri="{FF2B5EF4-FFF2-40B4-BE49-F238E27FC236}">
-                <a16:creationId xmlns:a16="http://schemas.microsoft.com/office/drawing/2014/main" id="{A1F9D777-12AE-0E81-3426-43E6B8042B72}"/>
-              </a:ext>
-            </a:extLst>
-          </p:cNvPr>
-          <p:cNvPicPr>
-            <a:picLocks/>
-          </p:cNvPicPr>
-          <p:nvPr/>
-        </p:nvPicPr>
-        <p:blipFill>
-          <a:blip r:embed="rId4">
-            <a:extLst>
-              <a:ext uri="{28A0092B-C50C-407E-A947-70E740481C1C}">
-                <a14:useLocalDpi xmlns:a14="http://schemas.microsoft.com/office/drawing/2010/main" val="0"/>
-              </a:ext>
-            </a:extLst>
-          </a:blip>
-          <a:stretch>
-            <a:fillRect/>
-          </a:stretch>
-        </p:blipFill>
-        <p:spPr>
-          <a:xfrm>
             <a:off x="9144000" y="5867400"/>
             <a:ext cx="2286000" cy="609600"/>
           </a:xfrm>
@@ -26559,7 +28396,7 @@
     </p:spTree>
     <p:extLst>
       <p:ext uri="{BB962C8B-B14F-4D97-AF65-F5344CB8AC3E}">
-        <p14:creationId xmlns:p14="http://schemas.microsoft.com/office/powerpoint/2010/main" val="2181610189"/>
+        <p14:creationId xmlns:p14="http://schemas.microsoft.com/office/powerpoint/2010/main" val="3512759281"/>
       </p:ext>
     </p:extLst>
   </p:cSld>
@@ -26578,6 +28415,275 @@
       </p:transition>
     </mc:Fallback>
   </mc:AlternateContent>
+  <p:timing>
+    <p:tnLst>
+      <p:par>
+        <p:cTn id="1" dur="indefinite" restart="never" nodeType="tmRoot">
+          <p:childTnLst>
+            <p:seq concurrent="1" nextAc="seek">
+              <p:cTn id="2" dur="indefinite" nodeType="mainSeq">
+                <p:childTnLst>
+                  <p:par>
+                    <p:cTn id="3" fill="hold">
+                      <p:stCondLst>
+                        <p:cond delay="indefinite"/>
+                        <p:cond evt="onBegin" delay="0">
+                          <p:tn val="2"/>
+                        </p:cond>
+                      </p:stCondLst>
+                      <p:childTnLst>
+                        <p:par>
+                          <p:cTn id="4" fill="hold">
+                            <p:stCondLst>
+                              <p:cond delay="0"/>
+                            </p:stCondLst>
+                            <p:childTnLst>
+                              <p:par>
+                                <p:cTn id="5" presetID="10" presetClass="entr" presetSubtype="0" fill="hold" grpId="0" nodeType="afterEffect">
+                                  <p:stCondLst>
+                                    <p:cond delay="0"/>
+                                  </p:stCondLst>
+                                  <p:childTnLst>
+                                    <p:set>
+                                      <p:cBhvr>
+                                        <p:cTn id="6" dur="1" fill="hold">
+                                          <p:stCondLst>
+                                            <p:cond delay="0"/>
+                                          </p:stCondLst>
+                                        </p:cTn>
+                                        <p:tgtEl>
+                                          <p:spTgt spid="33"/>
+                                        </p:tgtEl>
+                                        <p:attrNameLst>
+                                          <p:attrName>style.visibility</p:attrName>
+                                        </p:attrNameLst>
+                                      </p:cBhvr>
+                                      <p:to>
+                                        <p:strVal val="visible"/>
+                                      </p:to>
+                                    </p:set>
+                                    <p:animEffect transition="in" filter="fade">
+                                      <p:cBhvr>
+                                        <p:cTn id="7" dur="250"/>
+                                        <p:tgtEl>
+                                          <p:spTgt spid="33"/>
+                                        </p:tgtEl>
+                                      </p:cBhvr>
+                                    </p:animEffect>
+                                  </p:childTnLst>
+                                </p:cTn>
+                              </p:par>
+                            </p:childTnLst>
+                          </p:cTn>
+                        </p:par>
+                        <p:par>
+                          <p:cTn id="8" fill="hold">
+                            <p:stCondLst>
+                              <p:cond delay="250"/>
+                            </p:stCondLst>
+                            <p:childTnLst>
+                              <p:par>
+                                <p:cTn id="9" presetID="10" presetClass="entr" presetSubtype="0" fill="hold" grpId="0" nodeType="afterEffect">
+                                  <p:stCondLst>
+                                    <p:cond delay="0"/>
+                                  </p:stCondLst>
+                                  <p:childTnLst>
+                                    <p:set>
+                                      <p:cBhvr>
+                                        <p:cTn id="10" dur="1" fill="hold">
+                                          <p:stCondLst>
+                                            <p:cond delay="0"/>
+                                          </p:stCondLst>
+                                        </p:cTn>
+                                        <p:tgtEl>
+                                          <p:spTgt spid="38"/>
+                                        </p:tgtEl>
+                                        <p:attrNameLst>
+                                          <p:attrName>style.visibility</p:attrName>
+                                        </p:attrNameLst>
+                                      </p:cBhvr>
+                                      <p:to>
+                                        <p:strVal val="visible"/>
+                                      </p:to>
+                                    </p:set>
+                                    <p:animEffect transition="in" filter="fade">
+                                      <p:cBhvr>
+                                        <p:cTn id="11" dur="250"/>
+                                        <p:tgtEl>
+                                          <p:spTgt spid="38"/>
+                                        </p:tgtEl>
+                                      </p:cBhvr>
+                                    </p:animEffect>
+                                  </p:childTnLst>
+                                </p:cTn>
+                              </p:par>
+                            </p:childTnLst>
+                          </p:cTn>
+                        </p:par>
+                        <p:par>
+                          <p:cTn id="12" fill="hold">
+                            <p:stCondLst>
+                              <p:cond delay="500"/>
+                            </p:stCondLst>
+                            <p:childTnLst>
+                              <p:par>
+                                <p:cTn id="13" presetID="10" presetClass="entr" presetSubtype="0" fill="hold" grpId="0" nodeType="afterEffect">
+                                  <p:stCondLst>
+                                    <p:cond delay="0"/>
+                                  </p:stCondLst>
+                                  <p:childTnLst>
+                                    <p:set>
+                                      <p:cBhvr>
+                                        <p:cTn id="14" dur="1" fill="hold">
+                                          <p:stCondLst>
+                                            <p:cond delay="0"/>
+                                          </p:stCondLst>
+                                        </p:cTn>
+                                        <p:tgtEl>
+                                          <p:spTgt spid="43"/>
+                                        </p:tgtEl>
+                                        <p:attrNameLst>
+                                          <p:attrName>style.visibility</p:attrName>
+                                        </p:attrNameLst>
+                                      </p:cBhvr>
+                                      <p:to>
+                                        <p:strVal val="visible"/>
+                                      </p:to>
+                                    </p:set>
+                                    <p:animEffect transition="in" filter="fade">
+                                      <p:cBhvr>
+                                        <p:cTn id="15" dur="250"/>
+                                        <p:tgtEl>
+                                          <p:spTgt spid="43"/>
+                                        </p:tgtEl>
+                                      </p:cBhvr>
+                                    </p:animEffect>
+                                  </p:childTnLst>
+                                </p:cTn>
+                              </p:par>
+                            </p:childTnLst>
+                          </p:cTn>
+                        </p:par>
+                        <p:par>
+                          <p:cTn id="16" fill="hold">
+                            <p:stCondLst>
+                              <p:cond delay="750"/>
+                            </p:stCondLst>
+                            <p:childTnLst>
+                              <p:par>
+                                <p:cTn id="17" presetID="10" presetClass="entr" presetSubtype="0" fill="hold" grpId="0" nodeType="afterEffect">
+                                  <p:stCondLst>
+                                    <p:cond delay="0"/>
+                                  </p:stCondLst>
+                                  <p:childTnLst>
+                                    <p:set>
+                                      <p:cBhvr>
+                                        <p:cTn id="18" dur="1" fill="hold">
+                                          <p:stCondLst>
+                                            <p:cond delay="0"/>
+                                          </p:stCondLst>
+                                        </p:cTn>
+                                        <p:tgtEl>
+                                          <p:spTgt spid="48"/>
+                                        </p:tgtEl>
+                                        <p:attrNameLst>
+                                          <p:attrName>style.visibility</p:attrName>
+                                        </p:attrNameLst>
+                                      </p:cBhvr>
+                                      <p:to>
+                                        <p:strVal val="visible"/>
+                                      </p:to>
+                                    </p:set>
+                                    <p:animEffect transition="in" filter="fade">
+                                      <p:cBhvr>
+                                        <p:cTn id="19" dur="250"/>
+                                        <p:tgtEl>
+                                          <p:spTgt spid="48"/>
+                                        </p:tgtEl>
+                                      </p:cBhvr>
+                                    </p:animEffect>
+                                  </p:childTnLst>
+                                </p:cTn>
+                              </p:par>
+                            </p:childTnLst>
+                          </p:cTn>
+                        </p:par>
+                        <p:par>
+                          <p:cTn id="20" fill="hold">
+                            <p:stCondLst>
+                              <p:cond delay="1000"/>
+                            </p:stCondLst>
+                            <p:childTnLst>
+                              <p:par>
+                                <p:cTn id="21" presetID="10" presetClass="entr" presetSubtype="0" fill="hold" grpId="0" nodeType="afterEffect">
+                                  <p:stCondLst>
+                                    <p:cond delay="0"/>
+                                  </p:stCondLst>
+                                  <p:childTnLst>
+                                    <p:set>
+                                      <p:cBhvr>
+                                        <p:cTn id="22" dur="1" fill="hold">
+                                          <p:stCondLst>
+                                            <p:cond delay="0"/>
+                                          </p:stCondLst>
+                                        </p:cTn>
+                                        <p:tgtEl>
+                                          <p:spTgt spid="53"/>
+                                        </p:tgtEl>
+                                        <p:attrNameLst>
+                                          <p:attrName>style.visibility</p:attrName>
+                                        </p:attrNameLst>
+                                      </p:cBhvr>
+                                      <p:to>
+                                        <p:strVal val="visible"/>
+                                      </p:to>
+                                    </p:set>
+                                    <p:animEffect transition="in" filter="fade">
+                                      <p:cBhvr>
+                                        <p:cTn id="23" dur="250"/>
+                                        <p:tgtEl>
+                                          <p:spTgt spid="53"/>
+                                        </p:tgtEl>
+                                      </p:cBhvr>
+                                    </p:animEffect>
+                                  </p:childTnLst>
+                                </p:cTn>
+                              </p:par>
+                            </p:childTnLst>
+                          </p:cTn>
+                        </p:par>
+                      </p:childTnLst>
+                    </p:cTn>
+                  </p:par>
+                </p:childTnLst>
+              </p:cTn>
+              <p:prevCondLst>
+                <p:cond evt="onPrev" delay="0">
+                  <p:tgtEl>
+                    <p:sldTgt/>
+                  </p:tgtEl>
+                </p:cond>
+              </p:prevCondLst>
+              <p:nextCondLst>
+                <p:cond evt="onNext" delay="0">
+                  <p:tgtEl>
+                    <p:sldTgt/>
+                  </p:tgtEl>
+                </p:cond>
+              </p:nextCondLst>
+            </p:seq>
+          </p:childTnLst>
+        </p:cTn>
+      </p:par>
+    </p:tnLst>
+    <p:bldLst>
+      <p:bldP spid="33" grpId="0" animBg="1"/>
+      <p:bldP spid="38" grpId="0" animBg="1"/>
+      <p:bldP spid="43" grpId="0" animBg="1"/>
+      <p:bldP spid="48" grpId="0" animBg="1"/>
+      <p:bldP spid="53" grpId="0" animBg="1"/>
+    </p:bldLst>
+  </p:timing>
 </p:sld>
 </file>
 
@@ -26603,7 +28709,7 @@
           <p:cNvPr id="2" name="page-bg">
             <a:extLst>
               <a:ext uri="{FF2B5EF4-FFF2-40B4-BE49-F238E27FC236}">
-                <a16:creationId xmlns:a16="http://schemas.microsoft.com/office/drawing/2014/main" id="{EF08A35B-819C-D1E1-6019-07BB2C4967DA}"/>
+                <a16:creationId xmlns:a16="http://schemas.microsoft.com/office/drawing/2014/main" id="{EBB9342B-7E84-83E3-C2A2-0368CD33CECD}"/>
               </a:ext>
             </a:extLst>
           </p:cNvPr>
@@ -26664,7 +28770,7 @@
           <p:cNvPr id="3" name="left-rail">
             <a:extLst>
               <a:ext uri="{FF2B5EF4-FFF2-40B4-BE49-F238E27FC236}">
-                <a16:creationId xmlns:a16="http://schemas.microsoft.com/office/drawing/2014/main" id="{93916BC1-1E0E-5EB8-BFDA-92EA705F3102}"/>
+                <a16:creationId xmlns:a16="http://schemas.microsoft.com/office/drawing/2014/main" id="{F641A1B4-BA61-D3C1-A6A0-C4D0D05B3346}"/>
               </a:ext>
             </a:extLst>
           </p:cNvPr>
@@ -26725,7 +28831,7 @@
           <p:cNvPr id="4" name="top-line">
             <a:extLst>
               <a:ext uri="{FF2B5EF4-FFF2-40B4-BE49-F238E27FC236}">
-                <a16:creationId xmlns:a16="http://schemas.microsoft.com/office/drawing/2014/main" id="{ABE92CA3-B65D-D185-2EFF-131CA572EB64}"/>
+                <a16:creationId xmlns:a16="http://schemas.microsoft.com/office/drawing/2014/main" id="{0126934C-151E-09A1-C6C0-440CD836D21E}"/>
               </a:ext>
             </a:extLst>
           </p:cNvPr>
@@ -26766,7 +28872,7 @@
           <p:cNvPr id="5" name="footer-left">
             <a:extLst>
               <a:ext uri="{FF2B5EF4-FFF2-40B4-BE49-F238E27FC236}">
-                <a16:creationId xmlns:a16="http://schemas.microsoft.com/office/drawing/2014/main" id="{1E69C0AA-966C-48EB-4042-D7B4C909B5DF}"/>
+                <a16:creationId xmlns:a16="http://schemas.microsoft.com/office/drawing/2014/main" id="{D21E8892-AB58-B7F3-C107-09312491897C}"/>
               </a:ext>
             </a:extLst>
           </p:cNvPr>
@@ -26812,7 +28918,7 @@
           <p:cNvPr id="6" name="footer-mid">
             <a:extLst>
               <a:ext uri="{FF2B5EF4-FFF2-40B4-BE49-F238E27FC236}">
-                <a16:creationId xmlns:a16="http://schemas.microsoft.com/office/drawing/2014/main" id="{6A574B0C-5BDD-C4F7-DCE5-8ED034810C7F}"/>
+                <a16:creationId xmlns:a16="http://schemas.microsoft.com/office/drawing/2014/main" id="{2B2C28FC-6EE3-328F-1367-1AD1B0D3578E}"/>
               </a:ext>
             </a:extLst>
           </p:cNvPr>
@@ -26858,7 +28964,7 @@
           <p:cNvPr id="7" name="page-num">
             <a:extLst>
               <a:ext uri="{FF2B5EF4-FFF2-40B4-BE49-F238E27FC236}">
-                <a16:creationId xmlns:a16="http://schemas.microsoft.com/office/drawing/2014/main" id="{FD6DA114-146F-5534-E554-0E9CAD123518}"/>
+                <a16:creationId xmlns:a16="http://schemas.microsoft.com/office/drawing/2014/main" id="{46DF15FC-6F53-CCE1-8E22-28E6F532FB47}"/>
               </a:ext>
             </a:extLst>
           </p:cNvPr>
@@ -26904,7 +29010,7 @@
           <p:cNvPr id="8" name="section-label">
             <a:extLst>
               <a:ext uri="{FF2B5EF4-FFF2-40B4-BE49-F238E27FC236}">
-                <a16:creationId xmlns:a16="http://schemas.microsoft.com/office/drawing/2014/main" id="{8D6843B1-7022-4839-66C1-664B07F391D9}"/>
+                <a16:creationId xmlns:a16="http://schemas.microsoft.com/office/drawing/2014/main" id="{2D7BD755-832B-5639-6E0E-971E5A49B494}"/>
               </a:ext>
             </a:extLst>
           </p:cNvPr>
@@ -26950,7 +29056,7 @@
           <p:cNvPr id="10" name="图片 9">
             <a:extLst>
               <a:ext uri="{FF2B5EF4-FFF2-40B4-BE49-F238E27FC236}">
-                <a16:creationId xmlns:a16="http://schemas.microsoft.com/office/drawing/2014/main" id="{3D15C05D-DA2E-1603-C781-37AAEE2B9479}"/>
+                <a16:creationId xmlns:a16="http://schemas.microsoft.com/office/drawing/2014/main" id="{5ACBAE71-70D4-89CF-6A3F-6998A8A73005}"/>
               </a:ext>
             </a:extLst>
           </p:cNvPr>
@@ -26986,7 +29092,7 @@
           <p:cNvPr id="11" name="title">
             <a:extLst>
               <a:ext uri="{FF2B5EF4-FFF2-40B4-BE49-F238E27FC236}">
-                <a16:creationId xmlns:a16="http://schemas.microsoft.com/office/drawing/2014/main" id="{21B7FD4D-9EC0-8304-9905-CB3B16C16DF4}"/>
+                <a16:creationId xmlns:a16="http://schemas.microsoft.com/office/drawing/2014/main" id="{7BDDD0AA-1FC1-7EC6-2652-02270445CF01}"/>
               </a:ext>
             </a:extLst>
           </p:cNvPr>
@@ -27032,7 +29138,7 @@
           <p:cNvPr id="12" name="subtitle">
             <a:extLst>
               <a:ext uri="{FF2B5EF4-FFF2-40B4-BE49-F238E27FC236}">
-                <a16:creationId xmlns:a16="http://schemas.microsoft.com/office/drawing/2014/main" id="{DECC1093-3235-C95F-5FDB-F0547ACB3276}"/>
+                <a16:creationId xmlns:a16="http://schemas.microsoft.com/office/drawing/2014/main" id="{B0951EBA-5C78-45A5-9B49-75B92FB7F0BE}"/>
               </a:ext>
             </a:extLst>
           </p:cNvPr>
@@ -27078,7 +29184,7 @@
           <p:cNvPr id="13" name="fig-frame">
             <a:extLst>
               <a:ext uri="{FF2B5EF4-FFF2-40B4-BE49-F238E27FC236}">
-                <a16:creationId xmlns:a16="http://schemas.microsoft.com/office/drawing/2014/main" id="{C8DB2896-B0BC-330B-B64F-6A2A74BA92AA}"/>
+                <a16:creationId xmlns:a16="http://schemas.microsoft.com/office/drawing/2014/main" id="{5807D388-C31D-B798-2496-F3CBBFCA617D}"/>
               </a:ext>
             </a:extLst>
           </p:cNvPr>
@@ -27132,7 +29238,7 @@
           <p:cNvPr id="15" name="blackbox-table">
             <a:extLst>
               <a:ext uri="{FF2B5EF4-FFF2-40B4-BE49-F238E27FC236}">
-                <a16:creationId xmlns:a16="http://schemas.microsoft.com/office/drawing/2014/main" id="{77A20999-585D-ADEC-35FE-47DA5B51ADA5}"/>
+                <a16:creationId xmlns:a16="http://schemas.microsoft.com/office/drawing/2014/main" id="{0241AE5D-859F-7719-9EDD-F74DAA60A097}"/>
               </a:ext>
             </a:extLst>
           </p:cNvPr>
@@ -27168,7 +29274,7 @@
           <p:cNvPr id="16" name="left">
             <a:extLst>
               <a:ext uri="{FF2B5EF4-FFF2-40B4-BE49-F238E27FC236}">
-                <a16:creationId xmlns:a16="http://schemas.microsoft.com/office/drawing/2014/main" id="{8ACD14DB-EDA0-C49F-4054-F727A858389B}"/>
+                <a16:creationId xmlns:a16="http://schemas.microsoft.com/office/drawing/2014/main" id="{01C7A480-3D3A-5C33-FA69-42E4EE9C660A}"/>
               </a:ext>
             </a:extLst>
           </p:cNvPr>
@@ -27222,7 +29328,7 @@
           <p:cNvPr id="17" name="left-main">
             <a:extLst>
               <a:ext uri="{FF2B5EF4-FFF2-40B4-BE49-F238E27FC236}">
-                <a16:creationId xmlns:a16="http://schemas.microsoft.com/office/drawing/2014/main" id="{66AD8334-B589-007E-EB89-CE4D1C48AB7B}"/>
+                <a16:creationId xmlns:a16="http://schemas.microsoft.com/office/drawing/2014/main" id="{E7CECA01-EFE6-570C-1907-B7E69821ED29}"/>
               </a:ext>
             </a:extLst>
           </p:cNvPr>
@@ -27268,7 +29374,7 @@
           <p:cNvPr id="18" name="right">
             <a:extLst>
               <a:ext uri="{FF2B5EF4-FFF2-40B4-BE49-F238E27FC236}">
-                <a16:creationId xmlns:a16="http://schemas.microsoft.com/office/drawing/2014/main" id="{DB87E2C1-2740-5676-AC1D-EF5F5E1A44DF}"/>
+                <a16:creationId xmlns:a16="http://schemas.microsoft.com/office/drawing/2014/main" id="{CAD95ED1-F96C-C234-2EC1-B7FE3BE73BEB}"/>
               </a:ext>
             </a:extLst>
           </p:cNvPr>
@@ -27322,7 +29428,7 @@
           <p:cNvPr id="19" name="right-main">
             <a:extLst>
               <a:ext uri="{FF2B5EF4-FFF2-40B4-BE49-F238E27FC236}">
-                <a16:creationId xmlns:a16="http://schemas.microsoft.com/office/drawing/2014/main" id="{A6361C06-14C7-B2B6-54EB-6D858786334E}"/>
+                <a16:creationId xmlns:a16="http://schemas.microsoft.com/office/drawing/2014/main" id="{842AC343-20E9-9EC0-6617-EC0E67DEEAB0}"/>
               </a:ext>
             </a:extLst>
           </p:cNvPr>
@@ -27366,7 +29472,7 @@
     </p:spTree>
     <p:extLst>
       <p:ext uri="{BB962C8B-B14F-4D97-AF65-F5344CB8AC3E}">
-        <p14:creationId xmlns:p14="http://schemas.microsoft.com/office/powerpoint/2010/main" val="2950727345"/>
+        <p14:creationId xmlns:p14="http://schemas.microsoft.com/office/powerpoint/2010/main" val="4282357703"/>
       </p:ext>
     </p:extLst>
   </p:cSld>
@@ -27410,7 +29516,7 @@
           <p:cNvPr id="2" name="page-bg">
             <a:extLst>
               <a:ext uri="{FF2B5EF4-FFF2-40B4-BE49-F238E27FC236}">
-                <a16:creationId xmlns:a16="http://schemas.microsoft.com/office/drawing/2014/main" id="{BD9022B5-0110-1E2A-DB2E-89320B14A81F}"/>
+                <a16:creationId xmlns:a16="http://schemas.microsoft.com/office/drawing/2014/main" id="{2AAB01E7-1538-BF7A-60BF-9418FCB001F2}"/>
               </a:ext>
             </a:extLst>
           </p:cNvPr>
@@ -27471,7 +29577,7 @@
           <p:cNvPr id="3" name="left-rail">
             <a:extLst>
               <a:ext uri="{FF2B5EF4-FFF2-40B4-BE49-F238E27FC236}">
-                <a16:creationId xmlns:a16="http://schemas.microsoft.com/office/drawing/2014/main" id="{893FF4B6-5A7F-2E5C-1C88-8EC65DBB0B16}"/>
+                <a16:creationId xmlns:a16="http://schemas.microsoft.com/office/drawing/2014/main" id="{A0ED0D2D-DE6F-CD73-BA15-1EEA857AE5B8}"/>
               </a:ext>
             </a:extLst>
           </p:cNvPr>
@@ -27532,7 +29638,7 @@
           <p:cNvPr id="4" name="top-line">
             <a:extLst>
               <a:ext uri="{FF2B5EF4-FFF2-40B4-BE49-F238E27FC236}">
-                <a16:creationId xmlns:a16="http://schemas.microsoft.com/office/drawing/2014/main" id="{92FE0A0F-27F3-FB31-4330-3279FAB95703}"/>
+                <a16:creationId xmlns:a16="http://schemas.microsoft.com/office/drawing/2014/main" id="{1B92A501-A884-49BC-7644-11B02774F02B}"/>
               </a:ext>
             </a:extLst>
           </p:cNvPr>
@@ -27573,7 +29679,7 @@
           <p:cNvPr id="5" name="footer-left">
             <a:extLst>
               <a:ext uri="{FF2B5EF4-FFF2-40B4-BE49-F238E27FC236}">
-                <a16:creationId xmlns:a16="http://schemas.microsoft.com/office/drawing/2014/main" id="{331A796F-A6A7-7A92-32FC-0F8D106217BB}"/>
+                <a16:creationId xmlns:a16="http://schemas.microsoft.com/office/drawing/2014/main" id="{10FE2F29-B0A8-BD57-3D65-0704496C43EF}"/>
               </a:ext>
             </a:extLst>
           </p:cNvPr>
@@ -27619,7 +29725,7 @@
           <p:cNvPr id="6" name="footer-mid">
             <a:extLst>
               <a:ext uri="{FF2B5EF4-FFF2-40B4-BE49-F238E27FC236}">
-                <a16:creationId xmlns:a16="http://schemas.microsoft.com/office/drawing/2014/main" id="{E98E7CF6-A5B6-8490-3577-CC872EC55313}"/>
+                <a16:creationId xmlns:a16="http://schemas.microsoft.com/office/drawing/2014/main" id="{7D999F83-5992-B306-3502-A95755F010F0}"/>
               </a:ext>
             </a:extLst>
           </p:cNvPr>
@@ -27665,7 +29771,7 @@
           <p:cNvPr id="7" name="page-num">
             <a:extLst>
               <a:ext uri="{FF2B5EF4-FFF2-40B4-BE49-F238E27FC236}">
-                <a16:creationId xmlns:a16="http://schemas.microsoft.com/office/drawing/2014/main" id="{ACF05ADE-8502-AC1D-B4BC-60417B4DA6FE}"/>
+                <a16:creationId xmlns:a16="http://schemas.microsoft.com/office/drawing/2014/main" id="{026B463A-71F8-601B-CB5D-B922B01B4212}"/>
               </a:ext>
             </a:extLst>
           </p:cNvPr>
@@ -27711,7 +29817,7 @@
           <p:cNvPr id="8" name="section-label">
             <a:extLst>
               <a:ext uri="{FF2B5EF4-FFF2-40B4-BE49-F238E27FC236}">
-                <a16:creationId xmlns:a16="http://schemas.microsoft.com/office/drawing/2014/main" id="{7293605D-A90C-DC8D-BB47-AA3F6DF45620}"/>
+                <a16:creationId xmlns:a16="http://schemas.microsoft.com/office/drawing/2014/main" id="{F671D954-81DD-1C33-0822-A272C48E2B21}"/>
               </a:ext>
             </a:extLst>
           </p:cNvPr>
@@ -27757,7 +29863,7 @@
           <p:cNvPr id="10" name="图片 9">
             <a:extLst>
               <a:ext uri="{FF2B5EF4-FFF2-40B4-BE49-F238E27FC236}">
-                <a16:creationId xmlns:a16="http://schemas.microsoft.com/office/drawing/2014/main" id="{E9A7E130-CF7D-1FB9-A820-B599FBAC8126}"/>
+                <a16:creationId xmlns:a16="http://schemas.microsoft.com/office/drawing/2014/main" id="{FF98A262-6AF6-72B5-4D28-B3F3659FEE23}"/>
               </a:ext>
             </a:extLst>
           </p:cNvPr>
@@ -27793,7 +29899,7 @@
           <p:cNvPr id="11" name="title">
             <a:extLst>
               <a:ext uri="{FF2B5EF4-FFF2-40B4-BE49-F238E27FC236}">
-                <a16:creationId xmlns:a16="http://schemas.microsoft.com/office/drawing/2014/main" id="{55605FF9-4AA6-FA78-2AA8-5CC14A769523}"/>
+                <a16:creationId xmlns:a16="http://schemas.microsoft.com/office/drawing/2014/main" id="{5447A3E4-5C60-5082-F528-E18646879EA9}"/>
               </a:ext>
             </a:extLst>
           </p:cNvPr>
@@ -27839,7 +29945,7 @@
           <p:cNvPr id="12" name="subtitle">
             <a:extLst>
               <a:ext uri="{FF2B5EF4-FFF2-40B4-BE49-F238E27FC236}">
-                <a16:creationId xmlns:a16="http://schemas.microsoft.com/office/drawing/2014/main" id="{EA5F933F-0983-F68D-DBD4-5BD0DAE9D420}"/>
+                <a16:creationId xmlns:a16="http://schemas.microsoft.com/office/drawing/2014/main" id="{53E03418-97B9-F1F7-62AD-5FF76772E9B4}"/>
               </a:ext>
             </a:extLst>
           </p:cNvPr>
@@ -27885,7 +29991,7 @@
           <p:cNvPr id="13" name="fig-frame">
             <a:extLst>
               <a:ext uri="{FF2B5EF4-FFF2-40B4-BE49-F238E27FC236}">
-                <a16:creationId xmlns:a16="http://schemas.microsoft.com/office/drawing/2014/main" id="{E4B3B66D-EF46-4DFE-B021-B895A875E43C}"/>
+                <a16:creationId xmlns:a16="http://schemas.microsoft.com/office/drawing/2014/main" id="{CA028FE3-4826-84F1-57D9-3D40DA5D7A2F}"/>
               </a:ext>
             </a:extLst>
           </p:cNvPr>
@@ -27939,7 +30045,7 @@
           <p:cNvPr id="15" name="tradeoff">
             <a:extLst>
               <a:ext uri="{FF2B5EF4-FFF2-40B4-BE49-F238E27FC236}">
-                <a16:creationId xmlns:a16="http://schemas.microsoft.com/office/drawing/2014/main" id="{4601170B-3C88-85BC-1321-BD7208B24B8C}"/>
+                <a16:creationId xmlns:a16="http://schemas.microsoft.com/office/drawing/2014/main" id="{85345A17-F2B1-6923-B3A8-4606652D4DA2}"/>
               </a:ext>
             </a:extLst>
           </p:cNvPr>
@@ -27975,7 +30081,7 @@
           <p:cNvPr id="16" name="message">
             <a:extLst>
               <a:ext uri="{FF2B5EF4-FFF2-40B4-BE49-F238E27FC236}">
-                <a16:creationId xmlns:a16="http://schemas.microsoft.com/office/drawing/2014/main" id="{2316C7DD-EFC7-F852-1C50-E6BF8CB54842}"/>
+                <a16:creationId xmlns:a16="http://schemas.microsoft.com/office/drawing/2014/main" id="{D370DB31-1138-DE95-DADF-3104062DFB64}"/>
               </a:ext>
             </a:extLst>
           </p:cNvPr>
@@ -28029,7 +30135,7 @@
           <p:cNvPr id="17" name="message-text">
             <a:extLst>
               <a:ext uri="{FF2B5EF4-FFF2-40B4-BE49-F238E27FC236}">
-                <a16:creationId xmlns:a16="http://schemas.microsoft.com/office/drawing/2014/main" id="{0BD841D5-3EDD-334D-81D2-9C8E9133611C}"/>
+                <a16:creationId xmlns:a16="http://schemas.microsoft.com/office/drawing/2014/main" id="{A532BB55-42DB-7711-6E7F-1944974E467C}"/>
               </a:ext>
             </a:extLst>
           </p:cNvPr>
@@ -28073,7 +30179,7 @@
     </p:spTree>
     <p:extLst>
       <p:ext uri="{BB962C8B-B14F-4D97-AF65-F5344CB8AC3E}">
-        <p14:creationId xmlns:p14="http://schemas.microsoft.com/office/powerpoint/2010/main" val="3122203889"/>
+        <p14:creationId xmlns:p14="http://schemas.microsoft.com/office/powerpoint/2010/main" val="804996914"/>
       </p:ext>
     </p:extLst>
   </p:cSld>

--- a/docs/WatermarkScope_FYP_Viva.pptx
+++ b/docs/WatermarkScope_FYP_Viva.pptx
@@ -205,7 +205,7 @@
             </a:lvl1pPr>
           </a:lstStyle>
           <a:p>
-            <a:fld id="{85281228-3089-4FCA-A605-0434D7BA9FB0}" type="datetimeFigureOut">
+            <a:fld id="{91BE9077-09E9-44C6-AC7A-6C0347E82C42}" type="datetimeFigureOut">
               <a:rPr lang="zh-CN" altLang="en-US" smtClean="0"/>
               <a:t>2026/5/14</a:t>
             </a:fld>
@@ -363,7 +363,7 @@
             </a:lvl1pPr>
           </a:lstStyle>
           <a:p>
-            <a:fld id="{1A468A67-5D54-486F-A7C4-04CDC13CD5CC}" type="slidenum">
+            <a:fld id="{714CFD40-5120-4F1D-A4D7-45A58DB44D50}" type="slidenum">
               <a:rPr lang="zh-CN" altLang="en-US" smtClean="0"/>
               <a:t>‹#›</a:t>
             </a:fld>
@@ -374,7 +374,7 @@
     </p:spTree>
     <p:extLst>
       <p:ext uri="{BB962C8B-B14F-4D97-AF65-F5344CB8AC3E}">
-        <p14:creationId xmlns:p14="http://schemas.microsoft.com/office/powerpoint/2010/main" val="3084441103"/>
+        <p14:creationId xmlns:p14="http://schemas.microsoft.com/office/powerpoint/2010/main" val="3870856468"/>
       </p:ext>
     </p:extLst>
   </p:cSld>
@@ -541,7 +541,7 @@
           <a:bodyPr/>
           <a:lstStyle/>
           <a:p>
-            <a:fld id="{1A468A67-5D54-486F-A7C4-04CDC13CD5CC}" type="slidenum">
+            <a:fld id="{714CFD40-5120-4F1D-A4D7-45A58DB44D50}" type="slidenum">
               <a:rPr lang="zh-CN" altLang="en-US" smtClean="0"/>
               <a:t>1</a:t>
             </a:fld>
@@ -552,7 +552,7 @@
     </p:spTree>
     <p:extLst>
       <p:ext uri="{BB962C8B-B14F-4D97-AF65-F5344CB8AC3E}">
-        <p14:creationId xmlns:p14="http://schemas.microsoft.com/office/powerpoint/2010/main" val="1681325612"/>
+        <p14:creationId xmlns:p14="http://schemas.microsoft.com/office/powerpoint/2010/main" val="1434811415"/>
       </p:ext>
     </p:extLst>
   </p:cSld>
@@ -629,7 +629,7 @@
           <a:bodyPr/>
           <a:lstStyle/>
           <a:p>
-            <a:fld id="{1A468A67-5D54-486F-A7C4-04CDC13CD5CC}" type="slidenum">
+            <a:fld id="{714CFD40-5120-4F1D-A4D7-45A58DB44D50}" type="slidenum">
               <a:rPr lang="zh-CN" altLang="en-US" smtClean="0"/>
               <a:t>10</a:t>
             </a:fld>
@@ -640,7 +640,7 @@
     </p:spTree>
     <p:extLst>
       <p:ext uri="{BB962C8B-B14F-4D97-AF65-F5344CB8AC3E}">
-        <p14:creationId xmlns:p14="http://schemas.microsoft.com/office/powerpoint/2010/main" val="525471276"/>
+        <p14:creationId xmlns:p14="http://schemas.microsoft.com/office/powerpoint/2010/main" val="1924623276"/>
       </p:ext>
     </p:extLst>
   </p:cSld>
@@ -696,7 +696,7 @@
           <a:p>
             <a:r>
               <a:rPr lang="en-US" altLang="zh-CN"/>
-              <a:t>My Q&amp;A strategy is to answer directly and then state the boundary. I can defend the framework, qualify finite denominators, and refuse claims that the project does not support.</a:t>
+              <a:t>In Q&amp;A, I should keep answers short. First I answer directly. Then I state the boundary, such as denominator, control, or access model. If needed, I point to the claim boundary file, manifest, or viva check script.</a:t>
             </a:r>
             <a:endParaRPr lang="zh-CN" altLang="en-US"/>
           </a:p>
@@ -717,7 +717,7 @@
           <a:bodyPr/>
           <a:lstStyle/>
           <a:p>
-            <a:fld id="{1A468A67-5D54-486F-A7C4-04CDC13CD5CC}" type="slidenum">
+            <a:fld id="{714CFD40-5120-4F1D-A4D7-45A58DB44D50}" type="slidenum">
               <a:rPr lang="zh-CN" altLang="en-US" smtClean="0"/>
               <a:t>11</a:t>
             </a:fld>
@@ -728,7 +728,7 @@
     </p:spTree>
     <p:extLst>
       <p:ext uri="{BB962C8B-B14F-4D97-AF65-F5344CB8AC3E}">
-        <p14:creationId xmlns:p14="http://schemas.microsoft.com/office/powerpoint/2010/main" val="1752726597"/>
+        <p14:creationId xmlns:p14="http://schemas.microsoft.com/office/powerpoint/2010/main" val="3287107407"/>
       </p:ext>
     </p:extLst>
   </p:cSld>
@@ -784,7 +784,7 @@
           <a:p>
             <a:r>
               <a:rPr lang="en-US" altLang="zh-CN"/>
-              <a:t>For future work, the FYP artifact is the base. I plan to develop the benchmark work toward TOSEM and the other four workstreams toward EMNLP-style papers. These are planned continuations, not extra claims in the submitted dissertation.</a:t>
+              <a:t>For future work, the FYP artifact is the base. The benchmark work can be developed toward TOSEM, and the other four workstreams can be developed toward EMNLP-style papers. These are planned continuations. They are not extra claims added to the submitted dissertation.</a:t>
             </a:r>
             <a:endParaRPr lang="zh-CN" altLang="en-US"/>
           </a:p>
@@ -805,7 +805,7 @@
           <a:bodyPr/>
           <a:lstStyle/>
           <a:p>
-            <a:fld id="{1A468A67-5D54-486F-A7C4-04CDC13CD5CC}" type="slidenum">
+            <a:fld id="{714CFD40-5120-4F1D-A4D7-45A58DB44D50}" type="slidenum">
               <a:rPr lang="zh-CN" altLang="en-US" smtClean="0"/>
               <a:t>12</a:t>
             </a:fld>
@@ -816,7 +816,7 @@
     </p:spTree>
     <p:extLst>
       <p:ext uri="{BB962C8B-B14F-4D97-AF65-F5344CB8AC3E}">
-        <p14:creationId xmlns:p14="http://schemas.microsoft.com/office/powerpoint/2010/main" val="3269711802"/>
+        <p14:creationId xmlns:p14="http://schemas.microsoft.com/office/powerpoint/2010/main" val="1367902359"/>
       </p:ext>
     </p:extLst>
   </p:cSld>
@@ -893,7 +893,7 @@
           <a:bodyPr/>
           <a:lstStyle/>
           <a:p>
-            <a:fld id="{1A468A67-5D54-486F-A7C4-04CDC13CD5CC}" type="slidenum">
+            <a:fld id="{714CFD40-5120-4F1D-A4D7-45A58DB44D50}" type="slidenum">
               <a:rPr lang="zh-CN" altLang="en-US" smtClean="0"/>
               <a:t>13</a:t>
             </a:fld>
@@ -904,7 +904,7 @@
     </p:spTree>
     <p:extLst>
       <p:ext uri="{BB962C8B-B14F-4D97-AF65-F5344CB8AC3E}">
-        <p14:creationId xmlns:p14="http://schemas.microsoft.com/office/powerpoint/2010/main" val="3144115620"/>
+        <p14:creationId xmlns:p14="http://schemas.microsoft.com/office/powerpoint/2010/main" val="89522375"/>
       </p:ext>
     </p:extLst>
   </p:cSld>
@@ -981,7 +981,7 @@
           <a:bodyPr/>
           <a:lstStyle/>
           <a:p>
-            <a:fld id="{1A468A67-5D54-486F-A7C4-04CDC13CD5CC}" type="slidenum">
+            <a:fld id="{714CFD40-5120-4F1D-A4D7-45A58DB44D50}" type="slidenum">
               <a:rPr lang="zh-CN" altLang="en-US" smtClean="0"/>
               <a:t>14</a:t>
             </a:fld>
@@ -992,7 +992,7 @@
     </p:spTree>
     <p:extLst>
       <p:ext uri="{BB962C8B-B14F-4D97-AF65-F5344CB8AC3E}">
-        <p14:creationId xmlns:p14="http://schemas.microsoft.com/office/powerpoint/2010/main" val="3283950577"/>
+        <p14:creationId xmlns:p14="http://schemas.microsoft.com/office/powerpoint/2010/main" val="3392795912"/>
       </p:ext>
     </p:extLst>
   </p:cSld>
@@ -1069,7 +1069,7 @@
           <a:bodyPr/>
           <a:lstStyle/>
           <a:p>
-            <a:fld id="{1A468A67-5D54-486F-A7C4-04CDC13CD5CC}" type="slidenum">
+            <a:fld id="{714CFD40-5120-4F1D-A4D7-45A58DB44D50}" type="slidenum">
               <a:rPr lang="zh-CN" altLang="en-US" smtClean="0"/>
               <a:t>15</a:t>
             </a:fld>
@@ -1080,7 +1080,7 @@
     </p:spTree>
     <p:extLst>
       <p:ext uri="{BB962C8B-B14F-4D97-AF65-F5344CB8AC3E}">
-        <p14:creationId xmlns:p14="http://schemas.microsoft.com/office/powerpoint/2010/main" val="370455027"/>
+        <p14:creationId xmlns:p14="http://schemas.microsoft.com/office/powerpoint/2010/main" val="432348064"/>
       </p:ext>
     </p:extLst>
   </p:cSld>
@@ -1157,7 +1157,7 @@
           <a:bodyPr/>
           <a:lstStyle/>
           <a:p>
-            <a:fld id="{1A468A67-5D54-486F-A7C4-04CDC13CD5CC}" type="slidenum">
+            <a:fld id="{714CFD40-5120-4F1D-A4D7-45A58DB44D50}" type="slidenum">
               <a:rPr lang="zh-CN" altLang="en-US" smtClean="0"/>
               <a:t>16</a:t>
             </a:fld>
@@ -1168,7 +1168,7 @@
     </p:spTree>
     <p:extLst>
       <p:ext uri="{BB962C8B-B14F-4D97-AF65-F5344CB8AC3E}">
-        <p14:creationId xmlns:p14="http://schemas.microsoft.com/office/powerpoint/2010/main" val="1069782368"/>
+        <p14:creationId xmlns:p14="http://schemas.microsoft.com/office/powerpoint/2010/main" val="868235887"/>
       </p:ext>
     </p:extLst>
   </p:cSld>
@@ -1245,7 +1245,7 @@
           <a:bodyPr/>
           <a:lstStyle/>
           <a:p>
-            <a:fld id="{1A468A67-5D54-486F-A7C4-04CDC13CD5CC}" type="slidenum">
+            <a:fld id="{714CFD40-5120-4F1D-A4D7-45A58DB44D50}" type="slidenum">
               <a:rPr lang="zh-CN" altLang="en-US" smtClean="0"/>
               <a:t>2</a:t>
             </a:fld>
@@ -1256,7 +1256,7 @@
     </p:spTree>
     <p:extLst>
       <p:ext uri="{BB962C8B-B14F-4D97-AF65-F5344CB8AC3E}">
-        <p14:creationId xmlns:p14="http://schemas.microsoft.com/office/powerpoint/2010/main" val="2956369062"/>
+        <p14:creationId xmlns:p14="http://schemas.microsoft.com/office/powerpoint/2010/main" val="3189013636"/>
       </p:ext>
     </p:extLst>
   </p:cSld>
@@ -1333,7 +1333,7 @@
           <a:bodyPr/>
           <a:lstStyle/>
           <a:p>
-            <a:fld id="{1A468A67-5D54-486F-A7C4-04CDC13CD5CC}" type="slidenum">
+            <a:fld id="{714CFD40-5120-4F1D-A4D7-45A58DB44D50}" type="slidenum">
               <a:rPr lang="zh-CN" altLang="en-US" smtClean="0"/>
               <a:t>3</a:t>
             </a:fld>
@@ -1344,7 +1344,7 @@
     </p:spTree>
     <p:extLst>
       <p:ext uri="{BB962C8B-B14F-4D97-AF65-F5344CB8AC3E}">
-        <p14:creationId xmlns:p14="http://schemas.microsoft.com/office/powerpoint/2010/main" val="880509130"/>
+        <p14:creationId xmlns:p14="http://schemas.microsoft.com/office/powerpoint/2010/main" val="265778254"/>
       </p:ext>
     </p:extLst>
   </p:cSld>
@@ -1421,7 +1421,7 @@
           <a:bodyPr/>
           <a:lstStyle/>
           <a:p>
-            <a:fld id="{1A468A67-5D54-486F-A7C4-04CDC13CD5CC}" type="slidenum">
+            <a:fld id="{714CFD40-5120-4F1D-A4D7-45A58DB44D50}" type="slidenum">
               <a:rPr lang="zh-CN" altLang="en-US" smtClean="0"/>
               <a:t>4</a:t>
             </a:fld>
@@ -1432,7 +1432,7 @@
     </p:spTree>
     <p:extLst>
       <p:ext uri="{BB962C8B-B14F-4D97-AF65-F5344CB8AC3E}">
-        <p14:creationId xmlns:p14="http://schemas.microsoft.com/office/powerpoint/2010/main" val="3928941091"/>
+        <p14:creationId xmlns:p14="http://schemas.microsoft.com/office/powerpoint/2010/main" val="4265507980"/>
       </p:ext>
     </p:extLst>
   </p:cSld>
@@ -1509,7 +1509,7 @@
           <a:bodyPr/>
           <a:lstStyle/>
           <a:p>
-            <a:fld id="{1A468A67-5D54-486F-A7C4-04CDC13CD5CC}" type="slidenum">
+            <a:fld id="{714CFD40-5120-4F1D-A4D7-45A58DB44D50}" type="slidenum">
               <a:rPr lang="zh-CN" altLang="en-US" smtClean="0"/>
               <a:t>5</a:t>
             </a:fld>
@@ -1520,7 +1520,7 @@
     </p:spTree>
     <p:extLst>
       <p:ext uri="{BB962C8B-B14F-4D97-AF65-F5344CB8AC3E}">
-        <p14:creationId xmlns:p14="http://schemas.microsoft.com/office/powerpoint/2010/main" val="175569236"/>
+        <p14:creationId xmlns:p14="http://schemas.microsoft.com/office/powerpoint/2010/main" val="2906044749"/>
       </p:ext>
     </p:extLst>
   </p:cSld>
@@ -1597,7 +1597,7 @@
           <a:bodyPr/>
           <a:lstStyle/>
           <a:p>
-            <a:fld id="{1A468A67-5D54-486F-A7C4-04CDC13CD5CC}" type="slidenum">
+            <a:fld id="{714CFD40-5120-4F1D-A4D7-45A58DB44D50}" type="slidenum">
               <a:rPr lang="zh-CN" altLang="en-US" smtClean="0"/>
               <a:t>6</a:t>
             </a:fld>
@@ -1608,7 +1608,7 @@
     </p:spTree>
     <p:extLst>
       <p:ext uri="{BB962C8B-B14F-4D97-AF65-F5344CB8AC3E}">
-        <p14:creationId xmlns:p14="http://schemas.microsoft.com/office/powerpoint/2010/main" val="3591423947"/>
+        <p14:creationId xmlns:p14="http://schemas.microsoft.com/office/powerpoint/2010/main" val="2271478986"/>
       </p:ext>
     </p:extLst>
   </p:cSld>
@@ -1685,7 +1685,7 @@
           <a:bodyPr/>
           <a:lstStyle/>
           <a:p>
-            <a:fld id="{1A468A67-5D54-486F-A7C4-04CDC13CD5CC}" type="slidenum">
+            <a:fld id="{714CFD40-5120-4F1D-A4D7-45A58DB44D50}" type="slidenum">
               <a:rPr lang="zh-CN" altLang="en-US" smtClean="0"/>
               <a:t>7</a:t>
             </a:fld>
@@ -1696,7 +1696,7 @@
     </p:spTree>
     <p:extLst>
       <p:ext uri="{BB962C8B-B14F-4D97-AF65-F5344CB8AC3E}">
-        <p14:creationId xmlns:p14="http://schemas.microsoft.com/office/powerpoint/2010/main" val="3117118007"/>
+        <p14:creationId xmlns:p14="http://schemas.microsoft.com/office/powerpoint/2010/main" val="1880081235"/>
       </p:ext>
     </p:extLst>
   </p:cSld>
@@ -1773,7 +1773,7 @@
           <a:bodyPr/>
           <a:lstStyle/>
           <a:p>
-            <a:fld id="{1A468A67-5D54-486F-A7C4-04CDC13CD5CC}" type="slidenum">
+            <a:fld id="{714CFD40-5120-4F1D-A4D7-45A58DB44D50}" type="slidenum">
               <a:rPr lang="zh-CN" altLang="en-US" smtClean="0"/>
               <a:t>8</a:t>
             </a:fld>
@@ -1784,7 +1784,7 @@
     </p:spTree>
     <p:extLst>
       <p:ext uri="{BB962C8B-B14F-4D97-AF65-F5344CB8AC3E}">
-        <p14:creationId xmlns:p14="http://schemas.microsoft.com/office/powerpoint/2010/main" val="1911755827"/>
+        <p14:creationId xmlns:p14="http://schemas.microsoft.com/office/powerpoint/2010/main" val="265444633"/>
       </p:ext>
     </p:extLst>
   </p:cSld>
@@ -1861,7 +1861,7 @@
           <a:bodyPr/>
           <a:lstStyle/>
           <a:p>
-            <a:fld id="{1A468A67-5D54-486F-A7C4-04CDC13CD5CC}" type="slidenum">
+            <a:fld id="{714CFD40-5120-4F1D-A4D7-45A58DB44D50}" type="slidenum">
               <a:rPr lang="zh-CN" altLang="en-US" smtClean="0"/>
               <a:t>9</a:t>
             </a:fld>
@@ -1872,7 +1872,7 @@
     </p:spTree>
     <p:extLst>
       <p:ext uri="{BB962C8B-B14F-4D97-AF65-F5344CB8AC3E}">
-        <p14:creationId xmlns:p14="http://schemas.microsoft.com/office/powerpoint/2010/main" val="1614601057"/>
+        <p14:creationId xmlns:p14="http://schemas.microsoft.com/office/powerpoint/2010/main" val="3907000373"/>
       </p:ext>
     </p:extLst>
   </p:cSld>
@@ -1904,7 +1904,7 @@
           <p:cNvPr id="2" name="标题 1">
             <a:extLst>
               <a:ext uri="{FF2B5EF4-FFF2-40B4-BE49-F238E27FC236}">
-                <a16:creationId xmlns:a16="http://schemas.microsoft.com/office/drawing/2014/main" id="{34C68F41-D797-587C-29D2-C4A9810ECE2C}"/>
+                <a16:creationId xmlns:a16="http://schemas.microsoft.com/office/drawing/2014/main" id="{33F3102D-584C-C996-12F2-C8BE3F063FF7}"/>
               </a:ext>
             </a:extLst>
           </p:cNvPr>
@@ -1941,7 +1941,7 @@
           <p:cNvPr id="3" name="副标题 2">
             <a:extLst>
               <a:ext uri="{FF2B5EF4-FFF2-40B4-BE49-F238E27FC236}">
-                <a16:creationId xmlns:a16="http://schemas.microsoft.com/office/drawing/2014/main" id="{2FA2C9FD-B45E-FB23-8B5B-00449FF245FF}"/>
+                <a16:creationId xmlns:a16="http://schemas.microsoft.com/office/drawing/2014/main" id="{68D06C39-1422-36F1-5FAD-8F1214751D05}"/>
               </a:ext>
             </a:extLst>
           </p:cNvPr>
@@ -2011,7 +2011,7 @@
           <p:cNvPr id="4" name="日期占位符 3">
             <a:extLst>
               <a:ext uri="{FF2B5EF4-FFF2-40B4-BE49-F238E27FC236}">
-                <a16:creationId xmlns:a16="http://schemas.microsoft.com/office/drawing/2014/main" id="{A26BD00B-F927-E107-496D-7F8547EF82F4}"/>
+                <a16:creationId xmlns:a16="http://schemas.microsoft.com/office/drawing/2014/main" id="{D29308C1-0E55-B9F3-63ED-21C5D6057849}"/>
               </a:ext>
             </a:extLst>
           </p:cNvPr>
@@ -2027,7 +2027,7 @@
           <a:bodyPr/>
           <a:lstStyle/>
           <a:p>
-            <a:fld id="{171713EC-7EE6-46E1-B0CF-23D403B67E2F}" type="datetimeFigureOut">
+            <a:fld id="{D3B1AC3E-8B82-41EE-A0A8-5237A984D2A4}" type="datetimeFigureOut">
               <a:rPr lang="zh-CN" altLang="en-US" smtClean="0"/>
               <a:t>2026/5/14</a:t>
             </a:fld>
@@ -2040,7 +2040,7 @@
           <p:cNvPr id="5" name="页脚占位符 4">
             <a:extLst>
               <a:ext uri="{FF2B5EF4-FFF2-40B4-BE49-F238E27FC236}">
-                <a16:creationId xmlns:a16="http://schemas.microsoft.com/office/drawing/2014/main" id="{B77FE85C-6195-0FDF-879B-9E82FEA3C8DF}"/>
+                <a16:creationId xmlns:a16="http://schemas.microsoft.com/office/drawing/2014/main" id="{FB5362F5-BD1C-7DB8-D255-C009D5DAB4D1}"/>
               </a:ext>
             </a:extLst>
           </p:cNvPr>
@@ -2065,7 +2065,7 @@
           <p:cNvPr id="6" name="灯片编号占位符 5">
             <a:extLst>
               <a:ext uri="{FF2B5EF4-FFF2-40B4-BE49-F238E27FC236}">
-                <a16:creationId xmlns:a16="http://schemas.microsoft.com/office/drawing/2014/main" id="{56C4D90A-6BAE-CE90-3591-5ADB9E734686}"/>
+                <a16:creationId xmlns:a16="http://schemas.microsoft.com/office/drawing/2014/main" id="{6A56B47F-FCDA-8B11-72F4-2530986DE169}"/>
               </a:ext>
             </a:extLst>
           </p:cNvPr>
@@ -2081,7 +2081,7 @@
           <a:bodyPr/>
           <a:lstStyle/>
           <a:p>
-            <a:fld id="{50160C1B-AFB7-4B38-A4B0-10BD9837455B}" type="slidenum">
+            <a:fld id="{CAA57623-5CDA-44D9-88A2-506647CDCE2F}" type="slidenum">
               <a:rPr lang="zh-CN" altLang="en-US" smtClean="0"/>
               <a:t>‹#›</a:t>
             </a:fld>
@@ -2092,7 +2092,7 @@
     </p:spTree>
     <p:extLst>
       <p:ext uri="{BB962C8B-B14F-4D97-AF65-F5344CB8AC3E}">
-        <p14:creationId xmlns:p14="http://schemas.microsoft.com/office/powerpoint/2010/main" val="4244868249"/>
+        <p14:creationId xmlns:p14="http://schemas.microsoft.com/office/powerpoint/2010/main" val="2890925349"/>
       </p:ext>
     </p:extLst>
   </p:cSld>
@@ -2124,7 +2124,7 @@
           <p:cNvPr id="2" name="标题 1">
             <a:extLst>
               <a:ext uri="{FF2B5EF4-FFF2-40B4-BE49-F238E27FC236}">
-                <a16:creationId xmlns:a16="http://schemas.microsoft.com/office/drawing/2014/main" id="{B39979C2-DFD3-AB50-3077-AAE5FF8F7CFF}"/>
+                <a16:creationId xmlns:a16="http://schemas.microsoft.com/office/drawing/2014/main" id="{E3039DCC-BDED-0DE6-32AC-CAF8950FAACB}"/>
               </a:ext>
             </a:extLst>
           </p:cNvPr>
@@ -2152,7 +2152,7 @@
           <p:cNvPr id="3" name="竖排文字占位符 2">
             <a:extLst>
               <a:ext uri="{FF2B5EF4-FFF2-40B4-BE49-F238E27FC236}">
-                <a16:creationId xmlns:a16="http://schemas.microsoft.com/office/drawing/2014/main" id="{A5137330-596C-170B-5BBC-0581BE3E2F83}"/>
+                <a16:creationId xmlns:a16="http://schemas.microsoft.com/office/drawing/2014/main" id="{E2B4E459-2D77-3289-B0CC-047E00FE284B}"/>
               </a:ext>
             </a:extLst>
           </p:cNvPr>
@@ -2209,7 +2209,7 @@
           <p:cNvPr id="4" name="日期占位符 3">
             <a:extLst>
               <a:ext uri="{FF2B5EF4-FFF2-40B4-BE49-F238E27FC236}">
-                <a16:creationId xmlns:a16="http://schemas.microsoft.com/office/drawing/2014/main" id="{0FE6F85F-39E5-088C-FF3E-38FF965F7048}"/>
+                <a16:creationId xmlns:a16="http://schemas.microsoft.com/office/drawing/2014/main" id="{929E210F-3087-58B9-55BF-9B158BBD60C4}"/>
               </a:ext>
             </a:extLst>
           </p:cNvPr>
@@ -2225,7 +2225,7 @@
           <a:bodyPr/>
           <a:lstStyle/>
           <a:p>
-            <a:fld id="{171713EC-7EE6-46E1-B0CF-23D403B67E2F}" type="datetimeFigureOut">
+            <a:fld id="{D3B1AC3E-8B82-41EE-A0A8-5237A984D2A4}" type="datetimeFigureOut">
               <a:rPr lang="zh-CN" altLang="en-US" smtClean="0"/>
               <a:t>2026/5/14</a:t>
             </a:fld>
@@ -2238,7 +2238,7 @@
           <p:cNvPr id="5" name="页脚占位符 4">
             <a:extLst>
               <a:ext uri="{FF2B5EF4-FFF2-40B4-BE49-F238E27FC236}">
-                <a16:creationId xmlns:a16="http://schemas.microsoft.com/office/drawing/2014/main" id="{EC76FE69-A611-F64A-66BC-79D4ED7D3A06}"/>
+                <a16:creationId xmlns:a16="http://schemas.microsoft.com/office/drawing/2014/main" id="{F4BB797E-20F1-1814-75B7-0AE06293F198}"/>
               </a:ext>
             </a:extLst>
           </p:cNvPr>
@@ -2263,7 +2263,7 @@
           <p:cNvPr id="6" name="灯片编号占位符 5">
             <a:extLst>
               <a:ext uri="{FF2B5EF4-FFF2-40B4-BE49-F238E27FC236}">
-                <a16:creationId xmlns:a16="http://schemas.microsoft.com/office/drawing/2014/main" id="{3F6C58AF-8251-9411-CE9B-E8AAA7206CF3}"/>
+                <a16:creationId xmlns:a16="http://schemas.microsoft.com/office/drawing/2014/main" id="{BD0A0D06-AE94-74C6-8CB5-42C80FEA3B6B}"/>
               </a:ext>
             </a:extLst>
           </p:cNvPr>
@@ -2279,7 +2279,7 @@
           <a:bodyPr/>
           <a:lstStyle/>
           <a:p>
-            <a:fld id="{50160C1B-AFB7-4B38-A4B0-10BD9837455B}" type="slidenum">
+            <a:fld id="{CAA57623-5CDA-44D9-88A2-506647CDCE2F}" type="slidenum">
               <a:rPr lang="zh-CN" altLang="en-US" smtClean="0"/>
               <a:t>‹#›</a:t>
             </a:fld>
@@ -2290,7 +2290,7 @@
     </p:spTree>
     <p:extLst>
       <p:ext uri="{BB962C8B-B14F-4D97-AF65-F5344CB8AC3E}">
-        <p14:creationId xmlns:p14="http://schemas.microsoft.com/office/powerpoint/2010/main" val="3757358608"/>
+        <p14:creationId xmlns:p14="http://schemas.microsoft.com/office/powerpoint/2010/main" val="1854684706"/>
       </p:ext>
     </p:extLst>
   </p:cSld>
@@ -2322,7 +2322,7 @@
           <p:cNvPr id="2" name="竖排标题 1">
             <a:extLst>
               <a:ext uri="{FF2B5EF4-FFF2-40B4-BE49-F238E27FC236}">
-                <a16:creationId xmlns:a16="http://schemas.microsoft.com/office/drawing/2014/main" id="{BE97CFF5-956E-342E-9AB5-C400DFF67AD1}"/>
+                <a16:creationId xmlns:a16="http://schemas.microsoft.com/office/drawing/2014/main" id="{8385AC17-AB61-DD57-04B4-481EC3C41EFC}"/>
               </a:ext>
             </a:extLst>
           </p:cNvPr>
@@ -2355,7 +2355,7 @@
           <p:cNvPr id="3" name="竖排文字占位符 2">
             <a:extLst>
               <a:ext uri="{FF2B5EF4-FFF2-40B4-BE49-F238E27FC236}">
-                <a16:creationId xmlns:a16="http://schemas.microsoft.com/office/drawing/2014/main" id="{CFE3C1E5-C169-0ADD-D6AB-73A68CA1FAB8}"/>
+                <a16:creationId xmlns:a16="http://schemas.microsoft.com/office/drawing/2014/main" id="{5ABB3B6C-032C-9870-7DB2-A87115FD7199}"/>
               </a:ext>
             </a:extLst>
           </p:cNvPr>
@@ -2417,7 +2417,7 @@
           <p:cNvPr id="4" name="日期占位符 3">
             <a:extLst>
               <a:ext uri="{FF2B5EF4-FFF2-40B4-BE49-F238E27FC236}">
-                <a16:creationId xmlns:a16="http://schemas.microsoft.com/office/drawing/2014/main" id="{1CDC9505-8C4D-B060-C220-C5C44B491879}"/>
+                <a16:creationId xmlns:a16="http://schemas.microsoft.com/office/drawing/2014/main" id="{E9042959-765C-BCCD-905F-73E73C9AF794}"/>
               </a:ext>
             </a:extLst>
           </p:cNvPr>
@@ -2433,7 +2433,7 @@
           <a:bodyPr/>
           <a:lstStyle/>
           <a:p>
-            <a:fld id="{171713EC-7EE6-46E1-B0CF-23D403B67E2F}" type="datetimeFigureOut">
+            <a:fld id="{D3B1AC3E-8B82-41EE-A0A8-5237A984D2A4}" type="datetimeFigureOut">
               <a:rPr lang="zh-CN" altLang="en-US" smtClean="0"/>
               <a:t>2026/5/14</a:t>
             </a:fld>
@@ -2446,7 +2446,7 @@
           <p:cNvPr id="5" name="页脚占位符 4">
             <a:extLst>
               <a:ext uri="{FF2B5EF4-FFF2-40B4-BE49-F238E27FC236}">
-                <a16:creationId xmlns:a16="http://schemas.microsoft.com/office/drawing/2014/main" id="{85BBECE3-28E5-CC2C-C499-EC3AB79C56E3}"/>
+                <a16:creationId xmlns:a16="http://schemas.microsoft.com/office/drawing/2014/main" id="{26E01A3D-D8BB-CE44-32C0-631A735984B0}"/>
               </a:ext>
             </a:extLst>
           </p:cNvPr>
@@ -2471,7 +2471,7 @@
           <p:cNvPr id="6" name="灯片编号占位符 5">
             <a:extLst>
               <a:ext uri="{FF2B5EF4-FFF2-40B4-BE49-F238E27FC236}">
-                <a16:creationId xmlns:a16="http://schemas.microsoft.com/office/drawing/2014/main" id="{EEEDB2B8-8FA3-88A4-BA11-E3DF26202BE0}"/>
+                <a16:creationId xmlns:a16="http://schemas.microsoft.com/office/drawing/2014/main" id="{6070299F-395A-7B14-4F38-4A1EF2F494E1}"/>
               </a:ext>
             </a:extLst>
           </p:cNvPr>
@@ -2487,7 +2487,7 @@
           <a:bodyPr/>
           <a:lstStyle/>
           <a:p>
-            <a:fld id="{50160C1B-AFB7-4B38-A4B0-10BD9837455B}" type="slidenum">
+            <a:fld id="{CAA57623-5CDA-44D9-88A2-506647CDCE2F}" type="slidenum">
               <a:rPr lang="zh-CN" altLang="en-US" smtClean="0"/>
               <a:t>‹#›</a:t>
             </a:fld>
@@ -2498,7 +2498,7 @@
     </p:spTree>
     <p:extLst>
       <p:ext uri="{BB962C8B-B14F-4D97-AF65-F5344CB8AC3E}">
-        <p14:creationId xmlns:p14="http://schemas.microsoft.com/office/powerpoint/2010/main" val="510804581"/>
+        <p14:creationId xmlns:p14="http://schemas.microsoft.com/office/powerpoint/2010/main" val="520910871"/>
       </p:ext>
     </p:extLst>
   </p:cSld>
@@ -2530,7 +2530,7 @@
           <p:cNvPr id="2" name="标题 1">
             <a:extLst>
               <a:ext uri="{FF2B5EF4-FFF2-40B4-BE49-F238E27FC236}">
-                <a16:creationId xmlns:a16="http://schemas.microsoft.com/office/drawing/2014/main" id="{D3428F8C-25C3-C14F-6554-64F221EEEAD0}"/>
+                <a16:creationId xmlns:a16="http://schemas.microsoft.com/office/drawing/2014/main" id="{C8400147-5FDE-38B9-8183-1498267B7498}"/>
               </a:ext>
             </a:extLst>
           </p:cNvPr>
@@ -2558,7 +2558,7 @@
           <p:cNvPr id="3" name="内容占位符 2">
             <a:extLst>
               <a:ext uri="{FF2B5EF4-FFF2-40B4-BE49-F238E27FC236}">
-                <a16:creationId xmlns:a16="http://schemas.microsoft.com/office/drawing/2014/main" id="{22E678DB-5BAF-6A68-DC0C-B387B60AC34B}"/>
+                <a16:creationId xmlns:a16="http://schemas.microsoft.com/office/drawing/2014/main" id="{832E4414-7E51-38B4-298F-A32A9F919C72}"/>
               </a:ext>
             </a:extLst>
           </p:cNvPr>
@@ -2615,7 +2615,7 @@
           <p:cNvPr id="4" name="日期占位符 3">
             <a:extLst>
               <a:ext uri="{FF2B5EF4-FFF2-40B4-BE49-F238E27FC236}">
-                <a16:creationId xmlns:a16="http://schemas.microsoft.com/office/drawing/2014/main" id="{92C9488E-60D1-63FF-6066-80793B1A9A70}"/>
+                <a16:creationId xmlns:a16="http://schemas.microsoft.com/office/drawing/2014/main" id="{D21775B6-2CA9-79C0-2F1A-794F235340CE}"/>
               </a:ext>
             </a:extLst>
           </p:cNvPr>
@@ -2631,7 +2631,7 @@
           <a:bodyPr/>
           <a:lstStyle/>
           <a:p>
-            <a:fld id="{171713EC-7EE6-46E1-B0CF-23D403B67E2F}" type="datetimeFigureOut">
+            <a:fld id="{D3B1AC3E-8B82-41EE-A0A8-5237A984D2A4}" type="datetimeFigureOut">
               <a:rPr lang="zh-CN" altLang="en-US" smtClean="0"/>
               <a:t>2026/5/14</a:t>
             </a:fld>
@@ -2644,7 +2644,7 @@
           <p:cNvPr id="5" name="页脚占位符 4">
             <a:extLst>
               <a:ext uri="{FF2B5EF4-FFF2-40B4-BE49-F238E27FC236}">
-                <a16:creationId xmlns:a16="http://schemas.microsoft.com/office/drawing/2014/main" id="{EB9834A9-5E13-E82F-B209-FF25ECB667C9}"/>
+                <a16:creationId xmlns:a16="http://schemas.microsoft.com/office/drawing/2014/main" id="{0844E6C0-8803-29EB-518D-047AA9553307}"/>
               </a:ext>
             </a:extLst>
           </p:cNvPr>
@@ -2669,7 +2669,7 @@
           <p:cNvPr id="6" name="灯片编号占位符 5">
             <a:extLst>
               <a:ext uri="{FF2B5EF4-FFF2-40B4-BE49-F238E27FC236}">
-                <a16:creationId xmlns:a16="http://schemas.microsoft.com/office/drawing/2014/main" id="{C1841B68-88D7-B30B-8828-53E51EDC99FB}"/>
+                <a16:creationId xmlns:a16="http://schemas.microsoft.com/office/drawing/2014/main" id="{054B9130-926D-2918-7B08-6710EC30A09E}"/>
               </a:ext>
             </a:extLst>
           </p:cNvPr>
@@ -2685,7 +2685,7 @@
           <a:bodyPr/>
           <a:lstStyle/>
           <a:p>
-            <a:fld id="{50160C1B-AFB7-4B38-A4B0-10BD9837455B}" type="slidenum">
+            <a:fld id="{CAA57623-5CDA-44D9-88A2-506647CDCE2F}" type="slidenum">
               <a:rPr lang="zh-CN" altLang="en-US" smtClean="0"/>
               <a:t>‹#›</a:t>
             </a:fld>
@@ -2696,7 +2696,7 @@
     </p:spTree>
     <p:extLst>
       <p:ext uri="{BB962C8B-B14F-4D97-AF65-F5344CB8AC3E}">
-        <p14:creationId xmlns:p14="http://schemas.microsoft.com/office/powerpoint/2010/main" val="636921786"/>
+        <p14:creationId xmlns:p14="http://schemas.microsoft.com/office/powerpoint/2010/main" val="1107270788"/>
       </p:ext>
     </p:extLst>
   </p:cSld>
@@ -2728,7 +2728,7 @@
           <p:cNvPr id="2" name="标题 1">
             <a:extLst>
               <a:ext uri="{FF2B5EF4-FFF2-40B4-BE49-F238E27FC236}">
-                <a16:creationId xmlns:a16="http://schemas.microsoft.com/office/drawing/2014/main" id="{9C1AA43A-B350-7A3C-7DB1-2213DF0DAB65}"/>
+                <a16:creationId xmlns:a16="http://schemas.microsoft.com/office/drawing/2014/main" id="{58DB74CE-9B74-6C33-0F40-87B48A234D24}"/>
               </a:ext>
             </a:extLst>
           </p:cNvPr>
@@ -2765,7 +2765,7 @@
           <p:cNvPr id="3" name="文本占位符 2">
             <a:extLst>
               <a:ext uri="{FF2B5EF4-FFF2-40B4-BE49-F238E27FC236}">
-                <a16:creationId xmlns:a16="http://schemas.microsoft.com/office/drawing/2014/main" id="{E8CF0E5C-AF6C-F78F-F60A-9C6C222A92A4}"/>
+                <a16:creationId xmlns:a16="http://schemas.microsoft.com/office/drawing/2014/main" id="{264A9F92-1E31-86F2-7CA6-F01E6F70152E}"/>
               </a:ext>
             </a:extLst>
           </p:cNvPr>
@@ -2890,7 +2890,7 @@
           <p:cNvPr id="4" name="日期占位符 3">
             <a:extLst>
               <a:ext uri="{FF2B5EF4-FFF2-40B4-BE49-F238E27FC236}">
-                <a16:creationId xmlns:a16="http://schemas.microsoft.com/office/drawing/2014/main" id="{D0917D2A-8F62-3A25-44A4-C009505DA4A7}"/>
+                <a16:creationId xmlns:a16="http://schemas.microsoft.com/office/drawing/2014/main" id="{6A22B957-83CA-A596-4095-9344AEFF2379}"/>
               </a:ext>
             </a:extLst>
           </p:cNvPr>
@@ -2906,7 +2906,7 @@
           <a:bodyPr/>
           <a:lstStyle/>
           <a:p>
-            <a:fld id="{171713EC-7EE6-46E1-B0CF-23D403B67E2F}" type="datetimeFigureOut">
+            <a:fld id="{D3B1AC3E-8B82-41EE-A0A8-5237A984D2A4}" type="datetimeFigureOut">
               <a:rPr lang="zh-CN" altLang="en-US" smtClean="0"/>
               <a:t>2026/5/14</a:t>
             </a:fld>
@@ -2919,7 +2919,7 @@
           <p:cNvPr id="5" name="页脚占位符 4">
             <a:extLst>
               <a:ext uri="{FF2B5EF4-FFF2-40B4-BE49-F238E27FC236}">
-                <a16:creationId xmlns:a16="http://schemas.microsoft.com/office/drawing/2014/main" id="{C9AA0656-1B49-824B-938C-E9D68BE29FAF}"/>
+                <a16:creationId xmlns:a16="http://schemas.microsoft.com/office/drawing/2014/main" id="{EC908DC5-9733-1958-4764-017F9A6C8621}"/>
               </a:ext>
             </a:extLst>
           </p:cNvPr>
@@ -2944,7 +2944,7 @@
           <p:cNvPr id="6" name="灯片编号占位符 5">
             <a:extLst>
               <a:ext uri="{FF2B5EF4-FFF2-40B4-BE49-F238E27FC236}">
-                <a16:creationId xmlns:a16="http://schemas.microsoft.com/office/drawing/2014/main" id="{B13BBB8E-73E1-3FF4-FADE-65790B7E464E}"/>
+                <a16:creationId xmlns:a16="http://schemas.microsoft.com/office/drawing/2014/main" id="{F773B9BA-64B4-344D-A3E9-86C71F184BDF}"/>
               </a:ext>
             </a:extLst>
           </p:cNvPr>
@@ -2960,7 +2960,7 @@
           <a:bodyPr/>
           <a:lstStyle/>
           <a:p>
-            <a:fld id="{50160C1B-AFB7-4B38-A4B0-10BD9837455B}" type="slidenum">
+            <a:fld id="{CAA57623-5CDA-44D9-88A2-506647CDCE2F}" type="slidenum">
               <a:rPr lang="zh-CN" altLang="en-US" smtClean="0"/>
               <a:t>‹#›</a:t>
             </a:fld>
@@ -2971,7 +2971,7 @@
     </p:spTree>
     <p:extLst>
       <p:ext uri="{BB962C8B-B14F-4D97-AF65-F5344CB8AC3E}">
-        <p14:creationId xmlns:p14="http://schemas.microsoft.com/office/powerpoint/2010/main" val="899913055"/>
+        <p14:creationId xmlns:p14="http://schemas.microsoft.com/office/powerpoint/2010/main" val="2447681329"/>
       </p:ext>
     </p:extLst>
   </p:cSld>
@@ -3003,7 +3003,7 @@
           <p:cNvPr id="2" name="标题 1">
             <a:extLst>
               <a:ext uri="{FF2B5EF4-FFF2-40B4-BE49-F238E27FC236}">
-                <a16:creationId xmlns:a16="http://schemas.microsoft.com/office/drawing/2014/main" id="{8B8AECE7-F535-A32C-D1A8-D7AFD6FA63D9}"/>
+                <a16:creationId xmlns:a16="http://schemas.microsoft.com/office/drawing/2014/main" id="{5F5D679D-95C5-4815-FD8B-7D0951CA17C3}"/>
               </a:ext>
             </a:extLst>
           </p:cNvPr>
@@ -3031,7 +3031,7 @@
           <p:cNvPr id="3" name="内容占位符 2">
             <a:extLst>
               <a:ext uri="{FF2B5EF4-FFF2-40B4-BE49-F238E27FC236}">
-                <a16:creationId xmlns:a16="http://schemas.microsoft.com/office/drawing/2014/main" id="{BEEB67EE-EF35-A8E3-3FAA-DBABF8CC54CB}"/>
+                <a16:creationId xmlns:a16="http://schemas.microsoft.com/office/drawing/2014/main" id="{EE06D68B-69D6-613D-7F1F-A85C74AEA411}"/>
               </a:ext>
             </a:extLst>
           </p:cNvPr>
@@ -3093,7 +3093,7 @@
           <p:cNvPr id="4" name="内容占位符 3">
             <a:extLst>
               <a:ext uri="{FF2B5EF4-FFF2-40B4-BE49-F238E27FC236}">
-                <a16:creationId xmlns:a16="http://schemas.microsoft.com/office/drawing/2014/main" id="{46162BD5-639C-080B-1716-EE75FEA5AD6B}"/>
+                <a16:creationId xmlns:a16="http://schemas.microsoft.com/office/drawing/2014/main" id="{3604B389-57E4-108D-68A1-71D3F3533F26}"/>
               </a:ext>
             </a:extLst>
           </p:cNvPr>
@@ -3155,7 +3155,7 @@
           <p:cNvPr id="5" name="日期占位符 4">
             <a:extLst>
               <a:ext uri="{FF2B5EF4-FFF2-40B4-BE49-F238E27FC236}">
-                <a16:creationId xmlns:a16="http://schemas.microsoft.com/office/drawing/2014/main" id="{EDAC84A1-6367-781D-02F5-CC5592858A0B}"/>
+                <a16:creationId xmlns:a16="http://schemas.microsoft.com/office/drawing/2014/main" id="{3E05A71C-B6F5-CC5A-39DC-10BF4174D4B0}"/>
               </a:ext>
             </a:extLst>
           </p:cNvPr>
@@ -3171,7 +3171,7 @@
           <a:bodyPr/>
           <a:lstStyle/>
           <a:p>
-            <a:fld id="{171713EC-7EE6-46E1-B0CF-23D403B67E2F}" type="datetimeFigureOut">
+            <a:fld id="{D3B1AC3E-8B82-41EE-A0A8-5237A984D2A4}" type="datetimeFigureOut">
               <a:rPr lang="zh-CN" altLang="en-US" smtClean="0"/>
               <a:t>2026/5/14</a:t>
             </a:fld>
@@ -3184,7 +3184,7 @@
           <p:cNvPr id="6" name="页脚占位符 5">
             <a:extLst>
               <a:ext uri="{FF2B5EF4-FFF2-40B4-BE49-F238E27FC236}">
-                <a16:creationId xmlns:a16="http://schemas.microsoft.com/office/drawing/2014/main" id="{C580CA3C-C969-2248-8334-6B6DE268B4E3}"/>
+                <a16:creationId xmlns:a16="http://schemas.microsoft.com/office/drawing/2014/main" id="{0295F8DF-FDCB-25C8-8122-946C13B44806}"/>
               </a:ext>
             </a:extLst>
           </p:cNvPr>
@@ -3209,7 +3209,7 @@
           <p:cNvPr id="7" name="灯片编号占位符 6">
             <a:extLst>
               <a:ext uri="{FF2B5EF4-FFF2-40B4-BE49-F238E27FC236}">
-                <a16:creationId xmlns:a16="http://schemas.microsoft.com/office/drawing/2014/main" id="{EFB23C99-E5EB-9E5F-EDA8-221968BF7928}"/>
+                <a16:creationId xmlns:a16="http://schemas.microsoft.com/office/drawing/2014/main" id="{E26E6965-4924-84DB-396A-80147054DC2C}"/>
               </a:ext>
             </a:extLst>
           </p:cNvPr>
@@ -3225,7 +3225,7 @@
           <a:bodyPr/>
           <a:lstStyle/>
           <a:p>
-            <a:fld id="{50160C1B-AFB7-4B38-A4B0-10BD9837455B}" type="slidenum">
+            <a:fld id="{CAA57623-5CDA-44D9-88A2-506647CDCE2F}" type="slidenum">
               <a:rPr lang="zh-CN" altLang="en-US" smtClean="0"/>
               <a:t>‹#›</a:t>
             </a:fld>
@@ -3236,7 +3236,7 @@
     </p:spTree>
     <p:extLst>
       <p:ext uri="{BB962C8B-B14F-4D97-AF65-F5344CB8AC3E}">
-        <p14:creationId xmlns:p14="http://schemas.microsoft.com/office/powerpoint/2010/main" val="3538650253"/>
+        <p14:creationId xmlns:p14="http://schemas.microsoft.com/office/powerpoint/2010/main" val="290252080"/>
       </p:ext>
     </p:extLst>
   </p:cSld>
@@ -3268,7 +3268,7 @@
           <p:cNvPr id="2" name="标题 1">
             <a:extLst>
               <a:ext uri="{FF2B5EF4-FFF2-40B4-BE49-F238E27FC236}">
-                <a16:creationId xmlns:a16="http://schemas.microsoft.com/office/drawing/2014/main" id="{2F81E4A0-EFB2-87BE-AFB6-BA8457F87708}"/>
+                <a16:creationId xmlns:a16="http://schemas.microsoft.com/office/drawing/2014/main" id="{CCEBED80-DCAE-4CC6-1233-18225FC37753}"/>
               </a:ext>
             </a:extLst>
           </p:cNvPr>
@@ -3301,7 +3301,7 @@
           <p:cNvPr id="3" name="文本占位符 2">
             <a:extLst>
               <a:ext uri="{FF2B5EF4-FFF2-40B4-BE49-F238E27FC236}">
-                <a16:creationId xmlns:a16="http://schemas.microsoft.com/office/drawing/2014/main" id="{A79BD7B7-D3A3-EC82-8E8D-DC5F5F5401CA}"/>
+                <a16:creationId xmlns:a16="http://schemas.microsoft.com/office/drawing/2014/main" id="{5A90067D-13EA-5AD1-4013-38A21050AFF3}"/>
               </a:ext>
             </a:extLst>
           </p:cNvPr>
@@ -3372,7 +3372,7 @@
           <p:cNvPr id="4" name="内容占位符 3">
             <a:extLst>
               <a:ext uri="{FF2B5EF4-FFF2-40B4-BE49-F238E27FC236}">
-                <a16:creationId xmlns:a16="http://schemas.microsoft.com/office/drawing/2014/main" id="{FA281930-B71C-DF24-59A5-C89AE1A54A51}"/>
+                <a16:creationId xmlns:a16="http://schemas.microsoft.com/office/drawing/2014/main" id="{44C3B4F8-9C65-9EEA-12E2-625F0751FEA7}"/>
               </a:ext>
             </a:extLst>
           </p:cNvPr>
@@ -3434,7 +3434,7 @@
           <p:cNvPr id="5" name="文本占位符 4">
             <a:extLst>
               <a:ext uri="{FF2B5EF4-FFF2-40B4-BE49-F238E27FC236}">
-                <a16:creationId xmlns:a16="http://schemas.microsoft.com/office/drawing/2014/main" id="{9C4BB3AB-DE09-306A-0D50-B4207D4FA6F9}"/>
+                <a16:creationId xmlns:a16="http://schemas.microsoft.com/office/drawing/2014/main" id="{23E25780-541E-F0BC-A976-1221073F5B06}"/>
               </a:ext>
             </a:extLst>
           </p:cNvPr>
@@ -3505,7 +3505,7 @@
           <p:cNvPr id="6" name="内容占位符 5">
             <a:extLst>
               <a:ext uri="{FF2B5EF4-FFF2-40B4-BE49-F238E27FC236}">
-                <a16:creationId xmlns:a16="http://schemas.microsoft.com/office/drawing/2014/main" id="{1412A729-2C63-F7A2-AFB1-1B7AA40B6D34}"/>
+                <a16:creationId xmlns:a16="http://schemas.microsoft.com/office/drawing/2014/main" id="{2DA85929-7189-53B5-0B49-10C662A034CB}"/>
               </a:ext>
             </a:extLst>
           </p:cNvPr>
@@ -3567,7 +3567,7 @@
           <p:cNvPr id="7" name="日期占位符 6">
             <a:extLst>
               <a:ext uri="{FF2B5EF4-FFF2-40B4-BE49-F238E27FC236}">
-                <a16:creationId xmlns:a16="http://schemas.microsoft.com/office/drawing/2014/main" id="{729A11AB-FCD4-66C6-B434-B0092D9A6863}"/>
+                <a16:creationId xmlns:a16="http://schemas.microsoft.com/office/drawing/2014/main" id="{B3F4DC3F-B75A-5B42-CC93-8B0CABD90AB7}"/>
               </a:ext>
             </a:extLst>
           </p:cNvPr>
@@ -3583,7 +3583,7 @@
           <a:bodyPr/>
           <a:lstStyle/>
           <a:p>
-            <a:fld id="{171713EC-7EE6-46E1-B0CF-23D403B67E2F}" type="datetimeFigureOut">
+            <a:fld id="{D3B1AC3E-8B82-41EE-A0A8-5237A984D2A4}" type="datetimeFigureOut">
               <a:rPr lang="zh-CN" altLang="en-US" smtClean="0"/>
               <a:t>2026/5/14</a:t>
             </a:fld>
@@ -3596,7 +3596,7 @@
           <p:cNvPr id="8" name="页脚占位符 7">
             <a:extLst>
               <a:ext uri="{FF2B5EF4-FFF2-40B4-BE49-F238E27FC236}">
-                <a16:creationId xmlns:a16="http://schemas.microsoft.com/office/drawing/2014/main" id="{353F7200-1578-86BE-52BB-8E8D79C86FEF}"/>
+                <a16:creationId xmlns:a16="http://schemas.microsoft.com/office/drawing/2014/main" id="{5F48DA6D-A767-6C8C-01C9-4E32F66356E9}"/>
               </a:ext>
             </a:extLst>
           </p:cNvPr>
@@ -3621,7 +3621,7 @@
           <p:cNvPr id="9" name="灯片编号占位符 8">
             <a:extLst>
               <a:ext uri="{FF2B5EF4-FFF2-40B4-BE49-F238E27FC236}">
-                <a16:creationId xmlns:a16="http://schemas.microsoft.com/office/drawing/2014/main" id="{9BA2121E-11E6-330E-9BE1-0D14B04ADF4B}"/>
+                <a16:creationId xmlns:a16="http://schemas.microsoft.com/office/drawing/2014/main" id="{6A2FF778-FB00-BBB9-D665-082EEB1D2C53}"/>
               </a:ext>
             </a:extLst>
           </p:cNvPr>
@@ -3637,7 +3637,7 @@
           <a:bodyPr/>
           <a:lstStyle/>
           <a:p>
-            <a:fld id="{50160C1B-AFB7-4B38-A4B0-10BD9837455B}" type="slidenum">
+            <a:fld id="{CAA57623-5CDA-44D9-88A2-506647CDCE2F}" type="slidenum">
               <a:rPr lang="zh-CN" altLang="en-US" smtClean="0"/>
               <a:t>‹#›</a:t>
             </a:fld>
@@ -3648,7 +3648,7 @@
     </p:spTree>
     <p:extLst>
       <p:ext uri="{BB962C8B-B14F-4D97-AF65-F5344CB8AC3E}">
-        <p14:creationId xmlns:p14="http://schemas.microsoft.com/office/powerpoint/2010/main" val="1733235853"/>
+        <p14:creationId xmlns:p14="http://schemas.microsoft.com/office/powerpoint/2010/main" val="2341786642"/>
       </p:ext>
     </p:extLst>
   </p:cSld>
@@ -3680,7 +3680,7 @@
           <p:cNvPr id="2" name="标题 1">
             <a:extLst>
               <a:ext uri="{FF2B5EF4-FFF2-40B4-BE49-F238E27FC236}">
-                <a16:creationId xmlns:a16="http://schemas.microsoft.com/office/drawing/2014/main" id="{7BFC270F-4BE5-6EFC-D439-63C4E540EFFC}"/>
+                <a16:creationId xmlns:a16="http://schemas.microsoft.com/office/drawing/2014/main" id="{16532382-554B-560E-CF4A-A7D596C50C93}"/>
               </a:ext>
             </a:extLst>
           </p:cNvPr>
@@ -3708,7 +3708,7 @@
           <p:cNvPr id="3" name="日期占位符 2">
             <a:extLst>
               <a:ext uri="{FF2B5EF4-FFF2-40B4-BE49-F238E27FC236}">
-                <a16:creationId xmlns:a16="http://schemas.microsoft.com/office/drawing/2014/main" id="{A52A7B39-6C22-34B4-91EB-10E8F661B4B7}"/>
+                <a16:creationId xmlns:a16="http://schemas.microsoft.com/office/drawing/2014/main" id="{578FED0E-448E-1332-E69D-C7450F9011A8}"/>
               </a:ext>
             </a:extLst>
           </p:cNvPr>
@@ -3724,7 +3724,7 @@
           <a:bodyPr/>
           <a:lstStyle/>
           <a:p>
-            <a:fld id="{171713EC-7EE6-46E1-B0CF-23D403B67E2F}" type="datetimeFigureOut">
+            <a:fld id="{D3B1AC3E-8B82-41EE-A0A8-5237A984D2A4}" type="datetimeFigureOut">
               <a:rPr lang="zh-CN" altLang="en-US" smtClean="0"/>
               <a:t>2026/5/14</a:t>
             </a:fld>
@@ -3737,7 +3737,7 @@
           <p:cNvPr id="4" name="页脚占位符 3">
             <a:extLst>
               <a:ext uri="{FF2B5EF4-FFF2-40B4-BE49-F238E27FC236}">
-                <a16:creationId xmlns:a16="http://schemas.microsoft.com/office/drawing/2014/main" id="{98500DD0-FD49-8169-144A-8CB5E335E54C}"/>
+                <a16:creationId xmlns:a16="http://schemas.microsoft.com/office/drawing/2014/main" id="{C04B7F65-3E78-AD18-D479-6EDB777FCFD6}"/>
               </a:ext>
             </a:extLst>
           </p:cNvPr>
@@ -3762,7 +3762,7 @@
           <p:cNvPr id="5" name="灯片编号占位符 4">
             <a:extLst>
               <a:ext uri="{FF2B5EF4-FFF2-40B4-BE49-F238E27FC236}">
-                <a16:creationId xmlns:a16="http://schemas.microsoft.com/office/drawing/2014/main" id="{03A6AB92-65A7-44B9-6E50-0EDF330F8978}"/>
+                <a16:creationId xmlns:a16="http://schemas.microsoft.com/office/drawing/2014/main" id="{E55C09BC-AAC6-2FF0-3077-96423F6E6E92}"/>
               </a:ext>
             </a:extLst>
           </p:cNvPr>
@@ -3778,7 +3778,7 @@
           <a:bodyPr/>
           <a:lstStyle/>
           <a:p>
-            <a:fld id="{50160C1B-AFB7-4B38-A4B0-10BD9837455B}" type="slidenum">
+            <a:fld id="{CAA57623-5CDA-44D9-88A2-506647CDCE2F}" type="slidenum">
               <a:rPr lang="zh-CN" altLang="en-US" smtClean="0"/>
               <a:t>‹#›</a:t>
             </a:fld>
@@ -3789,7 +3789,7 @@
     </p:spTree>
     <p:extLst>
       <p:ext uri="{BB962C8B-B14F-4D97-AF65-F5344CB8AC3E}">
-        <p14:creationId xmlns:p14="http://schemas.microsoft.com/office/powerpoint/2010/main" val="4029406577"/>
+        <p14:creationId xmlns:p14="http://schemas.microsoft.com/office/powerpoint/2010/main" val="268865925"/>
       </p:ext>
     </p:extLst>
   </p:cSld>
@@ -3821,7 +3821,7 @@
           <p:cNvPr id="2" name="日期占位符 1">
             <a:extLst>
               <a:ext uri="{FF2B5EF4-FFF2-40B4-BE49-F238E27FC236}">
-                <a16:creationId xmlns:a16="http://schemas.microsoft.com/office/drawing/2014/main" id="{29AA1B5E-1F2D-3DF4-3AE7-4D9EFF8B8994}"/>
+                <a16:creationId xmlns:a16="http://schemas.microsoft.com/office/drawing/2014/main" id="{3EEBEE6A-6601-95D8-1A9B-B5B7D3720220}"/>
               </a:ext>
             </a:extLst>
           </p:cNvPr>
@@ -3837,7 +3837,7 @@
           <a:bodyPr/>
           <a:lstStyle/>
           <a:p>
-            <a:fld id="{171713EC-7EE6-46E1-B0CF-23D403B67E2F}" type="datetimeFigureOut">
+            <a:fld id="{D3B1AC3E-8B82-41EE-A0A8-5237A984D2A4}" type="datetimeFigureOut">
               <a:rPr lang="zh-CN" altLang="en-US" smtClean="0"/>
               <a:t>2026/5/14</a:t>
             </a:fld>
@@ -3850,7 +3850,7 @@
           <p:cNvPr id="3" name="页脚占位符 2">
             <a:extLst>
               <a:ext uri="{FF2B5EF4-FFF2-40B4-BE49-F238E27FC236}">
-                <a16:creationId xmlns:a16="http://schemas.microsoft.com/office/drawing/2014/main" id="{004AAD32-9469-6EB9-E739-91582539B7CE}"/>
+                <a16:creationId xmlns:a16="http://schemas.microsoft.com/office/drawing/2014/main" id="{65330B17-FBA3-DE26-19CE-82125A75B474}"/>
               </a:ext>
             </a:extLst>
           </p:cNvPr>
@@ -3875,7 +3875,7 @@
           <p:cNvPr id="4" name="灯片编号占位符 3">
             <a:extLst>
               <a:ext uri="{FF2B5EF4-FFF2-40B4-BE49-F238E27FC236}">
-                <a16:creationId xmlns:a16="http://schemas.microsoft.com/office/drawing/2014/main" id="{FA722545-D436-97F3-6814-7ABE42914834}"/>
+                <a16:creationId xmlns:a16="http://schemas.microsoft.com/office/drawing/2014/main" id="{E3A24C75-6CA4-DB5A-F3ED-D9C7CF2371E1}"/>
               </a:ext>
             </a:extLst>
           </p:cNvPr>
@@ -3891,7 +3891,7 @@
           <a:bodyPr/>
           <a:lstStyle/>
           <a:p>
-            <a:fld id="{50160C1B-AFB7-4B38-A4B0-10BD9837455B}" type="slidenum">
+            <a:fld id="{CAA57623-5CDA-44D9-88A2-506647CDCE2F}" type="slidenum">
               <a:rPr lang="zh-CN" altLang="en-US" smtClean="0"/>
               <a:t>‹#›</a:t>
             </a:fld>
@@ -3902,7 +3902,7 @@
     </p:spTree>
     <p:extLst>
       <p:ext uri="{BB962C8B-B14F-4D97-AF65-F5344CB8AC3E}">
-        <p14:creationId xmlns:p14="http://schemas.microsoft.com/office/powerpoint/2010/main" val="332066504"/>
+        <p14:creationId xmlns:p14="http://schemas.microsoft.com/office/powerpoint/2010/main" val="3077118350"/>
       </p:ext>
     </p:extLst>
   </p:cSld>
@@ -3934,7 +3934,7 @@
           <p:cNvPr id="2" name="标题 1">
             <a:extLst>
               <a:ext uri="{FF2B5EF4-FFF2-40B4-BE49-F238E27FC236}">
-                <a16:creationId xmlns:a16="http://schemas.microsoft.com/office/drawing/2014/main" id="{BDDBC4AD-BACF-0328-3BB0-7926615D9378}"/>
+                <a16:creationId xmlns:a16="http://schemas.microsoft.com/office/drawing/2014/main" id="{2A99BD1C-D8F7-F469-DBD4-D47E3DF0D8CE}"/>
               </a:ext>
             </a:extLst>
           </p:cNvPr>
@@ -3971,7 +3971,7 @@
           <p:cNvPr id="3" name="内容占位符 2">
             <a:extLst>
               <a:ext uri="{FF2B5EF4-FFF2-40B4-BE49-F238E27FC236}">
-                <a16:creationId xmlns:a16="http://schemas.microsoft.com/office/drawing/2014/main" id="{249D1B23-B4F1-CCA3-15AA-57D0791D14BB}"/>
+                <a16:creationId xmlns:a16="http://schemas.microsoft.com/office/drawing/2014/main" id="{110D2193-055D-AA50-454F-4D547D86D154}"/>
               </a:ext>
             </a:extLst>
           </p:cNvPr>
@@ -4061,7 +4061,7 @@
           <p:cNvPr id="4" name="文本占位符 3">
             <a:extLst>
               <a:ext uri="{FF2B5EF4-FFF2-40B4-BE49-F238E27FC236}">
-                <a16:creationId xmlns:a16="http://schemas.microsoft.com/office/drawing/2014/main" id="{2555B3E9-92CC-72E5-16EF-50F0D15D7E53}"/>
+                <a16:creationId xmlns:a16="http://schemas.microsoft.com/office/drawing/2014/main" id="{43BC6A69-0715-A3A6-88E0-ABB6CADD4545}"/>
               </a:ext>
             </a:extLst>
           </p:cNvPr>
@@ -4132,7 +4132,7 @@
           <p:cNvPr id="5" name="日期占位符 4">
             <a:extLst>
               <a:ext uri="{FF2B5EF4-FFF2-40B4-BE49-F238E27FC236}">
-                <a16:creationId xmlns:a16="http://schemas.microsoft.com/office/drawing/2014/main" id="{CEA2A1AE-538C-26AC-4AF6-1DC184031A9B}"/>
+                <a16:creationId xmlns:a16="http://schemas.microsoft.com/office/drawing/2014/main" id="{F12C6328-E55D-0885-52E2-B7BBB39DA598}"/>
               </a:ext>
             </a:extLst>
           </p:cNvPr>
@@ -4148,7 +4148,7 @@
           <a:bodyPr/>
           <a:lstStyle/>
           <a:p>
-            <a:fld id="{171713EC-7EE6-46E1-B0CF-23D403B67E2F}" type="datetimeFigureOut">
+            <a:fld id="{D3B1AC3E-8B82-41EE-A0A8-5237A984D2A4}" type="datetimeFigureOut">
               <a:rPr lang="zh-CN" altLang="en-US" smtClean="0"/>
               <a:t>2026/5/14</a:t>
             </a:fld>
@@ -4161,7 +4161,7 @@
           <p:cNvPr id="6" name="页脚占位符 5">
             <a:extLst>
               <a:ext uri="{FF2B5EF4-FFF2-40B4-BE49-F238E27FC236}">
-                <a16:creationId xmlns:a16="http://schemas.microsoft.com/office/drawing/2014/main" id="{BB11C21E-E6D7-C34F-E884-024C2041EBE9}"/>
+                <a16:creationId xmlns:a16="http://schemas.microsoft.com/office/drawing/2014/main" id="{0139B316-8CB1-4673-B6DF-915254AA759D}"/>
               </a:ext>
             </a:extLst>
           </p:cNvPr>
@@ -4186,7 +4186,7 @@
           <p:cNvPr id="7" name="灯片编号占位符 6">
             <a:extLst>
               <a:ext uri="{FF2B5EF4-FFF2-40B4-BE49-F238E27FC236}">
-                <a16:creationId xmlns:a16="http://schemas.microsoft.com/office/drawing/2014/main" id="{6A7F798B-BB97-2A1A-216D-0B352A44551F}"/>
+                <a16:creationId xmlns:a16="http://schemas.microsoft.com/office/drawing/2014/main" id="{81578EF2-EE17-643C-6867-D35F54EC3D6C}"/>
               </a:ext>
             </a:extLst>
           </p:cNvPr>
@@ -4202,7 +4202,7 @@
           <a:bodyPr/>
           <a:lstStyle/>
           <a:p>
-            <a:fld id="{50160C1B-AFB7-4B38-A4B0-10BD9837455B}" type="slidenum">
+            <a:fld id="{CAA57623-5CDA-44D9-88A2-506647CDCE2F}" type="slidenum">
               <a:rPr lang="zh-CN" altLang="en-US" smtClean="0"/>
               <a:t>‹#›</a:t>
             </a:fld>
@@ -4213,7 +4213,7 @@
     </p:spTree>
     <p:extLst>
       <p:ext uri="{BB962C8B-B14F-4D97-AF65-F5344CB8AC3E}">
-        <p14:creationId xmlns:p14="http://schemas.microsoft.com/office/powerpoint/2010/main" val="809816179"/>
+        <p14:creationId xmlns:p14="http://schemas.microsoft.com/office/powerpoint/2010/main" val="1686771473"/>
       </p:ext>
     </p:extLst>
   </p:cSld>
@@ -4245,7 +4245,7 @@
           <p:cNvPr id="2" name="标题 1">
             <a:extLst>
               <a:ext uri="{FF2B5EF4-FFF2-40B4-BE49-F238E27FC236}">
-                <a16:creationId xmlns:a16="http://schemas.microsoft.com/office/drawing/2014/main" id="{443FABF5-B028-CA3C-EC1F-8D94FB576B53}"/>
+                <a16:creationId xmlns:a16="http://schemas.microsoft.com/office/drawing/2014/main" id="{D3110EE0-BDDD-F421-57E7-E7BEA922E615}"/>
               </a:ext>
             </a:extLst>
           </p:cNvPr>
@@ -4282,7 +4282,7 @@
           <p:cNvPr id="3" name="图片占位符 2">
             <a:extLst>
               <a:ext uri="{FF2B5EF4-FFF2-40B4-BE49-F238E27FC236}">
-                <a16:creationId xmlns:a16="http://schemas.microsoft.com/office/drawing/2014/main" id="{53FBD368-2D69-ED2B-89A6-678B8CE942BF}"/>
+                <a16:creationId xmlns:a16="http://schemas.microsoft.com/office/drawing/2014/main" id="{E04C7898-DE9C-BA52-3117-EEF200D600E5}"/>
               </a:ext>
             </a:extLst>
           </p:cNvPr>
@@ -4349,7 +4349,7 @@
           <p:cNvPr id="4" name="文本占位符 3">
             <a:extLst>
               <a:ext uri="{FF2B5EF4-FFF2-40B4-BE49-F238E27FC236}">
-                <a16:creationId xmlns:a16="http://schemas.microsoft.com/office/drawing/2014/main" id="{A8C8BD52-8590-47D9-BAD1-F9BC85DF023A}"/>
+                <a16:creationId xmlns:a16="http://schemas.microsoft.com/office/drawing/2014/main" id="{2BB950C3-63FC-F9A1-8451-69A75814A2C1}"/>
               </a:ext>
             </a:extLst>
           </p:cNvPr>
@@ -4420,7 +4420,7 @@
           <p:cNvPr id="5" name="日期占位符 4">
             <a:extLst>
               <a:ext uri="{FF2B5EF4-FFF2-40B4-BE49-F238E27FC236}">
-                <a16:creationId xmlns:a16="http://schemas.microsoft.com/office/drawing/2014/main" id="{C57EEA1F-8A85-1DA5-81C6-7686BEC287B3}"/>
+                <a16:creationId xmlns:a16="http://schemas.microsoft.com/office/drawing/2014/main" id="{7B2DC974-56E6-8FB4-3DE1-FFC62A2DB0FA}"/>
               </a:ext>
             </a:extLst>
           </p:cNvPr>
@@ -4436,7 +4436,7 @@
           <a:bodyPr/>
           <a:lstStyle/>
           <a:p>
-            <a:fld id="{171713EC-7EE6-46E1-B0CF-23D403B67E2F}" type="datetimeFigureOut">
+            <a:fld id="{D3B1AC3E-8B82-41EE-A0A8-5237A984D2A4}" type="datetimeFigureOut">
               <a:rPr lang="zh-CN" altLang="en-US" smtClean="0"/>
               <a:t>2026/5/14</a:t>
             </a:fld>
@@ -4449,7 +4449,7 @@
           <p:cNvPr id="6" name="页脚占位符 5">
             <a:extLst>
               <a:ext uri="{FF2B5EF4-FFF2-40B4-BE49-F238E27FC236}">
-                <a16:creationId xmlns:a16="http://schemas.microsoft.com/office/drawing/2014/main" id="{894DD1FF-2426-5C64-7249-D95B8B0401A2}"/>
+                <a16:creationId xmlns:a16="http://schemas.microsoft.com/office/drawing/2014/main" id="{43125206-7494-B872-3007-C34B5672502D}"/>
               </a:ext>
             </a:extLst>
           </p:cNvPr>
@@ -4474,7 +4474,7 @@
           <p:cNvPr id="7" name="灯片编号占位符 6">
             <a:extLst>
               <a:ext uri="{FF2B5EF4-FFF2-40B4-BE49-F238E27FC236}">
-                <a16:creationId xmlns:a16="http://schemas.microsoft.com/office/drawing/2014/main" id="{5A9CD5B8-3FC0-E680-692E-8D10E7A9F207}"/>
+                <a16:creationId xmlns:a16="http://schemas.microsoft.com/office/drawing/2014/main" id="{A5473DD9-2379-BEB3-D923-27FE1AF43989}"/>
               </a:ext>
             </a:extLst>
           </p:cNvPr>
@@ -4490,7 +4490,7 @@
           <a:bodyPr/>
           <a:lstStyle/>
           <a:p>
-            <a:fld id="{50160C1B-AFB7-4B38-A4B0-10BD9837455B}" type="slidenum">
+            <a:fld id="{CAA57623-5CDA-44D9-88A2-506647CDCE2F}" type="slidenum">
               <a:rPr lang="zh-CN" altLang="en-US" smtClean="0"/>
               <a:t>‹#›</a:t>
             </a:fld>
@@ -4501,7 +4501,7 @@
     </p:spTree>
     <p:extLst>
       <p:ext uri="{BB962C8B-B14F-4D97-AF65-F5344CB8AC3E}">
-        <p14:creationId xmlns:p14="http://schemas.microsoft.com/office/powerpoint/2010/main" val="4174671284"/>
+        <p14:creationId xmlns:p14="http://schemas.microsoft.com/office/powerpoint/2010/main" val="3325687994"/>
       </p:ext>
     </p:extLst>
   </p:cSld>
@@ -4538,7 +4538,7 @@
           <p:cNvPr id="2" name="标题占位符 1">
             <a:extLst>
               <a:ext uri="{FF2B5EF4-FFF2-40B4-BE49-F238E27FC236}">
-                <a16:creationId xmlns:a16="http://schemas.microsoft.com/office/drawing/2014/main" id="{3E91B072-1A89-7D6E-31F3-D41AE88FEA3C}"/>
+                <a16:creationId xmlns:a16="http://schemas.microsoft.com/office/drawing/2014/main" id="{2F9AEB6E-2A97-254B-6009-574195A75063}"/>
               </a:ext>
             </a:extLst>
           </p:cNvPr>
@@ -4576,7 +4576,7 @@
           <p:cNvPr id="3" name="文本占位符 2">
             <a:extLst>
               <a:ext uri="{FF2B5EF4-FFF2-40B4-BE49-F238E27FC236}">
-                <a16:creationId xmlns:a16="http://schemas.microsoft.com/office/drawing/2014/main" id="{14C492B6-E603-C17E-C676-DBC4759F303D}"/>
+                <a16:creationId xmlns:a16="http://schemas.microsoft.com/office/drawing/2014/main" id="{F9B7BF60-8A97-1239-8922-BED28212C132}"/>
               </a:ext>
             </a:extLst>
           </p:cNvPr>
@@ -4643,7 +4643,7 @@
           <p:cNvPr id="4" name="日期占位符 3">
             <a:extLst>
               <a:ext uri="{FF2B5EF4-FFF2-40B4-BE49-F238E27FC236}">
-                <a16:creationId xmlns:a16="http://schemas.microsoft.com/office/drawing/2014/main" id="{D8E40C40-7A41-12BF-19A9-E852D73E13CC}"/>
+                <a16:creationId xmlns:a16="http://schemas.microsoft.com/office/drawing/2014/main" id="{E2ADC3E1-6658-AD5E-03BE-EA85384EEAE8}"/>
               </a:ext>
             </a:extLst>
           </p:cNvPr>
@@ -4677,7 +4677,7 @@
             </a:lvl1pPr>
           </a:lstStyle>
           <a:p>
-            <a:fld id="{171713EC-7EE6-46E1-B0CF-23D403B67E2F}" type="datetimeFigureOut">
+            <a:fld id="{D3B1AC3E-8B82-41EE-A0A8-5237A984D2A4}" type="datetimeFigureOut">
               <a:rPr lang="zh-CN" altLang="en-US" smtClean="0"/>
               <a:t>2026/5/14</a:t>
             </a:fld>
@@ -4690,7 +4690,7 @@
           <p:cNvPr id="5" name="页脚占位符 4">
             <a:extLst>
               <a:ext uri="{FF2B5EF4-FFF2-40B4-BE49-F238E27FC236}">
-                <a16:creationId xmlns:a16="http://schemas.microsoft.com/office/drawing/2014/main" id="{880942D4-A13C-729E-FA18-101797523C9E}"/>
+                <a16:creationId xmlns:a16="http://schemas.microsoft.com/office/drawing/2014/main" id="{78E2EEC1-A606-3704-A333-7555C1B8679B}"/>
               </a:ext>
             </a:extLst>
           </p:cNvPr>
@@ -4733,7 +4733,7 @@
           <p:cNvPr id="6" name="灯片编号占位符 5">
             <a:extLst>
               <a:ext uri="{FF2B5EF4-FFF2-40B4-BE49-F238E27FC236}">
-                <a16:creationId xmlns:a16="http://schemas.microsoft.com/office/drawing/2014/main" id="{86F04E4D-A7DB-08C0-D0DA-AE671F050B56}"/>
+                <a16:creationId xmlns:a16="http://schemas.microsoft.com/office/drawing/2014/main" id="{B266E6B9-CA06-DEAE-93CE-6BC0A3670B10}"/>
               </a:ext>
             </a:extLst>
           </p:cNvPr>
@@ -4767,7 +4767,7 @@
             </a:lvl1pPr>
           </a:lstStyle>
           <a:p>
-            <a:fld id="{50160C1B-AFB7-4B38-A4B0-10BD9837455B}" type="slidenum">
+            <a:fld id="{CAA57623-5CDA-44D9-88A2-506647CDCE2F}" type="slidenum">
               <a:rPr lang="zh-CN" altLang="en-US" smtClean="0"/>
               <a:t>‹#›</a:t>
             </a:fld>
@@ -4778,7 +4778,7 @@
     </p:spTree>
     <p:extLst>
       <p:ext uri="{BB962C8B-B14F-4D97-AF65-F5344CB8AC3E}">
-        <p14:creationId xmlns:p14="http://schemas.microsoft.com/office/powerpoint/2010/main" val="1579971032"/>
+        <p14:creationId xmlns:p14="http://schemas.microsoft.com/office/powerpoint/2010/main" val="1901412899"/>
       </p:ext>
     </p:extLst>
   </p:cSld>
@@ -5101,7 +5101,7 @@
           <p:cNvPr id="2" name="bg">
             <a:extLst>
               <a:ext uri="{FF2B5EF4-FFF2-40B4-BE49-F238E27FC236}">
-                <a16:creationId xmlns:a16="http://schemas.microsoft.com/office/drawing/2014/main" id="{0B5F27E5-3E75-46C9-6D73-D3D39A989382}"/>
+                <a16:creationId xmlns:a16="http://schemas.microsoft.com/office/drawing/2014/main" id="{C64F4342-EE8E-844A-21A5-005267C03610}"/>
               </a:ext>
             </a:extLst>
           </p:cNvPr>
@@ -5162,7 +5162,7 @@
           <p:cNvPr id="3" name="side-shade">
             <a:extLst>
               <a:ext uri="{FF2B5EF4-FFF2-40B4-BE49-F238E27FC236}">
-                <a16:creationId xmlns:a16="http://schemas.microsoft.com/office/drawing/2014/main" id="{38F9CD7C-8E3C-3079-1A6B-FEBEE7B4936C}"/>
+                <a16:creationId xmlns:a16="http://schemas.microsoft.com/office/drawing/2014/main" id="{974D8439-5F48-99CA-3580-EA603FFE808E}"/>
               </a:ext>
             </a:extLst>
           </p:cNvPr>
@@ -5223,7 +5223,7 @@
           <p:cNvPr id="4" name="cover-rule">
             <a:extLst>
               <a:ext uri="{FF2B5EF4-FFF2-40B4-BE49-F238E27FC236}">
-                <a16:creationId xmlns:a16="http://schemas.microsoft.com/office/drawing/2014/main" id="{1CC59ED5-E8EF-E79F-28C7-9A56F2D9D225}"/>
+                <a16:creationId xmlns:a16="http://schemas.microsoft.com/office/drawing/2014/main" id="{8587F4DC-100E-648F-2479-37707C451E30}"/>
               </a:ext>
             </a:extLst>
           </p:cNvPr>
@@ -5264,7 +5264,7 @@
           <p:cNvPr id="6" name="图片 5">
             <a:extLst>
               <a:ext uri="{FF2B5EF4-FFF2-40B4-BE49-F238E27FC236}">
-                <a16:creationId xmlns:a16="http://schemas.microsoft.com/office/drawing/2014/main" id="{5FB4408B-EE80-F0CF-7F44-391D7FE3A79F}"/>
+                <a16:creationId xmlns:a16="http://schemas.microsoft.com/office/drawing/2014/main" id="{F1A152EE-38B3-9E90-D7D5-418045A5A715}"/>
               </a:ext>
             </a:extLst>
           </p:cNvPr>
@@ -5300,7 +5300,7 @@
           <p:cNvPr id="7" name="kicker">
             <a:extLst>
               <a:ext uri="{FF2B5EF4-FFF2-40B4-BE49-F238E27FC236}">
-                <a16:creationId xmlns:a16="http://schemas.microsoft.com/office/drawing/2014/main" id="{5E2539D0-FAD0-77EF-347A-F8E16999AEA9}"/>
+                <a16:creationId xmlns:a16="http://schemas.microsoft.com/office/drawing/2014/main" id="{DF1C96E3-0F48-97D1-AFF7-9D5C0E4AEE23}"/>
               </a:ext>
             </a:extLst>
           </p:cNvPr>
@@ -5346,7 +5346,7 @@
           <p:cNvPr id="8" name="h1">
             <a:extLst>
               <a:ext uri="{FF2B5EF4-FFF2-40B4-BE49-F238E27FC236}">
-                <a16:creationId xmlns:a16="http://schemas.microsoft.com/office/drawing/2014/main" id="{097DCC97-1E99-810A-A275-3376478265CA}"/>
+                <a16:creationId xmlns:a16="http://schemas.microsoft.com/office/drawing/2014/main" id="{3DBDBD4D-FF65-5148-74DF-9AB19BFEF4FA}"/>
               </a:ext>
             </a:extLst>
           </p:cNvPr>
@@ -5392,7 +5392,7 @@
           <p:cNvPr id="9" name="sub">
             <a:extLst>
               <a:ext uri="{FF2B5EF4-FFF2-40B4-BE49-F238E27FC236}">
-                <a16:creationId xmlns:a16="http://schemas.microsoft.com/office/drawing/2014/main" id="{B87D8721-DA7F-7121-E732-CED56347AABE}"/>
+                <a16:creationId xmlns:a16="http://schemas.microsoft.com/office/drawing/2014/main" id="{BA86DC17-F8D0-ECC4-D34C-C4FF0B31552E}"/>
               </a:ext>
             </a:extLst>
           </p:cNvPr>
@@ -5438,7 +5438,7 @@
           <p:cNvPr id="10" name="rule">
             <a:extLst>
               <a:ext uri="{FF2B5EF4-FFF2-40B4-BE49-F238E27FC236}">
-                <a16:creationId xmlns:a16="http://schemas.microsoft.com/office/drawing/2014/main" id="{0E146CFB-51F1-224B-CB5A-FF755271B37A}"/>
+                <a16:creationId xmlns:a16="http://schemas.microsoft.com/office/drawing/2014/main" id="{CAF9628F-49A7-B11F-9FD2-F1FE29346F4B}"/>
               </a:ext>
             </a:extLst>
           </p:cNvPr>
@@ -5479,7 +5479,7 @@
           <p:cNvPr id="11" name="thesis">
             <a:extLst>
               <a:ext uri="{FF2B5EF4-FFF2-40B4-BE49-F238E27FC236}">
-                <a16:creationId xmlns:a16="http://schemas.microsoft.com/office/drawing/2014/main" id="{39A76C80-E04C-B8FA-78E5-1468FBA22AFC}"/>
+                <a16:creationId xmlns:a16="http://schemas.microsoft.com/office/drawing/2014/main" id="{11C875D7-E4B9-E416-37DD-E0AA755075DF}"/>
               </a:ext>
             </a:extLst>
           </p:cNvPr>
@@ -5525,7 +5525,7 @@
           <p:cNvPr id="12" name="meta">
             <a:extLst>
               <a:ext uri="{FF2B5EF4-FFF2-40B4-BE49-F238E27FC236}">
-                <a16:creationId xmlns:a16="http://schemas.microsoft.com/office/drawing/2014/main" id="{38091C75-515A-32A4-C6D4-33C81FD1436A}"/>
+                <a16:creationId xmlns:a16="http://schemas.microsoft.com/office/drawing/2014/main" id="{1BCF4507-6FD1-9324-3DA2-64FAB04DF9F3}"/>
               </a:ext>
             </a:extLst>
           </p:cNvPr>
@@ -5574,7 +5574,7 @@
             <a:hlinkClick r:id="rId4"/>
             <a:extLst>
               <a:ext uri="{FF2B5EF4-FFF2-40B4-BE49-F238E27FC236}">
-                <a16:creationId xmlns:a16="http://schemas.microsoft.com/office/drawing/2014/main" id="{FAEE18B8-76AF-B00A-93A0-0AFFB6570A30}"/>
+                <a16:creationId xmlns:a16="http://schemas.microsoft.com/office/drawing/2014/main" id="{95331154-91D8-DD6B-087E-ADC6141D6A64}"/>
               </a:ext>
             </a:extLst>
           </p:cNvPr>
@@ -5610,7 +5610,7 @@
           <p:cNvPr id="15" name="artifact">
             <a:extLst>
               <a:ext uri="{FF2B5EF4-FFF2-40B4-BE49-F238E27FC236}">
-                <a16:creationId xmlns:a16="http://schemas.microsoft.com/office/drawing/2014/main" id="{9B47AA32-B14F-99B5-8584-F63FA3F0DEF6}"/>
+                <a16:creationId xmlns:a16="http://schemas.microsoft.com/office/drawing/2014/main" id="{5707BC06-524D-144A-032F-896BACE49BEE}"/>
               </a:ext>
             </a:extLst>
           </p:cNvPr>
@@ -5656,7 +5656,7 @@
           <p:cNvPr id="16" name="artifact2">
             <a:extLst>
               <a:ext uri="{FF2B5EF4-FFF2-40B4-BE49-F238E27FC236}">
-                <a16:creationId xmlns:a16="http://schemas.microsoft.com/office/drawing/2014/main" id="{B1DC9BBE-5E71-AEAA-66D9-3010F61BF2E7}"/>
+                <a16:creationId xmlns:a16="http://schemas.microsoft.com/office/drawing/2014/main" id="{6190C1D1-2702-6491-BE39-217BDB7C8B7A}"/>
               </a:ext>
             </a:extLst>
           </p:cNvPr>
@@ -5703,7 +5703,7 @@
             <a:hlinkClick r:id="rId4"/>
             <a:extLst>
               <a:ext uri="{FF2B5EF4-FFF2-40B4-BE49-F238E27FC236}">
-                <a16:creationId xmlns:a16="http://schemas.microsoft.com/office/drawing/2014/main" id="{46C1F3F8-5632-E1F9-C8D8-0441F2D1FAFE}"/>
+                <a16:creationId xmlns:a16="http://schemas.microsoft.com/office/drawing/2014/main" id="{5C76BD5A-8BF7-1D05-2AC0-31F987DA3781}"/>
               </a:ext>
             </a:extLst>
           </p:cNvPr>
@@ -5772,7 +5772,7 @@
             <a:hlinkClick r:id="rId6"/>
             <a:extLst>
               <a:ext uri="{FF2B5EF4-FFF2-40B4-BE49-F238E27FC236}">
-                <a16:creationId xmlns:a16="http://schemas.microsoft.com/office/drawing/2014/main" id="{D16F108F-289F-24CB-ED5F-05A214FCD524}"/>
+                <a16:creationId xmlns:a16="http://schemas.microsoft.com/office/drawing/2014/main" id="{35A6AB15-E19F-9F97-ED9C-D8EEE1FD687B}"/>
               </a:ext>
             </a:extLst>
           </p:cNvPr>
@@ -5840,7 +5840,7 @@
           <p:cNvPr id="19" name="cover-flow-0">
             <a:extLst>
               <a:ext uri="{FF2B5EF4-FFF2-40B4-BE49-F238E27FC236}">
-                <a16:creationId xmlns:a16="http://schemas.microsoft.com/office/drawing/2014/main" id="{80EFF1F5-C762-6DE0-8A29-810A5F3308A9}"/>
+                <a16:creationId xmlns:a16="http://schemas.microsoft.com/office/drawing/2014/main" id="{FA250061-CFEF-0BD3-DA78-B5BD6024CE0D}"/>
               </a:ext>
             </a:extLst>
           </p:cNvPr>
@@ -5894,7 +5894,7 @@
           <p:cNvPr id="20" name="cover-flow-n-0">
             <a:extLst>
               <a:ext uri="{FF2B5EF4-FFF2-40B4-BE49-F238E27FC236}">
-                <a16:creationId xmlns:a16="http://schemas.microsoft.com/office/drawing/2014/main" id="{15C89D5B-C521-DA30-02FC-27DBC1191F3C}"/>
+                <a16:creationId xmlns:a16="http://schemas.microsoft.com/office/drawing/2014/main" id="{0CBFAAE5-A7FA-C217-2D97-9AD05B2EBA3B}"/>
               </a:ext>
             </a:extLst>
           </p:cNvPr>
@@ -5940,7 +5940,7 @@
           <p:cNvPr id="21" name="cover-flow-t-0">
             <a:extLst>
               <a:ext uri="{FF2B5EF4-FFF2-40B4-BE49-F238E27FC236}">
-                <a16:creationId xmlns:a16="http://schemas.microsoft.com/office/drawing/2014/main" id="{F55CCC07-34CA-5687-498E-868F3BE29932}"/>
+                <a16:creationId xmlns:a16="http://schemas.microsoft.com/office/drawing/2014/main" id="{DC432948-D5FF-5986-D236-F7D6A7AB935A}"/>
               </a:ext>
             </a:extLst>
           </p:cNvPr>
@@ -5986,7 +5986,7 @@
           <p:cNvPr id="22" name="cover-flow-a-0">
             <a:extLst>
               <a:ext uri="{FF2B5EF4-FFF2-40B4-BE49-F238E27FC236}">
-                <a16:creationId xmlns:a16="http://schemas.microsoft.com/office/drawing/2014/main" id="{BCD07A4E-C2C8-CD12-12F2-AD1ED2F44F38}"/>
+                <a16:creationId xmlns:a16="http://schemas.microsoft.com/office/drawing/2014/main" id="{88C37181-5104-5C4D-62BB-3A4B0834A075}"/>
               </a:ext>
             </a:extLst>
           </p:cNvPr>
@@ -6028,7 +6028,7 @@
           <p:cNvPr id="23" name="cover-flow-1">
             <a:extLst>
               <a:ext uri="{FF2B5EF4-FFF2-40B4-BE49-F238E27FC236}">
-                <a16:creationId xmlns:a16="http://schemas.microsoft.com/office/drawing/2014/main" id="{622C0108-C2D5-EF63-7819-480EED6253CE}"/>
+                <a16:creationId xmlns:a16="http://schemas.microsoft.com/office/drawing/2014/main" id="{B6547C8B-301F-F52E-B928-1FFECE4D6A52}"/>
               </a:ext>
             </a:extLst>
           </p:cNvPr>
@@ -6082,7 +6082,7 @@
           <p:cNvPr id="24" name="cover-flow-n-1">
             <a:extLst>
               <a:ext uri="{FF2B5EF4-FFF2-40B4-BE49-F238E27FC236}">
-                <a16:creationId xmlns:a16="http://schemas.microsoft.com/office/drawing/2014/main" id="{D09E9E15-73D1-388F-DF39-E76895C96A35}"/>
+                <a16:creationId xmlns:a16="http://schemas.microsoft.com/office/drawing/2014/main" id="{2AFB3CCC-4E58-C9F1-073A-4BAF94F2AE7D}"/>
               </a:ext>
             </a:extLst>
           </p:cNvPr>
@@ -6128,7 +6128,7 @@
           <p:cNvPr id="25" name="cover-flow-t-1">
             <a:extLst>
               <a:ext uri="{FF2B5EF4-FFF2-40B4-BE49-F238E27FC236}">
-                <a16:creationId xmlns:a16="http://schemas.microsoft.com/office/drawing/2014/main" id="{C959A3D5-2A8B-6D7E-E20B-610A349FDCD6}"/>
+                <a16:creationId xmlns:a16="http://schemas.microsoft.com/office/drawing/2014/main" id="{9DD24CD1-27CD-8C90-01A5-E056857FC6CA}"/>
               </a:ext>
             </a:extLst>
           </p:cNvPr>
@@ -6174,7 +6174,7 @@
           <p:cNvPr id="26" name="cover-flow-a-1">
             <a:extLst>
               <a:ext uri="{FF2B5EF4-FFF2-40B4-BE49-F238E27FC236}">
-                <a16:creationId xmlns:a16="http://schemas.microsoft.com/office/drawing/2014/main" id="{AE33BF6B-E205-9778-BDBA-8099EB71A9D7}"/>
+                <a16:creationId xmlns:a16="http://schemas.microsoft.com/office/drawing/2014/main" id="{0091B13F-2587-9F53-20B3-305ADC80ADA5}"/>
               </a:ext>
             </a:extLst>
           </p:cNvPr>
@@ -6216,7 +6216,7 @@
           <p:cNvPr id="27" name="cover-flow-2">
             <a:extLst>
               <a:ext uri="{FF2B5EF4-FFF2-40B4-BE49-F238E27FC236}">
-                <a16:creationId xmlns:a16="http://schemas.microsoft.com/office/drawing/2014/main" id="{1E515664-02B1-3E62-DFB0-E1372F5C224B}"/>
+                <a16:creationId xmlns:a16="http://schemas.microsoft.com/office/drawing/2014/main" id="{3EE0A4B1-3787-BECC-73B5-9EE37144D897}"/>
               </a:ext>
             </a:extLst>
           </p:cNvPr>
@@ -6270,7 +6270,7 @@
           <p:cNvPr id="28" name="cover-flow-n-2">
             <a:extLst>
               <a:ext uri="{FF2B5EF4-FFF2-40B4-BE49-F238E27FC236}">
-                <a16:creationId xmlns:a16="http://schemas.microsoft.com/office/drawing/2014/main" id="{A51FF2CB-B305-8CFA-1167-4AB6A095C526}"/>
+                <a16:creationId xmlns:a16="http://schemas.microsoft.com/office/drawing/2014/main" id="{F18612C3-DF02-869A-D35B-A19B75C2BD00}"/>
               </a:ext>
             </a:extLst>
           </p:cNvPr>
@@ -6316,7 +6316,7 @@
           <p:cNvPr id="29" name="cover-flow-t-2">
             <a:extLst>
               <a:ext uri="{FF2B5EF4-FFF2-40B4-BE49-F238E27FC236}">
-                <a16:creationId xmlns:a16="http://schemas.microsoft.com/office/drawing/2014/main" id="{1AE92D3B-64A5-4CDD-5B19-63A6EB726F5B}"/>
+                <a16:creationId xmlns:a16="http://schemas.microsoft.com/office/drawing/2014/main" id="{D6FAEAFB-E599-179C-0431-60414243A981}"/>
               </a:ext>
             </a:extLst>
           </p:cNvPr>
@@ -6362,7 +6362,7 @@
           <p:cNvPr id="30" name="cover-flow-a-2">
             <a:extLst>
               <a:ext uri="{FF2B5EF4-FFF2-40B4-BE49-F238E27FC236}">
-                <a16:creationId xmlns:a16="http://schemas.microsoft.com/office/drawing/2014/main" id="{92F73E98-774D-8F53-F810-5B96AC300F44}"/>
+                <a16:creationId xmlns:a16="http://schemas.microsoft.com/office/drawing/2014/main" id="{623E59A8-5177-1EA6-85A8-8D1C92E2A577}"/>
               </a:ext>
             </a:extLst>
           </p:cNvPr>
@@ -6404,7 +6404,7 @@
           <p:cNvPr id="31" name="cover-flow-3">
             <a:extLst>
               <a:ext uri="{FF2B5EF4-FFF2-40B4-BE49-F238E27FC236}">
-                <a16:creationId xmlns:a16="http://schemas.microsoft.com/office/drawing/2014/main" id="{C48EDEC7-6093-3FFA-4347-2905576FBB0D}"/>
+                <a16:creationId xmlns:a16="http://schemas.microsoft.com/office/drawing/2014/main" id="{C1DB442F-A212-4A51-1AAE-BDDD2DB20443}"/>
               </a:ext>
             </a:extLst>
           </p:cNvPr>
@@ -6458,7 +6458,7 @@
           <p:cNvPr id="32" name="cover-flow-n-3">
             <a:extLst>
               <a:ext uri="{FF2B5EF4-FFF2-40B4-BE49-F238E27FC236}">
-                <a16:creationId xmlns:a16="http://schemas.microsoft.com/office/drawing/2014/main" id="{6B4D5063-8172-4D26-39D5-6FBD490221A2}"/>
+                <a16:creationId xmlns:a16="http://schemas.microsoft.com/office/drawing/2014/main" id="{44422A6A-3088-4623-BF64-0AD447FD693B}"/>
               </a:ext>
             </a:extLst>
           </p:cNvPr>
@@ -6504,7 +6504,7 @@
           <p:cNvPr id="33" name="cover-flow-t-3">
             <a:extLst>
               <a:ext uri="{FF2B5EF4-FFF2-40B4-BE49-F238E27FC236}">
-                <a16:creationId xmlns:a16="http://schemas.microsoft.com/office/drawing/2014/main" id="{9844C476-B6E9-E188-0EE2-55AE381C033C}"/>
+                <a16:creationId xmlns:a16="http://schemas.microsoft.com/office/drawing/2014/main" id="{E361D5C6-2AB7-DED0-3BB5-854A3B810102}"/>
               </a:ext>
             </a:extLst>
           </p:cNvPr>
@@ -6551,7 +6551,7 @@
             <a:hlinkClick r:id="rId4"/>
             <a:extLst>
               <a:ext uri="{FF2B5EF4-FFF2-40B4-BE49-F238E27FC236}">
-                <a16:creationId xmlns:a16="http://schemas.microsoft.com/office/drawing/2014/main" id="{EC00D57A-4CB6-D4C4-8D6E-A02E580226E4}"/>
+                <a16:creationId xmlns:a16="http://schemas.microsoft.com/office/drawing/2014/main" id="{DB5D40F9-DD1D-BD8B-256F-E97B29619CA3}"/>
               </a:ext>
             </a:extLst>
           </p:cNvPr>
@@ -6612,7 +6612,7 @@
     </p:spTree>
     <p:extLst>
       <p:ext uri="{BB962C8B-B14F-4D97-AF65-F5344CB8AC3E}">
-        <p14:creationId xmlns:p14="http://schemas.microsoft.com/office/powerpoint/2010/main" val="3464062400"/>
+        <p14:creationId xmlns:p14="http://schemas.microsoft.com/office/powerpoint/2010/main" val="1226755534"/>
       </p:ext>
     </p:extLst>
   </p:cSld>
@@ -7372,7 +7372,7 @@
           <p:cNvPr id="2" name="bg">
             <a:extLst>
               <a:ext uri="{FF2B5EF4-FFF2-40B4-BE49-F238E27FC236}">
-                <a16:creationId xmlns:a16="http://schemas.microsoft.com/office/drawing/2014/main" id="{084C2FE0-04FA-C0A3-6C44-BDEA542E2EF5}"/>
+                <a16:creationId xmlns:a16="http://schemas.microsoft.com/office/drawing/2014/main" id="{8A817EC9-D1F9-0879-F6B3-7546E05786F7}"/>
               </a:ext>
             </a:extLst>
           </p:cNvPr>
@@ -7433,7 +7433,7 @@
           <p:cNvPr id="3" name="rail">
             <a:extLst>
               <a:ext uri="{FF2B5EF4-FFF2-40B4-BE49-F238E27FC236}">
-                <a16:creationId xmlns:a16="http://schemas.microsoft.com/office/drawing/2014/main" id="{0B2CC0DF-DBDE-CAD4-6BF0-9A4926C8B23D}"/>
+                <a16:creationId xmlns:a16="http://schemas.microsoft.com/office/drawing/2014/main" id="{40805931-36E9-30D0-87FE-FD1C0B77F334}"/>
               </a:ext>
             </a:extLst>
           </p:cNvPr>
@@ -7494,7 +7494,7 @@
           <p:cNvPr id="4" name="top-rule">
             <a:extLst>
               <a:ext uri="{FF2B5EF4-FFF2-40B4-BE49-F238E27FC236}">
-                <a16:creationId xmlns:a16="http://schemas.microsoft.com/office/drawing/2014/main" id="{E75D7E78-E081-8FFC-B1C3-6D16DE1C9BFD}"/>
+                <a16:creationId xmlns:a16="http://schemas.microsoft.com/office/drawing/2014/main" id="{87BCA087-4E4A-2251-C9F4-08D4AFF1648C}"/>
               </a:ext>
             </a:extLst>
           </p:cNvPr>
@@ -7535,7 +7535,7 @@
           <p:cNvPr id="5" name="section">
             <a:extLst>
               <a:ext uri="{FF2B5EF4-FFF2-40B4-BE49-F238E27FC236}">
-                <a16:creationId xmlns:a16="http://schemas.microsoft.com/office/drawing/2014/main" id="{DA3FAFF2-9385-5975-8D2B-935DF823C368}"/>
+                <a16:creationId xmlns:a16="http://schemas.microsoft.com/office/drawing/2014/main" id="{580198DA-7173-07AF-C042-05D43D78611D}"/>
               </a:ext>
             </a:extLst>
           </p:cNvPr>
@@ -7581,7 +7581,7 @@
           <p:cNvPr id="6" name="num">
             <a:extLst>
               <a:ext uri="{FF2B5EF4-FFF2-40B4-BE49-F238E27FC236}">
-                <a16:creationId xmlns:a16="http://schemas.microsoft.com/office/drawing/2014/main" id="{48859230-D0EB-AD22-B64C-6E5A7AE51CC6}"/>
+                <a16:creationId xmlns:a16="http://schemas.microsoft.com/office/drawing/2014/main" id="{A434EAD2-DCA9-E6F5-F144-C4A59B0D2925}"/>
               </a:ext>
             </a:extLst>
           </p:cNvPr>
@@ -7627,7 +7627,7 @@
           <p:cNvPr id="7" name="footer">
             <a:extLst>
               <a:ext uri="{FF2B5EF4-FFF2-40B4-BE49-F238E27FC236}">
-                <a16:creationId xmlns:a16="http://schemas.microsoft.com/office/drawing/2014/main" id="{F31CB50C-39F8-7992-E0E8-ECC0EB5A1F66}"/>
+                <a16:creationId xmlns:a16="http://schemas.microsoft.com/office/drawing/2014/main" id="{BD410147-5A29-A6CC-30E1-7CD5B44E0319}"/>
               </a:ext>
             </a:extLst>
           </p:cNvPr>
@@ -7673,7 +7673,7 @@
           <p:cNvPr id="8" name="student">
             <a:extLst>
               <a:ext uri="{FF2B5EF4-FFF2-40B4-BE49-F238E27FC236}">
-                <a16:creationId xmlns:a16="http://schemas.microsoft.com/office/drawing/2014/main" id="{050BC1FB-184F-8F2B-ADCE-01E0204F230C}"/>
+                <a16:creationId xmlns:a16="http://schemas.microsoft.com/office/drawing/2014/main" id="{03D89E97-5451-B142-6E8D-A31C4431EDA6}"/>
               </a:ext>
             </a:extLst>
           </p:cNvPr>
@@ -7719,7 +7719,7 @@
           <p:cNvPr id="10" name="图片 9">
             <a:extLst>
               <a:ext uri="{FF2B5EF4-FFF2-40B4-BE49-F238E27FC236}">
-                <a16:creationId xmlns:a16="http://schemas.microsoft.com/office/drawing/2014/main" id="{F7995438-F175-9212-F00B-F5D31E36C26A}"/>
+                <a16:creationId xmlns:a16="http://schemas.microsoft.com/office/drawing/2014/main" id="{FC3B990C-7517-7BFD-EFC5-5E363B1BED7E}"/>
               </a:ext>
             </a:extLst>
           </p:cNvPr>
@@ -7755,7 +7755,7 @@
           <p:cNvPr id="11" name="title">
             <a:extLst>
               <a:ext uri="{FF2B5EF4-FFF2-40B4-BE49-F238E27FC236}">
-                <a16:creationId xmlns:a16="http://schemas.microsoft.com/office/drawing/2014/main" id="{065A8ADF-90BA-4197-C0A9-1B942F91234F}"/>
+                <a16:creationId xmlns:a16="http://schemas.microsoft.com/office/drawing/2014/main" id="{3EF5D97C-666F-4B96-7511-A106EA9AB2BD}"/>
               </a:ext>
             </a:extLst>
           </p:cNvPr>
@@ -7801,7 +7801,7 @@
           <p:cNvPr id="12" name="subtitle">
             <a:extLst>
               <a:ext uri="{FF2B5EF4-FFF2-40B4-BE49-F238E27FC236}">
-                <a16:creationId xmlns:a16="http://schemas.microsoft.com/office/drawing/2014/main" id="{28C9D341-5D95-DB4A-7693-1A0E80B8A058}"/>
+                <a16:creationId xmlns:a16="http://schemas.microsoft.com/office/drawing/2014/main" id="{E7973DFD-957F-019E-C483-20CF02012E6C}"/>
               </a:ext>
             </a:extLst>
           </p:cNvPr>
@@ -7847,7 +7847,7 @@
           <p:cNvPr id="13" name="term">
             <a:extLst>
               <a:ext uri="{FF2B5EF4-FFF2-40B4-BE49-F238E27FC236}">
-                <a16:creationId xmlns:a16="http://schemas.microsoft.com/office/drawing/2014/main" id="{62EA2FDE-196F-D9F4-8079-D6E391EC929E}"/>
+                <a16:creationId xmlns:a16="http://schemas.microsoft.com/office/drawing/2014/main" id="{802E7B71-C088-8900-2D04-05DCE393E8D9}"/>
               </a:ext>
             </a:extLst>
           </p:cNvPr>
@@ -7901,7 +7901,7 @@
           <p:cNvPr id="14" name="term-k">
             <a:extLst>
               <a:ext uri="{FF2B5EF4-FFF2-40B4-BE49-F238E27FC236}">
-                <a16:creationId xmlns:a16="http://schemas.microsoft.com/office/drawing/2014/main" id="{AC8FF1E1-4872-3AEC-2694-48C185A0E1AF}"/>
+                <a16:creationId xmlns:a16="http://schemas.microsoft.com/office/drawing/2014/main" id="{368F3307-0C46-7176-0561-4E27FCF35BEA}"/>
               </a:ext>
             </a:extLst>
           </p:cNvPr>
@@ -7947,7 +7947,7 @@
           <p:cNvPr id="15" name="term-line">
             <a:extLst>
               <a:ext uri="{FF2B5EF4-FFF2-40B4-BE49-F238E27FC236}">
-                <a16:creationId xmlns:a16="http://schemas.microsoft.com/office/drawing/2014/main" id="{91C39A6A-15E7-C1F5-4B23-D18A841675D4}"/>
+                <a16:creationId xmlns:a16="http://schemas.microsoft.com/office/drawing/2014/main" id="{79C815A0-5467-97B8-A965-054A49EDCF0D}"/>
               </a:ext>
             </a:extLst>
           </p:cNvPr>
@@ -7988,7 +7988,7 @@
           <p:cNvPr id="16" name="term-t">
             <a:extLst>
               <a:ext uri="{FF2B5EF4-FFF2-40B4-BE49-F238E27FC236}">
-                <a16:creationId xmlns:a16="http://schemas.microsoft.com/office/drawing/2014/main" id="{0BFA88FB-8E11-BBE0-2290-5084E68CCEE5}"/>
+                <a16:creationId xmlns:a16="http://schemas.microsoft.com/office/drawing/2014/main" id="{E4A4E01C-AC39-57D9-8EAA-A2C07BBEBCC3}"/>
               </a:ext>
             </a:extLst>
           </p:cNvPr>
@@ -8038,7 +8038,7 @@
           <p:cNvPr id="17" name="ck-0">
             <a:extLst>
               <a:ext uri="{FF2B5EF4-FFF2-40B4-BE49-F238E27FC236}">
-                <a16:creationId xmlns:a16="http://schemas.microsoft.com/office/drawing/2014/main" id="{5FD94D56-D55A-5353-5C6A-6852668EFE9E}"/>
+                <a16:creationId xmlns:a16="http://schemas.microsoft.com/office/drawing/2014/main" id="{D6FFAFBE-55E8-E3E6-7376-D3CADAFAD9EC}"/>
               </a:ext>
             </a:extLst>
           </p:cNvPr>
@@ -8092,7 +8092,7 @@
           <p:cNvPr id="18" name="ck-t-0">
             <a:extLst>
               <a:ext uri="{FF2B5EF4-FFF2-40B4-BE49-F238E27FC236}">
-                <a16:creationId xmlns:a16="http://schemas.microsoft.com/office/drawing/2014/main" id="{0C8A9B73-3A6D-D736-6E19-10135A6F590F}"/>
+                <a16:creationId xmlns:a16="http://schemas.microsoft.com/office/drawing/2014/main" id="{DB252C4D-BD97-C171-B743-ECAA4E0AB3A7}"/>
               </a:ext>
             </a:extLst>
           </p:cNvPr>
@@ -8138,7 +8138,7 @@
           <p:cNvPr id="19" name="ck-s-0">
             <a:extLst>
               <a:ext uri="{FF2B5EF4-FFF2-40B4-BE49-F238E27FC236}">
-                <a16:creationId xmlns:a16="http://schemas.microsoft.com/office/drawing/2014/main" id="{DA5E8C09-A009-4619-3750-56D64C0E95AA}"/>
+                <a16:creationId xmlns:a16="http://schemas.microsoft.com/office/drawing/2014/main" id="{CA443BC1-0312-018E-0C43-86256ADC7C09}"/>
               </a:ext>
             </a:extLst>
           </p:cNvPr>
@@ -8184,7 +8184,7 @@
           <p:cNvPr id="20" name="ck-1">
             <a:extLst>
               <a:ext uri="{FF2B5EF4-FFF2-40B4-BE49-F238E27FC236}">
-                <a16:creationId xmlns:a16="http://schemas.microsoft.com/office/drawing/2014/main" id="{8255B4F6-9DBD-4B3D-A1EF-7305C2EEA934}"/>
+                <a16:creationId xmlns:a16="http://schemas.microsoft.com/office/drawing/2014/main" id="{C39E0C83-6657-3BFD-5502-49AEEF732E99}"/>
               </a:ext>
             </a:extLst>
           </p:cNvPr>
@@ -8238,7 +8238,7 @@
           <p:cNvPr id="21" name="ck-t-1">
             <a:extLst>
               <a:ext uri="{FF2B5EF4-FFF2-40B4-BE49-F238E27FC236}">
-                <a16:creationId xmlns:a16="http://schemas.microsoft.com/office/drawing/2014/main" id="{1766A4B9-2C18-E46F-8745-1323DA7DF2B9}"/>
+                <a16:creationId xmlns:a16="http://schemas.microsoft.com/office/drawing/2014/main" id="{F31F6D0C-9436-B41A-BDE0-EF38313F77CE}"/>
               </a:ext>
             </a:extLst>
           </p:cNvPr>
@@ -8284,7 +8284,7 @@
           <p:cNvPr id="22" name="ck-s-1">
             <a:extLst>
               <a:ext uri="{FF2B5EF4-FFF2-40B4-BE49-F238E27FC236}">
-                <a16:creationId xmlns:a16="http://schemas.microsoft.com/office/drawing/2014/main" id="{A003C0F7-A339-4940-7953-0E1B31B496A6}"/>
+                <a16:creationId xmlns:a16="http://schemas.microsoft.com/office/drawing/2014/main" id="{2FC146DE-F3D9-FC39-5DA2-9443802AB1AC}"/>
               </a:ext>
             </a:extLst>
           </p:cNvPr>
@@ -8330,7 +8330,7 @@
           <p:cNvPr id="23" name="ck-2">
             <a:extLst>
               <a:ext uri="{FF2B5EF4-FFF2-40B4-BE49-F238E27FC236}">
-                <a16:creationId xmlns:a16="http://schemas.microsoft.com/office/drawing/2014/main" id="{0CBFC7D7-DC7C-3CBB-C57A-82059CAAE52F}"/>
+                <a16:creationId xmlns:a16="http://schemas.microsoft.com/office/drawing/2014/main" id="{4A33D477-8851-FD0A-4DFD-888F9D226E1C}"/>
               </a:ext>
             </a:extLst>
           </p:cNvPr>
@@ -8384,7 +8384,7 @@
           <p:cNvPr id="24" name="ck-t-2">
             <a:extLst>
               <a:ext uri="{FF2B5EF4-FFF2-40B4-BE49-F238E27FC236}">
-                <a16:creationId xmlns:a16="http://schemas.microsoft.com/office/drawing/2014/main" id="{0B1FC572-024A-B4F7-7310-78C49AA3D262}"/>
+                <a16:creationId xmlns:a16="http://schemas.microsoft.com/office/drawing/2014/main" id="{E5BCBB15-55E3-F489-0810-33BAC767D30A}"/>
               </a:ext>
             </a:extLst>
           </p:cNvPr>
@@ -8430,7 +8430,7 @@
           <p:cNvPr id="25" name="ck-s-2">
             <a:extLst>
               <a:ext uri="{FF2B5EF4-FFF2-40B4-BE49-F238E27FC236}">
-                <a16:creationId xmlns:a16="http://schemas.microsoft.com/office/drawing/2014/main" id="{ECB666E1-508F-1C01-50AE-48C7A7AF57E8}"/>
+                <a16:creationId xmlns:a16="http://schemas.microsoft.com/office/drawing/2014/main" id="{CC40982C-BCD9-1541-2F96-E109F5B9FD6A}"/>
               </a:ext>
             </a:extLst>
           </p:cNvPr>
@@ -8477,7 +8477,7 @@
             <a:hlinkClick r:id="rId4"/>
             <a:extLst>
               <a:ext uri="{FF2B5EF4-FFF2-40B4-BE49-F238E27FC236}">
-                <a16:creationId xmlns:a16="http://schemas.microsoft.com/office/drawing/2014/main" id="{29EBF125-C9C7-2810-CF80-EC68CC5B9834}"/>
+                <a16:creationId xmlns:a16="http://schemas.microsoft.com/office/drawing/2014/main" id="{EFBB32FD-A4AF-8DED-7B2B-BC1DDD4A79CF}"/>
               </a:ext>
             </a:extLst>
           </p:cNvPr>
@@ -8546,7 +8546,7 @@
             <a:hlinkClick r:id="rId5"/>
             <a:extLst>
               <a:ext uri="{FF2B5EF4-FFF2-40B4-BE49-F238E27FC236}">
-                <a16:creationId xmlns:a16="http://schemas.microsoft.com/office/drawing/2014/main" id="{54CF6360-9510-F9DA-3656-11E8672F6F1F}"/>
+                <a16:creationId xmlns:a16="http://schemas.microsoft.com/office/drawing/2014/main" id="{51FFE251-964D-ABFB-E063-DA3BFC977156}"/>
               </a:ext>
             </a:extLst>
           </p:cNvPr>
@@ -8607,7 +8607,7 @@
     </p:spTree>
     <p:extLst>
       <p:ext uri="{BB962C8B-B14F-4D97-AF65-F5344CB8AC3E}">
-        <p14:creationId xmlns:p14="http://schemas.microsoft.com/office/powerpoint/2010/main" val="1285549801"/>
+        <p14:creationId xmlns:p14="http://schemas.microsoft.com/office/powerpoint/2010/main" val="3506498218"/>
       </p:ext>
     </p:extLst>
   </p:cSld>
@@ -9279,7 +9279,7 @@
           <p:cNvPr id="2" name="bg">
             <a:extLst>
               <a:ext uri="{FF2B5EF4-FFF2-40B4-BE49-F238E27FC236}">
-                <a16:creationId xmlns:a16="http://schemas.microsoft.com/office/drawing/2014/main" id="{246005CC-7276-AFC6-59E1-18F168001ECB}"/>
+                <a16:creationId xmlns:a16="http://schemas.microsoft.com/office/drawing/2014/main" id="{3A5328BE-5E6D-2ADB-7B02-971D42A82E8B}"/>
               </a:ext>
             </a:extLst>
           </p:cNvPr>
@@ -9340,7 +9340,7 @@
           <p:cNvPr id="3" name="rail">
             <a:extLst>
               <a:ext uri="{FF2B5EF4-FFF2-40B4-BE49-F238E27FC236}">
-                <a16:creationId xmlns:a16="http://schemas.microsoft.com/office/drawing/2014/main" id="{BBFC33C7-6D06-1ACD-FB35-23D7883BBDB6}"/>
+                <a16:creationId xmlns:a16="http://schemas.microsoft.com/office/drawing/2014/main" id="{998D2431-4C08-4618-482D-5966C4FC5DF2}"/>
               </a:ext>
             </a:extLst>
           </p:cNvPr>
@@ -9401,7 +9401,7 @@
           <p:cNvPr id="4" name="top-rule">
             <a:extLst>
               <a:ext uri="{FF2B5EF4-FFF2-40B4-BE49-F238E27FC236}">
-                <a16:creationId xmlns:a16="http://schemas.microsoft.com/office/drawing/2014/main" id="{6EB695A7-29F0-65D7-32CF-148E99C7169B}"/>
+                <a16:creationId xmlns:a16="http://schemas.microsoft.com/office/drawing/2014/main" id="{1B8D6227-ED0E-C167-8AF2-6002197CE8A1}"/>
               </a:ext>
             </a:extLst>
           </p:cNvPr>
@@ -9442,7 +9442,7 @@
           <p:cNvPr id="5" name="section">
             <a:extLst>
               <a:ext uri="{FF2B5EF4-FFF2-40B4-BE49-F238E27FC236}">
-                <a16:creationId xmlns:a16="http://schemas.microsoft.com/office/drawing/2014/main" id="{93DB037F-9758-8571-E037-242180E79D64}"/>
+                <a16:creationId xmlns:a16="http://schemas.microsoft.com/office/drawing/2014/main" id="{464B6DC0-2FC3-BD63-E83F-9FB037D1B53A}"/>
               </a:ext>
             </a:extLst>
           </p:cNvPr>
@@ -9488,7 +9488,7 @@
           <p:cNvPr id="6" name="num">
             <a:extLst>
               <a:ext uri="{FF2B5EF4-FFF2-40B4-BE49-F238E27FC236}">
-                <a16:creationId xmlns:a16="http://schemas.microsoft.com/office/drawing/2014/main" id="{85E428C8-3902-6E2E-03C7-F7DD60FFB106}"/>
+                <a16:creationId xmlns:a16="http://schemas.microsoft.com/office/drawing/2014/main" id="{197742CD-2471-5E50-6522-C51BE5EEDAB7}"/>
               </a:ext>
             </a:extLst>
           </p:cNvPr>
@@ -9534,7 +9534,7 @@
           <p:cNvPr id="7" name="footer">
             <a:extLst>
               <a:ext uri="{FF2B5EF4-FFF2-40B4-BE49-F238E27FC236}">
-                <a16:creationId xmlns:a16="http://schemas.microsoft.com/office/drawing/2014/main" id="{972FC9D9-0721-7ACC-22A3-01FC16D23DC6}"/>
+                <a16:creationId xmlns:a16="http://schemas.microsoft.com/office/drawing/2014/main" id="{3B03823D-B5A9-21B3-0970-99FFADEED001}"/>
               </a:ext>
             </a:extLst>
           </p:cNvPr>
@@ -9580,7 +9580,7 @@
           <p:cNvPr id="8" name="student">
             <a:extLst>
               <a:ext uri="{FF2B5EF4-FFF2-40B4-BE49-F238E27FC236}">
-                <a16:creationId xmlns:a16="http://schemas.microsoft.com/office/drawing/2014/main" id="{26197A64-00D7-65CE-68DD-7A5E8A57A5CD}"/>
+                <a16:creationId xmlns:a16="http://schemas.microsoft.com/office/drawing/2014/main" id="{EF72ED4E-80E0-2698-929E-7B6366A5A71C}"/>
               </a:ext>
             </a:extLst>
           </p:cNvPr>
@@ -9626,7 +9626,7 @@
           <p:cNvPr id="10" name="图片 9">
             <a:extLst>
               <a:ext uri="{FF2B5EF4-FFF2-40B4-BE49-F238E27FC236}">
-                <a16:creationId xmlns:a16="http://schemas.microsoft.com/office/drawing/2014/main" id="{A9AA49BC-8D40-8AD3-9322-5E02D962DE6F}"/>
+                <a16:creationId xmlns:a16="http://schemas.microsoft.com/office/drawing/2014/main" id="{79043664-1770-FA89-0055-A0F6A71405AE}"/>
               </a:ext>
             </a:extLst>
           </p:cNvPr>
@@ -9662,7 +9662,7 @@
           <p:cNvPr id="11" name="title">
             <a:extLst>
               <a:ext uri="{FF2B5EF4-FFF2-40B4-BE49-F238E27FC236}">
-                <a16:creationId xmlns:a16="http://schemas.microsoft.com/office/drawing/2014/main" id="{F0E42325-95E2-7A17-2070-4AF422F59009}"/>
+                <a16:creationId xmlns:a16="http://schemas.microsoft.com/office/drawing/2014/main" id="{4B9FDE32-C74A-4980-4B7B-F284AB5DAEE3}"/>
               </a:ext>
             </a:extLst>
           </p:cNvPr>
@@ -9692,7 +9692,7 @@
                 </a:solidFill>
                 <a:latin typeface="Aptos" panose="020B0004020202020204" pitchFamily="34" charset="0"/>
               </a:rPr>
-              <a:t>In Q&amp;A, defend the evidence and refuse unsupported claims.</a:t>
+              <a:t>My defence strategy is to qualify before I claim.</a:t>
             </a:r>
             <a:endParaRPr lang="zh-CN" altLang="en-US" sz="2150" b="1">
               <a:solidFill>
@@ -9708,7 +9708,7 @@
           <p:cNvPr id="12" name="subtitle">
             <a:extLst>
               <a:ext uri="{FF2B5EF4-FFF2-40B4-BE49-F238E27FC236}">
-                <a16:creationId xmlns:a16="http://schemas.microsoft.com/office/drawing/2014/main" id="{E0180444-5564-CAF8-D458-A950112818C5}"/>
+                <a16:creationId xmlns:a16="http://schemas.microsoft.com/office/drawing/2014/main" id="{FA20C207-2459-B4DF-8EAB-EB05767250DF}"/>
               </a:ext>
             </a:extLst>
           </p:cNvPr>
@@ -9738,7 +9738,7 @@
                 </a:solidFill>
                 <a:latin typeface="Aptos" panose="020B0004020202020204" pitchFamily="34" charset="0"/>
               </a:rPr>
-              <a:t>This slide is the answer strategy if the examiner pushes beyond the evidence.</a:t>
+              <a:t>For difficult questions, answer directly first, then state the evidence boundary.</a:t>
             </a:r>
             <a:endParaRPr lang="zh-CN" altLang="en-US" sz="930">
               <a:solidFill>
@@ -9754,7 +9754,7 @@
           <p:cNvPr id="13" name="rule">
             <a:extLst>
               <a:ext uri="{FF2B5EF4-FFF2-40B4-BE49-F238E27FC236}">
-                <a16:creationId xmlns:a16="http://schemas.microsoft.com/office/drawing/2014/main" id="{E87A9767-9C75-7CFF-3E1A-6254752A70DF}"/>
+                <a16:creationId xmlns:a16="http://schemas.microsoft.com/office/drawing/2014/main" id="{970F8C00-4749-E269-869C-529B6DB92A4B}"/>
               </a:ext>
             </a:extLst>
           </p:cNvPr>
@@ -9763,8 +9763,8 @@
         </p:nvSpPr>
         <p:spPr>
           <a:xfrm>
-            <a:off x="965200" y="1955800"/>
-            <a:ext cx="10261600" cy="660400"/>
+            <a:off x="990600" y="1955800"/>
+            <a:ext cx="10210800" cy="584200"/>
           </a:xfrm>
           <a:prstGeom prst="rect">
             <a:avLst/>
@@ -9808,7 +9808,7 @@
           <p:cNvPr id="14" name="rule-t">
             <a:extLst>
               <a:ext uri="{FF2B5EF4-FFF2-40B4-BE49-F238E27FC236}">
-                <a16:creationId xmlns:a16="http://schemas.microsoft.com/office/drawing/2014/main" id="{4130475D-3416-51D1-454B-F93CD270C571}"/>
+                <a16:creationId xmlns:a16="http://schemas.microsoft.com/office/drawing/2014/main" id="{3C0A7E76-FE48-3AD4-C096-4E118E3F715C}"/>
               </a:ext>
             </a:extLst>
           </p:cNvPr>
@@ -9817,8 +9817,8 @@
         </p:nvSpPr>
         <p:spPr>
           <a:xfrm>
-            <a:off x="1371600" y="2159000"/>
-            <a:ext cx="9220200" cy="276999"/>
+            <a:off x="1397000" y="2146300"/>
+            <a:ext cx="8890000" cy="276999"/>
           </a:xfrm>
           <a:prstGeom prst="rect">
             <a:avLst/>
@@ -9832,15 +9832,15 @@
           <a:lstStyle/>
           <a:p>
             <a:r>
-              <a:rPr lang="en-US" altLang="zh-CN" sz="1340" b="1">
+              <a:rPr lang="en-US" altLang="zh-CN" sz="1360" b="1">
                 <a:solidFill>
                   <a:srgbClr val="FFFFFF"/>
                 </a:solidFill>
                 <a:latin typeface="Aptos" panose="020B0004020202020204" pitchFamily="34" charset="0"/>
               </a:rPr>
-              <a:t>Answer in three moves: direct answer -&gt; evidence boundary -&gt; repository pointer.</a:t>
+              <a:t>Short answer -&gt; boundary -&gt; evidence pointer.</a:t>
             </a:r>
-            <a:endParaRPr lang="zh-CN" altLang="en-US" sz="1340" b="1">
+            <a:endParaRPr lang="zh-CN" altLang="en-US" sz="1360" b="1">
               <a:solidFill>
                 <a:srgbClr val="FFFFFF"/>
               </a:solidFill>
@@ -9851,10 +9851,10 @@
       </p:sp>
       <p:sp>
         <p:nvSpPr>
-          <p:cNvPr id="15" name="qa-move-0">
-            <a:extLst>
-              <a:ext uri="{FF2B5EF4-FFF2-40B4-BE49-F238E27FC236}">
-                <a16:creationId xmlns:a16="http://schemas.microsoft.com/office/drawing/2014/main" id="{B56D9890-0D88-56DD-B6D3-8C7187AD3C64}"/>
+          <p:cNvPr id="15" name="qa-row-0">
+            <a:extLst>
+              <a:ext uri="{FF2B5EF4-FFF2-40B4-BE49-F238E27FC236}">
+                <a16:creationId xmlns:a16="http://schemas.microsoft.com/office/drawing/2014/main" id="{EDAC8A7D-2A7C-0E75-6E51-FFDD82DB05FD}"/>
               </a:ext>
             </a:extLst>
           </p:cNvPr>
@@ -9863,14 +9863,14 @@
         </p:nvSpPr>
         <p:spPr>
           <a:xfrm>
-            <a:off x="1168400" y="3124200"/>
-            <a:ext cx="2819400" cy="1727200"/>
+            <a:off x="1422400" y="3022600"/>
+            <a:ext cx="9347200" cy="533400"/>
           </a:xfrm>
           <a:prstGeom prst="rect">
             <a:avLst/>
           </a:prstGeom>
           <a:solidFill>
-            <a:srgbClr val="FFFFFF"/>
+            <a:srgbClr val="F9FBFE"/>
           </a:solidFill>
           <a:ln w="11430">
             <a:solidFill>
@@ -9908,7 +9908,7 @@
           <p:cNvPr id="16" name="qa-band-0">
             <a:extLst>
               <a:ext uri="{FF2B5EF4-FFF2-40B4-BE49-F238E27FC236}">
-                <a16:creationId xmlns:a16="http://schemas.microsoft.com/office/drawing/2014/main" id="{3A672327-304F-FCAA-D7DB-C130823DFF3B}"/>
+                <a16:creationId xmlns:a16="http://schemas.microsoft.com/office/drawing/2014/main" id="{CD9E4FB3-15BA-9985-9316-A31436CB9447}"/>
               </a:ext>
             </a:extLst>
           </p:cNvPr>
@@ -9917,8 +9917,8 @@
         </p:nvSpPr>
         <p:spPr>
           <a:xfrm>
-            <a:off x="1168400" y="3124200"/>
-            <a:ext cx="2819400" cy="101600"/>
+            <a:off x="1422400" y="3022600"/>
+            <a:ext cx="88900" cy="533400"/>
           </a:xfrm>
           <a:prstGeom prst="rect">
             <a:avLst/>
@@ -9959,10 +9959,10 @@
       </p:sp>
       <p:sp>
         <p:nvSpPr>
-          <p:cNvPr id="17" name="qa-num-0">
-            <a:extLst>
-              <a:ext uri="{FF2B5EF4-FFF2-40B4-BE49-F238E27FC236}">
-                <a16:creationId xmlns:a16="http://schemas.microsoft.com/office/drawing/2014/main" id="{89593FC4-09CB-D364-C344-1BB54C0D4F97}"/>
+          <p:cNvPr id="17" name="qa-q-0">
+            <a:extLst>
+              <a:ext uri="{FF2B5EF4-FFF2-40B4-BE49-F238E27FC236}">
+                <a16:creationId xmlns:a16="http://schemas.microsoft.com/office/drawing/2014/main" id="{12375706-6F00-8FE0-ADE7-E55C9BA4E6E3}"/>
               </a:ext>
             </a:extLst>
           </p:cNvPr>
@@ -9971,8 +9971,8 @@
         </p:nvSpPr>
         <p:spPr>
           <a:xfrm>
-            <a:off x="1473200" y="3530600"/>
-            <a:ext cx="355600" cy="276999"/>
+            <a:off x="1803400" y="3149600"/>
+            <a:ext cx="3175000" cy="276999"/>
           </a:xfrm>
           <a:prstGeom prst="rect">
             <a:avLst/>
@@ -9986,15 +9986,15 @@
           <a:lstStyle/>
           <a:p>
             <a:r>
-              <a:rPr lang="en-US" altLang="zh-CN" sz="2200" b="1">
+              <a:rPr lang="en-US" altLang="zh-CN" sz="850" b="1">
                 <a:solidFill>
                   <a:srgbClr val="003B7A"/>
                 </a:solidFill>
                 <a:latin typeface="Aptos" panose="020B0004020202020204" pitchFamily="34" charset="0"/>
               </a:rPr>
-              <a:t>1</a:t>
+              <a:t>Why not one accuracy?</a:t>
             </a:r>
-            <a:endParaRPr lang="zh-CN" altLang="en-US" sz="2200" b="1">
+            <a:endParaRPr lang="zh-CN" altLang="en-US" sz="850" b="1">
               <a:solidFill>
                 <a:srgbClr val="003B7A"/>
               </a:solidFill>
@@ -10005,10 +10005,10 @@
       </p:sp>
       <p:sp>
         <p:nvSpPr>
-          <p:cNvPr id="18" name="qa-name-0">
-            <a:extLst>
-              <a:ext uri="{FF2B5EF4-FFF2-40B4-BE49-F238E27FC236}">
-                <a16:creationId xmlns:a16="http://schemas.microsoft.com/office/drawing/2014/main" id="{117F37E5-9D37-79F9-671A-FCA6FF80C22D}"/>
+          <p:cNvPr id="18" name="qa-a-0">
+            <a:extLst>
+              <a:ext uri="{FF2B5EF4-FFF2-40B4-BE49-F238E27FC236}">
+                <a16:creationId xmlns:a16="http://schemas.microsoft.com/office/drawing/2014/main" id="{EBBEC77F-FA56-939E-0321-618D0F8A4117}"/>
               </a:ext>
             </a:extLst>
           </p:cNvPr>
@@ -10017,8 +10017,8 @@
         </p:nvSpPr>
         <p:spPr>
           <a:xfrm>
-            <a:off x="2032000" y="3581400"/>
-            <a:ext cx="1498600" cy="276999"/>
+            <a:off x="5334000" y="3149600"/>
+            <a:ext cx="4572000" cy="276999"/>
           </a:xfrm>
           <a:prstGeom prst="rect">
             <a:avLst/>
@@ -10032,15 +10032,15 @@
           <a:lstStyle/>
           <a:p>
             <a:r>
-              <a:rPr lang="en-US" altLang="zh-CN" sz="1180" b="1">
+              <a:rPr lang="en-US" altLang="zh-CN" sz="830">
                 <a:solidFill>
                   <a:srgbClr val="071A3D"/>
                 </a:solidFill>
                 <a:latin typeface="Aptos" panose="020B0004020202020204" pitchFamily="34" charset="0"/>
               </a:rPr>
-              <a:t>Direct answer</a:t>
+              <a:t>Different access models require different evidence objects.</a:t>
             </a:r>
-            <a:endParaRPr lang="zh-CN" altLang="en-US" sz="1180" b="1">
+            <a:endParaRPr lang="zh-CN" altLang="en-US" sz="830">
               <a:solidFill>
                 <a:srgbClr val="071A3D"/>
               </a:solidFill>
@@ -10051,56 +10051,10 @@
       </p:sp>
       <p:sp>
         <p:nvSpPr>
-          <p:cNvPr id="19" name="qa-desc-0">
-            <a:extLst>
-              <a:ext uri="{FF2B5EF4-FFF2-40B4-BE49-F238E27FC236}">
-                <a16:creationId xmlns:a16="http://schemas.microsoft.com/office/drawing/2014/main" id="{EAFB100D-69B5-28D5-BB97-E31CA606BB09}"/>
-              </a:ext>
-            </a:extLst>
-          </p:cNvPr>
-          <p:cNvSpPr txBox="1"/>
-          <p:nvPr/>
-        </p:nvSpPr>
-        <p:spPr>
-          <a:xfrm>
-            <a:off x="1473200" y="4165600"/>
-            <a:ext cx="2108200" cy="276999"/>
-          </a:xfrm>
-          <a:prstGeom prst="rect">
-            <a:avLst/>
-          </a:prstGeom>
-          <a:noFill/>
-        </p:spPr>
-        <p:txBody>
-          <a:bodyPr vert="horz" wrap="square" lIns="0" tIns="0" rIns="0" bIns="0" rtlCol="0">
-            <a:noAutofit/>
-          </a:bodyPr>
-          <a:lstStyle/>
-          <a:p>
-            <a:r>
-              <a:rPr lang="en-US" altLang="zh-CN" sz="880">
-                <a:solidFill>
-                  <a:srgbClr val="4A5B78"/>
-                </a:solidFill>
-                <a:latin typeface="Aptos" panose="020B0004020202020204" pitchFamily="34" charset="0"/>
-              </a:rPr>
-              <a:t>State the result in one sentence.</a:t>
-            </a:r>
-            <a:endParaRPr lang="zh-CN" altLang="en-US" sz="880">
-              <a:solidFill>
-                <a:srgbClr val="4A5B78"/>
-              </a:solidFill>
-              <a:latin typeface="Aptos" panose="020B0004020202020204" pitchFamily="34" charset="0"/>
-            </a:endParaRPr>
-          </a:p>
-        </p:txBody>
-      </p:sp>
-      <p:sp>
-        <p:nvSpPr>
-          <p:cNvPr id="20" name="qa-move-1">
-            <a:extLst>
-              <a:ext uri="{FF2B5EF4-FFF2-40B4-BE49-F238E27FC236}">
-                <a16:creationId xmlns:a16="http://schemas.microsoft.com/office/drawing/2014/main" id="{986A13F4-7590-E3C3-DB79-AA4E3EC91CF8}"/>
+          <p:cNvPr id="19" name="qa-row-1">
+            <a:extLst>
+              <a:ext uri="{FF2B5EF4-FFF2-40B4-BE49-F238E27FC236}">
+                <a16:creationId xmlns:a16="http://schemas.microsoft.com/office/drawing/2014/main" id="{4F5C934B-21D7-485B-1EFE-DA9C2D4048C0}"/>
               </a:ext>
             </a:extLst>
           </p:cNvPr>
@@ -10109,14 +10063,14 @@
         </p:nvSpPr>
         <p:spPr>
           <a:xfrm>
-            <a:off x="4800600" y="3124200"/>
-            <a:ext cx="2819400" cy="1727200"/>
+            <a:off x="1422400" y="3810000"/>
+            <a:ext cx="9347200" cy="533400"/>
           </a:xfrm>
           <a:prstGeom prst="rect">
             <a:avLst/>
           </a:prstGeom>
           <a:solidFill>
-            <a:srgbClr val="FFFFFF"/>
+            <a:srgbClr val="F9FBFE"/>
           </a:solidFill>
           <a:ln w="11430">
             <a:solidFill>
@@ -10151,10 +10105,10 @@
       </p:sp>
       <p:sp>
         <p:nvSpPr>
-          <p:cNvPr id="21" name="qa-band-1">
-            <a:extLst>
-              <a:ext uri="{FF2B5EF4-FFF2-40B4-BE49-F238E27FC236}">
-                <a16:creationId xmlns:a16="http://schemas.microsoft.com/office/drawing/2014/main" id="{2DB8B402-C29E-03C2-E1FA-766980B3EF6B}"/>
+          <p:cNvPr id="20" name="qa-band-1">
+            <a:extLst>
+              <a:ext uri="{FF2B5EF4-FFF2-40B4-BE49-F238E27FC236}">
+                <a16:creationId xmlns:a16="http://schemas.microsoft.com/office/drawing/2014/main" id="{8001E993-E18C-F500-8905-FD63A6FA8DB0}"/>
               </a:ext>
             </a:extLst>
           </p:cNvPr>
@@ -10163,8 +10117,8 @@
         </p:nvSpPr>
         <p:spPr>
           <a:xfrm>
-            <a:off x="4800600" y="3124200"/>
-            <a:ext cx="2819400" cy="101600"/>
+            <a:off x="1422400" y="3810000"/>
+            <a:ext cx="88900" cy="533400"/>
           </a:xfrm>
           <a:prstGeom prst="rect">
             <a:avLst/>
@@ -10205,10 +10159,10 @@
       </p:sp>
       <p:sp>
         <p:nvSpPr>
-          <p:cNvPr id="22" name="qa-num-1">
-            <a:extLst>
-              <a:ext uri="{FF2B5EF4-FFF2-40B4-BE49-F238E27FC236}">
-                <a16:creationId xmlns:a16="http://schemas.microsoft.com/office/drawing/2014/main" id="{DE17DFB3-6C31-B173-7D17-8BF6CDEAD4C5}"/>
+          <p:cNvPr id="21" name="qa-q-1">
+            <a:extLst>
+              <a:ext uri="{FF2B5EF4-FFF2-40B4-BE49-F238E27FC236}">
+                <a16:creationId xmlns:a16="http://schemas.microsoft.com/office/drawing/2014/main" id="{5ED2DEA3-DB09-A2CF-49C3-826E3E12B882}"/>
               </a:ext>
             </a:extLst>
           </p:cNvPr>
@@ -10217,8 +10171,8 @@
         </p:nvSpPr>
         <p:spPr>
           <a:xfrm>
-            <a:off x="5105400" y="3530600"/>
-            <a:ext cx="355600" cy="276999"/>
+            <a:off x="1803400" y="3937000"/>
+            <a:ext cx="3175000" cy="276999"/>
           </a:xfrm>
           <a:prstGeom prst="rect">
             <a:avLst/>
@@ -10232,15 +10186,15 @@
           <a:lstStyle/>
           <a:p>
             <a:r>
-              <a:rPr lang="en-US" altLang="zh-CN" sz="2200" b="1">
+              <a:rPr lang="en-US" altLang="zh-CN" sz="850" b="1">
                 <a:solidFill>
                   <a:srgbClr val="B85C00"/>
                 </a:solidFill>
                 <a:latin typeface="Aptos" panose="020B0004020202020204" pitchFamily="34" charset="0"/>
               </a:rPr>
-              <a:t>2</a:t>
+              <a:t>What does 300/300 prove?</a:t>
             </a:r>
-            <a:endParaRPr lang="zh-CN" altLang="en-US" sz="2200" b="1">
+            <a:endParaRPr lang="zh-CN" altLang="en-US" sz="850" b="1">
               <a:solidFill>
                 <a:srgbClr val="B85C00"/>
               </a:solidFill>
@@ -10251,10 +10205,10 @@
       </p:sp>
       <p:sp>
         <p:nvSpPr>
-          <p:cNvPr id="23" name="qa-name-1">
-            <a:extLst>
-              <a:ext uri="{FF2B5EF4-FFF2-40B4-BE49-F238E27FC236}">
-                <a16:creationId xmlns:a16="http://schemas.microsoft.com/office/drawing/2014/main" id="{AD59E2E5-423F-43DB-7B5D-263C0EBB203C}"/>
+          <p:cNvPr id="22" name="qa-a-1">
+            <a:extLst>
+              <a:ext uri="{FF2B5EF4-FFF2-40B4-BE49-F238E27FC236}">
+                <a16:creationId xmlns:a16="http://schemas.microsoft.com/office/drawing/2014/main" id="{D6BF2A58-E015-C4F5-B04C-6C2ECE3D7081}"/>
               </a:ext>
             </a:extLst>
           </p:cNvPr>
@@ -10263,8 +10217,8 @@
         </p:nvSpPr>
         <p:spPr>
           <a:xfrm>
-            <a:off x="5664200" y="3581400"/>
-            <a:ext cx="1498600" cy="276999"/>
+            <a:off x="5334000" y="3937000"/>
+            <a:ext cx="4572000" cy="276999"/>
           </a:xfrm>
           <a:prstGeom prst="rect">
             <a:avLst/>
@@ -10278,15 +10232,15 @@
           <a:lstStyle/>
           <a:p>
             <a:r>
-              <a:rPr lang="en-US" altLang="zh-CN" sz="1180" b="1">
+              <a:rPr lang="en-US" altLang="zh-CN" sz="830">
                 <a:solidFill>
                   <a:srgbClr val="071A3D"/>
                 </a:solidFill>
                 <a:latin typeface="Aptos" panose="020B0004020202020204" pitchFamily="34" charset="0"/>
               </a:rPr>
-              <a:t>Boundary</a:t>
+              <a:t>Scoped owner attribution inside this registry and control set.</a:t>
             </a:r>
-            <a:endParaRPr lang="zh-CN" altLang="en-US" sz="1180" b="1">
+            <a:endParaRPr lang="zh-CN" altLang="en-US" sz="830">
               <a:solidFill>
                 <a:srgbClr val="071A3D"/>
               </a:solidFill>
@@ -10297,56 +10251,10 @@
       </p:sp>
       <p:sp>
         <p:nvSpPr>
-          <p:cNvPr id="24" name="qa-desc-1">
-            <a:extLst>
-              <a:ext uri="{FF2B5EF4-FFF2-40B4-BE49-F238E27FC236}">
-                <a16:creationId xmlns:a16="http://schemas.microsoft.com/office/drawing/2014/main" id="{5D4E43D4-4FBE-3B5E-AA4E-13459286DFBA}"/>
-              </a:ext>
-            </a:extLst>
-          </p:cNvPr>
-          <p:cNvSpPr txBox="1"/>
-          <p:nvPr/>
-        </p:nvSpPr>
-        <p:spPr>
-          <a:xfrm>
-            <a:off x="5105400" y="4165600"/>
-            <a:ext cx="2108200" cy="276999"/>
-          </a:xfrm>
-          <a:prstGeom prst="rect">
-            <a:avLst/>
-          </a:prstGeom>
-          <a:noFill/>
-        </p:spPr>
-        <p:txBody>
-          <a:bodyPr vert="horz" wrap="square" lIns="0" tIns="0" rIns="0" bIns="0" rtlCol="0">
-            <a:noAutofit/>
-          </a:bodyPr>
-          <a:lstStyle/>
-          <a:p>
-            <a:r>
-              <a:rPr lang="en-US" altLang="zh-CN" sz="880">
-                <a:solidFill>
-                  <a:srgbClr val="4A5B78"/>
-                </a:solidFill>
-                <a:latin typeface="Aptos" panose="020B0004020202020204" pitchFamily="34" charset="0"/>
-              </a:rPr>
-              <a:t>Name the denominator, control, or access limit.</a:t>
-            </a:r>
-            <a:endParaRPr lang="zh-CN" altLang="en-US" sz="880">
-              <a:solidFill>
-                <a:srgbClr val="4A5B78"/>
-              </a:solidFill>
-              <a:latin typeface="Aptos" panose="020B0004020202020204" pitchFamily="34" charset="0"/>
-            </a:endParaRPr>
-          </a:p>
-        </p:txBody>
-      </p:sp>
-      <p:sp>
-        <p:nvSpPr>
-          <p:cNvPr id="25" name="qa-move-2">
-            <a:extLst>
-              <a:ext uri="{FF2B5EF4-FFF2-40B4-BE49-F238E27FC236}">
-                <a16:creationId xmlns:a16="http://schemas.microsoft.com/office/drawing/2014/main" id="{335C32BD-1283-113D-7D94-DAF56A6941C9}"/>
+          <p:cNvPr id="23" name="qa-row-2">
+            <a:extLst>
+              <a:ext uri="{FF2B5EF4-FFF2-40B4-BE49-F238E27FC236}">
+                <a16:creationId xmlns:a16="http://schemas.microsoft.com/office/drawing/2014/main" id="{B5E225F0-5EAB-DACD-BD80-C290E05CD022}"/>
               </a:ext>
             </a:extLst>
           </p:cNvPr>
@@ -10355,14 +10263,14 @@
         </p:nvSpPr>
         <p:spPr>
           <a:xfrm>
-            <a:off x="8432800" y="3124200"/>
-            <a:ext cx="2819400" cy="1727200"/>
+            <a:off x="1422400" y="4597400"/>
+            <a:ext cx="9347200" cy="533400"/>
           </a:xfrm>
           <a:prstGeom prst="rect">
             <a:avLst/>
           </a:prstGeom>
           <a:solidFill>
-            <a:srgbClr val="FFFFFF"/>
+            <a:srgbClr val="F9FBFE"/>
           </a:solidFill>
           <a:ln w="11430">
             <a:solidFill>
@@ -10397,10 +10305,10 @@
       </p:sp>
       <p:sp>
         <p:nvSpPr>
-          <p:cNvPr id="26" name="qa-band-2">
-            <a:extLst>
-              <a:ext uri="{FF2B5EF4-FFF2-40B4-BE49-F238E27FC236}">
-                <a16:creationId xmlns:a16="http://schemas.microsoft.com/office/drawing/2014/main" id="{3DC08830-499E-E8AF-1C30-D2DF9A80FBA4}"/>
+          <p:cNvPr id="24" name="qa-band-2">
+            <a:extLst>
+              <a:ext uri="{FF2B5EF4-FFF2-40B4-BE49-F238E27FC236}">
+                <a16:creationId xmlns:a16="http://schemas.microsoft.com/office/drawing/2014/main" id="{4B0B1017-E229-3876-6997-EF60BBDE8C0F}"/>
               </a:ext>
             </a:extLst>
           </p:cNvPr>
@@ -10409,8 +10317,8 @@
         </p:nvSpPr>
         <p:spPr>
           <a:xfrm>
-            <a:off x="8432800" y="3124200"/>
-            <a:ext cx="2819400" cy="101600"/>
+            <a:off x="1422400" y="4597400"/>
+            <a:ext cx="88900" cy="533400"/>
           </a:xfrm>
           <a:prstGeom prst="rect">
             <a:avLst/>
@@ -10451,10 +10359,10 @@
       </p:sp>
       <p:sp>
         <p:nvSpPr>
-          <p:cNvPr id="27" name="qa-num-2">
-            <a:extLst>
-              <a:ext uri="{FF2B5EF4-FFF2-40B4-BE49-F238E27FC236}">
-                <a16:creationId xmlns:a16="http://schemas.microsoft.com/office/drawing/2014/main" id="{89C55AB1-C3A3-FDE7-1A8D-00E7F80A25BE}"/>
+          <p:cNvPr id="25" name="qa-q-2">
+            <a:extLst>
+              <a:ext uri="{FF2B5EF4-FFF2-40B4-BE49-F238E27FC236}">
+                <a16:creationId xmlns:a16="http://schemas.microsoft.com/office/drawing/2014/main" id="{EE1AE794-B34D-1849-F71C-A343DA39AB4F}"/>
               </a:ext>
             </a:extLst>
           </p:cNvPr>
@@ -10463,8 +10371,8 @@
         </p:nvSpPr>
         <p:spPr>
           <a:xfrm>
-            <a:off x="8737600" y="3530600"/>
-            <a:ext cx="355600" cy="276999"/>
+            <a:off x="1803400" y="4724400"/>
+            <a:ext cx="3175000" cy="276999"/>
           </a:xfrm>
           <a:prstGeom prst="rect">
             <a:avLst/>
@@ -10478,15 +10386,15 @@
           <a:lstStyle/>
           <a:p>
             <a:r>
-              <a:rPr lang="en-US" altLang="zh-CN" sz="2200" b="1">
+              <a:rPr lang="en-US" altLang="zh-CN" sz="850" b="1">
                 <a:solidFill>
                   <a:srgbClr val="1F7A4D"/>
                 </a:solidFill>
                 <a:latin typeface="Aptos" panose="020B0004020202020204" pitchFamily="34" charset="0"/>
               </a:rPr>
-              <a:t>3</a:t>
+              <a:t>Where can it be checked?</a:t>
             </a:r>
-            <a:endParaRPr lang="zh-CN" altLang="en-US" sz="2200" b="1">
+            <a:endParaRPr lang="zh-CN" altLang="en-US" sz="850" b="1">
               <a:solidFill>
                 <a:srgbClr val="1F7A4D"/>
               </a:solidFill>
@@ -10497,10 +10405,10 @@
       </p:sp>
       <p:sp>
         <p:nvSpPr>
-          <p:cNvPr id="28" name="qa-name-2">
-            <a:extLst>
-              <a:ext uri="{FF2B5EF4-FFF2-40B4-BE49-F238E27FC236}">
-                <a16:creationId xmlns:a16="http://schemas.microsoft.com/office/drawing/2014/main" id="{8075B61B-E464-3E76-2820-2558A0473AE0}"/>
+          <p:cNvPr id="26" name="qa-a-2">
+            <a:extLst>
+              <a:ext uri="{FF2B5EF4-FFF2-40B4-BE49-F238E27FC236}">
+                <a16:creationId xmlns:a16="http://schemas.microsoft.com/office/drawing/2014/main" id="{B3EAC895-215D-6F05-B4E8-0301A9F0C6F3}"/>
               </a:ext>
             </a:extLst>
           </p:cNvPr>
@@ -10509,8 +10417,8 @@
         </p:nvSpPr>
         <p:spPr>
           <a:xfrm>
-            <a:off x="9296400" y="3581400"/>
-            <a:ext cx="1498600" cy="276999"/>
+            <a:off x="5334000" y="4724400"/>
+            <a:ext cx="4572000" cy="276999"/>
           </a:xfrm>
           <a:prstGeom prst="rect">
             <a:avLst/>
@@ -10524,15 +10432,15 @@
           <a:lstStyle/>
           <a:p>
             <a:r>
-              <a:rPr lang="en-US" altLang="zh-CN" sz="1180" b="1">
+              <a:rPr lang="en-US" altLang="zh-CN" sz="830">
                 <a:solidFill>
                   <a:srgbClr val="071A3D"/>
                 </a:solidFill>
                 <a:latin typeface="Aptos" panose="020B0004020202020204" pitchFamily="34" charset="0"/>
               </a:rPr>
-              <a:t>Evidence pointer</a:t>
+              <a:t>CLAIM_BOUNDARIES, RESULT_MANIFEST, and viva_check.py.</a:t>
             </a:r>
-            <a:endParaRPr lang="zh-CN" altLang="en-US" sz="1180" b="1">
+            <a:endParaRPr lang="zh-CN" altLang="en-US" sz="830">
               <a:solidFill>
                 <a:srgbClr val="071A3D"/>
               </a:solidFill>
@@ -10543,56 +10451,10 @@
       </p:sp>
       <p:sp>
         <p:nvSpPr>
-          <p:cNvPr id="29" name="qa-desc-2">
-            <a:extLst>
-              <a:ext uri="{FF2B5EF4-FFF2-40B4-BE49-F238E27FC236}">
-                <a16:creationId xmlns:a16="http://schemas.microsoft.com/office/drawing/2014/main" id="{56BD2868-1F28-4D03-1719-E7A038AACDEE}"/>
-              </a:ext>
-            </a:extLst>
-          </p:cNvPr>
-          <p:cNvSpPr txBox="1"/>
-          <p:nvPr/>
-        </p:nvSpPr>
-        <p:spPr>
-          <a:xfrm>
-            <a:off x="8737600" y="4165600"/>
-            <a:ext cx="2108200" cy="276999"/>
-          </a:xfrm>
-          <a:prstGeom prst="rect">
-            <a:avLst/>
-          </a:prstGeom>
-          <a:noFill/>
-        </p:spPr>
-        <p:txBody>
-          <a:bodyPr vert="horz" wrap="square" lIns="0" tIns="0" rIns="0" bIns="0" rtlCol="0">
-            <a:noAutofit/>
-          </a:bodyPr>
-          <a:lstStyle/>
-          <a:p>
-            <a:r>
-              <a:rPr lang="en-US" altLang="zh-CN" sz="880">
-                <a:solidFill>
-                  <a:srgbClr val="4A5B78"/>
-                </a:solidFill>
-                <a:latin typeface="Aptos" panose="020B0004020202020204" pitchFamily="34" charset="0"/>
-              </a:rPr>
-              <a:t>Open the claim file, manifest, or check script.</a:t>
-            </a:r>
-            <a:endParaRPr lang="zh-CN" altLang="en-US" sz="880">
-              <a:solidFill>
-                <a:srgbClr val="4A5B78"/>
-              </a:solidFill>
-              <a:latin typeface="Aptos" panose="020B0004020202020204" pitchFamily="34" charset="0"/>
-            </a:endParaRPr>
-          </a:p>
-        </p:txBody>
-      </p:sp>
-      <p:sp>
-        <p:nvSpPr>
-          <p:cNvPr id="30" name="refuse">
-            <a:extLst>
-              <a:ext uri="{FF2B5EF4-FFF2-40B4-BE49-F238E27FC236}">
-                <a16:creationId xmlns:a16="http://schemas.microsoft.com/office/drawing/2014/main" id="{D30F625C-DE2D-4E44-8499-0ADFCF9F06C0}"/>
+          <p:cNvPr id="27" name="refuse">
+            <a:extLst>
+              <a:ext uri="{FF2B5EF4-FFF2-40B4-BE49-F238E27FC236}">
+                <a16:creationId xmlns:a16="http://schemas.microsoft.com/office/drawing/2014/main" id="{40B0A321-4CE9-8940-9B8A-F671822C9D5C}"/>
               </a:ext>
             </a:extLst>
           </p:cNvPr>
@@ -10601,8 +10463,8 @@
         </p:nvSpPr>
         <p:spPr>
           <a:xfrm>
-            <a:off x="1600200" y="5410200"/>
-            <a:ext cx="8991600" cy="431800"/>
+            <a:off x="1955800" y="5562600"/>
+            <a:ext cx="8280400" cy="381000"/>
           </a:xfrm>
           <a:prstGeom prst="rect">
             <a:avLst/>
@@ -10643,10 +10505,10 @@
       </p:sp>
       <p:sp>
         <p:nvSpPr>
-          <p:cNvPr id="31" name="refuse-t">
-            <a:extLst>
-              <a:ext uri="{FF2B5EF4-FFF2-40B4-BE49-F238E27FC236}">
-                <a16:creationId xmlns:a16="http://schemas.microsoft.com/office/drawing/2014/main" id="{2C38B577-F718-9FAD-4D4D-B52EA0E9B6B7}"/>
+          <p:cNvPr id="28" name="refuse-t">
+            <a:extLst>
+              <a:ext uri="{FF2B5EF4-FFF2-40B4-BE49-F238E27FC236}">
+                <a16:creationId xmlns:a16="http://schemas.microsoft.com/office/drawing/2014/main" id="{2B85E652-8BE5-D313-6D63-FFF63F5D5F4D}"/>
               </a:ext>
             </a:extLst>
           </p:cNvPr>
@@ -10655,8 +10517,8 @@
         </p:nvSpPr>
         <p:spPr>
           <a:xfrm>
-            <a:off x="1981200" y="5537200"/>
-            <a:ext cx="8229600" cy="276999"/>
+            <a:off x="2336800" y="5676900"/>
+            <a:ext cx="7518400" cy="276999"/>
           </a:xfrm>
           <a:prstGeom prst="rect">
             <a:avLst/>
@@ -10670,15 +10532,15 @@
           <a:lstStyle/>
           <a:p>
             <a:r>
-              <a:rPr lang="en-US" altLang="zh-CN" sz="790" b="1">
+              <a:rPr lang="en-US" altLang="zh-CN" sz="780" b="1">
                 <a:solidFill>
                   <a:srgbClr val="B8293C"/>
                 </a:solidFill>
                 <a:latin typeface="Aptos" panose="020B0004020202020204" pitchFamily="34" charset="0"/>
               </a:rPr>
-              <a:t>I will not claim legal authorship proof, provider accusation, universal watermarking, or a safety certificate.</a:t>
+              <a:t>Not claimed: legal authorship proof, provider accusation, universal watermarking, or safety certification.</a:t>
             </a:r>
-            <a:endParaRPr lang="zh-CN" altLang="en-US" sz="790" b="1">
+            <a:endParaRPr lang="zh-CN" altLang="en-US" sz="780" b="1">
               <a:solidFill>
                 <a:srgbClr val="B8293C"/>
               </a:solidFill>
@@ -10689,11 +10551,11 @@
       </p:sp>
       <p:sp>
         <p:nvSpPr>
-          <p:cNvPr id="32" name="footer-hit-11">
+          <p:cNvPr id="29" name="footer-hit-11">
             <a:hlinkClick r:id="rId4"/>
             <a:extLst>
               <a:ext uri="{FF2B5EF4-FFF2-40B4-BE49-F238E27FC236}">
-                <a16:creationId xmlns:a16="http://schemas.microsoft.com/office/drawing/2014/main" id="{7E7AA0FC-70D4-4BD8-671C-C67D22D7E1D8}"/>
+                <a16:creationId xmlns:a16="http://schemas.microsoft.com/office/drawing/2014/main" id="{434FD66B-1734-97DC-C888-440FCF409326}"/>
               </a:ext>
             </a:extLst>
           </p:cNvPr>
@@ -10754,7 +10616,7 @@
     </p:spTree>
     <p:extLst>
       <p:ext uri="{BB962C8B-B14F-4D97-AF65-F5344CB8AC3E}">
-        <p14:creationId xmlns:p14="http://schemas.microsoft.com/office/powerpoint/2010/main" val="48788143"/>
+        <p14:creationId xmlns:p14="http://schemas.microsoft.com/office/powerpoint/2010/main" val="4117910752"/>
       </p:ext>
     </p:extLst>
   </p:cSld>
@@ -11494,138 +11356,6 @@
                             </p:childTnLst>
                           </p:cTn>
                         </p:par>
-                        <p:par>
-                          <p:cTn id="68" fill="hold">
-                            <p:stCondLst>
-                              <p:cond delay="2560"/>
-                            </p:stCondLst>
-                            <p:childTnLst>
-                              <p:par>
-                                <p:cTn id="69" presetID="10" presetClass="entr" presetSubtype="0" fill="hold" grpId="0" nodeType="afterEffect">
-                                  <p:stCondLst>
-                                    <p:cond delay="0"/>
-                                  </p:stCondLst>
-                                  <p:childTnLst>
-                                    <p:set>
-                                      <p:cBhvr>
-                                        <p:cTn id="70" dur="1" fill="hold">
-                                          <p:stCondLst>
-                                            <p:cond delay="0"/>
-                                          </p:stCondLst>
-                                        </p:cTn>
-                                        <p:tgtEl>
-                                          <p:spTgt spid="29"/>
-                                        </p:tgtEl>
-                                        <p:attrNameLst>
-                                          <p:attrName>style.visibility</p:attrName>
-                                        </p:attrNameLst>
-                                      </p:cBhvr>
-                                      <p:to>
-                                        <p:strVal val="visible"/>
-                                      </p:to>
-                                    </p:set>
-                                    <p:animEffect transition="in" filter="fade">
-                                      <p:cBhvr>
-                                        <p:cTn id="71" dur="160"/>
-                                        <p:tgtEl>
-                                          <p:spTgt spid="29"/>
-                                        </p:tgtEl>
-                                      </p:cBhvr>
-                                    </p:animEffect>
-                                  </p:childTnLst>
-                                </p:cTn>
-                              </p:par>
-                            </p:childTnLst>
-                          </p:cTn>
-                        </p:par>
-                        <p:par>
-                          <p:cTn id="72" fill="hold">
-                            <p:stCondLst>
-                              <p:cond delay="2720"/>
-                            </p:stCondLst>
-                            <p:childTnLst>
-                              <p:par>
-                                <p:cTn id="73" presetID="10" presetClass="entr" presetSubtype="0" fill="hold" grpId="0" nodeType="afterEffect">
-                                  <p:stCondLst>
-                                    <p:cond delay="0"/>
-                                  </p:stCondLst>
-                                  <p:childTnLst>
-                                    <p:set>
-                                      <p:cBhvr>
-                                        <p:cTn id="74" dur="1" fill="hold">
-                                          <p:stCondLst>
-                                            <p:cond delay="0"/>
-                                          </p:stCondLst>
-                                        </p:cTn>
-                                        <p:tgtEl>
-                                          <p:spTgt spid="30"/>
-                                        </p:tgtEl>
-                                        <p:attrNameLst>
-                                          <p:attrName>style.visibility</p:attrName>
-                                        </p:attrNameLst>
-                                      </p:cBhvr>
-                                      <p:to>
-                                        <p:strVal val="visible"/>
-                                      </p:to>
-                                    </p:set>
-                                    <p:animEffect transition="in" filter="fade">
-                                      <p:cBhvr>
-                                        <p:cTn id="75" dur="160"/>
-                                        <p:tgtEl>
-                                          <p:spTgt spid="30"/>
-                                        </p:tgtEl>
-                                      </p:cBhvr>
-                                    </p:animEffect>
-                                  </p:childTnLst>
-                                </p:cTn>
-                              </p:par>
-                            </p:childTnLst>
-                          </p:cTn>
-                        </p:par>
-                        <p:par>
-                          <p:cTn id="76" fill="hold">
-                            <p:stCondLst>
-                              <p:cond delay="2880"/>
-                            </p:stCondLst>
-                            <p:childTnLst>
-                              <p:par>
-                                <p:cTn id="77" presetID="10" presetClass="entr" presetSubtype="0" fill="hold" grpId="0" nodeType="afterEffect">
-                                  <p:stCondLst>
-                                    <p:cond delay="0"/>
-                                  </p:stCondLst>
-                                  <p:childTnLst>
-                                    <p:set>
-                                      <p:cBhvr>
-                                        <p:cTn id="78" dur="1" fill="hold">
-                                          <p:stCondLst>
-                                            <p:cond delay="0"/>
-                                          </p:stCondLst>
-                                        </p:cTn>
-                                        <p:tgtEl>
-                                          <p:spTgt spid="31"/>
-                                        </p:tgtEl>
-                                        <p:attrNameLst>
-                                          <p:attrName>style.visibility</p:attrName>
-                                        </p:attrNameLst>
-                                      </p:cBhvr>
-                                      <p:to>
-                                        <p:strVal val="visible"/>
-                                      </p:to>
-                                    </p:set>
-                                    <p:animEffect transition="in" filter="fade">
-                                      <p:cBhvr>
-                                        <p:cTn id="79" dur="160"/>
-                                        <p:tgtEl>
-                                          <p:spTgt spid="31"/>
-                                        </p:tgtEl>
-                                      </p:cBhvr>
-                                    </p:animEffect>
-                                  </p:childTnLst>
-                                </p:cTn>
-                              </p:par>
-                            </p:childTnLst>
-                          </p:cTn>
-                        </p:par>
                       </p:childTnLst>
                     </p:cTn>
                   </p:par>
@@ -11657,19 +11387,16 @@
       <p:bldP spid="16" grpId="0" animBg="1"/>
       <p:bldP spid="17" grpId="0"/>
       <p:bldP spid="18" grpId="0"/>
-      <p:bldP spid="19" grpId="0"/>
+      <p:bldP spid="19" grpId="0" animBg="1"/>
       <p:bldP spid="20" grpId="0" animBg="1"/>
-      <p:bldP spid="21" grpId="0" animBg="1"/>
+      <p:bldP spid="21" grpId="0"/>
       <p:bldP spid="22" grpId="0"/>
-      <p:bldP spid="23" grpId="0"/>
-      <p:bldP spid="24" grpId="0"/>
-      <p:bldP spid="25" grpId="0" animBg="1"/>
-      <p:bldP spid="26" grpId="0" animBg="1"/>
-      <p:bldP spid="27" grpId="0"/>
+      <p:bldP spid="23" grpId="0" animBg="1"/>
+      <p:bldP spid="24" grpId="0" animBg="1"/>
+      <p:bldP spid="25" grpId="0"/>
+      <p:bldP spid="26" grpId="0"/>
+      <p:bldP spid="27" grpId="0" animBg="1"/>
       <p:bldP spid="28" grpId="0"/>
-      <p:bldP spid="29" grpId="0"/>
-      <p:bldP spid="30" grpId="0" animBg="1"/>
-      <p:bldP spid="31" grpId="0"/>
     </p:bldLst>
   </p:timing>
 </p:sld>
@@ -11697,7 +11424,7 @@
           <p:cNvPr id="2" name="bg">
             <a:extLst>
               <a:ext uri="{FF2B5EF4-FFF2-40B4-BE49-F238E27FC236}">
-                <a16:creationId xmlns:a16="http://schemas.microsoft.com/office/drawing/2014/main" id="{463F04EA-0303-58F5-16B7-D8DBE5D53C40}"/>
+                <a16:creationId xmlns:a16="http://schemas.microsoft.com/office/drawing/2014/main" id="{9D84BCF4-3FE8-50C7-F1DE-48CF4850557B}"/>
               </a:ext>
             </a:extLst>
           </p:cNvPr>
@@ -11758,7 +11485,7 @@
           <p:cNvPr id="3" name="rail">
             <a:extLst>
               <a:ext uri="{FF2B5EF4-FFF2-40B4-BE49-F238E27FC236}">
-                <a16:creationId xmlns:a16="http://schemas.microsoft.com/office/drawing/2014/main" id="{01A0C109-3F48-8531-C801-FF6381359521}"/>
+                <a16:creationId xmlns:a16="http://schemas.microsoft.com/office/drawing/2014/main" id="{557BEDD5-8D56-A522-5057-3FF096A8235C}"/>
               </a:ext>
             </a:extLst>
           </p:cNvPr>
@@ -11819,7 +11546,7 @@
           <p:cNvPr id="4" name="top-rule">
             <a:extLst>
               <a:ext uri="{FF2B5EF4-FFF2-40B4-BE49-F238E27FC236}">
-                <a16:creationId xmlns:a16="http://schemas.microsoft.com/office/drawing/2014/main" id="{A279F6AC-1AD9-072B-6857-59C6B42E4BF5}"/>
+                <a16:creationId xmlns:a16="http://schemas.microsoft.com/office/drawing/2014/main" id="{AE037B98-5244-1FE7-0823-6D4390817145}"/>
               </a:ext>
             </a:extLst>
           </p:cNvPr>
@@ -11860,7 +11587,7 @@
           <p:cNvPr id="5" name="section">
             <a:extLst>
               <a:ext uri="{FF2B5EF4-FFF2-40B4-BE49-F238E27FC236}">
-                <a16:creationId xmlns:a16="http://schemas.microsoft.com/office/drawing/2014/main" id="{1CAE3F5B-F319-CA1F-CA23-6A77B7FF4BA3}"/>
+                <a16:creationId xmlns:a16="http://schemas.microsoft.com/office/drawing/2014/main" id="{AAE16867-D2EC-81F7-BA4C-A506365B208C}"/>
               </a:ext>
             </a:extLst>
           </p:cNvPr>
@@ -11906,7 +11633,7 @@
           <p:cNvPr id="6" name="num">
             <a:extLst>
               <a:ext uri="{FF2B5EF4-FFF2-40B4-BE49-F238E27FC236}">
-                <a16:creationId xmlns:a16="http://schemas.microsoft.com/office/drawing/2014/main" id="{E9721015-517C-18C3-3FBC-DDE7024334BD}"/>
+                <a16:creationId xmlns:a16="http://schemas.microsoft.com/office/drawing/2014/main" id="{D566851C-3209-6057-0628-288B5AC2ED95}"/>
               </a:ext>
             </a:extLst>
           </p:cNvPr>
@@ -11952,7 +11679,7 @@
           <p:cNvPr id="7" name="footer">
             <a:extLst>
               <a:ext uri="{FF2B5EF4-FFF2-40B4-BE49-F238E27FC236}">
-                <a16:creationId xmlns:a16="http://schemas.microsoft.com/office/drawing/2014/main" id="{DD87D826-0932-7662-4A1C-1AF4CE755C91}"/>
+                <a16:creationId xmlns:a16="http://schemas.microsoft.com/office/drawing/2014/main" id="{8CDDEB4F-A626-6B3A-98D8-B932B796DD9B}"/>
               </a:ext>
             </a:extLst>
           </p:cNvPr>
@@ -11998,7 +11725,7 @@
           <p:cNvPr id="8" name="student">
             <a:extLst>
               <a:ext uri="{FF2B5EF4-FFF2-40B4-BE49-F238E27FC236}">
-                <a16:creationId xmlns:a16="http://schemas.microsoft.com/office/drawing/2014/main" id="{6BE5B45A-EB8B-91DE-C069-E4643EA1F41D}"/>
+                <a16:creationId xmlns:a16="http://schemas.microsoft.com/office/drawing/2014/main" id="{562D72BF-2C85-065E-405E-69729DEB9612}"/>
               </a:ext>
             </a:extLst>
           </p:cNvPr>
@@ -12044,7 +11771,7 @@
           <p:cNvPr id="10" name="图片 9">
             <a:extLst>
               <a:ext uri="{FF2B5EF4-FFF2-40B4-BE49-F238E27FC236}">
-                <a16:creationId xmlns:a16="http://schemas.microsoft.com/office/drawing/2014/main" id="{B9B70EFB-10C4-2C0F-31C6-CE55BCC41FB5}"/>
+                <a16:creationId xmlns:a16="http://schemas.microsoft.com/office/drawing/2014/main" id="{5A9DD8BD-FBF3-2051-840A-F7B18DD54836}"/>
               </a:ext>
             </a:extLst>
           </p:cNvPr>
@@ -12080,7 +11807,7 @@
           <p:cNvPr id="11" name="title">
             <a:extLst>
               <a:ext uri="{FF2B5EF4-FFF2-40B4-BE49-F238E27FC236}">
-                <a16:creationId xmlns:a16="http://schemas.microsoft.com/office/drawing/2014/main" id="{745D176E-AC23-6DD7-A7A5-478DB9BCFCE8}"/>
+                <a16:creationId xmlns:a16="http://schemas.microsoft.com/office/drawing/2014/main" id="{7A374A3C-96CB-59DD-E388-2DE189833529}"/>
               </a:ext>
             </a:extLst>
           </p:cNvPr>
@@ -12110,7 +11837,7 @@
                 </a:solidFill>
                 <a:latin typeface="Aptos" panose="020B0004020202020204" pitchFamily="34" charset="0"/>
               </a:rPr>
-              <a:t>The FYP artifact is complete; paper workstreams are planned continuations.</a:t>
+              <a:t>The submitted FYP is the artifact; papers are planned continuations.</a:t>
             </a:r>
             <a:endParaRPr lang="zh-CN" altLang="en-US" sz="2150" b="1">
               <a:solidFill>
@@ -12126,7 +11853,7 @@
           <p:cNvPr id="12" name="subtitle">
             <a:extLst>
               <a:ext uri="{FF2B5EF4-FFF2-40B4-BE49-F238E27FC236}">
-                <a16:creationId xmlns:a16="http://schemas.microsoft.com/office/drawing/2014/main" id="{E6DAA4B4-61BE-A1F0-7EFD-2694BABA1271}"/>
+                <a16:creationId xmlns:a16="http://schemas.microsoft.com/office/drawing/2014/main" id="{6FAC0A72-22E4-7693-A212-2710ACA62743}"/>
               </a:ext>
             </a:extLst>
           </p:cNvPr>
@@ -12156,7 +11883,7 @@
                 </a:solidFill>
                 <a:latin typeface="Aptos" panose="020B0004020202020204" pitchFamily="34" charset="0"/>
               </a:rPr>
-              <a:t>Publication targets are roadmap items, not extra claims added to the submitted dissertation.</a:t>
+              <a:t>The viva should assess the submitted repository, dissertation, evidence files, and claim boundaries.</a:t>
             </a:r>
             <a:endParaRPr lang="zh-CN" altLang="en-US" sz="930">
               <a:solidFill>
@@ -12172,7 +11899,7 @@
           <p:cNvPr id="13" name="fyp-box">
             <a:extLst>
               <a:ext uri="{FF2B5EF4-FFF2-40B4-BE49-F238E27FC236}">
-                <a16:creationId xmlns:a16="http://schemas.microsoft.com/office/drawing/2014/main" id="{B286AA96-A1FE-087A-9AAC-C99B62BC1B77}"/>
+                <a16:creationId xmlns:a16="http://schemas.microsoft.com/office/drawing/2014/main" id="{726888A7-032C-99C5-CF2A-3DDDC7A62147}"/>
               </a:ext>
             </a:extLst>
           </p:cNvPr>
@@ -12182,7 +11909,7 @@
         <p:spPr>
           <a:xfrm>
             <a:off x="838200" y="2108200"/>
-            <a:ext cx="3530600" cy="3022600"/>
+            <a:ext cx="3987800" cy="3022600"/>
           </a:xfrm>
           <a:prstGeom prst="rect">
             <a:avLst/>
@@ -12226,7 +11953,7 @@
           <p:cNvPr id="14" name="fyp-k">
             <a:extLst>
               <a:ext uri="{FF2B5EF4-FFF2-40B4-BE49-F238E27FC236}">
-                <a16:creationId xmlns:a16="http://schemas.microsoft.com/office/drawing/2014/main" id="{ED1C5449-076E-307C-AF9C-05ADDC361BB7}"/>
+                <a16:creationId xmlns:a16="http://schemas.microsoft.com/office/drawing/2014/main" id="{7233D43F-03F4-3747-0BFB-2471DE8D05A3}"/>
               </a:ext>
             </a:extLst>
           </p:cNvPr>
@@ -12272,7 +11999,7 @@
           <p:cNvPr id="15" name="fyp-t">
             <a:extLst>
               <a:ext uri="{FF2B5EF4-FFF2-40B4-BE49-F238E27FC236}">
-                <a16:creationId xmlns:a16="http://schemas.microsoft.com/office/drawing/2014/main" id="{A89AFB75-B60E-C71A-6C29-85D6886E11C0}"/>
+                <a16:creationId xmlns:a16="http://schemas.microsoft.com/office/drawing/2014/main" id="{F1213FF9-5707-495B-95EF-6AA3623B0042}"/>
               </a:ext>
             </a:extLst>
           </p:cNvPr>
@@ -12281,8 +12008,8 @@
         </p:nvSpPr>
         <p:spPr>
           <a:xfrm>
-            <a:off x="1219200" y="2997200"/>
-            <a:ext cx="2514600" cy="276999"/>
+            <a:off x="1219200" y="2946400"/>
+            <a:ext cx="2844800" cy="276999"/>
           </a:xfrm>
           <a:prstGeom prst="rect">
             <a:avLst/>
@@ -12296,15 +12023,15 @@
           <a:lstStyle/>
           <a:p>
             <a:r>
-              <a:rPr lang="en-US" altLang="zh-CN" b="1">
+              <a:rPr lang="en-US" altLang="zh-CN" sz="1750" b="1">
                 <a:solidFill>
                   <a:srgbClr val="FFFFFF"/>
                 </a:solidFill>
                 <a:latin typeface="Aptos" panose="020B0004020202020204" pitchFamily="34" charset="0"/>
               </a:rPr>
-              <a:t>Complete individual implementation and dissertation package</a:t>
+              <a:t>Individual implementation, dissertation, and evidence package</a:t>
             </a:r>
-            <a:endParaRPr lang="zh-CN" altLang="en-US" b="1">
+            <a:endParaRPr lang="zh-CN" altLang="en-US" sz="1750" b="1">
               <a:solidFill>
                 <a:srgbClr val="FFFFFF"/>
               </a:solidFill>
@@ -12318,7 +12045,7 @@
           <p:cNvPr id="16" name="fyp-s">
             <a:extLst>
               <a:ext uri="{FF2B5EF4-FFF2-40B4-BE49-F238E27FC236}">
-                <a16:creationId xmlns:a16="http://schemas.microsoft.com/office/drawing/2014/main" id="{1426B22A-6A14-DDD2-C67D-C7FB684ED767}"/>
+                <a16:creationId xmlns:a16="http://schemas.microsoft.com/office/drawing/2014/main" id="{49595A68-56EC-8B02-D670-82B692935B07}"/>
               </a:ext>
             </a:extLst>
           </p:cNvPr>
@@ -12328,7 +12055,7 @@
         <p:spPr>
           <a:xfrm>
             <a:off x="1219200" y="4038600"/>
-            <a:ext cx="2514600" cy="276999"/>
+            <a:ext cx="2844800" cy="276999"/>
           </a:xfrm>
           <a:prstGeom prst="rect">
             <a:avLst/>
@@ -12342,15 +12069,15 @@
           <a:lstStyle/>
           <a:p>
             <a:r>
-              <a:rPr lang="en-US" altLang="zh-CN" sz="900">
+              <a:rPr lang="en-US" altLang="zh-CN" sz="880">
                 <a:solidFill>
                   <a:srgbClr val="DBE9FA"/>
                 </a:solidFill>
                 <a:latin typeface="Aptos" panose="020B0004020202020204" pitchFamily="34" charset="0"/>
               </a:rPr>
-              <a:t>Assessed in viva: repository, dissertation, evidence files, and bounded claims.</a:t>
+              <a:t>This is the work being defended: code, data references, manifests, claim boundaries, and the submitted PDF.</a:t>
             </a:r>
-            <a:endParaRPr lang="zh-CN" altLang="en-US" sz="900">
+            <a:endParaRPr lang="zh-CN" altLang="en-US" sz="880">
               <a:solidFill>
                 <a:srgbClr val="DBE9FA"/>
               </a:solidFill>
@@ -12364,7 +12091,7 @@
           <p:cNvPr id="17" name="future-arrow">
             <a:extLst>
               <a:ext uri="{FF2B5EF4-FFF2-40B4-BE49-F238E27FC236}">
-                <a16:creationId xmlns:a16="http://schemas.microsoft.com/office/drawing/2014/main" id="{F1CA91A3-1416-2C3E-EA1F-AE40A98A96A4}"/>
+                <a16:creationId xmlns:a16="http://schemas.microsoft.com/office/drawing/2014/main" id="{6F6CD773-E286-CE63-6806-5122CC96E325}"/>
               </a:ext>
             </a:extLst>
           </p:cNvPr>
@@ -12373,8 +12100,8 @@
         </p:nvCxnSpPr>
         <p:spPr>
           <a:xfrm>
-            <a:off x="4699000" y="3632200"/>
-            <a:ext cx="1066800" cy="0"/>
+            <a:off x="5130800" y="3632200"/>
+            <a:ext cx="838200" cy="0"/>
           </a:xfrm>
           <a:prstGeom prst="line">
             <a:avLst/>
@@ -12406,7 +12133,7 @@
           <p:cNvPr id="18" name="future-label">
             <a:extLst>
               <a:ext uri="{FF2B5EF4-FFF2-40B4-BE49-F238E27FC236}">
-                <a16:creationId xmlns:a16="http://schemas.microsoft.com/office/drawing/2014/main" id="{0CBDB61C-4529-6EAE-74F5-7AE4823B5000}"/>
+                <a16:creationId xmlns:a16="http://schemas.microsoft.com/office/drawing/2014/main" id="{DF5E5445-83D0-462B-FBF7-090065AF0A5D}"/>
               </a:ext>
             </a:extLst>
           </p:cNvPr>
@@ -12415,7 +12142,7 @@
         </p:nvSpPr>
         <p:spPr>
           <a:xfrm>
-            <a:off x="5867400" y="2057400"/>
+            <a:off x="6172200" y="2057400"/>
             <a:ext cx="3378200" cy="276999"/>
           </a:xfrm>
           <a:prstGeom prst="rect">
@@ -12452,7 +12179,7 @@
           <p:cNvPr id="19" name="road-0">
             <a:extLst>
               <a:ext uri="{FF2B5EF4-FFF2-40B4-BE49-F238E27FC236}">
-                <a16:creationId xmlns:a16="http://schemas.microsoft.com/office/drawing/2014/main" id="{8AA7A0A4-BA76-818F-6EC5-CDDAF20686B1}"/>
+                <a16:creationId xmlns:a16="http://schemas.microsoft.com/office/drawing/2014/main" id="{360B6721-6BA2-095F-C9A1-D92448D2B952}"/>
               </a:ext>
             </a:extLst>
           </p:cNvPr>
@@ -12461,8 +12188,8 @@
         </p:nvSpPr>
         <p:spPr>
           <a:xfrm>
-            <a:off x="5867400" y="2489200"/>
-            <a:ext cx="5080000" cy="406400"/>
+            <a:off x="6172200" y="2489200"/>
+            <a:ext cx="4775200" cy="406400"/>
           </a:xfrm>
           <a:prstGeom prst="rect">
             <a:avLst/>
@@ -12506,7 +12233,7 @@
           <p:cNvPr id="20" name="road-band-0">
             <a:extLst>
               <a:ext uri="{FF2B5EF4-FFF2-40B4-BE49-F238E27FC236}">
-                <a16:creationId xmlns:a16="http://schemas.microsoft.com/office/drawing/2014/main" id="{8A0D2BBB-4C1C-0B4C-8565-B8C4DE956248}"/>
+                <a16:creationId xmlns:a16="http://schemas.microsoft.com/office/drawing/2014/main" id="{F235A409-4886-A445-09EA-A5C48F5163E8}"/>
               </a:ext>
             </a:extLst>
           </p:cNvPr>
@@ -12515,7 +12242,7 @@
         </p:nvSpPr>
         <p:spPr>
           <a:xfrm>
-            <a:off x="5867400" y="2489200"/>
+            <a:off x="6172200" y="2489200"/>
             <a:ext cx="76200" cy="406400"/>
           </a:xfrm>
           <a:prstGeom prst="rect">
@@ -12560,7 +12287,7 @@
           <p:cNvPr id="21" name="road-type-0">
             <a:extLst>
               <a:ext uri="{FF2B5EF4-FFF2-40B4-BE49-F238E27FC236}">
-                <a16:creationId xmlns:a16="http://schemas.microsoft.com/office/drawing/2014/main" id="{19A4F5F3-4698-4F72-DE99-B5FE524A90FF}"/>
+                <a16:creationId xmlns:a16="http://schemas.microsoft.com/office/drawing/2014/main" id="{CFCDDF2E-9461-3589-5F47-825B9E3DF8C0}"/>
               </a:ext>
             </a:extLst>
           </p:cNvPr>
@@ -12569,8 +12296,8 @@
         </p:nvSpPr>
         <p:spPr>
           <a:xfrm>
-            <a:off x="6146800" y="2603500"/>
-            <a:ext cx="914400" cy="276999"/>
+            <a:off x="6426200" y="2603500"/>
+            <a:ext cx="838200" cy="276999"/>
           </a:xfrm>
           <a:prstGeom prst="rect">
             <a:avLst/>
@@ -12584,7 +12311,7 @@
           <a:lstStyle/>
           <a:p>
             <a:r>
-              <a:rPr lang="en-US" altLang="zh-CN" sz="700" b="1">
+              <a:rPr lang="en-US" altLang="zh-CN" sz="680" b="1">
                 <a:solidFill>
                   <a:srgbClr val="4A5B78"/>
                 </a:solidFill>
@@ -12592,7 +12319,7 @@
               </a:rPr>
               <a:t>Benchmark</a:t>
             </a:r>
-            <a:endParaRPr lang="zh-CN" altLang="en-US" sz="700" b="1">
+            <a:endParaRPr lang="zh-CN" altLang="en-US" sz="680" b="1">
               <a:solidFill>
                 <a:srgbClr val="4A5B78"/>
               </a:solidFill>
@@ -12606,7 +12333,7 @@
           <p:cNvPr id="22" name="road-title-0">
             <a:extLst>
               <a:ext uri="{FF2B5EF4-FFF2-40B4-BE49-F238E27FC236}">
-                <a16:creationId xmlns:a16="http://schemas.microsoft.com/office/drawing/2014/main" id="{715C13D4-286E-52E5-C37C-9EF687299871}"/>
+                <a16:creationId xmlns:a16="http://schemas.microsoft.com/office/drawing/2014/main" id="{EEC3F094-CD2F-C274-C195-F077927F83F7}"/>
               </a:ext>
             </a:extLst>
           </p:cNvPr>
@@ -12615,8 +12342,8 @@
         </p:nvSpPr>
         <p:spPr>
           <a:xfrm>
-            <a:off x="7264400" y="2590800"/>
-            <a:ext cx="1422400" cy="276999"/>
+            <a:off x="7442200" y="2590800"/>
+            <a:ext cx="1371600" cy="276999"/>
           </a:xfrm>
           <a:prstGeom prst="rect">
             <a:avLst/>
@@ -12630,7 +12357,7 @@
           <a:lstStyle/>
           <a:p>
             <a:r>
-              <a:rPr lang="en-US" altLang="zh-CN" sz="780" b="1">
+              <a:rPr lang="en-US" altLang="zh-CN" sz="770" b="1">
                 <a:solidFill>
                   <a:srgbClr val="003B7A"/>
                 </a:solidFill>
@@ -12638,7 +12365,7 @@
               </a:rPr>
               <a:t>CodeMarkBench</a:t>
             </a:r>
-            <a:endParaRPr lang="zh-CN" altLang="en-US" sz="780" b="1">
+            <a:endParaRPr lang="zh-CN" altLang="en-US" sz="770" b="1">
               <a:solidFill>
                 <a:srgbClr val="003B7A"/>
               </a:solidFill>
@@ -12652,7 +12379,7 @@
           <p:cNvPr id="23" name="road-target-0">
             <a:extLst>
               <a:ext uri="{FF2B5EF4-FFF2-40B4-BE49-F238E27FC236}">
-                <a16:creationId xmlns:a16="http://schemas.microsoft.com/office/drawing/2014/main" id="{1E647105-2829-FF9C-81C6-F80093AE4F26}"/>
+                <a16:creationId xmlns:a16="http://schemas.microsoft.com/office/drawing/2014/main" id="{C0A62B93-8F95-24CD-78C0-2F784C943873}"/>
               </a:ext>
             </a:extLst>
           </p:cNvPr>
@@ -12661,7 +12388,7 @@
         </p:nvSpPr>
         <p:spPr>
           <a:xfrm>
-            <a:off x="8940800" y="2578100"/>
+            <a:off x="8991600" y="2578100"/>
             <a:ext cx="635000" cy="228600"/>
           </a:xfrm>
           <a:prstGeom prst="rect">
@@ -12706,7 +12433,7 @@
           <p:cNvPr id="24" name="road-targett-0">
             <a:extLst>
               <a:ext uri="{FF2B5EF4-FFF2-40B4-BE49-F238E27FC236}">
-                <a16:creationId xmlns:a16="http://schemas.microsoft.com/office/drawing/2014/main" id="{6DC6756C-3D28-1E1D-AA1A-9A4A61E26B34}"/>
+                <a16:creationId xmlns:a16="http://schemas.microsoft.com/office/drawing/2014/main" id="{E9FB0850-CDC5-C001-EDE0-C61602D2353A}"/>
               </a:ext>
             </a:extLst>
           </p:cNvPr>
@@ -12715,7 +12442,7 @@
         </p:nvSpPr>
         <p:spPr>
           <a:xfrm>
-            <a:off x="9067800" y="2641600"/>
+            <a:off x="9118600" y="2641600"/>
             <a:ext cx="431800" cy="276999"/>
           </a:xfrm>
           <a:prstGeom prst="rect">
@@ -12730,7 +12457,7 @@
           <a:lstStyle/>
           <a:p>
             <a:r>
-              <a:rPr lang="en-US" altLang="zh-CN" sz="640" b="1">
+              <a:rPr lang="en-US" altLang="zh-CN" sz="630" b="1">
                 <a:solidFill>
                   <a:srgbClr val="003B7A"/>
                 </a:solidFill>
@@ -12738,7 +12465,7 @@
               </a:rPr>
               <a:t>TOSEM</a:t>
             </a:r>
-            <a:endParaRPr lang="zh-CN" altLang="en-US" sz="640" b="1">
+            <a:endParaRPr lang="zh-CN" altLang="en-US" sz="630" b="1">
               <a:solidFill>
                 <a:srgbClr val="003B7A"/>
               </a:solidFill>
@@ -12752,7 +12479,7 @@
           <p:cNvPr id="25" name="road-sub-0">
             <a:extLst>
               <a:ext uri="{FF2B5EF4-FFF2-40B4-BE49-F238E27FC236}">
-                <a16:creationId xmlns:a16="http://schemas.microsoft.com/office/drawing/2014/main" id="{DDDBCEBB-85CE-D807-6799-D3EDD3EC8EA2}"/>
+                <a16:creationId xmlns:a16="http://schemas.microsoft.com/office/drawing/2014/main" id="{6CDFDCA0-0050-00D1-E551-460E1AEA1E78}"/>
               </a:ext>
             </a:extLst>
           </p:cNvPr>
@@ -12761,8 +12488,8 @@
         </p:nvSpPr>
         <p:spPr>
           <a:xfrm>
-            <a:off x="9829800" y="2603500"/>
-            <a:ext cx="914400" cy="276999"/>
+            <a:off x="9855200" y="2603500"/>
+            <a:ext cx="838200" cy="276999"/>
           </a:xfrm>
           <a:prstGeom prst="rect">
             <a:avLst/>
@@ -12776,7 +12503,7 @@
           <a:lstStyle/>
           <a:p>
             <a:r>
-              <a:rPr lang="en-US" altLang="zh-CN" sz="670">
+              <a:rPr lang="en-US" altLang="zh-CN" sz="650">
                 <a:solidFill>
                   <a:srgbClr val="4A5B78"/>
                 </a:solidFill>
@@ -12784,7 +12511,7 @@
               </a:rPr>
               <a:t>executability and adequacy</a:t>
             </a:r>
-            <a:endParaRPr lang="zh-CN" altLang="en-US" sz="670">
+            <a:endParaRPr lang="zh-CN" altLang="en-US" sz="650">
               <a:solidFill>
                 <a:srgbClr val="4A5B78"/>
               </a:solidFill>
@@ -12798,7 +12525,7 @@
           <p:cNvPr id="26" name="road-1">
             <a:extLst>
               <a:ext uri="{FF2B5EF4-FFF2-40B4-BE49-F238E27FC236}">
-                <a16:creationId xmlns:a16="http://schemas.microsoft.com/office/drawing/2014/main" id="{747FED53-B959-9FB8-6AC4-C6E364A62A11}"/>
+                <a16:creationId xmlns:a16="http://schemas.microsoft.com/office/drawing/2014/main" id="{2CA9A45B-175F-93D5-EB84-5DC8487475D8}"/>
               </a:ext>
             </a:extLst>
           </p:cNvPr>
@@ -12807,8 +12534,8 @@
         </p:nvSpPr>
         <p:spPr>
           <a:xfrm>
-            <a:off x="5867400" y="3060700"/>
-            <a:ext cx="5080000" cy="406400"/>
+            <a:off x="6172200" y="3060700"/>
+            <a:ext cx="4775200" cy="406400"/>
           </a:xfrm>
           <a:prstGeom prst="rect">
             <a:avLst/>
@@ -12852,7 +12579,7 @@
           <p:cNvPr id="27" name="road-band-1">
             <a:extLst>
               <a:ext uri="{FF2B5EF4-FFF2-40B4-BE49-F238E27FC236}">
-                <a16:creationId xmlns:a16="http://schemas.microsoft.com/office/drawing/2014/main" id="{7B9FE29A-839E-E166-ADA7-33F8B9AE287F}"/>
+                <a16:creationId xmlns:a16="http://schemas.microsoft.com/office/drawing/2014/main" id="{D4DA1534-3466-A211-4D4C-B0458DC316BE}"/>
               </a:ext>
             </a:extLst>
           </p:cNvPr>
@@ -12861,7 +12588,7 @@
         </p:nvSpPr>
         <p:spPr>
           <a:xfrm>
-            <a:off x="5867400" y="3060700"/>
+            <a:off x="6172200" y="3060700"/>
             <a:ext cx="76200" cy="406400"/>
           </a:xfrm>
           <a:prstGeom prst="rect">
@@ -12906,7 +12633,7 @@
           <p:cNvPr id="28" name="road-type-1">
             <a:extLst>
               <a:ext uri="{FF2B5EF4-FFF2-40B4-BE49-F238E27FC236}">
-                <a16:creationId xmlns:a16="http://schemas.microsoft.com/office/drawing/2014/main" id="{25B70EE2-AF1E-97C7-51FA-A4C37C630BBE}"/>
+                <a16:creationId xmlns:a16="http://schemas.microsoft.com/office/drawing/2014/main" id="{DC68342F-9047-C63C-21DD-977CB6F936CE}"/>
               </a:ext>
             </a:extLst>
           </p:cNvPr>
@@ -12915,8 +12642,8 @@
         </p:nvSpPr>
         <p:spPr>
           <a:xfrm>
-            <a:off x="6146800" y="3175000"/>
-            <a:ext cx="914400" cy="276999"/>
+            <a:off x="6426200" y="3175000"/>
+            <a:ext cx="838200" cy="276999"/>
           </a:xfrm>
           <a:prstGeom prst="rect">
             <a:avLst/>
@@ -12930,7 +12657,7 @@
           <a:lstStyle/>
           <a:p>
             <a:r>
-              <a:rPr lang="en-US" altLang="zh-CN" sz="700" b="1">
+              <a:rPr lang="en-US" altLang="zh-CN" sz="680" b="1">
                 <a:solidFill>
                   <a:srgbClr val="4A5B78"/>
                 </a:solidFill>
@@ -12938,7 +12665,7 @@
               </a:rPr>
               <a:t>White-box</a:t>
             </a:r>
-            <a:endParaRPr lang="zh-CN" altLang="en-US" sz="700" b="1">
+            <a:endParaRPr lang="zh-CN" altLang="en-US" sz="680" b="1">
               <a:solidFill>
                 <a:srgbClr val="4A5B78"/>
               </a:solidFill>
@@ -12952,7 +12679,7 @@
           <p:cNvPr id="29" name="road-title-1">
             <a:extLst>
               <a:ext uri="{FF2B5EF4-FFF2-40B4-BE49-F238E27FC236}">
-                <a16:creationId xmlns:a16="http://schemas.microsoft.com/office/drawing/2014/main" id="{85A2A0E6-780A-F905-F715-847355E77868}"/>
+                <a16:creationId xmlns:a16="http://schemas.microsoft.com/office/drawing/2014/main" id="{B0A940B9-629C-1E81-9DC0-D6EFFEBBED93}"/>
               </a:ext>
             </a:extLst>
           </p:cNvPr>
@@ -12961,8 +12688,8 @@
         </p:nvSpPr>
         <p:spPr>
           <a:xfrm>
-            <a:off x="7264400" y="3162300"/>
-            <a:ext cx="1422400" cy="276999"/>
+            <a:off x="7442200" y="3162300"/>
+            <a:ext cx="1371600" cy="276999"/>
           </a:xfrm>
           <a:prstGeom prst="rect">
             <a:avLst/>
@@ -12976,7 +12703,7 @@
           <a:lstStyle/>
           <a:p>
             <a:r>
-              <a:rPr lang="en-US" altLang="zh-CN" sz="780" b="1">
+              <a:rPr lang="en-US" altLang="zh-CN" sz="770" b="1">
                 <a:solidFill>
                   <a:srgbClr val="168E8B"/>
                 </a:solidFill>
@@ -12984,7 +12711,7 @@
               </a:rPr>
               <a:t>SemCodebook</a:t>
             </a:r>
-            <a:endParaRPr lang="zh-CN" altLang="en-US" sz="780" b="1">
+            <a:endParaRPr lang="zh-CN" altLang="en-US" sz="770" b="1">
               <a:solidFill>
                 <a:srgbClr val="168E8B"/>
               </a:solidFill>
@@ -12998,7 +12725,7 @@
           <p:cNvPr id="30" name="road-target-1">
             <a:extLst>
               <a:ext uri="{FF2B5EF4-FFF2-40B4-BE49-F238E27FC236}">
-                <a16:creationId xmlns:a16="http://schemas.microsoft.com/office/drawing/2014/main" id="{2EE42940-1961-0883-D407-C8BA33FB78A1}"/>
+                <a16:creationId xmlns:a16="http://schemas.microsoft.com/office/drawing/2014/main" id="{4ABE94E2-86CE-9695-56FE-F06682AA9B77}"/>
               </a:ext>
             </a:extLst>
           </p:cNvPr>
@@ -13007,7 +12734,7 @@
         </p:nvSpPr>
         <p:spPr>
           <a:xfrm>
-            <a:off x="8940800" y="3149600"/>
+            <a:off x="8991600" y="3149600"/>
             <a:ext cx="635000" cy="228600"/>
           </a:xfrm>
           <a:prstGeom prst="rect">
@@ -13052,7 +12779,7 @@
           <p:cNvPr id="31" name="road-targett-1">
             <a:extLst>
               <a:ext uri="{FF2B5EF4-FFF2-40B4-BE49-F238E27FC236}">
-                <a16:creationId xmlns:a16="http://schemas.microsoft.com/office/drawing/2014/main" id="{E7BBF27D-2885-6EA0-20F1-B80B03C41BE2}"/>
+                <a16:creationId xmlns:a16="http://schemas.microsoft.com/office/drawing/2014/main" id="{298DE06C-BA55-3824-950C-97DF3C1A5B71}"/>
               </a:ext>
             </a:extLst>
           </p:cNvPr>
@@ -13061,7 +12788,7 @@
         </p:nvSpPr>
         <p:spPr>
           <a:xfrm>
-            <a:off x="9067800" y="3213100"/>
+            <a:off x="9118600" y="3213100"/>
             <a:ext cx="431800" cy="276999"/>
           </a:xfrm>
           <a:prstGeom prst="rect">
@@ -13076,7 +12803,7 @@
           <a:lstStyle/>
           <a:p>
             <a:r>
-              <a:rPr lang="en-US" altLang="zh-CN" sz="640" b="1">
+              <a:rPr lang="en-US" altLang="zh-CN" sz="630" b="1">
                 <a:solidFill>
                   <a:srgbClr val="003B7A"/>
                 </a:solidFill>
@@ -13084,7 +12811,7 @@
               </a:rPr>
               <a:t>EMNLP</a:t>
             </a:r>
-            <a:endParaRPr lang="zh-CN" altLang="en-US" sz="640" b="1">
+            <a:endParaRPr lang="zh-CN" altLang="en-US" sz="630" b="1">
               <a:solidFill>
                 <a:srgbClr val="003B7A"/>
               </a:solidFill>
@@ -13098,7 +12825,7 @@
           <p:cNvPr id="32" name="road-sub-1">
             <a:extLst>
               <a:ext uri="{FF2B5EF4-FFF2-40B4-BE49-F238E27FC236}">
-                <a16:creationId xmlns:a16="http://schemas.microsoft.com/office/drawing/2014/main" id="{D5415675-D2AB-59CB-940F-AA4E4E14B690}"/>
+                <a16:creationId xmlns:a16="http://schemas.microsoft.com/office/drawing/2014/main" id="{151BA0A9-C5BF-2481-5997-B1327D05BEEF}"/>
               </a:ext>
             </a:extLst>
           </p:cNvPr>
@@ -13107,8 +12834,8 @@
         </p:nvSpPr>
         <p:spPr>
           <a:xfrm>
-            <a:off x="9829800" y="3175000"/>
-            <a:ext cx="914400" cy="276999"/>
+            <a:off x="9855200" y="3175000"/>
+            <a:ext cx="838200" cy="276999"/>
           </a:xfrm>
           <a:prstGeom prst="rect">
             <a:avLst/>
@@ -13122,7 +12849,7 @@
           <a:lstStyle/>
           <a:p>
             <a:r>
-              <a:rPr lang="en-US" altLang="zh-CN" sz="670">
+              <a:rPr lang="en-US" altLang="zh-CN" sz="650">
                 <a:solidFill>
                   <a:srgbClr val="4A5B78"/>
                 </a:solidFill>
@@ -13130,7 +12857,7 @@
               </a:rPr>
               <a:t>structured recovery</a:t>
             </a:r>
-            <a:endParaRPr lang="zh-CN" altLang="en-US" sz="670">
+            <a:endParaRPr lang="zh-CN" altLang="en-US" sz="650">
               <a:solidFill>
                 <a:srgbClr val="4A5B78"/>
               </a:solidFill>
@@ -13144,7 +12871,7 @@
           <p:cNvPr id="33" name="road-2">
             <a:extLst>
               <a:ext uri="{FF2B5EF4-FFF2-40B4-BE49-F238E27FC236}">
-                <a16:creationId xmlns:a16="http://schemas.microsoft.com/office/drawing/2014/main" id="{4432887B-E2C0-53C0-6240-A62F89BB23E3}"/>
+                <a16:creationId xmlns:a16="http://schemas.microsoft.com/office/drawing/2014/main" id="{AD19553A-159D-B9DD-AF68-DAFB83C3086D}"/>
               </a:ext>
             </a:extLst>
           </p:cNvPr>
@@ -13153,8 +12880,8 @@
         </p:nvSpPr>
         <p:spPr>
           <a:xfrm>
-            <a:off x="5867400" y="3632200"/>
-            <a:ext cx="5080000" cy="406400"/>
+            <a:off x="6172200" y="3632200"/>
+            <a:ext cx="4775200" cy="406400"/>
           </a:xfrm>
           <a:prstGeom prst="rect">
             <a:avLst/>
@@ -13198,7 +12925,7 @@
           <p:cNvPr id="34" name="road-band-2">
             <a:extLst>
               <a:ext uri="{FF2B5EF4-FFF2-40B4-BE49-F238E27FC236}">
-                <a16:creationId xmlns:a16="http://schemas.microsoft.com/office/drawing/2014/main" id="{CF631414-94AB-EC90-01E4-ADA0332C2181}"/>
+                <a16:creationId xmlns:a16="http://schemas.microsoft.com/office/drawing/2014/main" id="{4FB9222C-A42D-22D0-49C9-9E2B19841057}"/>
               </a:ext>
             </a:extLst>
           </p:cNvPr>
@@ -13207,7 +12934,7 @@
         </p:nvSpPr>
         <p:spPr>
           <a:xfrm>
-            <a:off x="5867400" y="3632200"/>
+            <a:off x="6172200" y="3632200"/>
             <a:ext cx="76200" cy="406400"/>
           </a:xfrm>
           <a:prstGeom prst="rect">
@@ -13252,7 +12979,7 @@
           <p:cNvPr id="35" name="road-type-2">
             <a:extLst>
               <a:ext uri="{FF2B5EF4-FFF2-40B4-BE49-F238E27FC236}">
-                <a16:creationId xmlns:a16="http://schemas.microsoft.com/office/drawing/2014/main" id="{C0237617-B1F0-FAF4-EBFF-6DB517162D90}"/>
+                <a16:creationId xmlns:a16="http://schemas.microsoft.com/office/drawing/2014/main" id="{8CCE54F6-6846-2C37-44C1-2012DFFDFAA8}"/>
               </a:ext>
             </a:extLst>
           </p:cNvPr>
@@ -13261,8 +12988,8 @@
         </p:nvSpPr>
         <p:spPr>
           <a:xfrm>
-            <a:off x="6146800" y="3746500"/>
-            <a:ext cx="914400" cy="276999"/>
+            <a:off x="6426200" y="3746500"/>
+            <a:ext cx="838200" cy="276999"/>
           </a:xfrm>
           <a:prstGeom prst="rect">
             <a:avLst/>
@@ -13276,7 +13003,7 @@
           <a:lstStyle/>
           <a:p>
             <a:r>
-              <a:rPr lang="en-US" altLang="zh-CN" sz="700" b="1">
+              <a:rPr lang="en-US" altLang="zh-CN" sz="680" b="1">
                 <a:solidFill>
                   <a:srgbClr val="4A5B78"/>
                 </a:solidFill>
@@ -13284,7 +13011,7 @@
               </a:rPr>
               <a:t>Black-box</a:t>
             </a:r>
-            <a:endParaRPr lang="zh-CN" altLang="en-US" sz="700" b="1">
+            <a:endParaRPr lang="zh-CN" altLang="en-US" sz="680" b="1">
               <a:solidFill>
                 <a:srgbClr val="4A5B78"/>
               </a:solidFill>
@@ -13298,7 +13025,7 @@
           <p:cNvPr id="36" name="road-title-2">
             <a:extLst>
               <a:ext uri="{FF2B5EF4-FFF2-40B4-BE49-F238E27FC236}">
-                <a16:creationId xmlns:a16="http://schemas.microsoft.com/office/drawing/2014/main" id="{225EF42E-1E32-47AB-27BD-44259BDC9350}"/>
+                <a16:creationId xmlns:a16="http://schemas.microsoft.com/office/drawing/2014/main" id="{DF2B350A-812B-1432-68BC-931C27FE118D}"/>
               </a:ext>
             </a:extLst>
           </p:cNvPr>
@@ -13307,8 +13034,8 @@
         </p:nvSpPr>
         <p:spPr>
           <a:xfrm>
-            <a:off x="7264400" y="3733800"/>
-            <a:ext cx="1422400" cy="276999"/>
+            <a:off x="7442200" y="3733800"/>
+            <a:ext cx="1371600" cy="276999"/>
           </a:xfrm>
           <a:prstGeom prst="rect">
             <a:avLst/>
@@ -13322,7 +13049,7 @@
           <a:lstStyle/>
           <a:p>
             <a:r>
-              <a:rPr lang="en-US" altLang="zh-CN" sz="780" b="1">
+              <a:rPr lang="en-US" altLang="zh-CN" sz="770" b="1">
                 <a:solidFill>
                   <a:srgbClr val="5B45C8"/>
                 </a:solidFill>
@@ -13330,7 +13057,7 @@
               </a:rPr>
               <a:t>CodeDye</a:t>
             </a:r>
-            <a:endParaRPr lang="zh-CN" altLang="en-US" sz="780" b="1">
+            <a:endParaRPr lang="zh-CN" altLang="en-US" sz="770" b="1">
               <a:solidFill>
                 <a:srgbClr val="5B45C8"/>
               </a:solidFill>
@@ -13344,7 +13071,7 @@
           <p:cNvPr id="37" name="road-target-2">
             <a:extLst>
               <a:ext uri="{FF2B5EF4-FFF2-40B4-BE49-F238E27FC236}">
-                <a16:creationId xmlns:a16="http://schemas.microsoft.com/office/drawing/2014/main" id="{817D6A37-1B1A-D29E-8EA8-44A66679D525}"/>
+                <a16:creationId xmlns:a16="http://schemas.microsoft.com/office/drawing/2014/main" id="{35274E30-604B-3D85-39F2-3D7B198581D9}"/>
               </a:ext>
             </a:extLst>
           </p:cNvPr>
@@ -13353,7 +13080,7 @@
         </p:nvSpPr>
         <p:spPr>
           <a:xfrm>
-            <a:off x="8940800" y="3721100"/>
+            <a:off x="8991600" y="3721100"/>
             <a:ext cx="635000" cy="228600"/>
           </a:xfrm>
           <a:prstGeom prst="rect">
@@ -13398,7 +13125,7 @@
           <p:cNvPr id="38" name="road-targett-2">
             <a:extLst>
               <a:ext uri="{FF2B5EF4-FFF2-40B4-BE49-F238E27FC236}">
-                <a16:creationId xmlns:a16="http://schemas.microsoft.com/office/drawing/2014/main" id="{22CE4EC0-65DD-DFA5-BA8E-0A46EA06D906}"/>
+                <a16:creationId xmlns:a16="http://schemas.microsoft.com/office/drawing/2014/main" id="{D7DBE0FE-4AE5-3BB5-3402-F54102CD6EFC}"/>
               </a:ext>
             </a:extLst>
           </p:cNvPr>
@@ -13407,7 +13134,7 @@
         </p:nvSpPr>
         <p:spPr>
           <a:xfrm>
-            <a:off x="9067800" y="3784600"/>
+            <a:off x="9118600" y="3784600"/>
             <a:ext cx="431800" cy="276999"/>
           </a:xfrm>
           <a:prstGeom prst="rect">
@@ -13422,7 +13149,7 @@
           <a:lstStyle/>
           <a:p>
             <a:r>
-              <a:rPr lang="en-US" altLang="zh-CN" sz="640" b="1">
+              <a:rPr lang="en-US" altLang="zh-CN" sz="630" b="1">
                 <a:solidFill>
                   <a:srgbClr val="003B7A"/>
                 </a:solidFill>
@@ -13430,7 +13157,7 @@
               </a:rPr>
               <a:t>EMNLP</a:t>
             </a:r>
-            <a:endParaRPr lang="zh-CN" altLang="en-US" sz="640" b="1">
+            <a:endParaRPr lang="zh-CN" altLang="en-US" sz="630" b="1">
               <a:solidFill>
                 <a:srgbClr val="003B7A"/>
               </a:solidFill>
@@ -13444,7 +13171,7 @@
           <p:cNvPr id="39" name="road-sub-2">
             <a:extLst>
               <a:ext uri="{FF2B5EF4-FFF2-40B4-BE49-F238E27FC236}">
-                <a16:creationId xmlns:a16="http://schemas.microsoft.com/office/drawing/2014/main" id="{76585508-5AB3-871C-2A78-6079CBA56330}"/>
+                <a16:creationId xmlns:a16="http://schemas.microsoft.com/office/drawing/2014/main" id="{61E11AA1-491B-A1E1-21D6-26E72C40DAEB}"/>
               </a:ext>
             </a:extLst>
           </p:cNvPr>
@@ -13453,8 +13180,8 @@
         </p:nvSpPr>
         <p:spPr>
           <a:xfrm>
-            <a:off x="9829800" y="3746500"/>
-            <a:ext cx="914400" cy="276999"/>
+            <a:off x="9855200" y="3746500"/>
+            <a:ext cx="838200" cy="276999"/>
           </a:xfrm>
           <a:prstGeom prst="rect">
             <a:avLst/>
@@ -13468,7 +13195,7 @@
           <a:lstStyle/>
           <a:p>
             <a:r>
-              <a:rPr lang="en-US" altLang="zh-CN" sz="670">
+              <a:rPr lang="en-US" altLang="zh-CN" sz="650">
                 <a:solidFill>
                   <a:srgbClr val="4A5B78"/>
                 </a:solidFill>
@@ -13476,7 +13203,7 @@
               </a:rPr>
               <a:t>conservative audit</a:t>
             </a:r>
-            <a:endParaRPr lang="zh-CN" altLang="en-US" sz="670">
+            <a:endParaRPr lang="zh-CN" altLang="en-US" sz="650">
               <a:solidFill>
                 <a:srgbClr val="4A5B78"/>
               </a:solidFill>
@@ -13490,7 +13217,7 @@
           <p:cNvPr id="40" name="road-3">
             <a:extLst>
               <a:ext uri="{FF2B5EF4-FFF2-40B4-BE49-F238E27FC236}">
-                <a16:creationId xmlns:a16="http://schemas.microsoft.com/office/drawing/2014/main" id="{09C23302-01B7-D706-50F9-D29B16D05EE4}"/>
+                <a16:creationId xmlns:a16="http://schemas.microsoft.com/office/drawing/2014/main" id="{EF3FCE58-25B9-24B6-10C8-49CCC54BB948}"/>
               </a:ext>
             </a:extLst>
           </p:cNvPr>
@@ -13499,8 +13226,8 @@
         </p:nvSpPr>
         <p:spPr>
           <a:xfrm>
-            <a:off x="5867400" y="4203700"/>
-            <a:ext cx="5080000" cy="406400"/>
+            <a:off x="6172200" y="4203700"/>
+            <a:ext cx="4775200" cy="406400"/>
           </a:xfrm>
           <a:prstGeom prst="rect">
             <a:avLst/>
@@ -13544,7 +13271,7 @@
           <p:cNvPr id="41" name="road-band-3">
             <a:extLst>
               <a:ext uri="{FF2B5EF4-FFF2-40B4-BE49-F238E27FC236}">
-                <a16:creationId xmlns:a16="http://schemas.microsoft.com/office/drawing/2014/main" id="{5DC5F987-7038-E3A0-A280-FB72AA61450C}"/>
+                <a16:creationId xmlns:a16="http://schemas.microsoft.com/office/drawing/2014/main" id="{F4F4E1BD-E6A2-7E82-8190-32A74F52D0BA}"/>
               </a:ext>
             </a:extLst>
           </p:cNvPr>
@@ -13553,7 +13280,7 @@
         </p:nvSpPr>
         <p:spPr>
           <a:xfrm>
-            <a:off x="5867400" y="4203700"/>
+            <a:off x="6172200" y="4203700"/>
             <a:ext cx="76200" cy="406400"/>
           </a:xfrm>
           <a:prstGeom prst="rect">
@@ -13598,7 +13325,7 @@
           <p:cNvPr id="42" name="road-type-3">
             <a:extLst>
               <a:ext uri="{FF2B5EF4-FFF2-40B4-BE49-F238E27FC236}">
-                <a16:creationId xmlns:a16="http://schemas.microsoft.com/office/drawing/2014/main" id="{FF9B84AC-2001-8F88-D521-A2BA88A619F3}"/>
+                <a16:creationId xmlns:a16="http://schemas.microsoft.com/office/drawing/2014/main" id="{1865DC52-FA83-52AD-761B-976C8817D1EF}"/>
               </a:ext>
             </a:extLst>
           </p:cNvPr>
@@ -13607,8 +13334,8 @@
         </p:nvSpPr>
         <p:spPr>
           <a:xfrm>
-            <a:off x="6146800" y="4318000"/>
-            <a:ext cx="914400" cy="276999"/>
+            <a:off x="6426200" y="4318000"/>
+            <a:ext cx="838200" cy="276999"/>
           </a:xfrm>
           <a:prstGeom prst="rect">
             <a:avLst/>
@@ -13622,7 +13349,7 @@
           <a:lstStyle/>
           <a:p>
             <a:r>
-              <a:rPr lang="en-US" altLang="zh-CN" sz="700" b="1">
+              <a:rPr lang="en-US" altLang="zh-CN" sz="680" b="1">
                 <a:solidFill>
                   <a:srgbClr val="4A5B78"/>
                 </a:solidFill>
@@ -13630,7 +13357,7 @@
               </a:rPr>
               <a:t>Attribution</a:t>
             </a:r>
-            <a:endParaRPr lang="zh-CN" altLang="en-US" sz="700" b="1">
+            <a:endParaRPr lang="zh-CN" altLang="en-US" sz="680" b="1">
               <a:solidFill>
                 <a:srgbClr val="4A5B78"/>
               </a:solidFill>
@@ -13644,7 +13371,7 @@
           <p:cNvPr id="43" name="road-title-3">
             <a:extLst>
               <a:ext uri="{FF2B5EF4-FFF2-40B4-BE49-F238E27FC236}">
-                <a16:creationId xmlns:a16="http://schemas.microsoft.com/office/drawing/2014/main" id="{205FDCC0-F2BE-A15E-BB1D-A1D149D46B3F}"/>
+                <a16:creationId xmlns:a16="http://schemas.microsoft.com/office/drawing/2014/main" id="{F009D450-8C0E-4100-5E18-93F40CB5E5DF}"/>
               </a:ext>
             </a:extLst>
           </p:cNvPr>
@@ -13653,8 +13380,8 @@
         </p:nvSpPr>
         <p:spPr>
           <a:xfrm>
-            <a:off x="7264400" y="4305300"/>
-            <a:ext cx="1422400" cy="276999"/>
+            <a:off x="7442200" y="4305300"/>
+            <a:ext cx="1371600" cy="276999"/>
           </a:xfrm>
           <a:prstGeom prst="rect">
             <a:avLst/>
@@ -13668,7 +13395,7 @@
           <a:lstStyle/>
           <a:p>
             <a:r>
-              <a:rPr lang="en-US" altLang="zh-CN" sz="780" b="1">
+              <a:rPr lang="en-US" altLang="zh-CN" sz="770" b="1">
                 <a:solidFill>
                   <a:srgbClr val="B85C00"/>
                 </a:solidFill>
@@ -13676,7 +13403,7 @@
               </a:rPr>
               <a:t>ProbeTrace</a:t>
             </a:r>
-            <a:endParaRPr lang="zh-CN" altLang="en-US" sz="780" b="1">
+            <a:endParaRPr lang="zh-CN" altLang="en-US" sz="770" b="1">
               <a:solidFill>
                 <a:srgbClr val="B85C00"/>
               </a:solidFill>
@@ -13690,7 +13417,7 @@
           <p:cNvPr id="44" name="road-target-3">
             <a:extLst>
               <a:ext uri="{FF2B5EF4-FFF2-40B4-BE49-F238E27FC236}">
-                <a16:creationId xmlns:a16="http://schemas.microsoft.com/office/drawing/2014/main" id="{FEBB3D30-A98C-166E-FF88-74839AB80759}"/>
+                <a16:creationId xmlns:a16="http://schemas.microsoft.com/office/drawing/2014/main" id="{303F0331-05FD-8F74-5775-4D003F4BF897}"/>
               </a:ext>
             </a:extLst>
           </p:cNvPr>
@@ -13699,7 +13426,7 @@
         </p:nvSpPr>
         <p:spPr>
           <a:xfrm>
-            <a:off x="8940800" y="4292600"/>
+            <a:off x="8991600" y="4292600"/>
             <a:ext cx="635000" cy="228600"/>
           </a:xfrm>
           <a:prstGeom prst="rect">
@@ -13744,7 +13471,7 @@
           <p:cNvPr id="45" name="road-targett-3">
             <a:extLst>
               <a:ext uri="{FF2B5EF4-FFF2-40B4-BE49-F238E27FC236}">
-                <a16:creationId xmlns:a16="http://schemas.microsoft.com/office/drawing/2014/main" id="{4B3BEE5D-ADC1-A8B6-543C-6DA48FC598E7}"/>
+                <a16:creationId xmlns:a16="http://schemas.microsoft.com/office/drawing/2014/main" id="{9B16A255-C01A-E255-761C-43079482D31C}"/>
               </a:ext>
             </a:extLst>
           </p:cNvPr>
@@ -13753,7 +13480,7 @@
         </p:nvSpPr>
         <p:spPr>
           <a:xfrm>
-            <a:off x="9067800" y="4356100"/>
+            <a:off x="9118600" y="4356100"/>
             <a:ext cx="431800" cy="276999"/>
           </a:xfrm>
           <a:prstGeom prst="rect">
@@ -13768,7 +13495,7 @@
           <a:lstStyle/>
           <a:p>
             <a:r>
-              <a:rPr lang="en-US" altLang="zh-CN" sz="640" b="1">
+              <a:rPr lang="en-US" altLang="zh-CN" sz="630" b="1">
                 <a:solidFill>
                   <a:srgbClr val="003B7A"/>
                 </a:solidFill>
@@ -13776,7 +13503,7 @@
               </a:rPr>
               <a:t>EMNLP</a:t>
             </a:r>
-            <a:endParaRPr lang="zh-CN" altLang="en-US" sz="640" b="1">
+            <a:endParaRPr lang="zh-CN" altLang="en-US" sz="630" b="1">
               <a:solidFill>
                 <a:srgbClr val="003B7A"/>
               </a:solidFill>
@@ -13790,7 +13517,7 @@
           <p:cNvPr id="46" name="road-sub-3">
             <a:extLst>
               <a:ext uri="{FF2B5EF4-FFF2-40B4-BE49-F238E27FC236}">
-                <a16:creationId xmlns:a16="http://schemas.microsoft.com/office/drawing/2014/main" id="{A841181C-EDB3-9D18-D952-3D5A6D5360F4}"/>
+                <a16:creationId xmlns:a16="http://schemas.microsoft.com/office/drawing/2014/main" id="{3F4F0A17-10F1-95FE-58DC-DA8FF923B022}"/>
               </a:ext>
             </a:extLst>
           </p:cNvPr>
@@ -13799,8 +13526,8 @@
         </p:nvSpPr>
         <p:spPr>
           <a:xfrm>
-            <a:off x="9829800" y="4318000"/>
-            <a:ext cx="914400" cy="276999"/>
+            <a:off x="9855200" y="4318000"/>
+            <a:ext cx="838200" cy="276999"/>
           </a:xfrm>
           <a:prstGeom prst="rect">
             <a:avLst/>
@@ -13814,7 +13541,7 @@
           <a:lstStyle/>
           <a:p>
             <a:r>
-              <a:rPr lang="en-US" altLang="zh-CN" sz="670">
+              <a:rPr lang="en-US" altLang="zh-CN" sz="650">
                 <a:solidFill>
                   <a:srgbClr val="4A5B78"/>
                 </a:solidFill>
@@ -13822,7 +13549,7 @@
               </a:rPr>
               <a:t>owner evidence</a:t>
             </a:r>
-            <a:endParaRPr lang="zh-CN" altLang="en-US" sz="670">
+            <a:endParaRPr lang="zh-CN" altLang="en-US" sz="650">
               <a:solidFill>
                 <a:srgbClr val="4A5B78"/>
               </a:solidFill>
@@ -13836,7 +13563,7 @@
           <p:cNvPr id="47" name="road-4">
             <a:extLst>
               <a:ext uri="{FF2B5EF4-FFF2-40B4-BE49-F238E27FC236}">
-                <a16:creationId xmlns:a16="http://schemas.microsoft.com/office/drawing/2014/main" id="{8965E439-7083-C956-5938-05E5FD046804}"/>
+                <a16:creationId xmlns:a16="http://schemas.microsoft.com/office/drawing/2014/main" id="{B3606984-1641-694A-EA28-6C59DC62B87A}"/>
               </a:ext>
             </a:extLst>
           </p:cNvPr>
@@ -13845,8 +13572,8 @@
         </p:nvSpPr>
         <p:spPr>
           <a:xfrm>
-            <a:off x="5867400" y="4775200"/>
-            <a:ext cx="5080000" cy="406400"/>
+            <a:off x="6172200" y="4775200"/>
+            <a:ext cx="4775200" cy="406400"/>
           </a:xfrm>
           <a:prstGeom prst="rect">
             <a:avLst/>
@@ -13890,7 +13617,7 @@
           <p:cNvPr id="48" name="road-band-4">
             <a:extLst>
               <a:ext uri="{FF2B5EF4-FFF2-40B4-BE49-F238E27FC236}">
-                <a16:creationId xmlns:a16="http://schemas.microsoft.com/office/drawing/2014/main" id="{EF5BF383-8353-8670-10E3-11B18AA8C649}"/>
+                <a16:creationId xmlns:a16="http://schemas.microsoft.com/office/drawing/2014/main" id="{2BE5B462-27F0-9778-7749-A69122657107}"/>
               </a:ext>
             </a:extLst>
           </p:cNvPr>
@@ -13899,7 +13626,7 @@
         </p:nvSpPr>
         <p:spPr>
           <a:xfrm>
-            <a:off x="5867400" y="4775200"/>
+            <a:off x="6172200" y="4775200"/>
             <a:ext cx="76200" cy="406400"/>
           </a:xfrm>
           <a:prstGeom prst="rect">
@@ -13944,7 +13671,7 @@
           <p:cNvPr id="49" name="road-type-4">
             <a:extLst>
               <a:ext uri="{FF2B5EF4-FFF2-40B4-BE49-F238E27FC236}">
-                <a16:creationId xmlns:a16="http://schemas.microsoft.com/office/drawing/2014/main" id="{52C5091D-FF50-6C68-C58C-028B97FD40FA}"/>
+                <a16:creationId xmlns:a16="http://schemas.microsoft.com/office/drawing/2014/main" id="{5554984D-9506-8855-F5B5-C54635A225DA}"/>
               </a:ext>
             </a:extLst>
           </p:cNvPr>
@@ -13953,8 +13680,8 @@
         </p:nvSpPr>
         <p:spPr>
           <a:xfrm>
-            <a:off x="6146800" y="4889500"/>
-            <a:ext cx="914400" cy="276999"/>
+            <a:off x="6426200" y="4889500"/>
+            <a:ext cx="838200" cy="276999"/>
           </a:xfrm>
           <a:prstGeom prst="rect">
             <a:avLst/>
@@ -13968,7 +13695,7 @@
           <a:lstStyle/>
           <a:p>
             <a:r>
-              <a:rPr lang="en-US" altLang="zh-CN" sz="700" b="1">
+              <a:rPr lang="en-US" altLang="zh-CN" sz="680" b="1">
                 <a:solidFill>
                   <a:srgbClr val="4A5B78"/>
                 </a:solidFill>
@@ -13976,7 +13703,7 @@
               </a:rPr>
               <a:t>Security</a:t>
             </a:r>
-            <a:endParaRPr lang="zh-CN" altLang="en-US" sz="700" b="1">
+            <a:endParaRPr lang="zh-CN" altLang="en-US" sz="680" b="1">
               <a:solidFill>
                 <a:srgbClr val="4A5B78"/>
               </a:solidFill>
@@ -13990,7 +13717,7 @@
           <p:cNvPr id="50" name="road-title-4">
             <a:extLst>
               <a:ext uri="{FF2B5EF4-FFF2-40B4-BE49-F238E27FC236}">
-                <a16:creationId xmlns:a16="http://schemas.microsoft.com/office/drawing/2014/main" id="{358BD5ED-84CD-4DC8-CB1E-24A247004CFB}"/>
+                <a16:creationId xmlns:a16="http://schemas.microsoft.com/office/drawing/2014/main" id="{A1A3E0A9-D7B8-0EC9-9C66-A867C06933B0}"/>
               </a:ext>
             </a:extLst>
           </p:cNvPr>
@@ -13999,8 +13726,8 @@
         </p:nvSpPr>
         <p:spPr>
           <a:xfrm>
-            <a:off x="7264400" y="4876800"/>
-            <a:ext cx="1422400" cy="276999"/>
+            <a:off x="7442200" y="4876800"/>
+            <a:ext cx="1371600" cy="276999"/>
           </a:xfrm>
           <a:prstGeom prst="rect">
             <a:avLst/>
@@ -14014,7 +13741,7 @@
           <a:lstStyle/>
           <a:p>
             <a:r>
-              <a:rPr lang="en-US" altLang="zh-CN" sz="780" b="1">
+              <a:rPr lang="en-US" altLang="zh-CN" sz="770" b="1">
                 <a:solidFill>
                   <a:srgbClr val="1F7A4D"/>
                 </a:solidFill>
@@ -14022,7 +13749,7 @@
               </a:rPr>
               <a:t>SealAudit</a:t>
             </a:r>
-            <a:endParaRPr lang="zh-CN" altLang="en-US" sz="780" b="1">
+            <a:endParaRPr lang="zh-CN" altLang="en-US" sz="770" b="1">
               <a:solidFill>
                 <a:srgbClr val="1F7A4D"/>
               </a:solidFill>
@@ -14036,7 +13763,7 @@
           <p:cNvPr id="51" name="road-target-4">
             <a:extLst>
               <a:ext uri="{FF2B5EF4-FFF2-40B4-BE49-F238E27FC236}">
-                <a16:creationId xmlns:a16="http://schemas.microsoft.com/office/drawing/2014/main" id="{D82FB8D3-52B7-B420-637D-4D432A34968C}"/>
+                <a16:creationId xmlns:a16="http://schemas.microsoft.com/office/drawing/2014/main" id="{96F5FD48-0185-BB26-174F-C45194C77641}"/>
               </a:ext>
             </a:extLst>
           </p:cNvPr>
@@ -14045,7 +13772,7 @@
         </p:nvSpPr>
         <p:spPr>
           <a:xfrm>
-            <a:off x="8940800" y="4864100"/>
+            <a:off x="8991600" y="4864100"/>
             <a:ext cx="635000" cy="228600"/>
           </a:xfrm>
           <a:prstGeom prst="rect">
@@ -14090,7 +13817,7 @@
           <p:cNvPr id="52" name="road-targett-4">
             <a:extLst>
               <a:ext uri="{FF2B5EF4-FFF2-40B4-BE49-F238E27FC236}">
-                <a16:creationId xmlns:a16="http://schemas.microsoft.com/office/drawing/2014/main" id="{DA0BA0F4-32BF-FB36-99BE-1A472087ED3B}"/>
+                <a16:creationId xmlns:a16="http://schemas.microsoft.com/office/drawing/2014/main" id="{DD6BE4F0-784A-6450-D347-023627B95E82}"/>
               </a:ext>
             </a:extLst>
           </p:cNvPr>
@@ -14099,7 +13826,7 @@
         </p:nvSpPr>
         <p:spPr>
           <a:xfrm>
-            <a:off x="9067800" y="4927600"/>
+            <a:off x="9118600" y="4927600"/>
             <a:ext cx="431800" cy="276999"/>
           </a:xfrm>
           <a:prstGeom prst="rect">
@@ -14114,7 +13841,7 @@
           <a:lstStyle/>
           <a:p>
             <a:r>
-              <a:rPr lang="en-US" altLang="zh-CN" sz="640" b="1">
+              <a:rPr lang="en-US" altLang="zh-CN" sz="630" b="1">
                 <a:solidFill>
                   <a:srgbClr val="003B7A"/>
                 </a:solidFill>
@@ -14122,7 +13849,7 @@
               </a:rPr>
               <a:t>EMNLP</a:t>
             </a:r>
-            <a:endParaRPr lang="zh-CN" altLang="en-US" sz="640" b="1">
+            <a:endParaRPr lang="zh-CN" altLang="en-US" sz="630" b="1">
               <a:solidFill>
                 <a:srgbClr val="003B7A"/>
               </a:solidFill>
@@ -14136,7 +13863,7 @@
           <p:cNvPr id="53" name="road-sub-4">
             <a:extLst>
               <a:ext uri="{FF2B5EF4-FFF2-40B4-BE49-F238E27FC236}">
-                <a16:creationId xmlns:a16="http://schemas.microsoft.com/office/drawing/2014/main" id="{B7CF9D60-E33E-B5EA-7E74-179CA0B0E0D0}"/>
+                <a16:creationId xmlns:a16="http://schemas.microsoft.com/office/drawing/2014/main" id="{9A44DF71-62E3-874C-2550-5EC993765B27}"/>
               </a:ext>
             </a:extLst>
           </p:cNvPr>
@@ -14145,8 +13872,8 @@
         </p:nvSpPr>
         <p:spPr>
           <a:xfrm>
-            <a:off x="9829800" y="4889500"/>
-            <a:ext cx="914400" cy="276999"/>
+            <a:off x="9855200" y="4889500"/>
+            <a:ext cx="838200" cy="276999"/>
           </a:xfrm>
           <a:prstGeom prst="rect">
             <a:avLst/>
@@ -14160,7 +13887,7 @@
           <a:lstStyle/>
           <a:p>
             <a:r>
-              <a:rPr lang="en-US" altLang="zh-CN" sz="670">
+              <a:rPr lang="en-US" altLang="zh-CN" sz="650">
                 <a:solidFill>
                   <a:srgbClr val="4A5B78"/>
                 </a:solidFill>
@@ -14168,7 +13895,7 @@
               </a:rPr>
               <a:t>selective triage</a:t>
             </a:r>
-            <a:endParaRPr lang="zh-CN" altLang="en-US" sz="670">
+            <a:endParaRPr lang="zh-CN" altLang="en-US" sz="650">
               <a:solidFill>
                 <a:srgbClr val="4A5B78"/>
               </a:solidFill>
@@ -14182,7 +13909,7 @@
           <p:cNvPr id="54" name="own">
             <a:extLst>
               <a:ext uri="{FF2B5EF4-FFF2-40B4-BE49-F238E27FC236}">
-                <a16:creationId xmlns:a16="http://schemas.microsoft.com/office/drawing/2014/main" id="{10B2B2A6-9E12-73ED-23D7-11CF21B8AFB2}"/>
+                <a16:creationId xmlns:a16="http://schemas.microsoft.com/office/drawing/2014/main" id="{3941E911-18DE-60A7-88D6-5ABB074154E2}"/>
               </a:ext>
             </a:extLst>
           </p:cNvPr>
@@ -14191,8 +13918,8 @@
         </p:nvSpPr>
         <p:spPr>
           <a:xfrm>
-            <a:off x="1498600" y="5461000"/>
-            <a:ext cx="9194800" cy="431800"/>
+            <a:off x="1727200" y="5486400"/>
+            <a:ext cx="8737600" cy="406400"/>
           </a:xfrm>
           <a:prstGeom prst="rect">
             <a:avLst/>
@@ -14236,7 +13963,7 @@
           <p:cNvPr id="55" name="own-t">
             <a:extLst>
               <a:ext uri="{FF2B5EF4-FFF2-40B4-BE49-F238E27FC236}">
-                <a16:creationId xmlns:a16="http://schemas.microsoft.com/office/drawing/2014/main" id="{B53D7086-8AE2-D3B0-0B2F-3C277E1B3365}"/>
+                <a16:creationId xmlns:a16="http://schemas.microsoft.com/office/drawing/2014/main" id="{CDE20A83-F278-3CF4-5F39-8AE12DE78E92}"/>
               </a:ext>
             </a:extLst>
           </p:cNvPr>
@@ -14245,8 +13972,8 @@
         </p:nvSpPr>
         <p:spPr>
           <a:xfrm>
-            <a:off x="1905000" y="5588000"/>
-            <a:ext cx="8356600" cy="276999"/>
+            <a:off x="2108200" y="5600700"/>
+            <a:ext cx="7975600" cy="276999"/>
           </a:xfrm>
           <a:prstGeom prst="rect">
             <a:avLst/>
@@ -14260,15 +13987,15 @@
           <a:lstStyle/>
           <a:p>
             <a:r>
-              <a:rPr lang="en-US" altLang="zh-CN" sz="780" b="1">
+              <a:rPr lang="en-US" altLang="zh-CN" sz="760" b="1">
                 <a:solidFill>
                   <a:srgbClr val="071A3D"/>
                 </a:solidFill>
                 <a:latin typeface="Aptos" panose="020B0004020202020204" pitchFamily="34" charset="0"/>
               </a:rPr>
-              <a:t>The submitted FYP implementation and dissertation artifact are my individual work; future writing collaborations are planned separately.</a:t>
+              <a:t>Boundary: submitted FYP work is individual; later writing collaborations are outside the submitted artifact.</a:t>
             </a:r>
-            <a:endParaRPr lang="zh-CN" altLang="en-US" sz="780" b="1">
+            <a:endParaRPr lang="zh-CN" altLang="en-US" sz="760" b="1">
               <a:solidFill>
                 <a:srgbClr val="071A3D"/>
               </a:solidFill>
@@ -14283,7 +14010,7 @@
             <a:hlinkClick r:id="rId4"/>
             <a:extLst>
               <a:ext uri="{FF2B5EF4-FFF2-40B4-BE49-F238E27FC236}">
-                <a16:creationId xmlns:a16="http://schemas.microsoft.com/office/drawing/2014/main" id="{0917D0B1-2F41-13E0-F7B4-CACA83F651B9}"/>
+                <a16:creationId xmlns:a16="http://schemas.microsoft.com/office/drawing/2014/main" id="{372C386D-39B3-6644-7222-3E0A6DD00FE3}"/>
               </a:ext>
             </a:extLst>
           </p:cNvPr>
@@ -14344,7 +14071,7 @@
     </p:spTree>
     <p:extLst>
       <p:ext uri="{BB962C8B-B14F-4D97-AF65-F5344CB8AC3E}">
-        <p14:creationId xmlns:p14="http://schemas.microsoft.com/office/powerpoint/2010/main" val="42471391"/>
+        <p14:creationId xmlns:p14="http://schemas.microsoft.com/office/powerpoint/2010/main" val="2962690370"/>
       </p:ext>
     </p:extLst>
   </p:cSld>
@@ -16097,7 +15824,7 @@
           <p:cNvPr id="2" name="bg">
             <a:extLst>
               <a:ext uri="{FF2B5EF4-FFF2-40B4-BE49-F238E27FC236}">
-                <a16:creationId xmlns:a16="http://schemas.microsoft.com/office/drawing/2014/main" id="{C6C7E9FD-0B24-9B4F-4EA3-FF0647BB94DD}"/>
+                <a16:creationId xmlns:a16="http://schemas.microsoft.com/office/drawing/2014/main" id="{1DF3C0CE-D215-D77B-79D2-667320196E1F}"/>
               </a:ext>
             </a:extLst>
           </p:cNvPr>
@@ -16158,7 +15885,7 @@
           <p:cNvPr id="3" name="side-shade">
             <a:extLst>
               <a:ext uri="{FF2B5EF4-FFF2-40B4-BE49-F238E27FC236}">
-                <a16:creationId xmlns:a16="http://schemas.microsoft.com/office/drawing/2014/main" id="{25939DAE-0882-3612-690C-F72C837DA773}"/>
+                <a16:creationId xmlns:a16="http://schemas.microsoft.com/office/drawing/2014/main" id="{90544485-0CEC-D21A-F893-FA38396C3C45}"/>
               </a:ext>
             </a:extLst>
           </p:cNvPr>
@@ -16219,7 +15946,7 @@
           <p:cNvPr id="4" name="cover-rule">
             <a:extLst>
               <a:ext uri="{FF2B5EF4-FFF2-40B4-BE49-F238E27FC236}">
-                <a16:creationId xmlns:a16="http://schemas.microsoft.com/office/drawing/2014/main" id="{D247503E-8D91-FF91-E7CB-4EB9E5B9AD9B}"/>
+                <a16:creationId xmlns:a16="http://schemas.microsoft.com/office/drawing/2014/main" id="{563597F3-50F5-9F89-06B2-A62D10E0B703}"/>
               </a:ext>
             </a:extLst>
           </p:cNvPr>
@@ -16260,7 +15987,7 @@
           <p:cNvPr id="6" name="图片 5">
             <a:extLst>
               <a:ext uri="{FF2B5EF4-FFF2-40B4-BE49-F238E27FC236}">
-                <a16:creationId xmlns:a16="http://schemas.microsoft.com/office/drawing/2014/main" id="{7DE18709-A103-AE0E-60C8-4D3CF661905F}"/>
+                <a16:creationId xmlns:a16="http://schemas.microsoft.com/office/drawing/2014/main" id="{7CFA0474-16CE-04D0-7E36-74CC67F2FDA6}"/>
               </a:ext>
             </a:extLst>
           </p:cNvPr>
@@ -16296,7 +16023,7 @@
           <p:cNvPr id="7" name="thanks">
             <a:extLst>
               <a:ext uri="{FF2B5EF4-FFF2-40B4-BE49-F238E27FC236}">
-                <a16:creationId xmlns:a16="http://schemas.microsoft.com/office/drawing/2014/main" id="{ADBC8327-7E6E-0CE3-230F-5B3BAD5BFA67}"/>
+                <a16:creationId xmlns:a16="http://schemas.microsoft.com/office/drawing/2014/main" id="{730896E3-1B17-459C-9DDC-C2EF2CE31296}"/>
               </a:ext>
             </a:extLst>
           </p:cNvPr>
@@ -16342,7 +16069,7 @@
           <p:cNvPr id="8" name="q">
             <a:extLst>
               <a:ext uri="{FF2B5EF4-FFF2-40B4-BE49-F238E27FC236}">
-                <a16:creationId xmlns:a16="http://schemas.microsoft.com/office/drawing/2014/main" id="{89D1F0FA-4BC1-A128-1F2C-E3A8403CCDEC}"/>
+                <a16:creationId xmlns:a16="http://schemas.microsoft.com/office/drawing/2014/main" id="{E6ACC0C4-FA94-4CD3-EE97-AAB1217FA30C}"/>
               </a:ext>
             </a:extLst>
           </p:cNvPr>
@@ -16388,7 +16115,7 @@
           <p:cNvPr id="9" name="qrule">
             <a:extLst>
               <a:ext uri="{FF2B5EF4-FFF2-40B4-BE49-F238E27FC236}">
-                <a16:creationId xmlns:a16="http://schemas.microsoft.com/office/drawing/2014/main" id="{A5E40D93-70D1-94AD-B255-3F314EF3F051}"/>
+                <a16:creationId xmlns:a16="http://schemas.microsoft.com/office/drawing/2014/main" id="{9062CB75-E730-B681-3AC9-01FFE5BC5CF8}"/>
               </a:ext>
             </a:extLst>
           </p:cNvPr>
@@ -16429,7 +16156,7 @@
           <p:cNvPr id="10" name="anchor1">
             <a:extLst>
               <a:ext uri="{FF2B5EF4-FFF2-40B4-BE49-F238E27FC236}">
-                <a16:creationId xmlns:a16="http://schemas.microsoft.com/office/drawing/2014/main" id="{9957BE6F-5FD6-AD7D-C25D-BA821C3810E7}"/>
+                <a16:creationId xmlns:a16="http://schemas.microsoft.com/office/drawing/2014/main" id="{C8BD2A78-3BA8-6B1E-0644-C88DCFA50236}"/>
               </a:ext>
             </a:extLst>
           </p:cNvPr>
@@ -16475,7 +16202,7 @@
           <p:cNvPr id="11" name="anchor2">
             <a:extLst>
               <a:ext uri="{FF2B5EF4-FFF2-40B4-BE49-F238E27FC236}">
-                <a16:creationId xmlns:a16="http://schemas.microsoft.com/office/drawing/2014/main" id="{BC919525-E1E1-767E-3ABA-721F160F25D4}"/>
+                <a16:creationId xmlns:a16="http://schemas.microsoft.com/office/drawing/2014/main" id="{13B933A4-93A0-8D8E-CF91-D5312731B6A5}"/>
               </a:ext>
             </a:extLst>
           </p:cNvPr>
@@ -16521,7 +16248,7 @@
           <p:cNvPr id="12" name="anchor3">
             <a:extLst>
               <a:ext uri="{FF2B5EF4-FFF2-40B4-BE49-F238E27FC236}">
-                <a16:creationId xmlns:a16="http://schemas.microsoft.com/office/drawing/2014/main" id="{83440B48-5076-3168-B847-39935F2B13E5}"/>
+                <a16:creationId xmlns:a16="http://schemas.microsoft.com/office/drawing/2014/main" id="{2734DCF0-9401-5DEC-2F15-B337870CFAE1}"/>
               </a:ext>
             </a:extLst>
           </p:cNvPr>
@@ -16568,7 +16295,7 @@
             <a:hlinkClick r:id="rId4"/>
             <a:extLst>
               <a:ext uri="{FF2B5EF4-FFF2-40B4-BE49-F238E27FC236}">
-                <a16:creationId xmlns:a16="http://schemas.microsoft.com/office/drawing/2014/main" id="{A135DC12-3AD8-00AD-6BC1-2542F60243CF}"/>
+                <a16:creationId xmlns:a16="http://schemas.microsoft.com/office/drawing/2014/main" id="{049B14E9-6B1E-B248-4E08-BBA154BD5C42}"/>
               </a:ext>
             </a:extLst>
           </p:cNvPr>
@@ -16604,7 +16331,7 @@
           <p:cNvPr id="15" name="qrlab">
             <a:extLst>
               <a:ext uri="{FF2B5EF4-FFF2-40B4-BE49-F238E27FC236}">
-                <a16:creationId xmlns:a16="http://schemas.microsoft.com/office/drawing/2014/main" id="{F8B4A5CE-31B0-9B19-6513-8B83DEA4D501}"/>
+                <a16:creationId xmlns:a16="http://schemas.microsoft.com/office/drawing/2014/main" id="{B6B654A2-E6E1-DF7B-9B7A-F79C85B1909C}"/>
               </a:ext>
             </a:extLst>
           </p:cNvPr>
@@ -16651,7 +16378,7 @@
             <a:hlinkClick r:id="rId4"/>
             <a:extLst>
               <a:ext uri="{FF2B5EF4-FFF2-40B4-BE49-F238E27FC236}">
-                <a16:creationId xmlns:a16="http://schemas.microsoft.com/office/drawing/2014/main" id="{6144A032-CFC0-D387-1E4D-B783C4954EA5}"/>
+                <a16:creationId xmlns:a16="http://schemas.microsoft.com/office/drawing/2014/main" id="{79A8BC32-69AF-4FE4-3602-1A8366250121}"/>
               </a:ext>
             </a:extLst>
           </p:cNvPr>
@@ -16720,7 +16447,7 @@
             <a:hlinkClick r:id="rId6"/>
             <a:extLst>
               <a:ext uri="{FF2B5EF4-FFF2-40B4-BE49-F238E27FC236}">
-                <a16:creationId xmlns:a16="http://schemas.microsoft.com/office/drawing/2014/main" id="{F5B92B4A-9C01-79EA-212E-C26DF522A4C8}"/>
+                <a16:creationId xmlns:a16="http://schemas.microsoft.com/office/drawing/2014/main" id="{E7AA334F-AF24-6F18-B7BA-6D8607EC80F2}"/>
               </a:ext>
             </a:extLst>
           </p:cNvPr>
@@ -16789,7 +16516,7 @@
             <a:hlinkClick r:id="rId4"/>
             <a:extLst>
               <a:ext uri="{FF2B5EF4-FFF2-40B4-BE49-F238E27FC236}">
-                <a16:creationId xmlns:a16="http://schemas.microsoft.com/office/drawing/2014/main" id="{271DDE1E-05B1-6CD9-6703-53A2E53E87EA}"/>
+                <a16:creationId xmlns:a16="http://schemas.microsoft.com/office/drawing/2014/main" id="{95F31635-DFDA-6272-BDF6-0BADF11EA0BF}"/>
               </a:ext>
             </a:extLst>
           </p:cNvPr>
@@ -16850,7 +16577,7 @@
     </p:spTree>
     <p:extLst>
       <p:ext uri="{BB962C8B-B14F-4D97-AF65-F5344CB8AC3E}">
-        <p14:creationId xmlns:p14="http://schemas.microsoft.com/office/powerpoint/2010/main" val="1148419286"/>
+        <p14:creationId xmlns:p14="http://schemas.microsoft.com/office/powerpoint/2010/main" val="3224802115"/>
       </p:ext>
     </p:extLst>
   </p:cSld>
@@ -16894,7 +16621,7 @@
           <p:cNvPr id="2" name="bg">
             <a:extLst>
               <a:ext uri="{FF2B5EF4-FFF2-40B4-BE49-F238E27FC236}">
-                <a16:creationId xmlns:a16="http://schemas.microsoft.com/office/drawing/2014/main" id="{170B64FB-7CC6-7C3C-1576-388C0988354D}"/>
+                <a16:creationId xmlns:a16="http://schemas.microsoft.com/office/drawing/2014/main" id="{C773DADB-FA92-F0FD-EB45-0A773DA6EED3}"/>
               </a:ext>
             </a:extLst>
           </p:cNvPr>
@@ -16955,7 +16682,7 @@
           <p:cNvPr id="3" name="rail">
             <a:extLst>
               <a:ext uri="{FF2B5EF4-FFF2-40B4-BE49-F238E27FC236}">
-                <a16:creationId xmlns:a16="http://schemas.microsoft.com/office/drawing/2014/main" id="{A2803ED5-0E5E-5426-E99D-B779613D336F}"/>
+                <a16:creationId xmlns:a16="http://schemas.microsoft.com/office/drawing/2014/main" id="{28846E3C-A9B0-46A9-88A2-7ED9EFB53CE4}"/>
               </a:ext>
             </a:extLst>
           </p:cNvPr>
@@ -17016,7 +16743,7 @@
           <p:cNvPr id="4" name="top-rule">
             <a:extLst>
               <a:ext uri="{FF2B5EF4-FFF2-40B4-BE49-F238E27FC236}">
-                <a16:creationId xmlns:a16="http://schemas.microsoft.com/office/drawing/2014/main" id="{759C9F76-1AFA-F040-E921-5C1ADD61FF52}"/>
+                <a16:creationId xmlns:a16="http://schemas.microsoft.com/office/drawing/2014/main" id="{02DD30C2-30BB-6C24-B259-DE6309CE8391}"/>
               </a:ext>
             </a:extLst>
           </p:cNvPr>
@@ -17057,7 +16784,7 @@
           <p:cNvPr id="5" name="section">
             <a:extLst>
               <a:ext uri="{FF2B5EF4-FFF2-40B4-BE49-F238E27FC236}">
-                <a16:creationId xmlns:a16="http://schemas.microsoft.com/office/drawing/2014/main" id="{8307AA85-41F8-5752-38D0-B4A867285272}"/>
+                <a16:creationId xmlns:a16="http://schemas.microsoft.com/office/drawing/2014/main" id="{CBC2F1B9-FCE0-0633-9E70-475693B6013C}"/>
               </a:ext>
             </a:extLst>
           </p:cNvPr>
@@ -17103,7 +16830,7 @@
           <p:cNvPr id="6" name="num">
             <a:extLst>
               <a:ext uri="{FF2B5EF4-FFF2-40B4-BE49-F238E27FC236}">
-                <a16:creationId xmlns:a16="http://schemas.microsoft.com/office/drawing/2014/main" id="{C55E7706-2FE6-4914-E86C-33718E506990}"/>
+                <a16:creationId xmlns:a16="http://schemas.microsoft.com/office/drawing/2014/main" id="{08B9CD26-D82F-339E-E897-BDD374486B10}"/>
               </a:ext>
             </a:extLst>
           </p:cNvPr>
@@ -17149,7 +16876,7 @@
           <p:cNvPr id="7" name="footer">
             <a:extLst>
               <a:ext uri="{FF2B5EF4-FFF2-40B4-BE49-F238E27FC236}">
-                <a16:creationId xmlns:a16="http://schemas.microsoft.com/office/drawing/2014/main" id="{3F127624-FC8A-079C-AB31-E5D6090C9D16}"/>
+                <a16:creationId xmlns:a16="http://schemas.microsoft.com/office/drawing/2014/main" id="{8FADCE3F-FFB4-6CCF-A252-3169A27C7284}"/>
               </a:ext>
             </a:extLst>
           </p:cNvPr>
@@ -17195,7 +16922,7 @@
           <p:cNvPr id="8" name="student">
             <a:extLst>
               <a:ext uri="{FF2B5EF4-FFF2-40B4-BE49-F238E27FC236}">
-                <a16:creationId xmlns:a16="http://schemas.microsoft.com/office/drawing/2014/main" id="{275A0EFB-B269-17B0-D5BC-715A135C51A7}"/>
+                <a16:creationId xmlns:a16="http://schemas.microsoft.com/office/drawing/2014/main" id="{50FE7AA1-F8B1-E4E5-E587-20A8918A652E}"/>
               </a:ext>
             </a:extLst>
           </p:cNvPr>
@@ -17241,7 +16968,7 @@
           <p:cNvPr id="10" name="图片 9">
             <a:extLst>
               <a:ext uri="{FF2B5EF4-FFF2-40B4-BE49-F238E27FC236}">
-                <a16:creationId xmlns:a16="http://schemas.microsoft.com/office/drawing/2014/main" id="{CB71F797-7284-CCE5-40C9-9622157E2330}"/>
+                <a16:creationId xmlns:a16="http://schemas.microsoft.com/office/drawing/2014/main" id="{CD4A4A28-D8D8-4C52-DB33-9FF0055EF290}"/>
               </a:ext>
             </a:extLst>
           </p:cNvPr>
@@ -17277,7 +17004,7 @@
           <p:cNvPr id="11" name="title">
             <a:extLst>
               <a:ext uri="{FF2B5EF4-FFF2-40B4-BE49-F238E27FC236}">
-                <a16:creationId xmlns:a16="http://schemas.microsoft.com/office/drawing/2014/main" id="{DD53158C-9641-4503-7E65-452D33B54208}"/>
+                <a16:creationId xmlns:a16="http://schemas.microsoft.com/office/drawing/2014/main" id="{4233215A-CB0F-0F44-1EDE-FC62B5642621}"/>
               </a:ext>
             </a:extLst>
           </p:cNvPr>
@@ -17323,7 +17050,7 @@
           <p:cNvPr id="12" name="subtitle">
             <a:extLst>
               <a:ext uri="{FF2B5EF4-FFF2-40B4-BE49-F238E27FC236}">
-                <a16:creationId xmlns:a16="http://schemas.microsoft.com/office/drawing/2014/main" id="{0774FC6F-C948-6B98-31A0-5C2B16E93CBC}"/>
+                <a16:creationId xmlns:a16="http://schemas.microsoft.com/office/drawing/2014/main" id="{57F30A2A-99F9-B25C-743E-D140DC5A6E09}"/>
               </a:ext>
             </a:extLst>
           </p:cNvPr>
@@ -17369,7 +17096,7 @@
           <p:cNvPr id="13" name="f1">
             <a:extLst>
               <a:ext uri="{FF2B5EF4-FFF2-40B4-BE49-F238E27FC236}">
-                <a16:creationId xmlns:a16="http://schemas.microsoft.com/office/drawing/2014/main" id="{1188DF9E-352B-B129-10FC-9372773D362B}"/>
+                <a16:creationId xmlns:a16="http://schemas.microsoft.com/office/drawing/2014/main" id="{29E0221E-775D-29DC-B585-D0D3A0627838}"/>
               </a:ext>
             </a:extLst>
           </p:cNvPr>
@@ -17423,7 +17150,7 @@
           <p:cNvPr id="14" name="f1t">
             <a:extLst>
               <a:ext uri="{FF2B5EF4-FFF2-40B4-BE49-F238E27FC236}">
-                <a16:creationId xmlns:a16="http://schemas.microsoft.com/office/drawing/2014/main" id="{03BB262B-FA20-28F5-4344-D99970B18E79}"/>
+                <a16:creationId xmlns:a16="http://schemas.microsoft.com/office/drawing/2014/main" id="{81A9D104-04C1-1853-6A8B-5DE8C6D5A62D}"/>
               </a:ext>
             </a:extLst>
           </p:cNvPr>
@@ -17469,7 +17196,7 @@
           <p:cNvPr id="15" name="f2">
             <a:extLst>
               <a:ext uri="{FF2B5EF4-FFF2-40B4-BE49-F238E27FC236}">
-                <a16:creationId xmlns:a16="http://schemas.microsoft.com/office/drawing/2014/main" id="{7AF160EB-637E-D986-C68F-8388E5572EC6}"/>
+                <a16:creationId xmlns:a16="http://schemas.microsoft.com/office/drawing/2014/main" id="{9C7E6F0E-73EF-B918-BD71-603A4233B516}"/>
               </a:ext>
             </a:extLst>
           </p:cNvPr>
@@ -17523,7 +17250,7 @@
           <p:cNvPr id="16" name="f2t">
             <a:extLst>
               <a:ext uri="{FF2B5EF4-FFF2-40B4-BE49-F238E27FC236}">
-                <a16:creationId xmlns:a16="http://schemas.microsoft.com/office/drawing/2014/main" id="{84963827-71FA-DD24-9978-290373EC0CCA}"/>
+                <a16:creationId xmlns:a16="http://schemas.microsoft.com/office/drawing/2014/main" id="{B8B69154-D0E4-3C77-4B55-74723B1CFEFB}"/>
               </a:ext>
             </a:extLst>
           </p:cNvPr>
@@ -17570,7 +17297,7 @@
           <p:cNvPr id="17" name="it-0">
             <a:extLst>
               <a:ext uri="{FF2B5EF4-FFF2-40B4-BE49-F238E27FC236}">
-                <a16:creationId xmlns:a16="http://schemas.microsoft.com/office/drawing/2014/main" id="{33CD2452-DA11-C5E8-356A-11A10D3B4FE1}"/>
+                <a16:creationId xmlns:a16="http://schemas.microsoft.com/office/drawing/2014/main" id="{7E699A2F-80EB-EDFF-A1DC-F54D8E4F26CB}"/>
               </a:ext>
             </a:extLst>
           </p:cNvPr>
@@ -17616,7 +17343,7 @@
           <p:cNvPr id="18" name="it2-0">
             <a:extLst>
               <a:ext uri="{FF2B5EF4-FFF2-40B4-BE49-F238E27FC236}">
-                <a16:creationId xmlns:a16="http://schemas.microsoft.com/office/drawing/2014/main" id="{88C94881-A51E-B5AC-7539-7F6397A7AE7B}"/>
+                <a16:creationId xmlns:a16="http://schemas.microsoft.com/office/drawing/2014/main" id="{98E3008A-F7E9-0FC3-8DB4-72BC61B63A91}"/>
               </a:ext>
             </a:extLst>
           </p:cNvPr>
@@ -17662,7 +17389,7 @@
           <p:cNvPr id="19" name="it-1">
             <a:extLst>
               <a:ext uri="{FF2B5EF4-FFF2-40B4-BE49-F238E27FC236}">
-                <a16:creationId xmlns:a16="http://schemas.microsoft.com/office/drawing/2014/main" id="{A96FAB2A-59FE-A272-268A-380DBB0894C3}"/>
+                <a16:creationId xmlns:a16="http://schemas.microsoft.com/office/drawing/2014/main" id="{DE6C87D4-BDAA-C802-7A4C-DA5E3D56E593}"/>
               </a:ext>
             </a:extLst>
           </p:cNvPr>
@@ -17708,7 +17435,7 @@
           <p:cNvPr id="20" name="it2-1">
             <a:extLst>
               <a:ext uri="{FF2B5EF4-FFF2-40B4-BE49-F238E27FC236}">
-                <a16:creationId xmlns:a16="http://schemas.microsoft.com/office/drawing/2014/main" id="{5E100FA2-EE8E-B4A0-7DD5-717AFF92469E}"/>
+                <a16:creationId xmlns:a16="http://schemas.microsoft.com/office/drawing/2014/main" id="{510A1423-36A6-6B3F-30FF-EB7534FF94D5}"/>
               </a:ext>
             </a:extLst>
           </p:cNvPr>
@@ -17754,7 +17481,7 @@
           <p:cNvPr id="21" name="it-2">
             <a:extLst>
               <a:ext uri="{FF2B5EF4-FFF2-40B4-BE49-F238E27FC236}">
-                <a16:creationId xmlns:a16="http://schemas.microsoft.com/office/drawing/2014/main" id="{0F8705B7-6BE3-48D2-83EE-EECB4ED7E841}"/>
+                <a16:creationId xmlns:a16="http://schemas.microsoft.com/office/drawing/2014/main" id="{DFB14A89-EF02-4042-6872-946F1D39A961}"/>
               </a:ext>
             </a:extLst>
           </p:cNvPr>
@@ -17800,7 +17527,7 @@
           <p:cNvPr id="22" name="it2-2">
             <a:extLst>
               <a:ext uri="{FF2B5EF4-FFF2-40B4-BE49-F238E27FC236}">
-                <a16:creationId xmlns:a16="http://schemas.microsoft.com/office/drawing/2014/main" id="{15E66E6A-2048-E8D7-D41E-DD7A41A71220}"/>
+                <a16:creationId xmlns:a16="http://schemas.microsoft.com/office/drawing/2014/main" id="{5BC6718A-9E75-35C2-9A88-01483B551426}"/>
               </a:ext>
             </a:extLst>
           </p:cNvPr>
@@ -17846,7 +17573,7 @@
           <p:cNvPr id="23" name="it-3">
             <a:extLst>
               <a:ext uri="{FF2B5EF4-FFF2-40B4-BE49-F238E27FC236}">
-                <a16:creationId xmlns:a16="http://schemas.microsoft.com/office/drawing/2014/main" id="{2290C0FC-7634-39C2-0B9F-B2F1AE826ADD}"/>
+                <a16:creationId xmlns:a16="http://schemas.microsoft.com/office/drawing/2014/main" id="{22151905-7C00-D7A6-D2DE-5A20CFA60198}"/>
               </a:ext>
             </a:extLst>
           </p:cNvPr>
@@ -17892,7 +17619,7 @@
           <p:cNvPr id="24" name="it2-3">
             <a:extLst>
               <a:ext uri="{FF2B5EF4-FFF2-40B4-BE49-F238E27FC236}">
-                <a16:creationId xmlns:a16="http://schemas.microsoft.com/office/drawing/2014/main" id="{CAA53083-EEBD-6227-5CFF-ED739FCEEC21}"/>
+                <a16:creationId xmlns:a16="http://schemas.microsoft.com/office/drawing/2014/main" id="{60B4DF44-1FE3-B3A1-B243-0E1F0CA5D437}"/>
               </a:ext>
             </a:extLst>
           </p:cNvPr>
@@ -17938,7 +17665,7 @@
           <p:cNvPr id="25" name="it-4">
             <a:extLst>
               <a:ext uri="{FF2B5EF4-FFF2-40B4-BE49-F238E27FC236}">
-                <a16:creationId xmlns:a16="http://schemas.microsoft.com/office/drawing/2014/main" id="{8D625780-2C56-3D2C-8E4E-E411E9E391B6}"/>
+                <a16:creationId xmlns:a16="http://schemas.microsoft.com/office/drawing/2014/main" id="{C174EA14-9C91-FAD7-F153-8D16BF906A91}"/>
               </a:ext>
             </a:extLst>
           </p:cNvPr>
@@ -17984,7 +17711,7 @@
           <p:cNvPr id="26" name="it2-4">
             <a:extLst>
               <a:ext uri="{FF2B5EF4-FFF2-40B4-BE49-F238E27FC236}">
-                <a16:creationId xmlns:a16="http://schemas.microsoft.com/office/drawing/2014/main" id="{1B32C82C-7972-C652-C388-5151CC0670E2}"/>
+                <a16:creationId xmlns:a16="http://schemas.microsoft.com/office/drawing/2014/main" id="{BA9C63BC-BA58-816F-9D7D-1F7FB7E74FCC}"/>
               </a:ext>
             </a:extLst>
           </p:cNvPr>
@@ -18031,7 +17758,7 @@
             <a:hlinkClick r:id="rId4"/>
             <a:extLst>
               <a:ext uri="{FF2B5EF4-FFF2-40B4-BE49-F238E27FC236}">
-                <a16:creationId xmlns:a16="http://schemas.microsoft.com/office/drawing/2014/main" id="{812AFC8A-E6E8-BFC6-2F45-C6BA731C680F}"/>
+                <a16:creationId xmlns:a16="http://schemas.microsoft.com/office/drawing/2014/main" id="{BB30F40E-5AE2-C17A-B6FA-E316CA0E6081}"/>
               </a:ext>
             </a:extLst>
           </p:cNvPr>
@@ -18092,7 +17819,7 @@
     </p:spTree>
     <p:extLst>
       <p:ext uri="{BB962C8B-B14F-4D97-AF65-F5344CB8AC3E}">
-        <p14:creationId xmlns:p14="http://schemas.microsoft.com/office/powerpoint/2010/main" val="886808852"/>
+        <p14:creationId xmlns:p14="http://schemas.microsoft.com/office/powerpoint/2010/main" val="456397935"/>
       </p:ext>
     </p:extLst>
   </p:cSld>
@@ -18855,7 +18582,7 @@
           <p:cNvPr id="2" name="bg">
             <a:extLst>
               <a:ext uri="{FF2B5EF4-FFF2-40B4-BE49-F238E27FC236}">
-                <a16:creationId xmlns:a16="http://schemas.microsoft.com/office/drawing/2014/main" id="{0E0AB8B5-A70A-1CF1-CA0C-415E531F6B78}"/>
+                <a16:creationId xmlns:a16="http://schemas.microsoft.com/office/drawing/2014/main" id="{C165762C-0033-D483-DC9D-74912CB0FE8C}"/>
               </a:ext>
             </a:extLst>
           </p:cNvPr>
@@ -18916,7 +18643,7 @@
           <p:cNvPr id="3" name="rail">
             <a:extLst>
               <a:ext uri="{FF2B5EF4-FFF2-40B4-BE49-F238E27FC236}">
-                <a16:creationId xmlns:a16="http://schemas.microsoft.com/office/drawing/2014/main" id="{5E820D34-F679-1169-7DB0-A798080D5FA7}"/>
+                <a16:creationId xmlns:a16="http://schemas.microsoft.com/office/drawing/2014/main" id="{E32483C0-6477-4DA8-293D-F53B884E6652}"/>
               </a:ext>
             </a:extLst>
           </p:cNvPr>
@@ -18977,7 +18704,7 @@
           <p:cNvPr id="4" name="top-rule">
             <a:extLst>
               <a:ext uri="{FF2B5EF4-FFF2-40B4-BE49-F238E27FC236}">
-                <a16:creationId xmlns:a16="http://schemas.microsoft.com/office/drawing/2014/main" id="{023DEFDD-AEB8-5F3C-D5D0-588D06574B41}"/>
+                <a16:creationId xmlns:a16="http://schemas.microsoft.com/office/drawing/2014/main" id="{4316A347-6837-62C9-B4AB-ED81533323B7}"/>
               </a:ext>
             </a:extLst>
           </p:cNvPr>
@@ -19018,7 +18745,7 @@
           <p:cNvPr id="5" name="section">
             <a:extLst>
               <a:ext uri="{FF2B5EF4-FFF2-40B4-BE49-F238E27FC236}">
-                <a16:creationId xmlns:a16="http://schemas.microsoft.com/office/drawing/2014/main" id="{612A965C-0E85-F80E-92B4-E3518D8222AB}"/>
+                <a16:creationId xmlns:a16="http://schemas.microsoft.com/office/drawing/2014/main" id="{A9FBEC9F-1414-9416-0A68-B6C41BF46A77}"/>
               </a:ext>
             </a:extLst>
           </p:cNvPr>
@@ -19064,7 +18791,7 @@
           <p:cNvPr id="6" name="num">
             <a:extLst>
               <a:ext uri="{FF2B5EF4-FFF2-40B4-BE49-F238E27FC236}">
-                <a16:creationId xmlns:a16="http://schemas.microsoft.com/office/drawing/2014/main" id="{F3AA3FBF-939C-5E04-5839-0CD25C6A2888}"/>
+                <a16:creationId xmlns:a16="http://schemas.microsoft.com/office/drawing/2014/main" id="{05719ECF-A4D9-A0B5-74F4-5E1B1242445B}"/>
               </a:ext>
             </a:extLst>
           </p:cNvPr>
@@ -19110,7 +18837,7 @@
           <p:cNvPr id="7" name="footer">
             <a:extLst>
               <a:ext uri="{FF2B5EF4-FFF2-40B4-BE49-F238E27FC236}">
-                <a16:creationId xmlns:a16="http://schemas.microsoft.com/office/drawing/2014/main" id="{51D2554F-CCE1-0861-576C-2FC1EBF3D5D1}"/>
+                <a16:creationId xmlns:a16="http://schemas.microsoft.com/office/drawing/2014/main" id="{43E5B97F-C9C2-5727-935D-A1A561F74988}"/>
               </a:ext>
             </a:extLst>
           </p:cNvPr>
@@ -19156,7 +18883,7 @@
           <p:cNvPr id="8" name="student">
             <a:extLst>
               <a:ext uri="{FF2B5EF4-FFF2-40B4-BE49-F238E27FC236}">
-                <a16:creationId xmlns:a16="http://schemas.microsoft.com/office/drawing/2014/main" id="{33F56341-E6C4-F991-4A07-E96EAA7DA534}"/>
+                <a16:creationId xmlns:a16="http://schemas.microsoft.com/office/drawing/2014/main" id="{CC4F8BAE-EF1B-23EC-946C-03E51D6BBCDF}"/>
               </a:ext>
             </a:extLst>
           </p:cNvPr>
@@ -19202,7 +18929,7 @@
           <p:cNvPr id="10" name="图片 9">
             <a:extLst>
               <a:ext uri="{FF2B5EF4-FFF2-40B4-BE49-F238E27FC236}">
-                <a16:creationId xmlns:a16="http://schemas.microsoft.com/office/drawing/2014/main" id="{A0F026C2-3A56-3A04-C4E4-492B19F789E5}"/>
+                <a16:creationId xmlns:a16="http://schemas.microsoft.com/office/drawing/2014/main" id="{B341CD09-C591-DFD3-0B34-41986C2B5AB6}"/>
               </a:ext>
             </a:extLst>
           </p:cNvPr>
@@ -19238,7 +18965,7 @@
           <p:cNvPr id="11" name="title">
             <a:extLst>
               <a:ext uri="{FF2B5EF4-FFF2-40B4-BE49-F238E27FC236}">
-                <a16:creationId xmlns:a16="http://schemas.microsoft.com/office/drawing/2014/main" id="{2FF1D3B7-6174-1A31-6169-9264E7D8084A}"/>
+                <a16:creationId xmlns:a16="http://schemas.microsoft.com/office/drawing/2014/main" id="{366A7B31-D898-1E54-29F6-C46B865780CE}"/>
               </a:ext>
             </a:extLst>
           </p:cNvPr>
@@ -19284,7 +19011,7 @@
           <p:cNvPr id="12" name="subtitle">
             <a:extLst>
               <a:ext uri="{FF2B5EF4-FFF2-40B4-BE49-F238E27FC236}">
-                <a16:creationId xmlns:a16="http://schemas.microsoft.com/office/drawing/2014/main" id="{9CFAE105-5619-9B81-6AF0-6AFEA254B7B4}"/>
+                <a16:creationId xmlns:a16="http://schemas.microsoft.com/office/drawing/2014/main" id="{3536018F-F9D1-FBE1-A072-025FF6C5D406}"/>
               </a:ext>
             </a:extLst>
           </p:cNvPr>
@@ -19330,7 +19057,7 @@
           <p:cNvPr id="13" name="qa-0">
             <a:extLst>
               <a:ext uri="{FF2B5EF4-FFF2-40B4-BE49-F238E27FC236}">
-                <a16:creationId xmlns:a16="http://schemas.microsoft.com/office/drawing/2014/main" id="{B8B8D3F4-4530-1954-B681-EAE973041E8D}"/>
+                <a16:creationId xmlns:a16="http://schemas.microsoft.com/office/drawing/2014/main" id="{33E07B0D-3B3D-D43A-DAB5-E1EC81F1B2CC}"/>
               </a:ext>
             </a:extLst>
           </p:cNvPr>
@@ -19384,7 +19111,7 @@
           <p:cNvPr id="14" name="qa-band-0">
             <a:extLst>
               <a:ext uri="{FF2B5EF4-FFF2-40B4-BE49-F238E27FC236}">
-                <a16:creationId xmlns:a16="http://schemas.microsoft.com/office/drawing/2014/main" id="{BE8711D5-2688-FC3A-356A-98AFD0BCBDDC}"/>
+                <a16:creationId xmlns:a16="http://schemas.microsoft.com/office/drawing/2014/main" id="{EF04F91C-88B0-F253-8AA0-7F8D5F7A93EA}"/>
               </a:ext>
             </a:extLst>
           </p:cNvPr>
@@ -19438,7 +19165,7 @@
           <p:cNvPr id="15" name="q-0">
             <a:extLst>
               <a:ext uri="{FF2B5EF4-FFF2-40B4-BE49-F238E27FC236}">
-                <a16:creationId xmlns:a16="http://schemas.microsoft.com/office/drawing/2014/main" id="{F008FF04-895F-3538-A8CA-164DEB94F71A}"/>
+                <a16:creationId xmlns:a16="http://schemas.microsoft.com/office/drawing/2014/main" id="{F786F261-0F66-3F6A-F101-B77519065564}"/>
               </a:ext>
             </a:extLst>
           </p:cNvPr>
@@ -19484,7 +19211,7 @@
           <p:cNvPr id="16" name="a-0">
             <a:extLst>
               <a:ext uri="{FF2B5EF4-FFF2-40B4-BE49-F238E27FC236}">
-                <a16:creationId xmlns:a16="http://schemas.microsoft.com/office/drawing/2014/main" id="{BA2BCA98-2C36-BC2D-2EA2-D6C5964B273D}"/>
+                <a16:creationId xmlns:a16="http://schemas.microsoft.com/office/drawing/2014/main" id="{8A04D893-34D1-ABA3-EEBD-E1047DB951ED}"/>
               </a:ext>
             </a:extLst>
           </p:cNvPr>
@@ -19530,7 +19257,7 @@
           <p:cNvPr id="17" name="qa-1">
             <a:extLst>
               <a:ext uri="{FF2B5EF4-FFF2-40B4-BE49-F238E27FC236}">
-                <a16:creationId xmlns:a16="http://schemas.microsoft.com/office/drawing/2014/main" id="{68B452A6-26B5-7F9B-22DA-0487AA313F7A}"/>
+                <a16:creationId xmlns:a16="http://schemas.microsoft.com/office/drawing/2014/main" id="{74E7F4A5-5A7E-4943-D29C-9DB4B45BEA21}"/>
               </a:ext>
             </a:extLst>
           </p:cNvPr>
@@ -19584,7 +19311,7 @@
           <p:cNvPr id="18" name="qa-band-1">
             <a:extLst>
               <a:ext uri="{FF2B5EF4-FFF2-40B4-BE49-F238E27FC236}">
-                <a16:creationId xmlns:a16="http://schemas.microsoft.com/office/drawing/2014/main" id="{D418DC65-2EDC-3D6C-BAF2-4CE4EECF5860}"/>
+                <a16:creationId xmlns:a16="http://schemas.microsoft.com/office/drawing/2014/main" id="{3CC46DBF-47E1-5656-112B-E345FB144E9B}"/>
               </a:ext>
             </a:extLst>
           </p:cNvPr>
@@ -19638,7 +19365,7 @@
           <p:cNvPr id="19" name="q-1">
             <a:extLst>
               <a:ext uri="{FF2B5EF4-FFF2-40B4-BE49-F238E27FC236}">
-                <a16:creationId xmlns:a16="http://schemas.microsoft.com/office/drawing/2014/main" id="{7DF23CCF-7489-8C82-C22D-BE7C9515FE65}"/>
+                <a16:creationId xmlns:a16="http://schemas.microsoft.com/office/drawing/2014/main" id="{B32BB1BA-169D-09DF-0DA7-C6B3EC658472}"/>
               </a:ext>
             </a:extLst>
           </p:cNvPr>
@@ -19684,7 +19411,7 @@
           <p:cNvPr id="20" name="a-1">
             <a:extLst>
               <a:ext uri="{FF2B5EF4-FFF2-40B4-BE49-F238E27FC236}">
-                <a16:creationId xmlns:a16="http://schemas.microsoft.com/office/drawing/2014/main" id="{758CA34E-AB7D-9393-6DD2-F00AFA6CB57F}"/>
+                <a16:creationId xmlns:a16="http://schemas.microsoft.com/office/drawing/2014/main" id="{C8E37FEA-7D17-C9A7-EB5B-0211744DFC75}"/>
               </a:ext>
             </a:extLst>
           </p:cNvPr>
@@ -19730,7 +19457,7 @@
           <p:cNvPr id="21" name="qa-2">
             <a:extLst>
               <a:ext uri="{FF2B5EF4-FFF2-40B4-BE49-F238E27FC236}">
-                <a16:creationId xmlns:a16="http://schemas.microsoft.com/office/drawing/2014/main" id="{869BD621-823C-9DC5-8997-366FF3DBF667}"/>
+                <a16:creationId xmlns:a16="http://schemas.microsoft.com/office/drawing/2014/main" id="{D10B40BD-8974-21CF-DBAD-5529E6EB222C}"/>
               </a:ext>
             </a:extLst>
           </p:cNvPr>
@@ -19784,7 +19511,7 @@
           <p:cNvPr id="22" name="qa-band-2">
             <a:extLst>
               <a:ext uri="{FF2B5EF4-FFF2-40B4-BE49-F238E27FC236}">
-                <a16:creationId xmlns:a16="http://schemas.microsoft.com/office/drawing/2014/main" id="{8532E625-F2E5-EA15-E066-F9BF347B208A}"/>
+                <a16:creationId xmlns:a16="http://schemas.microsoft.com/office/drawing/2014/main" id="{C2069CFB-5B60-A364-7633-E49FEBB7937A}"/>
               </a:ext>
             </a:extLst>
           </p:cNvPr>
@@ -19838,7 +19565,7 @@
           <p:cNvPr id="23" name="q-2">
             <a:extLst>
               <a:ext uri="{FF2B5EF4-FFF2-40B4-BE49-F238E27FC236}">
-                <a16:creationId xmlns:a16="http://schemas.microsoft.com/office/drawing/2014/main" id="{55DA1B3B-A64F-38FA-CA09-FF16286E50D8}"/>
+                <a16:creationId xmlns:a16="http://schemas.microsoft.com/office/drawing/2014/main" id="{AC75C81E-62E4-2B6A-8A8E-35542A0116CB}"/>
               </a:ext>
             </a:extLst>
           </p:cNvPr>
@@ -19884,7 +19611,7 @@
           <p:cNvPr id="24" name="a-2">
             <a:extLst>
               <a:ext uri="{FF2B5EF4-FFF2-40B4-BE49-F238E27FC236}">
-                <a16:creationId xmlns:a16="http://schemas.microsoft.com/office/drawing/2014/main" id="{C6D012A5-1254-5232-A1C8-2E1C220DC39F}"/>
+                <a16:creationId xmlns:a16="http://schemas.microsoft.com/office/drawing/2014/main" id="{2E3F9D9C-E95F-F153-46D2-5BA192A13FD6}"/>
               </a:ext>
             </a:extLst>
           </p:cNvPr>
@@ -19930,7 +19657,7 @@
           <p:cNvPr id="25" name="qa-3">
             <a:extLst>
               <a:ext uri="{FF2B5EF4-FFF2-40B4-BE49-F238E27FC236}">
-                <a16:creationId xmlns:a16="http://schemas.microsoft.com/office/drawing/2014/main" id="{D91951C7-148A-403B-BC9D-677B3400DAEF}"/>
+                <a16:creationId xmlns:a16="http://schemas.microsoft.com/office/drawing/2014/main" id="{A3E88521-D443-02E8-74BB-D7C57362EA84}"/>
               </a:ext>
             </a:extLst>
           </p:cNvPr>
@@ -19984,7 +19711,7 @@
           <p:cNvPr id="26" name="qa-band-3">
             <a:extLst>
               <a:ext uri="{FF2B5EF4-FFF2-40B4-BE49-F238E27FC236}">
-                <a16:creationId xmlns:a16="http://schemas.microsoft.com/office/drawing/2014/main" id="{2D588DC4-FF0D-3CF5-9A70-5C578FA3B512}"/>
+                <a16:creationId xmlns:a16="http://schemas.microsoft.com/office/drawing/2014/main" id="{ECF54E89-1C58-9FA8-8F23-39EA02C9BD76}"/>
               </a:ext>
             </a:extLst>
           </p:cNvPr>
@@ -20038,7 +19765,7 @@
           <p:cNvPr id="27" name="q-3">
             <a:extLst>
               <a:ext uri="{FF2B5EF4-FFF2-40B4-BE49-F238E27FC236}">
-                <a16:creationId xmlns:a16="http://schemas.microsoft.com/office/drawing/2014/main" id="{9CADC0D2-2E4E-1A2A-5D46-C4BA9C070A04}"/>
+                <a16:creationId xmlns:a16="http://schemas.microsoft.com/office/drawing/2014/main" id="{32B434C2-48D7-E270-011B-DE93B2747308}"/>
               </a:ext>
             </a:extLst>
           </p:cNvPr>
@@ -20084,7 +19811,7 @@
           <p:cNvPr id="28" name="a-3">
             <a:extLst>
               <a:ext uri="{FF2B5EF4-FFF2-40B4-BE49-F238E27FC236}">
-                <a16:creationId xmlns:a16="http://schemas.microsoft.com/office/drawing/2014/main" id="{0CF44993-BDA1-E478-63EE-F611C2A0812B}"/>
+                <a16:creationId xmlns:a16="http://schemas.microsoft.com/office/drawing/2014/main" id="{596DBFD2-3176-B17D-6DD5-87DB6BF01853}"/>
               </a:ext>
             </a:extLst>
           </p:cNvPr>
@@ -20130,7 +19857,7 @@
           <p:cNvPr id="29" name="qa-4">
             <a:extLst>
               <a:ext uri="{FF2B5EF4-FFF2-40B4-BE49-F238E27FC236}">
-                <a16:creationId xmlns:a16="http://schemas.microsoft.com/office/drawing/2014/main" id="{48F113EA-551D-4FBA-A85B-B16C1B0C927B}"/>
+                <a16:creationId xmlns:a16="http://schemas.microsoft.com/office/drawing/2014/main" id="{5A97BF93-679B-E8C2-3970-8F954DD80E10}"/>
               </a:ext>
             </a:extLst>
           </p:cNvPr>
@@ -20184,7 +19911,7 @@
           <p:cNvPr id="30" name="qa-band-4">
             <a:extLst>
               <a:ext uri="{FF2B5EF4-FFF2-40B4-BE49-F238E27FC236}">
-                <a16:creationId xmlns:a16="http://schemas.microsoft.com/office/drawing/2014/main" id="{D160D663-62F7-9FA6-2B51-32E897D70F8E}"/>
+                <a16:creationId xmlns:a16="http://schemas.microsoft.com/office/drawing/2014/main" id="{9E002F5D-16A1-0903-627D-A19F4C7C0395}"/>
               </a:ext>
             </a:extLst>
           </p:cNvPr>
@@ -20238,7 +19965,7 @@
           <p:cNvPr id="31" name="q-4">
             <a:extLst>
               <a:ext uri="{FF2B5EF4-FFF2-40B4-BE49-F238E27FC236}">
-                <a16:creationId xmlns:a16="http://schemas.microsoft.com/office/drawing/2014/main" id="{97C67356-24E2-8990-FFE6-BDB6EE77EB67}"/>
+                <a16:creationId xmlns:a16="http://schemas.microsoft.com/office/drawing/2014/main" id="{204ECA80-4EBC-775E-58D0-404775C88F58}"/>
               </a:ext>
             </a:extLst>
           </p:cNvPr>
@@ -20284,7 +20011,7 @@
           <p:cNvPr id="32" name="a-4">
             <a:extLst>
               <a:ext uri="{FF2B5EF4-FFF2-40B4-BE49-F238E27FC236}">
-                <a16:creationId xmlns:a16="http://schemas.microsoft.com/office/drawing/2014/main" id="{C2A1F13F-44FF-F72D-9A23-3ABAD9E9F10A}"/>
+                <a16:creationId xmlns:a16="http://schemas.microsoft.com/office/drawing/2014/main" id="{543803B4-769F-F27D-8DD5-5051EDD5381C}"/>
               </a:ext>
             </a:extLst>
           </p:cNvPr>
@@ -20331,7 +20058,7 @@
             <a:hlinkClick r:id="rId4"/>
             <a:extLst>
               <a:ext uri="{FF2B5EF4-FFF2-40B4-BE49-F238E27FC236}">
-                <a16:creationId xmlns:a16="http://schemas.microsoft.com/office/drawing/2014/main" id="{5F8D6F40-4B9D-14EB-996C-048E6A86E903}"/>
+                <a16:creationId xmlns:a16="http://schemas.microsoft.com/office/drawing/2014/main" id="{CBB75234-D7FF-A874-E789-C4B8558FCD58}"/>
               </a:ext>
             </a:extLst>
           </p:cNvPr>
@@ -20392,7 +20119,7 @@
     </p:spTree>
     <p:extLst>
       <p:ext uri="{BB962C8B-B14F-4D97-AF65-F5344CB8AC3E}">
-        <p14:creationId xmlns:p14="http://schemas.microsoft.com/office/powerpoint/2010/main" val="3089913280"/>
+        <p14:creationId xmlns:p14="http://schemas.microsoft.com/office/powerpoint/2010/main" val="64181564"/>
       </p:ext>
     </p:extLst>
   </p:cSld>
@@ -21380,7 +21107,7 @@
           <p:cNvPr id="2" name="bg">
             <a:extLst>
               <a:ext uri="{FF2B5EF4-FFF2-40B4-BE49-F238E27FC236}">
-                <a16:creationId xmlns:a16="http://schemas.microsoft.com/office/drawing/2014/main" id="{0B7CA883-00A8-8D32-E102-94AFEE642FF5}"/>
+                <a16:creationId xmlns:a16="http://schemas.microsoft.com/office/drawing/2014/main" id="{9FF22F73-C94B-76B9-6E27-BDFF94242722}"/>
               </a:ext>
             </a:extLst>
           </p:cNvPr>
@@ -21441,7 +21168,7 @@
           <p:cNvPr id="3" name="rail">
             <a:extLst>
               <a:ext uri="{FF2B5EF4-FFF2-40B4-BE49-F238E27FC236}">
-                <a16:creationId xmlns:a16="http://schemas.microsoft.com/office/drawing/2014/main" id="{4E52400F-729F-BD43-04F7-1795FCD9DA72}"/>
+                <a16:creationId xmlns:a16="http://schemas.microsoft.com/office/drawing/2014/main" id="{B005D1C2-FA79-CCD2-C6AB-0B3C6AEAE556}"/>
               </a:ext>
             </a:extLst>
           </p:cNvPr>
@@ -21502,7 +21229,7 @@
           <p:cNvPr id="4" name="top-rule">
             <a:extLst>
               <a:ext uri="{FF2B5EF4-FFF2-40B4-BE49-F238E27FC236}">
-                <a16:creationId xmlns:a16="http://schemas.microsoft.com/office/drawing/2014/main" id="{92D408B1-D047-74BC-5CBC-1DFFB4888EBD}"/>
+                <a16:creationId xmlns:a16="http://schemas.microsoft.com/office/drawing/2014/main" id="{B3CD78E5-D4EB-CB20-9E13-238BF92C0D88}"/>
               </a:ext>
             </a:extLst>
           </p:cNvPr>
@@ -21543,7 +21270,7 @@
           <p:cNvPr id="5" name="section">
             <a:extLst>
               <a:ext uri="{FF2B5EF4-FFF2-40B4-BE49-F238E27FC236}">
-                <a16:creationId xmlns:a16="http://schemas.microsoft.com/office/drawing/2014/main" id="{C3CEAA5D-AD5B-6D35-32DC-610CCF292C81}"/>
+                <a16:creationId xmlns:a16="http://schemas.microsoft.com/office/drawing/2014/main" id="{61551B44-F252-1773-6DBC-C84EFF14EBF0}"/>
               </a:ext>
             </a:extLst>
           </p:cNvPr>
@@ -21589,7 +21316,7 @@
           <p:cNvPr id="6" name="num">
             <a:extLst>
               <a:ext uri="{FF2B5EF4-FFF2-40B4-BE49-F238E27FC236}">
-                <a16:creationId xmlns:a16="http://schemas.microsoft.com/office/drawing/2014/main" id="{50677486-1401-B8FA-3B5B-B207954DA1EC}"/>
+                <a16:creationId xmlns:a16="http://schemas.microsoft.com/office/drawing/2014/main" id="{A64D7C3D-E407-C907-6AF4-0911846C3E54}"/>
               </a:ext>
             </a:extLst>
           </p:cNvPr>
@@ -21635,7 +21362,7 @@
           <p:cNvPr id="7" name="footer">
             <a:extLst>
               <a:ext uri="{FF2B5EF4-FFF2-40B4-BE49-F238E27FC236}">
-                <a16:creationId xmlns:a16="http://schemas.microsoft.com/office/drawing/2014/main" id="{784AD662-349F-B270-C567-1AC17E88852F}"/>
+                <a16:creationId xmlns:a16="http://schemas.microsoft.com/office/drawing/2014/main" id="{1DA44B82-6811-B118-45AA-84CBFFDA76C3}"/>
               </a:ext>
             </a:extLst>
           </p:cNvPr>
@@ -21681,7 +21408,7 @@
           <p:cNvPr id="8" name="student">
             <a:extLst>
               <a:ext uri="{FF2B5EF4-FFF2-40B4-BE49-F238E27FC236}">
-                <a16:creationId xmlns:a16="http://schemas.microsoft.com/office/drawing/2014/main" id="{41B528E5-823C-11C2-9449-57C65C23B9AF}"/>
+                <a16:creationId xmlns:a16="http://schemas.microsoft.com/office/drawing/2014/main" id="{F3139E22-B965-5E3B-A45D-0F738C7C99A3}"/>
               </a:ext>
             </a:extLst>
           </p:cNvPr>
@@ -21727,7 +21454,7 @@
           <p:cNvPr id="10" name="图片 9">
             <a:extLst>
               <a:ext uri="{FF2B5EF4-FFF2-40B4-BE49-F238E27FC236}">
-                <a16:creationId xmlns:a16="http://schemas.microsoft.com/office/drawing/2014/main" id="{41EC8EDA-A6B6-63EE-F2C6-4026825F8345}"/>
+                <a16:creationId xmlns:a16="http://schemas.microsoft.com/office/drawing/2014/main" id="{8AD5B520-C350-DD71-BC6B-12E62EBBF0AF}"/>
               </a:ext>
             </a:extLst>
           </p:cNvPr>
@@ -21763,7 +21490,7 @@
           <p:cNvPr id="11" name="title">
             <a:extLst>
               <a:ext uri="{FF2B5EF4-FFF2-40B4-BE49-F238E27FC236}">
-                <a16:creationId xmlns:a16="http://schemas.microsoft.com/office/drawing/2014/main" id="{A104735A-CF23-DB36-C761-07C9B422351C}"/>
+                <a16:creationId xmlns:a16="http://schemas.microsoft.com/office/drawing/2014/main" id="{F35E25FB-8C5A-12BC-DA62-FD43C396390F}"/>
               </a:ext>
             </a:extLst>
           </p:cNvPr>
@@ -21809,7 +21536,7 @@
           <p:cNvPr id="12" name="subtitle">
             <a:extLst>
               <a:ext uri="{FF2B5EF4-FFF2-40B4-BE49-F238E27FC236}">
-                <a16:creationId xmlns:a16="http://schemas.microsoft.com/office/drawing/2014/main" id="{6D207472-D8BE-E639-CDEE-5B38AC9773E9}"/>
+                <a16:creationId xmlns:a16="http://schemas.microsoft.com/office/drawing/2014/main" id="{E9C6A5F5-C9AA-5A25-07A1-DD27EAE3E9BD}"/>
               </a:ext>
             </a:extLst>
           </p:cNvPr>
@@ -21855,7 +21582,7 @@
           <p:cNvPr id="13" name="demo-spine">
             <a:extLst>
               <a:ext uri="{FF2B5EF4-FFF2-40B4-BE49-F238E27FC236}">
-                <a16:creationId xmlns:a16="http://schemas.microsoft.com/office/drawing/2014/main" id="{28409191-8D22-43FF-C959-3A7C6046CB3E}"/>
+                <a16:creationId xmlns:a16="http://schemas.microsoft.com/office/drawing/2014/main" id="{33E61FD0-FFE3-FCBC-F72C-2543AF4C7CDA}"/>
               </a:ext>
             </a:extLst>
           </p:cNvPr>
@@ -21896,7 +21623,7 @@
           <p:cNvPr id="14" name="story-dot-0">
             <a:extLst>
               <a:ext uri="{FF2B5EF4-FFF2-40B4-BE49-F238E27FC236}">
-                <a16:creationId xmlns:a16="http://schemas.microsoft.com/office/drawing/2014/main" id="{0F91B7B2-1A06-AB4E-BBCA-F13B0647A614}"/>
+                <a16:creationId xmlns:a16="http://schemas.microsoft.com/office/drawing/2014/main" id="{A25A1CA4-2BD1-4293-35CB-09A8102AB9FC}"/>
               </a:ext>
             </a:extLst>
           </p:cNvPr>
@@ -21950,7 +21677,7 @@
           <p:cNvPr id="15" name="story-num-0">
             <a:extLst>
               <a:ext uri="{FF2B5EF4-FFF2-40B4-BE49-F238E27FC236}">
-                <a16:creationId xmlns:a16="http://schemas.microsoft.com/office/drawing/2014/main" id="{97D91732-FA3A-293F-7EF9-DBC65FD730F9}"/>
+                <a16:creationId xmlns:a16="http://schemas.microsoft.com/office/drawing/2014/main" id="{44D5C846-4140-3023-B79E-DFD2B3A16903}"/>
               </a:ext>
             </a:extLst>
           </p:cNvPr>
@@ -21996,7 +21723,7 @@
           <p:cNvPr id="16" name="story-title-0">
             <a:extLst>
               <a:ext uri="{FF2B5EF4-FFF2-40B4-BE49-F238E27FC236}">
-                <a16:creationId xmlns:a16="http://schemas.microsoft.com/office/drawing/2014/main" id="{2C0BECDD-221E-E0E1-6908-6D377BB3695C}"/>
+                <a16:creationId xmlns:a16="http://schemas.microsoft.com/office/drawing/2014/main" id="{2A0AEBD3-755A-138A-0CFA-298D6D4FBEF0}"/>
               </a:ext>
             </a:extLst>
           </p:cNvPr>
@@ -22042,7 +21769,7 @@
           <p:cNvPr id="17" name="story-sub-0">
             <a:extLst>
               <a:ext uri="{FF2B5EF4-FFF2-40B4-BE49-F238E27FC236}">
-                <a16:creationId xmlns:a16="http://schemas.microsoft.com/office/drawing/2014/main" id="{97F908F8-1DDB-6A65-4162-D8B0F1B8BD1D}"/>
+                <a16:creationId xmlns:a16="http://schemas.microsoft.com/office/drawing/2014/main" id="{561852A4-E1EF-F362-AB00-043EA4C07DBD}"/>
               </a:ext>
             </a:extLst>
           </p:cNvPr>
@@ -22089,7 +21816,7 @@
             <a:hlinkClick r:id="rId4"/>
             <a:extLst>
               <a:ext uri="{FF2B5EF4-FFF2-40B4-BE49-F238E27FC236}">
-                <a16:creationId xmlns:a16="http://schemas.microsoft.com/office/drawing/2014/main" id="{5414FFF8-18AD-B857-86D8-C4072B7AA201}"/>
+                <a16:creationId xmlns:a16="http://schemas.microsoft.com/office/drawing/2014/main" id="{CB354156-8F54-9C71-3D06-BA474BC260CA}"/>
               </a:ext>
             </a:extLst>
           </p:cNvPr>
@@ -22152,7 +21879,7 @@
           <p:cNvPr id="19" name="story-dot-1">
             <a:extLst>
               <a:ext uri="{FF2B5EF4-FFF2-40B4-BE49-F238E27FC236}">
-                <a16:creationId xmlns:a16="http://schemas.microsoft.com/office/drawing/2014/main" id="{5B838E1D-4EBF-29D7-A5F2-6C101F6AF43F}"/>
+                <a16:creationId xmlns:a16="http://schemas.microsoft.com/office/drawing/2014/main" id="{B5B8A9F0-6D2D-CCBE-EE70-6B298DB9EE87}"/>
               </a:ext>
             </a:extLst>
           </p:cNvPr>
@@ -22206,7 +21933,7 @@
           <p:cNvPr id="20" name="story-num-1">
             <a:extLst>
               <a:ext uri="{FF2B5EF4-FFF2-40B4-BE49-F238E27FC236}">
-                <a16:creationId xmlns:a16="http://schemas.microsoft.com/office/drawing/2014/main" id="{56605722-9306-5425-8039-73C809A0E32B}"/>
+                <a16:creationId xmlns:a16="http://schemas.microsoft.com/office/drawing/2014/main" id="{7EABD7D3-97DC-158A-FF48-DF7BFDA973C3}"/>
               </a:ext>
             </a:extLst>
           </p:cNvPr>
@@ -22252,7 +21979,7 @@
           <p:cNvPr id="21" name="story-title-1">
             <a:extLst>
               <a:ext uri="{FF2B5EF4-FFF2-40B4-BE49-F238E27FC236}">
-                <a16:creationId xmlns:a16="http://schemas.microsoft.com/office/drawing/2014/main" id="{BD8877A1-F48D-BF9C-B835-EBDF7E84B7A8}"/>
+                <a16:creationId xmlns:a16="http://schemas.microsoft.com/office/drawing/2014/main" id="{D819029E-B182-DEDB-B425-CF3C96E1D727}"/>
               </a:ext>
             </a:extLst>
           </p:cNvPr>
@@ -22298,7 +22025,7 @@
           <p:cNvPr id="22" name="story-sub-1">
             <a:extLst>
               <a:ext uri="{FF2B5EF4-FFF2-40B4-BE49-F238E27FC236}">
-                <a16:creationId xmlns:a16="http://schemas.microsoft.com/office/drawing/2014/main" id="{7EC24FE9-124F-01A4-F1A0-2429227D106B}"/>
+                <a16:creationId xmlns:a16="http://schemas.microsoft.com/office/drawing/2014/main" id="{4B3F1977-4194-7989-AF45-2791336408B8}"/>
               </a:ext>
             </a:extLst>
           </p:cNvPr>
@@ -22345,7 +22072,7 @@
             <a:hlinkClick r:id="rId5"/>
             <a:extLst>
               <a:ext uri="{FF2B5EF4-FFF2-40B4-BE49-F238E27FC236}">
-                <a16:creationId xmlns:a16="http://schemas.microsoft.com/office/drawing/2014/main" id="{812D4410-9A1C-3E8E-B681-6E7C3FC0FEEE}"/>
+                <a16:creationId xmlns:a16="http://schemas.microsoft.com/office/drawing/2014/main" id="{F969C088-EB5A-58CE-F21A-29AF03720752}"/>
               </a:ext>
             </a:extLst>
           </p:cNvPr>
@@ -22408,7 +22135,7 @@
           <p:cNvPr id="24" name="story-dot-2">
             <a:extLst>
               <a:ext uri="{FF2B5EF4-FFF2-40B4-BE49-F238E27FC236}">
-                <a16:creationId xmlns:a16="http://schemas.microsoft.com/office/drawing/2014/main" id="{BACB1FE3-1BDB-3128-884B-8ED2164C945F}"/>
+                <a16:creationId xmlns:a16="http://schemas.microsoft.com/office/drawing/2014/main" id="{F1CD5F13-A4D7-182C-3424-C0ACA329E20E}"/>
               </a:ext>
             </a:extLst>
           </p:cNvPr>
@@ -22462,7 +22189,7 @@
           <p:cNvPr id="25" name="story-num-2">
             <a:extLst>
               <a:ext uri="{FF2B5EF4-FFF2-40B4-BE49-F238E27FC236}">
-                <a16:creationId xmlns:a16="http://schemas.microsoft.com/office/drawing/2014/main" id="{6665F99F-DCFC-9922-016C-C6DE7CCF73FB}"/>
+                <a16:creationId xmlns:a16="http://schemas.microsoft.com/office/drawing/2014/main" id="{26E1D438-E535-6024-3981-8C1D55B2777B}"/>
               </a:ext>
             </a:extLst>
           </p:cNvPr>
@@ -22508,7 +22235,7 @@
           <p:cNvPr id="26" name="story-title-2">
             <a:extLst>
               <a:ext uri="{FF2B5EF4-FFF2-40B4-BE49-F238E27FC236}">
-                <a16:creationId xmlns:a16="http://schemas.microsoft.com/office/drawing/2014/main" id="{64C354FE-E7AB-4A19-FA34-4F3608A438BB}"/>
+                <a16:creationId xmlns:a16="http://schemas.microsoft.com/office/drawing/2014/main" id="{91A30E11-631B-E8B4-5D4C-07F8CCAE824B}"/>
               </a:ext>
             </a:extLst>
           </p:cNvPr>
@@ -22554,7 +22281,7 @@
           <p:cNvPr id="27" name="story-sub-2">
             <a:extLst>
               <a:ext uri="{FF2B5EF4-FFF2-40B4-BE49-F238E27FC236}">
-                <a16:creationId xmlns:a16="http://schemas.microsoft.com/office/drawing/2014/main" id="{449D0148-CD54-1D1F-56D9-B979A295F640}"/>
+                <a16:creationId xmlns:a16="http://schemas.microsoft.com/office/drawing/2014/main" id="{90BA45DD-5468-BAB2-4D10-BF47337944C9}"/>
               </a:ext>
             </a:extLst>
           </p:cNvPr>
@@ -22601,7 +22328,7 @@
             <a:hlinkClick r:id="rId6"/>
             <a:extLst>
               <a:ext uri="{FF2B5EF4-FFF2-40B4-BE49-F238E27FC236}">
-                <a16:creationId xmlns:a16="http://schemas.microsoft.com/office/drawing/2014/main" id="{60A1051E-D157-F48C-5CA1-B8245E57FC8E}"/>
+                <a16:creationId xmlns:a16="http://schemas.microsoft.com/office/drawing/2014/main" id="{BB2D99ED-F57B-3805-1EAE-5DE2FE323B84}"/>
               </a:ext>
             </a:extLst>
           </p:cNvPr>
@@ -22664,7 +22391,7 @@
           <p:cNvPr id="29" name="story-dot-3">
             <a:extLst>
               <a:ext uri="{FF2B5EF4-FFF2-40B4-BE49-F238E27FC236}">
-                <a16:creationId xmlns:a16="http://schemas.microsoft.com/office/drawing/2014/main" id="{9CF10453-8F9A-B8EE-8E04-844A05E2C3B2}"/>
+                <a16:creationId xmlns:a16="http://schemas.microsoft.com/office/drawing/2014/main" id="{0C774B43-8AE5-3730-59FF-4D23E10228C7}"/>
               </a:ext>
             </a:extLst>
           </p:cNvPr>
@@ -22718,7 +22445,7 @@
           <p:cNvPr id="30" name="story-num-3">
             <a:extLst>
               <a:ext uri="{FF2B5EF4-FFF2-40B4-BE49-F238E27FC236}">
-                <a16:creationId xmlns:a16="http://schemas.microsoft.com/office/drawing/2014/main" id="{E41546BF-D7B8-DCCB-366A-50659F9FEFC7}"/>
+                <a16:creationId xmlns:a16="http://schemas.microsoft.com/office/drawing/2014/main" id="{44AC412C-E0C3-2C1E-B313-A7BA2C21C787}"/>
               </a:ext>
             </a:extLst>
           </p:cNvPr>
@@ -22764,7 +22491,7 @@
           <p:cNvPr id="31" name="story-title-3">
             <a:extLst>
               <a:ext uri="{FF2B5EF4-FFF2-40B4-BE49-F238E27FC236}">
-                <a16:creationId xmlns:a16="http://schemas.microsoft.com/office/drawing/2014/main" id="{7EA3E585-FC76-FD1B-D67F-3ECD090A5E6A}"/>
+                <a16:creationId xmlns:a16="http://schemas.microsoft.com/office/drawing/2014/main" id="{BD936BA3-FB30-0034-45CD-745722DCAF91}"/>
               </a:ext>
             </a:extLst>
           </p:cNvPr>
@@ -22810,7 +22537,7 @@
           <p:cNvPr id="32" name="story-sub-3">
             <a:extLst>
               <a:ext uri="{FF2B5EF4-FFF2-40B4-BE49-F238E27FC236}">
-                <a16:creationId xmlns:a16="http://schemas.microsoft.com/office/drawing/2014/main" id="{F4605349-6EB5-0B3C-0624-EA1CDD701F9F}"/>
+                <a16:creationId xmlns:a16="http://schemas.microsoft.com/office/drawing/2014/main" id="{9A9ED8DA-B395-85FE-1D7F-1442282F03A7}"/>
               </a:ext>
             </a:extLst>
           </p:cNvPr>
@@ -22857,7 +22584,7 @@
             <a:hlinkClick r:id="rId7"/>
             <a:extLst>
               <a:ext uri="{FF2B5EF4-FFF2-40B4-BE49-F238E27FC236}">
-                <a16:creationId xmlns:a16="http://schemas.microsoft.com/office/drawing/2014/main" id="{A46B81EF-844E-FD60-23F6-CA718BC82A48}"/>
+                <a16:creationId xmlns:a16="http://schemas.microsoft.com/office/drawing/2014/main" id="{5F40998E-DB6C-D5E0-EAF3-10268FE2FE60}"/>
               </a:ext>
             </a:extLst>
           </p:cNvPr>
@@ -22920,7 +22647,7 @@
           <p:cNvPr id="34" name="story-dot-4">
             <a:extLst>
               <a:ext uri="{FF2B5EF4-FFF2-40B4-BE49-F238E27FC236}">
-                <a16:creationId xmlns:a16="http://schemas.microsoft.com/office/drawing/2014/main" id="{1348F1DE-192C-F1CE-09A2-CA3485C7B8A6}"/>
+                <a16:creationId xmlns:a16="http://schemas.microsoft.com/office/drawing/2014/main" id="{C2C6AADE-78EA-E2C8-F82A-E0C80713C0CA}"/>
               </a:ext>
             </a:extLst>
           </p:cNvPr>
@@ -22974,7 +22701,7 @@
           <p:cNvPr id="35" name="story-num-4">
             <a:extLst>
               <a:ext uri="{FF2B5EF4-FFF2-40B4-BE49-F238E27FC236}">
-                <a16:creationId xmlns:a16="http://schemas.microsoft.com/office/drawing/2014/main" id="{773F4D84-27B2-6A0B-B1D7-0FCE0B5C3E13}"/>
+                <a16:creationId xmlns:a16="http://schemas.microsoft.com/office/drawing/2014/main" id="{9C73469F-DD58-B037-473E-07E0BC909BAC}"/>
               </a:ext>
             </a:extLst>
           </p:cNvPr>
@@ -23020,7 +22747,7 @@
           <p:cNvPr id="36" name="story-title-4">
             <a:extLst>
               <a:ext uri="{FF2B5EF4-FFF2-40B4-BE49-F238E27FC236}">
-                <a16:creationId xmlns:a16="http://schemas.microsoft.com/office/drawing/2014/main" id="{86ADCBE1-5F53-BD99-82E4-6A1D014FE222}"/>
+                <a16:creationId xmlns:a16="http://schemas.microsoft.com/office/drawing/2014/main" id="{65BD00C4-338A-F860-86CD-E4C683AA7D84}"/>
               </a:ext>
             </a:extLst>
           </p:cNvPr>
@@ -23066,7 +22793,7 @@
           <p:cNvPr id="37" name="story-sub-4">
             <a:extLst>
               <a:ext uri="{FF2B5EF4-FFF2-40B4-BE49-F238E27FC236}">
-                <a16:creationId xmlns:a16="http://schemas.microsoft.com/office/drawing/2014/main" id="{BCA3D44C-4088-122E-0196-897126253E47}"/>
+                <a16:creationId xmlns:a16="http://schemas.microsoft.com/office/drawing/2014/main" id="{DE270077-3CC1-975E-4969-C0A7ECACC7C8}"/>
               </a:ext>
             </a:extLst>
           </p:cNvPr>
@@ -23113,7 +22840,7 @@
             <a:hlinkClick r:id="rId8"/>
             <a:extLst>
               <a:ext uri="{FF2B5EF4-FFF2-40B4-BE49-F238E27FC236}">
-                <a16:creationId xmlns:a16="http://schemas.microsoft.com/office/drawing/2014/main" id="{7E2AB0F3-ECC0-A1D5-12D3-02BE002C5AB5}"/>
+                <a16:creationId xmlns:a16="http://schemas.microsoft.com/office/drawing/2014/main" id="{D9946589-BF1B-575E-8BB7-27E8DCFDBE00}"/>
               </a:ext>
             </a:extLst>
           </p:cNvPr>
@@ -23176,7 +22903,7 @@
           <p:cNvPr id="39" name="fallback-note">
             <a:extLst>
               <a:ext uri="{FF2B5EF4-FFF2-40B4-BE49-F238E27FC236}">
-                <a16:creationId xmlns:a16="http://schemas.microsoft.com/office/drawing/2014/main" id="{209E9EB7-15DB-AD07-B813-BDAD5881059A}"/>
+                <a16:creationId xmlns:a16="http://schemas.microsoft.com/office/drawing/2014/main" id="{53983256-864E-C187-C395-56DB74406671}"/>
               </a:ext>
             </a:extLst>
           </p:cNvPr>
@@ -23230,7 +22957,7 @@
           <p:cNvPr id="40" name="fallback-t">
             <a:extLst>
               <a:ext uri="{FF2B5EF4-FFF2-40B4-BE49-F238E27FC236}">
-                <a16:creationId xmlns:a16="http://schemas.microsoft.com/office/drawing/2014/main" id="{6822EFC4-01A7-00A0-830C-A837482B655B}"/>
+                <a16:creationId xmlns:a16="http://schemas.microsoft.com/office/drawing/2014/main" id="{E6065F26-D592-5B98-AA6F-7FE9C767E82F}"/>
               </a:ext>
             </a:extLst>
           </p:cNvPr>
@@ -23277,7 +23004,7 @@
             <a:hlinkClick r:id="rId4"/>
             <a:extLst>
               <a:ext uri="{FF2B5EF4-FFF2-40B4-BE49-F238E27FC236}">
-                <a16:creationId xmlns:a16="http://schemas.microsoft.com/office/drawing/2014/main" id="{4EDC96F5-CC76-DC2F-60E3-A35C7EBA0F75}"/>
+                <a16:creationId xmlns:a16="http://schemas.microsoft.com/office/drawing/2014/main" id="{9DB6B872-D15B-D42C-5D35-B77C5644FF11}"/>
               </a:ext>
             </a:extLst>
           </p:cNvPr>
@@ -23338,7 +23065,7 @@
     </p:spTree>
     <p:extLst>
       <p:ext uri="{BB962C8B-B14F-4D97-AF65-F5344CB8AC3E}">
-        <p14:creationId xmlns:p14="http://schemas.microsoft.com/office/powerpoint/2010/main" val="1082638404"/>
+        <p14:creationId xmlns:p14="http://schemas.microsoft.com/office/powerpoint/2010/main" val="3398772956"/>
       </p:ext>
     </p:extLst>
   </p:cSld>
@@ -24641,7 +24368,7 @@
           <p:cNvPr id="2" name="bg">
             <a:extLst>
               <a:ext uri="{FF2B5EF4-FFF2-40B4-BE49-F238E27FC236}">
-                <a16:creationId xmlns:a16="http://schemas.microsoft.com/office/drawing/2014/main" id="{9D60BDC5-987F-AAF1-F2F6-39710FCF0251}"/>
+                <a16:creationId xmlns:a16="http://schemas.microsoft.com/office/drawing/2014/main" id="{ACDD37A8-206E-3735-B923-A2B3DF1FA0B0}"/>
               </a:ext>
             </a:extLst>
           </p:cNvPr>
@@ -24702,7 +24429,7 @@
           <p:cNvPr id="3" name="rail">
             <a:extLst>
               <a:ext uri="{FF2B5EF4-FFF2-40B4-BE49-F238E27FC236}">
-                <a16:creationId xmlns:a16="http://schemas.microsoft.com/office/drawing/2014/main" id="{9E63EB73-1AAC-4DE8-2ED3-35459452F744}"/>
+                <a16:creationId xmlns:a16="http://schemas.microsoft.com/office/drawing/2014/main" id="{B8081185-7A1A-2CB8-389F-018DF4D67AF2}"/>
               </a:ext>
             </a:extLst>
           </p:cNvPr>
@@ -24763,7 +24490,7 @@
           <p:cNvPr id="4" name="top-rule">
             <a:extLst>
               <a:ext uri="{FF2B5EF4-FFF2-40B4-BE49-F238E27FC236}">
-                <a16:creationId xmlns:a16="http://schemas.microsoft.com/office/drawing/2014/main" id="{CD96E491-DF97-29BA-00B7-256D1E31E855}"/>
+                <a16:creationId xmlns:a16="http://schemas.microsoft.com/office/drawing/2014/main" id="{B7427FC0-F416-29CB-25D0-5B6E838B07DD}"/>
               </a:ext>
             </a:extLst>
           </p:cNvPr>
@@ -24804,7 +24531,7 @@
           <p:cNvPr id="5" name="section">
             <a:extLst>
               <a:ext uri="{FF2B5EF4-FFF2-40B4-BE49-F238E27FC236}">
-                <a16:creationId xmlns:a16="http://schemas.microsoft.com/office/drawing/2014/main" id="{4493BFAE-23A8-5A8C-14CF-86733DA19B59}"/>
+                <a16:creationId xmlns:a16="http://schemas.microsoft.com/office/drawing/2014/main" id="{03221622-8B7F-DE2D-BB5B-89BD44B6FDD0}"/>
               </a:ext>
             </a:extLst>
           </p:cNvPr>
@@ -24850,7 +24577,7 @@
           <p:cNvPr id="6" name="num">
             <a:extLst>
               <a:ext uri="{FF2B5EF4-FFF2-40B4-BE49-F238E27FC236}">
-                <a16:creationId xmlns:a16="http://schemas.microsoft.com/office/drawing/2014/main" id="{A1A0B9A6-A479-E293-5FAB-B9BF78FB5E0A}"/>
+                <a16:creationId xmlns:a16="http://schemas.microsoft.com/office/drawing/2014/main" id="{7D1F4360-5380-B880-C42A-FBA2A084B233}"/>
               </a:ext>
             </a:extLst>
           </p:cNvPr>
@@ -24896,7 +24623,7 @@
           <p:cNvPr id="7" name="footer">
             <a:extLst>
               <a:ext uri="{FF2B5EF4-FFF2-40B4-BE49-F238E27FC236}">
-                <a16:creationId xmlns:a16="http://schemas.microsoft.com/office/drawing/2014/main" id="{07EFE7B0-61F5-F334-B421-6FB5B25E56F8}"/>
+                <a16:creationId xmlns:a16="http://schemas.microsoft.com/office/drawing/2014/main" id="{15FEF02B-9249-6287-C062-95379BFED7C5}"/>
               </a:ext>
             </a:extLst>
           </p:cNvPr>
@@ -24942,7 +24669,7 @@
           <p:cNvPr id="8" name="student">
             <a:extLst>
               <a:ext uri="{FF2B5EF4-FFF2-40B4-BE49-F238E27FC236}">
-                <a16:creationId xmlns:a16="http://schemas.microsoft.com/office/drawing/2014/main" id="{F6AFA603-5196-5E7F-7449-94832202482A}"/>
+                <a16:creationId xmlns:a16="http://schemas.microsoft.com/office/drawing/2014/main" id="{53829EE7-DBEF-BC3D-A2F3-66CBDF94022B}"/>
               </a:ext>
             </a:extLst>
           </p:cNvPr>
@@ -24988,7 +24715,7 @@
           <p:cNvPr id="10" name="图片 9">
             <a:extLst>
               <a:ext uri="{FF2B5EF4-FFF2-40B4-BE49-F238E27FC236}">
-                <a16:creationId xmlns:a16="http://schemas.microsoft.com/office/drawing/2014/main" id="{D6BB91C8-8397-AE01-FD8C-63F29C9BABF1}"/>
+                <a16:creationId xmlns:a16="http://schemas.microsoft.com/office/drawing/2014/main" id="{F2F7DA83-291F-742B-88A5-3FF7E0643E27}"/>
               </a:ext>
             </a:extLst>
           </p:cNvPr>
@@ -25024,7 +24751,7 @@
           <p:cNvPr id="11" name="title">
             <a:extLst>
               <a:ext uri="{FF2B5EF4-FFF2-40B4-BE49-F238E27FC236}">
-                <a16:creationId xmlns:a16="http://schemas.microsoft.com/office/drawing/2014/main" id="{499D8BDC-1F34-0F1A-C81B-F183F839A50C}"/>
+                <a16:creationId xmlns:a16="http://schemas.microsoft.com/office/drawing/2014/main" id="{242E5FD9-1695-438A-62F5-05E68DA4D918}"/>
               </a:ext>
             </a:extLst>
           </p:cNvPr>
@@ -25070,7 +24797,7 @@
           <p:cNvPr id="12" name="subtitle">
             <a:extLst>
               <a:ext uri="{FF2B5EF4-FFF2-40B4-BE49-F238E27FC236}">
-                <a16:creationId xmlns:a16="http://schemas.microsoft.com/office/drawing/2014/main" id="{C5A753AB-43D1-B835-4B89-22454B3FB75C}"/>
+                <a16:creationId xmlns:a16="http://schemas.microsoft.com/office/drawing/2014/main" id="{2B9D5B6D-3B32-8D87-CDFD-E400B8BE3C6F}"/>
               </a:ext>
             </a:extLst>
           </p:cNvPr>
@@ -25116,7 +24843,7 @@
           <p:cNvPr id="13" name="lab">
             <a:extLst>
               <a:ext uri="{FF2B5EF4-FFF2-40B4-BE49-F238E27FC236}">
-                <a16:creationId xmlns:a16="http://schemas.microsoft.com/office/drawing/2014/main" id="{504FE482-1FDB-2906-9303-C56B8A538D96}"/>
+                <a16:creationId xmlns:a16="http://schemas.microsoft.com/office/drawing/2014/main" id="{2CF5C197-CBAD-CED6-F0DA-9E51D6316162}"/>
               </a:ext>
             </a:extLst>
           </p:cNvPr>
@@ -25170,7 +24897,7 @@
           <p:cNvPr id="14" name="lab-k">
             <a:extLst>
               <a:ext uri="{FF2B5EF4-FFF2-40B4-BE49-F238E27FC236}">
-                <a16:creationId xmlns:a16="http://schemas.microsoft.com/office/drawing/2014/main" id="{89E7CACE-956E-7B1E-B60C-4AD9CE308A48}"/>
+                <a16:creationId xmlns:a16="http://schemas.microsoft.com/office/drawing/2014/main" id="{0CFA04CC-B210-686B-C733-AAC1171FDB10}"/>
               </a:ext>
             </a:extLst>
           </p:cNvPr>
@@ -25216,7 +24943,7 @@
           <p:cNvPr id="15" name="lab-code">
             <a:extLst>
               <a:ext uri="{FF2B5EF4-FFF2-40B4-BE49-F238E27FC236}">
-                <a16:creationId xmlns:a16="http://schemas.microsoft.com/office/drawing/2014/main" id="{928CC384-899A-4561-9F40-DEFC40C898DB}"/>
+                <a16:creationId xmlns:a16="http://schemas.microsoft.com/office/drawing/2014/main" id="{64F5567D-88AD-C31D-5AEE-05CD88C7605A}"/>
               </a:ext>
             </a:extLst>
           </p:cNvPr>
@@ -25264,7 +24991,7 @@
           <p:cNvPr id="16" name="lab-rule">
             <a:extLst>
               <a:ext uri="{FF2B5EF4-FFF2-40B4-BE49-F238E27FC236}">
-                <a16:creationId xmlns:a16="http://schemas.microsoft.com/office/drawing/2014/main" id="{EA44AC6C-E78B-8C75-96E0-543B8A2CDCAA}"/>
+                <a16:creationId xmlns:a16="http://schemas.microsoft.com/office/drawing/2014/main" id="{31FA358C-C3C0-A887-6A8E-29C50F915F32}"/>
               </a:ext>
             </a:extLst>
           </p:cNvPr>
@@ -25305,7 +25032,7 @@
           <p:cNvPr id="17" name="lab-note">
             <a:extLst>
               <a:ext uri="{FF2B5EF4-FFF2-40B4-BE49-F238E27FC236}">
-                <a16:creationId xmlns:a16="http://schemas.microsoft.com/office/drawing/2014/main" id="{B60F5866-E5D1-E3E5-779A-D64924844C01}"/>
+                <a16:creationId xmlns:a16="http://schemas.microsoft.com/office/drawing/2014/main" id="{FF207733-1430-8D8F-D507-D114A695AB69}"/>
               </a:ext>
             </a:extLst>
           </p:cNvPr>
@@ -25351,7 +25078,7 @@
           <p:cNvPr id="18" name="move-spine">
             <a:extLst>
               <a:ext uri="{FF2B5EF4-FFF2-40B4-BE49-F238E27FC236}">
-                <a16:creationId xmlns:a16="http://schemas.microsoft.com/office/drawing/2014/main" id="{CD4FEC69-64D8-AF9F-7441-7B3DFECBAC8B}"/>
+                <a16:creationId xmlns:a16="http://schemas.microsoft.com/office/drawing/2014/main" id="{C821D0EA-52C9-D8EB-131F-4349EBF35263}"/>
               </a:ext>
             </a:extLst>
           </p:cNvPr>
@@ -25392,7 +25119,7 @@
           <p:cNvPr id="19" name="move-0">
             <a:extLst>
               <a:ext uri="{FF2B5EF4-FFF2-40B4-BE49-F238E27FC236}">
-                <a16:creationId xmlns:a16="http://schemas.microsoft.com/office/drawing/2014/main" id="{8C87193A-DC25-9810-5D35-1E2EE995BBF9}"/>
+                <a16:creationId xmlns:a16="http://schemas.microsoft.com/office/drawing/2014/main" id="{AF6C490D-870F-5CF8-7C30-027445B990B0}"/>
               </a:ext>
             </a:extLst>
           </p:cNvPr>
@@ -25446,7 +25173,7 @@
           <p:cNvPr id="20" name="move-top-0">
             <a:extLst>
               <a:ext uri="{FF2B5EF4-FFF2-40B4-BE49-F238E27FC236}">
-                <a16:creationId xmlns:a16="http://schemas.microsoft.com/office/drawing/2014/main" id="{C3A96D13-B344-F55C-1B4A-5C8BE83A2748}"/>
+                <a16:creationId xmlns:a16="http://schemas.microsoft.com/office/drawing/2014/main" id="{C078FF65-A698-EF01-8E8D-7CA7EB2B7761}"/>
               </a:ext>
             </a:extLst>
           </p:cNvPr>
@@ -25500,7 +25227,7 @@
           <p:cNvPr id="21" name="move-t-0">
             <a:extLst>
               <a:ext uri="{FF2B5EF4-FFF2-40B4-BE49-F238E27FC236}">
-                <a16:creationId xmlns:a16="http://schemas.microsoft.com/office/drawing/2014/main" id="{EC80C21D-CC5A-88AC-A44A-EEBAB38054AD}"/>
+                <a16:creationId xmlns:a16="http://schemas.microsoft.com/office/drawing/2014/main" id="{1C4A8E43-6B77-E422-91FA-67D8F2B36F77}"/>
               </a:ext>
             </a:extLst>
           </p:cNvPr>
@@ -25546,7 +25273,7 @@
           <p:cNvPr id="22" name="move-s-0">
             <a:extLst>
               <a:ext uri="{FF2B5EF4-FFF2-40B4-BE49-F238E27FC236}">
-                <a16:creationId xmlns:a16="http://schemas.microsoft.com/office/drawing/2014/main" id="{FBC34B84-D270-4470-73AA-7C90726FDAD9}"/>
+                <a16:creationId xmlns:a16="http://schemas.microsoft.com/office/drawing/2014/main" id="{9DA26E5D-0D92-E416-6908-A66A6907D17E}"/>
               </a:ext>
             </a:extLst>
           </p:cNvPr>
@@ -25592,7 +25319,7 @@
           <p:cNvPr id="23" name="move-a-0">
             <a:extLst>
               <a:ext uri="{FF2B5EF4-FFF2-40B4-BE49-F238E27FC236}">
-                <a16:creationId xmlns:a16="http://schemas.microsoft.com/office/drawing/2014/main" id="{E1FC3E2F-4D1E-12EA-38F0-295D8C024CDF}"/>
+                <a16:creationId xmlns:a16="http://schemas.microsoft.com/office/drawing/2014/main" id="{FDE49773-44F4-8CBF-CD59-9AB6924D43E8}"/>
               </a:ext>
             </a:extLst>
           </p:cNvPr>
@@ -25634,7 +25361,7 @@
           <p:cNvPr id="24" name="move-1">
             <a:extLst>
               <a:ext uri="{FF2B5EF4-FFF2-40B4-BE49-F238E27FC236}">
-                <a16:creationId xmlns:a16="http://schemas.microsoft.com/office/drawing/2014/main" id="{ED9E69CB-F1EF-5DBF-B927-D6F971F095F2}"/>
+                <a16:creationId xmlns:a16="http://schemas.microsoft.com/office/drawing/2014/main" id="{0266BBBC-32BB-AF92-BC28-53623128847A}"/>
               </a:ext>
             </a:extLst>
           </p:cNvPr>
@@ -25688,7 +25415,7 @@
           <p:cNvPr id="25" name="move-top-1">
             <a:extLst>
               <a:ext uri="{FF2B5EF4-FFF2-40B4-BE49-F238E27FC236}">
-                <a16:creationId xmlns:a16="http://schemas.microsoft.com/office/drawing/2014/main" id="{3901FCF4-F733-89F0-68CD-343DE8050BA8}"/>
+                <a16:creationId xmlns:a16="http://schemas.microsoft.com/office/drawing/2014/main" id="{B3B89DDB-A55D-4AA4-C296-CDFB95E8CE06}"/>
               </a:ext>
             </a:extLst>
           </p:cNvPr>
@@ -25742,7 +25469,7 @@
           <p:cNvPr id="26" name="move-t-1">
             <a:extLst>
               <a:ext uri="{FF2B5EF4-FFF2-40B4-BE49-F238E27FC236}">
-                <a16:creationId xmlns:a16="http://schemas.microsoft.com/office/drawing/2014/main" id="{8915B085-A68C-2372-9F84-5D0CA603AFF9}"/>
+                <a16:creationId xmlns:a16="http://schemas.microsoft.com/office/drawing/2014/main" id="{75F4857E-A7EC-B686-807D-B9EE88C77577}"/>
               </a:ext>
             </a:extLst>
           </p:cNvPr>
@@ -25788,7 +25515,7 @@
           <p:cNvPr id="27" name="move-s-1">
             <a:extLst>
               <a:ext uri="{FF2B5EF4-FFF2-40B4-BE49-F238E27FC236}">
-                <a16:creationId xmlns:a16="http://schemas.microsoft.com/office/drawing/2014/main" id="{A45462E1-45BF-0DDA-A2D9-D982FBA57F77}"/>
+                <a16:creationId xmlns:a16="http://schemas.microsoft.com/office/drawing/2014/main" id="{69C8403C-682B-C08D-8086-F04904A7897D}"/>
               </a:ext>
             </a:extLst>
           </p:cNvPr>
@@ -25834,7 +25561,7 @@
           <p:cNvPr id="28" name="move-a-1">
             <a:extLst>
               <a:ext uri="{FF2B5EF4-FFF2-40B4-BE49-F238E27FC236}">
-                <a16:creationId xmlns:a16="http://schemas.microsoft.com/office/drawing/2014/main" id="{DD9D5ACA-9D2D-FF0C-4D61-6F289C53631B}"/>
+                <a16:creationId xmlns:a16="http://schemas.microsoft.com/office/drawing/2014/main" id="{75832B92-1969-2D1D-7BE3-E2A8EE87D60B}"/>
               </a:ext>
             </a:extLst>
           </p:cNvPr>
@@ -25876,7 +25603,7 @@
           <p:cNvPr id="29" name="move-2">
             <a:extLst>
               <a:ext uri="{FF2B5EF4-FFF2-40B4-BE49-F238E27FC236}">
-                <a16:creationId xmlns:a16="http://schemas.microsoft.com/office/drawing/2014/main" id="{CB0DED3C-CFA4-9D75-98A4-2C8917E3157E}"/>
+                <a16:creationId xmlns:a16="http://schemas.microsoft.com/office/drawing/2014/main" id="{3EE9616E-27AB-1978-CD4F-B9B85B702C06}"/>
               </a:ext>
             </a:extLst>
           </p:cNvPr>
@@ -25930,7 +25657,7 @@
           <p:cNvPr id="30" name="move-top-2">
             <a:extLst>
               <a:ext uri="{FF2B5EF4-FFF2-40B4-BE49-F238E27FC236}">
-                <a16:creationId xmlns:a16="http://schemas.microsoft.com/office/drawing/2014/main" id="{D636744D-AECD-4835-BF77-9CDF5376062C}"/>
+                <a16:creationId xmlns:a16="http://schemas.microsoft.com/office/drawing/2014/main" id="{19185891-2045-4E46-839B-50C93549263B}"/>
               </a:ext>
             </a:extLst>
           </p:cNvPr>
@@ -25984,7 +25711,7 @@
           <p:cNvPr id="31" name="move-t-2">
             <a:extLst>
               <a:ext uri="{FF2B5EF4-FFF2-40B4-BE49-F238E27FC236}">
-                <a16:creationId xmlns:a16="http://schemas.microsoft.com/office/drawing/2014/main" id="{8732310D-E4F6-B56A-820A-6D78E3644B96}"/>
+                <a16:creationId xmlns:a16="http://schemas.microsoft.com/office/drawing/2014/main" id="{C13E76B1-25E0-3DB7-8624-DEF42A6FB7D0}"/>
               </a:ext>
             </a:extLst>
           </p:cNvPr>
@@ -26030,7 +25757,7 @@
           <p:cNvPr id="32" name="move-s-2">
             <a:extLst>
               <a:ext uri="{FF2B5EF4-FFF2-40B4-BE49-F238E27FC236}">
-                <a16:creationId xmlns:a16="http://schemas.microsoft.com/office/drawing/2014/main" id="{F0C87487-1907-D639-6691-6DD24DD3B8E0}"/>
+                <a16:creationId xmlns:a16="http://schemas.microsoft.com/office/drawing/2014/main" id="{2C405AA9-1E3C-D931-F3B9-D46B1D3CC3A8}"/>
               </a:ext>
             </a:extLst>
           </p:cNvPr>
@@ -26076,7 +25803,7 @@
           <p:cNvPr id="33" name="audit-a">
             <a:extLst>
               <a:ext uri="{FF2B5EF4-FFF2-40B4-BE49-F238E27FC236}">
-                <a16:creationId xmlns:a16="http://schemas.microsoft.com/office/drawing/2014/main" id="{7F5053F6-F3F0-AB82-A589-381F2DBBD8D8}"/>
+                <a16:creationId xmlns:a16="http://schemas.microsoft.com/office/drawing/2014/main" id="{4AE3432C-8565-DDC7-575B-BEFDB5715762}"/>
               </a:ext>
             </a:extLst>
           </p:cNvPr>
@@ -26118,7 +25845,7 @@
           <p:cNvPr id="34" name="audit">
             <a:extLst>
               <a:ext uri="{FF2B5EF4-FFF2-40B4-BE49-F238E27FC236}">
-                <a16:creationId xmlns:a16="http://schemas.microsoft.com/office/drawing/2014/main" id="{0B09129F-6FB9-0B3A-2293-9AD18F6CB2CE}"/>
+                <a16:creationId xmlns:a16="http://schemas.microsoft.com/office/drawing/2014/main" id="{4A88956D-081D-7C21-E397-C1AF32A51841}"/>
               </a:ext>
             </a:extLst>
           </p:cNvPr>
@@ -26172,7 +25899,7 @@
           <p:cNvPr id="35" name="audit-k">
             <a:extLst>
               <a:ext uri="{FF2B5EF4-FFF2-40B4-BE49-F238E27FC236}">
-                <a16:creationId xmlns:a16="http://schemas.microsoft.com/office/drawing/2014/main" id="{E0647DD1-41FB-B9C1-B008-FC7E60187FB8}"/>
+                <a16:creationId xmlns:a16="http://schemas.microsoft.com/office/drawing/2014/main" id="{FD990ADA-F93E-E12E-376C-3521AAF7CF59}"/>
               </a:ext>
             </a:extLst>
           </p:cNvPr>
@@ -26218,7 +25945,7 @@
           <p:cNvPr id="36" name="audit-main">
             <a:extLst>
               <a:ext uri="{FF2B5EF4-FFF2-40B4-BE49-F238E27FC236}">
-                <a16:creationId xmlns:a16="http://schemas.microsoft.com/office/drawing/2014/main" id="{D7A90075-90BD-FF8D-344A-399F544CB837}"/>
+                <a16:creationId xmlns:a16="http://schemas.microsoft.com/office/drawing/2014/main" id="{05BBDE2D-B214-C266-9A25-F2E31F2062C2}"/>
               </a:ext>
             </a:extLst>
           </p:cNvPr>
@@ -26264,7 +25991,7 @@
           <p:cNvPr id="37" name="audit-dot-0">
             <a:extLst>
               <a:ext uri="{FF2B5EF4-FFF2-40B4-BE49-F238E27FC236}">
-                <a16:creationId xmlns:a16="http://schemas.microsoft.com/office/drawing/2014/main" id="{82BA2033-8F9B-1707-4DE0-65D89EF9AC1A}"/>
+                <a16:creationId xmlns:a16="http://schemas.microsoft.com/office/drawing/2014/main" id="{9DCF87C9-2D91-8DA1-D330-88A29D6B59CB}"/>
               </a:ext>
             </a:extLst>
           </p:cNvPr>
@@ -26318,7 +26045,7 @@
           <p:cNvPr id="38" name="audit-q-0">
             <a:extLst>
               <a:ext uri="{FF2B5EF4-FFF2-40B4-BE49-F238E27FC236}">
-                <a16:creationId xmlns:a16="http://schemas.microsoft.com/office/drawing/2014/main" id="{C1AED0C7-417C-8E00-16BE-5EE38F457250}"/>
+                <a16:creationId xmlns:a16="http://schemas.microsoft.com/office/drawing/2014/main" id="{7351A2DF-2E25-CBF8-FC15-6A2AA69E6691}"/>
               </a:ext>
             </a:extLst>
           </p:cNvPr>
@@ -26364,7 +26091,7 @@
           <p:cNvPr id="39" name="audit-dot-1">
             <a:extLst>
               <a:ext uri="{FF2B5EF4-FFF2-40B4-BE49-F238E27FC236}">
-                <a16:creationId xmlns:a16="http://schemas.microsoft.com/office/drawing/2014/main" id="{9B0BCF87-9462-A742-E356-BF68AF696EAF}"/>
+                <a16:creationId xmlns:a16="http://schemas.microsoft.com/office/drawing/2014/main" id="{23B194C5-9972-FADB-F340-E0E0CA28A156}"/>
               </a:ext>
             </a:extLst>
           </p:cNvPr>
@@ -26418,7 +26145,7 @@
           <p:cNvPr id="40" name="audit-q-1">
             <a:extLst>
               <a:ext uri="{FF2B5EF4-FFF2-40B4-BE49-F238E27FC236}">
-                <a16:creationId xmlns:a16="http://schemas.microsoft.com/office/drawing/2014/main" id="{C14D0ABA-B7F9-2F9E-0AE9-B2050EBA8667}"/>
+                <a16:creationId xmlns:a16="http://schemas.microsoft.com/office/drawing/2014/main" id="{D97AD926-61DC-A49E-F7FC-B6BBF3011901}"/>
               </a:ext>
             </a:extLst>
           </p:cNvPr>
@@ -26464,7 +26191,7 @@
           <p:cNvPr id="41" name="audit-dot-2">
             <a:extLst>
               <a:ext uri="{FF2B5EF4-FFF2-40B4-BE49-F238E27FC236}">
-                <a16:creationId xmlns:a16="http://schemas.microsoft.com/office/drawing/2014/main" id="{F3173178-A73D-623B-9D2A-AAFF54C4AAB7}"/>
+                <a16:creationId xmlns:a16="http://schemas.microsoft.com/office/drawing/2014/main" id="{591F4BDA-A312-C435-B5D7-6FA78D11C8F3}"/>
               </a:ext>
             </a:extLst>
           </p:cNvPr>
@@ -26518,7 +26245,7 @@
           <p:cNvPr id="42" name="audit-q-2">
             <a:extLst>
               <a:ext uri="{FF2B5EF4-FFF2-40B4-BE49-F238E27FC236}">
-                <a16:creationId xmlns:a16="http://schemas.microsoft.com/office/drawing/2014/main" id="{C7CBEBCD-05AE-4500-D1C2-66FAA10FE69D}"/>
+                <a16:creationId xmlns:a16="http://schemas.microsoft.com/office/drawing/2014/main" id="{9F72DFFE-36C5-7185-80D9-EEFEBBCF18CB}"/>
               </a:ext>
             </a:extLst>
           </p:cNvPr>
@@ -26564,7 +26291,7 @@
           <p:cNvPr id="43" name="question">
             <a:extLst>
               <a:ext uri="{FF2B5EF4-FFF2-40B4-BE49-F238E27FC236}">
-                <a16:creationId xmlns:a16="http://schemas.microsoft.com/office/drawing/2014/main" id="{A5C5EF8F-0B93-EC9E-B249-A05A5C354867}"/>
+                <a16:creationId xmlns:a16="http://schemas.microsoft.com/office/drawing/2014/main" id="{768AA222-13D3-0DA9-730D-3F7CB66E23F3}"/>
               </a:ext>
             </a:extLst>
           </p:cNvPr>
@@ -26618,7 +26345,7 @@
           <p:cNvPr id="44" name="question-t">
             <a:extLst>
               <a:ext uri="{FF2B5EF4-FFF2-40B4-BE49-F238E27FC236}">
-                <a16:creationId xmlns:a16="http://schemas.microsoft.com/office/drawing/2014/main" id="{5A2BF2F8-DFD1-773F-FE23-8C2FE3AF5058}"/>
+                <a16:creationId xmlns:a16="http://schemas.microsoft.com/office/drawing/2014/main" id="{C9909FA4-6C90-DEC2-7900-8D5548BB776E}"/>
               </a:ext>
             </a:extLst>
           </p:cNvPr>
@@ -26665,7 +26392,7 @@
             <a:hlinkClick r:id="rId4"/>
             <a:extLst>
               <a:ext uri="{FF2B5EF4-FFF2-40B4-BE49-F238E27FC236}">
-                <a16:creationId xmlns:a16="http://schemas.microsoft.com/office/drawing/2014/main" id="{9823CD48-D5ED-0213-ECAC-2E894C620607}"/>
+                <a16:creationId xmlns:a16="http://schemas.microsoft.com/office/drawing/2014/main" id="{8C47F439-68F0-41F7-BD37-31E486EC700F}"/>
               </a:ext>
             </a:extLst>
           </p:cNvPr>
@@ -26726,7 +26453,7 @@
     </p:spTree>
     <p:extLst>
       <p:ext uri="{BB962C8B-B14F-4D97-AF65-F5344CB8AC3E}">
-        <p14:creationId xmlns:p14="http://schemas.microsoft.com/office/powerpoint/2010/main" val="521709048"/>
+        <p14:creationId xmlns:p14="http://schemas.microsoft.com/office/powerpoint/2010/main" val="893128480"/>
       </p:ext>
     </p:extLst>
   </p:cSld>
@@ -28249,7 +27976,7 @@
           <p:cNvPr id="2" name="bg">
             <a:extLst>
               <a:ext uri="{FF2B5EF4-FFF2-40B4-BE49-F238E27FC236}">
-                <a16:creationId xmlns:a16="http://schemas.microsoft.com/office/drawing/2014/main" id="{B0AC547F-DE9D-6F4E-D588-607EDD90BD50}"/>
+                <a16:creationId xmlns:a16="http://schemas.microsoft.com/office/drawing/2014/main" id="{11F86B58-8D84-CCC0-8174-BA2B6603E558}"/>
               </a:ext>
             </a:extLst>
           </p:cNvPr>
@@ -28310,7 +28037,7 @@
           <p:cNvPr id="3" name="rail">
             <a:extLst>
               <a:ext uri="{FF2B5EF4-FFF2-40B4-BE49-F238E27FC236}">
-                <a16:creationId xmlns:a16="http://schemas.microsoft.com/office/drawing/2014/main" id="{9D717710-CFB6-C2CF-EA15-98F585816382}"/>
+                <a16:creationId xmlns:a16="http://schemas.microsoft.com/office/drawing/2014/main" id="{80A44925-5B92-FD1D-7072-50AA6ECEE425}"/>
               </a:ext>
             </a:extLst>
           </p:cNvPr>
@@ -28371,7 +28098,7 @@
           <p:cNvPr id="4" name="top-rule">
             <a:extLst>
               <a:ext uri="{FF2B5EF4-FFF2-40B4-BE49-F238E27FC236}">
-                <a16:creationId xmlns:a16="http://schemas.microsoft.com/office/drawing/2014/main" id="{CFD405DC-4DE0-79B7-9F72-4FC6376770BC}"/>
+                <a16:creationId xmlns:a16="http://schemas.microsoft.com/office/drawing/2014/main" id="{05AC055F-10F4-7885-41B5-EDAD6D658EA0}"/>
               </a:ext>
             </a:extLst>
           </p:cNvPr>
@@ -28412,7 +28139,7 @@
           <p:cNvPr id="5" name="section">
             <a:extLst>
               <a:ext uri="{FF2B5EF4-FFF2-40B4-BE49-F238E27FC236}">
-                <a16:creationId xmlns:a16="http://schemas.microsoft.com/office/drawing/2014/main" id="{44B7FA12-3341-E7B3-92C1-26678BC71776}"/>
+                <a16:creationId xmlns:a16="http://schemas.microsoft.com/office/drawing/2014/main" id="{3F24199B-5E37-5604-7887-8167B2B81DDF}"/>
               </a:ext>
             </a:extLst>
           </p:cNvPr>
@@ -28458,7 +28185,7 @@
           <p:cNvPr id="6" name="num">
             <a:extLst>
               <a:ext uri="{FF2B5EF4-FFF2-40B4-BE49-F238E27FC236}">
-                <a16:creationId xmlns:a16="http://schemas.microsoft.com/office/drawing/2014/main" id="{48B8F9B8-0987-D2D4-4113-C3F99CE1C136}"/>
+                <a16:creationId xmlns:a16="http://schemas.microsoft.com/office/drawing/2014/main" id="{4381A896-3612-2DE2-875D-537B19AF24EB}"/>
               </a:ext>
             </a:extLst>
           </p:cNvPr>
@@ -28504,7 +28231,7 @@
           <p:cNvPr id="7" name="footer">
             <a:extLst>
               <a:ext uri="{FF2B5EF4-FFF2-40B4-BE49-F238E27FC236}">
-                <a16:creationId xmlns:a16="http://schemas.microsoft.com/office/drawing/2014/main" id="{E31C49B3-59C7-67A9-0E52-966A5FC565A2}"/>
+                <a16:creationId xmlns:a16="http://schemas.microsoft.com/office/drawing/2014/main" id="{E202BD29-BDEF-9568-E1DE-5B681E9C003F}"/>
               </a:ext>
             </a:extLst>
           </p:cNvPr>
@@ -28550,7 +28277,7 @@
           <p:cNvPr id="8" name="student">
             <a:extLst>
               <a:ext uri="{FF2B5EF4-FFF2-40B4-BE49-F238E27FC236}">
-                <a16:creationId xmlns:a16="http://schemas.microsoft.com/office/drawing/2014/main" id="{CAF7DFEC-10D6-FA5E-1E02-3397464E7B7F}"/>
+                <a16:creationId xmlns:a16="http://schemas.microsoft.com/office/drawing/2014/main" id="{D2FB1BAF-5FC8-D06D-FF3A-8E24EE7D8AB1}"/>
               </a:ext>
             </a:extLst>
           </p:cNvPr>
@@ -28596,7 +28323,7 @@
           <p:cNvPr id="10" name="图片 9">
             <a:extLst>
               <a:ext uri="{FF2B5EF4-FFF2-40B4-BE49-F238E27FC236}">
-                <a16:creationId xmlns:a16="http://schemas.microsoft.com/office/drawing/2014/main" id="{739EDAC9-032D-72A4-7C2B-5616E7DB6BF3}"/>
+                <a16:creationId xmlns:a16="http://schemas.microsoft.com/office/drawing/2014/main" id="{1F466F06-7CD5-07E7-D49E-20ABC20D6A50}"/>
               </a:ext>
             </a:extLst>
           </p:cNvPr>
@@ -28632,7 +28359,7 @@
           <p:cNvPr id="11" name="title">
             <a:extLst>
               <a:ext uri="{FF2B5EF4-FFF2-40B4-BE49-F238E27FC236}">
-                <a16:creationId xmlns:a16="http://schemas.microsoft.com/office/drawing/2014/main" id="{8F700B45-63FF-CEA0-D7E8-0881E2AD71E4}"/>
+                <a16:creationId xmlns:a16="http://schemas.microsoft.com/office/drawing/2014/main" id="{06CC1A5B-E538-A2A1-E460-D949E424F9AC}"/>
               </a:ext>
             </a:extLst>
           </p:cNvPr>
@@ -28678,7 +28405,7 @@
           <p:cNvPr id="12" name="subtitle">
             <a:extLst>
               <a:ext uri="{FF2B5EF4-FFF2-40B4-BE49-F238E27FC236}">
-                <a16:creationId xmlns:a16="http://schemas.microsoft.com/office/drawing/2014/main" id="{2B98875E-87F2-ED02-6D67-238F88E3F2FF}"/>
+                <a16:creationId xmlns:a16="http://schemas.microsoft.com/office/drawing/2014/main" id="{4E4ED84B-2238-F637-1B78-6EC4AE469552}"/>
               </a:ext>
             </a:extLst>
           </p:cNvPr>
@@ -28724,7 +28451,7 @@
           <p:cNvPr id="13" name="scorebox">
             <a:extLst>
               <a:ext uri="{FF2B5EF4-FFF2-40B4-BE49-F238E27FC236}">
-                <a16:creationId xmlns:a16="http://schemas.microsoft.com/office/drawing/2014/main" id="{3826CBBF-38D5-83DE-BCC6-39D6D553B612}"/>
+                <a16:creationId xmlns:a16="http://schemas.microsoft.com/office/drawing/2014/main" id="{9A4F2AF3-E062-B728-4D03-4CB724B60B54}"/>
               </a:ext>
             </a:extLst>
           </p:cNvPr>
@@ -28778,7 +28505,7 @@
           <p:cNvPr id="14" name="score-k">
             <a:extLst>
               <a:ext uri="{FF2B5EF4-FFF2-40B4-BE49-F238E27FC236}">
-                <a16:creationId xmlns:a16="http://schemas.microsoft.com/office/drawing/2014/main" id="{57B4B23A-44B6-1D8E-EE4C-12CA6418CBAE}"/>
+                <a16:creationId xmlns:a16="http://schemas.microsoft.com/office/drawing/2014/main" id="{DF09970A-6910-F8B2-268B-4E2898F53544}"/>
               </a:ext>
             </a:extLst>
           </p:cNvPr>
@@ -28824,7 +28551,7 @@
           <p:cNvPr id="15" name="score-big">
             <a:extLst>
               <a:ext uri="{FF2B5EF4-FFF2-40B4-BE49-F238E27FC236}">
-                <a16:creationId xmlns:a16="http://schemas.microsoft.com/office/drawing/2014/main" id="{170ACB95-CC61-7785-1610-0BE0EDB53978}"/>
+                <a16:creationId xmlns:a16="http://schemas.microsoft.com/office/drawing/2014/main" id="{99FE3DC1-B189-C7C1-1880-885E75D2EC54}"/>
               </a:ext>
             </a:extLst>
           </p:cNvPr>
@@ -28870,7 +28597,7 @@
           <p:cNvPr id="16" name="score-small">
             <a:extLst>
               <a:ext uri="{FF2B5EF4-FFF2-40B4-BE49-F238E27FC236}">
-                <a16:creationId xmlns:a16="http://schemas.microsoft.com/office/drawing/2014/main" id="{2C76355E-76D9-962B-CF9F-25BD05671135}"/>
+                <a16:creationId xmlns:a16="http://schemas.microsoft.com/office/drawing/2014/main" id="{B6F5B4A8-181B-3DA9-7C06-ED986F99F0F8}"/>
               </a:ext>
             </a:extLst>
           </p:cNvPr>
@@ -28916,7 +28643,7 @@
           <p:cNvPr id="17" name="gap-arrow">
             <a:extLst>
               <a:ext uri="{FF2B5EF4-FFF2-40B4-BE49-F238E27FC236}">
-                <a16:creationId xmlns:a16="http://schemas.microsoft.com/office/drawing/2014/main" id="{25C0B579-9453-99AE-C1C8-402635D7EACD}"/>
+                <a16:creationId xmlns:a16="http://schemas.microsoft.com/office/drawing/2014/main" id="{E202D50A-BFB4-3668-AEF7-ADA4CE65A284}"/>
               </a:ext>
             </a:extLst>
           </p:cNvPr>
@@ -28958,7 +28685,7 @@
           <p:cNvPr id="18" name="claimbox">
             <a:extLst>
               <a:ext uri="{FF2B5EF4-FFF2-40B4-BE49-F238E27FC236}">
-                <a16:creationId xmlns:a16="http://schemas.microsoft.com/office/drawing/2014/main" id="{722A365D-57A3-96E3-6C57-561F3DF30636}"/>
+                <a16:creationId xmlns:a16="http://schemas.microsoft.com/office/drawing/2014/main" id="{3C291CE5-C699-59A1-7B8D-CAFDA1A0559E}"/>
               </a:ext>
             </a:extLst>
           </p:cNvPr>
@@ -29012,7 +28739,7 @@
           <p:cNvPr id="19" name="claim-k">
             <a:extLst>
               <a:ext uri="{FF2B5EF4-FFF2-40B4-BE49-F238E27FC236}">
-                <a16:creationId xmlns:a16="http://schemas.microsoft.com/office/drawing/2014/main" id="{DC5B6C0F-229E-2B94-DB1D-E9F531B4EE95}"/>
+                <a16:creationId xmlns:a16="http://schemas.microsoft.com/office/drawing/2014/main" id="{5ADC8324-79D1-C972-6F59-AFA5D4D4220A}"/>
               </a:ext>
             </a:extLst>
           </p:cNvPr>
@@ -29058,7 +28785,7 @@
           <p:cNvPr id="20" name="claim-f">
             <a:extLst>
               <a:ext uri="{FF2B5EF4-FFF2-40B4-BE49-F238E27FC236}">
-                <a16:creationId xmlns:a16="http://schemas.microsoft.com/office/drawing/2014/main" id="{C150256A-243D-6C34-3CC5-7A390A30B048}"/>
+                <a16:creationId xmlns:a16="http://schemas.microsoft.com/office/drawing/2014/main" id="{8201747C-229F-5F9E-5BAC-13B770AB11BE}"/>
               </a:ext>
             </a:extLst>
           </p:cNvPr>
@@ -29104,7 +28831,7 @@
           <p:cNvPr id="21" name="claim-e">
             <a:extLst>
               <a:ext uri="{FF2B5EF4-FFF2-40B4-BE49-F238E27FC236}">
-                <a16:creationId xmlns:a16="http://schemas.microsoft.com/office/drawing/2014/main" id="{7794552F-D7EC-B49E-F9A2-83E505EAF95F}"/>
+                <a16:creationId xmlns:a16="http://schemas.microsoft.com/office/drawing/2014/main" id="{CFD38898-2E45-EE01-AAD1-908BF8CB4D2F}"/>
               </a:ext>
             </a:extLst>
           </p:cNvPr>
@@ -29151,7 +28878,7 @@
           <p:cNvPr id="22" name="tag-0">
             <a:extLst>
               <a:ext uri="{FF2B5EF4-FFF2-40B4-BE49-F238E27FC236}">
-                <a16:creationId xmlns:a16="http://schemas.microsoft.com/office/drawing/2014/main" id="{D90C6908-C846-B403-AA78-08F82E6141D7}"/>
+                <a16:creationId xmlns:a16="http://schemas.microsoft.com/office/drawing/2014/main" id="{32F6FE1D-18B5-2B0A-E080-595FA5415AEA}"/>
               </a:ext>
             </a:extLst>
           </p:cNvPr>
@@ -29219,7 +28946,7 @@
           <p:cNvPr id="23" name="tag-1">
             <a:extLst>
               <a:ext uri="{FF2B5EF4-FFF2-40B4-BE49-F238E27FC236}">
-                <a16:creationId xmlns:a16="http://schemas.microsoft.com/office/drawing/2014/main" id="{27FCEC31-A428-CEB9-EF88-A9671AD1C7D7}"/>
+                <a16:creationId xmlns:a16="http://schemas.microsoft.com/office/drawing/2014/main" id="{1659157F-8273-39B1-E6AE-B583E1258C86}"/>
               </a:ext>
             </a:extLst>
           </p:cNvPr>
@@ -29287,7 +29014,7 @@
           <p:cNvPr id="24" name="tag-2">
             <a:extLst>
               <a:ext uri="{FF2B5EF4-FFF2-40B4-BE49-F238E27FC236}">
-                <a16:creationId xmlns:a16="http://schemas.microsoft.com/office/drawing/2014/main" id="{BF6F8D14-8E85-EE25-2960-54367FF75670}"/>
+                <a16:creationId xmlns:a16="http://schemas.microsoft.com/office/drawing/2014/main" id="{DA8C0301-C0C2-3908-A49F-E2BDB0BA67FF}"/>
               </a:ext>
             </a:extLst>
           </p:cNvPr>
@@ -29355,7 +29082,7 @@
           <p:cNvPr id="25" name="tag-3">
             <a:extLst>
               <a:ext uri="{FF2B5EF4-FFF2-40B4-BE49-F238E27FC236}">
-                <a16:creationId xmlns:a16="http://schemas.microsoft.com/office/drawing/2014/main" id="{AB9167EB-A004-B3EE-5B36-A73846D11E97}"/>
+                <a16:creationId xmlns:a16="http://schemas.microsoft.com/office/drawing/2014/main" id="{7E7D6DD1-7DAF-0ADD-BAAC-FB15E2CECEC4}"/>
               </a:ext>
             </a:extLst>
           </p:cNvPr>
@@ -29424,7 +29151,7 @@
             <a:hlinkClick r:id="rId4"/>
             <a:extLst>
               <a:ext uri="{FF2B5EF4-FFF2-40B4-BE49-F238E27FC236}">
-                <a16:creationId xmlns:a16="http://schemas.microsoft.com/office/drawing/2014/main" id="{EA5541D6-E2F0-B43A-76E6-ACF0AF061E78}"/>
+                <a16:creationId xmlns:a16="http://schemas.microsoft.com/office/drawing/2014/main" id="{FA535D2D-AD49-E63B-084F-033363AF1243}"/>
               </a:ext>
             </a:extLst>
           </p:cNvPr>
@@ -29485,7 +29212,7 @@
     </p:spTree>
     <p:extLst>
       <p:ext uri="{BB962C8B-B14F-4D97-AF65-F5344CB8AC3E}">
-        <p14:creationId xmlns:p14="http://schemas.microsoft.com/office/powerpoint/2010/main" val="1907752704"/>
+        <p14:creationId xmlns:p14="http://schemas.microsoft.com/office/powerpoint/2010/main" val="1442815769"/>
       </p:ext>
     </p:extLst>
   </p:cSld>
@@ -29529,7 +29256,7 @@
           <p:cNvPr id="2" name="bg">
             <a:extLst>
               <a:ext uri="{FF2B5EF4-FFF2-40B4-BE49-F238E27FC236}">
-                <a16:creationId xmlns:a16="http://schemas.microsoft.com/office/drawing/2014/main" id="{FC74043F-3ACA-73A8-4137-10D0B6F76C4B}"/>
+                <a16:creationId xmlns:a16="http://schemas.microsoft.com/office/drawing/2014/main" id="{08CE09BE-35DD-F437-AD25-8CA91B0FFEE7}"/>
               </a:ext>
             </a:extLst>
           </p:cNvPr>
@@ -29590,7 +29317,7 @@
           <p:cNvPr id="3" name="rail">
             <a:extLst>
               <a:ext uri="{FF2B5EF4-FFF2-40B4-BE49-F238E27FC236}">
-                <a16:creationId xmlns:a16="http://schemas.microsoft.com/office/drawing/2014/main" id="{0724AC15-B6E9-5B98-CE64-592CA6AA4DD6}"/>
+                <a16:creationId xmlns:a16="http://schemas.microsoft.com/office/drawing/2014/main" id="{209FCF22-ACEF-D8AB-2859-89D6ADE5B8F4}"/>
               </a:ext>
             </a:extLst>
           </p:cNvPr>
@@ -29651,7 +29378,7 @@
           <p:cNvPr id="4" name="top-rule">
             <a:extLst>
               <a:ext uri="{FF2B5EF4-FFF2-40B4-BE49-F238E27FC236}">
-                <a16:creationId xmlns:a16="http://schemas.microsoft.com/office/drawing/2014/main" id="{795915E5-FB41-33E7-C08E-62F2C41D15D5}"/>
+                <a16:creationId xmlns:a16="http://schemas.microsoft.com/office/drawing/2014/main" id="{238720E6-8223-BB31-9B9C-189992782C77}"/>
               </a:ext>
             </a:extLst>
           </p:cNvPr>
@@ -29692,7 +29419,7 @@
           <p:cNvPr id="5" name="section">
             <a:extLst>
               <a:ext uri="{FF2B5EF4-FFF2-40B4-BE49-F238E27FC236}">
-                <a16:creationId xmlns:a16="http://schemas.microsoft.com/office/drawing/2014/main" id="{59EAE02B-5BFB-9429-9675-5F1AA5273F19}"/>
+                <a16:creationId xmlns:a16="http://schemas.microsoft.com/office/drawing/2014/main" id="{0866EFE7-4B1A-150B-55A5-1DE7F5F5D9D4}"/>
               </a:ext>
             </a:extLst>
           </p:cNvPr>
@@ -29738,7 +29465,7 @@
           <p:cNvPr id="6" name="num">
             <a:extLst>
               <a:ext uri="{FF2B5EF4-FFF2-40B4-BE49-F238E27FC236}">
-                <a16:creationId xmlns:a16="http://schemas.microsoft.com/office/drawing/2014/main" id="{400C81DC-6C80-9FDE-C4EF-FFB79B8EB05F}"/>
+                <a16:creationId xmlns:a16="http://schemas.microsoft.com/office/drawing/2014/main" id="{011B7C95-992E-DF82-7ED4-3411F21ACE68}"/>
               </a:ext>
             </a:extLst>
           </p:cNvPr>
@@ -29784,7 +29511,7 @@
           <p:cNvPr id="7" name="footer">
             <a:extLst>
               <a:ext uri="{FF2B5EF4-FFF2-40B4-BE49-F238E27FC236}">
-                <a16:creationId xmlns:a16="http://schemas.microsoft.com/office/drawing/2014/main" id="{C35B57F3-ECEC-33C2-1433-12DF5A03C751}"/>
+                <a16:creationId xmlns:a16="http://schemas.microsoft.com/office/drawing/2014/main" id="{40ACB471-112D-3C6C-F0E7-BF78763A3A67}"/>
               </a:ext>
             </a:extLst>
           </p:cNvPr>
@@ -29830,7 +29557,7 @@
           <p:cNvPr id="8" name="student">
             <a:extLst>
               <a:ext uri="{FF2B5EF4-FFF2-40B4-BE49-F238E27FC236}">
-                <a16:creationId xmlns:a16="http://schemas.microsoft.com/office/drawing/2014/main" id="{6BC66A92-E59C-6DE8-BFA6-753F89426F2E}"/>
+                <a16:creationId xmlns:a16="http://schemas.microsoft.com/office/drawing/2014/main" id="{5B106733-054D-4308-829F-1A47AC0B55C9}"/>
               </a:ext>
             </a:extLst>
           </p:cNvPr>
@@ -29876,7 +29603,7 @@
           <p:cNvPr id="10" name="图片 9">
             <a:extLst>
               <a:ext uri="{FF2B5EF4-FFF2-40B4-BE49-F238E27FC236}">
-                <a16:creationId xmlns:a16="http://schemas.microsoft.com/office/drawing/2014/main" id="{99660A04-3C04-B9BD-2C84-5E2EE6F6DE9D}"/>
+                <a16:creationId xmlns:a16="http://schemas.microsoft.com/office/drawing/2014/main" id="{D06C5206-2F4B-7D08-C5CB-8C72CA6C22C0}"/>
               </a:ext>
             </a:extLst>
           </p:cNvPr>
@@ -29912,7 +29639,7 @@
           <p:cNvPr id="11" name="title">
             <a:extLst>
               <a:ext uri="{FF2B5EF4-FFF2-40B4-BE49-F238E27FC236}">
-                <a16:creationId xmlns:a16="http://schemas.microsoft.com/office/drawing/2014/main" id="{5535217F-C995-7C8A-D22C-F21EC440B99B}"/>
+                <a16:creationId xmlns:a16="http://schemas.microsoft.com/office/drawing/2014/main" id="{AE20A773-28B9-636A-73D6-0E2152CF95F5}"/>
               </a:ext>
             </a:extLst>
           </p:cNvPr>
@@ -29958,7 +29685,7 @@
           <p:cNvPr id="12" name="subtitle">
             <a:extLst>
               <a:ext uri="{FF2B5EF4-FFF2-40B4-BE49-F238E27FC236}">
-                <a16:creationId xmlns:a16="http://schemas.microsoft.com/office/drawing/2014/main" id="{397D1449-1B93-585C-177A-736E1F2FC70E}"/>
+                <a16:creationId xmlns:a16="http://schemas.microsoft.com/office/drawing/2014/main" id="{C20B531D-8071-BF53-374A-0CC8B4026180}"/>
               </a:ext>
             </a:extLst>
           </p:cNvPr>
@@ -30004,7 +29731,7 @@
           <p:cNvPr id="13" name="big">
             <a:extLst>
               <a:ext uri="{FF2B5EF4-FFF2-40B4-BE49-F238E27FC236}">
-                <a16:creationId xmlns:a16="http://schemas.microsoft.com/office/drawing/2014/main" id="{1F1F1CC8-A259-A351-51D8-0B2C64FE722D}"/>
+                <a16:creationId xmlns:a16="http://schemas.microsoft.com/office/drawing/2014/main" id="{35F22DE7-9071-3ABC-5D10-63404B2C37A1}"/>
               </a:ext>
             </a:extLst>
           </p:cNvPr>
@@ -30050,7 +29777,7 @@
           <p:cNvPr id="14" name="big-sub">
             <a:extLst>
               <a:ext uri="{FF2B5EF4-FFF2-40B4-BE49-F238E27FC236}">
-                <a16:creationId xmlns:a16="http://schemas.microsoft.com/office/drawing/2014/main" id="{14A77E1B-67C7-BB1C-7265-1F096C3D33DE}"/>
+                <a16:creationId xmlns:a16="http://schemas.microsoft.com/office/drawing/2014/main" id="{C1A5C067-0F61-ED51-0A71-273FC6F1CD16}"/>
               </a:ext>
             </a:extLst>
           </p:cNvPr>
@@ -30096,7 +29823,7 @@
           <p:cNvPr id="15" name="h-0">
             <a:extLst>
               <a:ext uri="{FF2B5EF4-FFF2-40B4-BE49-F238E27FC236}">
-                <a16:creationId xmlns:a16="http://schemas.microsoft.com/office/drawing/2014/main" id="{60F801E3-5407-6833-5201-1A8A6F0986E6}"/>
+                <a16:creationId xmlns:a16="http://schemas.microsoft.com/office/drawing/2014/main" id="{104AAFDA-F0B1-BD70-DE95-21AD203E6198}"/>
               </a:ext>
             </a:extLst>
           </p:cNvPr>
@@ -30164,7 +29891,7 @@
           <p:cNvPr id="16" name="v-0">
             <a:extLst>
               <a:ext uri="{FF2B5EF4-FFF2-40B4-BE49-F238E27FC236}">
-                <a16:creationId xmlns:a16="http://schemas.microsoft.com/office/drawing/2014/main" id="{9F1E8C93-6FA7-A268-9669-FEC0A6D3AF67}"/>
+                <a16:creationId xmlns:a16="http://schemas.microsoft.com/office/drawing/2014/main" id="{C3A34264-9695-4771-13D2-6898DA52D2CC}"/>
               </a:ext>
             </a:extLst>
           </p:cNvPr>
@@ -30232,7 +29959,7 @@
           <p:cNvPr id="17" name="h-1">
             <a:extLst>
               <a:ext uri="{FF2B5EF4-FFF2-40B4-BE49-F238E27FC236}">
-                <a16:creationId xmlns:a16="http://schemas.microsoft.com/office/drawing/2014/main" id="{E94F0625-162A-0517-E4CB-AFAF4A3C5422}"/>
+                <a16:creationId xmlns:a16="http://schemas.microsoft.com/office/drawing/2014/main" id="{51A9CE63-1ADC-E4BA-F651-4C7D3519BEB2}"/>
               </a:ext>
             </a:extLst>
           </p:cNvPr>
@@ -30300,7 +30027,7 @@
           <p:cNvPr id="18" name="v-1">
             <a:extLst>
               <a:ext uri="{FF2B5EF4-FFF2-40B4-BE49-F238E27FC236}">
-                <a16:creationId xmlns:a16="http://schemas.microsoft.com/office/drawing/2014/main" id="{CF11E5B2-B1E5-D8FE-C51C-0FE9ECF9FB5B}"/>
+                <a16:creationId xmlns:a16="http://schemas.microsoft.com/office/drawing/2014/main" id="{DE809314-88BB-B006-4EE3-1304F7899F5D}"/>
               </a:ext>
             </a:extLst>
           </p:cNvPr>
@@ -30368,7 +30095,7 @@
           <p:cNvPr id="19" name="h-2">
             <a:extLst>
               <a:ext uri="{FF2B5EF4-FFF2-40B4-BE49-F238E27FC236}">
-                <a16:creationId xmlns:a16="http://schemas.microsoft.com/office/drawing/2014/main" id="{4B72C64F-E863-F4F2-B434-8BEA9FCFAABF}"/>
+                <a16:creationId xmlns:a16="http://schemas.microsoft.com/office/drawing/2014/main" id="{28668210-44EA-CF97-E380-A435BE3E4EE5}"/>
               </a:ext>
             </a:extLst>
           </p:cNvPr>
@@ -30436,7 +30163,7 @@
           <p:cNvPr id="20" name="v-2">
             <a:extLst>
               <a:ext uri="{FF2B5EF4-FFF2-40B4-BE49-F238E27FC236}">
-                <a16:creationId xmlns:a16="http://schemas.microsoft.com/office/drawing/2014/main" id="{28625125-6F5B-D0A6-66EA-FC3840E40939}"/>
+                <a16:creationId xmlns:a16="http://schemas.microsoft.com/office/drawing/2014/main" id="{AEBBFF07-00D0-7603-2403-182E33903513}"/>
               </a:ext>
             </a:extLst>
           </p:cNvPr>
@@ -30504,7 +30231,7 @@
           <p:cNvPr id="21" name="h-3">
             <a:extLst>
               <a:ext uri="{FF2B5EF4-FFF2-40B4-BE49-F238E27FC236}">
-                <a16:creationId xmlns:a16="http://schemas.microsoft.com/office/drawing/2014/main" id="{33B7E221-34D0-C7C1-1B3B-E20C36C5E868}"/>
+                <a16:creationId xmlns:a16="http://schemas.microsoft.com/office/drawing/2014/main" id="{4260EF70-4CE1-ED61-AC88-BA604F608E4B}"/>
               </a:ext>
             </a:extLst>
           </p:cNvPr>
@@ -30572,7 +30299,7 @@
           <p:cNvPr id="22" name="v-3">
             <a:extLst>
               <a:ext uri="{FF2B5EF4-FFF2-40B4-BE49-F238E27FC236}">
-                <a16:creationId xmlns:a16="http://schemas.microsoft.com/office/drawing/2014/main" id="{9B60BA8A-C33B-CFDD-0C6E-31431D2BA27E}"/>
+                <a16:creationId xmlns:a16="http://schemas.microsoft.com/office/drawing/2014/main" id="{8E1DD485-3446-4634-1679-D7DA1684630E}"/>
               </a:ext>
             </a:extLst>
           </p:cNvPr>
@@ -30640,7 +30367,7 @@
           <p:cNvPr id="23" name="h-4">
             <a:extLst>
               <a:ext uri="{FF2B5EF4-FFF2-40B4-BE49-F238E27FC236}">
-                <a16:creationId xmlns:a16="http://schemas.microsoft.com/office/drawing/2014/main" id="{1C33ECD2-A66F-2FE7-1F00-9FB6AABCDA56}"/>
+                <a16:creationId xmlns:a16="http://schemas.microsoft.com/office/drawing/2014/main" id="{A8004D2A-9C7A-0393-9287-2351ED705F7F}"/>
               </a:ext>
             </a:extLst>
           </p:cNvPr>
@@ -30708,7 +30435,7 @@
           <p:cNvPr id="24" name="v-4">
             <a:extLst>
               <a:ext uri="{FF2B5EF4-FFF2-40B4-BE49-F238E27FC236}">
-                <a16:creationId xmlns:a16="http://schemas.microsoft.com/office/drawing/2014/main" id="{807C5E39-704A-914A-E1DF-3EFA67B3EE35}"/>
+                <a16:creationId xmlns:a16="http://schemas.microsoft.com/office/drawing/2014/main" id="{3B9097B2-1D63-AAED-86E2-67E1F86C34B7}"/>
               </a:ext>
             </a:extLst>
           </p:cNvPr>
@@ -30776,7 +30503,7 @@
           <p:cNvPr id="25" name="h-5">
             <a:extLst>
               <a:ext uri="{FF2B5EF4-FFF2-40B4-BE49-F238E27FC236}">
-                <a16:creationId xmlns:a16="http://schemas.microsoft.com/office/drawing/2014/main" id="{0FF3004C-CADA-D101-DC44-0117B4F03880}"/>
+                <a16:creationId xmlns:a16="http://schemas.microsoft.com/office/drawing/2014/main" id="{29C30374-33E1-0A03-A9A0-6ADAC5734B82}"/>
               </a:ext>
             </a:extLst>
           </p:cNvPr>
@@ -30844,7 +30571,7 @@
           <p:cNvPr id="26" name="v-5">
             <a:extLst>
               <a:ext uri="{FF2B5EF4-FFF2-40B4-BE49-F238E27FC236}">
-                <a16:creationId xmlns:a16="http://schemas.microsoft.com/office/drawing/2014/main" id="{1C7FD35B-E0CA-37AD-B556-7B632FE416DC}"/>
+                <a16:creationId xmlns:a16="http://schemas.microsoft.com/office/drawing/2014/main" id="{AE6806ED-2507-CEB1-B3A1-7A116CAF4DA2}"/>
               </a:ext>
             </a:extLst>
           </p:cNvPr>
@@ -30912,7 +30639,7 @@
           <p:cNvPr id="27" name="path">
             <a:extLst>
               <a:ext uri="{FF2B5EF4-FFF2-40B4-BE49-F238E27FC236}">
-                <a16:creationId xmlns:a16="http://schemas.microsoft.com/office/drawing/2014/main" id="{A779751E-4BA9-8941-F9A6-5A65B6A71BEA}"/>
+                <a16:creationId xmlns:a16="http://schemas.microsoft.com/office/drawing/2014/main" id="{5F59D141-CE6D-D372-E490-6D2D23920114}"/>
               </a:ext>
             </a:extLst>
           </p:cNvPr>
@@ -30966,7 +30693,7 @@
           <p:cNvPr id="28" name="path-title">
             <a:extLst>
               <a:ext uri="{FF2B5EF4-FFF2-40B4-BE49-F238E27FC236}">
-                <a16:creationId xmlns:a16="http://schemas.microsoft.com/office/drawing/2014/main" id="{6CAFE450-F2C8-6A69-8308-B95750DBCEDA}"/>
+                <a16:creationId xmlns:a16="http://schemas.microsoft.com/office/drawing/2014/main" id="{BF34DC6E-A32A-D527-9C9A-628A88E1F5E5}"/>
               </a:ext>
             </a:extLst>
           </p:cNvPr>
@@ -31012,7 +30739,7 @@
           <p:cNvPr id="29" name="path-text">
             <a:extLst>
               <a:ext uri="{FF2B5EF4-FFF2-40B4-BE49-F238E27FC236}">
-                <a16:creationId xmlns:a16="http://schemas.microsoft.com/office/drawing/2014/main" id="{593E2039-E635-233A-59FA-BF8FC00778F7}"/>
+                <a16:creationId xmlns:a16="http://schemas.microsoft.com/office/drawing/2014/main" id="{6D7D1B05-8CF7-7413-8055-B235A8E74D15}"/>
               </a:ext>
             </a:extLst>
           </p:cNvPr>
@@ -31058,7 +30785,7 @@
           <p:cNvPr id="30" name="why">
             <a:extLst>
               <a:ext uri="{FF2B5EF4-FFF2-40B4-BE49-F238E27FC236}">
-                <a16:creationId xmlns:a16="http://schemas.microsoft.com/office/drawing/2014/main" id="{6BA531F3-2D87-9E51-5683-FD8D5CDF7FE4}"/>
+                <a16:creationId xmlns:a16="http://schemas.microsoft.com/office/drawing/2014/main" id="{B37592E3-A2AB-1096-F095-F2E959B57BFE}"/>
               </a:ext>
             </a:extLst>
           </p:cNvPr>
@@ -31112,7 +30839,7 @@
           <p:cNvPr id="31" name="why-t">
             <a:extLst>
               <a:ext uri="{FF2B5EF4-FFF2-40B4-BE49-F238E27FC236}">
-                <a16:creationId xmlns:a16="http://schemas.microsoft.com/office/drawing/2014/main" id="{F7290DC6-F735-05C8-A4DC-772F14D54FB2}"/>
+                <a16:creationId xmlns:a16="http://schemas.microsoft.com/office/drawing/2014/main" id="{823B1CD5-F390-9705-9059-785E58B79EB6}"/>
               </a:ext>
             </a:extLst>
           </p:cNvPr>
@@ -31159,7 +30886,7 @@
             <a:hlinkClick r:id="rId4"/>
             <a:extLst>
               <a:ext uri="{FF2B5EF4-FFF2-40B4-BE49-F238E27FC236}">
-                <a16:creationId xmlns:a16="http://schemas.microsoft.com/office/drawing/2014/main" id="{0AD0101C-2DB5-4610-06E6-123466EA8849}"/>
+                <a16:creationId xmlns:a16="http://schemas.microsoft.com/office/drawing/2014/main" id="{B8A8DC1F-44F5-3AB9-6786-0CC40434C844}"/>
               </a:ext>
             </a:extLst>
           </p:cNvPr>
@@ -31220,7 +30947,7 @@
     </p:spTree>
     <p:extLst>
       <p:ext uri="{BB962C8B-B14F-4D97-AF65-F5344CB8AC3E}">
-        <p14:creationId xmlns:p14="http://schemas.microsoft.com/office/powerpoint/2010/main" val="1577301529"/>
+        <p14:creationId xmlns:p14="http://schemas.microsoft.com/office/powerpoint/2010/main" val="677072376"/>
       </p:ext>
     </p:extLst>
   </p:cSld>
@@ -31264,7 +30991,7 @@
           <p:cNvPr id="2" name="bg">
             <a:extLst>
               <a:ext uri="{FF2B5EF4-FFF2-40B4-BE49-F238E27FC236}">
-                <a16:creationId xmlns:a16="http://schemas.microsoft.com/office/drawing/2014/main" id="{F0F305C7-15E1-8741-EF70-4AA7362FE931}"/>
+                <a16:creationId xmlns:a16="http://schemas.microsoft.com/office/drawing/2014/main" id="{02BF47D3-F7CA-4808-82C3-15C217F9DD05}"/>
               </a:ext>
             </a:extLst>
           </p:cNvPr>
@@ -31325,7 +31052,7 @@
           <p:cNvPr id="3" name="rail">
             <a:extLst>
               <a:ext uri="{FF2B5EF4-FFF2-40B4-BE49-F238E27FC236}">
-                <a16:creationId xmlns:a16="http://schemas.microsoft.com/office/drawing/2014/main" id="{3FD68292-944D-4905-4054-48DB6C794C80}"/>
+                <a16:creationId xmlns:a16="http://schemas.microsoft.com/office/drawing/2014/main" id="{CD3A1F8A-DB83-72DB-2152-6661BC4C858C}"/>
               </a:ext>
             </a:extLst>
           </p:cNvPr>
@@ -31386,7 +31113,7 @@
           <p:cNvPr id="4" name="top-rule">
             <a:extLst>
               <a:ext uri="{FF2B5EF4-FFF2-40B4-BE49-F238E27FC236}">
-                <a16:creationId xmlns:a16="http://schemas.microsoft.com/office/drawing/2014/main" id="{4283F2E8-AEDF-DD1E-4443-EA41CBDED202}"/>
+                <a16:creationId xmlns:a16="http://schemas.microsoft.com/office/drawing/2014/main" id="{9BC8E531-9783-249D-643E-E0AD7CAD0695}"/>
               </a:ext>
             </a:extLst>
           </p:cNvPr>
@@ -31427,7 +31154,7 @@
           <p:cNvPr id="5" name="section">
             <a:extLst>
               <a:ext uri="{FF2B5EF4-FFF2-40B4-BE49-F238E27FC236}">
-                <a16:creationId xmlns:a16="http://schemas.microsoft.com/office/drawing/2014/main" id="{6CFCD26C-E767-CEA6-0BEF-13F85AA3FC43}"/>
+                <a16:creationId xmlns:a16="http://schemas.microsoft.com/office/drawing/2014/main" id="{B7F68700-21A1-0CE0-C064-2AA8883BB6B2}"/>
               </a:ext>
             </a:extLst>
           </p:cNvPr>
@@ -31473,7 +31200,7 @@
           <p:cNvPr id="6" name="num">
             <a:extLst>
               <a:ext uri="{FF2B5EF4-FFF2-40B4-BE49-F238E27FC236}">
-                <a16:creationId xmlns:a16="http://schemas.microsoft.com/office/drawing/2014/main" id="{2B463113-E804-2091-B000-9A7597DEC86E}"/>
+                <a16:creationId xmlns:a16="http://schemas.microsoft.com/office/drawing/2014/main" id="{E688386F-4170-94D3-4D19-16D4CB2B4469}"/>
               </a:ext>
             </a:extLst>
           </p:cNvPr>
@@ -31519,7 +31246,7 @@
           <p:cNvPr id="7" name="footer">
             <a:extLst>
               <a:ext uri="{FF2B5EF4-FFF2-40B4-BE49-F238E27FC236}">
-                <a16:creationId xmlns:a16="http://schemas.microsoft.com/office/drawing/2014/main" id="{89B195D5-86F5-5EA4-021E-F76B3F12CB29}"/>
+                <a16:creationId xmlns:a16="http://schemas.microsoft.com/office/drawing/2014/main" id="{0969C212-665D-74A3-9D2A-5034CCEB77C7}"/>
               </a:ext>
             </a:extLst>
           </p:cNvPr>
@@ -31565,7 +31292,7 @@
           <p:cNvPr id="8" name="student">
             <a:extLst>
               <a:ext uri="{FF2B5EF4-FFF2-40B4-BE49-F238E27FC236}">
-                <a16:creationId xmlns:a16="http://schemas.microsoft.com/office/drawing/2014/main" id="{675C0F93-ED38-5F1C-DDE7-86B09B62CE68}"/>
+                <a16:creationId xmlns:a16="http://schemas.microsoft.com/office/drawing/2014/main" id="{9692EDA8-283F-7F4B-001A-CA0E670417A7}"/>
               </a:ext>
             </a:extLst>
           </p:cNvPr>
@@ -31611,7 +31338,7 @@
           <p:cNvPr id="10" name="图片 9">
             <a:extLst>
               <a:ext uri="{FF2B5EF4-FFF2-40B4-BE49-F238E27FC236}">
-                <a16:creationId xmlns:a16="http://schemas.microsoft.com/office/drawing/2014/main" id="{58BE0E0F-1DC3-E814-AF70-73A62B068DF0}"/>
+                <a16:creationId xmlns:a16="http://schemas.microsoft.com/office/drawing/2014/main" id="{BA2D2E3E-D882-3FBD-BF78-003347E5866E}"/>
               </a:ext>
             </a:extLst>
           </p:cNvPr>
@@ -31647,7 +31374,7 @@
           <p:cNvPr id="11" name="title">
             <a:extLst>
               <a:ext uri="{FF2B5EF4-FFF2-40B4-BE49-F238E27FC236}">
-                <a16:creationId xmlns:a16="http://schemas.microsoft.com/office/drawing/2014/main" id="{525124F2-FEE8-A3A2-9A6C-370C3DB67D10}"/>
+                <a16:creationId xmlns:a16="http://schemas.microsoft.com/office/drawing/2014/main" id="{45706D03-32FC-30CB-F4A6-E037428DB48B}"/>
               </a:ext>
             </a:extLst>
           </p:cNvPr>
@@ -31693,7 +31420,7 @@
           <p:cNvPr id="12" name="subtitle">
             <a:extLst>
               <a:ext uri="{FF2B5EF4-FFF2-40B4-BE49-F238E27FC236}">
-                <a16:creationId xmlns:a16="http://schemas.microsoft.com/office/drawing/2014/main" id="{CFE2FA97-A534-1E15-0DA3-E0C6858B9AF0}"/>
+                <a16:creationId xmlns:a16="http://schemas.microsoft.com/office/drawing/2014/main" id="{079A16EE-CFF6-B866-BEA1-FB167D81DEC3}"/>
               </a:ext>
             </a:extLst>
           </p:cNvPr>
@@ -31739,7 +31466,7 @@
           <p:cNvPr id="13" name="contract-core">
             <a:extLst>
               <a:ext uri="{FF2B5EF4-FFF2-40B4-BE49-F238E27FC236}">
-                <a16:creationId xmlns:a16="http://schemas.microsoft.com/office/drawing/2014/main" id="{88A27C51-5710-A53A-3C96-3BCBD049E7CA}"/>
+                <a16:creationId xmlns:a16="http://schemas.microsoft.com/office/drawing/2014/main" id="{6F386AA8-8681-2C29-C04E-D5022C584A0F}"/>
               </a:ext>
             </a:extLst>
           </p:cNvPr>
@@ -31793,7 +31520,7 @@
           <p:cNvPr id="14" name="contract-k">
             <a:extLst>
               <a:ext uri="{FF2B5EF4-FFF2-40B4-BE49-F238E27FC236}">
-                <a16:creationId xmlns:a16="http://schemas.microsoft.com/office/drawing/2014/main" id="{9BCBCE28-6ED0-0CFF-5304-24B22387D746}"/>
+                <a16:creationId xmlns:a16="http://schemas.microsoft.com/office/drawing/2014/main" id="{11A74510-AB5A-F032-1307-03C88D3071EA}"/>
               </a:ext>
             </a:extLst>
           </p:cNvPr>
@@ -31839,7 +31566,7 @@
           <p:cNvPr id="15" name="contract-f">
             <a:extLst>
               <a:ext uri="{FF2B5EF4-FFF2-40B4-BE49-F238E27FC236}">
-                <a16:creationId xmlns:a16="http://schemas.microsoft.com/office/drawing/2014/main" id="{0CD06127-E16C-979B-A8CD-723CB1999625}"/>
+                <a16:creationId xmlns:a16="http://schemas.microsoft.com/office/drawing/2014/main" id="{E0724817-5E4D-BBC5-61C0-557AFB828F18}"/>
               </a:ext>
             </a:extLst>
           </p:cNvPr>
@@ -31885,7 +31612,7 @@
           <p:cNvPr id="16" name="contract-s">
             <a:extLst>
               <a:ext uri="{FF2B5EF4-FFF2-40B4-BE49-F238E27FC236}">
-                <a16:creationId xmlns:a16="http://schemas.microsoft.com/office/drawing/2014/main" id="{8CE13BCD-800C-3A9D-70BC-8B261CE79755}"/>
+                <a16:creationId xmlns:a16="http://schemas.microsoft.com/office/drawing/2014/main" id="{5720AAD5-035E-2034-722C-291092643B7E}"/>
               </a:ext>
             </a:extLst>
           </p:cNvPr>
@@ -31931,7 +31658,7 @@
           <p:cNvPr id="17" name="contract-sep">
             <a:extLst>
               <a:ext uri="{FF2B5EF4-FFF2-40B4-BE49-F238E27FC236}">
-                <a16:creationId xmlns:a16="http://schemas.microsoft.com/office/drawing/2014/main" id="{1C9E415B-B093-B934-A3F9-821DB82B8B92}"/>
+                <a16:creationId xmlns:a16="http://schemas.microsoft.com/office/drawing/2014/main" id="{D5DD7D0F-04BB-6F52-D562-6F1B3D8C9948}"/>
               </a:ext>
             </a:extLst>
           </p:cNvPr>
@@ -31972,7 +31699,7 @@
           <p:cNvPr id="18" name="stage-0">
             <a:extLst>
               <a:ext uri="{FF2B5EF4-FFF2-40B4-BE49-F238E27FC236}">
-                <a16:creationId xmlns:a16="http://schemas.microsoft.com/office/drawing/2014/main" id="{E650A1F4-C468-3DA4-ABD0-7456671F9A3F}"/>
+                <a16:creationId xmlns:a16="http://schemas.microsoft.com/office/drawing/2014/main" id="{E0796EA7-CF3D-E492-4DFF-BFA3263F244F}"/>
               </a:ext>
             </a:extLst>
           </p:cNvPr>
@@ -32026,7 +31753,7 @@
           <p:cNvPr id="19" name="stage-band-0">
             <a:extLst>
               <a:ext uri="{FF2B5EF4-FFF2-40B4-BE49-F238E27FC236}">
-                <a16:creationId xmlns:a16="http://schemas.microsoft.com/office/drawing/2014/main" id="{C849764B-6689-B902-9778-F587B840F05C}"/>
+                <a16:creationId xmlns:a16="http://schemas.microsoft.com/office/drawing/2014/main" id="{DBE2CDF7-2893-2761-8795-611EDCE15DBE}"/>
               </a:ext>
             </a:extLst>
           </p:cNvPr>
@@ -32080,7 +31807,7 @@
           <p:cNvPr id="20" name="stage-num-0">
             <a:extLst>
               <a:ext uri="{FF2B5EF4-FFF2-40B4-BE49-F238E27FC236}">
-                <a16:creationId xmlns:a16="http://schemas.microsoft.com/office/drawing/2014/main" id="{42031A5C-512A-A4A0-F48E-DFC50F4B381F}"/>
+                <a16:creationId xmlns:a16="http://schemas.microsoft.com/office/drawing/2014/main" id="{DE8DF872-6BA1-F325-2FA9-3660C9D351BE}"/>
               </a:ext>
             </a:extLst>
           </p:cNvPr>
@@ -32126,7 +31853,7 @@
           <p:cNvPr id="21" name="stage-name-0">
             <a:extLst>
               <a:ext uri="{FF2B5EF4-FFF2-40B4-BE49-F238E27FC236}">
-                <a16:creationId xmlns:a16="http://schemas.microsoft.com/office/drawing/2014/main" id="{0ECE148E-D09D-04E7-FB73-0DDDB4056A4B}"/>
+                <a16:creationId xmlns:a16="http://schemas.microsoft.com/office/drawing/2014/main" id="{598C1A3B-F7C6-1D7D-B7F3-F289068C445E}"/>
               </a:ext>
             </a:extLst>
           </p:cNvPr>
@@ -32172,7 +31899,7 @@
           <p:cNvPr id="22" name="stage-admit-0">
             <a:extLst>
               <a:ext uri="{FF2B5EF4-FFF2-40B4-BE49-F238E27FC236}">
-                <a16:creationId xmlns:a16="http://schemas.microsoft.com/office/drawing/2014/main" id="{035787FE-8E6E-6DCC-026C-F6AAD7B73566}"/>
+                <a16:creationId xmlns:a16="http://schemas.microsoft.com/office/drawing/2014/main" id="{2ADD76F2-FFA9-5A28-EAE7-0849C4B03816}"/>
               </a:ext>
             </a:extLst>
           </p:cNvPr>
@@ -32218,7 +31945,7 @@
           <p:cNvPr id="23" name="stage-block-0">
             <a:extLst>
               <a:ext uri="{FF2B5EF4-FFF2-40B4-BE49-F238E27FC236}">
-                <a16:creationId xmlns:a16="http://schemas.microsoft.com/office/drawing/2014/main" id="{D7170585-85F4-297D-B082-6652D3DF9F23}"/>
+                <a16:creationId xmlns:a16="http://schemas.microsoft.com/office/drawing/2014/main" id="{1004EE98-285E-E832-D60E-99A00807447C}"/>
               </a:ext>
             </a:extLst>
           </p:cNvPr>
@@ -32264,7 +31991,7 @@
           <p:cNvPr id="24" name="stage-tie-0">
             <a:extLst>
               <a:ext uri="{FF2B5EF4-FFF2-40B4-BE49-F238E27FC236}">
-                <a16:creationId xmlns:a16="http://schemas.microsoft.com/office/drawing/2014/main" id="{4C79EE70-6EA3-0FE7-D8A8-4D6995601AD5}"/>
+                <a16:creationId xmlns:a16="http://schemas.microsoft.com/office/drawing/2014/main" id="{5B1BDB81-E84C-5020-FF0E-8A9C4BD06247}"/>
               </a:ext>
             </a:extLst>
           </p:cNvPr>
@@ -32305,7 +32032,7 @@
           <p:cNvPr id="25" name="stage-1">
             <a:extLst>
               <a:ext uri="{FF2B5EF4-FFF2-40B4-BE49-F238E27FC236}">
-                <a16:creationId xmlns:a16="http://schemas.microsoft.com/office/drawing/2014/main" id="{656C5286-E3BB-07F9-400F-8C933ADBE89F}"/>
+                <a16:creationId xmlns:a16="http://schemas.microsoft.com/office/drawing/2014/main" id="{3C183FAA-450C-7C75-E1B9-2FAF4FA6D052}"/>
               </a:ext>
             </a:extLst>
           </p:cNvPr>
@@ -32359,7 +32086,7 @@
           <p:cNvPr id="26" name="stage-band-1">
             <a:extLst>
               <a:ext uri="{FF2B5EF4-FFF2-40B4-BE49-F238E27FC236}">
-                <a16:creationId xmlns:a16="http://schemas.microsoft.com/office/drawing/2014/main" id="{F71E5140-1AA3-56BA-924D-85BE26A09658}"/>
+                <a16:creationId xmlns:a16="http://schemas.microsoft.com/office/drawing/2014/main" id="{DB2D122B-43D2-5CAD-D332-4808C397A455}"/>
               </a:ext>
             </a:extLst>
           </p:cNvPr>
@@ -32413,7 +32140,7 @@
           <p:cNvPr id="27" name="stage-num-1">
             <a:extLst>
               <a:ext uri="{FF2B5EF4-FFF2-40B4-BE49-F238E27FC236}">
-                <a16:creationId xmlns:a16="http://schemas.microsoft.com/office/drawing/2014/main" id="{6692C74D-FA9D-0E9D-CA1A-DF8BA2ED7D65}"/>
+                <a16:creationId xmlns:a16="http://schemas.microsoft.com/office/drawing/2014/main" id="{64961702-73EE-175B-BD15-39DD0BB3D7B8}"/>
               </a:ext>
             </a:extLst>
           </p:cNvPr>
@@ -32459,7 +32186,7 @@
           <p:cNvPr id="28" name="stage-name-1">
             <a:extLst>
               <a:ext uri="{FF2B5EF4-FFF2-40B4-BE49-F238E27FC236}">
-                <a16:creationId xmlns:a16="http://schemas.microsoft.com/office/drawing/2014/main" id="{DF99D844-AD31-6B96-2EAD-79C02A556EFC}"/>
+                <a16:creationId xmlns:a16="http://schemas.microsoft.com/office/drawing/2014/main" id="{027438A1-BD01-D54D-F6DD-A86C20BBA4E6}"/>
               </a:ext>
             </a:extLst>
           </p:cNvPr>
@@ -32505,7 +32232,7 @@
           <p:cNvPr id="29" name="stage-admit-1">
             <a:extLst>
               <a:ext uri="{FF2B5EF4-FFF2-40B4-BE49-F238E27FC236}">
-                <a16:creationId xmlns:a16="http://schemas.microsoft.com/office/drawing/2014/main" id="{959D0075-A749-F642-6C61-FC9E6E8A172D}"/>
+                <a16:creationId xmlns:a16="http://schemas.microsoft.com/office/drawing/2014/main" id="{338E2759-E4C4-8CFD-F7B5-49FB2EA831F6}"/>
               </a:ext>
             </a:extLst>
           </p:cNvPr>
@@ -32551,7 +32278,7 @@
           <p:cNvPr id="30" name="stage-block-1">
             <a:extLst>
               <a:ext uri="{FF2B5EF4-FFF2-40B4-BE49-F238E27FC236}">
-                <a16:creationId xmlns:a16="http://schemas.microsoft.com/office/drawing/2014/main" id="{E6C3388C-C619-D893-F786-928B654C2B3E}"/>
+                <a16:creationId xmlns:a16="http://schemas.microsoft.com/office/drawing/2014/main" id="{A4BF7E56-5BD5-6C53-BBC8-47ABD33F1EE4}"/>
               </a:ext>
             </a:extLst>
           </p:cNvPr>
@@ -32597,7 +32324,7 @@
           <p:cNvPr id="31" name="stage-tie-1">
             <a:extLst>
               <a:ext uri="{FF2B5EF4-FFF2-40B4-BE49-F238E27FC236}">
-                <a16:creationId xmlns:a16="http://schemas.microsoft.com/office/drawing/2014/main" id="{F6943B91-4F70-F8FF-B469-6272AA0A4AE1}"/>
+                <a16:creationId xmlns:a16="http://schemas.microsoft.com/office/drawing/2014/main" id="{58E0C999-22DD-9828-0A42-D8AB8A570766}"/>
               </a:ext>
             </a:extLst>
           </p:cNvPr>
@@ -32638,7 +32365,7 @@
           <p:cNvPr id="32" name="stage-2">
             <a:extLst>
               <a:ext uri="{FF2B5EF4-FFF2-40B4-BE49-F238E27FC236}">
-                <a16:creationId xmlns:a16="http://schemas.microsoft.com/office/drawing/2014/main" id="{EE4E0FAE-B790-2518-2855-120E1BFF1E43}"/>
+                <a16:creationId xmlns:a16="http://schemas.microsoft.com/office/drawing/2014/main" id="{2C269C28-59FC-7A54-C502-F22F16418965}"/>
               </a:ext>
             </a:extLst>
           </p:cNvPr>
@@ -32692,7 +32419,7 @@
           <p:cNvPr id="33" name="stage-band-2">
             <a:extLst>
               <a:ext uri="{FF2B5EF4-FFF2-40B4-BE49-F238E27FC236}">
-                <a16:creationId xmlns:a16="http://schemas.microsoft.com/office/drawing/2014/main" id="{088DBA49-23AE-7791-CEEE-1249A55B8531}"/>
+                <a16:creationId xmlns:a16="http://schemas.microsoft.com/office/drawing/2014/main" id="{70D46E30-087A-80A1-01C9-00FA0E4474C2}"/>
               </a:ext>
             </a:extLst>
           </p:cNvPr>
@@ -32746,7 +32473,7 @@
           <p:cNvPr id="34" name="stage-num-2">
             <a:extLst>
               <a:ext uri="{FF2B5EF4-FFF2-40B4-BE49-F238E27FC236}">
-                <a16:creationId xmlns:a16="http://schemas.microsoft.com/office/drawing/2014/main" id="{CCE8DD92-37C3-F0C2-05F4-852D89F93028}"/>
+                <a16:creationId xmlns:a16="http://schemas.microsoft.com/office/drawing/2014/main" id="{4C78C940-A777-16A6-598F-BB10380048C4}"/>
               </a:ext>
             </a:extLst>
           </p:cNvPr>
@@ -32792,7 +32519,7 @@
           <p:cNvPr id="35" name="stage-name-2">
             <a:extLst>
               <a:ext uri="{FF2B5EF4-FFF2-40B4-BE49-F238E27FC236}">
-                <a16:creationId xmlns:a16="http://schemas.microsoft.com/office/drawing/2014/main" id="{6ADDE352-E3FA-7053-C388-0762081D7671}"/>
+                <a16:creationId xmlns:a16="http://schemas.microsoft.com/office/drawing/2014/main" id="{4ED9EF75-1799-D905-5373-2E260E863561}"/>
               </a:ext>
             </a:extLst>
           </p:cNvPr>
@@ -32838,7 +32565,7 @@
           <p:cNvPr id="36" name="stage-admit-2">
             <a:extLst>
               <a:ext uri="{FF2B5EF4-FFF2-40B4-BE49-F238E27FC236}">
-                <a16:creationId xmlns:a16="http://schemas.microsoft.com/office/drawing/2014/main" id="{EC106FBD-6520-EABE-CDC1-E47603AE8398}"/>
+                <a16:creationId xmlns:a16="http://schemas.microsoft.com/office/drawing/2014/main" id="{33706250-B7FB-3E32-1C4D-56248F3C9EE2}"/>
               </a:ext>
             </a:extLst>
           </p:cNvPr>
@@ -32884,7 +32611,7 @@
           <p:cNvPr id="37" name="stage-block-2">
             <a:extLst>
               <a:ext uri="{FF2B5EF4-FFF2-40B4-BE49-F238E27FC236}">
-                <a16:creationId xmlns:a16="http://schemas.microsoft.com/office/drawing/2014/main" id="{1A7BD0A3-AAD5-8367-7F4A-1E7B4C74D19E}"/>
+                <a16:creationId xmlns:a16="http://schemas.microsoft.com/office/drawing/2014/main" id="{42223453-B246-9320-08E6-ABAEDABDF7CA}"/>
               </a:ext>
             </a:extLst>
           </p:cNvPr>
@@ -32930,7 +32657,7 @@
           <p:cNvPr id="38" name="stage-tie-2">
             <a:extLst>
               <a:ext uri="{FF2B5EF4-FFF2-40B4-BE49-F238E27FC236}">
-                <a16:creationId xmlns:a16="http://schemas.microsoft.com/office/drawing/2014/main" id="{A3EE5469-7421-3B9B-5626-0DFD9BE0208D}"/>
+                <a16:creationId xmlns:a16="http://schemas.microsoft.com/office/drawing/2014/main" id="{A125441F-6FCE-73C3-CDC2-94D10514DFBC}"/>
               </a:ext>
             </a:extLst>
           </p:cNvPr>
@@ -32971,7 +32698,7 @@
           <p:cNvPr id="39" name="stage-3">
             <a:extLst>
               <a:ext uri="{FF2B5EF4-FFF2-40B4-BE49-F238E27FC236}">
-                <a16:creationId xmlns:a16="http://schemas.microsoft.com/office/drawing/2014/main" id="{7F55D818-B749-E114-6CC5-8E18CB4E9B7D}"/>
+                <a16:creationId xmlns:a16="http://schemas.microsoft.com/office/drawing/2014/main" id="{27257392-A10C-7B2E-7290-3D724E8B81D1}"/>
               </a:ext>
             </a:extLst>
           </p:cNvPr>
@@ -33025,7 +32752,7 @@
           <p:cNvPr id="40" name="stage-band-3">
             <a:extLst>
               <a:ext uri="{FF2B5EF4-FFF2-40B4-BE49-F238E27FC236}">
-                <a16:creationId xmlns:a16="http://schemas.microsoft.com/office/drawing/2014/main" id="{56B200CF-FF42-62CC-CD90-4F8DB412FC1F}"/>
+                <a16:creationId xmlns:a16="http://schemas.microsoft.com/office/drawing/2014/main" id="{79920F1B-3798-93B3-AC5D-3FC7FC227FB8}"/>
               </a:ext>
             </a:extLst>
           </p:cNvPr>
@@ -33079,7 +32806,7 @@
           <p:cNvPr id="41" name="stage-num-3">
             <a:extLst>
               <a:ext uri="{FF2B5EF4-FFF2-40B4-BE49-F238E27FC236}">
-                <a16:creationId xmlns:a16="http://schemas.microsoft.com/office/drawing/2014/main" id="{602AAEA3-1AA5-569C-2E90-0E98338EE938}"/>
+                <a16:creationId xmlns:a16="http://schemas.microsoft.com/office/drawing/2014/main" id="{F9D44455-0DE8-9E0B-8295-8F72D99E6FC6}"/>
               </a:ext>
             </a:extLst>
           </p:cNvPr>
@@ -33125,7 +32852,7 @@
           <p:cNvPr id="42" name="stage-name-3">
             <a:extLst>
               <a:ext uri="{FF2B5EF4-FFF2-40B4-BE49-F238E27FC236}">
-                <a16:creationId xmlns:a16="http://schemas.microsoft.com/office/drawing/2014/main" id="{A4387713-E5A8-C8B9-68C1-B1B29CC28E01}"/>
+                <a16:creationId xmlns:a16="http://schemas.microsoft.com/office/drawing/2014/main" id="{BE2C9A17-4FE4-5AAC-C042-D12389B4D037}"/>
               </a:ext>
             </a:extLst>
           </p:cNvPr>
@@ -33171,7 +32898,7 @@
           <p:cNvPr id="43" name="stage-admit-3">
             <a:extLst>
               <a:ext uri="{FF2B5EF4-FFF2-40B4-BE49-F238E27FC236}">
-                <a16:creationId xmlns:a16="http://schemas.microsoft.com/office/drawing/2014/main" id="{24C1CD18-3F7E-2FCA-3DB5-97D2207B8243}"/>
+                <a16:creationId xmlns:a16="http://schemas.microsoft.com/office/drawing/2014/main" id="{8C654AD5-5B3F-D954-27FA-052F1310A8B8}"/>
               </a:ext>
             </a:extLst>
           </p:cNvPr>
@@ -33217,7 +32944,7 @@
           <p:cNvPr id="44" name="stage-block-3">
             <a:extLst>
               <a:ext uri="{FF2B5EF4-FFF2-40B4-BE49-F238E27FC236}">
-                <a16:creationId xmlns:a16="http://schemas.microsoft.com/office/drawing/2014/main" id="{CF8ED331-F76C-F9D3-668D-B578F3E70168}"/>
+                <a16:creationId xmlns:a16="http://schemas.microsoft.com/office/drawing/2014/main" id="{2F0BD421-1D9E-C0E9-0272-742ACEA696E1}"/>
               </a:ext>
             </a:extLst>
           </p:cNvPr>
@@ -33263,7 +32990,7 @@
           <p:cNvPr id="45" name="stage-tie-3">
             <a:extLst>
               <a:ext uri="{FF2B5EF4-FFF2-40B4-BE49-F238E27FC236}">
-                <a16:creationId xmlns:a16="http://schemas.microsoft.com/office/drawing/2014/main" id="{6E7E7FAF-8FDF-43F1-F6F7-9B4C3389843C}"/>
+                <a16:creationId xmlns:a16="http://schemas.microsoft.com/office/drawing/2014/main" id="{677FBE72-3B8A-D180-C5F2-A9E4B782B682}"/>
               </a:ext>
             </a:extLst>
           </p:cNvPr>
@@ -33304,7 +33031,7 @@
           <p:cNvPr id="46" name="stage-4">
             <a:extLst>
               <a:ext uri="{FF2B5EF4-FFF2-40B4-BE49-F238E27FC236}">
-                <a16:creationId xmlns:a16="http://schemas.microsoft.com/office/drawing/2014/main" id="{D6A53D4B-F6A8-DF27-04EF-9C206E8B8F40}"/>
+                <a16:creationId xmlns:a16="http://schemas.microsoft.com/office/drawing/2014/main" id="{C2FB80F2-6B3E-CFAF-3EAD-6065A1516171}"/>
               </a:ext>
             </a:extLst>
           </p:cNvPr>
@@ -33358,7 +33085,7 @@
           <p:cNvPr id="47" name="stage-band-4">
             <a:extLst>
               <a:ext uri="{FF2B5EF4-FFF2-40B4-BE49-F238E27FC236}">
-                <a16:creationId xmlns:a16="http://schemas.microsoft.com/office/drawing/2014/main" id="{0B43A55F-56C9-B8C4-8123-A6412E83155B}"/>
+                <a16:creationId xmlns:a16="http://schemas.microsoft.com/office/drawing/2014/main" id="{F468F04E-950D-2469-B6C6-70B7CDF980A3}"/>
               </a:ext>
             </a:extLst>
           </p:cNvPr>
@@ -33412,7 +33139,7 @@
           <p:cNvPr id="48" name="stage-num-4">
             <a:extLst>
               <a:ext uri="{FF2B5EF4-FFF2-40B4-BE49-F238E27FC236}">
-                <a16:creationId xmlns:a16="http://schemas.microsoft.com/office/drawing/2014/main" id="{F94C4F6A-165C-5952-4255-4A10EEA06052}"/>
+                <a16:creationId xmlns:a16="http://schemas.microsoft.com/office/drawing/2014/main" id="{676DD686-0E76-EAAB-9801-22F9FCFBEE3D}"/>
               </a:ext>
             </a:extLst>
           </p:cNvPr>
@@ -33458,7 +33185,7 @@
           <p:cNvPr id="49" name="stage-name-4">
             <a:extLst>
               <a:ext uri="{FF2B5EF4-FFF2-40B4-BE49-F238E27FC236}">
-                <a16:creationId xmlns:a16="http://schemas.microsoft.com/office/drawing/2014/main" id="{7EA1E9ED-B30A-C73B-5CC0-B032817A8A8D}"/>
+                <a16:creationId xmlns:a16="http://schemas.microsoft.com/office/drawing/2014/main" id="{D5FE86AD-0886-405D-FEFB-67DEA9090B15}"/>
               </a:ext>
             </a:extLst>
           </p:cNvPr>
@@ -33504,7 +33231,7 @@
           <p:cNvPr id="50" name="stage-admit-4">
             <a:extLst>
               <a:ext uri="{FF2B5EF4-FFF2-40B4-BE49-F238E27FC236}">
-                <a16:creationId xmlns:a16="http://schemas.microsoft.com/office/drawing/2014/main" id="{AA48368A-522D-8335-84F9-38CFA10EF627}"/>
+                <a16:creationId xmlns:a16="http://schemas.microsoft.com/office/drawing/2014/main" id="{861F1385-8646-467E-8500-7D06AC31C384}"/>
               </a:ext>
             </a:extLst>
           </p:cNvPr>
@@ -33550,7 +33277,7 @@
           <p:cNvPr id="51" name="stage-block-4">
             <a:extLst>
               <a:ext uri="{FF2B5EF4-FFF2-40B4-BE49-F238E27FC236}">
-                <a16:creationId xmlns:a16="http://schemas.microsoft.com/office/drawing/2014/main" id="{00BBA890-8990-79EA-76C4-7D3A41B5DE10}"/>
+                <a16:creationId xmlns:a16="http://schemas.microsoft.com/office/drawing/2014/main" id="{51DEDE3E-992F-E2C0-6CAF-4164902249DC}"/>
               </a:ext>
             </a:extLst>
           </p:cNvPr>
@@ -33596,7 +33323,7 @@
           <p:cNvPr id="52" name="stage-tie-4">
             <a:extLst>
               <a:ext uri="{FF2B5EF4-FFF2-40B4-BE49-F238E27FC236}">
-                <a16:creationId xmlns:a16="http://schemas.microsoft.com/office/drawing/2014/main" id="{6EAD9FCA-1537-D4AB-3B8B-D4BFB87EC38D}"/>
+                <a16:creationId xmlns:a16="http://schemas.microsoft.com/office/drawing/2014/main" id="{E749CA05-F3A7-4E43-8D03-F4EA4247A411}"/>
               </a:ext>
             </a:extLst>
           </p:cNvPr>
@@ -33637,7 +33364,7 @@
           <p:cNvPr id="53" name="takeaway">
             <a:extLst>
               <a:ext uri="{FF2B5EF4-FFF2-40B4-BE49-F238E27FC236}">
-                <a16:creationId xmlns:a16="http://schemas.microsoft.com/office/drawing/2014/main" id="{E9001EA3-DBAC-0526-A237-34D92B769442}"/>
+                <a16:creationId xmlns:a16="http://schemas.microsoft.com/office/drawing/2014/main" id="{FA73382E-013D-0693-9E0C-91B99FAAFDC4}"/>
               </a:ext>
             </a:extLst>
           </p:cNvPr>
@@ -33691,7 +33418,7 @@
           <p:cNvPr id="54" name="takeaway-t">
             <a:extLst>
               <a:ext uri="{FF2B5EF4-FFF2-40B4-BE49-F238E27FC236}">
-                <a16:creationId xmlns:a16="http://schemas.microsoft.com/office/drawing/2014/main" id="{7D89B96B-C22E-8151-4D98-870E833658A0}"/>
+                <a16:creationId xmlns:a16="http://schemas.microsoft.com/office/drawing/2014/main" id="{DF38067D-2F81-7142-5A5F-574E26245ECE}"/>
               </a:ext>
             </a:extLst>
           </p:cNvPr>
@@ -33738,7 +33465,7 @@
             <a:hlinkClick r:id="rId4"/>
             <a:extLst>
               <a:ext uri="{FF2B5EF4-FFF2-40B4-BE49-F238E27FC236}">
-                <a16:creationId xmlns:a16="http://schemas.microsoft.com/office/drawing/2014/main" id="{21FB37C2-844C-62AB-7BA5-FDF4D47F6296}"/>
+                <a16:creationId xmlns:a16="http://schemas.microsoft.com/office/drawing/2014/main" id="{11E499C5-6FEB-3E96-CA82-5ED6207B2D92}"/>
               </a:ext>
             </a:extLst>
           </p:cNvPr>
@@ -33799,7 +33526,7 @@
     </p:spTree>
     <p:extLst>
       <p:ext uri="{BB962C8B-B14F-4D97-AF65-F5344CB8AC3E}">
-        <p14:creationId xmlns:p14="http://schemas.microsoft.com/office/powerpoint/2010/main" val="3228793852"/>
+        <p14:creationId xmlns:p14="http://schemas.microsoft.com/office/powerpoint/2010/main" val="860739562"/>
       </p:ext>
     </p:extLst>
   </p:cSld>
@@ -35771,7 +35498,7 @@
           <p:cNvPr id="2" name="bg">
             <a:extLst>
               <a:ext uri="{FF2B5EF4-FFF2-40B4-BE49-F238E27FC236}">
-                <a16:creationId xmlns:a16="http://schemas.microsoft.com/office/drawing/2014/main" id="{DB897A9B-34D2-F018-A7CF-F5A8A06F02FC}"/>
+                <a16:creationId xmlns:a16="http://schemas.microsoft.com/office/drawing/2014/main" id="{D339280F-556F-9661-04B9-107FC7769C82}"/>
               </a:ext>
             </a:extLst>
           </p:cNvPr>
@@ -35832,7 +35559,7 @@
           <p:cNvPr id="3" name="rail">
             <a:extLst>
               <a:ext uri="{FF2B5EF4-FFF2-40B4-BE49-F238E27FC236}">
-                <a16:creationId xmlns:a16="http://schemas.microsoft.com/office/drawing/2014/main" id="{D32D610D-7BBF-E567-172C-965B00C0FA36}"/>
+                <a16:creationId xmlns:a16="http://schemas.microsoft.com/office/drawing/2014/main" id="{440D4F98-D00B-5971-3EEF-089F57071EE5}"/>
               </a:ext>
             </a:extLst>
           </p:cNvPr>
@@ -35893,7 +35620,7 @@
           <p:cNvPr id="4" name="top-rule">
             <a:extLst>
               <a:ext uri="{FF2B5EF4-FFF2-40B4-BE49-F238E27FC236}">
-                <a16:creationId xmlns:a16="http://schemas.microsoft.com/office/drawing/2014/main" id="{35DF3329-A52C-7DDD-8763-1AB395385569}"/>
+                <a16:creationId xmlns:a16="http://schemas.microsoft.com/office/drawing/2014/main" id="{DA219383-C909-182B-C3AC-62620D46DD4A}"/>
               </a:ext>
             </a:extLst>
           </p:cNvPr>
@@ -35934,7 +35661,7 @@
           <p:cNvPr id="5" name="section">
             <a:extLst>
               <a:ext uri="{FF2B5EF4-FFF2-40B4-BE49-F238E27FC236}">
-                <a16:creationId xmlns:a16="http://schemas.microsoft.com/office/drawing/2014/main" id="{6F25912B-DA5D-7076-88D2-9B2C9162DBBA}"/>
+                <a16:creationId xmlns:a16="http://schemas.microsoft.com/office/drawing/2014/main" id="{A98FFEDC-99FA-949D-D289-50B8D39930C5}"/>
               </a:ext>
             </a:extLst>
           </p:cNvPr>
@@ -35980,7 +35707,7 @@
           <p:cNvPr id="6" name="num">
             <a:extLst>
               <a:ext uri="{FF2B5EF4-FFF2-40B4-BE49-F238E27FC236}">
-                <a16:creationId xmlns:a16="http://schemas.microsoft.com/office/drawing/2014/main" id="{1FA10751-EDE0-3D70-7E19-D8D145AE762E}"/>
+                <a16:creationId xmlns:a16="http://schemas.microsoft.com/office/drawing/2014/main" id="{413A3468-32B1-8A9E-8DA6-7101AC67A9F3}"/>
               </a:ext>
             </a:extLst>
           </p:cNvPr>
@@ -36026,7 +35753,7 @@
           <p:cNvPr id="7" name="footer">
             <a:extLst>
               <a:ext uri="{FF2B5EF4-FFF2-40B4-BE49-F238E27FC236}">
-                <a16:creationId xmlns:a16="http://schemas.microsoft.com/office/drawing/2014/main" id="{35C52777-849F-9400-AFBE-08829A98A254}"/>
+                <a16:creationId xmlns:a16="http://schemas.microsoft.com/office/drawing/2014/main" id="{4A4D8142-69C4-2324-D8AC-3FCD0F46DB8B}"/>
               </a:ext>
             </a:extLst>
           </p:cNvPr>
@@ -36072,7 +35799,7 @@
           <p:cNvPr id="8" name="student">
             <a:extLst>
               <a:ext uri="{FF2B5EF4-FFF2-40B4-BE49-F238E27FC236}">
-                <a16:creationId xmlns:a16="http://schemas.microsoft.com/office/drawing/2014/main" id="{93677324-BD1F-0182-0C41-1822D79F4636}"/>
+                <a16:creationId xmlns:a16="http://schemas.microsoft.com/office/drawing/2014/main" id="{5A6B8690-FDCB-5CB3-949F-C926D6A084D8}"/>
               </a:ext>
             </a:extLst>
           </p:cNvPr>
@@ -36118,7 +35845,7 @@
           <p:cNvPr id="10" name="图片 9">
             <a:extLst>
               <a:ext uri="{FF2B5EF4-FFF2-40B4-BE49-F238E27FC236}">
-                <a16:creationId xmlns:a16="http://schemas.microsoft.com/office/drawing/2014/main" id="{45863FDA-142F-4CAD-6B9F-9C1BCDE913FF}"/>
+                <a16:creationId xmlns:a16="http://schemas.microsoft.com/office/drawing/2014/main" id="{C03328C7-16B7-C7AC-7A43-6AC4C7B29C22}"/>
               </a:ext>
             </a:extLst>
           </p:cNvPr>
@@ -36154,7 +35881,7 @@
           <p:cNvPr id="11" name="title">
             <a:extLst>
               <a:ext uri="{FF2B5EF4-FFF2-40B4-BE49-F238E27FC236}">
-                <a16:creationId xmlns:a16="http://schemas.microsoft.com/office/drawing/2014/main" id="{DA89D4D5-9709-4114-654E-3FB8D6844C38}"/>
+                <a16:creationId xmlns:a16="http://schemas.microsoft.com/office/drawing/2014/main" id="{571BC07B-E67D-9990-A5DE-249D3D6E2CC7}"/>
               </a:ext>
             </a:extLst>
           </p:cNvPr>
@@ -36200,7 +35927,7 @@
           <p:cNvPr id="12" name="subtitle">
             <a:extLst>
               <a:ext uri="{FF2B5EF4-FFF2-40B4-BE49-F238E27FC236}">
-                <a16:creationId xmlns:a16="http://schemas.microsoft.com/office/drawing/2014/main" id="{C1B3FC47-5A27-F3A1-7759-D8EF677E8A86}"/>
+                <a16:creationId xmlns:a16="http://schemas.microsoft.com/office/drawing/2014/main" id="{AC1AEA89-9EE8-A8E2-4EC4-DE32143ED985}"/>
               </a:ext>
             </a:extLst>
           </p:cNvPr>
@@ -36246,7 +35973,7 @@
           <p:cNvPr id="13" name="formula">
             <a:extLst>
               <a:ext uri="{FF2B5EF4-FFF2-40B4-BE49-F238E27FC236}">
-                <a16:creationId xmlns:a16="http://schemas.microsoft.com/office/drawing/2014/main" id="{02386294-E764-8D46-A514-A49A614F6E2A}"/>
+                <a16:creationId xmlns:a16="http://schemas.microsoft.com/office/drawing/2014/main" id="{3B6B3792-5A0C-937C-0D79-9E0A90F7A821}"/>
               </a:ext>
             </a:extLst>
           </p:cNvPr>
@@ -36300,7 +36027,7 @@
           <p:cNvPr id="14" name="formula-k">
             <a:extLst>
               <a:ext uri="{FF2B5EF4-FFF2-40B4-BE49-F238E27FC236}">
-                <a16:creationId xmlns:a16="http://schemas.microsoft.com/office/drawing/2014/main" id="{E785417C-F6EF-F5A1-74FA-93A233ECE36B}"/>
+                <a16:creationId xmlns:a16="http://schemas.microsoft.com/office/drawing/2014/main" id="{2F0E5B8F-CFB8-B4A5-29A3-5AF42B03E9F4}"/>
               </a:ext>
             </a:extLst>
           </p:cNvPr>
@@ -36346,7 +36073,7 @@
           <p:cNvPr id="15" name="formula-main">
             <a:extLst>
               <a:ext uri="{FF2B5EF4-FFF2-40B4-BE49-F238E27FC236}">
-                <a16:creationId xmlns:a16="http://schemas.microsoft.com/office/drawing/2014/main" id="{B4ECDA92-EEF2-43A4-03BC-26332483CF4E}"/>
+                <a16:creationId xmlns:a16="http://schemas.microsoft.com/office/drawing/2014/main" id="{8CD7B7C3-A1FB-CA18-18B3-3CA5F85311E7}"/>
               </a:ext>
             </a:extLst>
           </p:cNvPr>
@@ -36392,7 +36119,7 @@
           <p:cNvPr id="16" name="formula-sub">
             <a:extLst>
               <a:ext uri="{FF2B5EF4-FFF2-40B4-BE49-F238E27FC236}">
-                <a16:creationId xmlns:a16="http://schemas.microsoft.com/office/drawing/2014/main" id="{E78175E5-348F-55DF-628B-6895A2620A51}"/>
+                <a16:creationId xmlns:a16="http://schemas.microsoft.com/office/drawing/2014/main" id="{1F8CE0AF-F222-57FA-CEE2-F6261C05D4E2}"/>
               </a:ext>
             </a:extLst>
           </p:cNvPr>
@@ -36441,7 +36168,7 @@
           <p:cNvPr id="17" name="algo">
             <a:extLst>
               <a:ext uri="{FF2B5EF4-FFF2-40B4-BE49-F238E27FC236}">
-                <a16:creationId xmlns:a16="http://schemas.microsoft.com/office/drawing/2014/main" id="{E82CACDC-9B3A-79E5-7A77-88286595E3A3}"/>
+                <a16:creationId xmlns:a16="http://schemas.microsoft.com/office/drawing/2014/main" id="{9434FAE8-85E0-E64E-063E-46378A95628F}"/>
               </a:ext>
             </a:extLst>
           </p:cNvPr>
@@ -36495,7 +36222,7 @@
           <p:cNvPr id="18" name="algo-k">
             <a:extLst>
               <a:ext uri="{FF2B5EF4-FFF2-40B4-BE49-F238E27FC236}">
-                <a16:creationId xmlns:a16="http://schemas.microsoft.com/office/drawing/2014/main" id="{ADCB3C42-C6D0-0478-0303-B05CA404D772}"/>
+                <a16:creationId xmlns:a16="http://schemas.microsoft.com/office/drawing/2014/main" id="{EA86B9DC-E055-3C58-D110-42ABA41B22F9}"/>
               </a:ext>
             </a:extLst>
           </p:cNvPr>
@@ -36541,7 +36268,7 @@
           <p:cNvPr id="19" name="algo-t">
             <a:extLst>
               <a:ext uri="{FF2B5EF4-FFF2-40B4-BE49-F238E27FC236}">
-                <a16:creationId xmlns:a16="http://schemas.microsoft.com/office/drawing/2014/main" id="{786DDEF6-44A4-64DD-7B7F-A4732AFB1BEA}"/>
+                <a16:creationId xmlns:a16="http://schemas.microsoft.com/office/drawing/2014/main" id="{A4A8A752-390D-DE2E-A74B-33BB7B57C78D}"/>
               </a:ext>
             </a:extLst>
           </p:cNvPr>
@@ -36591,7 +36318,7 @@
           <p:cNvPr id="20" name="eq-0">
             <a:extLst>
               <a:ext uri="{FF2B5EF4-FFF2-40B4-BE49-F238E27FC236}">
-                <a16:creationId xmlns:a16="http://schemas.microsoft.com/office/drawing/2014/main" id="{D8F0EAC1-0FF4-8FC9-DCFC-750A5ECAD3DA}"/>
+                <a16:creationId xmlns:a16="http://schemas.microsoft.com/office/drawing/2014/main" id="{2AB06ED6-77C6-A169-8248-FEA2D355BB57}"/>
               </a:ext>
             </a:extLst>
           </p:cNvPr>
@@ -36645,7 +36372,7 @@
           <p:cNvPr id="21" name="eq-band-0">
             <a:extLst>
               <a:ext uri="{FF2B5EF4-FFF2-40B4-BE49-F238E27FC236}">
-                <a16:creationId xmlns:a16="http://schemas.microsoft.com/office/drawing/2014/main" id="{86BEDBCB-709F-1A15-D4A0-913F8245A4A7}"/>
+                <a16:creationId xmlns:a16="http://schemas.microsoft.com/office/drawing/2014/main" id="{2E5B7B5D-3F3A-4E9F-9B84-6F496FC7CF8A}"/>
               </a:ext>
             </a:extLst>
           </p:cNvPr>
@@ -36699,7 +36426,7 @@
           <p:cNvPr id="22" name="eq-n-0">
             <a:extLst>
               <a:ext uri="{FF2B5EF4-FFF2-40B4-BE49-F238E27FC236}">
-                <a16:creationId xmlns:a16="http://schemas.microsoft.com/office/drawing/2014/main" id="{91E82CDC-BC33-0AB3-B9E9-3624B3FB3B0F}"/>
+                <a16:creationId xmlns:a16="http://schemas.microsoft.com/office/drawing/2014/main" id="{AF64C283-7021-6E1D-E2E3-1096166A9E5B}"/>
               </a:ext>
             </a:extLst>
           </p:cNvPr>
@@ -36745,7 +36472,7 @@
           <p:cNvPr id="23" name="eq-s-0">
             <a:extLst>
               <a:ext uri="{FF2B5EF4-FFF2-40B4-BE49-F238E27FC236}">
-                <a16:creationId xmlns:a16="http://schemas.microsoft.com/office/drawing/2014/main" id="{9E69E852-8464-090A-1731-E4FBC88C8E47}"/>
+                <a16:creationId xmlns:a16="http://schemas.microsoft.com/office/drawing/2014/main" id="{D7BCE730-65EC-8006-42A4-2D748812BAE7}"/>
               </a:ext>
             </a:extLst>
           </p:cNvPr>
@@ -36791,7 +36518,7 @@
           <p:cNvPr id="24" name="eq-1">
             <a:extLst>
               <a:ext uri="{FF2B5EF4-FFF2-40B4-BE49-F238E27FC236}">
-                <a16:creationId xmlns:a16="http://schemas.microsoft.com/office/drawing/2014/main" id="{207D65DD-BAE9-BDFD-3901-2764CAD0DFC5}"/>
+                <a16:creationId xmlns:a16="http://schemas.microsoft.com/office/drawing/2014/main" id="{701D4798-AFDA-7D77-F0E9-3C31B60E60E0}"/>
               </a:ext>
             </a:extLst>
           </p:cNvPr>
@@ -36845,7 +36572,7 @@
           <p:cNvPr id="25" name="eq-band-1">
             <a:extLst>
               <a:ext uri="{FF2B5EF4-FFF2-40B4-BE49-F238E27FC236}">
-                <a16:creationId xmlns:a16="http://schemas.microsoft.com/office/drawing/2014/main" id="{C7AB2364-80AF-BF91-2BB7-F1B26B6D0318}"/>
+                <a16:creationId xmlns:a16="http://schemas.microsoft.com/office/drawing/2014/main" id="{5CE3D4EC-81A2-BE1A-090A-B501FD1E5713}"/>
               </a:ext>
             </a:extLst>
           </p:cNvPr>
@@ -36899,7 +36626,7 @@
           <p:cNvPr id="26" name="eq-n-1">
             <a:extLst>
               <a:ext uri="{FF2B5EF4-FFF2-40B4-BE49-F238E27FC236}">
-                <a16:creationId xmlns:a16="http://schemas.microsoft.com/office/drawing/2014/main" id="{80042BC2-492C-75EC-42FE-64924A7AC59E}"/>
+                <a16:creationId xmlns:a16="http://schemas.microsoft.com/office/drawing/2014/main" id="{C5F9FDEF-1222-ED2F-74F2-022CC7B742FD}"/>
               </a:ext>
             </a:extLst>
           </p:cNvPr>
@@ -36945,7 +36672,7 @@
           <p:cNvPr id="27" name="eq-s-1">
             <a:extLst>
               <a:ext uri="{FF2B5EF4-FFF2-40B4-BE49-F238E27FC236}">
-                <a16:creationId xmlns:a16="http://schemas.microsoft.com/office/drawing/2014/main" id="{DBB19CE4-8D2F-D35D-484B-A6C9A442E466}"/>
+                <a16:creationId xmlns:a16="http://schemas.microsoft.com/office/drawing/2014/main" id="{6D62D2A3-6847-E979-9F03-43E9203F4DDD}"/>
               </a:ext>
             </a:extLst>
           </p:cNvPr>
@@ -36991,7 +36718,7 @@
           <p:cNvPr id="28" name="eq-2">
             <a:extLst>
               <a:ext uri="{FF2B5EF4-FFF2-40B4-BE49-F238E27FC236}">
-                <a16:creationId xmlns:a16="http://schemas.microsoft.com/office/drawing/2014/main" id="{D63A816E-C3C1-AE58-3D42-7AFDFC10638A}"/>
+                <a16:creationId xmlns:a16="http://schemas.microsoft.com/office/drawing/2014/main" id="{E4BA2BE2-3024-1F7C-FB64-FA7446278B47}"/>
               </a:ext>
             </a:extLst>
           </p:cNvPr>
@@ -37045,7 +36772,7 @@
           <p:cNvPr id="29" name="eq-band-2">
             <a:extLst>
               <a:ext uri="{FF2B5EF4-FFF2-40B4-BE49-F238E27FC236}">
-                <a16:creationId xmlns:a16="http://schemas.microsoft.com/office/drawing/2014/main" id="{71848A99-86BD-5684-D8CA-760B3E170669}"/>
+                <a16:creationId xmlns:a16="http://schemas.microsoft.com/office/drawing/2014/main" id="{395959CE-199D-FB47-0DED-113398AA6C2A}"/>
               </a:ext>
             </a:extLst>
           </p:cNvPr>
@@ -37099,7 +36826,7 @@
           <p:cNvPr id="30" name="eq-n-2">
             <a:extLst>
               <a:ext uri="{FF2B5EF4-FFF2-40B4-BE49-F238E27FC236}">
-                <a16:creationId xmlns:a16="http://schemas.microsoft.com/office/drawing/2014/main" id="{79715C60-918D-A7BA-13B7-62FC36DEF6F7}"/>
+                <a16:creationId xmlns:a16="http://schemas.microsoft.com/office/drawing/2014/main" id="{472884C0-B5D0-10C2-677D-3C8984FA7797}"/>
               </a:ext>
             </a:extLst>
           </p:cNvPr>
@@ -37145,7 +36872,7 @@
           <p:cNvPr id="31" name="eq-s-2">
             <a:extLst>
               <a:ext uri="{FF2B5EF4-FFF2-40B4-BE49-F238E27FC236}">
-                <a16:creationId xmlns:a16="http://schemas.microsoft.com/office/drawing/2014/main" id="{C39473E4-91C1-E6B6-AA13-62B7CD3B6096}"/>
+                <a16:creationId xmlns:a16="http://schemas.microsoft.com/office/drawing/2014/main" id="{82B4647D-2FA1-0F42-5BC8-FC61445CA817}"/>
               </a:ext>
             </a:extLst>
           </p:cNvPr>
@@ -37192,7 +36919,7 @@
             <a:hlinkClick r:id="rId4"/>
             <a:extLst>
               <a:ext uri="{FF2B5EF4-FFF2-40B4-BE49-F238E27FC236}">
-                <a16:creationId xmlns:a16="http://schemas.microsoft.com/office/drawing/2014/main" id="{A22AAEB9-BE1A-9407-C525-913EC5AAC6C4}"/>
+                <a16:creationId xmlns:a16="http://schemas.microsoft.com/office/drawing/2014/main" id="{FD74C0BD-BAD3-F49F-B83A-9C401D6D46B0}"/>
               </a:ext>
             </a:extLst>
           </p:cNvPr>
@@ -37253,7 +36980,7 @@
     </p:spTree>
     <p:extLst>
       <p:ext uri="{BB962C8B-B14F-4D97-AF65-F5344CB8AC3E}">
-        <p14:creationId xmlns:p14="http://schemas.microsoft.com/office/powerpoint/2010/main" val="3962841856"/>
+        <p14:creationId xmlns:p14="http://schemas.microsoft.com/office/powerpoint/2010/main" val="1766628273"/>
       </p:ext>
     </p:extLst>
   </p:cSld>
@@ -37297,7 +37024,7 @@
           <p:cNvPr id="2" name="bg">
             <a:extLst>
               <a:ext uri="{FF2B5EF4-FFF2-40B4-BE49-F238E27FC236}">
-                <a16:creationId xmlns:a16="http://schemas.microsoft.com/office/drawing/2014/main" id="{6FAB100B-7C83-DA18-2DD7-7D47516BDCCB}"/>
+                <a16:creationId xmlns:a16="http://schemas.microsoft.com/office/drawing/2014/main" id="{B67B1A53-C640-5F1E-8F1F-076CCB5CDEA3}"/>
               </a:ext>
             </a:extLst>
           </p:cNvPr>
@@ -37358,7 +37085,7 @@
           <p:cNvPr id="3" name="rail">
             <a:extLst>
               <a:ext uri="{FF2B5EF4-FFF2-40B4-BE49-F238E27FC236}">
-                <a16:creationId xmlns:a16="http://schemas.microsoft.com/office/drawing/2014/main" id="{F2F5140E-2AF4-317A-059F-00B278643EBA}"/>
+                <a16:creationId xmlns:a16="http://schemas.microsoft.com/office/drawing/2014/main" id="{90B015A5-0E24-F36B-062F-B5F59C8C8E81}"/>
               </a:ext>
             </a:extLst>
           </p:cNvPr>
@@ -37419,7 +37146,7 @@
           <p:cNvPr id="4" name="top-rule">
             <a:extLst>
               <a:ext uri="{FF2B5EF4-FFF2-40B4-BE49-F238E27FC236}">
-                <a16:creationId xmlns:a16="http://schemas.microsoft.com/office/drawing/2014/main" id="{49CB2861-39EB-1BFA-044F-50332242CB44}"/>
+                <a16:creationId xmlns:a16="http://schemas.microsoft.com/office/drawing/2014/main" id="{C1D849C3-531B-10CB-442E-0BE6166C3ABA}"/>
               </a:ext>
             </a:extLst>
           </p:cNvPr>
@@ -37460,7 +37187,7 @@
           <p:cNvPr id="5" name="section">
             <a:extLst>
               <a:ext uri="{FF2B5EF4-FFF2-40B4-BE49-F238E27FC236}">
-                <a16:creationId xmlns:a16="http://schemas.microsoft.com/office/drawing/2014/main" id="{38FCEBB3-A69B-691C-3227-75131DA0925A}"/>
+                <a16:creationId xmlns:a16="http://schemas.microsoft.com/office/drawing/2014/main" id="{40D6D44D-13BE-59A7-322A-A03307533CE5}"/>
               </a:ext>
             </a:extLst>
           </p:cNvPr>
@@ -37506,7 +37233,7 @@
           <p:cNvPr id="6" name="num">
             <a:extLst>
               <a:ext uri="{FF2B5EF4-FFF2-40B4-BE49-F238E27FC236}">
-                <a16:creationId xmlns:a16="http://schemas.microsoft.com/office/drawing/2014/main" id="{E81173A2-B293-004E-141F-47C704EBE1FE}"/>
+                <a16:creationId xmlns:a16="http://schemas.microsoft.com/office/drawing/2014/main" id="{32B75EA2-BD06-71D7-4538-72D31B942F40}"/>
               </a:ext>
             </a:extLst>
           </p:cNvPr>
@@ -37552,7 +37279,7 @@
           <p:cNvPr id="7" name="footer">
             <a:extLst>
               <a:ext uri="{FF2B5EF4-FFF2-40B4-BE49-F238E27FC236}">
-                <a16:creationId xmlns:a16="http://schemas.microsoft.com/office/drawing/2014/main" id="{8FB27A04-EBFB-2849-E4AC-2BD6DB2EB2A0}"/>
+                <a16:creationId xmlns:a16="http://schemas.microsoft.com/office/drawing/2014/main" id="{E45E37C6-0867-8F0D-552C-0AF6C8C79EBB}"/>
               </a:ext>
             </a:extLst>
           </p:cNvPr>
@@ -37598,7 +37325,7 @@
           <p:cNvPr id="8" name="student">
             <a:extLst>
               <a:ext uri="{FF2B5EF4-FFF2-40B4-BE49-F238E27FC236}">
-                <a16:creationId xmlns:a16="http://schemas.microsoft.com/office/drawing/2014/main" id="{8060A7DA-7A33-620C-88A9-FB62C07084DF}"/>
+                <a16:creationId xmlns:a16="http://schemas.microsoft.com/office/drawing/2014/main" id="{2DCEAB5C-DF73-3968-89C0-A58BACA60A7A}"/>
               </a:ext>
             </a:extLst>
           </p:cNvPr>
@@ -37644,7 +37371,7 @@
           <p:cNvPr id="10" name="图片 9">
             <a:extLst>
               <a:ext uri="{FF2B5EF4-FFF2-40B4-BE49-F238E27FC236}">
-                <a16:creationId xmlns:a16="http://schemas.microsoft.com/office/drawing/2014/main" id="{86333DBF-9092-367B-F690-C395A50D603B}"/>
+                <a16:creationId xmlns:a16="http://schemas.microsoft.com/office/drawing/2014/main" id="{2ADB9708-ADC4-6529-5EBB-AFD31BDD991A}"/>
               </a:ext>
             </a:extLst>
           </p:cNvPr>
@@ -37680,7 +37407,7 @@
           <p:cNvPr id="11" name="title">
             <a:extLst>
               <a:ext uri="{FF2B5EF4-FFF2-40B4-BE49-F238E27FC236}">
-                <a16:creationId xmlns:a16="http://schemas.microsoft.com/office/drawing/2014/main" id="{CD23A956-977F-E66D-84D4-B43EE543BC8B}"/>
+                <a16:creationId xmlns:a16="http://schemas.microsoft.com/office/drawing/2014/main" id="{A4ADDC67-0F45-6130-5079-0BA061ED39BE}"/>
               </a:ext>
             </a:extLst>
           </p:cNvPr>
@@ -37726,7 +37453,7 @@
           <p:cNvPr id="12" name="subtitle">
             <a:extLst>
               <a:ext uri="{FF2B5EF4-FFF2-40B4-BE49-F238E27FC236}">
-                <a16:creationId xmlns:a16="http://schemas.microsoft.com/office/drawing/2014/main" id="{4C28759F-34D2-6AEF-2CC3-68EA7D46286B}"/>
+                <a16:creationId xmlns:a16="http://schemas.microsoft.com/office/drawing/2014/main" id="{6801FA34-6F5A-C975-92E2-90AAE9DF12CF}"/>
               </a:ext>
             </a:extLst>
           </p:cNvPr>
@@ -37772,7 +37499,7 @@
           <p:cNvPr id="13" name="headline">
             <a:extLst>
               <a:ext uri="{FF2B5EF4-FFF2-40B4-BE49-F238E27FC236}">
-                <a16:creationId xmlns:a16="http://schemas.microsoft.com/office/drawing/2014/main" id="{5193BFD7-B861-B08D-24F7-AFE0E2285D76}"/>
+                <a16:creationId xmlns:a16="http://schemas.microsoft.com/office/drawing/2014/main" id="{D04FCC5C-9FF3-A30B-41D9-168040A49E6D}"/>
               </a:ext>
             </a:extLst>
           </p:cNvPr>
@@ -37826,7 +37553,7 @@
           <p:cNvPr id="14" name="headline-k">
             <a:extLst>
               <a:ext uri="{FF2B5EF4-FFF2-40B4-BE49-F238E27FC236}">
-                <a16:creationId xmlns:a16="http://schemas.microsoft.com/office/drawing/2014/main" id="{A31FBBBB-8F02-56CB-2B91-E32F96AD9645}"/>
+                <a16:creationId xmlns:a16="http://schemas.microsoft.com/office/drawing/2014/main" id="{2962F806-9C17-7EEB-C1B8-FFCB600FED14}"/>
               </a:ext>
             </a:extLst>
           </p:cNvPr>
@@ -37872,7 +37599,7 @@
           <p:cNvPr id="15" name="headline-t">
             <a:extLst>
               <a:ext uri="{FF2B5EF4-FFF2-40B4-BE49-F238E27FC236}">
-                <a16:creationId xmlns:a16="http://schemas.microsoft.com/office/drawing/2014/main" id="{5659D6F3-3333-9EA6-D0F4-2A7A0806EF67}"/>
+                <a16:creationId xmlns:a16="http://schemas.microsoft.com/office/drawing/2014/main" id="{6AA13306-032E-32B5-6E7D-CB805216A454}"/>
               </a:ext>
             </a:extLst>
           </p:cNvPr>
@@ -37918,7 +37645,7 @@
           <p:cNvPr id="16" name="big-0">
             <a:extLst>
               <a:ext uri="{FF2B5EF4-FFF2-40B4-BE49-F238E27FC236}">
-                <a16:creationId xmlns:a16="http://schemas.microsoft.com/office/drawing/2014/main" id="{18219CA9-0996-8C60-842D-870B3E092139}"/>
+                <a16:creationId xmlns:a16="http://schemas.microsoft.com/office/drawing/2014/main" id="{39A94C2A-3151-FE2B-030E-6CC194333C9D}"/>
               </a:ext>
             </a:extLst>
           </p:cNvPr>
@@ -37972,7 +37699,7 @@
           <p:cNvPr id="17" name="big-band-0">
             <a:extLst>
               <a:ext uri="{FF2B5EF4-FFF2-40B4-BE49-F238E27FC236}">
-                <a16:creationId xmlns:a16="http://schemas.microsoft.com/office/drawing/2014/main" id="{27D757ED-4D55-06DF-5458-271AAC6127C3}"/>
+                <a16:creationId xmlns:a16="http://schemas.microsoft.com/office/drawing/2014/main" id="{14DB522F-D716-C6BF-F3A5-1209737DEB4F}"/>
               </a:ext>
             </a:extLst>
           </p:cNvPr>
@@ -38026,7 +37753,7 @@
           <p:cNvPr id="18" name="big-name-0">
             <a:extLst>
               <a:ext uri="{FF2B5EF4-FFF2-40B4-BE49-F238E27FC236}">
-                <a16:creationId xmlns:a16="http://schemas.microsoft.com/office/drawing/2014/main" id="{EF4A6948-0BEF-F925-030C-A279A39D2FB6}"/>
+                <a16:creationId xmlns:a16="http://schemas.microsoft.com/office/drawing/2014/main" id="{D8F27965-BBFD-59BF-DEBD-A5DE86539F22}"/>
               </a:ext>
             </a:extLst>
           </p:cNvPr>
@@ -38072,7 +37799,7 @@
           <p:cNvPr id="19" name="big-val-0">
             <a:extLst>
               <a:ext uri="{FF2B5EF4-FFF2-40B4-BE49-F238E27FC236}">
-                <a16:creationId xmlns:a16="http://schemas.microsoft.com/office/drawing/2014/main" id="{AA6842E3-691D-6641-4AAA-E4259F48D435}"/>
+                <a16:creationId xmlns:a16="http://schemas.microsoft.com/office/drawing/2014/main" id="{6B5C74A7-32DF-E924-41A0-071AF19C28B8}"/>
               </a:ext>
             </a:extLst>
           </p:cNvPr>
@@ -38118,7 +37845,7 @@
           <p:cNvPr id="20" name="big-ok-0">
             <a:extLst>
               <a:ext uri="{FF2B5EF4-FFF2-40B4-BE49-F238E27FC236}">
-                <a16:creationId xmlns:a16="http://schemas.microsoft.com/office/drawing/2014/main" id="{9B5A2F25-6AE1-5670-DEBD-E81124C6BE29}"/>
+                <a16:creationId xmlns:a16="http://schemas.microsoft.com/office/drawing/2014/main" id="{31A1B819-AE92-31B5-C1C8-95A0F20E001F}"/>
               </a:ext>
             </a:extLst>
           </p:cNvPr>
@@ -38164,7 +37891,7 @@
           <p:cNvPr id="21" name="big-ok-t-0">
             <a:extLst>
               <a:ext uri="{FF2B5EF4-FFF2-40B4-BE49-F238E27FC236}">
-                <a16:creationId xmlns:a16="http://schemas.microsoft.com/office/drawing/2014/main" id="{C95ECF13-DA05-B893-BD95-63968CA10DBB}"/>
+                <a16:creationId xmlns:a16="http://schemas.microsoft.com/office/drawing/2014/main" id="{0F0C56FC-72AD-CFA3-6A7F-47F5CBE7506E}"/>
               </a:ext>
             </a:extLst>
           </p:cNvPr>
@@ -38210,7 +37937,7 @@
           <p:cNvPr id="22" name="big-no-0">
             <a:extLst>
               <a:ext uri="{FF2B5EF4-FFF2-40B4-BE49-F238E27FC236}">
-                <a16:creationId xmlns:a16="http://schemas.microsoft.com/office/drawing/2014/main" id="{87D6C67E-E149-809E-6E3E-FCDDF8714BFB}"/>
+                <a16:creationId xmlns:a16="http://schemas.microsoft.com/office/drawing/2014/main" id="{7F8F8874-2B83-1881-822A-143225C6A563}"/>
               </a:ext>
             </a:extLst>
           </p:cNvPr>
@@ -38256,7 +37983,7 @@
           <p:cNvPr id="23" name="big-no-t-0">
             <a:extLst>
               <a:ext uri="{FF2B5EF4-FFF2-40B4-BE49-F238E27FC236}">
-                <a16:creationId xmlns:a16="http://schemas.microsoft.com/office/drawing/2014/main" id="{DB95C4A8-94B8-9525-F2DF-0721D498D9FB}"/>
+                <a16:creationId xmlns:a16="http://schemas.microsoft.com/office/drawing/2014/main" id="{0288CCF1-94C7-CA50-F4F0-EFF70B183DF8}"/>
               </a:ext>
             </a:extLst>
           </p:cNvPr>
@@ -38302,7 +38029,7 @@
           <p:cNvPr id="24" name="big-1">
             <a:extLst>
               <a:ext uri="{FF2B5EF4-FFF2-40B4-BE49-F238E27FC236}">
-                <a16:creationId xmlns:a16="http://schemas.microsoft.com/office/drawing/2014/main" id="{D27595C1-E188-AB73-8265-E011C196708A}"/>
+                <a16:creationId xmlns:a16="http://schemas.microsoft.com/office/drawing/2014/main" id="{072F743D-E369-DBDC-6628-5505A20EDB5B}"/>
               </a:ext>
             </a:extLst>
           </p:cNvPr>
@@ -38356,7 +38083,7 @@
           <p:cNvPr id="25" name="big-band-1">
             <a:extLst>
               <a:ext uri="{FF2B5EF4-FFF2-40B4-BE49-F238E27FC236}">
-                <a16:creationId xmlns:a16="http://schemas.microsoft.com/office/drawing/2014/main" id="{94F05AB6-C289-1BA7-1038-F1E74ABF47CD}"/>
+                <a16:creationId xmlns:a16="http://schemas.microsoft.com/office/drawing/2014/main" id="{807B8908-D3E8-9E5C-C515-953B05EA2ACD}"/>
               </a:ext>
             </a:extLst>
           </p:cNvPr>
@@ -38410,7 +38137,7 @@
           <p:cNvPr id="26" name="big-name-1">
             <a:extLst>
               <a:ext uri="{FF2B5EF4-FFF2-40B4-BE49-F238E27FC236}">
-                <a16:creationId xmlns:a16="http://schemas.microsoft.com/office/drawing/2014/main" id="{31900676-C19B-E084-1640-DF8CDDBA41EE}"/>
+                <a16:creationId xmlns:a16="http://schemas.microsoft.com/office/drawing/2014/main" id="{572672D9-5F28-D8BC-0B5C-E0D0471E1C72}"/>
               </a:ext>
             </a:extLst>
           </p:cNvPr>
@@ -38456,7 +38183,7 @@
           <p:cNvPr id="27" name="big-val-1">
             <a:extLst>
               <a:ext uri="{FF2B5EF4-FFF2-40B4-BE49-F238E27FC236}">
-                <a16:creationId xmlns:a16="http://schemas.microsoft.com/office/drawing/2014/main" id="{3141DACA-5368-0BEA-D3E0-D03F330BAFA1}"/>
+                <a16:creationId xmlns:a16="http://schemas.microsoft.com/office/drawing/2014/main" id="{F600D62B-A4E3-8B5E-31AE-358570740812}"/>
               </a:ext>
             </a:extLst>
           </p:cNvPr>
@@ -38502,7 +38229,7 @@
           <p:cNvPr id="28" name="big-ok-1">
             <a:extLst>
               <a:ext uri="{FF2B5EF4-FFF2-40B4-BE49-F238E27FC236}">
-                <a16:creationId xmlns:a16="http://schemas.microsoft.com/office/drawing/2014/main" id="{83B14EFD-A289-0E70-3302-8B0F3136B763}"/>
+                <a16:creationId xmlns:a16="http://schemas.microsoft.com/office/drawing/2014/main" id="{2A4B6D6B-24C9-A3AC-2407-97215AF568E5}"/>
               </a:ext>
             </a:extLst>
           </p:cNvPr>
@@ -38548,7 +38275,7 @@
           <p:cNvPr id="29" name="big-ok-t-1">
             <a:extLst>
               <a:ext uri="{FF2B5EF4-FFF2-40B4-BE49-F238E27FC236}">
-                <a16:creationId xmlns:a16="http://schemas.microsoft.com/office/drawing/2014/main" id="{1B3AC8D3-E4F6-4537-9461-B28060EBB7AA}"/>
+                <a16:creationId xmlns:a16="http://schemas.microsoft.com/office/drawing/2014/main" id="{47EDF922-C70D-8063-AABE-85C8D67F516D}"/>
               </a:ext>
             </a:extLst>
           </p:cNvPr>
@@ -38594,7 +38321,7 @@
           <p:cNvPr id="30" name="big-no-1">
             <a:extLst>
               <a:ext uri="{FF2B5EF4-FFF2-40B4-BE49-F238E27FC236}">
-                <a16:creationId xmlns:a16="http://schemas.microsoft.com/office/drawing/2014/main" id="{AC00FFF0-A8F9-A75A-CE14-186F0E43E4D9}"/>
+                <a16:creationId xmlns:a16="http://schemas.microsoft.com/office/drawing/2014/main" id="{F419AD57-046A-3E82-2B42-77EF18330909}"/>
               </a:ext>
             </a:extLst>
           </p:cNvPr>
@@ -38640,7 +38367,7 @@
           <p:cNvPr id="31" name="big-no-t-1">
             <a:extLst>
               <a:ext uri="{FF2B5EF4-FFF2-40B4-BE49-F238E27FC236}">
-                <a16:creationId xmlns:a16="http://schemas.microsoft.com/office/drawing/2014/main" id="{1091DE80-D972-5F6F-2756-CA02C337DFE9}"/>
+                <a16:creationId xmlns:a16="http://schemas.microsoft.com/office/drawing/2014/main" id="{F1109115-2C95-CCB9-2F43-BAB08AF21D1D}"/>
               </a:ext>
             </a:extLst>
           </p:cNvPr>
@@ -38686,7 +38413,7 @@
           <p:cNvPr id="32" name="big-2">
             <a:extLst>
               <a:ext uri="{FF2B5EF4-FFF2-40B4-BE49-F238E27FC236}">
-                <a16:creationId xmlns:a16="http://schemas.microsoft.com/office/drawing/2014/main" id="{26999468-E999-8143-EC7F-E6AD23432F86}"/>
+                <a16:creationId xmlns:a16="http://schemas.microsoft.com/office/drawing/2014/main" id="{15FFDA8F-216F-59CA-ACDB-7A235329D153}"/>
               </a:ext>
             </a:extLst>
           </p:cNvPr>
@@ -38740,7 +38467,7 @@
           <p:cNvPr id="33" name="big-band-2">
             <a:extLst>
               <a:ext uri="{FF2B5EF4-FFF2-40B4-BE49-F238E27FC236}">
-                <a16:creationId xmlns:a16="http://schemas.microsoft.com/office/drawing/2014/main" id="{EC36827B-3F91-3719-22E3-B204E35F1B3B}"/>
+                <a16:creationId xmlns:a16="http://schemas.microsoft.com/office/drawing/2014/main" id="{897FFE55-1911-9B43-C4EB-880E5FAA0C27}"/>
               </a:ext>
             </a:extLst>
           </p:cNvPr>
@@ -38794,7 +38521,7 @@
           <p:cNvPr id="34" name="big-name-2">
             <a:extLst>
               <a:ext uri="{FF2B5EF4-FFF2-40B4-BE49-F238E27FC236}">
-                <a16:creationId xmlns:a16="http://schemas.microsoft.com/office/drawing/2014/main" id="{E20259B0-9467-DD6E-B801-61F70B57DD57}"/>
+                <a16:creationId xmlns:a16="http://schemas.microsoft.com/office/drawing/2014/main" id="{6B52F3C7-C872-C468-10BD-522BC51DADB0}"/>
               </a:ext>
             </a:extLst>
           </p:cNvPr>
@@ -38840,7 +38567,7 @@
           <p:cNvPr id="35" name="big-val-2">
             <a:extLst>
               <a:ext uri="{FF2B5EF4-FFF2-40B4-BE49-F238E27FC236}">
-                <a16:creationId xmlns:a16="http://schemas.microsoft.com/office/drawing/2014/main" id="{F3987567-ACFA-69BF-45CC-4E1A6B5D79E9}"/>
+                <a16:creationId xmlns:a16="http://schemas.microsoft.com/office/drawing/2014/main" id="{F39BBC2A-160A-345E-3273-00FDEA1D64B3}"/>
               </a:ext>
             </a:extLst>
           </p:cNvPr>
@@ -38886,7 +38613,7 @@
           <p:cNvPr id="36" name="big-ok-2">
             <a:extLst>
               <a:ext uri="{FF2B5EF4-FFF2-40B4-BE49-F238E27FC236}">
-                <a16:creationId xmlns:a16="http://schemas.microsoft.com/office/drawing/2014/main" id="{E369D109-4ED7-7AAC-7D57-ACF49CE1EC81}"/>
+                <a16:creationId xmlns:a16="http://schemas.microsoft.com/office/drawing/2014/main" id="{D01FE246-CD84-1BB6-C776-3AD4F9C1ACC4}"/>
               </a:ext>
             </a:extLst>
           </p:cNvPr>
@@ -38932,7 +38659,7 @@
           <p:cNvPr id="37" name="big-ok-t-2">
             <a:extLst>
               <a:ext uri="{FF2B5EF4-FFF2-40B4-BE49-F238E27FC236}">
-                <a16:creationId xmlns:a16="http://schemas.microsoft.com/office/drawing/2014/main" id="{A5EA3428-F3B5-3022-E2D7-037AC8EA621C}"/>
+                <a16:creationId xmlns:a16="http://schemas.microsoft.com/office/drawing/2014/main" id="{B65BBB00-43DE-1B72-5B62-BBA78DEEF49D}"/>
               </a:ext>
             </a:extLst>
           </p:cNvPr>
@@ -38978,7 +38705,7 @@
           <p:cNvPr id="38" name="big-no-2">
             <a:extLst>
               <a:ext uri="{FF2B5EF4-FFF2-40B4-BE49-F238E27FC236}">
-                <a16:creationId xmlns:a16="http://schemas.microsoft.com/office/drawing/2014/main" id="{20466973-F446-F380-D766-4EE0623EE585}"/>
+                <a16:creationId xmlns:a16="http://schemas.microsoft.com/office/drawing/2014/main" id="{1FAD44D3-4000-5440-5CE4-4D958A3F1D00}"/>
               </a:ext>
             </a:extLst>
           </p:cNvPr>
@@ -39024,7 +38751,7 @@
           <p:cNvPr id="39" name="big-no-t-2">
             <a:extLst>
               <a:ext uri="{FF2B5EF4-FFF2-40B4-BE49-F238E27FC236}">
-                <a16:creationId xmlns:a16="http://schemas.microsoft.com/office/drawing/2014/main" id="{287DA171-F1EA-336E-2BCA-E9F07B66A0C4}"/>
+                <a16:creationId xmlns:a16="http://schemas.microsoft.com/office/drawing/2014/main" id="{0FF1D3B3-FD8F-C112-6520-AC3F838A091E}"/>
               </a:ext>
             </a:extLst>
           </p:cNvPr>
@@ -39070,7 +38797,7 @@
           <p:cNvPr id="40" name="small-0">
             <a:extLst>
               <a:ext uri="{FF2B5EF4-FFF2-40B4-BE49-F238E27FC236}">
-                <a16:creationId xmlns:a16="http://schemas.microsoft.com/office/drawing/2014/main" id="{781EEF15-3029-5DC7-4DF0-D4AF0F8FC30D}"/>
+                <a16:creationId xmlns:a16="http://schemas.microsoft.com/office/drawing/2014/main" id="{0F256551-D36B-80CE-40E8-CC8E2B4599A7}"/>
               </a:ext>
             </a:extLst>
           </p:cNvPr>
@@ -39124,7 +38851,7 @@
           <p:cNvPr id="41" name="small-band-0">
             <a:extLst>
               <a:ext uri="{FF2B5EF4-FFF2-40B4-BE49-F238E27FC236}">
-                <a16:creationId xmlns:a16="http://schemas.microsoft.com/office/drawing/2014/main" id="{1925FE63-3720-9025-61E5-1CBB352101BF}"/>
+                <a16:creationId xmlns:a16="http://schemas.microsoft.com/office/drawing/2014/main" id="{B3E0DB1E-0C62-E118-CFD5-DB6A0ED6387F}"/>
               </a:ext>
             </a:extLst>
           </p:cNvPr>
@@ -39178,7 +38905,7 @@
           <p:cNvPr id="42" name="small-name-0">
             <a:extLst>
               <a:ext uri="{FF2B5EF4-FFF2-40B4-BE49-F238E27FC236}">
-                <a16:creationId xmlns:a16="http://schemas.microsoft.com/office/drawing/2014/main" id="{D19D2973-15D4-36DA-F4A3-4E3111B6F4A4}"/>
+                <a16:creationId xmlns:a16="http://schemas.microsoft.com/office/drawing/2014/main" id="{B9A98B27-DC6E-098B-19D9-21BFFB55C32F}"/>
               </a:ext>
             </a:extLst>
           </p:cNvPr>
@@ -39224,7 +38951,7 @@
           <p:cNvPr id="43" name="small-val-0">
             <a:extLst>
               <a:ext uri="{FF2B5EF4-FFF2-40B4-BE49-F238E27FC236}">
-                <a16:creationId xmlns:a16="http://schemas.microsoft.com/office/drawing/2014/main" id="{A45015FC-BB2E-9282-4F16-69DC0062F860}"/>
+                <a16:creationId xmlns:a16="http://schemas.microsoft.com/office/drawing/2014/main" id="{0D739A1D-7F5D-24A7-20C8-FB1FC3BB28E5}"/>
               </a:ext>
             </a:extLst>
           </p:cNvPr>
@@ -39270,7 +38997,7 @@
           <p:cNvPr id="44" name="small-desc-0">
             <a:extLst>
               <a:ext uri="{FF2B5EF4-FFF2-40B4-BE49-F238E27FC236}">
-                <a16:creationId xmlns:a16="http://schemas.microsoft.com/office/drawing/2014/main" id="{436F8711-9F8A-1399-29A7-CCCE5CEA18E8}"/>
+                <a16:creationId xmlns:a16="http://schemas.microsoft.com/office/drawing/2014/main" id="{25EDD332-4C64-646F-F8FB-469AB270F0F1}"/>
               </a:ext>
             </a:extLst>
           </p:cNvPr>
@@ -39316,7 +39043,7 @@
           <p:cNvPr id="45" name="small-1">
             <a:extLst>
               <a:ext uri="{FF2B5EF4-FFF2-40B4-BE49-F238E27FC236}">
-                <a16:creationId xmlns:a16="http://schemas.microsoft.com/office/drawing/2014/main" id="{D82C775F-FDBC-B56C-9DC4-4B6DEFF0B741}"/>
+                <a16:creationId xmlns:a16="http://schemas.microsoft.com/office/drawing/2014/main" id="{98326B3D-CA6C-A92F-7EF9-E5A0A50CD76C}"/>
               </a:ext>
             </a:extLst>
           </p:cNvPr>
@@ -39370,7 +39097,7 @@
           <p:cNvPr id="46" name="small-band-1">
             <a:extLst>
               <a:ext uri="{FF2B5EF4-FFF2-40B4-BE49-F238E27FC236}">
-                <a16:creationId xmlns:a16="http://schemas.microsoft.com/office/drawing/2014/main" id="{1E07E450-5C5C-A7A3-AC50-2F590A7DF728}"/>
+                <a16:creationId xmlns:a16="http://schemas.microsoft.com/office/drawing/2014/main" id="{523C4143-BD26-64DD-AE74-9F3B0745A966}"/>
               </a:ext>
             </a:extLst>
           </p:cNvPr>
@@ -39424,7 +39151,7 @@
           <p:cNvPr id="47" name="small-name-1">
             <a:extLst>
               <a:ext uri="{FF2B5EF4-FFF2-40B4-BE49-F238E27FC236}">
-                <a16:creationId xmlns:a16="http://schemas.microsoft.com/office/drawing/2014/main" id="{9D2C0AEB-6682-7B18-7FD2-96AF90FD3092}"/>
+                <a16:creationId xmlns:a16="http://schemas.microsoft.com/office/drawing/2014/main" id="{C5C17BC7-FAD4-C7D0-B289-0D708C509E6F}"/>
               </a:ext>
             </a:extLst>
           </p:cNvPr>
@@ -39470,7 +39197,7 @@
           <p:cNvPr id="48" name="small-val-1">
             <a:extLst>
               <a:ext uri="{FF2B5EF4-FFF2-40B4-BE49-F238E27FC236}">
-                <a16:creationId xmlns:a16="http://schemas.microsoft.com/office/drawing/2014/main" id="{1B5D75F7-E136-C265-8DDC-56CF4E3078BE}"/>
+                <a16:creationId xmlns:a16="http://schemas.microsoft.com/office/drawing/2014/main" id="{F6E2E338-BE30-3343-AB21-CDCE124DE9B2}"/>
               </a:ext>
             </a:extLst>
           </p:cNvPr>
@@ -39516,7 +39243,7 @@
           <p:cNvPr id="49" name="small-desc-1">
             <a:extLst>
               <a:ext uri="{FF2B5EF4-FFF2-40B4-BE49-F238E27FC236}">
-                <a16:creationId xmlns:a16="http://schemas.microsoft.com/office/drawing/2014/main" id="{97AB1B52-979D-D150-B332-E20DE7C0D4B1}"/>
+                <a16:creationId xmlns:a16="http://schemas.microsoft.com/office/drawing/2014/main" id="{46471CAD-5E52-136F-8652-453D20564C90}"/>
               </a:ext>
             </a:extLst>
           </p:cNvPr>
@@ -39562,7 +39289,7 @@
           <p:cNvPr id="50" name="call">
             <a:extLst>
               <a:ext uri="{FF2B5EF4-FFF2-40B4-BE49-F238E27FC236}">
-                <a16:creationId xmlns:a16="http://schemas.microsoft.com/office/drawing/2014/main" id="{A37452AA-365C-8B0F-BB07-3952B48EBBC3}"/>
+                <a16:creationId xmlns:a16="http://schemas.microsoft.com/office/drawing/2014/main" id="{8BC509D9-C332-1F7A-1999-44E83DBD95CE}"/>
               </a:ext>
             </a:extLst>
           </p:cNvPr>
@@ -39616,7 +39343,7 @@
           <p:cNvPr id="51" name="call-t">
             <a:extLst>
               <a:ext uri="{FF2B5EF4-FFF2-40B4-BE49-F238E27FC236}">
-                <a16:creationId xmlns:a16="http://schemas.microsoft.com/office/drawing/2014/main" id="{F159E25E-C11F-3CB0-80E9-660047F81994}"/>
+                <a16:creationId xmlns:a16="http://schemas.microsoft.com/office/drawing/2014/main" id="{08EDD5D7-7901-C70C-C89C-3F110A79B78C}"/>
               </a:ext>
             </a:extLst>
           </p:cNvPr>
@@ -39663,7 +39390,7 @@
             <a:hlinkClick r:id="rId4"/>
             <a:extLst>
               <a:ext uri="{FF2B5EF4-FFF2-40B4-BE49-F238E27FC236}">
-                <a16:creationId xmlns:a16="http://schemas.microsoft.com/office/drawing/2014/main" id="{AD75D883-4041-3174-4204-AA767D3644CE}"/>
+                <a16:creationId xmlns:a16="http://schemas.microsoft.com/office/drawing/2014/main" id="{00C85BC2-4699-57A3-0BB7-4FDE4B6BDC1C}"/>
               </a:ext>
             </a:extLst>
           </p:cNvPr>
@@ -39724,7 +39451,7 @@
     </p:spTree>
     <p:extLst>
       <p:ext uri="{BB962C8B-B14F-4D97-AF65-F5344CB8AC3E}">
-        <p14:creationId xmlns:p14="http://schemas.microsoft.com/office/powerpoint/2010/main" val="1363934035"/>
+        <p14:creationId xmlns:p14="http://schemas.microsoft.com/office/powerpoint/2010/main" val="1232111248"/>
       </p:ext>
     </p:extLst>
   </p:cSld>
@@ -39902,7 +39629,7 @@
           <p:cNvPr id="2" name="bg">
             <a:extLst>
               <a:ext uri="{FF2B5EF4-FFF2-40B4-BE49-F238E27FC236}">
-                <a16:creationId xmlns:a16="http://schemas.microsoft.com/office/drawing/2014/main" id="{B9FE8007-7B3E-646F-E4F3-1C17A511122E}"/>
+                <a16:creationId xmlns:a16="http://schemas.microsoft.com/office/drawing/2014/main" id="{CC06CFB9-E656-DE25-D18D-5130ECAE5907}"/>
               </a:ext>
             </a:extLst>
           </p:cNvPr>
@@ -39963,7 +39690,7 @@
           <p:cNvPr id="3" name="rail">
             <a:extLst>
               <a:ext uri="{FF2B5EF4-FFF2-40B4-BE49-F238E27FC236}">
-                <a16:creationId xmlns:a16="http://schemas.microsoft.com/office/drawing/2014/main" id="{075B8D2E-F62A-9C43-157E-FAE66E6CF88E}"/>
+                <a16:creationId xmlns:a16="http://schemas.microsoft.com/office/drawing/2014/main" id="{EA716F60-1AF8-AE97-69A3-3FC6084975CE}"/>
               </a:ext>
             </a:extLst>
           </p:cNvPr>
@@ -40024,7 +39751,7 @@
           <p:cNvPr id="4" name="top-rule">
             <a:extLst>
               <a:ext uri="{FF2B5EF4-FFF2-40B4-BE49-F238E27FC236}">
-                <a16:creationId xmlns:a16="http://schemas.microsoft.com/office/drawing/2014/main" id="{18227657-1176-28EA-1B16-A3432D9A8A58}"/>
+                <a16:creationId xmlns:a16="http://schemas.microsoft.com/office/drawing/2014/main" id="{4278F670-B5CE-34F6-0E76-D93ADDEC13BC}"/>
               </a:ext>
             </a:extLst>
           </p:cNvPr>
@@ -40065,7 +39792,7 @@
           <p:cNvPr id="5" name="section">
             <a:extLst>
               <a:ext uri="{FF2B5EF4-FFF2-40B4-BE49-F238E27FC236}">
-                <a16:creationId xmlns:a16="http://schemas.microsoft.com/office/drawing/2014/main" id="{9B6D6537-40A3-8685-C7D9-1E36B794BCD8}"/>
+                <a16:creationId xmlns:a16="http://schemas.microsoft.com/office/drawing/2014/main" id="{9633F2FD-493C-C006-3D68-CABE4BFABE34}"/>
               </a:ext>
             </a:extLst>
           </p:cNvPr>
@@ -40111,7 +39838,7 @@
           <p:cNvPr id="6" name="num">
             <a:extLst>
               <a:ext uri="{FF2B5EF4-FFF2-40B4-BE49-F238E27FC236}">
-                <a16:creationId xmlns:a16="http://schemas.microsoft.com/office/drawing/2014/main" id="{35810492-CBD4-5BDC-DD41-981DE5625798}"/>
+                <a16:creationId xmlns:a16="http://schemas.microsoft.com/office/drawing/2014/main" id="{05404F5C-7572-871D-C731-CDE95679C937}"/>
               </a:ext>
             </a:extLst>
           </p:cNvPr>
@@ -40157,7 +39884,7 @@
           <p:cNvPr id="7" name="footer">
             <a:extLst>
               <a:ext uri="{FF2B5EF4-FFF2-40B4-BE49-F238E27FC236}">
-                <a16:creationId xmlns:a16="http://schemas.microsoft.com/office/drawing/2014/main" id="{6D55ABDE-9BAA-6FE8-D16D-2DD97148A401}"/>
+                <a16:creationId xmlns:a16="http://schemas.microsoft.com/office/drawing/2014/main" id="{DD3A9409-AA96-757B-EF0D-49A061376E52}"/>
               </a:ext>
             </a:extLst>
           </p:cNvPr>
@@ -40203,7 +39930,7 @@
           <p:cNvPr id="8" name="student">
             <a:extLst>
               <a:ext uri="{FF2B5EF4-FFF2-40B4-BE49-F238E27FC236}">
-                <a16:creationId xmlns:a16="http://schemas.microsoft.com/office/drawing/2014/main" id="{C5E17BAC-D03F-B9F3-5E21-7F13FD73DF53}"/>
+                <a16:creationId xmlns:a16="http://schemas.microsoft.com/office/drawing/2014/main" id="{667594E9-FC9F-D0B9-E4D0-C085150FE6BD}"/>
               </a:ext>
             </a:extLst>
           </p:cNvPr>
@@ -40249,7 +39976,7 @@
           <p:cNvPr id="10" name="图片 9">
             <a:extLst>
               <a:ext uri="{FF2B5EF4-FFF2-40B4-BE49-F238E27FC236}">
-                <a16:creationId xmlns:a16="http://schemas.microsoft.com/office/drawing/2014/main" id="{757CF49D-25CE-9CF7-ADBE-344519395E9B}"/>
+                <a16:creationId xmlns:a16="http://schemas.microsoft.com/office/drawing/2014/main" id="{7BE04FA0-6A1F-9AFB-F0CE-59E1A2233C5E}"/>
               </a:ext>
             </a:extLst>
           </p:cNvPr>
@@ -40285,7 +40012,7 @@
           <p:cNvPr id="11" name="title">
             <a:extLst>
               <a:ext uri="{FF2B5EF4-FFF2-40B4-BE49-F238E27FC236}">
-                <a16:creationId xmlns:a16="http://schemas.microsoft.com/office/drawing/2014/main" id="{6842D0C0-F1F5-7EE4-8306-8259791EBBB1}"/>
+                <a16:creationId xmlns:a16="http://schemas.microsoft.com/office/drawing/2014/main" id="{70C85664-1C45-E019-84F7-249FC2B754A9}"/>
               </a:ext>
             </a:extLst>
           </p:cNvPr>
@@ -40331,7 +40058,7 @@
           <p:cNvPr id="12" name="subtitle">
             <a:extLst>
               <a:ext uri="{FF2B5EF4-FFF2-40B4-BE49-F238E27FC236}">
-                <a16:creationId xmlns:a16="http://schemas.microsoft.com/office/drawing/2014/main" id="{5646106F-5A00-CB2D-4E95-349C34ACE95E}"/>
+                <a16:creationId xmlns:a16="http://schemas.microsoft.com/office/drawing/2014/main" id="{399139DB-8780-902A-135F-AA841DE4C7D5}"/>
               </a:ext>
             </a:extLst>
           </p:cNvPr>
@@ -40377,7 +40104,7 @@
           <p:cNvPr id="13" name="left">
             <a:extLst>
               <a:ext uri="{FF2B5EF4-FFF2-40B4-BE49-F238E27FC236}">
-                <a16:creationId xmlns:a16="http://schemas.microsoft.com/office/drawing/2014/main" id="{4AC88952-0CB6-A4E2-9D7C-9AF9F5CBBD67}"/>
+                <a16:creationId xmlns:a16="http://schemas.microsoft.com/office/drawing/2014/main" id="{3C735613-5075-01AB-AB42-D73BED2E83D1}"/>
               </a:ext>
             </a:extLst>
           </p:cNvPr>
@@ -40431,7 +40158,7 @@
           <p:cNvPr id="14" name="left-band">
             <a:extLst>
               <a:ext uri="{FF2B5EF4-FFF2-40B4-BE49-F238E27FC236}">
-                <a16:creationId xmlns:a16="http://schemas.microsoft.com/office/drawing/2014/main" id="{7A00CB69-2B34-27F2-D2FB-5E2248CFBFE9}"/>
+                <a16:creationId xmlns:a16="http://schemas.microsoft.com/office/drawing/2014/main" id="{DB5C0AED-9462-D127-53FA-99C713B33536}"/>
               </a:ext>
             </a:extLst>
           </p:cNvPr>
@@ -40485,7 +40212,7 @@
           <p:cNvPr id="15" name="left-k">
             <a:extLst>
               <a:ext uri="{FF2B5EF4-FFF2-40B4-BE49-F238E27FC236}">
-                <a16:creationId xmlns:a16="http://schemas.microsoft.com/office/drawing/2014/main" id="{1566C10A-E3D9-8391-F8B2-2CBED802A29C}"/>
+                <a16:creationId xmlns:a16="http://schemas.microsoft.com/office/drawing/2014/main" id="{6CABF18A-8ED7-B418-0438-F83DEDC80627}"/>
               </a:ext>
             </a:extLst>
           </p:cNvPr>
@@ -40531,7 +40258,7 @@
           <p:cNvPr id="16" name="left-v">
             <a:extLst>
               <a:ext uri="{FF2B5EF4-FFF2-40B4-BE49-F238E27FC236}">
-                <a16:creationId xmlns:a16="http://schemas.microsoft.com/office/drawing/2014/main" id="{D05443A3-EFAD-B778-0363-4341F3352151}"/>
+                <a16:creationId xmlns:a16="http://schemas.microsoft.com/office/drawing/2014/main" id="{C9B9166E-4D62-8AD0-2072-6178147AD443}"/>
               </a:ext>
             </a:extLst>
           </p:cNvPr>
@@ -40577,7 +40304,7 @@
           <p:cNvPr id="17" name="left-s">
             <a:extLst>
               <a:ext uri="{FF2B5EF4-FFF2-40B4-BE49-F238E27FC236}">
-                <a16:creationId xmlns:a16="http://schemas.microsoft.com/office/drawing/2014/main" id="{F6B69D4E-F4A6-A7EA-5A92-0C791F81A527}"/>
+                <a16:creationId xmlns:a16="http://schemas.microsoft.com/office/drawing/2014/main" id="{D0C76449-C5EF-C02D-AC23-6642A3368B81}"/>
               </a:ext>
             </a:extLst>
           </p:cNvPr>
@@ -40623,7 +40350,7 @@
           <p:cNvPr id="18" name="left-rule">
             <a:extLst>
               <a:ext uri="{FF2B5EF4-FFF2-40B4-BE49-F238E27FC236}">
-                <a16:creationId xmlns:a16="http://schemas.microsoft.com/office/drawing/2014/main" id="{AF183FDE-BA37-93A7-D406-70E3033B2102}"/>
+                <a16:creationId xmlns:a16="http://schemas.microsoft.com/office/drawing/2014/main" id="{49D18402-5F26-D3B9-6A59-6744188EBE68}"/>
               </a:ext>
             </a:extLst>
           </p:cNvPr>
@@ -40664,7 +40391,7 @@
           <p:cNvPr id="19" name="left-a">
             <a:extLst>
               <a:ext uri="{FF2B5EF4-FFF2-40B4-BE49-F238E27FC236}">
-                <a16:creationId xmlns:a16="http://schemas.microsoft.com/office/drawing/2014/main" id="{A847B6CB-42AF-3B92-AA89-5B4EB118A1A9}"/>
+                <a16:creationId xmlns:a16="http://schemas.microsoft.com/office/drawing/2014/main" id="{2118C997-C558-A1B5-C0F0-052D7A0842EF}"/>
               </a:ext>
             </a:extLst>
           </p:cNvPr>
@@ -40710,7 +40437,7 @@
           <p:cNvPr id="20" name="left-at">
             <a:extLst>
               <a:ext uri="{FF2B5EF4-FFF2-40B4-BE49-F238E27FC236}">
-                <a16:creationId xmlns:a16="http://schemas.microsoft.com/office/drawing/2014/main" id="{2F0EE05A-37C9-0CFE-3D6C-92B5FB880594}"/>
+                <a16:creationId xmlns:a16="http://schemas.microsoft.com/office/drawing/2014/main" id="{C70A7102-70BE-BC18-3EAE-F6710E30AB56}"/>
               </a:ext>
             </a:extLst>
           </p:cNvPr>
@@ -40756,7 +40483,7 @@
           <p:cNvPr id="21" name="left-b">
             <a:extLst>
               <a:ext uri="{FF2B5EF4-FFF2-40B4-BE49-F238E27FC236}">
-                <a16:creationId xmlns:a16="http://schemas.microsoft.com/office/drawing/2014/main" id="{9CB62D6B-EF20-14F5-7468-EA6B0DD9AF94}"/>
+                <a16:creationId xmlns:a16="http://schemas.microsoft.com/office/drawing/2014/main" id="{37D75C8C-78CC-C425-EB6B-AF4F48D700C7}"/>
               </a:ext>
             </a:extLst>
           </p:cNvPr>
@@ -40802,7 +40529,7 @@
           <p:cNvPr id="22" name="left-bt">
             <a:extLst>
               <a:ext uri="{FF2B5EF4-FFF2-40B4-BE49-F238E27FC236}">
-                <a16:creationId xmlns:a16="http://schemas.microsoft.com/office/drawing/2014/main" id="{2A732B8E-2193-E5CF-F852-228CDC93C9A8}"/>
+                <a16:creationId xmlns:a16="http://schemas.microsoft.com/office/drawing/2014/main" id="{E0FE634A-1893-1821-3A1B-5045840CF8A5}"/>
               </a:ext>
             </a:extLst>
           </p:cNvPr>
@@ -40848,7 +40575,7 @@
           <p:cNvPr id="23" name="right">
             <a:extLst>
               <a:ext uri="{FF2B5EF4-FFF2-40B4-BE49-F238E27FC236}">
-                <a16:creationId xmlns:a16="http://schemas.microsoft.com/office/drawing/2014/main" id="{AD87BD94-8F6D-28AA-D16E-BACB99574EFA}"/>
+                <a16:creationId xmlns:a16="http://schemas.microsoft.com/office/drawing/2014/main" id="{0CA0372F-CF84-B50B-50D9-38FD6FC2330D}"/>
               </a:ext>
             </a:extLst>
           </p:cNvPr>
@@ -40902,7 +40629,7 @@
           <p:cNvPr id="24" name="right-band">
             <a:extLst>
               <a:ext uri="{FF2B5EF4-FFF2-40B4-BE49-F238E27FC236}">
-                <a16:creationId xmlns:a16="http://schemas.microsoft.com/office/drawing/2014/main" id="{163D8365-BA00-B9D5-CF7E-E092CB6C0AE9}"/>
+                <a16:creationId xmlns:a16="http://schemas.microsoft.com/office/drawing/2014/main" id="{204C0195-9AA9-CDD2-B133-56D8B045AEE2}"/>
               </a:ext>
             </a:extLst>
           </p:cNvPr>
@@ -40956,7 +40683,7 @@
           <p:cNvPr id="25" name="right-k">
             <a:extLst>
               <a:ext uri="{FF2B5EF4-FFF2-40B4-BE49-F238E27FC236}">
-                <a16:creationId xmlns:a16="http://schemas.microsoft.com/office/drawing/2014/main" id="{6EC0D2B0-1938-280D-417A-E74D7157EC05}"/>
+                <a16:creationId xmlns:a16="http://schemas.microsoft.com/office/drawing/2014/main" id="{BE02F707-0F7D-CE2F-3229-05FDB9CBCF32}"/>
               </a:ext>
             </a:extLst>
           </p:cNvPr>
@@ -41002,7 +40729,7 @@
           <p:cNvPr id="26" name="right-v">
             <a:extLst>
               <a:ext uri="{FF2B5EF4-FFF2-40B4-BE49-F238E27FC236}">
-                <a16:creationId xmlns:a16="http://schemas.microsoft.com/office/drawing/2014/main" id="{A7568E28-BEF9-2B80-7589-93DC6DAA53B4}"/>
+                <a16:creationId xmlns:a16="http://schemas.microsoft.com/office/drawing/2014/main" id="{72372B50-9678-A45B-5AB3-7D2FA46D3020}"/>
               </a:ext>
             </a:extLst>
           </p:cNvPr>
@@ -41048,7 +40775,7 @@
           <p:cNvPr id="27" name="right-s">
             <a:extLst>
               <a:ext uri="{FF2B5EF4-FFF2-40B4-BE49-F238E27FC236}">
-                <a16:creationId xmlns:a16="http://schemas.microsoft.com/office/drawing/2014/main" id="{EEDFFFE7-1169-45A7-8886-05C3EE65D848}"/>
+                <a16:creationId xmlns:a16="http://schemas.microsoft.com/office/drawing/2014/main" id="{03333CDB-7F2A-9F46-1EF2-D1E8376F6220}"/>
               </a:ext>
             </a:extLst>
           </p:cNvPr>
@@ -41094,7 +40821,7 @@
           <p:cNvPr id="28" name="right-rule">
             <a:extLst>
               <a:ext uri="{FF2B5EF4-FFF2-40B4-BE49-F238E27FC236}">
-                <a16:creationId xmlns:a16="http://schemas.microsoft.com/office/drawing/2014/main" id="{7D473058-8E2B-B70C-D07A-88DE6653EB37}"/>
+                <a16:creationId xmlns:a16="http://schemas.microsoft.com/office/drawing/2014/main" id="{DB2B72D5-D527-33A1-1DDC-E4DE0BC6ACBB}"/>
               </a:ext>
             </a:extLst>
           </p:cNvPr>
@@ -41135,7 +40862,7 @@
           <p:cNvPr id="29" name="right-a">
             <a:extLst>
               <a:ext uri="{FF2B5EF4-FFF2-40B4-BE49-F238E27FC236}">
-                <a16:creationId xmlns:a16="http://schemas.microsoft.com/office/drawing/2014/main" id="{E3BFBB1F-AD82-DD89-7052-DF622AD178E3}"/>
+                <a16:creationId xmlns:a16="http://schemas.microsoft.com/office/drawing/2014/main" id="{526DF217-BD08-38C6-9C21-897E9C506A57}"/>
               </a:ext>
             </a:extLst>
           </p:cNvPr>
@@ -41181,7 +40908,7 @@
           <p:cNvPr id="30" name="right-at">
             <a:extLst>
               <a:ext uri="{FF2B5EF4-FFF2-40B4-BE49-F238E27FC236}">
-                <a16:creationId xmlns:a16="http://schemas.microsoft.com/office/drawing/2014/main" id="{9C54D9DE-1E1A-5472-C829-95658BEF75ED}"/>
+                <a16:creationId xmlns:a16="http://schemas.microsoft.com/office/drawing/2014/main" id="{D0BB88EE-E71B-E7F1-5879-6A949E8982EF}"/>
               </a:ext>
             </a:extLst>
           </p:cNvPr>
@@ -41227,7 +40954,7 @@
           <p:cNvPr id="31" name="right-b">
             <a:extLst>
               <a:ext uri="{FF2B5EF4-FFF2-40B4-BE49-F238E27FC236}">
-                <a16:creationId xmlns:a16="http://schemas.microsoft.com/office/drawing/2014/main" id="{694CAC34-2702-DF8A-8D4E-69290CFE5CB2}"/>
+                <a16:creationId xmlns:a16="http://schemas.microsoft.com/office/drawing/2014/main" id="{B4EBFD85-0005-742B-8F75-6CBCDBDCDF49}"/>
               </a:ext>
             </a:extLst>
           </p:cNvPr>
@@ -41273,7 +41000,7 @@
           <p:cNvPr id="32" name="right-bt">
             <a:extLst>
               <a:ext uri="{FF2B5EF4-FFF2-40B4-BE49-F238E27FC236}">
-                <a16:creationId xmlns:a16="http://schemas.microsoft.com/office/drawing/2014/main" id="{3FC94690-8325-A8D8-F596-07E536ECF5FC}"/>
+                <a16:creationId xmlns:a16="http://schemas.microsoft.com/office/drawing/2014/main" id="{30BF6E95-258D-51BD-CA8D-B2681244F3A5}"/>
               </a:ext>
             </a:extLst>
           </p:cNvPr>
@@ -41319,7 +41046,7 @@
           <p:cNvPr id="33" name="rule">
             <a:extLst>
               <a:ext uri="{FF2B5EF4-FFF2-40B4-BE49-F238E27FC236}">
-                <a16:creationId xmlns:a16="http://schemas.microsoft.com/office/drawing/2014/main" id="{482D0B95-8D5C-9CD9-8CBD-5B36F34242FF}"/>
+                <a16:creationId xmlns:a16="http://schemas.microsoft.com/office/drawing/2014/main" id="{C0AE421D-6ACC-3FF9-CC9B-C31F5843D384}"/>
               </a:ext>
             </a:extLst>
           </p:cNvPr>
@@ -41373,7 +41100,7 @@
           <p:cNvPr id="34" name="rule-t">
             <a:extLst>
               <a:ext uri="{FF2B5EF4-FFF2-40B4-BE49-F238E27FC236}">
-                <a16:creationId xmlns:a16="http://schemas.microsoft.com/office/drawing/2014/main" id="{9B5A409B-D3FD-12EB-4616-563E237DF5EB}"/>
+                <a16:creationId xmlns:a16="http://schemas.microsoft.com/office/drawing/2014/main" id="{C0119D2C-9A8A-553D-90F0-ADD1CC410B8B}"/>
               </a:ext>
             </a:extLst>
           </p:cNvPr>
@@ -41420,7 +41147,7 @@
             <a:hlinkClick r:id="rId4"/>
             <a:extLst>
               <a:ext uri="{FF2B5EF4-FFF2-40B4-BE49-F238E27FC236}">
-                <a16:creationId xmlns:a16="http://schemas.microsoft.com/office/drawing/2014/main" id="{A0D6DFC0-B0E6-FEA4-7F5B-1E202A58C7DD}"/>
+                <a16:creationId xmlns:a16="http://schemas.microsoft.com/office/drawing/2014/main" id="{BE66F7DF-1713-5DD1-5BF3-58635732F162}"/>
               </a:ext>
             </a:extLst>
           </p:cNvPr>
@@ -41481,7 +41208,7 @@
     </p:spTree>
     <p:extLst>
       <p:ext uri="{BB962C8B-B14F-4D97-AF65-F5344CB8AC3E}">
-        <p14:creationId xmlns:p14="http://schemas.microsoft.com/office/powerpoint/2010/main" val="3692165467"/>
+        <p14:creationId xmlns:p14="http://schemas.microsoft.com/office/powerpoint/2010/main" val="426235057"/>
       </p:ext>
     </p:extLst>
   </p:cSld>
@@ -42557,7 +42284,7 @@
           <p:cNvPr id="2" name="bg">
             <a:extLst>
               <a:ext uri="{FF2B5EF4-FFF2-40B4-BE49-F238E27FC236}">
-                <a16:creationId xmlns:a16="http://schemas.microsoft.com/office/drawing/2014/main" id="{4DF7F4BF-94E3-B16D-6232-362B0CE84ED6}"/>
+                <a16:creationId xmlns:a16="http://schemas.microsoft.com/office/drawing/2014/main" id="{EC884958-D784-7AA2-3FEB-5397C2408DE8}"/>
               </a:ext>
             </a:extLst>
           </p:cNvPr>
@@ -42618,7 +42345,7 @@
           <p:cNvPr id="3" name="rail">
             <a:extLst>
               <a:ext uri="{FF2B5EF4-FFF2-40B4-BE49-F238E27FC236}">
-                <a16:creationId xmlns:a16="http://schemas.microsoft.com/office/drawing/2014/main" id="{EC8BB91B-2B2C-4B1E-D449-D8617F17269C}"/>
+                <a16:creationId xmlns:a16="http://schemas.microsoft.com/office/drawing/2014/main" id="{C2366C06-785A-AFE0-A6D7-BA5445E56E44}"/>
               </a:ext>
             </a:extLst>
           </p:cNvPr>
@@ -42679,7 +42406,7 @@
           <p:cNvPr id="4" name="top-rule">
             <a:extLst>
               <a:ext uri="{FF2B5EF4-FFF2-40B4-BE49-F238E27FC236}">
-                <a16:creationId xmlns:a16="http://schemas.microsoft.com/office/drawing/2014/main" id="{02ED0C68-C886-DFA5-1BD8-2B56804E0FBC}"/>
+                <a16:creationId xmlns:a16="http://schemas.microsoft.com/office/drawing/2014/main" id="{5841559C-5505-DD49-6873-1D9DC68A1C3D}"/>
               </a:ext>
             </a:extLst>
           </p:cNvPr>
@@ -42720,7 +42447,7 @@
           <p:cNvPr id="5" name="section">
             <a:extLst>
               <a:ext uri="{FF2B5EF4-FFF2-40B4-BE49-F238E27FC236}">
-                <a16:creationId xmlns:a16="http://schemas.microsoft.com/office/drawing/2014/main" id="{E61957A8-E184-1155-C80A-E0679363C962}"/>
+                <a16:creationId xmlns:a16="http://schemas.microsoft.com/office/drawing/2014/main" id="{C4A822A7-95F7-A9EE-282D-5C44ABA43B1E}"/>
               </a:ext>
             </a:extLst>
           </p:cNvPr>
@@ -42766,7 +42493,7 @@
           <p:cNvPr id="6" name="num">
             <a:extLst>
               <a:ext uri="{FF2B5EF4-FFF2-40B4-BE49-F238E27FC236}">
-                <a16:creationId xmlns:a16="http://schemas.microsoft.com/office/drawing/2014/main" id="{A7D779AD-02E0-773E-5656-29BE5A052B9C}"/>
+                <a16:creationId xmlns:a16="http://schemas.microsoft.com/office/drawing/2014/main" id="{B655DF8D-134C-45DD-4501-A6CEF0272C1C}"/>
               </a:ext>
             </a:extLst>
           </p:cNvPr>
@@ -42812,7 +42539,7 @@
           <p:cNvPr id="7" name="footer">
             <a:extLst>
               <a:ext uri="{FF2B5EF4-FFF2-40B4-BE49-F238E27FC236}">
-                <a16:creationId xmlns:a16="http://schemas.microsoft.com/office/drawing/2014/main" id="{6945CFD6-7EE4-9FA1-5FF5-6EB182CA1774}"/>
+                <a16:creationId xmlns:a16="http://schemas.microsoft.com/office/drawing/2014/main" id="{95A3E871-E44A-0A78-91CA-0825240E8516}"/>
               </a:ext>
             </a:extLst>
           </p:cNvPr>
@@ -42858,7 +42585,7 @@
           <p:cNvPr id="8" name="student">
             <a:extLst>
               <a:ext uri="{FF2B5EF4-FFF2-40B4-BE49-F238E27FC236}">
-                <a16:creationId xmlns:a16="http://schemas.microsoft.com/office/drawing/2014/main" id="{4AFD57AF-5813-9A20-04CA-0B5814E2E0A3}"/>
+                <a16:creationId xmlns:a16="http://schemas.microsoft.com/office/drawing/2014/main" id="{379F0B43-06A7-46C4-0784-9A2788ABE63A}"/>
               </a:ext>
             </a:extLst>
           </p:cNvPr>
@@ -42904,7 +42631,7 @@
           <p:cNvPr id="10" name="图片 9">
             <a:extLst>
               <a:ext uri="{FF2B5EF4-FFF2-40B4-BE49-F238E27FC236}">
-                <a16:creationId xmlns:a16="http://schemas.microsoft.com/office/drawing/2014/main" id="{8DFE3248-2A0E-4A5E-B6A3-41E277709412}"/>
+                <a16:creationId xmlns:a16="http://schemas.microsoft.com/office/drawing/2014/main" id="{9C78E65E-49F2-83BF-BC54-B6DFAE3B0CC5}"/>
               </a:ext>
             </a:extLst>
           </p:cNvPr>
@@ -42940,7 +42667,7 @@
           <p:cNvPr id="11" name="title">
             <a:extLst>
               <a:ext uri="{FF2B5EF4-FFF2-40B4-BE49-F238E27FC236}">
-                <a16:creationId xmlns:a16="http://schemas.microsoft.com/office/drawing/2014/main" id="{5D01843F-9D28-D457-D3BE-6D99513044C2}"/>
+                <a16:creationId xmlns:a16="http://schemas.microsoft.com/office/drawing/2014/main" id="{B6D2E356-B0C1-EB63-A72A-24A637AFAF6C}"/>
               </a:ext>
             </a:extLst>
           </p:cNvPr>
@@ -42986,7 +42713,7 @@
           <p:cNvPr id="12" name="subtitle">
             <a:extLst>
               <a:ext uri="{FF2B5EF4-FFF2-40B4-BE49-F238E27FC236}">
-                <a16:creationId xmlns:a16="http://schemas.microsoft.com/office/drawing/2014/main" id="{D986EB79-F1DC-BD2A-60A6-15F5C621693F}"/>
+                <a16:creationId xmlns:a16="http://schemas.microsoft.com/office/drawing/2014/main" id="{F54AE880-03DA-89D0-2D3A-B80208A4DFE9}"/>
               </a:ext>
             </a:extLst>
           </p:cNvPr>
@@ -43032,7 +42759,7 @@
           <p:cNvPr id="13" name="shot-frame">
             <a:extLst>
               <a:ext uri="{FF2B5EF4-FFF2-40B4-BE49-F238E27FC236}">
-                <a16:creationId xmlns:a16="http://schemas.microsoft.com/office/drawing/2014/main" id="{518E109D-F32F-5A71-9EEF-C0300B258B48}"/>
+                <a16:creationId xmlns:a16="http://schemas.microsoft.com/office/drawing/2014/main" id="{FF26A57B-3B5B-8D10-2508-208D5D806D93}"/>
               </a:ext>
             </a:extLst>
           </p:cNvPr>
@@ -43086,7 +42813,7 @@
           <p:cNvPr id="15" name="project-page">
             <a:extLst>
               <a:ext uri="{FF2B5EF4-FFF2-40B4-BE49-F238E27FC236}">
-                <a16:creationId xmlns:a16="http://schemas.microsoft.com/office/drawing/2014/main" id="{98F9FB35-C688-EB2F-223B-FF2E4CD31CD2}"/>
+                <a16:creationId xmlns:a16="http://schemas.microsoft.com/office/drawing/2014/main" id="{63702298-3E5B-2D5C-E7D2-EBE1CEF46FED}"/>
               </a:ext>
             </a:extLst>
           </p:cNvPr>
@@ -43127,7 +42854,7 @@
           <p:cNvPr id="16" name="demo-under">
             <a:extLst>
               <a:ext uri="{FF2B5EF4-FFF2-40B4-BE49-F238E27FC236}">
-                <a16:creationId xmlns:a16="http://schemas.microsoft.com/office/drawing/2014/main" id="{CCC6AD88-510F-2AE1-C009-E5CCDAA7C40E}"/>
+                <a16:creationId xmlns:a16="http://schemas.microsoft.com/office/drawing/2014/main" id="{5256E86E-70B7-A9FF-9D82-E4D1AEDB5351}"/>
               </a:ext>
             </a:extLst>
           </p:cNvPr>
@@ -43181,7 +42908,7 @@
           <p:cNvPr id="17" name="demo-under-t">
             <a:extLst>
               <a:ext uri="{FF2B5EF4-FFF2-40B4-BE49-F238E27FC236}">
-                <a16:creationId xmlns:a16="http://schemas.microsoft.com/office/drawing/2014/main" id="{A767893E-FA5E-A328-3143-54309D405803}"/>
+                <a16:creationId xmlns:a16="http://schemas.microsoft.com/office/drawing/2014/main" id="{86CFA4D0-D7A8-A216-BEBF-F4EBE12DD64B}"/>
               </a:ext>
             </a:extLst>
           </p:cNvPr>
@@ -43228,7 +42955,7 @@
             <a:hlinkClick r:id="rId5"/>
             <a:extLst>
               <a:ext uri="{FF2B5EF4-FFF2-40B4-BE49-F238E27FC236}">
-                <a16:creationId xmlns:a16="http://schemas.microsoft.com/office/drawing/2014/main" id="{409876C3-211E-F0D5-308A-A1AC82FC5116}"/>
+                <a16:creationId xmlns:a16="http://schemas.microsoft.com/office/drawing/2014/main" id="{93936389-43FF-524D-1A9C-7B698F8E039D}"/>
               </a:ext>
             </a:extLst>
           </p:cNvPr>
@@ -43296,7 +43023,7 @@
           <p:cNvPr id="19" name="route">
             <a:extLst>
               <a:ext uri="{FF2B5EF4-FFF2-40B4-BE49-F238E27FC236}">
-                <a16:creationId xmlns:a16="http://schemas.microsoft.com/office/drawing/2014/main" id="{E55C94C5-91C0-74AE-46F3-4BA19397A207}"/>
+                <a16:creationId xmlns:a16="http://schemas.microsoft.com/office/drawing/2014/main" id="{D4583347-49AD-DFAD-036F-7EAAD5B82724}"/>
               </a:ext>
             </a:extLst>
           </p:cNvPr>
@@ -43350,7 +43077,7 @@
           <p:cNvPr id="20" name="route-k">
             <a:extLst>
               <a:ext uri="{FF2B5EF4-FFF2-40B4-BE49-F238E27FC236}">
-                <a16:creationId xmlns:a16="http://schemas.microsoft.com/office/drawing/2014/main" id="{7C2C9B81-F220-B5A2-5B53-4A16C4508318}"/>
+                <a16:creationId xmlns:a16="http://schemas.microsoft.com/office/drawing/2014/main" id="{BE58C80B-3C9F-6E03-DFCD-FC4F9F66F16C}"/>
               </a:ext>
             </a:extLst>
           </p:cNvPr>
@@ -43396,7 +43123,7 @@
           <p:cNvPr id="21" name="rnum-0">
             <a:extLst>
               <a:ext uri="{FF2B5EF4-FFF2-40B4-BE49-F238E27FC236}">
-                <a16:creationId xmlns:a16="http://schemas.microsoft.com/office/drawing/2014/main" id="{298AFA9F-916F-76CE-9F60-1281F4CF4891}"/>
+                <a16:creationId xmlns:a16="http://schemas.microsoft.com/office/drawing/2014/main" id="{A109A7EB-DD18-1976-F0D5-ED2D87A3FF6B}"/>
               </a:ext>
             </a:extLst>
           </p:cNvPr>
@@ -43450,7 +43177,7 @@
           <p:cNvPr id="22" name="rnumt-0">
             <a:extLst>
               <a:ext uri="{FF2B5EF4-FFF2-40B4-BE49-F238E27FC236}">
-                <a16:creationId xmlns:a16="http://schemas.microsoft.com/office/drawing/2014/main" id="{FEA7EEA7-166D-FA2B-1352-0E2F4957DA19}"/>
+                <a16:creationId xmlns:a16="http://schemas.microsoft.com/office/drawing/2014/main" id="{F8608FF9-39FA-9D53-B6DA-9842C9C24412}"/>
               </a:ext>
             </a:extLst>
           </p:cNvPr>
@@ -43496,7 +43223,7 @@
           <p:cNvPr id="23" name="rt-0">
             <a:extLst>
               <a:ext uri="{FF2B5EF4-FFF2-40B4-BE49-F238E27FC236}">
-                <a16:creationId xmlns:a16="http://schemas.microsoft.com/office/drawing/2014/main" id="{94DED53A-98C4-45A4-F43E-FE05D52DECBB}"/>
+                <a16:creationId xmlns:a16="http://schemas.microsoft.com/office/drawing/2014/main" id="{112284AC-6ED9-4337-A86D-4868741E7C7D}"/>
               </a:ext>
             </a:extLst>
           </p:cNvPr>
@@ -43542,7 +43269,7 @@
           <p:cNvPr id="24" name="rnum-1">
             <a:extLst>
               <a:ext uri="{FF2B5EF4-FFF2-40B4-BE49-F238E27FC236}">
-                <a16:creationId xmlns:a16="http://schemas.microsoft.com/office/drawing/2014/main" id="{B1B7AFD2-BAF9-8903-E6D3-8CD1F7C0352D}"/>
+                <a16:creationId xmlns:a16="http://schemas.microsoft.com/office/drawing/2014/main" id="{685540CE-187D-8693-9C2D-2046F7ABE72E}"/>
               </a:ext>
             </a:extLst>
           </p:cNvPr>
@@ -43596,7 +43323,7 @@
           <p:cNvPr id="25" name="rnumt-1">
             <a:extLst>
               <a:ext uri="{FF2B5EF4-FFF2-40B4-BE49-F238E27FC236}">
-                <a16:creationId xmlns:a16="http://schemas.microsoft.com/office/drawing/2014/main" id="{9DA21092-8D6A-F595-7B4D-8AC0F08FB34A}"/>
+                <a16:creationId xmlns:a16="http://schemas.microsoft.com/office/drawing/2014/main" id="{8E71FB81-4080-51B7-B86D-9384511C266B}"/>
               </a:ext>
             </a:extLst>
           </p:cNvPr>
@@ -43642,7 +43369,7 @@
           <p:cNvPr id="26" name="rt-1">
             <a:extLst>
               <a:ext uri="{FF2B5EF4-FFF2-40B4-BE49-F238E27FC236}">
-                <a16:creationId xmlns:a16="http://schemas.microsoft.com/office/drawing/2014/main" id="{CA8EA7D1-AF9F-4C9B-883F-D063D4280635}"/>
+                <a16:creationId xmlns:a16="http://schemas.microsoft.com/office/drawing/2014/main" id="{7DEAC235-AEFA-FA6E-817B-678E23605C99}"/>
               </a:ext>
             </a:extLst>
           </p:cNvPr>
@@ -43688,7 +43415,7 @@
           <p:cNvPr id="27" name="rnum-2">
             <a:extLst>
               <a:ext uri="{FF2B5EF4-FFF2-40B4-BE49-F238E27FC236}">
-                <a16:creationId xmlns:a16="http://schemas.microsoft.com/office/drawing/2014/main" id="{BFB4E150-9EFE-A1D9-CBE3-D38098B5EC30}"/>
+                <a16:creationId xmlns:a16="http://schemas.microsoft.com/office/drawing/2014/main" id="{746D897F-5717-F31C-27C4-15E17AC76DDF}"/>
               </a:ext>
             </a:extLst>
           </p:cNvPr>
@@ -43742,7 +43469,7 @@
           <p:cNvPr id="28" name="rnumt-2">
             <a:extLst>
               <a:ext uri="{FF2B5EF4-FFF2-40B4-BE49-F238E27FC236}">
-                <a16:creationId xmlns:a16="http://schemas.microsoft.com/office/drawing/2014/main" id="{8E0758B8-3AB7-508C-0291-865B78EC7726}"/>
+                <a16:creationId xmlns:a16="http://schemas.microsoft.com/office/drawing/2014/main" id="{D501B837-DCC0-A6EE-54EE-21AE18A4BE8F}"/>
               </a:ext>
             </a:extLst>
           </p:cNvPr>
@@ -43788,7 +43515,7 @@
           <p:cNvPr id="29" name="rt-2">
             <a:extLst>
               <a:ext uri="{FF2B5EF4-FFF2-40B4-BE49-F238E27FC236}">
-                <a16:creationId xmlns:a16="http://schemas.microsoft.com/office/drawing/2014/main" id="{A81F514A-B4FC-6483-A313-046BA899ACE6}"/>
+                <a16:creationId xmlns:a16="http://schemas.microsoft.com/office/drawing/2014/main" id="{0446674E-2017-F951-8582-19CD31543E50}"/>
               </a:ext>
             </a:extLst>
           </p:cNvPr>
@@ -43834,7 +43561,7 @@
           <p:cNvPr id="30" name="rnum-3">
             <a:extLst>
               <a:ext uri="{FF2B5EF4-FFF2-40B4-BE49-F238E27FC236}">
-                <a16:creationId xmlns:a16="http://schemas.microsoft.com/office/drawing/2014/main" id="{579CBC54-D4C7-5AD7-C746-0F6AF5F09336}"/>
+                <a16:creationId xmlns:a16="http://schemas.microsoft.com/office/drawing/2014/main" id="{A5378264-72A8-A027-9C7B-6A3ED813C210}"/>
               </a:ext>
             </a:extLst>
           </p:cNvPr>
@@ -43888,7 +43615,7 @@
           <p:cNvPr id="31" name="rnumt-3">
             <a:extLst>
               <a:ext uri="{FF2B5EF4-FFF2-40B4-BE49-F238E27FC236}">
-                <a16:creationId xmlns:a16="http://schemas.microsoft.com/office/drawing/2014/main" id="{ABFC28CA-E393-E51F-8F01-EAA2393AA3A2}"/>
+                <a16:creationId xmlns:a16="http://schemas.microsoft.com/office/drawing/2014/main" id="{AF3ECB2D-366C-F201-115C-434F71A357E4}"/>
               </a:ext>
             </a:extLst>
           </p:cNvPr>
@@ -43934,7 +43661,7 @@
           <p:cNvPr id="32" name="rt-3">
             <a:extLst>
               <a:ext uri="{FF2B5EF4-FFF2-40B4-BE49-F238E27FC236}">
-                <a16:creationId xmlns:a16="http://schemas.microsoft.com/office/drawing/2014/main" id="{FE68C566-F263-3E99-3AB2-B205370C073C}"/>
+                <a16:creationId xmlns:a16="http://schemas.microsoft.com/office/drawing/2014/main" id="{F6B4C661-1A00-8530-0933-0F3810576C4C}"/>
               </a:ext>
             </a:extLst>
           </p:cNvPr>
@@ -43980,7 +43707,7 @@
           <p:cNvPr id="33" name="rnum-4">
             <a:extLst>
               <a:ext uri="{FF2B5EF4-FFF2-40B4-BE49-F238E27FC236}">
-                <a16:creationId xmlns:a16="http://schemas.microsoft.com/office/drawing/2014/main" id="{9FC3D7E6-23D6-717E-49A7-948C653FCB0D}"/>
+                <a16:creationId xmlns:a16="http://schemas.microsoft.com/office/drawing/2014/main" id="{68F2F636-DE9B-41CB-6202-0FE885448254}"/>
               </a:ext>
             </a:extLst>
           </p:cNvPr>
@@ -44034,7 +43761,7 @@
           <p:cNvPr id="34" name="rnumt-4">
             <a:extLst>
               <a:ext uri="{FF2B5EF4-FFF2-40B4-BE49-F238E27FC236}">
-                <a16:creationId xmlns:a16="http://schemas.microsoft.com/office/drawing/2014/main" id="{F3EFB5B4-2B14-3EEC-36B5-F17EB4FB9C9D}"/>
+                <a16:creationId xmlns:a16="http://schemas.microsoft.com/office/drawing/2014/main" id="{24D669BC-5D4F-E982-DF57-51C649B116B4}"/>
               </a:ext>
             </a:extLst>
           </p:cNvPr>
@@ -44080,7 +43807,7 @@
           <p:cNvPr id="35" name="rt-4">
             <a:extLst>
               <a:ext uri="{FF2B5EF4-FFF2-40B4-BE49-F238E27FC236}">
-                <a16:creationId xmlns:a16="http://schemas.microsoft.com/office/drawing/2014/main" id="{4EAF2E65-FC17-D829-4D96-FF00D5522AB6}"/>
+                <a16:creationId xmlns:a16="http://schemas.microsoft.com/office/drawing/2014/main" id="{08AFD690-D88E-F2D4-21CF-4A780CEE6A09}"/>
               </a:ext>
             </a:extLst>
           </p:cNvPr>
@@ -44127,7 +43854,7 @@
             <a:hlinkClick r:id="rId5"/>
             <a:extLst>
               <a:ext uri="{FF2B5EF4-FFF2-40B4-BE49-F238E27FC236}">
-                <a16:creationId xmlns:a16="http://schemas.microsoft.com/office/drawing/2014/main" id="{8CBF6E4A-E512-9C1B-937C-5C2267A8F444}"/>
+                <a16:creationId xmlns:a16="http://schemas.microsoft.com/office/drawing/2014/main" id="{13F75FE6-7979-8C27-3926-A7EE63C40C77}"/>
               </a:ext>
             </a:extLst>
           </p:cNvPr>
@@ -44188,7 +43915,7 @@
     </p:spTree>
     <p:extLst>
       <p:ext uri="{BB962C8B-B14F-4D97-AF65-F5344CB8AC3E}">
-        <p14:creationId xmlns:p14="http://schemas.microsoft.com/office/powerpoint/2010/main" val="1368879047"/>
+        <p14:creationId xmlns:p14="http://schemas.microsoft.com/office/powerpoint/2010/main" val="2224919955"/>
       </p:ext>
     </p:extLst>
   </p:cSld>

--- a/docs/WatermarkScope_FYP_Viva.pptx
+++ b/docs/WatermarkScope_FYP_Viva.pptx
@@ -205,7 +205,7 @@
             </a:lvl1pPr>
           </a:lstStyle>
           <a:p>
-            <a:fld id="{E42F852D-F725-4B91-9DA6-627445BBDCDF}" type="datetimeFigureOut">
+            <a:fld id="{AB5A03C3-31C5-4360-AE37-38C9F394CADA}" type="datetimeFigureOut">
               <a:rPr lang="zh-CN" altLang="en-US" smtClean="0"/>
               <a:t>2026/5/15</a:t>
             </a:fld>
@@ -363,7 +363,7 @@
             </a:lvl1pPr>
           </a:lstStyle>
           <a:p>
-            <a:fld id="{5278B4E5-1F60-451A-B79C-E55D2238D8E0}" type="slidenum">
+            <a:fld id="{EC0D1325-43DF-407E-BD7B-79DA3298A8CD}" type="slidenum">
               <a:rPr lang="zh-CN" altLang="en-US" smtClean="0"/>
               <a:t>‹#›</a:t>
             </a:fld>
@@ -374,7 +374,7 @@
     </p:spTree>
     <p:extLst>
       <p:ext uri="{BB962C8B-B14F-4D97-AF65-F5344CB8AC3E}">
-        <p14:creationId xmlns:p14="http://schemas.microsoft.com/office/powerpoint/2010/main" val="1371166994"/>
+        <p14:creationId xmlns:p14="http://schemas.microsoft.com/office/powerpoint/2010/main" val="2520771944"/>
       </p:ext>
     </p:extLst>
   </p:cSld>
@@ -541,7 +541,7 @@
           <a:bodyPr/>
           <a:lstStyle/>
           <a:p>
-            <a:fld id="{5278B4E5-1F60-451A-B79C-E55D2238D8E0}" type="slidenum">
+            <a:fld id="{EC0D1325-43DF-407E-BD7B-79DA3298A8CD}" type="slidenum">
               <a:rPr lang="zh-CN" altLang="en-US" smtClean="0"/>
               <a:t>1</a:t>
             </a:fld>
@@ -552,7 +552,7 @@
     </p:spTree>
     <p:extLst>
       <p:ext uri="{BB962C8B-B14F-4D97-AF65-F5344CB8AC3E}">
-        <p14:creationId xmlns:p14="http://schemas.microsoft.com/office/powerpoint/2010/main" val="2132486330"/>
+        <p14:creationId xmlns:p14="http://schemas.microsoft.com/office/powerpoint/2010/main" val="3588201938"/>
       </p:ext>
     </p:extLst>
   </p:cSld>
@@ -629,7 +629,7 @@
           <a:bodyPr/>
           <a:lstStyle/>
           <a:p>
-            <a:fld id="{5278B4E5-1F60-451A-B79C-E55D2238D8E0}" type="slidenum">
+            <a:fld id="{EC0D1325-43DF-407E-BD7B-79DA3298A8CD}" type="slidenum">
               <a:rPr lang="zh-CN" altLang="en-US" smtClean="0"/>
               <a:t>10</a:t>
             </a:fld>
@@ -640,7 +640,7 @@
     </p:spTree>
     <p:extLst>
       <p:ext uri="{BB962C8B-B14F-4D97-AF65-F5344CB8AC3E}">
-        <p14:creationId xmlns:p14="http://schemas.microsoft.com/office/powerpoint/2010/main" val="2267298493"/>
+        <p14:creationId xmlns:p14="http://schemas.microsoft.com/office/powerpoint/2010/main" val="2675977076"/>
       </p:ext>
     </p:extLst>
   </p:cSld>
@@ -717,7 +717,7 @@
           <a:bodyPr/>
           <a:lstStyle/>
           <a:p>
-            <a:fld id="{5278B4E5-1F60-451A-B79C-E55D2238D8E0}" type="slidenum">
+            <a:fld id="{EC0D1325-43DF-407E-BD7B-79DA3298A8CD}" type="slidenum">
               <a:rPr lang="zh-CN" altLang="en-US" smtClean="0"/>
               <a:t>11</a:t>
             </a:fld>
@@ -728,7 +728,7 @@
     </p:spTree>
     <p:extLst>
       <p:ext uri="{BB962C8B-B14F-4D97-AF65-F5344CB8AC3E}">
-        <p14:creationId xmlns:p14="http://schemas.microsoft.com/office/powerpoint/2010/main" val="3433245960"/>
+        <p14:creationId xmlns:p14="http://schemas.microsoft.com/office/powerpoint/2010/main" val="1452529288"/>
       </p:ext>
     </p:extLst>
   </p:cSld>
@@ -805,7 +805,7 @@
           <a:bodyPr/>
           <a:lstStyle/>
           <a:p>
-            <a:fld id="{5278B4E5-1F60-451A-B79C-E55D2238D8E0}" type="slidenum">
+            <a:fld id="{EC0D1325-43DF-407E-BD7B-79DA3298A8CD}" type="slidenum">
               <a:rPr lang="zh-CN" altLang="en-US" smtClean="0"/>
               <a:t>12</a:t>
             </a:fld>
@@ -816,7 +816,7 @@
     </p:spTree>
     <p:extLst>
       <p:ext uri="{BB962C8B-B14F-4D97-AF65-F5344CB8AC3E}">
-        <p14:creationId xmlns:p14="http://schemas.microsoft.com/office/powerpoint/2010/main" val="3085111688"/>
+        <p14:creationId xmlns:p14="http://schemas.microsoft.com/office/powerpoint/2010/main" val="910221274"/>
       </p:ext>
     </p:extLst>
   </p:cSld>
@@ -893,7 +893,7 @@
           <a:bodyPr/>
           <a:lstStyle/>
           <a:p>
-            <a:fld id="{5278B4E5-1F60-451A-B79C-E55D2238D8E0}" type="slidenum">
+            <a:fld id="{EC0D1325-43DF-407E-BD7B-79DA3298A8CD}" type="slidenum">
               <a:rPr lang="zh-CN" altLang="en-US" smtClean="0"/>
               <a:t>13</a:t>
             </a:fld>
@@ -904,7 +904,7 @@
     </p:spTree>
     <p:extLst>
       <p:ext uri="{BB962C8B-B14F-4D97-AF65-F5344CB8AC3E}">
-        <p14:creationId xmlns:p14="http://schemas.microsoft.com/office/powerpoint/2010/main" val="2888893926"/>
+        <p14:creationId xmlns:p14="http://schemas.microsoft.com/office/powerpoint/2010/main" val="1758721212"/>
       </p:ext>
     </p:extLst>
   </p:cSld>
@@ -960,7 +960,7 @@
           <a:p>
             <a:r>
               <a:rPr lang="en-US" altLang="zh-CN"/>
-              <a:t>This backup slide defines the notation. It is only for Q&amp;A.</a:t>
+              <a:t>This backup slide explains the notation. If asked about a formula, I should translate it into plain English: fix the denominator, run controls, preserve the artifact, and then state only the bounded claim.</a:t>
             </a:r>
             <a:endParaRPr lang="zh-CN" altLang="en-US"/>
           </a:p>
@@ -981,7 +981,7 @@
           <a:bodyPr/>
           <a:lstStyle/>
           <a:p>
-            <a:fld id="{5278B4E5-1F60-451A-B79C-E55D2238D8E0}" type="slidenum">
+            <a:fld id="{EC0D1325-43DF-407E-BD7B-79DA3298A8CD}" type="slidenum">
               <a:rPr lang="zh-CN" altLang="en-US" smtClean="0"/>
               <a:t>14</a:t>
             </a:fld>
@@ -992,7 +992,7 @@
     </p:spTree>
     <p:extLst>
       <p:ext uri="{BB962C8B-B14F-4D97-AF65-F5344CB8AC3E}">
-        <p14:creationId xmlns:p14="http://schemas.microsoft.com/office/powerpoint/2010/main" val="892846590"/>
+        <p14:creationId xmlns:p14="http://schemas.microsoft.com/office/powerpoint/2010/main" val="472517434"/>
       </p:ext>
     </p:extLst>
   </p:cSld>
@@ -1069,7 +1069,7 @@
           <a:bodyPr/>
           <a:lstStyle/>
           <a:p>
-            <a:fld id="{5278B4E5-1F60-451A-B79C-E55D2238D8E0}" type="slidenum">
+            <a:fld id="{EC0D1325-43DF-407E-BD7B-79DA3298A8CD}" type="slidenum">
               <a:rPr lang="zh-CN" altLang="en-US" smtClean="0"/>
               <a:t>15</a:t>
             </a:fld>
@@ -1080,7 +1080,7 @@
     </p:spTree>
     <p:extLst>
       <p:ext uri="{BB962C8B-B14F-4D97-AF65-F5344CB8AC3E}">
-        <p14:creationId xmlns:p14="http://schemas.microsoft.com/office/powerpoint/2010/main" val="2680791215"/>
+        <p14:creationId xmlns:p14="http://schemas.microsoft.com/office/powerpoint/2010/main" val="3820189773"/>
       </p:ext>
     </p:extLst>
   </p:cSld>
@@ -1157,7 +1157,7 @@
           <a:bodyPr/>
           <a:lstStyle/>
           <a:p>
-            <a:fld id="{5278B4E5-1F60-451A-B79C-E55D2238D8E0}" type="slidenum">
+            <a:fld id="{EC0D1325-43DF-407E-BD7B-79DA3298A8CD}" type="slidenum">
               <a:rPr lang="zh-CN" altLang="en-US" smtClean="0"/>
               <a:t>16</a:t>
             </a:fld>
@@ -1168,7 +1168,7 @@
     </p:spTree>
     <p:extLst>
       <p:ext uri="{BB962C8B-B14F-4D97-AF65-F5344CB8AC3E}">
-        <p14:creationId xmlns:p14="http://schemas.microsoft.com/office/powerpoint/2010/main" val="3528884602"/>
+        <p14:creationId xmlns:p14="http://schemas.microsoft.com/office/powerpoint/2010/main" val="56702089"/>
       </p:ext>
     </p:extLst>
   </p:cSld>
@@ -1245,7 +1245,7 @@
           <a:bodyPr/>
           <a:lstStyle/>
           <a:p>
-            <a:fld id="{5278B4E5-1F60-451A-B79C-E55D2238D8E0}" type="slidenum">
+            <a:fld id="{EC0D1325-43DF-407E-BD7B-79DA3298A8CD}" type="slidenum">
               <a:rPr lang="zh-CN" altLang="en-US" smtClean="0"/>
               <a:t>2</a:t>
             </a:fld>
@@ -1256,7 +1256,7 @@
     </p:spTree>
     <p:extLst>
       <p:ext uri="{BB962C8B-B14F-4D97-AF65-F5344CB8AC3E}">
-        <p14:creationId xmlns:p14="http://schemas.microsoft.com/office/powerpoint/2010/main" val="288378519"/>
+        <p14:creationId xmlns:p14="http://schemas.microsoft.com/office/powerpoint/2010/main" val="946960055"/>
       </p:ext>
     </p:extLst>
   </p:cSld>
@@ -1333,7 +1333,7 @@
           <a:bodyPr/>
           <a:lstStyle/>
           <a:p>
-            <a:fld id="{5278B4E5-1F60-451A-B79C-E55D2238D8E0}" type="slidenum">
+            <a:fld id="{EC0D1325-43DF-407E-BD7B-79DA3298A8CD}" type="slidenum">
               <a:rPr lang="zh-CN" altLang="en-US" smtClean="0"/>
               <a:t>3</a:t>
             </a:fld>
@@ -1344,7 +1344,7 @@
     </p:spTree>
     <p:extLst>
       <p:ext uri="{BB962C8B-B14F-4D97-AF65-F5344CB8AC3E}">
-        <p14:creationId xmlns:p14="http://schemas.microsoft.com/office/powerpoint/2010/main" val="9366786"/>
+        <p14:creationId xmlns:p14="http://schemas.microsoft.com/office/powerpoint/2010/main" val="2396604277"/>
       </p:ext>
     </p:extLst>
   </p:cSld>
@@ -1421,7 +1421,7 @@
           <a:bodyPr/>
           <a:lstStyle/>
           <a:p>
-            <a:fld id="{5278B4E5-1F60-451A-B79C-E55D2238D8E0}" type="slidenum">
+            <a:fld id="{EC0D1325-43DF-407E-BD7B-79DA3298A8CD}" type="slidenum">
               <a:rPr lang="zh-CN" altLang="en-US" smtClean="0"/>
               <a:t>4</a:t>
             </a:fld>
@@ -1432,7 +1432,7 @@
     </p:spTree>
     <p:extLst>
       <p:ext uri="{BB962C8B-B14F-4D97-AF65-F5344CB8AC3E}">
-        <p14:creationId xmlns:p14="http://schemas.microsoft.com/office/powerpoint/2010/main" val="2434887129"/>
+        <p14:creationId xmlns:p14="http://schemas.microsoft.com/office/powerpoint/2010/main" val="3681914659"/>
       </p:ext>
     </p:extLst>
   </p:cSld>
@@ -1509,7 +1509,7 @@
           <a:bodyPr/>
           <a:lstStyle/>
           <a:p>
-            <a:fld id="{5278B4E5-1F60-451A-B79C-E55D2238D8E0}" type="slidenum">
+            <a:fld id="{EC0D1325-43DF-407E-BD7B-79DA3298A8CD}" type="slidenum">
               <a:rPr lang="zh-CN" altLang="en-US" smtClean="0"/>
               <a:t>5</a:t>
             </a:fld>
@@ -1520,7 +1520,7 @@
     </p:spTree>
     <p:extLst>
       <p:ext uri="{BB962C8B-B14F-4D97-AF65-F5344CB8AC3E}">
-        <p14:creationId xmlns:p14="http://schemas.microsoft.com/office/powerpoint/2010/main" val="267272452"/>
+        <p14:creationId xmlns:p14="http://schemas.microsoft.com/office/powerpoint/2010/main" val="2637244286"/>
       </p:ext>
     </p:extLst>
   </p:cSld>
@@ -1597,7 +1597,7 @@
           <a:bodyPr/>
           <a:lstStyle/>
           <a:p>
-            <a:fld id="{5278B4E5-1F60-451A-B79C-E55D2238D8E0}" type="slidenum">
+            <a:fld id="{EC0D1325-43DF-407E-BD7B-79DA3298A8CD}" type="slidenum">
               <a:rPr lang="zh-CN" altLang="en-US" smtClean="0"/>
               <a:t>6</a:t>
             </a:fld>
@@ -1608,7 +1608,7 @@
     </p:spTree>
     <p:extLst>
       <p:ext uri="{BB962C8B-B14F-4D97-AF65-F5344CB8AC3E}">
-        <p14:creationId xmlns:p14="http://schemas.microsoft.com/office/powerpoint/2010/main" val="1818883874"/>
+        <p14:creationId xmlns:p14="http://schemas.microsoft.com/office/powerpoint/2010/main" val="1681875428"/>
       </p:ext>
     </p:extLst>
   </p:cSld>
@@ -1685,7 +1685,7 @@
           <a:bodyPr/>
           <a:lstStyle/>
           <a:p>
-            <a:fld id="{5278B4E5-1F60-451A-B79C-E55D2238D8E0}" type="slidenum">
+            <a:fld id="{EC0D1325-43DF-407E-BD7B-79DA3298A8CD}" type="slidenum">
               <a:rPr lang="zh-CN" altLang="en-US" smtClean="0"/>
               <a:t>7</a:t>
             </a:fld>
@@ -1696,7 +1696,7 @@
     </p:spTree>
     <p:extLst>
       <p:ext uri="{BB962C8B-B14F-4D97-AF65-F5344CB8AC3E}">
-        <p14:creationId xmlns:p14="http://schemas.microsoft.com/office/powerpoint/2010/main" val="1801196217"/>
+        <p14:creationId xmlns:p14="http://schemas.microsoft.com/office/powerpoint/2010/main" val="3984881200"/>
       </p:ext>
     </p:extLst>
   </p:cSld>
@@ -1773,7 +1773,7 @@
           <a:bodyPr/>
           <a:lstStyle/>
           <a:p>
-            <a:fld id="{5278B4E5-1F60-451A-B79C-E55D2238D8E0}" type="slidenum">
+            <a:fld id="{EC0D1325-43DF-407E-BD7B-79DA3298A8CD}" type="slidenum">
               <a:rPr lang="zh-CN" altLang="en-US" smtClean="0"/>
               <a:t>8</a:t>
             </a:fld>
@@ -1784,7 +1784,7 @@
     </p:spTree>
     <p:extLst>
       <p:ext uri="{BB962C8B-B14F-4D97-AF65-F5344CB8AC3E}">
-        <p14:creationId xmlns:p14="http://schemas.microsoft.com/office/powerpoint/2010/main" val="2801733599"/>
+        <p14:creationId xmlns:p14="http://schemas.microsoft.com/office/powerpoint/2010/main" val="3568902784"/>
       </p:ext>
     </p:extLst>
   </p:cSld>
@@ -1861,7 +1861,7 @@
           <a:bodyPr/>
           <a:lstStyle/>
           <a:p>
-            <a:fld id="{5278B4E5-1F60-451A-B79C-E55D2238D8E0}" type="slidenum">
+            <a:fld id="{EC0D1325-43DF-407E-BD7B-79DA3298A8CD}" type="slidenum">
               <a:rPr lang="zh-CN" altLang="en-US" smtClean="0"/>
               <a:t>9</a:t>
             </a:fld>
@@ -1872,7 +1872,7 @@
     </p:spTree>
     <p:extLst>
       <p:ext uri="{BB962C8B-B14F-4D97-AF65-F5344CB8AC3E}">
-        <p14:creationId xmlns:p14="http://schemas.microsoft.com/office/powerpoint/2010/main" val="1364646373"/>
+        <p14:creationId xmlns:p14="http://schemas.microsoft.com/office/powerpoint/2010/main" val="4115142043"/>
       </p:ext>
     </p:extLst>
   </p:cSld>
@@ -1904,7 +1904,7 @@
           <p:cNvPr id="2" name="标题 1">
             <a:extLst>
               <a:ext uri="{FF2B5EF4-FFF2-40B4-BE49-F238E27FC236}">
-                <a16:creationId xmlns:a16="http://schemas.microsoft.com/office/drawing/2014/main" id="{CCEF191F-6757-D935-C76F-0FE52A3197C7}"/>
+                <a16:creationId xmlns:a16="http://schemas.microsoft.com/office/drawing/2014/main" id="{E4483042-3AC8-4AE0-58FD-611F80401D56}"/>
               </a:ext>
             </a:extLst>
           </p:cNvPr>
@@ -1941,7 +1941,7 @@
           <p:cNvPr id="3" name="副标题 2">
             <a:extLst>
               <a:ext uri="{FF2B5EF4-FFF2-40B4-BE49-F238E27FC236}">
-                <a16:creationId xmlns:a16="http://schemas.microsoft.com/office/drawing/2014/main" id="{0235379E-3252-13F9-D583-652814FCA9D3}"/>
+                <a16:creationId xmlns:a16="http://schemas.microsoft.com/office/drawing/2014/main" id="{AC5EEE95-1DEC-BD30-6F2F-BD0FDC4C1E1C}"/>
               </a:ext>
             </a:extLst>
           </p:cNvPr>
@@ -2011,7 +2011,7 @@
           <p:cNvPr id="4" name="日期占位符 3">
             <a:extLst>
               <a:ext uri="{FF2B5EF4-FFF2-40B4-BE49-F238E27FC236}">
-                <a16:creationId xmlns:a16="http://schemas.microsoft.com/office/drawing/2014/main" id="{9C88FBA3-E368-BE2B-4F1C-022EDB6BBAB5}"/>
+                <a16:creationId xmlns:a16="http://schemas.microsoft.com/office/drawing/2014/main" id="{C5C004C6-C545-D497-5FDB-F6E0BD0A6B00}"/>
               </a:ext>
             </a:extLst>
           </p:cNvPr>
@@ -2027,7 +2027,7 @@
           <a:bodyPr/>
           <a:lstStyle/>
           <a:p>
-            <a:fld id="{90A087C6-6293-4C91-AE24-2445A871C412}" type="datetimeFigureOut">
+            <a:fld id="{60D9FF60-80F7-4871-A393-9759AE8E5043}" type="datetimeFigureOut">
               <a:rPr lang="zh-CN" altLang="en-US" smtClean="0"/>
               <a:t>2026/5/15</a:t>
             </a:fld>
@@ -2040,7 +2040,7 @@
           <p:cNvPr id="5" name="页脚占位符 4">
             <a:extLst>
               <a:ext uri="{FF2B5EF4-FFF2-40B4-BE49-F238E27FC236}">
-                <a16:creationId xmlns:a16="http://schemas.microsoft.com/office/drawing/2014/main" id="{3FFABC64-8747-0F0F-13CD-43427CA697AA}"/>
+                <a16:creationId xmlns:a16="http://schemas.microsoft.com/office/drawing/2014/main" id="{31B9238D-058E-E18D-9BD8-26411FA809FA}"/>
               </a:ext>
             </a:extLst>
           </p:cNvPr>
@@ -2065,7 +2065,7 @@
           <p:cNvPr id="6" name="灯片编号占位符 5">
             <a:extLst>
               <a:ext uri="{FF2B5EF4-FFF2-40B4-BE49-F238E27FC236}">
-                <a16:creationId xmlns:a16="http://schemas.microsoft.com/office/drawing/2014/main" id="{0C417A0A-3D45-9877-01A5-E36ACBB38BA1}"/>
+                <a16:creationId xmlns:a16="http://schemas.microsoft.com/office/drawing/2014/main" id="{D7167202-7403-0929-12DF-A44EC516B989}"/>
               </a:ext>
             </a:extLst>
           </p:cNvPr>
@@ -2081,7 +2081,7 @@
           <a:bodyPr/>
           <a:lstStyle/>
           <a:p>
-            <a:fld id="{54A4F7AE-8FB6-4B02-9F03-C4D030564A12}" type="slidenum">
+            <a:fld id="{2DFB0C09-02B1-4FD9-9132-88FB23AD6455}" type="slidenum">
               <a:rPr lang="zh-CN" altLang="en-US" smtClean="0"/>
               <a:t>‹#›</a:t>
             </a:fld>
@@ -2092,7 +2092,7 @@
     </p:spTree>
     <p:extLst>
       <p:ext uri="{BB962C8B-B14F-4D97-AF65-F5344CB8AC3E}">
-        <p14:creationId xmlns:p14="http://schemas.microsoft.com/office/powerpoint/2010/main" val="3481972419"/>
+        <p14:creationId xmlns:p14="http://schemas.microsoft.com/office/powerpoint/2010/main" val="2276284212"/>
       </p:ext>
     </p:extLst>
   </p:cSld>
@@ -2124,7 +2124,7 @@
           <p:cNvPr id="2" name="标题 1">
             <a:extLst>
               <a:ext uri="{FF2B5EF4-FFF2-40B4-BE49-F238E27FC236}">
-                <a16:creationId xmlns:a16="http://schemas.microsoft.com/office/drawing/2014/main" id="{48AA3234-8CC2-53C7-7CC4-8B2DE7EFDA8D}"/>
+                <a16:creationId xmlns:a16="http://schemas.microsoft.com/office/drawing/2014/main" id="{EA4E7E21-EEC5-C282-7DD5-564379264C2D}"/>
               </a:ext>
             </a:extLst>
           </p:cNvPr>
@@ -2152,7 +2152,7 @@
           <p:cNvPr id="3" name="竖排文字占位符 2">
             <a:extLst>
               <a:ext uri="{FF2B5EF4-FFF2-40B4-BE49-F238E27FC236}">
-                <a16:creationId xmlns:a16="http://schemas.microsoft.com/office/drawing/2014/main" id="{0E1BE46B-D8B5-136F-D834-2AD80AE3FAAF}"/>
+                <a16:creationId xmlns:a16="http://schemas.microsoft.com/office/drawing/2014/main" id="{A910FAFB-A920-13FC-CFE5-E17B9FB8260C}"/>
               </a:ext>
             </a:extLst>
           </p:cNvPr>
@@ -2209,7 +2209,7 @@
           <p:cNvPr id="4" name="日期占位符 3">
             <a:extLst>
               <a:ext uri="{FF2B5EF4-FFF2-40B4-BE49-F238E27FC236}">
-                <a16:creationId xmlns:a16="http://schemas.microsoft.com/office/drawing/2014/main" id="{8A6A7770-92A7-5A9A-2D4F-31FADA8E01E3}"/>
+                <a16:creationId xmlns:a16="http://schemas.microsoft.com/office/drawing/2014/main" id="{6EBD6F91-BF6E-FEBB-2764-5CF4DC93B44B}"/>
               </a:ext>
             </a:extLst>
           </p:cNvPr>
@@ -2225,7 +2225,7 @@
           <a:bodyPr/>
           <a:lstStyle/>
           <a:p>
-            <a:fld id="{90A087C6-6293-4C91-AE24-2445A871C412}" type="datetimeFigureOut">
+            <a:fld id="{60D9FF60-80F7-4871-A393-9759AE8E5043}" type="datetimeFigureOut">
               <a:rPr lang="zh-CN" altLang="en-US" smtClean="0"/>
               <a:t>2026/5/15</a:t>
             </a:fld>
@@ -2238,7 +2238,7 @@
           <p:cNvPr id="5" name="页脚占位符 4">
             <a:extLst>
               <a:ext uri="{FF2B5EF4-FFF2-40B4-BE49-F238E27FC236}">
-                <a16:creationId xmlns:a16="http://schemas.microsoft.com/office/drawing/2014/main" id="{2B577503-49A9-6BDC-7563-88DFE5D928C3}"/>
+                <a16:creationId xmlns:a16="http://schemas.microsoft.com/office/drawing/2014/main" id="{EA90CB36-D3AE-E4F8-4F58-54E9BD916B24}"/>
               </a:ext>
             </a:extLst>
           </p:cNvPr>
@@ -2263,7 +2263,7 @@
           <p:cNvPr id="6" name="灯片编号占位符 5">
             <a:extLst>
               <a:ext uri="{FF2B5EF4-FFF2-40B4-BE49-F238E27FC236}">
-                <a16:creationId xmlns:a16="http://schemas.microsoft.com/office/drawing/2014/main" id="{9ECB832C-FE28-DB9C-4ABA-8A223CA7E269}"/>
+                <a16:creationId xmlns:a16="http://schemas.microsoft.com/office/drawing/2014/main" id="{601920EE-8DFD-D1DF-D923-91018FB9836A}"/>
               </a:ext>
             </a:extLst>
           </p:cNvPr>
@@ -2279,7 +2279,7 @@
           <a:bodyPr/>
           <a:lstStyle/>
           <a:p>
-            <a:fld id="{54A4F7AE-8FB6-4B02-9F03-C4D030564A12}" type="slidenum">
+            <a:fld id="{2DFB0C09-02B1-4FD9-9132-88FB23AD6455}" type="slidenum">
               <a:rPr lang="zh-CN" altLang="en-US" smtClean="0"/>
               <a:t>‹#›</a:t>
             </a:fld>
@@ -2290,7 +2290,7 @@
     </p:spTree>
     <p:extLst>
       <p:ext uri="{BB962C8B-B14F-4D97-AF65-F5344CB8AC3E}">
-        <p14:creationId xmlns:p14="http://schemas.microsoft.com/office/powerpoint/2010/main" val="554937692"/>
+        <p14:creationId xmlns:p14="http://schemas.microsoft.com/office/powerpoint/2010/main" val="3948346388"/>
       </p:ext>
     </p:extLst>
   </p:cSld>
@@ -2322,7 +2322,7 @@
           <p:cNvPr id="2" name="竖排标题 1">
             <a:extLst>
               <a:ext uri="{FF2B5EF4-FFF2-40B4-BE49-F238E27FC236}">
-                <a16:creationId xmlns:a16="http://schemas.microsoft.com/office/drawing/2014/main" id="{3AF2E0CD-05F7-9046-9E18-BCAB7A15B64E}"/>
+                <a16:creationId xmlns:a16="http://schemas.microsoft.com/office/drawing/2014/main" id="{10F759A6-455C-BD7A-1402-48B46CBEFC3E}"/>
               </a:ext>
             </a:extLst>
           </p:cNvPr>
@@ -2355,7 +2355,7 @@
           <p:cNvPr id="3" name="竖排文字占位符 2">
             <a:extLst>
               <a:ext uri="{FF2B5EF4-FFF2-40B4-BE49-F238E27FC236}">
-                <a16:creationId xmlns:a16="http://schemas.microsoft.com/office/drawing/2014/main" id="{6F12E6E8-6926-14F5-791D-E0F521790824}"/>
+                <a16:creationId xmlns:a16="http://schemas.microsoft.com/office/drawing/2014/main" id="{CE7A3AEC-3C5A-6361-3BD1-243CECECD20F}"/>
               </a:ext>
             </a:extLst>
           </p:cNvPr>
@@ -2417,7 +2417,7 @@
           <p:cNvPr id="4" name="日期占位符 3">
             <a:extLst>
               <a:ext uri="{FF2B5EF4-FFF2-40B4-BE49-F238E27FC236}">
-                <a16:creationId xmlns:a16="http://schemas.microsoft.com/office/drawing/2014/main" id="{2AB278C0-052B-FF25-1351-686F81676AF0}"/>
+                <a16:creationId xmlns:a16="http://schemas.microsoft.com/office/drawing/2014/main" id="{8E325FEC-227A-51FE-4667-64580F6B3BA4}"/>
               </a:ext>
             </a:extLst>
           </p:cNvPr>
@@ -2433,7 +2433,7 @@
           <a:bodyPr/>
           <a:lstStyle/>
           <a:p>
-            <a:fld id="{90A087C6-6293-4C91-AE24-2445A871C412}" type="datetimeFigureOut">
+            <a:fld id="{60D9FF60-80F7-4871-A393-9759AE8E5043}" type="datetimeFigureOut">
               <a:rPr lang="zh-CN" altLang="en-US" smtClean="0"/>
               <a:t>2026/5/15</a:t>
             </a:fld>
@@ -2446,7 +2446,7 @@
           <p:cNvPr id="5" name="页脚占位符 4">
             <a:extLst>
               <a:ext uri="{FF2B5EF4-FFF2-40B4-BE49-F238E27FC236}">
-                <a16:creationId xmlns:a16="http://schemas.microsoft.com/office/drawing/2014/main" id="{4766FFE7-DF22-2751-4F3E-4BD35F1DC34F}"/>
+                <a16:creationId xmlns:a16="http://schemas.microsoft.com/office/drawing/2014/main" id="{1E6F1731-6C82-E64D-0608-7BB741C2BED6}"/>
               </a:ext>
             </a:extLst>
           </p:cNvPr>
@@ -2471,7 +2471,7 @@
           <p:cNvPr id="6" name="灯片编号占位符 5">
             <a:extLst>
               <a:ext uri="{FF2B5EF4-FFF2-40B4-BE49-F238E27FC236}">
-                <a16:creationId xmlns:a16="http://schemas.microsoft.com/office/drawing/2014/main" id="{10B764E7-4E42-1547-92D3-7DF44211C0C3}"/>
+                <a16:creationId xmlns:a16="http://schemas.microsoft.com/office/drawing/2014/main" id="{9BD0EFE7-97EC-3971-0254-811795CB9A4F}"/>
               </a:ext>
             </a:extLst>
           </p:cNvPr>
@@ -2487,7 +2487,7 @@
           <a:bodyPr/>
           <a:lstStyle/>
           <a:p>
-            <a:fld id="{54A4F7AE-8FB6-4B02-9F03-C4D030564A12}" type="slidenum">
+            <a:fld id="{2DFB0C09-02B1-4FD9-9132-88FB23AD6455}" type="slidenum">
               <a:rPr lang="zh-CN" altLang="en-US" smtClean="0"/>
               <a:t>‹#›</a:t>
             </a:fld>
@@ -2498,7 +2498,7 @@
     </p:spTree>
     <p:extLst>
       <p:ext uri="{BB962C8B-B14F-4D97-AF65-F5344CB8AC3E}">
-        <p14:creationId xmlns:p14="http://schemas.microsoft.com/office/powerpoint/2010/main" val="2054583357"/>
+        <p14:creationId xmlns:p14="http://schemas.microsoft.com/office/powerpoint/2010/main" val="946639266"/>
       </p:ext>
     </p:extLst>
   </p:cSld>
@@ -2530,7 +2530,7 @@
           <p:cNvPr id="2" name="标题 1">
             <a:extLst>
               <a:ext uri="{FF2B5EF4-FFF2-40B4-BE49-F238E27FC236}">
-                <a16:creationId xmlns:a16="http://schemas.microsoft.com/office/drawing/2014/main" id="{D2E2017E-8B57-B9F0-EF96-ABAEE3ED9733}"/>
+                <a16:creationId xmlns:a16="http://schemas.microsoft.com/office/drawing/2014/main" id="{AAFB0684-6877-0CA5-856E-9BDC8196389A}"/>
               </a:ext>
             </a:extLst>
           </p:cNvPr>
@@ -2558,7 +2558,7 @@
           <p:cNvPr id="3" name="内容占位符 2">
             <a:extLst>
               <a:ext uri="{FF2B5EF4-FFF2-40B4-BE49-F238E27FC236}">
-                <a16:creationId xmlns:a16="http://schemas.microsoft.com/office/drawing/2014/main" id="{1BC1F066-9B94-A5DD-1008-D76FAFFDF359}"/>
+                <a16:creationId xmlns:a16="http://schemas.microsoft.com/office/drawing/2014/main" id="{69865FFB-3F54-9F98-8D94-34BD78F26CB2}"/>
               </a:ext>
             </a:extLst>
           </p:cNvPr>
@@ -2615,7 +2615,7 @@
           <p:cNvPr id="4" name="日期占位符 3">
             <a:extLst>
               <a:ext uri="{FF2B5EF4-FFF2-40B4-BE49-F238E27FC236}">
-                <a16:creationId xmlns:a16="http://schemas.microsoft.com/office/drawing/2014/main" id="{584731D1-8C57-15E7-40BE-FE144206BDDA}"/>
+                <a16:creationId xmlns:a16="http://schemas.microsoft.com/office/drawing/2014/main" id="{DF09E404-21F3-7F61-EFF1-EFCAB999ED5D}"/>
               </a:ext>
             </a:extLst>
           </p:cNvPr>
@@ -2631,7 +2631,7 @@
           <a:bodyPr/>
           <a:lstStyle/>
           <a:p>
-            <a:fld id="{90A087C6-6293-4C91-AE24-2445A871C412}" type="datetimeFigureOut">
+            <a:fld id="{60D9FF60-80F7-4871-A393-9759AE8E5043}" type="datetimeFigureOut">
               <a:rPr lang="zh-CN" altLang="en-US" smtClean="0"/>
               <a:t>2026/5/15</a:t>
             </a:fld>
@@ -2644,7 +2644,7 @@
           <p:cNvPr id="5" name="页脚占位符 4">
             <a:extLst>
               <a:ext uri="{FF2B5EF4-FFF2-40B4-BE49-F238E27FC236}">
-                <a16:creationId xmlns:a16="http://schemas.microsoft.com/office/drawing/2014/main" id="{6007645E-8CC7-8AFA-D0BE-87939241E254}"/>
+                <a16:creationId xmlns:a16="http://schemas.microsoft.com/office/drawing/2014/main" id="{CF3F324C-4AD3-2A8E-8FAA-66F444FC02F7}"/>
               </a:ext>
             </a:extLst>
           </p:cNvPr>
@@ -2669,7 +2669,7 @@
           <p:cNvPr id="6" name="灯片编号占位符 5">
             <a:extLst>
               <a:ext uri="{FF2B5EF4-FFF2-40B4-BE49-F238E27FC236}">
-                <a16:creationId xmlns:a16="http://schemas.microsoft.com/office/drawing/2014/main" id="{965E7DDE-BFA7-54A6-2435-A092B7291589}"/>
+                <a16:creationId xmlns:a16="http://schemas.microsoft.com/office/drawing/2014/main" id="{26877214-2E01-AC8A-6B0F-EB6E11CA83C1}"/>
               </a:ext>
             </a:extLst>
           </p:cNvPr>
@@ -2685,7 +2685,7 @@
           <a:bodyPr/>
           <a:lstStyle/>
           <a:p>
-            <a:fld id="{54A4F7AE-8FB6-4B02-9F03-C4D030564A12}" type="slidenum">
+            <a:fld id="{2DFB0C09-02B1-4FD9-9132-88FB23AD6455}" type="slidenum">
               <a:rPr lang="zh-CN" altLang="en-US" smtClean="0"/>
               <a:t>‹#›</a:t>
             </a:fld>
@@ -2696,7 +2696,7 @@
     </p:spTree>
     <p:extLst>
       <p:ext uri="{BB962C8B-B14F-4D97-AF65-F5344CB8AC3E}">
-        <p14:creationId xmlns:p14="http://schemas.microsoft.com/office/powerpoint/2010/main" val="3219496661"/>
+        <p14:creationId xmlns:p14="http://schemas.microsoft.com/office/powerpoint/2010/main" val="2510467233"/>
       </p:ext>
     </p:extLst>
   </p:cSld>
@@ -2728,7 +2728,7 @@
           <p:cNvPr id="2" name="标题 1">
             <a:extLst>
               <a:ext uri="{FF2B5EF4-FFF2-40B4-BE49-F238E27FC236}">
-                <a16:creationId xmlns:a16="http://schemas.microsoft.com/office/drawing/2014/main" id="{2844AB7F-0F24-DFAE-61B5-4505E858AB00}"/>
+                <a16:creationId xmlns:a16="http://schemas.microsoft.com/office/drawing/2014/main" id="{BFA649F7-561F-95A8-DACF-F7CDF4FA2541}"/>
               </a:ext>
             </a:extLst>
           </p:cNvPr>
@@ -2765,7 +2765,7 @@
           <p:cNvPr id="3" name="文本占位符 2">
             <a:extLst>
               <a:ext uri="{FF2B5EF4-FFF2-40B4-BE49-F238E27FC236}">
-                <a16:creationId xmlns:a16="http://schemas.microsoft.com/office/drawing/2014/main" id="{F8907C3F-97B8-361A-34B3-BBF1378ABA63}"/>
+                <a16:creationId xmlns:a16="http://schemas.microsoft.com/office/drawing/2014/main" id="{C5BF42B9-958F-6373-5C10-E4E2BD9A9DEC}"/>
               </a:ext>
             </a:extLst>
           </p:cNvPr>
@@ -2890,7 +2890,7 @@
           <p:cNvPr id="4" name="日期占位符 3">
             <a:extLst>
               <a:ext uri="{FF2B5EF4-FFF2-40B4-BE49-F238E27FC236}">
-                <a16:creationId xmlns:a16="http://schemas.microsoft.com/office/drawing/2014/main" id="{A614CA2F-DFCC-8286-E101-93447786390E}"/>
+                <a16:creationId xmlns:a16="http://schemas.microsoft.com/office/drawing/2014/main" id="{7FF4D118-1D16-E933-FE89-F573420F06EA}"/>
               </a:ext>
             </a:extLst>
           </p:cNvPr>
@@ -2906,7 +2906,7 @@
           <a:bodyPr/>
           <a:lstStyle/>
           <a:p>
-            <a:fld id="{90A087C6-6293-4C91-AE24-2445A871C412}" type="datetimeFigureOut">
+            <a:fld id="{60D9FF60-80F7-4871-A393-9759AE8E5043}" type="datetimeFigureOut">
               <a:rPr lang="zh-CN" altLang="en-US" smtClean="0"/>
               <a:t>2026/5/15</a:t>
             </a:fld>
@@ -2919,7 +2919,7 @@
           <p:cNvPr id="5" name="页脚占位符 4">
             <a:extLst>
               <a:ext uri="{FF2B5EF4-FFF2-40B4-BE49-F238E27FC236}">
-                <a16:creationId xmlns:a16="http://schemas.microsoft.com/office/drawing/2014/main" id="{7BB920CA-1E27-ADAC-8034-2D8DDB2A4A5E}"/>
+                <a16:creationId xmlns:a16="http://schemas.microsoft.com/office/drawing/2014/main" id="{0967896A-FB3A-EBB9-E6AB-EA2A66078D86}"/>
               </a:ext>
             </a:extLst>
           </p:cNvPr>
@@ -2944,7 +2944,7 @@
           <p:cNvPr id="6" name="灯片编号占位符 5">
             <a:extLst>
               <a:ext uri="{FF2B5EF4-FFF2-40B4-BE49-F238E27FC236}">
-                <a16:creationId xmlns:a16="http://schemas.microsoft.com/office/drawing/2014/main" id="{4A4FABCF-FA8B-160D-8BF1-93E94F6E5D7C}"/>
+                <a16:creationId xmlns:a16="http://schemas.microsoft.com/office/drawing/2014/main" id="{3A75C6C2-0D0E-F914-12A5-CFC2C9CAD72A}"/>
               </a:ext>
             </a:extLst>
           </p:cNvPr>
@@ -2960,7 +2960,7 @@
           <a:bodyPr/>
           <a:lstStyle/>
           <a:p>
-            <a:fld id="{54A4F7AE-8FB6-4B02-9F03-C4D030564A12}" type="slidenum">
+            <a:fld id="{2DFB0C09-02B1-4FD9-9132-88FB23AD6455}" type="slidenum">
               <a:rPr lang="zh-CN" altLang="en-US" smtClean="0"/>
               <a:t>‹#›</a:t>
             </a:fld>
@@ -2971,7 +2971,7 @@
     </p:spTree>
     <p:extLst>
       <p:ext uri="{BB962C8B-B14F-4D97-AF65-F5344CB8AC3E}">
-        <p14:creationId xmlns:p14="http://schemas.microsoft.com/office/powerpoint/2010/main" val="1030801639"/>
+        <p14:creationId xmlns:p14="http://schemas.microsoft.com/office/powerpoint/2010/main" val="3533295997"/>
       </p:ext>
     </p:extLst>
   </p:cSld>
@@ -3003,7 +3003,7 @@
           <p:cNvPr id="2" name="标题 1">
             <a:extLst>
               <a:ext uri="{FF2B5EF4-FFF2-40B4-BE49-F238E27FC236}">
-                <a16:creationId xmlns:a16="http://schemas.microsoft.com/office/drawing/2014/main" id="{BBCF2281-FA9C-21E5-8839-8AFF7F2843A8}"/>
+                <a16:creationId xmlns:a16="http://schemas.microsoft.com/office/drawing/2014/main" id="{62C7E02E-917C-50B7-3424-E43379218570}"/>
               </a:ext>
             </a:extLst>
           </p:cNvPr>
@@ -3031,7 +3031,7 @@
           <p:cNvPr id="3" name="内容占位符 2">
             <a:extLst>
               <a:ext uri="{FF2B5EF4-FFF2-40B4-BE49-F238E27FC236}">
-                <a16:creationId xmlns:a16="http://schemas.microsoft.com/office/drawing/2014/main" id="{7CAC54E8-E097-1476-0B7F-85C7429386D7}"/>
+                <a16:creationId xmlns:a16="http://schemas.microsoft.com/office/drawing/2014/main" id="{E9AF7CA1-1154-A054-B6EC-05403A2E5BDD}"/>
               </a:ext>
             </a:extLst>
           </p:cNvPr>
@@ -3093,7 +3093,7 @@
           <p:cNvPr id="4" name="内容占位符 3">
             <a:extLst>
               <a:ext uri="{FF2B5EF4-FFF2-40B4-BE49-F238E27FC236}">
-                <a16:creationId xmlns:a16="http://schemas.microsoft.com/office/drawing/2014/main" id="{B6E0EEA6-3949-2C10-8DFC-B5109B1DA498}"/>
+                <a16:creationId xmlns:a16="http://schemas.microsoft.com/office/drawing/2014/main" id="{DFDAB9D5-F27F-A2EB-44CE-329A5AF47735}"/>
               </a:ext>
             </a:extLst>
           </p:cNvPr>
@@ -3155,7 +3155,7 @@
           <p:cNvPr id="5" name="日期占位符 4">
             <a:extLst>
               <a:ext uri="{FF2B5EF4-FFF2-40B4-BE49-F238E27FC236}">
-                <a16:creationId xmlns:a16="http://schemas.microsoft.com/office/drawing/2014/main" id="{D0E36136-0356-5E8B-3235-F79ED0FE1FBC}"/>
+                <a16:creationId xmlns:a16="http://schemas.microsoft.com/office/drawing/2014/main" id="{3D47E83C-FDE2-29A8-0A3D-BDAFA025BC08}"/>
               </a:ext>
             </a:extLst>
           </p:cNvPr>
@@ -3171,7 +3171,7 @@
           <a:bodyPr/>
           <a:lstStyle/>
           <a:p>
-            <a:fld id="{90A087C6-6293-4C91-AE24-2445A871C412}" type="datetimeFigureOut">
+            <a:fld id="{60D9FF60-80F7-4871-A393-9759AE8E5043}" type="datetimeFigureOut">
               <a:rPr lang="zh-CN" altLang="en-US" smtClean="0"/>
               <a:t>2026/5/15</a:t>
             </a:fld>
@@ -3184,7 +3184,7 @@
           <p:cNvPr id="6" name="页脚占位符 5">
             <a:extLst>
               <a:ext uri="{FF2B5EF4-FFF2-40B4-BE49-F238E27FC236}">
-                <a16:creationId xmlns:a16="http://schemas.microsoft.com/office/drawing/2014/main" id="{8E3E3EA8-2709-999D-7BE6-ED4124E637DE}"/>
+                <a16:creationId xmlns:a16="http://schemas.microsoft.com/office/drawing/2014/main" id="{A4AFF727-AE8A-DF18-E0A8-9D874CC3F9DF}"/>
               </a:ext>
             </a:extLst>
           </p:cNvPr>
@@ -3209,7 +3209,7 @@
           <p:cNvPr id="7" name="灯片编号占位符 6">
             <a:extLst>
               <a:ext uri="{FF2B5EF4-FFF2-40B4-BE49-F238E27FC236}">
-                <a16:creationId xmlns:a16="http://schemas.microsoft.com/office/drawing/2014/main" id="{79915BE1-66E0-B05F-29C9-B1FD39A72CAB}"/>
+                <a16:creationId xmlns:a16="http://schemas.microsoft.com/office/drawing/2014/main" id="{9086228C-1A23-4C15-706F-27C43FA3AEE0}"/>
               </a:ext>
             </a:extLst>
           </p:cNvPr>
@@ -3225,7 +3225,7 @@
           <a:bodyPr/>
           <a:lstStyle/>
           <a:p>
-            <a:fld id="{54A4F7AE-8FB6-4B02-9F03-C4D030564A12}" type="slidenum">
+            <a:fld id="{2DFB0C09-02B1-4FD9-9132-88FB23AD6455}" type="slidenum">
               <a:rPr lang="zh-CN" altLang="en-US" smtClean="0"/>
               <a:t>‹#›</a:t>
             </a:fld>
@@ -3236,7 +3236,7 @@
     </p:spTree>
     <p:extLst>
       <p:ext uri="{BB962C8B-B14F-4D97-AF65-F5344CB8AC3E}">
-        <p14:creationId xmlns:p14="http://schemas.microsoft.com/office/powerpoint/2010/main" val="2476588680"/>
+        <p14:creationId xmlns:p14="http://schemas.microsoft.com/office/powerpoint/2010/main" val="3146238404"/>
       </p:ext>
     </p:extLst>
   </p:cSld>
@@ -3268,7 +3268,7 @@
           <p:cNvPr id="2" name="标题 1">
             <a:extLst>
               <a:ext uri="{FF2B5EF4-FFF2-40B4-BE49-F238E27FC236}">
-                <a16:creationId xmlns:a16="http://schemas.microsoft.com/office/drawing/2014/main" id="{018B5237-7AD2-5A63-9FF3-C6E4D8D73BCC}"/>
+                <a16:creationId xmlns:a16="http://schemas.microsoft.com/office/drawing/2014/main" id="{9DA89BF4-E5A1-18EF-7B42-B0107B1E552F}"/>
               </a:ext>
             </a:extLst>
           </p:cNvPr>
@@ -3301,7 +3301,7 @@
           <p:cNvPr id="3" name="文本占位符 2">
             <a:extLst>
               <a:ext uri="{FF2B5EF4-FFF2-40B4-BE49-F238E27FC236}">
-                <a16:creationId xmlns:a16="http://schemas.microsoft.com/office/drawing/2014/main" id="{FA45A613-F6AA-F04D-7770-E90AB3BD63B6}"/>
+                <a16:creationId xmlns:a16="http://schemas.microsoft.com/office/drawing/2014/main" id="{71058CD2-6C5B-9250-2EDB-BFE700A3DCE5}"/>
               </a:ext>
             </a:extLst>
           </p:cNvPr>
@@ -3372,7 +3372,7 @@
           <p:cNvPr id="4" name="内容占位符 3">
             <a:extLst>
               <a:ext uri="{FF2B5EF4-FFF2-40B4-BE49-F238E27FC236}">
-                <a16:creationId xmlns:a16="http://schemas.microsoft.com/office/drawing/2014/main" id="{7DD722D1-42AF-496E-C5B1-EA30828C087D}"/>
+                <a16:creationId xmlns:a16="http://schemas.microsoft.com/office/drawing/2014/main" id="{38107BA2-1D6C-6540-C521-00EA2EE1724A}"/>
               </a:ext>
             </a:extLst>
           </p:cNvPr>
@@ -3434,7 +3434,7 @@
           <p:cNvPr id="5" name="文本占位符 4">
             <a:extLst>
               <a:ext uri="{FF2B5EF4-FFF2-40B4-BE49-F238E27FC236}">
-                <a16:creationId xmlns:a16="http://schemas.microsoft.com/office/drawing/2014/main" id="{0B04845E-FB77-CCA3-2FDB-06CD0C6FD906}"/>
+                <a16:creationId xmlns:a16="http://schemas.microsoft.com/office/drawing/2014/main" id="{B8F09FCF-46E1-3C68-186A-B732A487559E}"/>
               </a:ext>
             </a:extLst>
           </p:cNvPr>
@@ -3505,7 +3505,7 @@
           <p:cNvPr id="6" name="内容占位符 5">
             <a:extLst>
               <a:ext uri="{FF2B5EF4-FFF2-40B4-BE49-F238E27FC236}">
-                <a16:creationId xmlns:a16="http://schemas.microsoft.com/office/drawing/2014/main" id="{FBCBA6F6-A3D3-91DA-6A84-73A52683F5D8}"/>
+                <a16:creationId xmlns:a16="http://schemas.microsoft.com/office/drawing/2014/main" id="{95A59D43-373D-6AD5-D7D9-9AF0DCB23925}"/>
               </a:ext>
             </a:extLst>
           </p:cNvPr>
@@ -3567,7 +3567,7 @@
           <p:cNvPr id="7" name="日期占位符 6">
             <a:extLst>
               <a:ext uri="{FF2B5EF4-FFF2-40B4-BE49-F238E27FC236}">
-                <a16:creationId xmlns:a16="http://schemas.microsoft.com/office/drawing/2014/main" id="{4401BD8C-E4EE-90EE-783F-F8EBA56653BD}"/>
+                <a16:creationId xmlns:a16="http://schemas.microsoft.com/office/drawing/2014/main" id="{4E6AB768-677B-A6CC-D5E8-4A36FB7DCD1B}"/>
               </a:ext>
             </a:extLst>
           </p:cNvPr>
@@ -3583,7 +3583,7 @@
           <a:bodyPr/>
           <a:lstStyle/>
           <a:p>
-            <a:fld id="{90A087C6-6293-4C91-AE24-2445A871C412}" type="datetimeFigureOut">
+            <a:fld id="{60D9FF60-80F7-4871-A393-9759AE8E5043}" type="datetimeFigureOut">
               <a:rPr lang="zh-CN" altLang="en-US" smtClean="0"/>
               <a:t>2026/5/15</a:t>
             </a:fld>
@@ -3596,7 +3596,7 @@
           <p:cNvPr id="8" name="页脚占位符 7">
             <a:extLst>
               <a:ext uri="{FF2B5EF4-FFF2-40B4-BE49-F238E27FC236}">
-                <a16:creationId xmlns:a16="http://schemas.microsoft.com/office/drawing/2014/main" id="{E1B5CBC0-1708-4773-4FE5-20FF0896925D}"/>
+                <a16:creationId xmlns:a16="http://schemas.microsoft.com/office/drawing/2014/main" id="{08E2F5A2-9142-920F-654D-4046E9D63970}"/>
               </a:ext>
             </a:extLst>
           </p:cNvPr>
@@ -3621,7 +3621,7 @@
           <p:cNvPr id="9" name="灯片编号占位符 8">
             <a:extLst>
               <a:ext uri="{FF2B5EF4-FFF2-40B4-BE49-F238E27FC236}">
-                <a16:creationId xmlns:a16="http://schemas.microsoft.com/office/drawing/2014/main" id="{1FB3DDFC-8470-334B-FD4F-2BACDF09F23B}"/>
+                <a16:creationId xmlns:a16="http://schemas.microsoft.com/office/drawing/2014/main" id="{40979EE7-6AB8-7663-A8D3-CF742652200E}"/>
               </a:ext>
             </a:extLst>
           </p:cNvPr>
@@ -3637,7 +3637,7 @@
           <a:bodyPr/>
           <a:lstStyle/>
           <a:p>
-            <a:fld id="{54A4F7AE-8FB6-4B02-9F03-C4D030564A12}" type="slidenum">
+            <a:fld id="{2DFB0C09-02B1-4FD9-9132-88FB23AD6455}" type="slidenum">
               <a:rPr lang="zh-CN" altLang="en-US" smtClean="0"/>
               <a:t>‹#›</a:t>
             </a:fld>
@@ -3648,7 +3648,7 @@
     </p:spTree>
     <p:extLst>
       <p:ext uri="{BB962C8B-B14F-4D97-AF65-F5344CB8AC3E}">
-        <p14:creationId xmlns:p14="http://schemas.microsoft.com/office/powerpoint/2010/main" val="1702311543"/>
+        <p14:creationId xmlns:p14="http://schemas.microsoft.com/office/powerpoint/2010/main" val="39155121"/>
       </p:ext>
     </p:extLst>
   </p:cSld>
@@ -3680,7 +3680,7 @@
           <p:cNvPr id="2" name="标题 1">
             <a:extLst>
               <a:ext uri="{FF2B5EF4-FFF2-40B4-BE49-F238E27FC236}">
-                <a16:creationId xmlns:a16="http://schemas.microsoft.com/office/drawing/2014/main" id="{000AF24A-AC43-0E4E-4643-0A22BDC0A0CA}"/>
+                <a16:creationId xmlns:a16="http://schemas.microsoft.com/office/drawing/2014/main" id="{DC15E5CD-C232-C2A0-4AD6-296B51CBBC17}"/>
               </a:ext>
             </a:extLst>
           </p:cNvPr>
@@ -3708,7 +3708,7 @@
           <p:cNvPr id="3" name="日期占位符 2">
             <a:extLst>
               <a:ext uri="{FF2B5EF4-FFF2-40B4-BE49-F238E27FC236}">
-                <a16:creationId xmlns:a16="http://schemas.microsoft.com/office/drawing/2014/main" id="{C1E9337C-CC02-114E-B225-6585DD5E0942}"/>
+                <a16:creationId xmlns:a16="http://schemas.microsoft.com/office/drawing/2014/main" id="{1D5D118A-96A6-D6F2-BCD0-F307905479A2}"/>
               </a:ext>
             </a:extLst>
           </p:cNvPr>
@@ -3724,7 +3724,7 @@
           <a:bodyPr/>
           <a:lstStyle/>
           <a:p>
-            <a:fld id="{90A087C6-6293-4C91-AE24-2445A871C412}" type="datetimeFigureOut">
+            <a:fld id="{60D9FF60-80F7-4871-A393-9759AE8E5043}" type="datetimeFigureOut">
               <a:rPr lang="zh-CN" altLang="en-US" smtClean="0"/>
               <a:t>2026/5/15</a:t>
             </a:fld>
@@ -3737,7 +3737,7 @@
           <p:cNvPr id="4" name="页脚占位符 3">
             <a:extLst>
               <a:ext uri="{FF2B5EF4-FFF2-40B4-BE49-F238E27FC236}">
-                <a16:creationId xmlns:a16="http://schemas.microsoft.com/office/drawing/2014/main" id="{12BDC524-FBC7-16BE-416C-7A2025C97CF2}"/>
+                <a16:creationId xmlns:a16="http://schemas.microsoft.com/office/drawing/2014/main" id="{2F098663-320D-73BD-8A0F-949722CF24C5}"/>
               </a:ext>
             </a:extLst>
           </p:cNvPr>
@@ -3762,7 +3762,7 @@
           <p:cNvPr id="5" name="灯片编号占位符 4">
             <a:extLst>
               <a:ext uri="{FF2B5EF4-FFF2-40B4-BE49-F238E27FC236}">
-                <a16:creationId xmlns:a16="http://schemas.microsoft.com/office/drawing/2014/main" id="{9E986F2E-D587-4D10-6930-CDC6D5027397}"/>
+                <a16:creationId xmlns:a16="http://schemas.microsoft.com/office/drawing/2014/main" id="{A304BD35-9E34-F809-FDD7-6DE79FB59696}"/>
               </a:ext>
             </a:extLst>
           </p:cNvPr>
@@ -3778,7 +3778,7 @@
           <a:bodyPr/>
           <a:lstStyle/>
           <a:p>
-            <a:fld id="{54A4F7AE-8FB6-4B02-9F03-C4D030564A12}" type="slidenum">
+            <a:fld id="{2DFB0C09-02B1-4FD9-9132-88FB23AD6455}" type="slidenum">
               <a:rPr lang="zh-CN" altLang="en-US" smtClean="0"/>
               <a:t>‹#›</a:t>
             </a:fld>
@@ -3789,7 +3789,7 @@
     </p:spTree>
     <p:extLst>
       <p:ext uri="{BB962C8B-B14F-4D97-AF65-F5344CB8AC3E}">
-        <p14:creationId xmlns:p14="http://schemas.microsoft.com/office/powerpoint/2010/main" val="2683586733"/>
+        <p14:creationId xmlns:p14="http://schemas.microsoft.com/office/powerpoint/2010/main" val="3027747101"/>
       </p:ext>
     </p:extLst>
   </p:cSld>
@@ -3821,7 +3821,7 @@
           <p:cNvPr id="2" name="日期占位符 1">
             <a:extLst>
               <a:ext uri="{FF2B5EF4-FFF2-40B4-BE49-F238E27FC236}">
-                <a16:creationId xmlns:a16="http://schemas.microsoft.com/office/drawing/2014/main" id="{A0F1F494-0D45-B275-A345-403060AC582D}"/>
+                <a16:creationId xmlns:a16="http://schemas.microsoft.com/office/drawing/2014/main" id="{5535C128-8556-0B5F-1314-463DEFA3A154}"/>
               </a:ext>
             </a:extLst>
           </p:cNvPr>
@@ -3837,7 +3837,7 @@
           <a:bodyPr/>
           <a:lstStyle/>
           <a:p>
-            <a:fld id="{90A087C6-6293-4C91-AE24-2445A871C412}" type="datetimeFigureOut">
+            <a:fld id="{60D9FF60-80F7-4871-A393-9759AE8E5043}" type="datetimeFigureOut">
               <a:rPr lang="zh-CN" altLang="en-US" smtClean="0"/>
               <a:t>2026/5/15</a:t>
             </a:fld>
@@ -3850,7 +3850,7 @@
           <p:cNvPr id="3" name="页脚占位符 2">
             <a:extLst>
               <a:ext uri="{FF2B5EF4-FFF2-40B4-BE49-F238E27FC236}">
-                <a16:creationId xmlns:a16="http://schemas.microsoft.com/office/drawing/2014/main" id="{F6D8F4FB-B2E0-92BF-31E8-2993E388E226}"/>
+                <a16:creationId xmlns:a16="http://schemas.microsoft.com/office/drawing/2014/main" id="{7779C86F-C49D-3472-9D79-7ACC94AA19A8}"/>
               </a:ext>
             </a:extLst>
           </p:cNvPr>
@@ -3875,7 +3875,7 @@
           <p:cNvPr id="4" name="灯片编号占位符 3">
             <a:extLst>
               <a:ext uri="{FF2B5EF4-FFF2-40B4-BE49-F238E27FC236}">
-                <a16:creationId xmlns:a16="http://schemas.microsoft.com/office/drawing/2014/main" id="{8BC45D46-B707-5889-394A-21703B71AC11}"/>
+                <a16:creationId xmlns:a16="http://schemas.microsoft.com/office/drawing/2014/main" id="{F1E52249-D308-194E-FC6C-E7E0506B4298}"/>
               </a:ext>
             </a:extLst>
           </p:cNvPr>
@@ -3891,7 +3891,7 @@
           <a:bodyPr/>
           <a:lstStyle/>
           <a:p>
-            <a:fld id="{54A4F7AE-8FB6-4B02-9F03-C4D030564A12}" type="slidenum">
+            <a:fld id="{2DFB0C09-02B1-4FD9-9132-88FB23AD6455}" type="slidenum">
               <a:rPr lang="zh-CN" altLang="en-US" smtClean="0"/>
               <a:t>‹#›</a:t>
             </a:fld>
@@ -3902,7 +3902,7 @@
     </p:spTree>
     <p:extLst>
       <p:ext uri="{BB962C8B-B14F-4D97-AF65-F5344CB8AC3E}">
-        <p14:creationId xmlns:p14="http://schemas.microsoft.com/office/powerpoint/2010/main" val="1322427314"/>
+        <p14:creationId xmlns:p14="http://schemas.microsoft.com/office/powerpoint/2010/main" val="3755226840"/>
       </p:ext>
     </p:extLst>
   </p:cSld>
@@ -3934,7 +3934,7 @@
           <p:cNvPr id="2" name="标题 1">
             <a:extLst>
               <a:ext uri="{FF2B5EF4-FFF2-40B4-BE49-F238E27FC236}">
-                <a16:creationId xmlns:a16="http://schemas.microsoft.com/office/drawing/2014/main" id="{1990D2FC-10AD-4DA6-6349-E23FBE22BD7F}"/>
+                <a16:creationId xmlns:a16="http://schemas.microsoft.com/office/drawing/2014/main" id="{C8DAF3C0-21DE-DC78-96E5-20BF61583FA5}"/>
               </a:ext>
             </a:extLst>
           </p:cNvPr>
@@ -3971,7 +3971,7 @@
           <p:cNvPr id="3" name="内容占位符 2">
             <a:extLst>
               <a:ext uri="{FF2B5EF4-FFF2-40B4-BE49-F238E27FC236}">
-                <a16:creationId xmlns:a16="http://schemas.microsoft.com/office/drawing/2014/main" id="{44FAB499-8501-0DAD-F1F4-CEF6450CB108}"/>
+                <a16:creationId xmlns:a16="http://schemas.microsoft.com/office/drawing/2014/main" id="{A5BA4EE7-BE19-86FE-9C25-08A2630F23FA}"/>
               </a:ext>
             </a:extLst>
           </p:cNvPr>
@@ -4061,7 +4061,7 @@
           <p:cNvPr id="4" name="文本占位符 3">
             <a:extLst>
               <a:ext uri="{FF2B5EF4-FFF2-40B4-BE49-F238E27FC236}">
-                <a16:creationId xmlns:a16="http://schemas.microsoft.com/office/drawing/2014/main" id="{1AFCE5F3-F68D-485D-5F81-C46C7F9D8E15}"/>
+                <a16:creationId xmlns:a16="http://schemas.microsoft.com/office/drawing/2014/main" id="{CF801517-9E5E-61B7-5620-38E590260EEA}"/>
               </a:ext>
             </a:extLst>
           </p:cNvPr>
@@ -4132,7 +4132,7 @@
           <p:cNvPr id="5" name="日期占位符 4">
             <a:extLst>
               <a:ext uri="{FF2B5EF4-FFF2-40B4-BE49-F238E27FC236}">
-                <a16:creationId xmlns:a16="http://schemas.microsoft.com/office/drawing/2014/main" id="{F64D9479-B160-88AC-8422-B70B2A73107E}"/>
+                <a16:creationId xmlns:a16="http://schemas.microsoft.com/office/drawing/2014/main" id="{B62F9DFD-044D-ED0E-2A05-37372DA7483C}"/>
               </a:ext>
             </a:extLst>
           </p:cNvPr>
@@ -4148,7 +4148,7 @@
           <a:bodyPr/>
           <a:lstStyle/>
           <a:p>
-            <a:fld id="{90A087C6-6293-4C91-AE24-2445A871C412}" type="datetimeFigureOut">
+            <a:fld id="{60D9FF60-80F7-4871-A393-9759AE8E5043}" type="datetimeFigureOut">
               <a:rPr lang="zh-CN" altLang="en-US" smtClean="0"/>
               <a:t>2026/5/15</a:t>
             </a:fld>
@@ -4161,7 +4161,7 @@
           <p:cNvPr id="6" name="页脚占位符 5">
             <a:extLst>
               <a:ext uri="{FF2B5EF4-FFF2-40B4-BE49-F238E27FC236}">
-                <a16:creationId xmlns:a16="http://schemas.microsoft.com/office/drawing/2014/main" id="{AB653CF3-33B0-968C-EEA7-BFC172A4E74F}"/>
+                <a16:creationId xmlns:a16="http://schemas.microsoft.com/office/drawing/2014/main" id="{0A01DB4E-D8D6-DCDB-412A-FAD051CE9759}"/>
               </a:ext>
             </a:extLst>
           </p:cNvPr>
@@ -4186,7 +4186,7 @@
           <p:cNvPr id="7" name="灯片编号占位符 6">
             <a:extLst>
               <a:ext uri="{FF2B5EF4-FFF2-40B4-BE49-F238E27FC236}">
-                <a16:creationId xmlns:a16="http://schemas.microsoft.com/office/drawing/2014/main" id="{26D8A1BE-AC0C-9AE2-E896-87531A232FB1}"/>
+                <a16:creationId xmlns:a16="http://schemas.microsoft.com/office/drawing/2014/main" id="{99F61665-EBC0-D1BE-0FDD-4FAADBBA0F1D}"/>
               </a:ext>
             </a:extLst>
           </p:cNvPr>
@@ -4202,7 +4202,7 @@
           <a:bodyPr/>
           <a:lstStyle/>
           <a:p>
-            <a:fld id="{54A4F7AE-8FB6-4B02-9F03-C4D030564A12}" type="slidenum">
+            <a:fld id="{2DFB0C09-02B1-4FD9-9132-88FB23AD6455}" type="slidenum">
               <a:rPr lang="zh-CN" altLang="en-US" smtClean="0"/>
               <a:t>‹#›</a:t>
             </a:fld>
@@ -4213,7 +4213,7 @@
     </p:spTree>
     <p:extLst>
       <p:ext uri="{BB962C8B-B14F-4D97-AF65-F5344CB8AC3E}">
-        <p14:creationId xmlns:p14="http://schemas.microsoft.com/office/powerpoint/2010/main" val="1093823980"/>
+        <p14:creationId xmlns:p14="http://schemas.microsoft.com/office/powerpoint/2010/main" val="1958840536"/>
       </p:ext>
     </p:extLst>
   </p:cSld>
@@ -4245,7 +4245,7 @@
           <p:cNvPr id="2" name="标题 1">
             <a:extLst>
               <a:ext uri="{FF2B5EF4-FFF2-40B4-BE49-F238E27FC236}">
-                <a16:creationId xmlns:a16="http://schemas.microsoft.com/office/drawing/2014/main" id="{8F32CFB1-9FB8-512F-91AC-46BF2A6571B5}"/>
+                <a16:creationId xmlns:a16="http://schemas.microsoft.com/office/drawing/2014/main" id="{4D2DC9FC-A591-C6F6-584E-0C9F67D48A9D}"/>
               </a:ext>
             </a:extLst>
           </p:cNvPr>
@@ -4282,7 +4282,7 @@
           <p:cNvPr id="3" name="图片占位符 2">
             <a:extLst>
               <a:ext uri="{FF2B5EF4-FFF2-40B4-BE49-F238E27FC236}">
-                <a16:creationId xmlns:a16="http://schemas.microsoft.com/office/drawing/2014/main" id="{44801464-42EE-031C-2D5A-2EA9051A6D87}"/>
+                <a16:creationId xmlns:a16="http://schemas.microsoft.com/office/drawing/2014/main" id="{9011740D-F641-4868-FF33-1FACB69FE4E2}"/>
               </a:ext>
             </a:extLst>
           </p:cNvPr>
@@ -4349,7 +4349,7 @@
           <p:cNvPr id="4" name="文本占位符 3">
             <a:extLst>
               <a:ext uri="{FF2B5EF4-FFF2-40B4-BE49-F238E27FC236}">
-                <a16:creationId xmlns:a16="http://schemas.microsoft.com/office/drawing/2014/main" id="{15D87C42-91BE-B14C-71A6-AC9903F0BF94}"/>
+                <a16:creationId xmlns:a16="http://schemas.microsoft.com/office/drawing/2014/main" id="{FCFD7420-B12A-AA65-BC88-E01F5677EF9D}"/>
               </a:ext>
             </a:extLst>
           </p:cNvPr>
@@ -4420,7 +4420,7 @@
           <p:cNvPr id="5" name="日期占位符 4">
             <a:extLst>
               <a:ext uri="{FF2B5EF4-FFF2-40B4-BE49-F238E27FC236}">
-                <a16:creationId xmlns:a16="http://schemas.microsoft.com/office/drawing/2014/main" id="{09C78A16-6532-FD06-28BA-D914367101E3}"/>
+                <a16:creationId xmlns:a16="http://schemas.microsoft.com/office/drawing/2014/main" id="{489AC208-FF52-A115-AAA2-5D46C5CD63F3}"/>
               </a:ext>
             </a:extLst>
           </p:cNvPr>
@@ -4436,7 +4436,7 @@
           <a:bodyPr/>
           <a:lstStyle/>
           <a:p>
-            <a:fld id="{90A087C6-6293-4C91-AE24-2445A871C412}" type="datetimeFigureOut">
+            <a:fld id="{60D9FF60-80F7-4871-A393-9759AE8E5043}" type="datetimeFigureOut">
               <a:rPr lang="zh-CN" altLang="en-US" smtClean="0"/>
               <a:t>2026/5/15</a:t>
             </a:fld>
@@ -4449,7 +4449,7 @@
           <p:cNvPr id="6" name="页脚占位符 5">
             <a:extLst>
               <a:ext uri="{FF2B5EF4-FFF2-40B4-BE49-F238E27FC236}">
-                <a16:creationId xmlns:a16="http://schemas.microsoft.com/office/drawing/2014/main" id="{D52C8AD8-4FF4-C478-DE22-28A30B8533CC}"/>
+                <a16:creationId xmlns:a16="http://schemas.microsoft.com/office/drawing/2014/main" id="{AFABAC1A-822D-F569-8575-4FD3C3621F75}"/>
               </a:ext>
             </a:extLst>
           </p:cNvPr>
@@ -4474,7 +4474,7 @@
           <p:cNvPr id="7" name="灯片编号占位符 6">
             <a:extLst>
               <a:ext uri="{FF2B5EF4-FFF2-40B4-BE49-F238E27FC236}">
-                <a16:creationId xmlns:a16="http://schemas.microsoft.com/office/drawing/2014/main" id="{0270B311-BB60-D485-40AC-B259B58B0212}"/>
+                <a16:creationId xmlns:a16="http://schemas.microsoft.com/office/drawing/2014/main" id="{8BF101BB-E4DE-DEDA-242F-2DEE891D3A32}"/>
               </a:ext>
             </a:extLst>
           </p:cNvPr>
@@ -4490,7 +4490,7 @@
           <a:bodyPr/>
           <a:lstStyle/>
           <a:p>
-            <a:fld id="{54A4F7AE-8FB6-4B02-9F03-C4D030564A12}" type="slidenum">
+            <a:fld id="{2DFB0C09-02B1-4FD9-9132-88FB23AD6455}" type="slidenum">
               <a:rPr lang="zh-CN" altLang="en-US" smtClean="0"/>
               <a:t>‹#›</a:t>
             </a:fld>
@@ -4501,7 +4501,7 @@
     </p:spTree>
     <p:extLst>
       <p:ext uri="{BB962C8B-B14F-4D97-AF65-F5344CB8AC3E}">
-        <p14:creationId xmlns:p14="http://schemas.microsoft.com/office/powerpoint/2010/main" val="2395325997"/>
+        <p14:creationId xmlns:p14="http://schemas.microsoft.com/office/powerpoint/2010/main" val="3772403803"/>
       </p:ext>
     </p:extLst>
   </p:cSld>
@@ -4538,7 +4538,7 @@
           <p:cNvPr id="2" name="标题占位符 1">
             <a:extLst>
               <a:ext uri="{FF2B5EF4-FFF2-40B4-BE49-F238E27FC236}">
-                <a16:creationId xmlns:a16="http://schemas.microsoft.com/office/drawing/2014/main" id="{A778E286-B118-9837-0954-245254229FA1}"/>
+                <a16:creationId xmlns:a16="http://schemas.microsoft.com/office/drawing/2014/main" id="{8E6F5BF9-1CF9-A349-36CF-44781D1BEDEF}"/>
               </a:ext>
             </a:extLst>
           </p:cNvPr>
@@ -4576,7 +4576,7 @@
           <p:cNvPr id="3" name="文本占位符 2">
             <a:extLst>
               <a:ext uri="{FF2B5EF4-FFF2-40B4-BE49-F238E27FC236}">
-                <a16:creationId xmlns:a16="http://schemas.microsoft.com/office/drawing/2014/main" id="{9C7FAC93-62AD-711F-45D1-79E201A73DB4}"/>
+                <a16:creationId xmlns:a16="http://schemas.microsoft.com/office/drawing/2014/main" id="{B874B60E-388D-8A7D-C47F-C22EFAD3A50C}"/>
               </a:ext>
             </a:extLst>
           </p:cNvPr>
@@ -4643,7 +4643,7 @@
           <p:cNvPr id="4" name="日期占位符 3">
             <a:extLst>
               <a:ext uri="{FF2B5EF4-FFF2-40B4-BE49-F238E27FC236}">
-                <a16:creationId xmlns:a16="http://schemas.microsoft.com/office/drawing/2014/main" id="{7B9FD42D-D273-1AB7-6C5F-8B39679938BB}"/>
+                <a16:creationId xmlns:a16="http://schemas.microsoft.com/office/drawing/2014/main" id="{A22FCA58-022F-F807-78B8-12EE68C93278}"/>
               </a:ext>
             </a:extLst>
           </p:cNvPr>
@@ -4677,7 +4677,7 @@
             </a:lvl1pPr>
           </a:lstStyle>
           <a:p>
-            <a:fld id="{90A087C6-6293-4C91-AE24-2445A871C412}" type="datetimeFigureOut">
+            <a:fld id="{60D9FF60-80F7-4871-A393-9759AE8E5043}" type="datetimeFigureOut">
               <a:rPr lang="zh-CN" altLang="en-US" smtClean="0"/>
               <a:t>2026/5/15</a:t>
             </a:fld>
@@ -4690,7 +4690,7 @@
           <p:cNvPr id="5" name="页脚占位符 4">
             <a:extLst>
               <a:ext uri="{FF2B5EF4-FFF2-40B4-BE49-F238E27FC236}">
-                <a16:creationId xmlns:a16="http://schemas.microsoft.com/office/drawing/2014/main" id="{B8328AFB-9255-D566-61C0-4D447C09329F}"/>
+                <a16:creationId xmlns:a16="http://schemas.microsoft.com/office/drawing/2014/main" id="{D2836E35-787F-F68E-7286-2A6033343708}"/>
               </a:ext>
             </a:extLst>
           </p:cNvPr>
@@ -4733,7 +4733,7 @@
           <p:cNvPr id="6" name="灯片编号占位符 5">
             <a:extLst>
               <a:ext uri="{FF2B5EF4-FFF2-40B4-BE49-F238E27FC236}">
-                <a16:creationId xmlns:a16="http://schemas.microsoft.com/office/drawing/2014/main" id="{EA89395E-F86A-AFBB-F22F-9FCF91766051}"/>
+                <a16:creationId xmlns:a16="http://schemas.microsoft.com/office/drawing/2014/main" id="{A221783B-124E-7F1D-FCD1-D6ABBCAB6A13}"/>
               </a:ext>
             </a:extLst>
           </p:cNvPr>
@@ -4767,7 +4767,7 @@
             </a:lvl1pPr>
           </a:lstStyle>
           <a:p>
-            <a:fld id="{54A4F7AE-8FB6-4B02-9F03-C4D030564A12}" type="slidenum">
+            <a:fld id="{2DFB0C09-02B1-4FD9-9132-88FB23AD6455}" type="slidenum">
               <a:rPr lang="zh-CN" altLang="en-US" smtClean="0"/>
               <a:t>‹#›</a:t>
             </a:fld>
@@ -4778,7 +4778,7 @@
     </p:spTree>
     <p:extLst>
       <p:ext uri="{BB962C8B-B14F-4D97-AF65-F5344CB8AC3E}">
-        <p14:creationId xmlns:p14="http://schemas.microsoft.com/office/powerpoint/2010/main" val="1390819875"/>
+        <p14:creationId xmlns:p14="http://schemas.microsoft.com/office/powerpoint/2010/main" val="818615847"/>
       </p:ext>
     </p:extLst>
   </p:cSld>
@@ -5101,7 +5101,7 @@
           <p:cNvPr id="2" name="bg">
             <a:extLst>
               <a:ext uri="{FF2B5EF4-FFF2-40B4-BE49-F238E27FC236}">
-                <a16:creationId xmlns:a16="http://schemas.microsoft.com/office/drawing/2014/main" id="{9AC1C4FC-7E42-CA2E-91A5-1FC5FE49FEC7}"/>
+                <a16:creationId xmlns:a16="http://schemas.microsoft.com/office/drawing/2014/main" id="{E4EA597E-F1D1-21CB-2094-48385B821E00}"/>
               </a:ext>
             </a:extLst>
           </p:cNvPr>
@@ -5162,7 +5162,7 @@
           <p:cNvPr id="3" name="side-shade">
             <a:extLst>
               <a:ext uri="{FF2B5EF4-FFF2-40B4-BE49-F238E27FC236}">
-                <a16:creationId xmlns:a16="http://schemas.microsoft.com/office/drawing/2014/main" id="{981BE95E-5E21-4BFD-719C-A50D3158BBFB}"/>
+                <a16:creationId xmlns:a16="http://schemas.microsoft.com/office/drawing/2014/main" id="{C2C4DD99-F8CC-4932-9740-99070F7B3CD8}"/>
               </a:ext>
             </a:extLst>
           </p:cNvPr>
@@ -5223,7 +5223,7 @@
           <p:cNvPr id="4" name="cover-rule">
             <a:extLst>
               <a:ext uri="{FF2B5EF4-FFF2-40B4-BE49-F238E27FC236}">
-                <a16:creationId xmlns:a16="http://schemas.microsoft.com/office/drawing/2014/main" id="{C0377DA6-6E03-676F-8DC6-CF805C244862}"/>
+                <a16:creationId xmlns:a16="http://schemas.microsoft.com/office/drawing/2014/main" id="{FB59AF72-CD2A-C6B2-3784-2C424DAF6572}"/>
               </a:ext>
             </a:extLst>
           </p:cNvPr>
@@ -5264,7 +5264,7 @@
           <p:cNvPr id="6" name="图片 5">
             <a:extLst>
               <a:ext uri="{FF2B5EF4-FFF2-40B4-BE49-F238E27FC236}">
-                <a16:creationId xmlns:a16="http://schemas.microsoft.com/office/drawing/2014/main" id="{8FF64B44-3BAB-AC05-5DC0-D55738BAA42D}"/>
+                <a16:creationId xmlns:a16="http://schemas.microsoft.com/office/drawing/2014/main" id="{44A413A1-3CA8-E37C-DC08-5E9BE9E78047}"/>
               </a:ext>
             </a:extLst>
           </p:cNvPr>
@@ -5300,7 +5300,7 @@
           <p:cNvPr id="7" name="kicker">
             <a:extLst>
               <a:ext uri="{FF2B5EF4-FFF2-40B4-BE49-F238E27FC236}">
-                <a16:creationId xmlns:a16="http://schemas.microsoft.com/office/drawing/2014/main" id="{CE652B5C-DAA7-ACDE-BCA4-A7A3318A7E0A}"/>
+                <a16:creationId xmlns:a16="http://schemas.microsoft.com/office/drawing/2014/main" id="{7C5B9C8A-CE4D-DAAC-9D4C-426587D6E6AB}"/>
               </a:ext>
             </a:extLst>
           </p:cNvPr>
@@ -5346,7 +5346,7 @@
           <p:cNvPr id="8" name="h1">
             <a:extLst>
               <a:ext uri="{FF2B5EF4-FFF2-40B4-BE49-F238E27FC236}">
-                <a16:creationId xmlns:a16="http://schemas.microsoft.com/office/drawing/2014/main" id="{970C0714-CAD3-9640-81C3-8327ADC89927}"/>
+                <a16:creationId xmlns:a16="http://schemas.microsoft.com/office/drawing/2014/main" id="{BDF798C1-0B64-67B4-AE88-0B6A2234FE03}"/>
               </a:ext>
             </a:extLst>
           </p:cNvPr>
@@ -5392,7 +5392,7 @@
           <p:cNvPr id="9" name="sub">
             <a:extLst>
               <a:ext uri="{FF2B5EF4-FFF2-40B4-BE49-F238E27FC236}">
-                <a16:creationId xmlns:a16="http://schemas.microsoft.com/office/drawing/2014/main" id="{3BEAE1BD-C8F9-B7FE-BC76-4E18A6DBF98F}"/>
+                <a16:creationId xmlns:a16="http://schemas.microsoft.com/office/drawing/2014/main" id="{DF680F50-F940-E58F-D274-7AAFBD0104BE}"/>
               </a:ext>
             </a:extLst>
           </p:cNvPr>
@@ -5438,7 +5438,7 @@
           <p:cNvPr id="10" name="rule">
             <a:extLst>
               <a:ext uri="{FF2B5EF4-FFF2-40B4-BE49-F238E27FC236}">
-                <a16:creationId xmlns:a16="http://schemas.microsoft.com/office/drawing/2014/main" id="{0822C4BA-F1DC-450F-5016-EE9A35FAE055}"/>
+                <a16:creationId xmlns:a16="http://schemas.microsoft.com/office/drawing/2014/main" id="{C6E4E435-597C-65B9-D7CE-99CFA48A5E56}"/>
               </a:ext>
             </a:extLst>
           </p:cNvPr>
@@ -5479,7 +5479,7 @@
           <p:cNvPr id="11" name="thesis">
             <a:extLst>
               <a:ext uri="{FF2B5EF4-FFF2-40B4-BE49-F238E27FC236}">
-                <a16:creationId xmlns:a16="http://schemas.microsoft.com/office/drawing/2014/main" id="{5AD5D847-1A28-91A1-F5CF-8AB9C6A14076}"/>
+                <a16:creationId xmlns:a16="http://schemas.microsoft.com/office/drawing/2014/main" id="{122D1F3E-FCCD-B52C-120C-94B153E7FF58}"/>
               </a:ext>
             </a:extLst>
           </p:cNvPr>
@@ -5525,7 +5525,7 @@
           <p:cNvPr id="12" name="meta">
             <a:extLst>
               <a:ext uri="{FF2B5EF4-FFF2-40B4-BE49-F238E27FC236}">
-                <a16:creationId xmlns:a16="http://schemas.microsoft.com/office/drawing/2014/main" id="{DAB0210A-B52A-AC5B-08F7-5A9A51589DFB}"/>
+                <a16:creationId xmlns:a16="http://schemas.microsoft.com/office/drawing/2014/main" id="{5FBF8D0F-CCB3-5E93-47A9-CBF6A121701A}"/>
               </a:ext>
             </a:extLst>
           </p:cNvPr>
@@ -5574,7 +5574,7 @@
             <a:hlinkClick r:id="rId4"/>
             <a:extLst>
               <a:ext uri="{FF2B5EF4-FFF2-40B4-BE49-F238E27FC236}">
-                <a16:creationId xmlns:a16="http://schemas.microsoft.com/office/drawing/2014/main" id="{16207ADD-D6D8-A4BE-F375-C31CD2C345DB}"/>
+                <a16:creationId xmlns:a16="http://schemas.microsoft.com/office/drawing/2014/main" id="{96BB06A5-54D4-8A19-7D3E-B7F62AF42C03}"/>
               </a:ext>
             </a:extLst>
           </p:cNvPr>
@@ -5610,7 +5610,7 @@
           <p:cNvPr id="15" name="artifact">
             <a:extLst>
               <a:ext uri="{FF2B5EF4-FFF2-40B4-BE49-F238E27FC236}">
-                <a16:creationId xmlns:a16="http://schemas.microsoft.com/office/drawing/2014/main" id="{B4DFE69E-C965-7CD8-5F8B-8E5AF05F7911}"/>
+                <a16:creationId xmlns:a16="http://schemas.microsoft.com/office/drawing/2014/main" id="{3BF34F61-DEAF-CA23-E5D8-2E16299BBABA}"/>
               </a:ext>
             </a:extLst>
           </p:cNvPr>
@@ -5656,7 +5656,7 @@
           <p:cNvPr id="16" name="artifact2">
             <a:extLst>
               <a:ext uri="{FF2B5EF4-FFF2-40B4-BE49-F238E27FC236}">
-                <a16:creationId xmlns:a16="http://schemas.microsoft.com/office/drawing/2014/main" id="{6DBEFBFA-A8C5-ECBE-B420-ACD26F42D46D}"/>
+                <a16:creationId xmlns:a16="http://schemas.microsoft.com/office/drawing/2014/main" id="{FE15B040-0867-DD38-286D-1B64EFC99983}"/>
               </a:ext>
             </a:extLst>
           </p:cNvPr>
@@ -5703,7 +5703,7 @@
             <a:hlinkClick r:id="rId4"/>
             <a:extLst>
               <a:ext uri="{FF2B5EF4-FFF2-40B4-BE49-F238E27FC236}">
-                <a16:creationId xmlns:a16="http://schemas.microsoft.com/office/drawing/2014/main" id="{BDDB70D0-728A-AA79-E145-6BCE0B690FEF}"/>
+                <a16:creationId xmlns:a16="http://schemas.microsoft.com/office/drawing/2014/main" id="{1AA563F8-E431-FA4B-A5DF-92E637F21802}"/>
               </a:ext>
             </a:extLst>
           </p:cNvPr>
@@ -5772,7 +5772,7 @@
             <a:hlinkClick r:id="rId6"/>
             <a:extLst>
               <a:ext uri="{FF2B5EF4-FFF2-40B4-BE49-F238E27FC236}">
-                <a16:creationId xmlns:a16="http://schemas.microsoft.com/office/drawing/2014/main" id="{55B1C4AE-1BBC-465E-DBBD-7896364FD23F}"/>
+                <a16:creationId xmlns:a16="http://schemas.microsoft.com/office/drawing/2014/main" id="{E0554C2A-2078-0767-2266-E2453DBCEB46}"/>
               </a:ext>
             </a:extLst>
           </p:cNvPr>
@@ -5840,7 +5840,7 @@
           <p:cNvPr id="19" name="cover-flow-0">
             <a:extLst>
               <a:ext uri="{FF2B5EF4-FFF2-40B4-BE49-F238E27FC236}">
-                <a16:creationId xmlns:a16="http://schemas.microsoft.com/office/drawing/2014/main" id="{3A45346F-BF20-BCD1-AFC4-A9528B5A730A}"/>
+                <a16:creationId xmlns:a16="http://schemas.microsoft.com/office/drawing/2014/main" id="{2FECDB39-D712-F37A-285F-956332ACFDB2}"/>
               </a:ext>
             </a:extLst>
           </p:cNvPr>
@@ -5894,7 +5894,7 @@
           <p:cNvPr id="20" name="cover-flow-n-0">
             <a:extLst>
               <a:ext uri="{FF2B5EF4-FFF2-40B4-BE49-F238E27FC236}">
-                <a16:creationId xmlns:a16="http://schemas.microsoft.com/office/drawing/2014/main" id="{A98F4315-79E6-63DD-9570-6F80411A5B9E}"/>
+                <a16:creationId xmlns:a16="http://schemas.microsoft.com/office/drawing/2014/main" id="{DBC4C81B-09F7-B292-2266-F34315EF1E02}"/>
               </a:ext>
             </a:extLst>
           </p:cNvPr>
@@ -5940,7 +5940,7 @@
           <p:cNvPr id="21" name="cover-flow-t-0">
             <a:extLst>
               <a:ext uri="{FF2B5EF4-FFF2-40B4-BE49-F238E27FC236}">
-                <a16:creationId xmlns:a16="http://schemas.microsoft.com/office/drawing/2014/main" id="{0DAA5598-C856-9CF5-F09F-A8E3BBC83F50}"/>
+                <a16:creationId xmlns:a16="http://schemas.microsoft.com/office/drawing/2014/main" id="{5BFB3DFB-5175-0C2A-0F3C-05FDA5F620BA}"/>
               </a:ext>
             </a:extLst>
           </p:cNvPr>
@@ -5986,7 +5986,7 @@
           <p:cNvPr id="22" name="cover-flow-a-0">
             <a:extLst>
               <a:ext uri="{FF2B5EF4-FFF2-40B4-BE49-F238E27FC236}">
-                <a16:creationId xmlns:a16="http://schemas.microsoft.com/office/drawing/2014/main" id="{701DC320-DC76-93CD-928B-7C294B2BB63D}"/>
+                <a16:creationId xmlns:a16="http://schemas.microsoft.com/office/drawing/2014/main" id="{0611DC76-3C3F-5703-75E0-079F0E6A517C}"/>
               </a:ext>
             </a:extLst>
           </p:cNvPr>
@@ -6028,7 +6028,7 @@
           <p:cNvPr id="23" name="cover-flow-1">
             <a:extLst>
               <a:ext uri="{FF2B5EF4-FFF2-40B4-BE49-F238E27FC236}">
-                <a16:creationId xmlns:a16="http://schemas.microsoft.com/office/drawing/2014/main" id="{48A2C63A-2258-D840-E3E3-73D14A94E1AE}"/>
+                <a16:creationId xmlns:a16="http://schemas.microsoft.com/office/drawing/2014/main" id="{060661B1-6A0B-1411-FEB8-79789F9F7789}"/>
               </a:ext>
             </a:extLst>
           </p:cNvPr>
@@ -6082,7 +6082,7 @@
           <p:cNvPr id="24" name="cover-flow-n-1">
             <a:extLst>
               <a:ext uri="{FF2B5EF4-FFF2-40B4-BE49-F238E27FC236}">
-                <a16:creationId xmlns:a16="http://schemas.microsoft.com/office/drawing/2014/main" id="{0DD9E218-1595-D223-17B8-694C4DFE216C}"/>
+                <a16:creationId xmlns:a16="http://schemas.microsoft.com/office/drawing/2014/main" id="{02B0628D-A6FD-A415-E086-A57C1A035BC4}"/>
               </a:ext>
             </a:extLst>
           </p:cNvPr>
@@ -6128,7 +6128,7 @@
           <p:cNvPr id="25" name="cover-flow-t-1">
             <a:extLst>
               <a:ext uri="{FF2B5EF4-FFF2-40B4-BE49-F238E27FC236}">
-                <a16:creationId xmlns:a16="http://schemas.microsoft.com/office/drawing/2014/main" id="{1F3D6CBF-7FE4-D441-0B4C-3D220ABB5974}"/>
+                <a16:creationId xmlns:a16="http://schemas.microsoft.com/office/drawing/2014/main" id="{486060E1-4FAC-2086-F6D6-45C78BA042F1}"/>
               </a:ext>
             </a:extLst>
           </p:cNvPr>
@@ -6174,7 +6174,7 @@
           <p:cNvPr id="26" name="cover-flow-a-1">
             <a:extLst>
               <a:ext uri="{FF2B5EF4-FFF2-40B4-BE49-F238E27FC236}">
-                <a16:creationId xmlns:a16="http://schemas.microsoft.com/office/drawing/2014/main" id="{42782B93-FF47-08EA-2B85-0AC210D468E9}"/>
+                <a16:creationId xmlns:a16="http://schemas.microsoft.com/office/drawing/2014/main" id="{737FED1D-3B45-B321-837E-F76B4A6A07A8}"/>
               </a:ext>
             </a:extLst>
           </p:cNvPr>
@@ -6216,7 +6216,7 @@
           <p:cNvPr id="27" name="cover-flow-2">
             <a:extLst>
               <a:ext uri="{FF2B5EF4-FFF2-40B4-BE49-F238E27FC236}">
-                <a16:creationId xmlns:a16="http://schemas.microsoft.com/office/drawing/2014/main" id="{0D173335-9412-A154-DC69-558BEA20FDEA}"/>
+                <a16:creationId xmlns:a16="http://schemas.microsoft.com/office/drawing/2014/main" id="{6B266AE5-96C6-9B08-44DF-8595A79DE8A4}"/>
               </a:ext>
             </a:extLst>
           </p:cNvPr>
@@ -6270,7 +6270,7 @@
           <p:cNvPr id="28" name="cover-flow-n-2">
             <a:extLst>
               <a:ext uri="{FF2B5EF4-FFF2-40B4-BE49-F238E27FC236}">
-                <a16:creationId xmlns:a16="http://schemas.microsoft.com/office/drawing/2014/main" id="{F1F1BE7E-453D-E8EE-14B4-1A3626CDD421}"/>
+                <a16:creationId xmlns:a16="http://schemas.microsoft.com/office/drawing/2014/main" id="{D311BFD9-3442-9D25-49EE-1B14DA78EC37}"/>
               </a:ext>
             </a:extLst>
           </p:cNvPr>
@@ -6316,7 +6316,7 @@
           <p:cNvPr id="29" name="cover-flow-t-2">
             <a:extLst>
               <a:ext uri="{FF2B5EF4-FFF2-40B4-BE49-F238E27FC236}">
-                <a16:creationId xmlns:a16="http://schemas.microsoft.com/office/drawing/2014/main" id="{327636C8-0BE6-FF62-BEFE-93DA9EFBDA38}"/>
+                <a16:creationId xmlns:a16="http://schemas.microsoft.com/office/drawing/2014/main" id="{891F55DC-709C-076B-1C88-45FF1C4288F8}"/>
               </a:ext>
             </a:extLst>
           </p:cNvPr>
@@ -6362,7 +6362,7 @@
           <p:cNvPr id="30" name="cover-flow-a-2">
             <a:extLst>
               <a:ext uri="{FF2B5EF4-FFF2-40B4-BE49-F238E27FC236}">
-                <a16:creationId xmlns:a16="http://schemas.microsoft.com/office/drawing/2014/main" id="{139320E8-EA6C-A75F-8FE5-97110B9BDAFA}"/>
+                <a16:creationId xmlns:a16="http://schemas.microsoft.com/office/drawing/2014/main" id="{B0BB8C83-897D-95D4-CC3F-643E278A8D00}"/>
               </a:ext>
             </a:extLst>
           </p:cNvPr>
@@ -6404,7 +6404,7 @@
           <p:cNvPr id="31" name="cover-flow-3">
             <a:extLst>
               <a:ext uri="{FF2B5EF4-FFF2-40B4-BE49-F238E27FC236}">
-                <a16:creationId xmlns:a16="http://schemas.microsoft.com/office/drawing/2014/main" id="{FC8DCDC8-E4AB-EC39-1B83-92C1B020BBCA}"/>
+                <a16:creationId xmlns:a16="http://schemas.microsoft.com/office/drawing/2014/main" id="{FE1D245B-2751-70A6-8F88-019D279E2A26}"/>
               </a:ext>
             </a:extLst>
           </p:cNvPr>
@@ -6458,7 +6458,7 @@
           <p:cNvPr id="32" name="cover-flow-n-3">
             <a:extLst>
               <a:ext uri="{FF2B5EF4-FFF2-40B4-BE49-F238E27FC236}">
-                <a16:creationId xmlns:a16="http://schemas.microsoft.com/office/drawing/2014/main" id="{5E72891D-E000-CE5C-2AB2-D388B7DFCB95}"/>
+                <a16:creationId xmlns:a16="http://schemas.microsoft.com/office/drawing/2014/main" id="{05EBD9E7-E731-043F-3DF7-871073996C2F}"/>
               </a:ext>
             </a:extLst>
           </p:cNvPr>
@@ -6504,7 +6504,7 @@
           <p:cNvPr id="33" name="cover-flow-t-3">
             <a:extLst>
               <a:ext uri="{FF2B5EF4-FFF2-40B4-BE49-F238E27FC236}">
-                <a16:creationId xmlns:a16="http://schemas.microsoft.com/office/drawing/2014/main" id="{CAA0D0BA-5235-E913-A688-883EEDD028D2}"/>
+                <a16:creationId xmlns:a16="http://schemas.microsoft.com/office/drawing/2014/main" id="{4436987E-1D25-43D9-085B-D3AB13A8D1D7}"/>
               </a:ext>
             </a:extLst>
           </p:cNvPr>
@@ -6551,7 +6551,7 @@
             <a:hlinkClick r:id="rId4"/>
             <a:extLst>
               <a:ext uri="{FF2B5EF4-FFF2-40B4-BE49-F238E27FC236}">
-                <a16:creationId xmlns:a16="http://schemas.microsoft.com/office/drawing/2014/main" id="{0DC340A7-9466-0D13-0B67-36C57DBCED85}"/>
+                <a16:creationId xmlns:a16="http://schemas.microsoft.com/office/drawing/2014/main" id="{7C3213A8-AF02-CAFC-D2FD-D294FA06AF69}"/>
               </a:ext>
             </a:extLst>
           </p:cNvPr>
@@ -6612,7 +6612,7 @@
     </p:spTree>
     <p:extLst>
       <p:ext uri="{BB962C8B-B14F-4D97-AF65-F5344CB8AC3E}">
-        <p14:creationId xmlns:p14="http://schemas.microsoft.com/office/powerpoint/2010/main" val="1519353289"/>
+        <p14:creationId xmlns:p14="http://schemas.microsoft.com/office/powerpoint/2010/main" val="2471151088"/>
       </p:ext>
     </p:extLst>
   </p:cSld>
@@ -7372,7 +7372,7 @@
           <p:cNvPr id="2" name="bg">
             <a:extLst>
               <a:ext uri="{FF2B5EF4-FFF2-40B4-BE49-F238E27FC236}">
-                <a16:creationId xmlns:a16="http://schemas.microsoft.com/office/drawing/2014/main" id="{1BB5BAAB-1B3F-FC07-D1CC-7FB014719A16}"/>
+                <a16:creationId xmlns:a16="http://schemas.microsoft.com/office/drawing/2014/main" id="{ABD2D1DE-4C49-22E7-C072-C4861F7443B1}"/>
               </a:ext>
             </a:extLst>
           </p:cNvPr>
@@ -7433,7 +7433,7 @@
           <p:cNvPr id="3" name="rail">
             <a:extLst>
               <a:ext uri="{FF2B5EF4-FFF2-40B4-BE49-F238E27FC236}">
-                <a16:creationId xmlns:a16="http://schemas.microsoft.com/office/drawing/2014/main" id="{58D4FAB0-2C7A-523A-0F52-94C60C7EB18C}"/>
+                <a16:creationId xmlns:a16="http://schemas.microsoft.com/office/drawing/2014/main" id="{6EB4AB6A-8D8E-B086-82C2-978E78F7850A}"/>
               </a:ext>
             </a:extLst>
           </p:cNvPr>
@@ -7494,7 +7494,7 @@
           <p:cNvPr id="4" name="top-rule">
             <a:extLst>
               <a:ext uri="{FF2B5EF4-FFF2-40B4-BE49-F238E27FC236}">
-                <a16:creationId xmlns:a16="http://schemas.microsoft.com/office/drawing/2014/main" id="{B0C97D3C-54EA-6C72-3F73-D9BDC4CEBCD7}"/>
+                <a16:creationId xmlns:a16="http://schemas.microsoft.com/office/drawing/2014/main" id="{08089AFC-D774-32EB-1595-8672AD2938C7}"/>
               </a:ext>
             </a:extLst>
           </p:cNvPr>
@@ -7535,7 +7535,7 @@
           <p:cNvPr id="5" name="section">
             <a:extLst>
               <a:ext uri="{FF2B5EF4-FFF2-40B4-BE49-F238E27FC236}">
-                <a16:creationId xmlns:a16="http://schemas.microsoft.com/office/drawing/2014/main" id="{91BA8017-54B2-C6AB-8545-EEA6CF9D216B}"/>
+                <a16:creationId xmlns:a16="http://schemas.microsoft.com/office/drawing/2014/main" id="{EC811732-4F49-8049-D019-D5A72A35DD1B}"/>
               </a:ext>
             </a:extLst>
           </p:cNvPr>
@@ -7581,7 +7581,7 @@
           <p:cNvPr id="6" name="num">
             <a:extLst>
               <a:ext uri="{FF2B5EF4-FFF2-40B4-BE49-F238E27FC236}">
-                <a16:creationId xmlns:a16="http://schemas.microsoft.com/office/drawing/2014/main" id="{66578FBE-F799-CFF1-B6BD-F38D20C422C5}"/>
+                <a16:creationId xmlns:a16="http://schemas.microsoft.com/office/drawing/2014/main" id="{F7DE8A7D-1238-0EEF-E44C-7B7483D39A7A}"/>
               </a:ext>
             </a:extLst>
           </p:cNvPr>
@@ -7627,7 +7627,7 @@
           <p:cNvPr id="7" name="footer">
             <a:extLst>
               <a:ext uri="{FF2B5EF4-FFF2-40B4-BE49-F238E27FC236}">
-                <a16:creationId xmlns:a16="http://schemas.microsoft.com/office/drawing/2014/main" id="{601E09BB-FA6E-A9FB-EDB3-FC80B9A9B043}"/>
+                <a16:creationId xmlns:a16="http://schemas.microsoft.com/office/drawing/2014/main" id="{510363D8-8448-8F2B-581F-FE73FEFDDD4B}"/>
               </a:ext>
             </a:extLst>
           </p:cNvPr>
@@ -7673,7 +7673,7 @@
           <p:cNvPr id="8" name="student">
             <a:extLst>
               <a:ext uri="{FF2B5EF4-FFF2-40B4-BE49-F238E27FC236}">
-                <a16:creationId xmlns:a16="http://schemas.microsoft.com/office/drawing/2014/main" id="{8D82E5E8-366E-F971-6902-CC0A1E0A609C}"/>
+                <a16:creationId xmlns:a16="http://schemas.microsoft.com/office/drawing/2014/main" id="{E7F70952-06EB-A962-3CB0-F3ECEBFE9065}"/>
               </a:ext>
             </a:extLst>
           </p:cNvPr>
@@ -7719,7 +7719,7 @@
           <p:cNvPr id="10" name="图片 9">
             <a:extLst>
               <a:ext uri="{FF2B5EF4-FFF2-40B4-BE49-F238E27FC236}">
-                <a16:creationId xmlns:a16="http://schemas.microsoft.com/office/drawing/2014/main" id="{946C4198-B8DF-9C05-E70A-E14260600818}"/>
+                <a16:creationId xmlns:a16="http://schemas.microsoft.com/office/drawing/2014/main" id="{1FA533C4-FD56-E1A3-A515-1809B54488C4}"/>
               </a:ext>
             </a:extLst>
           </p:cNvPr>
@@ -7755,7 +7755,7 @@
           <p:cNvPr id="11" name="title">
             <a:extLst>
               <a:ext uri="{FF2B5EF4-FFF2-40B4-BE49-F238E27FC236}">
-                <a16:creationId xmlns:a16="http://schemas.microsoft.com/office/drawing/2014/main" id="{3B66A2FF-3B36-B611-6A8B-18ACE59B19E5}"/>
+                <a16:creationId xmlns:a16="http://schemas.microsoft.com/office/drawing/2014/main" id="{F63EA625-E18E-B29B-A724-B5B1409DC8DC}"/>
               </a:ext>
             </a:extLst>
           </p:cNvPr>
@@ -7801,7 +7801,7 @@
           <p:cNvPr id="12" name="subtitle">
             <a:extLst>
               <a:ext uri="{FF2B5EF4-FFF2-40B4-BE49-F238E27FC236}">
-                <a16:creationId xmlns:a16="http://schemas.microsoft.com/office/drawing/2014/main" id="{CFDE660B-4CDE-D9FF-9BE1-715BA37F2562}"/>
+                <a16:creationId xmlns:a16="http://schemas.microsoft.com/office/drawing/2014/main" id="{16EFA9C9-5E79-CC10-D474-F594ACD03831}"/>
               </a:ext>
             </a:extLst>
           </p:cNvPr>
@@ -7847,7 +7847,7 @@
           <p:cNvPr id="13" name="term">
             <a:extLst>
               <a:ext uri="{FF2B5EF4-FFF2-40B4-BE49-F238E27FC236}">
-                <a16:creationId xmlns:a16="http://schemas.microsoft.com/office/drawing/2014/main" id="{5703A7C2-5E19-12B8-62D7-F5732FA37479}"/>
+                <a16:creationId xmlns:a16="http://schemas.microsoft.com/office/drawing/2014/main" id="{287DF4CF-7B19-1357-D4E5-804923ED8BC6}"/>
               </a:ext>
             </a:extLst>
           </p:cNvPr>
@@ -7901,7 +7901,7 @@
           <p:cNvPr id="14" name="term-k">
             <a:extLst>
               <a:ext uri="{FF2B5EF4-FFF2-40B4-BE49-F238E27FC236}">
-                <a16:creationId xmlns:a16="http://schemas.microsoft.com/office/drawing/2014/main" id="{D37895FF-E326-8DE3-74F9-53A7312CAB27}"/>
+                <a16:creationId xmlns:a16="http://schemas.microsoft.com/office/drawing/2014/main" id="{6B84DFDB-0DF3-B9DC-1ADE-0070E0AB4D0A}"/>
               </a:ext>
             </a:extLst>
           </p:cNvPr>
@@ -7947,7 +7947,7 @@
           <p:cNvPr id="15" name="term-line">
             <a:extLst>
               <a:ext uri="{FF2B5EF4-FFF2-40B4-BE49-F238E27FC236}">
-                <a16:creationId xmlns:a16="http://schemas.microsoft.com/office/drawing/2014/main" id="{B9E9F1E8-38A4-63C1-FF43-EA32214F3EA1}"/>
+                <a16:creationId xmlns:a16="http://schemas.microsoft.com/office/drawing/2014/main" id="{055B2D9C-354B-E715-75FA-6761BE833303}"/>
               </a:ext>
             </a:extLst>
           </p:cNvPr>
@@ -7988,7 +7988,7 @@
           <p:cNvPr id="16" name="term-t">
             <a:extLst>
               <a:ext uri="{FF2B5EF4-FFF2-40B4-BE49-F238E27FC236}">
-                <a16:creationId xmlns:a16="http://schemas.microsoft.com/office/drawing/2014/main" id="{9860596F-1715-C23D-F74F-D4E8CCF085C0}"/>
+                <a16:creationId xmlns:a16="http://schemas.microsoft.com/office/drawing/2014/main" id="{64940794-F54D-B39B-6A90-55CB13034DF0}"/>
               </a:ext>
             </a:extLst>
           </p:cNvPr>
@@ -8038,7 +8038,7 @@
           <p:cNvPr id="17" name="term-bottom">
             <a:extLst>
               <a:ext uri="{FF2B5EF4-FFF2-40B4-BE49-F238E27FC236}">
-                <a16:creationId xmlns:a16="http://schemas.microsoft.com/office/drawing/2014/main" id="{B2FEBA89-7B1E-E50F-1B4A-0A90D8F0BFE1}"/>
+                <a16:creationId xmlns:a16="http://schemas.microsoft.com/office/drawing/2014/main" id="{49B441BB-9B13-3445-C6F0-406811F0872A}"/>
               </a:ext>
             </a:extLst>
           </p:cNvPr>
@@ -8092,7 +8092,7 @@
           <p:cNvPr id="18" name="term-bottom-t">
             <a:extLst>
               <a:ext uri="{FF2B5EF4-FFF2-40B4-BE49-F238E27FC236}">
-                <a16:creationId xmlns:a16="http://schemas.microsoft.com/office/drawing/2014/main" id="{B8EA9871-3AF1-3CA2-85BD-D1BE5AA7E77A}"/>
+                <a16:creationId xmlns:a16="http://schemas.microsoft.com/office/drawing/2014/main" id="{30F67815-5122-BC87-B07A-193250A66706}"/>
               </a:ext>
             </a:extLst>
           </p:cNvPr>
@@ -8138,7 +8138,7 @@
           <p:cNvPr id="19" name="ck-0">
             <a:extLst>
               <a:ext uri="{FF2B5EF4-FFF2-40B4-BE49-F238E27FC236}">
-                <a16:creationId xmlns:a16="http://schemas.microsoft.com/office/drawing/2014/main" id="{BB9715C8-24BE-44E9-E05E-FEA8525A39E9}"/>
+                <a16:creationId xmlns:a16="http://schemas.microsoft.com/office/drawing/2014/main" id="{4EBE9EEF-27AA-80EF-9EAA-790F397F23AC}"/>
               </a:ext>
             </a:extLst>
           </p:cNvPr>
@@ -8192,7 +8192,7 @@
           <p:cNvPr id="20" name="ckbar-0">
             <a:extLst>
               <a:ext uri="{FF2B5EF4-FFF2-40B4-BE49-F238E27FC236}">
-                <a16:creationId xmlns:a16="http://schemas.microsoft.com/office/drawing/2014/main" id="{E4113237-D672-0D33-3C30-3E302CB8FE15}"/>
+                <a16:creationId xmlns:a16="http://schemas.microsoft.com/office/drawing/2014/main" id="{568E31AB-7777-EFD7-B47C-7B588F9E5B87}"/>
               </a:ext>
             </a:extLst>
           </p:cNvPr>
@@ -8246,7 +8246,7 @@
           <p:cNvPr id="21" name="ck-t-0">
             <a:extLst>
               <a:ext uri="{FF2B5EF4-FFF2-40B4-BE49-F238E27FC236}">
-                <a16:creationId xmlns:a16="http://schemas.microsoft.com/office/drawing/2014/main" id="{CC79A245-A607-32D4-08FE-A6874D393202}"/>
+                <a16:creationId xmlns:a16="http://schemas.microsoft.com/office/drawing/2014/main" id="{FD0657D5-7B36-685F-D80D-BAD1325B8DD8}"/>
               </a:ext>
             </a:extLst>
           </p:cNvPr>
@@ -8292,7 +8292,7 @@
           <p:cNvPr id="22" name="ck-s-0">
             <a:extLst>
               <a:ext uri="{FF2B5EF4-FFF2-40B4-BE49-F238E27FC236}">
-                <a16:creationId xmlns:a16="http://schemas.microsoft.com/office/drawing/2014/main" id="{C96A9F01-A500-5553-25E4-1FE12E44623A}"/>
+                <a16:creationId xmlns:a16="http://schemas.microsoft.com/office/drawing/2014/main" id="{A61C320C-D6F1-48A9-3238-CF6B1135C104}"/>
               </a:ext>
             </a:extLst>
           </p:cNvPr>
@@ -8338,7 +8338,7 @@
           <p:cNvPr id="23" name="ck-1">
             <a:extLst>
               <a:ext uri="{FF2B5EF4-FFF2-40B4-BE49-F238E27FC236}">
-                <a16:creationId xmlns:a16="http://schemas.microsoft.com/office/drawing/2014/main" id="{C44E4505-1FB2-20F7-5A0D-443AEE45CEA0}"/>
+                <a16:creationId xmlns:a16="http://schemas.microsoft.com/office/drawing/2014/main" id="{46A00EFF-1307-3E5B-7895-76EF624A3BFA}"/>
               </a:ext>
             </a:extLst>
           </p:cNvPr>
@@ -8392,7 +8392,7 @@
           <p:cNvPr id="24" name="ckbar-1">
             <a:extLst>
               <a:ext uri="{FF2B5EF4-FFF2-40B4-BE49-F238E27FC236}">
-                <a16:creationId xmlns:a16="http://schemas.microsoft.com/office/drawing/2014/main" id="{A8E3A5C3-7A11-5C66-6C8A-0D5B4126701E}"/>
+                <a16:creationId xmlns:a16="http://schemas.microsoft.com/office/drawing/2014/main" id="{0ABB1C7C-050B-BB64-0455-85083A3C859F}"/>
               </a:ext>
             </a:extLst>
           </p:cNvPr>
@@ -8446,7 +8446,7 @@
           <p:cNvPr id="25" name="ck-t-1">
             <a:extLst>
               <a:ext uri="{FF2B5EF4-FFF2-40B4-BE49-F238E27FC236}">
-                <a16:creationId xmlns:a16="http://schemas.microsoft.com/office/drawing/2014/main" id="{84A58CD0-16F8-B03D-173C-4B1B3DB6ED3A}"/>
+                <a16:creationId xmlns:a16="http://schemas.microsoft.com/office/drawing/2014/main" id="{18F3D2ED-5C73-825B-EAA1-4EEFE49FC99E}"/>
               </a:ext>
             </a:extLst>
           </p:cNvPr>
@@ -8492,7 +8492,7 @@
           <p:cNvPr id="26" name="ck-s-1">
             <a:extLst>
               <a:ext uri="{FF2B5EF4-FFF2-40B4-BE49-F238E27FC236}">
-                <a16:creationId xmlns:a16="http://schemas.microsoft.com/office/drawing/2014/main" id="{1A5C893C-4782-B320-DC78-65DB6F63E565}"/>
+                <a16:creationId xmlns:a16="http://schemas.microsoft.com/office/drawing/2014/main" id="{306F7C7D-BA8D-A0A6-1D4C-E5EC9EE7224F}"/>
               </a:ext>
             </a:extLst>
           </p:cNvPr>
@@ -8538,7 +8538,7 @@
           <p:cNvPr id="27" name="ck-2">
             <a:extLst>
               <a:ext uri="{FF2B5EF4-FFF2-40B4-BE49-F238E27FC236}">
-                <a16:creationId xmlns:a16="http://schemas.microsoft.com/office/drawing/2014/main" id="{AEC4B517-3E93-92DC-F336-B9A56FEBE431}"/>
+                <a16:creationId xmlns:a16="http://schemas.microsoft.com/office/drawing/2014/main" id="{47DF16E6-FC51-6414-3777-616DC5FAA835}"/>
               </a:ext>
             </a:extLst>
           </p:cNvPr>
@@ -8592,7 +8592,7 @@
           <p:cNvPr id="28" name="ckbar-2">
             <a:extLst>
               <a:ext uri="{FF2B5EF4-FFF2-40B4-BE49-F238E27FC236}">
-                <a16:creationId xmlns:a16="http://schemas.microsoft.com/office/drawing/2014/main" id="{972255F7-73AC-B219-CD02-29BDFEF23E43}"/>
+                <a16:creationId xmlns:a16="http://schemas.microsoft.com/office/drawing/2014/main" id="{3AE91CA9-F87C-D162-6643-6B23CE50D5D2}"/>
               </a:ext>
             </a:extLst>
           </p:cNvPr>
@@ -8646,7 +8646,7 @@
           <p:cNvPr id="29" name="ck-t-2">
             <a:extLst>
               <a:ext uri="{FF2B5EF4-FFF2-40B4-BE49-F238E27FC236}">
-                <a16:creationId xmlns:a16="http://schemas.microsoft.com/office/drawing/2014/main" id="{0E11FEC3-0433-0AE4-3D7D-5874306B6D31}"/>
+                <a16:creationId xmlns:a16="http://schemas.microsoft.com/office/drawing/2014/main" id="{E00B2653-7FED-88B2-BA59-69A557B8E653}"/>
               </a:ext>
             </a:extLst>
           </p:cNvPr>
@@ -8692,7 +8692,7 @@
           <p:cNvPr id="30" name="ck-s-2">
             <a:extLst>
               <a:ext uri="{FF2B5EF4-FFF2-40B4-BE49-F238E27FC236}">
-                <a16:creationId xmlns:a16="http://schemas.microsoft.com/office/drawing/2014/main" id="{457D2B6B-2C66-0E2A-AE8C-6CFA9648FF73}"/>
+                <a16:creationId xmlns:a16="http://schemas.microsoft.com/office/drawing/2014/main" id="{4EC28803-47B0-4C74-A776-DE1729AF62B4}"/>
               </a:ext>
             </a:extLst>
           </p:cNvPr>
@@ -8739,7 +8739,7 @@
             <a:hlinkClick r:id="rId4"/>
             <a:extLst>
               <a:ext uri="{FF2B5EF4-FFF2-40B4-BE49-F238E27FC236}">
-                <a16:creationId xmlns:a16="http://schemas.microsoft.com/office/drawing/2014/main" id="{75038B2B-E085-43A8-C144-D96577808B12}"/>
+                <a16:creationId xmlns:a16="http://schemas.microsoft.com/office/drawing/2014/main" id="{AADD0ED4-0E7B-8F65-8A24-0BABFC042101}"/>
               </a:ext>
             </a:extLst>
           </p:cNvPr>
@@ -8808,7 +8808,7 @@
             <a:hlinkClick r:id="rId5"/>
             <a:extLst>
               <a:ext uri="{FF2B5EF4-FFF2-40B4-BE49-F238E27FC236}">
-                <a16:creationId xmlns:a16="http://schemas.microsoft.com/office/drawing/2014/main" id="{C8198BE8-71EC-5F3B-BCD9-385978763B80}"/>
+                <a16:creationId xmlns:a16="http://schemas.microsoft.com/office/drawing/2014/main" id="{D739EF8D-D1B2-AF56-4B1E-EBC545030691}"/>
               </a:ext>
             </a:extLst>
           </p:cNvPr>
@@ -8869,7 +8869,7 @@
     </p:spTree>
     <p:extLst>
       <p:ext uri="{BB962C8B-B14F-4D97-AF65-F5344CB8AC3E}">
-        <p14:creationId xmlns:p14="http://schemas.microsoft.com/office/powerpoint/2010/main" val="1320953170"/>
+        <p14:creationId xmlns:p14="http://schemas.microsoft.com/office/powerpoint/2010/main" val="3284391828"/>
       </p:ext>
     </p:extLst>
   </p:cSld>
@@ -9631,7 +9631,7 @@
           <p:cNvPr id="2" name="bg">
             <a:extLst>
               <a:ext uri="{FF2B5EF4-FFF2-40B4-BE49-F238E27FC236}">
-                <a16:creationId xmlns:a16="http://schemas.microsoft.com/office/drawing/2014/main" id="{CADA8A47-BCFC-3D8B-056A-E24856F290B9}"/>
+                <a16:creationId xmlns:a16="http://schemas.microsoft.com/office/drawing/2014/main" id="{5B854DF4-4DA6-BED7-5BE3-059C4C20AB53}"/>
               </a:ext>
             </a:extLst>
           </p:cNvPr>
@@ -9692,7 +9692,7 @@
           <p:cNvPr id="3" name="rail">
             <a:extLst>
               <a:ext uri="{FF2B5EF4-FFF2-40B4-BE49-F238E27FC236}">
-                <a16:creationId xmlns:a16="http://schemas.microsoft.com/office/drawing/2014/main" id="{6ED6E860-2E52-DCC0-2089-E2FFE9F43E16}"/>
+                <a16:creationId xmlns:a16="http://schemas.microsoft.com/office/drawing/2014/main" id="{AC775F52-AF8C-FE0B-5D79-C797C157D11E}"/>
               </a:ext>
             </a:extLst>
           </p:cNvPr>
@@ -9753,7 +9753,7 @@
           <p:cNvPr id="4" name="top-rule">
             <a:extLst>
               <a:ext uri="{FF2B5EF4-FFF2-40B4-BE49-F238E27FC236}">
-                <a16:creationId xmlns:a16="http://schemas.microsoft.com/office/drawing/2014/main" id="{0831C4C2-2749-51F7-12F7-7D264FE5254F}"/>
+                <a16:creationId xmlns:a16="http://schemas.microsoft.com/office/drawing/2014/main" id="{3868E3CF-570D-B278-2227-128D3E70865E}"/>
               </a:ext>
             </a:extLst>
           </p:cNvPr>
@@ -9794,7 +9794,7 @@
           <p:cNvPr id="5" name="section">
             <a:extLst>
               <a:ext uri="{FF2B5EF4-FFF2-40B4-BE49-F238E27FC236}">
-                <a16:creationId xmlns:a16="http://schemas.microsoft.com/office/drawing/2014/main" id="{1511E895-8E06-3F08-0C16-4DB9DA781B5D}"/>
+                <a16:creationId xmlns:a16="http://schemas.microsoft.com/office/drawing/2014/main" id="{6CCA4963-8E3D-30C2-D05F-2E531C63A902}"/>
               </a:ext>
             </a:extLst>
           </p:cNvPr>
@@ -9840,7 +9840,7 @@
           <p:cNvPr id="6" name="num">
             <a:extLst>
               <a:ext uri="{FF2B5EF4-FFF2-40B4-BE49-F238E27FC236}">
-                <a16:creationId xmlns:a16="http://schemas.microsoft.com/office/drawing/2014/main" id="{2F98EDA7-E688-F2C9-B2E4-A40348B4A9E1}"/>
+                <a16:creationId xmlns:a16="http://schemas.microsoft.com/office/drawing/2014/main" id="{FFEB702C-DBC2-0427-3F02-80098B0E59E4}"/>
               </a:ext>
             </a:extLst>
           </p:cNvPr>
@@ -9886,7 +9886,7 @@
           <p:cNvPr id="7" name="footer">
             <a:extLst>
               <a:ext uri="{FF2B5EF4-FFF2-40B4-BE49-F238E27FC236}">
-                <a16:creationId xmlns:a16="http://schemas.microsoft.com/office/drawing/2014/main" id="{5BB84BFC-F87C-5F61-9943-5C250D103BB0}"/>
+                <a16:creationId xmlns:a16="http://schemas.microsoft.com/office/drawing/2014/main" id="{09F3BFBE-0D4B-AE69-7A5D-85EB334EC30E}"/>
               </a:ext>
             </a:extLst>
           </p:cNvPr>
@@ -9932,7 +9932,7 @@
           <p:cNvPr id="8" name="student">
             <a:extLst>
               <a:ext uri="{FF2B5EF4-FFF2-40B4-BE49-F238E27FC236}">
-                <a16:creationId xmlns:a16="http://schemas.microsoft.com/office/drawing/2014/main" id="{1BF2AC57-1F93-9B28-DF92-B91D17DEE0A2}"/>
+                <a16:creationId xmlns:a16="http://schemas.microsoft.com/office/drawing/2014/main" id="{6AEC6AB4-76BC-9BAE-8FD7-2D77C75DDDF5}"/>
               </a:ext>
             </a:extLst>
           </p:cNvPr>
@@ -9978,7 +9978,7 @@
           <p:cNvPr id="10" name="图片 9">
             <a:extLst>
               <a:ext uri="{FF2B5EF4-FFF2-40B4-BE49-F238E27FC236}">
-                <a16:creationId xmlns:a16="http://schemas.microsoft.com/office/drawing/2014/main" id="{58BA0859-FE8E-5894-5CC1-609EFFC1A38C}"/>
+                <a16:creationId xmlns:a16="http://schemas.microsoft.com/office/drawing/2014/main" id="{8EB7BCA7-D9E7-CC5E-419C-124B0D0745E8}"/>
               </a:ext>
             </a:extLst>
           </p:cNvPr>
@@ -10014,7 +10014,7 @@
           <p:cNvPr id="11" name="title">
             <a:extLst>
               <a:ext uri="{FF2B5EF4-FFF2-40B4-BE49-F238E27FC236}">
-                <a16:creationId xmlns:a16="http://schemas.microsoft.com/office/drawing/2014/main" id="{CD651B72-49CD-190D-C699-7825D0F68229}"/>
+                <a16:creationId xmlns:a16="http://schemas.microsoft.com/office/drawing/2014/main" id="{643748D4-6094-791E-E5F3-4083477CE2DF}"/>
               </a:ext>
             </a:extLst>
           </p:cNvPr>
@@ -10060,7 +10060,7 @@
           <p:cNvPr id="12" name="subtitle">
             <a:extLst>
               <a:ext uri="{FF2B5EF4-FFF2-40B4-BE49-F238E27FC236}">
-                <a16:creationId xmlns:a16="http://schemas.microsoft.com/office/drawing/2014/main" id="{760E2EAF-376D-2855-CF7E-A01533628DB7}"/>
+                <a16:creationId xmlns:a16="http://schemas.microsoft.com/office/drawing/2014/main" id="{F89BE486-1C93-FFBC-2961-013C17939A0B}"/>
               </a:ext>
             </a:extLst>
           </p:cNvPr>
@@ -10106,7 +10106,7 @@
           <p:cNvPr id="13" name="rule">
             <a:extLst>
               <a:ext uri="{FF2B5EF4-FFF2-40B4-BE49-F238E27FC236}">
-                <a16:creationId xmlns:a16="http://schemas.microsoft.com/office/drawing/2014/main" id="{3D75AA03-3464-D577-5C74-3987FC6B1F5A}"/>
+                <a16:creationId xmlns:a16="http://schemas.microsoft.com/office/drawing/2014/main" id="{637F5C7B-F759-4BA2-FBD8-1C4E387CEDFF}"/>
               </a:ext>
             </a:extLst>
           </p:cNvPr>
@@ -10160,7 +10160,7 @@
           <p:cNvPr id="14" name="move-num-0">
             <a:extLst>
               <a:ext uri="{FF2B5EF4-FFF2-40B4-BE49-F238E27FC236}">
-                <a16:creationId xmlns:a16="http://schemas.microsoft.com/office/drawing/2014/main" id="{71542304-5B43-8808-20C9-D1AA43E9B773}"/>
+                <a16:creationId xmlns:a16="http://schemas.microsoft.com/office/drawing/2014/main" id="{EDE77A35-C1CA-867A-B99F-CE3465D29E7D}"/>
               </a:ext>
             </a:extLst>
           </p:cNvPr>
@@ -10206,7 +10206,7 @@
           <p:cNvPr id="15" name="move-title-0">
             <a:extLst>
               <a:ext uri="{FF2B5EF4-FFF2-40B4-BE49-F238E27FC236}">
-                <a16:creationId xmlns:a16="http://schemas.microsoft.com/office/drawing/2014/main" id="{9793A7BB-7A11-DF44-9CD5-7113F5AB96FA}"/>
+                <a16:creationId xmlns:a16="http://schemas.microsoft.com/office/drawing/2014/main" id="{36EF493C-4862-7497-41E5-4F7109233ABC}"/>
               </a:ext>
             </a:extLst>
           </p:cNvPr>
@@ -10252,7 +10252,7 @@
           <p:cNvPr id="16" name="move-sub-0">
             <a:extLst>
               <a:ext uri="{FF2B5EF4-FFF2-40B4-BE49-F238E27FC236}">
-                <a16:creationId xmlns:a16="http://schemas.microsoft.com/office/drawing/2014/main" id="{4AEDF674-901F-8369-6F1D-D17E887317B2}"/>
+                <a16:creationId xmlns:a16="http://schemas.microsoft.com/office/drawing/2014/main" id="{FA02BE1D-4C5A-53E4-7121-09CFB71D28CF}"/>
               </a:ext>
             </a:extLst>
           </p:cNvPr>
@@ -10298,7 +10298,7 @@
           <p:cNvPr id="17" name="move-num-1">
             <a:extLst>
               <a:ext uri="{FF2B5EF4-FFF2-40B4-BE49-F238E27FC236}">
-                <a16:creationId xmlns:a16="http://schemas.microsoft.com/office/drawing/2014/main" id="{7F28CC97-D88C-5695-B72B-C16F8B32F354}"/>
+                <a16:creationId xmlns:a16="http://schemas.microsoft.com/office/drawing/2014/main" id="{90D48120-29DE-9830-FE96-0713E3EE07E3}"/>
               </a:ext>
             </a:extLst>
           </p:cNvPr>
@@ -10344,7 +10344,7 @@
           <p:cNvPr id="18" name="move-title-1">
             <a:extLst>
               <a:ext uri="{FF2B5EF4-FFF2-40B4-BE49-F238E27FC236}">
-                <a16:creationId xmlns:a16="http://schemas.microsoft.com/office/drawing/2014/main" id="{C8A4AF0F-ED9E-54F6-55B7-15C451D7C137}"/>
+                <a16:creationId xmlns:a16="http://schemas.microsoft.com/office/drawing/2014/main" id="{0AF0BBDD-8440-A171-79F2-BD720DE70666}"/>
               </a:ext>
             </a:extLst>
           </p:cNvPr>
@@ -10390,7 +10390,7 @@
           <p:cNvPr id="19" name="move-sub-1">
             <a:extLst>
               <a:ext uri="{FF2B5EF4-FFF2-40B4-BE49-F238E27FC236}">
-                <a16:creationId xmlns:a16="http://schemas.microsoft.com/office/drawing/2014/main" id="{3219950E-B70C-8D11-85D8-25755EE21748}"/>
+                <a16:creationId xmlns:a16="http://schemas.microsoft.com/office/drawing/2014/main" id="{66E55CAA-0A48-EDD8-57CC-B2E144CEC9C2}"/>
               </a:ext>
             </a:extLst>
           </p:cNvPr>
@@ -10436,7 +10436,7 @@
           <p:cNvPr id="20" name="move-num-2">
             <a:extLst>
               <a:ext uri="{FF2B5EF4-FFF2-40B4-BE49-F238E27FC236}">
-                <a16:creationId xmlns:a16="http://schemas.microsoft.com/office/drawing/2014/main" id="{BBEA2A44-476A-1431-29BA-4BA9B40CFDF6}"/>
+                <a16:creationId xmlns:a16="http://schemas.microsoft.com/office/drawing/2014/main" id="{8A4226BC-5D9F-C702-01B9-91CC879F4F12}"/>
               </a:ext>
             </a:extLst>
           </p:cNvPr>
@@ -10482,7 +10482,7 @@
           <p:cNvPr id="21" name="move-title-2">
             <a:extLst>
               <a:ext uri="{FF2B5EF4-FFF2-40B4-BE49-F238E27FC236}">
-                <a16:creationId xmlns:a16="http://schemas.microsoft.com/office/drawing/2014/main" id="{95A36261-C645-FBC6-E7B3-90B7A9924973}"/>
+                <a16:creationId xmlns:a16="http://schemas.microsoft.com/office/drawing/2014/main" id="{13F3D0B6-319E-D206-AA16-18C0D4CEB653}"/>
               </a:ext>
             </a:extLst>
           </p:cNvPr>
@@ -10528,7 +10528,7 @@
           <p:cNvPr id="22" name="move-sub-2">
             <a:extLst>
               <a:ext uri="{FF2B5EF4-FFF2-40B4-BE49-F238E27FC236}">
-                <a16:creationId xmlns:a16="http://schemas.microsoft.com/office/drawing/2014/main" id="{67C2550F-CDAE-7439-5E19-1BEE2AC96602}"/>
+                <a16:creationId xmlns:a16="http://schemas.microsoft.com/office/drawing/2014/main" id="{C4265F70-BBC6-92C0-AB74-C30FFA72CB31}"/>
               </a:ext>
             </a:extLst>
           </p:cNvPr>
@@ -10574,7 +10574,7 @@
           <p:cNvPr id="23" name="qa-card-0">
             <a:extLst>
               <a:ext uri="{FF2B5EF4-FFF2-40B4-BE49-F238E27FC236}">
-                <a16:creationId xmlns:a16="http://schemas.microsoft.com/office/drawing/2014/main" id="{EB785923-997D-69A9-3650-BFD7590FFDB9}"/>
+                <a16:creationId xmlns:a16="http://schemas.microsoft.com/office/drawing/2014/main" id="{C759D03F-8965-BBCE-3D43-C97934D3F12B}"/>
               </a:ext>
             </a:extLst>
           </p:cNvPr>
@@ -10628,7 +10628,7 @@
           <p:cNvPr id="24" name="qa-card-top-0">
             <a:extLst>
               <a:ext uri="{FF2B5EF4-FFF2-40B4-BE49-F238E27FC236}">
-                <a16:creationId xmlns:a16="http://schemas.microsoft.com/office/drawing/2014/main" id="{28054DC6-C8E8-59EC-BB11-744553845AEB}"/>
+                <a16:creationId xmlns:a16="http://schemas.microsoft.com/office/drawing/2014/main" id="{E25DC117-C9A3-3517-D0C0-1179061FA9C1}"/>
               </a:ext>
             </a:extLst>
           </p:cNvPr>
@@ -10682,7 +10682,7 @@
           <p:cNvPr id="25" name="qa-q-0">
             <a:extLst>
               <a:ext uri="{FF2B5EF4-FFF2-40B4-BE49-F238E27FC236}">
-                <a16:creationId xmlns:a16="http://schemas.microsoft.com/office/drawing/2014/main" id="{73ABC64A-0A38-1988-846A-8DC96E2D4959}"/>
+                <a16:creationId xmlns:a16="http://schemas.microsoft.com/office/drawing/2014/main" id="{76FAD2C8-2496-F342-7B4D-147684897608}"/>
               </a:ext>
             </a:extLst>
           </p:cNvPr>
@@ -10728,7 +10728,7 @@
           <p:cNvPr id="26" name="qa-a-0">
             <a:extLst>
               <a:ext uri="{FF2B5EF4-FFF2-40B4-BE49-F238E27FC236}">
-                <a16:creationId xmlns:a16="http://schemas.microsoft.com/office/drawing/2014/main" id="{1DD3FBD7-3E7F-C53E-C21C-7AA6371A295C}"/>
+                <a16:creationId xmlns:a16="http://schemas.microsoft.com/office/drawing/2014/main" id="{B73C7D0E-C0E1-5DD0-FB48-2B7A4ABB88F7}"/>
               </a:ext>
             </a:extLst>
           </p:cNvPr>
@@ -10774,7 +10774,7 @@
           <p:cNvPr id="27" name="qa-line-0">
             <a:extLst>
               <a:ext uri="{FF2B5EF4-FFF2-40B4-BE49-F238E27FC236}">
-                <a16:creationId xmlns:a16="http://schemas.microsoft.com/office/drawing/2014/main" id="{261EDFB1-F5E0-46BB-D23E-52EA44066EBA}"/>
+                <a16:creationId xmlns:a16="http://schemas.microsoft.com/office/drawing/2014/main" id="{B268892E-3619-521A-2A6D-B8D9D5E6CE4E}"/>
               </a:ext>
             </a:extLst>
           </p:cNvPr>
@@ -10815,7 +10815,7 @@
           <p:cNvPr id="28" name="qa-p-0">
             <a:extLst>
               <a:ext uri="{FF2B5EF4-FFF2-40B4-BE49-F238E27FC236}">
-                <a16:creationId xmlns:a16="http://schemas.microsoft.com/office/drawing/2014/main" id="{33DCFCF3-818C-63DF-FD7F-15DB9B4FDCEB}"/>
+                <a16:creationId xmlns:a16="http://schemas.microsoft.com/office/drawing/2014/main" id="{E1BBEB54-F666-5767-73AB-1E4BCA830B40}"/>
               </a:ext>
             </a:extLst>
           </p:cNvPr>
@@ -10861,7 +10861,7 @@
           <p:cNvPr id="29" name="qa-card-1">
             <a:extLst>
               <a:ext uri="{FF2B5EF4-FFF2-40B4-BE49-F238E27FC236}">
-                <a16:creationId xmlns:a16="http://schemas.microsoft.com/office/drawing/2014/main" id="{B5B7C7D0-2770-6AC9-D185-FF341ADF6880}"/>
+                <a16:creationId xmlns:a16="http://schemas.microsoft.com/office/drawing/2014/main" id="{9903BBBF-EC26-BB48-9C63-F6C5AFDCA48F}"/>
               </a:ext>
             </a:extLst>
           </p:cNvPr>
@@ -10915,7 +10915,7 @@
           <p:cNvPr id="30" name="qa-card-top-1">
             <a:extLst>
               <a:ext uri="{FF2B5EF4-FFF2-40B4-BE49-F238E27FC236}">
-                <a16:creationId xmlns:a16="http://schemas.microsoft.com/office/drawing/2014/main" id="{00A92C12-464C-DA23-C45A-9184B647A60D}"/>
+                <a16:creationId xmlns:a16="http://schemas.microsoft.com/office/drawing/2014/main" id="{2EA2712D-BEBE-EDEF-57E7-DA7E58457D2D}"/>
               </a:ext>
             </a:extLst>
           </p:cNvPr>
@@ -10969,7 +10969,7 @@
           <p:cNvPr id="31" name="qa-q-1">
             <a:extLst>
               <a:ext uri="{FF2B5EF4-FFF2-40B4-BE49-F238E27FC236}">
-                <a16:creationId xmlns:a16="http://schemas.microsoft.com/office/drawing/2014/main" id="{E835DD66-3B53-E55E-8796-01C764C7283F}"/>
+                <a16:creationId xmlns:a16="http://schemas.microsoft.com/office/drawing/2014/main" id="{B8C1BD92-6F91-75C2-887B-5E92C2844BF9}"/>
               </a:ext>
             </a:extLst>
           </p:cNvPr>
@@ -11015,7 +11015,7 @@
           <p:cNvPr id="32" name="qa-a-1">
             <a:extLst>
               <a:ext uri="{FF2B5EF4-FFF2-40B4-BE49-F238E27FC236}">
-                <a16:creationId xmlns:a16="http://schemas.microsoft.com/office/drawing/2014/main" id="{107E7A9A-CE44-463D-273A-77C945839EAA}"/>
+                <a16:creationId xmlns:a16="http://schemas.microsoft.com/office/drawing/2014/main" id="{06103FCA-6B24-BE44-81DF-E92C28AAC2D6}"/>
               </a:ext>
             </a:extLst>
           </p:cNvPr>
@@ -11061,7 +11061,7 @@
           <p:cNvPr id="33" name="qa-line-1">
             <a:extLst>
               <a:ext uri="{FF2B5EF4-FFF2-40B4-BE49-F238E27FC236}">
-                <a16:creationId xmlns:a16="http://schemas.microsoft.com/office/drawing/2014/main" id="{D82ED6D9-20DC-BEB6-1973-0219F3CB4346}"/>
+                <a16:creationId xmlns:a16="http://schemas.microsoft.com/office/drawing/2014/main" id="{8E1D4918-3C10-CDDB-EDA1-A84E26FD35BC}"/>
               </a:ext>
             </a:extLst>
           </p:cNvPr>
@@ -11102,7 +11102,7 @@
           <p:cNvPr id="34" name="qa-p-1">
             <a:extLst>
               <a:ext uri="{FF2B5EF4-FFF2-40B4-BE49-F238E27FC236}">
-                <a16:creationId xmlns:a16="http://schemas.microsoft.com/office/drawing/2014/main" id="{337EFC50-E776-9C8F-98A7-F00C58B42928}"/>
+                <a16:creationId xmlns:a16="http://schemas.microsoft.com/office/drawing/2014/main" id="{0D98551B-EFC0-DDD1-3E17-33BC45CDA84D}"/>
               </a:ext>
             </a:extLst>
           </p:cNvPr>
@@ -11148,7 +11148,7 @@
           <p:cNvPr id="35" name="qa-card-2">
             <a:extLst>
               <a:ext uri="{FF2B5EF4-FFF2-40B4-BE49-F238E27FC236}">
-                <a16:creationId xmlns:a16="http://schemas.microsoft.com/office/drawing/2014/main" id="{46F3963B-AE6A-3A6C-92E2-0ED20FF74E21}"/>
+                <a16:creationId xmlns:a16="http://schemas.microsoft.com/office/drawing/2014/main" id="{E5874BC8-8C6D-9A42-C52D-D72F11904DC6}"/>
               </a:ext>
             </a:extLst>
           </p:cNvPr>
@@ -11202,7 +11202,7 @@
           <p:cNvPr id="36" name="qa-card-top-2">
             <a:extLst>
               <a:ext uri="{FF2B5EF4-FFF2-40B4-BE49-F238E27FC236}">
-                <a16:creationId xmlns:a16="http://schemas.microsoft.com/office/drawing/2014/main" id="{F1AF1F41-E0FC-D11E-B9F8-4315B913B651}"/>
+                <a16:creationId xmlns:a16="http://schemas.microsoft.com/office/drawing/2014/main" id="{978519C9-5B4A-C4D8-80D0-94D3FA0D81FF}"/>
               </a:ext>
             </a:extLst>
           </p:cNvPr>
@@ -11256,7 +11256,7 @@
           <p:cNvPr id="37" name="qa-q-2">
             <a:extLst>
               <a:ext uri="{FF2B5EF4-FFF2-40B4-BE49-F238E27FC236}">
-                <a16:creationId xmlns:a16="http://schemas.microsoft.com/office/drawing/2014/main" id="{EB6ACFFB-EEA9-FF99-DA7D-9EF3AB327828}"/>
+                <a16:creationId xmlns:a16="http://schemas.microsoft.com/office/drawing/2014/main" id="{BBACF81A-1EE0-C367-88D6-A13148A18B05}"/>
               </a:ext>
             </a:extLst>
           </p:cNvPr>
@@ -11302,7 +11302,7 @@
           <p:cNvPr id="38" name="qa-a-2">
             <a:extLst>
               <a:ext uri="{FF2B5EF4-FFF2-40B4-BE49-F238E27FC236}">
-                <a16:creationId xmlns:a16="http://schemas.microsoft.com/office/drawing/2014/main" id="{7282C60A-05FE-3E86-7207-8E749DAB762C}"/>
+                <a16:creationId xmlns:a16="http://schemas.microsoft.com/office/drawing/2014/main" id="{1705898A-3E6C-061E-9453-B4C566034612}"/>
               </a:ext>
             </a:extLst>
           </p:cNvPr>
@@ -11348,7 +11348,7 @@
           <p:cNvPr id="39" name="qa-line-2">
             <a:extLst>
               <a:ext uri="{FF2B5EF4-FFF2-40B4-BE49-F238E27FC236}">
-                <a16:creationId xmlns:a16="http://schemas.microsoft.com/office/drawing/2014/main" id="{94DCD364-C5A7-7F84-0A35-9107CDACD8CD}"/>
+                <a16:creationId xmlns:a16="http://schemas.microsoft.com/office/drawing/2014/main" id="{DDA895F1-739A-D045-C095-DFC70AF7B8B4}"/>
               </a:ext>
             </a:extLst>
           </p:cNvPr>
@@ -11389,7 +11389,7 @@
           <p:cNvPr id="40" name="qa-p-2">
             <a:extLst>
               <a:ext uri="{FF2B5EF4-FFF2-40B4-BE49-F238E27FC236}">
-                <a16:creationId xmlns:a16="http://schemas.microsoft.com/office/drawing/2014/main" id="{ED28CF71-56BB-5B9E-71E5-48CEEEE5473D}"/>
+                <a16:creationId xmlns:a16="http://schemas.microsoft.com/office/drawing/2014/main" id="{437DD241-F23F-9229-5550-E14B993CB277}"/>
               </a:ext>
             </a:extLst>
           </p:cNvPr>
@@ -11435,7 +11435,7 @@
           <p:cNvPr id="41" name="refuse">
             <a:extLst>
               <a:ext uri="{FF2B5EF4-FFF2-40B4-BE49-F238E27FC236}">
-                <a16:creationId xmlns:a16="http://schemas.microsoft.com/office/drawing/2014/main" id="{15135C24-5FA3-202F-6B88-1712249068DA}"/>
+                <a16:creationId xmlns:a16="http://schemas.microsoft.com/office/drawing/2014/main" id="{F525B2E3-5497-FB66-F701-07882F096DB5}"/>
               </a:ext>
             </a:extLst>
           </p:cNvPr>
@@ -11489,7 +11489,7 @@
           <p:cNvPr id="42" name="refuse-t">
             <a:extLst>
               <a:ext uri="{FF2B5EF4-FFF2-40B4-BE49-F238E27FC236}">
-                <a16:creationId xmlns:a16="http://schemas.microsoft.com/office/drawing/2014/main" id="{0B5542A4-01EC-3C28-57C8-FFF8AF1C3468}"/>
+                <a16:creationId xmlns:a16="http://schemas.microsoft.com/office/drawing/2014/main" id="{FA8F8253-0698-BA6B-9DC6-8A2CE6537C60}"/>
               </a:ext>
             </a:extLst>
           </p:cNvPr>
@@ -11536,7 +11536,7 @@
             <a:hlinkClick r:id="rId4"/>
             <a:extLst>
               <a:ext uri="{FF2B5EF4-FFF2-40B4-BE49-F238E27FC236}">
-                <a16:creationId xmlns:a16="http://schemas.microsoft.com/office/drawing/2014/main" id="{E350063B-7CAC-2E2F-2754-DFFF48988599}"/>
+                <a16:creationId xmlns:a16="http://schemas.microsoft.com/office/drawing/2014/main" id="{47889BF3-321B-54CD-0377-614AD1A44B75}"/>
               </a:ext>
             </a:extLst>
           </p:cNvPr>
@@ -11597,7 +11597,7 @@
     </p:spTree>
     <p:extLst>
       <p:ext uri="{BB962C8B-B14F-4D97-AF65-F5344CB8AC3E}">
-        <p14:creationId xmlns:p14="http://schemas.microsoft.com/office/powerpoint/2010/main" val="3741741267"/>
+        <p14:creationId xmlns:p14="http://schemas.microsoft.com/office/powerpoint/2010/main" val="3743847701"/>
       </p:ext>
     </p:extLst>
   </p:cSld>
@@ -13032,7 +13032,7 @@
           <p:cNvPr id="2" name="bg">
             <a:extLst>
               <a:ext uri="{FF2B5EF4-FFF2-40B4-BE49-F238E27FC236}">
-                <a16:creationId xmlns:a16="http://schemas.microsoft.com/office/drawing/2014/main" id="{6FD89BA7-C64A-1665-735C-AB3E73DA0480}"/>
+                <a16:creationId xmlns:a16="http://schemas.microsoft.com/office/drawing/2014/main" id="{C8EA9B94-07A9-F835-4F02-947AAB115B03}"/>
               </a:ext>
             </a:extLst>
           </p:cNvPr>
@@ -13093,7 +13093,7 @@
           <p:cNvPr id="3" name="rail">
             <a:extLst>
               <a:ext uri="{FF2B5EF4-FFF2-40B4-BE49-F238E27FC236}">
-                <a16:creationId xmlns:a16="http://schemas.microsoft.com/office/drawing/2014/main" id="{3AED7B3A-E277-44C6-BB42-39C011660681}"/>
+                <a16:creationId xmlns:a16="http://schemas.microsoft.com/office/drawing/2014/main" id="{07A0F7E8-E221-1B0B-F1AE-523383DBC227}"/>
               </a:ext>
             </a:extLst>
           </p:cNvPr>
@@ -13154,7 +13154,7 @@
           <p:cNvPr id="4" name="top-rule">
             <a:extLst>
               <a:ext uri="{FF2B5EF4-FFF2-40B4-BE49-F238E27FC236}">
-                <a16:creationId xmlns:a16="http://schemas.microsoft.com/office/drawing/2014/main" id="{C3C9A5D9-2EE2-F9BF-30DD-5326D7DD117A}"/>
+                <a16:creationId xmlns:a16="http://schemas.microsoft.com/office/drawing/2014/main" id="{D675CBED-BE21-283F-1F75-60327A801084}"/>
               </a:ext>
             </a:extLst>
           </p:cNvPr>
@@ -13195,7 +13195,7 @@
           <p:cNvPr id="5" name="section">
             <a:extLst>
               <a:ext uri="{FF2B5EF4-FFF2-40B4-BE49-F238E27FC236}">
-                <a16:creationId xmlns:a16="http://schemas.microsoft.com/office/drawing/2014/main" id="{0367C409-E500-3B74-D72F-EDA62D742E1E}"/>
+                <a16:creationId xmlns:a16="http://schemas.microsoft.com/office/drawing/2014/main" id="{C76B8635-0E10-E4A0-D030-FC4541922D79}"/>
               </a:ext>
             </a:extLst>
           </p:cNvPr>
@@ -13241,7 +13241,7 @@
           <p:cNvPr id="6" name="num">
             <a:extLst>
               <a:ext uri="{FF2B5EF4-FFF2-40B4-BE49-F238E27FC236}">
-                <a16:creationId xmlns:a16="http://schemas.microsoft.com/office/drawing/2014/main" id="{03E818A2-36D8-7986-8D1A-CA6AA948AB44}"/>
+                <a16:creationId xmlns:a16="http://schemas.microsoft.com/office/drawing/2014/main" id="{FE2CBEB0-85B6-3569-9EBE-B6670719B77C}"/>
               </a:ext>
             </a:extLst>
           </p:cNvPr>
@@ -13287,7 +13287,7 @@
           <p:cNvPr id="7" name="footer">
             <a:extLst>
               <a:ext uri="{FF2B5EF4-FFF2-40B4-BE49-F238E27FC236}">
-                <a16:creationId xmlns:a16="http://schemas.microsoft.com/office/drawing/2014/main" id="{8A20C412-559B-742C-DE15-B654BF29A702}"/>
+                <a16:creationId xmlns:a16="http://schemas.microsoft.com/office/drawing/2014/main" id="{8A41146B-8D5D-246C-A13D-4E6927C8933A}"/>
               </a:ext>
             </a:extLst>
           </p:cNvPr>
@@ -13333,7 +13333,7 @@
           <p:cNvPr id="8" name="student">
             <a:extLst>
               <a:ext uri="{FF2B5EF4-FFF2-40B4-BE49-F238E27FC236}">
-                <a16:creationId xmlns:a16="http://schemas.microsoft.com/office/drawing/2014/main" id="{DADFA0B8-58F1-10BF-5D8A-85F1958D2FE9}"/>
+                <a16:creationId xmlns:a16="http://schemas.microsoft.com/office/drawing/2014/main" id="{006875F1-85DE-482F-3FB6-7F1367210C8D}"/>
               </a:ext>
             </a:extLst>
           </p:cNvPr>
@@ -13379,7 +13379,7 @@
           <p:cNvPr id="10" name="图片 9">
             <a:extLst>
               <a:ext uri="{FF2B5EF4-FFF2-40B4-BE49-F238E27FC236}">
-                <a16:creationId xmlns:a16="http://schemas.microsoft.com/office/drawing/2014/main" id="{194F9C54-0B85-DE25-3313-8698962EEA60}"/>
+                <a16:creationId xmlns:a16="http://schemas.microsoft.com/office/drawing/2014/main" id="{5A2791C1-1FD8-A159-5CAC-C41DD127BA90}"/>
               </a:ext>
             </a:extLst>
           </p:cNvPr>
@@ -13415,7 +13415,7 @@
           <p:cNvPr id="11" name="title">
             <a:extLst>
               <a:ext uri="{FF2B5EF4-FFF2-40B4-BE49-F238E27FC236}">
-                <a16:creationId xmlns:a16="http://schemas.microsoft.com/office/drawing/2014/main" id="{AB31230B-728A-3396-1987-8F73FA04CBBF}"/>
+                <a16:creationId xmlns:a16="http://schemas.microsoft.com/office/drawing/2014/main" id="{92765D27-F51F-AD0D-2FF8-20E02AE06EE0}"/>
               </a:ext>
             </a:extLst>
           </p:cNvPr>
@@ -13461,7 +13461,7 @@
           <p:cNvPr id="12" name="subtitle">
             <a:extLst>
               <a:ext uri="{FF2B5EF4-FFF2-40B4-BE49-F238E27FC236}">
-                <a16:creationId xmlns:a16="http://schemas.microsoft.com/office/drawing/2014/main" id="{B91736A8-B98D-45C8-E90F-96CB9889CBF7}"/>
+                <a16:creationId xmlns:a16="http://schemas.microsoft.com/office/drawing/2014/main" id="{4DB96809-CA4D-5EF2-4B64-1FB357F03580}"/>
               </a:ext>
             </a:extLst>
           </p:cNvPr>
@@ -13507,7 +13507,7 @@
           <p:cNvPr id="13" name="fyp-box">
             <a:extLst>
               <a:ext uri="{FF2B5EF4-FFF2-40B4-BE49-F238E27FC236}">
-                <a16:creationId xmlns:a16="http://schemas.microsoft.com/office/drawing/2014/main" id="{3DE69727-377F-89A4-B4E9-5A502C231C8C}"/>
+                <a16:creationId xmlns:a16="http://schemas.microsoft.com/office/drawing/2014/main" id="{3C157C44-B73B-3B70-1459-F8D6A8D453B2}"/>
               </a:ext>
             </a:extLst>
           </p:cNvPr>
@@ -13561,7 +13561,7 @@
           <p:cNvPr id="14" name="fyp-k">
             <a:extLst>
               <a:ext uri="{FF2B5EF4-FFF2-40B4-BE49-F238E27FC236}">
-                <a16:creationId xmlns:a16="http://schemas.microsoft.com/office/drawing/2014/main" id="{7C021BE9-A9B9-04DD-56E2-88E706854A8D}"/>
+                <a16:creationId xmlns:a16="http://schemas.microsoft.com/office/drawing/2014/main" id="{297F1F20-3EE7-B8F6-ACEB-67F06410FDEF}"/>
               </a:ext>
             </a:extLst>
           </p:cNvPr>
@@ -13607,7 +13607,7 @@
           <p:cNvPr id="15" name="fyp-t">
             <a:extLst>
               <a:ext uri="{FF2B5EF4-FFF2-40B4-BE49-F238E27FC236}">
-                <a16:creationId xmlns:a16="http://schemas.microsoft.com/office/drawing/2014/main" id="{53AFE6A2-CF31-3299-F418-1D311EF8B667}"/>
+                <a16:creationId xmlns:a16="http://schemas.microsoft.com/office/drawing/2014/main" id="{42031FFA-9AA9-1E60-080C-6AD12F90AC21}"/>
               </a:ext>
             </a:extLst>
           </p:cNvPr>
@@ -13653,7 +13653,7 @@
           <p:cNvPr id="16" name="fyp-s">
             <a:extLst>
               <a:ext uri="{FF2B5EF4-FFF2-40B4-BE49-F238E27FC236}">
-                <a16:creationId xmlns:a16="http://schemas.microsoft.com/office/drawing/2014/main" id="{053E2054-DBF5-0254-57D8-FD3C045D1394}"/>
+                <a16:creationId xmlns:a16="http://schemas.microsoft.com/office/drawing/2014/main" id="{E38AC851-EC2F-27C9-3CE1-368954945BA8}"/>
               </a:ext>
             </a:extLst>
           </p:cNvPr>
@@ -13699,7 +13699,7 @@
           <p:cNvPr id="17" name="future-arrow">
             <a:extLst>
               <a:ext uri="{FF2B5EF4-FFF2-40B4-BE49-F238E27FC236}">
-                <a16:creationId xmlns:a16="http://schemas.microsoft.com/office/drawing/2014/main" id="{958B175F-504B-B849-5C65-BC446C7FD5AB}"/>
+                <a16:creationId xmlns:a16="http://schemas.microsoft.com/office/drawing/2014/main" id="{2A7CC32C-D8FA-FB88-AC63-6663C09B3725}"/>
               </a:ext>
             </a:extLst>
           </p:cNvPr>
@@ -13741,7 +13741,7 @@
           <p:cNvPr id="18" name="future-label">
             <a:extLst>
               <a:ext uri="{FF2B5EF4-FFF2-40B4-BE49-F238E27FC236}">
-                <a16:creationId xmlns:a16="http://schemas.microsoft.com/office/drawing/2014/main" id="{35AAB94A-A3B4-344C-3D60-8D0D632B3CB1}"/>
+                <a16:creationId xmlns:a16="http://schemas.microsoft.com/office/drawing/2014/main" id="{814DEDDA-EEDD-FF7C-E4E8-501463B76941}"/>
               </a:ext>
             </a:extLst>
           </p:cNvPr>
@@ -13787,7 +13787,7 @@
           <p:cNvPr id="19" name="road-0">
             <a:extLst>
               <a:ext uri="{FF2B5EF4-FFF2-40B4-BE49-F238E27FC236}">
-                <a16:creationId xmlns:a16="http://schemas.microsoft.com/office/drawing/2014/main" id="{C19D3C81-84EF-22E0-930F-442845E9814E}"/>
+                <a16:creationId xmlns:a16="http://schemas.microsoft.com/office/drawing/2014/main" id="{9CECCF1F-FFAC-8D02-68F9-FE1EED2FB89A}"/>
               </a:ext>
             </a:extLst>
           </p:cNvPr>
@@ -13841,7 +13841,7 @@
           <p:cNvPr id="20" name="road-band-0">
             <a:extLst>
               <a:ext uri="{FF2B5EF4-FFF2-40B4-BE49-F238E27FC236}">
-                <a16:creationId xmlns:a16="http://schemas.microsoft.com/office/drawing/2014/main" id="{EDC280F4-D2E7-5BBD-D75D-8DBB7D43810A}"/>
+                <a16:creationId xmlns:a16="http://schemas.microsoft.com/office/drawing/2014/main" id="{A2C23397-E69F-0987-7819-5E217CEA8837}"/>
               </a:ext>
             </a:extLst>
           </p:cNvPr>
@@ -13895,7 +13895,7 @@
           <p:cNvPr id="21" name="road-type-0">
             <a:extLst>
               <a:ext uri="{FF2B5EF4-FFF2-40B4-BE49-F238E27FC236}">
-                <a16:creationId xmlns:a16="http://schemas.microsoft.com/office/drawing/2014/main" id="{03724FB6-C436-441F-FEE4-05C341D63397}"/>
+                <a16:creationId xmlns:a16="http://schemas.microsoft.com/office/drawing/2014/main" id="{A7A0F55A-B0BF-7F89-4F71-576AAFDE9DBD}"/>
               </a:ext>
             </a:extLst>
           </p:cNvPr>
@@ -13941,7 +13941,7 @@
           <p:cNvPr id="22" name="road-title-0">
             <a:extLst>
               <a:ext uri="{FF2B5EF4-FFF2-40B4-BE49-F238E27FC236}">
-                <a16:creationId xmlns:a16="http://schemas.microsoft.com/office/drawing/2014/main" id="{5E312274-C094-A1E1-85F8-A6E5FF30643C}"/>
+                <a16:creationId xmlns:a16="http://schemas.microsoft.com/office/drawing/2014/main" id="{5A95A43C-C40D-B640-D330-D6F0E21D1E2F}"/>
               </a:ext>
             </a:extLst>
           </p:cNvPr>
@@ -13987,7 +13987,7 @@
           <p:cNvPr id="23" name="road-target-0">
             <a:extLst>
               <a:ext uri="{FF2B5EF4-FFF2-40B4-BE49-F238E27FC236}">
-                <a16:creationId xmlns:a16="http://schemas.microsoft.com/office/drawing/2014/main" id="{2A91BA4E-6DF3-F84A-CF57-64DBBFC7E4B6}"/>
+                <a16:creationId xmlns:a16="http://schemas.microsoft.com/office/drawing/2014/main" id="{67835A5E-3B7B-37CA-50B6-ED3B2DEE7973}"/>
               </a:ext>
             </a:extLst>
           </p:cNvPr>
@@ -14041,7 +14041,7 @@
           <p:cNvPr id="24" name="road-targett-0">
             <a:extLst>
               <a:ext uri="{FF2B5EF4-FFF2-40B4-BE49-F238E27FC236}">
-                <a16:creationId xmlns:a16="http://schemas.microsoft.com/office/drawing/2014/main" id="{E678646A-29CB-4536-B1E2-B7B7986CBE71}"/>
+                <a16:creationId xmlns:a16="http://schemas.microsoft.com/office/drawing/2014/main" id="{DA677D8F-05F3-6E7A-B07B-8B8A6A39CAA2}"/>
               </a:ext>
             </a:extLst>
           </p:cNvPr>
@@ -14087,7 +14087,7 @@
           <p:cNvPr id="25" name="road-sub-0">
             <a:extLst>
               <a:ext uri="{FF2B5EF4-FFF2-40B4-BE49-F238E27FC236}">
-                <a16:creationId xmlns:a16="http://schemas.microsoft.com/office/drawing/2014/main" id="{096E7B32-F022-9149-F92E-1D026C42AA79}"/>
+                <a16:creationId xmlns:a16="http://schemas.microsoft.com/office/drawing/2014/main" id="{59C4E263-68F7-B977-0449-9D0C2123B55A}"/>
               </a:ext>
             </a:extLst>
           </p:cNvPr>
@@ -14133,7 +14133,7 @@
           <p:cNvPr id="26" name="road-1">
             <a:extLst>
               <a:ext uri="{FF2B5EF4-FFF2-40B4-BE49-F238E27FC236}">
-                <a16:creationId xmlns:a16="http://schemas.microsoft.com/office/drawing/2014/main" id="{69672BC9-7C52-37E2-5B09-31B1EE43B53B}"/>
+                <a16:creationId xmlns:a16="http://schemas.microsoft.com/office/drawing/2014/main" id="{8B746037-DD24-71EC-7BBA-C4B7E346A096}"/>
               </a:ext>
             </a:extLst>
           </p:cNvPr>
@@ -14187,7 +14187,7 @@
           <p:cNvPr id="27" name="road-band-1">
             <a:extLst>
               <a:ext uri="{FF2B5EF4-FFF2-40B4-BE49-F238E27FC236}">
-                <a16:creationId xmlns:a16="http://schemas.microsoft.com/office/drawing/2014/main" id="{534FC563-0C2B-ACCB-2658-A722BEE6D216}"/>
+                <a16:creationId xmlns:a16="http://schemas.microsoft.com/office/drawing/2014/main" id="{8CBB363D-124B-A886-42DA-F300AAD3210C}"/>
               </a:ext>
             </a:extLst>
           </p:cNvPr>
@@ -14241,7 +14241,7 @@
           <p:cNvPr id="28" name="road-type-1">
             <a:extLst>
               <a:ext uri="{FF2B5EF4-FFF2-40B4-BE49-F238E27FC236}">
-                <a16:creationId xmlns:a16="http://schemas.microsoft.com/office/drawing/2014/main" id="{EA30EC76-01C9-8985-0328-B16F53FE06BA}"/>
+                <a16:creationId xmlns:a16="http://schemas.microsoft.com/office/drawing/2014/main" id="{D718331A-0FFB-1E37-28D5-06AA3CF2F257}"/>
               </a:ext>
             </a:extLst>
           </p:cNvPr>
@@ -14287,7 +14287,7 @@
           <p:cNvPr id="29" name="road-title-1">
             <a:extLst>
               <a:ext uri="{FF2B5EF4-FFF2-40B4-BE49-F238E27FC236}">
-                <a16:creationId xmlns:a16="http://schemas.microsoft.com/office/drawing/2014/main" id="{DBC3237A-6B36-E4DA-EBDC-71BE956DDD37}"/>
+                <a16:creationId xmlns:a16="http://schemas.microsoft.com/office/drawing/2014/main" id="{7A31EA25-9633-CB4E-6B3E-1FAA122E8E1A}"/>
               </a:ext>
             </a:extLst>
           </p:cNvPr>
@@ -14333,7 +14333,7 @@
           <p:cNvPr id="30" name="road-target-1">
             <a:extLst>
               <a:ext uri="{FF2B5EF4-FFF2-40B4-BE49-F238E27FC236}">
-                <a16:creationId xmlns:a16="http://schemas.microsoft.com/office/drawing/2014/main" id="{A4B1E3C2-6B57-C2FE-E2D9-9173C6A8F340}"/>
+                <a16:creationId xmlns:a16="http://schemas.microsoft.com/office/drawing/2014/main" id="{7C75EEAF-B738-9CF5-2A7F-32138105F334}"/>
               </a:ext>
             </a:extLst>
           </p:cNvPr>
@@ -14387,7 +14387,7 @@
           <p:cNvPr id="31" name="road-targett-1">
             <a:extLst>
               <a:ext uri="{FF2B5EF4-FFF2-40B4-BE49-F238E27FC236}">
-                <a16:creationId xmlns:a16="http://schemas.microsoft.com/office/drawing/2014/main" id="{74186723-74D5-4DC3-17B1-995DCE430A75}"/>
+                <a16:creationId xmlns:a16="http://schemas.microsoft.com/office/drawing/2014/main" id="{53388348-9342-24A5-094D-518427B67B43}"/>
               </a:ext>
             </a:extLst>
           </p:cNvPr>
@@ -14433,7 +14433,7 @@
           <p:cNvPr id="32" name="road-sub-1">
             <a:extLst>
               <a:ext uri="{FF2B5EF4-FFF2-40B4-BE49-F238E27FC236}">
-                <a16:creationId xmlns:a16="http://schemas.microsoft.com/office/drawing/2014/main" id="{DA79574B-9DF9-CF5F-2CB5-5B14551EE10C}"/>
+                <a16:creationId xmlns:a16="http://schemas.microsoft.com/office/drawing/2014/main" id="{E4F19911-5A6C-B4E3-82EF-E11B32EB596B}"/>
               </a:ext>
             </a:extLst>
           </p:cNvPr>
@@ -14479,7 +14479,7 @@
           <p:cNvPr id="33" name="road-2">
             <a:extLst>
               <a:ext uri="{FF2B5EF4-FFF2-40B4-BE49-F238E27FC236}">
-                <a16:creationId xmlns:a16="http://schemas.microsoft.com/office/drawing/2014/main" id="{A10959DD-1605-3509-4EC4-B60CC9D96AD3}"/>
+                <a16:creationId xmlns:a16="http://schemas.microsoft.com/office/drawing/2014/main" id="{2A4091D8-68C6-43B2-7B63-5CBA62D45B4D}"/>
               </a:ext>
             </a:extLst>
           </p:cNvPr>
@@ -14533,7 +14533,7 @@
           <p:cNvPr id="34" name="road-band-2">
             <a:extLst>
               <a:ext uri="{FF2B5EF4-FFF2-40B4-BE49-F238E27FC236}">
-                <a16:creationId xmlns:a16="http://schemas.microsoft.com/office/drawing/2014/main" id="{8304022B-31DE-4BF2-F95B-B304340347E2}"/>
+                <a16:creationId xmlns:a16="http://schemas.microsoft.com/office/drawing/2014/main" id="{4263F8B2-A7C2-A8ED-3C28-8516D5AFC71F}"/>
               </a:ext>
             </a:extLst>
           </p:cNvPr>
@@ -14587,7 +14587,7 @@
           <p:cNvPr id="35" name="road-type-2">
             <a:extLst>
               <a:ext uri="{FF2B5EF4-FFF2-40B4-BE49-F238E27FC236}">
-                <a16:creationId xmlns:a16="http://schemas.microsoft.com/office/drawing/2014/main" id="{22F1D96E-D616-B599-39E4-1E3A178B1210}"/>
+                <a16:creationId xmlns:a16="http://schemas.microsoft.com/office/drawing/2014/main" id="{E70413FA-8CDD-0D33-9391-2564FA70C4BC}"/>
               </a:ext>
             </a:extLst>
           </p:cNvPr>
@@ -14633,7 +14633,7 @@
           <p:cNvPr id="36" name="road-title-2">
             <a:extLst>
               <a:ext uri="{FF2B5EF4-FFF2-40B4-BE49-F238E27FC236}">
-                <a16:creationId xmlns:a16="http://schemas.microsoft.com/office/drawing/2014/main" id="{B15678D1-A466-1437-8A80-8281F061A95A}"/>
+                <a16:creationId xmlns:a16="http://schemas.microsoft.com/office/drawing/2014/main" id="{C6EF64EF-1C47-048F-9A94-B46866F05176}"/>
               </a:ext>
             </a:extLst>
           </p:cNvPr>
@@ -14679,7 +14679,7 @@
           <p:cNvPr id="37" name="road-target-2">
             <a:extLst>
               <a:ext uri="{FF2B5EF4-FFF2-40B4-BE49-F238E27FC236}">
-                <a16:creationId xmlns:a16="http://schemas.microsoft.com/office/drawing/2014/main" id="{4104CB40-7B03-0FB5-28A0-C4DB2B73F077}"/>
+                <a16:creationId xmlns:a16="http://schemas.microsoft.com/office/drawing/2014/main" id="{AF08A307-FA7A-716F-EAE6-68F0C38E2E05}"/>
               </a:ext>
             </a:extLst>
           </p:cNvPr>
@@ -14733,7 +14733,7 @@
           <p:cNvPr id="38" name="road-targett-2">
             <a:extLst>
               <a:ext uri="{FF2B5EF4-FFF2-40B4-BE49-F238E27FC236}">
-                <a16:creationId xmlns:a16="http://schemas.microsoft.com/office/drawing/2014/main" id="{71B8A4BC-C310-30A2-07FB-7F96EFB5540B}"/>
+                <a16:creationId xmlns:a16="http://schemas.microsoft.com/office/drawing/2014/main" id="{3D9FA5F4-6DEC-5EFF-1263-A123B7AD0241}"/>
               </a:ext>
             </a:extLst>
           </p:cNvPr>
@@ -14779,7 +14779,7 @@
           <p:cNvPr id="39" name="road-sub-2">
             <a:extLst>
               <a:ext uri="{FF2B5EF4-FFF2-40B4-BE49-F238E27FC236}">
-                <a16:creationId xmlns:a16="http://schemas.microsoft.com/office/drawing/2014/main" id="{A488AACE-D755-15A8-F413-493D8DF26804}"/>
+                <a16:creationId xmlns:a16="http://schemas.microsoft.com/office/drawing/2014/main" id="{A78D20D0-81AA-0635-5CA4-7EC96706E23C}"/>
               </a:ext>
             </a:extLst>
           </p:cNvPr>
@@ -14825,7 +14825,7 @@
           <p:cNvPr id="40" name="road-3">
             <a:extLst>
               <a:ext uri="{FF2B5EF4-FFF2-40B4-BE49-F238E27FC236}">
-                <a16:creationId xmlns:a16="http://schemas.microsoft.com/office/drawing/2014/main" id="{4DAB021A-63D1-0C67-34EF-C703E78976F9}"/>
+                <a16:creationId xmlns:a16="http://schemas.microsoft.com/office/drawing/2014/main" id="{521D6A91-8B96-4CDC-FF6C-51DD51D46BF9}"/>
               </a:ext>
             </a:extLst>
           </p:cNvPr>
@@ -14879,7 +14879,7 @@
           <p:cNvPr id="41" name="road-band-3">
             <a:extLst>
               <a:ext uri="{FF2B5EF4-FFF2-40B4-BE49-F238E27FC236}">
-                <a16:creationId xmlns:a16="http://schemas.microsoft.com/office/drawing/2014/main" id="{5A176D62-9C8E-BC04-D751-CE5D0E816B98}"/>
+                <a16:creationId xmlns:a16="http://schemas.microsoft.com/office/drawing/2014/main" id="{64722656-8A28-4EF5-7548-EE4302CA1279}"/>
               </a:ext>
             </a:extLst>
           </p:cNvPr>
@@ -14933,7 +14933,7 @@
           <p:cNvPr id="42" name="road-type-3">
             <a:extLst>
               <a:ext uri="{FF2B5EF4-FFF2-40B4-BE49-F238E27FC236}">
-                <a16:creationId xmlns:a16="http://schemas.microsoft.com/office/drawing/2014/main" id="{61B57D97-BADE-B73F-0258-97522993C99A}"/>
+                <a16:creationId xmlns:a16="http://schemas.microsoft.com/office/drawing/2014/main" id="{D963276D-750F-7377-7622-3D9D1BAF1293}"/>
               </a:ext>
             </a:extLst>
           </p:cNvPr>
@@ -14979,7 +14979,7 @@
           <p:cNvPr id="43" name="road-title-3">
             <a:extLst>
               <a:ext uri="{FF2B5EF4-FFF2-40B4-BE49-F238E27FC236}">
-                <a16:creationId xmlns:a16="http://schemas.microsoft.com/office/drawing/2014/main" id="{8FC8B2A1-5B59-7813-FE84-8967ABCEAC19}"/>
+                <a16:creationId xmlns:a16="http://schemas.microsoft.com/office/drawing/2014/main" id="{B0C3DE57-1F9E-C1C2-BBB5-EC98D7A0DB30}"/>
               </a:ext>
             </a:extLst>
           </p:cNvPr>
@@ -15025,7 +15025,7 @@
           <p:cNvPr id="44" name="road-target-3">
             <a:extLst>
               <a:ext uri="{FF2B5EF4-FFF2-40B4-BE49-F238E27FC236}">
-                <a16:creationId xmlns:a16="http://schemas.microsoft.com/office/drawing/2014/main" id="{5C7B3F90-2BCE-B28C-F55C-5AEEAF415D7F}"/>
+                <a16:creationId xmlns:a16="http://schemas.microsoft.com/office/drawing/2014/main" id="{9997C961-32C9-22A5-B99B-309FADE818EE}"/>
               </a:ext>
             </a:extLst>
           </p:cNvPr>
@@ -15079,7 +15079,7 @@
           <p:cNvPr id="45" name="road-targett-3">
             <a:extLst>
               <a:ext uri="{FF2B5EF4-FFF2-40B4-BE49-F238E27FC236}">
-                <a16:creationId xmlns:a16="http://schemas.microsoft.com/office/drawing/2014/main" id="{7F27B3DE-4650-D830-94BD-B7578BCC5A2B}"/>
+                <a16:creationId xmlns:a16="http://schemas.microsoft.com/office/drawing/2014/main" id="{7E483AE3-D944-2B81-6144-EF4BE990E2E8}"/>
               </a:ext>
             </a:extLst>
           </p:cNvPr>
@@ -15125,7 +15125,7 @@
           <p:cNvPr id="46" name="road-sub-3">
             <a:extLst>
               <a:ext uri="{FF2B5EF4-FFF2-40B4-BE49-F238E27FC236}">
-                <a16:creationId xmlns:a16="http://schemas.microsoft.com/office/drawing/2014/main" id="{FD2AEAE2-2C92-740D-47B0-1EED8153A264}"/>
+                <a16:creationId xmlns:a16="http://schemas.microsoft.com/office/drawing/2014/main" id="{26472AEE-E9EE-4784-7764-EFE012B96BAE}"/>
               </a:ext>
             </a:extLst>
           </p:cNvPr>
@@ -15171,7 +15171,7 @@
           <p:cNvPr id="47" name="road-4">
             <a:extLst>
               <a:ext uri="{FF2B5EF4-FFF2-40B4-BE49-F238E27FC236}">
-                <a16:creationId xmlns:a16="http://schemas.microsoft.com/office/drawing/2014/main" id="{D3E25855-0D66-4BE2-2803-0857564BCFC9}"/>
+                <a16:creationId xmlns:a16="http://schemas.microsoft.com/office/drawing/2014/main" id="{8FA2C5C6-6B73-7507-5DE7-AA47F7318742}"/>
               </a:ext>
             </a:extLst>
           </p:cNvPr>
@@ -15225,7 +15225,7 @@
           <p:cNvPr id="48" name="road-band-4">
             <a:extLst>
               <a:ext uri="{FF2B5EF4-FFF2-40B4-BE49-F238E27FC236}">
-                <a16:creationId xmlns:a16="http://schemas.microsoft.com/office/drawing/2014/main" id="{C6F41F3B-5498-3248-0B8B-6E05EA5AF367}"/>
+                <a16:creationId xmlns:a16="http://schemas.microsoft.com/office/drawing/2014/main" id="{6DA3A561-F09A-BF43-8FEB-08E57E274BE1}"/>
               </a:ext>
             </a:extLst>
           </p:cNvPr>
@@ -15279,7 +15279,7 @@
           <p:cNvPr id="49" name="road-type-4">
             <a:extLst>
               <a:ext uri="{FF2B5EF4-FFF2-40B4-BE49-F238E27FC236}">
-                <a16:creationId xmlns:a16="http://schemas.microsoft.com/office/drawing/2014/main" id="{90BED2AE-6F38-9400-D2F6-EC74107FB8CB}"/>
+                <a16:creationId xmlns:a16="http://schemas.microsoft.com/office/drawing/2014/main" id="{400A09D7-16F7-C648-7808-05CBA0BEF720}"/>
               </a:ext>
             </a:extLst>
           </p:cNvPr>
@@ -15325,7 +15325,7 @@
           <p:cNvPr id="50" name="road-title-4">
             <a:extLst>
               <a:ext uri="{FF2B5EF4-FFF2-40B4-BE49-F238E27FC236}">
-                <a16:creationId xmlns:a16="http://schemas.microsoft.com/office/drawing/2014/main" id="{E2158E5E-99AA-139D-6AF0-99F01D232521}"/>
+                <a16:creationId xmlns:a16="http://schemas.microsoft.com/office/drawing/2014/main" id="{BDDF9E93-C108-E495-1326-73F5C1CC889F}"/>
               </a:ext>
             </a:extLst>
           </p:cNvPr>
@@ -15371,7 +15371,7 @@
           <p:cNvPr id="51" name="road-target-4">
             <a:extLst>
               <a:ext uri="{FF2B5EF4-FFF2-40B4-BE49-F238E27FC236}">
-                <a16:creationId xmlns:a16="http://schemas.microsoft.com/office/drawing/2014/main" id="{F6AC89B2-EDA2-01EC-1398-53A81267B362}"/>
+                <a16:creationId xmlns:a16="http://schemas.microsoft.com/office/drawing/2014/main" id="{CBF58104-42B2-CF61-B5A7-EBA20B973604}"/>
               </a:ext>
             </a:extLst>
           </p:cNvPr>
@@ -15425,7 +15425,7 @@
           <p:cNvPr id="52" name="road-targett-4">
             <a:extLst>
               <a:ext uri="{FF2B5EF4-FFF2-40B4-BE49-F238E27FC236}">
-                <a16:creationId xmlns:a16="http://schemas.microsoft.com/office/drawing/2014/main" id="{7DB8C5FE-DD27-7660-3B99-3ADB78CA2C45}"/>
+                <a16:creationId xmlns:a16="http://schemas.microsoft.com/office/drawing/2014/main" id="{216AE32F-8DED-F4E4-45F4-A451BE1932FA}"/>
               </a:ext>
             </a:extLst>
           </p:cNvPr>
@@ -15471,7 +15471,7 @@
           <p:cNvPr id="53" name="road-sub-4">
             <a:extLst>
               <a:ext uri="{FF2B5EF4-FFF2-40B4-BE49-F238E27FC236}">
-                <a16:creationId xmlns:a16="http://schemas.microsoft.com/office/drawing/2014/main" id="{1548C37C-7981-6EDA-62ED-15E7E861E84E}"/>
+                <a16:creationId xmlns:a16="http://schemas.microsoft.com/office/drawing/2014/main" id="{2965067E-7096-0D7A-2A47-AEC5109F3DB4}"/>
               </a:ext>
             </a:extLst>
           </p:cNvPr>
@@ -15517,7 +15517,7 @@
           <p:cNvPr id="54" name="own">
             <a:extLst>
               <a:ext uri="{FF2B5EF4-FFF2-40B4-BE49-F238E27FC236}">
-                <a16:creationId xmlns:a16="http://schemas.microsoft.com/office/drawing/2014/main" id="{5F6C311D-3285-B6E1-346A-3E527DAF3448}"/>
+                <a16:creationId xmlns:a16="http://schemas.microsoft.com/office/drawing/2014/main" id="{0AD987A5-0B02-1CAB-6596-8111C3AE2194}"/>
               </a:ext>
             </a:extLst>
           </p:cNvPr>
@@ -15571,7 +15571,7 @@
           <p:cNvPr id="55" name="own-t">
             <a:extLst>
               <a:ext uri="{FF2B5EF4-FFF2-40B4-BE49-F238E27FC236}">
-                <a16:creationId xmlns:a16="http://schemas.microsoft.com/office/drawing/2014/main" id="{EFB12347-0207-2D60-957A-F0AD75C02E32}"/>
+                <a16:creationId xmlns:a16="http://schemas.microsoft.com/office/drawing/2014/main" id="{FE59AA14-60A0-94A8-5805-E7711F6D8177}"/>
               </a:ext>
             </a:extLst>
           </p:cNvPr>
@@ -15618,7 +15618,7 @@
             <a:hlinkClick r:id="rId4"/>
             <a:extLst>
               <a:ext uri="{FF2B5EF4-FFF2-40B4-BE49-F238E27FC236}">
-                <a16:creationId xmlns:a16="http://schemas.microsoft.com/office/drawing/2014/main" id="{64BBC21B-7BAF-1921-1F81-7229DD770AAC}"/>
+                <a16:creationId xmlns:a16="http://schemas.microsoft.com/office/drawing/2014/main" id="{170E5199-700D-B1FB-8116-9608EE772F99}"/>
               </a:ext>
             </a:extLst>
           </p:cNvPr>
@@ -15679,7 +15679,7 @@
     </p:spTree>
     <p:extLst>
       <p:ext uri="{BB962C8B-B14F-4D97-AF65-F5344CB8AC3E}">
-        <p14:creationId xmlns:p14="http://schemas.microsoft.com/office/powerpoint/2010/main" val="3251168929"/>
+        <p14:creationId xmlns:p14="http://schemas.microsoft.com/office/powerpoint/2010/main" val="750435010"/>
       </p:ext>
     </p:extLst>
   </p:cSld>
@@ -17432,7 +17432,7 @@
           <p:cNvPr id="2" name="bg">
             <a:extLst>
               <a:ext uri="{FF2B5EF4-FFF2-40B4-BE49-F238E27FC236}">
-                <a16:creationId xmlns:a16="http://schemas.microsoft.com/office/drawing/2014/main" id="{729180F4-8063-090D-DE52-D266BE7C7B69}"/>
+                <a16:creationId xmlns:a16="http://schemas.microsoft.com/office/drawing/2014/main" id="{A1A92793-E9B7-FFC6-51A5-7CA5432E2325}"/>
               </a:ext>
             </a:extLst>
           </p:cNvPr>
@@ -17493,7 +17493,7 @@
           <p:cNvPr id="3" name="side-shade">
             <a:extLst>
               <a:ext uri="{FF2B5EF4-FFF2-40B4-BE49-F238E27FC236}">
-                <a16:creationId xmlns:a16="http://schemas.microsoft.com/office/drawing/2014/main" id="{D13AE1C8-F4B8-27D0-F8DB-6ABF5D624CD8}"/>
+                <a16:creationId xmlns:a16="http://schemas.microsoft.com/office/drawing/2014/main" id="{202A730F-32DA-40A1-D180-AB067F47BA4A}"/>
               </a:ext>
             </a:extLst>
           </p:cNvPr>
@@ -17554,7 +17554,7 @@
           <p:cNvPr id="4" name="cover-rule">
             <a:extLst>
               <a:ext uri="{FF2B5EF4-FFF2-40B4-BE49-F238E27FC236}">
-                <a16:creationId xmlns:a16="http://schemas.microsoft.com/office/drawing/2014/main" id="{B73FCAAF-C5FB-EEB8-CCB5-3B73470A58AD}"/>
+                <a16:creationId xmlns:a16="http://schemas.microsoft.com/office/drawing/2014/main" id="{4656AA15-3039-AE67-B4EF-D83B0894D104}"/>
               </a:ext>
             </a:extLst>
           </p:cNvPr>
@@ -17595,7 +17595,7 @@
           <p:cNvPr id="6" name="图片 5">
             <a:extLst>
               <a:ext uri="{FF2B5EF4-FFF2-40B4-BE49-F238E27FC236}">
-                <a16:creationId xmlns:a16="http://schemas.microsoft.com/office/drawing/2014/main" id="{99C772CC-2677-F50D-26E4-2008E70239D1}"/>
+                <a16:creationId xmlns:a16="http://schemas.microsoft.com/office/drawing/2014/main" id="{EF3D06A3-F405-2B71-C470-7F775898528D}"/>
               </a:ext>
             </a:extLst>
           </p:cNvPr>
@@ -17631,7 +17631,7 @@
           <p:cNvPr id="7" name="thanks">
             <a:extLst>
               <a:ext uri="{FF2B5EF4-FFF2-40B4-BE49-F238E27FC236}">
-                <a16:creationId xmlns:a16="http://schemas.microsoft.com/office/drawing/2014/main" id="{E451B1F4-75AD-515D-C008-A7FDF317C0AA}"/>
+                <a16:creationId xmlns:a16="http://schemas.microsoft.com/office/drawing/2014/main" id="{2FE20F95-FACF-C810-90DB-4358B1DBA870}"/>
               </a:ext>
             </a:extLst>
           </p:cNvPr>
@@ -17677,7 +17677,7 @@
           <p:cNvPr id="8" name="q">
             <a:extLst>
               <a:ext uri="{FF2B5EF4-FFF2-40B4-BE49-F238E27FC236}">
-                <a16:creationId xmlns:a16="http://schemas.microsoft.com/office/drawing/2014/main" id="{2008AA30-3C4D-24F8-3049-636B41D551F6}"/>
+                <a16:creationId xmlns:a16="http://schemas.microsoft.com/office/drawing/2014/main" id="{ACF6529C-4B86-1A72-79D5-399D60A33CC5}"/>
               </a:ext>
             </a:extLst>
           </p:cNvPr>
@@ -17723,7 +17723,7 @@
           <p:cNvPr id="9" name="qrule">
             <a:extLst>
               <a:ext uri="{FF2B5EF4-FFF2-40B4-BE49-F238E27FC236}">
-                <a16:creationId xmlns:a16="http://schemas.microsoft.com/office/drawing/2014/main" id="{B5DB2108-1F44-A05A-39D6-7C4C27DF6B05}"/>
+                <a16:creationId xmlns:a16="http://schemas.microsoft.com/office/drawing/2014/main" id="{A02D1D23-2868-DE2D-1F77-6B8BB5075F44}"/>
               </a:ext>
             </a:extLst>
           </p:cNvPr>
@@ -17764,7 +17764,7 @@
           <p:cNvPr id="10" name="anchor1">
             <a:extLst>
               <a:ext uri="{FF2B5EF4-FFF2-40B4-BE49-F238E27FC236}">
-                <a16:creationId xmlns:a16="http://schemas.microsoft.com/office/drawing/2014/main" id="{B04E122A-C0DD-FDB8-C594-C0FE049B81A4}"/>
+                <a16:creationId xmlns:a16="http://schemas.microsoft.com/office/drawing/2014/main" id="{F0389E79-CC62-6B92-AEF4-C1EDECE7E91D}"/>
               </a:ext>
             </a:extLst>
           </p:cNvPr>
@@ -17810,7 +17810,7 @@
           <p:cNvPr id="11" name="anchor2">
             <a:extLst>
               <a:ext uri="{FF2B5EF4-FFF2-40B4-BE49-F238E27FC236}">
-                <a16:creationId xmlns:a16="http://schemas.microsoft.com/office/drawing/2014/main" id="{40B2C6A6-0805-E6F9-A7A1-423CC0066098}"/>
+                <a16:creationId xmlns:a16="http://schemas.microsoft.com/office/drawing/2014/main" id="{11620466-4DBF-6103-AE79-4D12A159162C}"/>
               </a:ext>
             </a:extLst>
           </p:cNvPr>
@@ -17856,7 +17856,7 @@
           <p:cNvPr id="12" name="anchor3">
             <a:extLst>
               <a:ext uri="{FF2B5EF4-FFF2-40B4-BE49-F238E27FC236}">
-                <a16:creationId xmlns:a16="http://schemas.microsoft.com/office/drawing/2014/main" id="{EE8EAAB2-EA23-1F1B-EDAB-782A9FB1A1FF}"/>
+                <a16:creationId xmlns:a16="http://schemas.microsoft.com/office/drawing/2014/main" id="{1AB823D4-8C6A-87C5-4E4B-5AD67FB0545C}"/>
               </a:ext>
             </a:extLst>
           </p:cNvPr>
@@ -17903,7 +17903,7 @@
             <a:hlinkClick r:id="rId4"/>
             <a:extLst>
               <a:ext uri="{FF2B5EF4-FFF2-40B4-BE49-F238E27FC236}">
-                <a16:creationId xmlns:a16="http://schemas.microsoft.com/office/drawing/2014/main" id="{00A6162D-64F0-25C8-A9C6-C066C6325353}"/>
+                <a16:creationId xmlns:a16="http://schemas.microsoft.com/office/drawing/2014/main" id="{3841B1FE-C076-6E1C-FA68-8560DA6F27D0}"/>
               </a:ext>
             </a:extLst>
           </p:cNvPr>
@@ -17939,7 +17939,7 @@
           <p:cNvPr id="15" name="qrlab">
             <a:extLst>
               <a:ext uri="{FF2B5EF4-FFF2-40B4-BE49-F238E27FC236}">
-                <a16:creationId xmlns:a16="http://schemas.microsoft.com/office/drawing/2014/main" id="{BC23685A-C3F4-35A8-700F-F3395B640819}"/>
+                <a16:creationId xmlns:a16="http://schemas.microsoft.com/office/drawing/2014/main" id="{30222DCF-4079-4133-DBF9-B192A78C50EE}"/>
               </a:ext>
             </a:extLst>
           </p:cNvPr>
@@ -17986,7 +17986,7 @@
             <a:hlinkClick r:id="rId4"/>
             <a:extLst>
               <a:ext uri="{FF2B5EF4-FFF2-40B4-BE49-F238E27FC236}">
-                <a16:creationId xmlns:a16="http://schemas.microsoft.com/office/drawing/2014/main" id="{B17BD220-6F3C-898A-5D5F-2670CCC45151}"/>
+                <a16:creationId xmlns:a16="http://schemas.microsoft.com/office/drawing/2014/main" id="{2DE0D2B1-3F61-14A4-5910-13B784C5E37F}"/>
               </a:ext>
             </a:extLst>
           </p:cNvPr>
@@ -18055,7 +18055,7 @@
             <a:hlinkClick r:id="rId6"/>
             <a:extLst>
               <a:ext uri="{FF2B5EF4-FFF2-40B4-BE49-F238E27FC236}">
-                <a16:creationId xmlns:a16="http://schemas.microsoft.com/office/drawing/2014/main" id="{B810F827-0160-B829-FE8F-CE65259BEB9F}"/>
+                <a16:creationId xmlns:a16="http://schemas.microsoft.com/office/drawing/2014/main" id="{6D811D20-40EC-E50F-8616-184BC4703155}"/>
               </a:ext>
             </a:extLst>
           </p:cNvPr>
@@ -18124,7 +18124,7 @@
             <a:hlinkClick r:id="rId4"/>
             <a:extLst>
               <a:ext uri="{FF2B5EF4-FFF2-40B4-BE49-F238E27FC236}">
-                <a16:creationId xmlns:a16="http://schemas.microsoft.com/office/drawing/2014/main" id="{3B3F9266-70FD-D3E7-4CB4-A1D65AC743EF}"/>
+                <a16:creationId xmlns:a16="http://schemas.microsoft.com/office/drawing/2014/main" id="{5D328A25-B3A5-7CEB-F9A0-399DD5362355}"/>
               </a:ext>
             </a:extLst>
           </p:cNvPr>
@@ -18185,7 +18185,7 @@
     </p:spTree>
     <p:extLst>
       <p:ext uri="{BB962C8B-B14F-4D97-AF65-F5344CB8AC3E}">
-        <p14:creationId xmlns:p14="http://schemas.microsoft.com/office/powerpoint/2010/main" val="197514999"/>
+        <p14:creationId xmlns:p14="http://schemas.microsoft.com/office/powerpoint/2010/main" val="85244818"/>
       </p:ext>
     </p:extLst>
   </p:cSld>
@@ -18229,7 +18229,7 @@
           <p:cNvPr id="2" name="bg">
             <a:extLst>
               <a:ext uri="{FF2B5EF4-FFF2-40B4-BE49-F238E27FC236}">
-                <a16:creationId xmlns:a16="http://schemas.microsoft.com/office/drawing/2014/main" id="{3D09AED9-8AD9-8309-561A-F29EADF63CA0}"/>
+                <a16:creationId xmlns:a16="http://schemas.microsoft.com/office/drawing/2014/main" id="{83DDFD7C-7A98-5968-D97E-82DB404E3A6B}"/>
               </a:ext>
             </a:extLst>
           </p:cNvPr>
@@ -18290,7 +18290,7 @@
           <p:cNvPr id="3" name="rail">
             <a:extLst>
               <a:ext uri="{FF2B5EF4-FFF2-40B4-BE49-F238E27FC236}">
-                <a16:creationId xmlns:a16="http://schemas.microsoft.com/office/drawing/2014/main" id="{CADA09E2-6B0A-0190-D753-2F956AC46C5E}"/>
+                <a16:creationId xmlns:a16="http://schemas.microsoft.com/office/drawing/2014/main" id="{89016F0F-045F-2620-597B-603508422449}"/>
               </a:ext>
             </a:extLst>
           </p:cNvPr>
@@ -18351,7 +18351,7 @@
           <p:cNvPr id="4" name="top-rule">
             <a:extLst>
               <a:ext uri="{FF2B5EF4-FFF2-40B4-BE49-F238E27FC236}">
-                <a16:creationId xmlns:a16="http://schemas.microsoft.com/office/drawing/2014/main" id="{472F36DE-02F7-6EC9-20A6-99BB2DC9E0B0}"/>
+                <a16:creationId xmlns:a16="http://schemas.microsoft.com/office/drawing/2014/main" id="{38D32D63-E42D-4E08-DB06-99CC0D194E3B}"/>
               </a:ext>
             </a:extLst>
           </p:cNvPr>
@@ -18392,7 +18392,7 @@
           <p:cNvPr id="5" name="section">
             <a:extLst>
               <a:ext uri="{FF2B5EF4-FFF2-40B4-BE49-F238E27FC236}">
-                <a16:creationId xmlns:a16="http://schemas.microsoft.com/office/drawing/2014/main" id="{DC294261-AF47-F05D-0584-6C21FDFBB3C7}"/>
+                <a16:creationId xmlns:a16="http://schemas.microsoft.com/office/drawing/2014/main" id="{A09875A7-3773-FC54-EFE7-965AC316A0DD}"/>
               </a:ext>
             </a:extLst>
           </p:cNvPr>
@@ -18438,7 +18438,7 @@
           <p:cNvPr id="6" name="num">
             <a:extLst>
               <a:ext uri="{FF2B5EF4-FFF2-40B4-BE49-F238E27FC236}">
-                <a16:creationId xmlns:a16="http://schemas.microsoft.com/office/drawing/2014/main" id="{3A02C998-A087-1C51-365B-5AE259AF3D77}"/>
+                <a16:creationId xmlns:a16="http://schemas.microsoft.com/office/drawing/2014/main" id="{E8DA93B3-A67E-87E9-CD7E-5B9AEBC08919}"/>
               </a:ext>
             </a:extLst>
           </p:cNvPr>
@@ -18484,7 +18484,7 @@
           <p:cNvPr id="7" name="footer">
             <a:extLst>
               <a:ext uri="{FF2B5EF4-FFF2-40B4-BE49-F238E27FC236}">
-                <a16:creationId xmlns:a16="http://schemas.microsoft.com/office/drawing/2014/main" id="{00CA67C2-EE41-D07E-D09C-BECB951F45C2}"/>
+                <a16:creationId xmlns:a16="http://schemas.microsoft.com/office/drawing/2014/main" id="{A03FEF7F-129C-C046-5299-E79E2F1E8257}"/>
               </a:ext>
             </a:extLst>
           </p:cNvPr>
@@ -18530,7 +18530,7 @@
           <p:cNvPr id="8" name="student">
             <a:extLst>
               <a:ext uri="{FF2B5EF4-FFF2-40B4-BE49-F238E27FC236}">
-                <a16:creationId xmlns:a16="http://schemas.microsoft.com/office/drawing/2014/main" id="{2F56C6FF-C124-C1BE-D803-57774C7A7C0D}"/>
+                <a16:creationId xmlns:a16="http://schemas.microsoft.com/office/drawing/2014/main" id="{E9C08B58-2B0F-9AA4-0E43-186C85F31006}"/>
               </a:ext>
             </a:extLst>
           </p:cNvPr>
@@ -18576,7 +18576,7 @@
           <p:cNvPr id="10" name="图片 9">
             <a:extLst>
               <a:ext uri="{FF2B5EF4-FFF2-40B4-BE49-F238E27FC236}">
-                <a16:creationId xmlns:a16="http://schemas.microsoft.com/office/drawing/2014/main" id="{E547980D-ED97-50AE-AED9-483F76A52D25}"/>
+                <a16:creationId xmlns:a16="http://schemas.microsoft.com/office/drawing/2014/main" id="{EE61767B-73A4-B5E0-1B83-0DADFD60BD05}"/>
               </a:ext>
             </a:extLst>
           </p:cNvPr>
@@ -18612,7 +18612,7 @@
           <p:cNvPr id="11" name="title">
             <a:extLst>
               <a:ext uri="{FF2B5EF4-FFF2-40B4-BE49-F238E27FC236}">
-                <a16:creationId xmlns:a16="http://schemas.microsoft.com/office/drawing/2014/main" id="{F39B730E-8A8D-162A-2FB9-70496EC1F81C}"/>
+                <a16:creationId xmlns:a16="http://schemas.microsoft.com/office/drawing/2014/main" id="{53AE8685-EBAB-2951-C0C2-3FB595953FCB}"/>
               </a:ext>
             </a:extLst>
           </p:cNvPr>
@@ -18658,7 +18658,7 @@
           <p:cNvPr id="12" name="subtitle">
             <a:extLst>
               <a:ext uri="{FF2B5EF4-FFF2-40B4-BE49-F238E27FC236}">
-                <a16:creationId xmlns:a16="http://schemas.microsoft.com/office/drawing/2014/main" id="{284C2E78-8BE0-81E7-1C41-6E376D690019}"/>
+                <a16:creationId xmlns:a16="http://schemas.microsoft.com/office/drawing/2014/main" id="{86E14FB6-9D34-2AF7-F159-A770E61590CF}"/>
               </a:ext>
             </a:extLst>
           </p:cNvPr>
@@ -18688,7 +18688,7 @@
                 </a:solidFill>
                 <a:latin typeface="Aptos" panose="020B0004020202020204" pitchFamily="34" charset="0"/>
               </a:rPr>
-              <a:t>Use this only if the examiner asks about notation or statistical reading.</a:t>
+              <a:t>Use this if the examiner asks how a result becomes a claim.</a:t>
             </a:r>
             <a:endParaRPr lang="zh-CN" altLang="en-US" sz="930">
               <a:solidFill>
@@ -18701,10 +18701,10 @@
       </p:sp>
       <p:sp>
         <p:nvSpPr>
-          <p:cNvPr id="13" name="f1">
-            <a:extLst>
-              <a:ext uri="{FF2B5EF4-FFF2-40B4-BE49-F238E27FC236}">
-                <a16:creationId xmlns:a16="http://schemas.microsoft.com/office/drawing/2014/main" id="{EE2EDA10-FA0C-20D1-B924-4B1814627A5D}"/>
+          <p:cNvPr id="13" name="formula-left">
+            <a:extLst>
+              <a:ext uri="{FF2B5EF4-FFF2-40B4-BE49-F238E27FC236}">
+                <a16:creationId xmlns:a16="http://schemas.microsoft.com/office/drawing/2014/main" id="{5D811C93-7CF2-1617-6468-FA465984A975}"/>
               </a:ext>
             </a:extLst>
           </p:cNvPr>
@@ -18713,8 +18713,8 @@
         </p:nvSpPr>
         <p:spPr>
           <a:xfrm>
-            <a:off x="965200" y="1828800"/>
-            <a:ext cx="4572000" cy="1320800"/>
+            <a:off x="889000" y="1879600"/>
+            <a:ext cx="3657600" cy="3022600"/>
           </a:xfrm>
           <a:prstGeom prst="rect">
             <a:avLst/>
@@ -18755,10 +18755,10 @@
       </p:sp>
       <p:sp>
         <p:nvSpPr>
-          <p:cNvPr id="14" name="f1t">
-            <a:extLst>
-              <a:ext uri="{FF2B5EF4-FFF2-40B4-BE49-F238E27FC236}">
-                <a16:creationId xmlns:a16="http://schemas.microsoft.com/office/drawing/2014/main" id="{FDF1764B-01F8-336F-D20E-EC9E38058659}"/>
+          <p:cNvPr id="14" name="formula-k">
+            <a:extLst>
+              <a:ext uri="{FF2B5EF4-FFF2-40B4-BE49-F238E27FC236}">
+                <a16:creationId xmlns:a16="http://schemas.microsoft.com/office/drawing/2014/main" id="{0BB77583-74DC-C450-9235-20A00DB26104}"/>
               </a:ext>
             </a:extLst>
           </p:cNvPr>
@@ -18767,8 +18767,8 @@
         </p:nvSpPr>
         <p:spPr>
           <a:xfrm>
-            <a:off x="1397000" y="2298700"/>
-            <a:ext cx="3708400" cy="276999"/>
+            <a:off x="1219200" y="2235200"/>
+            <a:ext cx="1498600" cy="276999"/>
           </a:xfrm>
           <a:prstGeom prst="rect">
             <a:avLst/>
@@ -18782,7 +18782,53 @@
           <a:lstStyle/>
           <a:p>
             <a:r>
-              <a:rPr lang="pt-BR" altLang="zh-CN" sz="2100" b="1">
+              <a:rPr lang="en-US" altLang="zh-CN" sz="740" b="1">
+                <a:solidFill>
+                  <a:srgbClr val="CDE2FA"/>
+                </a:solidFill>
+                <a:latin typeface="Aptos" panose="020B0004020202020204" pitchFamily="34" charset="0"/>
+              </a:rPr>
+              <a:t>EVIDENCE OBJECT</a:t>
+            </a:r>
+            <a:endParaRPr lang="zh-CN" altLang="en-US" sz="740" b="1">
+              <a:solidFill>
+                <a:srgbClr val="CDE2FA"/>
+              </a:solidFill>
+              <a:latin typeface="Aptos" panose="020B0004020202020204" pitchFamily="34" charset="0"/>
+            </a:endParaRPr>
+          </a:p>
+        </p:txBody>
+      </p:sp>
+      <p:sp>
+        <p:nvSpPr>
+          <p:cNvPr id="15" name="formula-main">
+            <a:extLst>
+              <a:ext uri="{FF2B5EF4-FFF2-40B4-BE49-F238E27FC236}">
+                <a16:creationId xmlns:a16="http://schemas.microsoft.com/office/drawing/2014/main" id="{27BC41FA-AED5-2430-FA24-1C8B55BF4A8C}"/>
+              </a:ext>
+            </a:extLst>
+          </p:cNvPr>
+          <p:cNvSpPr txBox="1"/>
+          <p:nvPr/>
+        </p:nvSpPr>
+        <p:spPr>
+          <a:xfrm>
+            <a:off x="1219200" y="2768600"/>
+            <a:ext cx="2717800" cy="276999"/>
+          </a:xfrm>
+          <a:prstGeom prst="rect">
+            <a:avLst/>
+          </a:prstGeom>
+          <a:noFill/>
+        </p:spPr>
+        <p:txBody>
+          <a:bodyPr vert="horz" wrap="square" lIns="0" tIns="0" rIns="0" bIns="0" rtlCol="0">
+            <a:noAutofit/>
+          </a:bodyPr>
+          <a:lstStyle/>
+          <a:p>
+            <a:r>
+              <a:rPr lang="pt-BR" altLang="zh-CN" sz="2050" b="1">
                 <a:solidFill>
                   <a:srgbClr val="FFFFFF"/>
                 </a:solidFill>
@@ -18790,7 +18836,7 @@
               </a:rPr>
               <a:t>E = &lt;D, C, A, H, B&gt;</a:t>
             </a:r>
-            <a:endParaRPr lang="zh-CN" altLang="en-US" sz="2100" b="1">
+            <a:endParaRPr lang="zh-CN" altLang="en-US" sz="2050" b="1">
               <a:solidFill>
                 <a:srgbClr val="FFFFFF"/>
               </a:solidFill>
@@ -18799,12 +18845,99 @@
           </a:p>
         </p:txBody>
       </p:sp>
-      <p:sp>
-        <p:nvSpPr>
-          <p:cNvPr id="15" name="f2">
-            <a:extLst>
-              <a:ext uri="{FF2B5EF4-FFF2-40B4-BE49-F238E27FC236}">
-                <a16:creationId xmlns:a16="http://schemas.microsoft.com/office/drawing/2014/main" id="{BCD6B335-8A15-BA55-9CE8-7E32943F986E}"/>
+      <p:cxnSp>
+        <p:nvCxnSpPr>
+          <p:cNvPr id="16" name="formula-rule">
+            <a:extLst>
+              <a:ext uri="{FF2B5EF4-FFF2-40B4-BE49-F238E27FC236}">
+                <a16:creationId xmlns:a16="http://schemas.microsoft.com/office/drawing/2014/main" id="{94EE2373-D471-33E6-3032-EE9C9DA8460E}"/>
+              </a:ext>
+            </a:extLst>
+          </p:cNvPr>
+          <p:cNvCxnSpPr/>
+          <p:nvPr/>
+        </p:nvCxnSpPr>
+        <p:spPr>
+          <a:xfrm>
+            <a:off x="1219200" y="3505200"/>
+            <a:ext cx="2794000" cy="0"/>
+          </a:xfrm>
+          <a:prstGeom prst="line">
+            <a:avLst/>
+          </a:prstGeom>
+          <a:ln w="12700">
+            <a:solidFill>
+              <a:srgbClr val="5F8FC6"/>
+            </a:solidFill>
+          </a:ln>
+        </p:spPr>
+        <p:style>
+          <a:lnRef idx="1">
+            <a:schemeClr val="accent1"/>
+          </a:lnRef>
+          <a:fillRef idx="0">
+            <a:schemeClr val="accent1"/>
+          </a:fillRef>
+          <a:effectRef idx="0">
+            <a:schemeClr val="accent1"/>
+          </a:effectRef>
+          <a:fontRef idx="minor">
+            <a:schemeClr val="tx1"/>
+          </a:fontRef>
+        </p:style>
+      </p:cxnSp>
+      <p:sp>
+        <p:nvSpPr>
+          <p:cNvPr id="17" name="formula-sub">
+            <a:extLst>
+              <a:ext uri="{FF2B5EF4-FFF2-40B4-BE49-F238E27FC236}">
+                <a16:creationId xmlns:a16="http://schemas.microsoft.com/office/drawing/2014/main" id="{41ABBB18-FED0-C333-9B28-F05B32F316DE}"/>
+              </a:ext>
+            </a:extLst>
+          </p:cNvPr>
+          <p:cNvSpPr txBox="1"/>
+          <p:nvPr/>
+        </p:nvSpPr>
+        <p:spPr>
+          <a:xfrm>
+            <a:off x="1219200" y="3860800"/>
+            <a:ext cx="2616200" cy="276999"/>
+          </a:xfrm>
+          <a:prstGeom prst="rect">
+            <a:avLst/>
+          </a:prstGeom>
+          <a:noFill/>
+        </p:spPr>
+        <p:txBody>
+          <a:bodyPr vert="horz" wrap="square" lIns="0" tIns="0" rIns="0" bIns="0" rtlCol="0">
+            <a:noAutofit/>
+          </a:bodyPr>
+          <a:lstStyle/>
+          <a:p>
+            <a:r>
+              <a:rPr lang="en-US" altLang="zh-CN" sz="950" b="1">
+                <a:solidFill>
+                  <a:srgbClr val="DAE8FA"/>
+                </a:solidFill>
+                <a:latin typeface="Aptos" panose="020B0004020202020204" pitchFamily="34" charset="0"/>
+              </a:rPr>
+              <a:t>A result is admitted only when its denominator, controls, artifact, hash, and boundary are all visible.</a:t>
+            </a:r>
+            <a:endParaRPr lang="zh-CN" altLang="en-US" sz="950" b="1">
+              <a:solidFill>
+                <a:srgbClr val="DAE8FA"/>
+              </a:solidFill>
+              <a:latin typeface="Aptos" panose="020B0004020202020204" pitchFamily="34" charset="0"/>
+            </a:endParaRPr>
+          </a:p>
+        </p:txBody>
+      </p:sp>
+      <p:sp>
+        <p:nvSpPr>
+          <p:cNvPr id="18" name="claim-box">
+            <a:extLst>
+              <a:ext uri="{FF2B5EF4-FFF2-40B4-BE49-F238E27FC236}">
+                <a16:creationId xmlns:a16="http://schemas.microsoft.com/office/drawing/2014/main" id="{E0908C41-F3B2-8595-7705-39F401E862C5}"/>
               </a:ext>
             </a:extLst>
           </p:cNvPr>
@@ -18813,8 +18946,8 @@
         </p:nvSpPr>
         <p:spPr>
           <a:xfrm>
-            <a:off x="6350000" y="1828800"/>
-            <a:ext cx="4572000" cy="1320800"/>
+            <a:off x="5130800" y="1879600"/>
+            <a:ext cx="6172200" cy="939800"/>
           </a:xfrm>
           <a:prstGeom prst="rect">
             <a:avLst/>
@@ -18855,10 +18988,10 @@
       </p:sp>
       <p:sp>
         <p:nvSpPr>
-          <p:cNvPr id="16" name="f2t">
-            <a:extLst>
-              <a:ext uri="{FF2B5EF4-FFF2-40B4-BE49-F238E27FC236}">
-                <a16:creationId xmlns:a16="http://schemas.microsoft.com/office/drawing/2014/main" id="{AA73FDD7-A6A1-2DC0-5FBE-C7782F39DB6F}"/>
+          <p:cNvPr id="19" name="claim-k">
+            <a:extLst>
+              <a:ext uri="{FF2B5EF4-FFF2-40B4-BE49-F238E27FC236}">
+                <a16:creationId xmlns:a16="http://schemas.microsoft.com/office/drawing/2014/main" id="{2801E65C-9E30-64C2-89C6-9DD7C7F0A0F0}"/>
               </a:ext>
             </a:extLst>
           </p:cNvPr>
@@ -18867,8 +19000,8 @@
         </p:nvSpPr>
         <p:spPr>
           <a:xfrm>
-            <a:off x="6756400" y="2247900"/>
-            <a:ext cx="3632200" cy="276999"/>
+            <a:off x="5486400" y="2133600"/>
+            <a:ext cx="1422400" cy="276999"/>
           </a:xfrm>
           <a:prstGeom prst="rect">
             <a:avLst/>
@@ -18882,16 +19015,61 @@
           <a:lstStyle/>
           <a:p>
             <a:r>
-              <a:rPr lang="en-US" altLang="zh-CN" sz="1380" b="1">
+              <a:rPr lang="en-US" altLang="zh-CN" sz="720" b="1">
+                <a:solidFill>
+                  <a:srgbClr val="4A5B78"/>
+                </a:solidFill>
+                <a:latin typeface="Aptos" panose="020B0004020202020204" pitchFamily="34" charset="0"/>
+              </a:rPr>
+              <a:t>PROMOTION RULE</a:t>
+            </a:r>
+            <a:endParaRPr lang="zh-CN" altLang="en-US" sz="720" b="1">
+              <a:solidFill>
+                <a:srgbClr val="4A5B78"/>
+              </a:solidFill>
+              <a:latin typeface="Aptos" panose="020B0004020202020204" pitchFamily="34" charset="0"/>
+            </a:endParaRPr>
+          </a:p>
+        </p:txBody>
+      </p:sp>
+      <p:sp>
+        <p:nvSpPr>
+          <p:cNvPr id="20" name="claim-t">
+            <a:extLst>
+              <a:ext uri="{FF2B5EF4-FFF2-40B4-BE49-F238E27FC236}">
+                <a16:creationId xmlns:a16="http://schemas.microsoft.com/office/drawing/2014/main" id="{C3D3221A-E8E6-2715-6D02-E429F97B8992}"/>
+              </a:ext>
+            </a:extLst>
+          </p:cNvPr>
+          <p:cNvSpPr txBox="1"/>
+          <p:nvPr/>
+        </p:nvSpPr>
+        <p:spPr>
+          <a:xfrm>
+            <a:off x="5486400" y="2438400"/>
+            <a:ext cx="5029200" cy="276999"/>
+          </a:xfrm>
+          <a:prstGeom prst="rect">
+            <a:avLst/>
+          </a:prstGeom>
+          <a:noFill/>
+        </p:spPr>
+        <p:txBody>
+          <a:bodyPr vert="horz" wrap="square" lIns="0" tIns="0" rIns="0" bIns="0" rtlCol="0">
+            <a:noAutofit/>
+          </a:bodyPr>
+          <a:lstStyle/>
+          <a:p>
+            <a:r>
+              <a:rPr lang="en-US" altLang="zh-CN" sz="1340" b="1">
                 <a:solidFill>
                   <a:srgbClr val="071A3D"/>
                 </a:solidFill>
                 <a:latin typeface="Consolas" panose="020B0609020204030204" pitchFamily="49" charset="0"/>
               </a:rPr>
-              <a:t>claim := f(E, controls,
-           access, boundary)</a:t>
+              <a:t>claim := f(E, controls, access, boundary)</a:t>
             </a:r>
-            <a:endParaRPr lang="zh-CN" altLang="en-US" sz="1380" b="1">
+            <a:endParaRPr lang="zh-CN" altLang="en-US" sz="1340" b="1">
               <a:solidFill>
                 <a:srgbClr val="071A3D"/>
               </a:solidFill>
@@ -18902,10 +19080,118 @@
       </p:sp>
       <p:sp>
         <p:nvSpPr>
-          <p:cNvPr id="17" name="it-0">
-            <a:extLst>
-              <a:ext uri="{FF2B5EF4-FFF2-40B4-BE49-F238E27FC236}">
-                <a16:creationId xmlns:a16="http://schemas.microsoft.com/office/drawing/2014/main" id="{B6A16844-9B21-0268-36A3-C30128EB8BE4}"/>
+          <p:cNvPr id="21" name="it-card-0">
+            <a:extLst>
+              <a:ext uri="{FF2B5EF4-FFF2-40B4-BE49-F238E27FC236}">
+                <a16:creationId xmlns:a16="http://schemas.microsoft.com/office/drawing/2014/main" id="{4E1F7D29-E3CF-30E0-DF48-A1AF69396957}"/>
+              </a:ext>
+            </a:extLst>
+          </p:cNvPr>
+          <p:cNvSpPr/>
+          <p:nvPr/>
+        </p:nvSpPr>
+        <p:spPr>
+          <a:xfrm>
+            <a:off x="5130800" y="3200400"/>
+            <a:ext cx="2819400" cy="304800"/>
+          </a:xfrm>
+          <a:prstGeom prst="rect">
+            <a:avLst/>
+          </a:prstGeom>
+          <a:solidFill>
+            <a:srgbClr val="F9FBFE"/>
+          </a:solidFill>
+          <a:ln w="11430">
+            <a:solidFill>
+              <a:srgbClr val="D5E2F0"/>
+            </a:solidFill>
+          </a:ln>
+        </p:spPr>
+        <p:style>
+          <a:lnRef idx="2">
+            <a:schemeClr val="accent1">
+              <a:shade val="15000"/>
+            </a:schemeClr>
+          </a:lnRef>
+          <a:fillRef idx="1">
+            <a:schemeClr val="accent1"/>
+          </a:fillRef>
+          <a:effectRef idx="0">
+            <a:schemeClr val="accent1"/>
+          </a:effectRef>
+          <a:fontRef idx="minor">
+            <a:schemeClr val="lt1"/>
+          </a:fontRef>
+        </p:style>
+        <p:txBody>
+          <a:bodyPr rtlCol="0" anchor="ctr"/>
+          <a:lstStyle/>
+          <a:p>
+            <a:pPr algn="ctr"/>
+            <a:endParaRPr lang="zh-CN" altLang="en-US"/>
+          </a:p>
+        </p:txBody>
+      </p:sp>
+      <p:sp>
+        <p:nvSpPr>
+          <p:cNvPr id="22" name="it-band-0">
+            <a:extLst>
+              <a:ext uri="{FF2B5EF4-FFF2-40B4-BE49-F238E27FC236}">
+                <a16:creationId xmlns:a16="http://schemas.microsoft.com/office/drawing/2014/main" id="{4A5FA57F-C1D0-E2B2-A1D7-1D32D9B36E80}"/>
+              </a:ext>
+            </a:extLst>
+          </p:cNvPr>
+          <p:cNvSpPr/>
+          <p:nvPr/>
+        </p:nvSpPr>
+        <p:spPr>
+          <a:xfrm>
+            <a:off x="5130800" y="3200400"/>
+            <a:ext cx="63500" cy="304800"/>
+          </a:xfrm>
+          <a:prstGeom prst="rect">
+            <a:avLst/>
+          </a:prstGeom>
+          <a:solidFill>
+            <a:srgbClr val="003B7A"/>
+          </a:solidFill>
+          <a:ln w="11430">
+            <a:solidFill>
+              <a:srgbClr val="003B7A"/>
+            </a:solidFill>
+          </a:ln>
+        </p:spPr>
+        <p:style>
+          <a:lnRef idx="2">
+            <a:schemeClr val="accent1">
+              <a:shade val="15000"/>
+            </a:schemeClr>
+          </a:lnRef>
+          <a:fillRef idx="1">
+            <a:schemeClr val="accent1"/>
+          </a:fillRef>
+          <a:effectRef idx="0">
+            <a:schemeClr val="accent1"/>
+          </a:effectRef>
+          <a:fontRef idx="minor">
+            <a:schemeClr val="lt1"/>
+          </a:fontRef>
+        </p:style>
+        <p:txBody>
+          <a:bodyPr rtlCol="0" anchor="ctr"/>
+          <a:lstStyle/>
+          <a:p>
+            <a:pPr algn="ctr"/>
+            <a:endParaRPr lang="zh-CN" altLang="en-US"/>
+          </a:p>
+        </p:txBody>
+      </p:sp>
+      <p:sp>
+        <p:nvSpPr>
+          <p:cNvPr id="23" name="it-0">
+            <a:extLst>
+              <a:ext uri="{FF2B5EF4-FFF2-40B4-BE49-F238E27FC236}">
+                <a16:creationId xmlns:a16="http://schemas.microsoft.com/office/drawing/2014/main" id="{45AC195B-1EB9-BCAE-12FA-1B7335459F4D}"/>
               </a:ext>
             </a:extLst>
           </p:cNvPr>
@@ -18914,8 +19200,8 @@
         </p:nvSpPr>
         <p:spPr>
           <a:xfrm>
-            <a:off x="1955800" y="3632200"/>
-            <a:ext cx="406400" cy="276999"/>
+            <a:off x="5384800" y="3289300"/>
+            <a:ext cx="304800" cy="276999"/>
           </a:xfrm>
           <a:prstGeom prst="rect">
             <a:avLst/>
@@ -18929,7 +19215,7 @@
           <a:lstStyle/>
           <a:p>
             <a:r>
-              <a:rPr lang="en-US" altLang="zh-CN" sz="900" b="1">
+              <a:rPr lang="en-US" altLang="zh-CN" sz="780" b="1">
                 <a:solidFill>
                   <a:srgbClr val="003B7A"/>
                 </a:solidFill>
@@ -18937,7 +19223,7 @@
               </a:rPr>
               <a:t>D</a:t>
             </a:r>
-            <a:endParaRPr lang="zh-CN" altLang="en-US" sz="900" b="1">
+            <a:endParaRPr lang="zh-CN" altLang="en-US" sz="780" b="1">
               <a:solidFill>
                 <a:srgbClr val="003B7A"/>
               </a:solidFill>
@@ -18948,10 +19234,10 @@
       </p:sp>
       <p:sp>
         <p:nvSpPr>
-          <p:cNvPr id="18" name="it2-0">
-            <a:extLst>
-              <a:ext uri="{FF2B5EF4-FFF2-40B4-BE49-F238E27FC236}">
-                <a16:creationId xmlns:a16="http://schemas.microsoft.com/office/drawing/2014/main" id="{A0928065-F5A1-1C0F-3C18-92E9CB8419B8}"/>
+          <p:cNvPr id="24" name="it2-0">
+            <a:extLst>
+              <a:ext uri="{FF2B5EF4-FFF2-40B4-BE49-F238E27FC236}">
+                <a16:creationId xmlns:a16="http://schemas.microsoft.com/office/drawing/2014/main" id="{341DF21C-CC3A-3779-EF8B-5B29CB8182AA}"/>
               </a:ext>
             </a:extLst>
           </p:cNvPr>
@@ -18960,8 +19246,8 @@
         </p:nvSpPr>
         <p:spPr>
           <a:xfrm>
-            <a:off x="2514600" y="3632200"/>
-            <a:ext cx="5334000" cy="276999"/>
+            <a:off x="5867400" y="3289300"/>
+            <a:ext cx="1651000" cy="276999"/>
           </a:xfrm>
           <a:prstGeom prst="rect">
             <a:avLst/>
@@ -18975,7 +19261,7 @@
           <a:lstStyle/>
           <a:p>
             <a:r>
-              <a:rPr lang="en-US" altLang="zh-CN" sz="820">
+              <a:rPr lang="en-US" altLang="zh-CN" sz="690">
                 <a:solidFill>
                   <a:srgbClr val="071A3D"/>
                 </a:solidFill>
@@ -18983,7 +19269,7 @@
               </a:rPr>
               <a:t>denominator fixed before results</a:t>
             </a:r>
-            <a:endParaRPr lang="zh-CN" altLang="en-US" sz="820">
+            <a:endParaRPr lang="zh-CN" altLang="en-US" sz="690">
               <a:solidFill>
                 <a:srgbClr val="071A3D"/>
               </a:solidFill>
@@ -18994,10 +19280,118 @@
       </p:sp>
       <p:sp>
         <p:nvSpPr>
-          <p:cNvPr id="19" name="it-1">
-            <a:extLst>
-              <a:ext uri="{FF2B5EF4-FFF2-40B4-BE49-F238E27FC236}">
-                <a16:creationId xmlns:a16="http://schemas.microsoft.com/office/drawing/2014/main" id="{A9E8159C-A17C-33CF-BEE0-96A6A70F1E32}"/>
+          <p:cNvPr id="25" name="it-card-1">
+            <a:extLst>
+              <a:ext uri="{FF2B5EF4-FFF2-40B4-BE49-F238E27FC236}">
+                <a16:creationId xmlns:a16="http://schemas.microsoft.com/office/drawing/2014/main" id="{824BF33E-51BE-B375-8603-643BBAC4CE14}"/>
+              </a:ext>
+            </a:extLst>
+          </p:cNvPr>
+          <p:cNvSpPr/>
+          <p:nvPr/>
+        </p:nvSpPr>
+        <p:spPr>
+          <a:xfrm>
+            <a:off x="5130800" y="3632200"/>
+            <a:ext cx="2819400" cy="304800"/>
+          </a:xfrm>
+          <a:prstGeom prst="rect">
+            <a:avLst/>
+          </a:prstGeom>
+          <a:solidFill>
+            <a:srgbClr val="F9FBFE"/>
+          </a:solidFill>
+          <a:ln w="11430">
+            <a:solidFill>
+              <a:srgbClr val="D5E2F0"/>
+            </a:solidFill>
+          </a:ln>
+        </p:spPr>
+        <p:style>
+          <a:lnRef idx="2">
+            <a:schemeClr val="accent1">
+              <a:shade val="15000"/>
+            </a:schemeClr>
+          </a:lnRef>
+          <a:fillRef idx="1">
+            <a:schemeClr val="accent1"/>
+          </a:fillRef>
+          <a:effectRef idx="0">
+            <a:schemeClr val="accent1"/>
+          </a:effectRef>
+          <a:fontRef idx="minor">
+            <a:schemeClr val="lt1"/>
+          </a:fontRef>
+        </p:style>
+        <p:txBody>
+          <a:bodyPr rtlCol="0" anchor="ctr"/>
+          <a:lstStyle/>
+          <a:p>
+            <a:pPr algn="ctr"/>
+            <a:endParaRPr lang="zh-CN" altLang="en-US"/>
+          </a:p>
+        </p:txBody>
+      </p:sp>
+      <p:sp>
+        <p:nvSpPr>
+          <p:cNvPr id="26" name="it-band-1">
+            <a:extLst>
+              <a:ext uri="{FF2B5EF4-FFF2-40B4-BE49-F238E27FC236}">
+                <a16:creationId xmlns:a16="http://schemas.microsoft.com/office/drawing/2014/main" id="{9E4D53E1-B342-CC37-9B59-70BB6DB618D6}"/>
+              </a:ext>
+            </a:extLst>
+          </p:cNvPr>
+          <p:cNvSpPr/>
+          <p:nvPr/>
+        </p:nvSpPr>
+        <p:spPr>
+          <a:xfrm>
+            <a:off x="5130800" y="3632200"/>
+            <a:ext cx="63500" cy="304800"/>
+          </a:xfrm>
+          <a:prstGeom prst="rect">
+            <a:avLst/>
+          </a:prstGeom>
+          <a:solidFill>
+            <a:srgbClr val="5B45C8"/>
+          </a:solidFill>
+          <a:ln w="11430">
+            <a:solidFill>
+              <a:srgbClr val="5B45C8"/>
+            </a:solidFill>
+          </a:ln>
+        </p:spPr>
+        <p:style>
+          <a:lnRef idx="2">
+            <a:schemeClr val="accent1">
+              <a:shade val="15000"/>
+            </a:schemeClr>
+          </a:lnRef>
+          <a:fillRef idx="1">
+            <a:schemeClr val="accent1"/>
+          </a:fillRef>
+          <a:effectRef idx="0">
+            <a:schemeClr val="accent1"/>
+          </a:effectRef>
+          <a:fontRef idx="minor">
+            <a:schemeClr val="lt1"/>
+          </a:fontRef>
+        </p:style>
+        <p:txBody>
+          <a:bodyPr rtlCol="0" anchor="ctr"/>
+          <a:lstStyle/>
+          <a:p>
+            <a:pPr algn="ctr"/>
+            <a:endParaRPr lang="zh-CN" altLang="en-US"/>
+          </a:p>
+        </p:txBody>
+      </p:sp>
+      <p:sp>
+        <p:nvSpPr>
+          <p:cNvPr id="27" name="it-1">
+            <a:extLst>
+              <a:ext uri="{FF2B5EF4-FFF2-40B4-BE49-F238E27FC236}">
+                <a16:creationId xmlns:a16="http://schemas.microsoft.com/office/drawing/2014/main" id="{5BCDB4E2-1FD8-2332-B0DA-652056BA8690}"/>
               </a:ext>
             </a:extLst>
           </p:cNvPr>
@@ -19006,8 +19400,8 @@
         </p:nvSpPr>
         <p:spPr>
           <a:xfrm>
-            <a:off x="1955800" y="4051300"/>
-            <a:ext cx="406400" cy="276999"/>
+            <a:off x="5384800" y="3721100"/>
+            <a:ext cx="304800" cy="276999"/>
           </a:xfrm>
           <a:prstGeom prst="rect">
             <a:avLst/>
@@ -19021,17 +19415,17 @@
           <a:lstStyle/>
           <a:p>
             <a:r>
-              <a:rPr lang="en-US" altLang="zh-CN" sz="900" b="1">
+              <a:rPr lang="en-US" altLang="zh-CN" sz="780" b="1">
                 <a:solidFill>
-                  <a:srgbClr val="003B7A"/>
+                  <a:srgbClr val="5B45C8"/>
                 </a:solidFill>
                 <a:latin typeface="Consolas" panose="020B0609020204030204" pitchFamily="49" charset="0"/>
               </a:rPr>
               <a:t>C</a:t>
             </a:r>
-            <a:endParaRPr lang="zh-CN" altLang="en-US" sz="900" b="1">
+            <a:endParaRPr lang="zh-CN" altLang="en-US" sz="780" b="1">
               <a:solidFill>
-                <a:srgbClr val="003B7A"/>
+                <a:srgbClr val="5B45C8"/>
               </a:solidFill>
               <a:latin typeface="Consolas" panose="020B0609020204030204" pitchFamily="49" charset="0"/>
             </a:endParaRPr>
@@ -19040,10 +19434,10 @@
       </p:sp>
       <p:sp>
         <p:nvSpPr>
-          <p:cNvPr id="20" name="it2-1">
-            <a:extLst>
-              <a:ext uri="{FF2B5EF4-FFF2-40B4-BE49-F238E27FC236}">
-                <a16:creationId xmlns:a16="http://schemas.microsoft.com/office/drawing/2014/main" id="{76BF410C-0706-C354-9680-0AAE8E983CCE}"/>
+          <p:cNvPr id="28" name="it2-1">
+            <a:extLst>
+              <a:ext uri="{FF2B5EF4-FFF2-40B4-BE49-F238E27FC236}">
+                <a16:creationId xmlns:a16="http://schemas.microsoft.com/office/drawing/2014/main" id="{B410EE2D-7946-3CFB-3A6F-531546B1FA76}"/>
               </a:ext>
             </a:extLst>
           </p:cNvPr>
@@ -19052,8 +19446,8 @@
         </p:nvSpPr>
         <p:spPr>
           <a:xfrm>
-            <a:off x="2514600" y="4051300"/>
-            <a:ext cx="5334000" cy="276999"/>
+            <a:off x="5867400" y="3721100"/>
+            <a:ext cx="1651000" cy="276999"/>
           </a:xfrm>
           <a:prstGeom prst="rect">
             <a:avLst/>
@@ -19067,7 +19461,7 @@
           <a:lstStyle/>
           <a:p>
             <a:r>
-              <a:rPr lang="en-US" altLang="zh-CN" sz="820">
+              <a:rPr lang="en-US" altLang="zh-CN" sz="690">
                 <a:solidFill>
                   <a:srgbClr val="071A3D"/>
                 </a:solidFill>
@@ -19075,7 +19469,7 @@
               </a:rPr>
               <a:t>positive and negative controls</a:t>
             </a:r>
-            <a:endParaRPr lang="zh-CN" altLang="en-US" sz="820">
+            <a:endParaRPr lang="zh-CN" altLang="en-US" sz="690">
               <a:solidFill>
                 <a:srgbClr val="071A3D"/>
               </a:solidFill>
@@ -19086,10 +19480,118 @@
       </p:sp>
       <p:sp>
         <p:nvSpPr>
-          <p:cNvPr id="21" name="it-2">
-            <a:extLst>
-              <a:ext uri="{FF2B5EF4-FFF2-40B4-BE49-F238E27FC236}">
-                <a16:creationId xmlns:a16="http://schemas.microsoft.com/office/drawing/2014/main" id="{F5E45D7F-AB57-8AB9-42C7-A8E367C12613}"/>
+          <p:cNvPr id="29" name="it-card-2">
+            <a:extLst>
+              <a:ext uri="{FF2B5EF4-FFF2-40B4-BE49-F238E27FC236}">
+                <a16:creationId xmlns:a16="http://schemas.microsoft.com/office/drawing/2014/main" id="{3EEFB2F7-4602-B955-3692-D329658D3440}"/>
+              </a:ext>
+            </a:extLst>
+          </p:cNvPr>
+          <p:cNvSpPr/>
+          <p:nvPr/>
+        </p:nvSpPr>
+        <p:spPr>
+          <a:xfrm>
+            <a:off x="5130800" y="4064000"/>
+            <a:ext cx="2819400" cy="304800"/>
+          </a:xfrm>
+          <a:prstGeom prst="rect">
+            <a:avLst/>
+          </a:prstGeom>
+          <a:solidFill>
+            <a:srgbClr val="F9FBFE"/>
+          </a:solidFill>
+          <a:ln w="11430">
+            <a:solidFill>
+              <a:srgbClr val="D5E2F0"/>
+            </a:solidFill>
+          </a:ln>
+        </p:spPr>
+        <p:style>
+          <a:lnRef idx="2">
+            <a:schemeClr val="accent1">
+              <a:shade val="15000"/>
+            </a:schemeClr>
+          </a:lnRef>
+          <a:fillRef idx="1">
+            <a:schemeClr val="accent1"/>
+          </a:fillRef>
+          <a:effectRef idx="0">
+            <a:schemeClr val="accent1"/>
+          </a:effectRef>
+          <a:fontRef idx="minor">
+            <a:schemeClr val="lt1"/>
+          </a:fontRef>
+        </p:style>
+        <p:txBody>
+          <a:bodyPr rtlCol="0" anchor="ctr"/>
+          <a:lstStyle/>
+          <a:p>
+            <a:pPr algn="ctr"/>
+            <a:endParaRPr lang="zh-CN" altLang="en-US"/>
+          </a:p>
+        </p:txBody>
+      </p:sp>
+      <p:sp>
+        <p:nvSpPr>
+          <p:cNvPr id="30" name="it-band-2">
+            <a:extLst>
+              <a:ext uri="{FF2B5EF4-FFF2-40B4-BE49-F238E27FC236}">
+                <a16:creationId xmlns:a16="http://schemas.microsoft.com/office/drawing/2014/main" id="{A0D2087B-E2E5-7D0E-D3CD-D55F2F7E91D5}"/>
+              </a:ext>
+            </a:extLst>
+          </p:cNvPr>
+          <p:cNvSpPr/>
+          <p:nvPr/>
+        </p:nvSpPr>
+        <p:spPr>
+          <a:xfrm>
+            <a:off x="5130800" y="4064000"/>
+            <a:ext cx="63500" cy="304800"/>
+          </a:xfrm>
+          <a:prstGeom prst="rect">
+            <a:avLst/>
+          </a:prstGeom>
+          <a:solidFill>
+            <a:srgbClr val="168E8B"/>
+          </a:solidFill>
+          <a:ln w="11430">
+            <a:solidFill>
+              <a:srgbClr val="168E8B"/>
+            </a:solidFill>
+          </a:ln>
+        </p:spPr>
+        <p:style>
+          <a:lnRef idx="2">
+            <a:schemeClr val="accent1">
+              <a:shade val="15000"/>
+            </a:schemeClr>
+          </a:lnRef>
+          <a:fillRef idx="1">
+            <a:schemeClr val="accent1"/>
+          </a:fillRef>
+          <a:effectRef idx="0">
+            <a:schemeClr val="accent1"/>
+          </a:effectRef>
+          <a:fontRef idx="minor">
+            <a:schemeClr val="lt1"/>
+          </a:fontRef>
+        </p:style>
+        <p:txBody>
+          <a:bodyPr rtlCol="0" anchor="ctr"/>
+          <a:lstStyle/>
+          <a:p>
+            <a:pPr algn="ctr"/>
+            <a:endParaRPr lang="zh-CN" altLang="en-US"/>
+          </a:p>
+        </p:txBody>
+      </p:sp>
+      <p:sp>
+        <p:nvSpPr>
+          <p:cNvPr id="31" name="it-2">
+            <a:extLst>
+              <a:ext uri="{FF2B5EF4-FFF2-40B4-BE49-F238E27FC236}">
+                <a16:creationId xmlns:a16="http://schemas.microsoft.com/office/drawing/2014/main" id="{41820EB5-1051-8673-A4CF-6530FD730F72}"/>
               </a:ext>
             </a:extLst>
           </p:cNvPr>
@@ -19098,8 +19600,8 @@
         </p:nvSpPr>
         <p:spPr>
           <a:xfrm>
-            <a:off x="1955800" y="4470400"/>
-            <a:ext cx="406400" cy="276999"/>
+            <a:off x="5384800" y="4152900"/>
+            <a:ext cx="304800" cy="276999"/>
           </a:xfrm>
           <a:prstGeom prst="rect">
             <a:avLst/>
@@ -19113,17 +19615,17 @@
           <a:lstStyle/>
           <a:p>
             <a:r>
-              <a:rPr lang="en-US" altLang="zh-CN" sz="900" b="1">
+              <a:rPr lang="en-US" altLang="zh-CN" sz="780" b="1">
                 <a:solidFill>
-                  <a:srgbClr val="003B7A"/>
+                  <a:srgbClr val="168E8B"/>
                 </a:solidFill>
                 <a:latin typeface="Consolas" panose="020B0609020204030204" pitchFamily="49" charset="0"/>
               </a:rPr>
               <a:t>A</a:t>
             </a:r>
-            <a:endParaRPr lang="zh-CN" altLang="en-US" sz="900" b="1">
+            <a:endParaRPr lang="zh-CN" altLang="en-US" sz="780" b="1">
               <a:solidFill>
-                <a:srgbClr val="003B7A"/>
+                <a:srgbClr val="168E8B"/>
               </a:solidFill>
               <a:latin typeface="Consolas" panose="020B0609020204030204" pitchFamily="49" charset="0"/>
             </a:endParaRPr>
@@ -19132,10 +19634,10 @@
       </p:sp>
       <p:sp>
         <p:nvSpPr>
-          <p:cNvPr id="22" name="it2-2">
-            <a:extLst>
-              <a:ext uri="{FF2B5EF4-FFF2-40B4-BE49-F238E27FC236}">
-                <a16:creationId xmlns:a16="http://schemas.microsoft.com/office/drawing/2014/main" id="{D2B042AF-8408-7BF7-C669-03D51F12611E}"/>
+          <p:cNvPr id="32" name="it2-2">
+            <a:extLst>
+              <a:ext uri="{FF2B5EF4-FFF2-40B4-BE49-F238E27FC236}">
+                <a16:creationId xmlns:a16="http://schemas.microsoft.com/office/drawing/2014/main" id="{374E3CE9-B551-EB8C-A5B8-73A32BF0D052}"/>
               </a:ext>
             </a:extLst>
           </p:cNvPr>
@@ -19144,8 +19646,8 @@
         </p:nvSpPr>
         <p:spPr>
           <a:xfrm>
-            <a:off x="2514600" y="4470400"/>
-            <a:ext cx="5334000" cy="276999"/>
+            <a:off x="5867400" y="4152900"/>
+            <a:ext cx="1651000" cy="276999"/>
           </a:xfrm>
           <a:prstGeom prst="rect">
             <a:avLst/>
@@ -19159,7 +19661,7 @@
           <a:lstStyle/>
           <a:p>
             <a:r>
-              <a:rPr lang="en-US" altLang="zh-CN" sz="820">
+              <a:rPr lang="en-US" altLang="zh-CN" sz="690">
                 <a:solidFill>
                   <a:srgbClr val="071A3D"/>
                 </a:solidFill>
@@ -19167,7 +19669,7 @@
               </a:rPr>
               <a:t>artifact, model access, and protocol</a:t>
             </a:r>
-            <a:endParaRPr lang="zh-CN" altLang="en-US" sz="820">
+            <a:endParaRPr lang="zh-CN" altLang="en-US" sz="690">
               <a:solidFill>
                 <a:srgbClr val="071A3D"/>
               </a:solidFill>
@@ -19178,10 +19680,118 @@
       </p:sp>
       <p:sp>
         <p:nvSpPr>
-          <p:cNvPr id="23" name="it-3">
-            <a:extLst>
-              <a:ext uri="{FF2B5EF4-FFF2-40B4-BE49-F238E27FC236}">
-                <a16:creationId xmlns:a16="http://schemas.microsoft.com/office/drawing/2014/main" id="{A33E5342-D1BF-03F9-AE05-AE44E2070420}"/>
+          <p:cNvPr id="33" name="it-card-3">
+            <a:extLst>
+              <a:ext uri="{FF2B5EF4-FFF2-40B4-BE49-F238E27FC236}">
+                <a16:creationId xmlns:a16="http://schemas.microsoft.com/office/drawing/2014/main" id="{B7C8B16F-6929-FCEC-5C29-107D79A9B2B4}"/>
+              </a:ext>
+            </a:extLst>
+          </p:cNvPr>
+          <p:cNvSpPr/>
+          <p:nvPr/>
+        </p:nvSpPr>
+        <p:spPr>
+          <a:xfrm>
+            <a:off x="5130800" y="4495800"/>
+            <a:ext cx="2819400" cy="304800"/>
+          </a:xfrm>
+          <a:prstGeom prst="rect">
+            <a:avLst/>
+          </a:prstGeom>
+          <a:solidFill>
+            <a:srgbClr val="F9FBFE"/>
+          </a:solidFill>
+          <a:ln w="11430">
+            <a:solidFill>
+              <a:srgbClr val="D5E2F0"/>
+            </a:solidFill>
+          </a:ln>
+        </p:spPr>
+        <p:style>
+          <a:lnRef idx="2">
+            <a:schemeClr val="accent1">
+              <a:shade val="15000"/>
+            </a:schemeClr>
+          </a:lnRef>
+          <a:fillRef idx="1">
+            <a:schemeClr val="accent1"/>
+          </a:fillRef>
+          <a:effectRef idx="0">
+            <a:schemeClr val="accent1"/>
+          </a:effectRef>
+          <a:fontRef idx="minor">
+            <a:schemeClr val="lt1"/>
+          </a:fontRef>
+        </p:style>
+        <p:txBody>
+          <a:bodyPr rtlCol="0" anchor="ctr"/>
+          <a:lstStyle/>
+          <a:p>
+            <a:pPr algn="ctr"/>
+            <a:endParaRPr lang="zh-CN" altLang="en-US"/>
+          </a:p>
+        </p:txBody>
+      </p:sp>
+      <p:sp>
+        <p:nvSpPr>
+          <p:cNvPr id="34" name="it-band-3">
+            <a:extLst>
+              <a:ext uri="{FF2B5EF4-FFF2-40B4-BE49-F238E27FC236}">
+                <a16:creationId xmlns:a16="http://schemas.microsoft.com/office/drawing/2014/main" id="{14AB5D0C-F3E2-F296-8DA3-3CB265D3E702}"/>
+              </a:ext>
+            </a:extLst>
+          </p:cNvPr>
+          <p:cNvSpPr/>
+          <p:nvPr/>
+        </p:nvSpPr>
+        <p:spPr>
+          <a:xfrm>
+            <a:off x="5130800" y="4495800"/>
+            <a:ext cx="63500" cy="304800"/>
+          </a:xfrm>
+          <a:prstGeom prst="rect">
+            <a:avLst/>
+          </a:prstGeom>
+          <a:solidFill>
+            <a:srgbClr val="B85C00"/>
+          </a:solidFill>
+          <a:ln w="11430">
+            <a:solidFill>
+              <a:srgbClr val="B85C00"/>
+            </a:solidFill>
+          </a:ln>
+        </p:spPr>
+        <p:style>
+          <a:lnRef idx="2">
+            <a:schemeClr val="accent1">
+              <a:shade val="15000"/>
+            </a:schemeClr>
+          </a:lnRef>
+          <a:fillRef idx="1">
+            <a:schemeClr val="accent1"/>
+          </a:fillRef>
+          <a:effectRef idx="0">
+            <a:schemeClr val="accent1"/>
+          </a:effectRef>
+          <a:fontRef idx="minor">
+            <a:schemeClr val="lt1"/>
+          </a:fontRef>
+        </p:style>
+        <p:txBody>
+          <a:bodyPr rtlCol="0" anchor="ctr"/>
+          <a:lstStyle/>
+          <a:p>
+            <a:pPr algn="ctr"/>
+            <a:endParaRPr lang="zh-CN" altLang="en-US"/>
+          </a:p>
+        </p:txBody>
+      </p:sp>
+      <p:sp>
+        <p:nvSpPr>
+          <p:cNvPr id="35" name="it-3">
+            <a:extLst>
+              <a:ext uri="{FF2B5EF4-FFF2-40B4-BE49-F238E27FC236}">
+                <a16:creationId xmlns:a16="http://schemas.microsoft.com/office/drawing/2014/main" id="{DE646A66-1805-066B-B0D7-90B9E0865E32}"/>
               </a:ext>
             </a:extLst>
           </p:cNvPr>
@@ -19190,8 +19800,8 @@
         </p:nvSpPr>
         <p:spPr>
           <a:xfrm>
-            <a:off x="1955800" y="4889500"/>
-            <a:ext cx="406400" cy="276999"/>
+            <a:off x="5384800" y="4584700"/>
+            <a:ext cx="304800" cy="276999"/>
           </a:xfrm>
           <a:prstGeom prst="rect">
             <a:avLst/>
@@ -19205,17 +19815,17 @@
           <a:lstStyle/>
           <a:p>
             <a:r>
-              <a:rPr lang="en-US" altLang="zh-CN" sz="900" b="1">
+              <a:rPr lang="en-US" altLang="zh-CN" sz="780" b="1">
                 <a:solidFill>
-                  <a:srgbClr val="003B7A"/>
+                  <a:srgbClr val="B85C00"/>
                 </a:solidFill>
                 <a:latin typeface="Consolas" panose="020B0609020204030204" pitchFamily="49" charset="0"/>
               </a:rPr>
               <a:t>H</a:t>
             </a:r>
-            <a:endParaRPr lang="zh-CN" altLang="en-US" sz="900" b="1">
+            <a:endParaRPr lang="zh-CN" altLang="en-US" sz="780" b="1">
               <a:solidFill>
-                <a:srgbClr val="003B7A"/>
+                <a:srgbClr val="B85C00"/>
               </a:solidFill>
               <a:latin typeface="Consolas" panose="020B0609020204030204" pitchFamily="49" charset="0"/>
             </a:endParaRPr>
@@ -19224,10 +19834,10 @@
       </p:sp>
       <p:sp>
         <p:nvSpPr>
-          <p:cNvPr id="24" name="it2-3">
-            <a:extLst>
-              <a:ext uri="{FF2B5EF4-FFF2-40B4-BE49-F238E27FC236}">
-                <a16:creationId xmlns:a16="http://schemas.microsoft.com/office/drawing/2014/main" id="{3682E708-650A-E7D0-6CDF-14D01801E72F}"/>
+          <p:cNvPr id="36" name="it2-3">
+            <a:extLst>
+              <a:ext uri="{FF2B5EF4-FFF2-40B4-BE49-F238E27FC236}">
+                <a16:creationId xmlns:a16="http://schemas.microsoft.com/office/drawing/2014/main" id="{45D6B0E0-D070-F1B1-8663-52DEDFFFE7E1}"/>
               </a:ext>
             </a:extLst>
           </p:cNvPr>
@@ -19236,8 +19846,8 @@
         </p:nvSpPr>
         <p:spPr>
           <a:xfrm>
-            <a:off x="2514600" y="4889500"/>
-            <a:ext cx="5334000" cy="276999"/>
+            <a:off x="5867400" y="4584700"/>
+            <a:ext cx="1651000" cy="276999"/>
           </a:xfrm>
           <a:prstGeom prst="rect">
             <a:avLst/>
@@ -19251,7 +19861,7 @@
           <a:lstStyle/>
           <a:p>
             <a:r>
-              <a:rPr lang="en-US" altLang="zh-CN" sz="820">
+              <a:rPr lang="en-US" altLang="zh-CN" sz="690">
                 <a:solidFill>
                   <a:srgbClr val="071A3D"/>
                 </a:solidFill>
@@ -19259,7 +19869,7 @@
               </a:rPr>
               <a:t>hash or integrity identifier</a:t>
             </a:r>
-            <a:endParaRPr lang="zh-CN" altLang="en-US" sz="820">
+            <a:endParaRPr lang="zh-CN" altLang="en-US" sz="690">
               <a:solidFill>
                 <a:srgbClr val="071A3D"/>
               </a:solidFill>
@@ -19270,10 +19880,118 @@
       </p:sp>
       <p:sp>
         <p:nvSpPr>
-          <p:cNvPr id="25" name="it-4">
-            <a:extLst>
-              <a:ext uri="{FF2B5EF4-FFF2-40B4-BE49-F238E27FC236}">
-                <a16:creationId xmlns:a16="http://schemas.microsoft.com/office/drawing/2014/main" id="{D69E83AB-ED70-BAEA-8D43-08F0BF9855F2}"/>
+          <p:cNvPr id="37" name="it-card-4">
+            <a:extLst>
+              <a:ext uri="{FF2B5EF4-FFF2-40B4-BE49-F238E27FC236}">
+                <a16:creationId xmlns:a16="http://schemas.microsoft.com/office/drawing/2014/main" id="{BFC3C1D8-5870-F6D5-0BC5-1A2D7AA56683}"/>
+              </a:ext>
+            </a:extLst>
+          </p:cNvPr>
+          <p:cNvSpPr/>
+          <p:nvPr/>
+        </p:nvSpPr>
+        <p:spPr>
+          <a:xfrm>
+            <a:off x="5130800" y="4927600"/>
+            <a:ext cx="2819400" cy="304800"/>
+          </a:xfrm>
+          <a:prstGeom prst="rect">
+            <a:avLst/>
+          </a:prstGeom>
+          <a:solidFill>
+            <a:srgbClr val="F9FBFE"/>
+          </a:solidFill>
+          <a:ln w="11430">
+            <a:solidFill>
+              <a:srgbClr val="D5E2F0"/>
+            </a:solidFill>
+          </a:ln>
+        </p:spPr>
+        <p:style>
+          <a:lnRef idx="2">
+            <a:schemeClr val="accent1">
+              <a:shade val="15000"/>
+            </a:schemeClr>
+          </a:lnRef>
+          <a:fillRef idx="1">
+            <a:schemeClr val="accent1"/>
+          </a:fillRef>
+          <a:effectRef idx="0">
+            <a:schemeClr val="accent1"/>
+          </a:effectRef>
+          <a:fontRef idx="minor">
+            <a:schemeClr val="lt1"/>
+          </a:fontRef>
+        </p:style>
+        <p:txBody>
+          <a:bodyPr rtlCol="0" anchor="ctr"/>
+          <a:lstStyle/>
+          <a:p>
+            <a:pPr algn="ctr"/>
+            <a:endParaRPr lang="zh-CN" altLang="en-US"/>
+          </a:p>
+        </p:txBody>
+      </p:sp>
+      <p:sp>
+        <p:nvSpPr>
+          <p:cNvPr id="38" name="it-band-4">
+            <a:extLst>
+              <a:ext uri="{FF2B5EF4-FFF2-40B4-BE49-F238E27FC236}">
+                <a16:creationId xmlns:a16="http://schemas.microsoft.com/office/drawing/2014/main" id="{A32D5B52-0D74-F49B-4FC1-885178B1033F}"/>
+              </a:ext>
+            </a:extLst>
+          </p:cNvPr>
+          <p:cNvSpPr/>
+          <p:nvPr/>
+        </p:nvSpPr>
+        <p:spPr>
+          <a:xfrm>
+            <a:off x="5130800" y="4927600"/>
+            <a:ext cx="63500" cy="304800"/>
+          </a:xfrm>
+          <a:prstGeom prst="rect">
+            <a:avLst/>
+          </a:prstGeom>
+          <a:solidFill>
+            <a:srgbClr val="1F7A4D"/>
+          </a:solidFill>
+          <a:ln w="11430">
+            <a:solidFill>
+              <a:srgbClr val="1F7A4D"/>
+            </a:solidFill>
+          </a:ln>
+        </p:spPr>
+        <p:style>
+          <a:lnRef idx="2">
+            <a:schemeClr val="accent1">
+              <a:shade val="15000"/>
+            </a:schemeClr>
+          </a:lnRef>
+          <a:fillRef idx="1">
+            <a:schemeClr val="accent1"/>
+          </a:fillRef>
+          <a:effectRef idx="0">
+            <a:schemeClr val="accent1"/>
+          </a:effectRef>
+          <a:fontRef idx="minor">
+            <a:schemeClr val="lt1"/>
+          </a:fontRef>
+        </p:style>
+        <p:txBody>
+          <a:bodyPr rtlCol="0" anchor="ctr"/>
+          <a:lstStyle/>
+          <a:p>
+            <a:pPr algn="ctr"/>
+            <a:endParaRPr lang="zh-CN" altLang="en-US"/>
+          </a:p>
+        </p:txBody>
+      </p:sp>
+      <p:sp>
+        <p:nvSpPr>
+          <p:cNvPr id="39" name="it-4">
+            <a:extLst>
+              <a:ext uri="{FF2B5EF4-FFF2-40B4-BE49-F238E27FC236}">
+                <a16:creationId xmlns:a16="http://schemas.microsoft.com/office/drawing/2014/main" id="{B5C5FAF3-4CAB-E586-CCB1-057F7D14644C}"/>
               </a:ext>
             </a:extLst>
           </p:cNvPr>
@@ -19282,8 +20000,8 @@
         </p:nvSpPr>
         <p:spPr>
           <a:xfrm>
-            <a:off x="1955800" y="5308600"/>
-            <a:ext cx="406400" cy="276999"/>
+            <a:off x="5384800" y="5016500"/>
+            <a:ext cx="304800" cy="276999"/>
           </a:xfrm>
           <a:prstGeom prst="rect">
             <a:avLst/>
@@ -19297,17 +20015,17 @@
           <a:lstStyle/>
           <a:p>
             <a:r>
-              <a:rPr lang="en-US" altLang="zh-CN" sz="900" b="1">
+              <a:rPr lang="en-US" altLang="zh-CN" sz="780" b="1">
                 <a:solidFill>
-                  <a:srgbClr val="003B7A"/>
+                  <a:srgbClr val="1F7A4D"/>
                 </a:solidFill>
                 <a:latin typeface="Consolas" panose="020B0609020204030204" pitchFamily="49" charset="0"/>
               </a:rPr>
               <a:t>B</a:t>
             </a:r>
-            <a:endParaRPr lang="zh-CN" altLang="en-US" sz="900" b="1">
+            <a:endParaRPr lang="zh-CN" altLang="en-US" sz="780" b="1">
               <a:solidFill>
-                <a:srgbClr val="003B7A"/>
+                <a:srgbClr val="1F7A4D"/>
               </a:solidFill>
               <a:latin typeface="Consolas" panose="020B0609020204030204" pitchFamily="49" charset="0"/>
             </a:endParaRPr>
@@ -19316,10 +20034,10 @@
       </p:sp>
       <p:sp>
         <p:nvSpPr>
-          <p:cNvPr id="26" name="it2-4">
-            <a:extLst>
-              <a:ext uri="{FF2B5EF4-FFF2-40B4-BE49-F238E27FC236}">
-                <a16:creationId xmlns:a16="http://schemas.microsoft.com/office/drawing/2014/main" id="{2F7A8973-62CF-75A2-7A71-773A7C8E540B}"/>
+          <p:cNvPr id="40" name="it2-4">
+            <a:extLst>
+              <a:ext uri="{FF2B5EF4-FFF2-40B4-BE49-F238E27FC236}">
+                <a16:creationId xmlns:a16="http://schemas.microsoft.com/office/drawing/2014/main" id="{C75ECA88-B46F-20CF-7A0B-9A8445109CC6}"/>
               </a:ext>
             </a:extLst>
           </p:cNvPr>
@@ -19328,8 +20046,8 @@
         </p:nvSpPr>
         <p:spPr>
           <a:xfrm>
-            <a:off x="2514600" y="5308600"/>
-            <a:ext cx="5334000" cy="276999"/>
+            <a:off x="5867400" y="5016500"/>
+            <a:ext cx="1651000" cy="276999"/>
           </a:xfrm>
           <a:prstGeom prst="rect">
             <a:avLst/>
@@ -19343,7 +20061,7 @@
           <a:lstStyle/>
           <a:p>
             <a:r>
-              <a:rPr lang="en-US" altLang="zh-CN" sz="820">
+              <a:rPr lang="en-US" altLang="zh-CN" sz="690">
                 <a:solidFill>
                   <a:srgbClr val="071A3D"/>
                 </a:solidFill>
@@ -19351,7 +20069,7 @@
               </a:rPr>
               <a:t>allowed and forbidden interpretation</a:t>
             </a:r>
-            <a:endParaRPr lang="zh-CN" altLang="en-US" sz="820">
+            <a:endParaRPr lang="zh-CN" altLang="en-US" sz="690">
               <a:solidFill>
                 <a:srgbClr val="071A3D"/>
               </a:solidFill>
@@ -19362,11 +20080,203 @@
       </p:sp>
       <p:sp>
         <p:nvSpPr>
-          <p:cNvPr id="27" name="footer-hit-14">
+          <p:cNvPr id="41" name="example">
+            <a:extLst>
+              <a:ext uri="{FF2B5EF4-FFF2-40B4-BE49-F238E27FC236}">
+                <a16:creationId xmlns:a16="http://schemas.microsoft.com/office/drawing/2014/main" id="{8D1D093A-58CF-E48E-7C06-E242D761DFDB}"/>
+              </a:ext>
+            </a:extLst>
+          </p:cNvPr>
+          <p:cNvSpPr/>
+          <p:nvPr/>
+        </p:nvSpPr>
+        <p:spPr>
+          <a:xfrm>
+            <a:off x="8407400" y="3200400"/>
+            <a:ext cx="2895600" cy="2032000"/>
+          </a:xfrm>
+          <a:prstGeom prst="rect">
+            <a:avLst/>
+          </a:prstGeom>
+          <a:solidFill>
+            <a:srgbClr val="FFF7E0"/>
+          </a:solidFill>
+          <a:ln w="11430">
+            <a:solidFill>
+              <a:srgbClr val="F2C14E"/>
+            </a:solidFill>
+          </a:ln>
+        </p:spPr>
+        <p:style>
+          <a:lnRef idx="2">
+            <a:schemeClr val="accent1">
+              <a:shade val="15000"/>
+            </a:schemeClr>
+          </a:lnRef>
+          <a:fillRef idx="1">
+            <a:schemeClr val="accent1"/>
+          </a:fillRef>
+          <a:effectRef idx="0">
+            <a:schemeClr val="accent1"/>
+          </a:effectRef>
+          <a:fontRef idx="minor">
+            <a:schemeClr val="lt1"/>
+          </a:fontRef>
+        </p:style>
+        <p:txBody>
+          <a:bodyPr rtlCol="0" anchor="ctr"/>
+          <a:lstStyle/>
+          <a:p>
+            <a:pPr algn="ctr"/>
+            <a:endParaRPr lang="zh-CN" altLang="en-US"/>
+          </a:p>
+        </p:txBody>
+      </p:sp>
+      <p:sp>
+        <p:nvSpPr>
+          <p:cNvPr id="42" name="example-k">
+            <a:extLst>
+              <a:ext uri="{FF2B5EF4-FFF2-40B4-BE49-F238E27FC236}">
+                <a16:creationId xmlns:a16="http://schemas.microsoft.com/office/drawing/2014/main" id="{6E03B00F-5E9D-D8E2-50DE-94D05D873AE0}"/>
+              </a:ext>
+            </a:extLst>
+          </p:cNvPr>
+          <p:cNvSpPr txBox="1"/>
+          <p:nvPr/>
+        </p:nvSpPr>
+        <p:spPr>
+          <a:xfrm>
+            <a:off x="8737600" y="3479800"/>
+            <a:ext cx="1168400" cy="276999"/>
+          </a:xfrm>
+          <a:prstGeom prst="rect">
+            <a:avLst/>
+          </a:prstGeom>
+          <a:noFill/>
+        </p:spPr>
+        <p:txBody>
+          <a:bodyPr vert="horz" wrap="square" lIns="0" tIns="0" rIns="0" bIns="0" rtlCol="0">
+            <a:noAutofit/>
+          </a:bodyPr>
+          <a:lstStyle/>
+          <a:p>
+            <a:r>
+              <a:rPr lang="en-US" altLang="zh-CN" sz="710" b="1">
+                <a:solidFill>
+                  <a:srgbClr val="B85C00"/>
+                </a:solidFill>
+                <a:latin typeface="Aptos" panose="020B0004020202020204" pitchFamily="34" charset="0"/>
+              </a:rPr>
+              <a:t>VIVA ANSWER</a:t>
+            </a:r>
+            <a:endParaRPr lang="zh-CN" altLang="en-US" sz="710" b="1">
+              <a:solidFill>
+                <a:srgbClr val="B85C00"/>
+              </a:solidFill>
+              <a:latin typeface="Aptos" panose="020B0004020202020204" pitchFamily="34" charset="0"/>
+            </a:endParaRPr>
+          </a:p>
+        </p:txBody>
+      </p:sp>
+      <p:sp>
+        <p:nvSpPr>
+          <p:cNvPr id="43" name="example-t">
+            <a:extLst>
+              <a:ext uri="{FF2B5EF4-FFF2-40B4-BE49-F238E27FC236}">
+                <a16:creationId xmlns:a16="http://schemas.microsoft.com/office/drawing/2014/main" id="{4B0B9D26-C640-AEF2-6280-7F954DD78737}"/>
+              </a:ext>
+            </a:extLst>
+          </p:cNvPr>
+          <p:cNvSpPr txBox="1"/>
+          <p:nvPr/>
+        </p:nvSpPr>
+        <p:spPr>
+          <a:xfrm>
+            <a:off x="8737600" y="3886200"/>
+            <a:ext cx="2133600" cy="276999"/>
+          </a:xfrm>
+          <a:prstGeom prst="rect">
+            <a:avLst/>
+          </a:prstGeom>
+          <a:noFill/>
+        </p:spPr>
+        <p:txBody>
+          <a:bodyPr vert="horz" wrap="square" lIns="0" tIns="0" rIns="0" bIns="0" rtlCol="0">
+            <a:noAutofit/>
+          </a:bodyPr>
+          <a:lstStyle/>
+          <a:p>
+            <a:r>
+              <a:rPr lang="en-US" altLang="zh-CN" sz="840" b="1">
+                <a:solidFill>
+                  <a:srgbClr val="071A3D"/>
+                </a:solidFill>
+                <a:latin typeface="Aptos" panose="020B0004020202020204" pitchFamily="34" charset="0"/>
+              </a:rPr>
+              <a:t>Example: ProbeTrace supports scoped owner attribution inside this registry and split. It is not general authorship proof.</a:t>
+            </a:r>
+            <a:endParaRPr lang="zh-CN" altLang="en-US" sz="840" b="1">
+              <a:solidFill>
+                <a:srgbClr val="071A3D"/>
+              </a:solidFill>
+              <a:latin typeface="Aptos" panose="020B0004020202020204" pitchFamily="34" charset="0"/>
+            </a:endParaRPr>
+          </a:p>
+        </p:txBody>
+      </p:sp>
+      <p:sp>
+        <p:nvSpPr>
+          <p:cNvPr id="44" name="example-p">
+            <a:extLst>
+              <a:ext uri="{FF2B5EF4-FFF2-40B4-BE49-F238E27FC236}">
+                <a16:creationId xmlns:a16="http://schemas.microsoft.com/office/drawing/2014/main" id="{F1D0FA97-8218-DDAD-457F-B8215D5DD8F7}"/>
+              </a:ext>
+            </a:extLst>
+          </p:cNvPr>
+          <p:cNvSpPr txBox="1"/>
+          <p:nvPr/>
+        </p:nvSpPr>
+        <p:spPr>
+          <a:xfrm>
+            <a:off x="8737600" y="4749800"/>
+            <a:ext cx="1854200" cy="276999"/>
+          </a:xfrm>
+          <a:prstGeom prst="rect">
+            <a:avLst/>
+          </a:prstGeom>
+          <a:noFill/>
+        </p:spPr>
+        <p:txBody>
+          <a:bodyPr vert="horz" wrap="square" lIns="0" tIns="0" rIns="0" bIns="0" rtlCol="0">
+            <a:noAutofit/>
+          </a:bodyPr>
+          <a:lstStyle/>
+          <a:p>
+            <a:r>
+              <a:rPr lang="en-US" altLang="zh-CN" sz="700" b="1">
+                <a:solidFill>
+                  <a:srgbClr val="4A5B78"/>
+                </a:solidFill>
+                <a:latin typeface="Aptos" panose="020B0004020202020204" pitchFamily="34" charset="0"/>
+              </a:rPr>
+              <a:t>Point to: CLAIM_BOUNDARIES.md</a:t>
+            </a:r>
+            <a:endParaRPr lang="zh-CN" altLang="en-US" sz="700" b="1">
+              <a:solidFill>
+                <a:srgbClr val="4A5B78"/>
+              </a:solidFill>
+              <a:latin typeface="Aptos" panose="020B0004020202020204" pitchFamily="34" charset="0"/>
+            </a:endParaRPr>
+          </a:p>
+        </p:txBody>
+      </p:sp>
+      <p:sp>
+        <p:nvSpPr>
+          <p:cNvPr id="45" name="footer-hit-14">
             <a:hlinkClick r:id="rId4"/>
             <a:extLst>
               <a:ext uri="{FF2B5EF4-FFF2-40B4-BE49-F238E27FC236}">
-                <a16:creationId xmlns:a16="http://schemas.microsoft.com/office/drawing/2014/main" id="{624EF8D2-171E-CF98-7C76-03F27742B075}"/>
+                <a16:creationId xmlns:a16="http://schemas.microsoft.com/office/drawing/2014/main" id="{554B731E-C245-372F-65E5-5504015144B2}"/>
               </a:ext>
             </a:extLst>
           </p:cNvPr>
@@ -19427,7 +20337,7 @@
     </p:spTree>
     <p:extLst>
       <p:ext uri="{BB962C8B-B14F-4D97-AF65-F5344CB8AC3E}">
-        <p14:creationId xmlns:p14="http://schemas.microsoft.com/office/powerpoint/2010/main" val="1418941545"/>
+        <p14:creationId xmlns:p14="http://schemas.microsoft.com/office/powerpoint/2010/main" val="3852643196"/>
       </p:ext>
     </p:extLst>
   </p:cSld>
@@ -19483,7 +20393,7 @@
                                           </p:stCondLst>
                                         </p:cTn>
                                         <p:tgtEl>
-                                          <p:spTgt spid="7"/>
+                                          <p:spTgt spid="13"/>
                                         </p:tgtEl>
                                         <p:attrNameLst>
                                           <p:attrName>style.visibility</p:attrName>
@@ -19497,7 +20407,7 @@
                                       <p:cBhvr>
                                         <p:cTn id="7" dur="160"/>
                                         <p:tgtEl>
-                                          <p:spTgt spid="7"/>
+                                          <p:spTgt spid="13"/>
                                         </p:tgtEl>
                                       </p:cBhvr>
                                     </p:animEffect>
@@ -19527,7 +20437,7 @@
                                           </p:stCondLst>
                                         </p:cTn>
                                         <p:tgtEl>
-                                          <p:spTgt spid="13"/>
+                                          <p:spTgt spid="14"/>
                                         </p:tgtEl>
                                         <p:attrNameLst>
                                           <p:attrName>style.visibility</p:attrName>
@@ -19541,7 +20451,7 @@
                                       <p:cBhvr>
                                         <p:cTn id="11" dur="160"/>
                                         <p:tgtEl>
-                                          <p:spTgt spid="13"/>
+                                          <p:spTgt spid="14"/>
                                         </p:tgtEl>
                                       </p:cBhvr>
                                     </p:animEffect>
@@ -19571,7 +20481,7 @@
                                           </p:stCondLst>
                                         </p:cTn>
                                         <p:tgtEl>
-                                          <p:spTgt spid="14"/>
+                                          <p:spTgt spid="15"/>
                                         </p:tgtEl>
                                         <p:attrNameLst>
                                           <p:attrName>style.visibility</p:attrName>
@@ -19585,7 +20495,7 @@
                                       <p:cBhvr>
                                         <p:cTn id="15" dur="160"/>
                                         <p:tgtEl>
-                                          <p:spTgt spid="14"/>
+                                          <p:spTgt spid="15"/>
                                         </p:tgtEl>
                                       </p:cBhvr>
                                     </p:animEffect>
@@ -19602,7 +20512,7 @@
                             </p:stCondLst>
                             <p:childTnLst>
                               <p:par>
-                                <p:cTn id="17" presetID="10" presetClass="entr" presetSubtype="0" fill="hold" grpId="0" nodeType="afterEffect">
+                                <p:cTn id="17" presetID="10" presetClass="entr" presetSubtype="0" fill="hold" nodeType="afterEffect">
                                   <p:stCondLst>
                                     <p:cond delay="0"/>
                                   </p:stCondLst>
@@ -19615,7 +20525,7 @@
                                           </p:stCondLst>
                                         </p:cTn>
                                         <p:tgtEl>
-                                          <p:spTgt spid="15"/>
+                                          <p:spTgt spid="16"/>
                                         </p:tgtEl>
                                         <p:attrNameLst>
                                           <p:attrName>style.visibility</p:attrName>
@@ -19629,7 +20539,7 @@
                                       <p:cBhvr>
                                         <p:cTn id="19" dur="160"/>
                                         <p:tgtEl>
-                                          <p:spTgt spid="15"/>
+                                          <p:spTgt spid="16"/>
                                         </p:tgtEl>
                                       </p:cBhvr>
                                     </p:animEffect>
@@ -19659,7 +20569,7 @@
                                           </p:stCondLst>
                                         </p:cTn>
                                         <p:tgtEl>
-                                          <p:spTgt spid="16"/>
+                                          <p:spTgt spid="17"/>
                                         </p:tgtEl>
                                         <p:attrNameLst>
                                           <p:attrName>style.visibility</p:attrName>
@@ -19673,7 +20583,7 @@
                                       <p:cBhvr>
                                         <p:cTn id="23" dur="160"/>
                                         <p:tgtEl>
-                                          <p:spTgt spid="16"/>
+                                          <p:spTgt spid="17"/>
                                         </p:tgtEl>
                                       </p:cBhvr>
                                     </p:animEffect>
@@ -19703,7 +20613,7 @@
                                           </p:stCondLst>
                                         </p:cTn>
                                         <p:tgtEl>
-                                          <p:spTgt spid="17"/>
+                                          <p:spTgt spid="18"/>
                                         </p:tgtEl>
                                         <p:attrNameLst>
                                           <p:attrName>style.visibility</p:attrName>
@@ -19717,7 +20627,7 @@
                                       <p:cBhvr>
                                         <p:cTn id="27" dur="160"/>
                                         <p:tgtEl>
-                                          <p:spTgt spid="17"/>
+                                          <p:spTgt spid="18"/>
                                         </p:tgtEl>
                                       </p:cBhvr>
                                     </p:animEffect>
@@ -19747,7 +20657,7 @@
                                           </p:stCondLst>
                                         </p:cTn>
                                         <p:tgtEl>
-                                          <p:spTgt spid="18"/>
+                                          <p:spTgt spid="19"/>
                                         </p:tgtEl>
                                         <p:attrNameLst>
                                           <p:attrName>style.visibility</p:attrName>
@@ -19761,7 +20671,7 @@
                                       <p:cBhvr>
                                         <p:cTn id="31" dur="160"/>
                                         <p:tgtEl>
-                                          <p:spTgt spid="18"/>
+                                          <p:spTgt spid="19"/>
                                         </p:tgtEl>
                                       </p:cBhvr>
                                     </p:animEffect>
@@ -19791,7 +20701,7 @@
                                           </p:stCondLst>
                                         </p:cTn>
                                         <p:tgtEl>
-                                          <p:spTgt spid="19"/>
+                                          <p:spTgt spid="20"/>
                                         </p:tgtEl>
                                         <p:attrNameLst>
                                           <p:attrName>style.visibility</p:attrName>
@@ -19805,7 +20715,7 @@
                                       <p:cBhvr>
                                         <p:cTn id="35" dur="160"/>
                                         <p:tgtEl>
-                                          <p:spTgt spid="19"/>
+                                          <p:spTgt spid="20"/>
                                         </p:tgtEl>
                                       </p:cBhvr>
                                     </p:animEffect>
@@ -19835,7 +20745,7 @@
                                           </p:stCondLst>
                                         </p:cTn>
                                         <p:tgtEl>
-                                          <p:spTgt spid="20"/>
+                                          <p:spTgt spid="21"/>
                                         </p:tgtEl>
                                         <p:attrNameLst>
                                           <p:attrName>style.visibility</p:attrName>
@@ -19849,7 +20759,7 @@
                                       <p:cBhvr>
                                         <p:cTn id="39" dur="160"/>
                                         <p:tgtEl>
-                                          <p:spTgt spid="20"/>
+                                          <p:spTgt spid="21"/>
                                         </p:tgtEl>
                                       </p:cBhvr>
                                     </p:animEffect>
@@ -19879,7 +20789,7 @@
                                           </p:stCondLst>
                                         </p:cTn>
                                         <p:tgtEl>
-                                          <p:spTgt spid="21"/>
+                                          <p:spTgt spid="22"/>
                                         </p:tgtEl>
                                         <p:attrNameLst>
                                           <p:attrName>style.visibility</p:attrName>
@@ -19893,7 +20803,7 @@
                                       <p:cBhvr>
                                         <p:cTn id="43" dur="160"/>
                                         <p:tgtEl>
-                                          <p:spTgt spid="21"/>
+                                          <p:spTgt spid="22"/>
                                         </p:tgtEl>
                                       </p:cBhvr>
                                     </p:animEffect>
@@ -19923,7 +20833,7 @@
                                           </p:stCondLst>
                                         </p:cTn>
                                         <p:tgtEl>
-                                          <p:spTgt spid="22"/>
+                                          <p:spTgt spid="23"/>
                                         </p:tgtEl>
                                         <p:attrNameLst>
                                           <p:attrName>style.visibility</p:attrName>
@@ -19937,7 +20847,7 @@
                                       <p:cBhvr>
                                         <p:cTn id="47" dur="160"/>
                                         <p:tgtEl>
-                                          <p:spTgt spid="22"/>
+                                          <p:spTgt spid="23"/>
                                         </p:tgtEl>
                                       </p:cBhvr>
                                     </p:animEffect>
@@ -19967,7 +20877,7 @@
                                           </p:stCondLst>
                                         </p:cTn>
                                         <p:tgtEl>
-                                          <p:spTgt spid="23"/>
+                                          <p:spTgt spid="24"/>
                                         </p:tgtEl>
                                         <p:attrNameLst>
                                           <p:attrName>style.visibility</p:attrName>
@@ -19981,7 +20891,7 @@
                                       <p:cBhvr>
                                         <p:cTn id="51" dur="160"/>
                                         <p:tgtEl>
-                                          <p:spTgt spid="23"/>
+                                          <p:spTgt spid="24"/>
                                         </p:tgtEl>
                                       </p:cBhvr>
                                     </p:animEffect>
@@ -20011,7 +20921,7 @@
                                           </p:stCondLst>
                                         </p:cTn>
                                         <p:tgtEl>
-                                          <p:spTgt spid="24"/>
+                                          <p:spTgt spid="25"/>
                                         </p:tgtEl>
                                         <p:attrNameLst>
                                           <p:attrName>style.visibility</p:attrName>
@@ -20025,7 +20935,7 @@
                                       <p:cBhvr>
                                         <p:cTn id="55" dur="160"/>
                                         <p:tgtEl>
-                                          <p:spTgt spid="24"/>
+                                          <p:spTgt spid="25"/>
                                         </p:tgtEl>
                                       </p:cBhvr>
                                     </p:animEffect>
@@ -20055,7 +20965,7 @@
                                           </p:stCondLst>
                                         </p:cTn>
                                         <p:tgtEl>
-                                          <p:spTgt spid="25"/>
+                                          <p:spTgt spid="26"/>
                                         </p:tgtEl>
                                         <p:attrNameLst>
                                           <p:attrName>style.visibility</p:attrName>
@@ -20069,7 +20979,7 @@
                                       <p:cBhvr>
                                         <p:cTn id="59" dur="160"/>
                                         <p:tgtEl>
-                                          <p:spTgt spid="25"/>
+                                          <p:spTgt spid="26"/>
                                         </p:tgtEl>
                                       </p:cBhvr>
                                     </p:animEffect>
@@ -20099,7 +21009,7 @@
                                           </p:stCondLst>
                                         </p:cTn>
                                         <p:tgtEl>
-                                          <p:spTgt spid="26"/>
+                                          <p:spTgt spid="27"/>
                                         </p:tgtEl>
                                         <p:attrNameLst>
                                           <p:attrName>style.visibility</p:attrName>
@@ -20113,7 +21023,755 @@
                                       <p:cBhvr>
                                         <p:cTn id="63" dur="160"/>
                                         <p:tgtEl>
-                                          <p:spTgt spid="26"/>
+                                          <p:spTgt spid="27"/>
+                                        </p:tgtEl>
+                                      </p:cBhvr>
+                                    </p:animEffect>
+                                  </p:childTnLst>
+                                </p:cTn>
+                              </p:par>
+                            </p:childTnLst>
+                          </p:cTn>
+                        </p:par>
+                        <p:par>
+                          <p:cTn id="64" fill="hold">
+                            <p:stCondLst>
+                              <p:cond delay="2400"/>
+                            </p:stCondLst>
+                            <p:childTnLst>
+                              <p:par>
+                                <p:cTn id="65" presetID="10" presetClass="entr" presetSubtype="0" fill="hold" grpId="0" nodeType="afterEffect">
+                                  <p:stCondLst>
+                                    <p:cond delay="0"/>
+                                  </p:stCondLst>
+                                  <p:childTnLst>
+                                    <p:set>
+                                      <p:cBhvr>
+                                        <p:cTn id="66" dur="1" fill="hold">
+                                          <p:stCondLst>
+                                            <p:cond delay="0"/>
+                                          </p:stCondLst>
+                                        </p:cTn>
+                                        <p:tgtEl>
+                                          <p:spTgt spid="28"/>
+                                        </p:tgtEl>
+                                        <p:attrNameLst>
+                                          <p:attrName>style.visibility</p:attrName>
+                                        </p:attrNameLst>
+                                      </p:cBhvr>
+                                      <p:to>
+                                        <p:strVal val="visible"/>
+                                      </p:to>
+                                    </p:set>
+                                    <p:animEffect transition="in" filter="fade">
+                                      <p:cBhvr>
+                                        <p:cTn id="67" dur="160"/>
+                                        <p:tgtEl>
+                                          <p:spTgt spid="28"/>
+                                        </p:tgtEl>
+                                      </p:cBhvr>
+                                    </p:animEffect>
+                                  </p:childTnLst>
+                                </p:cTn>
+                              </p:par>
+                            </p:childTnLst>
+                          </p:cTn>
+                        </p:par>
+                        <p:par>
+                          <p:cTn id="68" fill="hold">
+                            <p:stCondLst>
+                              <p:cond delay="2560"/>
+                            </p:stCondLst>
+                            <p:childTnLst>
+                              <p:par>
+                                <p:cTn id="69" presetID="10" presetClass="entr" presetSubtype="0" fill="hold" grpId="0" nodeType="afterEffect">
+                                  <p:stCondLst>
+                                    <p:cond delay="0"/>
+                                  </p:stCondLst>
+                                  <p:childTnLst>
+                                    <p:set>
+                                      <p:cBhvr>
+                                        <p:cTn id="70" dur="1" fill="hold">
+                                          <p:stCondLst>
+                                            <p:cond delay="0"/>
+                                          </p:stCondLst>
+                                        </p:cTn>
+                                        <p:tgtEl>
+                                          <p:spTgt spid="29"/>
+                                        </p:tgtEl>
+                                        <p:attrNameLst>
+                                          <p:attrName>style.visibility</p:attrName>
+                                        </p:attrNameLst>
+                                      </p:cBhvr>
+                                      <p:to>
+                                        <p:strVal val="visible"/>
+                                      </p:to>
+                                    </p:set>
+                                    <p:animEffect transition="in" filter="fade">
+                                      <p:cBhvr>
+                                        <p:cTn id="71" dur="160"/>
+                                        <p:tgtEl>
+                                          <p:spTgt spid="29"/>
+                                        </p:tgtEl>
+                                      </p:cBhvr>
+                                    </p:animEffect>
+                                  </p:childTnLst>
+                                </p:cTn>
+                              </p:par>
+                            </p:childTnLst>
+                          </p:cTn>
+                        </p:par>
+                        <p:par>
+                          <p:cTn id="72" fill="hold">
+                            <p:stCondLst>
+                              <p:cond delay="2720"/>
+                            </p:stCondLst>
+                            <p:childTnLst>
+                              <p:par>
+                                <p:cTn id="73" presetID="10" presetClass="entr" presetSubtype="0" fill="hold" grpId="0" nodeType="afterEffect">
+                                  <p:stCondLst>
+                                    <p:cond delay="0"/>
+                                  </p:stCondLst>
+                                  <p:childTnLst>
+                                    <p:set>
+                                      <p:cBhvr>
+                                        <p:cTn id="74" dur="1" fill="hold">
+                                          <p:stCondLst>
+                                            <p:cond delay="0"/>
+                                          </p:stCondLst>
+                                        </p:cTn>
+                                        <p:tgtEl>
+                                          <p:spTgt spid="30"/>
+                                        </p:tgtEl>
+                                        <p:attrNameLst>
+                                          <p:attrName>style.visibility</p:attrName>
+                                        </p:attrNameLst>
+                                      </p:cBhvr>
+                                      <p:to>
+                                        <p:strVal val="visible"/>
+                                      </p:to>
+                                    </p:set>
+                                    <p:animEffect transition="in" filter="fade">
+                                      <p:cBhvr>
+                                        <p:cTn id="75" dur="160"/>
+                                        <p:tgtEl>
+                                          <p:spTgt spid="30"/>
+                                        </p:tgtEl>
+                                      </p:cBhvr>
+                                    </p:animEffect>
+                                  </p:childTnLst>
+                                </p:cTn>
+                              </p:par>
+                            </p:childTnLst>
+                          </p:cTn>
+                        </p:par>
+                        <p:par>
+                          <p:cTn id="76" fill="hold">
+                            <p:stCondLst>
+                              <p:cond delay="2880"/>
+                            </p:stCondLst>
+                            <p:childTnLst>
+                              <p:par>
+                                <p:cTn id="77" presetID="10" presetClass="entr" presetSubtype="0" fill="hold" grpId="0" nodeType="afterEffect">
+                                  <p:stCondLst>
+                                    <p:cond delay="0"/>
+                                  </p:stCondLst>
+                                  <p:childTnLst>
+                                    <p:set>
+                                      <p:cBhvr>
+                                        <p:cTn id="78" dur="1" fill="hold">
+                                          <p:stCondLst>
+                                            <p:cond delay="0"/>
+                                          </p:stCondLst>
+                                        </p:cTn>
+                                        <p:tgtEl>
+                                          <p:spTgt spid="31"/>
+                                        </p:tgtEl>
+                                        <p:attrNameLst>
+                                          <p:attrName>style.visibility</p:attrName>
+                                        </p:attrNameLst>
+                                      </p:cBhvr>
+                                      <p:to>
+                                        <p:strVal val="visible"/>
+                                      </p:to>
+                                    </p:set>
+                                    <p:animEffect transition="in" filter="fade">
+                                      <p:cBhvr>
+                                        <p:cTn id="79" dur="160"/>
+                                        <p:tgtEl>
+                                          <p:spTgt spid="31"/>
+                                        </p:tgtEl>
+                                      </p:cBhvr>
+                                    </p:animEffect>
+                                  </p:childTnLst>
+                                </p:cTn>
+                              </p:par>
+                            </p:childTnLst>
+                          </p:cTn>
+                        </p:par>
+                        <p:par>
+                          <p:cTn id="80" fill="hold">
+                            <p:stCondLst>
+                              <p:cond delay="3040"/>
+                            </p:stCondLst>
+                            <p:childTnLst>
+                              <p:par>
+                                <p:cTn id="81" presetID="10" presetClass="entr" presetSubtype="0" fill="hold" grpId="0" nodeType="afterEffect">
+                                  <p:stCondLst>
+                                    <p:cond delay="0"/>
+                                  </p:stCondLst>
+                                  <p:childTnLst>
+                                    <p:set>
+                                      <p:cBhvr>
+                                        <p:cTn id="82" dur="1" fill="hold">
+                                          <p:stCondLst>
+                                            <p:cond delay="0"/>
+                                          </p:stCondLst>
+                                        </p:cTn>
+                                        <p:tgtEl>
+                                          <p:spTgt spid="32"/>
+                                        </p:tgtEl>
+                                        <p:attrNameLst>
+                                          <p:attrName>style.visibility</p:attrName>
+                                        </p:attrNameLst>
+                                      </p:cBhvr>
+                                      <p:to>
+                                        <p:strVal val="visible"/>
+                                      </p:to>
+                                    </p:set>
+                                    <p:animEffect transition="in" filter="fade">
+                                      <p:cBhvr>
+                                        <p:cTn id="83" dur="160"/>
+                                        <p:tgtEl>
+                                          <p:spTgt spid="32"/>
+                                        </p:tgtEl>
+                                      </p:cBhvr>
+                                    </p:animEffect>
+                                  </p:childTnLst>
+                                </p:cTn>
+                              </p:par>
+                            </p:childTnLst>
+                          </p:cTn>
+                        </p:par>
+                        <p:par>
+                          <p:cTn id="84" fill="hold">
+                            <p:stCondLst>
+                              <p:cond delay="3200"/>
+                            </p:stCondLst>
+                            <p:childTnLst>
+                              <p:par>
+                                <p:cTn id="85" presetID="10" presetClass="entr" presetSubtype="0" fill="hold" grpId="0" nodeType="afterEffect">
+                                  <p:stCondLst>
+                                    <p:cond delay="0"/>
+                                  </p:stCondLst>
+                                  <p:childTnLst>
+                                    <p:set>
+                                      <p:cBhvr>
+                                        <p:cTn id="86" dur="1" fill="hold">
+                                          <p:stCondLst>
+                                            <p:cond delay="0"/>
+                                          </p:stCondLst>
+                                        </p:cTn>
+                                        <p:tgtEl>
+                                          <p:spTgt spid="33"/>
+                                        </p:tgtEl>
+                                        <p:attrNameLst>
+                                          <p:attrName>style.visibility</p:attrName>
+                                        </p:attrNameLst>
+                                      </p:cBhvr>
+                                      <p:to>
+                                        <p:strVal val="visible"/>
+                                      </p:to>
+                                    </p:set>
+                                    <p:animEffect transition="in" filter="fade">
+                                      <p:cBhvr>
+                                        <p:cTn id="87" dur="160"/>
+                                        <p:tgtEl>
+                                          <p:spTgt spid="33"/>
+                                        </p:tgtEl>
+                                      </p:cBhvr>
+                                    </p:animEffect>
+                                  </p:childTnLst>
+                                </p:cTn>
+                              </p:par>
+                            </p:childTnLst>
+                          </p:cTn>
+                        </p:par>
+                        <p:par>
+                          <p:cTn id="88" fill="hold">
+                            <p:stCondLst>
+                              <p:cond delay="3360"/>
+                            </p:stCondLst>
+                            <p:childTnLst>
+                              <p:par>
+                                <p:cTn id="89" presetID="10" presetClass="entr" presetSubtype="0" fill="hold" grpId="0" nodeType="afterEffect">
+                                  <p:stCondLst>
+                                    <p:cond delay="0"/>
+                                  </p:stCondLst>
+                                  <p:childTnLst>
+                                    <p:set>
+                                      <p:cBhvr>
+                                        <p:cTn id="90" dur="1" fill="hold">
+                                          <p:stCondLst>
+                                            <p:cond delay="0"/>
+                                          </p:stCondLst>
+                                        </p:cTn>
+                                        <p:tgtEl>
+                                          <p:spTgt spid="34"/>
+                                        </p:tgtEl>
+                                        <p:attrNameLst>
+                                          <p:attrName>style.visibility</p:attrName>
+                                        </p:attrNameLst>
+                                      </p:cBhvr>
+                                      <p:to>
+                                        <p:strVal val="visible"/>
+                                      </p:to>
+                                    </p:set>
+                                    <p:animEffect transition="in" filter="fade">
+                                      <p:cBhvr>
+                                        <p:cTn id="91" dur="160"/>
+                                        <p:tgtEl>
+                                          <p:spTgt spid="34"/>
+                                        </p:tgtEl>
+                                      </p:cBhvr>
+                                    </p:animEffect>
+                                  </p:childTnLst>
+                                </p:cTn>
+                              </p:par>
+                            </p:childTnLst>
+                          </p:cTn>
+                        </p:par>
+                        <p:par>
+                          <p:cTn id="92" fill="hold">
+                            <p:stCondLst>
+                              <p:cond delay="3520"/>
+                            </p:stCondLst>
+                            <p:childTnLst>
+                              <p:par>
+                                <p:cTn id="93" presetID="10" presetClass="entr" presetSubtype="0" fill="hold" grpId="0" nodeType="afterEffect">
+                                  <p:stCondLst>
+                                    <p:cond delay="0"/>
+                                  </p:stCondLst>
+                                  <p:childTnLst>
+                                    <p:set>
+                                      <p:cBhvr>
+                                        <p:cTn id="94" dur="1" fill="hold">
+                                          <p:stCondLst>
+                                            <p:cond delay="0"/>
+                                          </p:stCondLst>
+                                        </p:cTn>
+                                        <p:tgtEl>
+                                          <p:spTgt spid="35"/>
+                                        </p:tgtEl>
+                                        <p:attrNameLst>
+                                          <p:attrName>style.visibility</p:attrName>
+                                        </p:attrNameLst>
+                                      </p:cBhvr>
+                                      <p:to>
+                                        <p:strVal val="visible"/>
+                                      </p:to>
+                                    </p:set>
+                                    <p:animEffect transition="in" filter="fade">
+                                      <p:cBhvr>
+                                        <p:cTn id="95" dur="160"/>
+                                        <p:tgtEl>
+                                          <p:spTgt spid="35"/>
+                                        </p:tgtEl>
+                                      </p:cBhvr>
+                                    </p:animEffect>
+                                  </p:childTnLst>
+                                </p:cTn>
+                              </p:par>
+                            </p:childTnLst>
+                          </p:cTn>
+                        </p:par>
+                        <p:par>
+                          <p:cTn id="96" fill="hold">
+                            <p:stCondLst>
+                              <p:cond delay="3680"/>
+                            </p:stCondLst>
+                            <p:childTnLst>
+                              <p:par>
+                                <p:cTn id="97" presetID="10" presetClass="entr" presetSubtype="0" fill="hold" grpId="0" nodeType="afterEffect">
+                                  <p:stCondLst>
+                                    <p:cond delay="0"/>
+                                  </p:stCondLst>
+                                  <p:childTnLst>
+                                    <p:set>
+                                      <p:cBhvr>
+                                        <p:cTn id="98" dur="1" fill="hold">
+                                          <p:stCondLst>
+                                            <p:cond delay="0"/>
+                                          </p:stCondLst>
+                                        </p:cTn>
+                                        <p:tgtEl>
+                                          <p:spTgt spid="36"/>
+                                        </p:tgtEl>
+                                        <p:attrNameLst>
+                                          <p:attrName>style.visibility</p:attrName>
+                                        </p:attrNameLst>
+                                      </p:cBhvr>
+                                      <p:to>
+                                        <p:strVal val="visible"/>
+                                      </p:to>
+                                    </p:set>
+                                    <p:animEffect transition="in" filter="fade">
+                                      <p:cBhvr>
+                                        <p:cTn id="99" dur="160"/>
+                                        <p:tgtEl>
+                                          <p:spTgt spid="36"/>
+                                        </p:tgtEl>
+                                      </p:cBhvr>
+                                    </p:animEffect>
+                                  </p:childTnLst>
+                                </p:cTn>
+                              </p:par>
+                            </p:childTnLst>
+                          </p:cTn>
+                        </p:par>
+                        <p:par>
+                          <p:cTn id="100" fill="hold">
+                            <p:stCondLst>
+                              <p:cond delay="3840"/>
+                            </p:stCondLst>
+                            <p:childTnLst>
+                              <p:par>
+                                <p:cTn id="101" presetID="10" presetClass="entr" presetSubtype="0" fill="hold" grpId="0" nodeType="afterEffect">
+                                  <p:stCondLst>
+                                    <p:cond delay="0"/>
+                                  </p:stCondLst>
+                                  <p:childTnLst>
+                                    <p:set>
+                                      <p:cBhvr>
+                                        <p:cTn id="102" dur="1" fill="hold">
+                                          <p:stCondLst>
+                                            <p:cond delay="0"/>
+                                          </p:stCondLst>
+                                        </p:cTn>
+                                        <p:tgtEl>
+                                          <p:spTgt spid="37"/>
+                                        </p:tgtEl>
+                                        <p:attrNameLst>
+                                          <p:attrName>style.visibility</p:attrName>
+                                        </p:attrNameLst>
+                                      </p:cBhvr>
+                                      <p:to>
+                                        <p:strVal val="visible"/>
+                                      </p:to>
+                                    </p:set>
+                                    <p:animEffect transition="in" filter="fade">
+                                      <p:cBhvr>
+                                        <p:cTn id="103" dur="160"/>
+                                        <p:tgtEl>
+                                          <p:spTgt spid="37"/>
+                                        </p:tgtEl>
+                                      </p:cBhvr>
+                                    </p:animEffect>
+                                  </p:childTnLst>
+                                </p:cTn>
+                              </p:par>
+                            </p:childTnLst>
+                          </p:cTn>
+                        </p:par>
+                        <p:par>
+                          <p:cTn id="104" fill="hold">
+                            <p:stCondLst>
+                              <p:cond delay="4000"/>
+                            </p:stCondLst>
+                            <p:childTnLst>
+                              <p:par>
+                                <p:cTn id="105" presetID="10" presetClass="entr" presetSubtype="0" fill="hold" grpId="0" nodeType="afterEffect">
+                                  <p:stCondLst>
+                                    <p:cond delay="0"/>
+                                  </p:stCondLst>
+                                  <p:childTnLst>
+                                    <p:set>
+                                      <p:cBhvr>
+                                        <p:cTn id="106" dur="1" fill="hold">
+                                          <p:stCondLst>
+                                            <p:cond delay="0"/>
+                                          </p:stCondLst>
+                                        </p:cTn>
+                                        <p:tgtEl>
+                                          <p:spTgt spid="38"/>
+                                        </p:tgtEl>
+                                        <p:attrNameLst>
+                                          <p:attrName>style.visibility</p:attrName>
+                                        </p:attrNameLst>
+                                      </p:cBhvr>
+                                      <p:to>
+                                        <p:strVal val="visible"/>
+                                      </p:to>
+                                    </p:set>
+                                    <p:animEffect transition="in" filter="fade">
+                                      <p:cBhvr>
+                                        <p:cTn id="107" dur="160"/>
+                                        <p:tgtEl>
+                                          <p:spTgt spid="38"/>
+                                        </p:tgtEl>
+                                      </p:cBhvr>
+                                    </p:animEffect>
+                                  </p:childTnLst>
+                                </p:cTn>
+                              </p:par>
+                            </p:childTnLst>
+                          </p:cTn>
+                        </p:par>
+                        <p:par>
+                          <p:cTn id="108" fill="hold">
+                            <p:stCondLst>
+                              <p:cond delay="4160"/>
+                            </p:stCondLst>
+                            <p:childTnLst>
+                              <p:par>
+                                <p:cTn id="109" presetID="10" presetClass="entr" presetSubtype="0" fill="hold" grpId="0" nodeType="afterEffect">
+                                  <p:stCondLst>
+                                    <p:cond delay="0"/>
+                                  </p:stCondLst>
+                                  <p:childTnLst>
+                                    <p:set>
+                                      <p:cBhvr>
+                                        <p:cTn id="110" dur="1" fill="hold">
+                                          <p:stCondLst>
+                                            <p:cond delay="0"/>
+                                          </p:stCondLst>
+                                        </p:cTn>
+                                        <p:tgtEl>
+                                          <p:spTgt spid="39"/>
+                                        </p:tgtEl>
+                                        <p:attrNameLst>
+                                          <p:attrName>style.visibility</p:attrName>
+                                        </p:attrNameLst>
+                                      </p:cBhvr>
+                                      <p:to>
+                                        <p:strVal val="visible"/>
+                                      </p:to>
+                                    </p:set>
+                                    <p:animEffect transition="in" filter="fade">
+                                      <p:cBhvr>
+                                        <p:cTn id="111" dur="160"/>
+                                        <p:tgtEl>
+                                          <p:spTgt spid="39"/>
+                                        </p:tgtEl>
+                                      </p:cBhvr>
+                                    </p:animEffect>
+                                  </p:childTnLst>
+                                </p:cTn>
+                              </p:par>
+                            </p:childTnLst>
+                          </p:cTn>
+                        </p:par>
+                        <p:par>
+                          <p:cTn id="112" fill="hold">
+                            <p:stCondLst>
+                              <p:cond delay="4320"/>
+                            </p:stCondLst>
+                            <p:childTnLst>
+                              <p:par>
+                                <p:cTn id="113" presetID="10" presetClass="entr" presetSubtype="0" fill="hold" grpId="0" nodeType="afterEffect">
+                                  <p:stCondLst>
+                                    <p:cond delay="0"/>
+                                  </p:stCondLst>
+                                  <p:childTnLst>
+                                    <p:set>
+                                      <p:cBhvr>
+                                        <p:cTn id="114" dur="1" fill="hold">
+                                          <p:stCondLst>
+                                            <p:cond delay="0"/>
+                                          </p:stCondLst>
+                                        </p:cTn>
+                                        <p:tgtEl>
+                                          <p:spTgt spid="40"/>
+                                        </p:tgtEl>
+                                        <p:attrNameLst>
+                                          <p:attrName>style.visibility</p:attrName>
+                                        </p:attrNameLst>
+                                      </p:cBhvr>
+                                      <p:to>
+                                        <p:strVal val="visible"/>
+                                      </p:to>
+                                    </p:set>
+                                    <p:animEffect transition="in" filter="fade">
+                                      <p:cBhvr>
+                                        <p:cTn id="115" dur="160"/>
+                                        <p:tgtEl>
+                                          <p:spTgt spid="40"/>
+                                        </p:tgtEl>
+                                      </p:cBhvr>
+                                    </p:animEffect>
+                                  </p:childTnLst>
+                                </p:cTn>
+                              </p:par>
+                            </p:childTnLst>
+                          </p:cTn>
+                        </p:par>
+                        <p:par>
+                          <p:cTn id="116" fill="hold">
+                            <p:stCondLst>
+                              <p:cond delay="4480"/>
+                            </p:stCondLst>
+                            <p:childTnLst>
+                              <p:par>
+                                <p:cTn id="117" presetID="10" presetClass="entr" presetSubtype="0" fill="hold" grpId="0" nodeType="afterEffect">
+                                  <p:stCondLst>
+                                    <p:cond delay="0"/>
+                                  </p:stCondLst>
+                                  <p:childTnLst>
+                                    <p:set>
+                                      <p:cBhvr>
+                                        <p:cTn id="118" dur="1" fill="hold">
+                                          <p:stCondLst>
+                                            <p:cond delay="0"/>
+                                          </p:stCondLst>
+                                        </p:cTn>
+                                        <p:tgtEl>
+                                          <p:spTgt spid="41"/>
+                                        </p:tgtEl>
+                                        <p:attrNameLst>
+                                          <p:attrName>style.visibility</p:attrName>
+                                        </p:attrNameLst>
+                                      </p:cBhvr>
+                                      <p:to>
+                                        <p:strVal val="visible"/>
+                                      </p:to>
+                                    </p:set>
+                                    <p:animEffect transition="in" filter="fade">
+                                      <p:cBhvr>
+                                        <p:cTn id="119" dur="160"/>
+                                        <p:tgtEl>
+                                          <p:spTgt spid="41"/>
+                                        </p:tgtEl>
+                                      </p:cBhvr>
+                                    </p:animEffect>
+                                  </p:childTnLst>
+                                </p:cTn>
+                              </p:par>
+                            </p:childTnLst>
+                          </p:cTn>
+                        </p:par>
+                        <p:par>
+                          <p:cTn id="120" fill="hold">
+                            <p:stCondLst>
+                              <p:cond delay="4640"/>
+                            </p:stCondLst>
+                            <p:childTnLst>
+                              <p:par>
+                                <p:cTn id="121" presetID="10" presetClass="entr" presetSubtype="0" fill="hold" grpId="0" nodeType="afterEffect">
+                                  <p:stCondLst>
+                                    <p:cond delay="0"/>
+                                  </p:stCondLst>
+                                  <p:childTnLst>
+                                    <p:set>
+                                      <p:cBhvr>
+                                        <p:cTn id="122" dur="1" fill="hold">
+                                          <p:stCondLst>
+                                            <p:cond delay="0"/>
+                                          </p:stCondLst>
+                                        </p:cTn>
+                                        <p:tgtEl>
+                                          <p:spTgt spid="42"/>
+                                        </p:tgtEl>
+                                        <p:attrNameLst>
+                                          <p:attrName>style.visibility</p:attrName>
+                                        </p:attrNameLst>
+                                      </p:cBhvr>
+                                      <p:to>
+                                        <p:strVal val="visible"/>
+                                      </p:to>
+                                    </p:set>
+                                    <p:animEffect transition="in" filter="fade">
+                                      <p:cBhvr>
+                                        <p:cTn id="123" dur="160"/>
+                                        <p:tgtEl>
+                                          <p:spTgt spid="42"/>
+                                        </p:tgtEl>
+                                      </p:cBhvr>
+                                    </p:animEffect>
+                                  </p:childTnLst>
+                                </p:cTn>
+                              </p:par>
+                            </p:childTnLst>
+                          </p:cTn>
+                        </p:par>
+                        <p:par>
+                          <p:cTn id="124" fill="hold">
+                            <p:stCondLst>
+                              <p:cond delay="4800"/>
+                            </p:stCondLst>
+                            <p:childTnLst>
+                              <p:par>
+                                <p:cTn id="125" presetID="10" presetClass="entr" presetSubtype="0" fill="hold" grpId="0" nodeType="afterEffect">
+                                  <p:stCondLst>
+                                    <p:cond delay="0"/>
+                                  </p:stCondLst>
+                                  <p:childTnLst>
+                                    <p:set>
+                                      <p:cBhvr>
+                                        <p:cTn id="126" dur="1" fill="hold">
+                                          <p:stCondLst>
+                                            <p:cond delay="0"/>
+                                          </p:stCondLst>
+                                        </p:cTn>
+                                        <p:tgtEl>
+                                          <p:spTgt spid="43"/>
+                                        </p:tgtEl>
+                                        <p:attrNameLst>
+                                          <p:attrName>style.visibility</p:attrName>
+                                        </p:attrNameLst>
+                                      </p:cBhvr>
+                                      <p:to>
+                                        <p:strVal val="visible"/>
+                                      </p:to>
+                                    </p:set>
+                                    <p:animEffect transition="in" filter="fade">
+                                      <p:cBhvr>
+                                        <p:cTn id="127" dur="160"/>
+                                        <p:tgtEl>
+                                          <p:spTgt spid="43"/>
+                                        </p:tgtEl>
+                                      </p:cBhvr>
+                                    </p:animEffect>
+                                  </p:childTnLst>
+                                </p:cTn>
+                              </p:par>
+                            </p:childTnLst>
+                          </p:cTn>
+                        </p:par>
+                        <p:par>
+                          <p:cTn id="128" fill="hold">
+                            <p:stCondLst>
+                              <p:cond delay="4960"/>
+                            </p:stCondLst>
+                            <p:childTnLst>
+                              <p:par>
+                                <p:cTn id="129" presetID="10" presetClass="entr" presetSubtype="0" fill="hold" grpId="0" nodeType="afterEffect">
+                                  <p:stCondLst>
+                                    <p:cond delay="0"/>
+                                  </p:stCondLst>
+                                  <p:childTnLst>
+                                    <p:set>
+                                      <p:cBhvr>
+                                        <p:cTn id="130" dur="1" fill="hold">
+                                          <p:stCondLst>
+                                            <p:cond delay="0"/>
+                                          </p:stCondLst>
+                                        </p:cTn>
+                                        <p:tgtEl>
+                                          <p:spTgt spid="44"/>
+                                        </p:tgtEl>
+                                        <p:attrNameLst>
+                                          <p:attrName>style.visibility</p:attrName>
+                                        </p:attrNameLst>
+                                      </p:cBhvr>
+                                      <p:to>
+                                        <p:strVal val="visible"/>
+                                      </p:to>
+                                    </p:set>
+                                    <p:animEffect transition="in" filter="fade">
+                                      <p:cBhvr>
+                                        <p:cTn id="131" dur="160"/>
+                                        <p:tgtEl>
+                                          <p:spTgt spid="44"/>
                                         </p:tgtEl>
                                       </p:cBhvr>
                                     </p:animEffect>
@@ -20148,21 +21806,37 @@
       </p:par>
     </p:tnLst>
     <p:bldLst>
-      <p:bldP spid="7" grpId="0"/>
       <p:bldP spid="13" grpId="0" animBg="1"/>
       <p:bldP spid="14" grpId="0"/>
-      <p:bldP spid="15" grpId="0" animBg="1"/>
-      <p:bldP spid="16" grpId="0"/>
+      <p:bldP spid="15" grpId="0"/>
       <p:bldP spid="17" grpId="0"/>
-      <p:bldP spid="18" grpId="0"/>
+      <p:bldP spid="18" grpId="0" animBg="1"/>
       <p:bldP spid="19" grpId="0"/>
       <p:bldP spid="20" grpId="0"/>
-      <p:bldP spid="21" grpId="0"/>
-      <p:bldP spid="22" grpId="0"/>
+      <p:bldP spid="21" grpId="0" animBg="1"/>
+      <p:bldP spid="22" grpId="0" animBg="1"/>
       <p:bldP spid="23" grpId="0"/>
       <p:bldP spid="24" grpId="0"/>
-      <p:bldP spid="25" grpId="0"/>
-      <p:bldP spid="26" grpId="0"/>
+      <p:bldP spid="25" grpId="0" animBg="1"/>
+      <p:bldP spid="26" grpId="0" animBg="1"/>
+      <p:bldP spid="27" grpId="0"/>
+      <p:bldP spid="28" grpId="0"/>
+      <p:bldP spid="29" grpId="0" animBg="1"/>
+      <p:bldP spid="30" grpId="0" animBg="1"/>
+      <p:bldP spid="31" grpId="0"/>
+      <p:bldP spid="32" grpId="0"/>
+      <p:bldP spid="33" grpId="0" animBg="1"/>
+      <p:bldP spid="34" grpId="0" animBg="1"/>
+      <p:bldP spid="35" grpId="0"/>
+      <p:bldP spid="36" grpId="0"/>
+      <p:bldP spid="37" grpId="0" animBg="1"/>
+      <p:bldP spid="38" grpId="0" animBg="1"/>
+      <p:bldP spid="39" grpId="0"/>
+      <p:bldP spid="40" grpId="0"/>
+      <p:bldP spid="41" grpId="0" animBg="1"/>
+      <p:bldP spid="42" grpId="0"/>
+      <p:bldP spid="43" grpId="0"/>
+      <p:bldP spid="44" grpId="0"/>
     </p:bldLst>
   </p:timing>
 </p:sld>
@@ -20190,7 +21864,7 @@
           <p:cNvPr id="2" name="bg">
             <a:extLst>
               <a:ext uri="{FF2B5EF4-FFF2-40B4-BE49-F238E27FC236}">
-                <a16:creationId xmlns:a16="http://schemas.microsoft.com/office/drawing/2014/main" id="{1DE51EF0-9075-25D7-BB53-36AC45DADE2E}"/>
+                <a16:creationId xmlns:a16="http://schemas.microsoft.com/office/drawing/2014/main" id="{9BAA419B-0784-AE71-D428-3C08AFA1D49B}"/>
               </a:ext>
             </a:extLst>
           </p:cNvPr>
@@ -20251,7 +21925,7 @@
           <p:cNvPr id="3" name="rail">
             <a:extLst>
               <a:ext uri="{FF2B5EF4-FFF2-40B4-BE49-F238E27FC236}">
-                <a16:creationId xmlns:a16="http://schemas.microsoft.com/office/drawing/2014/main" id="{C7C1CAE3-949D-D39D-7AF7-2C2B0C88B94F}"/>
+                <a16:creationId xmlns:a16="http://schemas.microsoft.com/office/drawing/2014/main" id="{6E9B38BD-84B6-CE50-9185-6753F81C8165}"/>
               </a:ext>
             </a:extLst>
           </p:cNvPr>
@@ -20312,7 +21986,7 @@
           <p:cNvPr id="4" name="top-rule">
             <a:extLst>
               <a:ext uri="{FF2B5EF4-FFF2-40B4-BE49-F238E27FC236}">
-                <a16:creationId xmlns:a16="http://schemas.microsoft.com/office/drawing/2014/main" id="{D25DBFBF-E55D-2567-1397-70A360E7AB99}"/>
+                <a16:creationId xmlns:a16="http://schemas.microsoft.com/office/drawing/2014/main" id="{90589582-D22B-56C9-BBC8-977ECAB4AC99}"/>
               </a:ext>
             </a:extLst>
           </p:cNvPr>
@@ -20353,7 +22027,7 @@
           <p:cNvPr id="5" name="section">
             <a:extLst>
               <a:ext uri="{FF2B5EF4-FFF2-40B4-BE49-F238E27FC236}">
-                <a16:creationId xmlns:a16="http://schemas.microsoft.com/office/drawing/2014/main" id="{DEE187F0-24FE-45CA-CA23-BA52826C5504}"/>
+                <a16:creationId xmlns:a16="http://schemas.microsoft.com/office/drawing/2014/main" id="{3AE9DC83-88C6-FDEB-73BB-B9FA18A9A8AF}"/>
               </a:ext>
             </a:extLst>
           </p:cNvPr>
@@ -20399,7 +22073,7 @@
           <p:cNvPr id="6" name="num">
             <a:extLst>
               <a:ext uri="{FF2B5EF4-FFF2-40B4-BE49-F238E27FC236}">
-                <a16:creationId xmlns:a16="http://schemas.microsoft.com/office/drawing/2014/main" id="{8272A5EE-C702-EA65-ACF4-E961FCB236DB}"/>
+                <a16:creationId xmlns:a16="http://schemas.microsoft.com/office/drawing/2014/main" id="{8E0F9838-3492-523A-3D5E-DF372CDAF852}"/>
               </a:ext>
             </a:extLst>
           </p:cNvPr>
@@ -20445,7 +22119,7 @@
           <p:cNvPr id="7" name="footer">
             <a:extLst>
               <a:ext uri="{FF2B5EF4-FFF2-40B4-BE49-F238E27FC236}">
-                <a16:creationId xmlns:a16="http://schemas.microsoft.com/office/drawing/2014/main" id="{AA318D60-3EE6-11F0-04D7-FBA2F1D35E94}"/>
+                <a16:creationId xmlns:a16="http://schemas.microsoft.com/office/drawing/2014/main" id="{7CD788F2-A439-1B85-6FFF-4258391E582C}"/>
               </a:ext>
             </a:extLst>
           </p:cNvPr>
@@ -20491,7 +22165,7 @@
           <p:cNvPr id="8" name="student">
             <a:extLst>
               <a:ext uri="{FF2B5EF4-FFF2-40B4-BE49-F238E27FC236}">
-                <a16:creationId xmlns:a16="http://schemas.microsoft.com/office/drawing/2014/main" id="{73F6C424-1051-0757-4AD2-F579FBFE6238}"/>
+                <a16:creationId xmlns:a16="http://schemas.microsoft.com/office/drawing/2014/main" id="{9C359A40-AFDE-BC65-7821-9781A8692E8B}"/>
               </a:ext>
             </a:extLst>
           </p:cNvPr>
@@ -20537,7 +22211,7 @@
           <p:cNvPr id="10" name="图片 9">
             <a:extLst>
               <a:ext uri="{FF2B5EF4-FFF2-40B4-BE49-F238E27FC236}">
-                <a16:creationId xmlns:a16="http://schemas.microsoft.com/office/drawing/2014/main" id="{5D2EB7CA-EDA9-3544-8963-A74FCE75EFD1}"/>
+                <a16:creationId xmlns:a16="http://schemas.microsoft.com/office/drawing/2014/main" id="{2F92CB1A-BC9D-BD90-EACE-D187A27145EB}"/>
               </a:ext>
             </a:extLst>
           </p:cNvPr>
@@ -20573,7 +22247,7 @@
           <p:cNvPr id="11" name="title">
             <a:extLst>
               <a:ext uri="{FF2B5EF4-FFF2-40B4-BE49-F238E27FC236}">
-                <a16:creationId xmlns:a16="http://schemas.microsoft.com/office/drawing/2014/main" id="{FE0EEC24-E4AD-B47F-CC46-1AFFA040D6AC}"/>
+                <a16:creationId xmlns:a16="http://schemas.microsoft.com/office/drawing/2014/main" id="{0CC1BCD5-8BD8-5D98-A4B5-973C875D061F}"/>
               </a:ext>
             </a:extLst>
           </p:cNvPr>
@@ -20619,7 +22293,7 @@
           <p:cNvPr id="12" name="subtitle">
             <a:extLst>
               <a:ext uri="{FF2B5EF4-FFF2-40B4-BE49-F238E27FC236}">
-                <a16:creationId xmlns:a16="http://schemas.microsoft.com/office/drawing/2014/main" id="{CF74E5DA-880A-3B32-CE33-E446DBCB0A89}"/>
+                <a16:creationId xmlns:a16="http://schemas.microsoft.com/office/drawing/2014/main" id="{8FAD59E7-649C-F5CC-A66B-734348EA347A}"/>
               </a:ext>
             </a:extLst>
           </p:cNvPr>
@@ -20665,7 +22339,7 @@
           <p:cNvPr id="13" name="pattern">
             <a:extLst>
               <a:ext uri="{FF2B5EF4-FFF2-40B4-BE49-F238E27FC236}">
-                <a16:creationId xmlns:a16="http://schemas.microsoft.com/office/drawing/2014/main" id="{F6FD19FC-4FF2-05E2-1BCB-FCE7C672569C}"/>
+                <a16:creationId xmlns:a16="http://schemas.microsoft.com/office/drawing/2014/main" id="{6BA30977-12B2-607C-8D7B-2D2AEEDA88EB}"/>
               </a:ext>
             </a:extLst>
           </p:cNvPr>
@@ -20719,7 +22393,7 @@
           <p:cNvPr id="14" name="pattern-k">
             <a:extLst>
               <a:ext uri="{FF2B5EF4-FFF2-40B4-BE49-F238E27FC236}">
-                <a16:creationId xmlns:a16="http://schemas.microsoft.com/office/drawing/2014/main" id="{29851EF3-DFB7-4B3F-2F5C-5E2CADFE1FE5}"/>
+                <a16:creationId xmlns:a16="http://schemas.microsoft.com/office/drawing/2014/main" id="{46D400E7-11BD-3AA1-8807-E9CF6F244314}"/>
               </a:ext>
             </a:extLst>
           </p:cNvPr>
@@ -20765,7 +22439,7 @@
           <p:cNvPr id="15" name="pattern-t">
             <a:extLst>
               <a:ext uri="{FF2B5EF4-FFF2-40B4-BE49-F238E27FC236}">
-                <a16:creationId xmlns:a16="http://schemas.microsoft.com/office/drawing/2014/main" id="{1A448410-E486-89FE-0599-20CC1A61D631}"/>
+                <a16:creationId xmlns:a16="http://schemas.microsoft.com/office/drawing/2014/main" id="{36429375-82AE-273D-8357-ADA5000853FB}"/>
               </a:ext>
             </a:extLst>
           </p:cNvPr>
@@ -20813,7 +22487,7 @@
           <p:cNvPr id="16" name="pattern-line">
             <a:extLst>
               <a:ext uri="{FF2B5EF4-FFF2-40B4-BE49-F238E27FC236}">
-                <a16:creationId xmlns:a16="http://schemas.microsoft.com/office/drawing/2014/main" id="{8F68554F-92EA-3656-64BD-FD16AF46E23C}"/>
+                <a16:creationId xmlns:a16="http://schemas.microsoft.com/office/drawing/2014/main" id="{6EB612DE-4557-7891-E901-EBDD70C0D2AE}"/>
               </a:ext>
             </a:extLst>
           </p:cNvPr>
@@ -20854,7 +22528,7 @@
           <p:cNvPr id="17" name="pattern-s">
             <a:extLst>
               <a:ext uri="{FF2B5EF4-FFF2-40B4-BE49-F238E27FC236}">
-                <a16:creationId xmlns:a16="http://schemas.microsoft.com/office/drawing/2014/main" id="{88A561F3-EDD1-10BF-9A22-1B3286F967FE}"/>
+                <a16:creationId xmlns:a16="http://schemas.microsoft.com/office/drawing/2014/main" id="{460C23DC-9437-D11A-6D60-8561917E4950}"/>
               </a:ext>
             </a:extLst>
           </p:cNvPr>
@@ -20900,7 +22574,7 @@
           <p:cNvPr id="18" name="qa-0">
             <a:extLst>
               <a:ext uri="{FF2B5EF4-FFF2-40B4-BE49-F238E27FC236}">
-                <a16:creationId xmlns:a16="http://schemas.microsoft.com/office/drawing/2014/main" id="{61ADA46E-1708-09E5-7F1E-A94BBA0DB73C}"/>
+                <a16:creationId xmlns:a16="http://schemas.microsoft.com/office/drawing/2014/main" id="{4F2615A2-F852-E2BC-0DD8-C112FC7D9514}"/>
               </a:ext>
             </a:extLst>
           </p:cNvPr>
@@ -20954,7 +22628,7 @@
           <p:cNvPr id="19" name="qa-band-0">
             <a:extLst>
               <a:ext uri="{FF2B5EF4-FFF2-40B4-BE49-F238E27FC236}">
-                <a16:creationId xmlns:a16="http://schemas.microsoft.com/office/drawing/2014/main" id="{91294A28-8DB8-1319-E995-20ECB7A8A3E6}"/>
+                <a16:creationId xmlns:a16="http://schemas.microsoft.com/office/drawing/2014/main" id="{8C8A9E6C-91CB-1B64-F148-17CF5AE1C06A}"/>
               </a:ext>
             </a:extLst>
           </p:cNvPr>
@@ -21008,7 +22682,7 @@
           <p:cNvPr id="20" name="q-0">
             <a:extLst>
               <a:ext uri="{FF2B5EF4-FFF2-40B4-BE49-F238E27FC236}">
-                <a16:creationId xmlns:a16="http://schemas.microsoft.com/office/drawing/2014/main" id="{C65DA2D8-0B50-2746-33BC-923EE1ADD103}"/>
+                <a16:creationId xmlns:a16="http://schemas.microsoft.com/office/drawing/2014/main" id="{E0E170C2-0467-EC66-A92F-D5470D4C8862}"/>
               </a:ext>
             </a:extLst>
           </p:cNvPr>
@@ -21054,7 +22728,7 @@
           <p:cNvPr id="21" name="a-0">
             <a:extLst>
               <a:ext uri="{FF2B5EF4-FFF2-40B4-BE49-F238E27FC236}">
-                <a16:creationId xmlns:a16="http://schemas.microsoft.com/office/drawing/2014/main" id="{45B07676-7F98-A233-4F88-76F2912C1AD8}"/>
+                <a16:creationId xmlns:a16="http://schemas.microsoft.com/office/drawing/2014/main" id="{C75C617F-8B66-FBBB-A7F2-66810FFAD2D3}"/>
               </a:ext>
             </a:extLst>
           </p:cNvPr>
@@ -21100,7 +22774,7 @@
           <p:cNvPr id="22" name="ptr-0">
             <a:extLst>
               <a:ext uri="{FF2B5EF4-FFF2-40B4-BE49-F238E27FC236}">
-                <a16:creationId xmlns:a16="http://schemas.microsoft.com/office/drawing/2014/main" id="{A7058FDA-7839-8ADA-97E3-F09DDE878A0F}"/>
+                <a16:creationId xmlns:a16="http://schemas.microsoft.com/office/drawing/2014/main" id="{3A979B73-CE1E-2EC3-2AA4-F251423C29CA}"/>
               </a:ext>
             </a:extLst>
           </p:cNvPr>
@@ -21146,7 +22820,7 @@
           <p:cNvPr id="23" name="qa-1">
             <a:extLst>
               <a:ext uri="{FF2B5EF4-FFF2-40B4-BE49-F238E27FC236}">
-                <a16:creationId xmlns:a16="http://schemas.microsoft.com/office/drawing/2014/main" id="{F1D1B336-6FCA-012B-3E91-7E066E9529D0}"/>
+                <a16:creationId xmlns:a16="http://schemas.microsoft.com/office/drawing/2014/main" id="{43027D4F-5DAD-D81E-685E-7E592E0D0591}"/>
               </a:ext>
             </a:extLst>
           </p:cNvPr>
@@ -21200,7 +22874,7 @@
           <p:cNvPr id="24" name="qa-band-1">
             <a:extLst>
               <a:ext uri="{FF2B5EF4-FFF2-40B4-BE49-F238E27FC236}">
-                <a16:creationId xmlns:a16="http://schemas.microsoft.com/office/drawing/2014/main" id="{501D413D-8FCA-D3A4-2E70-BC7D64F1758A}"/>
+                <a16:creationId xmlns:a16="http://schemas.microsoft.com/office/drawing/2014/main" id="{40E00DDD-DB66-BDC9-D6F0-E801E80B1427}"/>
               </a:ext>
             </a:extLst>
           </p:cNvPr>
@@ -21254,7 +22928,7 @@
           <p:cNvPr id="25" name="q-1">
             <a:extLst>
               <a:ext uri="{FF2B5EF4-FFF2-40B4-BE49-F238E27FC236}">
-                <a16:creationId xmlns:a16="http://schemas.microsoft.com/office/drawing/2014/main" id="{E15751E1-0D63-611F-AB5D-99492E00802D}"/>
+                <a16:creationId xmlns:a16="http://schemas.microsoft.com/office/drawing/2014/main" id="{FD2C0C31-247E-0615-5845-3D9201E9E44F}"/>
               </a:ext>
             </a:extLst>
           </p:cNvPr>
@@ -21300,7 +22974,7 @@
           <p:cNvPr id="26" name="a-1">
             <a:extLst>
               <a:ext uri="{FF2B5EF4-FFF2-40B4-BE49-F238E27FC236}">
-                <a16:creationId xmlns:a16="http://schemas.microsoft.com/office/drawing/2014/main" id="{65C8B628-B4C5-83F2-24AE-D9D695EB8B58}"/>
+                <a16:creationId xmlns:a16="http://schemas.microsoft.com/office/drawing/2014/main" id="{5765D75E-4D6E-216D-89C6-BD8BE80EF772}"/>
               </a:ext>
             </a:extLst>
           </p:cNvPr>
@@ -21346,7 +23020,7 @@
           <p:cNvPr id="27" name="ptr-1">
             <a:extLst>
               <a:ext uri="{FF2B5EF4-FFF2-40B4-BE49-F238E27FC236}">
-                <a16:creationId xmlns:a16="http://schemas.microsoft.com/office/drawing/2014/main" id="{98338A5E-3D5E-EB16-828A-77D28F8CE41B}"/>
+                <a16:creationId xmlns:a16="http://schemas.microsoft.com/office/drawing/2014/main" id="{3B077429-EA59-E2BC-3564-3D9C8B591868}"/>
               </a:ext>
             </a:extLst>
           </p:cNvPr>
@@ -21392,7 +23066,7 @@
           <p:cNvPr id="28" name="qa-2">
             <a:extLst>
               <a:ext uri="{FF2B5EF4-FFF2-40B4-BE49-F238E27FC236}">
-                <a16:creationId xmlns:a16="http://schemas.microsoft.com/office/drawing/2014/main" id="{29F4B5C0-CFB1-F93B-23B9-F2F20F7880DC}"/>
+                <a16:creationId xmlns:a16="http://schemas.microsoft.com/office/drawing/2014/main" id="{9980D969-568E-AA25-F0E1-5B1F821F2513}"/>
               </a:ext>
             </a:extLst>
           </p:cNvPr>
@@ -21446,7 +23120,7 @@
           <p:cNvPr id="29" name="qa-band-2">
             <a:extLst>
               <a:ext uri="{FF2B5EF4-FFF2-40B4-BE49-F238E27FC236}">
-                <a16:creationId xmlns:a16="http://schemas.microsoft.com/office/drawing/2014/main" id="{BA1421E4-0D1C-03A5-0647-F2E88BA1EF54}"/>
+                <a16:creationId xmlns:a16="http://schemas.microsoft.com/office/drawing/2014/main" id="{076DB013-7C03-375E-ADC0-4F32D9C7CB37}"/>
               </a:ext>
             </a:extLst>
           </p:cNvPr>
@@ -21500,7 +23174,7 @@
           <p:cNvPr id="30" name="q-2">
             <a:extLst>
               <a:ext uri="{FF2B5EF4-FFF2-40B4-BE49-F238E27FC236}">
-                <a16:creationId xmlns:a16="http://schemas.microsoft.com/office/drawing/2014/main" id="{AE239DDB-E56E-BA72-6209-D98EC5D78014}"/>
+                <a16:creationId xmlns:a16="http://schemas.microsoft.com/office/drawing/2014/main" id="{3F8094C4-3EB2-F5E9-92E5-9A48092A9DB2}"/>
               </a:ext>
             </a:extLst>
           </p:cNvPr>
@@ -21546,7 +23220,7 @@
           <p:cNvPr id="31" name="a-2">
             <a:extLst>
               <a:ext uri="{FF2B5EF4-FFF2-40B4-BE49-F238E27FC236}">
-                <a16:creationId xmlns:a16="http://schemas.microsoft.com/office/drawing/2014/main" id="{1F47B606-8CC7-2092-AB79-D0FA85294777}"/>
+                <a16:creationId xmlns:a16="http://schemas.microsoft.com/office/drawing/2014/main" id="{4E5AE547-AC1B-914E-2903-FBB48864B5B9}"/>
               </a:ext>
             </a:extLst>
           </p:cNvPr>
@@ -21592,7 +23266,7 @@
           <p:cNvPr id="32" name="ptr-2">
             <a:extLst>
               <a:ext uri="{FF2B5EF4-FFF2-40B4-BE49-F238E27FC236}">
-                <a16:creationId xmlns:a16="http://schemas.microsoft.com/office/drawing/2014/main" id="{69EEBC64-DBA6-538D-06E1-B446FC762E66}"/>
+                <a16:creationId xmlns:a16="http://schemas.microsoft.com/office/drawing/2014/main" id="{B065D332-5E71-A000-1A31-478B53FE663F}"/>
               </a:ext>
             </a:extLst>
           </p:cNvPr>
@@ -21638,7 +23312,7 @@
           <p:cNvPr id="33" name="qa-3">
             <a:extLst>
               <a:ext uri="{FF2B5EF4-FFF2-40B4-BE49-F238E27FC236}">
-                <a16:creationId xmlns:a16="http://schemas.microsoft.com/office/drawing/2014/main" id="{21F4D7E6-D454-2FCF-97FA-A979702F7AFC}"/>
+                <a16:creationId xmlns:a16="http://schemas.microsoft.com/office/drawing/2014/main" id="{750E0F05-32BD-E861-BB8D-A84B4A0A6660}"/>
               </a:ext>
             </a:extLst>
           </p:cNvPr>
@@ -21692,7 +23366,7 @@
           <p:cNvPr id="34" name="qa-band-3">
             <a:extLst>
               <a:ext uri="{FF2B5EF4-FFF2-40B4-BE49-F238E27FC236}">
-                <a16:creationId xmlns:a16="http://schemas.microsoft.com/office/drawing/2014/main" id="{9D9F9A1E-66D7-34CB-284D-39CB47B6208A}"/>
+                <a16:creationId xmlns:a16="http://schemas.microsoft.com/office/drawing/2014/main" id="{372E8EA7-4DEF-30A8-5E90-3567C69CA545}"/>
               </a:ext>
             </a:extLst>
           </p:cNvPr>
@@ -21746,7 +23420,7 @@
           <p:cNvPr id="35" name="q-3">
             <a:extLst>
               <a:ext uri="{FF2B5EF4-FFF2-40B4-BE49-F238E27FC236}">
-                <a16:creationId xmlns:a16="http://schemas.microsoft.com/office/drawing/2014/main" id="{F76CF5B5-13AD-47CA-3A95-E4772D4AB3D8}"/>
+                <a16:creationId xmlns:a16="http://schemas.microsoft.com/office/drawing/2014/main" id="{55946B24-CA97-A9CE-DC87-DC4F8E318CD8}"/>
               </a:ext>
             </a:extLst>
           </p:cNvPr>
@@ -21792,7 +23466,7 @@
           <p:cNvPr id="36" name="a-3">
             <a:extLst>
               <a:ext uri="{FF2B5EF4-FFF2-40B4-BE49-F238E27FC236}">
-                <a16:creationId xmlns:a16="http://schemas.microsoft.com/office/drawing/2014/main" id="{6207F7BF-9EE3-A268-7D2D-7D85A4022293}"/>
+                <a16:creationId xmlns:a16="http://schemas.microsoft.com/office/drawing/2014/main" id="{85E85E14-509C-5288-C458-FBE73FCFC649}"/>
               </a:ext>
             </a:extLst>
           </p:cNvPr>
@@ -21838,7 +23512,7 @@
           <p:cNvPr id="37" name="ptr-3">
             <a:extLst>
               <a:ext uri="{FF2B5EF4-FFF2-40B4-BE49-F238E27FC236}">
-                <a16:creationId xmlns:a16="http://schemas.microsoft.com/office/drawing/2014/main" id="{0E85A846-84FF-8D2A-C562-3CFE8975B27F}"/>
+                <a16:creationId xmlns:a16="http://schemas.microsoft.com/office/drawing/2014/main" id="{0E1AD367-858D-CEE3-CD95-BA06B3E70D19}"/>
               </a:ext>
             </a:extLst>
           </p:cNvPr>
@@ -21884,7 +23558,7 @@
           <p:cNvPr id="38" name="qa-4">
             <a:extLst>
               <a:ext uri="{FF2B5EF4-FFF2-40B4-BE49-F238E27FC236}">
-                <a16:creationId xmlns:a16="http://schemas.microsoft.com/office/drawing/2014/main" id="{EC8B54AA-EA9B-0FEB-B010-A258BD7D56B1}"/>
+                <a16:creationId xmlns:a16="http://schemas.microsoft.com/office/drawing/2014/main" id="{A407F175-852E-23B7-F9A8-AD3DBB789308}"/>
               </a:ext>
             </a:extLst>
           </p:cNvPr>
@@ -21938,7 +23612,7 @@
           <p:cNvPr id="39" name="qa-band-4">
             <a:extLst>
               <a:ext uri="{FF2B5EF4-FFF2-40B4-BE49-F238E27FC236}">
-                <a16:creationId xmlns:a16="http://schemas.microsoft.com/office/drawing/2014/main" id="{8F2EC7C6-B01E-6EAB-4437-1DB91ED49CC9}"/>
+                <a16:creationId xmlns:a16="http://schemas.microsoft.com/office/drawing/2014/main" id="{2562EA4C-1E58-18B8-6F4C-C21EE56CEC0F}"/>
               </a:ext>
             </a:extLst>
           </p:cNvPr>
@@ -21992,7 +23666,7 @@
           <p:cNvPr id="40" name="q-4">
             <a:extLst>
               <a:ext uri="{FF2B5EF4-FFF2-40B4-BE49-F238E27FC236}">
-                <a16:creationId xmlns:a16="http://schemas.microsoft.com/office/drawing/2014/main" id="{648F771D-972A-88C2-9D70-A1B2CA839052}"/>
+                <a16:creationId xmlns:a16="http://schemas.microsoft.com/office/drawing/2014/main" id="{3B68DA7E-D78E-A474-EE87-1825CA07FE03}"/>
               </a:ext>
             </a:extLst>
           </p:cNvPr>
@@ -22038,7 +23712,7 @@
           <p:cNvPr id="41" name="a-4">
             <a:extLst>
               <a:ext uri="{FF2B5EF4-FFF2-40B4-BE49-F238E27FC236}">
-                <a16:creationId xmlns:a16="http://schemas.microsoft.com/office/drawing/2014/main" id="{31E485BA-9049-0152-0570-FF271FDB8F27}"/>
+                <a16:creationId xmlns:a16="http://schemas.microsoft.com/office/drawing/2014/main" id="{7ED0D6C1-97BC-30E8-F409-A6D7C684ED09}"/>
               </a:ext>
             </a:extLst>
           </p:cNvPr>
@@ -22084,7 +23758,7 @@
           <p:cNvPr id="42" name="ptr-4">
             <a:extLst>
               <a:ext uri="{FF2B5EF4-FFF2-40B4-BE49-F238E27FC236}">
-                <a16:creationId xmlns:a16="http://schemas.microsoft.com/office/drawing/2014/main" id="{A93CE018-8E93-5765-8245-801D06D1A9D6}"/>
+                <a16:creationId xmlns:a16="http://schemas.microsoft.com/office/drawing/2014/main" id="{8D6F2A9A-9057-6144-2949-17F75BB6AF46}"/>
               </a:ext>
             </a:extLst>
           </p:cNvPr>
@@ -22130,7 +23804,7 @@
           <p:cNvPr id="43" name="qa-rule">
             <a:extLst>
               <a:ext uri="{FF2B5EF4-FFF2-40B4-BE49-F238E27FC236}">
-                <a16:creationId xmlns:a16="http://schemas.microsoft.com/office/drawing/2014/main" id="{4F659718-1815-60AF-A74E-7AF8DAD18C66}"/>
+                <a16:creationId xmlns:a16="http://schemas.microsoft.com/office/drawing/2014/main" id="{E37AC809-DC51-2C6D-C645-E699CA8EFA96}"/>
               </a:ext>
             </a:extLst>
           </p:cNvPr>
@@ -22184,7 +23858,7 @@
           <p:cNvPr id="44" name="qa-rule-t">
             <a:extLst>
               <a:ext uri="{FF2B5EF4-FFF2-40B4-BE49-F238E27FC236}">
-                <a16:creationId xmlns:a16="http://schemas.microsoft.com/office/drawing/2014/main" id="{6B7EF4DB-5850-BB3E-22FE-94AF4153ED81}"/>
+                <a16:creationId xmlns:a16="http://schemas.microsoft.com/office/drawing/2014/main" id="{DF1C42A0-44AB-6BCA-B8E8-A5A8204C70A3}"/>
               </a:ext>
             </a:extLst>
           </p:cNvPr>
@@ -22231,7 +23905,7 @@
             <a:hlinkClick r:id="rId4"/>
             <a:extLst>
               <a:ext uri="{FF2B5EF4-FFF2-40B4-BE49-F238E27FC236}">
-                <a16:creationId xmlns:a16="http://schemas.microsoft.com/office/drawing/2014/main" id="{B19BEAB0-C027-4712-1AEE-A2533DDD1F84}"/>
+                <a16:creationId xmlns:a16="http://schemas.microsoft.com/office/drawing/2014/main" id="{130F25E1-5FB4-9807-84BF-FAA0CBAE36E9}"/>
               </a:ext>
             </a:extLst>
           </p:cNvPr>
@@ -22292,7 +23966,7 @@
     </p:spTree>
     <p:extLst>
       <p:ext uri="{BB962C8B-B14F-4D97-AF65-F5344CB8AC3E}">
-        <p14:creationId xmlns:p14="http://schemas.microsoft.com/office/powerpoint/2010/main" val="1521485402"/>
+        <p14:creationId xmlns:p14="http://schemas.microsoft.com/office/powerpoint/2010/main" val="187173004"/>
       </p:ext>
     </p:extLst>
   </p:cSld>
@@ -23819,7 +25493,7 @@
           <p:cNvPr id="2" name="bg">
             <a:extLst>
               <a:ext uri="{FF2B5EF4-FFF2-40B4-BE49-F238E27FC236}">
-                <a16:creationId xmlns:a16="http://schemas.microsoft.com/office/drawing/2014/main" id="{00B6A079-5209-26A1-BB6A-72710EC1DAF6}"/>
+                <a16:creationId xmlns:a16="http://schemas.microsoft.com/office/drawing/2014/main" id="{22D9B619-6CCD-FAA2-A1E2-E94B4632CEF4}"/>
               </a:ext>
             </a:extLst>
           </p:cNvPr>
@@ -23880,7 +25554,7 @@
           <p:cNvPr id="3" name="rail">
             <a:extLst>
               <a:ext uri="{FF2B5EF4-FFF2-40B4-BE49-F238E27FC236}">
-                <a16:creationId xmlns:a16="http://schemas.microsoft.com/office/drawing/2014/main" id="{55937ABE-9751-8050-5C17-131A47C0DCC0}"/>
+                <a16:creationId xmlns:a16="http://schemas.microsoft.com/office/drawing/2014/main" id="{5DFABD51-3AC5-8018-035C-344D04195CE8}"/>
               </a:ext>
             </a:extLst>
           </p:cNvPr>
@@ -23941,7 +25615,7 @@
           <p:cNvPr id="4" name="top-rule">
             <a:extLst>
               <a:ext uri="{FF2B5EF4-FFF2-40B4-BE49-F238E27FC236}">
-                <a16:creationId xmlns:a16="http://schemas.microsoft.com/office/drawing/2014/main" id="{255BF3F3-EB3E-CD0B-2F9E-AABAEA42E671}"/>
+                <a16:creationId xmlns:a16="http://schemas.microsoft.com/office/drawing/2014/main" id="{BCBFF594-FD7F-CEB0-7253-F80766AE8315}"/>
               </a:ext>
             </a:extLst>
           </p:cNvPr>
@@ -23982,7 +25656,7 @@
           <p:cNvPr id="5" name="section">
             <a:extLst>
               <a:ext uri="{FF2B5EF4-FFF2-40B4-BE49-F238E27FC236}">
-                <a16:creationId xmlns:a16="http://schemas.microsoft.com/office/drawing/2014/main" id="{506F9DA7-3E65-5E57-6C8C-3EB4CBDFD461}"/>
+                <a16:creationId xmlns:a16="http://schemas.microsoft.com/office/drawing/2014/main" id="{6E7E0814-3EA6-CF92-6AC7-3C763FB86876}"/>
               </a:ext>
             </a:extLst>
           </p:cNvPr>
@@ -24028,7 +25702,7 @@
           <p:cNvPr id="6" name="num">
             <a:extLst>
               <a:ext uri="{FF2B5EF4-FFF2-40B4-BE49-F238E27FC236}">
-                <a16:creationId xmlns:a16="http://schemas.microsoft.com/office/drawing/2014/main" id="{2464347F-692A-60F6-B655-B5EF4C40FFCF}"/>
+                <a16:creationId xmlns:a16="http://schemas.microsoft.com/office/drawing/2014/main" id="{94FA2668-D1FA-9CFA-E113-A9A2E0BDA92D}"/>
               </a:ext>
             </a:extLst>
           </p:cNvPr>
@@ -24074,7 +25748,7 @@
           <p:cNvPr id="7" name="footer">
             <a:extLst>
               <a:ext uri="{FF2B5EF4-FFF2-40B4-BE49-F238E27FC236}">
-                <a16:creationId xmlns:a16="http://schemas.microsoft.com/office/drawing/2014/main" id="{86CA9C4A-2563-FD0C-380E-7D8C237AE5E3}"/>
+                <a16:creationId xmlns:a16="http://schemas.microsoft.com/office/drawing/2014/main" id="{7F1B7EA3-271F-C691-F0FE-3A13B795337F}"/>
               </a:ext>
             </a:extLst>
           </p:cNvPr>
@@ -24120,7 +25794,7 @@
           <p:cNvPr id="8" name="student">
             <a:extLst>
               <a:ext uri="{FF2B5EF4-FFF2-40B4-BE49-F238E27FC236}">
-                <a16:creationId xmlns:a16="http://schemas.microsoft.com/office/drawing/2014/main" id="{717F7FB5-B6C4-150A-A66F-ADBD2C131078}"/>
+                <a16:creationId xmlns:a16="http://schemas.microsoft.com/office/drawing/2014/main" id="{E3C76770-8C68-0F43-0AC3-BF7557515182}"/>
               </a:ext>
             </a:extLst>
           </p:cNvPr>
@@ -24166,7 +25840,7 @@
           <p:cNvPr id="10" name="图片 9">
             <a:extLst>
               <a:ext uri="{FF2B5EF4-FFF2-40B4-BE49-F238E27FC236}">
-                <a16:creationId xmlns:a16="http://schemas.microsoft.com/office/drawing/2014/main" id="{F006011D-37B3-193A-448D-2862420182E0}"/>
+                <a16:creationId xmlns:a16="http://schemas.microsoft.com/office/drawing/2014/main" id="{D735AAAC-3840-46EC-CBA8-4B01EEC0F036}"/>
               </a:ext>
             </a:extLst>
           </p:cNvPr>
@@ -24202,7 +25876,7 @@
           <p:cNvPr id="11" name="title">
             <a:extLst>
               <a:ext uri="{FF2B5EF4-FFF2-40B4-BE49-F238E27FC236}">
-                <a16:creationId xmlns:a16="http://schemas.microsoft.com/office/drawing/2014/main" id="{0B564EC9-B154-A79D-0B75-8EC787163731}"/>
+                <a16:creationId xmlns:a16="http://schemas.microsoft.com/office/drawing/2014/main" id="{F1FB74C6-A5AB-6D6F-856C-5F5A47A90454}"/>
               </a:ext>
             </a:extLst>
           </p:cNvPr>
@@ -24248,7 +25922,7 @@
           <p:cNvPr id="12" name="subtitle">
             <a:extLst>
               <a:ext uri="{FF2B5EF4-FFF2-40B4-BE49-F238E27FC236}">
-                <a16:creationId xmlns:a16="http://schemas.microsoft.com/office/drawing/2014/main" id="{35744D70-7F2A-7914-3525-FB7B9C3AB8E1}"/>
+                <a16:creationId xmlns:a16="http://schemas.microsoft.com/office/drawing/2014/main" id="{A352360D-815B-FE93-B917-86484BC93894}"/>
               </a:ext>
             </a:extLst>
           </p:cNvPr>
@@ -24294,7 +25968,7 @@
           <p:cNvPr id="13" name="live">
             <a:extLst>
               <a:ext uri="{FF2B5EF4-FFF2-40B4-BE49-F238E27FC236}">
-                <a16:creationId xmlns:a16="http://schemas.microsoft.com/office/drawing/2014/main" id="{22AA2A05-F323-270D-D102-B84E63DEC8DF}"/>
+                <a16:creationId xmlns:a16="http://schemas.microsoft.com/office/drawing/2014/main" id="{77017413-FBA1-432B-138A-7A0DAE1C4E2E}"/>
               </a:ext>
             </a:extLst>
           </p:cNvPr>
@@ -24348,7 +26022,7 @@
           <p:cNvPr id="14" name="live-k">
             <a:extLst>
               <a:ext uri="{FF2B5EF4-FFF2-40B4-BE49-F238E27FC236}">
-                <a16:creationId xmlns:a16="http://schemas.microsoft.com/office/drawing/2014/main" id="{FD285973-4590-A482-7789-DB2943767A3F}"/>
+                <a16:creationId xmlns:a16="http://schemas.microsoft.com/office/drawing/2014/main" id="{EC5F61F2-0FCC-3282-EE1B-D68D6B8B64B4}"/>
               </a:ext>
             </a:extLst>
           </p:cNvPr>
@@ -24394,7 +26068,7 @@
           <p:cNvPr id="15" name="live-t">
             <a:extLst>
               <a:ext uri="{FF2B5EF4-FFF2-40B4-BE49-F238E27FC236}">
-                <a16:creationId xmlns:a16="http://schemas.microsoft.com/office/drawing/2014/main" id="{8BB04E17-4279-ED9E-C9E3-B8154519115C}"/>
+                <a16:creationId xmlns:a16="http://schemas.microsoft.com/office/drawing/2014/main" id="{120D809F-789B-35A9-DD7F-A86BBB5F9669}"/>
               </a:ext>
             </a:extLst>
           </p:cNvPr>
@@ -24440,7 +26114,7 @@
           <p:cNvPr id="16" name="live-s">
             <a:extLst>
               <a:ext uri="{FF2B5EF4-FFF2-40B4-BE49-F238E27FC236}">
-                <a16:creationId xmlns:a16="http://schemas.microsoft.com/office/drawing/2014/main" id="{8B6418FE-92CB-2129-3B12-D332A259590F}"/>
+                <a16:creationId xmlns:a16="http://schemas.microsoft.com/office/drawing/2014/main" id="{D419367C-921D-599D-8F1D-35D56CFA9D20}"/>
               </a:ext>
             </a:extLst>
           </p:cNvPr>
@@ -24487,7 +26161,7 @@
             <a:hlinkClick r:id="rId4"/>
             <a:extLst>
               <a:ext uri="{FF2B5EF4-FFF2-40B4-BE49-F238E27FC236}">
-                <a16:creationId xmlns:a16="http://schemas.microsoft.com/office/drawing/2014/main" id="{C3BF944B-2D99-E996-BE70-2E5B3E673018}"/>
+                <a16:creationId xmlns:a16="http://schemas.microsoft.com/office/drawing/2014/main" id="{985AD3BD-8C5B-0775-BC56-EBFFA603C182}"/>
               </a:ext>
             </a:extLst>
           </p:cNvPr>
@@ -24556,7 +26230,7 @@
             <a:hlinkClick r:id="rId5"/>
             <a:extLst>
               <a:ext uri="{FF2B5EF4-FFF2-40B4-BE49-F238E27FC236}">
-                <a16:creationId xmlns:a16="http://schemas.microsoft.com/office/drawing/2014/main" id="{32AEAA8D-C907-75E6-9A4A-CE6BD33A1DDF}"/>
+                <a16:creationId xmlns:a16="http://schemas.microsoft.com/office/drawing/2014/main" id="{7B2D9046-7F16-D69A-0A49-D7C6C139B7C1}"/>
               </a:ext>
             </a:extLst>
           </p:cNvPr>
@@ -24624,7 +26298,7 @@
           <p:cNvPr id="19" name="demo-spine">
             <a:extLst>
               <a:ext uri="{FF2B5EF4-FFF2-40B4-BE49-F238E27FC236}">
-                <a16:creationId xmlns:a16="http://schemas.microsoft.com/office/drawing/2014/main" id="{CB0A22CF-C504-5217-D45C-7BB3F0F29B87}"/>
+                <a16:creationId xmlns:a16="http://schemas.microsoft.com/office/drawing/2014/main" id="{051DE732-12AE-3F53-9B0D-53FEBA2FEFB7}"/>
               </a:ext>
             </a:extLst>
           </p:cNvPr>
@@ -24665,7 +26339,7 @@
           <p:cNvPr id="20" name="story-dot-0">
             <a:extLst>
               <a:ext uri="{FF2B5EF4-FFF2-40B4-BE49-F238E27FC236}">
-                <a16:creationId xmlns:a16="http://schemas.microsoft.com/office/drawing/2014/main" id="{8DE1DEA7-51AE-A2FB-3595-5D48D55A8B7B}"/>
+                <a16:creationId xmlns:a16="http://schemas.microsoft.com/office/drawing/2014/main" id="{BB65C22B-598D-8808-AABB-666313582704}"/>
               </a:ext>
             </a:extLst>
           </p:cNvPr>
@@ -24719,7 +26393,7 @@
           <p:cNvPr id="21" name="story-num-0">
             <a:extLst>
               <a:ext uri="{FF2B5EF4-FFF2-40B4-BE49-F238E27FC236}">
-                <a16:creationId xmlns:a16="http://schemas.microsoft.com/office/drawing/2014/main" id="{4C0AA08D-FD24-1FC8-CEE4-C5AA8BA238E6}"/>
+                <a16:creationId xmlns:a16="http://schemas.microsoft.com/office/drawing/2014/main" id="{1DD831FB-FA62-18E7-B936-48B3C56E092C}"/>
               </a:ext>
             </a:extLst>
           </p:cNvPr>
@@ -24765,7 +26439,7 @@
           <p:cNvPr id="22" name="story-title-0">
             <a:extLst>
               <a:ext uri="{FF2B5EF4-FFF2-40B4-BE49-F238E27FC236}">
-                <a16:creationId xmlns:a16="http://schemas.microsoft.com/office/drawing/2014/main" id="{BAB76585-5B95-F7A6-DDAB-FBF57B2E3FD5}"/>
+                <a16:creationId xmlns:a16="http://schemas.microsoft.com/office/drawing/2014/main" id="{CF323F15-27FC-2357-76A2-F6AC1E949392}"/>
               </a:ext>
             </a:extLst>
           </p:cNvPr>
@@ -24811,7 +26485,7 @@
           <p:cNvPr id="23" name="story-sub-0">
             <a:extLst>
               <a:ext uri="{FF2B5EF4-FFF2-40B4-BE49-F238E27FC236}">
-                <a16:creationId xmlns:a16="http://schemas.microsoft.com/office/drawing/2014/main" id="{4DC388B2-EA33-FAEB-0638-C53CE2430C53}"/>
+                <a16:creationId xmlns:a16="http://schemas.microsoft.com/office/drawing/2014/main" id="{F375DCF9-18FA-F34B-AC6F-D664A7649FCE}"/>
               </a:ext>
             </a:extLst>
           </p:cNvPr>
@@ -24857,7 +26531,7 @@
           <p:cNvPr id="24" name="story-arr-0">
             <a:extLst>
               <a:ext uri="{FF2B5EF4-FFF2-40B4-BE49-F238E27FC236}">
-                <a16:creationId xmlns:a16="http://schemas.microsoft.com/office/drawing/2014/main" id="{4F541882-E924-A7A1-4B73-4E2C07455F1A}"/>
+                <a16:creationId xmlns:a16="http://schemas.microsoft.com/office/drawing/2014/main" id="{7E04C124-329D-0657-8396-FE0B82DF6E35}"/>
               </a:ext>
             </a:extLst>
           </p:cNvPr>
@@ -24900,7 +26574,7 @@
             <a:hlinkClick r:id="rId4"/>
             <a:extLst>
               <a:ext uri="{FF2B5EF4-FFF2-40B4-BE49-F238E27FC236}">
-                <a16:creationId xmlns:a16="http://schemas.microsoft.com/office/drawing/2014/main" id="{679C9EC6-F5FD-B530-5976-7387BAB25454}"/>
+                <a16:creationId xmlns:a16="http://schemas.microsoft.com/office/drawing/2014/main" id="{F19CEA9A-7D5F-FB27-EF4A-FF1B4E932F4C}"/>
               </a:ext>
             </a:extLst>
           </p:cNvPr>
@@ -24963,7 +26637,7 @@
           <p:cNvPr id="26" name="story-dot-1">
             <a:extLst>
               <a:ext uri="{FF2B5EF4-FFF2-40B4-BE49-F238E27FC236}">
-                <a16:creationId xmlns:a16="http://schemas.microsoft.com/office/drawing/2014/main" id="{491CD566-F123-38BE-96D1-213A40112A74}"/>
+                <a16:creationId xmlns:a16="http://schemas.microsoft.com/office/drawing/2014/main" id="{2E43DF3B-CE46-70DB-4639-0CB58AE2E2BF}"/>
               </a:ext>
             </a:extLst>
           </p:cNvPr>
@@ -25017,7 +26691,7 @@
           <p:cNvPr id="27" name="story-num-1">
             <a:extLst>
               <a:ext uri="{FF2B5EF4-FFF2-40B4-BE49-F238E27FC236}">
-                <a16:creationId xmlns:a16="http://schemas.microsoft.com/office/drawing/2014/main" id="{35C1C4B2-6AD4-710B-5A73-F272D8963847}"/>
+                <a16:creationId xmlns:a16="http://schemas.microsoft.com/office/drawing/2014/main" id="{B3EAF745-32DD-7F76-2277-446CACE7CECC}"/>
               </a:ext>
             </a:extLst>
           </p:cNvPr>
@@ -25063,7 +26737,7 @@
           <p:cNvPr id="28" name="story-title-1">
             <a:extLst>
               <a:ext uri="{FF2B5EF4-FFF2-40B4-BE49-F238E27FC236}">
-                <a16:creationId xmlns:a16="http://schemas.microsoft.com/office/drawing/2014/main" id="{A4068F2F-2932-B422-00BF-14FEAA69E038}"/>
+                <a16:creationId xmlns:a16="http://schemas.microsoft.com/office/drawing/2014/main" id="{B312D5E4-2739-5661-5A72-2191018F379C}"/>
               </a:ext>
             </a:extLst>
           </p:cNvPr>
@@ -25109,7 +26783,7 @@
           <p:cNvPr id="29" name="story-sub-1">
             <a:extLst>
               <a:ext uri="{FF2B5EF4-FFF2-40B4-BE49-F238E27FC236}">
-                <a16:creationId xmlns:a16="http://schemas.microsoft.com/office/drawing/2014/main" id="{52C7B1CD-A767-DA15-A7B2-C6B2E4B6AE1F}"/>
+                <a16:creationId xmlns:a16="http://schemas.microsoft.com/office/drawing/2014/main" id="{F9338D83-6B55-0EA6-920D-F384F0D14465}"/>
               </a:ext>
             </a:extLst>
           </p:cNvPr>
@@ -25155,7 +26829,7 @@
           <p:cNvPr id="30" name="story-arr-1">
             <a:extLst>
               <a:ext uri="{FF2B5EF4-FFF2-40B4-BE49-F238E27FC236}">
-                <a16:creationId xmlns:a16="http://schemas.microsoft.com/office/drawing/2014/main" id="{6E807201-408E-8FAF-A5A6-B7BC36E51EF6}"/>
+                <a16:creationId xmlns:a16="http://schemas.microsoft.com/office/drawing/2014/main" id="{42A56FA0-F756-B709-07B9-FC55D2667D30}"/>
               </a:ext>
             </a:extLst>
           </p:cNvPr>
@@ -25198,7 +26872,7 @@
             <a:hlinkClick r:id="rId6"/>
             <a:extLst>
               <a:ext uri="{FF2B5EF4-FFF2-40B4-BE49-F238E27FC236}">
-                <a16:creationId xmlns:a16="http://schemas.microsoft.com/office/drawing/2014/main" id="{347776C0-67DC-C21E-295C-7874D7DD7B94}"/>
+                <a16:creationId xmlns:a16="http://schemas.microsoft.com/office/drawing/2014/main" id="{EA283DDB-13D2-C85A-039B-20C0D5669A0E}"/>
               </a:ext>
             </a:extLst>
           </p:cNvPr>
@@ -25261,7 +26935,7 @@
           <p:cNvPr id="32" name="story-dot-2">
             <a:extLst>
               <a:ext uri="{FF2B5EF4-FFF2-40B4-BE49-F238E27FC236}">
-                <a16:creationId xmlns:a16="http://schemas.microsoft.com/office/drawing/2014/main" id="{FD5A5BC5-4CA1-2786-2D49-F5669CE2BB36}"/>
+                <a16:creationId xmlns:a16="http://schemas.microsoft.com/office/drawing/2014/main" id="{9168C0EC-A798-51B8-D66C-D3B92DE3F399}"/>
               </a:ext>
             </a:extLst>
           </p:cNvPr>
@@ -25315,7 +26989,7 @@
           <p:cNvPr id="33" name="story-num-2">
             <a:extLst>
               <a:ext uri="{FF2B5EF4-FFF2-40B4-BE49-F238E27FC236}">
-                <a16:creationId xmlns:a16="http://schemas.microsoft.com/office/drawing/2014/main" id="{74265EB3-E9D2-2387-2C99-FC84A651B561}"/>
+                <a16:creationId xmlns:a16="http://schemas.microsoft.com/office/drawing/2014/main" id="{D6F4A7F8-CC47-FB08-7F3F-9A8528CC15FB}"/>
               </a:ext>
             </a:extLst>
           </p:cNvPr>
@@ -25361,7 +27035,7 @@
           <p:cNvPr id="34" name="story-title-2">
             <a:extLst>
               <a:ext uri="{FF2B5EF4-FFF2-40B4-BE49-F238E27FC236}">
-                <a16:creationId xmlns:a16="http://schemas.microsoft.com/office/drawing/2014/main" id="{B84D4516-2E78-DFD8-ADCE-903FD85EE13C}"/>
+                <a16:creationId xmlns:a16="http://schemas.microsoft.com/office/drawing/2014/main" id="{AE9C1D5A-1DF5-8413-DB7E-6A7BFA7EC6EB}"/>
               </a:ext>
             </a:extLst>
           </p:cNvPr>
@@ -25407,7 +27081,7 @@
           <p:cNvPr id="35" name="story-sub-2">
             <a:extLst>
               <a:ext uri="{FF2B5EF4-FFF2-40B4-BE49-F238E27FC236}">
-                <a16:creationId xmlns:a16="http://schemas.microsoft.com/office/drawing/2014/main" id="{56F37D1F-DFC6-F4DE-180F-77CB4171F0B4}"/>
+                <a16:creationId xmlns:a16="http://schemas.microsoft.com/office/drawing/2014/main" id="{B2264702-6677-872C-8999-05FEA509E95D}"/>
               </a:ext>
             </a:extLst>
           </p:cNvPr>
@@ -25453,7 +27127,7 @@
           <p:cNvPr id="36" name="story-arr-2">
             <a:extLst>
               <a:ext uri="{FF2B5EF4-FFF2-40B4-BE49-F238E27FC236}">
-                <a16:creationId xmlns:a16="http://schemas.microsoft.com/office/drawing/2014/main" id="{77825ACD-C140-8DE1-51A3-2B5A04A96397}"/>
+                <a16:creationId xmlns:a16="http://schemas.microsoft.com/office/drawing/2014/main" id="{759777E0-5A33-2122-CF15-747421DBE801}"/>
               </a:ext>
             </a:extLst>
           </p:cNvPr>
@@ -25496,7 +27170,7 @@
             <a:hlinkClick r:id="rId7"/>
             <a:extLst>
               <a:ext uri="{FF2B5EF4-FFF2-40B4-BE49-F238E27FC236}">
-                <a16:creationId xmlns:a16="http://schemas.microsoft.com/office/drawing/2014/main" id="{8528C354-1E7F-5092-7F60-091448B7426C}"/>
+                <a16:creationId xmlns:a16="http://schemas.microsoft.com/office/drawing/2014/main" id="{AE60D3E9-1B0D-ACA7-11DE-731638D4CF31}"/>
               </a:ext>
             </a:extLst>
           </p:cNvPr>
@@ -25559,7 +27233,7 @@
           <p:cNvPr id="38" name="story-dot-3">
             <a:extLst>
               <a:ext uri="{FF2B5EF4-FFF2-40B4-BE49-F238E27FC236}">
-                <a16:creationId xmlns:a16="http://schemas.microsoft.com/office/drawing/2014/main" id="{3BD4458A-F90D-F81B-49B2-6C784CA41112}"/>
+                <a16:creationId xmlns:a16="http://schemas.microsoft.com/office/drawing/2014/main" id="{95BE87C7-2290-D3B9-A90D-C082B3B9A751}"/>
               </a:ext>
             </a:extLst>
           </p:cNvPr>
@@ -25613,7 +27287,7 @@
           <p:cNvPr id="39" name="story-num-3">
             <a:extLst>
               <a:ext uri="{FF2B5EF4-FFF2-40B4-BE49-F238E27FC236}">
-                <a16:creationId xmlns:a16="http://schemas.microsoft.com/office/drawing/2014/main" id="{2C46BE86-DB7E-88D2-D73B-E5817B1FB692}"/>
+                <a16:creationId xmlns:a16="http://schemas.microsoft.com/office/drawing/2014/main" id="{037720B6-7DEB-281F-073B-E5F7BB809264}"/>
               </a:ext>
             </a:extLst>
           </p:cNvPr>
@@ -25659,7 +27333,7 @@
           <p:cNvPr id="40" name="story-title-3">
             <a:extLst>
               <a:ext uri="{FF2B5EF4-FFF2-40B4-BE49-F238E27FC236}">
-                <a16:creationId xmlns:a16="http://schemas.microsoft.com/office/drawing/2014/main" id="{F1DD6E01-EDE7-D4B9-4C04-1E525CEFAF10}"/>
+                <a16:creationId xmlns:a16="http://schemas.microsoft.com/office/drawing/2014/main" id="{641956D2-8416-A389-F5A4-58476654672C}"/>
               </a:ext>
             </a:extLst>
           </p:cNvPr>
@@ -25705,7 +27379,7 @@
           <p:cNvPr id="41" name="story-sub-3">
             <a:extLst>
               <a:ext uri="{FF2B5EF4-FFF2-40B4-BE49-F238E27FC236}">
-                <a16:creationId xmlns:a16="http://schemas.microsoft.com/office/drawing/2014/main" id="{DABD9B09-1209-02DD-8E1A-2A2A3F322DF5}"/>
+                <a16:creationId xmlns:a16="http://schemas.microsoft.com/office/drawing/2014/main" id="{2228BC95-8A63-EB2A-88D6-8CFC73C68F4D}"/>
               </a:ext>
             </a:extLst>
           </p:cNvPr>
@@ -25751,7 +27425,7 @@
           <p:cNvPr id="42" name="story-arr-3">
             <a:extLst>
               <a:ext uri="{FF2B5EF4-FFF2-40B4-BE49-F238E27FC236}">
-                <a16:creationId xmlns:a16="http://schemas.microsoft.com/office/drawing/2014/main" id="{85AFDF86-1E5F-2803-7BD1-CE8777E7427F}"/>
+                <a16:creationId xmlns:a16="http://schemas.microsoft.com/office/drawing/2014/main" id="{C3B6A513-A238-8B65-B0A3-17C12168FF54}"/>
               </a:ext>
             </a:extLst>
           </p:cNvPr>
@@ -25794,7 +27468,7 @@
             <a:hlinkClick r:id="rId8"/>
             <a:extLst>
               <a:ext uri="{FF2B5EF4-FFF2-40B4-BE49-F238E27FC236}">
-                <a16:creationId xmlns:a16="http://schemas.microsoft.com/office/drawing/2014/main" id="{E5FFEB3A-A950-66A8-746A-B90439EC35EA}"/>
+                <a16:creationId xmlns:a16="http://schemas.microsoft.com/office/drawing/2014/main" id="{1A1BB0FC-DB61-E11D-83CD-4EE511CDB287}"/>
               </a:ext>
             </a:extLst>
           </p:cNvPr>
@@ -25857,7 +27531,7 @@
           <p:cNvPr id="44" name="story-dot-4">
             <a:extLst>
               <a:ext uri="{FF2B5EF4-FFF2-40B4-BE49-F238E27FC236}">
-                <a16:creationId xmlns:a16="http://schemas.microsoft.com/office/drawing/2014/main" id="{D09A9F49-BDC9-5A5B-6DA8-2A3C7B8E2C9C}"/>
+                <a16:creationId xmlns:a16="http://schemas.microsoft.com/office/drawing/2014/main" id="{2ED177E8-DECD-45C8-E28D-CC1FB3B68D59}"/>
               </a:ext>
             </a:extLst>
           </p:cNvPr>
@@ -25911,7 +27585,7 @@
           <p:cNvPr id="45" name="story-num-4">
             <a:extLst>
               <a:ext uri="{FF2B5EF4-FFF2-40B4-BE49-F238E27FC236}">
-                <a16:creationId xmlns:a16="http://schemas.microsoft.com/office/drawing/2014/main" id="{41647342-5747-2F0E-EF4E-DF6517FA388C}"/>
+                <a16:creationId xmlns:a16="http://schemas.microsoft.com/office/drawing/2014/main" id="{2451EDA0-C4E4-AB06-9593-3A75DCC503F2}"/>
               </a:ext>
             </a:extLst>
           </p:cNvPr>
@@ -25957,7 +27631,7 @@
           <p:cNvPr id="46" name="story-title-4">
             <a:extLst>
               <a:ext uri="{FF2B5EF4-FFF2-40B4-BE49-F238E27FC236}">
-                <a16:creationId xmlns:a16="http://schemas.microsoft.com/office/drawing/2014/main" id="{3A7AA174-6858-5244-1CFE-BAECE2C28F1F}"/>
+                <a16:creationId xmlns:a16="http://schemas.microsoft.com/office/drawing/2014/main" id="{8DBF1C83-79A2-52B3-8B3F-CF5E3926600A}"/>
               </a:ext>
             </a:extLst>
           </p:cNvPr>
@@ -26003,7 +27677,7 @@
           <p:cNvPr id="47" name="story-sub-4">
             <a:extLst>
               <a:ext uri="{FF2B5EF4-FFF2-40B4-BE49-F238E27FC236}">
-                <a16:creationId xmlns:a16="http://schemas.microsoft.com/office/drawing/2014/main" id="{8645F6DE-DEC8-E5A1-69A9-1210E7716FA3}"/>
+                <a16:creationId xmlns:a16="http://schemas.microsoft.com/office/drawing/2014/main" id="{40AA2A21-0F07-5542-D8B4-A9869FD3C5FE}"/>
               </a:ext>
             </a:extLst>
           </p:cNvPr>
@@ -26050,7 +27724,7 @@
             <a:hlinkClick r:id="rId5"/>
             <a:extLst>
               <a:ext uri="{FF2B5EF4-FFF2-40B4-BE49-F238E27FC236}">
-                <a16:creationId xmlns:a16="http://schemas.microsoft.com/office/drawing/2014/main" id="{FDB12DBF-474D-2FCA-392F-28FB161F3159}"/>
+                <a16:creationId xmlns:a16="http://schemas.microsoft.com/office/drawing/2014/main" id="{005812B1-84D8-016D-EE0A-22887885FAB7}"/>
               </a:ext>
             </a:extLst>
           </p:cNvPr>
@@ -26113,7 +27787,7 @@
           <p:cNvPr id="49" name="fallback-note">
             <a:extLst>
               <a:ext uri="{FF2B5EF4-FFF2-40B4-BE49-F238E27FC236}">
-                <a16:creationId xmlns:a16="http://schemas.microsoft.com/office/drawing/2014/main" id="{F3EB4B93-F540-10D4-54B3-D32F8345498C}"/>
+                <a16:creationId xmlns:a16="http://schemas.microsoft.com/office/drawing/2014/main" id="{5E68FE2F-DCD6-C579-CA49-40FF7C247A84}"/>
               </a:ext>
             </a:extLst>
           </p:cNvPr>
@@ -26167,7 +27841,7 @@
           <p:cNvPr id="50" name="fallback-k">
             <a:extLst>
               <a:ext uri="{FF2B5EF4-FFF2-40B4-BE49-F238E27FC236}">
-                <a16:creationId xmlns:a16="http://schemas.microsoft.com/office/drawing/2014/main" id="{EDB455BB-15B2-B41B-6CF6-C126950C78F3}"/>
+                <a16:creationId xmlns:a16="http://schemas.microsoft.com/office/drawing/2014/main" id="{C3BB9092-E09A-2084-B977-A31D301F0940}"/>
               </a:ext>
             </a:extLst>
           </p:cNvPr>
@@ -26213,7 +27887,7 @@
           <p:cNvPr id="51" name="fallback-t">
             <a:extLst>
               <a:ext uri="{FF2B5EF4-FFF2-40B4-BE49-F238E27FC236}">
-                <a16:creationId xmlns:a16="http://schemas.microsoft.com/office/drawing/2014/main" id="{DD2709A5-6080-55F1-80DB-3502F46793DA}"/>
+                <a16:creationId xmlns:a16="http://schemas.microsoft.com/office/drawing/2014/main" id="{E1752C7C-BEC2-B839-4210-75CCE31991D4}"/>
               </a:ext>
             </a:extLst>
           </p:cNvPr>
@@ -26260,7 +27934,7 @@
             <a:hlinkClick r:id="rId4"/>
             <a:extLst>
               <a:ext uri="{FF2B5EF4-FFF2-40B4-BE49-F238E27FC236}">
-                <a16:creationId xmlns:a16="http://schemas.microsoft.com/office/drawing/2014/main" id="{843D1C00-D5B0-4BD8-BE9B-BCF5CC4666F9}"/>
+                <a16:creationId xmlns:a16="http://schemas.microsoft.com/office/drawing/2014/main" id="{A66C7953-0168-2BCC-42D3-5FF1BC286A4B}"/>
               </a:ext>
             </a:extLst>
           </p:cNvPr>
@@ -26321,7 +27995,7 @@
     </p:spTree>
     <p:extLst>
       <p:ext uri="{BB962C8B-B14F-4D97-AF65-F5344CB8AC3E}">
-        <p14:creationId xmlns:p14="http://schemas.microsoft.com/office/powerpoint/2010/main" val="2206906391"/>
+        <p14:creationId xmlns:p14="http://schemas.microsoft.com/office/powerpoint/2010/main" val="830561955"/>
       </p:ext>
     </p:extLst>
   </p:cSld>
@@ -28115,7 +29789,7 @@
           <p:cNvPr id="2" name="bg">
             <a:extLst>
               <a:ext uri="{FF2B5EF4-FFF2-40B4-BE49-F238E27FC236}">
-                <a16:creationId xmlns:a16="http://schemas.microsoft.com/office/drawing/2014/main" id="{AABFAD1D-5E06-93AC-C9F4-8BBD1F20C4F7}"/>
+                <a16:creationId xmlns:a16="http://schemas.microsoft.com/office/drawing/2014/main" id="{78D83AE9-4073-61FD-CBB4-7AE87B0FBB39}"/>
               </a:ext>
             </a:extLst>
           </p:cNvPr>
@@ -28176,7 +29850,7 @@
           <p:cNvPr id="3" name="rail">
             <a:extLst>
               <a:ext uri="{FF2B5EF4-FFF2-40B4-BE49-F238E27FC236}">
-                <a16:creationId xmlns:a16="http://schemas.microsoft.com/office/drawing/2014/main" id="{17B2FC31-BA64-93D7-6AB7-D5240CEBBDD1}"/>
+                <a16:creationId xmlns:a16="http://schemas.microsoft.com/office/drawing/2014/main" id="{0EB2333D-E564-75AA-2066-32E4EFA44FEF}"/>
               </a:ext>
             </a:extLst>
           </p:cNvPr>
@@ -28237,7 +29911,7 @@
           <p:cNvPr id="4" name="top-rule">
             <a:extLst>
               <a:ext uri="{FF2B5EF4-FFF2-40B4-BE49-F238E27FC236}">
-                <a16:creationId xmlns:a16="http://schemas.microsoft.com/office/drawing/2014/main" id="{1D8608E6-B5A6-FDC3-1F7D-CCF3CC38C381}"/>
+                <a16:creationId xmlns:a16="http://schemas.microsoft.com/office/drawing/2014/main" id="{F415BE93-4A48-9630-BC7B-34025837683F}"/>
               </a:ext>
             </a:extLst>
           </p:cNvPr>
@@ -28278,7 +29952,7 @@
           <p:cNvPr id="5" name="section">
             <a:extLst>
               <a:ext uri="{FF2B5EF4-FFF2-40B4-BE49-F238E27FC236}">
-                <a16:creationId xmlns:a16="http://schemas.microsoft.com/office/drawing/2014/main" id="{CB0B5466-CB60-BC6C-B152-C324F98A84C6}"/>
+                <a16:creationId xmlns:a16="http://schemas.microsoft.com/office/drawing/2014/main" id="{0B7DC7D5-75D5-E8AD-73D5-6C02A83E957B}"/>
               </a:ext>
             </a:extLst>
           </p:cNvPr>
@@ -28324,7 +29998,7 @@
           <p:cNvPr id="6" name="num">
             <a:extLst>
               <a:ext uri="{FF2B5EF4-FFF2-40B4-BE49-F238E27FC236}">
-                <a16:creationId xmlns:a16="http://schemas.microsoft.com/office/drawing/2014/main" id="{8AA91013-873B-5931-8F8B-6D94F47D9FF2}"/>
+                <a16:creationId xmlns:a16="http://schemas.microsoft.com/office/drawing/2014/main" id="{E612695B-583D-6DBB-040E-7A6B04DCD275}"/>
               </a:ext>
             </a:extLst>
           </p:cNvPr>
@@ -28370,7 +30044,7 @@
           <p:cNvPr id="7" name="footer">
             <a:extLst>
               <a:ext uri="{FF2B5EF4-FFF2-40B4-BE49-F238E27FC236}">
-                <a16:creationId xmlns:a16="http://schemas.microsoft.com/office/drawing/2014/main" id="{A81B28EE-980B-FD1C-FA31-399CF2EF3A6E}"/>
+                <a16:creationId xmlns:a16="http://schemas.microsoft.com/office/drawing/2014/main" id="{11C71E5E-84B9-BDBE-DE7C-AE97B84A4901}"/>
               </a:ext>
             </a:extLst>
           </p:cNvPr>
@@ -28416,7 +30090,7 @@
           <p:cNvPr id="8" name="student">
             <a:extLst>
               <a:ext uri="{FF2B5EF4-FFF2-40B4-BE49-F238E27FC236}">
-                <a16:creationId xmlns:a16="http://schemas.microsoft.com/office/drawing/2014/main" id="{F089C5C6-F3D4-1859-8B9A-6D4253A943C2}"/>
+                <a16:creationId xmlns:a16="http://schemas.microsoft.com/office/drawing/2014/main" id="{B5C7F931-E90F-D7FC-C16D-C3CFB1043690}"/>
               </a:ext>
             </a:extLst>
           </p:cNvPr>
@@ -28462,7 +30136,7 @@
           <p:cNvPr id="10" name="图片 9">
             <a:extLst>
               <a:ext uri="{FF2B5EF4-FFF2-40B4-BE49-F238E27FC236}">
-                <a16:creationId xmlns:a16="http://schemas.microsoft.com/office/drawing/2014/main" id="{4D17C1E4-BFBA-98B2-C334-B784A5EF904D}"/>
+                <a16:creationId xmlns:a16="http://schemas.microsoft.com/office/drawing/2014/main" id="{6D3055D4-D7AB-1CF4-52DA-FB5D012C2FF4}"/>
               </a:ext>
             </a:extLst>
           </p:cNvPr>
@@ -28498,7 +30172,7 @@
           <p:cNvPr id="11" name="title">
             <a:extLst>
               <a:ext uri="{FF2B5EF4-FFF2-40B4-BE49-F238E27FC236}">
-                <a16:creationId xmlns:a16="http://schemas.microsoft.com/office/drawing/2014/main" id="{4E45336A-E9DD-AAEB-189F-397C80998890}"/>
+                <a16:creationId xmlns:a16="http://schemas.microsoft.com/office/drawing/2014/main" id="{9BEB57CA-49AB-9843-8488-25849365566D}"/>
               </a:ext>
             </a:extLst>
           </p:cNvPr>
@@ -28544,7 +30218,7 @@
           <p:cNvPr id="12" name="subtitle">
             <a:extLst>
               <a:ext uri="{FF2B5EF4-FFF2-40B4-BE49-F238E27FC236}">
-                <a16:creationId xmlns:a16="http://schemas.microsoft.com/office/drawing/2014/main" id="{C7FD29FC-A872-3E28-E6EE-9746C6998C65}"/>
+                <a16:creationId xmlns:a16="http://schemas.microsoft.com/office/drawing/2014/main" id="{D2E916DF-27F7-5153-5F9B-7A25DCA6206E}"/>
               </a:ext>
             </a:extLst>
           </p:cNvPr>
@@ -28590,7 +30264,7 @@
           <p:cNvPr id="13" name="lab">
             <a:extLst>
               <a:ext uri="{FF2B5EF4-FFF2-40B4-BE49-F238E27FC236}">
-                <a16:creationId xmlns:a16="http://schemas.microsoft.com/office/drawing/2014/main" id="{802B97C0-6329-C9DD-916D-E9940D7F5436}"/>
+                <a16:creationId xmlns:a16="http://schemas.microsoft.com/office/drawing/2014/main" id="{993CD5E4-3317-0EA5-7731-002E4473B25C}"/>
               </a:ext>
             </a:extLst>
           </p:cNvPr>
@@ -28644,7 +30318,7 @@
           <p:cNvPr id="14" name="lab-k">
             <a:extLst>
               <a:ext uri="{FF2B5EF4-FFF2-40B4-BE49-F238E27FC236}">
-                <a16:creationId xmlns:a16="http://schemas.microsoft.com/office/drawing/2014/main" id="{3111CA41-1DB4-2C82-FD1C-691D7375A65A}"/>
+                <a16:creationId xmlns:a16="http://schemas.microsoft.com/office/drawing/2014/main" id="{08383001-1FF0-0194-8721-3A77F2302320}"/>
               </a:ext>
             </a:extLst>
           </p:cNvPr>
@@ -28690,7 +30364,7 @@
           <p:cNvPr id="15" name="lab-code">
             <a:extLst>
               <a:ext uri="{FF2B5EF4-FFF2-40B4-BE49-F238E27FC236}">
-                <a16:creationId xmlns:a16="http://schemas.microsoft.com/office/drawing/2014/main" id="{80EE0A37-2128-0BEE-7FB5-4E385318221E}"/>
+                <a16:creationId xmlns:a16="http://schemas.microsoft.com/office/drawing/2014/main" id="{29F90BF9-5AAE-7483-2152-0402ADD8DD9A}"/>
               </a:ext>
             </a:extLst>
           </p:cNvPr>
@@ -28738,7 +30412,7 @@
           <p:cNvPr id="16" name="lab-rule">
             <a:extLst>
               <a:ext uri="{FF2B5EF4-FFF2-40B4-BE49-F238E27FC236}">
-                <a16:creationId xmlns:a16="http://schemas.microsoft.com/office/drawing/2014/main" id="{F5EE9568-4831-61DB-EF59-E8AE48CC364A}"/>
+                <a16:creationId xmlns:a16="http://schemas.microsoft.com/office/drawing/2014/main" id="{B3CA5F27-64B3-E22B-B800-902401A81F61}"/>
               </a:ext>
             </a:extLst>
           </p:cNvPr>
@@ -28779,7 +30453,7 @@
           <p:cNvPr id="17" name="lab-note">
             <a:extLst>
               <a:ext uri="{FF2B5EF4-FFF2-40B4-BE49-F238E27FC236}">
-                <a16:creationId xmlns:a16="http://schemas.microsoft.com/office/drawing/2014/main" id="{98CC7502-1262-D061-B27D-DF2B2631F454}"/>
+                <a16:creationId xmlns:a16="http://schemas.microsoft.com/office/drawing/2014/main" id="{9806D953-4CC9-C776-D084-6234586E9B89}"/>
               </a:ext>
             </a:extLst>
           </p:cNvPr>
@@ -28825,7 +30499,7 @@
           <p:cNvPr id="18" name="move-spine">
             <a:extLst>
               <a:ext uri="{FF2B5EF4-FFF2-40B4-BE49-F238E27FC236}">
-                <a16:creationId xmlns:a16="http://schemas.microsoft.com/office/drawing/2014/main" id="{199AD5D6-6FBC-3B87-D7A1-0C8B388DE9BC}"/>
+                <a16:creationId xmlns:a16="http://schemas.microsoft.com/office/drawing/2014/main" id="{41B168E8-A126-705F-345D-084C883491D0}"/>
               </a:ext>
             </a:extLst>
           </p:cNvPr>
@@ -28866,7 +30540,7 @@
           <p:cNvPr id="19" name="move-0">
             <a:extLst>
               <a:ext uri="{FF2B5EF4-FFF2-40B4-BE49-F238E27FC236}">
-                <a16:creationId xmlns:a16="http://schemas.microsoft.com/office/drawing/2014/main" id="{CD45B482-5347-4472-F9A1-E24BF34F8B03}"/>
+                <a16:creationId xmlns:a16="http://schemas.microsoft.com/office/drawing/2014/main" id="{13A54484-85EC-AF1D-3E8F-23D84CB39F03}"/>
               </a:ext>
             </a:extLst>
           </p:cNvPr>
@@ -28920,7 +30594,7 @@
           <p:cNvPr id="20" name="move-top-0">
             <a:extLst>
               <a:ext uri="{FF2B5EF4-FFF2-40B4-BE49-F238E27FC236}">
-                <a16:creationId xmlns:a16="http://schemas.microsoft.com/office/drawing/2014/main" id="{6B163974-E6EA-EB79-9414-CC70D53299CA}"/>
+                <a16:creationId xmlns:a16="http://schemas.microsoft.com/office/drawing/2014/main" id="{C9322A4F-D72D-75C5-C0DC-AFEC54F7E87D}"/>
               </a:ext>
             </a:extLst>
           </p:cNvPr>
@@ -28974,7 +30648,7 @@
           <p:cNvPr id="21" name="move-t-0">
             <a:extLst>
               <a:ext uri="{FF2B5EF4-FFF2-40B4-BE49-F238E27FC236}">
-                <a16:creationId xmlns:a16="http://schemas.microsoft.com/office/drawing/2014/main" id="{DEF15CF1-F4DE-6EDF-F981-43997960F5B3}"/>
+                <a16:creationId xmlns:a16="http://schemas.microsoft.com/office/drawing/2014/main" id="{72DE8CA7-C8B3-FB39-1A6A-98071A5361FE}"/>
               </a:ext>
             </a:extLst>
           </p:cNvPr>
@@ -29020,7 +30694,7 @@
           <p:cNvPr id="22" name="move-s-0">
             <a:extLst>
               <a:ext uri="{FF2B5EF4-FFF2-40B4-BE49-F238E27FC236}">
-                <a16:creationId xmlns:a16="http://schemas.microsoft.com/office/drawing/2014/main" id="{9940EFBB-C94E-2B8D-EB96-BFDC83CD9DEF}"/>
+                <a16:creationId xmlns:a16="http://schemas.microsoft.com/office/drawing/2014/main" id="{002F83CB-0667-EFDF-01A8-3E782E8D2009}"/>
               </a:ext>
             </a:extLst>
           </p:cNvPr>
@@ -29066,7 +30740,7 @@
           <p:cNvPr id="23" name="move-a-0">
             <a:extLst>
               <a:ext uri="{FF2B5EF4-FFF2-40B4-BE49-F238E27FC236}">
-                <a16:creationId xmlns:a16="http://schemas.microsoft.com/office/drawing/2014/main" id="{027C103A-2569-DAB1-5031-BA7FDC915BC7}"/>
+                <a16:creationId xmlns:a16="http://schemas.microsoft.com/office/drawing/2014/main" id="{2ED0AD4A-6BA5-8782-8362-BF964C096F9E}"/>
               </a:ext>
             </a:extLst>
           </p:cNvPr>
@@ -29108,7 +30782,7 @@
           <p:cNvPr id="24" name="move-1">
             <a:extLst>
               <a:ext uri="{FF2B5EF4-FFF2-40B4-BE49-F238E27FC236}">
-                <a16:creationId xmlns:a16="http://schemas.microsoft.com/office/drawing/2014/main" id="{AAF1D0AD-2E13-3103-F030-04BF09EB63CE}"/>
+                <a16:creationId xmlns:a16="http://schemas.microsoft.com/office/drawing/2014/main" id="{4F63126F-8E8D-40B9-3E18-8360C10E9528}"/>
               </a:ext>
             </a:extLst>
           </p:cNvPr>
@@ -29162,7 +30836,7 @@
           <p:cNvPr id="25" name="move-top-1">
             <a:extLst>
               <a:ext uri="{FF2B5EF4-FFF2-40B4-BE49-F238E27FC236}">
-                <a16:creationId xmlns:a16="http://schemas.microsoft.com/office/drawing/2014/main" id="{BE39B6C1-C492-C100-21FB-1273E061465F}"/>
+                <a16:creationId xmlns:a16="http://schemas.microsoft.com/office/drawing/2014/main" id="{B3EDE3A4-635C-5501-615B-C66CB0A60021}"/>
               </a:ext>
             </a:extLst>
           </p:cNvPr>
@@ -29216,7 +30890,7 @@
           <p:cNvPr id="26" name="move-t-1">
             <a:extLst>
               <a:ext uri="{FF2B5EF4-FFF2-40B4-BE49-F238E27FC236}">
-                <a16:creationId xmlns:a16="http://schemas.microsoft.com/office/drawing/2014/main" id="{C739C857-EB5E-EAC7-89FE-7A23FD4E7C00}"/>
+                <a16:creationId xmlns:a16="http://schemas.microsoft.com/office/drawing/2014/main" id="{252CD48B-8536-B4D9-EB6F-6E925414DB4B}"/>
               </a:ext>
             </a:extLst>
           </p:cNvPr>
@@ -29262,7 +30936,7 @@
           <p:cNvPr id="27" name="move-s-1">
             <a:extLst>
               <a:ext uri="{FF2B5EF4-FFF2-40B4-BE49-F238E27FC236}">
-                <a16:creationId xmlns:a16="http://schemas.microsoft.com/office/drawing/2014/main" id="{F5B61D7F-7707-FB91-123E-F536044063FF}"/>
+                <a16:creationId xmlns:a16="http://schemas.microsoft.com/office/drawing/2014/main" id="{042C9B40-4110-5365-3340-DE1BC7A8C79F}"/>
               </a:ext>
             </a:extLst>
           </p:cNvPr>
@@ -29308,7 +30982,7 @@
           <p:cNvPr id="28" name="move-a-1">
             <a:extLst>
               <a:ext uri="{FF2B5EF4-FFF2-40B4-BE49-F238E27FC236}">
-                <a16:creationId xmlns:a16="http://schemas.microsoft.com/office/drawing/2014/main" id="{AC225A1A-782A-1DE9-3F4F-BAEBA5CF11F7}"/>
+                <a16:creationId xmlns:a16="http://schemas.microsoft.com/office/drawing/2014/main" id="{1AEDD5E5-3FD9-D669-59C9-B67725DFE81D}"/>
               </a:ext>
             </a:extLst>
           </p:cNvPr>
@@ -29350,7 +31024,7 @@
           <p:cNvPr id="29" name="move-2">
             <a:extLst>
               <a:ext uri="{FF2B5EF4-FFF2-40B4-BE49-F238E27FC236}">
-                <a16:creationId xmlns:a16="http://schemas.microsoft.com/office/drawing/2014/main" id="{C3B293D9-F99A-782E-F377-F69F12BAF3C7}"/>
+                <a16:creationId xmlns:a16="http://schemas.microsoft.com/office/drawing/2014/main" id="{A46BB475-28E6-0520-6224-ADB8F84A07D2}"/>
               </a:ext>
             </a:extLst>
           </p:cNvPr>
@@ -29404,7 +31078,7 @@
           <p:cNvPr id="30" name="move-top-2">
             <a:extLst>
               <a:ext uri="{FF2B5EF4-FFF2-40B4-BE49-F238E27FC236}">
-                <a16:creationId xmlns:a16="http://schemas.microsoft.com/office/drawing/2014/main" id="{AA0D14FB-038D-93B8-2223-B358D801AAA6}"/>
+                <a16:creationId xmlns:a16="http://schemas.microsoft.com/office/drawing/2014/main" id="{5770D597-B13D-239E-7847-3AF0C886165D}"/>
               </a:ext>
             </a:extLst>
           </p:cNvPr>
@@ -29458,7 +31132,7 @@
           <p:cNvPr id="31" name="move-t-2">
             <a:extLst>
               <a:ext uri="{FF2B5EF4-FFF2-40B4-BE49-F238E27FC236}">
-                <a16:creationId xmlns:a16="http://schemas.microsoft.com/office/drawing/2014/main" id="{2E70EFA6-0939-594A-8AF4-FD7126E8040A}"/>
+                <a16:creationId xmlns:a16="http://schemas.microsoft.com/office/drawing/2014/main" id="{0F42F81C-F81A-ECC1-CA61-0DCB6A5D94F0}"/>
               </a:ext>
             </a:extLst>
           </p:cNvPr>
@@ -29504,7 +31178,7 @@
           <p:cNvPr id="32" name="move-s-2">
             <a:extLst>
               <a:ext uri="{FF2B5EF4-FFF2-40B4-BE49-F238E27FC236}">
-                <a16:creationId xmlns:a16="http://schemas.microsoft.com/office/drawing/2014/main" id="{A2515063-82D2-B9B1-1930-87BE02F641E7}"/>
+                <a16:creationId xmlns:a16="http://schemas.microsoft.com/office/drawing/2014/main" id="{B40C5E54-D1AC-2217-F2F9-026918C88DC4}"/>
               </a:ext>
             </a:extLst>
           </p:cNvPr>
@@ -29550,7 +31224,7 @@
           <p:cNvPr id="33" name="audit-a">
             <a:extLst>
               <a:ext uri="{FF2B5EF4-FFF2-40B4-BE49-F238E27FC236}">
-                <a16:creationId xmlns:a16="http://schemas.microsoft.com/office/drawing/2014/main" id="{4E0929FE-08DD-F474-2042-E457B74A21EA}"/>
+                <a16:creationId xmlns:a16="http://schemas.microsoft.com/office/drawing/2014/main" id="{C3668D90-C661-0E1E-CF3E-8C16B7E9155C}"/>
               </a:ext>
             </a:extLst>
           </p:cNvPr>
@@ -29592,7 +31266,7 @@
           <p:cNvPr id="34" name="audit">
             <a:extLst>
               <a:ext uri="{FF2B5EF4-FFF2-40B4-BE49-F238E27FC236}">
-                <a16:creationId xmlns:a16="http://schemas.microsoft.com/office/drawing/2014/main" id="{9741DF78-AA29-9206-5735-67D8FEC6A53E}"/>
+                <a16:creationId xmlns:a16="http://schemas.microsoft.com/office/drawing/2014/main" id="{20DCD767-2BBB-E331-27D8-B1BD247236A9}"/>
               </a:ext>
             </a:extLst>
           </p:cNvPr>
@@ -29646,7 +31320,7 @@
           <p:cNvPr id="35" name="audit-k">
             <a:extLst>
               <a:ext uri="{FF2B5EF4-FFF2-40B4-BE49-F238E27FC236}">
-                <a16:creationId xmlns:a16="http://schemas.microsoft.com/office/drawing/2014/main" id="{28BB347B-C9F9-C130-2370-0C26C76A0AD3}"/>
+                <a16:creationId xmlns:a16="http://schemas.microsoft.com/office/drawing/2014/main" id="{9EDE692A-CA69-0790-D841-F8622D0001E6}"/>
               </a:ext>
             </a:extLst>
           </p:cNvPr>
@@ -29692,7 +31366,7 @@
           <p:cNvPr id="36" name="audit-main">
             <a:extLst>
               <a:ext uri="{FF2B5EF4-FFF2-40B4-BE49-F238E27FC236}">
-                <a16:creationId xmlns:a16="http://schemas.microsoft.com/office/drawing/2014/main" id="{FAA95B50-BED0-0D53-3C9E-189E2FF6B6B1}"/>
+                <a16:creationId xmlns:a16="http://schemas.microsoft.com/office/drawing/2014/main" id="{213270AA-9E5D-3F73-29F2-7251A9132D44}"/>
               </a:ext>
             </a:extLst>
           </p:cNvPr>
@@ -29738,7 +31412,7 @@
           <p:cNvPr id="37" name="audit-dot-0">
             <a:extLst>
               <a:ext uri="{FF2B5EF4-FFF2-40B4-BE49-F238E27FC236}">
-                <a16:creationId xmlns:a16="http://schemas.microsoft.com/office/drawing/2014/main" id="{475E0246-7B2C-D078-F01D-E4F4EA27B520}"/>
+                <a16:creationId xmlns:a16="http://schemas.microsoft.com/office/drawing/2014/main" id="{89899B55-ED9E-F93D-4F8B-6F566572D5CD}"/>
               </a:ext>
             </a:extLst>
           </p:cNvPr>
@@ -29792,7 +31466,7 @@
           <p:cNvPr id="38" name="audit-q-0">
             <a:extLst>
               <a:ext uri="{FF2B5EF4-FFF2-40B4-BE49-F238E27FC236}">
-                <a16:creationId xmlns:a16="http://schemas.microsoft.com/office/drawing/2014/main" id="{884FE799-85C2-EDF7-4785-782218462179}"/>
+                <a16:creationId xmlns:a16="http://schemas.microsoft.com/office/drawing/2014/main" id="{CA74A3F7-4AE6-4EDE-CEB3-8DA94BD775AA}"/>
               </a:ext>
             </a:extLst>
           </p:cNvPr>
@@ -29838,7 +31512,7 @@
           <p:cNvPr id="39" name="audit-dot-1">
             <a:extLst>
               <a:ext uri="{FF2B5EF4-FFF2-40B4-BE49-F238E27FC236}">
-                <a16:creationId xmlns:a16="http://schemas.microsoft.com/office/drawing/2014/main" id="{32720B0D-BFAA-BEA3-8F19-8963656EF74F}"/>
+                <a16:creationId xmlns:a16="http://schemas.microsoft.com/office/drawing/2014/main" id="{A9A7E428-7557-74B5-14B6-9D053E000395}"/>
               </a:ext>
             </a:extLst>
           </p:cNvPr>
@@ -29892,7 +31566,7 @@
           <p:cNvPr id="40" name="audit-q-1">
             <a:extLst>
               <a:ext uri="{FF2B5EF4-FFF2-40B4-BE49-F238E27FC236}">
-                <a16:creationId xmlns:a16="http://schemas.microsoft.com/office/drawing/2014/main" id="{598AF27B-0F41-345A-9560-6D0EF11B6EA5}"/>
+                <a16:creationId xmlns:a16="http://schemas.microsoft.com/office/drawing/2014/main" id="{A09360A5-9B8B-5F87-BBCB-EF7B2796F6F7}"/>
               </a:ext>
             </a:extLst>
           </p:cNvPr>
@@ -29938,7 +31612,7 @@
           <p:cNvPr id="41" name="audit-dot-2">
             <a:extLst>
               <a:ext uri="{FF2B5EF4-FFF2-40B4-BE49-F238E27FC236}">
-                <a16:creationId xmlns:a16="http://schemas.microsoft.com/office/drawing/2014/main" id="{947DF2BF-2A81-5E47-E485-269E429EAA87}"/>
+                <a16:creationId xmlns:a16="http://schemas.microsoft.com/office/drawing/2014/main" id="{614D8D2D-04BE-541C-229A-292DFD1FAE3F}"/>
               </a:ext>
             </a:extLst>
           </p:cNvPr>
@@ -29992,7 +31666,7 @@
           <p:cNvPr id="42" name="audit-q-2">
             <a:extLst>
               <a:ext uri="{FF2B5EF4-FFF2-40B4-BE49-F238E27FC236}">
-                <a16:creationId xmlns:a16="http://schemas.microsoft.com/office/drawing/2014/main" id="{D2865DF6-CA2F-6A55-1AE2-C904F089281C}"/>
+                <a16:creationId xmlns:a16="http://schemas.microsoft.com/office/drawing/2014/main" id="{2F8FB912-5E2F-41C9-77F8-B6D0F31F1DC4}"/>
               </a:ext>
             </a:extLst>
           </p:cNvPr>
@@ -30038,7 +31712,7 @@
           <p:cNvPr id="43" name="question">
             <a:extLst>
               <a:ext uri="{FF2B5EF4-FFF2-40B4-BE49-F238E27FC236}">
-                <a16:creationId xmlns:a16="http://schemas.microsoft.com/office/drawing/2014/main" id="{ADCD8ED1-B26D-65AA-E028-3B60C30A3C66}"/>
+                <a16:creationId xmlns:a16="http://schemas.microsoft.com/office/drawing/2014/main" id="{57C3D949-8E63-2643-4AE5-33B9D880125F}"/>
               </a:ext>
             </a:extLst>
           </p:cNvPr>
@@ -30092,7 +31766,7 @@
           <p:cNvPr id="44" name="question-t">
             <a:extLst>
               <a:ext uri="{FF2B5EF4-FFF2-40B4-BE49-F238E27FC236}">
-                <a16:creationId xmlns:a16="http://schemas.microsoft.com/office/drawing/2014/main" id="{0B080460-01BF-5233-8939-B6A55DFDB84D}"/>
+                <a16:creationId xmlns:a16="http://schemas.microsoft.com/office/drawing/2014/main" id="{9E838AF2-385A-773B-25A0-31DFF40868DE}"/>
               </a:ext>
             </a:extLst>
           </p:cNvPr>
@@ -30139,7 +31813,7 @@
             <a:hlinkClick r:id="rId4"/>
             <a:extLst>
               <a:ext uri="{FF2B5EF4-FFF2-40B4-BE49-F238E27FC236}">
-                <a16:creationId xmlns:a16="http://schemas.microsoft.com/office/drawing/2014/main" id="{76172475-063B-1B7D-4A61-595BFCBFF7B4}"/>
+                <a16:creationId xmlns:a16="http://schemas.microsoft.com/office/drawing/2014/main" id="{EB6B0F93-506E-1192-61B8-2E06A21F498B}"/>
               </a:ext>
             </a:extLst>
           </p:cNvPr>
@@ -30200,7 +31874,7 @@
     </p:spTree>
     <p:extLst>
       <p:ext uri="{BB962C8B-B14F-4D97-AF65-F5344CB8AC3E}">
-        <p14:creationId xmlns:p14="http://schemas.microsoft.com/office/powerpoint/2010/main" val="4178517046"/>
+        <p14:creationId xmlns:p14="http://schemas.microsoft.com/office/powerpoint/2010/main" val="2044127481"/>
       </p:ext>
     </p:extLst>
   </p:cSld>
@@ -31723,7 +33397,7 @@
           <p:cNvPr id="2" name="bg">
             <a:extLst>
               <a:ext uri="{FF2B5EF4-FFF2-40B4-BE49-F238E27FC236}">
-                <a16:creationId xmlns:a16="http://schemas.microsoft.com/office/drawing/2014/main" id="{9C09DA3A-CD62-BEDA-0CE4-19ED1AEFD324}"/>
+                <a16:creationId xmlns:a16="http://schemas.microsoft.com/office/drawing/2014/main" id="{A3215FE9-B684-9F61-F33D-59A8E01FF8A1}"/>
               </a:ext>
             </a:extLst>
           </p:cNvPr>
@@ -31784,7 +33458,7 @@
           <p:cNvPr id="3" name="rail">
             <a:extLst>
               <a:ext uri="{FF2B5EF4-FFF2-40B4-BE49-F238E27FC236}">
-                <a16:creationId xmlns:a16="http://schemas.microsoft.com/office/drawing/2014/main" id="{E835D80D-BE0E-7BE8-C9B0-BD3F652E4A6F}"/>
+                <a16:creationId xmlns:a16="http://schemas.microsoft.com/office/drawing/2014/main" id="{A398D05D-C4FD-9B26-7057-C2772BD0B134}"/>
               </a:ext>
             </a:extLst>
           </p:cNvPr>
@@ -31845,7 +33519,7 @@
           <p:cNvPr id="4" name="top-rule">
             <a:extLst>
               <a:ext uri="{FF2B5EF4-FFF2-40B4-BE49-F238E27FC236}">
-                <a16:creationId xmlns:a16="http://schemas.microsoft.com/office/drawing/2014/main" id="{9361907F-587D-2C36-DFB7-128B6957D537}"/>
+                <a16:creationId xmlns:a16="http://schemas.microsoft.com/office/drawing/2014/main" id="{95FB5DB6-7CC6-C48B-43F0-8FA780C21723}"/>
               </a:ext>
             </a:extLst>
           </p:cNvPr>
@@ -31886,7 +33560,7 @@
           <p:cNvPr id="5" name="section">
             <a:extLst>
               <a:ext uri="{FF2B5EF4-FFF2-40B4-BE49-F238E27FC236}">
-                <a16:creationId xmlns:a16="http://schemas.microsoft.com/office/drawing/2014/main" id="{0755006C-55E3-A880-6E28-5FD506FBB9EC}"/>
+                <a16:creationId xmlns:a16="http://schemas.microsoft.com/office/drawing/2014/main" id="{39817A40-0BB5-2308-51A2-47F6401B0D97}"/>
               </a:ext>
             </a:extLst>
           </p:cNvPr>
@@ -31932,7 +33606,7 @@
           <p:cNvPr id="6" name="num">
             <a:extLst>
               <a:ext uri="{FF2B5EF4-FFF2-40B4-BE49-F238E27FC236}">
-                <a16:creationId xmlns:a16="http://schemas.microsoft.com/office/drawing/2014/main" id="{BCA2FA13-6931-2CE1-6D5A-6A3C350FFF95}"/>
+                <a16:creationId xmlns:a16="http://schemas.microsoft.com/office/drawing/2014/main" id="{F55E825E-F85A-C258-9D39-EC391CEE1B43}"/>
               </a:ext>
             </a:extLst>
           </p:cNvPr>
@@ -31978,7 +33652,7 @@
           <p:cNvPr id="7" name="footer">
             <a:extLst>
               <a:ext uri="{FF2B5EF4-FFF2-40B4-BE49-F238E27FC236}">
-                <a16:creationId xmlns:a16="http://schemas.microsoft.com/office/drawing/2014/main" id="{F413FE82-5E9E-50DA-BF4F-500810090AE0}"/>
+                <a16:creationId xmlns:a16="http://schemas.microsoft.com/office/drawing/2014/main" id="{8BE14D1D-7DE6-EF2E-E984-750EB5A2EAC2}"/>
               </a:ext>
             </a:extLst>
           </p:cNvPr>
@@ -32024,7 +33698,7 @@
           <p:cNvPr id="8" name="student">
             <a:extLst>
               <a:ext uri="{FF2B5EF4-FFF2-40B4-BE49-F238E27FC236}">
-                <a16:creationId xmlns:a16="http://schemas.microsoft.com/office/drawing/2014/main" id="{8A76045C-4394-BBC2-2711-475AAB52BB15}"/>
+                <a16:creationId xmlns:a16="http://schemas.microsoft.com/office/drawing/2014/main" id="{190E1694-6863-9E5F-E716-6D2C7722FD50}"/>
               </a:ext>
             </a:extLst>
           </p:cNvPr>
@@ -32070,7 +33744,7 @@
           <p:cNvPr id="10" name="图片 9">
             <a:extLst>
               <a:ext uri="{FF2B5EF4-FFF2-40B4-BE49-F238E27FC236}">
-                <a16:creationId xmlns:a16="http://schemas.microsoft.com/office/drawing/2014/main" id="{B2824CE8-FF3C-7E93-166D-46CB119EF22E}"/>
+                <a16:creationId xmlns:a16="http://schemas.microsoft.com/office/drawing/2014/main" id="{42026D2B-A074-5A55-8780-37CA5D9B4262}"/>
               </a:ext>
             </a:extLst>
           </p:cNvPr>
@@ -32106,7 +33780,7 @@
           <p:cNvPr id="11" name="title">
             <a:extLst>
               <a:ext uri="{FF2B5EF4-FFF2-40B4-BE49-F238E27FC236}">
-                <a16:creationId xmlns:a16="http://schemas.microsoft.com/office/drawing/2014/main" id="{9CC685EB-B289-E886-6D00-24C8B48F5FB2}"/>
+                <a16:creationId xmlns:a16="http://schemas.microsoft.com/office/drawing/2014/main" id="{BDAF6FBA-F733-7720-225A-DEB8E631A9A0}"/>
               </a:ext>
             </a:extLst>
           </p:cNvPr>
@@ -32152,7 +33826,7 @@
           <p:cNvPr id="12" name="subtitle">
             <a:extLst>
               <a:ext uri="{FF2B5EF4-FFF2-40B4-BE49-F238E27FC236}">
-                <a16:creationId xmlns:a16="http://schemas.microsoft.com/office/drawing/2014/main" id="{AFE0EB75-76FF-35BB-640C-8EA0BBDA2FF4}"/>
+                <a16:creationId xmlns:a16="http://schemas.microsoft.com/office/drawing/2014/main" id="{9BA5B941-5702-5AA8-7908-FCD8EA9A8923}"/>
               </a:ext>
             </a:extLst>
           </p:cNvPr>
@@ -32198,7 +33872,7 @@
           <p:cNvPr id="13" name="scorebox">
             <a:extLst>
               <a:ext uri="{FF2B5EF4-FFF2-40B4-BE49-F238E27FC236}">
-                <a16:creationId xmlns:a16="http://schemas.microsoft.com/office/drawing/2014/main" id="{F2ED33B0-9D2F-40BA-8180-CEE6217BA979}"/>
+                <a16:creationId xmlns:a16="http://schemas.microsoft.com/office/drawing/2014/main" id="{73B894B7-9C7A-200A-1A7E-D3CF5269E71A}"/>
               </a:ext>
             </a:extLst>
           </p:cNvPr>
@@ -32252,7 +33926,7 @@
           <p:cNvPr id="14" name="score-k">
             <a:extLst>
               <a:ext uri="{FF2B5EF4-FFF2-40B4-BE49-F238E27FC236}">
-                <a16:creationId xmlns:a16="http://schemas.microsoft.com/office/drawing/2014/main" id="{B8E40DE8-EE39-8588-1991-4CCE82555DF2}"/>
+                <a16:creationId xmlns:a16="http://schemas.microsoft.com/office/drawing/2014/main" id="{A0EEAAFE-C49F-B3E7-E767-27C385BA9F8E}"/>
               </a:ext>
             </a:extLst>
           </p:cNvPr>
@@ -32298,7 +33972,7 @@
           <p:cNvPr id="15" name="score-big">
             <a:extLst>
               <a:ext uri="{FF2B5EF4-FFF2-40B4-BE49-F238E27FC236}">
-                <a16:creationId xmlns:a16="http://schemas.microsoft.com/office/drawing/2014/main" id="{A628F206-FEF5-2007-6AEF-1B7AD82F73DD}"/>
+                <a16:creationId xmlns:a16="http://schemas.microsoft.com/office/drawing/2014/main" id="{2742FFCA-9544-7DBC-D726-88D97C3759DA}"/>
               </a:ext>
             </a:extLst>
           </p:cNvPr>
@@ -32344,7 +34018,7 @@
           <p:cNvPr id="16" name="score-small">
             <a:extLst>
               <a:ext uri="{FF2B5EF4-FFF2-40B4-BE49-F238E27FC236}">
-                <a16:creationId xmlns:a16="http://schemas.microsoft.com/office/drawing/2014/main" id="{C2314CBE-464B-3DE5-8654-A18E4B045A6D}"/>
+                <a16:creationId xmlns:a16="http://schemas.microsoft.com/office/drawing/2014/main" id="{C9E82867-2CF5-AF4A-773E-DAC7477EC77E}"/>
               </a:ext>
             </a:extLst>
           </p:cNvPr>
@@ -32390,7 +34064,7 @@
           <p:cNvPr id="17" name="gap-arrow">
             <a:extLst>
               <a:ext uri="{FF2B5EF4-FFF2-40B4-BE49-F238E27FC236}">
-                <a16:creationId xmlns:a16="http://schemas.microsoft.com/office/drawing/2014/main" id="{36BFF600-8B8B-1201-FB46-7AA3A28769B4}"/>
+                <a16:creationId xmlns:a16="http://schemas.microsoft.com/office/drawing/2014/main" id="{CD1587D1-B79E-C63A-2B85-CC08BC7A5385}"/>
               </a:ext>
             </a:extLst>
           </p:cNvPr>
@@ -32432,7 +34106,7 @@
           <p:cNvPr id="18" name="claimbox">
             <a:extLst>
               <a:ext uri="{FF2B5EF4-FFF2-40B4-BE49-F238E27FC236}">
-                <a16:creationId xmlns:a16="http://schemas.microsoft.com/office/drawing/2014/main" id="{07D1E755-8D54-5590-BDDC-5F182EDD4878}"/>
+                <a16:creationId xmlns:a16="http://schemas.microsoft.com/office/drawing/2014/main" id="{73D141EF-299D-3606-93CF-23FEB601CDCE}"/>
               </a:ext>
             </a:extLst>
           </p:cNvPr>
@@ -32486,7 +34160,7 @@
           <p:cNvPr id="19" name="claim-k">
             <a:extLst>
               <a:ext uri="{FF2B5EF4-FFF2-40B4-BE49-F238E27FC236}">
-                <a16:creationId xmlns:a16="http://schemas.microsoft.com/office/drawing/2014/main" id="{C94594C2-7793-0EBC-F417-ECAFD4638317}"/>
+                <a16:creationId xmlns:a16="http://schemas.microsoft.com/office/drawing/2014/main" id="{94EAFA8A-D615-CD9C-4733-84409705536D}"/>
               </a:ext>
             </a:extLst>
           </p:cNvPr>
@@ -32532,7 +34206,7 @@
           <p:cNvPr id="20" name="claim-f">
             <a:extLst>
               <a:ext uri="{FF2B5EF4-FFF2-40B4-BE49-F238E27FC236}">
-                <a16:creationId xmlns:a16="http://schemas.microsoft.com/office/drawing/2014/main" id="{21058FBA-547C-7795-EDF7-56EF2EDD847E}"/>
+                <a16:creationId xmlns:a16="http://schemas.microsoft.com/office/drawing/2014/main" id="{AD385C0B-48C6-7CB0-7222-DC76779F63BF}"/>
               </a:ext>
             </a:extLst>
           </p:cNvPr>
@@ -32578,7 +34252,7 @@
           <p:cNvPr id="21" name="claim-e">
             <a:extLst>
               <a:ext uri="{FF2B5EF4-FFF2-40B4-BE49-F238E27FC236}">
-                <a16:creationId xmlns:a16="http://schemas.microsoft.com/office/drawing/2014/main" id="{AEDBCD5D-E086-A58D-C88E-015E01808F34}"/>
+                <a16:creationId xmlns:a16="http://schemas.microsoft.com/office/drawing/2014/main" id="{40E38F63-E1CD-6F79-200A-4176360EC4AC}"/>
               </a:ext>
             </a:extLst>
           </p:cNvPr>
@@ -32625,7 +34299,7 @@
           <p:cNvPr id="22" name="tag-0">
             <a:extLst>
               <a:ext uri="{FF2B5EF4-FFF2-40B4-BE49-F238E27FC236}">
-                <a16:creationId xmlns:a16="http://schemas.microsoft.com/office/drawing/2014/main" id="{3BED034C-9A38-409C-5227-308082DD0414}"/>
+                <a16:creationId xmlns:a16="http://schemas.microsoft.com/office/drawing/2014/main" id="{EB65FA82-E210-0073-0442-CF0266C5D7C6}"/>
               </a:ext>
             </a:extLst>
           </p:cNvPr>
@@ -32693,7 +34367,7 @@
           <p:cNvPr id="23" name="tag-1">
             <a:extLst>
               <a:ext uri="{FF2B5EF4-FFF2-40B4-BE49-F238E27FC236}">
-                <a16:creationId xmlns:a16="http://schemas.microsoft.com/office/drawing/2014/main" id="{75179BED-6C01-286B-43E5-ED4E7F28D722}"/>
+                <a16:creationId xmlns:a16="http://schemas.microsoft.com/office/drawing/2014/main" id="{E8B2120C-E8FD-B425-2523-4B959EDA6FCF}"/>
               </a:ext>
             </a:extLst>
           </p:cNvPr>
@@ -32761,7 +34435,7 @@
           <p:cNvPr id="24" name="tag-2">
             <a:extLst>
               <a:ext uri="{FF2B5EF4-FFF2-40B4-BE49-F238E27FC236}">
-                <a16:creationId xmlns:a16="http://schemas.microsoft.com/office/drawing/2014/main" id="{F5FC1376-4D0A-EA74-F40E-968655DF1855}"/>
+                <a16:creationId xmlns:a16="http://schemas.microsoft.com/office/drawing/2014/main" id="{708E7423-96D1-A6A1-5B37-E2099EB06672}"/>
               </a:ext>
             </a:extLst>
           </p:cNvPr>
@@ -32829,7 +34503,7 @@
           <p:cNvPr id="25" name="tag-3">
             <a:extLst>
               <a:ext uri="{FF2B5EF4-FFF2-40B4-BE49-F238E27FC236}">
-                <a16:creationId xmlns:a16="http://schemas.microsoft.com/office/drawing/2014/main" id="{25EBA234-1AAA-DCA9-9589-BE821064A8E9}"/>
+                <a16:creationId xmlns:a16="http://schemas.microsoft.com/office/drawing/2014/main" id="{9E30891A-8691-1F82-3EB5-3F6C052DD369}"/>
               </a:ext>
             </a:extLst>
           </p:cNvPr>
@@ -32898,7 +34572,7 @@
             <a:hlinkClick r:id="rId4"/>
             <a:extLst>
               <a:ext uri="{FF2B5EF4-FFF2-40B4-BE49-F238E27FC236}">
-                <a16:creationId xmlns:a16="http://schemas.microsoft.com/office/drawing/2014/main" id="{E22B37FD-F12E-E508-5A94-FCBD284E2457}"/>
+                <a16:creationId xmlns:a16="http://schemas.microsoft.com/office/drawing/2014/main" id="{2A0434C0-F6AB-5339-A794-371A40858E3B}"/>
               </a:ext>
             </a:extLst>
           </p:cNvPr>
@@ -32959,7 +34633,7 @@
     </p:spTree>
     <p:extLst>
       <p:ext uri="{BB962C8B-B14F-4D97-AF65-F5344CB8AC3E}">
-        <p14:creationId xmlns:p14="http://schemas.microsoft.com/office/powerpoint/2010/main" val="2261556175"/>
+        <p14:creationId xmlns:p14="http://schemas.microsoft.com/office/powerpoint/2010/main" val="2610814274"/>
       </p:ext>
     </p:extLst>
   </p:cSld>
@@ -33003,7 +34677,7 @@
           <p:cNvPr id="2" name="bg">
             <a:extLst>
               <a:ext uri="{FF2B5EF4-FFF2-40B4-BE49-F238E27FC236}">
-                <a16:creationId xmlns:a16="http://schemas.microsoft.com/office/drawing/2014/main" id="{761963DF-345A-F0B1-62C3-F3A5B31C6BAB}"/>
+                <a16:creationId xmlns:a16="http://schemas.microsoft.com/office/drawing/2014/main" id="{A9BA2569-980C-BD3F-620F-77AA7D907545}"/>
               </a:ext>
             </a:extLst>
           </p:cNvPr>
@@ -33064,7 +34738,7 @@
           <p:cNvPr id="3" name="rail">
             <a:extLst>
               <a:ext uri="{FF2B5EF4-FFF2-40B4-BE49-F238E27FC236}">
-                <a16:creationId xmlns:a16="http://schemas.microsoft.com/office/drawing/2014/main" id="{F09AFCE2-B9FF-5D20-D5AB-67FD29D8A5E8}"/>
+                <a16:creationId xmlns:a16="http://schemas.microsoft.com/office/drawing/2014/main" id="{96C059D7-B15F-7093-D83D-C195EDB407EC}"/>
               </a:ext>
             </a:extLst>
           </p:cNvPr>
@@ -33125,7 +34799,7 @@
           <p:cNvPr id="4" name="top-rule">
             <a:extLst>
               <a:ext uri="{FF2B5EF4-FFF2-40B4-BE49-F238E27FC236}">
-                <a16:creationId xmlns:a16="http://schemas.microsoft.com/office/drawing/2014/main" id="{80E83D99-B312-9C67-1ECC-D19B49E50910}"/>
+                <a16:creationId xmlns:a16="http://schemas.microsoft.com/office/drawing/2014/main" id="{18FD5474-F0D6-E562-76D6-26948D072EF8}"/>
               </a:ext>
             </a:extLst>
           </p:cNvPr>
@@ -33166,7 +34840,7 @@
           <p:cNvPr id="5" name="section">
             <a:extLst>
               <a:ext uri="{FF2B5EF4-FFF2-40B4-BE49-F238E27FC236}">
-                <a16:creationId xmlns:a16="http://schemas.microsoft.com/office/drawing/2014/main" id="{1E89C1D7-46F4-46B6-DC3F-54C71EA59A3F}"/>
+                <a16:creationId xmlns:a16="http://schemas.microsoft.com/office/drawing/2014/main" id="{65616246-B8BC-B3A9-D7BC-59D44B72A9EA}"/>
               </a:ext>
             </a:extLst>
           </p:cNvPr>
@@ -33212,7 +34886,7 @@
           <p:cNvPr id="6" name="num">
             <a:extLst>
               <a:ext uri="{FF2B5EF4-FFF2-40B4-BE49-F238E27FC236}">
-                <a16:creationId xmlns:a16="http://schemas.microsoft.com/office/drawing/2014/main" id="{3C59D4E9-054C-F196-BB8B-AEA6AC53CC71}"/>
+                <a16:creationId xmlns:a16="http://schemas.microsoft.com/office/drawing/2014/main" id="{847526CF-7382-B396-D1C5-FDC2AF305817}"/>
               </a:ext>
             </a:extLst>
           </p:cNvPr>
@@ -33258,7 +34932,7 @@
           <p:cNvPr id="7" name="footer">
             <a:extLst>
               <a:ext uri="{FF2B5EF4-FFF2-40B4-BE49-F238E27FC236}">
-                <a16:creationId xmlns:a16="http://schemas.microsoft.com/office/drawing/2014/main" id="{0D63E13C-BBDF-3F29-FFD3-F38D3AC7A055}"/>
+                <a16:creationId xmlns:a16="http://schemas.microsoft.com/office/drawing/2014/main" id="{4C223BB1-CBC4-A7F3-BA3B-882282BC79F2}"/>
               </a:ext>
             </a:extLst>
           </p:cNvPr>
@@ -33304,7 +34978,7 @@
           <p:cNvPr id="8" name="student">
             <a:extLst>
               <a:ext uri="{FF2B5EF4-FFF2-40B4-BE49-F238E27FC236}">
-                <a16:creationId xmlns:a16="http://schemas.microsoft.com/office/drawing/2014/main" id="{56D491B1-B851-B316-7D83-B7BE09E8B2C8}"/>
+                <a16:creationId xmlns:a16="http://schemas.microsoft.com/office/drawing/2014/main" id="{C6B57064-65C6-8A33-A173-4F16E6C82D75}"/>
               </a:ext>
             </a:extLst>
           </p:cNvPr>
@@ -33350,7 +35024,7 @@
           <p:cNvPr id="10" name="图片 9">
             <a:extLst>
               <a:ext uri="{FF2B5EF4-FFF2-40B4-BE49-F238E27FC236}">
-                <a16:creationId xmlns:a16="http://schemas.microsoft.com/office/drawing/2014/main" id="{4682D9D3-5C63-8C46-4C88-163B27AE24E2}"/>
+                <a16:creationId xmlns:a16="http://schemas.microsoft.com/office/drawing/2014/main" id="{C4422421-FD04-EAB9-1980-061218D7F7D9}"/>
               </a:ext>
             </a:extLst>
           </p:cNvPr>
@@ -33386,7 +35060,7 @@
           <p:cNvPr id="11" name="title">
             <a:extLst>
               <a:ext uri="{FF2B5EF4-FFF2-40B4-BE49-F238E27FC236}">
-                <a16:creationId xmlns:a16="http://schemas.microsoft.com/office/drawing/2014/main" id="{EE3FBDA8-2C2A-AD5D-ED19-26F6D9E1CEED}"/>
+                <a16:creationId xmlns:a16="http://schemas.microsoft.com/office/drawing/2014/main" id="{6DB03EFF-91BA-0449-ADC3-6C347AA4299B}"/>
               </a:ext>
             </a:extLst>
           </p:cNvPr>
@@ -33432,7 +35106,7 @@
           <p:cNvPr id="12" name="subtitle">
             <a:extLst>
               <a:ext uri="{FF2B5EF4-FFF2-40B4-BE49-F238E27FC236}">
-                <a16:creationId xmlns:a16="http://schemas.microsoft.com/office/drawing/2014/main" id="{5D45FDEF-806F-50C0-3C1F-11BECD7245FC}"/>
+                <a16:creationId xmlns:a16="http://schemas.microsoft.com/office/drawing/2014/main" id="{845D1ECF-F0BC-28C1-D5B5-6FEA9E5BEDF6}"/>
               </a:ext>
             </a:extLst>
           </p:cNvPr>
@@ -33478,7 +35152,7 @@
           <p:cNvPr id="13" name="big">
             <a:extLst>
               <a:ext uri="{FF2B5EF4-FFF2-40B4-BE49-F238E27FC236}">
-                <a16:creationId xmlns:a16="http://schemas.microsoft.com/office/drawing/2014/main" id="{777D7A21-52DC-CEC6-5AB3-0236CF0ADA70}"/>
+                <a16:creationId xmlns:a16="http://schemas.microsoft.com/office/drawing/2014/main" id="{E0C35470-48E9-CC1C-7952-77577DFBE481}"/>
               </a:ext>
             </a:extLst>
           </p:cNvPr>
@@ -33524,7 +35198,7 @@
           <p:cNvPr id="14" name="big-sub">
             <a:extLst>
               <a:ext uri="{FF2B5EF4-FFF2-40B4-BE49-F238E27FC236}">
-                <a16:creationId xmlns:a16="http://schemas.microsoft.com/office/drawing/2014/main" id="{E5ED3894-D43A-A3DB-1999-A259F1F956EE}"/>
+                <a16:creationId xmlns:a16="http://schemas.microsoft.com/office/drawing/2014/main" id="{0324E1A2-1141-9A46-0CB4-9D75F77B9336}"/>
               </a:ext>
             </a:extLst>
           </p:cNvPr>
@@ -33570,7 +35244,7 @@
           <p:cNvPr id="15" name="h-0">
             <a:extLst>
               <a:ext uri="{FF2B5EF4-FFF2-40B4-BE49-F238E27FC236}">
-                <a16:creationId xmlns:a16="http://schemas.microsoft.com/office/drawing/2014/main" id="{60E4F4E1-961B-3FE0-4080-19337853A2A3}"/>
+                <a16:creationId xmlns:a16="http://schemas.microsoft.com/office/drawing/2014/main" id="{C262EEDB-4F3D-C2F6-7A17-ADA635C54348}"/>
               </a:ext>
             </a:extLst>
           </p:cNvPr>
@@ -33638,7 +35312,7 @@
           <p:cNvPr id="16" name="v-0">
             <a:extLst>
               <a:ext uri="{FF2B5EF4-FFF2-40B4-BE49-F238E27FC236}">
-                <a16:creationId xmlns:a16="http://schemas.microsoft.com/office/drawing/2014/main" id="{E6B3BDF4-0301-C3D2-9AFC-B0C987987DE5}"/>
+                <a16:creationId xmlns:a16="http://schemas.microsoft.com/office/drawing/2014/main" id="{1BB3A8C6-2E7C-9204-2038-5D94F8A7B1C2}"/>
               </a:ext>
             </a:extLst>
           </p:cNvPr>
@@ -33706,7 +35380,7 @@
           <p:cNvPr id="17" name="h-1">
             <a:extLst>
               <a:ext uri="{FF2B5EF4-FFF2-40B4-BE49-F238E27FC236}">
-                <a16:creationId xmlns:a16="http://schemas.microsoft.com/office/drawing/2014/main" id="{27899210-1668-B4E5-16F7-9FACE8061E3D}"/>
+                <a16:creationId xmlns:a16="http://schemas.microsoft.com/office/drawing/2014/main" id="{610C2A68-5380-685E-36FD-735A74A31FFF}"/>
               </a:ext>
             </a:extLst>
           </p:cNvPr>
@@ -33774,7 +35448,7 @@
           <p:cNvPr id="18" name="v-1">
             <a:extLst>
               <a:ext uri="{FF2B5EF4-FFF2-40B4-BE49-F238E27FC236}">
-                <a16:creationId xmlns:a16="http://schemas.microsoft.com/office/drawing/2014/main" id="{91B8680D-3C99-D82C-40F9-74BECA81911B}"/>
+                <a16:creationId xmlns:a16="http://schemas.microsoft.com/office/drawing/2014/main" id="{FF8B1332-C51B-CD67-1B48-6D4B6F2B984F}"/>
               </a:ext>
             </a:extLst>
           </p:cNvPr>
@@ -33842,7 +35516,7 @@
           <p:cNvPr id="19" name="h-2">
             <a:extLst>
               <a:ext uri="{FF2B5EF4-FFF2-40B4-BE49-F238E27FC236}">
-                <a16:creationId xmlns:a16="http://schemas.microsoft.com/office/drawing/2014/main" id="{865C62D5-577C-1485-D6D4-D238208B224D}"/>
+                <a16:creationId xmlns:a16="http://schemas.microsoft.com/office/drawing/2014/main" id="{07AEABBB-E151-AFED-4B3E-F05033267C9D}"/>
               </a:ext>
             </a:extLst>
           </p:cNvPr>
@@ -33910,7 +35584,7 @@
           <p:cNvPr id="20" name="v-2">
             <a:extLst>
               <a:ext uri="{FF2B5EF4-FFF2-40B4-BE49-F238E27FC236}">
-                <a16:creationId xmlns:a16="http://schemas.microsoft.com/office/drawing/2014/main" id="{6E323ED7-9C03-32F3-E453-1650B3314A3F}"/>
+                <a16:creationId xmlns:a16="http://schemas.microsoft.com/office/drawing/2014/main" id="{6C15BE71-10E8-19BC-786C-24CCE7843CD8}"/>
               </a:ext>
             </a:extLst>
           </p:cNvPr>
@@ -33978,7 +35652,7 @@
           <p:cNvPr id="21" name="h-3">
             <a:extLst>
               <a:ext uri="{FF2B5EF4-FFF2-40B4-BE49-F238E27FC236}">
-                <a16:creationId xmlns:a16="http://schemas.microsoft.com/office/drawing/2014/main" id="{857B72CB-A6E1-02F1-6835-2E6938964D45}"/>
+                <a16:creationId xmlns:a16="http://schemas.microsoft.com/office/drawing/2014/main" id="{FA5360DF-702C-EEB5-A786-D7B69D410291}"/>
               </a:ext>
             </a:extLst>
           </p:cNvPr>
@@ -34046,7 +35720,7 @@
           <p:cNvPr id="22" name="v-3">
             <a:extLst>
               <a:ext uri="{FF2B5EF4-FFF2-40B4-BE49-F238E27FC236}">
-                <a16:creationId xmlns:a16="http://schemas.microsoft.com/office/drawing/2014/main" id="{10022074-3CC7-52AA-9671-0593D83C302E}"/>
+                <a16:creationId xmlns:a16="http://schemas.microsoft.com/office/drawing/2014/main" id="{0F36F2BC-F4AA-6E9F-20CA-6CDFC9E937BF}"/>
               </a:ext>
             </a:extLst>
           </p:cNvPr>
@@ -34114,7 +35788,7 @@
           <p:cNvPr id="23" name="h-4">
             <a:extLst>
               <a:ext uri="{FF2B5EF4-FFF2-40B4-BE49-F238E27FC236}">
-                <a16:creationId xmlns:a16="http://schemas.microsoft.com/office/drawing/2014/main" id="{74BBD83E-E018-2D0C-0E25-8F45D5339F1B}"/>
+                <a16:creationId xmlns:a16="http://schemas.microsoft.com/office/drawing/2014/main" id="{8553892A-5DF5-7407-2CF2-C019CFEDF711}"/>
               </a:ext>
             </a:extLst>
           </p:cNvPr>
@@ -34182,7 +35856,7 @@
           <p:cNvPr id="24" name="v-4">
             <a:extLst>
               <a:ext uri="{FF2B5EF4-FFF2-40B4-BE49-F238E27FC236}">
-                <a16:creationId xmlns:a16="http://schemas.microsoft.com/office/drawing/2014/main" id="{66606BA9-68D3-5693-9508-3D0AF82E0C33}"/>
+                <a16:creationId xmlns:a16="http://schemas.microsoft.com/office/drawing/2014/main" id="{BCE85639-896E-C5EE-33FD-DDC697C1E10E}"/>
               </a:ext>
             </a:extLst>
           </p:cNvPr>
@@ -34250,7 +35924,7 @@
           <p:cNvPr id="25" name="h-5">
             <a:extLst>
               <a:ext uri="{FF2B5EF4-FFF2-40B4-BE49-F238E27FC236}">
-                <a16:creationId xmlns:a16="http://schemas.microsoft.com/office/drawing/2014/main" id="{25F58CAB-CC87-1111-54A2-E1FA786D7971}"/>
+                <a16:creationId xmlns:a16="http://schemas.microsoft.com/office/drawing/2014/main" id="{261C91F2-3918-6F21-AB6B-E596619D6266}"/>
               </a:ext>
             </a:extLst>
           </p:cNvPr>
@@ -34318,7 +35992,7 @@
           <p:cNvPr id="26" name="v-5">
             <a:extLst>
               <a:ext uri="{FF2B5EF4-FFF2-40B4-BE49-F238E27FC236}">
-                <a16:creationId xmlns:a16="http://schemas.microsoft.com/office/drawing/2014/main" id="{3CB5B788-56B8-BEB1-C2DE-90C52931B644}"/>
+                <a16:creationId xmlns:a16="http://schemas.microsoft.com/office/drawing/2014/main" id="{F1283028-24EF-E2A9-453A-3F355B9A969F}"/>
               </a:ext>
             </a:extLst>
           </p:cNvPr>
@@ -34386,7 +36060,7 @@
           <p:cNvPr id="27" name="path">
             <a:extLst>
               <a:ext uri="{FF2B5EF4-FFF2-40B4-BE49-F238E27FC236}">
-                <a16:creationId xmlns:a16="http://schemas.microsoft.com/office/drawing/2014/main" id="{1AC6C6E4-C2B1-197E-5C11-DC3FCFBDECE2}"/>
+                <a16:creationId xmlns:a16="http://schemas.microsoft.com/office/drawing/2014/main" id="{DFB65F1A-0F1B-60B1-4408-CCFFA6172EC4}"/>
               </a:ext>
             </a:extLst>
           </p:cNvPr>
@@ -34440,7 +36114,7 @@
           <p:cNvPr id="28" name="path-title">
             <a:extLst>
               <a:ext uri="{FF2B5EF4-FFF2-40B4-BE49-F238E27FC236}">
-                <a16:creationId xmlns:a16="http://schemas.microsoft.com/office/drawing/2014/main" id="{649B5A44-FCB7-1814-E54C-CD36F7CC5D88}"/>
+                <a16:creationId xmlns:a16="http://schemas.microsoft.com/office/drawing/2014/main" id="{F79149BD-AF3E-DBDA-6936-B4D04435B714}"/>
               </a:ext>
             </a:extLst>
           </p:cNvPr>
@@ -34486,7 +36160,7 @@
           <p:cNvPr id="29" name="path-text">
             <a:extLst>
               <a:ext uri="{FF2B5EF4-FFF2-40B4-BE49-F238E27FC236}">
-                <a16:creationId xmlns:a16="http://schemas.microsoft.com/office/drawing/2014/main" id="{34D8A406-B90E-D840-316F-9B7B55961F68}"/>
+                <a16:creationId xmlns:a16="http://schemas.microsoft.com/office/drawing/2014/main" id="{6D79960A-C47B-F4CE-7D7E-3AE96EF0AF9B}"/>
               </a:ext>
             </a:extLst>
           </p:cNvPr>
@@ -34532,7 +36206,7 @@
           <p:cNvPr id="30" name="why">
             <a:extLst>
               <a:ext uri="{FF2B5EF4-FFF2-40B4-BE49-F238E27FC236}">
-                <a16:creationId xmlns:a16="http://schemas.microsoft.com/office/drawing/2014/main" id="{16F56B78-9ED1-8DFB-8BA9-34FEC04F20F8}"/>
+                <a16:creationId xmlns:a16="http://schemas.microsoft.com/office/drawing/2014/main" id="{97611743-836E-7C3E-5BA3-3DE957C34D3A}"/>
               </a:ext>
             </a:extLst>
           </p:cNvPr>
@@ -34586,7 +36260,7 @@
           <p:cNvPr id="31" name="why-t">
             <a:extLst>
               <a:ext uri="{FF2B5EF4-FFF2-40B4-BE49-F238E27FC236}">
-                <a16:creationId xmlns:a16="http://schemas.microsoft.com/office/drawing/2014/main" id="{55BF3C61-AADE-9512-F4C5-1A1DFC5794D0}"/>
+                <a16:creationId xmlns:a16="http://schemas.microsoft.com/office/drawing/2014/main" id="{658C0AA7-8EAB-6BCC-E7B2-D85F846EF8B1}"/>
               </a:ext>
             </a:extLst>
           </p:cNvPr>
@@ -34633,7 +36307,7 @@
             <a:hlinkClick r:id="rId4"/>
             <a:extLst>
               <a:ext uri="{FF2B5EF4-FFF2-40B4-BE49-F238E27FC236}">
-                <a16:creationId xmlns:a16="http://schemas.microsoft.com/office/drawing/2014/main" id="{DE815D45-3A2B-D9B3-27B4-264B3AEC06D0}"/>
+                <a16:creationId xmlns:a16="http://schemas.microsoft.com/office/drawing/2014/main" id="{681DDA5D-456B-DE29-14EF-6DA048EA1894}"/>
               </a:ext>
             </a:extLst>
           </p:cNvPr>
@@ -34694,7 +36368,7 @@
     </p:spTree>
     <p:extLst>
       <p:ext uri="{BB962C8B-B14F-4D97-AF65-F5344CB8AC3E}">
-        <p14:creationId xmlns:p14="http://schemas.microsoft.com/office/powerpoint/2010/main" val="1277995124"/>
+        <p14:creationId xmlns:p14="http://schemas.microsoft.com/office/powerpoint/2010/main" val="231724550"/>
       </p:ext>
     </p:extLst>
   </p:cSld>
@@ -34738,7 +36412,7 @@
           <p:cNvPr id="2" name="bg">
             <a:extLst>
               <a:ext uri="{FF2B5EF4-FFF2-40B4-BE49-F238E27FC236}">
-                <a16:creationId xmlns:a16="http://schemas.microsoft.com/office/drawing/2014/main" id="{6BC4CE22-294F-08C6-9354-090CD2983397}"/>
+                <a16:creationId xmlns:a16="http://schemas.microsoft.com/office/drawing/2014/main" id="{F499C577-28CA-8641-55D5-1AC19B653DF6}"/>
               </a:ext>
             </a:extLst>
           </p:cNvPr>
@@ -34799,7 +36473,7 @@
           <p:cNvPr id="3" name="rail">
             <a:extLst>
               <a:ext uri="{FF2B5EF4-FFF2-40B4-BE49-F238E27FC236}">
-                <a16:creationId xmlns:a16="http://schemas.microsoft.com/office/drawing/2014/main" id="{532E3636-50BE-FEF7-C7C8-92997FE844A1}"/>
+                <a16:creationId xmlns:a16="http://schemas.microsoft.com/office/drawing/2014/main" id="{72910E93-28BB-1067-C9CB-B98968F177D5}"/>
               </a:ext>
             </a:extLst>
           </p:cNvPr>
@@ -34860,7 +36534,7 @@
           <p:cNvPr id="4" name="top-rule">
             <a:extLst>
               <a:ext uri="{FF2B5EF4-FFF2-40B4-BE49-F238E27FC236}">
-                <a16:creationId xmlns:a16="http://schemas.microsoft.com/office/drawing/2014/main" id="{D77853BE-EEB4-E810-4B79-9D64B97310E4}"/>
+                <a16:creationId xmlns:a16="http://schemas.microsoft.com/office/drawing/2014/main" id="{07B5E793-4B43-3C1E-C109-FE98BA179806}"/>
               </a:ext>
             </a:extLst>
           </p:cNvPr>
@@ -34901,7 +36575,7 @@
           <p:cNvPr id="5" name="section">
             <a:extLst>
               <a:ext uri="{FF2B5EF4-FFF2-40B4-BE49-F238E27FC236}">
-                <a16:creationId xmlns:a16="http://schemas.microsoft.com/office/drawing/2014/main" id="{AEEBFF78-D6D6-9DD4-BC1E-FE1E75952C56}"/>
+                <a16:creationId xmlns:a16="http://schemas.microsoft.com/office/drawing/2014/main" id="{04094D3F-A3BD-D56F-15FD-897BF66C3931}"/>
               </a:ext>
             </a:extLst>
           </p:cNvPr>
@@ -34947,7 +36621,7 @@
           <p:cNvPr id="6" name="num">
             <a:extLst>
               <a:ext uri="{FF2B5EF4-FFF2-40B4-BE49-F238E27FC236}">
-                <a16:creationId xmlns:a16="http://schemas.microsoft.com/office/drawing/2014/main" id="{272B4EA2-B7D0-AC65-043B-6ECB176C4EC7}"/>
+                <a16:creationId xmlns:a16="http://schemas.microsoft.com/office/drawing/2014/main" id="{B5541F5B-3A91-470C-34BB-E4EF055193FF}"/>
               </a:ext>
             </a:extLst>
           </p:cNvPr>
@@ -34993,7 +36667,7 @@
           <p:cNvPr id="7" name="footer">
             <a:extLst>
               <a:ext uri="{FF2B5EF4-FFF2-40B4-BE49-F238E27FC236}">
-                <a16:creationId xmlns:a16="http://schemas.microsoft.com/office/drawing/2014/main" id="{301B3E7D-DF54-4D97-40BF-D8D1A73A880C}"/>
+                <a16:creationId xmlns:a16="http://schemas.microsoft.com/office/drawing/2014/main" id="{4AA5ED5C-1740-3BDF-CE08-251776462576}"/>
               </a:ext>
             </a:extLst>
           </p:cNvPr>
@@ -35039,7 +36713,7 @@
           <p:cNvPr id="8" name="student">
             <a:extLst>
               <a:ext uri="{FF2B5EF4-FFF2-40B4-BE49-F238E27FC236}">
-                <a16:creationId xmlns:a16="http://schemas.microsoft.com/office/drawing/2014/main" id="{EE829B54-23F9-17F7-FA4C-DC3694074380}"/>
+                <a16:creationId xmlns:a16="http://schemas.microsoft.com/office/drawing/2014/main" id="{6E589FD5-DC08-103C-0EC8-535E82F2C683}"/>
               </a:ext>
             </a:extLst>
           </p:cNvPr>
@@ -35085,7 +36759,7 @@
           <p:cNvPr id="10" name="图片 9">
             <a:extLst>
               <a:ext uri="{FF2B5EF4-FFF2-40B4-BE49-F238E27FC236}">
-                <a16:creationId xmlns:a16="http://schemas.microsoft.com/office/drawing/2014/main" id="{FD0412B5-E666-AA3F-B945-890923BE21A8}"/>
+                <a16:creationId xmlns:a16="http://schemas.microsoft.com/office/drawing/2014/main" id="{110A1939-8717-A850-C7F0-6678901ED07F}"/>
               </a:ext>
             </a:extLst>
           </p:cNvPr>
@@ -35121,7 +36795,7 @@
           <p:cNvPr id="11" name="title">
             <a:extLst>
               <a:ext uri="{FF2B5EF4-FFF2-40B4-BE49-F238E27FC236}">
-                <a16:creationId xmlns:a16="http://schemas.microsoft.com/office/drawing/2014/main" id="{3AD42072-792F-117F-50EE-9098A66A22B0}"/>
+                <a16:creationId xmlns:a16="http://schemas.microsoft.com/office/drawing/2014/main" id="{6D1FA171-7451-62CD-3D69-E84E03B2FC3E}"/>
               </a:ext>
             </a:extLst>
           </p:cNvPr>
@@ -35167,7 +36841,7 @@
           <p:cNvPr id="12" name="subtitle">
             <a:extLst>
               <a:ext uri="{FF2B5EF4-FFF2-40B4-BE49-F238E27FC236}">
-                <a16:creationId xmlns:a16="http://schemas.microsoft.com/office/drawing/2014/main" id="{ED8467A4-EEBA-0C6A-085A-4BC7C8FDA60B}"/>
+                <a16:creationId xmlns:a16="http://schemas.microsoft.com/office/drawing/2014/main" id="{ACB4AAB1-1207-8D54-7D35-D939E3DBA055}"/>
               </a:ext>
             </a:extLst>
           </p:cNvPr>
@@ -35213,7 +36887,7 @@
           <p:cNvPr id="13" name="contract-core">
             <a:extLst>
               <a:ext uri="{FF2B5EF4-FFF2-40B4-BE49-F238E27FC236}">
-                <a16:creationId xmlns:a16="http://schemas.microsoft.com/office/drawing/2014/main" id="{B0774284-B2FB-7DAF-C765-9FDD6252908F}"/>
+                <a16:creationId xmlns:a16="http://schemas.microsoft.com/office/drawing/2014/main" id="{F4419772-E0D2-EC2B-921A-A39618C1F925}"/>
               </a:ext>
             </a:extLst>
           </p:cNvPr>
@@ -35267,7 +36941,7 @@
           <p:cNvPr id="14" name="contract-k">
             <a:extLst>
               <a:ext uri="{FF2B5EF4-FFF2-40B4-BE49-F238E27FC236}">
-                <a16:creationId xmlns:a16="http://schemas.microsoft.com/office/drawing/2014/main" id="{DB23B02C-3021-1FFC-9955-A559A3003743}"/>
+                <a16:creationId xmlns:a16="http://schemas.microsoft.com/office/drawing/2014/main" id="{4B27D23F-DC23-9FA2-B7BB-061A28D26709}"/>
               </a:ext>
             </a:extLst>
           </p:cNvPr>
@@ -35313,7 +36987,7 @@
           <p:cNvPr id="15" name="contract-f">
             <a:extLst>
               <a:ext uri="{FF2B5EF4-FFF2-40B4-BE49-F238E27FC236}">
-                <a16:creationId xmlns:a16="http://schemas.microsoft.com/office/drawing/2014/main" id="{CA315BCF-1203-6985-C614-643006908854}"/>
+                <a16:creationId xmlns:a16="http://schemas.microsoft.com/office/drawing/2014/main" id="{5CD5BD82-4A28-B45A-8D34-183968E3DE3C}"/>
               </a:ext>
             </a:extLst>
           </p:cNvPr>
@@ -35359,7 +37033,7 @@
           <p:cNvPr id="16" name="contract-s">
             <a:extLst>
               <a:ext uri="{FF2B5EF4-FFF2-40B4-BE49-F238E27FC236}">
-                <a16:creationId xmlns:a16="http://schemas.microsoft.com/office/drawing/2014/main" id="{EB52AC33-F340-7CA6-A54D-8E1E23649701}"/>
+                <a16:creationId xmlns:a16="http://schemas.microsoft.com/office/drawing/2014/main" id="{44CAB60A-FF64-ABA7-1A93-65F99DBCE622}"/>
               </a:ext>
             </a:extLst>
           </p:cNvPr>
@@ -35405,7 +37079,7 @@
           <p:cNvPr id="17" name="contract-sep">
             <a:extLst>
               <a:ext uri="{FF2B5EF4-FFF2-40B4-BE49-F238E27FC236}">
-                <a16:creationId xmlns:a16="http://schemas.microsoft.com/office/drawing/2014/main" id="{FF92EE29-2749-56B8-C90C-F5DA56E318C6}"/>
+                <a16:creationId xmlns:a16="http://schemas.microsoft.com/office/drawing/2014/main" id="{E9815F5D-F375-C615-F9FF-DC64AAC4C928}"/>
               </a:ext>
             </a:extLst>
           </p:cNvPr>
@@ -35446,7 +37120,7 @@
           <p:cNvPr id="18" name="stage-0">
             <a:extLst>
               <a:ext uri="{FF2B5EF4-FFF2-40B4-BE49-F238E27FC236}">
-                <a16:creationId xmlns:a16="http://schemas.microsoft.com/office/drawing/2014/main" id="{275DE79E-23FC-FC33-E738-7EAAA8B5AF44}"/>
+                <a16:creationId xmlns:a16="http://schemas.microsoft.com/office/drawing/2014/main" id="{A0133A3B-020E-3808-8BE1-4F792F829F09}"/>
               </a:ext>
             </a:extLst>
           </p:cNvPr>
@@ -35500,7 +37174,7 @@
           <p:cNvPr id="19" name="stage-band-0">
             <a:extLst>
               <a:ext uri="{FF2B5EF4-FFF2-40B4-BE49-F238E27FC236}">
-                <a16:creationId xmlns:a16="http://schemas.microsoft.com/office/drawing/2014/main" id="{0DCF40B7-7D58-CE20-76F5-9D70EB30DE74}"/>
+                <a16:creationId xmlns:a16="http://schemas.microsoft.com/office/drawing/2014/main" id="{FC6FC3F4-8418-451A-4DA8-2E39B6B2FA47}"/>
               </a:ext>
             </a:extLst>
           </p:cNvPr>
@@ -35554,7 +37228,7 @@
           <p:cNvPr id="20" name="stage-num-0">
             <a:extLst>
               <a:ext uri="{FF2B5EF4-FFF2-40B4-BE49-F238E27FC236}">
-                <a16:creationId xmlns:a16="http://schemas.microsoft.com/office/drawing/2014/main" id="{28735914-63E3-CE24-8DD0-19C3C4F18A1A}"/>
+                <a16:creationId xmlns:a16="http://schemas.microsoft.com/office/drawing/2014/main" id="{6189C47B-45D5-5352-FCD8-00FA42E75F01}"/>
               </a:ext>
             </a:extLst>
           </p:cNvPr>
@@ -35600,7 +37274,7 @@
           <p:cNvPr id="21" name="stage-name-0">
             <a:extLst>
               <a:ext uri="{FF2B5EF4-FFF2-40B4-BE49-F238E27FC236}">
-                <a16:creationId xmlns:a16="http://schemas.microsoft.com/office/drawing/2014/main" id="{5C15C07E-F004-34C9-38B1-74206F93C967}"/>
+                <a16:creationId xmlns:a16="http://schemas.microsoft.com/office/drawing/2014/main" id="{E7359ADD-73DA-B46F-0076-2725BD2CA3FA}"/>
               </a:ext>
             </a:extLst>
           </p:cNvPr>
@@ -35646,7 +37320,7 @@
           <p:cNvPr id="22" name="stage-admit-0">
             <a:extLst>
               <a:ext uri="{FF2B5EF4-FFF2-40B4-BE49-F238E27FC236}">
-                <a16:creationId xmlns:a16="http://schemas.microsoft.com/office/drawing/2014/main" id="{D3FD386E-918A-0BC5-322C-B0EA6A069A5D}"/>
+                <a16:creationId xmlns:a16="http://schemas.microsoft.com/office/drawing/2014/main" id="{A874D5FF-5423-1DF8-3335-018C2E844B6D}"/>
               </a:ext>
             </a:extLst>
           </p:cNvPr>
@@ -35692,7 +37366,7 @@
           <p:cNvPr id="23" name="stage-block-0">
             <a:extLst>
               <a:ext uri="{FF2B5EF4-FFF2-40B4-BE49-F238E27FC236}">
-                <a16:creationId xmlns:a16="http://schemas.microsoft.com/office/drawing/2014/main" id="{6E6314FE-2337-E5B5-9E62-F2C26BF238BE}"/>
+                <a16:creationId xmlns:a16="http://schemas.microsoft.com/office/drawing/2014/main" id="{D135ECE1-F773-01F8-8423-8D0B5EA98A5A}"/>
               </a:ext>
             </a:extLst>
           </p:cNvPr>
@@ -35738,7 +37412,7 @@
           <p:cNvPr id="24" name="stage-tie-0">
             <a:extLst>
               <a:ext uri="{FF2B5EF4-FFF2-40B4-BE49-F238E27FC236}">
-                <a16:creationId xmlns:a16="http://schemas.microsoft.com/office/drawing/2014/main" id="{92C53379-D07E-92E8-5442-8BB99E2764FD}"/>
+                <a16:creationId xmlns:a16="http://schemas.microsoft.com/office/drawing/2014/main" id="{9FE0AA0B-96B4-9DF4-649A-8C48D1A7F038}"/>
               </a:ext>
             </a:extLst>
           </p:cNvPr>
@@ -35779,7 +37453,7 @@
           <p:cNvPr id="25" name="stage-1">
             <a:extLst>
               <a:ext uri="{FF2B5EF4-FFF2-40B4-BE49-F238E27FC236}">
-                <a16:creationId xmlns:a16="http://schemas.microsoft.com/office/drawing/2014/main" id="{2E6F55CD-96BE-850F-91A6-DF54AEF30B60}"/>
+                <a16:creationId xmlns:a16="http://schemas.microsoft.com/office/drawing/2014/main" id="{7B1C6BA3-404C-B981-11DE-2C519E4ACF35}"/>
               </a:ext>
             </a:extLst>
           </p:cNvPr>
@@ -35833,7 +37507,7 @@
           <p:cNvPr id="26" name="stage-band-1">
             <a:extLst>
               <a:ext uri="{FF2B5EF4-FFF2-40B4-BE49-F238E27FC236}">
-                <a16:creationId xmlns:a16="http://schemas.microsoft.com/office/drawing/2014/main" id="{F98D6195-64B3-D198-04F1-4E227C3128A9}"/>
+                <a16:creationId xmlns:a16="http://schemas.microsoft.com/office/drawing/2014/main" id="{EF4B3C41-BD85-1A1D-8E2E-F1C1065A4328}"/>
               </a:ext>
             </a:extLst>
           </p:cNvPr>
@@ -35887,7 +37561,7 @@
           <p:cNvPr id="27" name="stage-num-1">
             <a:extLst>
               <a:ext uri="{FF2B5EF4-FFF2-40B4-BE49-F238E27FC236}">
-                <a16:creationId xmlns:a16="http://schemas.microsoft.com/office/drawing/2014/main" id="{A9A269FD-845F-6504-BB78-C6EC4648EA20}"/>
+                <a16:creationId xmlns:a16="http://schemas.microsoft.com/office/drawing/2014/main" id="{2E159F8C-DB45-BE2E-792B-4D504AB6597A}"/>
               </a:ext>
             </a:extLst>
           </p:cNvPr>
@@ -35933,7 +37607,7 @@
           <p:cNvPr id="28" name="stage-name-1">
             <a:extLst>
               <a:ext uri="{FF2B5EF4-FFF2-40B4-BE49-F238E27FC236}">
-                <a16:creationId xmlns:a16="http://schemas.microsoft.com/office/drawing/2014/main" id="{F8E4D579-641F-2925-C7C7-9DADD36C5D55}"/>
+                <a16:creationId xmlns:a16="http://schemas.microsoft.com/office/drawing/2014/main" id="{DF6532A7-C255-4E8D-DD8B-39AB3B245578}"/>
               </a:ext>
             </a:extLst>
           </p:cNvPr>
@@ -35979,7 +37653,7 @@
           <p:cNvPr id="29" name="stage-admit-1">
             <a:extLst>
               <a:ext uri="{FF2B5EF4-FFF2-40B4-BE49-F238E27FC236}">
-                <a16:creationId xmlns:a16="http://schemas.microsoft.com/office/drawing/2014/main" id="{5B443BF8-D0B6-C13E-C2D0-CF7ED67F9E67}"/>
+                <a16:creationId xmlns:a16="http://schemas.microsoft.com/office/drawing/2014/main" id="{EAABF292-E972-20B4-4456-1A946B0BC380}"/>
               </a:ext>
             </a:extLst>
           </p:cNvPr>
@@ -36025,7 +37699,7 @@
           <p:cNvPr id="30" name="stage-block-1">
             <a:extLst>
               <a:ext uri="{FF2B5EF4-FFF2-40B4-BE49-F238E27FC236}">
-                <a16:creationId xmlns:a16="http://schemas.microsoft.com/office/drawing/2014/main" id="{2F57B891-79DC-E7FE-2E34-AA66DDA76445}"/>
+                <a16:creationId xmlns:a16="http://schemas.microsoft.com/office/drawing/2014/main" id="{9EBF921E-869B-D0B0-3561-38DC94759B08}"/>
               </a:ext>
             </a:extLst>
           </p:cNvPr>
@@ -36071,7 +37745,7 @@
           <p:cNvPr id="31" name="stage-tie-1">
             <a:extLst>
               <a:ext uri="{FF2B5EF4-FFF2-40B4-BE49-F238E27FC236}">
-                <a16:creationId xmlns:a16="http://schemas.microsoft.com/office/drawing/2014/main" id="{57D5A369-D481-468D-D5E4-77EA66BFE9B1}"/>
+                <a16:creationId xmlns:a16="http://schemas.microsoft.com/office/drawing/2014/main" id="{5AD6016D-CCB5-D6D5-204C-F2C1FD3CD5D8}"/>
               </a:ext>
             </a:extLst>
           </p:cNvPr>
@@ -36112,7 +37786,7 @@
           <p:cNvPr id="32" name="stage-2">
             <a:extLst>
               <a:ext uri="{FF2B5EF4-FFF2-40B4-BE49-F238E27FC236}">
-                <a16:creationId xmlns:a16="http://schemas.microsoft.com/office/drawing/2014/main" id="{7AACF5DE-D235-1228-3EB2-C0794E78C178}"/>
+                <a16:creationId xmlns:a16="http://schemas.microsoft.com/office/drawing/2014/main" id="{E8DA9967-9F66-4BB5-153F-5290A8DA4FF8}"/>
               </a:ext>
             </a:extLst>
           </p:cNvPr>
@@ -36166,7 +37840,7 @@
           <p:cNvPr id="33" name="stage-band-2">
             <a:extLst>
               <a:ext uri="{FF2B5EF4-FFF2-40B4-BE49-F238E27FC236}">
-                <a16:creationId xmlns:a16="http://schemas.microsoft.com/office/drawing/2014/main" id="{FEB94632-711D-8F08-704B-A76D8E47333D}"/>
+                <a16:creationId xmlns:a16="http://schemas.microsoft.com/office/drawing/2014/main" id="{162ED221-F391-7C9D-F95F-1913F2C3DE37}"/>
               </a:ext>
             </a:extLst>
           </p:cNvPr>
@@ -36220,7 +37894,7 @@
           <p:cNvPr id="34" name="stage-num-2">
             <a:extLst>
               <a:ext uri="{FF2B5EF4-FFF2-40B4-BE49-F238E27FC236}">
-                <a16:creationId xmlns:a16="http://schemas.microsoft.com/office/drawing/2014/main" id="{4E22F9A8-1727-DAE4-6D76-8F63C78167BF}"/>
+                <a16:creationId xmlns:a16="http://schemas.microsoft.com/office/drawing/2014/main" id="{1D88BEDE-28A7-2762-0FB7-DB5C20BB5B50}"/>
               </a:ext>
             </a:extLst>
           </p:cNvPr>
@@ -36266,7 +37940,7 @@
           <p:cNvPr id="35" name="stage-name-2">
             <a:extLst>
               <a:ext uri="{FF2B5EF4-FFF2-40B4-BE49-F238E27FC236}">
-                <a16:creationId xmlns:a16="http://schemas.microsoft.com/office/drawing/2014/main" id="{C64282C5-7D95-5DF7-AB9F-A7BA1A74CC25}"/>
+                <a16:creationId xmlns:a16="http://schemas.microsoft.com/office/drawing/2014/main" id="{8601D8D5-B538-A928-7C48-B69655AD6C15}"/>
               </a:ext>
             </a:extLst>
           </p:cNvPr>
@@ -36312,7 +37986,7 @@
           <p:cNvPr id="36" name="stage-admit-2">
             <a:extLst>
               <a:ext uri="{FF2B5EF4-FFF2-40B4-BE49-F238E27FC236}">
-                <a16:creationId xmlns:a16="http://schemas.microsoft.com/office/drawing/2014/main" id="{DC19901D-D1B7-6179-4EF5-EDE90B1E435C}"/>
+                <a16:creationId xmlns:a16="http://schemas.microsoft.com/office/drawing/2014/main" id="{6ADE7D30-5706-4B72-C32E-FF33CA52AB90}"/>
               </a:ext>
             </a:extLst>
           </p:cNvPr>
@@ -36358,7 +38032,7 @@
           <p:cNvPr id="37" name="stage-block-2">
             <a:extLst>
               <a:ext uri="{FF2B5EF4-FFF2-40B4-BE49-F238E27FC236}">
-                <a16:creationId xmlns:a16="http://schemas.microsoft.com/office/drawing/2014/main" id="{8D1812E8-67AE-020C-A551-70D9CB48F024}"/>
+                <a16:creationId xmlns:a16="http://schemas.microsoft.com/office/drawing/2014/main" id="{D07AB0C4-DA04-DA92-55E4-13970DC0D380}"/>
               </a:ext>
             </a:extLst>
           </p:cNvPr>
@@ -36404,7 +38078,7 @@
           <p:cNvPr id="38" name="stage-tie-2">
             <a:extLst>
               <a:ext uri="{FF2B5EF4-FFF2-40B4-BE49-F238E27FC236}">
-                <a16:creationId xmlns:a16="http://schemas.microsoft.com/office/drawing/2014/main" id="{F548CF7B-AB7B-16E9-9C49-A896D0D8EFF3}"/>
+                <a16:creationId xmlns:a16="http://schemas.microsoft.com/office/drawing/2014/main" id="{CF63CD7C-0E86-0722-2E21-05A74D37B3FE}"/>
               </a:ext>
             </a:extLst>
           </p:cNvPr>
@@ -36445,7 +38119,7 @@
           <p:cNvPr id="39" name="stage-3">
             <a:extLst>
               <a:ext uri="{FF2B5EF4-FFF2-40B4-BE49-F238E27FC236}">
-                <a16:creationId xmlns:a16="http://schemas.microsoft.com/office/drawing/2014/main" id="{62AF58BF-0D78-22FE-1172-D3C636B69C19}"/>
+                <a16:creationId xmlns:a16="http://schemas.microsoft.com/office/drawing/2014/main" id="{2C311285-645A-8ABC-BDA9-3AD0DB60CC76}"/>
               </a:ext>
             </a:extLst>
           </p:cNvPr>
@@ -36499,7 +38173,7 @@
           <p:cNvPr id="40" name="stage-band-3">
             <a:extLst>
               <a:ext uri="{FF2B5EF4-FFF2-40B4-BE49-F238E27FC236}">
-                <a16:creationId xmlns:a16="http://schemas.microsoft.com/office/drawing/2014/main" id="{9D7B9F42-5CC5-ADE8-D27A-570C4FE456AD}"/>
+                <a16:creationId xmlns:a16="http://schemas.microsoft.com/office/drawing/2014/main" id="{A96EA698-A28D-306C-AB36-486FEA92FB4F}"/>
               </a:ext>
             </a:extLst>
           </p:cNvPr>
@@ -36553,7 +38227,7 @@
           <p:cNvPr id="41" name="stage-num-3">
             <a:extLst>
               <a:ext uri="{FF2B5EF4-FFF2-40B4-BE49-F238E27FC236}">
-                <a16:creationId xmlns:a16="http://schemas.microsoft.com/office/drawing/2014/main" id="{35624A21-0C68-4EFF-FA20-61CDC19B6407}"/>
+                <a16:creationId xmlns:a16="http://schemas.microsoft.com/office/drawing/2014/main" id="{28AD94EC-56E7-2C48-3096-99EC1726D1F6}"/>
               </a:ext>
             </a:extLst>
           </p:cNvPr>
@@ -36599,7 +38273,7 @@
           <p:cNvPr id="42" name="stage-name-3">
             <a:extLst>
               <a:ext uri="{FF2B5EF4-FFF2-40B4-BE49-F238E27FC236}">
-                <a16:creationId xmlns:a16="http://schemas.microsoft.com/office/drawing/2014/main" id="{FBB3270B-EFA4-85B9-BD4D-9EFA1677075F}"/>
+                <a16:creationId xmlns:a16="http://schemas.microsoft.com/office/drawing/2014/main" id="{C5898B78-E3E4-1891-57F9-037D4E0978B8}"/>
               </a:ext>
             </a:extLst>
           </p:cNvPr>
@@ -36645,7 +38319,7 @@
           <p:cNvPr id="43" name="stage-admit-3">
             <a:extLst>
               <a:ext uri="{FF2B5EF4-FFF2-40B4-BE49-F238E27FC236}">
-                <a16:creationId xmlns:a16="http://schemas.microsoft.com/office/drawing/2014/main" id="{E82F7D84-B21B-4C49-948B-CFB94F948BB4}"/>
+                <a16:creationId xmlns:a16="http://schemas.microsoft.com/office/drawing/2014/main" id="{88CC5146-0F7D-9F15-5ACE-4FE0DE04DE1F}"/>
               </a:ext>
             </a:extLst>
           </p:cNvPr>
@@ -36691,7 +38365,7 @@
           <p:cNvPr id="44" name="stage-block-3">
             <a:extLst>
               <a:ext uri="{FF2B5EF4-FFF2-40B4-BE49-F238E27FC236}">
-                <a16:creationId xmlns:a16="http://schemas.microsoft.com/office/drawing/2014/main" id="{03B7BF2F-549E-E382-D4FA-9D675EE76208}"/>
+                <a16:creationId xmlns:a16="http://schemas.microsoft.com/office/drawing/2014/main" id="{5669BA5B-0CA9-A14A-8891-35C828DE7731}"/>
               </a:ext>
             </a:extLst>
           </p:cNvPr>
@@ -36737,7 +38411,7 @@
           <p:cNvPr id="45" name="stage-tie-3">
             <a:extLst>
               <a:ext uri="{FF2B5EF4-FFF2-40B4-BE49-F238E27FC236}">
-                <a16:creationId xmlns:a16="http://schemas.microsoft.com/office/drawing/2014/main" id="{2B1D1719-9786-1DC5-67C8-44749951FBD4}"/>
+                <a16:creationId xmlns:a16="http://schemas.microsoft.com/office/drawing/2014/main" id="{5412A5A5-D8FE-3069-1011-CB50E826293D}"/>
               </a:ext>
             </a:extLst>
           </p:cNvPr>
@@ -36778,7 +38452,7 @@
           <p:cNvPr id="46" name="stage-4">
             <a:extLst>
               <a:ext uri="{FF2B5EF4-FFF2-40B4-BE49-F238E27FC236}">
-                <a16:creationId xmlns:a16="http://schemas.microsoft.com/office/drawing/2014/main" id="{0739B3C3-C0A3-E461-3A4F-9D81F79FEC95}"/>
+                <a16:creationId xmlns:a16="http://schemas.microsoft.com/office/drawing/2014/main" id="{BA68A094-A4EA-A18D-F704-694CF99D37CB}"/>
               </a:ext>
             </a:extLst>
           </p:cNvPr>
@@ -36832,7 +38506,7 @@
           <p:cNvPr id="47" name="stage-band-4">
             <a:extLst>
               <a:ext uri="{FF2B5EF4-FFF2-40B4-BE49-F238E27FC236}">
-                <a16:creationId xmlns:a16="http://schemas.microsoft.com/office/drawing/2014/main" id="{7C0A0DCA-E9BE-3FA8-032D-522CA7C75DD1}"/>
+                <a16:creationId xmlns:a16="http://schemas.microsoft.com/office/drawing/2014/main" id="{8A116988-A8B8-A6E9-F701-42F2E17A28DD}"/>
               </a:ext>
             </a:extLst>
           </p:cNvPr>
@@ -36886,7 +38560,7 @@
           <p:cNvPr id="48" name="stage-num-4">
             <a:extLst>
               <a:ext uri="{FF2B5EF4-FFF2-40B4-BE49-F238E27FC236}">
-                <a16:creationId xmlns:a16="http://schemas.microsoft.com/office/drawing/2014/main" id="{0E3B7BCB-CE58-D7A9-656F-1AEC32BA533C}"/>
+                <a16:creationId xmlns:a16="http://schemas.microsoft.com/office/drawing/2014/main" id="{5A5DD7B1-A1D0-6BB6-86F2-4F10D734C81B}"/>
               </a:ext>
             </a:extLst>
           </p:cNvPr>
@@ -36932,7 +38606,7 @@
           <p:cNvPr id="49" name="stage-name-4">
             <a:extLst>
               <a:ext uri="{FF2B5EF4-FFF2-40B4-BE49-F238E27FC236}">
-                <a16:creationId xmlns:a16="http://schemas.microsoft.com/office/drawing/2014/main" id="{4F8B43B9-F200-E9C6-EFE2-9011B0AFAECB}"/>
+                <a16:creationId xmlns:a16="http://schemas.microsoft.com/office/drawing/2014/main" id="{629880E2-9DB2-B38C-EA4E-37F240D97132}"/>
               </a:ext>
             </a:extLst>
           </p:cNvPr>
@@ -36978,7 +38652,7 @@
           <p:cNvPr id="50" name="stage-admit-4">
             <a:extLst>
               <a:ext uri="{FF2B5EF4-FFF2-40B4-BE49-F238E27FC236}">
-                <a16:creationId xmlns:a16="http://schemas.microsoft.com/office/drawing/2014/main" id="{25390501-F95B-448F-849D-394A0C045287}"/>
+                <a16:creationId xmlns:a16="http://schemas.microsoft.com/office/drawing/2014/main" id="{F8B95533-645C-C6C9-045F-65DC13B6C7CC}"/>
               </a:ext>
             </a:extLst>
           </p:cNvPr>
@@ -37024,7 +38698,7 @@
           <p:cNvPr id="51" name="stage-block-4">
             <a:extLst>
               <a:ext uri="{FF2B5EF4-FFF2-40B4-BE49-F238E27FC236}">
-                <a16:creationId xmlns:a16="http://schemas.microsoft.com/office/drawing/2014/main" id="{52E96520-0510-2DFE-6853-3919365A11B9}"/>
+                <a16:creationId xmlns:a16="http://schemas.microsoft.com/office/drawing/2014/main" id="{2AA0363C-0D92-EFD3-5B42-350ECD0360A5}"/>
               </a:ext>
             </a:extLst>
           </p:cNvPr>
@@ -37070,7 +38744,7 @@
           <p:cNvPr id="52" name="stage-tie-4">
             <a:extLst>
               <a:ext uri="{FF2B5EF4-FFF2-40B4-BE49-F238E27FC236}">
-                <a16:creationId xmlns:a16="http://schemas.microsoft.com/office/drawing/2014/main" id="{7E5C7823-A3F8-C6E9-B1B3-9C70D8F42DC7}"/>
+                <a16:creationId xmlns:a16="http://schemas.microsoft.com/office/drawing/2014/main" id="{F5D80C2D-D4EE-3352-DFDA-92F1B03E4FF0}"/>
               </a:ext>
             </a:extLst>
           </p:cNvPr>
@@ -37111,7 +38785,7 @@
           <p:cNvPr id="53" name="takeaway">
             <a:extLst>
               <a:ext uri="{FF2B5EF4-FFF2-40B4-BE49-F238E27FC236}">
-                <a16:creationId xmlns:a16="http://schemas.microsoft.com/office/drawing/2014/main" id="{C6631919-1351-100F-E69B-F1EE2413B0ED}"/>
+                <a16:creationId xmlns:a16="http://schemas.microsoft.com/office/drawing/2014/main" id="{01357257-7503-3AE4-AEA0-3EB8B3B018BC}"/>
               </a:ext>
             </a:extLst>
           </p:cNvPr>
@@ -37165,7 +38839,7 @@
           <p:cNvPr id="54" name="takeaway-t">
             <a:extLst>
               <a:ext uri="{FF2B5EF4-FFF2-40B4-BE49-F238E27FC236}">
-                <a16:creationId xmlns:a16="http://schemas.microsoft.com/office/drawing/2014/main" id="{A0D2EA30-B0A1-1C73-26C0-81D3916F3999}"/>
+                <a16:creationId xmlns:a16="http://schemas.microsoft.com/office/drawing/2014/main" id="{DDE42F64-7103-D366-03C0-D7BF8ACEC4C2}"/>
               </a:ext>
             </a:extLst>
           </p:cNvPr>
@@ -37212,7 +38886,7 @@
             <a:hlinkClick r:id="rId4"/>
             <a:extLst>
               <a:ext uri="{FF2B5EF4-FFF2-40B4-BE49-F238E27FC236}">
-                <a16:creationId xmlns:a16="http://schemas.microsoft.com/office/drawing/2014/main" id="{935A04CF-ED63-A784-DE7C-C1B9E0FACF7A}"/>
+                <a16:creationId xmlns:a16="http://schemas.microsoft.com/office/drawing/2014/main" id="{657F44EF-9121-6DD8-AFF8-0E1366B38506}"/>
               </a:ext>
             </a:extLst>
           </p:cNvPr>
@@ -37273,7 +38947,7 @@
     </p:spTree>
     <p:extLst>
       <p:ext uri="{BB962C8B-B14F-4D97-AF65-F5344CB8AC3E}">
-        <p14:creationId xmlns:p14="http://schemas.microsoft.com/office/powerpoint/2010/main" val="3061667873"/>
+        <p14:creationId xmlns:p14="http://schemas.microsoft.com/office/powerpoint/2010/main" val="2580937557"/>
       </p:ext>
     </p:extLst>
   </p:cSld>
@@ -39245,7 +40919,7 @@
           <p:cNvPr id="2" name="bg">
             <a:extLst>
               <a:ext uri="{FF2B5EF4-FFF2-40B4-BE49-F238E27FC236}">
-                <a16:creationId xmlns:a16="http://schemas.microsoft.com/office/drawing/2014/main" id="{90E0F8CB-BC98-8ED0-A98D-E5CC76B2CE11}"/>
+                <a16:creationId xmlns:a16="http://schemas.microsoft.com/office/drawing/2014/main" id="{B898A84F-D457-887C-D8C3-59D10499E34E}"/>
               </a:ext>
             </a:extLst>
           </p:cNvPr>
@@ -39306,7 +40980,7 @@
           <p:cNvPr id="3" name="rail">
             <a:extLst>
               <a:ext uri="{FF2B5EF4-FFF2-40B4-BE49-F238E27FC236}">
-                <a16:creationId xmlns:a16="http://schemas.microsoft.com/office/drawing/2014/main" id="{BB0A6FCE-7137-098F-F051-F2408BA3BF77}"/>
+                <a16:creationId xmlns:a16="http://schemas.microsoft.com/office/drawing/2014/main" id="{A6089397-B9A2-993C-6B8B-F44367933EAC}"/>
               </a:ext>
             </a:extLst>
           </p:cNvPr>
@@ -39367,7 +41041,7 @@
           <p:cNvPr id="4" name="top-rule">
             <a:extLst>
               <a:ext uri="{FF2B5EF4-FFF2-40B4-BE49-F238E27FC236}">
-                <a16:creationId xmlns:a16="http://schemas.microsoft.com/office/drawing/2014/main" id="{B648BE46-402E-AD2D-E290-E20728AFF435}"/>
+                <a16:creationId xmlns:a16="http://schemas.microsoft.com/office/drawing/2014/main" id="{31171007-8E47-2F17-0CC6-D8CE4783F9DF}"/>
               </a:ext>
             </a:extLst>
           </p:cNvPr>
@@ -39408,7 +41082,7 @@
           <p:cNvPr id="5" name="section">
             <a:extLst>
               <a:ext uri="{FF2B5EF4-FFF2-40B4-BE49-F238E27FC236}">
-                <a16:creationId xmlns:a16="http://schemas.microsoft.com/office/drawing/2014/main" id="{B70ADF24-048C-3B12-4148-115E26AA2C49}"/>
+                <a16:creationId xmlns:a16="http://schemas.microsoft.com/office/drawing/2014/main" id="{8A1C996A-C57F-7472-3B8D-A560A64E0070}"/>
               </a:ext>
             </a:extLst>
           </p:cNvPr>
@@ -39454,7 +41128,7 @@
           <p:cNvPr id="6" name="num">
             <a:extLst>
               <a:ext uri="{FF2B5EF4-FFF2-40B4-BE49-F238E27FC236}">
-                <a16:creationId xmlns:a16="http://schemas.microsoft.com/office/drawing/2014/main" id="{D4D3EB47-CB2D-0E17-91D2-761BE57391F2}"/>
+                <a16:creationId xmlns:a16="http://schemas.microsoft.com/office/drawing/2014/main" id="{E9DDBE14-2D99-F6C1-CF0E-7A45140A82EE}"/>
               </a:ext>
             </a:extLst>
           </p:cNvPr>
@@ -39500,7 +41174,7 @@
           <p:cNvPr id="7" name="footer">
             <a:extLst>
               <a:ext uri="{FF2B5EF4-FFF2-40B4-BE49-F238E27FC236}">
-                <a16:creationId xmlns:a16="http://schemas.microsoft.com/office/drawing/2014/main" id="{CAAB322C-A883-A247-E8D3-24C39E518E66}"/>
+                <a16:creationId xmlns:a16="http://schemas.microsoft.com/office/drawing/2014/main" id="{8076815B-B0C4-580A-109D-FFA12D5C0CF2}"/>
               </a:ext>
             </a:extLst>
           </p:cNvPr>
@@ -39546,7 +41220,7 @@
           <p:cNvPr id="8" name="student">
             <a:extLst>
               <a:ext uri="{FF2B5EF4-FFF2-40B4-BE49-F238E27FC236}">
-                <a16:creationId xmlns:a16="http://schemas.microsoft.com/office/drawing/2014/main" id="{9CF53833-B78C-8677-2D67-42FE03B7F505}"/>
+                <a16:creationId xmlns:a16="http://schemas.microsoft.com/office/drawing/2014/main" id="{ADF06F9B-D2B7-B6FE-8CE4-483BF745FB1D}"/>
               </a:ext>
             </a:extLst>
           </p:cNvPr>
@@ -39592,7 +41266,7 @@
           <p:cNvPr id="10" name="图片 9">
             <a:extLst>
               <a:ext uri="{FF2B5EF4-FFF2-40B4-BE49-F238E27FC236}">
-                <a16:creationId xmlns:a16="http://schemas.microsoft.com/office/drawing/2014/main" id="{38F52FDC-84FA-12F6-65A9-5AC0B9FE633E}"/>
+                <a16:creationId xmlns:a16="http://schemas.microsoft.com/office/drawing/2014/main" id="{75948DAC-517B-7C99-546C-EACD34D9B477}"/>
               </a:ext>
             </a:extLst>
           </p:cNvPr>
@@ -39628,7 +41302,7 @@
           <p:cNvPr id="11" name="title">
             <a:extLst>
               <a:ext uri="{FF2B5EF4-FFF2-40B4-BE49-F238E27FC236}">
-                <a16:creationId xmlns:a16="http://schemas.microsoft.com/office/drawing/2014/main" id="{6BC612B8-65CC-6A6E-9C58-1B834F9867F6}"/>
+                <a16:creationId xmlns:a16="http://schemas.microsoft.com/office/drawing/2014/main" id="{37D77C79-6404-71C4-B358-F724572464C3}"/>
               </a:ext>
             </a:extLst>
           </p:cNvPr>
@@ -39674,7 +41348,7 @@
           <p:cNvPr id="12" name="subtitle">
             <a:extLst>
               <a:ext uri="{FF2B5EF4-FFF2-40B4-BE49-F238E27FC236}">
-                <a16:creationId xmlns:a16="http://schemas.microsoft.com/office/drawing/2014/main" id="{5541D599-DBBD-E340-3BDC-E19E2405EBD5}"/>
+                <a16:creationId xmlns:a16="http://schemas.microsoft.com/office/drawing/2014/main" id="{32AA58C3-37A1-F3AA-4F9A-9AE3DC3DFF43}"/>
               </a:ext>
             </a:extLst>
           </p:cNvPr>
@@ -39720,7 +41394,7 @@
           <p:cNvPr id="13" name="formula">
             <a:extLst>
               <a:ext uri="{FF2B5EF4-FFF2-40B4-BE49-F238E27FC236}">
-                <a16:creationId xmlns:a16="http://schemas.microsoft.com/office/drawing/2014/main" id="{664CCDB3-A0C2-AF8A-F67E-ADF07BC69B2E}"/>
+                <a16:creationId xmlns:a16="http://schemas.microsoft.com/office/drawing/2014/main" id="{162F8E7C-5CA9-3642-9617-ED0291366BA6}"/>
               </a:ext>
             </a:extLst>
           </p:cNvPr>
@@ -39774,7 +41448,7 @@
           <p:cNvPr id="14" name="formula-k">
             <a:extLst>
               <a:ext uri="{FF2B5EF4-FFF2-40B4-BE49-F238E27FC236}">
-                <a16:creationId xmlns:a16="http://schemas.microsoft.com/office/drawing/2014/main" id="{41C5BF55-45C8-EC24-CE6A-37707831331F}"/>
+                <a16:creationId xmlns:a16="http://schemas.microsoft.com/office/drawing/2014/main" id="{74F67845-61EB-0436-F7AB-86213A560A89}"/>
               </a:ext>
             </a:extLst>
           </p:cNvPr>
@@ -39820,7 +41494,7 @@
           <p:cNvPr id="15" name="formula-main">
             <a:extLst>
               <a:ext uri="{FF2B5EF4-FFF2-40B4-BE49-F238E27FC236}">
-                <a16:creationId xmlns:a16="http://schemas.microsoft.com/office/drawing/2014/main" id="{4D872CA6-6E82-01CF-D5EC-C421BE58C48A}"/>
+                <a16:creationId xmlns:a16="http://schemas.microsoft.com/office/drawing/2014/main" id="{09FFD9BA-4A9C-260A-50C9-F40C446BC5D3}"/>
               </a:ext>
             </a:extLst>
           </p:cNvPr>
@@ -39866,7 +41540,7 @@
           <p:cNvPr id="16" name="formula-sub">
             <a:extLst>
               <a:ext uri="{FF2B5EF4-FFF2-40B4-BE49-F238E27FC236}">
-                <a16:creationId xmlns:a16="http://schemas.microsoft.com/office/drawing/2014/main" id="{BFD184DD-2D6D-723B-0AB1-AA68F2B9D4AE}"/>
+                <a16:creationId xmlns:a16="http://schemas.microsoft.com/office/drawing/2014/main" id="{89D4C6FE-6A3C-2DAB-AA9B-8279BE237EB0}"/>
               </a:ext>
             </a:extLst>
           </p:cNvPr>
@@ -39915,7 +41589,7 @@
           <p:cNvPr id="17" name="algo">
             <a:extLst>
               <a:ext uri="{FF2B5EF4-FFF2-40B4-BE49-F238E27FC236}">
-                <a16:creationId xmlns:a16="http://schemas.microsoft.com/office/drawing/2014/main" id="{51512467-9E24-DBED-AEE1-1859AAA06689}"/>
+                <a16:creationId xmlns:a16="http://schemas.microsoft.com/office/drawing/2014/main" id="{6A5E10E7-6EF8-B18C-75EC-3168630DE710}"/>
               </a:ext>
             </a:extLst>
           </p:cNvPr>
@@ -39969,7 +41643,7 @@
           <p:cNvPr id="18" name="algo-k">
             <a:extLst>
               <a:ext uri="{FF2B5EF4-FFF2-40B4-BE49-F238E27FC236}">
-                <a16:creationId xmlns:a16="http://schemas.microsoft.com/office/drawing/2014/main" id="{6ED31627-6BEE-6057-B64E-76A86FDC7016}"/>
+                <a16:creationId xmlns:a16="http://schemas.microsoft.com/office/drawing/2014/main" id="{3FDEA507-25ED-38F3-AE46-BEF90186DBA8}"/>
               </a:ext>
             </a:extLst>
           </p:cNvPr>
@@ -40015,7 +41689,7 @@
           <p:cNvPr id="19" name="algo-t">
             <a:extLst>
               <a:ext uri="{FF2B5EF4-FFF2-40B4-BE49-F238E27FC236}">
-                <a16:creationId xmlns:a16="http://schemas.microsoft.com/office/drawing/2014/main" id="{377C5FA9-8C16-4E25-2F7C-EEB48136253A}"/>
+                <a16:creationId xmlns:a16="http://schemas.microsoft.com/office/drawing/2014/main" id="{9DB2CEE5-157C-A4E4-D45D-49A8CACCC5D9}"/>
               </a:ext>
             </a:extLst>
           </p:cNvPr>
@@ -40065,7 +41739,7 @@
           <p:cNvPr id="20" name="eq-0">
             <a:extLst>
               <a:ext uri="{FF2B5EF4-FFF2-40B4-BE49-F238E27FC236}">
-                <a16:creationId xmlns:a16="http://schemas.microsoft.com/office/drawing/2014/main" id="{57B1BA12-3AC2-7F84-0566-17DA2FB84082}"/>
+                <a16:creationId xmlns:a16="http://schemas.microsoft.com/office/drawing/2014/main" id="{65E8C714-B1BB-BBB1-E246-958FC207F2C0}"/>
               </a:ext>
             </a:extLst>
           </p:cNvPr>
@@ -40119,7 +41793,7 @@
           <p:cNvPr id="21" name="eq-band-0">
             <a:extLst>
               <a:ext uri="{FF2B5EF4-FFF2-40B4-BE49-F238E27FC236}">
-                <a16:creationId xmlns:a16="http://schemas.microsoft.com/office/drawing/2014/main" id="{57931CCB-C1C9-2494-A00D-6E84458337D7}"/>
+                <a16:creationId xmlns:a16="http://schemas.microsoft.com/office/drawing/2014/main" id="{B5B63F64-FCE1-46A7-3A9A-4F26901FC24D}"/>
               </a:ext>
             </a:extLst>
           </p:cNvPr>
@@ -40173,7 +41847,7 @@
           <p:cNvPr id="22" name="eq-n-0">
             <a:extLst>
               <a:ext uri="{FF2B5EF4-FFF2-40B4-BE49-F238E27FC236}">
-                <a16:creationId xmlns:a16="http://schemas.microsoft.com/office/drawing/2014/main" id="{0477D16A-AEE2-C571-574C-EC58D6F8445F}"/>
+                <a16:creationId xmlns:a16="http://schemas.microsoft.com/office/drawing/2014/main" id="{D5B62178-0E57-00F9-5359-152B33379D36}"/>
               </a:ext>
             </a:extLst>
           </p:cNvPr>
@@ -40219,7 +41893,7 @@
           <p:cNvPr id="23" name="eq-s-0">
             <a:extLst>
               <a:ext uri="{FF2B5EF4-FFF2-40B4-BE49-F238E27FC236}">
-                <a16:creationId xmlns:a16="http://schemas.microsoft.com/office/drawing/2014/main" id="{7FA25A19-AFCE-48D7-62C9-90D506841490}"/>
+                <a16:creationId xmlns:a16="http://schemas.microsoft.com/office/drawing/2014/main" id="{D315D880-A367-CC98-3520-A78378CC0D09}"/>
               </a:ext>
             </a:extLst>
           </p:cNvPr>
@@ -40265,7 +41939,7 @@
           <p:cNvPr id="24" name="eq-1">
             <a:extLst>
               <a:ext uri="{FF2B5EF4-FFF2-40B4-BE49-F238E27FC236}">
-                <a16:creationId xmlns:a16="http://schemas.microsoft.com/office/drawing/2014/main" id="{638195F7-870D-5742-200F-A283E11B91DE}"/>
+                <a16:creationId xmlns:a16="http://schemas.microsoft.com/office/drawing/2014/main" id="{493EEEA7-CAD2-2221-4C0D-6E7BCE2E4132}"/>
               </a:ext>
             </a:extLst>
           </p:cNvPr>
@@ -40319,7 +41993,7 @@
           <p:cNvPr id="25" name="eq-band-1">
             <a:extLst>
               <a:ext uri="{FF2B5EF4-FFF2-40B4-BE49-F238E27FC236}">
-                <a16:creationId xmlns:a16="http://schemas.microsoft.com/office/drawing/2014/main" id="{56D6D6E0-B49C-30C1-18AA-CFF11E7C29CC}"/>
+                <a16:creationId xmlns:a16="http://schemas.microsoft.com/office/drawing/2014/main" id="{C7FB18BF-6E48-5D5E-7D43-CAF9448D0E45}"/>
               </a:ext>
             </a:extLst>
           </p:cNvPr>
@@ -40373,7 +42047,7 @@
           <p:cNvPr id="26" name="eq-n-1">
             <a:extLst>
               <a:ext uri="{FF2B5EF4-FFF2-40B4-BE49-F238E27FC236}">
-                <a16:creationId xmlns:a16="http://schemas.microsoft.com/office/drawing/2014/main" id="{84FA2E57-90F6-1A24-8EB0-7CE08131B05B}"/>
+                <a16:creationId xmlns:a16="http://schemas.microsoft.com/office/drawing/2014/main" id="{4F4D98E1-B0F3-8877-18E0-E34BA2382B5A}"/>
               </a:ext>
             </a:extLst>
           </p:cNvPr>
@@ -40419,7 +42093,7 @@
           <p:cNvPr id="27" name="eq-s-1">
             <a:extLst>
               <a:ext uri="{FF2B5EF4-FFF2-40B4-BE49-F238E27FC236}">
-                <a16:creationId xmlns:a16="http://schemas.microsoft.com/office/drawing/2014/main" id="{4B19D2A4-C3E9-F24B-8329-1EB326434583}"/>
+                <a16:creationId xmlns:a16="http://schemas.microsoft.com/office/drawing/2014/main" id="{B94ED1BB-AA04-4D36-5785-13EF3BAB30E3}"/>
               </a:ext>
             </a:extLst>
           </p:cNvPr>
@@ -40465,7 +42139,7 @@
           <p:cNvPr id="28" name="eq-2">
             <a:extLst>
               <a:ext uri="{FF2B5EF4-FFF2-40B4-BE49-F238E27FC236}">
-                <a16:creationId xmlns:a16="http://schemas.microsoft.com/office/drawing/2014/main" id="{EEB4BB9D-801E-4274-E819-4E698ABEA874}"/>
+                <a16:creationId xmlns:a16="http://schemas.microsoft.com/office/drawing/2014/main" id="{8EDBD7E5-F3A9-11C3-AC54-689D3F39EDD8}"/>
               </a:ext>
             </a:extLst>
           </p:cNvPr>
@@ -40519,7 +42193,7 @@
           <p:cNvPr id="29" name="eq-band-2">
             <a:extLst>
               <a:ext uri="{FF2B5EF4-FFF2-40B4-BE49-F238E27FC236}">
-                <a16:creationId xmlns:a16="http://schemas.microsoft.com/office/drawing/2014/main" id="{570F1DC7-9B9F-F1BA-55F8-5E805737AB4E}"/>
+                <a16:creationId xmlns:a16="http://schemas.microsoft.com/office/drawing/2014/main" id="{9BD71AE3-0588-A210-C2AF-EB183E33B3F1}"/>
               </a:ext>
             </a:extLst>
           </p:cNvPr>
@@ -40573,7 +42247,7 @@
           <p:cNvPr id="30" name="eq-n-2">
             <a:extLst>
               <a:ext uri="{FF2B5EF4-FFF2-40B4-BE49-F238E27FC236}">
-                <a16:creationId xmlns:a16="http://schemas.microsoft.com/office/drawing/2014/main" id="{1C1D22E6-369A-7B44-505C-A4CB9BD2B194}"/>
+                <a16:creationId xmlns:a16="http://schemas.microsoft.com/office/drawing/2014/main" id="{A9858803-F2FE-72D1-BECD-B0B073D13EA1}"/>
               </a:ext>
             </a:extLst>
           </p:cNvPr>
@@ -40619,7 +42293,7 @@
           <p:cNvPr id="31" name="eq-s-2">
             <a:extLst>
               <a:ext uri="{FF2B5EF4-FFF2-40B4-BE49-F238E27FC236}">
-                <a16:creationId xmlns:a16="http://schemas.microsoft.com/office/drawing/2014/main" id="{35C1EEC3-CD8D-D835-6F59-251ABF312824}"/>
+                <a16:creationId xmlns:a16="http://schemas.microsoft.com/office/drawing/2014/main" id="{24C129A9-25ED-F4C3-1EE4-57CE83BB8F09}"/>
               </a:ext>
             </a:extLst>
           </p:cNvPr>
@@ -40666,7 +42340,7 @@
             <a:hlinkClick r:id="rId4"/>
             <a:extLst>
               <a:ext uri="{FF2B5EF4-FFF2-40B4-BE49-F238E27FC236}">
-                <a16:creationId xmlns:a16="http://schemas.microsoft.com/office/drawing/2014/main" id="{DD19DB29-ECEF-B701-B49F-6B89016A429C}"/>
+                <a16:creationId xmlns:a16="http://schemas.microsoft.com/office/drawing/2014/main" id="{1E6EDB1D-5D19-E945-891F-60857A776949}"/>
               </a:ext>
             </a:extLst>
           </p:cNvPr>
@@ -40727,7 +42401,7 @@
     </p:spTree>
     <p:extLst>
       <p:ext uri="{BB962C8B-B14F-4D97-AF65-F5344CB8AC3E}">
-        <p14:creationId xmlns:p14="http://schemas.microsoft.com/office/powerpoint/2010/main" val="1769925379"/>
+        <p14:creationId xmlns:p14="http://schemas.microsoft.com/office/powerpoint/2010/main" val="601014240"/>
       </p:ext>
     </p:extLst>
   </p:cSld>
@@ -40771,7 +42445,7 @@
           <p:cNvPr id="2" name="bg">
             <a:extLst>
               <a:ext uri="{FF2B5EF4-FFF2-40B4-BE49-F238E27FC236}">
-                <a16:creationId xmlns:a16="http://schemas.microsoft.com/office/drawing/2014/main" id="{9F21E5CA-C246-0C9D-F868-71581380E4E1}"/>
+                <a16:creationId xmlns:a16="http://schemas.microsoft.com/office/drawing/2014/main" id="{12FB29DA-1BFD-45AF-333D-C57237AE67A0}"/>
               </a:ext>
             </a:extLst>
           </p:cNvPr>
@@ -40832,7 +42506,7 @@
           <p:cNvPr id="3" name="rail">
             <a:extLst>
               <a:ext uri="{FF2B5EF4-FFF2-40B4-BE49-F238E27FC236}">
-                <a16:creationId xmlns:a16="http://schemas.microsoft.com/office/drawing/2014/main" id="{CDE8024D-C198-1E8C-A4F4-81C275624839}"/>
+                <a16:creationId xmlns:a16="http://schemas.microsoft.com/office/drawing/2014/main" id="{F5E52FB2-6721-A744-5510-BAE31A166441}"/>
               </a:ext>
             </a:extLst>
           </p:cNvPr>
@@ -40893,7 +42567,7 @@
           <p:cNvPr id="4" name="top-rule">
             <a:extLst>
               <a:ext uri="{FF2B5EF4-FFF2-40B4-BE49-F238E27FC236}">
-                <a16:creationId xmlns:a16="http://schemas.microsoft.com/office/drawing/2014/main" id="{E9D2E772-F0DF-E1AC-D6E0-AAEBCAFF394B}"/>
+                <a16:creationId xmlns:a16="http://schemas.microsoft.com/office/drawing/2014/main" id="{2EB64AB6-C893-C395-2EA8-0873A49AB291}"/>
               </a:ext>
             </a:extLst>
           </p:cNvPr>
@@ -40934,7 +42608,7 @@
           <p:cNvPr id="5" name="section">
             <a:extLst>
               <a:ext uri="{FF2B5EF4-FFF2-40B4-BE49-F238E27FC236}">
-                <a16:creationId xmlns:a16="http://schemas.microsoft.com/office/drawing/2014/main" id="{A6B47AE8-BF18-B962-EB3A-BB2E21732D28}"/>
+                <a16:creationId xmlns:a16="http://schemas.microsoft.com/office/drawing/2014/main" id="{540157CB-9753-6C68-CA40-72C057BEB037}"/>
               </a:ext>
             </a:extLst>
           </p:cNvPr>
@@ -40980,7 +42654,7 @@
           <p:cNvPr id="6" name="num">
             <a:extLst>
               <a:ext uri="{FF2B5EF4-FFF2-40B4-BE49-F238E27FC236}">
-                <a16:creationId xmlns:a16="http://schemas.microsoft.com/office/drawing/2014/main" id="{6A87563A-C4FF-9E6D-58E7-7DBA21B20628}"/>
+                <a16:creationId xmlns:a16="http://schemas.microsoft.com/office/drawing/2014/main" id="{AD82BE23-CF0E-AF75-905F-E516711343D6}"/>
               </a:ext>
             </a:extLst>
           </p:cNvPr>
@@ -41026,7 +42700,7 @@
           <p:cNvPr id="7" name="footer">
             <a:extLst>
               <a:ext uri="{FF2B5EF4-FFF2-40B4-BE49-F238E27FC236}">
-                <a16:creationId xmlns:a16="http://schemas.microsoft.com/office/drawing/2014/main" id="{FB841D89-DEBE-9CDA-C1EC-7501014C0EF8}"/>
+                <a16:creationId xmlns:a16="http://schemas.microsoft.com/office/drawing/2014/main" id="{E0C466D7-C614-354D-BD6D-F218E796D57C}"/>
               </a:ext>
             </a:extLst>
           </p:cNvPr>
@@ -41072,7 +42746,7 @@
           <p:cNvPr id="8" name="student">
             <a:extLst>
               <a:ext uri="{FF2B5EF4-FFF2-40B4-BE49-F238E27FC236}">
-                <a16:creationId xmlns:a16="http://schemas.microsoft.com/office/drawing/2014/main" id="{70AF5864-6531-B76E-954D-D79E32D34BE3}"/>
+                <a16:creationId xmlns:a16="http://schemas.microsoft.com/office/drawing/2014/main" id="{B499F295-357B-8C01-E18D-B594F7A7618C}"/>
               </a:ext>
             </a:extLst>
           </p:cNvPr>
@@ -41118,7 +42792,7 @@
           <p:cNvPr id="10" name="图片 9">
             <a:extLst>
               <a:ext uri="{FF2B5EF4-FFF2-40B4-BE49-F238E27FC236}">
-                <a16:creationId xmlns:a16="http://schemas.microsoft.com/office/drawing/2014/main" id="{77444894-1713-6890-B553-621C748E64A7}"/>
+                <a16:creationId xmlns:a16="http://schemas.microsoft.com/office/drawing/2014/main" id="{01F564DE-6B27-39ED-2EFB-43B38BEA17BD}"/>
               </a:ext>
             </a:extLst>
           </p:cNvPr>
@@ -41154,7 +42828,7 @@
           <p:cNvPr id="11" name="title">
             <a:extLst>
               <a:ext uri="{FF2B5EF4-FFF2-40B4-BE49-F238E27FC236}">
-                <a16:creationId xmlns:a16="http://schemas.microsoft.com/office/drawing/2014/main" id="{CE15726B-2236-14EA-7951-00898BE8E939}"/>
+                <a16:creationId xmlns:a16="http://schemas.microsoft.com/office/drawing/2014/main" id="{F2256E40-41FC-7F91-7789-58FD825B069A}"/>
               </a:ext>
             </a:extLst>
           </p:cNvPr>
@@ -41200,7 +42874,7 @@
           <p:cNvPr id="12" name="subtitle">
             <a:extLst>
               <a:ext uri="{FF2B5EF4-FFF2-40B4-BE49-F238E27FC236}">
-                <a16:creationId xmlns:a16="http://schemas.microsoft.com/office/drawing/2014/main" id="{AFE0E327-BD6E-827B-4BFA-11D17524B7AE}"/>
+                <a16:creationId xmlns:a16="http://schemas.microsoft.com/office/drawing/2014/main" id="{F7B229ED-3A7D-F8C8-61D9-084A19053460}"/>
               </a:ext>
             </a:extLst>
           </p:cNvPr>
@@ -41246,7 +42920,7 @@
           <p:cNvPr id="13" name="headline">
             <a:extLst>
               <a:ext uri="{FF2B5EF4-FFF2-40B4-BE49-F238E27FC236}">
-                <a16:creationId xmlns:a16="http://schemas.microsoft.com/office/drawing/2014/main" id="{7B6275CF-7DF4-D438-1580-6391607E9FF7}"/>
+                <a16:creationId xmlns:a16="http://schemas.microsoft.com/office/drawing/2014/main" id="{BE1CC702-5116-66E9-F236-32EB29678E53}"/>
               </a:ext>
             </a:extLst>
           </p:cNvPr>
@@ -41300,7 +42974,7 @@
           <p:cNvPr id="14" name="headline-k">
             <a:extLst>
               <a:ext uri="{FF2B5EF4-FFF2-40B4-BE49-F238E27FC236}">
-                <a16:creationId xmlns:a16="http://schemas.microsoft.com/office/drawing/2014/main" id="{7285FE7E-E16F-8AD2-D57C-8B89FDC2CEF9}"/>
+                <a16:creationId xmlns:a16="http://schemas.microsoft.com/office/drawing/2014/main" id="{A1ED0870-3F28-D796-E5B7-BD847CCD320B}"/>
               </a:ext>
             </a:extLst>
           </p:cNvPr>
@@ -41346,7 +43020,7 @@
           <p:cNvPr id="15" name="headline-t">
             <a:extLst>
               <a:ext uri="{FF2B5EF4-FFF2-40B4-BE49-F238E27FC236}">
-                <a16:creationId xmlns:a16="http://schemas.microsoft.com/office/drawing/2014/main" id="{BA5E8281-BE0B-2A1C-C5BC-C36BECDB7E72}"/>
+                <a16:creationId xmlns:a16="http://schemas.microsoft.com/office/drawing/2014/main" id="{7061511C-4C39-3127-9C43-C654807B3FE5}"/>
               </a:ext>
             </a:extLst>
           </p:cNvPr>
@@ -41392,7 +43066,7 @@
           <p:cNvPr id="16" name="big-0">
             <a:extLst>
               <a:ext uri="{FF2B5EF4-FFF2-40B4-BE49-F238E27FC236}">
-                <a16:creationId xmlns:a16="http://schemas.microsoft.com/office/drawing/2014/main" id="{55ED133D-05EA-02E2-F732-92D2B3FE9860}"/>
+                <a16:creationId xmlns:a16="http://schemas.microsoft.com/office/drawing/2014/main" id="{38543447-3EAA-B077-7B4D-16A97B401577}"/>
               </a:ext>
             </a:extLst>
           </p:cNvPr>
@@ -41446,7 +43120,7 @@
           <p:cNvPr id="17" name="big-band-0">
             <a:extLst>
               <a:ext uri="{FF2B5EF4-FFF2-40B4-BE49-F238E27FC236}">
-                <a16:creationId xmlns:a16="http://schemas.microsoft.com/office/drawing/2014/main" id="{04F70103-DBA7-E8BC-D7D1-720F22D8AF15}"/>
+                <a16:creationId xmlns:a16="http://schemas.microsoft.com/office/drawing/2014/main" id="{FF32BBD6-74A5-FAF3-114A-D29A0E9DF7D9}"/>
               </a:ext>
             </a:extLst>
           </p:cNvPr>
@@ -41500,7 +43174,7 @@
           <p:cNvPr id="18" name="big-name-0">
             <a:extLst>
               <a:ext uri="{FF2B5EF4-FFF2-40B4-BE49-F238E27FC236}">
-                <a16:creationId xmlns:a16="http://schemas.microsoft.com/office/drawing/2014/main" id="{058EB2EE-2540-17C9-91B4-C5FA7596EB14}"/>
+                <a16:creationId xmlns:a16="http://schemas.microsoft.com/office/drawing/2014/main" id="{2DB14632-D661-ED23-8611-F426666DE650}"/>
               </a:ext>
             </a:extLst>
           </p:cNvPr>
@@ -41546,7 +43220,7 @@
           <p:cNvPr id="19" name="big-val-0">
             <a:extLst>
               <a:ext uri="{FF2B5EF4-FFF2-40B4-BE49-F238E27FC236}">
-                <a16:creationId xmlns:a16="http://schemas.microsoft.com/office/drawing/2014/main" id="{EF6BA11F-D121-AD2C-A7ED-6735CA4E06E4}"/>
+                <a16:creationId xmlns:a16="http://schemas.microsoft.com/office/drawing/2014/main" id="{8592A941-FC26-0878-B253-2FDB93BEB1F1}"/>
               </a:ext>
             </a:extLst>
           </p:cNvPr>
@@ -41592,7 +43266,7 @@
           <p:cNvPr id="20" name="big-ok-0">
             <a:extLst>
               <a:ext uri="{FF2B5EF4-FFF2-40B4-BE49-F238E27FC236}">
-                <a16:creationId xmlns:a16="http://schemas.microsoft.com/office/drawing/2014/main" id="{8B281D78-DC79-23A3-B7EC-0A0CA8CB3231}"/>
+                <a16:creationId xmlns:a16="http://schemas.microsoft.com/office/drawing/2014/main" id="{73DCBDBC-E4F4-F325-E52E-0599DA1428B4}"/>
               </a:ext>
             </a:extLst>
           </p:cNvPr>
@@ -41638,7 +43312,7 @@
           <p:cNvPr id="21" name="big-ok-t-0">
             <a:extLst>
               <a:ext uri="{FF2B5EF4-FFF2-40B4-BE49-F238E27FC236}">
-                <a16:creationId xmlns:a16="http://schemas.microsoft.com/office/drawing/2014/main" id="{9994CD83-4072-7BFC-1984-3067CB62AF90}"/>
+                <a16:creationId xmlns:a16="http://schemas.microsoft.com/office/drawing/2014/main" id="{1B23B3B5-BFB8-A2D7-1C31-74F4382F419C}"/>
               </a:ext>
             </a:extLst>
           </p:cNvPr>
@@ -41684,7 +43358,7 @@
           <p:cNvPr id="22" name="big-no-0">
             <a:extLst>
               <a:ext uri="{FF2B5EF4-FFF2-40B4-BE49-F238E27FC236}">
-                <a16:creationId xmlns:a16="http://schemas.microsoft.com/office/drawing/2014/main" id="{8B4CC18A-52DC-D1B7-D37E-45B7CBA1CC7E}"/>
+                <a16:creationId xmlns:a16="http://schemas.microsoft.com/office/drawing/2014/main" id="{307E3460-3195-E75F-347F-A38DB79CAE99}"/>
               </a:ext>
             </a:extLst>
           </p:cNvPr>
@@ -41730,7 +43404,7 @@
           <p:cNvPr id="23" name="big-no-t-0">
             <a:extLst>
               <a:ext uri="{FF2B5EF4-FFF2-40B4-BE49-F238E27FC236}">
-                <a16:creationId xmlns:a16="http://schemas.microsoft.com/office/drawing/2014/main" id="{29997E1D-2513-2423-AF86-77544FC0A7F9}"/>
+                <a16:creationId xmlns:a16="http://schemas.microsoft.com/office/drawing/2014/main" id="{E129B186-6EC6-21FE-DFD3-2D737EB3898C}"/>
               </a:ext>
             </a:extLst>
           </p:cNvPr>
@@ -41776,7 +43450,7 @@
           <p:cNvPr id="24" name="big-1">
             <a:extLst>
               <a:ext uri="{FF2B5EF4-FFF2-40B4-BE49-F238E27FC236}">
-                <a16:creationId xmlns:a16="http://schemas.microsoft.com/office/drawing/2014/main" id="{B02F9DD1-0955-7446-C41B-7A18E0FD1D53}"/>
+                <a16:creationId xmlns:a16="http://schemas.microsoft.com/office/drawing/2014/main" id="{F3BB811D-A482-B33C-95E9-ADCB3B5CC084}"/>
               </a:ext>
             </a:extLst>
           </p:cNvPr>
@@ -41830,7 +43504,7 @@
           <p:cNvPr id="25" name="big-band-1">
             <a:extLst>
               <a:ext uri="{FF2B5EF4-FFF2-40B4-BE49-F238E27FC236}">
-                <a16:creationId xmlns:a16="http://schemas.microsoft.com/office/drawing/2014/main" id="{FE175739-D558-F4AC-D8C7-0676D034A775}"/>
+                <a16:creationId xmlns:a16="http://schemas.microsoft.com/office/drawing/2014/main" id="{64B76560-69D5-A7D5-547B-03E1C9DDF071}"/>
               </a:ext>
             </a:extLst>
           </p:cNvPr>
@@ -41884,7 +43558,7 @@
           <p:cNvPr id="26" name="big-name-1">
             <a:extLst>
               <a:ext uri="{FF2B5EF4-FFF2-40B4-BE49-F238E27FC236}">
-                <a16:creationId xmlns:a16="http://schemas.microsoft.com/office/drawing/2014/main" id="{AD5C5481-D80B-2B2C-D7FA-E7D8A74B9FF8}"/>
+                <a16:creationId xmlns:a16="http://schemas.microsoft.com/office/drawing/2014/main" id="{093E3992-7358-A992-C44B-266B6AB66181}"/>
               </a:ext>
             </a:extLst>
           </p:cNvPr>
@@ -41930,7 +43604,7 @@
           <p:cNvPr id="27" name="big-val-1">
             <a:extLst>
               <a:ext uri="{FF2B5EF4-FFF2-40B4-BE49-F238E27FC236}">
-                <a16:creationId xmlns:a16="http://schemas.microsoft.com/office/drawing/2014/main" id="{9A79BC55-F9F4-1221-5592-8DAF0D3775E8}"/>
+                <a16:creationId xmlns:a16="http://schemas.microsoft.com/office/drawing/2014/main" id="{55B1ECE6-DE8C-AB81-1BF0-27FAE4091763}"/>
               </a:ext>
             </a:extLst>
           </p:cNvPr>
@@ -41976,7 +43650,7 @@
           <p:cNvPr id="28" name="big-ok-1">
             <a:extLst>
               <a:ext uri="{FF2B5EF4-FFF2-40B4-BE49-F238E27FC236}">
-                <a16:creationId xmlns:a16="http://schemas.microsoft.com/office/drawing/2014/main" id="{78359AF7-2A57-06E4-893C-9EA06A6911A6}"/>
+                <a16:creationId xmlns:a16="http://schemas.microsoft.com/office/drawing/2014/main" id="{9FA537F0-40F2-6986-8C31-A29C75D08713}"/>
               </a:ext>
             </a:extLst>
           </p:cNvPr>
@@ -42022,7 +43696,7 @@
           <p:cNvPr id="29" name="big-ok-t-1">
             <a:extLst>
               <a:ext uri="{FF2B5EF4-FFF2-40B4-BE49-F238E27FC236}">
-                <a16:creationId xmlns:a16="http://schemas.microsoft.com/office/drawing/2014/main" id="{4B63C151-F468-7F43-D6D8-0F004660D03A}"/>
+                <a16:creationId xmlns:a16="http://schemas.microsoft.com/office/drawing/2014/main" id="{BD94B866-452E-F9D2-2DF8-FB1E87A6B02E}"/>
               </a:ext>
             </a:extLst>
           </p:cNvPr>
@@ -42068,7 +43742,7 @@
           <p:cNvPr id="30" name="big-no-1">
             <a:extLst>
               <a:ext uri="{FF2B5EF4-FFF2-40B4-BE49-F238E27FC236}">
-                <a16:creationId xmlns:a16="http://schemas.microsoft.com/office/drawing/2014/main" id="{C5CA15F4-63AB-09D9-5CF3-F790E337C1E5}"/>
+                <a16:creationId xmlns:a16="http://schemas.microsoft.com/office/drawing/2014/main" id="{08EC5F50-1D1B-297B-5661-D9B3FBF53964}"/>
               </a:ext>
             </a:extLst>
           </p:cNvPr>
@@ -42114,7 +43788,7 @@
           <p:cNvPr id="31" name="big-no-t-1">
             <a:extLst>
               <a:ext uri="{FF2B5EF4-FFF2-40B4-BE49-F238E27FC236}">
-                <a16:creationId xmlns:a16="http://schemas.microsoft.com/office/drawing/2014/main" id="{BF0390D2-978B-BDFD-A571-5EEA3BC1B50C}"/>
+                <a16:creationId xmlns:a16="http://schemas.microsoft.com/office/drawing/2014/main" id="{89B1E4B2-5640-04E6-F5D9-C02C5A251B7A}"/>
               </a:ext>
             </a:extLst>
           </p:cNvPr>
@@ -42160,7 +43834,7 @@
           <p:cNvPr id="32" name="big-2">
             <a:extLst>
               <a:ext uri="{FF2B5EF4-FFF2-40B4-BE49-F238E27FC236}">
-                <a16:creationId xmlns:a16="http://schemas.microsoft.com/office/drawing/2014/main" id="{4D9C51FF-E326-7A34-AD7E-F473A0CFE02F}"/>
+                <a16:creationId xmlns:a16="http://schemas.microsoft.com/office/drawing/2014/main" id="{4C1978C3-A6EF-97CE-8BE8-336976FCD67A}"/>
               </a:ext>
             </a:extLst>
           </p:cNvPr>
@@ -42214,7 +43888,7 @@
           <p:cNvPr id="33" name="big-band-2">
             <a:extLst>
               <a:ext uri="{FF2B5EF4-FFF2-40B4-BE49-F238E27FC236}">
-                <a16:creationId xmlns:a16="http://schemas.microsoft.com/office/drawing/2014/main" id="{1A87B479-3351-C84C-7DAF-D893B5F7293C}"/>
+                <a16:creationId xmlns:a16="http://schemas.microsoft.com/office/drawing/2014/main" id="{0F7CD2A8-889C-FB82-6B70-5D52B66B76EB}"/>
               </a:ext>
             </a:extLst>
           </p:cNvPr>
@@ -42268,7 +43942,7 @@
           <p:cNvPr id="34" name="big-name-2">
             <a:extLst>
               <a:ext uri="{FF2B5EF4-FFF2-40B4-BE49-F238E27FC236}">
-                <a16:creationId xmlns:a16="http://schemas.microsoft.com/office/drawing/2014/main" id="{EFFA9467-C59D-C2F2-B6EA-D2F6896DF1F6}"/>
+                <a16:creationId xmlns:a16="http://schemas.microsoft.com/office/drawing/2014/main" id="{3A8117A5-BBF6-266B-933D-F74E3D79E50F}"/>
               </a:ext>
             </a:extLst>
           </p:cNvPr>
@@ -42314,7 +43988,7 @@
           <p:cNvPr id="35" name="big-val-2">
             <a:extLst>
               <a:ext uri="{FF2B5EF4-FFF2-40B4-BE49-F238E27FC236}">
-                <a16:creationId xmlns:a16="http://schemas.microsoft.com/office/drawing/2014/main" id="{4000E34F-AD16-7CDD-4839-932C693B9D4F}"/>
+                <a16:creationId xmlns:a16="http://schemas.microsoft.com/office/drawing/2014/main" id="{CAB66497-E660-19B4-B011-F892EF441B49}"/>
               </a:ext>
             </a:extLst>
           </p:cNvPr>
@@ -42360,7 +44034,7 @@
           <p:cNvPr id="36" name="big-ok-2">
             <a:extLst>
               <a:ext uri="{FF2B5EF4-FFF2-40B4-BE49-F238E27FC236}">
-                <a16:creationId xmlns:a16="http://schemas.microsoft.com/office/drawing/2014/main" id="{EE904DF6-2136-A770-4ED9-ACC2AB3B1234}"/>
+                <a16:creationId xmlns:a16="http://schemas.microsoft.com/office/drawing/2014/main" id="{576D1233-DE2A-FED9-35A3-06EF8B1E8A83}"/>
               </a:ext>
             </a:extLst>
           </p:cNvPr>
@@ -42406,7 +44080,7 @@
           <p:cNvPr id="37" name="big-ok-t-2">
             <a:extLst>
               <a:ext uri="{FF2B5EF4-FFF2-40B4-BE49-F238E27FC236}">
-                <a16:creationId xmlns:a16="http://schemas.microsoft.com/office/drawing/2014/main" id="{B5C0942D-84DC-7682-CED1-18B3C34A2734}"/>
+                <a16:creationId xmlns:a16="http://schemas.microsoft.com/office/drawing/2014/main" id="{5882377C-03F6-FA24-4C42-765509100C04}"/>
               </a:ext>
             </a:extLst>
           </p:cNvPr>
@@ -42452,7 +44126,7 @@
           <p:cNvPr id="38" name="big-no-2">
             <a:extLst>
               <a:ext uri="{FF2B5EF4-FFF2-40B4-BE49-F238E27FC236}">
-                <a16:creationId xmlns:a16="http://schemas.microsoft.com/office/drawing/2014/main" id="{6D4D07CE-95E0-12E2-6ACA-1419F7F4C676}"/>
+                <a16:creationId xmlns:a16="http://schemas.microsoft.com/office/drawing/2014/main" id="{D600DFBF-FD11-4BA9-3463-E2A5C83929DE}"/>
               </a:ext>
             </a:extLst>
           </p:cNvPr>
@@ -42498,7 +44172,7 @@
           <p:cNvPr id="39" name="big-no-t-2">
             <a:extLst>
               <a:ext uri="{FF2B5EF4-FFF2-40B4-BE49-F238E27FC236}">
-                <a16:creationId xmlns:a16="http://schemas.microsoft.com/office/drawing/2014/main" id="{F3284FF5-8414-99B0-F113-51BE7D557F4F}"/>
+                <a16:creationId xmlns:a16="http://schemas.microsoft.com/office/drawing/2014/main" id="{D986366C-E7D5-F89E-1B8B-100718F8DECC}"/>
               </a:ext>
             </a:extLst>
           </p:cNvPr>
@@ -42544,7 +44218,7 @@
           <p:cNvPr id="40" name="small-0">
             <a:extLst>
               <a:ext uri="{FF2B5EF4-FFF2-40B4-BE49-F238E27FC236}">
-                <a16:creationId xmlns:a16="http://schemas.microsoft.com/office/drawing/2014/main" id="{71CB0C07-D853-BCD0-A290-2BEDC1996C30}"/>
+                <a16:creationId xmlns:a16="http://schemas.microsoft.com/office/drawing/2014/main" id="{39A8F393-1CE7-8E35-78BE-68FE6A455A07}"/>
               </a:ext>
             </a:extLst>
           </p:cNvPr>
@@ -42598,7 +44272,7 @@
           <p:cNvPr id="41" name="small-band-0">
             <a:extLst>
               <a:ext uri="{FF2B5EF4-FFF2-40B4-BE49-F238E27FC236}">
-                <a16:creationId xmlns:a16="http://schemas.microsoft.com/office/drawing/2014/main" id="{8FD6E58C-2639-1CA1-6D9A-CE5FD82EB96F}"/>
+                <a16:creationId xmlns:a16="http://schemas.microsoft.com/office/drawing/2014/main" id="{FA40055D-D9AA-0824-672E-85B8559CBF07}"/>
               </a:ext>
             </a:extLst>
           </p:cNvPr>
@@ -42652,7 +44326,7 @@
           <p:cNvPr id="42" name="small-name-0">
             <a:extLst>
               <a:ext uri="{FF2B5EF4-FFF2-40B4-BE49-F238E27FC236}">
-                <a16:creationId xmlns:a16="http://schemas.microsoft.com/office/drawing/2014/main" id="{11CA8C50-7A43-AB3E-0F55-96154C9CEB70}"/>
+                <a16:creationId xmlns:a16="http://schemas.microsoft.com/office/drawing/2014/main" id="{6ED8C0A7-91FD-D8A1-ECCB-480056052A7F}"/>
               </a:ext>
             </a:extLst>
           </p:cNvPr>
@@ -42698,7 +44372,7 @@
           <p:cNvPr id="43" name="small-val-0">
             <a:extLst>
               <a:ext uri="{FF2B5EF4-FFF2-40B4-BE49-F238E27FC236}">
-                <a16:creationId xmlns:a16="http://schemas.microsoft.com/office/drawing/2014/main" id="{E36B57A6-C36F-70D6-23F8-75AA0B177B2B}"/>
+                <a16:creationId xmlns:a16="http://schemas.microsoft.com/office/drawing/2014/main" id="{5B79650B-FFB7-D86F-CBAB-B53ABADA9D14}"/>
               </a:ext>
             </a:extLst>
           </p:cNvPr>
@@ -42744,7 +44418,7 @@
           <p:cNvPr id="44" name="small-desc-0">
             <a:extLst>
               <a:ext uri="{FF2B5EF4-FFF2-40B4-BE49-F238E27FC236}">
-                <a16:creationId xmlns:a16="http://schemas.microsoft.com/office/drawing/2014/main" id="{1AFF13B7-099A-1173-7D2F-FC8C25DB58D0}"/>
+                <a16:creationId xmlns:a16="http://schemas.microsoft.com/office/drawing/2014/main" id="{60D89447-43E2-803A-D6F2-4E155188A995}"/>
               </a:ext>
             </a:extLst>
           </p:cNvPr>
@@ -42790,7 +44464,7 @@
           <p:cNvPr id="45" name="small-1">
             <a:extLst>
               <a:ext uri="{FF2B5EF4-FFF2-40B4-BE49-F238E27FC236}">
-                <a16:creationId xmlns:a16="http://schemas.microsoft.com/office/drawing/2014/main" id="{9BB1195B-1763-2244-6CB7-C0B98BF2D727}"/>
+                <a16:creationId xmlns:a16="http://schemas.microsoft.com/office/drawing/2014/main" id="{B247ACA9-1803-1B71-46B5-DEA6E1142A50}"/>
               </a:ext>
             </a:extLst>
           </p:cNvPr>
@@ -42844,7 +44518,7 @@
           <p:cNvPr id="46" name="small-band-1">
             <a:extLst>
               <a:ext uri="{FF2B5EF4-FFF2-40B4-BE49-F238E27FC236}">
-                <a16:creationId xmlns:a16="http://schemas.microsoft.com/office/drawing/2014/main" id="{7800C8D8-7CA0-C930-8A82-D4B59340CE38}"/>
+                <a16:creationId xmlns:a16="http://schemas.microsoft.com/office/drawing/2014/main" id="{969D3922-B2B8-733A-12E5-266F46DED785}"/>
               </a:ext>
             </a:extLst>
           </p:cNvPr>
@@ -42898,7 +44572,7 @@
           <p:cNvPr id="47" name="small-name-1">
             <a:extLst>
               <a:ext uri="{FF2B5EF4-FFF2-40B4-BE49-F238E27FC236}">
-                <a16:creationId xmlns:a16="http://schemas.microsoft.com/office/drawing/2014/main" id="{7D2E052A-431F-DA59-D9E3-F31362745568}"/>
+                <a16:creationId xmlns:a16="http://schemas.microsoft.com/office/drawing/2014/main" id="{0A649713-7D1C-1747-3425-D5712BF2BE00}"/>
               </a:ext>
             </a:extLst>
           </p:cNvPr>
@@ -42944,7 +44618,7 @@
           <p:cNvPr id="48" name="small-val-1">
             <a:extLst>
               <a:ext uri="{FF2B5EF4-FFF2-40B4-BE49-F238E27FC236}">
-                <a16:creationId xmlns:a16="http://schemas.microsoft.com/office/drawing/2014/main" id="{5C970FE6-A6A9-193C-1032-A74928EE0D55}"/>
+                <a16:creationId xmlns:a16="http://schemas.microsoft.com/office/drawing/2014/main" id="{B6F5E76F-1FB3-BFD6-B310-DB77C7F433F3}"/>
               </a:ext>
             </a:extLst>
           </p:cNvPr>
@@ -42990,7 +44664,7 @@
           <p:cNvPr id="49" name="small-desc-1">
             <a:extLst>
               <a:ext uri="{FF2B5EF4-FFF2-40B4-BE49-F238E27FC236}">
-                <a16:creationId xmlns:a16="http://schemas.microsoft.com/office/drawing/2014/main" id="{27ECCE01-6D5B-7CA8-362A-BFDA406D47AE}"/>
+                <a16:creationId xmlns:a16="http://schemas.microsoft.com/office/drawing/2014/main" id="{F757F2D1-A738-EA93-24B3-C169B9EF1C3D}"/>
               </a:ext>
             </a:extLst>
           </p:cNvPr>
@@ -43036,7 +44710,7 @@
           <p:cNvPr id="50" name="call">
             <a:extLst>
               <a:ext uri="{FF2B5EF4-FFF2-40B4-BE49-F238E27FC236}">
-                <a16:creationId xmlns:a16="http://schemas.microsoft.com/office/drawing/2014/main" id="{5C99C874-6A6D-9FE6-7E14-CDACD3A98088}"/>
+                <a16:creationId xmlns:a16="http://schemas.microsoft.com/office/drawing/2014/main" id="{9F0802CD-FEA6-FFFE-A3C3-01334E67D604}"/>
               </a:ext>
             </a:extLst>
           </p:cNvPr>
@@ -43090,7 +44764,7 @@
           <p:cNvPr id="51" name="call-t">
             <a:extLst>
               <a:ext uri="{FF2B5EF4-FFF2-40B4-BE49-F238E27FC236}">
-                <a16:creationId xmlns:a16="http://schemas.microsoft.com/office/drawing/2014/main" id="{C3C4D1A0-6E64-EB38-4E4A-7EFB8BF7F8C8}"/>
+                <a16:creationId xmlns:a16="http://schemas.microsoft.com/office/drawing/2014/main" id="{D6CB5211-EF06-5EFD-7F21-C06BAD7BE333}"/>
               </a:ext>
             </a:extLst>
           </p:cNvPr>
@@ -43137,7 +44811,7 @@
             <a:hlinkClick r:id="rId4"/>
             <a:extLst>
               <a:ext uri="{FF2B5EF4-FFF2-40B4-BE49-F238E27FC236}">
-                <a16:creationId xmlns:a16="http://schemas.microsoft.com/office/drawing/2014/main" id="{2EB87A75-DD37-7153-C548-70ECFCB802D9}"/>
+                <a16:creationId xmlns:a16="http://schemas.microsoft.com/office/drawing/2014/main" id="{063CC572-3A95-A2B5-9EC3-35794CFDA3D5}"/>
               </a:ext>
             </a:extLst>
           </p:cNvPr>
@@ -43198,7 +44872,7 @@
     </p:spTree>
     <p:extLst>
       <p:ext uri="{BB962C8B-B14F-4D97-AF65-F5344CB8AC3E}">
-        <p14:creationId xmlns:p14="http://schemas.microsoft.com/office/powerpoint/2010/main" val="1467237710"/>
+        <p14:creationId xmlns:p14="http://schemas.microsoft.com/office/powerpoint/2010/main" val="268745901"/>
       </p:ext>
     </p:extLst>
   </p:cSld>
@@ -43376,7 +45050,7 @@
           <p:cNvPr id="2" name="bg">
             <a:extLst>
               <a:ext uri="{FF2B5EF4-FFF2-40B4-BE49-F238E27FC236}">
-                <a16:creationId xmlns:a16="http://schemas.microsoft.com/office/drawing/2014/main" id="{8F1736C9-78EA-8BC0-0799-81137A61FCC1}"/>
+                <a16:creationId xmlns:a16="http://schemas.microsoft.com/office/drawing/2014/main" id="{3B2D452A-F23A-EC4C-6B35-035280092015}"/>
               </a:ext>
             </a:extLst>
           </p:cNvPr>
@@ -43437,7 +45111,7 @@
           <p:cNvPr id="3" name="rail">
             <a:extLst>
               <a:ext uri="{FF2B5EF4-FFF2-40B4-BE49-F238E27FC236}">
-                <a16:creationId xmlns:a16="http://schemas.microsoft.com/office/drawing/2014/main" id="{0BE8B2E9-F7FE-F1E6-C0A6-54E1A119A436}"/>
+                <a16:creationId xmlns:a16="http://schemas.microsoft.com/office/drawing/2014/main" id="{1728C52C-56E9-7F5C-B0E0-CF44137AA31B}"/>
               </a:ext>
             </a:extLst>
           </p:cNvPr>
@@ -43498,7 +45172,7 @@
           <p:cNvPr id="4" name="top-rule">
             <a:extLst>
               <a:ext uri="{FF2B5EF4-FFF2-40B4-BE49-F238E27FC236}">
-                <a16:creationId xmlns:a16="http://schemas.microsoft.com/office/drawing/2014/main" id="{6A8EBADB-216A-2D40-B1D9-CEEE35866761}"/>
+                <a16:creationId xmlns:a16="http://schemas.microsoft.com/office/drawing/2014/main" id="{87A08AAF-5B94-ACDC-BE7E-08116B29019A}"/>
               </a:ext>
             </a:extLst>
           </p:cNvPr>
@@ -43539,7 +45213,7 @@
           <p:cNvPr id="5" name="section">
             <a:extLst>
               <a:ext uri="{FF2B5EF4-FFF2-40B4-BE49-F238E27FC236}">
-                <a16:creationId xmlns:a16="http://schemas.microsoft.com/office/drawing/2014/main" id="{420386B9-C9E0-7251-2415-D18B15701E87}"/>
+                <a16:creationId xmlns:a16="http://schemas.microsoft.com/office/drawing/2014/main" id="{97E891FC-C041-407A-1593-C682E2E4648E}"/>
               </a:ext>
             </a:extLst>
           </p:cNvPr>
@@ -43585,7 +45259,7 @@
           <p:cNvPr id="6" name="num">
             <a:extLst>
               <a:ext uri="{FF2B5EF4-FFF2-40B4-BE49-F238E27FC236}">
-                <a16:creationId xmlns:a16="http://schemas.microsoft.com/office/drawing/2014/main" id="{7605269F-3115-E203-C1C2-CA3A014D62FA}"/>
+                <a16:creationId xmlns:a16="http://schemas.microsoft.com/office/drawing/2014/main" id="{220EC6A5-DCDE-3A64-AED6-C13F177C5EDF}"/>
               </a:ext>
             </a:extLst>
           </p:cNvPr>
@@ -43631,7 +45305,7 @@
           <p:cNvPr id="7" name="footer">
             <a:extLst>
               <a:ext uri="{FF2B5EF4-FFF2-40B4-BE49-F238E27FC236}">
-                <a16:creationId xmlns:a16="http://schemas.microsoft.com/office/drawing/2014/main" id="{B8A09BA4-4E50-B84C-2232-56B459FD3863}"/>
+                <a16:creationId xmlns:a16="http://schemas.microsoft.com/office/drawing/2014/main" id="{3ABE4FD6-9F1C-10F7-8DB7-571F81819009}"/>
               </a:ext>
             </a:extLst>
           </p:cNvPr>
@@ -43677,7 +45351,7 @@
           <p:cNvPr id="8" name="student">
             <a:extLst>
               <a:ext uri="{FF2B5EF4-FFF2-40B4-BE49-F238E27FC236}">
-                <a16:creationId xmlns:a16="http://schemas.microsoft.com/office/drawing/2014/main" id="{31DDCE1E-0ECB-ABC7-049F-26E571582ADD}"/>
+                <a16:creationId xmlns:a16="http://schemas.microsoft.com/office/drawing/2014/main" id="{200444FD-6078-BCE4-53FF-D20683FCD2E3}"/>
               </a:ext>
             </a:extLst>
           </p:cNvPr>
@@ -43723,7 +45397,7 @@
           <p:cNvPr id="10" name="图片 9">
             <a:extLst>
               <a:ext uri="{FF2B5EF4-FFF2-40B4-BE49-F238E27FC236}">
-                <a16:creationId xmlns:a16="http://schemas.microsoft.com/office/drawing/2014/main" id="{3B9BEE52-1F4F-0449-29E6-CB1D7AE6BDF8}"/>
+                <a16:creationId xmlns:a16="http://schemas.microsoft.com/office/drawing/2014/main" id="{0253228D-30C6-215C-8BED-118DCA0C2DE4}"/>
               </a:ext>
             </a:extLst>
           </p:cNvPr>
@@ -43759,7 +45433,7 @@
           <p:cNvPr id="11" name="title">
             <a:extLst>
               <a:ext uri="{FF2B5EF4-FFF2-40B4-BE49-F238E27FC236}">
-                <a16:creationId xmlns:a16="http://schemas.microsoft.com/office/drawing/2014/main" id="{A4E29747-77AE-C23B-6548-D81207EEDF11}"/>
+                <a16:creationId xmlns:a16="http://schemas.microsoft.com/office/drawing/2014/main" id="{39DDBBE4-9AE5-C1ED-A716-AAE29C92D37C}"/>
               </a:ext>
             </a:extLst>
           </p:cNvPr>
@@ -43805,7 +45479,7 @@
           <p:cNvPr id="12" name="subtitle">
             <a:extLst>
               <a:ext uri="{FF2B5EF4-FFF2-40B4-BE49-F238E27FC236}">
-                <a16:creationId xmlns:a16="http://schemas.microsoft.com/office/drawing/2014/main" id="{DE7242FA-B6DD-111D-7F1D-68E302F45E6F}"/>
+                <a16:creationId xmlns:a16="http://schemas.microsoft.com/office/drawing/2014/main" id="{72B5AEAC-DFBC-B7B3-0013-C93350C297FB}"/>
               </a:ext>
             </a:extLst>
           </p:cNvPr>
@@ -43851,7 +45525,7 @@
           <p:cNvPr id="13" name="left">
             <a:extLst>
               <a:ext uri="{FF2B5EF4-FFF2-40B4-BE49-F238E27FC236}">
-                <a16:creationId xmlns:a16="http://schemas.microsoft.com/office/drawing/2014/main" id="{3486A954-4B5E-BE71-BF0C-64E0ED5792E0}"/>
+                <a16:creationId xmlns:a16="http://schemas.microsoft.com/office/drawing/2014/main" id="{5FA04EC7-2912-57AB-6496-FE005BF6DE51}"/>
               </a:ext>
             </a:extLst>
           </p:cNvPr>
@@ -43905,7 +45579,7 @@
           <p:cNvPr id="14" name="left-band">
             <a:extLst>
               <a:ext uri="{FF2B5EF4-FFF2-40B4-BE49-F238E27FC236}">
-                <a16:creationId xmlns:a16="http://schemas.microsoft.com/office/drawing/2014/main" id="{02A0FC9F-6DCE-CE60-2108-9B0C36572C0C}"/>
+                <a16:creationId xmlns:a16="http://schemas.microsoft.com/office/drawing/2014/main" id="{A317C0AB-E648-586F-7EC8-EEE4FAAD7AF1}"/>
               </a:ext>
             </a:extLst>
           </p:cNvPr>
@@ -43959,7 +45633,7 @@
           <p:cNvPr id="15" name="left-k">
             <a:extLst>
               <a:ext uri="{FF2B5EF4-FFF2-40B4-BE49-F238E27FC236}">
-                <a16:creationId xmlns:a16="http://schemas.microsoft.com/office/drawing/2014/main" id="{708D7F85-6846-8FC7-DAF0-AA8E353C71C0}"/>
+                <a16:creationId xmlns:a16="http://schemas.microsoft.com/office/drawing/2014/main" id="{DA050E18-7A03-AA70-4D90-2BA3467A43F6}"/>
               </a:ext>
             </a:extLst>
           </p:cNvPr>
@@ -44005,7 +45679,7 @@
           <p:cNvPr id="16" name="left-v">
             <a:extLst>
               <a:ext uri="{FF2B5EF4-FFF2-40B4-BE49-F238E27FC236}">
-                <a16:creationId xmlns:a16="http://schemas.microsoft.com/office/drawing/2014/main" id="{09BDF9F6-ED47-5974-DCE3-5A68F2C2BB5D}"/>
+                <a16:creationId xmlns:a16="http://schemas.microsoft.com/office/drawing/2014/main" id="{DA86B5E7-D8FA-E5B9-923B-E4E17BEB1E8E}"/>
               </a:ext>
             </a:extLst>
           </p:cNvPr>
@@ -44051,7 +45725,7 @@
           <p:cNvPr id="17" name="left-s">
             <a:extLst>
               <a:ext uri="{FF2B5EF4-FFF2-40B4-BE49-F238E27FC236}">
-                <a16:creationId xmlns:a16="http://schemas.microsoft.com/office/drawing/2014/main" id="{17F576D8-E562-F832-8861-9AC342769142}"/>
+                <a16:creationId xmlns:a16="http://schemas.microsoft.com/office/drawing/2014/main" id="{9479D7B5-5736-4459-7F31-A89DB3D2ACC2}"/>
               </a:ext>
             </a:extLst>
           </p:cNvPr>
@@ -44097,7 +45771,7 @@
           <p:cNvPr id="18" name="left-rule">
             <a:extLst>
               <a:ext uri="{FF2B5EF4-FFF2-40B4-BE49-F238E27FC236}">
-                <a16:creationId xmlns:a16="http://schemas.microsoft.com/office/drawing/2014/main" id="{C2ED493E-0234-BEDE-CE11-09539E46BAEE}"/>
+                <a16:creationId xmlns:a16="http://schemas.microsoft.com/office/drawing/2014/main" id="{0F24AE98-F271-482B-C476-A71F7C3D5806}"/>
               </a:ext>
             </a:extLst>
           </p:cNvPr>
@@ -44138,7 +45812,7 @@
           <p:cNvPr id="19" name="left-a">
             <a:extLst>
               <a:ext uri="{FF2B5EF4-FFF2-40B4-BE49-F238E27FC236}">
-                <a16:creationId xmlns:a16="http://schemas.microsoft.com/office/drawing/2014/main" id="{E181B872-A327-999E-F74B-03C2F1263A41}"/>
+                <a16:creationId xmlns:a16="http://schemas.microsoft.com/office/drawing/2014/main" id="{5AFFCEB1-ED66-00D1-A085-0AFE175E89AA}"/>
               </a:ext>
             </a:extLst>
           </p:cNvPr>
@@ -44184,7 +45858,7 @@
           <p:cNvPr id="20" name="left-at">
             <a:extLst>
               <a:ext uri="{FF2B5EF4-FFF2-40B4-BE49-F238E27FC236}">
-                <a16:creationId xmlns:a16="http://schemas.microsoft.com/office/drawing/2014/main" id="{72EE3BB5-5B14-0672-5EED-2950F4D2AE70}"/>
+                <a16:creationId xmlns:a16="http://schemas.microsoft.com/office/drawing/2014/main" id="{A01AF9A9-C289-0BE6-84E7-12CE927A1F2D}"/>
               </a:ext>
             </a:extLst>
           </p:cNvPr>
@@ -44230,7 +45904,7 @@
           <p:cNvPr id="21" name="left-b">
             <a:extLst>
               <a:ext uri="{FF2B5EF4-FFF2-40B4-BE49-F238E27FC236}">
-                <a16:creationId xmlns:a16="http://schemas.microsoft.com/office/drawing/2014/main" id="{93F3FB3E-BD09-C774-0907-565BE9BC50FF}"/>
+                <a16:creationId xmlns:a16="http://schemas.microsoft.com/office/drawing/2014/main" id="{82E98050-1273-3973-C798-89CADD0C63F3}"/>
               </a:ext>
             </a:extLst>
           </p:cNvPr>
@@ -44276,7 +45950,7 @@
           <p:cNvPr id="22" name="left-bt">
             <a:extLst>
               <a:ext uri="{FF2B5EF4-FFF2-40B4-BE49-F238E27FC236}">
-                <a16:creationId xmlns:a16="http://schemas.microsoft.com/office/drawing/2014/main" id="{2DCD897F-8913-56E6-84D6-7DD854C5CCBA}"/>
+                <a16:creationId xmlns:a16="http://schemas.microsoft.com/office/drawing/2014/main" id="{88F624F2-F903-20B1-9834-2518F866BA38}"/>
               </a:ext>
             </a:extLst>
           </p:cNvPr>
@@ -44322,7 +45996,7 @@
           <p:cNvPr id="23" name="right">
             <a:extLst>
               <a:ext uri="{FF2B5EF4-FFF2-40B4-BE49-F238E27FC236}">
-                <a16:creationId xmlns:a16="http://schemas.microsoft.com/office/drawing/2014/main" id="{C3EC8AB0-2841-11FA-17CB-AA31B9498993}"/>
+                <a16:creationId xmlns:a16="http://schemas.microsoft.com/office/drawing/2014/main" id="{E5E27D6D-995A-B226-CD4F-6E8A7892C959}"/>
               </a:ext>
             </a:extLst>
           </p:cNvPr>
@@ -44376,7 +46050,7 @@
           <p:cNvPr id="24" name="right-band">
             <a:extLst>
               <a:ext uri="{FF2B5EF4-FFF2-40B4-BE49-F238E27FC236}">
-                <a16:creationId xmlns:a16="http://schemas.microsoft.com/office/drawing/2014/main" id="{ED1F8BE8-75C1-2FEC-E879-7E9075A6D54B}"/>
+                <a16:creationId xmlns:a16="http://schemas.microsoft.com/office/drawing/2014/main" id="{10993FFF-E00C-9BEB-726E-6DE217EECCD0}"/>
               </a:ext>
             </a:extLst>
           </p:cNvPr>
@@ -44430,7 +46104,7 @@
           <p:cNvPr id="25" name="right-k">
             <a:extLst>
               <a:ext uri="{FF2B5EF4-FFF2-40B4-BE49-F238E27FC236}">
-                <a16:creationId xmlns:a16="http://schemas.microsoft.com/office/drawing/2014/main" id="{9BC8D96E-1028-F33F-E51A-BF3726C8805E}"/>
+                <a16:creationId xmlns:a16="http://schemas.microsoft.com/office/drawing/2014/main" id="{A440767E-1020-E032-7699-D91F9702899F}"/>
               </a:ext>
             </a:extLst>
           </p:cNvPr>
@@ -44476,7 +46150,7 @@
           <p:cNvPr id="26" name="right-v">
             <a:extLst>
               <a:ext uri="{FF2B5EF4-FFF2-40B4-BE49-F238E27FC236}">
-                <a16:creationId xmlns:a16="http://schemas.microsoft.com/office/drawing/2014/main" id="{39959659-5A5E-E003-FADF-07A56F25155D}"/>
+                <a16:creationId xmlns:a16="http://schemas.microsoft.com/office/drawing/2014/main" id="{AEE60CF1-D4C4-7C3A-5909-18C4DBEA6B37}"/>
               </a:ext>
             </a:extLst>
           </p:cNvPr>
@@ -44522,7 +46196,7 @@
           <p:cNvPr id="27" name="right-s">
             <a:extLst>
               <a:ext uri="{FF2B5EF4-FFF2-40B4-BE49-F238E27FC236}">
-                <a16:creationId xmlns:a16="http://schemas.microsoft.com/office/drawing/2014/main" id="{DE409019-AE8A-D0CC-3D2B-855F74CFB5C7}"/>
+                <a16:creationId xmlns:a16="http://schemas.microsoft.com/office/drawing/2014/main" id="{64F4B897-4843-63E4-8B9E-B33D23924F9E}"/>
               </a:ext>
             </a:extLst>
           </p:cNvPr>
@@ -44568,7 +46242,7 @@
           <p:cNvPr id="28" name="right-rule">
             <a:extLst>
               <a:ext uri="{FF2B5EF4-FFF2-40B4-BE49-F238E27FC236}">
-                <a16:creationId xmlns:a16="http://schemas.microsoft.com/office/drawing/2014/main" id="{8431F9D0-6544-6A53-42BC-0789A9410CE4}"/>
+                <a16:creationId xmlns:a16="http://schemas.microsoft.com/office/drawing/2014/main" id="{D006C33B-C519-DC54-1A29-952C0DC6BD27}"/>
               </a:ext>
             </a:extLst>
           </p:cNvPr>
@@ -44609,7 +46283,7 @@
           <p:cNvPr id="29" name="right-a">
             <a:extLst>
               <a:ext uri="{FF2B5EF4-FFF2-40B4-BE49-F238E27FC236}">
-                <a16:creationId xmlns:a16="http://schemas.microsoft.com/office/drawing/2014/main" id="{8C35A498-6C5E-52AF-D532-953DEFCC270C}"/>
+                <a16:creationId xmlns:a16="http://schemas.microsoft.com/office/drawing/2014/main" id="{87577F65-40C6-43D3-280E-B2F9613065E6}"/>
               </a:ext>
             </a:extLst>
           </p:cNvPr>
@@ -44655,7 +46329,7 @@
           <p:cNvPr id="30" name="right-at">
             <a:extLst>
               <a:ext uri="{FF2B5EF4-FFF2-40B4-BE49-F238E27FC236}">
-                <a16:creationId xmlns:a16="http://schemas.microsoft.com/office/drawing/2014/main" id="{2F19BCBE-C0C0-BEF5-5ABE-0A6A4235BD9B}"/>
+                <a16:creationId xmlns:a16="http://schemas.microsoft.com/office/drawing/2014/main" id="{5A22401A-EFED-98A3-FB35-BD67BEFA5874}"/>
               </a:ext>
             </a:extLst>
           </p:cNvPr>
@@ -44701,7 +46375,7 @@
           <p:cNvPr id="31" name="right-b">
             <a:extLst>
               <a:ext uri="{FF2B5EF4-FFF2-40B4-BE49-F238E27FC236}">
-                <a16:creationId xmlns:a16="http://schemas.microsoft.com/office/drawing/2014/main" id="{C2318030-DECA-E84C-8DA9-670A8A78FC99}"/>
+                <a16:creationId xmlns:a16="http://schemas.microsoft.com/office/drawing/2014/main" id="{46D48701-4C40-1E2F-C63B-CC0284CACF1C}"/>
               </a:ext>
             </a:extLst>
           </p:cNvPr>
@@ -44747,7 +46421,7 @@
           <p:cNvPr id="32" name="right-bt">
             <a:extLst>
               <a:ext uri="{FF2B5EF4-FFF2-40B4-BE49-F238E27FC236}">
-                <a16:creationId xmlns:a16="http://schemas.microsoft.com/office/drawing/2014/main" id="{40F82724-75FD-7562-E662-CCF71A76D450}"/>
+                <a16:creationId xmlns:a16="http://schemas.microsoft.com/office/drawing/2014/main" id="{4724999C-AEE4-4796-A078-63BF1AD7D4E9}"/>
               </a:ext>
             </a:extLst>
           </p:cNvPr>
@@ -44793,7 +46467,7 @@
           <p:cNvPr id="33" name="rule">
             <a:extLst>
               <a:ext uri="{FF2B5EF4-FFF2-40B4-BE49-F238E27FC236}">
-                <a16:creationId xmlns:a16="http://schemas.microsoft.com/office/drawing/2014/main" id="{09ADB7AF-A0DB-1545-F418-54B9DFE98374}"/>
+                <a16:creationId xmlns:a16="http://schemas.microsoft.com/office/drawing/2014/main" id="{409E5892-D75A-0748-7F07-D5F17199E634}"/>
               </a:ext>
             </a:extLst>
           </p:cNvPr>
@@ -44847,7 +46521,7 @@
           <p:cNvPr id="34" name="rule-t">
             <a:extLst>
               <a:ext uri="{FF2B5EF4-FFF2-40B4-BE49-F238E27FC236}">
-                <a16:creationId xmlns:a16="http://schemas.microsoft.com/office/drawing/2014/main" id="{E983C51F-EE8A-D7B8-6A11-E2E7D288D5BD}"/>
+                <a16:creationId xmlns:a16="http://schemas.microsoft.com/office/drawing/2014/main" id="{417FA742-6895-F1A9-698D-F7116CD9A7BE}"/>
               </a:ext>
             </a:extLst>
           </p:cNvPr>
@@ -44894,7 +46568,7 @@
             <a:hlinkClick r:id="rId4"/>
             <a:extLst>
               <a:ext uri="{FF2B5EF4-FFF2-40B4-BE49-F238E27FC236}">
-                <a16:creationId xmlns:a16="http://schemas.microsoft.com/office/drawing/2014/main" id="{919C37F0-4700-D8F6-301E-9456B2F88AA0}"/>
+                <a16:creationId xmlns:a16="http://schemas.microsoft.com/office/drawing/2014/main" id="{0187899F-6455-538F-BED1-F604994E7966}"/>
               </a:ext>
             </a:extLst>
           </p:cNvPr>
@@ -44955,7 +46629,7 @@
     </p:spTree>
     <p:extLst>
       <p:ext uri="{BB962C8B-B14F-4D97-AF65-F5344CB8AC3E}">
-        <p14:creationId xmlns:p14="http://schemas.microsoft.com/office/powerpoint/2010/main" val="2399182385"/>
+        <p14:creationId xmlns:p14="http://schemas.microsoft.com/office/powerpoint/2010/main" val="815152782"/>
       </p:ext>
     </p:extLst>
   </p:cSld>
@@ -46031,7 +47705,7 @@
           <p:cNvPr id="2" name="bg">
             <a:extLst>
               <a:ext uri="{FF2B5EF4-FFF2-40B4-BE49-F238E27FC236}">
-                <a16:creationId xmlns:a16="http://schemas.microsoft.com/office/drawing/2014/main" id="{CB7AE452-61D7-2518-664D-BBF4E58710DE}"/>
+                <a16:creationId xmlns:a16="http://schemas.microsoft.com/office/drawing/2014/main" id="{91FFEE56-CE1D-C0AC-D1AC-700FADF96A49}"/>
               </a:ext>
             </a:extLst>
           </p:cNvPr>
@@ -46092,7 +47766,7 @@
           <p:cNvPr id="3" name="rail">
             <a:extLst>
               <a:ext uri="{FF2B5EF4-FFF2-40B4-BE49-F238E27FC236}">
-                <a16:creationId xmlns:a16="http://schemas.microsoft.com/office/drawing/2014/main" id="{1E072C29-5C3E-C36D-CF57-975D70BA3804}"/>
+                <a16:creationId xmlns:a16="http://schemas.microsoft.com/office/drawing/2014/main" id="{AF356490-8817-CC12-42CB-0598704744D1}"/>
               </a:ext>
             </a:extLst>
           </p:cNvPr>
@@ -46153,7 +47827,7 @@
           <p:cNvPr id="4" name="top-rule">
             <a:extLst>
               <a:ext uri="{FF2B5EF4-FFF2-40B4-BE49-F238E27FC236}">
-                <a16:creationId xmlns:a16="http://schemas.microsoft.com/office/drawing/2014/main" id="{EE574892-8517-40EB-FF8A-86F69F457AC4}"/>
+                <a16:creationId xmlns:a16="http://schemas.microsoft.com/office/drawing/2014/main" id="{C3424C24-3EBF-32C2-632F-25F8DDE2668C}"/>
               </a:ext>
             </a:extLst>
           </p:cNvPr>
@@ -46194,7 +47868,7 @@
           <p:cNvPr id="5" name="section">
             <a:extLst>
               <a:ext uri="{FF2B5EF4-FFF2-40B4-BE49-F238E27FC236}">
-                <a16:creationId xmlns:a16="http://schemas.microsoft.com/office/drawing/2014/main" id="{E4B7A173-EDD6-6E71-D3A3-88D709D047A2}"/>
+                <a16:creationId xmlns:a16="http://schemas.microsoft.com/office/drawing/2014/main" id="{B126F1E3-2940-4786-68A0-7ABF4312EF68}"/>
               </a:ext>
             </a:extLst>
           </p:cNvPr>
@@ -46240,7 +47914,7 @@
           <p:cNvPr id="6" name="num">
             <a:extLst>
               <a:ext uri="{FF2B5EF4-FFF2-40B4-BE49-F238E27FC236}">
-                <a16:creationId xmlns:a16="http://schemas.microsoft.com/office/drawing/2014/main" id="{40AFF4B1-8908-70DC-4BA9-2DF8E5FCED67}"/>
+                <a16:creationId xmlns:a16="http://schemas.microsoft.com/office/drawing/2014/main" id="{90A42E6F-4099-E0F2-C92E-A6536FF5D90B}"/>
               </a:ext>
             </a:extLst>
           </p:cNvPr>
@@ -46286,7 +47960,7 @@
           <p:cNvPr id="7" name="footer">
             <a:extLst>
               <a:ext uri="{FF2B5EF4-FFF2-40B4-BE49-F238E27FC236}">
-                <a16:creationId xmlns:a16="http://schemas.microsoft.com/office/drawing/2014/main" id="{99E64AE3-08D1-AF2E-E13C-2CA48C990506}"/>
+                <a16:creationId xmlns:a16="http://schemas.microsoft.com/office/drawing/2014/main" id="{DAE4B1E7-F5E6-8435-E78C-941A914BC188}"/>
               </a:ext>
             </a:extLst>
           </p:cNvPr>
@@ -46332,7 +48006,7 @@
           <p:cNvPr id="8" name="student">
             <a:extLst>
               <a:ext uri="{FF2B5EF4-FFF2-40B4-BE49-F238E27FC236}">
-                <a16:creationId xmlns:a16="http://schemas.microsoft.com/office/drawing/2014/main" id="{4E941DD8-E498-7176-3C32-FA66FBEE126F}"/>
+                <a16:creationId xmlns:a16="http://schemas.microsoft.com/office/drawing/2014/main" id="{29BF2428-1709-EAD2-1601-F32EDA9C31BC}"/>
               </a:ext>
             </a:extLst>
           </p:cNvPr>
@@ -46378,7 +48052,7 @@
           <p:cNvPr id="10" name="图片 9">
             <a:extLst>
               <a:ext uri="{FF2B5EF4-FFF2-40B4-BE49-F238E27FC236}">
-                <a16:creationId xmlns:a16="http://schemas.microsoft.com/office/drawing/2014/main" id="{17602219-01EC-76A5-B67F-B47C107DF745}"/>
+                <a16:creationId xmlns:a16="http://schemas.microsoft.com/office/drawing/2014/main" id="{A04A740C-E4AF-EF51-5779-E352F7B94124}"/>
               </a:ext>
             </a:extLst>
           </p:cNvPr>
@@ -46414,7 +48088,7 @@
           <p:cNvPr id="11" name="title">
             <a:extLst>
               <a:ext uri="{FF2B5EF4-FFF2-40B4-BE49-F238E27FC236}">
-                <a16:creationId xmlns:a16="http://schemas.microsoft.com/office/drawing/2014/main" id="{E49106AB-3B9E-DB6D-8701-48B7FF84B71E}"/>
+                <a16:creationId xmlns:a16="http://schemas.microsoft.com/office/drawing/2014/main" id="{380EA198-67F4-4FD9-F22F-3BB536A7365F}"/>
               </a:ext>
             </a:extLst>
           </p:cNvPr>
@@ -46460,7 +48134,7 @@
           <p:cNvPr id="12" name="subtitle">
             <a:extLst>
               <a:ext uri="{FF2B5EF4-FFF2-40B4-BE49-F238E27FC236}">
-                <a16:creationId xmlns:a16="http://schemas.microsoft.com/office/drawing/2014/main" id="{30CE35D5-A876-FDB8-A830-03A94B51294B}"/>
+                <a16:creationId xmlns:a16="http://schemas.microsoft.com/office/drawing/2014/main" id="{8D06A055-88AA-DE27-9D7B-E3DB15D74DFD}"/>
               </a:ext>
             </a:extLst>
           </p:cNvPr>
@@ -46506,7 +48180,7 @@
           <p:cNvPr id="13" name="shot-frame">
             <a:extLst>
               <a:ext uri="{FF2B5EF4-FFF2-40B4-BE49-F238E27FC236}">
-                <a16:creationId xmlns:a16="http://schemas.microsoft.com/office/drawing/2014/main" id="{70921AD0-5CFF-7C9E-4D45-F42BF48C569E}"/>
+                <a16:creationId xmlns:a16="http://schemas.microsoft.com/office/drawing/2014/main" id="{8E4C23EA-AEC0-4A94-AA20-B8C7C9070DC8}"/>
               </a:ext>
             </a:extLst>
           </p:cNvPr>
@@ -46560,7 +48234,7 @@
           <p:cNvPr id="15" name="project-page">
             <a:extLst>
               <a:ext uri="{FF2B5EF4-FFF2-40B4-BE49-F238E27FC236}">
-                <a16:creationId xmlns:a16="http://schemas.microsoft.com/office/drawing/2014/main" id="{F5E210B2-F3CB-B210-9C72-B5A9C3FC4723}"/>
+                <a16:creationId xmlns:a16="http://schemas.microsoft.com/office/drawing/2014/main" id="{E9ABFBDC-EECD-0D8C-A573-5F3EB37030B8}"/>
               </a:ext>
             </a:extLst>
           </p:cNvPr>
@@ -46601,7 +48275,7 @@
           <p:cNvPr id="16" name="demo-under">
             <a:extLst>
               <a:ext uri="{FF2B5EF4-FFF2-40B4-BE49-F238E27FC236}">
-                <a16:creationId xmlns:a16="http://schemas.microsoft.com/office/drawing/2014/main" id="{961F4EC3-2CF0-9554-222B-308D23C70DE0}"/>
+                <a16:creationId xmlns:a16="http://schemas.microsoft.com/office/drawing/2014/main" id="{34E89F00-F7C7-F449-70EB-09B0EBA837DE}"/>
               </a:ext>
             </a:extLst>
           </p:cNvPr>
@@ -46655,7 +48329,7 @@
           <p:cNvPr id="17" name="demo-under-t">
             <a:extLst>
               <a:ext uri="{FF2B5EF4-FFF2-40B4-BE49-F238E27FC236}">
-                <a16:creationId xmlns:a16="http://schemas.microsoft.com/office/drawing/2014/main" id="{D53928C9-AB50-2FEA-82CB-FB356851B9FF}"/>
+                <a16:creationId xmlns:a16="http://schemas.microsoft.com/office/drawing/2014/main" id="{4D109C11-FCB6-771C-14D5-84271F67FF80}"/>
               </a:ext>
             </a:extLst>
           </p:cNvPr>
@@ -46702,7 +48376,7 @@
             <a:hlinkClick r:id="rId5"/>
             <a:extLst>
               <a:ext uri="{FF2B5EF4-FFF2-40B4-BE49-F238E27FC236}">
-                <a16:creationId xmlns:a16="http://schemas.microsoft.com/office/drawing/2014/main" id="{6F735A48-3F78-9142-A6B3-5C3786E805DE}"/>
+                <a16:creationId xmlns:a16="http://schemas.microsoft.com/office/drawing/2014/main" id="{B42D95F2-5821-44A9-DE9E-CBC4E2E52B90}"/>
               </a:ext>
             </a:extLst>
           </p:cNvPr>
@@ -46770,7 +48444,7 @@
           <p:cNvPr id="19" name="route">
             <a:extLst>
               <a:ext uri="{FF2B5EF4-FFF2-40B4-BE49-F238E27FC236}">
-                <a16:creationId xmlns:a16="http://schemas.microsoft.com/office/drawing/2014/main" id="{EC067B50-6ECF-726E-076C-379BACFFF0B7}"/>
+                <a16:creationId xmlns:a16="http://schemas.microsoft.com/office/drawing/2014/main" id="{A00E0751-44E7-15A2-5ED2-747682387CC6}"/>
               </a:ext>
             </a:extLst>
           </p:cNvPr>
@@ -46824,7 +48498,7 @@
           <p:cNvPr id="20" name="route-k">
             <a:extLst>
               <a:ext uri="{FF2B5EF4-FFF2-40B4-BE49-F238E27FC236}">
-                <a16:creationId xmlns:a16="http://schemas.microsoft.com/office/drawing/2014/main" id="{5D8FD347-BF35-F9CE-6E69-F8A16320E829}"/>
+                <a16:creationId xmlns:a16="http://schemas.microsoft.com/office/drawing/2014/main" id="{F6B4FDDF-AC7D-EFF5-99AF-7022ED25AC95}"/>
               </a:ext>
             </a:extLst>
           </p:cNvPr>
@@ -46870,7 +48544,7 @@
           <p:cNvPr id="21" name="rnum-0">
             <a:extLst>
               <a:ext uri="{FF2B5EF4-FFF2-40B4-BE49-F238E27FC236}">
-                <a16:creationId xmlns:a16="http://schemas.microsoft.com/office/drawing/2014/main" id="{44D7769F-7F5B-CF2C-34E9-82520E35A8E7}"/>
+                <a16:creationId xmlns:a16="http://schemas.microsoft.com/office/drawing/2014/main" id="{761FE5CE-C644-D759-8DF9-1A6CAE434297}"/>
               </a:ext>
             </a:extLst>
           </p:cNvPr>
@@ -46924,7 +48598,7 @@
           <p:cNvPr id="22" name="rnumt-0">
             <a:extLst>
               <a:ext uri="{FF2B5EF4-FFF2-40B4-BE49-F238E27FC236}">
-                <a16:creationId xmlns:a16="http://schemas.microsoft.com/office/drawing/2014/main" id="{ECF63E92-447C-B8B9-6838-905915AE9A21}"/>
+                <a16:creationId xmlns:a16="http://schemas.microsoft.com/office/drawing/2014/main" id="{F5CA1BCA-5C94-D37B-52CC-91DAFD70E562}"/>
               </a:ext>
             </a:extLst>
           </p:cNvPr>
@@ -46970,7 +48644,7 @@
           <p:cNvPr id="23" name="rt-0">
             <a:extLst>
               <a:ext uri="{FF2B5EF4-FFF2-40B4-BE49-F238E27FC236}">
-                <a16:creationId xmlns:a16="http://schemas.microsoft.com/office/drawing/2014/main" id="{C3669A02-B360-8901-6DAC-8E6D493E86CC}"/>
+                <a16:creationId xmlns:a16="http://schemas.microsoft.com/office/drawing/2014/main" id="{6D874E98-242B-F1B5-2618-BBDEA620B717}"/>
               </a:ext>
             </a:extLst>
           </p:cNvPr>
@@ -47016,7 +48690,7 @@
           <p:cNvPr id="24" name="rnum-1">
             <a:extLst>
               <a:ext uri="{FF2B5EF4-FFF2-40B4-BE49-F238E27FC236}">
-                <a16:creationId xmlns:a16="http://schemas.microsoft.com/office/drawing/2014/main" id="{0EBD6536-72D5-3D42-4C2A-22CC303285D9}"/>
+                <a16:creationId xmlns:a16="http://schemas.microsoft.com/office/drawing/2014/main" id="{F43EEDEE-FBEF-C573-2F55-670FFE3E4381}"/>
               </a:ext>
             </a:extLst>
           </p:cNvPr>
@@ -47070,7 +48744,7 @@
           <p:cNvPr id="25" name="rnumt-1">
             <a:extLst>
               <a:ext uri="{FF2B5EF4-FFF2-40B4-BE49-F238E27FC236}">
-                <a16:creationId xmlns:a16="http://schemas.microsoft.com/office/drawing/2014/main" id="{BA551DF1-3B04-04D4-0EAA-0C68D9EA42B7}"/>
+                <a16:creationId xmlns:a16="http://schemas.microsoft.com/office/drawing/2014/main" id="{2481F11A-00E8-0DD8-7B27-90ECC0FB8672}"/>
               </a:ext>
             </a:extLst>
           </p:cNvPr>
@@ -47116,7 +48790,7 @@
           <p:cNvPr id="26" name="rt-1">
             <a:extLst>
               <a:ext uri="{FF2B5EF4-FFF2-40B4-BE49-F238E27FC236}">
-                <a16:creationId xmlns:a16="http://schemas.microsoft.com/office/drawing/2014/main" id="{68A1CEF0-A8BA-13D7-D8BD-5F90127987C7}"/>
+                <a16:creationId xmlns:a16="http://schemas.microsoft.com/office/drawing/2014/main" id="{B12C9CDE-EEDF-F503-C845-0B68AE600040}"/>
               </a:ext>
             </a:extLst>
           </p:cNvPr>
@@ -47162,7 +48836,7 @@
           <p:cNvPr id="27" name="rnum-2">
             <a:extLst>
               <a:ext uri="{FF2B5EF4-FFF2-40B4-BE49-F238E27FC236}">
-                <a16:creationId xmlns:a16="http://schemas.microsoft.com/office/drawing/2014/main" id="{3A74AA85-A055-42E3-2CE4-C225C2E93EA2}"/>
+                <a16:creationId xmlns:a16="http://schemas.microsoft.com/office/drawing/2014/main" id="{D8FA851C-B011-F638-C411-1C51DEC845D1}"/>
               </a:ext>
             </a:extLst>
           </p:cNvPr>
@@ -47216,7 +48890,7 @@
           <p:cNvPr id="28" name="rnumt-2">
             <a:extLst>
               <a:ext uri="{FF2B5EF4-FFF2-40B4-BE49-F238E27FC236}">
-                <a16:creationId xmlns:a16="http://schemas.microsoft.com/office/drawing/2014/main" id="{64C84CF4-7461-DC67-EDB8-21A5D59A3252}"/>
+                <a16:creationId xmlns:a16="http://schemas.microsoft.com/office/drawing/2014/main" id="{011ED53A-A91C-0717-D2F6-BC632A7CDECA}"/>
               </a:ext>
             </a:extLst>
           </p:cNvPr>
@@ -47262,7 +48936,7 @@
           <p:cNvPr id="29" name="rt-2">
             <a:extLst>
               <a:ext uri="{FF2B5EF4-FFF2-40B4-BE49-F238E27FC236}">
-                <a16:creationId xmlns:a16="http://schemas.microsoft.com/office/drawing/2014/main" id="{E95C8270-B25B-E138-9736-10E746C60E0B}"/>
+                <a16:creationId xmlns:a16="http://schemas.microsoft.com/office/drawing/2014/main" id="{C8395984-C556-F291-C34C-357E91BEDA56}"/>
               </a:ext>
             </a:extLst>
           </p:cNvPr>
@@ -47308,7 +48982,7 @@
           <p:cNvPr id="30" name="rnum-3">
             <a:extLst>
               <a:ext uri="{FF2B5EF4-FFF2-40B4-BE49-F238E27FC236}">
-                <a16:creationId xmlns:a16="http://schemas.microsoft.com/office/drawing/2014/main" id="{D90C4E04-C681-CADE-3BA8-6BF797685114}"/>
+                <a16:creationId xmlns:a16="http://schemas.microsoft.com/office/drawing/2014/main" id="{F270ED34-820A-3DEE-8381-F4989B243DC7}"/>
               </a:ext>
             </a:extLst>
           </p:cNvPr>
@@ -47362,7 +49036,7 @@
           <p:cNvPr id="31" name="rnumt-3">
             <a:extLst>
               <a:ext uri="{FF2B5EF4-FFF2-40B4-BE49-F238E27FC236}">
-                <a16:creationId xmlns:a16="http://schemas.microsoft.com/office/drawing/2014/main" id="{AD65A967-1342-4C6C-E10E-6411072B2563}"/>
+                <a16:creationId xmlns:a16="http://schemas.microsoft.com/office/drawing/2014/main" id="{05BD01D5-991A-4226-B6D3-F5CF7C9AFC89}"/>
               </a:ext>
             </a:extLst>
           </p:cNvPr>
@@ -47408,7 +49082,7 @@
           <p:cNvPr id="32" name="rt-3">
             <a:extLst>
               <a:ext uri="{FF2B5EF4-FFF2-40B4-BE49-F238E27FC236}">
-                <a16:creationId xmlns:a16="http://schemas.microsoft.com/office/drawing/2014/main" id="{B4837FD4-7D1E-123D-C12F-F0A958FCB543}"/>
+                <a16:creationId xmlns:a16="http://schemas.microsoft.com/office/drawing/2014/main" id="{6436FF43-D681-1378-4F00-44DBAE8AF3AD}"/>
               </a:ext>
             </a:extLst>
           </p:cNvPr>
@@ -47454,7 +49128,7 @@
           <p:cNvPr id="33" name="rnum-4">
             <a:extLst>
               <a:ext uri="{FF2B5EF4-FFF2-40B4-BE49-F238E27FC236}">
-                <a16:creationId xmlns:a16="http://schemas.microsoft.com/office/drawing/2014/main" id="{CE6754BC-315F-4A37-BC84-B1BE3C4CB7A0}"/>
+                <a16:creationId xmlns:a16="http://schemas.microsoft.com/office/drawing/2014/main" id="{6FAD9374-6082-E154-9B8D-163F0E7435F4}"/>
               </a:ext>
             </a:extLst>
           </p:cNvPr>
@@ -47508,7 +49182,7 @@
           <p:cNvPr id="34" name="rnumt-4">
             <a:extLst>
               <a:ext uri="{FF2B5EF4-FFF2-40B4-BE49-F238E27FC236}">
-                <a16:creationId xmlns:a16="http://schemas.microsoft.com/office/drawing/2014/main" id="{E0D4458B-BB42-4274-0C80-ACCE4975D975}"/>
+                <a16:creationId xmlns:a16="http://schemas.microsoft.com/office/drawing/2014/main" id="{28017AB3-674C-637B-7A44-F044699E0AEB}"/>
               </a:ext>
             </a:extLst>
           </p:cNvPr>
@@ -47554,7 +49228,7 @@
           <p:cNvPr id="35" name="rt-4">
             <a:extLst>
               <a:ext uri="{FF2B5EF4-FFF2-40B4-BE49-F238E27FC236}">
-                <a16:creationId xmlns:a16="http://schemas.microsoft.com/office/drawing/2014/main" id="{E096CDA5-4426-2E8A-EF91-4CA16164850B}"/>
+                <a16:creationId xmlns:a16="http://schemas.microsoft.com/office/drawing/2014/main" id="{8CE5B7EA-84A3-4B43-9DB5-183A33C7528E}"/>
               </a:ext>
             </a:extLst>
           </p:cNvPr>
@@ -47601,7 +49275,7 @@
             <a:hlinkClick r:id="rId5"/>
             <a:extLst>
               <a:ext uri="{FF2B5EF4-FFF2-40B4-BE49-F238E27FC236}">
-                <a16:creationId xmlns:a16="http://schemas.microsoft.com/office/drawing/2014/main" id="{D6FA1851-E7CF-C031-4DDB-88F294E9E4B4}"/>
+                <a16:creationId xmlns:a16="http://schemas.microsoft.com/office/drawing/2014/main" id="{ED34FCA3-DF24-2F28-4A31-F24DEE556318}"/>
               </a:ext>
             </a:extLst>
           </p:cNvPr>
@@ -47662,7 +49336,7 @@
     </p:spTree>
     <p:extLst>
       <p:ext uri="{BB962C8B-B14F-4D97-AF65-F5344CB8AC3E}">
-        <p14:creationId xmlns:p14="http://schemas.microsoft.com/office/powerpoint/2010/main" val="71933434"/>
+        <p14:creationId xmlns:p14="http://schemas.microsoft.com/office/powerpoint/2010/main" val="1009847956"/>
       </p:ext>
     </p:extLst>
   </p:cSld>
